--- a/presentation/dsfs_ft_36_Projet_REnergies_efficiency_prediction.pptx
+++ b/presentation/dsfs_ft_36_Projet_REnergies_efficiency_prediction.pptx
@@ -291,7 +291,7 @@
 <file path=ppt/revisionInfo.xml><?xml version="1.0" encoding="utf-8"?>
 <p1510:revInfo xmlns:a="http://schemas.openxmlformats.org/drawingml/2006/main" xmlns:r="http://schemas.openxmlformats.org/officeDocument/2006/relationships" xmlns:p1510="http://schemas.microsoft.com/office/powerpoint/2015/10/main">
   <p1510:revLst>
-    <p1510:client id="{2EB72A00-7F79-4813-B4C2-C6564860F3F6}" v="979" dt="2025-11-20T16:50:18.376"/>
+    <p1510:client id="{2EB72A00-7F79-4813-B4C2-C6564860F3F6}" v="1411" dt="2025-11-20T20:39:03.634"/>
   </p1510:revLst>
 </p1510:revInfo>
 </file>
@@ -301,7 +301,7 @@
   <pc:docChgLst>
     <pc:chgData name="Jean-Yves Vuillequez" userId="e7fac481abea6bd0" providerId="LiveId" clId="{79E365E8-22BC-4EC2-9606-9A9AC6CD1D22}"/>
     <pc:docChg chg="undo custSel addSld delSld modSld sldOrd">
-      <pc:chgData name="Jean-Yves Vuillequez" userId="e7fac481abea6bd0" providerId="LiveId" clId="{79E365E8-22BC-4EC2-9606-9A9AC6CD1D22}" dt="2025-11-20T16:50:18.376" v="4801" actId="20577"/>
+      <pc:chgData name="Jean-Yves Vuillequez" userId="e7fac481abea6bd0" providerId="LiveId" clId="{79E365E8-22BC-4EC2-9606-9A9AC6CD1D22}" dt="2025-11-20T20:45:26.230" v="5250" actId="20577"/>
       <pc:docMkLst>
         <pc:docMk/>
       </pc:docMkLst>
@@ -387,8 +387,8 @@
           <pc:sldMk cId="2644984178" sldId="267"/>
         </pc:sldMkLst>
       </pc:sldChg>
-      <pc:sldChg chg="addSp delSp modSp mod">
-        <pc:chgData name="Jean-Yves Vuillequez" userId="e7fac481abea6bd0" providerId="LiveId" clId="{79E365E8-22BC-4EC2-9606-9A9AC6CD1D22}" dt="2025-11-20T13:25:35.424" v="3240" actId="1076"/>
+      <pc:sldChg chg="addSp delSp modSp mod modAnim">
+        <pc:chgData name="Jean-Yves Vuillequez" userId="e7fac481abea6bd0" providerId="LiveId" clId="{79E365E8-22BC-4EC2-9606-9A9AC6CD1D22}" dt="2025-11-20T20:36:02.952" v="5213"/>
         <pc:sldMkLst>
           <pc:docMk/>
           <pc:sldMk cId="0" sldId="270"/>
@@ -775,7 +775,7 @@
         </pc:spChg>
       </pc:sldChg>
       <pc:sldChg chg="addSp delSp modSp add mod ord delAnim modAnim modNotesTx">
-        <pc:chgData name="Jean-Yves Vuillequez" userId="e7fac481abea6bd0" providerId="LiveId" clId="{79E365E8-22BC-4EC2-9606-9A9AC6CD1D22}" dt="2025-11-20T15:36:32.279" v="4052" actId="20577"/>
+        <pc:chgData name="Jean-Yves Vuillequez" userId="e7fac481abea6bd0" providerId="LiveId" clId="{79E365E8-22BC-4EC2-9606-9A9AC6CD1D22}" dt="2025-11-20T20:34:08.981" v="5207" actId="478"/>
         <pc:sldMkLst>
           <pc:docMk/>
           <pc:sldMk cId="1821755839" sldId="274"/>
@@ -901,7 +901,7 @@
           </ac:spMkLst>
         </pc:spChg>
         <pc:spChg chg="add mod ord">
-          <ac:chgData name="Jean-Yves Vuillequez" userId="e7fac481abea6bd0" providerId="LiveId" clId="{79E365E8-22BC-4EC2-9606-9A9AC6CD1D22}" dt="2025-11-20T12:02:50.125" v="2760" actId="403"/>
+          <ac:chgData name="Jean-Yves Vuillequez" userId="e7fac481abea6bd0" providerId="LiveId" clId="{79E365E8-22BC-4EC2-9606-9A9AC6CD1D22}" dt="2025-11-20T20:27:28.016" v="5176" actId="1076"/>
           <ac:spMkLst>
             <pc:docMk/>
             <pc:sldMk cId="1821755839" sldId="274"/>
@@ -949,7 +949,7 @@
           </ac:spMkLst>
         </pc:spChg>
         <pc:spChg chg="add mod ord">
-          <ac:chgData name="Jean-Yves Vuillequez" userId="e7fac481abea6bd0" providerId="LiveId" clId="{79E365E8-22BC-4EC2-9606-9A9AC6CD1D22}" dt="2025-11-20T12:02:50.125" v="2760" actId="403"/>
+          <ac:chgData name="Jean-Yves Vuillequez" userId="e7fac481abea6bd0" providerId="LiveId" clId="{79E365E8-22BC-4EC2-9606-9A9AC6CD1D22}" dt="2025-11-20T20:32:24.618" v="5200" actId="1076"/>
           <ac:spMkLst>
             <pc:docMk/>
             <pc:sldMk cId="1821755839" sldId="274"/>
@@ -957,7 +957,7 @@
           </ac:spMkLst>
         </pc:spChg>
         <pc:spChg chg="add mod">
-          <ac:chgData name="Jean-Yves Vuillequez" userId="e7fac481abea6bd0" providerId="LiveId" clId="{79E365E8-22BC-4EC2-9606-9A9AC6CD1D22}" dt="2025-11-20T11:57:23.294" v="2668" actId="1076"/>
+          <ac:chgData name="Jean-Yves Vuillequez" userId="e7fac481abea6bd0" providerId="LiveId" clId="{79E365E8-22BC-4EC2-9606-9A9AC6CD1D22}" dt="2025-11-20T20:30:15.752" v="5193" actId="164"/>
           <ac:spMkLst>
             <pc:docMk/>
             <pc:sldMk cId="1821755839" sldId="274"/>
@@ -973,7 +973,7 @@
           </ac:spMkLst>
         </pc:spChg>
         <pc:spChg chg="add mod ord">
-          <ac:chgData name="Jean-Yves Vuillequez" userId="e7fac481abea6bd0" providerId="LiveId" clId="{79E365E8-22BC-4EC2-9606-9A9AC6CD1D22}" dt="2025-11-20T12:03:03.618" v="2778" actId="1035"/>
+          <ac:chgData name="Jean-Yves Vuillequez" userId="e7fac481abea6bd0" providerId="LiveId" clId="{79E365E8-22BC-4EC2-9606-9A9AC6CD1D22}" dt="2025-11-20T20:30:15.752" v="5193" actId="164"/>
           <ac:spMkLst>
             <pc:docMk/>
             <pc:sldMk cId="1821755839" sldId="274"/>
@@ -981,7 +981,7 @@
           </ac:spMkLst>
         </pc:spChg>
         <pc:spChg chg="add mod">
-          <ac:chgData name="Jean-Yves Vuillequez" userId="e7fac481abea6bd0" providerId="LiveId" clId="{79E365E8-22BC-4EC2-9606-9A9AC6CD1D22}" dt="2025-11-20T12:00:21.431" v="2709" actId="14100"/>
+          <ac:chgData name="Jean-Yves Vuillequez" userId="e7fac481abea6bd0" providerId="LiveId" clId="{79E365E8-22BC-4EC2-9606-9A9AC6CD1D22}" dt="2025-11-20T20:26:58.742" v="5170" actId="164"/>
           <ac:spMkLst>
             <pc:docMk/>
             <pc:sldMk cId="1821755839" sldId="274"/>
@@ -989,7 +989,7 @@
           </ac:spMkLst>
         </pc:spChg>
         <pc:spChg chg="add mod">
-          <ac:chgData name="Jean-Yves Vuillequez" userId="e7fac481abea6bd0" providerId="LiveId" clId="{79E365E8-22BC-4EC2-9606-9A9AC6CD1D22}" dt="2025-11-20T12:03:38.326" v="2781" actId="1076"/>
+          <ac:chgData name="Jean-Yves Vuillequez" userId="e7fac481abea6bd0" providerId="LiveId" clId="{79E365E8-22BC-4EC2-9606-9A9AC6CD1D22}" dt="2025-11-20T20:26:58.742" v="5170" actId="164"/>
           <ac:spMkLst>
             <pc:docMk/>
             <pc:sldMk cId="1821755839" sldId="274"/>
@@ -997,7 +997,7 @@
           </ac:spMkLst>
         </pc:spChg>
         <pc:spChg chg="add mod">
-          <ac:chgData name="Jean-Yves Vuillequez" userId="e7fac481abea6bd0" providerId="LiveId" clId="{79E365E8-22BC-4EC2-9606-9A9AC6CD1D22}" dt="2025-11-20T12:05:49.967" v="2793" actId="1076"/>
+          <ac:chgData name="Jean-Yves Vuillequez" userId="e7fac481abea6bd0" providerId="LiveId" clId="{79E365E8-22BC-4EC2-9606-9A9AC6CD1D22}" dt="2025-11-20T20:26:58.742" v="5170" actId="164"/>
           <ac:spMkLst>
             <pc:docMk/>
             <pc:sldMk cId="1821755839" sldId="274"/>
@@ -1005,7 +1005,7 @@
           </ac:spMkLst>
         </pc:spChg>
         <pc:spChg chg="add mod">
-          <ac:chgData name="Jean-Yves Vuillequez" userId="e7fac481abea6bd0" providerId="LiveId" clId="{79E365E8-22BC-4EC2-9606-9A9AC6CD1D22}" dt="2025-11-20T12:05:49.967" v="2793" actId="1076"/>
+          <ac:chgData name="Jean-Yves Vuillequez" userId="e7fac481abea6bd0" providerId="LiveId" clId="{79E365E8-22BC-4EC2-9606-9A9AC6CD1D22}" dt="2025-11-20T20:26:58.742" v="5170" actId="164"/>
           <ac:spMkLst>
             <pc:docMk/>
             <pc:sldMk cId="1821755839" sldId="274"/>
@@ -1013,7 +1013,7 @@
           </ac:spMkLst>
         </pc:spChg>
         <pc:spChg chg="add mod">
-          <ac:chgData name="Jean-Yves Vuillequez" userId="e7fac481abea6bd0" providerId="LiveId" clId="{79E365E8-22BC-4EC2-9606-9A9AC6CD1D22}" dt="2025-11-20T11:57:23.294" v="2668" actId="1076"/>
+          <ac:chgData name="Jean-Yves Vuillequez" userId="e7fac481abea6bd0" providerId="LiveId" clId="{79E365E8-22BC-4EC2-9606-9A9AC6CD1D22}" dt="2025-11-20T20:26:58.742" v="5170" actId="164"/>
           <ac:spMkLst>
             <pc:docMk/>
             <pc:sldMk cId="1821755839" sldId="274"/>
@@ -1021,7 +1021,7 @@
           </ac:spMkLst>
         </pc:spChg>
         <pc:spChg chg="add mod">
-          <ac:chgData name="Jean-Yves Vuillequez" userId="e7fac481abea6bd0" providerId="LiveId" clId="{79E365E8-22BC-4EC2-9606-9A9AC6CD1D22}" dt="2025-11-20T15:36:09.231" v="4051" actId="1037"/>
+          <ac:chgData name="Jean-Yves Vuillequez" userId="e7fac481abea6bd0" providerId="LiveId" clId="{79E365E8-22BC-4EC2-9606-9A9AC6CD1D22}" dt="2025-11-20T20:26:58.742" v="5170" actId="164"/>
           <ac:spMkLst>
             <pc:docMk/>
             <pc:sldMk cId="1821755839" sldId="274"/>
@@ -1029,7 +1029,7 @@
           </ac:spMkLst>
         </pc:spChg>
         <pc:spChg chg="add mod">
-          <ac:chgData name="Jean-Yves Vuillequez" userId="e7fac481abea6bd0" providerId="LiveId" clId="{79E365E8-22BC-4EC2-9606-9A9AC6CD1D22}" dt="2025-11-20T12:02:04.482" v="2735" actId="1076"/>
+          <ac:chgData name="Jean-Yves Vuillequez" userId="e7fac481abea6bd0" providerId="LiveId" clId="{79E365E8-22BC-4EC2-9606-9A9AC6CD1D22}" dt="2025-11-20T20:32:44.585" v="5201" actId="164"/>
           <ac:spMkLst>
             <pc:docMk/>
             <pc:sldMk cId="1821755839" sldId="274"/>
@@ -1037,7 +1037,7 @@
           </ac:spMkLst>
         </pc:spChg>
         <pc:spChg chg="add mod">
-          <ac:chgData name="Jean-Yves Vuillequez" userId="e7fac481abea6bd0" providerId="LiveId" clId="{79E365E8-22BC-4EC2-9606-9A9AC6CD1D22}" dt="2025-11-20T12:02:04.482" v="2735" actId="1076"/>
+          <ac:chgData name="Jean-Yves Vuillequez" userId="e7fac481abea6bd0" providerId="LiveId" clId="{79E365E8-22BC-4EC2-9606-9A9AC6CD1D22}" dt="2025-11-20T20:32:44.585" v="5201" actId="164"/>
           <ac:spMkLst>
             <pc:docMk/>
             <pc:sldMk cId="1821755839" sldId="274"/>
@@ -1045,7 +1045,7 @@
           </ac:spMkLst>
         </pc:spChg>
         <pc:spChg chg="add mod">
-          <ac:chgData name="Jean-Yves Vuillequez" userId="e7fac481abea6bd0" providerId="LiveId" clId="{79E365E8-22BC-4EC2-9606-9A9AC6CD1D22}" dt="2025-11-20T12:02:04.482" v="2735" actId="1076"/>
+          <ac:chgData name="Jean-Yves Vuillequez" userId="e7fac481abea6bd0" providerId="LiveId" clId="{79E365E8-22BC-4EC2-9606-9A9AC6CD1D22}" dt="2025-11-20T20:32:44.585" v="5201" actId="164"/>
           <ac:spMkLst>
             <pc:docMk/>
             <pc:sldMk cId="1821755839" sldId="274"/>
@@ -1053,7 +1053,7 @@
           </ac:spMkLst>
         </pc:spChg>
         <pc:spChg chg="add mod">
-          <ac:chgData name="Jean-Yves Vuillequez" userId="e7fac481abea6bd0" providerId="LiveId" clId="{79E365E8-22BC-4EC2-9606-9A9AC6CD1D22}" dt="2025-11-20T15:36:32.279" v="4052" actId="20577"/>
+          <ac:chgData name="Jean-Yves Vuillequez" userId="e7fac481abea6bd0" providerId="LiveId" clId="{79E365E8-22BC-4EC2-9606-9A9AC6CD1D22}" dt="2025-11-20T20:32:44.585" v="5201" actId="164"/>
           <ac:spMkLst>
             <pc:docMk/>
             <pc:sldMk cId="1821755839" sldId="274"/>
@@ -1061,7 +1061,7 @@
           </ac:spMkLst>
         </pc:spChg>
         <pc:spChg chg="add mod">
-          <ac:chgData name="Jean-Yves Vuillequez" userId="e7fac481abea6bd0" providerId="LiveId" clId="{79E365E8-22BC-4EC2-9606-9A9AC6CD1D22}" dt="2025-11-20T12:03:03.618" v="2778" actId="1035"/>
+          <ac:chgData name="Jean-Yves Vuillequez" userId="e7fac481abea6bd0" providerId="LiveId" clId="{79E365E8-22BC-4EC2-9606-9A9AC6CD1D22}" dt="2025-11-20T20:27:18.739" v="5174" actId="164"/>
           <ac:spMkLst>
             <pc:docMk/>
             <pc:sldMk cId="1821755839" sldId="274"/>
@@ -1101,7 +1101,7 @@
           </ac:spMkLst>
         </pc:spChg>
         <pc:spChg chg="add mod">
-          <ac:chgData name="Jean-Yves Vuillequez" userId="e7fac481abea6bd0" providerId="LiveId" clId="{79E365E8-22BC-4EC2-9606-9A9AC6CD1D22}" dt="2025-11-20T12:03:03.618" v="2778" actId="1035"/>
+          <ac:chgData name="Jean-Yves Vuillequez" userId="e7fac481abea6bd0" providerId="LiveId" clId="{79E365E8-22BC-4EC2-9606-9A9AC6CD1D22}" dt="2025-11-20T20:27:18.739" v="5174" actId="164"/>
           <ac:spMkLst>
             <pc:docMk/>
             <pc:sldMk cId="1821755839" sldId="274"/>
@@ -1109,7 +1109,7 @@
           </ac:spMkLst>
         </pc:spChg>
         <pc:spChg chg="add mod">
-          <ac:chgData name="Jean-Yves Vuillequez" userId="e7fac481abea6bd0" providerId="LiveId" clId="{79E365E8-22BC-4EC2-9606-9A9AC6CD1D22}" dt="2025-11-20T12:03:03.618" v="2778" actId="1035"/>
+          <ac:chgData name="Jean-Yves Vuillequez" userId="e7fac481abea6bd0" providerId="LiveId" clId="{79E365E8-22BC-4EC2-9606-9A9AC6CD1D22}" dt="2025-11-20T20:27:18.739" v="5174" actId="164"/>
           <ac:spMkLst>
             <pc:docMk/>
             <pc:sldMk cId="1821755839" sldId="274"/>
@@ -1117,7 +1117,7 @@
           </ac:spMkLst>
         </pc:spChg>
         <pc:spChg chg="add mod">
-          <ac:chgData name="Jean-Yves Vuillequez" userId="e7fac481abea6bd0" providerId="LiveId" clId="{79E365E8-22BC-4EC2-9606-9A9AC6CD1D22}" dt="2025-11-20T11:55:01.506" v="2622" actId="14100"/>
+          <ac:chgData name="Jean-Yves Vuillequez" userId="e7fac481abea6bd0" providerId="LiveId" clId="{79E365E8-22BC-4EC2-9606-9A9AC6CD1D22}" dt="2025-11-20T20:28:42.563" v="5185" actId="164"/>
           <ac:spMkLst>
             <pc:docMk/>
             <pc:sldMk cId="1821755839" sldId="274"/>
@@ -1125,7 +1125,7 @@
           </ac:spMkLst>
         </pc:spChg>
         <pc:spChg chg="add mod">
-          <ac:chgData name="Jean-Yves Vuillequez" userId="e7fac481abea6bd0" providerId="LiveId" clId="{79E365E8-22BC-4EC2-9606-9A9AC6CD1D22}" dt="2025-11-20T12:03:03.618" v="2778" actId="1035"/>
+          <ac:chgData name="Jean-Yves Vuillequez" userId="e7fac481abea6bd0" providerId="LiveId" clId="{79E365E8-22BC-4EC2-9606-9A9AC6CD1D22}" dt="2025-11-20T20:27:18.739" v="5174" actId="164"/>
           <ac:spMkLst>
             <pc:docMk/>
             <pc:sldMk cId="1821755839" sldId="274"/>
@@ -1189,7 +1189,7 @@
           </ac:spMkLst>
         </pc:spChg>
         <pc:spChg chg="add mod">
-          <ac:chgData name="Jean-Yves Vuillequez" userId="e7fac481abea6bd0" providerId="LiveId" clId="{79E365E8-22BC-4EC2-9606-9A9AC6CD1D22}" dt="2025-11-20T11:56:08.699" v="2635" actId="1076"/>
+          <ac:chgData name="Jean-Yves Vuillequez" userId="e7fac481abea6bd0" providerId="LiveId" clId="{79E365E8-22BC-4EC2-9606-9A9AC6CD1D22}" dt="2025-11-20T20:28:42.563" v="5185" actId="164"/>
           <ac:spMkLst>
             <pc:docMk/>
             <pc:sldMk cId="1821755839" sldId="274"/>
@@ -1197,7 +1197,7 @@
           </ac:spMkLst>
         </pc:spChg>
         <pc:spChg chg="add mod">
-          <ac:chgData name="Jean-Yves Vuillequez" userId="e7fac481abea6bd0" providerId="LiveId" clId="{79E365E8-22BC-4EC2-9606-9A9AC6CD1D22}" dt="2025-11-20T12:03:03.618" v="2778" actId="1035"/>
+          <ac:chgData name="Jean-Yves Vuillequez" userId="e7fac481abea6bd0" providerId="LiveId" clId="{79E365E8-22BC-4EC2-9606-9A9AC6CD1D22}" dt="2025-11-20T20:32:44.585" v="5201" actId="164"/>
           <ac:spMkLst>
             <pc:docMk/>
             <pc:sldMk cId="1821755839" sldId="274"/>
@@ -1213,19 +1213,59 @@
           </ac:spMkLst>
         </pc:spChg>
         <pc:spChg chg="add mod">
-          <ac:chgData name="Jean-Yves Vuillequez" userId="e7fac481abea6bd0" providerId="LiveId" clId="{79E365E8-22BC-4EC2-9606-9A9AC6CD1D22}" dt="2025-11-20T12:02:04.482" v="2735" actId="1076"/>
+          <ac:chgData name="Jean-Yves Vuillequez" userId="e7fac481abea6bd0" providerId="LiveId" clId="{79E365E8-22BC-4EC2-9606-9A9AC6CD1D22}" dt="2025-11-20T20:32:44.585" v="5201" actId="164"/>
           <ac:spMkLst>
             <pc:docMk/>
             <pc:sldMk cId="1821755839" sldId="274"/>
             <ac:spMk id="2097" creationId="{ADF20F1D-E32A-83D7-1C9F-ED56E1ADF5A6}"/>
           </ac:spMkLst>
         </pc:spChg>
+        <pc:grpChg chg="add mod">
+          <ac:chgData name="Jean-Yves Vuillequez" userId="e7fac481abea6bd0" providerId="LiveId" clId="{79E365E8-22BC-4EC2-9606-9A9AC6CD1D22}" dt="2025-11-20T20:26:59.699" v="5173" actId="164"/>
+          <ac:grpSpMkLst>
+            <pc:docMk/>
+            <pc:sldMk cId="1821755839" sldId="274"/>
+            <ac:grpSpMk id="3" creationId="{23FD7915-E9FB-D50D-3D2C-DAA536A072F4}"/>
+          </ac:grpSpMkLst>
+        </pc:grpChg>
+        <pc:grpChg chg="add mod">
+          <ac:chgData name="Jean-Yves Vuillequez" userId="e7fac481abea6bd0" providerId="LiveId" clId="{79E365E8-22BC-4EC2-9606-9A9AC6CD1D22}" dt="2025-11-20T20:26:59.004" v="5171" actId="164"/>
+          <ac:grpSpMkLst>
+            <pc:docMk/>
+            <pc:sldMk cId="1821755839" sldId="274"/>
+            <ac:grpSpMk id="5" creationId="{C3A27509-F8DF-5392-E215-F9E129F2934C}"/>
+          </ac:grpSpMkLst>
+        </pc:grpChg>
+        <pc:grpChg chg="add mod">
+          <ac:chgData name="Jean-Yves Vuillequez" userId="e7fac481abea6bd0" providerId="LiveId" clId="{79E365E8-22BC-4EC2-9606-9A9AC6CD1D22}" dt="2025-11-20T20:26:58.491" v="5169" actId="164"/>
+          <ac:grpSpMkLst>
+            <pc:docMk/>
+            <pc:sldMk cId="1821755839" sldId="274"/>
+            <ac:grpSpMk id="7" creationId="{BCAC5398-48B7-D159-642C-6C1FB77F51AD}"/>
+          </ac:grpSpMkLst>
+        </pc:grpChg>
+        <pc:grpChg chg="add mod">
+          <ac:chgData name="Jean-Yves Vuillequez" userId="e7fac481abea6bd0" providerId="LiveId" clId="{79E365E8-22BC-4EC2-9606-9A9AC6CD1D22}" dt="2025-11-20T20:26:56.795" v="5163" actId="164"/>
+          <ac:grpSpMkLst>
+            <pc:docMk/>
+            <pc:sldMk cId="1821755839" sldId="274"/>
+            <ac:grpSpMk id="8" creationId="{2F3F1743-DDFF-E074-6078-31C09C5D19C9}"/>
+          </ac:grpSpMkLst>
+        </pc:grpChg>
         <pc:grpChg chg="add del mod">
           <ac:chgData name="Jean-Yves Vuillequez" userId="e7fac481abea6bd0" providerId="LiveId" clId="{79E365E8-22BC-4EC2-9606-9A9AC6CD1D22}" dt="2025-11-20T08:51:30.090" v="451" actId="478"/>
           <ac:grpSpMkLst>
             <pc:docMk/>
             <pc:sldMk cId="1821755839" sldId="274"/>
             <ac:grpSpMk id="8" creationId="{A3B8CF28-56C6-32D7-D0F2-18444BE72F66}"/>
+          </ac:grpSpMkLst>
+        </pc:grpChg>
+        <pc:grpChg chg="add mod">
+          <ac:chgData name="Jean-Yves Vuillequez" userId="e7fac481abea6bd0" providerId="LiveId" clId="{79E365E8-22BC-4EC2-9606-9A9AC6CD1D22}" dt="2025-11-20T20:27:18.739" v="5174" actId="164"/>
+          <ac:grpSpMkLst>
+            <pc:docMk/>
+            <pc:sldMk cId="1821755839" sldId="274"/>
+            <ac:grpSpMk id="9" creationId="{1942901F-9902-04A0-3544-E014B88B92FF}"/>
           </ac:grpSpMkLst>
         </pc:grpChg>
         <pc:grpChg chg="add del mod">
@@ -1237,23 +1277,47 @@
           </ac:grpSpMkLst>
         </pc:grpChg>
         <pc:grpChg chg="add mod">
-          <ac:chgData name="Jean-Yves Vuillequez" userId="e7fac481abea6bd0" providerId="LiveId" clId="{79E365E8-22BC-4EC2-9606-9A9AC6CD1D22}" dt="2025-11-20T08:50:36.749" v="425" actId="1076"/>
+          <ac:chgData name="Jean-Yves Vuillequez" userId="e7fac481abea6bd0" providerId="LiveId" clId="{79E365E8-22BC-4EC2-9606-9A9AC6CD1D22}" dt="2025-11-20T20:30:42.131" v="5196" actId="164"/>
+          <ac:grpSpMkLst>
+            <pc:docMk/>
+            <pc:sldMk cId="1821755839" sldId="274"/>
+            <ac:grpSpMk id="12" creationId="{A4F3950E-A273-3885-0546-EA789FEF3AD4}"/>
+          </ac:grpSpMkLst>
+        </pc:grpChg>
+        <pc:grpChg chg="add mod">
+          <ac:chgData name="Jean-Yves Vuillequez" userId="e7fac481abea6bd0" providerId="LiveId" clId="{79E365E8-22BC-4EC2-9606-9A9AC6CD1D22}" dt="2025-11-20T20:30:42.131" v="5196" actId="164"/>
+          <ac:grpSpMkLst>
+            <pc:docMk/>
+            <pc:sldMk cId="1821755839" sldId="274"/>
+            <ac:grpSpMk id="13" creationId="{17A2B2F0-AB99-333B-30C9-EC04234D17C0}"/>
+          </ac:grpSpMkLst>
+        </pc:grpChg>
+        <pc:grpChg chg="add del mod">
+          <ac:chgData name="Jean-Yves Vuillequez" userId="e7fac481abea6bd0" providerId="LiveId" clId="{79E365E8-22BC-4EC2-9606-9A9AC6CD1D22}" dt="2025-11-20T20:34:08.981" v="5207" actId="478"/>
           <ac:grpSpMkLst>
             <pc:docMk/>
             <pc:sldMk cId="1821755839" sldId="274"/>
             <ac:grpSpMk id="14" creationId="{0D06F820-0C84-13EF-42FA-C8495BEA0636}"/>
           </ac:grpSpMkLst>
         </pc:grpChg>
-        <pc:grpChg chg="add mod ord">
-          <ac:chgData name="Jean-Yves Vuillequez" userId="e7fac481abea6bd0" providerId="LiveId" clId="{79E365E8-22BC-4EC2-9606-9A9AC6CD1D22}" dt="2025-11-20T08:50:36.749" v="425" actId="1076"/>
+        <pc:grpChg chg="add mod">
+          <ac:chgData name="Jean-Yves Vuillequez" userId="e7fac481abea6bd0" providerId="LiveId" clId="{79E365E8-22BC-4EC2-9606-9A9AC6CD1D22}" dt="2025-11-20T20:32:44.585" v="5201" actId="164"/>
+          <ac:grpSpMkLst>
+            <pc:docMk/>
+            <pc:sldMk cId="1821755839" sldId="274"/>
+            <ac:grpSpMk id="17" creationId="{618688FD-4D2F-7A63-8807-ABB66A2C4089}"/>
+          </ac:grpSpMkLst>
+        </pc:grpChg>
+        <pc:grpChg chg="add del mod ord">
+          <ac:chgData name="Jean-Yves Vuillequez" userId="e7fac481abea6bd0" providerId="LiveId" clId="{79E365E8-22BC-4EC2-9606-9A9AC6CD1D22}" dt="2025-11-20T20:34:08.981" v="5207" actId="478"/>
           <ac:grpSpMkLst>
             <pc:docMk/>
             <pc:sldMk cId="1821755839" sldId="274"/>
             <ac:grpSpMk id="19" creationId="{D5364BFE-1394-DF84-7508-CE993349E3F7}"/>
           </ac:grpSpMkLst>
         </pc:grpChg>
-        <pc:grpChg chg="add mod">
-          <ac:chgData name="Jean-Yves Vuillequez" userId="e7fac481abea6bd0" providerId="LiveId" clId="{79E365E8-22BC-4EC2-9606-9A9AC6CD1D22}" dt="2025-11-20T08:50:36.749" v="425" actId="1076"/>
+        <pc:grpChg chg="add del mod">
+          <ac:chgData name="Jean-Yves Vuillequez" userId="e7fac481abea6bd0" providerId="LiveId" clId="{79E365E8-22BC-4EC2-9606-9A9AC6CD1D22}" dt="2025-11-20T20:34:08.981" v="5207" actId="478"/>
           <ac:grpSpMkLst>
             <pc:docMk/>
             <pc:sldMk cId="1821755839" sldId="274"/>
@@ -1357,7 +1421,7 @@
           </ac:picMkLst>
         </pc:picChg>
         <pc:picChg chg="add mod">
-          <ac:chgData name="Jean-Yves Vuillequez" userId="e7fac481abea6bd0" providerId="LiveId" clId="{79E365E8-22BC-4EC2-9606-9A9AC6CD1D22}" dt="2025-11-20T11:58:48.017" v="2684" actId="1076"/>
+          <ac:chgData name="Jean-Yves Vuillequez" userId="e7fac481abea6bd0" providerId="LiveId" clId="{79E365E8-22BC-4EC2-9606-9A9AC6CD1D22}" dt="2025-11-20T20:32:44.585" v="5201" actId="164"/>
           <ac:picMkLst>
             <pc:docMk/>
             <pc:sldMk cId="1821755839" sldId="274"/>
@@ -1365,7 +1429,7 @@
           </ac:picMkLst>
         </pc:picChg>
         <pc:picChg chg="add mod">
-          <ac:chgData name="Jean-Yves Vuillequez" userId="e7fac481abea6bd0" providerId="LiveId" clId="{79E365E8-22BC-4EC2-9606-9A9AC6CD1D22}" dt="2025-11-20T12:05:49.967" v="2793" actId="1076"/>
+          <ac:chgData name="Jean-Yves Vuillequez" userId="e7fac481abea6bd0" providerId="LiveId" clId="{79E365E8-22BC-4EC2-9606-9A9AC6CD1D22}" dt="2025-11-20T20:26:58.742" v="5170" actId="164"/>
           <ac:picMkLst>
             <pc:docMk/>
             <pc:sldMk cId="1821755839" sldId="274"/>
@@ -1389,7 +1453,7 @@
           </ac:picMkLst>
         </pc:picChg>
         <pc:picChg chg="add mod">
-          <ac:chgData name="Jean-Yves Vuillequez" userId="e7fac481abea6bd0" providerId="LiveId" clId="{79E365E8-22BC-4EC2-9606-9A9AC6CD1D22}" dt="2025-11-20T11:55:59.579" v="2631" actId="1076"/>
+          <ac:chgData name="Jean-Yves Vuillequez" userId="e7fac481abea6bd0" providerId="LiveId" clId="{79E365E8-22BC-4EC2-9606-9A9AC6CD1D22}" dt="2025-11-20T20:27:18.739" v="5174" actId="164"/>
           <ac:picMkLst>
             <pc:docMk/>
             <pc:sldMk cId="1821755839" sldId="274"/>
@@ -1405,7 +1469,7 @@
           </ac:picMkLst>
         </pc:picChg>
         <pc:picChg chg="add mod">
-          <ac:chgData name="Jean-Yves Vuillequez" userId="e7fac481abea6bd0" providerId="LiveId" clId="{79E365E8-22BC-4EC2-9606-9A9AC6CD1D22}" dt="2025-11-20T11:56:12.971" v="2636" actId="1076"/>
+          <ac:chgData name="Jean-Yves Vuillequez" userId="e7fac481abea6bd0" providerId="LiveId" clId="{79E365E8-22BC-4EC2-9606-9A9AC6CD1D22}" dt="2025-11-20T20:27:18.739" v="5174" actId="164"/>
           <ac:picMkLst>
             <pc:docMk/>
             <pc:sldMk cId="1821755839" sldId="274"/>
@@ -1461,7 +1525,7 @@
           </ac:picMkLst>
         </pc:picChg>
         <pc:picChg chg="add mod">
-          <ac:chgData name="Jean-Yves Vuillequez" userId="e7fac481abea6bd0" providerId="LiveId" clId="{79E365E8-22BC-4EC2-9606-9A9AC6CD1D22}" dt="2025-11-20T11:54:51.683" v="2620" actId="1076"/>
+          <ac:chgData name="Jean-Yves Vuillequez" userId="e7fac481abea6bd0" providerId="LiveId" clId="{79E365E8-22BC-4EC2-9606-9A9AC6CD1D22}" dt="2025-11-20T20:28:42.563" v="5185" actId="164"/>
           <ac:picMkLst>
             <pc:docMk/>
             <pc:sldMk cId="1821755839" sldId="274"/>
@@ -1469,7 +1533,7 @@
           </ac:picMkLst>
         </pc:picChg>
         <pc:picChg chg="add mod">
-          <ac:chgData name="Jean-Yves Vuillequez" userId="e7fac481abea6bd0" providerId="LiveId" clId="{79E365E8-22BC-4EC2-9606-9A9AC6CD1D22}" dt="2025-11-20T11:55:59.579" v="2631" actId="1076"/>
+          <ac:chgData name="Jean-Yves Vuillequez" userId="e7fac481abea6bd0" providerId="LiveId" clId="{79E365E8-22BC-4EC2-9606-9A9AC6CD1D22}" dt="2025-11-20T20:28:42.563" v="5185" actId="164"/>
           <ac:picMkLst>
             <pc:docMk/>
             <pc:sldMk cId="1821755839" sldId="274"/>
@@ -1477,7 +1541,7 @@
           </ac:picMkLst>
         </pc:picChg>
         <pc:picChg chg="add mod">
-          <ac:chgData name="Jean-Yves Vuillequez" userId="e7fac481abea6bd0" providerId="LiveId" clId="{79E365E8-22BC-4EC2-9606-9A9AC6CD1D22}" dt="2025-11-20T11:56:12.971" v="2636" actId="1076"/>
+          <ac:chgData name="Jean-Yves Vuillequez" userId="e7fac481abea6bd0" providerId="LiveId" clId="{79E365E8-22BC-4EC2-9606-9A9AC6CD1D22}" dt="2025-11-20T20:28:42.563" v="5185" actId="164"/>
           <ac:picMkLst>
             <pc:docMk/>
             <pc:sldMk cId="1821755839" sldId="274"/>
@@ -1485,7 +1549,7 @@
           </ac:picMkLst>
         </pc:picChg>
         <pc:picChg chg="add mod">
-          <ac:chgData name="Jean-Yves Vuillequez" userId="e7fac481abea6bd0" providerId="LiveId" clId="{79E365E8-22BC-4EC2-9606-9A9AC6CD1D22}" dt="2025-11-20T11:55:08.114" v="2624" actId="1076"/>
+          <ac:chgData name="Jean-Yves Vuillequez" userId="e7fac481abea6bd0" providerId="LiveId" clId="{79E365E8-22BC-4EC2-9606-9A9AC6CD1D22}" dt="2025-11-20T20:28:42.563" v="5185" actId="164"/>
           <ac:picMkLst>
             <pc:docMk/>
             <pc:sldMk cId="1821755839" sldId="274"/>
@@ -1493,7 +1557,7 @@
           </ac:picMkLst>
         </pc:picChg>
         <pc:picChg chg="add mod">
-          <ac:chgData name="Jean-Yves Vuillequez" userId="e7fac481abea6bd0" providerId="LiveId" clId="{79E365E8-22BC-4EC2-9606-9A9AC6CD1D22}" dt="2025-11-20T11:55:51.058" v="2630" actId="1076"/>
+          <ac:chgData name="Jean-Yves Vuillequez" userId="e7fac481abea6bd0" providerId="LiveId" clId="{79E365E8-22BC-4EC2-9606-9A9AC6CD1D22}" dt="2025-11-20T20:28:42.563" v="5185" actId="164"/>
           <ac:picMkLst>
             <pc:docMk/>
             <pc:sldMk cId="1821755839" sldId="274"/>
@@ -1501,7 +1565,7 @@
           </ac:picMkLst>
         </pc:picChg>
         <pc:picChg chg="add mod">
-          <ac:chgData name="Jean-Yves Vuillequez" userId="e7fac481abea6bd0" providerId="LiveId" clId="{79E365E8-22BC-4EC2-9606-9A9AC6CD1D22}" dt="2025-11-20T11:55:59.579" v="2631" actId="1076"/>
+          <ac:chgData name="Jean-Yves Vuillequez" userId="e7fac481abea6bd0" providerId="LiveId" clId="{79E365E8-22BC-4EC2-9606-9A9AC6CD1D22}" dt="2025-11-20T20:28:42.563" v="5185" actId="164"/>
           <ac:picMkLst>
             <pc:docMk/>
             <pc:sldMk cId="1821755839" sldId="274"/>
@@ -1509,7 +1573,7 @@
           </ac:picMkLst>
         </pc:picChg>
         <pc:picChg chg="add mod">
-          <ac:chgData name="Jean-Yves Vuillequez" userId="e7fac481abea6bd0" providerId="LiveId" clId="{79E365E8-22BC-4EC2-9606-9A9AC6CD1D22}" dt="2025-11-20T11:56:12.971" v="2636" actId="1076"/>
+          <ac:chgData name="Jean-Yves Vuillequez" userId="e7fac481abea6bd0" providerId="LiveId" clId="{79E365E8-22BC-4EC2-9606-9A9AC6CD1D22}" dt="2025-11-20T20:27:51.832" v="5177" actId="164"/>
           <ac:picMkLst>
             <pc:docMk/>
             <pc:sldMk cId="1821755839" sldId="274"/>
@@ -1517,7 +1581,7 @@
           </ac:picMkLst>
         </pc:picChg>
         <pc:picChg chg="add mod">
-          <ac:chgData name="Jean-Yves Vuillequez" userId="e7fac481abea6bd0" providerId="LiveId" clId="{79E365E8-22BC-4EC2-9606-9A9AC6CD1D22}" dt="2025-11-20T11:54:51.683" v="2620" actId="1076"/>
+          <ac:chgData name="Jean-Yves Vuillequez" userId="e7fac481abea6bd0" providerId="LiveId" clId="{79E365E8-22BC-4EC2-9606-9A9AC6CD1D22}" dt="2025-11-20T20:28:32.286" v="5184" actId="164"/>
           <ac:picMkLst>
             <pc:docMk/>
             <pc:sldMk cId="1821755839" sldId="274"/>
@@ -1533,7 +1597,7 @@
           </ac:picMkLst>
         </pc:picChg>
         <pc:picChg chg="add mod">
-          <ac:chgData name="Jean-Yves Vuillequez" userId="e7fac481abea6bd0" providerId="LiveId" clId="{79E365E8-22BC-4EC2-9606-9A9AC6CD1D22}" dt="2025-11-20T12:03:53.507" v="2782" actId="1076"/>
+          <ac:chgData name="Jean-Yves Vuillequez" userId="e7fac481abea6bd0" providerId="LiveId" clId="{79E365E8-22BC-4EC2-9606-9A9AC6CD1D22}" dt="2025-11-20T20:27:18.739" v="5174" actId="164"/>
           <ac:picMkLst>
             <pc:docMk/>
             <pc:sldMk cId="1821755839" sldId="274"/>
@@ -1541,7 +1605,7 @@
           </ac:picMkLst>
         </pc:picChg>
         <pc:picChg chg="add mod">
-          <ac:chgData name="Jean-Yves Vuillequez" userId="e7fac481abea6bd0" providerId="LiveId" clId="{79E365E8-22BC-4EC2-9606-9A9AC6CD1D22}" dt="2025-11-20T11:54:51.683" v="2620" actId="1076"/>
+          <ac:chgData name="Jean-Yves Vuillequez" userId="e7fac481abea6bd0" providerId="LiveId" clId="{79E365E8-22BC-4EC2-9606-9A9AC6CD1D22}" dt="2025-11-20T20:27:18.739" v="5174" actId="164"/>
           <ac:picMkLst>
             <pc:docMk/>
             <pc:sldMk cId="1821755839" sldId="274"/>
@@ -1549,7 +1613,7 @@
           </ac:picMkLst>
         </pc:picChg>
         <pc:picChg chg="add mod">
-          <ac:chgData name="Jean-Yves Vuillequez" userId="e7fac481abea6bd0" providerId="LiveId" clId="{79E365E8-22BC-4EC2-9606-9A9AC6CD1D22}" dt="2025-11-20T11:55:51.058" v="2630" actId="1076"/>
+          <ac:chgData name="Jean-Yves Vuillequez" userId="e7fac481abea6bd0" providerId="LiveId" clId="{79E365E8-22BC-4EC2-9606-9A9AC6CD1D22}" dt="2025-11-20T20:27:18.739" v="5174" actId="164"/>
           <ac:picMkLst>
             <pc:docMk/>
             <pc:sldMk cId="1821755839" sldId="274"/>
@@ -1557,7 +1621,7 @@
           </ac:picMkLst>
         </pc:picChg>
         <pc:picChg chg="add mod">
-          <ac:chgData name="Jean-Yves Vuillequez" userId="e7fac481abea6bd0" providerId="LiveId" clId="{79E365E8-22BC-4EC2-9606-9A9AC6CD1D22}" dt="2025-11-20T12:05:28.757" v="2791" actId="1076"/>
+          <ac:chgData name="Jean-Yves Vuillequez" userId="e7fac481abea6bd0" providerId="LiveId" clId="{79E365E8-22BC-4EC2-9606-9A9AC6CD1D22}" dt="2025-11-20T20:28:42.563" v="5185" actId="164"/>
           <ac:picMkLst>
             <pc:docMk/>
             <pc:sldMk cId="1821755839" sldId="274"/>
@@ -1565,7 +1629,7 @@
           </ac:picMkLst>
         </pc:picChg>
         <pc:picChg chg="add mod">
-          <ac:chgData name="Jean-Yves Vuillequez" userId="e7fac481abea6bd0" providerId="LiveId" clId="{79E365E8-22BC-4EC2-9606-9A9AC6CD1D22}" dt="2025-11-20T12:04:01.760" v="2784" actId="1076"/>
+          <ac:chgData name="Jean-Yves Vuillequez" userId="e7fac481abea6bd0" providerId="LiveId" clId="{79E365E8-22BC-4EC2-9606-9A9AC6CD1D22}" dt="2025-11-20T20:30:15.752" v="5193" actId="164"/>
           <ac:picMkLst>
             <pc:docMk/>
             <pc:sldMk cId="1821755839" sldId="274"/>
@@ -1573,7 +1637,7 @@
           </ac:picMkLst>
         </pc:picChg>
         <pc:picChg chg="add mod">
-          <ac:chgData name="Jean-Yves Vuillequez" userId="e7fac481abea6bd0" providerId="LiveId" clId="{79E365E8-22BC-4EC2-9606-9A9AC6CD1D22}" dt="2025-11-20T12:00:26.281" v="2711" actId="1076"/>
+          <ac:chgData name="Jean-Yves Vuillequez" userId="e7fac481abea6bd0" providerId="LiveId" clId="{79E365E8-22BC-4EC2-9606-9A9AC6CD1D22}" dt="2025-11-20T20:26:58.742" v="5170" actId="164"/>
           <ac:picMkLst>
             <pc:docMk/>
             <pc:sldMk cId="1821755839" sldId="274"/>
@@ -1581,7 +1645,7 @@
           </ac:picMkLst>
         </pc:picChg>
         <pc:picChg chg="add mod">
-          <ac:chgData name="Jean-Yves Vuillequez" userId="e7fac481abea6bd0" providerId="LiveId" clId="{79E365E8-22BC-4EC2-9606-9A9AC6CD1D22}" dt="2025-11-20T12:00:23.937" v="2710" actId="1076"/>
+          <ac:chgData name="Jean-Yves Vuillequez" userId="e7fac481abea6bd0" providerId="LiveId" clId="{79E365E8-22BC-4EC2-9606-9A9AC6CD1D22}" dt="2025-11-20T20:26:58.742" v="5170" actId="164"/>
           <ac:picMkLst>
             <pc:docMk/>
             <pc:sldMk cId="1821755839" sldId="274"/>
@@ -1589,7 +1653,7 @@
           </ac:picMkLst>
         </pc:picChg>
         <pc:picChg chg="add mod">
-          <ac:chgData name="Jean-Yves Vuillequez" userId="e7fac481abea6bd0" providerId="LiveId" clId="{79E365E8-22BC-4EC2-9606-9A9AC6CD1D22}" dt="2025-11-20T11:55:51.058" v="2630" actId="1076"/>
+          <ac:chgData name="Jean-Yves Vuillequez" userId="e7fac481abea6bd0" providerId="LiveId" clId="{79E365E8-22BC-4EC2-9606-9A9AC6CD1D22}" dt="2025-11-20T20:28:42.563" v="5185" actId="164"/>
           <ac:picMkLst>
             <pc:docMk/>
             <pc:sldMk cId="1821755839" sldId="274"/>
@@ -1597,7 +1661,7 @@
           </ac:picMkLst>
         </pc:picChg>
         <pc:picChg chg="add mod">
-          <ac:chgData name="Jean-Yves Vuillequez" userId="e7fac481abea6bd0" providerId="LiveId" clId="{79E365E8-22BC-4EC2-9606-9A9AC6CD1D22}" dt="2025-11-20T12:03:58.310" v="2783" actId="1076"/>
+          <ac:chgData name="Jean-Yves Vuillequez" userId="e7fac481abea6bd0" providerId="LiveId" clId="{79E365E8-22BC-4EC2-9606-9A9AC6CD1D22}" dt="2025-11-20T20:32:44.585" v="5201" actId="164"/>
           <ac:picMkLst>
             <pc:docMk/>
             <pc:sldMk cId="1821755839" sldId="274"/>
@@ -1605,7 +1669,7 @@
           </ac:picMkLst>
         </pc:picChg>
         <pc:picChg chg="add mod">
-          <ac:chgData name="Jean-Yves Vuillequez" userId="e7fac481abea6bd0" providerId="LiveId" clId="{79E365E8-22BC-4EC2-9606-9A9AC6CD1D22}" dt="2025-11-20T11:53:04.059" v="2593" actId="1076"/>
+          <ac:chgData name="Jean-Yves Vuillequez" userId="e7fac481abea6bd0" providerId="LiveId" clId="{79E365E8-22BC-4EC2-9606-9A9AC6CD1D22}" dt="2025-11-20T20:26:58.742" v="5170" actId="164"/>
           <ac:picMkLst>
             <pc:docMk/>
             <pc:sldMk cId="1821755839" sldId="274"/>
@@ -1621,7 +1685,7 @@
           </ac:picMkLst>
         </pc:picChg>
         <pc:cxnChg chg="add mod">
-          <ac:chgData name="Jean-Yves Vuillequez" userId="e7fac481abea6bd0" providerId="LiveId" clId="{79E365E8-22BC-4EC2-9606-9A9AC6CD1D22}" dt="2025-11-20T09:04:04.822" v="470" actId="208"/>
+          <ac:chgData name="Jean-Yves Vuillequez" userId="e7fac481abea6bd0" providerId="LiveId" clId="{79E365E8-22BC-4EC2-9606-9A9AC6CD1D22}" dt="2025-11-20T20:26:59.699" v="5173" actId="164"/>
           <ac:cxnSpMkLst>
             <pc:docMk/>
             <pc:sldMk cId="1821755839" sldId="274"/>
@@ -1637,7 +1701,7 @@
           </ac:cxnSpMkLst>
         </pc:cxnChg>
         <pc:cxnChg chg="add mod">
-          <ac:chgData name="Jean-Yves Vuillequez" userId="e7fac481abea6bd0" providerId="LiveId" clId="{79E365E8-22BC-4EC2-9606-9A9AC6CD1D22}" dt="2025-11-20T09:04:04.822" v="470" actId="208"/>
+          <ac:chgData name="Jean-Yves Vuillequez" userId="e7fac481abea6bd0" providerId="LiveId" clId="{79E365E8-22BC-4EC2-9606-9A9AC6CD1D22}" dt="2025-11-20T20:30:42.131" v="5196" actId="164"/>
           <ac:cxnSpMkLst>
             <pc:docMk/>
             <pc:sldMk cId="1821755839" sldId="274"/>
@@ -1645,7 +1709,7 @@
           </ac:cxnSpMkLst>
         </pc:cxnChg>
         <pc:cxnChg chg="add mod">
-          <ac:chgData name="Jean-Yves Vuillequez" userId="e7fac481abea6bd0" providerId="LiveId" clId="{79E365E8-22BC-4EC2-9606-9A9AC6CD1D22}" dt="2025-11-20T12:05:02.357" v="2785" actId="1582"/>
+          <ac:chgData name="Jean-Yves Vuillequez" userId="e7fac481abea6bd0" providerId="LiveId" clId="{79E365E8-22BC-4EC2-9606-9A9AC6CD1D22}" dt="2025-11-20T20:26:59.699" v="5173" actId="164"/>
           <ac:cxnSpMkLst>
             <pc:docMk/>
             <pc:sldMk cId="1821755839" sldId="274"/>
@@ -1684,8 +1748,8 @@
             <ac:cxnSpMk id="99" creationId="{1740FD3C-BB82-E8E4-4341-9F9B0A291611}"/>
           </ac:cxnSpMkLst>
         </pc:cxnChg>
-        <pc:cxnChg chg="add mod">
-          <ac:chgData name="Jean-Yves Vuillequez" userId="e7fac481abea6bd0" providerId="LiveId" clId="{79E365E8-22BC-4EC2-9606-9A9AC6CD1D22}" dt="2025-11-20T12:05:39.188" v="2792" actId="14100"/>
+        <pc:cxnChg chg="add mod ord">
+          <ac:chgData name="Jean-Yves Vuillequez" userId="e7fac481abea6bd0" providerId="LiveId" clId="{79E365E8-22BC-4EC2-9606-9A9AC6CD1D22}" dt="2025-11-20T20:30:15.752" v="5193" actId="164"/>
           <ac:cxnSpMkLst>
             <pc:docMk/>
             <pc:sldMk cId="1821755839" sldId="274"/>
@@ -1821,7 +1885,7 @@
           </ac:cxnSpMkLst>
         </pc:cxnChg>
         <pc:cxnChg chg="add mod">
-          <ac:chgData name="Jean-Yves Vuillequez" userId="e7fac481abea6bd0" providerId="LiveId" clId="{79E365E8-22BC-4EC2-9606-9A9AC6CD1D22}" dt="2025-11-20T12:02:26.430" v="2757" actId="1035"/>
+          <ac:chgData name="Jean-Yves Vuillequez" userId="e7fac481abea6bd0" providerId="LiveId" clId="{79E365E8-22BC-4EC2-9606-9A9AC6CD1D22}" dt="2025-11-20T20:26:58.491" v="5169" actId="164"/>
           <ac:cxnSpMkLst>
             <pc:docMk/>
             <pc:sldMk cId="1821755839" sldId="274"/>
@@ -1964,8 +2028,8 @@
           <pc:sldMk cId="2602082869" sldId="285"/>
         </pc:sldMkLst>
       </pc:sldChg>
-      <pc:sldChg chg="addSp delSp modSp mod delAnim modAnim modNotesTx">
-        <pc:chgData name="Jean-Yves Vuillequez" userId="e7fac481abea6bd0" providerId="LiveId" clId="{79E365E8-22BC-4EC2-9606-9A9AC6CD1D22}" dt="2025-11-20T16:50:18.376" v="4801" actId="20577"/>
+      <pc:sldChg chg="addSp delSp modSp mod addAnim delAnim modAnim modNotesTx">
+        <pc:chgData name="Jean-Yves Vuillequez" userId="e7fac481abea6bd0" providerId="LiveId" clId="{79E365E8-22BC-4EC2-9606-9A9AC6CD1D22}" dt="2025-11-20T20:03:48.943" v="4847"/>
         <pc:sldMkLst>
           <pc:docMk/>
           <pc:sldMk cId="406580661" sldId="286"/>
@@ -1987,7 +2051,7 @@
           </ac:spMkLst>
         </pc:spChg>
         <pc:spChg chg="add mod">
-          <ac:chgData name="Jean-Yves Vuillequez" userId="e7fac481abea6bd0" providerId="LiveId" clId="{79E365E8-22BC-4EC2-9606-9A9AC6CD1D22}" dt="2025-11-20T16:44:37.451" v="4745" actId="207"/>
+          <ac:chgData name="Jean-Yves Vuillequez" userId="e7fac481abea6bd0" providerId="LiveId" clId="{79E365E8-22BC-4EC2-9606-9A9AC6CD1D22}" dt="2025-11-20T20:01:17.573" v="4830" actId="113"/>
           <ac:spMkLst>
             <pc:docMk/>
             <pc:sldMk cId="406580661" sldId="286"/>
@@ -2011,7 +2075,7 @@
           </ac:spMkLst>
         </pc:spChg>
         <pc:spChg chg="add mod">
-          <ac:chgData name="Jean-Yves Vuillequez" userId="e7fac481abea6bd0" providerId="LiveId" clId="{79E365E8-22BC-4EC2-9606-9A9AC6CD1D22}" dt="2025-11-20T16:50:18.376" v="4801" actId="20577"/>
+          <ac:chgData name="Jean-Yves Vuillequez" userId="e7fac481abea6bd0" providerId="LiveId" clId="{79E365E8-22BC-4EC2-9606-9A9AC6CD1D22}" dt="2025-11-20T20:01:28.181" v="4837" actId="113"/>
           <ac:spMkLst>
             <pc:docMk/>
             <pc:sldMk cId="406580661" sldId="286"/>
@@ -2027,7 +2091,7 @@
           </ac:spMkLst>
         </pc:spChg>
         <pc:spChg chg="add mod">
-          <ac:chgData name="Jean-Yves Vuillequez" userId="e7fac481abea6bd0" providerId="LiveId" clId="{79E365E8-22BC-4EC2-9606-9A9AC6CD1D22}" dt="2025-11-20T16:44:44.754" v="4747" actId="207"/>
+          <ac:chgData name="Jean-Yves Vuillequez" userId="e7fac481abea6bd0" providerId="LiveId" clId="{79E365E8-22BC-4EC2-9606-9A9AC6CD1D22}" dt="2025-11-20T20:01:06.610" v="4829" actId="404"/>
           <ac:spMkLst>
             <pc:docMk/>
             <pc:sldMk cId="406580661" sldId="286"/>
@@ -2364,7 +2428,7 @@
         </pc:picChg>
       </pc:sldChg>
       <pc:sldChg chg="addSp delSp modSp add mod ord modAnim">
-        <pc:chgData name="Jean-Yves Vuillequez" userId="e7fac481abea6bd0" providerId="LiveId" clId="{79E365E8-22BC-4EC2-9606-9A9AC6CD1D22}" dt="2025-11-20T16:47:57.291" v="4768"/>
+        <pc:chgData name="Jean-Yves Vuillequez" userId="e7fac481abea6bd0" providerId="LiveId" clId="{79E365E8-22BC-4EC2-9606-9A9AC6CD1D22}" dt="2025-11-20T20:00:47.118" v="4826"/>
         <pc:sldMkLst>
           <pc:docMk/>
           <pc:sldMk cId="3647836335" sldId="287"/>
@@ -2669,7 +2733,7 @@
         </pc:spChg>
       </pc:sldChg>
       <pc:sldChg chg="addSp delSp modSp add mod ord delAnim modAnim modNotesTx">
-        <pc:chgData name="Jean-Yves Vuillequez" userId="e7fac481abea6bd0" providerId="LiveId" clId="{79E365E8-22BC-4EC2-9606-9A9AC6CD1D22}" dt="2025-11-20T16:30:32.436" v="4739" actId="207"/>
+        <pc:chgData name="Jean-Yves Vuillequez" userId="e7fac481abea6bd0" providerId="LiveId" clId="{79E365E8-22BC-4EC2-9606-9A9AC6CD1D22}" dt="2025-11-20T20:38:01.208" v="5232"/>
         <pc:sldMkLst>
           <pc:docMk/>
           <pc:sldMk cId="3315518580" sldId="292"/>
@@ -2696,6 +2760,14 @@
             <pc:docMk/>
             <pc:sldMk cId="3315518580" sldId="292"/>
             <ac:spMk id="3" creationId="{58C7CB4A-9D41-2B2B-3342-5448FB603161}"/>
+          </ac:spMkLst>
+        </pc:spChg>
+        <pc:spChg chg="add mod">
+          <ac:chgData name="Jean-Yves Vuillequez" userId="e7fac481abea6bd0" providerId="LiveId" clId="{79E365E8-22BC-4EC2-9606-9A9AC6CD1D22}" dt="2025-11-20T20:36:47.745" v="5218" actId="207"/>
+          <ac:spMkLst>
+            <pc:docMk/>
+            <pc:sldMk cId="3315518580" sldId="292"/>
+            <ac:spMk id="3" creationId="{8E129141-57FA-3782-2D29-46A01202FF38}"/>
           </ac:spMkLst>
         </pc:spChg>
         <pc:spChg chg="del mod">
@@ -2731,7 +2803,7 @@
           </ac:spMkLst>
         </pc:spChg>
         <pc:spChg chg="add mod ord">
-          <ac:chgData name="Jean-Yves Vuillequez" userId="e7fac481abea6bd0" providerId="LiveId" clId="{79E365E8-22BC-4EC2-9606-9A9AC6CD1D22}" dt="2025-11-20T16:30:32.436" v="4739" actId="207"/>
+          <ac:chgData name="Jean-Yves Vuillequez" userId="e7fac481abea6bd0" providerId="LiveId" clId="{79E365E8-22BC-4EC2-9606-9A9AC6CD1D22}" dt="2025-11-20T20:37:10.457" v="5221" actId="2085"/>
           <ac:spMkLst>
             <pc:docMk/>
             <pc:sldMk cId="3315518580" sldId="292"/>
@@ -2755,7 +2827,7 @@
           </ac:spMkLst>
         </pc:spChg>
         <pc:spChg chg="add mod">
-          <ac:chgData name="Jean-Yves Vuillequez" userId="e7fac481abea6bd0" providerId="LiveId" clId="{79E365E8-22BC-4EC2-9606-9A9AC6CD1D22}" dt="2025-11-20T16:30:25.093" v="4738" actId="208"/>
+          <ac:chgData name="Jean-Yves Vuillequez" userId="e7fac481abea6bd0" providerId="LiveId" clId="{79E365E8-22BC-4EC2-9606-9A9AC6CD1D22}" dt="2025-11-20T20:37:00.629" v="5220" actId="208"/>
           <ac:spMkLst>
             <pc:docMk/>
             <pc:sldMk cId="3315518580" sldId="292"/>
@@ -2795,8 +2867,8 @@
           </ac:picMkLst>
         </pc:picChg>
       </pc:sldChg>
-      <pc:sldChg chg="addSp delSp modSp add mod">
-        <pc:chgData name="Jean-Yves Vuillequez" userId="e7fac481abea6bd0" providerId="LiveId" clId="{79E365E8-22BC-4EC2-9606-9A9AC6CD1D22}" dt="2025-11-20T13:25:30.949" v="3239" actId="1076"/>
+      <pc:sldChg chg="addSp delSp modSp add mod modAnim">
+        <pc:chgData name="Jean-Yves Vuillequez" userId="e7fac481abea6bd0" providerId="LiveId" clId="{79E365E8-22BC-4EC2-9606-9A9AC6CD1D22}" dt="2025-11-20T20:39:03.631" v="5241"/>
         <pc:sldMkLst>
           <pc:docMk/>
           <pc:sldMk cId="1155304805" sldId="293"/>
@@ -2953,7 +3025,7 @@
         </pc:spChg>
       </pc:sldChg>
       <pc:sldChg chg="modSp add mod">
-        <pc:chgData name="Jean-Yves Vuillequez" userId="e7fac481abea6bd0" providerId="LiveId" clId="{79E365E8-22BC-4EC2-9606-9A9AC6CD1D22}" dt="2025-11-20T16:41:51.642" v="4742" actId="113"/>
+        <pc:chgData name="Jean-Yves Vuillequez" userId="e7fac481abea6bd0" providerId="LiveId" clId="{79E365E8-22BC-4EC2-9606-9A9AC6CD1D22}" dt="2025-11-20T20:45:26.230" v="5250" actId="20577"/>
         <pc:sldMkLst>
           <pc:docMk/>
           <pc:sldMk cId="2817282669" sldId="295"/>
@@ -2967,7 +3039,7 @@
           </ac:spMkLst>
         </pc:spChg>
         <pc:graphicFrameChg chg="mod modGraphic">
-          <ac:chgData name="Jean-Yves Vuillequez" userId="e7fac481abea6bd0" providerId="LiveId" clId="{79E365E8-22BC-4EC2-9606-9A9AC6CD1D22}" dt="2025-11-20T16:28:31.299" v="4732" actId="2164"/>
+          <ac:chgData name="Jean-Yves Vuillequez" userId="e7fac481abea6bd0" providerId="LiveId" clId="{79E365E8-22BC-4EC2-9606-9A9AC6CD1D22}" dt="2025-11-20T20:45:26.230" v="5250" actId="20577"/>
           <ac:graphicFrameMkLst>
             <pc:docMk/>
             <pc:sldMk cId="2817282669" sldId="295"/>
@@ -5179,7 +5251,6 @@
               <a:rPr lang="fr-FR" dirty="0"/>
               <a:t>Source : https://www.auvergnerhonealpes-ee.fr/fileadmin/mediatheque_Cdr/Documents/ENR/Panorama_filiere_solaire_AURA_2024.pdf</a:t>
             </a:r>
-            <a:endParaRPr dirty="0"/>
           </a:p>
         </p:txBody>
       </p:sp>
@@ -19534,7 +19605,7 @@
           </a:solidFill>
           <a:ln>
             <a:solidFill>
-              <a:srgbClr val="00B050"/>
+              <a:srgbClr val="FF0000"/>
             </a:solidFill>
           </a:ln>
         </p:spPr>
@@ -19559,7 +19630,11 @@
           <a:lstStyle/>
           <a:p>
             <a:pPr algn="ctr"/>
-            <a:endParaRPr lang="fr-FR"/>
+            <a:endParaRPr lang="fr-FR">
+              <a:solidFill>
+                <a:srgbClr val="FF0000"/>
+              </a:solidFill>
+            </a:endParaRPr>
           </a:p>
         </p:txBody>
       </p:sp>
@@ -19597,14 +19672,14 @@
             <a:r>
               <a:rPr lang="fr-FR" sz="1050" b="1" dirty="0" err="1">
                 <a:solidFill>
-                  <a:srgbClr val="00B050"/>
+                  <a:srgbClr val="FF0000"/>
                 </a:solidFill>
               </a:rPr>
               <a:t>What’s</a:t>
             </a:r>
             <a:endParaRPr lang="fr-FR" sz="1050" b="1" dirty="0">
               <a:solidFill>
-                <a:srgbClr val="00B050"/>
+                <a:srgbClr val="FF0000"/>
               </a:solidFill>
             </a:endParaRPr>
           </a:p>
@@ -19612,7 +19687,7 @@
             <a:r>
               <a:rPr lang="fr-FR" sz="1050" b="1" dirty="0" err="1">
                 <a:solidFill>
-                  <a:srgbClr val="00B050"/>
+                  <a:srgbClr val="FF0000"/>
                 </a:solidFill>
               </a:rPr>
               <a:t>next</a:t>
@@ -19620,11 +19695,63 @@
             <a:r>
               <a:rPr lang="fr-FR" sz="1050" b="1" dirty="0">
                 <a:solidFill>
-                  <a:srgbClr val="00B050"/>
+                  <a:srgbClr val="FF0000"/>
                 </a:solidFill>
               </a:rPr>
               <a:t> ?</a:t>
             </a:r>
+          </a:p>
+        </p:txBody>
+      </p:sp>
+      <p:sp>
+        <p:nvSpPr>
+          <p:cNvPr id="3" name="Flèche : droite 2">
+            <a:extLst>
+              <a:ext uri="{FF2B5EF4-FFF2-40B4-BE49-F238E27FC236}">
+                <a16:creationId xmlns:a16="http://schemas.microsoft.com/office/drawing/2014/main" id="{8E129141-57FA-3782-2D29-46A01202FF38}"/>
+              </a:ext>
+            </a:extLst>
+          </p:cNvPr>
+          <p:cNvSpPr/>
+          <p:nvPr/>
+        </p:nvSpPr>
+        <p:spPr>
+          <a:xfrm>
+            <a:off x="4458214" y="2568491"/>
+            <a:ext cx="418726" cy="596535"/>
+          </a:xfrm>
+          <a:prstGeom prst="rightArrow">
+            <a:avLst/>
+          </a:prstGeom>
+          <a:solidFill>
+            <a:srgbClr val="FF0000"/>
+          </a:solidFill>
+          <a:ln>
+            <a:noFill/>
+          </a:ln>
+        </p:spPr>
+        <p:style>
+          <a:lnRef idx="2">
+            <a:schemeClr val="accent1">
+              <a:shade val="15000"/>
+            </a:schemeClr>
+          </a:lnRef>
+          <a:fillRef idx="1">
+            <a:schemeClr val="accent1"/>
+          </a:fillRef>
+          <a:effectRef idx="0">
+            <a:schemeClr val="accent1"/>
+          </a:effectRef>
+          <a:fontRef idx="minor">
+            <a:schemeClr val="lt1"/>
+          </a:fontRef>
+        </p:style>
+        <p:txBody>
+          <a:bodyPr rtlCol="0" anchor="ctr"/>
+          <a:lstStyle/>
+          <a:p>
+            <a:pPr algn="ctr"/>
+            <a:endParaRPr lang="fr-FR" dirty="0"/>
           </a:p>
         </p:txBody>
       </p:sp>
@@ -19650,9 +19777,6 @@
                     <p:cTn id="3" fill="hold">
                       <p:stCondLst>
                         <p:cond delay="indefinite"/>
-                        <p:cond evt="onBegin" delay="0">
-                          <p:tn val="2"/>
-                        </p:cond>
                       </p:stCondLst>
                       <p:childTnLst>
                         <p:par>
@@ -19662,7 +19786,7 @@
                             </p:stCondLst>
                             <p:childTnLst>
                               <p:par>
-                                <p:cTn id="5" presetID="1" presetClass="entr" presetSubtype="0" fill="hold" grpId="0" nodeType="withEffect">
+                                <p:cTn id="5" presetID="1" presetClass="entr" presetSubtype="0" fill="hold" grpId="0" nodeType="clickEffect">
                                   <p:stCondLst>
                                     <p:cond delay="0"/>
                                   </p:stCondLst>
@@ -19702,7 +19826,160 @@
                                           </p:stCondLst>
                                         </p:cTn>
                                         <p:tgtEl>
+                                          <p:spTgt spid="11"/>
+                                        </p:tgtEl>
+                                        <p:attrNameLst>
+                                          <p:attrName>style.visibility</p:attrName>
+                                        </p:attrNameLst>
+                                      </p:cBhvr>
+                                      <p:to>
+                                        <p:strVal val="visible"/>
+                                      </p:to>
+                                    </p:set>
+                                  </p:childTnLst>
+                                </p:cTn>
+                              </p:par>
+                              <p:par>
+                                <p:cTn id="9" presetID="1" presetClass="entr" presetSubtype="0" fill="hold" nodeType="withEffect">
+                                  <p:stCondLst>
+                                    <p:cond delay="0"/>
+                                  </p:stCondLst>
+                                  <p:childTnLst>
+                                    <p:set>
+                                      <p:cBhvr>
+                                        <p:cTn id="10" dur="1" fill="hold">
+                                          <p:stCondLst>
+                                            <p:cond delay="0"/>
+                                          </p:stCondLst>
+                                        </p:cTn>
+                                        <p:tgtEl>
+                                          <p:spTgt spid="14"/>
+                                        </p:tgtEl>
+                                        <p:attrNameLst>
+                                          <p:attrName>style.visibility</p:attrName>
+                                        </p:attrNameLst>
+                                      </p:cBhvr>
+                                      <p:to>
+                                        <p:strVal val="visible"/>
+                                      </p:to>
+                                    </p:set>
+                                  </p:childTnLst>
+                                </p:cTn>
+                              </p:par>
+                            </p:childTnLst>
+                          </p:cTn>
+                        </p:par>
+                      </p:childTnLst>
+                    </p:cTn>
+                  </p:par>
+                  <p:par>
+                    <p:cTn id="11" fill="hold">
+                      <p:stCondLst>
+                        <p:cond delay="indefinite"/>
+                      </p:stCondLst>
+                      <p:childTnLst>
+                        <p:par>
+                          <p:cTn id="12" fill="hold">
+                            <p:stCondLst>
+                              <p:cond delay="0"/>
+                            </p:stCondLst>
+                            <p:childTnLst>
+                              <p:par>
+                                <p:cTn id="13" presetID="1" presetClass="entr" presetSubtype="0" fill="hold" grpId="0" nodeType="clickEffect">
+                                  <p:stCondLst>
+                                    <p:cond delay="0"/>
+                                  </p:stCondLst>
+                                  <p:childTnLst>
+                                    <p:set>
+                                      <p:cBhvr>
+                                        <p:cTn id="14" dur="1" fill="hold">
+                                          <p:stCondLst>
+                                            <p:cond delay="0"/>
+                                          </p:stCondLst>
+                                        </p:cTn>
+                                        <p:tgtEl>
                                           <p:spTgt spid="6"/>
+                                        </p:tgtEl>
+                                        <p:attrNameLst>
+                                          <p:attrName>style.visibility</p:attrName>
+                                        </p:attrNameLst>
+                                      </p:cBhvr>
+                                      <p:to>
+                                        <p:strVal val="visible"/>
+                                      </p:to>
+                                    </p:set>
+                                  </p:childTnLst>
+                                </p:cTn>
+                              </p:par>
+                              <p:par>
+                                <p:cTn id="15" presetID="1" presetClass="entr" presetSubtype="0" fill="hold" grpId="0" nodeType="withEffect">
+                                  <p:stCondLst>
+                                    <p:cond delay="0"/>
+                                  </p:stCondLst>
+                                  <p:childTnLst>
+                                    <p:set>
+                                      <p:cBhvr>
+                                        <p:cTn id="16" dur="1" fill="hold">
+                                          <p:stCondLst>
+                                            <p:cond delay="0"/>
+                                          </p:stCondLst>
+                                        </p:cTn>
+                                        <p:tgtEl>
+                                          <p:spTgt spid="16"/>
+                                        </p:tgtEl>
+                                        <p:attrNameLst>
+                                          <p:attrName>style.visibility</p:attrName>
+                                        </p:attrNameLst>
+                                      </p:cBhvr>
+                                      <p:to>
+                                        <p:strVal val="visible"/>
+                                      </p:to>
+                                    </p:set>
+                                  </p:childTnLst>
+                                </p:cTn>
+                              </p:par>
+                              <p:par>
+                                <p:cTn id="17" presetID="1" presetClass="entr" presetSubtype="0" fill="hold" grpId="0" nodeType="withEffect">
+                                  <p:stCondLst>
+                                    <p:cond delay="0"/>
+                                  </p:stCondLst>
+                                  <p:childTnLst>
+                                    <p:set>
+                                      <p:cBhvr>
+                                        <p:cTn id="18" dur="1" fill="hold">
+                                          <p:stCondLst>
+                                            <p:cond delay="0"/>
+                                          </p:stCondLst>
+                                        </p:cTn>
+                                        <p:tgtEl>
+                                          <p:spTgt spid="9"/>
+                                        </p:tgtEl>
+                                        <p:attrNameLst>
+                                          <p:attrName>style.visibility</p:attrName>
+                                        </p:attrNameLst>
+                                      </p:cBhvr>
+                                      <p:to>
+                                        <p:strVal val="visible"/>
+                                      </p:to>
+                                    </p:set>
+                                  </p:childTnLst>
+                                </p:cTn>
+                              </p:par>
+                              <p:par>
+                                <p:cTn id="19" presetID="1" presetClass="entr" presetSubtype="0" fill="hold" grpId="0" nodeType="withEffect">
+                                  <p:stCondLst>
+                                    <p:cond delay="0"/>
+                                  </p:stCondLst>
+                                  <p:childTnLst>
+                                    <p:set>
+                                      <p:cBhvr>
+                                        <p:cTn id="20" dur="1" fill="hold">
+                                          <p:stCondLst>
+                                            <p:cond delay="0"/>
+                                          </p:stCondLst>
+                                        </p:cTn>
+                                        <p:tgtEl>
+                                          <p:spTgt spid="3"/>
                                         </p:tgtEl>
                                         <p:attrNameLst>
                                           <p:attrName>style.visibility</p:attrName>
@@ -19745,6 +20022,10 @@
     <p:bldLst>
       <p:bldP spid="2" grpId="0" animBg="1"/>
       <p:bldP spid="6" grpId="0" animBg="1"/>
+      <p:bldP spid="11" grpId="0" animBg="1"/>
+      <p:bldP spid="16" grpId="0" animBg="1"/>
+      <p:bldP spid="9" grpId="0"/>
+      <p:bldP spid="3" grpId="0" animBg="1"/>
     </p:bldLst>
   </p:timing>
 </p:sld>
@@ -21152,7 +21433,7 @@
           <p:nvPr>
             <p:extLst>
               <p:ext uri="{D42A27DB-BD31-4B8C-83A1-F6EECF244321}">
-                <p14:modId xmlns:p14="http://schemas.microsoft.com/office/powerpoint/2010/main" val="3599845409"/>
+                <p14:modId xmlns:p14="http://schemas.microsoft.com/office/powerpoint/2010/main" val="2862834959"/>
               </p:ext>
             </p:extLst>
           </p:nvPr>
@@ -22347,9 +22628,22 @@
                     <a:lstStyle/>
                     <a:p>
                       <a:r>
-                        <a:rPr sz="900"/>
-                        <a:t>Analyse explor.</a:t>
+                        <a:rPr sz="900" dirty="0" err="1"/>
+                        <a:t>Analyse</a:t>
                       </a:r>
+                      <a:r>
+                        <a:rPr sz="900" dirty="0"/>
+                        <a:t> </a:t>
+                      </a:r>
+                      <a:r>
+                        <a:rPr sz="900" dirty="0" err="1"/>
+                        <a:t>explor</a:t>
+                      </a:r>
+                      <a:r>
+                        <a:rPr lang="fr-FR" sz="900" dirty="0" err="1"/>
+                        <a:t>atoire</a:t>
+                      </a:r>
+                      <a:endParaRPr sz="900" dirty="0"/>
                     </a:p>
                   </a:txBody>
                   <a:tcPr/>
@@ -24972,7 +25266,11 @@
                                           </p:stCondLst>
                                         </p:cTn>
                                         <p:tgtEl>
-                                          <p:spTgt spid="6"/>
+                                          <p:spTgt spid="4">
+                                            <p:txEl>
+                                              <p:pRg st="0" end="0"/>
+                                            </p:txEl>
+                                          </p:spTgt>
                                         </p:tgtEl>
                                         <p:attrNameLst>
                                           <p:attrName>style.visibility</p:attrName>
@@ -25017,6 +25315,33 @@
                                           </p:stCondLst>
                                         </p:cTn>
                                         <p:tgtEl>
+                                          <p:spTgt spid="6"/>
+                                        </p:tgtEl>
+                                        <p:attrNameLst>
+                                          <p:attrName>style.visibility</p:attrName>
+                                        </p:attrNameLst>
+                                      </p:cBhvr>
+                                      <p:to>
+                                        <p:strVal val="visible"/>
+                                      </p:to>
+                                    </p:set>
+                                  </p:childTnLst>
+                                </p:cTn>
+                              </p:par>
+                              <p:par>
+                                <p:cTn id="11" presetID="1" presetClass="entr" presetSubtype="0" fill="hold" grpId="0" nodeType="withEffect">
+                                  <p:stCondLst>
+                                    <p:cond delay="0"/>
+                                  </p:stCondLst>
+                                  <p:childTnLst>
+                                    <p:set>
+                                      <p:cBhvr>
+                                        <p:cTn id="12" dur="1" fill="hold">
+                                          <p:stCondLst>
+                                            <p:cond delay="0"/>
+                                          </p:stCondLst>
+                                        </p:cTn>
+                                        <p:tgtEl>
                                           <p:spTgt spid="7"/>
                                         </p:tgtEl>
                                         <p:attrNameLst>
@@ -25030,26 +25355,8 @@
                                   </p:childTnLst>
                                 </p:cTn>
                               </p:par>
-                            </p:childTnLst>
-                          </p:cTn>
-                        </p:par>
-                      </p:childTnLst>
-                    </p:cTn>
-                  </p:par>
-                  <p:par>
-                    <p:cTn id="11" fill="hold">
-                      <p:stCondLst>
-                        <p:cond delay="indefinite"/>
-                      </p:stCondLst>
-                      <p:childTnLst>
-                        <p:par>
-                          <p:cTn id="12" fill="hold">
-                            <p:stCondLst>
-                              <p:cond delay="0"/>
-                            </p:stCondLst>
-                            <p:childTnLst>
                               <p:par>
-                                <p:cTn id="13" presetID="1" presetClass="entr" presetSubtype="0" fill="hold" grpId="0" nodeType="clickEffect">
+                                <p:cTn id="13" presetID="1" presetClass="entr" presetSubtype="0" fill="hold" nodeType="withEffect">
                                   <p:stCondLst>
                                     <p:cond delay="0"/>
                                   </p:stCondLst>
@@ -25062,7 +25369,7 @@
                                           </p:stCondLst>
                                         </p:cTn>
                                         <p:tgtEl>
-                                          <p:spTgt spid="8"/>
+                                          <p:spTgt spid="11"/>
                                         </p:tgtEl>
                                         <p:attrNameLst>
                                           <p:attrName>style.visibility</p:attrName>
@@ -25107,7 +25414,61 @@
                                           </p:stCondLst>
                                         </p:cTn>
                                         <p:tgtEl>
+                                          <p:spTgt spid="8"/>
+                                        </p:tgtEl>
+                                        <p:attrNameLst>
+                                          <p:attrName>style.visibility</p:attrName>
+                                        </p:attrNameLst>
+                                      </p:cBhvr>
+                                      <p:to>
+                                        <p:strVal val="visible"/>
+                                      </p:to>
+                                    </p:set>
+                                  </p:childTnLst>
+                                </p:cTn>
+                              </p:par>
+                              <p:par>
+                                <p:cTn id="19" presetID="1" presetClass="entr" presetSubtype="0" fill="hold" grpId="0" nodeType="withEffect">
+                                  <p:stCondLst>
+                                    <p:cond delay="0"/>
+                                  </p:stCondLst>
+                                  <p:childTnLst>
+                                    <p:set>
+                                      <p:cBhvr>
+                                        <p:cTn id="20" dur="1" fill="hold">
+                                          <p:stCondLst>
+                                            <p:cond delay="0"/>
+                                          </p:stCondLst>
+                                        </p:cTn>
+                                        <p:tgtEl>
                                           <p:spTgt spid="9"/>
+                                        </p:tgtEl>
+                                        <p:attrNameLst>
+                                          <p:attrName>style.visibility</p:attrName>
+                                        </p:attrNameLst>
+                                      </p:cBhvr>
+                                      <p:to>
+                                        <p:strVal val="visible"/>
+                                      </p:to>
+                                    </p:set>
+                                  </p:childTnLst>
+                                </p:cTn>
+                              </p:par>
+                              <p:par>
+                                <p:cTn id="21" presetID="1" presetClass="entr" presetSubtype="0" fill="hold" grpId="0" nodeType="withEffect">
+                                  <p:stCondLst>
+                                    <p:cond delay="0"/>
+                                  </p:stCondLst>
+                                  <p:childTnLst>
+                                    <p:set>
+                                      <p:cBhvr>
+                                        <p:cTn id="22" dur="1" fill="hold">
+                                          <p:stCondLst>
+                                            <p:cond delay="0"/>
+                                          </p:stCondLst>
+                                        </p:cTn>
+                                        <p:tgtEl>
+                                          <p:spTgt spid="13"/>
                                         </p:tgtEl>
                                         <p:attrNameLst>
                                           <p:attrName>style.visibility</p:attrName>
@@ -25148,10 +25509,12 @@
       </p:par>
     </p:tnLst>
     <p:bldLst>
+      <p:bldP spid="4" grpId="0" build="p"/>
       <p:bldP spid="6" grpId="0" animBg="1"/>
       <p:bldP spid="7" grpId="0" animBg="1"/>
       <p:bldP spid="8" grpId="0" animBg="1"/>
       <p:bldP spid="9" grpId="0" animBg="1"/>
+      <p:bldP spid="13" grpId="0" animBg="1"/>
     </p:bldLst>
   </p:timing>
 </p:sld>
@@ -25410,7 +25773,7 @@
               <a:defRPr sz="3600" b="1"/>
             </a:pPr>
             <a:r>
-              <a:rPr lang="fr-FR" sz="3200" dirty="0"/>
+              <a:rPr lang="fr-FR" sz="2800" dirty="0"/>
               <a:t>+350 %</a:t>
             </a:r>
           </a:p>
@@ -25836,7 +26199,7 @@
               <a:defRPr sz="3600" b="1"/>
             </a:pPr>
             <a:r>
-              <a:rPr lang="fr-FR" sz="3200" dirty="0"/>
+              <a:rPr lang="fr-FR" sz="2800" dirty="0"/>
               <a:t>#1</a:t>
             </a:r>
           </a:p>
@@ -25852,17 +26215,7 @@
                   </a:schemeClr>
                 </a:solidFill>
               </a:rPr>
-              <a:t>Région française en </a:t>
-            </a:r>
-            <a:r>
-              <a:rPr lang="fr-FR" sz="1600">
-                <a:solidFill>
-                  <a:schemeClr val="bg1">
-                    <a:lumMod val="50000"/>
-                  </a:schemeClr>
-                </a:solidFill>
-              </a:rPr>
-              <a:t>installations photovoltaïques</a:t>
+              <a:t>Région française en installations photovoltaïques</a:t>
             </a:r>
             <a:endParaRPr lang="fr-FR" sz="1100" dirty="0">
               <a:solidFill>
@@ -26225,8 +26578,8 @@
               <a:defRPr sz="3600" b="1"/>
             </a:pPr>
             <a:r>
-              <a:rPr lang="fr-FR" sz="3200" dirty="0"/>
-              <a:t>Variabilité élevée</a:t>
+              <a:rPr lang="fr-FR" sz="2800" dirty="0"/>
+              <a:t>Variabilité</a:t>
             </a:r>
           </a:p>
           <a:p>
@@ -27327,7 +27680,7 @@
                                           </p:stCondLst>
                                         </p:cTn>
                                         <p:tgtEl>
-                                          <p:spTgt spid="5"/>
+                                          <p:spTgt spid="3"/>
                                         </p:tgtEl>
                                         <p:attrNameLst>
                                           <p:attrName>style.visibility</p:attrName>
@@ -27354,7 +27707,34 @@
                                           </p:stCondLst>
                                         </p:cTn>
                                         <p:tgtEl>
-                                          <p:spTgt spid="3"/>
+                                          <p:spTgt spid="5"/>
+                                        </p:tgtEl>
+                                        <p:attrNameLst>
+                                          <p:attrName>style.visibility</p:attrName>
+                                        </p:attrNameLst>
+                                      </p:cBhvr>
+                                      <p:to>
+                                        <p:strVal val="visible"/>
+                                      </p:to>
+                                    </p:set>
+                                  </p:childTnLst>
+                                </p:cTn>
+                              </p:par>
+                              <p:par>
+                                <p:cTn id="9" presetID="1" presetClass="entr" presetSubtype="0" fill="hold" nodeType="withEffect">
+                                  <p:stCondLst>
+                                    <p:cond delay="0"/>
+                                  </p:stCondLst>
+                                  <p:childTnLst>
+                                    <p:set>
+                                      <p:cBhvr>
+                                        <p:cTn id="10" dur="1" fill="hold">
+                                          <p:stCondLst>
+                                            <p:cond delay="0"/>
+                                          </p:stCondLst>
+                                        </p:cTn>
+                                        <p:tgtEl>
+                                          <p:spTgt spid="13"/>
                                         </p:tgtEl>
                                         <p:attrNameLst>
                                           <p:attrName>style.visibility</p:attrName>
@@ -27374,46 +27754,19 @@
                     </p:cTn>
                   </p:par>
                   <p:par>
-                    <p:cTn id="9" fill="hold">
+                    <p:cTn id="11" fill="hold">
                       <p:stCondLst>
                         <p:cond delay="indefinite"/>
                       </p:stCondLst>
                       <p:childTnLst>
                         <p:par>
-                          <p:cTn id="10" fill="hold">
+                          <p:cTn id="12" fill="hold">
                             <p:stCondLst>
                               <p:cond delay="0"/>
                             </p:stCondLst>
                             <p:childTnLst>
                               <p:par>
-                                <p:cTn id="11" presetID="1" presetClass="entr" presetSubtype="0" fill="hold" grpId="0" nodeType="clickEffect">
-                                  <p:stCondLst>
-                                    <p:cond delay="0"/>
-                                  </p:stCondLst>
-                                  <p:childTnLst>
-                                    <p:set>
-                                      <p:cBhvr>
-                                        <p:cTn id="12" dur="1" fill="hold">
-                                          <p:stCondLst>
-                                            <p:cond delay="0"/>
-                                          </p:stCondLst>
-                                        </p:cTn>
-                                        <p:tgtEl>
-                                          <p:spTgt spid="7"/>
-                                        </p:tgtEl>
-                                        <p:attrNameLst>
-                                          <p:attrName>style.visibility</p:attrName>
-                                        </p:attrNameLst>
-                                      </p:cBhvr>
-                                      <p:to>
-                                        <p:strVal val="visible"/>
-                                      </p:to>
-                                    </p:set>
-                                  </p:childTnLst>
-                                </p:cTn>
-                              </p:par>
-                              <p:par>
-                                <p:cTn id="13" presetID="1" presetClass="entr" presetSubtype="0" fill="hold" grpId="0" nodeType="withEffect">
+                                <p:cTn id="13" presetID="1" presetClass="entr" presetSubtype="0" fill="hold" grpId="0" nodeType="clickEffect">
                                   <p:stCondLst>
                                     <p:cond delay="0"/>
                                   </p:stCondLst>
@@ -27439,6 +27792,60 @@
                                   </p:childTnLst>
                                 </p:cTn>
                               </p:par>
+                              <p:par>
+                                <p:cTn id="15" presetID="1" presetClass="entr" presetSubtype="0" fill="hold" grpId="0" nodeType="withEffect">
+                                  <p:stCondLst>
+                                    <p:cond delay="0"/>
+                                  </p:stCondLst>
+                                  <p:childTnLst>
+                                    <p:set>
+                                      <p:cBhvr>
+                                        <p:cTn id="16" dur="1" fill="hold">
+                                          <p:stCondLst>
+                                            <p:cond delay="0"/>
+                                          </p:stCondLst>
+                                        </p:cTn>
+                                        <p:tgtEl>
+                                          <p:spTgt spid="7"/>
+                                        </p:tgtEl>
+                                        <p:attrNameLst>
+                                          <p:attrName>style.visibility</p:attrName>
+                                        </p:attrNameLst>
+                                      </p:cBhvr>
+                                      <p:to>
+                                        <p:strVal val="visible"/>
+                                      </p:to>
+                                    </p:set>
+                                  </p:childTnLst>
+                                </p:cTn>
+                              </p:par>
+                              <p:par>
+                                <p:cTn id="17" presetID="1" presetClass="entr" presetSubtype="0" fill="hold" nodeType="withEffect">
+                                  <p:stCondLst>
+                                    <p:cond delay="0"/>
+                                  </p:stCondLst>
+                                  <p:childTnLst>
+                                    <p:set>
+                                      <p:cBhvr>
+                                        <p:cTn id="18" dur="1" fill="hold">
+                                          <p:stCondLst>
+                                            <p:cond delay="0"/>
+                                          </p:stCondLst>
+                                        </p:cTn>
+                                        <p:tgtEl>
+                                          <p:spTgt spid="4"/>
+                                        </p:tgtEl>
+                                        <p:attrNameLst>
+                                          <p:attrName>style.visibility</p:attrName>
+                                        </p:attrNameLst>
+                                      </p:cBhvr>
+                                      <p:to>
+                                        <p:strVal val="visible"/>
+                                      </p:to>
+                                    </p:set>
+                                  </p:childTnLst>
+                                </p:cTn>
+                              </p:par>
                             </p:childTnLst>
                           </p:cTn>
                         </p:par>
@@ -27446,26 +27853,53 @@
                     </p:cTn>
                   </p:par>
                   <p:par>
-                    <p:cTn id="15" fill="hold">
+                    <p:cTn id="19" fill="hold">
                       <p:stCondLst>
                         <p:cond delay="indefinite"/>
                       </p:stCondLst>
                       <p:childTnLst>
                         <p:par>
-                          <p:cTn id="16" fill="hold">
+                          <p:cTn id="20" fill="hold">
                             <p:stCondLst>
                               <p:cond delay="0"/>
                             </p:stCondLst>
                             <p:childTnLst>
                               <p:par>
-                                <p:cTn id="17" presetID="1" presetClass="entr" presetSubtype="0" fill="hold" grpId="0" nodeType="clickEffect">
+                                <p:cTn id="21" presetID="1" presetClass="entr" presetSubtype="0" fill="hold" grpId="0" nodeType="clickEffect">
                                   <p:stCondLst>
                                     <p:cond delay="0"/>
                                   </p:stCondLst>
                                   <p:childTnLst>
                                     <p:set>
                                       <p:cBhvr>
-                                        <p:cTn id="18" dur="1" fill="hold">
+                                        <p:cTn id="22" dur="1" fill="hold">
+                                          <p:stCondLst>
+                                            <p:cond delay="0"/>
+                                          </p:stCondLst>
+                                        </p:cTn>
+                                        <p:tgtEl>
+                                          <p:spTgt spid="8"/>
+                                        </p:tgtEl>
+                                        <p:attrNameLst>
+                                          <p:attrName>style.visibility</p:attrName>
+                                        </p:attrNameLst>
+                                      </p:cBhvr>
+                                      <p:to>
+                                        <p:strVal val="visible"/>
+                                      </p:to>
+                                    </p:set>
+                                  </p:childTnLst>
+                                </p:cTn>
+                              </p:par>
+                              <p:par>
+                                <p:cTn id="23" presetID="1" presetClass="entr" presetSubtype="0" fill="hold" grpId="0" nodeType="withEffect">
+                                  <p:stCondLst>
+                                    <p:cond delay="0"/>
+                                  </p:stCondLst>
+                                  <p:childTnLst>
+                                    <p:set>
+                                      <p:cBhvr>
+                                        <p:cTn id="24" dur="1" fill="hold">
                                           <p:stCondLst>
                                             <p:cond delay="0"/>
                                           </p:stCondLst>
@@ -27485,20 +27919,92 @@
                                 </p:cTn>
                               </p:par>
                               <p:par>
-                                <p:cTn id="19" presetID="1" presetClass="entr" presetSubtype="0" fill="hold" grpId="0" nodeType="withEffect">
+                                <p:cTn id="25" presetID="1" presetClass="entr" presetSubtype="0" fill="hold" nodeType="withEffect">
                                   <p:stCondLst>
                                     <p:cond delay="0"/>
                                   </p:stCondLst>
                                   <p:childTnLst>
                                     <p:set>
                                       <p:cBhvr>
-                                        <p:cTn id="20" dur="1" fill="hold">
+                                        <p:cTn id="26" dur="1" fill="hold">
                                           <p:stCondLst>
                                             <p:cond delay="0"/>
                                           </p:stCondLst>
                                         </p:cTn>
                                         <p:tgtEl>
-                                          <p:spTgt spid="8"/>
+                                          <p:spTgt spid="2"/>
+                                        </p:tgtEl>
+                                        <p:attrNameLst>
+                                          <p:attrName>style.visibility</p:attrName>
+                                        </p:attrNameLst>
+                                      </p:cBhvr>
+                                      <p:to>
+                                        <p:strVal val="visible"/>
+                                      </p:to>
+                                    </p:set>
+                                  </p:childTnLst>
+                                </p:cTn>
+                              </p:par>
+                            </p:childTnLst>
+                          </p:cTn>
+                        </p:par>
+                      </p:childTnLst>
+                    </p:cTn>
+                  </p:par>
+                  <p:par>
+                    <p:cTn id="27" fill="hold">
+                      <p:stCondLst>
+                        <p:cond delay="indefinite"/>
+                      </p:stCondLst>
+                      <p:childTnLst>
+                        <p:par>
+                          <p:cTn id="28" fill="hold">
+                            <p:stCondLst>
+                              <p:cond delay="0"/>
+                            </p:stCondLst>
+                            <p:childTnLst>
+                              <p:par>
+                                <p:cTn id="29" presetID="1" presetClass="entr" presetSubtype="0" fill="hold" grpId="0" nodeType="clickEffect">
+                                  <p:stCondLst>
+                                    <p:cond delay="0"/>
+                                  </p:stCondLst>
+                                  <p:childTnLst>
+                                    <p:set>
+                                      <p:cBhvr>
+                                        <p:cTn id="30" dur="1" fill="hold">
+                                          <p:stCondLst>
+                                            <p:cond delay="0"/>
+                                          </p:stCondLst>
+                                        </p:cTn>
+                                        <p:tgtEl>
+                                          <p:spTgt spid="43"/>
+                                        </p:tgtEl>
+                                        <p:attrNameLst>
+                                          <p:attrName>style.visibility</p:attrName>
+                                        </p:attrNameLst>
+                                      </p:cBhvr>
+                                      <p:to>
+                                        <p:strVal val="visible"/>
+                                      </p:to>
+                                    </p:set>
+                                  </p:childTnLst>
+                                </p:cTn>
+                              </p:par>
+                              <p:par>
+                                <p:cTn id="31" presetID="1" presetClass="entr" presetSubtype="0" fill="hold" grpId="0" nodeType="withEffect">
+                                  <p:stCondLst>
+                                    <p:cond delay="0"/>
+                                  </p:stCondLst>
+                                  <p:childTnLst>
+                                    <p:set>
+                                      <p:cBhvr>
+                                        <p:cTn id="32" dur="1" fill="hold">
+                                          <p:stCondLst>
+                                            <p:cond delay="0"/>
+                                          </p:stCondLst>
+                                        </p:cTn>
+                                        <p:tgtEl>
+                                          <p:spTgt spid="44"/>
                                         </p:tgtEl>
                                         <p:attrNameLst>
                                           <p:attrName>style.visibility</p:attrName>
@@ -27545,6 +28051,8 @@
       <p:bldP spid="7" grpId="0" animBg="1"/>
       <p:bldP spid="8" grpId="0" animBg="1"/>
       <p:bldP spid="9" grpId="0" animBg="1"/>
+      <p:bldP spid="43" grpId="0"/>
+      <p:bldP spid="44" grpId="0" animBg="1"/>
     </p:bldLst>
   </p:timing>
 </p:sld>
@@ -27575,60 +28083,6 @@
       </p:grpSpPr>
       <p:sp>
         <p:nvSpPr>
-          <p:cNvPr id="46" name="Rectangle : coins arrondis 45">
-            <a:extLst>
-              <a:ext uri="{FF2B5EF4-FFF2-40B4-BE49-F238E27FC236}">
-                <a16:creationId xmlns:a16="http://schemas.microsoft.com/office/drawing/2014/main" id="{E433E364-4228-6856-536E-34873F6A6DC3}"/>
-              </a:ext>
-            </a:extLst>
-          </p:cNvPr>
-          <p:cNvSpPr/>
-          <p:nvPr/>
-        </p:nvSpPr>
-        <p:spPr>
-          <a:xfrm>
-            <a:off x="4797443" y="1718594"/>
-            <a:ext cx="1235879" cy="584200"/>
-          </a:xfrm>
-          <a:prstGeom prst="roundRect">
-            <a:avLst/>
-          </a:prstGeom>
-          <a:solidFill>
-            <a:schemeClr val="bg1">
-              <a:lumMod val="95000"/>
-            </a:schemeClr>
-          </a:solidFill>
-          <a:ln>
-            <a:noFill/>
-          </a:ln>
-        </p:spPr>
-        <p:style>
-          <a:lnRef idx="2">
-            <a:schemeClr val="accent1">
-              <a:shade val="15000"/>
-            </a:schemeClr>
-          </a:lnRef>
-          <a:fillRef idx="1">
-            <a:schemeClr val="accent1"/>
-          </a:fillRef>
-          <a:effectRef idx="0">
-            <a:schemeClr val="accent1"/>
-          </a:effectRef>
-          <a:fontRef idx="minor">
-            <a:schemeClr val="lt1"/>
-          </a:fontRef>
-        </p:style>
-        <p:txBody>
-          <a:bodyPr rtlCol="0" anchor="ctr"/>
-          <a:lstStyle/>
-          <a:p>
-            <a:pPr algn="ctr"/>
-            <a:endParaRPr lang="fr-FR" dirty="0"/>
-          </a:p>
-        </p:txBody>
-      </p:sp>
-      <p:sp>
-        <p:nvSpPr>
           <p:cNvPr id="26" name="Forme libre : forme 25">
             <a:extLst>
               <a:ext uri="{FF2B5EF4-FFF2-40B4-BE49-F238E27FC236}">
@@ -27641,7 +28095,7 @@
         </p:nvSpPr>
         <p:spPr>
           <a:xfrm>
-            <a:off x="6417329" y="936409"/>
+            <a:off x="6374912" y="936409"/>
             <a:ext cx="2310321" cy="393656"/>
           </a:xfrm>
           <a:custGeom>
@@ -28063,7 +28517,7 @@
               <a:buNone/>
             </a:pPr>
             <a:r>
-              <a:rPr lang="fr-FR" sz="900" b="1" dirty="0"/>
+              <a:rPr lang="fr-FR" sz="900" b="1"/>
               <a:t>Préparation et </a:t>
             </a:r>
           </a:p>
@@ -28072,143 +28526,13 @@
               <a:buNone/>
             </a:pPr>
             <a:r>
-              <a:rPr lang="fr-FR" sz="900" b="1" dirty="0"/>
+              <a:rPr lang="fr-FR" sz="900" b="1"/>
               <a:t>nettoyage</a:t>
             </a:r>
+            <a:endParaRPr lang="fr-FR" sz="900" b="1" dirty="0"/>
           </a:p>
         </p:txBody>
       </p:sp>
-      <p:grpSp>
-        <p:nvGrpSpPr>
-          <p:cNvPr id="19" name="Groupe 18">
-            <a:extLst>
-              <a:ext uri="{FF2B5EF4-FFF2-40B4-BE49-F238E27FC236}">
-                <a16:creationId xmlns:a16="http://schemas.microsoft.com/office/drawing/2014/main" id="{D5364BFE-1394-DF84-7508-CE993349E3F7}"/>
-              </a:ext>
-            </a:extLst>
-          </p:cNvPr>
-          <p:cNvGrpSpPr/>
-          <p:nvPr/>
-        </p:nvGrpSpPr>
-        <p:grpSpPr>
-          <a:xfrm>
-            <a:off x="4266850" y="1014066"/>
-            <a:ext cx="517495" cy="238342"/>
-            <a:chOff x="5129933" y="1197972"/>
-            <a:chExt cx="679703" cy="414716"/>
-          </a:xfrm>
-        </p:grpSpPr>
-        <p:sp>
-          <p:nvSpPr>
-            <p:cNvPr id="20" name="Flèche : demi-tour 19">
-              <a:extLst>
-                <a:ext uri="{FF2B5EF4-FFF2-40B4-BE49-F238E27FC236}">
-                  <a16:creationId xmlns:a16="http://schemas.microsoft.com/office/drawing/2014/main" id="{6DDE20E4-CB2E-04FF-2DA9-1E1738D5C9E4}"/>
-                </a:ext>
-              </a:extLst>
-            </p:cNvPr>
-            <p:cNvSpPr/>
-            <p:nvPr/>
-          </p:nvSpPr>
-          <p:spPr>
-            <a:xfrm rot="5400000" flipH="1">
-              <a:off x="5434669" y="1202078"/>
-              <a:ext cx="379074" cy="370861"/>
-            </a:xfrm>
-            <a:prstGeom prst="uturnArrow">
-              <a:avLst>
-                <a:gd name="adj1" fmla="val 24379"/>
-                <a:gd name="adj2" fmla="val 25000"/>
-                <a:gd name="adj3" fmla="val 25000"/>
-                <a:gd name="adj4" fmla="val 43750"/>
-                <a:gd name="adj5" fmla="val 75000"/>
-              </a:avLst>
-            </a:prstGeom>
-            <a:ln w="12700"/>
-          </p:spPr>
-          <p:style>
-            <a:lnRef idx="2">
-              <a:schemeClr val="accent1"/>
-            </a:lnRef>
-            <a:fillRef idx="1">
-              <a:schemeClr val="lt1"/>
-            </a:fillRef>
-            <a:effectRef idx="0">
-              <a:schemeClr val="accent1"/>
-            </a:effectRef>
-            <a:fontRef idx="minor">
-              <a:schemeClr val="dk1"/>
-            </a:fontRef>
-          </p:style>
-          <p:txBody>
-            <a:bodyPr rtlCol="0" anchor="ctr"/>
-            <a:lstStyle/>
-            <a:p>
-              <a:pPr algn="ctr"/>
-              <a:endParaRPr lang="fr-FR" dirty="0">
-                <a:solidFill>
-                  <a:schemeClr val="tx1"/>
-                </a:solidFill>
-              </a:endParaRPr>
-            </a:p>
-          </p:txBody>
-        </p:sp>
-        <p:sp>
-          <p:nvSpPr>
-            <p:cNvPr id="21" name="Flèche : demi-tour 20">
-              <a:extLst>
-                <a:ext uri="{FF2B5EF4-FFF2-40B4-BE49-F238E27FC236}">
-                  <a16:creationId xmlns:a16="http://schemas.microsoft.com/office/drawing/2014/main" id="{85EC5690-6283-B244-7760-CCEF398604E4}"/>
-                </a:ext>
-              </a:extLst>
-            </p:cNvPr>
-            <p:cNvSpPr/>
-            <p:nvPr/>
-          </p:nvSpPr>
-          <p:spPr>
-            <a:xfrm rot="16200000" flipH="1">
-              <a:off x="5125827" y="1237720"/>
-              <a:ext cx="379074" cy="370861"/>
-            </a:xfrm>
-            <a:prstGeom prst="uturnArrow">
-              <a:avLst>
-                <a:gd name="adj1" fmla="val 24379"/>
-                <a:gd name="adj2" fmla="val 25000"/>
-                <a:gd name="adj3" fmla="val 25000"/>
-                <a:gd name="adj4" fmla="val 43750"/>
-                <a:gd name="adj5" fmla="val 75000"/>
-              </a:avLst>
-            </a:prstGeom>
-            <a:ln w="12700"/>
-          </p:spPr>
-          <p:style>
-            <a:lnRef idx="2">
-              <a:schemeClr val="accent1"/>
-            </a:lnRef>
-            <a:fillRef idx="1">
-              <a:schemeClr val="lt1"/>
-            </a:fillRef>
-            <a:effectRef idx="0">
-              <a:schemeClr val="accent1"/>
-            </a:effectRef>
-            <a:fontRef idx="minor">
-              <a:schemeClr val="dk1"/>
-            </a:fontRef>
-          </p:style>
-          <p:txBody>
-            <a:bodyPr rtlCol="0" anchor="ctr"/>
-            <a:lstStyle/>
-            <a:p>
-              <a:pPr algn="ctr"/>
-              <a:endParaRPr lang="fr-FR" dirty="0">
-                <a:solidFill>
-                  <a:schemeClr val="tx1"/>
-                </a:solidFill>
-              </a:endParaRPr>
-            </a:p>
-          </p:txBody>
-        </p:sp>
-      </p:grpSp>
       <p:sp>
         <p:nvSpPr>
           <p:cNvPr id="96" name="Google Shape;96;p5">
@@ -28293,241 +28617,6 @@
       </p:pic>
       <p:pic>
         <p:nvPicPr>
-          <p:cNvPr id="1026" name="Picture 2">
-            <a:extLst>
-              <a:ext uri="{FF2B5EF4-FFF2-40B4-BE49-F238E27FC236}">
-                <a16:creationId xmlns:a16="http://schemas.microsoft.com/office/drawing/2014/main" id="{923FE2F2-F305-A7CE-975B-2A2BA912E4B7}"/>
-              </a:ext>
-            </a:extLst>
-          </p:cNvPr>
-          <p:cNvPicPr>
-            <a:picLocks noChangeAspect="1" noChangeArrowheads="1"/>
-          </p:cNvPicPr>
-          <p:nvPr/>
-        </p:nvPicPr>
-        <p:blipFill rotWithShape="1">
-          <a:blip r:embed="rId4">
-            <a:extLst>
-              <a:ext uri="{28A0092B-C50C-407E-A947-70E740481C1C}">
-                <a14:useLocalDpi xmlns:a14="http://schemas.microsoft.com/office/drawing/2010/main" val="0"/>
-              </a:ext>
-            </a:extLst>
-          </a:blip>
-          <a:srcRect l="14585" t="12264" r="16331" b="16417"/>
-          <a:stretch>
-            <a:fillRect/>
-          </a:stretch>
-        </p:blipFill>
-        <p:spPr bwMode="auto">
-          <a:xfrm>
-            <a:off x="1765455" y="1652962"/>
-            <a:ext cx="381317" cy="393656"/>
-          </a:xfrm>
-          <a:prstGeom prst="rect">
-            <a:avLst/>
-          </a:prstGeom>
-          <a:noFill/>
-          <a:extLst>
-            <a:ext uri="{909E8E84-426E-40DD-AFC4-6F175D3DCCD1}">
-              <a14:hiddenFill xmlns:a14="http://schemas.microsoft.com/office/drawing/2010/main">
-                <a:solidFill>
-                  <a:srgbClr val="FFFFFF"/>
-                </a:solidFill>
-              </a14:hiddenFill>
-            </a:ext>
-          </a:extLst>
-        </p:spPr>
-      </p:pic>
-      <p:pic>
-        <p:nvPicPr>
-          <p:cNvPr id="1028" name="Picture 4">
-            <a:extLst>
-              <a:ext uri="{FF2B5EF4-FFF2-40B4-BE49-F238E27FC236}">
-                <a16:creationId xmlns:a16="http://schemas.microsoft.com/office/drawing/2014/main" id="{D0C03EA7-EAD6-1A33-21AE-920B9121582F}"/>
-              </a:ext>
-            </a:extLst>
-          </p:cNvPr>
-          <p:cNvPicPr>
-            <a:picLocks noChangeAspect="1" noChangeArrowheads="1"/>
-          </p:cNvPicPr>
-          <p:nvPr/>
-        </p:nvPicPr>
-        <p:blipFill rotWithShape="1">
-          <a:blip r:embed="rId5">
-            <a:extLst>
-              <a:ext uri="{28A0092B-C50C-407E-A947-70E740481C1C}">
-                <a14:useLocalDpi xmlns:a14="http://schemas.microsoft.com/office/drawing/2010/main" val="0"/>
-              </a:ext>
-            </a:extLst>
-          </a:blip>
-          <a:srcRect l="11432" t="21688" r="13291" b="23045"/>
-          <a:stretch>
-            <a:fillRect/>
-          </a:stretch>
-        </p:blipFill>
-        <p:spPr bwMode="auto">
-          <a:xfrm>
-            <a:off x="583256" y="1682497"/>
-            <a:ext cx="792868" cy="332636"/>
-          </a:xfrm>
-          <a:prstGeom prst="rect">
-            <a:avLst/>
-          </a:prstGeom>
-          <a:noFill/>
-          <a:extLst>
-            <a:ext uri="{909E8E84-426E-40DD-AFC4-6F175D3DCCD1}">
-              <a14:hiddenFill xmlns:a14="http://schemas.microsoft.com/office/drawing/2010/main">
-                <a:solidFill>
-                  <a:srgbClr val="FFFFFF"/>
-                </a:solidFill>
-              </a14:hiddenFill>
-            </a:ext>
-          </a:extLst>
-        </p:spPr>
-      </p:pic>
-      <p:pic>
-        <p:nvPicPr>
-          <p:cNvPr id="1030" name="Picture 6">
-            <a:extLst>
-              <a:ext uri="{FF2B5EF4-FFF2-40B4-BE49-F238E27FC236}">
-                <a16:creationId xmlns:a16="http://schemas.microsoft.com/office/drawing/2014/main" id="{2941D76B-6840-C572-907F-F3680B66EBF7}"/>
-              </a:ext>
-            </a:extLst>
-          </p:cNvPr>
-          <p:cNvPicPr>
-            <a:picLocks noChangeAspect="1" noChangeArrowheads="1"/>
-          </p:cNvPicPr>
-          <p:nvPr/>
-        </p:nvPicPr>
-        <p:blipFill rotWithShape="1">
-          <a:blip r:embed="rId6">
-            <a:extLst>
-              <a:ext uri="{28A0092B-C50C-407E-A947-70E740481C1C}">
-                <a14:useLocalDpi xmlns:a14="http://schemas.microsoft.com/office/drawing/2010/main" val="0"/>
-              </a:ext>
-            </a:extLst>
-          </a:blip>
-          <a:srcRect l="30624" r="31046" b="34033"/>
-          <a:stretch>
-            <a:fillRect/>
-          </a:stretch>
-        </p:blipFill>
-        <p:spPr bwMode="auto">
-          <a:xfrm>
-            <a:off x="756608" y="2258501"/>
-            <a:ext cx="386389" cy="485958"/>
-          </a:xfrm>
-          <a:prstGeom prst="rect">
-            <a:avLst/>
-          </a:prstGeom>
-          <a:noFill/>
-          <a:extLst>
-            <a:ext uri="{909E8E84-426E-40DD-AFC4-6F175D3DCCD1}">
-              <a14:hiddenFill xmlns:a14="http://schemas.microsoft.com/office/drawing/2010/main">
-                <a:solidFill>
-                  <a:srgbClr val="FFFFFF"/>
-                </a:solidFill>
-              </a14:hiddenFill>
-            </a:ext>
-          </a:extLst>
-        </p:spPr>
-      </p:pic>
-      <p:pic>
-        <p:nvPicPr>
-          <p:cNvPr id="1032" name="Picture 8">
-            <a:extLst>
-              <a:ext uri="{FF2B5EF4-FFF2-40B4-BE49-F238E27FC236}">
-                <a16:creationId xmlns:a16="http://schemas.microsoft.com/office/drawing/2014/main" id="{0AA62D0C-7533-F64F-5205-AC2C6EB164FE}"/>
-              </a:ext>
-            </a:extLst>
-          </p:cNvPr>
-          <p:cNvPicPr>
-            <a:picLocks noChangeAspect="1" noChangeArrowheads="1"/>
-          </p:cNvPicPr>
-          <p:nvPr/>
-        </p:nvPicPr>
-        <p:blipFill rotWithShape="1">
-          <a:blip r:embed="rId7">
-            <a:extLst>
-              <a:ext uri="{28A0092B-C50C-407E-A947-70E740481C1C}">
-                <a14:useLocalDpi xmlns:a14="http://schemas.microsoft.com/office/drawing/2010/main" val="0"/>
-              </a:ext>
-            </a:extLst>
-          </a:blip>
-          <a:srcRect l="18372" t="16968" r="15985" b="15970"/>
-          <a:stretch>
-            <a:fillRect/>
-          </a:stretch>
-        </p:blipFill>
-        <p:spPr bwMode="auto">
-          <a:xfrm>
-            <a:off x="2696327" y="1707018"/>
-            <a:ext cx="277594" cy="283594"/>
-          </a:xfrm>
-          <a:prstGeom prst="rect">
-            <a:avLst/>
-          </a:prstGeom>
-          <a:noFill/>
-          <a:extLst>
-            <a:ext uri="{909E8E84-426E-40DD-AFC4-6F175D3DCCD1}">
-              <a14:hiddenFill xmlns:a14="http://schemas.microsoft.com/office/drawing/2010/main">
-                <a:solidFill>
-                  <a:srgbClr val="FFFFFF"/>
-                </a:solidFill>
-              </a14:hiddenFill>
-            </a:ext>
-          </a:extLst>
-        </p:spPr>
-      </p:pic>
-      <p:pic>
-        <p:nvPicPr>
-          <p:cNvPr id="1034" name="Picture 10">
-            <a:extLst>
-              <a:ext uri="{FF2B5EF4-FFF2-40B4-BE49-F238E27FC236}">
-                <a16:creationId xmlns:a16="http://schemas.microsoft.com/office/drawing/2014/main" id="{748B16F9-6C53-91C1-4712-424BF6CE8989}"/>
-              </a:ext>
-            </a:extLst>
-          </p:cNvPr>
-          <p:cNvPicPr>
-            <a:picLocks noChangeAspect="1" noChangeArrowheads="1"/>
-          </p:cNvPicPr>
-          <p:nvPr/>
-        </p:nvPicPr>
-        <p:blipFill>
-          <a:blip r:embed="rId8">
-            <a:extLst>
-              <a:ext uri="{28A0092B-C50C-407E-A947-70E740481C1C}">
-                <a14:useLocalDpi xmlns:a14="http://schemas.microsoft.com/office/drawing/2010/main" val="0"/>
-              </a:ext>
-            </a:extLst>
-          </a:blip>
-          <a:srcRect/>
-          <a:stretch>
-            <a:fillRect/>
-          </a:stretch>
-        </p:blipFill>
-        <p:spPr bwMode="auto">
-          <a:xfrm>
-            <a:off x="4595812" y="1495363"/>
-            <a:ext cx="506762" cy="506762"/>
-          </a:xfrm>
-          <a:prstGeom prst="rect">
-            <a:avLst/>
-          </a:prstGeom>
-          <a:noFill/>
-          <a:extLst>
-            <a:ext uri="{909E8E84-426E-40DD-AFC4-6F175D3DCCD1}">
-              <a14:hiddenFill xmlns:a14="http://schemas.microsoft.com/office/drawing/2010/main">
-                <a:solidFill>
-                  <a:srgbClr val="FFFFFF"/>
-                </a:solidFill>
-              </a14:hiddenFill>
-            </a:ext>
-          </a:extLst>
-        </p:spPr>
-      </p:pic>
-      <p:pic>
-        <p:nvPicPr>
           <p:cNvPr id="1036" name="Picture 12">
             <a:extLst>
               <a:ext uri="{FF2B5EF4-FFF2-40B4-BE49-F238E27FC236}">
@@ -28541,7 +28630,7 @@
           <p:nvPr/>
         </p:nvPicPr>
         <p:blipFill>
-          <a:blip r:embed="rId9">
+          <a:blip r:embed="rId4">
             <a:extLst>
               <a:ext uri="{28A0092B-C50C-407E-A947-70E740481C1C}">
                 <a14:useLocalDpi xmlns:a14="http://schemas.microsoft.com/office/drawing/2010/main" val="0"/>
@@ -28588,7 +28677,7 @@
           <p:nvPr/>
         </p:nvPicPr>
         <p:blipFill rotWithShape="1">
-          <a:blip r:embed="rId10">
+          <a:blip r:embed="rId5">
             <a:extLst>
               <a:ext uri="{28A0092B-C50C-407E-A947-70E740481C1C}">
                 <a14:useLocalDpi xmlns:a14="http://schemas.microsoft.com/office/drawing/2010/main" val="0"/>
@@ -28762,577 +28851,6 @@
               <a:t>Collecte des données</a:t>
             </a:r>
             <a:endParaRPr lang="fr-FR" sz="900" kern="1200" dirty="0"/>
-          </a:p>
-        </p:txBody>
-      </p:sp>
-      <p:grpSp>
-        <p:nvGrpSpPr>
-          <p:cNvPr id="14" name="Groupe 13">
-            <a:extLst>
-              <a:ext uri="{FF2B5EF4-FFF2-40B4-BE49-F238E27FC236}">
-                <a16:creationId xmlns:a16="http://schemas.microsoft.com/office/drawing/2014/main" id="{0D06F820-0C84-13EF-42FA-C8495BEA0636}"/>
-              </a:ext>
-            </a:extLst>
-          </p:cNvPr>
-          <p:cNvGrpSpPr/>
-          <p:nvPr/>
-        </p:nvGrpSpPr>
-        <p:grpSpPr>
-          <a:xfrm>
-            <a:off x="2217967" y="1014066"/>
-            <a:ext cx="517495" cy="238342"/>
-            <a:chOff x="5129933" y="1197972"/>
-            <a:chExt cx="679703" cy="414716"/>
-          </a:xfrm>
-        </p:grpSpPr>
-        <p:sp>
-          <p:nvSpPr>
-            <p:cNvPr id="15" name="Flèche : demi-tour 14">
-              <a:extLst>
-                <a:ext uri="{FF2B5EF4-FFF2-40B4-BE49-F238E27FC236}">
-                  <a16:creationId xmlns:a16="http://schemas.microsoft.com/office/drawing/2014/main" id="{ACAD37B6-EF93-C275-C6AA-A8A46E685AC9}"/>
-                </a:ext>
-              </a:extLst>
-            </p:cNvPr>
-            <p:cNvSpPr/>
-            <p:nvPr/>
-          </p:nvSpPr>
-          <p:spPr>
-            <a:xfrm rot="5400000" flipH="1">
-              <a:off x="5434669" y="1202078"/>
-              <a:ext cx="379074" cy="370861"/>
-            </a:xfrm>
-            <a:prstGeom prst="uturnArrow">
-              <a:avLst>
-                <a:gd name="adj1" fmla="val 24379"/>
-                <a:gd name="adj2" fmla="val 25000"/>
-                <a:gd name="adj3" fmla="val 25000"/>
-                <a:gd name="adj4" fmla="val 43750"/>
-                <a:gd name="adj5" fmla="val 75000"/>
-              </a:avLst>
-            </a:prstGeom>
-            <a:ln w="12700"/>
-          </p:spPr>
-          <p:style>
-            <a:lnRef idx="2">
-              <a:schemeClr val="accent1"/>
-            </a:lnRef>
-            <a:fillRef idx="1">
-              <a:schemeClr val="lt1"/>
-            </a:fillRef>
-            <a:effectRef idx="0">
-              <a:schemeClr val="accent1"/>
-            </a:effectRef>
-            <a:fontRef idx="minor">
-              <a:schemeClr val="dk1"/>
-            </a:fontRef>
-          </p:style>
-          <p:txBody>
-            <a:bodyPr rtlCol="0" anchor="ctr"/>
-            <a:lstStyle/>
-            <a:p>
-              <a:pPr algn="ctr"/>
-              <a:endParaRPr lang="fr-FR" dirty="0">
-                <a:solidFill>
-                  <a:schemeClr val="tx1"/>
-                </a:solidFill>
-              </a:endParaRPr>
-            </a:p>
-          </p:txBody>
-        </p:sp>
-        <p:sp>
-          <p:nvSpPr>
-            <p:cNvPr id="16" name="Flèche : demi-tour 15">
-              <a:extLst>
-                <a:ext uri="{FF2B5EF4-FFF2-40B4-BE49-F238E27FC236}">
-                  <a16:creationId xmlns:a16="http://schemas.microsoft.com/office/drawing/2014/main" id="{8ECB2D9A-ED98-FE7D-DED3-4DF3A449AE8B}"/>
-                </a:ext>
-              </a:extLst>
-            </p:cNvPr>
-            <p:cNvSpPr/>
-            <p:nvPr/>
-          </p:nvSpPr>
-          <p:spPr>
-            <a:xfrm rot="16200000" flipH="1">
-              <a:off x="5125827" y="1237720"/>
-              <a:ext cx="379074" cy="370861"/>
-            </a:xfrm>
-            <a:prstGeom prst="uturnArrow">
-              <a:avLst>
-                <a:gd name="adj1" fmla="val 24379"/>
-                <a:gd name="adj2" fmla="val 25000"/>
-                <a:gd name="adj3" fmla="val 25000"/>
-                <a:gd name="adj4" fmla="val 43750"/>
-                <a:gd name="adj5" fmla="val 75000"/>
-              </a:avLst>
-            </a:prstGeom>
-            <a:ln w="12700"/>
-          </p:spPr>
-          <p:style>
-            <a:lnRef idx="2">
-              <a:schemeClr val="accent1"/>
-            </a:lnRef>
-            <a:fillRef idx="1">
-              <a:schemeClr val="lt1"/>
-            </a:fillRef>
-            <a:effectRef idx="0">
-              <a:schemeClr val="accent1"/>
-            </a:effectRef>
-            <a:fontRef idx="minor">
-              <a:schemeClr val="dk1"/>
-            </a:fontRef>
-          </p:style>
-          <p:txBody>
-            <a:bodyPr rtlCol="0" anchor="ctr"/>
-            <a:lstStyle/>
-            <a:p>
-              <a:pPr algn="ctr"/>
-              <a:endParaRPr lang="fr-FR" dirty="0">
-                <a:solidFill>
-                  <a:schemeClr val="tx1"/>
-                </a:solidFill>
-              </a:endParaRPr>
-            </a:p>
-          </p:txBody>
-        </p:sp>
-      </p:grpSp>
-      <p:grpSp>
-        <p:nvGrpSpPr>
-          <p:cNvPr id="23" name="Groupe 22">
-            <a:extLst>
-              <a:ext uri="{FF2B5EF4-FFF2-40B4-BE49-F238E27FC236}">
-                <a16:creationId xmlns:a16="http://schemas.microsoft.com/office/drawing/2014/main" id="{D68234D9-A2C6-161D-C55C-E509AF1EEB5C}"/>
-              </a:ext>
-            </a:extLst>
-          </p:cNvPr>
-          <p:cNvGrpSpPr/>
-          <p:nvPr/>
-        </p:nvGrpSpPr>
-        <p:grpSpPr>
-          <a:xfrm>
-            <a:off x="6307808" y="1014066"/>
-            <a:ext cx="517495" cy="238342"/>
-            <a:chOff x="5129933" y="1197972"/>
-            <a:chExt cx="679703" cy="414716"/>
-          </a:xfrm>
-        </p:grpSpPr>
-        <p:sp>
-          <p:nvSpPr>
-            <p:cNvPr id="24" name="Flèche : demi-tour 23">
-              <a:extLst>
-                <a:ext uri="{FF2B5EF4-FFF2-40B4-BE49-F238E27FC236}">
-                  <a16:creationId xmlns:a16="http://schemas.microsoft.com/office/drawing/2014/main" id="{7E04026A-4B4B-8456-8D1B-0738F4E374CD}"/>
-                </a:ext>
-              </a:extLst>
-            </p:cNvPr>
-            <p:cNvSpPr/>
-            <p:nvPr/>
-          </p:nvSpPr>
-          <p:spPr>
-            <a:xfrm rot="5400000" flipH="1">
-              <a:off x="5434669" y="1202078"/>
-              <a:ext cx="379074" cy="370861"/>
-            </a:xfrm>
-            <a:prstGeom prst="uturnArrow">
-              <a:avLst>
-                <a:gd name="adj1" fmla="val 24379"/>
-                <a:gd name="adj2" fmla="val 25000"/>
-                <a:gd name="adj3" fmla="val 25000"/>
-                <a:gd name="adj4" fmla="val 43750"/>
-                <a:gd name="adj5" fmla="val 75000"/>
-              </a:avLst>
-            </a:prstGeom>
-            <a:ln w="12700"/>
-          </p:spPr>
-          <p:style>
-            <a:lnRef idx="2">
-              <a:schemeClr val="accent1"/>
-            </a:lnRef>
-            <a:fillRef idx="1">
-              <a:schemeClr val="lt1"/>
-            </a:fillRef>
-            <a:effectRef idx="0">
-              <a:schemeClr val="accent1"/>
-            </a:effectRef>
-            <a:fontRef idx="minor">
-              <a:schemeClr val="dk1"/>
-            </a:fontRef>
-          </p:style>
-          <p:txBody>
-            <a:bodyPr rtlCol="0" anchor="ctr"/>
-            <a:lstStyle/>
-            <a:p>
-              <a:pPr algn="ctr"/>
-              <a:endParaRPr lang="fr-FR" dirty="0">
-                <a:solidFill>
-                  <a:schemeClr val="tx1"/>
-                </a:solidFill>
-              </a:endParaRPr>
-            </a:p>
-          </p:txBody>
-        </p:sp>
-        <p:sp>
-          <p:nvSpPr>
-            <p:cNvPr id="25" name="Flèche : demi-tour 24">
-              <a:extLst>
-                <a:ext uri="{FF2B5EF4-FFF2-40B4-BE49-F238E27FC236}">
-                  <a16:creationId xmlns:a16="http://schemas.microsoft.com/office/drawing/2014/main" id="{D3C0BCCC-11D1-700F-BAD0-6BB53604F9B7}"/>
-                </a:ext>
-              </a:extLst>
-            </p:cNvPr>
-            <p:cNvSpPr/>
-            <p:nvPr/>
-          </p:nvSpPr>
-          <p:spPr>
-            <a:xfrm rot="16200000" flipH="1">
-              <a:off x="5125827" y="1237720"/>
-              <a:ext cx="379074" cy="370861"/>
-            </a:xfrm>
-            <a:prstGeom prst="uturnArrow">
-              <a:avLst>
-                <a:gd name="adj1" fmla="val 24379"/>
-                <a:gd name="adj2" fmla="val 25000"/>
-                <a:gd name="adj3" fmla="val 25000"/>
-                <a:gd name="adj4" fmla="val 43750"/>
-                <a:gd name="adj5" fmla="val 75000"/>
-              </a:avLst>
-            </a:prstGeom>
-            <a:ln w="12700"/>
-          </p:spPr>
-          <p:style>
-            <a:lnRef idx="2">
-              <a:schemeClr val="accent1"/>
-            </a:lnRef>
-            <a:fillRef idx="1">
-              <a:schemeClr val="lt1"/>
-            </a:fillRef>
-            <a:effectRef idx="0">
-              <a:schemeClr val="accent1"/>
-            </a:effectRef>
-            <a:fontRef idx="minor">
-              <a:schemeClr val="dk1"/>
-            </a:fontRef>
-          </p:style>
-          <p:txBody>
-            <a:bodyPr rtlCol="0" anchor="ctr"/>
-            <a:lstStyle/>
-            <a:p>
-              <a:pPr algn="ctr"/>
-              <a:endParaRPr lang="fr-FR" dirty="0">
-                <a:solidFill>
-                  <a:schemeClr val="tx1"/>
-                </a:solidFill>
-              </a:endParaRPr>
-            </a:p>
-          </p:txBody>
-        </p:sp>
-      </p:grpSp>
-      <p:cxnSp>
-        <p:nvCxnSpPr>
-          <p:cNvPr id="28" name="Connecteur droit 27">
-            <a:extLst>
-              <a:ext uri="{FF2B5EF4-FFF2-40B4-BE49-F238E27FC236}">
-                <a16:creationId xmlns:a16="http://schemas.microsoft.com/office/drawing/2014/main" id="{66A68388-D1A7-6AC6-5F1F-65E1A6494D4A}"/>
-              </a:ext>
-            </a:extLst>
-          </p:cNvPr>
-          <p:cNvCxnSpPr/>
-          <p:nvPr/>
-        </p:nvCxnSpPr>
-        <p:spPr>
-          <a:xfrm>
-            <a:off x="2293137" y="1458686"/>
-            <a:ext cx="0" cy="3272971"/>
-          </a:xfrm>
-          <a:prstGeom prst="line">
-            <a:avLst/>
-          </a:prstGeom>
-          <a:ln w="19050">
-            <a:solidFill>
-              <a:schemeClr val="bg1">
-                <a:lumMod val="75000"/>
-              </a:schemeClr>
-            </a:solidFill>
-            <a:prstDash val="dash"/>
-          </a:ln>
-        </p:spPr>
-        <p:style>
-          <a:lnRef idx="1">
-            <a:schemeClr val="dk1"/>
-          </a:lnRef>
-          <a:fillRef idx="0">
-            <a:schemeClr val="dk1"/>
-          </a:fillRef>
-          <a:effectRef idx="0">
-            <a:schemeClr val="dk1"/>
-          </a:effectRef>
-          <a:fontRef idx="minor">
-            <a:schemeClr val="tx1"/>
-          </a:fontRef>
-        </p:style>
-      </p:cxnSp>
-      <p:cxnSp>
-        <p:nvCxnSpPr>
-          <p:cNvPr id="29" name="Connecteur droit 28">
-            <a:extLst>
-              <a:ext uri="{FF2B5EF4-FFF2-40B4-BE49-F238E27FC236}">
-                <a16:creationId xmlns:a16="http://schemas.microsoft.com/office/drawing/2014/main" id="{2F5C326A-12BF-B849-9176-2CB67D7A7ED9}"/>
-              </a:ext>
-            </a:extLst>
-          </p:cNvPr>
-          <p:cNvCxnSpPr/>
-          <p:nvPr/>
-        </p:nvCxnSpPr>
-        <p:spPr>
-          <a:xfrm>
-            <a:off x="4378905" y="1458686"/>
-            <a:ext cx="0" cy="3272971"/>
-          </a:xfrm>
-          <a:prstGeom prst="line">
-            <a:avLst/>
-          </a:prstGeom>
-          <a:ln w="19050">
-            <a:solidFill>
-              <a:schemeClr val="bg1">
-                <a:lumMod val="75000"/>
-              </a:schemeClr>
-            </a:solidFill>
-            <a:prstDash val="dash"/>
-          </a:ln>
-        </p:spPr>
-        <p:style>
-          <a:lnRef idx="1">
-            <a:schemeClr val="dk1"/>
-          </a:lnRef>
-          <a:fillRef idx="0">
-            <a:schemeClr val="dk1"/>
-          </a:fillRef>
-          <a:effectRef idx="0">
-            <a:schemeClr val="dk1"/>
-          </a:effectRef>
-          <a:fontRef idx="minor">
-            <a:schemeClr val="tx1"/>
-          </a:fontRef>
-        </p:style>
-      </p:cxnSp>
-      <p:cxnSp>
-        <p:nvCxnSpPr>
-          <p:cNvPr id="30" name="Connecteur droit 29">
-            <a:extLst>
-              <a:ext uri="{FF2B5EF4-FFF2-40B4-BE49-F238E27FC236}">
-                <a16:creationId xmlns:a16="http://schemas.microsoft.com/office/drawing/2014/main" id="{DD9C7B50-C6F5-7260-C61A-2CAE5E4C0BF7}"/>
-              </a:ext>
-            </a:extLst>
-          </p:cNvPr>
-          <p:cNvCxnSpPr/>
-          <p:nvPr/>
-        </p:nvCxnSpPr>
-        <p:spPr>
-          <a:xfrm>
-            <a:off x="6450928" y="1458686"/>
-            <a:ext cx="0" cy="3272971"/>
-          </a:xfrm>
-          <a:prstGeom prst="line">
-            <a:avLst/>
-          </a:prstGeom>
-          <a:ln w="19050">
-            <a:solidFill>
-              <a:schemeClr val="bg1">
-                <a:lumMod val="75000"/>
-              </a:schemeClr>
-            </a:solidFill>
-            <a:prstDash val="dash"/>
-          </a:ln>
-        </p:spPr>
-        <p:style>
-          <a:lnRef idx="1">
-            <a:schemeClr val="dk1"/>
-          </a:lnRef>
-          <a:fillRef idx="0">
-            <a:schemeClr val="dk1"/>
-          </a:fillRef>
-          <a:effectRef idx="0">
-            <a:schemeClr val="dk1"/>
-          </a:effectRef>
-          <a:fontRef idx="minor">
-            <a:schemeClr val="tx1"/>
-          </a:fontRef>
-        </p:style>
-      </p:cxnSp>
-      <p:pic>
-        <p:nvPicPr>
-          <p:cNvPr id="2050" name="Picture 2">
-            <a:extLst>
-              <a:ext uri="{FF2B5EF4-FFF2-40B4-BE49-F238E27FC236}">
-                <a16:creationId xmlns:a16="http://schemas.microsoft.com/office/drawing/2014/main" id="{66BE5478-2C49-E651-22DF-909C00CA75C0}"/>
-              </a:ext>
-            </a:extLst>
-          </p:cNvPr>
-          <p:cNvPicPr>
-            <a:picLocks noChangeAspect="1" noChangeArrowheads="1"/>
-          </p:cNvPicPr>
-          <p:nvPr/>
-        </p:nvPicPr>
-        <p:blipFill rotWithShape="1">
-          <a:blip r:embed="rId11">
-            <a:extLst>
-              <a:ext uri="{28A0092B-C50C-407E-A947-70E740481C1C}">
-                <a14:useLocalDpi xmlns:a14="http://schemas.microsoft.com/office/drawing/2010/main" val="0"/>
-              </a:ext>
-            </a:extLst>
-          </a:blip>
-          <a:srcRect l="15800" t="16870" r="16971" b="17050"/>
-          <a:stretch>
-            <a:fillRect/>
-          </a:stretch>
-        </p:blipFill>
-        <p:spPr bwMode="auto">
-          <a:xfrm>
-            <a:off x="3369783" y="2328613"/>
-            <a:ext cx="350993" cy="344994"/>
-          </a:xfrm>
-          <a:prstGeom prst="rect">
-            <a:avLst/>
-          </a:prstGeom>
-          <a:noFill/>
-          <a:extLst>
-            <a:ext uri="{909E8E84-426E-40DD-AFC4-6F175D3DCCD1}">
-              <a14:hiddenFill xmlns:a14="http://schemas.microsoft.com/office/drawing/2010/main">
-                <a:solidFill>
-                  <a:srgbClr val="FFFFFF"/>
-                </a:solidFill>
-              </a14:hiddenFill>
-            </a:ext>
-          </a:extLst>
-        </p:spPr>
-      </p:pic>
-      <p:pic>
-        <p:nvPicPr>
-          <p:cNvPr id="2052" name="Picture 4">
-            <a:extLst>
-              <a:ext uri="{FF2B5EF4-FFF2-40B4-BE49-F238E27FC236}">
-                <a16:creationId xmlns:a16="http://schemas.microsoft.com/office/drawing/2014/main" id="{FCCA093A-E48A-7B59-31BE-E1F8F80AD69D}"/>
-              </a:ext>
-            </a:extLst>
-          </p:cNvPr>
-          <p:cNvPicPr>
-            <a:picLocks noChangeAspect="1" noChangeArrowheads="1"/>
-          </p:cNvPicPr>
-          <p:nvPr/>
-        </p:nvPicPr>
-        <p:blipFill>
-          <a:blip r:embed="rId12">
-            <a:extLst>
-              <a:ext uri="{28A0092B-C50C-407E-A947-70E740481C1C}">
-                <a14:useLocalDpi xmlns:a14="http://schemas.microsoft.com/office/drawing/2010/main" val="0"/>
-              </a:ext>
-            </a:extLst>
-          </a:blip>
-          <a:srcRect/>
-          <a:stretch>
-            <a:fillRect/>
-          </a:stretch>
-        </p:blipFill>
-        <p:spPr bwMode="auto">
-          <a:xfrm>
-            <a:off x="7151687" y="1351552"/>
-            <a:ext cx="872238" cy="688609"/>
-          </a:xfrm>
-          <a:prstGeom prst="rect">
-            <a:avLst/>
-          </a:prstGeom>
-          <a:noFill/>
-          <a:extLst>
-            <a:ext uri="{909E8E84-426E-40DD-AFC4-6F175D3DCCD1}">
-              <a14:hiddenFill xmlns:a14="http://schemas.microsoft.com/office/drawing/2010/main">
-                <a:solidFill>
-                  <a:srgbClr val="FFFFFF"/>
-                </a:solidFill>
-              </a14:hiddenFill>
-            </a:ext>
-          </a:extLst>
-        </p:spPr>
-      </p:pic>
-      <p:pic>
-        <p:nvPicPr>
-          <p:cNvPr id="43" name="Picture 2">
-            <a:extLst>
-              <a:ext uri="{FF2B5EF4-FFF2-40B4-BE49-F238E27FC236}">
-                <a16:creationId xmlns:a16="http://schemas.microsoft.com/office/drawing/2014/main" id="{A31CCBD7-31A9-6123-B61B-FB210F650877}"/>
-              </a:ext>
-            </a:extLst>
-          </p:cNvPr>
-          <p:cNvPicPr>
-            <a:picLocks noChangeAspect="1" noChangeArrowheads="1"/>
-          </p:cNvPicPr>
-          <p:nvPr/>
-        </p:nvPicPr>
-        <p:blipFill rotWithShape="1">
-          <a:blip r:embed="rId4">
-            <a:extLst>
-              <a:ext uri="{28A0092B-C50C-407E-A947-70E740481C1C}">
-                <a14:useLocalDpi xmlns:a14="http://schemas.microsoft.com/office/drawing/2010/main" val="0"/>
-              </a:ext>
-            </a:extLst>
-          </a:blip>
-          <a:srcRect l="15783" t="15290" r="14205" b="17134"/>
-          <a:stretch>
-            <a:fillRect/>
-          </a:stretch>
-        </p:blipFill>
-        <p:spPr bwMode="auto">
-          <a:xfrm>
-            <a:off x="6540706" y="3950826"/>
-            <a:ext cx="565643" cy="545954"/>
-          </a:xfrm>
-          <a:prstGeom prst="rect">
-            <a:avLst/>
-          </a:prstGeom>
-          <a:noFill/>
-          <a:extLst>
-            <a:ext uri="{909E8E84-426E-40DD-AFC4-6F175D3DCCD1}">
-              <a14:hiddenFill xmlns:a14="http://schemas.microsoft.com/office/drawing/2010/main">
-                <a:solidFill>
-                  <a:srgbClr val="FFFFFF"/>
-                </a:solidFill>
-              </a14:hiddenFill>
-            </a:ext>
-          </a:extLst>
-        </p:spPr>
-      </p:pic>
-      <p:sp>
-        <p:nvSpPr>
-          <p:cNvPr id="44" name="ZoneTexte 43">
-            <a:extLst>
-              <a:ext uri="{FF2B5EF4-FFF2-40B4-BE49-F238E27FC236}">
-                <a16:creationId xmlns:a16="http://schemas.microsoft.com/office/drawing/2014/main" id="{682088E1-064C-5214-7A97-A059E4869B55}"/>
-              </a:ext>
-            </a:extLst>
-          </p:cNvPr>
-          <p:cNvSpPr txBox="1"/>
-          <p:nvPr/>
-        </p:nvSpPr>
-        <p:spPr>
-          <a:xfrm>
-            <a:off x="4900942" y="1841943"/>
-            <a:ext cx="1079654" cy="338554"/>
-          </a:xfrm>
-          <a:prstGeom prst="rect">
-            <a:avLst/>
-          </a:prstGeom>
-          <a:noFill/>
-        </p:spPr>
-        <p:txBody>
-          <a:bodyPr wrap="square" rtlCol="0">
-            <a:spAutoFit/>
-          </a:bodyPr>
-          <a:lstStyle/>
-          <a:p>
-            <a:pPr algn="ctr"/>
-            <a:r>
-              <a:rPr lang="fr-FR" sz="800" b="1" dirty="0"/>
-              <a:t>Entraînement du modèle</a:t>
-            </a:r>
           </a:p>
         </p:txBody>
       </p:sp>
@@ -29535,7 +29053,7 @@
           <p:nvPr/>
         </p:nvPicPr>
         <p:blipFill>
-          <a:blip r:embed="rId13">
+          <a:blip r:embed="rId6">
             <a:extLst>
               <a:ext uri="{28A0092B-C50C-407E-A947-70E740481C1C}">
                 <a14:useLocalDpi xmlns:a14="http://schemas.microsoft.com/office/drawing/2010/main" val="0"/>
@@ -29582,7 +29100,7 @@
           <p:nvPr/>
         </p:nvPicPr>
         <p:blipFill>
-          <a:blip r:embed="rId14"/>
+          <a:blip r:embed="rId7"/>
           <a:stretch>
             <a:fillRect/>
           </a:stretch>
@@ -29705,1138 +29223,498 @@
           </a:p>
         </p:txBody>
       </p:sp>
-      <p:sp>
-        <p:nvSpPr>
-          <p:cNvPr id="54" name="Rectangle : coins arrondis 53">
+      <p:grpSp>
+        <p:nvGrpSpPr>
+          <p:cNvPr id="9" name="Groupe 8">
             <a:extLst>
               <a:ext uri="{FF2B5EF4-FFF2-40B4-BE49-F238E27FC236}">
-                <a16:creationId xmlns:a16="http://schemas.microsoft.com/office/drawing/2014/main" id="{3E4E5C19-19D1-7DB3-6126-771BB460CA7E}"/>
+                <a16:creationId xmlns:a16="http://schemas.microsoft.com/office/drawing/2014/main" id="{1942901F-9902-04A0-3544-E014B88B92FF}"/>
               </a:ext>
             </a:extLst>
           </p:cNvPr>
-          <p:cNvSpPr/>
+          <p:cNvGrpSpPr/>
           <p:nvPr/>
-        </p:nvSpPr>
-        <p:spPr>
+        </p:nvGrpSpPr>
+        <p:grpSpPr>
           <a:xfrm>
-            <a:off x="7018263" y="1968834"/>
-            <a:ext cx="1098685" cy="584200"/>
+            <a:off x="246312" y="1458686"/>
+            <a:ext cx="2046825" cy="3272971"/>
+            <a:chOff x="246312" y="1458686"/>
+            <a:chExt cx="2046825" cy="3272971"/>
           </a:xfrm>
-          <a:prstGeom prst="roundRect">
-            <a:avLst/>
-          </a:prstGeom>
-          <a:solidFill>
-            <a:schemeClr val="bg1">
-              <a:lumMod val="95000"/>
-            </a:schemeClr>
-          </a:solidFill>
-          <a:ln>
+        </p:grpSpPr>
+        <p:pic>
+          <p:nvPicPr>
+            <p:cNvPr id="1026" name="Picture 2">
+              <a:extLst>
+                <a:ext uri="{FF2B5EF4-FFF2-40B4-BE49-F238E27FC236}">
+                  <a16:creationId xmlns:a16="http://schemas.microsoft.com/office/drawing/2014/main" id="{923FE2F2-F305-A7CE-975B-2A2BA912E4B7}"/>
+                </a:ext>
+              </a:extLst>
+            </p:cNvPr>
+            <p:cNvPicPr>
+              <a:picLocks noChangeAspect="1" noChangeArrowheads="1"/>
+            </p:cNvPicPr>
+            <p:nvPr/>
+          </p:nvPicPr>
+          <p:blipFill rotWithShape="1">
+            <a:blip r:embed="rId8">
+              <a:extLst>
+                <a:ext uri="{28A0092B-C50C-407E-A947-70E740481C1C}">
+                  <a14:useLocalDpi xmlns:a14="http://schemas.microsoft.com/office/drawing/2010/main" val="0"/>
+                </a:ext>
+              </a:extLst>
+            </a:blip>
+            <a:srcRect l="14585" t="12264" r="16331" b="16417"/>
+            <a:stretch>
+              <a:fillRect/>
+            </a:stretch>
+          </p:blipFill>
+          <p:spPr bwMode="auto">
+            <a:xfrm>
+              <a:off x="1765455" y="1652962"/>
+              <a:ext cx="381317" cy="393656"/>
+            </a:xfrm>
+            <a:prstGeom prst="rect">
+              <a:avLst/>
+            </a:prstGeom>
             <a:noFill/>
-          </a:ln>
-        </p:spPr>
-        <p:style>
-          <a:lnRef idx="2">
-            <a:schemeClr val="accent1">
-              <a:shade val="15000"/>
-            </a:schemeClr>
-          </a:lnRef>
-          <a:fillRef idx="1">
-            <a:schemeClr val="accent1"/>
-          </a:fillRef>
-          <a:effectRef idx="0">
-            <a:schemeClr val="accent1"/>
-          </a:effectRef>
-          <a:fontRef idx="minor">
-            <a:schemeClr val="lt1"/>
-          </a:fontRef>
-        </p:style>
-        <p:txBody>
-          <a:bodyPr rtlCol="0" anchor="ctr"/>
-          <a:lstStyle/>
-          <a:p>
-            <a:pPr algn="ctr"/>
-            <a:endParaRPr lang="fr-FR"/>
-          </a:p>
-        </p:txBody>
-      </p:sp>
-      <p:sp>
-        <p:nvSpPr>
-          <p:cNvPr id="55" name="ZoneTexte 54">
             <a:extLst>
-              <a:ext uri="{FF2B5EF4-FFF2-40B4-BE49-F238E27FC236}">
-                <a16:creationId xmlns:a16="http://schemas.microsoft.com/office/drawing/2014/main" id="{C4EB1607-BC4B-15A3-0324-3D29B9154D63}"/>
+              <a:ext uri="{909E8E84-426E-40DD-AFC4-6F175D3DCCD1}">
+                <a14:hiddenFill xmlns:a14="http://schemas.microsoft.com/office/drawing/2010/main">
+                  <a:solidFill>
+                    <a:srgbClr val="FFFFFF"/>
+                  </a:solidFill>
+                </a14:hiddenFill>
               </a:ext>
             </a:extLst>
-          </p:cNvPr>
-          <p:cNvSpPr txBox="1"/>
-          <p:nvPr/>
-        </p:nvSpPr>
-        <p:spPr>
-          <a:xfrm>
-            <a:off x="6985463" y="2026312"/>
-            <a:ext cx="1156330" cy="492443"/>
-          </a:xfrm>
-          <a:prstGeom prst="rect">
-            <a:avLst/>
-          </a:prstGeom>
-          <a:noFill/>
-        </p:spPr>
-        <p:txBody>
-          <a:bodyPr wrap="square" rtlCol="0">
-            <a:spAutoFit/>
-          </a:bodyPr>
-          <a:lstStyle/>
-          <a:p>
-            <a:pPr algn="ctr"/>
-            <a:r>
-              <a:rPr lang="fr-FR" sz="1000" dirty="0"/>
-              <a:t>EDA </a:t>
-            </a:r>
-          </a:p>
-          <a:p>
-            <a:pPr algn="ctr"/>
-            <a:r>
-              <a:rPr lang="fr-FR" sz="800" dirty="0"/>
-              <a:t>descriptive et comparative</a:t>
-            </a:r>
-          </a:p>
-        </p:txBody>
-      </p:sp>
-      <p:sp>
-        <p:nvSpPr>
-          <p:cNvPr id="56" name="Rectangle : coins arrondis 55">
+          </p:spPr>
+        </p:pic>
+        <p:pic>
+          <p:nvPicPr>
+            <p:cNvPr id="1028" name="Picture 4">
+              <a:extLst>
+                <a:ext uri="{FF2B5EF4-FFF2-40B4-BE49-F238E27FC236}">
+                  <a16:creationId xmlns:a16="http://schemas.microsoft.com/office/drawing/2014/main" id="{D0C03EA7-EAD6-1A33-21AE-920B9121582F}"/>
+                </a:ext>
+              </a:extLst>
+            </p:cNvPr>
+            <p:cNvPicPr>
+              <a:picLocks noChangeAspect="1" noChangeArrowheads="1"/>
+            </p:cNvPicPr>
+            <p:nvPr/>
+          </p:nvPicPr>
+          <p:blipFill rotWithShape="1">
+            <a:blip r:embed="rId9">
+              <a:extLst>
+                <a:ext uri="{28A0092B-C50C-407E-A947-70E740481C1C}">
+                  <a14:useLocalDpi xmlns:a14="http://schemas.microsoft.com/office/drawing/2010/main" val="0"/>
+                </a:ext>
+              </a:extLst>
+            </a:blip>
+            <a:srcRect l="11432" t="21688" r="13291" b="23045"/>
+            <a:stretch>
+              <a:fillRect/>
+            </a:stretch>
+          </p:blipFill>
+          <p:spPr bwMode="auto">
+            <a:xfrm>
+              <a:off x="583256" y="1682497"/>
+              <a:ext cx="792868" cy="332636"/>
+            </a:xfrm>
+            <a:prstGeom prst="rect">
+              <a:avLst/>
+            </a:prstGeom>
+            <a:noFill/>
             <a:extLst>
-              <a:ext uri="{FF2B5EF4-FFF2-40B4-BE49-F238E27FC236}">
-                <a16:creationId xmlns:a16="http://schemas.microsoft.com/office/drawing/2014/main" id="{34BB09D2-59B3-0F52-1024-4F32B01B2F53}"/>
+              <a:ext uri="{909E8E84-426E-40DD-AFC4-6F175D3DCCD1}">
+                <a14:hiddenFill xmlns:a14="http://schemas.microsoft.com/office/drawing/2010/main">
+                  <a:solidFill>
+                    <a:srgbClr val="FFFFFF"/>
+                  </a:solidFill>
+                </a14:hiddenFill>
               </a:ext>
             </a:extLst>
-          </p:cNvPr>
-          <p:cNvSpPr/>
-          <p:nvPr/>
-        </p:nvSpPr>
-        <p:spPr>
-          <a:xfrm>
-            <a:off x="6981071" y="2960216"/>
-            <a:ext cx="1135877" cy="584200"/>
-          </a:xfrm>
-          <a:prstGeom prst="roundRect">
-            <a:avLst/>
-          </a:prstGeom>
-          <a:solidFill>
-            <a:schemeClr val="bg1">
-              <a:lumMod val="95000"/>
-            </a:schemeClr>
-          </a:solidFill>
-          <a:ln>
+          </p:spPr>
+        </p:pic>
+        <p:pic>
+          <p:nvPicPr>
+            <p:cNvPr id="1030" name="Picture 6">
+              <a:extLst>
+                <a:ext uri="{FF2B5EF4-FFF2-40B4-BE49-F238E27FC236}">
+                  <a16:creationId xmlns:a16="http://schemas.microsoft.com/office/drawing/2014/main" id="{2941D76B-6840-C572-907F-F3680B66EBF7}"/>
+                </a:ext>
+              </a:extLst>
+            </p:cNvPr>
+            <p:cNvPicPr>
+              <a:picLocks noChangeAspect="1" noChangeArrowheads="1"/>
+            </p:cNvPicPr>
+            <p:nvPr/>
+          </p:nvPicPr>
+          <p:blipFill rotWithShape="1">
+            <a:blip r:embed="rId10">
+              <a:extLst>
+                <a:ext uri="{28A0092B-C50C-407E-A947-70E740481C1C}">
+                  <a14:useLocalDpi xmlns:a14="http://schemas.microsoft.com/office/drawing/2010/main" val="0"/>
+                </a:ext>
+              </a:extLst>
+            </a:blip>
+            <a:srcRect l="30624" r="31046" b="34033"/>
+            <a:stretch>
+              <a:fillRect/>
+            </a:stretch>
+          </p:blipFill>
+          <p:spPr bwMode="auto">
+            <a:xfrm>
+              <a:off x="756608" y="2258501"/>
+              <a:ext cx="386389" cy="485958"/>
+            </a:xfrm>
+            <a:prstGeom prst="rect">
+              <a:avLst/>
+            </a:prstGeom>
             <a:noFill/>
-          </a:ln>
-        </p:spPr>
-        <p:style>
-          <a:lnRef idx="2">
-            <a:schemeClr val="accent1">
-              <a:shade val="15000"/>
-            </a:schemeClr>
-          </a:lnRef>
-          <a:fillRef idx="1">
-            <a:schemeClr val="accent1"/>
-          </a:fillRef>
-          <a:effectRef idx="0">
-            <a:schemeClr val="accent1"/>
-          </a:effectRef>
-          <a:fontRef idx="minor">
-            <a:schemeClr val="lt1"/>
-          </a:fontRef>
-        </p:style>
-        <p:txBody>
-          <a:bodyPr rtlCol="0" anchor="ctr"/>
-          <a:lstStyle/>
-          <a:p>
-            <a:pPr algn="ctr"/>
-            <a:endParaRPr lang="fr-FR"/>
-          </a:p>
-        </p:txBody>
-      </p:sp>
-      <p:sp>
-        <p:nvSpPr>
-          <p:cNvPr id="57" name="ZoneTexte 56">
             <a:extLst>
-              <a:ext uri="{FF2B5EF4-FFF2-40B4-BE49-F238E27FC236}">
-                <a16:creationId xmlns:a16="http://schemas.microsoft.com/office/drawing/2014/main" id="{685F5B80-27B1-45A6-3DF8-0CF7271056CC}"/>
+              <a:ext uri="{909E8E84-426E-40DD-AFC4-6F175D3DCCD1}">
+                <a14:hiddenFill xmlns:a14="http://schemas.microsoft.com/office/drawing/2010/main">
+                  <a:solidFill>
+                    <a:srgbClr val="FFFFFF"/>
+                  </a:solidFill>
+                </a14:hiddenFill>
               </a:ext>
             </a:extLst>
-          </p:cNvPr>
-          <p:cNvSpPr txBox="1"/>
-          <p:nvPr/>
-        </p:nvSpPr>
-        <p:spPr>
-          <a:xfrm>
-            <a:off x="6985463" y="3075570"/>
-            <a:ext cx="1156330" cy="369332"/>
-          </a:xfrm>
-          <a:prstGeom prst="rect">
-            <a:avLst/>
-          </a:prstGeom>
-          <a:noFill/>
-        </p:spPr>
-        <p:txBody>
-          <a:bodyPr wrap="square" rtlCol="0">
-            <a:spAutoFit/>
-          </a:bodyPr>
-          <a:lstStyle/>
-          <a:p>
-            <a:pPr algn="ctr"/>
-            <a:r>
-              <a:rPr lang="fr-FR" sz="1000" dirty="0"/>
-              <a:t>PREDICT </a:t>
-            </a:r>
-          </a:p>
-          <a:p>
-            <a:pPr algn="ctr"/>
-            <a:r>
-              <a:rPr lang="fr-FR" sz="800" dirty="0"/>
-              <a:t>Sur 3 jours glissants</a:t>
-            </a:r>
-          </a:p>
-        </p:txBody>
-      </p:sp>
-      <p:sp>
-        <p:nvSpPr>
-          <p:cNvPr id="58" name="ZoneTexte 57">
+          </p:spPr>
+        </p:pic>
+        <p:cxnSp>
+          <p:nvCxnSpPr>
+            <p:cNvPr id="28" name="Connecteur droit 27">
+              <a:extLst>
+                <a:ext uri="{FF2B5EF4-FFF2-40B4-BE49-F238E27FC236}">
+                  <a16:creationId xmlns:a16="http://schemas.microsoft.com/office/drawing/2014/main" id="{66A68388-D1A7-6AC6-5F1F-65E1A6494D4A}"/>
+                </a:ext>
+              </a:extLst>
+            </p:cNvPr>
+            <p:cNvCxnSpPr/>
+            <p:nvPr/>
+          </p:nvCxnSpPr>
+          <p:spPr>
+            <a:xfrm>
+              <a:off x="2293137" y="1458686"/>
+              <a:ext cx="0" cy="3272971"/>
+            </a:xfrm>
+            <a:prstGeom prst="line">
+              <a:avLst/>
+            </a:prstGeom>
+            <a:ln w="19050">
+              <a:solidFill>
+                <a:schemeClr val="bg1">
+                  <a:lumMod val="75000"/>
+                </a:schemeClr>
+              </a:solidFill>
+              <a:prstDash val="dash"/>
+            </a:ln>
+          </p:spPr>
+          <p:style>
+            <a:lnRef idx="1">
+              <a:schemeClr val="dk1"/>
+            </a:lnRef>
+            <a:fillRef idx="0">
+              <a:schemeClr val="dk1"/>
+            </a:fillRef>
+            <a:effectRef idx="0">
+              <a:schemeClr val="dk1"/>
+            </a:effectRef>
+            <a:fontRef idx="minor">
+              <a:schemeClr val="tx1"/>
+            </a:fontRef>
+          </p:style>
+        </p:cxnSp>
+        <p:sp>
+          <p:nvSpPr>
+            <p:cNvPr id="58" name="ZoneTexte 57">
+              <a:extLst>
+                <a:ext uri="{FF2B5EF4-FFF2-40B4-BE49-F238E27FC236}">
+                  <a16:creationId xmlns:a16="http://schemas.microsoft.com/office/drawing/2014/main" id="{42C67AD7-C645-5367-3E47-6D6A996C5FE8}"/>
+                </a:ext>
+              </a:extLst>
+            </p:cNvPr>
+            <p:cNvSpPr txBox="1"/>
+            <p:nvPr/>
+          </p:nvSpPr>
+          <p:spPr>
+            <a:xfrm>
+              <a:off x="246312" y="2674581"/>
+              <a:ext cx="1390212" cy="200055"/>
+            </a:xfrm>
+            <a:prstGeom prst="rect">
+              <a:avLst/>
+            </a:prstGeom>
+            <a:noFill/>
+          </p:spPr>
+          <p:txBody>
+            <a:bodyPr wrap="square" rtlCol="0">
+              <a:spAutoFit/>
+            </a:bodyPr>
+            <a:lstStyle/>
+            <a:p>
+              <a:pPr algn="ctr"/>
+              <a:r>
+                <a:rPr lang="fr-FR" sz="700" b="1" dirty="0"/>
+                <a:t>USGS / Landsat</a:t>
+              </a:r>
+            </a:p>
+          </p:txBody>
+        </p:sp>
+        <p:pic>
+          <p:nvPicPr>
+            <p:cNvPr id="65" name="Picture 6">
+              <a:extLst>
+                <a:ext uri="{FF2B5EF4-FFF2-40B4-BE49-F238E27FC236}">
+                  <a16:creationId xmlns:a16="http://schemas.microsoft.com/office/drawing/2014/main" id="{976AB5B9-1D61-B29C-C9DE-9051A31E8E27}"/>
+                </a:ext>
+              </a:extLst>
+            </p:cNvPr>
+            <p:cNvPicPr>
+              <a:picLocks noChangeAspect="1" noChangeArrowheads="1"/>
+            </p:cNvPicPr>
+            <p:nvPr/>
+          </p:nvPicPr>
+          <p:blipFill rotWithShape="1">
+            <a:blip r:embed="rId10">
+              <a:extLst>
+                <a:ext uri="{28A0092B-C50C-407E-A947-70E740481C1C}">
+                  <a14:useLocalDpi xmlns:a14="http://schemas.microsoft.com/office/drawing/2010/main" val="0"/>
+                </a:ext>
+              </a:extLst>
+            </a:blip>
+            <a:srcRect l="33049" r="31047" b="34033"/>
+            <a:stretch>
+              <a:fillRect/>
+            </a:stretch>
+          </p:blipFill>
+          <p:spPr bwMode="auto">
+            <a:xfrm>
+              <a:off x="781055" y="2922466"/>
+              <a:ext cx="361938" cy="485958"/>
+            </a:xfrm>
+            <a:prstGeom prst="rect">
+              <a:avLst/>
+            </a:prstGeom>
+            <a:noFill/>
             <a:extLst>
-              <a:ext uri="{FF2B5EF4-FFF2-40B4-BE49-F238E27FC236}">
-                <a16:creationId xmlns:a16="http://schemas.microsoft.com/office/drawing/2014/main" id="{42C67AD7-C645-5367-3E47-6D6A996C5FE8}"/>
+              <a:ext uri="{909E8E84-426E-40DD-AFC4-6F175D3DCCD1}">
+                <a14:hiddenFill xmlns:a14="http://schemas.microsoft.com/office/drawing/2010/main">
+                  <a:solidFill>
+                    <a:srgbClr val="FFFFFF"/>
+                  </a:solidFill>
+                </a14:hiddenFill>
               </a:ext>
             </a:extLst>
-          </p:cNvPr>
-          <p:cNvSpPr txBox="1"/>
-          <p:nvPr/>
-        </p:nvSpPr>
-        <p:spPr>
-          <a:xfrm>
-            <a:off x="246312" y="2674581"/>
-            <a:ext cx="1390212" cy="200055"/>
-          </a:xfrm>
-          <a:prstGeom prst="rect">
-            <a:avLst/>
-          </a:prstGeom>
-          <a:noFill/>
-        </p:spPr>
-        <p:txBody>
-          <a:bodyPr wrap="square" rtlCol="0">
-            <a:spAutoFit/>
-          </a:bodyPr>
-          <a:lstStyle/>
-          <a:p>
-            <a:pPr algn="ctr"/>
-            <a:r>
-              <a:rPr lang="fr-FR" sz="700" b="1" dirty="0"/>
-              <a:t>USGS / Landsat</a:t>
-            </a:r>
-          </a:p>
-        </p:txBody>
-      </p:sp>
-      <p:pic>
-        <p:nvPicPr>
-          <p:cNvPr id="65" name="Picture 6">
+          </p:spPr>
+        </p:pic>
+        <p:sp>
+          <p:nvSpPr>
+            <p:cNvPr id="67" name="ZoneTexte 66">
+              <a:extLst>
+                <a:ext uri="{FF2B5EF4-FFF2-40B4-BE49-F238E27FC236}">
+                  <a16:creationId xmlns:a16="http://schemas.microsoft.com/office/drawing/2014/main" id="{77C37EC6-CDFA-6EF5-9731-EDD14211D90B}"/>
+                </a:ext>
+              </a:extLst>
+            </p:cNvPr>
+            <p:cNvSpPr txBox="1"/>
+            <p:nvPr/>
+          </p:nvSpPr>
+          <p:spPr>
+            <a:xfrm>
+              <a:off x="246312" y="3396825"/>
+              <a:ext cx="1390212" cy="200055"/>
+            </a:xfrm>
+            <a:prstGeom prst="rect">
+              <a:avLst/>
+            </a:prstGeom>
+            <a:noFill/>
+          </p:spPr>
+          <p:txBody>
+            <a:bodyPr wrap="square" rtlCol="0">
+              <a:spAutoFit/>
+            </a:bodyPr>
+            <a:lstStyle/>
+            <a:p>
+              <a:pPr algn="ctr"/>
+              <a:r>
+                <a:rPr lang="fr-FR" sz="700" b="1" dirty="0"/>
+                <a:t>Production RTE</a:t>
+              </a:r>
+            </a:p>
+          </p:txBody>
+        </p:sp>
+        <p:pic>
+          <p:nvPicPr>
+            <p:cNvPr id="68" name="Picture 6">
+              <a:extLst>
+                <a:ext uri="{FF2B5EF4-FFF2-40B4-BE49-F238E27FC236}">
+                  <a16:creationId xmlns:a16="http://schemas.microsoft.com/office/drawing/2014/main" id="{6A1FE08D-DF15-8940-EAA5-98ED76914736}"/>
+                </a:ext>
+              </a:extLst>
+            </p:cNvPr>
+            <p:cNvPicPr>
+              <a:picLocks noChangeAspect="1" noChangeArrowheads="1"/>
+            </p:cNvPicPr>
+            <p:nvPr/>
+          </p:nvPicPr>
+          <p:blipFill rotWithShape="1">
+            <a:blip r:embed="rId10">
+              <a:extLst>
+                <a:ext uri="{28A0092B-C50C-407E-A947-70E740481C1C}">
+                  <a14:useLocalDpi xmlns:a14="http://schemas.microsoft.com/office/drawing/2010/main" val="0"/>
+                </a:ext>
+              </a:extLst>
+            </a:blip>
+            <a:srcRect l="33049" r="31047" b="34033"/>
+            <a:stretch>
+              <a:fillRect/>
+            </a:stretch>
+          </p:blipFill>
+          <p:spPr bwMode="auto">
+            <a:xfrm>
+              <a:off x="781054" y="3634159"/>
+              <a:ext cx="361937" cy="485958"/>
+            </a:xfrm>
+            <a:prstGeom prst="rect">
+              <a:avLst/>
+            </a:prstGeom>
+            <a:noFill/>
             <a:extLst>
-              <a:ext uri="{FF2B5EF4-FFF2-40B4-BE49-F238E27FC236}">
-                <a16:creationId xmlns:a16="http://schemas.microsoft.com/office/drawing/2014/main" id="{976AB5B9-1D61-B29C-C9DE-9051A31E8E27}"/>
+              <a:ext uri="{909E8E84-426E-40DD-AFC4-6F175D3DCCD1}">
+                <a14:hiddenFill xmlns:a14="http://schemas.microsoft.com/office/drawing/2010/main">
+                  <a:solidFill>
+                    <a:srgbClr val="FFFFFF"/>
+                  </a:solidFill>
+                </a14:hiddenFill>
               </a:ext>
             </a:extLst>
-          </p:cNvPr>
-          <p:cNvPicPr>
-            <a:picLocks noChangeAspect="1" noChangeArrowheads="1"/>
-          </p:cNvPicPr>
-          <p:nvPr/>
-        </p:nvPicPr>
-        <p:blipFill rotWithShape="1">
-          <a:blip r:embed="rId6">
-            <a:extLst>
-              <a:ext uri="{28A0092B-C50C-407E-A947-70E740481C1C}">
-                <a14:useLocalDpi xmlns:a14="http://schemas.microsoft.com/office/drawing/2010/main" val="0"/>
-              </a:ext>
-            </a:extLst>
-          </a:blip>
-          <a:srcRect l="33049" r="31047" b="34033"/>
-          <a:stretch>
-            <a:fillRect/>
-          </a:stretch>
-        </p:blipFill>
-        <p:spPr bwMode="auto">
-          <a:xfrm>
-            <a:off x="781055" y="2922466"/>
-            <a:ext cx="361938" cy="485958"/>
-          </a:xfrm>
-          <a:prstGeom prst="rect">
-            <a:avLst/>
-          </a:prstGeom>
-          <a:noFill/>
-          <a:extLst>
-            <a:ext uri="{909E8E84-426E-40DD-AFC4-6F175D3DCCD1}">
-              <a14:hiddenFill xmlns:a14="http://schemas.microsoft.com/office/drawing/2010/main">
-                <a:solidFill>
-                  <a:srgbClr val="FFFFFF"/>
-                </a:solidFill>
-              </a14:hiddenFill>
-            </a:ext>
-          </a:extLst>
-        </p:spPr>
-      </p:pic>
-      <p:sp>
-        <p:nvSpPr>
-          <p:cNvPr id="67" name="ZoneTexte 66">
-            <a:extLst>
-              <a:ext uri="{FF2B5EF4-FFF2-40B4-BE49-F238E27FC236}">
-                <a16:creationId xmlns:a16="http://schemas.microsoft.com/office/drawing/2014/main" id="{77C37EC6-CDFA-6EF5-9731-EDD14211D90B}"/>
-              </a:ext>
-            </a:extLst>
-          </p:cNvPr>
-          <p:cNvSpPr txBox="1"/>
-          <p:nvPr/>
-        </p:nvSpPr>
-        <p:spPr>
-          <a:xfrm>
-            <a:off x="246312" y="3396825"/>
-            <a:ext cx="1390212" cy="200055"/>
-          </a:xfrm>
-          <a:prstGeom prst="rect">
-            <a:avLst/>
-          </a:prstGeom>
-          <a:noFill/>
-        </p:spPr>
-        <p:txBody>
-          <a:bodyPr wrap="square" rtlCol="0">
-            <a:spAutoFit/>
-          </a:bodyPr>
-          <a:lstStyle/>
-          <a:p>
-            <a:pPr algn="ctr"/>
-            <a:r>
-              <a:rPr lang="fr-FR" sz="700" b="1" dirty="0"/>
-              <a:t>Production RTE</a:t>
-            </a:r>
-          </a:p>
-        </p:txBody>
-      </p:sp>
-      <p:pic>
-        <p:nvPicPr>
-          <p:cNvPr id="68" name="Picture 6">
-            <a:extLst>
-              <a:ext uri="{FF2B5EF4-FFF2-40B4-BE49-F238E27FC236}">
-                <a16:creationId xmlns:a16="http://schemas.microsoft.com/office/drawing/2014/main" id="{6A1FE08D-DF15-8940-EAA5-98ED76914736}"/>
-              </a:ext>
-            </a:extLst>
-          </p:cNvPr>
-          <p:cNvPicPr>
-            <a:picLocks noChangeAspect="1" noChangeArrowheads="1"/>
-          </p:cNvPicPr>
-          <p:nvPr/>
-        </p:nvPicPr>
-        <p:blipFill rotWithShape="1">
-          <a:blip r:embed="rId6">
-            <a:extLst>
-              <a:ext uri="{28A0092B-C50C-407E-A947-70E740481C1C}">
-                <a14:useLocalDpi xmlns:a14="http://schemas.microsoft.com/office/drawing/2010/main" val="0"/>
-              </a:ext>
-            </a:extLst>
-          </a:blip>
-          <a:srcRect l="33049" r="31047" b="34033"/>
-          <a:stretch>
-            <a:fillRect/>
-          </a:stretch>
-        </p:blipFill>
-        <p:spPr bwMode="auto">
-          <a:xfrm>
-            <a:off x="781054" y="3634159"/>
-            <a:ext cx="361937" cy="485958"/>
-          </a:xfrm>
-          <a:prstGeom prst="rect">
-            <a:avLst/>
-          </a:prstGeom>
-          <a:noFill/>
-          <a:extLst>
-            <a:ext uri="{909E8E84-426E-40DD-AFC4-6F175D3DCCD1}">
-              <a14:hiddenFill xmlns:a14="http://schemas.microsoft.com/office/drawing/2010/main">
-                <a:solidFill>
-                  <a:srgbClr val="FFFFFF"/>
-                </a:solidFill>
-              </a14:hiddenFill>
-            </a:ext>
-          </a:extLst>
-        </p:spPr>
-      </p:pic>
-      <p:sp>
-        <p:nvSpPr>
-          <p:cNvPr id="70" name="ZoneTexte 69">
-            <a:extLst>
-              <a:ext uri="{FF2B5EF4-FFF2-40B4-BE49-F238E27FC236}">
-                <a16:creationId xmlns:a16="http://schemas.microsoft.com/office/drawing/2014/main" id="{78E1D7E3-9E06-E6A5-253E-A6CE2A2F1050}"/>
-              </a:ext>
-            </a:extLst>
-          </p:cNvPr>
-          <p:cNvSpPr txBox="1"/>
-          <p:nvPr/>
-        </p:nvSpPr>
-        <p:spPr>
-          <a:xfrm>
-            <a:off x="246312" y="4108518"/>
-            <a:ext cx="1390212" cy="200055"/>
-          </a:xfrm>
-          <a:prstGeom prst="rect">
-            <a:avLst/>
-          </a:prstGeom>
-          <a:noFill/>
-        </p:spPr>
-        <p:txBody>
-          <a:bodyPr wrap="square" rtlCol="0">
-            <a:spAutoFit/>
-          </a:bodyPr>
-          <a:lstStyle/>
-          <a:p>
-            <a:pPr algn="ctr"/>
-            <a:r>
-              <a:rPr lang="fr-FR" sz="700" b="1" dirty="0"/>
-              <a:t>Solar Data</a:t>
-            </a:r>
-          </a:p>
-        </p:txBody>
-      </p:sp>
-      <p:sp>
-        <p:nvSpPr>
-          <p:cNvPr id="71" name="Rectangle : coins arrondis 70">
-            <a:extLst>
-              <a:ext uri="{FF2B5EF4-FFF2-40B4-BE49-F238E27FC236}">
-                <a16:creationId xmlns:a16="http://schemas.microsoft.com/office/drawing/2014/main" id="{E74B2057-34BC-1980-9671-44A128491597}"/>
-              </a:ext>
-            </a:extLst>
-          </p:cNvPr>
-          <p:cNvSpPr/>
-          <p:nvPr/>
-        </p:nvSpPr>
-        <p:spPr>
-          <a:xfrm>
-            <a:off x="2461359" y="1469509"/>
-            <a:ext cx="1776005" cy="2957143"/>
-          </a:xfrm>
-          <a:prstGeom prst="roundRect">
-            <a:avLst/>
-          </a:prstGeom>
-          <a:noFill/>
-          <a:ln w="9525">
-            <a:solidFill>
-              <a:srgbClr val="FFC000"/>
-            </a:solidFill>
-            <a:prstDash val="dash"/>
-          </a:ln>
-        </p:spPr>
-        <p:style>
-          <a:lnRef idx="2">
-            <a:schemeClr val="accent1">
-              <a:shade val="15000"/>
-            </a:schemeClr>
-          </a:lnRef>
-          <a:fillRef idx="1">
-            <a:schemeClr val="accent1"/>
-          </a:fillRef>
-          <a:effectRef idx="0">
-            <a:schemeClr val="accent1"/>
-          </a:effectRef>
-          <a:fontRef idx="minor">
-            <a:schemeClr val="lt1"/>
-          </a:fontRef>
-        </p:style>
-        <p:txBody>
-          <a:bodyPr rtlCol="0" anchor="ctr"/>
-          <a:lstStyle/>
-          <a:p>
-            <a:pPr algn="ctr"/>
-            <a:endParaRPr lang="fr-FR" dirty="0"/>
-          </a:p>
-        </p:txBody>
-      </p:sp>
-      <p:sp>
-        <p:nvSpPr>
-          <p:cNvPr id="73" name="ZoneTexte 72">
-            <a:extLst>
-              <a:ext uri="{FF2B5EF4-FFF2-40B4-BE49-F238E27FC236}">
-                <a16:creationId xmlns:a16="http://schemas.microsoft.com/office/drawing/2014/main" id="{33C41871-317D-BA64-26E2-EBEE7A51AE73}"/>
-              </a:ext>
-            </a:extLst>
-          </p:cNvPr>
-          <p:cNvSpPr txBox="1"/>
-          <p:nvPr/>
-        </p:nvSpPr>
-        <p:spPr>
-          <a:xfrm>
-            <a:off x="263070" y="2047148"/>
-            <a:ext cx="1390212" cy="200055"/>
-          </a:xfrm>
-          <a:prstGeom prst="rect">
-            <a:avLst/>
-          </a:prstGeom>
-          <a:noFill/>
-        </p:spPr>
-        <p:txBody>
-          <a:bodyPr wrap="square" rtlCol="0">
-            <a:spAutoFit/>
-          </a:bodyPr>
-          <a:lstStyle/>
-          <a:p>
-            <a:pPr algn="ctr"/>
-            <a:r>
-              <a:rPr lang="fr-FR" sz="700" b="1" dirty="0"/>
-              <a:t>Météo</a:t>
-            </a:r>
-          </a:p>
-        </p:txBody>
-      </p:sp>
-      <p:cxnSp>
-        <p:nvCxnSpPr>
-          <p:cNvPr id="75" name="Connecteur droit avec flèche 74">
-            <a:extLst>
-              <a:ext uri="{FF2B5EF4-FFF2-40B4-BE49-F238E27FC236}">
-                <a16:creationId xmlns:a16="http://schemas.microsoft.com/office/drawing/2014/main" id="{EA2D8E70-0E38-6F85-C46D-473AA9425B34}"/>
-              </a:ext>
-            </a:extLst>
-          </p:cNvPr>
-          <p:cNvCxnSpPr>
-            <a:cxnSpLocks/>
-            <a:stCxn id="1028" idx="3"/>
-            <a:endCxn id="1026" idx="1"/>
-          </p:cNvCxnSpPr>
-          <p:nvPr/>
-        </p:nvCxnSpPr>
-        <p:spPr>
-          <a:xfrm>
-            <a:off x="1376124" y="1848815"/>
-            <a:ext cx="389331" cy="975"/>
-          </a:xfrm>
-          <a:prstGeom prst="straightConnector1">
-            <a:avLst/>
-          </a:prstGeom>
-          <a:ln w="9525">
-            <a:solidFill>
-              <a:schemeClr val="bg1">
-                <a:lumMod val="65000"/>
-              </a:schemeClr>
-            </a:solidFill>
-            <a:tailEnd type="triangle"/>
-          </a:ln>
-        </p:spPr>
-        <p:style>
-          <a:lnRef idx="1">
-            <a:schemeClr val="accent1"/>
-          </a:lnRef>
-          <a:fillRef idx="0">
-            <a:schemeClr val="accent1"/>
-          </a:fillRef>
-          <a:effectRef idx="0">
-            <a:schemeClr val="accent1"/>
-          </a:effectRef>
-          <a:fontRef idx="minor">
-            <a:schemeClr val="tx1"/>
-          </a:fontRef>
-        </p:style>
-      </p:cxnSp>
-      <p:cxnSp>
-        <p:nvCxnSpPr>
-          <p:cNvPr id="99" name="Connecteur droit avec flèche 98">
-            <a:extLst>
-              <a:ext uri="{FF2B5EF4-FFF2-40B4-BE49-F238E27FC236}">
-                <a16:creationId xmlns:a16="http://schemas.microsoft.com/office/drawing/2014/main" id="{1740FD3C-BB82-E8E4-4341-9F9B0A291611}"/>
-              </a:ext>
-            </a:extLst>
-          </p:cNvPr>
-          <p:cNvCxnSpPr>
-            <a:cxnSpLocks/>
-            <a:stCxn id="1026" idx="3"/>
-            <a:endCxn id="1032" idx="1"/>
-          </p:cNvCxnSpPr>
-          <p:nvPr/>
-        </p:nvCxnSpPr>
-        <p:spPr>
-          <a:xfrm flipV="1">
-            <a:off x="2146772" y="1848815"/>
-            <a:ext cx="549555" cy="975"/>
-          </a:xfrm>
-          <a:prstGeom prst="straightConnector1">
-            <a:avLst/>
-          </a:prstGeom>
-          <a:ln w="9525">
-            <a:solidFill>
-              <a:schemeClr val="bg1">
-                <a:lumMod val="65000"/>
-              </a:schemeClr>
-            </a:solidFill>
-            <a:tailEnd type="triangle"/>
-          </a:ln>
-        </p:spPr>
-        <p:style>
-          <a:lnRef idx="1">
-            <a:schemeClr val="accent1"/>
-          </a:lnRef>
-          <a:fillRef idx="0">
-            <a:schemeClr val="accent1"/>
-          </a:fillRef>
-          <a:effectRef idx="0">
-            <a:schemeClr val="accent1"/>
-          </a:effectRef>
-          <a:fontRef idx="minor">
-            <a:schemeClr val="tx1"/>
-          </a:fontRef>
-        </p:style>
-      </p:cxnSp>
-      <p:pic>
-        <p:nvPicPr>
-          <p:cNvPr id="102" name="Picture 2">
-            <a:extLst>
-              <a:ext uri="{FF2B5EF4-FFF2-40B4-BE49-F238E27FC236}">
-                <a16:creationId xmlns:a16="http://schemas.microsoft.com/office/drawing/2014/main" id="{26F3760A-01F7-627E-27AC-B1F00D3B52C6}"/>
-              </a:ext>
-            </a:extLst>
-          </p:cNvPr>
-          <p:cNvPicPr>
-            <a:picLocks noChangeAspect="1" noChangeArrowheads="1"/>
-          </p:cNvPicPr>
-          <p:nvPr/>
-        </p:nvPicPr>
-        <p:blipFill rotWithShape="1">
-          <a:blip r:embed="rId11">
-            <a:extLst>
-              <a:ext uri="{28A0092B-C50C-407E-A947-70E740481C1C}">
-                <a14:useLocalDpi xmlns:a14="http://schemas.microsoft.com/office/drawing/2010/main" val="0"/>
-              </a:ext>
-            </a:extLst>
-          </a:blip>
-          <a:srcRect l="15800" t="16870" r="16971" b="17050"/>
-          <a:stretch>
-            <a:fillRect/>
-          </a:stretch>
-        </p:blipFill>
-        <p:spPr bwMode="auto">
-          <a:xfrm>
-            <a:off x="3378283" y="1676305"/>
-            <a:ext cx="350993" cy="344994"/>
-          </a:xfrm>
-          <a:prstGeom prst="rect">
-            <a:avLst/>
-          </a:prstGeom>
-          <a:noFill/>
-          <a:extLst>
-            <a:ext uri="{909E8E84-426E-40DD-AFC4-6F175D3DCCD1}">
-              <a14:hiddenFill xmlns:a14="http://schemas.microsoft.com/office/drawing/2010/main">
-                <a:solidFill>
-                  <a:srgbClr val="FFFFFF"/>
-                </a:solidFill>
-              </a14:hiddenFill>
-            </a:ext>
-          </a:extLst>
-        </p:spPr>
-      </p:pic>
-      <p:pic>
-        <p:nvPicPr>
-          <p:cNvPr id="103" name="Picture 2">
-            <a:extLst>
-              <a:ext uri="{FF2B5EF4-FFF2-40B4-BE49-F238E27FC236}">
-                <a16:creationId xmlns:a16="http://schemas.microsoft.com/office/drawing/2014/main" id="{B33DCAA7-8CDF-83ED-2AFC-66875EDF434A}"/>
-              </a:ext>
-            </a:extLst>
-          </p:cNvPr>
-          <p:cNvPicPr>
-            <a:picLocks noChangeAspect="1" noChangeArrowheads="1"/>
-          </p:cNvPicPr>
-          <p:nvPr/>
-        </p:nvPicPr>
-        <p:blipFill rotWithShape="1">
-          <a:blip r:embed="rId11">
-            <a:extLst>
-              <a:ext uri="{28A0092B-C50C-407E-A947-70E740481C1C}">
-                <a14:useLocalDpi xmlns:a14="http://schemas.microsoft.com/office/drawing/2010/main" val="0"/>
-              </a:ext>
-            </a:extLst>
-          </a:blip>
-          <a:srcRect l="15800" t="16870" r="16971" b="17050"/>
-          <a:stretch>
-            <a:fillRect/>
-          </a:stretch>
-        </p:blipFill>
-        <p:spPr bwMode="auto">
-          <a:xfrm>
-            <a:off x="3364720" y="2990820"/>
-            <a:ext cx="350993" cy="344994"/>
-          </a:xfrm>
-          <a:prstGeom prst="rect">
-            <a:avLst/>
-          </a:prstGeom>
-          <a:noFill/>
-          <a:extLst>
-            <a:ext uri="{909E8E84-426E-40DD-AFC4-6F175D3DCCD1}">
-              <a14:hiddenFill xmlns:a14="http://schemas.microsoft.com/office/drawing/2010/main">
-                <a:solidFill>
-                  <a:srgbClr val="FFFFFF"/>
-                </a:solidFill>
-              </a14:hiddenFill>
-            </a:ext>
-          </a:extLst>
-        </p:spPr>
-      </p:pic>
-      <p:pic>
-        <p:nvPicPr>
-          <p:cNvPr id="104" name="Picture 2">
-            <a:extLst>
-              <a:ext uri="{FF2B5EF4-FFF2-40B4-BE49-F238E27FC236}">
-                <a16:creationId xmlns:a16="http://schemas.microsoft.com/office/drawing/2014/main" id="{30EDEF50-F042-0782-1F82-E1015B7ED2D4}"/>
-              </a:ext>
-            </a:extLst>
-          </p:cNvPr>
-          <p:cNvPicPr>
-            <a:picLocks noChangeAspect="1" noChangeArrowheads="1"/>
-          </p:cNvPicPr>
-          <p:nvPr/>
-        </p:nvPicPr>
-        <p:blipFill rotWithShape="1">
-          <a:blip r:embed="rId11">
-            <a:extLst>
-              <a:ext uri="{28A0092B-C50C-407E-A947-70E740481C1C}">
-                <a14:useLocalDpi xmlns:a14="http://schemas.microsoft.com/office/drawing/2010/main" val="0"/>
-              </a:ext>
-            </a:extLst>
-          </a:blip>
-          <a:srcRect l="15800" t="16870" r="16971" b="17050"/>
-          <a:stretch>
-            <a:fillRect/>
-          </a:stretch>
-        </p:blipFill>
-        <p:spPr bwMode="auto">
-          <a:xfrm>
-            <a:off x="3339191" y="3703859"/>
-            <a:ext cx="350993" cy="344994"/>
-          </a:xfrm>
-          <a:prstGeom prst="rect">
-            <a:avLst/>
-          </a:prstGeom>
-          <a:noFill/>
-          <a:extLst>
-            <a:ext uri="{909E8E84-426E-40DD-AFC4-6F175D3DCCD1}">
-              <a14:hiddenFill xmlns:a14="http://schemas.microsoft.com/office/drawing/2010/main">
-                <a:solidFill>
-                  <a:srgbClr val="FFFFFF"/>
-                </a:solidFill>
-              </a14:hiddenFill>
-            </a:ext>
-          </a:extLst>
-        </p:spPr>
-      </p:pic>
-      <p:sp>
-        <p:nvSpPr>
-          <p:cNvPr id="106" name="Rectangle : coins arrondis 105">
-            <a:extLst>
-              <a:ext uri="{FF2B5EF4-FFF2-40B4-BE49-F238E27FC236}">
-                <a16:creationId xmlns:a16="http://schemas.microsoft.com/office/drawing/2014/main" id="{70820C9A-B957-87A8-109D-6C661627DA4C}"/>
-              </a:ext>
-            </a:extLst>
-          </p:cNvPr>
-          <p:cNvSpPr/>
-          <p:nvPr/>
-        </p:nvSpPr>
-        <p:spPr>
-          <a:xfrm>
-            <a:off x="3364720" y="4265830"/>
-            <a:ext cx="868391" cy="252609"/>
-          </a:xfrm>
-          <a:prstGeom prst="roundRect">
-            <a:avLst/>
-          </a:prstGeom>
-          <a:solidFill>
-            <a:schemeClr val="bg1">
-              <a:lumMod val="95000"/>
-            </a:schemeClr>
-          </a:solidFill>
-          <a:ln>
+          </p:spPr>
+        </p:pic>
+        <p:sp>
+          <p:nvSpPr>
+            <p:cNvPr id="70" name="ZoneTexte 69">
+              <a:extLst>
+                <a:ext uri="{FF2B5EF4-FFF2-40B4-BE49-F238E27FC236}">
+                  <a16:creationId xmlns:a16="http://schemas.microsoft.com/office/drawing/2014/main" id="{78E1D7E3-9E06-E6A5-253E-A6CE2A2F1050}"/>
+                </a:ext>
+              </a:extLst>
+            </p:cNvPr>
+            <p:cNvSpPr txBox="1"/>
+            <p:nvPr/>
+          </p:nvSpPr>
+          <p:spPr>
+            <a:xfrm>
+              <a:off x="246312" y="4108518"/>
+              <a:ext cx="1390212" cy="200055"/>
+            </a:xfrm>
+            <a:prstGeom prst="rect">
+              <a:avLst/>
+            </a:prstGeom>
             <a:noFill/>
-          </a:ln>
-        </p:spPr>
-        <p:style>
-          <a:lnRef idx="2">
-            <a:schemeClr val="accent1">
-              <a:shade val="15000"/>
-            </a:schemeClr>
-          </a:lnRef>
-          <a:fillRef idx="1">
-            <a:schemeClr val="accent1"/>
-          </a:fillRef>
-          <a:effectRef idx="0">
-            <a:schemeClr val="accent1"/>
-          </a:effectRef>
-          <a:fontRef idx="minor">
-            <a:schemeClr val="lt1"/>
-          </a:fontRef>
-        </p:style>
-        <p:txBody>
-          <a:bodyPr rtlCol="0" anchor="ctr"/>
-          <a:lstStyle/>
-          <a:p>
-            <a:r>
-              <a:rPr lang="fr-FR" sz="700" b="1" dirty="0">
-                <a:solidFill>
-                  <a:schemeClr val="tx1"/>
-                </a:solidFill>
-              </a:rPr>
-              <a:t>AWS S3</a:t>
-            </a:r>
-          </a:p>
-        </p:txBody>
-      </p:sp>
-      <p:pic>
-        <p:nvPicPr>
-          <p:cNvPr id="107" name="Image 106" descr="Une image contenant art, pixel, conception&#10;&#10;Le contenu généré par l’IA peut être incorrect.">
-            <a:extLst>
-              <a:ext uri="{FF2B5EF4-FFF2-40B4-BE49-F238E27FC236}">
-                <a16:creationId xmlns:a16="http://schemas.microsoft.com/office/drawing/2014/main" id="{9E201599-7D6B-4671-395A-AB9C1CE55DB4}"/>
-              </a:ext>
-            </a:extLst>
-          </p:cNvPr>
-          <p:cNvPicPr>
-            <a:picLocks noChangeAspect="1"/>
-          </p:cNvPicPr>
-          <p:nvPr/>
-        </p:nvPicPr>
-        <p:blipFill>
-          <a:blip r:embed="rId14"/>
-          <a:stretch>
-            <a:fillRect/>
-          </a:stretch>
-        </p:blipFill>
-        <p:spPr>
-          <a:xfrm>
-            <a:off x="3927166" y="4032093"/>
-            <a:ext cx="347790" cy="416048"/>
-          </a:xfrm>
-          <a:prstGeom prst="rect">
-            <a:avLst/>
-          </a:prstGeom>
-        </p:spPr>
-      </p:pic>
-      <p:cxnSp>
-        <p:nvCxnSpPr>
-          <p:cNvPr id="108" name="Connecteur droit avec flèche 107">
-            <a:extLst>
-              <a:ext uri="{FF2B5EF4-FFF2-40B4-BE49-F238E27FC236}">
-                <a16:creationId xmlns:a16="http://schemas.microsoft.com/office/drawing/2014/main" id="{8FC538F3-E888-6C1B-940B-D6B968D8FCEE}"/>
-              </a:ext>
-            </a:extLst>
-          </p:cNvPr>
-          <p:cNvCxnSpPr>
-            <a:cxnSpLocks/>
-          </p:cNvCxnSpPr>
-          <p:nvPr/>
-        </p:nvCxnSpPr>
-        <p:spPr>
-          <a:xfrm>
-            <a:off x="4233111" y="2035648"/>
-            <a:ext cx="551235" cy="0"/>
-          </a:xfrm>
-          <a:prstGeom prst="straightConnector1">
-            <a:avLst/>
-          </a:prstGeom>
-          <a:ln w="57150">
-            <a:solidFill>
-              <a:srgbClr val="FFC000"/>
-            </a:solidFill>
-            <a:tailEnd type="triangle"/>
-          </a:ln>
-        </p:spPr>
-        <p:style>
-          <a:lnRef idx="1">
-            <a:schemeClr val="accent1"/>
-          </a:lnRef>
-          <a:fillRef idx="0">
-            <a:schemeClr val="accent1"/>
-          </a:fillRef>
-          <a:effectRef idx="0">
-            <a:schemeClr val="accent1"/>
-          </a:effectRef>
-          <a:fontRef idx="minor">
-            <a:schemeClr val="tx1"/>
-          </a:fontRef>
-        </p:style>
-      </p:cxnSp>
-      <p:cxnSp>
-        <p:nvCxnSpPr>
-          <p:cNvPr id="111" name="Connecteur droit avec flèche 110">
-            <a:extLst>
-              <a:ext uri="{FF2B5EF4-FFF2-40B4-BE49-F238E27FC236}">
-                <a16:creationId xmlns:a16="http://schemas.microsoft.com/office/drawing/2014/main" id="{67D61FBD-E531-1326-0C48-8BF9669015EF}"/>
-              </a:ext>
-            </a:extLst>
-          </p:cNvPr>
-          <p:cNvCxnSpPr>
-            <a:cxnSpLocks/>
-            <a:stCxn id="1030" idx="3"/>
-            <a:endCxn id="2050" idx="1"/>
-          </p:cNvCxnSpPr>
-          <p:nvPr/>
-        </p:nvCxnSpPr>
-        <p:spPr>
-          <a:xfrm flipV="1">
-            <a:off x="1142997" y="2501110"/>
-            <a:ext cx="2226786" cy="370"/>
-          </a:xfrm>
-          <a:prstGeom prst="straightConnector1">
-            <a:avLst/>
-          </a:prstGeom>
-          <a:ln w="9525">
-            <a:solidFill>
-              <a:schemeClr val="bg1">
-                <a:lumMod val="65000"/>
-              </a:schemeClr>
-            </a:solidFill>
-            <a:tailEnd type="triangle"/>
-          </a:ln>
-        </p:spPr>
-        <p:style>
-          <a:lnRef idx="1">
-            <a:schemeClr val="accent1"/>
-          </a:lnRef>
-          <a:fillRef idx="0">
-            <a:schemeClr val="accent1"/>
-          </a:fillRef>
-          <a:effectRef idx="0">
-            <a:schemeClr val="accent1"/>
-          </a:effectRef>
-          <a:fontRef idx="minor">
-            <a:schemeClr val="tx1"/>
-          </a:fontRef>
-        </p:style>
-      </p:cxnSp>
-      <p:cxnSp>
-        <p:nvCxnSpPr>
-          <p:cNvPr id="114" name="Connecteur droit avec flèche 113">
-            <a:extLst>
-              <a:ext uri="{FF2B5EF4-FFF2-40B4-BE49-F238E27FC236}">
-                <a16:creationId xmlns:a16="http://schemas.microsoft.com/office/drawing/2014/main" id="{D838041E-F078-6C94-A2B0-03079C59425A}"/>
-              </a:ext>
-            </a:extLst>
-          </p:cNvPr>
-          <p:cNvCxnSpPr>
-            <a:cxnSpLocks/>
-            <a:stCxn id="65" idx="3"/>
-            <a:endCxn id="103" idx="1"/>
-          </p:cNvCxnSpPr>
-          <p:nvPr/>
-        </p:nvCxnSpPr>
-        <p:spPr>
-          <a:xfrm flipV="1">
-            <a:off x="1142993" y="3163317"/>
-            <a:ext cx="2221727" cy="2128"/>
-          </a:xfrm>
-          <a:prstGeom prst="straightConnector1">
-            <a:avLst/>
-          </a:prstGeom>
-          <a:ln w="9525">
-            <a:solidFill>
-              <a:schemeClr val="bg1">
-                <a:lumMod val="65000"/>
-              </a:schemeClr>
-            </a:solidFill>
-            <a:tailEnd type="triangle"/>
-          </a:ln>
-        </p:spPr>
-        <p:style>
-          <a:lnRef idx="1">
-            <a:schemeClr val="accent1"/>
-          </a:lnRef>
-          <a:fillRef idx="0">
-            <a:schemeClr val="accent1"/>
-          </a:fillRef>
-          <a:effectRef idx="0">
-            <a:schemeClr val="accent1"/>
-          </a:effectRef>
-          <a:fontRef idx="minor">
-            <a:schemeClr val="tx1"/>
-          </a:fontRef>
-        </p:style>
-      </p:cxnSp>
-      <p:cxnSp>
-        <p:nvCxnSpPr>
-          <p:cNvPr id="119" name="Connecteur droit avec flèche 118">
-            <a:extLst>
-              <a:ext uri="{FF2B5EF4-FFF2-40B4-BE49-F238E27FC236}">
-                <a16:creationId xmlns:a16="http://schemas.microsoft.com/office/drawing/2014/main" id="{71456FE5-64C3-8B7D-7CCF-34EA9321C3CA}"/>
-              </a:ext>
-            </a:extLst>
-          </p:cNvPr>
-          <p:cNvCxnSpPr>
-            <a:cxnSpLocks/>
-            <a:stCxn id="68" idx="3"/>
-            <a:endCxn id="104" idx="1"/>
-          </p:cNvCxnSpPr>
-          <p:nvPr/>
-        </p:nvCxnSpPr>
-        <p:spPr>
-          <a:xfrm flipV="1">
-            <a:off x="1142991" y="3876356"/>
-            <a:ext cx="2196200" cy="782"/>
-          </a:xfrm>
-          <a:prstGeom prst="straightConnector1">
-            <a:avLst/>
-          </a:prstGeom>
-          <a:ln w="9525">
-            <a:solidFill>
-              <a:schemeClr val="bg1">
-                <a:lumMod val="65000"/>
-              </a:schemeClr>
-            </a:solidFill>
-            <a:tailEnd type="triangle"/>
-          </a:ln>
-        </p:spPr>
-        <p:style>
-          <a:lnRef idx="1">
-            <a:schemeClr val="accent1"/>
-          </a:lnRef>
-          <a:fillRef idx="0">
-            <a:schemeClr val="accent1"/>
-          </a:fillRef>
-          <a:effectRef idx="0">
-            <a:schemeClr val="accent1"/>
-          </a:effectRef>
-          <a:fontRef idx="minor">
-            <a:schemeClr val="tx1"/>
-          </a:fontRef>
-        </p:style>
-      </p:cxnSp>
-      <p:pic>
-        <p:nvPicPr>
-          <p:cNvPr id="123" name="Image 122">
-            <a:extLst>
-              <a:ext uri="{FF2B5EF4-FFF2-40B4-BE49-F238E27FC236}">
-                <a16:creationId xmlns:a16="http://schemas.microsoft.com/office/drawing/2014/main" id="{D715FB7A-A546-1D86-6C47-6E592D4CF67D}"/>
-              </a:ext>
-            </a:extLst>
-          </p:cNvPr>
-          <p:cNvPicPr>
-            <a:picLocks noChangeAspect="1"/>
-          </p:cNvPicPr>
-          <p:nvPr/>
-        </p:nvPicPr>
-        <p:blipFill>
-          <a:blip r:embed="rId15"/>
-          <a:stretch>
-            <a:fillRect/>
-          </a:stretch>
-        </p:blipFill>
-        <p:spPr>
-          <a:xfrm>
-            <a:off x="3305340" y="2221695"/>
-            <a:ext cx="277668" cy="193267"/>
-          </a:xfrm>
-          <a:prstGeom prst="rect">
-            <a:avLst/>
-          </a:prstGeom>
-          <a:ln>
+          </p:spPr>
+          <p:txBody>
+            <a:bodyPr wrap="square" rtlCol="0">
+              <a:spAutoFit/>
+            </a:bodyPr>
+            <a:lstStyle/>
+            <a:p>
+              <a:pPr algn="ctr"/>
+              <a:r>
+                <a:rPr lang="fr-FR" sz="700" b="1" dirty="0"/>
+                <a:t>Solar Data</a:t>
+              </a:r>
+            </a:p>
+          </p:txBody>
+        </p:sp>
+        <p:sp>
+          <p:nvSpPr>
+            <p:cNvPr id="73" name="ZoneTexte 72">
+              <a:extLst>
+                <a:ext uri="{FF2B5EF4-FFF2-40B4-BE49-F238E27FC236}">
+                  <a16:creationId xmlns:a16="http://schemas.microsoft.com/office/drawing/2014/main" id="{33C41871-317D-BA64-26E2-EBEE7A51AE73}"/>
+                </a:ext>
+              </a:extLst>
+            </p:cNvPr>
+            <p:cNvSpPr txBox="1"/>
+            <p:nvPr/>
+          </p:nvSpPr>
+          <p:spPr>
+            <a:xfrm>
+              <a:off x="263070" y="2047148"/>
+              <a:ext cx="1390212" cy="200055"/>
+            </a:xfrm>
+            <a:prstGeom prst="rect">
+              <a:avLst/>
+            </a:prstGeom>
             <a:noFill/>
-          </a:ln>
-        </p:spPr>
-      </p:pic>
-      <p:pic>
-        <p:nvPicPr>
-          <p:cNvPr id="124" name="Image 123">
-            <a:extLst>
-              <a:ext uri="{FF2B5EF4-FFF2-40B4-BE49-F238E27FC236}">
-                <a16:creationId xmlns:a16="http://schemas.microsoft.com/office/drawing/2014/main" id="{C5293EF4-20E0-DF10-D159-DD1506BA9014}"/>
-              </a:ext>
-            </a:extLst>
-          </p:cNvPr>
-          <p:cNvPicPr>
-            <a:picLocks noChangeAspect="1"/>
-          </p:cNvPicPr>
-          <p:nvPr/>
-        </p:nvPicPr>
-        <p:blipFill>
-          <a:blip r:embed="rId15"/>
-          <a:stretch>
-            <a:fillRect/>
-          </a:stretch>
-        </p:blipFill>
-        <p:spPr>
-          <a:xfrm>
-            <a:off x="3316145" y="2905022"/>
-            <a:ext cx="277668" cy="193267"/>
-          </a:xfrm>
-          <a:prstGeom prst="rect">
-            <a:avLst/>
-          </a:prstGeom>
-          <a:ln>
-            <a:noFill/>
-          </a:ln>
-        </p:spPr>
-      </p:pic>
-      <p:pic>
-        <p:nvPicPr>
-          <p:cNvPr id="125" name="Image 124">
-            <a:extLst>
-              <a:ext uri="{FF2B5EF4-FFF2-40B4-BE49-F238E27FC236}">
-                <a16:creationId xmlns:a16="http://schemas.microsoft.com/office/drawing/2014/main" id="{33AAD6E8-755C-ADC6-DD82-513A7A7A0F5B}"/>
-              </a:ext>
-            </a:extLst>
-          </p:cNvPr>
-          <p:cNvPicPr>
-            <a:picLocks noChangeAspect="1"/>
-          </p:cNvPicPr>
-          <p:nvPr/>
-        </p:nvPicPr>
-        <p:blipFill>
-          <a:blip r:embed="rId15"/>
-          <a:stretch>
-            <a:fillRect/>
-          </a:stretch>
-        </p:blipFill>
-        <p:spPr>
-          <a:xfrm>
-            <a:off x="3305323" y="3593675"/>
-            <a:ext cx="277668" cy="193267"/>
-          </a:xfrm>
-          <a:prstGeom prst="rect">
-            <a:avLst/>
-          </a:prstGeom>
-          <a:ln>
-            <a:noFill/>
-          </a:ln>
-        </p:spPr>
-      </p:pic>
-      <p:pic>
-        <p:nvPicPr>
-          <p:cNvPr id="126" name="Image 125">
-            <a:extLst>
-              <a:ext uri="{FF2B5EF4-FFF2-40B4-BE49-F238E27FC236}">
-                <a16:creationId xmlns:a16="http://schemas.microsoft.com/office/drawing/2014/main" id="{CDFE02BC-1F91-5E6A-387E-5166BAEB4B47}"/>
-              </a:ext>
-            </a:extLst>
-          </p:cNvPr>
-          <p:cNvPicPr>
-            <a:picLocks noChangeAspect="1"/>
-          </p:cNvPicPr>
-          <p:nvPr/>
-        </p:nvPicPr>
-        <p:blipFill>
-          <a:blip r:embed="rId15"/>
-          <a:stretch>
-            <a:fillRect/>
-          </a:stretch>
-        </p:blipFill>
-        <p:spPr>
-          <a:xfrm>
-            <a:off x="3324300" y="1569286"/>
-            <a:ext cx="277668" cy="193267"/>
-          </a:xfrm>
-          <a:prstGeom prst="rect">
-            <a:avLst/>
-          </a:prstGeom>
-          <a:ln>
-            <a:noFill/>
-          </a:ln>
-        </p:spPr>
-      </p:pic>
+          </p:spPr>
+          <p:txBody>
+            <a:bodyPr wrap="square" rtlCol="0">
+              <a:spAutoFit/>
+            </a:bodyPr>
+            <a:lstStyle/>
+            <a:p>
+              <a:pPr algn="ctr"/>
+              <a:r>
+                <a:rPr lang="fr-FR" sz="700" b="1" dirty="0"/>
+                <a:t>Météo</a:t>
+              </a:r>
+            </a:p>
+          </p:txBody>
+        </p:sp>
+        <p:cxnSp>
+          <p:nvCxnSpPr>
+            <p:cNvPr id="75" name="Connecteur droit avec flèche 74">
+              <a:extLst>
+                <a:ext uri="{FF2B5EF4-FFF2-40B4-BE49-F238E27FC236}">
+                  <a16:creationId xmlns:a16="http://schemas.microsoft.com/office/drawing/2014/main" id="{EA2D8E70-0E38-6F85-C46D-473AA9425B34}"/>
+                </a:ext>
+              </a:extLst>
+            </p:cNvPr>
+            <p:cNvCxnSpPr>
+              <a:cxnSpLocks/>
+              <a:stCxn id="1028" idx="3"/>
+              <a:endCxn id="1026" idx="1"/>
+            </p:cNvCxnSpPr>
+            <p:nvPr/>
+          </p:nvCxnSpPr>
+          <p:spPr>
+            <a:xfrm>
+              <a:off x="1376124" y="1848815"/>
+              <a:ext cx="389331" cy="975"/>
+            </a:xfrm>
+            <a:prstGeom prst="straightConnector1">
+              <a:avLst/>
+            </a:prstGeom>
+            <a:ln w="9525">
+              <a:solidFill>
+                <a:schemeClr val="bg1">
+                  <a:lumMod val="65000"/>
+                </a:schemeClr>
+              </a:solidFill>
+              <a:tailEnd type="triangle"/>
+            </a:ln>
+          </p:spPr>
+          <p:style>
+            <a:lnRef idx="1">
+              <a:schemeClr val="accent1"/>
+            </a:lnRef>
+            <a:fillRef idx="0">
+              <a:schemeClr val="accent1"/>
+            </a:fillRef>
+            <a:effectRef idx="0">
+              <a:schemeClr val="accent1"/>
+            </a:effectRef>
+            <a:fontRef idx="minor">
+              <a:schemeClr val="tx1"/>
+            </a:fontRef>
+          </p:style>
+        </p:cxnSp>
+      </p:grpSp>
       <p:cxnSp>
         <p:nvCxnSpPr>
           <p:cNvPr id="1029" name="Connecteur : en angle 1028">
@@ -31019,61 +29897,6 @@
           </a:fontRef>
         </p:style>
       </p:cxnSp>
-      <p:sp>
-        <p:nvSpPr>
-          <p:cNvPr id="1074" name="Rectangle : coins arrondis 1073">
-            <a:extLst>
-              <a:ext uri="{FF2B5EF4-FFF2-40B4-BE49-F238E27FC236}">
-                <a16:creationId xmlns:a16="http://schemas.microsoft.com/office/drawing/2014/main" id="{4162FACA-EA89-9D97-B392-632929E9443D}"/>
-              </a:ext>
-            </a:extLst>
-          </p:cNvPr>
-          <p:cNvSpPr/>
-          <p:nvPr/>
-        </p:nvSpPr>
-        <p:spPr>
-          <a:xfrm>
-            <a:off x="6955001" y="1904349"/>
-            <a:ext cx="1228499" cy="1800970"/>
-          </a:xfrm>
-          <a:prstGeom prst="roundRect">
-            <a:avLst>
-              <a:gd name="adj" fmla="val 7978"/>
-            </a:avLst>
-          </a:prstGeom>
-          <a:noFill/>
-          <a:ln w="9525">
-            <a:solidFill>
-              <a:srgbClr val="FFC000"/>
-            </a:solidFill>
-            <a:prstDash val="dash"/>
-          </a:ln>
-        </p:spPr>
-        <p:style>
-          <a:lnRef idx="2">
-            <a:schemeClr val="accent1">
-              <a:shade val="15000"/>
-            </a:schemeClr>
-          </a:lnRef>
-          <a:fillRef idx="1">
-            <a:schemeClr val="accent1"/>
-          </a:fillRef>
-          <a:effectRef idx="0">
-            <a:schemeClr val="accent1"/>
-          </a:effectRef>
-          <a:fontRef idx="minor">
-            <a:schemeClr val="lt1"/>
-          </a:fontRef>
-        </p:style>
-        <p:txBody>
-          <a:bodyPr rtlCol="0" anchor="ctr"/>
-          <a:lstStyle/>
-          <a:p>
-            <a:pPr algn="ctr"/>
-            <a:endParaRPr lang="fr-FR" dirty="0"/>
-          </a:p>
-        </p:txBody>
-      </p:sp>
       <p:cxnSp>
         <p:nvCxnSpPr>
           <p:cNvPr id="1075" name="Connecteur : en angle 1074">
@@ -31118,54 +29941,821 @@
           </a:fontRef>
         </p:style>
       </p:cxnSp>
-      <p:cxnSp>
-        <p:nvCxnSpPr>
-          <p:cNvPr id="2055" name="Connecteur droit avec flèche 2054">
+      <p:grpSp>
+        <p:nvGrpSpPr>
+          <p:cNvPr id="11" name="Groupe 10">
             <a:extLst>
               <a:ext uri="{FF2B5EF4-FFF2-40B4-BE49-F238E27FC236}">
-                <a16:creationId xmlns:a16="http://schemas.microsoft.com/office/drawing/2014/main" id="{87E620DB-CBC1-5464-4E1E-A4B454C8BE5D}"/>
+                <a16:creationId xmlns:a16="http://schemas.microsoft.com/office/drawing/2014/main" id="{2CB2D600-7028-C267-C7F2-4B9481AE645B}"/>
               </a:ext>
             </a:extLst>
           </p:cNvPr>
-          <p:cNvCxnSpPr>
-            <a:cxnSpLocks/>
-            <a:stCxn id="1032" idx="3"/>
-            <a:endCxn id="102" idx="1"/>
-          </p:cNvCxnSpPr>
+          <p:cNvGrpSpPr/>
           <p:nvPr/>
-        </p:nvCxnSpPr>
-        <p:spPr>
-          <a:xfrm flipV="1">
-            <a:off x="2973921" y="1848802"/>
-            <a:ext cx="404362" cy="13"/>
+        </p:nvGrpSpPr>
+        <p:grpSpPr>
+          <a:xfrm>
+            <a:off x="1142991" y="1458686"/>
+            <a:ext cx="3235914" cy="3272971"/>
+            <a:chOff x="1142991" y="1458686"/>
+            <a:chExt cx="3235914" cy="3272971"/>
           </a:xfrm>
-          <a:prstGeom prst="straightConnector1">
-            <a:avLst/>
-          </a:prstGeom>
-          <a:ln w="9525">
+        </p:grpSpPr>
+        <p:pic>
+          <p:nvPicPr>
+            <p:cNvPr id="1032" name="Picture 8">
+              <a:extLst>
+                <a:ext uri="{FF2B5EF4-FFF2-40B4-BE49-F238E27FC236}">
+                  <a16:creationId xmlns:a16="http://schemas.microsoft.com/office/drawing/2014/main" id="{0AA62D0C-7533-F64F-5205-AC2C6EB164FE}"/>
+                </a:ext>
+              </a:extLst>
+            </p:cNvPr>
+            <p:cNvPicPr>
+              <a:picLocks noChangeAspect="1" noChangeArrowheads="1"/>
+            </p:cNvPicPr>
+            <p:nvPr/>
+          </p:nvPicPr>
+          <p:blipFill rotWithShape="1">
+            <a:blip r:embed="rId11">
+              <a:extLst>
+                <a:ext uri="{28A0092B-C50C-407E-A947-70E740481C1C}">
+                  <a14:useLocalDpi xmlns:a14="http://schemas.microsoft.com/office/drawing/2010/main" val="0"/>
+                </a:ext>
+              </a:extLst>
+            </a:blip>
+            <a:srcRect l="18372" t="16968" r="15985" b="15970"/>
+            <a:stretch>
+              <a:fillRect/>
+            </a:stretch>
+          </p:blipFill>
+          <p:spPr bwMode="auto">
+            <a:xfrm>
+              <a:off x="2696327" y="1707018"/>
+              <a:ext cx="277594" cy="283594"/>
+            </a:xfrm>
+            <a:prstGeom prst="rect">
+              <a:avLst/>
+            </a:prstGeom>
+            <a:noFill/>
+            <a:extLst>
+              <a:ext uri="{909E8E84-426E-40DD-AFC4-6F175D3DCCD1}">
+                <a14:hiddenFill xmlns:a14="http://schemas.microsoft.com/office/drawing/2010/main">
+                  <a:solidFill>
+                    <a:srgbClr val="FFFFFF"/>
+                  </a:solidFill>
+                </a14:hiddenFill>
+              </a:ext>
+            </a:extLst>
+          </p:spPr>
+        </p:pic>
+        <p:cxnSp>
+          <p:nvCxnSpPr>
+            <p:cNvPr id="29" name="Connecteur droit 28">
+              <a:extLst>
+                <a:ext uri="{FF2B5EF4-FFF2-40B4-BE49-F238E27FC236}">
+                  <a16:creationId xmlns:a16="http://schemas.microsoft.com/office/drawing/2014/main" id="{2F5C326A-12BF-B849-9176-2CB67D7A7ED9}"/>
+                </a:ext>
+              </a:extLst>
+            </p:cNvPr>
+            <p:cNvCxnSpPr/>
+            <p:nvPr/>
+          </p:nvCxnSpPr>
+          <p:spPr>
+            <a:xfrm>
+              <a:off x="4378905" y="1458686"/>
+              <a:ext cx="0" cy="3272971"/>
+            </a:xfrm>
+            <a:prstGeom prst="line">
+              <a:avLst/>
+            </a:prstGeom>
+            <a:ln w="19050">
+              <a:solidFill>
+                <a:schemeClr val="bg1">
+                  <a:lumMod val="75000"/>
+                </a:schemeClr>
+              </a:solidFill>
+              <a:prstDash val="dash"/>
+            </a:ln>
+          </p:spPr>
+          <p:style>
+            <a:lnRef idx="1">
+              <a:schemeClr val="dk1"/>
+            </a:lnRef>
+            <a:fillRef idx="0">
+              <a:schemeClr val="dk1"/>
+            </a:fillRef>
+            <a:effectRef idx="0">
+              <a:schemeClr val="dk1"/>
+            </a:effectRef>
+            <a:fontRef idx="minor">
+              <a:schemeClr val="tx1"/>
+            </a:fontRef>
+          </p:style>
+        </p:cxnSp>
+        <p:pic>
+          <p:nvPicPr>
+            <p:cNvPr id="2050" name="Picture 2">
+              <a:extLst>
+                <a:ext uri="{FF2B5EF4-FFF2-40B4-BE49-F238E27FC236}">
+                  <a16:creationId xmlns:a16="http://schemas.microsoft.com/office/drawing/2014/main" id="{66BE5478-2C49-E651-22DF-909C00CA75C0}"/>
+                </a:ext>
+              </a:extLst>
+            </p:cNvPr>
+            <p:cNvPicPr>
+              <a:picLocks noChangeAspect="1" noChangeArrowheads="1"/>
+            </p:cNvPicPr>
+            <p:nvPr/>
+          </p:nvPicPr>
+          <p:blipFill rotWithShape="1">
+            <a:blip r:embed="rId12">
+              <a:extLst>
+                <a:ext uri="{28A0092B-C50C-407E-A947-70E740481C1C}">
+                  <a14:useLocalDpi xmlns:a14="http://schemas.microsoft.com/office/drawing/2010/main" val="0"/>
+                </a:ext>
+              </a:extLst>
+            </a:blip>
+            <a:srcRect l="15800" t="16870" r="16971" b="17050"/>
+            <a:stretch>
+              <a:fillRect/>
+            </a:stretch>
+          </p:blipFill>
+          <p:spPr bwMode="auto">
+            <a:xfrm>
+              <a:off x="3369783" y="2328613"/>
+              <a:ext cx="350993" cy="344994"/>
+            </a:xfrm>
+            <a:prstGeom prst="rect">
+              <a:avLst/>
+            </a:prstGeom>
+            <a:noFill/>
+            <a:extLst>
+              <a:ext uri="{909E8E84-426E-40DD-AFC4-6F175D3DCCD1}">
+                <a14:hiddenFill xmlns:a14="http://schemas.microsoft.com/office/drawing/2010/main">
+                  <a:solidFill>
+                    <a:srgbClr val="FFFFFF"/>
+                  </a:solidFill>
+                </a14:hiddenFill>
+              </a:ext>
+            </a:extLst>
+          </p:spPr>
+        </p:pic>
+        <p:sp>
+          <p:nvSpPr>
+            <p:cNvPr id="71" name="Rectangle : coins arrondis 70">
+              <a:extLst>
+                <a:ext uri="{FF2B5EF4-FFF2-40B4-BE49-F238E27FC236}">
+                  <a16:creationId xmlns:a16="http://schemas.microsoft.com/office/drawing/2014/main" id="{E74B2057-34BC-1980-9671-44A128491597}"/>
+                </a:ext>
+              </a:extLst>
+            </p:cNvPr>
+            <p:cNvSpPr/>
+            <p:nvPr/>
+          </p:nvSpPr>
+          <p:spPr>
+            <a:xfrm>
+              <a:off x="2461359" y="1469509"/>
+              <a:ext cx="1776005" cy="2957143"/>
+            </a:xfrm>
+            <a:prstGeom prst="roundRect">
+              <a:avLst/>
+            </a:prstGeom>
+            <a:noFill/>
+            <a:ln w="9525">
+              <a:solidFill>
+                <a:srgbClr val="FFC000"/>
+              </a:solidFill>
+              <a:prstDash val="dash"/>
+            </a:ln>
+          </p:spPr>
+          <p:style>
+            <a:lnRef idx="2">
+              <a:schemeClr val="accent1">
+                <a:shade val="15000"/>
+              </a:schemeClr>
+            </a:lnRef>
+            <a:fillRef idx="1">
+              <a:schemeClr val="accent1"/>
+            </a:fillRef>
+            <a:effectRef idx="0">
+              <a:schemeClr val="accent1"/>
+            </a:effectRef>
+            <a:fontRef idx="minor">
+              <a:schemeClr val="lt1"/>
+            </a:fontRef>
+          </p:style>
+          <p:txBody>
+            <a:bodyPr rtlCol="0" anchor="ctr"/>
+            <a:lstStyle/>
+            <a:p>
+              <a:pPr algn="ctr"/>
+              <a:endParaRPr lang="fr-FR" dirty="0"/>
+            </a:p>
+          </p:txBody>
+        </p:sp>
+        <p:cxnSp>
+          <p:nvCxnSpPr>
+            <p:cNvPr id="99" name="Connecteur droit avec flèche 98">
+              <a:extLst>
+                <a:ext uri="{FF2B5EF4-FFF2-40B4-BE49-F238E27FC236}">
+                  <a16:creationId xmlns:a16="http://schemas.microsoft.com/office/drawing/2014/main" id="{1740FD3C-BB82-E8E4-4341-9F9B0A291611}"/>
+                </a:ext>
+              </a:extLst>
+            </p:cNvPr>
+            <p:cNvCxnSpPr>
+              <a:cxnSpLocks/>
+              <a:stCxn id="1026" idx="3"/>
+              <a:endCxn id="1032" idx="1"/>
+            </p:cNvCxnSpPr>
+            <p:nvPr/>
+          </p:nvCxnSpPr>
+          <p:spPr>
+            <a:xfrm flipV="1">
+              <a:off x="2146772" y="1848815"/>
+              <a:ext cx="549555" cy="975"/>
+            </a:xfrm>
+            <a:prstGeom prst="straightConnector1">
+              <a:avLst/>
+            </a:prstGeom>
+            <a:ln w="9525">
+              <a:solidFill>
+                <a:schemeClr val="bg1">
+                  <a:lumMod val="65000"/>
+                </a:schemeClr>
+              </a:solidFill>
+              <a:tailEnd type="triangle"/>
+            </a:ln>
+          </p:spPr>
+          <p:style>
+            <a:lnRef idx="1">
+              <a:schemeClr val="accent1"/>
+            </a:lnRef>
+            <a:fillRef idx="0">
+              <a:schemeClr val="accent1"/>
+            </a:fillRef>
+            <a:effectRef idx="0">
+              <a:schemeClr val="accent1"/>
+            </a:effectRef>
+            <a:fontRef idx="minor">
+              <a:schemeClr val="tx1"/>
+            </a:fontRef>
+          </p:style>
+        </p:cxnSp>
+        <p:pic>
+          <p:nvPicPr>
+            <p:cNvPr id="102" name="Picture 2">
+              <a:extLst>
+                <a:ext uri="{FF2B5EF4-FFF2-40B4-BE49-F238E27FC236}">
+                  <a16:creationId xmlns:a16="http://schemas.microsoft.com/office/drawing/2014/main" id="{26F3760A-01F7-627E-27AC-B1F00D3B52C6}"/>
+                </a:ext>
+              </a:extLst>
+            </p:cNvPr>
+            <p:cNvPicPr>
+              <a:picLocks noChangeAspect="1" noChangeArrowheads="1"/>
+            </p:cNvPicPr>
+            <p:nvPr/>
+          </p:nvPicPr>
+          <p:blipFill rotWithShape="1">
+            <a:blip r:embed="rId12">
+              <a:extLst>
+                <a:ext uri="{28A0092B-C50C-407E-A947-70E740481C1C}">
+                  <a14:useLocalDpi xmlns:a14="http://schemas.microsoft.com/office/drawing/2010/main" val="0"/>
+                </a:ext>
+              </a:extLst>
+            </a:blip>
+            <a:srcRect l="15800" t="16870" r="16971" b="17050"/>
+            <a:stretch>
+              <a:fillRect/>
+            </a:stretch>
+          </p:blipFill>
+          <p:spPr bwMode="auto">
+            <a:xfrm>
+              <a:off x="3378283" y="1676305"/>
+              <a:ext cx="350993" cy="344994"/>
+            </a:xfrm>
+            <a:prstGeom prst="rect">
+              <a:avLst/>
+            </a:prstGeom>
+            <a:noFill/>
+            <a:extLst>
+              <a:ext uri="{909E8E84-426E-40DD-AFC4-6F175D3DCCD1}">
+                <a14:hiddenFill xmlns:a14="http://schemas.microsoft.com/office/drawing/2010/main">
+                  <a:solidFill>
+                    <a:srgbClr val="FFFFFF"/>
+                  </a:solidFill>
+                </a14:hiddenFill>
+              </a:ext>
+            </a:extLst>
+          </p:spPr>
+        </p:pic>
+        <p:pic>
+          <p:nvPicPr>
+            <p:cNvPr id="103" name="Picture 2">
+              <a:extLst>
+                <a:ext uri="{FF2B5EF4-FFF2-40B4-BE49-F238E27FC236}">
+                  <a16:creationId xmlns:a16="http://schemas.microsoft.com/office/drawing/2014/main" id="{B33DCAA7-8CDF-83ED-2AFC-66875EDF434A}"/>
+                </a:ext>
+              </a:extLst>
+            </p:cNvPr>
+            <p:cNvPicPr>
+              <a:picLocks noChangeAspect="1" noChangeArrowheads="1"/>
+            </p:cNvPicPr>
+            <p:nvPr/>
+          </p:nvPicPr>
+          <p:blipFill rotWithShape="1">
+            <a:blip r:embed="rId12">
+              <a:extLst>
+                <a:ext uri="{28A0092B-C50C-407E-A947-70E740481C1C}">
+                  <a14:useLocalDpi xmlns:a14="http://schemas.microsoft.com/office/drawing/2010/main" val="0"/>
+                </a:ext>
+              </a:extLst>
+            </a:blip>
+            <a:srcRect l="15800" t="16870" r="16971" b="17050"/>
+            <a:stretch>
+              <a:fillRect/>
+            </a:stretch>
+          </p:blipFill>
+          <p:spPr bwMode="auto">
+            <a:xfrm>
+              <a:off x="3364720" y="2990820"/>
+              <a:ext cx="350993" cy="344994"/>
+            </a:xfrm>
+            <a:prstGeom prst="rect">
+              <a:avLst/>
+            </a:prstGeom>
+            <a:noFill/>
+            <a:extLst>
+              <a:ext uri="{909E8E84-426E-40DD-AFC4-6F175D3DCCD1}">
+                <a14:hiddenFill xmlns:a14="http://schemas.microsoft.com/office/drawing/2010/main">
+                  <a:solidFill>
+                    <a:srgbClr val="FFFFFF"/>
+                  </a:solidFill>
+                </a14:hiddenFill>
+              </a:ext>
+            </a:extLst>
+          </p:spPr>
+        </p:pic>
+        <p:pic>
+          <p:nvPicPr>
+            <p:cNvPr id="104" name="Picture 2">
+              <a:extLst>
+                <a:ext uri="{FF2B5EF4-FFF2-40B4-BE49-F238E27FC236}">
+                  <a16:creationId xmlns:a16="http://schemas.microsoft.com/office/drawing/2014/main" id="{30EDEF50-F042-0782-1F82-E1015B7ED2D4}"/>
+                </a:ext>
+              </a:extLst>
+            </p:cNvPr>
+            <p:cNvPicPr>
+              <a:picLocks noChangeAspect="1" noChangeArrowheads="1"/>
+            </p:cNvPicPr>
+            <p:nvPr/>
+          </p:nvPicPr>
+          <p:blipFill rotWithShape="1">
+            <a:blip r:embed="rId12">
+              <a:extLst>
+                <a:ext uri="{28A0092B-C50C-407E-A947-70E740481C1C}">
+                  <a14:useLocalDpi xmlns:a14="http://schemas.microsoft.com/office/drawing/2010/main" val="0"/>
+                </a:ext>
+              </a:extLst>
+            </a:blip>
+            <a:srcRect l="15800" t="16870" r="16971" b="17050"/>
+            <a:stretch>
+              <a:fillRect/>
+            </a:stretch>
+          </p:blipFill>
+          <p:spPr bwMode="auto">
+            <a:xfrm>
+              <a:off x="3339191" y="3703859"/>
+              <a:ext cx="350993" cy="344994"/>
+            </a:xfrm>
+            <a:prstGeom prst="rect">
+              <a:avLst/>
+            </a:prstGeom>
+            <a:noFill/>
+            <a:extLst>
+              <a:ext uri="{909E8E84-426E-40DD-AFC4-6F175D3DCCD1}">
+                <a14:hiddenFill xmlns:a14="http://schemas.microsoft.com/office/drawing/2010/main">
+                  <a:solidFill>
+                    <a:srgbClr val="FFFFFF"/>
+                  </a:solidFill>
+                </a14:hiddenFill>
+              </a:ext>
+            </a:extLst>
+          </p:spPr>
+        </p:pic>
+        <p:sp>
+          <p:nvSpPr>
+            <p:cNvPr id="106" name="Rectangle : coins arrondis 105">
+              <a:extLst>
+                <a:ext uri="{FF2B5EF4-FFF2-40B4-BE49-F238E27FC236}">
+                  <a16:creationId xmlns:a16="http://schemas.microsoft.com/office/drawing/2014/main" id="{70820C9A-B957-87A8-109D-6C661627DA4C}"/>
+                </a:ext>
+              </a:extLst>
+            </p:cNvPr>
+            <p:cNvSpPr/>
+            <p:nvPr/>
+          </p:nvSpPr>
+          <p:spPr>
+            <a:xfrm>
+              <a:off x="3364720" y="4265830"/>
+              <a:ext cx="868391" cy="252609"/>
+            </a:xfrm>
+            <a:prstGeom prst="roundRect">
+              <a:avLst/>
+            </a:prstGeom>
             <a:solidFill>
               <a:schemeClr val="bg1">
-                <a:lumMod val="65000"/>
+                <a:lumMod val="95000"/>
               </a:schemeClr>
             </a:solidFill>
-            <a:tailEnd type="triangle"/>
-          </a:ln>
-        </p:spPr>
-        <p:style>
-          <a:lnRef idx="1">
-            <a:schemeClr val="accent1"/>
-          </a:lnRef>
-          <a:fillRef idx="0">
-            <a:schemeClr val="accent1"/>
-          </a:fillRef>
-          <a:effectRef idx="0">
-            <a:schemeClr val="accent1"/>
-          </a:effectRef>
-          <a:fontRef idx="minor">
-            <a:schemeClr val="tx1"/>
-          </a:fontRef>
-        </p:style>
-      </p:cxnSp>
+            <a:ln>
+              <a:noFill/>
+            </a:ln>
+          </p:spPr>
+          <p:style>
+            <a:lnRef idx="2">
+              <a:schemeClr val="accent1">
+                <a:shade val="15000"/>
+              </a:schemeClr>
+            </a:lnRef>
+            <a:fillRef idx="1">
+              <a:schemeClr val="accent1"/>
+            </a:fillRef>
+            <a:effectRef idx="0">
+              <a:schemeClr val="accent1"/>
+            </a:effectRef>
+            <a:fontRef idx="minor">
+              <a:schemeClr val="lt1"/>
+            </a:fontRef>
+          </p:style>
+          <p:txBody>
+            <a:bodyPr rtlCol="0" anchor="ctr"/>
+            <a:lstStyle/>
+            <a:p>
+              <a:r>
+                <a:rPr lang="fr-FR" sz="700" b="1" dirty="0">
+                  <a:solidFill>
+                    <a:schemeClr val="tx1"/>
+                  </a:solidFill>
+                </a:rPr>
+                <a:t>AWS S3</a:t>
+              </a:r>
+            </a:p>
+          </p:txBody>
+        </p:sp>
+        <p:pic>
+          <p:nvPicPr>
+            <p:cNvPr id="107" name="Image 106" descr="Une image contenant art, pixel, conception&#10;&#10;Le contenu généré par l’IA peut être incorrect.">
+              <a:extLst>
+                <a:ext uri="{FF2B5EF4-FFF2-40B4-BE49-F238E27FC236}">
+                  <a16:creationId xmlns:a16="http://schemas.microsoft.com/office/drawing/2014/main" id="{9E201599-7D6B-4671-395A-AB9C1CE55DB4}"/>
+                </a:ext>
+              </a:extLst>
+            </p:cNvPr>
+            <p:cNvPicPr>
+              <a:picLocks noChangeAspect="1"/>
+            </p:cNvPicPr>
+            <p:nvPr/>
+          </p:nvPicPr>
+          <p:blipFill>
+            <a:blip r:embed="rId7"/>
+            <a:stretch>
+              <a:fillRect/>
+            </a:stretch>
+          </p:blipFill>
+          <p:spPr>
+            <a:xfrm>
+              <a:off x="3927166" y="4032093"/>
+              <a:ext cx="347790" cy="416048"/>
+            </a:xfrm>
+            <a:prstGeom prst="rect">
+              <a:avLst/>
+            </a:prstGeom>
+          </p:spPr>
+        </p:pic>
+        <p:cxnSp>
+          <p:nvCxnSpPr>
+            <p:cNvPr id="111" name="Connecteur droit avec flèche 110">
+              <a:extLst>
+                <a:ext uri="{FF2B5EF4-FFF2-40B4-BE49-F238E27FC236}">
+                  <a16:creationId xmlns:a16="http://schemas.microsoft.com/office/drawing/2014/main" id="{67D61FBD-E531-1326-0C48-8BF9669015EF}"/>
+                </a:ext>
+              </a:extLst>
+            </p:cNvPr>
+            <p:cNvCxnSpPr>
+              <a:cxnSpLocks/>
+              <a:stCxn id="1030" idx="3"/>
+              <a:endCxn id="2050" idx="1"/>
+            </p:cNvCxnSpPr>
+            <p:nvPr/>
+          </p:nvCxnSpPr>
+          <p:spPr>
+            <a:xfrm flipV="1">
+              <a:off x="1142997" y="2501110"/>
+              <a:ext cx="2226786" cy="370"/>
+            </a:xfrm>
+            <a:prstGeom prst="straightConnector1">
+              <a:avLst/>
+            </a:prstGeom>
+            <a:ln w="9525">
+              <a:solidFill>
+                <a:schemeClr val="bg1">
+                  <a:lumMod val="65000"/>
+                </a:schemeClr>
+              </a:solidFill>
+              <a:tailEnd type="triangle"/>
+            </a:ln>
+          </p:spPr>
+          <p:style>
+            <a:lnRef idx="1">
+              <a:schemeClr val="accent1"/>
+            </a:lnRef>
+            <a:fillRef idx="0">
+              <a:schemeClr val="accent1"/>
+            </a:fillRef>
+            <a:effectRef idx="0">
+              <a:schemeClr val="accent1"/>
+            </a:effectRef>
+            <a:fontRef idx="minor">
+              <a:schemeClr val="tx1"/>
+            </a:fontRef>
+          </p:style>
+        </p:cxnSp>
+        <p:cxnSp>
+          <p:nvCxnSpPr>
+            <p:cNvPr id="114" name="Connecteur droit avec flèche 113">
+              <a:extLst>
+                <a:ext uri="{FF2B5EF4-FFF2-40B4-BE49-F238E27FC236}">
+                  <a16:creationId xmlns:a16="http://schemas.microsoft.com/office/drawing/2014/main" id="{D838041E-F078-6C94-A2B0-03079C59425A}"/>
+                </a:ext>
+              </a:extLst>
+            </p:cNvPr>
+            <p:cNvCxnSpPr>
+              <a:cxnSpLocks/>
+              <a:stCxn id="65" idx="3"/>
+              <a:endCxn id="103" idx="1"/>
+            </p:cNvCxnSpPr>
+            <p:nvPr/>
+          </p:nvCxnSpPr>
+          <p:spPr>
+            <a:xfrm flipV="1">
+              <a:off x="1142993" y="3163317"/>
+              <a:ext cx="2221727" cy="2128"/>
+            </a:xfrm>
+            <a:prstGeom prst="straightConnector1">
+              <a:avLst/>
+            </a:prstGeom>
+            <a:ln w="9525">
+              <a:solidFill>
+                <a:schemeClr val="bg1">
+                  <a:lumMod val="65000"/>
+                </a:schemeClr>
+              </a:solidFill>
+              <a:tailEnd type="triangle"/>
+            </a:ln>
+          </p:spPr>
+          <p:style>
+            <a:lnRef idx="1">
+              <a:schemeClr val="accent1"/>
+            </a:lnRef>
+            <a:fillRef idx="0">
+              <a:schemeClr val="accent1"/>
+            </a:fillRef>
+            <a:effectRef idx="0">
+              <a:schemeClr val="accent1"/>
+            </a:effectRef>
+            <a:fontRef idx="minor">
+              <a:schemeClr val="tx1"/>
+            </a:fontRef>
+          </p:style>
+        </p:cxnSp>
+        <p:cxnSp>
+          <p:nvCxnSpPr>
+            <p:cNvPr id="119" name="Connecteur droit avec flèche 118">
+              <a:extLst>
+                <a:ext uri="{FF2B5EF4-FFF2-40B4-BE49-F238E27FC236}">
+                  <a16:creationId xmlns:a16="http://schemas.microsoft.com/office/drawing/2014/main" id="{71456FE5-64C3-8B7D-7CCF-34EA9321C3CA}"/>
+                </a:ext>
+              </a:extLst>
+            </p:cNvPr>
+            <p:cNvCxnSpPr>
+              <a:cxnSpLocks/>
+              <a:stCxn id="68" idx="3"/>
+              <a:endCxn id="104" idx="1"/>
+            </p:cNvCxnSpPr>
+            <p:nvPr/>
+          </p:nvCxnSpPr>
+          <p:spPr>
+            <a:xfrm flipV="1">
+              <a:off x="1142991" y="3876356"/>
+              <a:ext cx="2196200" cy="782"/>
+            </a:xfrm>
+            <a:prstGeom prst="straightConnector1">
+              <a:avLst/>
+            </a:prstGeom>
+            <a:ln w="9525">
+              <a:solidFill>
+                <a:schemeClr val="bg1">
+                  <a:lumMod val="65000"/>
+                </a:schemeClr>
+              </a:solidFill>
+              <a:tailEnd type="triangle"/>
+            </a:ln>
+          </p:spPr>
+          <p:style>
+            <a:lnRef idx="1">
+              <a:schemeClr val="accent1"/>
+            </a:lnRef>
+            <a:fillRef idx="0">
+              <a:schemeClr val="accent1"/>
+            </a:fillRef>
+            <a:effectRef idx="0">
+              <a:schemeClr val="accent1"/>
+            </a:effectRef>
+            <a:fontRef idx="minor">
+              <a:schemeClr val="tx1"/>
+            </a:fontRef>
+          </p:style>
+        </p:cxnSp>
+        <p:pic>
+          <p:nvPicPr>
+            <p:cNvPr id="123" name="Image 122">
+              <a:extLst>
+                <a:ext uri="{FF2B5EF4-FFF2-40B4-BE49-F238E27FC236}">
+                  <a16:creationId xmlns:a16="http://schemas.microsoft.com/office/drawing/2014/main" id="{D715FB7A-A546-1D86-6C47-6E592D4CF67D}"/>
+                </a:ext>
+              </a:extLst>
+            </p:cNvPr>
+            <p:cNvPicPr>
+              <a:picLocks noChangeAspect="1"/>
+            </p:cNvPicPr>
+            <p:nvPr/>
+          </p:nvPicPr>
+          <p:blipFill>
+            <a:blip r:embed="rId13"/>
+            <a:stretch>
+              <a:fillRect/>
+            </a:stretch>
+          </p:blipFill>
+          <p:spPr>
+            <a:xfrm>
+              <a:off x="3305340" y="2221695"/>
+              <a:ext cx="277668" cy="193267"/>
+            </a:xfrm>
+            <a:prstGeom prst="rect">
+              <a:avLst/>
+            </a:prstGeom>
+            <a:ln>
+              <a:noFill/>
+            </a:ln>
+          </p:spPr>
+        </p:pic>
+        <p:pic>
+          <p:nvPicPr>
+            <p:cNvPr id="124" name="Image 123">
+              <a:extLst>
+                <a:ext uri="{FF2B5EF4-FFF2-40B4-BE49-F238E27FC236}">
+                  <a16:creationId xmlns:a16="http://schemas.microsoft.com/office/drawing/2014/main" id="{C5293EF4-20E0-DF10-D159-DD1506BA9014}"/>
+                </a:ext>
+              </a:extLst>
+            </p:cNvPr>
+            <p:cNvPicPr>
+              <a:picLocks noChangeAspect="1"/>
+            </p:cNvPicPr>
+            <p:nvPr/>
+          </p:nvPicPr>
+          <p:blipFill>
+            <a:blip r:embed="rId13"/>
+            <a:stretch>
+              <a:fillRect/>
+            </a:stretch>
+          </p:blipFill>
+          <p:spPr>
+            <a:xfrm>
+              <a:off x="3316145" y="2905022"/>
+              <a:ext cx="277668" cy="193267"/>
+            </a:xfrm>
+            <a:prstGeom prst="rect">
+              <a:avLst/>
+            </a:prstGeom>
+            <a:ln>
+              <a:noFill/>
+            </a:ln>
+          </p:spPr>
+        </p:pic>
+        <p:pic>
+          <p:nvPicPr>
+            <p:cNvPr id="125" name="Image 124">
+              <a:extLst>
+                <a:ext uri="{FF2B5EF4-FFF2-40B4-BE49-F238E27FC236}">
+                  <a16:creationId xmlns:a16="http://schemas.microsoft.com/office/drawing/2014/main" id="{33AAD6E8-755C-ADC6-DD82-513A7A7A0F5B}"/>
+                </a:ext>
+              </a:extLst>
+            </p:cNvPr>
+            <p:cNvPicPr>
+              <a:picLocks noChangeAspect="1"/>
+            </p:cNvPicPr>
+            <p:nvPr/>
+          </p:nvPicPr>
+          <p:blipFill>
+            <a:blip r:embed="rId13"/>
+            <a:stretch>
+              <a:fillRect/>
+            </a:stretch>
+          </p:blipFill>
+          <p:spPr>
+            <a:xfrm>
+              <a:off x="3305323" y="3593675"/>
+              <a:ext cx="277668" cy="193267"/>
+            </a:xfrm>
+            <a:prstGeom prst="rect">
+              <a:avLst/>
+            </a:prstGeom>
+            <a:ln>
+              <a:noFill/>
+            </a:ln>
+          </p:spPr>
+        </p:pic>
+        <p:pic>
+          <p:nvPicPr>
+            <p:cNvPr id="126" name="Image 125">
+              <a:extLst>
+                <a:ext uri="{FF2B5EF4-FFF2-40B4-BE49-F238E27FC236}">
+                  <a16:creationId xmlns:a16="http://schemas.microsoft.com/office/drawing/2014/main" id="{CDFE02BC-1F91-5E6A-387E-5166BAEB4B47}"/>
+                </a:ext>
+              </a:extLst>
+            </p:cNvPr>
+            <p:cNvPicPr>
+              <a:picLocks noChangeAspect="1"/>
+            </p:cNvPicPr>
+            <p:nvPr/>
+          </p:nvPicPr>
+          <p:blipFill>
+            <a:blip r:embed="rId13"/>
+            <a:stretch>
+              <a:fillRect/>
+            </a:stretch>
+          </p:blipFill>
+          <p:spPr>
+            <a:xfrm>
+              <a:off x="3324300" y="1569286"/>
+              <a:ext cx="277668" cy="193267"/>
+            </a:xfrm>
+            <a:prstGeom prst="rect">
+              <a:avLst/>
+            </a:prstGeom>
+            <a:ln>
+              <a:noFill/>
+            </a:ln>
+          </p:spPr>
+        </p:pic>
+        <p:cxnSp>
+          <p:nvCxnSpPr>
+            <p:cNvPr id="2055" name="Connecteur droit avec flèche 2054">
+              <a:extLst>
+                <a:ext uri="{FF2B5EF4-FFF2-40B4-BE49-F238E27FC236}">
+                  <a16:creationId xmlns:a16="http://schemas.microsoft.com/office/drawing/2014/main" id="{87E620DB-CBC1-5464-4E1E-A4B454C8BE5D}"/>
+                </a:ext>
+              </a:extLst>
+            </p:cNvPr>
+            <p:cNvCxnSpPr>
+              <a:cxnSpLocks/>
+              <a:stCxn id="1032" idx="3"/>
+              <a:endCxn id="102" idx="1"/>
+            </p:cNvCxnSpPr>
+            <p:nvPr/>
+          </p:nvCxnSpPr>
+          <p:spPr>
+            <a:xfrm flipV="1">
+              <a:off x="2973921" y="1848802"/>
+              <a:ext cx="404362" cy="13"/>
+            </a:xfrm>
+            <a:prstGeom prst="straightConnector1">
+              <a:avLst/>
+            </a:prstGeom>
+            <a:ln w="9525">
+              <a:solidFill>
+                <a:schemeClr val="bg1">
+                  <a:lumMod val="65000"/>
+                </a:schemeClr>
+              </a:solidFill>
+              <a:tailEnd type="triangle"/>
+            </a:ln>
+          </p:spPr>
+          <p:style>
+            <a:lnRef idx="1">
+              <a:schemeClr val="accent1"/>
+            </a:lnRef>
+            <a:fillRef idx="0">
+              <a:schemeClr val="accent1"/>
+            </a:fillRef>
+            <a:effectRef idx="0">
+              <a:schemeClr val="accent1"/>
+            </a:effectRef>
+            <a:fontRef idx="minor">
+              <a:schemeClr val="tx1"/>
+            </a:fontRef>
+          </p:style>
+        </p:cxnSp>
+      </p:grpSp>
       <p:pic>
         <p:nvPicPr>
           <p:cNvPr id="2068" name="Picture 8">
@@ -31181,7 +30771,7 @@
           <p:nvPr/>
         </p:nvPicPr>
         <p:blipFill>
-          <a:blip r:embed="rId16">
+          <a:blip r:embed="rId14">
             <a:extLst>
               <a:ext uri="{28A0092B-C50C-407E-A947-70E740481C1C}">
                 <a14:useLocalDpi xmlns:a14="http://schemas.microsoft.com/office/drawing/2010/main" val="0"/>
@@ -31275,56 +30865,420 @@
           </a:p>
         </p:txBody>
       </p:sp>
-      <p:sp>
-        <p:nvSpPr>
-          <p:cNvPr id="2097" name="Rectangle 2096">
+      <p:grpSp>
+        <p:nvGrpSpPr>
+          <p:cNvPr id="17" name="Groupe 16">
             <a:extLst>
               <a:ext uri="{FF2B5EF4-FFF2-40B4-BE49-F238E27FC236}">
-                <a16:creationId xmlns:a16="http://schemas.microsoft.com/office/drawing/2014/main" id="{ADF20F1D-E32A-83D7-1C9F-ED56E1ADF5A6}"/>
+                <a16:creationId xmlns:a16="http://schemas.microsoft.com/office/drawing/2014/main" id="{618688FD-4D2F-7A63-8807-ABB66A2C4089}"/>
               </a:ext>
             </a:extLst>
           </p:cNvPr>
-          <p:cNvSpPr/>
+          <p:cNvGrpSpPr/>
           <p:nvPr/>
-        </p:nvSpPr>
-        <p:spPr>
+        </p:nvGrpSpPr>
+        <p:grpSpPr>
           <a:xfrm>
-            <a:off x="7859073" y="3333557"/>
-            <a:ext cx="362541" cy="326213"/>
+            <a:off x="6540706" y="1351552"/>
+            <a:ext cx="1680908" cy="3145228"/>
+            <a:chOff x="6540706" y="1351552"/>
+            <a:chExt cx="1680908" cy="3145228"/>
           </a:xfrm>
-          <a:prstGeom prst="rect">
-            <a:avLst/>
-          </a:prstGeom>
-          <a:noFill/>
-          <a:ln>
+        </p:grpSpPr>
+        <p:pic>
+          <p:nvPicPr>
+            <p:cNvPr id="2052" name="Picture 4">
+              <a:extLst>
+                <a:ext uri="{FF2B5EF4-FFF2-40B4-BE49-F238E27FC236}">
+                  <a16:creationId xmlns:a16="http://schemas.microsoft.com/office/drawing/2014/main" id="{FCCA093A-E48A-7B59-31BE-E1F8F80AD69D}"/>
+                </a:ext>
+              </a:extLst>
+            </p:cNvPr>
+            <p:cNvPicPr>
+              <a:picLocks noChangeAspect="1" noChangeArrowheads="1"/>
+            </p:cNvPicPr>
+            <p:nvPr/>
+          </p:nvPicPr>
+          <p:blipFill>
+            <a:blip r:embed="rId15">
+              <a:extLst>
+                <a:ext uri="{28A0092B-C50C-407E-A947-70E740481C1C}">
+                  <a14:useLocalDpi xmlns:a14="http://schemas.microsoft.com/office/drawing/2010/main" val="0"/>
+                </a:ext>
+              </a:extLst>
+            </a:blip>
+            <a:srcRect/>
+            <a:stretch>
+              <a:fillRect/>
+            </a:stretch>
+          </p:blipFill>
+          <p:spPr bwMode="auto">
+            <a:xfrm>
+              <a:off x="7151687" y="1351552"/>
+              <a:ext cx="872238" cy="688609"/>
+            </a:xfrm>
+            <a:prstGeom prst="rect">
+              <a:avLst/>
+            </a:prstGeom>
             <a:noFill/>
-          </a:ln>
-        </p:spPr>
-        <p:style>
-          <a:lnRef idx="2">
-            <a:schemeClr val="accent1">
-              <a:shade val="15000"/>
-            </a:schemeClr>
-          </a:lnRef>
-          <a:fillRef idx="1">
-            <a:schemeClr val="accent1"/>
-          </a:fillRef>
-          <a:effectRef idx="0">
-            <a:schemeClr val="accent1"/>
-          </a:effectRef>
-          <a:fontRef idx="minor">
-            <a:schemeClr val="lt1"/>
-          </a:fontRef>
-        </p:style>
-        <p:txBody>
-          <a:bodyPr rtlCol="0" anchor="ctr"/>
-          <a:lstStyle/>
-          <a:p>
-            <a:pPr algn="ctr"/>
-            <a:endParaRPr lang="fr-FR"/>
-          </a:p>
-        </p:txBody>
-      </p:sp>
+            <a:extLst>
+              <a:ext uri="{909E8E84-426E-40DD-AFC4-6F175D3DCCD1}">
+                <a14:hiddenFill xmlns:a14="http://schemas.microsoft.com/office/drawing/2010/main">
+                  <a:solidFill>
+                    <a:srgbClr val="FFFFFF"/>
+                  </a:solidFill>
+                </a14:hiddenFill>
+              </a:ext>
+            </a:extLst>
+          </p:spPr>
+        </p:pic>
+        <p:pic>
+          <p:nvPicPr>
+            <p:cNvPr id="43" name="Picture 2">
+              <a:extLst>
+                <a:ext uri="{FF2B5EF4-FFF2-40B4-BE49-F238E27FC236}">
+                  <a16:creationId xmlns:a16="http://schemas.microsoft.com/office/drawing/2014/main" id="{A31CCBD7-31A9-6123-B61B-FB210F650877}"/>
+                </a:ext>
+              </a:extLst>
+            </p:cNvPr>
+            <p:cNvPicPr>
+              <a:picLocks noChangeAspect="1" noChangeArrowheads="1"/>
+            </p:cNvPicPr>
+            <p:nvPr/>
+          </p:nvPicPr>
+          <p:blipFill rotWithShape="1">
+            <a:blip r:embed="rId8">
+              <a:extLst>
+                <a:ext uri="{28A0092B-C50C-407E-A947-70E740481C1C}">
+                  <a14:useLocalDpi xmlns:a14="http://schemas.microsoft.com/office/drawing/2010/main" val="0"/>
+                </a:ext>
+              </a:extLst>
+            </a:blip>
+            <a:srcRect l="15783" t="15290" r="14205" b="17134"/>
+            <a:stretch>
+              <a:fillRect/>
+            </a:stretch>
+          </p:blipFill>
+          <p:spPr bwMode="auto">
+            <a:xfrm>
+              <a:off x="6540706" y="3950826"/>
+              <a:ext cx="565643" cy="545954"/>
+            </a:xfrm>
+            <a:prstGeom prst="rect">
+              <a:avLst/>
+            </a:prstGeom>
+            <a:noFill/>
+            <a:extLst>
+              <a:ext uri="{909E8E84-426E-40DD-AFC4-6F175D3DCCD1}">
+                <a14:hiddenFill xmlns:a14="http://schemas.microsoft.com/office/drawing/2010/main">
+                  <a:solidFill>
+                    <a:srgbClr val="FFFFFF"/>
+                  </a:solidFill>
+                </a14:hiddenFill>
+              </a:ext>
+            </a:extLst>
+          </p:spPr>
+        </p:pic>
+        <p:sp>
+          <p:nvSpPr>
+            <p:cNvPr id="54" name="Rectangle : coins arrondis 53">
+              <a:extLst>
+                <a:ext uri="{FF2B5EF4-FFF2-40B4-BE49-F238E27FC236}">
+                  <a16:creationId xmlns:a16="http://schemas.microsoft.com/office/drawing/2014/main" id="{3E4E5C19-19D1-7DB3-6126-771BB460CA7E}"/>
+                </a:ext>
+              </a:extLst>
+            </p:cNvPr>
+            <p:cNvSpPr/>
+            <p:nvPr/>
+          </p:nvSpPr>
+          <p:spPr>
+            <a:xfrm>
+              <a:off x="7018263" y="1968834"/>
+              <a:ext cx="1098685" cy="584200"/>
+            </a:xfrm>
+            <a:prstGeom prst="roundRect">
+              <a:avLst/>
+            </a:prstGeom>
+            <a:solidFill>
+              <a:schemeClr val="bg1">
+                <a:lumMod val="95000"/>
+              </a:schemeClr>
+            </a:solidFill>
+            <a:ln>
+              <a:noFill/>
+            </a:ln>
+          </p:spPr>
+          <p:style>
+            <a:lnRef idx="2">
+              <a:schemeClr val="accent1">
+                <a:shade val="15000"/>
+              </a:schemeClr>
+            </a:lnRef>
+            <a:fillRef idx="1">
+              <a:schemeClr val="accent1"/>
+            </a:fillRef>
+            <a:effectRef idx="0">
+              <a:schemeClr val="accent1"/>
+            </a:effectRef>
+            <a:fontRef idx="minor">
+              <a:schemeClr val="lt1"/>
+            </a:fontRef>
+          </p:style>
+          <p:txBody>
+            <a:bodyPr rtlCol="0" anchor="ctr"/>
+            <a:lstStyle/>
+            <a:p>
+              <a:pPr algn="ctr"/>
+              <a:endParaRPr lang="fr-FR"/>
+            </a:p>
+          </p:txBody>
+        </p:sp>
+        <p:sp>
+          <p:nvSpPr>
+            <p:cNvPr id="55" name="ZoneTexte 54">
+              <a:extLst>
+                <a:ext uri="{FF2B5EF4-FFF2-40B4-BE49-F238E27FC236}">
+                  <a16:creationId xmlns:a16="http://schemas.microsoft.com/office/drawing/2014/main" id="{C4EB1607-BC4B-15A3-0324-3D29B9154D63}"/>
+                </a:ext>
+              </a:extLst>
+            </p:cNvPr>
+            <p:cNvSpPr txBox="1"/>
+            <p:nvPr/>
+          </p:nvSpPr>
+          <p:spPr>
+            <a:xfrm>
+              <a:off x="6985463" y="2026312"/>
+              <a:ext cx="1156330" cy="492443"/>
+            </a:xfrm>
+            <a:prstGeom prst="rect">
+              <a:avLst/>
+            </a:prstGeom>
+            <a:noFill/>
+          </p:spPr>
+          <p:txBody>
+            <a:bodyPr wrap="square" rtlCol="0">
+              <a:spAutoFit/>
+            </a:bodyPr>
+            <a:lstStyle/>
+            <a:p>
+              <a:pPr algn="ctr"/>
+              <a:r>
+                <a:rPr lang="fr-FR" sz="1000" dirty="0"/>
+                <a:t>EDA </a:t>
+              </a:r>
+            </a:p>
+            <a:p>
+              <a:pPr algn="ctr"/>
+              <a:r>
+                <a:rPr lang="fr-FR" sz="800" dirty="0"/>
+                <a:t>descriptive et comparative</a:t>
+              </a:r>
+            </a:p>
+          </p:txBody>
+        </p:sp>
+        <p:sp>
+          <p:nvSpPr>
+            <p:cNvPr id="56" name="Rectangle : coins arrondis 55">
+              <a:extLst>
+                <a:ext uri="{FF2B5EF4-FFF2-40B4-BE49-F238E27FC236}">
+                  <a16:creationId xmlns:a16="http://schemas.microsoft.com/office/drawing/2014/main" id="{34BB09D2-59B3-0F52-1024-4F32B01B2F53}"/>
+                </a:ext>
+              </a:extLst>
+            </p:cNvPr>
+            <p:cNvSpPr/>
+            <p:nvPr/>
+          </p:nvSpPr>
+          <p:spPr>
+            <a:xfrm>
+              <a:off x="6981071" y="2960216"/>
+              <a:ext cx="1135877" cy="584200"/>
+            </a:xfrm>
+            <a:prstGeom prst="roundRect">
+              <a:avLst/>
+            </a:prstGeom>
+            <a:solidFill>
+              <a:schemeClr val="bg1">
+                <a:lumMod val="95000"/>
+              </a:schemeClr>
+            </a:solidFill>
+            <a:ln>
+              <a:noFill/>
+            </a:ln>
+          </p:spPr>
+          <p:style>
+            <a:lnRef idx="2">
+              <a:schemeClr val="accent1">
+                <a:shade val="15000"/>
+              </a:schemeClr>
+            </a:lnRef>
+            <a:fillRef idx="1">
+              <a:schemeClr val="accent1"/>
+            </a:fillRef>
+            <a:effectRef idx="0">
+              <a:schemeClr val="accent1"/>
+            </a:effectRef>
+            <a:fontRef idx="minor">
+              <a:schemeClr val="lt1"/>
+            </a:fontRef>
+          </p:style>
+          <p:txBody>
+            <a:bodyPr rtlCol="0" anchor="ctr"/>
+            <a:lstStyle/>
+            <a:p>
+              <a:pPr algn="ctr"/>
+              <a:endParaRPr lang="fr-FR"/>
+            </a:p>
+          </p:txBody>
+        </p:sp>
+        <p:sp>
+          <p:nvSpPr>
+            <p:cNvPr id="57" name="ZoneTexte 56">
+              <a:extLst>
+                <a:ext uri="{FF2B5EF4-FFF2-40B4-BE49-F238E27FC236}">
+                  <a16:creationId xmlns:a16="http://schemas.microsoft.com/office/drawing/2014/main" id="{685F5B80-27B1-45A6-3DF8-0CF7271056CC}"/>
+                </a:ext>
+              </a:extLst>
+            </p:cNvPr>
+            <p:cNvSpPr txBox="1"/>
+            <p:nvPr/>
+          </p:nvSpPr>
+          <p:spPr>
+            <a:xfrm>
+              <a:off x="6985463" y="3075570"/>
+              <a:ext cx="1156330" cy="369332"/>
+            </a:xfrm>
+            <a:prstGeom prst="rect">
+              <a:avLst/>
+            </a:prstGeom>
+            <a:noFill/>
+          </p:spPr>
+          <p:txBody>
+            <a:bodyPr wrap="square" rtlCol="0">
+              <a:spAutoFit/>
+            </a:bodyPr>
+            <a:lstStyle/>
+            <a:p>
+              <a:pPr algn="ctr"/>
+              <a:r>
+                <a:rPr lang="fr-FR" sz="1000" dirty="0"/>
+                <a:t>PREDICT </a:t>
+              </a:r>
+            </a:p>
+            <a:p>
+              <a:pPr algn="ctr"/>
+              <a:r>
+                <a:rPr lang="fr-FR" sz="800" dirty="0"/>
+                <a:t>Sur 3 jours glissants</a:t>
+              </a:r>
+            </a:p>
+          </p:txBody>
+        </p:sp>
+        <p:sp>
+          <p:nvSpPr>
+            <p:cNvPr id="1074" name="Rectangle : coins arrondis 1073">
+              <a:extLst>
+                <a:ext uri="{FF2B5EF4-FFF2-40B4-BE49-F238E27FC236}">
+                  <a16:creationId xmlns:a16="http://schemas.microsoft.com/office/drawing/2014/main" id="{4162FACA-EA89-9D97-B392-632929E9443D}"/>
+                </a:ext>
+              </a:extLst>
+            </p:cNvPr>
+            <p:cNvSpPr/>
+            <p:nvPr/>
+          </p:nvSpPr>
+          <p:spPr>
+            <a:xfrm>
+              <a:off x="6955001" y="1904349"/>
+              <a:ext cx="1228499" cy="1800970"/>
+            </a:xfrm>
+            <a:prstGeom prst="roundRect">
+              <a:avLst>
+                <a:gd name="adj" fmla="val 7978"/>
+              </a:avLst>
+            </a:prstGeom>
+            <a:noFill/>
+            <a:ln w="9525">
+              <a:solidFill>
+                <a:srgbClr val="FFC000"/>
+              </a:solidFill>
+              <a:prstDash val="dash"/>
+            </a:ln>
+          </p:spPr>
+          <p:style>
+            <a:lnRef idx="2">
+              <a:schemeClr val="accent1">
+                <a:shade val="15000"/>
+              </a:schemeClr>
+            </a:lnRef>
+            <a:fillRef idx="1">
+              <a:schemeClr val="accent1"/>
+            </a:fillRef>
+            <a:effectRef idx="0">
+              <a:schemeClr val="accent1"/>
+            </a:effectRef>
+            <a:fontRef idx="minor">
+              <a:schemeClr val="lt1"/>
+            </a:fontRef>
+          </p:style>
+          <p:txBody>
+            <a:bodyPr rtlCol="0" anchor="ctr"/>
+            <a:lstStyle/>
+            <a:p>
+              <a:pPr algn="ctr"/>
+              <a:endParaRPr lang="fr-FR" dirty="0"/>
+            </a:p>
+          </p:txBody>
+        </p:sp>
+        <p:sp>
+          <p:nvSpPr>
+            <p:cNvPr id="2097" name="Rectangle 2096">
+              <a:extLst>
+                <a:ext uri="{FF2B5EF4-FFF2-40B4-BE49-F238E27FC236}">
+                  <a16:creationId xmlns:a16="http://schemas.microsoft.com/office/drawing/2014/main" id="{ADF20F1D-E32A-83D7-1C9F-ED56E1ADF5A6}"/>
+                </a:ext>
+              </a:extLst>
+            </p:cNvPr>
+            <p:cNvSpPr/>
+            <p:nvPr/>
+          </p:nvSpPr>
+          <p:spPr>
+            <a:xfrm>
+              <a:off x="7859073" y="3333557"/>
+              <a:ext cx="362541" cy="326213"/>
+            </a:xfrm>
+            <a:prstGeom prst="rect">
+              <a:avLst/>
+            </a:prstGeom>
+            <a:noFill/>
+            <a:ln>
+              <a:noFill/>
+            </a:ln>
+          </p:spPr>
+          <p:style>
+            <a:lnRef idx="2">
+              <a:schemeClr val="accent1">
+                <a:shade val="15000"/>
+              </a:schemeClr>
+            </a:lnRef>
+            <a:fillRef idx="1">
+              <a:schemeClr val="accent1"/>
+            </a:fillRef>
+            <a:effectRef idx="0">
+              <a:schemeClr val="accent1"/>
+            </a:effectRef>
+            <a:fontRef idx="minor">
+              <a:schemeClr val="lt1"/>
+            </a:fontRef>
+          </p:style>
+          <p:txBody>
+            <a:bodyPr rtlCol="0" anchor="ctr"/>
+            <a:lstStyle/>
+            <a:p>
+              <a:pPr algn="ctr"/>
+              <a:endParaRPr lang="fr-FR"/>
+            </a:p>
+          </p:txBody>
+        </p:sp>
+      </p:grpSp>
       <p:cxnSp>
         <p:nvCxnSpPr>
           <p:cNvPr id="2101" name="Connecteur droit avec flèche 2100">
@@ -31373,6 +31327,273 @@
           </a:fontRef>
         </p:style>
       </p:cxnSp>
+      <p:grpSp>
+        <p:nvGrpSpPr>
+          <p:cNvPr id="13" name="Groupe 12">
+            <a:extLst>
+              <a:ext uri="{FF2B5EF4-FFF2-40B4-BE49-F238E27FC236}">
+                <a16:creationId xmlns:a16="http://schemas.microsoft.com/office/drawing/2014/main" id="{17A2B2F0-AB99-333B-30C9-EC04234D17C0}"/>
+              </a:ext>
+            </a:extLst>
+          </p:cNvPr>
+          <p:cNvGrpSpPr/>
+          <p:nvPr/>
+        </p:nvGrpSpPr>
+        <p:grpSpPr>
+          <a:xfrm>
+            <a:off x="4233111" y="1458686"/>
+            <a:ext cx="2217817" cy="3272971"/>
+            <a:chOff x="4233111" y="1458686"/>
+            <a:chExt cx="2217817" cy="3272971"/>
+          </a:xfrm>
+        </p:grpSpPr>
+        <p:cxnSp>
+          <p:nvCxnSpPr>
+            <p:cNvPr id="30" name="Connecteur droit 29">
+              <a:extLst>
+                <a:ext uri="{FF2B5EF4-FFF2-40B4-BE49-F238E27FC236}">
+                  <a16:creationId xmlns:a16="http://schemas.microsoft.com/office/drawing/2014/main" id="{DD9C7B50-C6F5-7260-C61A-2CAE5E4C0BF7}"/>
+                </a:ext>
+              </a:extLst>
+            </p:cNvPr>
+            <p:cNvCxnSpPr/>
+            <p:nvPr/>
+          </p:nvCxnSpPr>
+          <p:spPr>
+            <a:xfrm>
+              <a:off x="6450928" y="1458686"/>
+              <a:ext cx="0" cy="3272971"/>
+            </a:xfrm>
+            <a:prstGeom prst="line">
+              <a:avLst/>
+            </a:prstGeom>
+            <a:ln w="19050">
+              <a:solidFill>
+                <a:schemeClr val="bg1">
+                  <a:lumMod val="75000"/>
+                </a:schemeClr>
+              </a:solidFill>
+              <a:prstDash val="dash"/>
+            </a:ln>
+          </p:spPr>
+          <p:style>
+            <a:lnRef idx="1">
+              <a:schemeClr val="dk1"/>
+            </a:lnRef>
+            <a:fillRef idx="0">
+              <a:schemeClr val="dk1"/>
+            </a:fillRef>
+            <a:effectRef idx="0">
+              <a:schemeClr val="dk1"/>
+            </a:effectRef>
+            <a:fontRef idx="minor">
+              <a:schemeClr val="tx1"/>
+            </a:fontRef>
+          </p:style>
+        </p:cxnSp>
+        <p:grpSp>
+          <p:nvGrpSpPr>
+            <p:cNvPr id="12" name="Groupe 11">
+              <a:extLst>
+                <a:ext uri="{FF2B5EF4-FFF2-40B4-BE49-F238E27FC236}">
+                  <a16:creationId xmlns:a16="http://schemas.microsoft.com/office/drawing/2014/main" id="{A4F3950E-A273-3885-0546-EA789FEF3AD4}"/>
+                </a:ext>
+              </a:extLst>
+            </p:cNvPr>
+            <p:cNvGrpSpPr/>
+            <p:nvPr/>
+          </p:nvGrpSpPr>
+          <p:grpSpPr>
+            <a:xfrm>
+              <a:off x="4233111" y="1495363"/>
+              <a:ext cx="1800211" cy="807431"/>
+              <a:chOff x="4233111" y="1495363"/>
+              <a:chExt cx="1800211" cy="807431"/>
+            </a:xfrm>
+          </p:grpSpPr>
+          <p:sp>
+            <p:nvSpPr>
+              <p:cNvPr id="46" name="Rectangle : coins arrondis 45">
+                <a:extLst>
+                  <a:ext uri="{FF2B5EF4-FFF2-40B4-BE49-F238E27FC236}">
+                    <a16:creationId xmlns:a16="http://schemas.microsoft.com/office/drawing/2014/main" id="{E433E364-4228-6856-536E-34873F6A6DC3}"/>
+                  </a:ext>
+                </a:extLst>
+              </p:cNvPr>
+              <p:cNvSpPr/>
+              <p:nvPr/>
+            </p:nvSpPr>
+            <p:spPr>
+              <a:xfrm>
+                <a:off x="4797443" y="1718594"/>
+                <a:ext cx="1235879" cy="584200"/>
+              </a:xfrm>
+              <a:prstGeom prst="roundRect">
+                <a:avLst/>
+              </a:prstGeom>
+              <a:solidFill>
+                <a:schemeClr val="bg1">
+                  <a:lumMod val="95000"/>
+                </a:schemeClr>
+              </a:solidFill>
+              <a:ln>
+                <a:noFill/>
+              </a:ln>
+            </p:spPr>
+            <p:style>
+              <a:lnRef idx="2">
+                <a:schemeClr val="accent1">
+                  <a:shade val="15000"/>
+                </a:schemeClr>
+              </a:lnRef>
+              <a:fillRef idx="1">
+                <a:schemeClr val="accent1"/>
+              </a:fillRef>
+              <a:effectRef idx="0">
+                <a:schemeClr val="accent1"/>
+              </a:effectRef>
+              <a:fontRef idx="minor">
+                <a:schemeClr val="lt1"/>
+              </a:fontRef>
+            </p:style>
+            <p:txBody>
+              <a:bodyPr rtlCol="0" anchor="ctr"/>
+              <a:lstStyle/>
+              <a:p>
+                <a:pPr algn="ctr"/>
+                <a:endParaRPr lang="fr-FR" dirty="0"/>
+              </a:p>
+            </p:txBody>
+          </p:sp>
+          <p:pic>
+            <p:nvPicPr>
+              <p:cNvPr id="1034" name="Picture 10">
+                <a:extLst>
+                  <a:ext uri="{FF2B5EF4-FFF2-40B4-BE49-F238E27FC236}">
+                    <a16:creationId xmlns:a16="http://schemas.microsoft.com/office/drawing/2014/main" id="{748B16F9-6C53-91C1-4712-424BF6CE8989}"/>
+                  </a:ext>
+                </a:extLst>
+              </p:cNvPr>
+              <p:cNvPicPr>
+                <a:picLocks noChangeAspect="1" noChangeArrowheads="1"/>
+              </p:cNvPicPr>
+              <p:nvPr/>
+            </p:nvPicPr>
+            <p:blipFill>
+              <a:blip r:embed="rId16">
+                <a:extLst>
+                  <a:ext uri="{28A0092B-C50C-407E-A947-70E740481C1C}">
+                    <a14:useLocalDpi xmlns:a14="http://schemas.microsoft.com/office/drawing/2010/main" val="0"/>
+                  </a:ext>
+                </a:extLst>
+              </a:blip>
+              <a:srcRect/>
+              <a:stretch>
+                <a:fillRect/>
+              </a:stretch>
+            </p:blipFill>
+            <p:spPr bwMode="auto">
+              <a:xfrm>
+                <a:off x="4595812" y="1495363"/>
+                <a:ext cx="506762" cy="506762"/>
+              </a:xfrm>
+              <a:prstGeom prst="rect">
+                <a:avLst/>
+              </a:prstGeom>
+              <a:noFill/>
+              <a:extLst>
+                <a:ext uri="{909E8E84-426E-40DD-AFC4-6F175D3DCCD1}">
+                  <a14:hiddenFill xmlns:a14="http://schemas.microsoft.com/office/drawing/2010/main">
+                    <a:solidFill>
+                      <a:srgbClr val="FFFFFF"/>
+                    </a:solidFill>
+                  </a14:hiddenFill>
+                </a:ext>
+              </a:extLst>
+            </p:spPr>
+          </p:pic>
+          <p:sp>
+            <p:nvSpPr>
+              <p:cNvPr id="44" name="ZoneTexte 43">
+                <a:extLst>
+                  <a:ext uri="{FF2B5EF4-FFF2-40B4-BE49-F238E27FC236}">
+                    <a16:creationId xmlns:a16="http://schemas.microsoft.com/office/drawing/2014/main" id="{682088E1-064C-5214-7A97-A059E4869B55}"/>
+                  </a:ext>
+                </a:extLst>
+              </p:cNvPr>
+              <p:cNvSpPr txBox="1"/>
+              <p:nvPr/>
+            </p:nvSpPr>
+            <p:spPr>
+              <a:xfrm>
+                <a:off x="4900942" y="1841943"/>
+                <a:ext cx="1079654" cy="338554"/>
+              </a:xfrm>
+              <a:prstGeom prst="rect">
+                <a:avLst/>
+              </a:prstGeom>
+              <a:noFill/>
+            </p:spPr>
+            <p:txBody>
+              <a:bodyPr wrap="square" rtlCol="0">
+                <a:spAutoFit/>
+              </a:bodyPr>
+              <a:lstStyle/>
+              <a:p>
+                <a:pPr algn="ctr"/>
+                <a:r>
+                  <a:rPr lang="fr-FR" sz="800" b="1" dirty="0"/>
+                  <a:t>Entraînement du modèle</a:t>
+                </a:r>
+              </a:p>
+            </p:txBody>
+          </p:sp>
+          <p:cxnSp>
+            <p:nvCxnSpPr>
+              <p:cNvPr id="108" name="Connecteur droit avec flèche 107">
+                <a:extLst>
+                  <a:ext uri="{FF2B5EF4-FFF2-40B4-BE49-F238E27FC236}">
+                    <a16:creationId xmlns:a16="http://schemas.microsoft.com/office/drawing/2014/main" id="{8FC538F3-E888-6C1B-940B-D6B968D8FCEE}"/>
+                  </a:ext>
+                </a:extLst>
+              </p:cNvPr>
+              <p:cNvCxnSpPr>
+                <a:cxnSpLocks/>
+              </p:cNvCxnSpPr>
+              <p:nvPr/>
+            </p:nvCxnSpPr>
+            <p:spPr>
+              <a:xfrm>
+                <a:off x="4233111" y="2035648"/>
+                <a:ext cx="551235" cy="0"/>
+              </a:xfrm>
+              <a:prstGeom prst="straightConnector1">
+                <a:avLst/>
+              </a:prstGeom>
+              <a:ln w="57150">
+                <a:solidFill>
+                  <a:srgbClr val="FFC000"/>
+                </a:solidFill>
+                <a:tailEnd type="triangle"/>
+              </a:ln>
+            </p:spPr>
+            <p:style>
+              <a:lnRef idx="1">
+                <a:schemeClr val="accent1"/>
+              </a:lnRef>
+              <a:fillRef idx="0">
+                <a:schemeClr val="accent1"/>
+              </a:fillRef>
+              <a:effectRef idx="0">
+                <a:schemeClr val="accent1"/>
+              </a:effectRef>
+              <a:fontRef idx="minor">
+                <a:schemeClr val="tx1"/>
+              </a:fontRef>
+            </p:style>
+          </p:cxnSp>
+        </p:grpSp>
+      </p:grpSp>
     </p:spTree>
     <p:extLst>
       <p:ext uri="{BB962C8B-B14F-4D97-AF65-F5344CB8AC3E}">
@@ -31404,7 +31625,7 @@
                             </p:stCondLst>
                             <p:childTnLst>
                               <p:par>
-                                <p:cTn id="5" presetID="1" presetClass="entr" presetSubtype="0" fill="hold" grpId="0" nodeType="clickEffect">
+                                <p:cTn id="5" presetID="1" presetClass="entr" presetSubtype="0" fill="hold" nodeType="clickEffect">
                                   <p:stCondLst>
                                     <p:cond delay="0"/>
                                   </p:stCondLst>
@@ -31412,6 +31633,33 @@
                                     <p:set>
                                       <p:cBhvr>
                                         <p:cTn id="6" dur="1" fill="hold">
+                                          <p:stCondLst>
+                                            <p:cond delay="0"/>
+                                          </p:stCondLst>
+                                        </p:cTn>
+                                        <p:tgtEl>
+                                          <p:spTgt spid="9"/>
+                                        </p:tgtEl>
+                                        <p:attrNameLst>
+                                          <p:attrName>style.visibility</p:attrName>
+                                        </p:attrNameLst>
+                                      </p:cBhvr>
+                                      <p:to>
+                                        <p:strVal val="visible"/>
+                                      </p:to>
+                                    </p:set>
+                                  </p:childTnLst>
+                                </p:cTn>
+                              </p:par>
+                              <p:par>
+                                <p:cTn id="7" presetID="1" presetClass="entr" presetSubtype="0" fill="hold" grpId="0" nodeType="withEffect">
+                                  <p:stCondLst>
+                                    <p:cond delay="0"/>
+                                  </p:stCondLst>
+                                  <p:childTnLst>
+                                    <p:set>
+                                      <p:cBhvr>
+                                        <p:cTn id="8" dur="1" fill="hold">
                                           <p:stCondLst>
                                             <p:cond delay="0"/>
                                           </p:stCondLst>
@@ -31437,32 +31685,32 @@
                     </p:cTn>
                   </p:par>
                   <p:par>
-                    <p:cTn id="7" fill="hold">
+                    <p:cTn id="9" fill="hold">
                       <p:stCondLst>
                         <p:cond delay="indefinite"/>
                       </p:stCondLst>
                       <p:childTnLst>
                         <p:par>
-                          <p:cTn id="8" fill="hold">
+                          <p:cTn id="10" fill="hold">
                             <p:stCondLst>
                               <p:cond delay="0"/>
                             </p:stCondLst>
                             <p:childTnLst>
                               <p:par>
-                                <p:cTn id="9" presetID="1" presetClass="entr" presetSubtype="0" fill="hold" nodeType="clickEffect">
+                                <p:cTn id="11" presetID="1" presetClass="entr" presetSubtype="0" fill="hold" nodeType="clickEffect">
                                   <p:stCondLst>
                                     <p:cond delay="0"/>
                                   </p:stCondLst>
                                   <p:childTnLst>
                                     <p:set>
                                       <p:cBhvr>
-                                        <p:cTn id="10" dur="1" fill="hold">
+                                        <p:cTn id="12" dur="1" fill="hold">
                                           <p:stCondLst>
                                             <p:cond delay="0"/>
                                           </p:stCondLst>
                                         </p:cTn>
                                         <p:tgtEl>
-                                          <p:spTgt spid="14"/>
+                                          <p:spTgt spid="11"/>
                                         </p:tgtEl>
                                         <p:attrNameLst>
                                           <p:attrName>style.visibility</p:attrName>
@@ -31475,26 +31723,8 @@
                                   </p:childTnLst>
                                 </p:cTn>
                               </p:par>
-                            </p:childTnLst>
-                          </p:cTn>
-                        </p:par>
-                      </p:childTnLst>
-                    </p:cTn>
-                  </p:par>
-                  <p:par>
-                    <p:cTn id="11" fill="hold">
-                      <p:stCondLst>
-                        <p:cond delay="indefinite"/>
-                      </p:stCondLst>
-                      <p:childTnLst>
-                        <p:par>
-                          <p:cTn id="12" fill="hold">
-                            <p:stCondLst>
-                              <p:cond delay="0"/>
-                            </p:stCondLst>
-                            <p:childTnLst>
                               <p:par>
-                                <p:cTn id="13" presetID="1" presetClass="entr" presetSubtype="0" fill="hold" grpId="0" nodeType="clickEffect">
+                                <p:cTn id="13" presetID="1" presetClass="entr" presetSubtype="0" fill="hold" grpId="0" nodeType="withEffect">
                                   <p:stCondLst>
                                     <p:cond delay="0"/>
                                   </p:stCondLst>
@@ -31552,7 +31782,7 @@
                                           </p:stCondLst>
                                         </p:cTn>
                                         <p:tgtEl>
-                                          <p:spTgt spid="19"/>
+                                          <p:spTgt spid="13"/>
                                         </p:tgtEl>
                                         <p:attrNameLst>
                                           <p:attrName>style.visibility</p:attrName>
@@ -31565,33 +31795,15 @@
                                   </p:childTnLst>
                                 </p:cTn>
                               </p:par>
-                            </p:childTnLst>
-                          </p:cTn>
-                        </p:par>
-                      </p:childTnLst>
-                    </p:cTn>
-                  </p:par>
-                  <p:par>
-                    <p:cTn id="19" fill="hold">
-                      <p:stCondLst>
-                        <p:cond delay="indefinite"/>
-                      </p:stCondLst>
-                      <p:childTnLst>
-                        <p:par>
-                          <p:cTn id="20" fill="hold">
-                            <p:stCondLst>
-                              <p:cond delay="0"/>
-                            </p:stCondLst>
-                            <p:childTnLst>
                               <p:par>
-                                <p:cTn id="21" presetID="1" presetClass="entr" presetSubtype="0" fill="hold" grpId="0" nodeType="clickEffect">
+                                <p:cTn id="19" presetID="1" presetClass="entr" presetSubtype="0" fill="hold" grpId="0" nodeType="withEffect">
                                   <p:stCondLst>
                                     <p:cond delay="0"/>
                                   </p:stCondLst>
                                   <p:childTnLst>
                                     <p:set>
                                       <p:cBhvr>
-                                        <p:cTn id="22" dur="1" fill="hold">
+                                        <p:cTn id="20" dur="1" fill="hold">
                                           <p:stCondLst>
                                             <p:cond delay="0"/>
                                           </p:stCondLst>
@@ -31617,77 +31829,32 @@
                     </p:cTn>
                   </p:par>
                   <p:par>
-                    <p:cTn id="23" fill="hold">
+                    <p:cTn id="21" fill="hold">
                       <p:stCondLst>
                         <p:cond delay="indefinite"/>
                       </p:stCondLst>
                       <p:childTnLst>
                         <p:par>
-                          <p:cTn id="24" fill="hold">
+                          <p:cTn id="22" fill="hold">
                             <p:stCondLst>
                               <p:cond delay="0"/>
                             </p:stCondLst>
                             <p:childTnLst>
                               <p:par>
-                                <p:cTn id="25" presetID="1" presetClass="entr" presetSubtype="0" fill="hold" nodeType="clickEffect">
+                                <p:cTn id="23" presetID="1" presetClass="entr" presetSubtype="0" fill="hold" nodeType="clickEffect">
                                   <p:stCondLst>
                                     <p:cond delay="0"/>
                                   </p:stCondLst>
                                   <p:childTnLst>
                                     <p:set>
                                       <p:cBhvr>
-                                        <p:cTn id="26" dur="1" fill="hold">
+                                        <p:cTn id="24" dur="1" fill="hold">
                                           <p:stCondLst>
                                             <p:cond delay="0"/>
                                           </p:stCondLst>
                                         </p:cTn>
                                         <p:tgtEl>
-                                          <p:spTgt spid="23"/>
-                                        </p:tgtEl>
-                                        <p:attrNameLst>
-                                          <p:attrName>style.visibility</p:attrName>
-                                        </p:attrNameLst>
-                                      </p:cBhvr>
-                                      <p:to>
-                                        <p:strVal val="visible"/>
-                                      </p:to>
-                                    </p:set>
-                                  </p:childTnLst>
-                                </p:cTn>
-                              </p:par>
-                            </p:childTnLst>
-                          </p:cTn>
-                        </p:par>
-                      </p:childTnLst>
-                    </p:cTn>
-                  </p:par>
-                  <p:par>
-                    <p:cTn id="27" fill="hold">
-                      <p:stCondLst>
-                        <p:cond delay="indefinite"/>
-                      </p:stCondLst>
-                      <p:childTnLst>
-                        <p:par>
-                          <p:cTn id="28" fill="hold">
-                            <p:stCondLst>
-                              <p:cond delay="0"/>
-                            </p:stCondLst>
-                            <p:childTnLst>
-                              <p:par>
-                                <p:cTn id="29" presetID="1" presetClass="entr" presetSubtype="0" fill="hold" grpId="0" nodeType="clickEffect">
-                                  <p:stCondLst>
-                                    <p:cond delay="0"/>
-                                  </p:stCondLst>
-                                  <p:childTnLst>
-                                    <p:set>
-                                      <p:cBhvr>
-                                        <p:cTn id="30" dur="1" fill="hold">
-                                          <p:stCondLst>
-                                            <p:cond delay="0"/>
-                                          </p:stCondLst>
-                                        </p:cTn>
-                                        <p:tgtEl>
-                                          <p:spTgt spid="26"/>
+                                          <p:spTgt spid="1036"/>
                                         </p:tgtEl>
                                         <p:attrNameLst>
                                           <p:attrName>style.visibility</p:attrName>
@@ -31701,20 +31868,20 @@
                                 </p:cTn>
                               </p:par>
                               <p:par>
-                                <p:cTn id="31" presetID="1" presetClass="entr" presetSubtype="0" fill="hold" nodeType="withEffect">
+                                <p:cTn id="25" presetID="1" presetClass="entr" presetSubtype="0" fill="hold" nodeType="withEffect">
                                   <p:stCondLst>
                                     <p:cond delay="0"/>
                                   </p:stCondLst>
                                   <p:childTnLst>
                                     <p:set>
                                       <p:cBhvr>
-                                        <p:cTn id="32" dur="1" fill="hold">
+                                        <p:cTn id="26" dur="1" fill="hold">
                                           <p:stCondLst>
                                             <p:cond delay="0"/>
                                           </p:stCondLst>
                                         </p:cTn>
                                         <p:tgtEl>
-                                          <p:spTgt spid="123"/>
+                                          <p:spTgt spid="1038"/>
                                         </p:tgtEl>
                                         <p:attrNameLst>
                                           <p:attrName>style.visibility</p:attrName>
@@ -31728,7 +31895,88 @@
                                 </p:cTn>
                               </p:par>
                               <p:par>
-                                <p:cTn id="33" presetID="1" presetClass="entr" presetSubtype="0" fill="hold" nodeType="withEffect">
+                                <p:cTn id="27" presetID="1" presetClass="entr" presetSubtype="0" fill="hold" grpId="0" nodeType="withEffect">
+                                  <p:stCondLst>
+                                    <p:cond delay="0"/>
+                                  </p:stCondLst>
+                                  <p:childTnLst>
+                                    <p:set>
+                                      <p:cBhvr>
+                                        <p:cTn id="28" dur="1" fill="hold">
+                                          <p:stCondLst>
+                                            <p:cond delay="0"/>
+                                          </p:stCondLst>
+                                        </p:cTn>
+                                        <p:tgtEl>
+                                          <p:spTgt spid="47"/>
+                                        </p:tgtEl>
+                                        <p:attrNameLst>
+                                          <p:attrName>style.visibility</p:attrName>
+                                        </p:attrNameLst>
+                                      </p:cBhvr>
+                                      <p:to>
+                                        <p:strVal val="visible"/>
+                                      </p:to>
+                                    </p:set>
+                                  </p:childTnLst>
+                                </p:cTn>
+                              </p:par>
+                              <p:par>
+                                <p:cTn id="29" presetID="1" presetClass="entr" presetSubtype="0" fill="hold" grpId="0" nodeType="withEffect">
+                                  <p:stCondLst>
+                                    <p:cond delay="0"/>
+                                  </p:stCondLst>
+                                  <p:childTnLst>
+                                    <p:set>
+                                      <p:cBhvr>
+                                        <p:cTn id="30" dur="1" fill="hold">
+                                          <p:stCondLst>
+                                            <p:cond delay="0"/>
+                                          </p:stCondLst>
+                                        </p:cTn>
+                                        <p:tgtEl>
+                                          <p:spTgt spid="48"/>
+                                        </p:tgtEl>
+                                        <p:attrNameLst>
+                                          <p:attrName>style.visibility</p:attrName>
+                                        </p:attrNameLst>
+                                      </p:cBhvr>
+                                      <p:to>
+                                        <p:strVal val="visible"/>
+                                      </p:to>
+                                    </p:set>
+                                  </p:childTnLst>
+                                </p:cTn>
+                              </p:par>
+                              <p:par>
+                                <p:cTn id="31" presetID="1" presetClass="entr" presetSubtype="0" fill="hold" grpId="0" nodeType="withEffect">
+                                  <p:stCondLst>
+                                    <p:cond delay="0"/>
+                                  </p:stCondLst>
+                                  <p:childTnLst>
+                                    <p:set>
+                                      <p:cBhvr>
+                                        <p:cTn id="32" dur="1" fill="hold">
+                                          <p:stCondLst>
+                                            <p:cond delay="0"/>
+                                          </p:stCondLst>
+                                        </p:cTn>
+                                        <p:tgtEl>
+                                          <p:spTgt spid="49"/>
+                                        </p:tgtEl>
+                                        <p:attrNameLst>
+                                          <p:attrName>style.visibility</p:attrName>
+                                        </p:attrNameLst>
+                                      </p:cBhvr>
+                                      <p:to>
+                                        <p:strVal val="visible"/>
+                                      </p:to>
+                                    </p:set>
+                                  </p:childTnLst>
+                                </p:cTn>
+                              </p:par>
+                              <p:par>
+                                <p:cTn id="33" presetID="1" presetClass="entr" presetSubtype="0" fill="hold" grpId="0" nodeType="withEffect">
                                   <p:stCondLst>
                                     <p:cond delay="0"/>
                                   </p:stCondLst>
@@ -31741,7 +31989,7 @@
                                           </p:stCondLst>
                                         </p:cTn>
                                         <p:tgtEl>
-                                          <p:spTgt spid="124"/>
+                                          <p:spTgt spid="50"/>
                                         </p:tgtEl>
                                         <p:attrNameLst>
                                           <p:attrName>style.visibility</p:attrName>
@@ -31768,7 +32016,7 @@
                                           </p:stCondLst>
                                         </p:cTn>
                                         <p:tgtEl>
-                                          <p:spTgt spid="125"/>
+                                          <p:spTgt spid="2054"/>
                                         </p:tgtEl>
                                         <p:attrNameLst>
                                           <p:attrName>style.visibility</p:attrName>
@@ -31795,7 +32043,394 @@
                                           </p:stCondLst>
                                         </p:cTn>
                                         <p:tgtEl>
-                                          <p:spTgt spid="126"/>
+                                          <p:spTgt spid="51"/>
+                                        </p:tgtEl>
+                                        <p:attrNameLst>
+                                          <p:attrName>style.visibility</p:attrName>
+                                        </p:attrNameLst>
+                                      </p:cBhvr>
+                                      <p:to>
+                                        <p:strVal val="visible"/>
+                                      </p:to>
+                                    </p:set>
+                                  </p:childTnLst>
+                                </p:cTn>
+                              </p:par>
+                              <p:par>
+                                <p:cTn id="39" presetID="1" presetClass="entr" presetSubtype="0" fill="hold" grpId="0" nodeType="withEffect">
+                                  <p:stCondLst>
+                                    <p:cond delay="0"/>
+                                  </p:stCondLst>
+                                  <p:childTnLst>
+                                    <p:set>
+                                      <p:cBhvr>
+                                        <p:cTn id="40" dur="1" fill="hold">
+                                          <p:stCondLst>
+                                            <p:cond delay="0"/>
+                                          </p:stCondLst>
+                                        </p:cTn>
+                                        <p:tgtEl>
+                                          <p:spTgt spid="52"/>
+                                        </p:tgtEl>
+                                        <p:attrNameLst>
+                                          <p:attrName>style.visibility</p:attrName>
+                                        </p:attrNameLst>
+                                      </p:cBhvr>
+                                      <p:to>
+                                        <p:strVal val="visible"/>
+                                      </p:to>
+                                    </p:set>
+                                  </p:childTnLst>
+                                </p:cTn>
+                              </p:par>
+                              <p:par>
+                                <p:cTn id="41" presetID="1" presetClass="entr" presetSubtype="0" fill="hold" nodeType="withEffect">
+                                  <p:stCondLst>
+                                    <p:cond delay="0"/>
+                                  </p:stCondLst>
+                                  <p:childTnLst>
+                                    <p:set>
+                                      <p:cBhvr>
+                                        <p:cTn id="42" dur="1" fill="hold">
+                                          <p:stCondLst>
+                                            <p:cond delay="0"/>
+                                          </p:stCondLst>
+                                        </p:cTn>
+                                        <p:tgtEl>
+                                          <p:spTgt spid="1068"/>
+                                        </p:tgtEl>
+                                        <p:attrNameLst>
+                                          <p:attrName>style.visibility</p:attrName>
+                                        </p:attrNameLst>
+                                      </p:cBhvr>
+                                      <p:to>
+                                        <p:strVal val="visible"/>
+                                      </p:to>
+                                    </p:set>
+                                  </p:childTnLst>
+                                </p:cTn>
+                              </p:par>
+                              <p:par>
+                                <p:cTn id="43" presetID="1" presetClass="entr" presetSubtype="0" fill="hold" grpId="0" nodeType="withEffect">
+                                  <p:stCondLst>
+                                    <p:cond delay="0"/>
+                                  </p:stCondLst>
+                                  <p:childTnLst>
+                                    <p:set>
+                                      <p:cBhvr>
+                                        <p:cTn id="44" dur="1" fill="hold">
+                                          <p:stCondLst>
+                                            <p:cond delay="0"/>
+                                          </p:stCondLst>
+                                        </p:cTn>
+                                        <p:tgtEl>
+                                          <p:spTgt spid="53"/>
+                                        </p:tgtEl>
+                                        <p:attrNameLst>
+                                          <p:attrName>style.visibility</p:attrName>
+                                        </p:attrNameLst>
+                                      </p:cBhvr>
+                                      <p:to>
+                                        <p:strVal val="visible"/>
+                                      </p:to>
+                                    </p:set>
+                                  </p:childTnLst>
+                                </p:cTn>
+                              </p:par>
+                              <p:par>
+                                <p:cTn id="45" presetID="1" presetClass="entr" presetSubtype="0" fill="hold" nodeType="withEffect">
+                                  <p:stCondLst>
+                                    <p:cond delay="0"/>
+                                  </p:stCondLst>
+                                  <p:childTnLst>
+                                    <p:set>
+                                      <p:cBhvr>
+                                        <p:cTn id="46" dur="1" fill="hold">
+                                          <p:stCondLst>
+                                            <p:cond delay="0"/>
+                                          </p:stCondLst>
+                                        </p:cTn>
+                                        <p:tgtEl>
+                                          <p:spTgt spid="1046"/>
+                                        </p:tgtEl>
+                                        <p:attrNameLst>
+                                          <p:attrName>style.visibility</p:attrName>
+                                        </p:attrNameLst>
+                                      </p:cBhvr>
+                                      <p:to>
+                                        <p:strVal val="visible"/>
+                                      </p:to>
+                                    </p:set>
+                                  </p:childTnLst>
+                                </p:cTn>
+                              </p:par>
+                            </p:childTnLst>
+                          </p:cTn>
+                        </p:par>
+                      </p:childTnLst>
+                    </p:cTn>
+                  </p:par>
+                  <p:par>
+                    <p:cTn id="47" fill="hold">
+                      <p:stCondLst>
+                        <p:cond delay="indefinite"/>
+                      </p:stCondLst>
+                      <p:childTnLst>
+                        <p:par>
+                          <p:cTn id="48" fill="hold">
+                            <p:stCondLst>
+                              <p:cond delay="0"/>
+                            </p:stCondLst>
+                            <p:childTnLst>
+                              <p:par>
+                                <p:cTn id="49" presetID="1" presetClass="entr" presetSubtype="0" fill="hold" grpId="0" nodeType="clickEffect">
+                                  <p:stCondLst>
+                                    <p:cond delay="0"/>
+                                  </p:stCondLst>
+                                  <p:childTnLst>
+                                    <p:set>
+                                      <p:cBhvr>
+                                        <p:cTn id="50" dur="1" fill="hold">
+                                          <p:stCondLst>
+                                            <p:cond delay="0"/>
+                                          </p:stCondLst>
+                                        </p:cTn>
+                                        <p:tgtEl>
+                                          <p:spTgt spid="26"/>
+                                        </p:tgtEl>
+                                        <p:attrNameLst>
+                                          <p:attrName>style.visibility</p:attrName>
+                                        </p:attrNameLst>
+                                      </p:cBhvr>
+                                      <p:to>
+                                        <p:strVal val="visible"/>
+                                      </p:to>
+                                    </p:set>
+                                  </p:childTnLst>
+                                </p:cTn>
+                              </p:par>
+                              <p:par>
+                                <p:cTn id="51" presetID="1" presetClass="entr" presetSubtype="0" fill="hold" nodeType="withEffect">
+                                  <p:stCondLst>
+                                    <p:cond delay="0"/>
+                                  </p:stCondLst>
+                                  <p:childTnLst>
+                                    <p:set>
+                                      <p:cBhvr>
+                                        <p:cTn id="52" dur="1" fill="hold">
+                                          <p:stCondLst>
+                                            <p:cond delay="0"/>
+                                          </p:stCondLst>
+                                        </p:cTn>
+                                        <p:tgtEl>
+                                          <p:spTgt spid="17"/>
+                                        </p:tgtEl>
+                                        <p:attrNameLst>
+                                          <p:attrName>style.visibility</p:attrName>
+                                        </p:attrNameLst>
+                                      </p:cBhvr>
+                                      <p:to>
+                                        <p:strVal val="visible"/>
+                                      </p:to>
+                                    </p:set>
+                                  </p:childTnLst>
+                                </p:cTn>
+                              </p:par>
+                            </p:childTnLst>
+                          </p:cTn>
+                        </p:par>
+                      </p:childTnLst>
+                    </p:cTn>
+                  </p:par>
+                  <p:par>
+                    <p:cTn id="53" fill="hold">
+                      <p:stCondLst>
+                        <p:cond delay="indefinite"/>
+                      </p:stCondLst>
+                      <p:childTnLst>
+                        <p:par>
+                          <p:cTn id="54" fill="hold">
+                            <p:stCondLst>
+                              <p:cond delay="0"/>
+                            </p:stCondLst>
+                            <p:childTnLst>
+                              <p:par>
+                                <p:cTn id="55" presetID="1" presetClass="entr" presetSubtype="0" fill="hold" nodeType="clickEffect">
+                                  <p:stCondLst>
+                                    <p:cond delay="0"/>
+                                  </p:stCondLst>
+                                  <p:childTnLst>
+                                    <p:set>
+                                      <p:cBhvr>
+                                        <p:cTn id="56" dur="1" fill="hold">
+                                          <p:stCondLst>
+                                            <p:cond delay="0"/>
+                                          </p:stCondLst>
+                                        </p:cTn>
+                                        <p:tgtEl>
+                                          <p:spTgt spid="1029"/>
+                                        </p:tgtEl>
+                                        <p:attrNameLst>
+                                          <p:attrName>style.visibility</p:attrName>
+                                        </p:attrNameLst>
+                                      </p:cBhvr>
+                                      <p:to>
+                                        <p:strVal val="visible"/>
+                                      </p:to>
+                                    </p:set>
+                                  </p:childTnLst>
+                                </p:cTn>
+                              </p:par>
+                            </p:childTnLst>
+                          </p:cTn>
+                        </p:par>
+                      </p:childTnLst>
+                    </p:cTn>
+                  </p:par>
+                  <p:par>
+                    <p:cTn id="57" fill="hold">
+                      <p:stCondLst>
+                        <p:cond delay="indefinite"/>
+                      </p:stCondLst>
+                      <p:childTnLst>
+                        <p:par>
+                          <p:cTn id="58" fill="hold">
+                            <p:stCondLst>
+                              <p:cond delay="0"/>
+                            </p:stCondLst>
+                            <p:childTnLst>
+                              <p:par>
+                                <p:cTn id="59" presetID="1" presetClass="entr" presetSubtype="0" fill="hold" nodeType="clickEffect">
+                                  <p:stCondLst>
+                                    <p:cond delay="0"/>
+                                  </p:stCondLst>
+                                  <p:childTnLst>
+                                    <p:set>
+                                      <p:cBhvr>
+                                        <p:cTn id="60" dur="1" fill="hold">
+                                          <p:stCondLst>
+                                            <p:cond delay="0"/>
+                                          </p:stCondLst>
+                                        </p:cTn>
+                                        <p:tgtEl>
+                                          <p:spTgt spid="1062"/>
+                                        </p:tgtEl>
+                                        <p:attrNameLst>
+                                          <p:attrName>style.visibility</p:attrName>
+                                        </p:attrNameLst>
+                                      </p:cBhvr>
+                                      <p:to>
+                                        <p:strVal val="visible"/>
+                                      </p:to>
+                                    </p:set>
+                                  </p:childTnLst>
+                                </p:cTn>
+                              </p:par>
+                            </p:childTnLst>
+                          </p:cTn>
+                        </p:par>
+                      </p:childTnLst>
+                    </p:cTn>
+                  </p:par>
+                  <p:par>
+                    <p:cTn id="61" fill="hold">
+                      <p:stCondLst>
+                        <p:cond delay="indefinite"/>
+                      </p:stCondLst>
+                      <p:childTnLst>
+                        <p:par>
+                          <p:cTn id="62" fill="hold">
+                            <p:stCondLst>
+                              <p:cond delay="0"/>
+                            </p:stCondLst>
+                            <p:childTnLst>
+                              <p:par>
+                                <p:cTn id="63" presetID="1" presetClass="entr" presetSubtype="0" fill="hold" nodeType="clickEffect">
+                                  <p:stCondLst>
+                                    <p:cond delay="0"/>
+                                  </p:stCondLst>
+                                  <p:childTnLst>
+                                    <p:set>
+                                      <p:cBhvr>
+                                        <p:cTn id="64" dur="1" fill="hold">
+                                          <p:stCondLst>
+                                            <p:cond delay="0"/>
+                                          </p:stCondLst>
+                                        </p:cTn>
+                                        <p:tgtEl>
+                                          <p:spTgt spid="1075"/>
+                                        </p:tgtEl>
+                                        <p:attrNameLst>
+                                          <p:attrName>style.visibility</p:attrName>
+                                        </p:attrNameLst>
+                                      </p:cBhvr>
+                                      <p:to>
+                                        <p:strVal val="visible"/>
+                                      </p:to>
+                                    </p:set>
+                                  </p:childTnLst>
+                                </p:cTn>
+                              </p:par>
+                            </p:childTnLst>
+                          </p:cTn>
+                        </p:par>
+                      </p:childTnLst>
+                    </p:cTn>
+                  </p:par>
+                  <p:par>
+                    <p:cTn id="65" fill="hold">
+                      <p:stCondLst>
+                        <p:cond delay="indefinite"/>
+                      </p:stCondLst>
+                      <p:childTnLst>
+                        <p:par>
+                          <p:cTn id="66" fill="hold">
+                            <p:stCondLst>
+                              <p:cond delay="0"/>
+                            </p:stCondLst>
+                            <p:childTnLst>
+                              <p:par>
+                                <p:cTn id="67" presetID="1" presetClass="entr" presetSubtype="0" fill="hold" nodeType="clickEffect">
+                                  <p:stCondLst>
+                                    <p:cond delay="0"/>
+                                  </p:stCondLst>
+                                  <p:childTnLst>
+                                    <p:set>
+                                      <p:cBhvr>
+                                        <p:cTn id="68" dur="1" fill="hold">
+                                          <p:stCondLst>
+                                            <p:cond delay="0"/>
+                                          </p:stCondLst>
+                                        </p:cTn>
+                                        <p:tgtEl>
+                                          <p:spTgt spid="2101"/>
+                                        </p:tgtEl>
+                                        <p:attrNameLst>
+                                          <p:attrName>style.visibility</p:attrName>
+                                        </p:attrNameLst>
+                                      </p:cBhvr>
+                                      <p:to>
+                                        <p:strVal val="visible"/>
+                                      </p:to>
+                                    </p:set>
+                                  </p:childTnLst>
+                                </p:cTn>
+                              </p:par>
+                              <p:par>
+                                <p:cTn id="69" presetID="1" presetClass="entr" presetSubtype="0" fill="hold" nodeType="withEffect">
+                                  <p:stCondLst>
+                                    <p:cond delay="0"/>
+                                  </p:stCondLst>
+                                  <p:childTnLst>
+                                    <p:set>
+                                      <p:cBhvr>
+                                        <p:cTn id="70" dur="1" fill="hold">
+                                          <p:stCondLst>
+                                            <p:cond delay="0"/>
+                                          </p:stCondLst>
+                                        </p:cTn>
+                                        <p:tgtEl>
+                                          <p:spTgt spid="2068"/>
                                         </p:tgtEl>
                                         <p:attrNameLst>
                                           <p:attrName>style.visibility</p:attrName>
@@ -31840,6 +32475,12 @@
       <p:bldP spid="22" grpId="0" animBg="1"/>
       <p:bldP spid="18" grpId="0" animBg="1"/>
       <p:bldP spid="2" grpId="0" animBg="1"/>
+      <p:bldP spid="47" grpId="0" animBg="1"/>
+      <p:bldP spid="48" grpId="0"/>
+      <p:bldP spid="49" grpId="0" animBg="1"/>
+      <p:bldP spid="50" grpId="0"/>
+      <p:bldP spid="52" grpId="0" animBg="1"/>
+      <p:bldP spid="53" grpId="0" animBg="1"/>
     </p:bldLst>
   </p:timing>
 </p:sld>
@@ -33620,6 +34261,294 @@
   <p:clrMapOvr>
     <a:masterClrMapping/>
   </p:clrMapOvr>
+  <p:timing>
+    <p:tnLst>
+      <p:par>
+        <p:cTn id="1" dur="indefinite" restart="never" nodeType="tmRoot">
+          <p:childTnLst>
+            <p:seq concurrent="1" nextAc="seek">
+              <p:cTn id="2" dur="indefinite" nodeType="mainSeq">
+                <p:childTnLst>
+                  <p:par>
+                    <p:cTn id="3" fill="hold">
+                      <p:stCondLst>
+                        <p:cond delay="indefinite"/>
+                      </p:stCondLst>
+                      <p:childTnLst>
+                        <p:par>
+                          <p:cTn id="4" fill="hold">
+                            <p:stCondLst>
+                              <p:cond delay="0"/>
+                            </p:stCondLst>
+                            <p:childTnLst>
+                              <p:par>
+                                <p:cTn id="5" presetID="1" presetClass="entr" presetSubtype="0" fill="hold" grpId="0" nodeType="clickEffect">
+                                  <p:stCondLst>
+                                    <p:cond delay="0"/>
+                                  </p:stCondLst>
+                                  <p:childTnLst>
+                                    <p:set>
+                                      <p:cBhvr>
+                                        <p:cTn id="6" dur="1" fill="hold">
+                                          <p:stCondLst>
+                                            <p:cond delay="0"/>
+                                          </p:stCondLst>
+                                        </p:cTn>
+                                        <p:tgtEl>
+                                          <p:spTgt spid="22"/>
+                                        </p:tgtEl>
+                                        <p:attrNameLst>
+                                          <p:attrName>style.visibility</p:attrName>
+                                        </p:attrNameLst>
+                                      </p:cBhvr>
+                                      <p:to>
+                                        <p:strVal val="visible"/>
+                                      </p:to>
+                                    </p:set>
+                                  </p:childTnLst>
+                                </p:cTn>
+                              </p:par>
+                              <p:par>
+                                <p:cTn id="7" presetID="1" presetClass="entr" presetSubtype="0" fill="hold" nodeType="withEffect">
+                                  <p:stCondLst>
+                                    <p:cond delay="0"/>
+                                  </p:stCondLst>
+                                  <p:childTnLst>
+                                    <p:set>
+                                      <p:cBhvr>
+                                        <p:cTn id="8" dur="1" fill="hold">
+                                          <p:stCondLst>
+                                            <p:cond delay="0"/>
+                                          </p:stCondLst>
+                                        </p:cTn>
+                                        <p:tgtEl>
+                                          <p:spTgt spid="24"/>
+                                        </p:tgtEl>
+                                        <p:attrNameLst>
+                                          <p:attrName>style.visibility</p:attrName>
+                                        </p:attrNameLst>
+                                      </p:cBhvr>
+                                      <p:to>
+                                        <p:strVal val="visible"/>
+                                      </p:to>
+                                    </p:set>
+                                  </p:childTnLst>
+                                </p:cTn>
+                              </p:par>
+                              <p:par>
+                                <p:cTn id="9" presetID="1" presetClass="entr" presetSubtype="0" fill="hold" nodeType="withEffect">
+                                  <p:stCondLst>
+                                    <p:cond delay="0"/>
+                                  </p:stCondLst>
+                                  <p:childTnLst>
+                                    <p:set>
+                                      <p:cBhvr>
+                                        <p:cTn id="10" dur="1" fill="hold">
+                                          <p:stCondLst>
+                                            <p:cond delay="0"/>
+                                          </p:stCondLst>
+                                        </p:cTn>
+                                        <p:tgtEl>
+                                          <p:spTgt spid="26"/>
+                                        </p:tgtEl>
+                                        <p:attrNameLst>
+                                          <p:attrName>style.visibility</p:attrName>
+                                        </p:attrNameLst>
+                                      </p:cBhvr>
+                                      <p:to>
+                                        <p:strVal val="visible"/>
+                                      </p:to>
+                                    </p:set>
+                                  </p:childTnLst>
+                                </p:cTn>
+                              </p:par>
+                              <p:par>
+                                <p:cTn id="11" presetID="1" presetClass="entr" presetSubtype="0" fill="hold" grpId="0" nodeType="withEffect">
+                                  <p:stCondLst>
+                                    <p:cond delay="0"/>
+                                  </p:stCondLst>
+                                  <p:childTnLst>
+                                    <p:set>
+                                      <p:cBhvr>
+                                        <p:cTn id="12" dur="1" fill="hold">
+                                          <p:stCondLst>
+                                            <p:cond delay="0"/>
+                                          </p:stCondLst>
+                                        </p:cTn>
+                                        <p:tgtEl>
+                                          <p:spTgt spid="27"/>
+                                        </p:tgtEl>
+                                        <p:attrNameLst>
+                                          <p:attrName>style.visibility</p:attrName>
+                                        </p:attrNameLst>
+                                      </p:cBhvr>
+                                      <p:to>
+                                        <p:strVal val="visible"/>
+                                      </p:to>
+                                    </p:set>
+                                  </p:childTnLst>
+                                </p:cTn>
+                              </p:par>
+                            </p:childTnLst>
+                          </p:cTn>
+                        </p:par>
+                      </p:childTnLst>
+                    </p:cTn>
+                  </p:par>
+                  <p:par>
+                    <p:cTn id="13" fill="hold">
+                      <p:stCondLst>
+                        <p:cond delay="indefinite"/>
+                      </p:stCondLst>
+                      <p:childTnLst>
+                        <p:par>
+                          <p:cTn id="14" fill="hold">
+                            <p:stCondLst>
+                              <p:cond delay="0"/>
+                            </p:stCondLst>
+                            <p:childTnLst>
+                              <p:par>
+                                <p:cTn id="15" presetID="1" presetClass="entr" presetSubtype="0" fill="hold" nodeType="clickEffect">
+                                  <p:stCondLst>
+                                    <p:cond delay="0"/>
+                                  </p:stCondLst>
+                                  <p:childTnLst>
+                                    <p:set>
+                                      <p:cBhvr>
+                                        <p:cTn id="16" dur="1" fill="hold">
+                                          <p:stCondLst>
+                                            <p:cond delay="0"/>
+                                          </p:stCondLst>
+                                        </p:cTn>
+                                        <p:tgtEl>
+                                          <p:spTgt spid="31"/>
+                                        </p:tgtEl>
+                                        <p:attrNameLst>
+                                          <p:attrName>style.visibility</p:attrName>
+                                        </p:attrNameLst>
+                                      </p:cBhvr>
+                                      <p:to>
+                                        <p:strVal val="visible"/>
+                                      </p:to>
+                                    </p:set>
+                                  </p:childTnLst>
+                                </p:cTn>
+                              </p:par>
+                              <p:par>
+                                <p:cTn id="17" presetID="1" presetClass="entr" presetSubtype="0" fill="hold" nodeType="withEffect">
+                                  <p:stCondLst>
+                                    <p:cond delay="0"/>
+                                  </p:stCondLst>
+                                  <p:childTnLst>
+                                    <p:set>
+                                      <p:cBhvr>
+                                        <p:cTn id="18" dur="1" fill="hold">
+                                          <p:stCondLst>
+                                            <p:cond delay="0"/>
+                                          </p:stCondLst>
+                                        </p:cTn>
+                                        <p:tgtEl>
+                                          <p:spTgt spid="34"/>
+                                        </p:tgtEl>
+                                        <p:attrNameLst>
+                                          <p:attrName>style.visibility</p:attrName>
+                                        </p:attrNameLst>
+                                      </p:cBhvr>
+                                      <p:to>
+                                        <p:strVal val="visible"/>
+                                      </p:to>
+                                    </p:set>
+                                  </p:childTnLst>
+                                </p:cTn>
+                              </p:par>
+                              <p:par>
+                                <p:cTn id="19" presetID="1" presetClass="entr" presetSubtype="0" fill="hold" grpId="0" nodeType="withEffect">
+                                  <p:stCondLst>
+                                    <p:cond delay="0"/>
+                                  </p:stCondLst>
+                                  <p:childTnLst>
+                                    <p:set>
+                                      <p:cBhvr>
+                                        <p:cTn id="20" dur="1" fill="hold">
+                                          <p:stCondLst>
+                                            <p:cond delay="0"/>
+                                          </p:stCondLst>
+                                        </p:cTn>
+                                        <p:tgtEl>
+                                          <p:spTgt spid="32"/>
+                                        </p:tgtEl>
+                                        <p:attrNameLst>
+                                          <p:attrName>style.visibility</p:attrName>
+                                        </p:attrNameLst>
+                                      </p:cBhvr>
+                                      <p:to>
+                                        <p:strVal val="visible"/>
+                                      </p:to>
+                                    </p:set>
+                                  </p:childTnLst>
+                                </p:cTn>
+                              </p:par>
+                              <p:par>
+                                <p:cTn id="21" presetID="1" presetClass="entr" presetSubtype="0" fill="hold" grpId="0" nodeType="withEffect">
+                                  <p:stCondLst>
+                                    <p:cond delay="0"/>
+                                  </p:stCondLst>
+                                  <p:childTnLst>
+                                    <p:set>
+                                      <p:cBhvr>
+                                        <p:cTn id="22" dur="1" fill="hold">
+                                          <p:stCondLst>
+                                            <p:cond delay="0"/>
+                                          </p:stCondLst>
+                                        </p:cTn>
+                                        <p:tgtEl>
+                                          <p:spTgt spid="29"/>
+                                        </p:tgtEl>
+                                        <p:attrNameLst>
+                                          <p:attrName>style.visibility</p:attrName>
+                                        </p:attrNameLst>
+                                      </p:cBhvr>
+                                      <p:to>
+                                        <p:strVal val="visible"/>
+                                      </p:to>
+                                    </p:set>
+                                  </p:childTnLst>
+                                </p:cTn>
+                              </p:par>
+                            </p:childTnLst>
+                          </p:cTn>
+                        </p:par>
+                      </p:childTnLst>
+                    </p:cTn>
+                  </p:par>
+                </p:childTnLst>
+              </p:cTn>
+              <p:prevCondLst>
+                <p:cond evt="onPrev" delay="0">
+                  <p:tgtEl>
+                    <p:sldTgt/>
+                  </p:tgtEl>
+                </p:cond>
+              </p:prevCondLst>
+              <p:nextCondLst>
+                <p:cond evt="onNext" delay="0">
+                  <p:tgtEl>
+                    <p:sldTgt/>
+                  </p:tgtEl>
+                </p:cond>
+              </p:nextCondLst>
+            </p:seq>
+          </p:childTnLst>
+        </p:cTn>
+      </p:par>
+    </p:tnLst>
+    <p:bldLst>
+      <p:bldP spid="22" grpId="0"/>
+      <p:bldP spid="27" grpId="0"/>
+      <p:bldP spid="29" grpId="0"/>
+      <p:bldP spid="32" grpId="0"/>
+    </p:bldLst>
+  </p:timing>
 </p:sld>
 </file>
 
@@ -35425,6 +36354,294 @@
   <p:clrMapOvr>
     <a:masterClrMapping/>
   </p:clrMapOvr>
+  <p:timing>
+    <p:tnLst>
+      <p:par>
+        <p:cTn id="1" dur="indefinite" restart="never" nodeType="tmRoot">
+          <p:childTnLst>
+            <p:seq concurrent="1" nextAc="seek">
+              <p:cTn id="2" dur="indefinite" nodeType="mainSeq">
+                <p:childTnLst>
+                  <p:par>
+                    <p:cTn id="3" fill="hold">
+                      <p:stCondLst>
+                        <p:cond delay="indefinite"/>
+                      </p:stCondLst>
+                      <p:childTnLst>
+                        <p:par>
+                          <p:cTn id="4" fill="hold">
+                            <p:stCondLst>
+                              <p:cond delay="0"/>
+                            </p:stCondLst>
+                            <p:childTnLst>
+                              <p:par>
+                                <p:cTn id="5" presetID="1" presetClass="entr" presetSubtype="0" fill="hold" nodeType="clickEffect">
+                                  <p:stCondLst>
+                                    <p:cond delay="0"/>
+                                  </p:stCondLst>
+                                  <p:childTnLst>
+                                    <p:set>
+                                      <p:cBhvr>
+                                        <p:cTn id="6" dur="1" fill="hold">
+                                          <p:stCondLst>
+                                            <p:cond delay="0"/>
+                                          </p:stCondLst>
+                                        </p:cTn>
+                                        <p:tgtEl>
+                                          <p:spTgt spid="9"/>
+                                        </p:tgtEl>
+                                        <p:attrNameLst>
+                                          <p:attrName>style.visibility</p:attrName>
+                                        </p:attrNameLst>
+                                      </p:cBhvr>
+                                      <p:to>
+                                        <p:strVal val="visible"/>
+                                      </p:to>
+                                    </p:set>
+                                  </p:childTnLst>
+                                </p:cTn>
+                              </p:par>
+                              <p:par>
+                                <p:cTn id="7" presetID="1" presetClass="entr" presetSubtype="0" fill="hold" grpId="0" nodeType="withEffect">
+                                  <p:stCondLst>
+                                    <p:cond delay="0"/>
+                                  </p:stCondLst>
+                                  <p:childTnLst>
+                                    <p:set>
+                                      <p:cBhvr>
+                                        <p:cTn id="8" dur="1" fill="hold">
+                                          <p:stCondLst>
+                                            <p:cond delay="0"/>
+                                          </p:stCondLst>
+                                        </p:cTn>
+                                        <p:tgtEl>
+                                          <p:spTgt spid="22"/>
+                                        </p:tgtEl>
+                                        <p:attrNameLst>
+                                          <p:attrName>style.visibility</p:attrName>
+                                        </p:attrNameLst>
+                                      </p:cBhvr>
+                                      <p:to>
+                                        <p:strVal val="visible"/>
+                                      </p:to>
+                                    </p:set>
+                                  </p:childTnLst>
+                                </p:cTn>
+                              </p:par>
+                              <p:par>
+                                <p:cTn id="9" presetID="1" presetClass="entr" presetSubtype="0" fill="hold" grpId="0" nodeType="withEffect">
+                                  <p:stCondLst>
+                                    <p:cond delay="0"/>
+                                  </p:stCondLst>
+                                  <p:childTnLst>
+                                    <p:set>
+                                      <p:cBhvr>
+                                        <p:cTn id="10" dur="1" fill="hold">
+                                          <p:stCondLst>
+                                            <p:cond delay="0"/>
+                                          </p:stCondLst>
+                                        </p:cTn>
+                                        <p:tgtEl>
+                                          <p:spTgt spid="27"/>
+                                        </p:tgtEl>
+                                        <p:attrNameLst>
+                                          <p:attrName>style.visibility</p:attrName>
+                                        </p:attrNameLst>
+                                      </p:cBhvr>
+                                      <p:to>
+                                        <p:strVal val="visible"/>
+                                      </p:to>
+                                    </p:set>
+                                  </p:childTnLst>
+                                </p:cTn>
+                              </p:par>
+                              <p:par>
+                                <p:cTn id="11" presetID="1" presetClass="entr" presetSubtype="0" fill="hold" nodeType="withEffect">
+                                  <p:stCondLst>
+                                    <p:cond delay="0"/>
+                                  </p:stCondLst>
+                                  <p:childTnLst>
+                                    <p:set>
+                                      <p:cBhvr>
+                                        <p:cTn id="12" dur="1" fill="hold">
+                                          <p:stCondLst>
+                                            <p:cond delay="0"/>
+                                          </p:stCondLst>
+                                        </p:cTn>
+                                        <p:tgtEl>
+                                          <p:spTgt spid="14"/>
+                                        </p:tgtEl>
+                                        <p:attrNameLst>
+                                          <p:attrName>style.visibility</p:attrName>
+                                        </p:attrNameLst>
+                                      </p:cBhvr>
+                                      <p:to>
+                                        <p:strVal val="visible"/>
+                                      </p:to>
+                                    </p:set>
+                                  </p:childTnLst>
+                                </p:cTn>
+                              </p:par>
+                            </p:childTnLst>
+                          </p:cTn>
+                        </p:par>
+                      </p:childTnLst>
+                    </p:cTn>
+                  </p:par>
+                  <p:par>
+                    <p:cTn id="13" fill="hold">
+                      <p:stCondLst>
+                        <p:cond delay="indefinite"/>
+                      </p:stCondLst>
+                      <p:childTnLst>
+                        <p:par>
+                          <p:cTn id="14" fill="hold">
+                            <p:stCondLst>
+                              <p:cond delay="0"/>
+                            </p:stCondLst>
+                            <p:childTnLst>
+                              <p:par>
+                                <p:cTn id="15" presetID="1" presetClass="entr" presetSubtype="0" fill="hold" grpId="0" nodeType="clickEffect">
+                                  <p:stCondLst>
+                                    <p:cond delay="0"/>
+                                  </p:stCondLst>
+                                  <p:childTnLst>
+                                    <p:set>
+                                      <p:cBhvr>
+                                        <p:cTn id="16" dur="1" fill="hold">
+                                          <p:stCondLst>
+                                            <p:cond delay="0"/>
+                                          </p:stCondLst>
+                                        </p:cTn>
+                                        <p:tgtEl>
+                                          <p:spTgt spid="29"/>
+                                        </p:tgtEl>
+                                        <p:attrNameLst>
+                                          <p:attrName>style.visibility</p:attrName>
+                                        </p:attrNameLst>
+                                      </p:cBhvr>
+                                      <p:to>
+                                        <p:strVal val="visible"/>
+                                      </p:to>
+                                    </p:set>
+                                  </p:childTnLst>
+                                </p:cTn>
+                              </p:par>
+                              <p:par>
+                                <p:cTn id="17" presetID="1" presetClass="entr" presetSubtype="0" fill="hold" grpId="0" nodeType="withEffect">
+                                  <p:stCondLst>
+                                    <p:cond delay="0"/>
+                                  </p:stCondLst>
+                                  <p:childTnLst>
+                                    <p:set>
+                                      <p:cBhvr>
+                                        <p:cTn id="18" dur="1" fill="hold">
+                                          <p:stCondLst>
+                                            <p:cond delay="0"/>
+                                          </p:stCondLst>
+                                        </p:cTn>
+                                        <p:tgtEl>
+                                          <p:spTgt spid="32"/>
+                                        </p:tgtEl>
+                                        <p:attrNameLst>
+                                          <p:attrName>style.visibility</p:attrName>
+                                        </p:attrNameLst>
+                                      </p:cBhvr>
+                                      <p:to>
+                                        <p:strVal val="visible"/>
+                                      </p:to>
+                                    </p:set>
+                                  </p:childTnLst>
+                                </p:cTn>
+                              </p:par>
+                              <p:par>
+                                <p:cTn id="19" presetID="1" presetClass="entr" presetSubtype="0" fill="hold" nodeType="withEffect">
+                                  <p:stCondLst>
+                                    <p:cond delay="0"/>
+                                  </p:stCondLst>
+                                  <p:childTnLst>
+                                    <p:set>
+                                      <p:cBhvr>
+                                        <p:cTn id="20" dur="1" fill="hold">
+                                          <p:stCondLst>
+                                            <p:cond delay="0"/>
+                                          </p:stCondLst>
+                                        </p:cTn>
+                                        <p:tgtEl>
+                                          <p:spTgt spid="17"/>
+                                        </p:tgtEl>
+                                        <p:attrNameLst>
+                                          <p:attrName>style.visibility</p:attrName>
+                                        </p:attrNameLst>
+                                      </p:cBhvr>
+                                      <p:to>
+                                        <p:strVal val="visible"/>
+                                      </p:to>
+                                    </p:set>
+                                  </p:childTnLst>
+                                </p:cTn>
+                              </p:par>
+                              <p:par>
+                                <p:cTn id="21" presetID="1" presetClass="entr" presetSubtype="0" fill="hold" nodeType="withEffect">
+                                  <p:stCondLst>
+                                    <p:cond delay="0"/>
+                                  </p:stCondLst>
+                                  <p:childTnLst>
+                                    <p:set>
+                                      <p:cBhvr>
+                                        <p:cTn id="22" dur="1" fill="hold">
+                                          <p:stCondLst>
+                                            <p:cond delay="0"/>
+                                          </p:stCondLst>
+                                        </p:cTn>
+                                        <p:tgtEl>
+                                          <p:spTgt spid="19"/>
+                                        </p:tgtEl>
+                                        <p:attrNameLst>
+                                          <p:attrName>style.visibility</p:attrName>
+                                        </p:attrNameLst>
+                                      </p:cBhvr>
+                                      <p:to>
+                                        <p:strVal val="visible"/>
+                                      </p:to>
+                                    </p:set>
+                                  </p:childTnLst>
+                                </p:cTn>
+                              </p:par>
+                            </p:childTnLst>
+                          </p:cTn>
+                        </p:par>
+                      </p:childTnLst>
+                    </p:cTn>
+                  </p:par>
+                </p:childTnLst>
+              </p:cTn>
+              <p:prevCondLst>
+                <p:cond evt="onPrev" delay="0">
+                  <p:tgtEl>
+                    <p:sldTgt/>
+                  </p:tgtEl>
+                </p:cond>
+              </p:prevCondLst>
+              <p:nextCondLst>
+                <p:cond evt="onNext" delay="0">
+                  <p:tgtEl>
+                    <p:sldTgt/>
+                  </p:tgtEl>
+                </p:cond>
+              </p:nextCondLst>
+            </p:seq>
+          </p:childTnLst>
+        </p:cTn>
+      </p:par>
+    </p:tnLst>
+    <p:bldLst>
+      <p:bldP spid="22" grpId="0"/>
+      <p:bldP spid="27" grpId="0"/>
+      <p:bldP spid="29" grpId="0"/>
+      <p:bldP spid="32" grpId="0"/>
+    </p:bldLst>
+  </p:timing>
 </p:sld>
 </file>
 

--- a/presentation/dsfs_ft_36_Projet_REnergies_efficiency_prediction.pptx
+++ b/presentation/dsfs_ft_36_Projet_REnergies_efficiency_prediction.pptx
@@ -291,7 +291,7 @@
 <file path=ppt/revisionInfo.xml><?xml version="1.0" encoding="utf-8"?>
 <p1510:revInfo xmlns:a="http://schemas.openxmlformats.org/drawingml/2006/main" xmlns:r="http://schemas.openxmlformats.org/officeDocument/2006/relationships" xmlns:p1510="http://schemas.microsoft.com/office/powerpoint/2015/10/main">
   <p1510:revLst>
-    <p1510:client id="{2EB72A00-7F79-4813-B4C2-C6564860F3F6}" v="1411" dt="2025-11-20T20:39:03.634"/>
+    <p1510:client id="{2EB72A00-7F79-4813-B4C2-C6564860F3F6}" v="1576" dt="2025-11-21T02:14:12.346"/>
   </p1510:revLst>
 </p1510:revInfo>
 </file>
@@ -301,7 +301,7 @@
   <pc:docChgLst>
     <pc:chgData name="Jean-Yves Vuillequez" userId="e7fac481abea6bd0" providerId="LiveId" clId="{79E365E8-22BC-4EC2-9606-9A9AC6CD1D22}"/>
     <pc:docChg chg="undo custSel addSld delSld modSld sldOrd">
-      <pc:chgData name="Jean-Yves Vuillequez" userId="e7fac481abea6bd0" providerId="LiveId" clId="{79E365E8-22BC-4EC2-9606-9A9AC6CD1D22}" dt="2025-11-20T20:45:26.230" v="5250" actId="20577"/>
+      <pc:chgData name="Jean-Yves Vuillequez" userId="e7fac481abea6bd0" providerId="LiveId" clId="{79E365E8-22BC-4EC2-9606-9A9AC6CD1D22}" dt="2025-11-21T02:29:34.535" v="5608" actId="6549"/>
       <pc:docMkLst>
         <pc:docMk/>
       </pc:docMkLst>
@@ -329,13 +329,13 @@
         </pc:spChg>
       </pc:sldChg>
       <pc:sldChg chg="addSp delSp modSp add del mod">
-        <pc:chgData name="Jean-Yves Vuillequez" userId="e7fac481abea6bd0" providerId="LiveId" clId="{79E365E8-22BC-4EC2-9606-9A9AC6CD1D22}" dt="2025-11-20T14:44:47.056" v="3910" actId="1076"/>
+        <pc:chgData name="Jean-Yves Vuillequez" userId="e7fac481abea6bd0" providerId="LiveId" clId="{79E365E8-22BC-4EC2-9606-9A9AC6CD1D22}" dt="2025-11-21T02:25:39.724" v="5607" actId="20577"/>
         <pc:sldMkLst>
           <pc:docMk/>
           <pc:sldMk cId="0" sldId="263"/>
         </pc:sldMkLst>
         <pc:spChg chg="add mod">
-          <ac:chgData name="Jean-Yves Vuillequez" userId="e7fac481abea6bd0" providerId="LiveId" clId="{79E365E8-22BC-4EC2-9606-9A9AC6CD1D22}" dt="2025-11-20T14:44:47.056" v="3910" actId="1076"/>
+          <ac:chgData name="Jean-Yves Vuillequez" userId="e7fac481abea6bd0" providerId="LiveId" clId="{79E365E8-22BC-4EC2-9606-9A9AC6CD1D22}" dt="2025-11-21T02:25:39.724" v="5607" actId="20577"/>
           <ac:spMkLst>
             <pc:docMk/>
             <pc:sldMk cId="0" sldId="263"/>
@@ -343,49 +343,13 @@
           </ac:spMkLst>
         </pc:spChg>
         <pc:spChg chg="mod">
-          <ac:chgData name="Jean-Yves Vuillequez" userId="e7fac481abea6bd0" providerId="LiveId" clId="{79E365E8-22BC-4EC2-9606-9A9AC6CD1D22}" dt="2025-11-19T10:57:53.045" v="42" actId="20577"/>
+          <ac:chgData name="Jean-Yves Vuillequez" userId="e7fac481abea6bd0" providerId="LiveId" clId="{79E365E8-22BC-4EC2-9606-9A9AC6CD1D22}" dt="2025-11-21T02:25:31.718" v="5591" actId="20577"/>
           <ac:spMkLst>
             <pc:docMk/>
             <pc:sldMk cId="0" sldId="263"/>
             <ac:spMk id="61" creationId="{00000000-0000-0000-0000-000000000000}"/>
           </ac:spMkLst>
         </pc:spChg>
-        <pc:picChg chg="del mod">
-          <ac:chgData name="Jean-Yves Vuillequez" userId="e7fac481abea6bd0" providerId="LiveId" clId="{79E365E8-22BC-4EC2-9606-9A9AC6CD1D22}" dt="2025-11-19T10:57:28.093" v="13" actId="478"/>
-          <ac:picMkLst>
-            <pc:docMk/>
-            <pc:sldMk cId="0" sldId="263"/>
-            <ac:picMk id="5" creationId="{BF507C43-8C8F-F14C-A2E6-D966FC03A531}"/>
-          </ac:picMkLst>
-        </pc:picChg>
-      </pc:sldChg>
-      <pc:sldChg chg="del">
-        <pc:chgData name="Jean-Yves Vuillequez" userId="e7fac481abea6bd0" providerId="LiveId" clId="{79E365E8-22BC-4EC2-9606-9A9AC6CD1D22}" dt="2025-11-19T10:57:21.256" v="9" actId="47"/>
-        <pc:sldMkLst>
-          <pc:docMk/>
-          <pc:sldMk cId="0" sldId="264"/>
-        </pc:sldMkLst>
-      </pc:sldChg>
-      <pc:sldChg chg="del">
-        <pc:chgData name="Jean-Yves Vuillequez" userId="e7fac481abea6bd0" providerId="LiveId" clId="{79E365E8-22BC-4EC2-9606-9A9AC6CD1D22}" dt="2025-11-19T11:00:58.858" v="84" actId="47"/>
-        <pc:sldMkLst>
-          <pc:docMk/>
-          <pc:sldMk cId="0" sldId="265"/>
-        </pc:sldMkLst>
-      </pc:sldChg>
-      <pc:sldChg chg="del">
-        <pc:chgData name="Jean-Yves Vuillequez" userId="e7fac481abea6bd0" providerId="LiveId" clId="{79E365E8-22BC-4EC2-9606-9A9AC6CD1D22}" dt="2025-11-19T11:00:58.858" v="84" actId="47"/>
-        <pc:sldMkLst>
-          <pc:docMk/>
-          <pc:sldMk cId="1868318443" sldId="266"/>
-        </pc:sldMkLst>
-      </pc:sldChg>
-      <pc:sldChg chg="del">
-        <pc:chgData name="Jean-Yves Vuillequez" userId="e7fac481abea6bd0" providerId="LiveId" clId="{79E365E8-22BC-4EC2-9606-9A9AC6CD1D22}" dt="2025-11-19T11:00:58.858" v="84" actId="47"/>
-        <pc:sldMkLst>
-          <pc:docMk/>
-          <pc:sldMk cId="2644984178" sldId="267"/>
-        </pc:sldMkLst>
       </pc:sldChg>
       <pc:sldChg chg="addSp delSp modSp mod modAnim">
         <pc:chgData name="Jean-Yves Vuillequez" userId="e7fac481abea6bd0" providerId="LiveId" clId="{79E365E8-22BC-4EC2-9606-9A9AC6CD1D22}" dt="2025-11-20T20:36:02.952" v="5213"/>
@@ -415,14 +379,6 @@
             <pc:docMk/>
             <pc:sldMk cId="0" sldId="270"/>
             <ac:spMk id="5" creationId="{6E9B9A86-9FEE-4DF9-2C6B-AA0F6754EFCC}"/>
-          </ac:spMkLst>
-        </pc:spChg>
-        <pc:spChg chg="add del">
-          <ac:chgData name="Jean-Yves Vuillequez" userId="e7fac481abea6bd0" providerId="LiveId" clId="{79E365E8-22BC-4EC2-9606-9A9AC6CD1D22}" dt="2025-11-19T15:27:31.625" v="178" actId="22"/>
-          <ac:spMkLst>
-            <pc:docMk/>
-            <pc:sldMk cId="0" sldId="270"/>
-            <ac:spMk id="5" creationId="{CFDEE9DF-9D18-D97C-5C14-CA1236A83E99}"/>
           </ac:spMkLst>
         </pc:spChg>
         <pc:spChg chg="add mod">
@@ -545,22 +501,6 @@
             <ac:spMk id="181" creationId="{00000000-0000-0000-0000-000000000000}"/>
           </ac:spMkLst>
         </pc:spChg>
-        <pc:spChg chg="del">
-          <ac:chgData name="Jean-Yves Vuillequez" userId="e7fac481abea6bd0" providerId="LiveId" clId="{79E365E8-22BC-4EC2-9606-9A9AC6CD1D22}" dt="2025-11-19T11:00:46.457" v="81" actId="478"/>
-          <ac:spMkLst>
-            <pc:docMk/>
-            <pc:sldMk cId="0" sldId="270"/>
-            <ac:spMk id="182" creationId="{00000000-0000-0000-0000-000000000000}"/>
-          </ac:spMkLst>
-        </pc:spChg>
-        <pc:picChg chg="add del">
-          <ac:chgData name="Jean-Yves Vuillequez" userId="e7fac481abea6bd0" providerId="LiveId" clId="{79E365E8-22BC-4EC2-9606-9A9AC6CD1D22}" dt="2025-11-19T11:04:20.428" v="92" actId="22"/>
-          <ac:picMkLst>
-            <pc:docMk/>
-            <pc:sldMk cId="0" sldId="270"/>
-            <ac:picMk id="3" creationId="{385EAD59-F5EF-433F-E72D-66416F21249B}"/>
-          </ac:picMkLst>
-        </pc:picChg>
         <pc:picChg chg="add del mod">
           <ac:chgData name="Jean-Yves Vuillequez" userId="e7fac481abea6bd0" providerId="LiveId" clId="{79E365E8-22BC-4EC2-9606-9A9AC6CD1D22}" dt="2025-11-20T12:53:29.722" v="2837" actId="478"/>
           <ac:picMkLst>
@@ -626,20 +566,6 @@
           </ac:cxnSpMkLst>
         </pc:cxnChg>
       </pc:sldChg>
-      <pc:sldChg chg="del">
-        <pc:chgData name="Jean-Yves Vuillequez" userId="e7fac481abea6bd0" providerId="LiveId" clId="{79E365E8-22BC-4EC2-9606-9A9AC6CD1D22}" dt="2025-11-19T14:02:01.719" v="119" actId="47"/>
-        <pc:sldMkLst>
-          <pc:docMk/>
-          <pc:sldMk cId="2182015625" sldId="272"/>
-        </pc:sldMkLst>
-      </pc:sldChg>
-      <pc:sldChg chg="add del">
-        <pc:chgData name="Jean-Yves Vuillequez" userId="e7fac481abea6bd0" providerId="LiveId" clId="{79E365E8-22BC-4EC2-9606-9A9AC6CD1D22}" dt="2025-11-19T14:02:17.709" v="121" actId="47"/>
-        <pc:sldMkLst>
-          <pc:docMk/>
-          <pc:sldMk cId="1023234914" sldId="273"/>
-        </pc:sldMkLst>
-      </pc:sldChg>
       <pc:sldChg chg="modSp add del mod">
         <pc:chgData name="Jean-Yves Vuillequez" userId="e7fac481abea6bd0" providerId="LiveId" clId="{79E365E8-22BC-4EC2-9606-9A9AC6CD1D22}" dt="2025-11-19T14:03:57.617" v="139" actId="20577"/>
         <pc:sldMkLst>
@@ -652,125 +578,6 @@
             <pc:docMk/>
             <pc:sldMk cId="1558646683" sldId="273"/>
             <ac:spMk id="62" creationId="{1465D56F-7913-AD4E-8248-AEC9AC3FBC16}"/>
-          </ac:spMkLst>
-        </pc:spChg>
-      </pc:sldChg>
-      <pc:sldChg chg="delSp modSp del mod delAnim">
-        <pc:chgData name="Jean-Yves Vuillequez" userId="e7fac481abea6bd0" providerId="LiveId" clId="{79E365E8-22BC-4EC2-9606-9A9AC6CD1D22}" dt="2025-11-19T11:00:27.703" v="73" actId="2696"/>
-        <pc:sldMkLst>
-          <pc:docMk/>
-          <pc:sldMk cId="76015710" sldId="274"/>
-        </pc:sldMkLst>
-        <pc:spChg chg="del">
-          <ac:chgData name="Jean-Yves Vuillequez" userId="e7fac481abea6bd0" providerId="LiveId" clId="{79E365E8-22BC-4EC2-9606-9A9AC6CD1D22}" dt="2025-11-19T10:58:31.404" v="47" actId="478"/>
-          <ac:spMkLst>
-            <pc:docMk/>
-            <pc:sldMk cId="76015710" sldId="274"/>
-            <ac:spMk id="5" creationId="{88A106DF-7A83-DB85-D675-3B89338AAC0D}"/>
-          </ac:spMkLst>
-        </pc:spChg>
-        <pc:spChg chg="del">
-          <ac:chgData name="Jean-Yves Vuillequez" userId="e7fac481abea6bd0" providerId="LiveId" clId="{79E365E8-22BC-4EC2-9606-9A9AC6CD1D22}" dt="2025-11-19T10:58:36.593" v="49" actId="478"/>
-          <ac:spMkLst>
-            <pc:docMk/>
-            <pc:sldMk cId="76015710" sldId="274"/>
-            <ac:spMk id="9" creationId="{0EA1EBA7-5A55-2DB4-2AAA-7181ADF95728}"/>
-          </ac:spMkLst>
-        </pc:spChg>
-        <pc:spChg chg="del">
-          <ac:chgData name="Jean-Yves Vuillequez" userId="e7fac481abea6bd0" providerId="LiveId" clId="{79E365E8-22BC-4EC2-9606-9A9AC6CD1D22}" dt="2025-11-19T10:58:36.593" v="49" actId="478"/>
-          <ac:spMkLst>
-            <pc:docMk/>
-            <pc:sldMk cId="76015710" sldId="274"/>
-            <ac:spMk id="10" creationId="{A409361B-330D-D2A5-D967-903166D5DAE4}"/>
-          </ac:spMkLst>
-        </pc:spChg>
-        <pc:spChg chg="del">
-          <ac:chgData name="Jean-Yves Vuillequez" userId="e7fac481abea6bd0" providerId="LiveId" clId="{79E365E8-22BC-4EC2-9606-9A9AC6CD1D22}" dt="2025-11-19T10:58:36.593" v="49" actId="478"/>
-          <ac:spMkLst>
-            <pc:docMk/>
-            <pc:sldMk cId="76015710" sldId="274"/>
-            <ac:spMk id="11" creationId="{F0A9E65F-DDDA-6923-AE09-42C784AB054A}"/>
-          </ac:spMkLst>
-        </pc:spChg>
-        <pc:spChg chg="del">
-          <ac:chgData name="Jean-Yves Vuillequez" userId="e7fac481abea6bd0" providerId="LiveId" clId="{79E365E8-22BC-4EC2-9606-9A9AC6CD1D22}" dt="2025-11-19T10:58:31.404" v="47" actId="478"/>
-          <ac:spMkLst>
-            <pc:docMk/>
-            <pc:sldMk cId="76015710" sldId="274"/>
-            <ac:spMk id="15" creationId="{60EA83CE-862E-0716-7D4B-D10594298AFC}"/>
-          </ac:spMkLst>
-        </pc:spChg>
-        <pc:spChg chg="del">
-          <ac:chgData name="Jean-Yves Vuillequez" userId="e7fac481abea6bd0" providerId="LiveId" clId="{79E365E8-22BC-4EC2-9606-9A9AC6CD1D22}" dt="2025-11-19T10:58:31.404" v="47" actId="478"/>
-          <ac:spMkLst>
-            <pc:docMk/>
-            <pc:sldMk cId="76015710" sldId="274"/>
-            <ac:spMk id="17" creationId="{8304CF66-5C77-FB70-A0AB-14108326AAF8}"/>
-          </ac:spMkLst>
-        </pc:spChg>
-        <pc:spChg chg="del">
-          <ac:chgData name="Jean-Yves Vuillequez" userId="e7fac481abea6bd0" providerId="LiveId" clId="{79E365E8-22BC-4EC2-9606-9A9AC6CD1D22}" dt="2025-11-19T10:58:31.404" v="47" actId="478"/>
-          <ac:spMkLst>
-            <pc:docMk/>
-            <pc:sldMk cId="76015710" sldId="274"/>
-            <ac:spMk id="30" creationId="{4E85C3F7-9A4B-4403-40BA-E16E7B8AA378}"/>
-          </ac:spMkLst>
-        </pc:spChg>
-        <pc:spChg chg="del">
-          <ac:chgData name="Jean-Yves Vuillequez" userId="e7fac481abea6bd0" providerId="LiveId" clId="{79E365E8-22BC-4EC2-9606-9A9AC6CD1D22}" dt="2025-11-19T10:58:31.404" v="47" actId="478"/>
-          <ac:spMkLst>
-            <pc:docMk/>
-            <pc:sldMk cId="76015710" sldId="274"/>
-            <ac:spMk id="31" creationId="{D4DF20D5-B823-CD4C-6253-AA52E542825B}"/>
-          </ac:spMkLst>
-        </pc:spChg>
-        <pc:spChg chg="del">
-          <ac:chgData name="Jean-Yves Vuillequez" userId="e7fac481abea6bd0" providerId="LiveId" clId="{79E365E8-22BC-4EC2-9606-9A9AC6CD1D22}" dt="2025-11-19T10:58:31.404" v="47" actId="478"/>
-          <ac:spMkLst>
-            <pc:docMk/>
-            <pc:sldMk cId="76015710" sldId="274"/>
-            <ac:spMk id="38" creationId="{BB03DB3F-AABC-78B6-177C-8257943D252C}"/>
-          </ac:spMkLst>
-        </pc:spChg>
-        <pc:spChg chg="del">
-          <ac:chgData name="Jean-Yves Vuillequez" userId="e7fac481abea6bd0" providerId="LiveId" clId="{79E365E8-22BC-4EC2-9606-9A9AC6CD1D22}" dt="2025-11-19T10:58:31.404" v="47" actId="478"/>
-          <ac:spMkLst>
-            <pc:docMk/>
-            <pc:sldMk cId="76015710" sldId="274"/>
-            <ac:spMk id="46" creationId="{322DB39E-A9B2-B285-9879-968293AD4F66}"/>
-          </ac:spMkLst>
-        </pc:spChg>
-        <pc:spChg chg="del">
-          <ac:chgData name="Jean-Yves Vuillequez" userId="e7fac481abea6bd0" providerId="LiveId" clId="{79E365E8-22BC-4EC2-9606-9A9AC6CD1D22}" dt="2025-11-19T10:58:31.404" v="47" actId="478"/>
-          <ac:spMkLst>
-            <pc:docMk/>
-            <pc:sldMk cId="76015710" sldId="274"/>
-            <ac:spMk id="51" creationId="{0CF2B953-3A17-D1D1-0C1F-3CC46B1E9440}"/>
-          </ac:spMkLst>
-        </pc:spChg>
-        <pc:spChg chg="del">
-          <ac:chgData name="Jean-Yves Vuillequez" userId="e7fac481abea6bd0" providerId="LiveId" clId="{79E365E8-22BC-4EC2-9606-9A9AC6CD1D22}" dt="2025-11-19T10:58:31.404" v="47" actId="478"/>
-          <ac:spMkLst>
-            <pc:docMk/>
-            <pc:sldMk cId="76015710" sldId="274"/>
-            <ac:spMk id="54" creationId="{B4290750-3B48-DB32-F34D-A5ED50FB2781}"/>
-          </ac:spMkLst>
-        </pc:spChg>
-        <pc:spChg chg="del">
-          <ac:chgData name="Jean-Yves Vuillequez" userId="e7fac481abea6bd0" providerId="LiveId" clId="{79E365E8-22BC-4EC2-9606-9A9AC6CD1D22}" dt="2025-11-19T10:58:33.360" v="48" actId="478"/>
-          <ac:spMkLst>
-            <pc:docMk/>
-            <pc:sldMk cId="76015710" sldId="274"/>
-            <ac:spMk id="55" creationId="{0E6AC91E-885F-D28E-5599-E7B82E562698}"/>
-          </ac:spMkLst>
-        </pc:spChg>
-        <pc:spChg chg="del">
-          <ac:chgData name="Jean-Yves Vuillequez" userId="e7fac481abea6bd0" providerId="LiveId" clId="{79E365E8-22BC-4EC2-9606-9A9AC6CD1D22}" dt="2025-11-19T10:58:31.404" v="47" actId="478"/>
-          <ac:spMkLst>
-            <pc:docMk/>
-            <pc:sldMk cId="76015710" sldId="274"/>
-            <ac:spMk id="64" creationId="{AB510ECB-2555-D6DB-1542-96D0D3B9EEC4}"/>
           </ac:spMkLst>
         </pc:spChg>
       </pc:sldChg>
@@ -794,14 +601,6 @@
             <pc:docMk/>
             <pc:sldMk cId="1821755839" sldId="274"/>
             <ac:spMk id="4" creationId="{CBCFB9A3-164B-59E0-23FF-58CBDB2217D5}"/>
-          </ac:spMkLst>
-        </pc:spChg>
-        <pc:spChg chg="add del">
-          <ac:chgData name="Jean-Yves Vuillequez" userId="e7fac481abea6bd0" providerId="LiveId" clId="{79E365E8-22BC-4EC2-9606-9A9AC6CD1D22}" dt="2025-11-19T15:21:25.434" v="149" actId="22"/>
-          <ac:spMkLst>
-            <pc:docMk/>
-            <pc:sldMk cId="1821755839" sldId="274"/>
-            <ac:spMk id="5" creationId="{42ECEDB8-E4FE-DAD1-959E-CE1C852FF3B7}"/>
           </ac:spMkLst>
         </pc:spChg>
         <pc:spChg chg="add del mod">
@@ -828,28 +627,12 @@
             <ac:spMk id="7" creationId="{67A62F17-EB69-4DE3-2CF4-7B669263DC3D}"/>
           </ac:spMkLst>
         </pc:spChg>
-        <pc:spChg chg="add del">
-          <ac:chgData name="Jean-Yves Vuillequez" userId="e7fac481abea6bd0" providerId="LiveId" clId="{79E365E8-22BC-4EC2-9606-9A9AC6CD1D22}" dt="2025-11-19T15:25:59.512" v="172" actId="22"/>
-          <ac:spMkLst>
-            <pc:docMk/>
-            <pc:sldMk cId="1821755839" sldId="274"/>
-            <ac:spMk id="7" creationId="{A1088045-42F5-FD97-ED83-6AEF73316F36}"/>
-          </ac:spMkLst>
-        </pc:spChg>
         <pc:spChg chg="mod">
           <ac:chgData name="Jean-Yves Vuillequez" userId="e7fac481abea6bd0" providerId="LiveId" clId="{79E365E8-22BC-4EC2-9606-9A9AC6CD1D22}" dt="2025-11-20T08:33:18.924" v="343"/>
           <ac:spMkLst>
             <pc:docMk/>
             <pc:sldMk cId="1821755839" sldId="274"/>
             <ac:spMk id="9" creationId="{7CF89CA7-8084-322B-0AD8-B63AD2B345E1}"/>
-          </ac:spMkLst>
-        </pc:spChg>
-        <pc:spChg chg="add del">
-          <ac:chgData name="Jean-Yves Vuillequez" userId="e7fac481abea6bd0" providerId="LiveId" clId="{79E365E8-22BC-4EC2-9606-9A9AC6CD1D22}" dt="2025-11-19T15:31:05.378" v="184" actId="22"/>
-          <ac:spMkLst>
-            <pc:docMk/>
-            <pc:sldMk cId="1821755839" sldId="274"/>
-            <ac:spMk id="9" creationId="{C85936DC-7A36-C7FD-89BC-2AF218A582C2}"/>
           </ac:spMkLst>
         </pc:spChg>
         <pc:spChg chg="mod">
@@ -1893,29 +1676,6 @@
           </ac:cxnSpMkLst>
         </pc:cxnChg>
       </pc:sldChg>
-      <pc:sldChg chg="modSp del mod">
-        <pc:chgData name="Jean-Yves Vuillequez" userId="e7fac481abea6bd0" providerId="LiveId" clId="{79E365E8-22BC-4EC2-9606-9A9AC6CD1D22}" dt="2025-11-19T11:00:27.703" v="73" actId="2696"/>
-        <pc:sldMkLst>
-          <pc:docMk/>
-          <pc:sldMk cId="4075992510" sldId="275"/>
-        </pc:sldMkLst>
-        <pc:spChg chg="mod">
-          <ac:chgData name="Jean-Yves Vuillequez" userId="e7fac481abea6bd0" providerId="LiveId" clId="{79E365E8-22BC-4EC2-9606-9A9AC6CD1D22}" dt="2025-11-19T10:58:13.405" v="45" actId="20577"/>
-          <ac:spMkLst>
-            <pc:docMk/>
-            <pc:sldMk cId="4075992510" sldId="275"/>
-            <ac:spMk id="13" creationId="{A4E917A3-F694-3B96-CCCF-E8B993CF7914}"/>
-          </ac:spMkLst>
-        </pc:spChg>
-        <pc:graphicFrameChg chg="modGraphic">
-          <ac:chgData name="Jean-Yves Vuillequez" userId="e7fac481abea6bd0" providerId="LiveId" clId="{79E365E8-22BC-4EC2-9606-9A9AC6CD1D22}" dt="2025-11-19T10:58:19.644" v="46" actId="6549"/>
-          <ac:graphicFrameMkLst>
-            <pc:docMk/>
-            <pc:sldMk cId="4075992510" sldId="275"/>
-            <ac:graphicFrameMk id="2" creationId="{B369D15F-B77E-9E89-4E59-4FB8C96A6FDE}"/>
-          </ac:graphicFrameMkLst>
-        </pc:graphicFrameChg>
-      </pc:sldChg>
       <pc:sldChg chg="addSp delSp modSp add mod ord">
         <pc:chgData name="Jean-Yves Vuillequez" userId="e7fac481abea6bd0" providerId="LiveId" clId="{79E365E8-22BC-4EC2-9606-9A9AC6CD1D22}" dt="2025-11-20T16:41:43.422" v="4740" actId="113"/>
         <pc:sldMkLst>
@@ -1979,55 +1739,6 @@
           </ac:graphicFrameMkLst>
         </pc:graphicFrameChg>
       </pc:sldChg>
-      <pc:sldChg chg="del">
-        <pc:chgData name="Jean-Yves Vuillequez" userId="e7fac481abea6bd0" providerId="LiveId" clId="{79E365E8-22BC-4EC2-9606-9A9AC6CD1D22}" dt="2025-11-19T10:58:46.543" v="50" actId="47"/>
-        <pc:sldMkLst>
-          <pc:docMk/>
-          <pc:sldMk cId="4260295178" sldId="276"/>
-        </pc:sldMkLst>
-      </pc:sldChg>
-      <pc:sldChg chg="del">
-        <pc:chgData name="Jean-Yves Vuillequez" userId="e7fac481abea6bd0" providerId="LiveId" clId="{79E365E8-22BC-4EC2-9606-9A9AC6CD1D22}" dt="2025-11-19T11:00:58.858" v="84" actId="47"/>
-        <pc:sldMkLst>
-          <pc:docMk/>
-          <pc:sldMk cId="2782134582" sldId="280"/>
-        </pc:sldMkLst>
-      </pc:sldChg>
-      <pc:sldChg chg="del">
-        <pc:chgData name="Jean-Yves Vuillequez" userId="e7fac481abea6bd0" providerId="LiveId" clId="{79E365E8-22BC-4EC2-9606-9A9AC6CD1D22}" dt="2025-11-19T11:00:58.858" v="84" actId="47"/>
-        <pc:sldMkLst>
-          <pc:docMk/>
-          <pc:sldMk cId="3379059680" sldId="281"/>
-        </pc:sldMkLst>
-      </pc:sldChg>
-      <pc:sldChg chg="del">
-        <pc:chgData name="Jean-Yves Vuillequez" userId="e7fac481abea6bd0" providerId="LiveId" clId="{79E365E8-22BC-4EC2-9606-9A9AC6CD1D22}" dt="2025-11-19T11:00:58.858" v="84" actId="47"/>
-        <pc:sldMkLst>
-          <pc:docMk/>
-          <pc:sldMk cId="1308464095" sldId="282"/>
-        </pc:sldMkLst>
-      </pc:sldChg>
-      <pc:sldChg chg="del">
-        <pc:chgData name="Jean-Yves Vuillequez" userId="e7fac481abea6bd0" providerId="LiveId" clId="{79E365E8-22BC-4EC2-9606-9A9AC6CD1D22}" dt="2025-11-19T11:00:58.858" v="84" actId="47"/>
-        <pc:sldMkLst>
-          <pc:docMk/>
-          <pc:sldMk cId="3541112122" sldId="283"/>
-        </pc:sldMkLst>
-      </pc:sldChg>
-      <pc:sldChg chg="del">
-        <pc:chgData name="Jean-Yves Vuillequez" userId="e7fac481abea6bd0" providerId="LiveId" clId="{79E365E8-22BC-4EC2-9606-9A9AC6CD1D22}" dt="2025-11-19T11:00:58.858" v="84" actId="47"/>
-        <pc:sldMkLst>
-          <pc:docMk/>
-          <pc:sldMk cId="3746995239" sldId="284"/>
-        </pc:sldMkLst>
-      </pc:sldChg>
-      <pc:sldChg chg="del">
-        <pc:chgData name="Jean-Yves Vuillequez" userId="e7fac481abea6bd0" providerId="LiveId" clId="{79E365E8-22BC-4EC2-9606-9A9AC6CD1D22}" dt="2025-11-19T11:00:58.858" v="84" actId="47"/>
-        <pc:sldMkLst>
-          <pc:docMk/>
-          <pc:sldMk cId="2602082869" sldId="285"/>
-        </pc:sldMkLst>
-      </pc:sldChg>
       <pc:sldChg chg="addSp delSp modSp mod addAnim delAnim modAnim modNotesTx">
         <pc:chgData name="Jean-Yves Vuillequez" userId="e7fac481abea6bd0" providerId="LiveId" clId="{79E365E8-22BC-4EC2-9606-9A9AC6CD1D22}" dt="2025-11-20T20:03:48.943" v="4847"/>
         <pc:sldMkLst>
@@ -2040,14 +1751,6 @@
             <pc:docMk/>
             <pc:sldMk cId="406580661" sldId="286"/>
             <ac:spMk id="2" creationId="{42BBF137-A4F8-10C8-E76C-714A4AC08CD8}"/>
-          </ac:spMkLst>
-        </pc:spChg>
-        <pc:spChg chg="add del mod">
-          <ac:chgData name="Jean-Yves Vuillequez" userId="e7fac481abea6bd0" providerId="LiveId" clId="{79E365E8-22BC-4EC2-9606-9A9AC6CD1D22}" dt="2025-11-19T15:04:10.897" v="143" actId="478"/>
-          <ac:spMkLst>
-            <pc:docMk/>
-            <pc:sldMk cId="406580661" sldId="286"/>
-            <ac:spMk id="3" creationId="{C43968D4-0691-98E3-02E7-DB654E7392F3}"/>
           </ac:spMkLst>
         </pc:spChg>
         <pc:spChg chg="add mod">
@@ -2266,76 +1969,12 @@
             <ac:spMk id="44" creationId="{52DAE273-297D-B78E-8D7A-2AA631E57226}"/>
           </ac:spMkLst>
         </pc:spChg>
-        <pc:spChg chg="del">
-          <ac:chgData name="Jean-Yves Vuillequez" userId="e7fac481abea6bd0" providerId="LiveId" clId="{79E365E8-22BC-4EC2-9606-9A9AC6CD1D22}" dt="2025-11-19T15:03:54.191" v="140" actId="478"/>
-          <ac:spMkLst>
-            <pc:docMk/>
-            <pc:sldMk cId="406580661" sldId="286"/>
-            <ac:spMk id="69" creationId="{2DFE67F9-5520-F4B8-B6C5-40C9605525B6}"/>
-          </ac:spMkLst>
-        </pc:spChg>
         <pc:spChg chg="mod">
           <ac:chgData name="Jean-Yves Vuillequez" userId="e7fac481abea6bd0" providerId="LiveId" clId="{79E365E8-22BC-4EC2-9606-9A9AC6CD1D22}" dt="2025-11-20T08:33:31.466" v="346" actId="113"/>
           <ac:spMkLst>
             <pc:docMk/>
             <pc:sldMk cId="406580661" sldId="286"/>
             <ac:spMk id="70" creationId="{6C332C7A-0C1B-7002-DD8F-E4EB26F3199D}"/>
-          </ac:spMkLst>
-        </pc:spChg>
-        <pc:spChg chg="del mod">
-          <ac:chgData name="Jean-Yves Vuillequez" userId="e7fac481abea6bd0" providerId="LiveId" clId="{79E365E8-22BC-4EC2-9606-9A9AC6CD1D22}" dt="2025-11-19T15:04:08.497" v="142" actId="478"/>
-          <ac:spMkLst>
-            <pc:docMk/>
-            <pc:sldMk cId="406580661" sldId="286"/>
-            <ac:spMk id="73" creationId="{1362DE8B-B008-E6AB-C9CD-6095A12B8D39}"/>
-          </ac:spMkLst>
-        </pc:spChg>
-        <pc:spChg chg="del mod">
-          <ac:chgData name="Jean-Yves Vuillequez" userId="e7fac481abea6bd0" providerId="LiveId" clId="{79E365E8-22BC-4EC2-9606-9A9AC6CD1D22}" dt="2025-11-19T15:03:54.191" v="140" actId="478"/>
-          <ac:spMkLst>
-            <pc:docMk/>
-            <pc:sldMk cId="406580661" sldId="286"/>
-            <ac:spMk id="74" creationId="{594EF5A4-95A8-DB9E-307C-92C5044EEF3F}"/>
-          </ac:spMkLst>
-        </pc:spChg>
-        <pc:spChg chg="del mod">
-          <ac:chgData name="Jean-Yves Vuillequez" userId="e7fac481abea6bd0" providerId="LiveId" clId="{79E365E8-22BC-4EC2-9606-9A9AC6CD1D22}" dt="2025-11-19T15:03:57.484" v="141" actId="478"/>
-          <ac:spMkLst>
-            <pc:docMk/>
-            <pc:sldMk cId="406580661" sldId="286"/>
-            <ac:spMk id="75" creationId="{2DA76B5D-5507-C433-3A50-BA24AFDD5759}"/>
-          </ac:spMkLst>
-        </pc:spChg>
-        <pc:spChg chg="del mod">
-          <ac:chgData name="Jean-Yves Vuillequez" userId="e7fac481abea6bd0" providerId="LiveId" clId="{79E365E8-22BC-4EC2-9606-9A9AC6CD1D22}" dt="2025-11-19T15:03:57.484" v="141" actId="478"/>
-          <ac:spMkLst>
-            <pc:docMk/>
-            <pc:sldMk cId="406580661" sldId="286"/>
-            <ac:spMk id="76" creationId="{0D0BEA13-407D-BB40-EDD4-89543044A7D8}"/>
-          </ac:spMkLst>
-        </pc:spChg>
-        <pc:spChg chg="del mod">
-          <ac:chgData name="Jean-Yves Vuillequez" userId="e7fac481abea6bd0" providerId="LiveId" clId="{79E365E8-22BC-4EC2-9606-9A9AC6CD1D22}" dt="2025-11-19T15:03:57.484" v="141" actId="478"/>
-          <ac:spMkLst>
-            <pc:docMk/>
-            <pc:sldMk cId="406580661" sldId="286"/>
-            <ac:spMk id="77" creationId="{4B2D55FD-E6CB-F70B-1A6D-C59E9EAB43E2}"/>
-          </ac:spMkLst>
-        </pc:spChg>
-        <pc:spChg chg="del">
-          <ac:chgData name="Jean-Yves Vuillequez" userId="e7fac481abea6bd0" providerId="LiveId" clId="{79E365E8-22BC-4EC2-9606-9A9AC6CD1D22}" dt="2025-11-19T10:59:15.865" v="69" actId="478"/>
-          <ac:spMkLst>
-            <pc:docMk/>
-            <pc:sldMk cId="406580661" sldId="286"/>
-            <ac:spMk id="78" creationId="{EE57DF56-19D6-5F9D-623C-FD197620AB38}"/>
-          </ac:spMkLst>
-        </pc:spChg>
-        <pc:spChg chg="del">
-          <ac:chgData name="Jean-Yves Vuillequez" userId="e7fac481abea6bd0" providerId="LiveId" clId="{79E365E8-22BC-4EC2-9606-9A9AC6CD1D22}" dt="2025-11-19T10:59:15.865" v="69" actId="478"/>
-          <ac:spMkLst>
-            <pc:docMk/>
-            <pc:sldMk cId="406580661" sldId="286"/>
-            <ac:spMk id="79" creationId="{9872CB08-4753-4C4E-189F-43C9459E961D}"/>
           </ac:spMkLst>
         </pc:spChg>
         <pc:grpChg chg="add mod">
@@ -2547,13 +2186,6 @@
         </pc:picChg>
       </pc:sldChg>
       <pc:sldChg chg="add del">
-        <pc:chgData name="Jean-Yves Vuillequez" userId="e7fac481abea6bd0" providerId="LiveId" clId="{79E365E8-22BC-4EC2-9606-9A9AC6CD1D22}" dt="2025-11-19T18:14:09.212" v="197"/>
-        <pc:sldMkLst>
-          <pc:docMk/>
-          <pc:sldMk cId="919858653" sldId="288"/>
-        </pc:sldMkLst>
-      </pc:sldChg>
-      <pc:sldChg chg="add del">
         <pc:chgData name="Jean-Yves Vuillequez" userId="e7fac481abea6bd0" providerId="LiveId" clId="{79E365E8-22BC-4EC2-9606-9A9AC6CD1D22}" dt="2025-11-20T16:28:21.698" v="4730"/>
         <pc:sldMkLst>
           <pc:docMk/>
@@ -2670,21 +2302,6 @@
           </ac:spMkLst>
         </pc:spChg>
       </pc:sldChg>
-      <pc:sldChg chg="modSp add del">
-        <pc:chgData name="Jean-Yves Vuillequez" userId="e7fac481abea6bd0" providerId="LiveId" clId="{79E365E8-22BC-4EC2-9606-9A9AC6CD1D22}" dt="2025-11-19T18:59:08.937" v="303" actId="47"/>
-        <pc:sldMkLst>
-          <pc:docMk/>
-          <pc:sldMk cId="3738511160" sldId="290"/>
-        </pc:sldMkLst>
-        <pc:spChg chg="mod">
-          <ac:chgData name="Jean-Yves Vuillequez" userId="e7fac481abea6bd0" providerId="LiveId" clId="{79E365E8-22BC-4EC2-9606-9A9AC6CD1D22}" dt="2025-11-19T18:59:02.352" v="301"/>
-          <ac:spMkLst>
-            <pc:docMk/>
-            <pc:sldMk cId="3738511160" sldId="290"/>
-            <ac:spMk id="70" creationId="{4B63368A-49D0-EF4C-D66D-6EEF2743BE0B}"/>
-          </ac:spMkLst>
-        </pc:spChg>
-      </pc:sldChg>
       <pc:sldChg chg="addSp delSp modSp add mod">
         <pc:chgData name="Jean-Yves Vuillequez" userId="e7fac481abea6bd0" providerId="LiveId" clId="{79E365E8-22BC-4EC2-9606-9A9AC6CD1D22}" dt="2025-11-20T14:45:38.621" v="3933"/>
         <pc:sldMkLst>
@@ -2733,13 +2350,13 @@
         </pc:spChg>
       </pc:sldChg>
       <pc:sldChg chg="addSp delSp modSp add mod ord delAnim modAnim modNotesTx">
-        <pc:chgData name="Jean-Yves Vuillequez" userId="e7fac481abea6bd0" providerId="LiveId" clId="{79E365E8-22BC-4EC2-9606-9A9AC6CD1D22}" dt="2025-11-20T20:38:01.208" v="5232"/>
+        <pc:chgData name="Jean-Yves Vuillequez" userId="e7fac481abea6bd0" providerId="LiveId" clId="{79E365E8-22BC-4EC2-9606-9A9AC6CD1D22}" dt="2025-11-21T02:14:36.257" v="5432" actId="1076"/>
         <pc:sldMkLst>
           <pc:docMk/>
           <pc:sldMk cId="3315518580" sldId="292"/>
         </pc:sldMkLst>
         <pc:spChg chg="add mod">
-          <ac:chgData name="Jean-Yves Vuillequez" userId="e7fac481abea6bd0" providerId="LiveId" clId="{79E365E8-22BC-4EC2-9606-9A9AC6CD1D22}" dt="2025-11-20T15:04:30.018" v="3955" actId="403"/>
+          <ac:chgData name="Jean-Yves Vuillequez" userId="e7fac481abea6bd0" providerId="LiveId" clId="{79E365E8-22BC-4EC2-9606-9A9AC6CD1D22}" dt="2025-11-21T02:11:56.158" v="5290" actId="6549"/>
           <ac:spMkLst>
             <pc:docMk/>
             <pc:sldMk cId="3315518580" sldId="292"/>
@@ -2778,6 +2395,14 @@
             <ac:spMk id="4" creationId="{CDF36CC3-8438-C6F0-3E01-EC79EEB762E1}"/>
           </ac:spMkLst>
         </pc:spChg>
+        <pc:spChg chg="add mod">
+          <ac:chgData name="Jean-Yves Vuillequez" userId="e7fac481abea6bd0" providerId="LiveId" clId="{79E365E8-22BC-4EC2-9606-9A9AC6CD1D22}" dt="2025-11-21T02:14:36.257" v="5432" actId="1076"/>
+          <ac:spMkLst>
+            <pc:docMk/>
+            <pc:sldMk cId="3315518580" sldId="292"/>
+            <ac:spMk id="4" creationId="{DC681EF8-A850-D11F-7ECC-97847033BF06}"/>
+          </ac:spMkLst>
+        </pc:spChg>
         <pc:spChg chg="add">
           <ac:chgData name="Jean-Yves Vuillequez" userId="e7fac481abea6bd0" providerId="LiveId" clId="{79E365E8-22BC-4EC2-9606-9A9AC6CD1D22}" dt="2025-11-20T15:03:44.399" v="3944"/>
           <ac:spMkLst>
@@ -2787,7 +2412,7 @@
           </ac:spMkLst>
         </pc:spChg>
         <pc:spChg chg="add mod">
-          <ac:chgData name="Jean-Yves Vuillequez" userId="e7fac481abea6bd0" providerId="LiveId" clId="{79E365E8-22BC-4EC2-9606-9A9AC6CD1D22}" dt="2025-11-20T15:15:34.139" v="4044" actId="1076"/>
+          <ac:chgData name="Jean-Yves Vuillequez" userId="e7fac481abea6bd0" providerId="LiveId" clId="{79E365E8-22BC-4EC2-9606-9A9AC6CD1D22}" dt="2025-11-21T02:14:00.132" v="5414" actId="20577"/>
           <ac:spMkLst>
             <pc:docMk/>
             <pc:sldMk cId="3315518580" sldId="292"/>
@@ -3010,7 +2635,7 @@
         </pc:spChg>
       </pc:sldChg>
       <pc:sldChg chg="modSp add mod">
-        <pc:chgData name="Jean-Yves Vuillequez" userId="e7fac481abea6bd0" providerId="LiveId" clId="{79E365E8-22BC-4EC2-9606-9A9AC6CD1D22}" dt="2025-11-20T16:41:47.501" v="4741" actId="113"/>
+        <pc:chgData name="Jean-Yves Vuillequez" userId="e7fac481abea6bd0" providerId="LiveId" clId="{79E365E8-22BC-4EC2-9606-9A9AC6CD1D22}" dt="2025-11-21T02:29:34.535" v="5608" actId="6549"/>
         <pc:sldMkLst>
           <pc:docMk/>
           <pc:sldMk cId="4010613788" sldId="294"/>
@@ -3023,6 +2648,14 @@
             <ac:spMk id="96" creationId="{A01AE6FF-5294-F6EC-FB0D-D63D7D63D71C}"/>
           </ac:spMkLst>
         </pc:spChg>
+        <pc:graphicFrameChg chg="modGraphic">
+          <ac:chgData name="Jean-Yves Vuillequez" userId="e7fac481abea6bd0" providerId="LiveId" clId="{79E365E8-22BC-4EC2-9606-9A9AC6CD1D22}" dt="2025-11-21T02:29:34.535" v="5608" actId="6549"/>
+          <ac:graphicFrameMkLst>
+            <pc:docMk/>
+            <pc:sldMk cId="4010613788" sldId="294"/>
+            <ac:graphicFrameMk id="2" creationId="{1F110593-1E38-6872-65AA-F9F3DBB52889}"/>
+          </ac:graphicFrameMkLst>
+        </pc:graphicFrameChg>
       </pc:sldChg>
       <pc:sldChg chg="modSp add mod">
         <pc:chgData name="Jean-Yves Vuillequez" userId="e7fac481abea6bd0" providerId="LiveId" clId="{79E365E8-22BC-4EC2-9606-9A9AC6CD1D22}" dt="2025-11-20T20:45:26.230" v="5250" actId="20577"/>
@@ -3048,7 +2681,7 @@
         </pc:graphicFrameChg>
       </pc:sldChg>
       <pc:sldChg chg="modSp add mod">
-        <pc:chgData name="Jean-Yves Vuillequez" userId="e7fac481abea6bd0" providerId="LiveId" clId="{79E365E8-22BC-4EC2-9606-9A9AC6CD1D22}" dt="2025-11-20T16:41:57.627" v="4743" actId="113"/>
+        <pc:chgData name="Jean-Yves Vuillequez" userId="e7fac481abea6bd0" providerId="LiveId" clId="{79E365E8-22BC-4EC2-9606-9A9AC6CD1D22}" dt="2025-11-21T02:15:47.871" v="5462" actId="20577"/>
         <pc:sldMkLst>
           <pc:docMk/>
           <pc:sldMk cId="2552402859" sldId="296"/>
@@ -3062,7 +2695,7 @@
           </ac:spMkLst>
         </pc:spChg>
         <pc:graphicFrameChg chg="mod modGraphic">
-          <ac:chgData name="Jean-Yves Vuillequez" userId="e7fac481abea6bd0" providerId="LiveId" clId="{79E365E8-22BC-4EC2-9606-9A9AC6CD1D22}" dt="2025-11-20T16:29:44.257" v="4737" actId="14100"/>
+          <ac:chgData name="Jean-Yves Vuillequez" userId="e7fac481abea6bd0" providerId="LiveId" clId="{79E365E8-22BC-4EC2-9606-9A9AC6CD1D22}" dt="2025-11-21T02:15:47.871" v="5462" actId="20577"/>
           <ac:graphicFrameMkLst>
             <pc:docMk/>
             <pc:sldMk cId="2552402859" sldId="296"/>
@@ -19312,11 +18945,11 @@
             </a:pPr>
             <a:r>
               <a:rPr lang="fr-FR" b="1" dirty="0"/>
-              <a:t>Visibilité sur 3 jours</a:t>
+              <a:t>Visibilité sur 3 jours : </a:t>
             </a:r>
             <a:r>
               <a:rPr lang="fr-FR" dirty="0"/>
-              <a:t>, permettant une planification énergétique plus fiable</a:t>
+              <a:t>Planification énergétique plus fiable</a:t>
             </a:r>
           </a:p>
           <a:p>
@@ -19333,7 +18966,7 @@
             </a:r>
             <a:r>
               <a:rPr lang="fr-FR" dirty="0"/>
-              <a:t>, contribuant à un réseau plus stable</a:t>
+              <a:t> : Réseau plus stable</a:t>
             </a:r>
           </a:p>
           <a:p>
@@ -19346,11 +18979,11 @@
             </a:pPr>
             <a:r>
               <a:rPr lang="fr-FR" b="1" dirty="0"/>
-              <a:t>Analyse régionale précise</a:t>
+              <a:t>Analyse régionale précise : </a:t>
             </a:r>
             <a:r>
               <a:rPr lang="fr-FR" dirty="0"/>
-              <a:t>, facilitant la priorisation des zones à fort potentiel solaire</a:t>
+              <a:t>Priorisation des zones à fort potentiel solaire</a:t>
             </a:r>
           </a:p>
           <a:p>
@@ -19363,7 +18996,7 @@
             </a:pPr>
             <a:r>
               <a:rPr lang="fr-FR" b="1" dirty="0"/>
-              <a:t>Outil d’aide à la décision simple, clair et directement exploitable</a:t>
+              <a:t>Outil d’aide à la décision</a:t>
             </a:r>
             <a:endParaRPr lang="fr-FR" dirty="0"/>
           </a:p>
@@ -19453,7 +19086,7 @@
             </a:r>
             <a:r>
               <a:rPr lang="fr-FR" dirty="0"/>
-              <a:t> des données et des prévisions</a:t>
+              <a:t> des données et des prévisions (prédictions lancées en synchrone depuis le Dashboard)</a:t>
             </a:r>
           </a:p>
           <a:p>
@@ -19474,7 +19107,7 @@
             </a:r>
             <a:r>
               <a:rPr lang="fr-FR" dirty="0"/>
-              <a:t>, appuyée sur les données RTE mises à jour toutes les 30 minutes</a:t>
+              <a:t> : données RTE mises à jour toutes les 30 minutes (intérêt métier à vérifier)</a:t>
             </a:r>
           </a:p>
           <a:p>
@@ -19491,8 +19124,18 @@
             </a:r>
             <a:r>
               <a:rPr lang="fr-FR" dirty="0"/>
-              <a:t> (nuages, albédo, couverture atmosphérique)</a:t>
+              <a:t> (nuages, couverture atmosphérique)</a:t>
             </a:r>
+          </a:p>
+          <a:p>
+            <a:pPr marL="285750" indent="-285750">
+              <a:spcBef>
+                <a:spcPts val="1200"/>
+              </a:spcBef>
+              <a:buFont typeface="Arial" panose="020B0604020202020204" pitchFamily="34" charset="0"/>
+              <a:buChar char="•"/>
+            </a:pPr>
+            <a:endParaRPr lang="fr-FR" dirty="0"/>
           </a:p>
         </p:txBody>
       </p:sp>
@@ -19752,6 +19395,51 @@
           <a:p>
             <a:pPr algn="ctr"/>
             <a:endParaRPr lang="fr-FR" dirty="0"/>
+          </a:p>
+        </p:txBody>
+      </p:sp>
+      <p:sp>
+        <p:nvSpPr>
+          <p:cNvPr id="4" name="ZoneTexte 3">
+            <a:extLst>
+              <a:ext uri="{FF2B5EF4-FFF2-40B4-BE49-F238E27FC236}">
+                <a16:creationId xmlns:a16="http://schemas.microsoft.com/office/drawing/2014/main" id="{DC681EF8-A850-D11F-7ECC-97847033BF06}"/>
+              </a:ext>
+            </a:extLst>
+          </p:cNvPr>
+          <p:cNvSpPr txBox="1"/>
+          <p:nvPr/>
+        </p:nvSpPr>
+        <p:spPr>
+          <a:xfrm rot="443839">
+            <a:off x="5562932" y="1075208"/>
+            <a:ext cx="3244850" cy="584775"/>
+          </a:xfrm>
+          <a:prstGeom prst="rect">
+            <a:avLst/>
+          </a:prstGeom>
+          <a:noFill/>
+          <a:ln>
+            <a:solidFill>
+              <a:srgbClr val="FF0000"/>
+            </a:solidFill>
+          </a:ln>
+        </p:spPr>
+        <p:txBody>
+          <a:bodyPr wrap="square" rtlCol="0">
+            <a:spAutoFit/>
+          </a:bodyPr>
+          <a:lstStyle/>
+          <a:p>
+            <a:pPr algn="ctr"/>
+            <a:r>
+              <a:rPr lang="fr-FR" sz="3200" dirty="0">
+                <a:solidFill>
+                  <a:srgbClr val="FF0000"/>
+                </a:solidFill>
+              </a:rPr>
+              <a:t>A discuter</a:t>
+            </a:r>
           </a:p>
         </p:txBody>
       </p:sp>
@@ -20700,7 +20388,13 @@
           <p:cNvGraphicFramePr>
             <a:graphicFrameLocks noGrp="1"/>
           </p:cNvGraphicFramePr>
-          <p:nvPr/>
+          <p:nvPr>
+            <p:extLst>
+              <p:ext uri="{D42A27DB-BD31-4B8C-83A1-F6EECF244321}">
+                <p14:modId xmlns:p14="http://schemas.microsoft.com/office/powerpoint/2010/main" val="2643252541"/>
+              </p:ext>
+            </p:extLst>
+          </p:nvPr>
         </p:nvGraphicFramePr>
         <p:xfrm>
           <a:off x="463375" y="1160010"/>
@@ -21042,9 +20736,6 @@
                   <a:txBody>
                     <a:bodyPr/>
                     <a:lstStyle/>
-                    <a:p>
-                      <a:endParaRPr lang="fr-FR" sz="700" dirty="0"/>
-                    </a:p>
                     <a:p>
                       <a:r>
                         <a:rPr lang="fr-FR" sz="700" dirty="0">
@@ -22957,7 +22648,7 @@
           <p:nvPr>
             <p:extLst>
               <p:ext uri="{D42A27DB-BD31-4B8C-83A1-F6EECF244321}">
-                <p14:modId xmlns:p14="http://schemas.microsoft.com/office/powerpoint/2010/main" val="286112335"/>
+                <p14:modId xmlns:p14="http://schemas.microsoft.com/office/powerpoint/2010/main" val="687343311"/>
               </p:ext>
             </p:extLst>
           </p:nvPr>
@@ -23147,9 +22838,14 @@
                     <a:lstStyle/>
                     <a:p>
                       <a:r>
-                        <a:rPr sz="900"/>
-                        <a:t>Feature eng.</a:t>
+                        <a:rPr sz="900" dirty="0"/>
+                        <a:t>Feature </a:t>
                       </a:r>
+                      <a:r>
+                        <a:rPr lang="fr-FR" sz="900" dirty="0"/>
+                        <a:t>engineering</a:t>
+                      </a:r>
+                      <a:endParaRPr sz="900" dirty="0"/>
                     </a:p>
                   </a:txBody>
                   <a:tcPr/>
@@ -23242,9 +22938,10 @@
                     <a:lstStyle/>
                     <a:p>
                       <a:r>
-                        <a:rPr sz="900"/>
+                        <a:rPr sz="900" dirty="0" err="1"/>
                         <a:t>Modélisation</a:t>
                       </a:r>
+                      <a:endParaRPr sz="900" dirty="0"/>
                     </a:p>
                   </a:txBody>
                   <a:tcPr/>
@@ -23433,7 +23130,7 @@
                     <a:lstStyle/>
                     <a:p>
                       <a:r>
-                        <a:rPr sz="900"/>
+                        <a:rPr sz="900" dirty="0"/>
                         <a:t>API</a:t>
                       </a:r>
                     </a:p>
@@ -23528,7 +23225,7 @@
                     <a:lstStyle/>
                     <a:p>
                       <a:r>
-                        <a:rPr sz="900"/>
+                        <a:rPr sz="900" dirty="0"/>
                         <a:t>Dashboard</a:t>
                       </a:r>
                     </a:p>
@@ -24211,6 +23908,34 @@
               <a:buFont typeface="Arial"/>
               <a:buNone/>
             </a:pPr>
+            <a:endParaRPr lang="fr-FR" sz="1400" b="0" i="0" u="none" strike="noStrike" cap="none" dirty="0">
+              <a:solidFill>
+                <a:srgbClr val="000000"/>
+              </a:solidFill>
+              <a:latin typeface="Arial"/>
+              <a:ea typeface="Arial"/>
+              <a:cs typeface="Arial"/>
+              <a:sym typeface="Arial"/>
+            </a:endParaRPr>
+          </a:p>
+          <a:p>
+            <a:pPr marL="0" marR="0" lvl="0" indent="0" algn="l" rtl="0">
+              <a:lnSpc>
+                <a:spcPct val="200000"/>
+              </a:lnSpc>
+              <a:spcBef>
+                <a:spcPts val="0"/>
+              </a:spcBef>
+              <a:spcAft>
+                <a:spcPts val="0"/>
+              </a:spcAft>
+              <a:buClr>
+                <a:srgbClr val="000000"/>
+              </a:buClr>
+              <a:buSzPts val="1400"/>
+              <a:buFont typeface="Arial"/>
+              <a:buNone/>
+            </a:pPr>
             <a:r>
               <a:rPr lang="fr-FR" sz="1400" b="0" i="0" u="none" strike="noStrike" cap="none" dirty="0" err="1">
                 <a:solidFill>
@@ -24221,7 +23946,7 @@
                 <a:cs typeface="Arial"/>
                 <a:sym typeface="Arial"/>
               </a:rPr>
-              <a:t>Xxxxxxx</a:t>
+              <a:t>Jhon</a:t>
             </a:r>
             <a:r>
               <a:rPr lang="fr-FR" sz="1400" b="0" i="0" u="none" strike="noStrike" cap="none" dirty="0">
@@ -24233,7 +23958,7 @@
                 <a:cs typeface="Arial"/>
                 <a:sym typeface="Arial"/>
               </a:rPr>
-              <a:t>  XXXXXXXX</a:t>
+              <a:t> DUBOS</a:t>
             </a:r>
             <a:endParaRPr sz="1400" b="0" i="0" u="none" strike="noStrike" cap="none" dirty="0">
               <a:solidFill>
@@ -24253,12 +23978,8 @@
               <a:buSzPts val="1400"/>
             </a:pPr>
             <a:r>
-              <a:rPr lang="fr-FR" dirty="0" err="1"/>
-              <a:t>Xxxxxxx</a:t>
-            </a:r>
-            <a:r>
               <a:rPr lang="fr-FR" dirty="0"/>
-              <a:t>  XXXXXXXX</a:t>
+              <a:t>Sandrine HARDY</a:t>
             </a:r>
           </a:p>
           <a:p>
@@ -24269,12 +23990,8 @@
               <a:buSzPts val="1400"/>
             </a:pPr>
             <a:r>
-              <a:rPr lang="fr-FR" dirty="0" err="1"/>
-              <a:t>Xxxxxxx</a:t>
-            </a:r>
-            <a:r>
               <a:rPr lang="fr-FR" dirty="0"/>
-              <a:t>  XXXXXXXX</a:t>
+              <a:t>Jean-Yves VUILLEQUEZ</a:t>
             </a:r>
           </a:p>
           <a:p>
@@ -24285,12 +24002,20 @@
               <a:buSzPts val="1400"/>
             </a:pPr>
             <a:r>
-              <a:rPr lang="fr-FR" dirty="0" err="1"/>
-              <a:t>Xxxxxxx</a:t>
+              <a:rPr lang="fr-FR" dirty="0"/>
+              <a:t>Victor NOUANE</a:t>
             </a:r>
+          </a:p>
+          <a:p>
+            <a:pPr>
+              <a:lnSpc>
+                <a:spcPct val="200000"/>
+              </a:lnSpc>
+              <a:buSzPts val="1400"/>
+            </a:pPr>
             <a:r>
               <a:rPr lang="fr-FR" dirty="0"/>
-              <a:t>  XXXXXXXX</a:t>
+              <a:t>Eduardo NAVARRETE</a:t>
             </a:r>
           </a:p>
           <a:p>
@@ -24437,7 +24162,7 @@
                   <a:srgbClr val="FF0000"/>
                 </a:solidFill>
               </a:rPr>
-              <a:t>A mettre à jour</a:t>
+              <a:t>MAJ illustration</a:t>
             </a:r>
           </a:p>
         </p:txBody>

--- a/presentation/dsfs_ft_36_Projet_REnergies_efficiency_prediction.pptx
+++ b/presentation/dsfs_ft_36_Projet_REnergies_efficiency_prediction.pptx
@@ -291,7 +291,7 @@
 <file path=ppt/revisionInfo.xml><?xml version="1.0" encoding="utf-8"?>
 <p1510:revInfo xmlns:a="http://schemas.openxmlformats.org/drawingml/2006/main" xmlns:r="http://schemas.openxmlformats.org/officeDocument/2006/relationships" xmlns:p1510="http://schemas.microsoft.com/office/powerpoint/2015/10/main">
   <p1510:revLst>
-    <p1510:client id="{2EB72A00-7F79-4813-B4C2-C6564860F3F6}" v="1576" dt="2025-11-21T02:14:12.346"/>
+    <p1510:client id="{2EB72A00-7F79-4813-B4C2-C6564860F3F6}" v="1578" dt="2025-11-21T09:08:53.483"/>
   </p1510:revLst>
 </p1510:revInfo>
 </file>
@@ -301,7 +301,7 @@
   <pc:docChgLst>
     <pc:chgData name="Jean-Yves Vuillequez" userId="e7fac481abea6bd0" providerId="LiveId" clId="{79E365E8-22BC-4EC2-9606-9A9AC6CD1D22}"/>
     <pc:docChg chg="undo custSel addSld delSld modSld sldOrd">
-      <pc:chgData name="Jean-Yves Vuillequez" userId="e7fac481abea6bd0" providerId="LiveId" clId="{79E365E8-22BC-4EC2-9606-9A9AC6CD1D22}" dt="2025-11-21T02:29:34.535" v="5608" actId="6549"/>
+      <pc:chgData name="Jean-Yves Vuillequez" userId="e7fac481abea6bd0" providerId="LiveId" clId="{79E365E8-22BC-4EC2-9606-9A9AC6CD1D22}" dt="2025-11-21T09:08:53.483" v="5611"/>
       <pc:docMkLst>
         <pc:docMk/>
       </pc:docMkLst>
@@ -2350,7 +2350,7 @@
         </pc:spChg>
       </pc:sldChg>
       <pc:sldChg chg="addSp delSp modSp add mod ord delAnim modAnim modNotesTx">
-        <pc:chgData name="Jean-Yves Vuillequez" userId="e7fac481abea6bd0" providerId="LiveId" clId="{79E365E8-22BC-4EC2-9606-9A9AC6CD1D22}" dt="2025-11-21T02:14:36.257" v="5432" actId="1076"/>
+        <pc:chgData name="Jean-Yves Vuillequez" userId="e7fac481abea6bd0" providerId="LiveId" clId="{79E365E8-22BC-4EC2-9606-9A9AC6CD1D22}" dt="2025-11-21T09:08:53.483" v="5611"/>
         <pc:sldMkLst>
           <pc:docMk/>
           <pc:sldMk cId="3315518580" sldId="292"/>
@@ -2412,7 +2412,7 @@
           </ac:spMkLst>
         </pc:spChg>
         <pc:spChg chg="add mod">
-          <ac:chgData name="Jean-Yves Vuillequez" userId="e7fac481abea6bd0" providerId="LiveId" clId="{79E365E8-22BC-4EC2-9606-9A9AC6CD1D22}" dt="2025-11-21T02:14:00.132" v="5414" actId="20577"/>
+          <ac:chgData name="Jean-Yves Vuillequez" userId="e7fac481abea6bd0" providerId="LiveId" clId="{79E365E8-22BC-4EC2-9606-9A9AC6CD1D22}" dt="2025-11-21T09:08:53.483" v="5611"/>
           <ac:spMkLst>
             <pc:docMk/>
             <pc:sldMk cId="3315518580" sldId="292"/>
@@ -18929,7 +18929,7 @@
               <a:buChar char="•"/>
               <a:defRPr/>
             </a:pPr>
-            <a:endParaRPr lang="fr-FR" kern="1200" dirty="0">
+            <a:endParaRPr lang="fr-FR" sz="1200" kern="1200" dirty="0">
               <a:latin typeface="Calibri"/>
               <a:ea typeface="Calibri"/>
               <a:cs typeface="Calibri"/>
@@ -18944,11 +18944,11 @@
               <a:buChar char="•"/>
             </a:pPr>
             <a:r>
-              <a:rPr lang="fr-FR" b="1" dirty="0"/>
+              <a:rPr lang="fr-FR" sz="1200" b="1" dirty="0"/>
               <a:t>Visibilité sur 3 jours : </a:t>
             </a:r>
             <a:r>
-              <a:rPr lang="fr-FR" dirty="0"/>
+              <a:rPr lang="fr-FR" sz="1200" dirty="0"/>
               <a:t>Planification énergétique plus fiable</a:t>
             </a:r>
           </a:p>
@@ -18961,11 +18961,11 @@
               <a:buChar char="•"/>
             </a:pPr>
             <a:r>
-              <a:rPr lang="fr-FR" b="1" dirty="0"/>
+              <a:rPr lang="fr-FR" sz="1200" b="1" dirty="0"/>
               <a:t>Détection proactive des pics et creux</a:t>
             </a:r>
             <a:r>
-              <a:rPr lang="fr-FR" dirty="0"/>
+              <a:rPr lang="fr-FR" sz="1200" dirty="0"/>
               <a:t> : Réseau plus stable</a:t>
             </a:r>
           </a:p>
@@ -18978,11 +18978,11 @@
               <a:buChar char="•"/>
             </a:pPr>
             <a:r>
-              <a:rPr lang="fr-FR" b="1" dirty="0"/>
+              <a:rPr lang="fr-FR" sz="1200" b="1" dirty="0"/>
               <a:t>Analyse régionale précise : </a:t>
             </a:r>
             <a:r>
-              <a:rPr lang="fr-FR" dirty="0"/>
+              <a:rPr lang="fr-FR" sz="1200" dirty="0"/>
               <a:t>Priorisation des zones à fort potentiel solaire</a:t>
             </a:r>
           </a:p>
@@ -18995,20 +18995,22 @@
               <a:buChar char="•"/>
             </a:pPr>
             <a:r>
-              <a:rPr lang="fr-FR" b="1" dirty="0"/>
+              <a:rPr lang="fr-FR" sz="1200" b="1" dirty="0"/>
               <a:t>Outil d’aide à la décision</a:t>
             </a:r>
-            <a:endParaRPr lang="fr-FR" dirty="0"/>
+            <a:endParaRPr lang="fr-FR" sz="1200" dirty="0"/>
           </a:p>
           <a:p>
-            <a:pPr>
+            <a:pPr marL="285750" indent="-285750">
               <a:spcBef>
                 <a:spcPts val="300"/>
               </a:spcBef>
               <a:buClrTx/>
+              <a:buFont typeface="Arial" panose="020B0604020202020204" pitchFamily="34" charset="0"/>
+              <a:buChar char="•"/>
               <a:defRPr/>
             </a:pPr>
-            <a:endParaRPr lang="fr-FR" kern="1200" dirty="0">
+            <a:endParaRPr lang="fr-FR" sz="1200" kern="1200" dirty="0">
               <a:latin typeface="Calibri"/>
               <a:ea typeface="Calibri"/>
               <a:cs typeface="Calibri"/>
@@ -19066,7 +19068,7 @@
               <a:buChar char="•"/>
               <a:defRPr/>
             </a:pPr>
-            <a:endParaRPr lang="fr-FR" kern="1200" dirty="0">
+            <a:endParaRPr lang="fr-FR" sz="1200" kern="1200" dirty="0">
               <a:latin typeface="Calibri"/>
               <a:ea typeface="Calibri"/>
               <a:cs typeface="Calibri"/>
@@ -19081,12 +19083,12 @@
               <a:buChar char="•"/>
             </a:pPr>
             <a:r>
-              <a:rPr lang="fr-FR" b="1" dirty="0"/>
+              <a:rPr lang="fr-FR" sz="1200" b="1" dirty="0"/>
               <a:t>Passage en temps réel</a:t>
             </a:r>
             <a:r>
-              <a:rPr lang="fr-FR" dirty="0"/>
-              <a:t> des données et des prévisions (prédictions lancées en synchrone depuis le Dashboard)</a:t>
+              <a:rPr lang="fr-FR" sz="1200" dirty="0"/>
+              <a:t> des données et des prévisions</a:t>
             </a:r>
           </a:p>
           <a:p>
@@ -19098,15 +19100,32 @@
               <a:buChar char="•"/>
             </a:pPr>
             <a:r>
-              <a:rPr lang="fr-FR" b="1" dirty="0"/>
+              <a:rPr lang="fr-FR" sz="1200" b="1" dirty="0"/>
+              <a:t>Lancement des prédictions </a:t>
+            </a:r>
+            <a:r>
+              <a:rPr lang="fr-FR" sz="1200" dirty="0"/>
+              <a:t>depuis le Dashboard (prédictions lancées en synchrone depuis le Dashboard)</a:t>
+            </a:r>
+          </a:p>
+          <a:p>
+            <a:pPr marL="285750" indent="-285750">
+              <a:spcBef>
+                <a:spcPts val="1200"/>
+              </a:spcBef>
+              <a:buFont typeface="Arial" panose="020B0604020202020204" pitchFamily="34" charset="0"/>
+              <a:buChar char="•"/>
+            </a:pPr>
+            <a:r>
+              <a:rPr lang="fr-FR" sz="1200" b="1" dirty="0"/>
               <a:t>Ajout d’une prévision </a:t>
             </a:r>
             <a:r>
-              <a:rPr lang="fr-FR" b="1" dirty="0" err="1"/>
+              <a:rPr lang="fr-FR" sz="1200" b="1" dirty="0" err="1"/>
               <a:t>intraday</a:t>
             </a:r>
             <a:r>
-              <a:rPr lang="fr-FR" dirty="0"/>
+              <a:rPr lang="fr-FR" sz="1200" dirty="0"/>
               <a:t> : données RTE mises à jour toutes les 30 minutes (intérêt métier à vérifier)</a:t>
             </a:r>
           </a:p>
@@ -19119,11 +19138,11 @@
               <a:buChar char="•"/>
             </a:pPr>
             <a:r>
-              <a:rPr lang="fr-FR" b="1" dirty="0"/>
+              <a:rPr lang="fr-FR" sz="1200" b="1" dirty="0"/>
               <a:t>Enrichissement par données satellitaires avancées</a:t>
             </a:r>
             <a:r>
-              <a:rPr lang="fr-FR" dirty="0"/>
+              <a:rPr lang="fr-FR" sz="1200" dirty="0"/>
               <a:t> (nuages, couverture atmosphérique)</a:t>
             </a:r>
           </a:p>
@@ -19135,7 +19154,7 @@
               <a:buFont typeface="Arial" panose="020B0604020202020204" pitchFamily="34" charset="0"/>
               <a:buChar char="•"/>
             </a:pPr>
-            <a:endParaRPr lang="fr-FR" dirty="0"/>
+            <a:endParaRPr lang="fr-FR" sz="1200" dirty="0"/>
           </a:p>
         </p:txBody>
       </p:sp>
@@ -19411,8 +19430,8 @@
           <p:nvPr/>
         </p:nvSpPr>
         <p:spPr>
-          <a:xfrm rot="443839">
-            <a:off x="5562932" y="1075208"/>
+          <a:xfrm rot="1199074">
+            <a:off x="5584842" y="806544"/>
             <a:ext cx="3244850" cy="584775"/>
           </a:xfrm>
           <a:prstGeom prst="rect">

--- a/presentation/dsfs_ft_36_Projet_REnergies_efficiency_prediction.pptx
+++ b/presentation/dsfs_ft_36_Projet_REnergies_efficiency_prediction.pptx
@@ -291,7 +291,7 @@
 <file path=ppt/revisionInfo.xml><?xml version="1.0" encoding="utf-8"?>
 <p1510:revInfo xmlns:a="http://schemas.openxmlformats.org/drawingml/2006/main" xmlns:r="http://schemas.openxmlformats.org/officeDocument/2006/relationships" xmlns:p1510="http://schemas.microsoft.com/office/powerpoint/2015/10/main">
   <p1510:revLst>
-    <p1510:client id="{2EB72A00-7F79-4813-B4C2-C6564860F3F6}" v="1578" dt="2025-11-21T09:08:53.483"/>
+    <p1510:client id="{2EB72A00-7F79-4813-B4C2-C6564860F3F6}" v="1718" dt="2025-11-21T09:41:24.918"/>
   </p1510:revLst>
 </p1510:revInfo>
 </file>
@@ -301,7 +301,7 @@
   <pc:docChgLst>
     <pc:chgData name="Jean-Yves Vuillequez" userId="e7fac481abea6bd0" providerId="LiveId" clId="{79E365E8-22BC-4EC2-9606-9A9AC6CD1D22}"/>
     <pc:docChg chg="undo custSel addSld delSld modSld sldOrd">
-      <pc:chgData name="Jean-Yves Vuillequez" userId="e7fac481abea6bd0" providerId="LiveId" clId="{79E365E8-22BC-4EC2-9606-9A9AC6CD1D22}" dt="2025-11-21T09:08:53.483" v="5611"/>
+      <pc:chgData name="Jean-Yves Vuillequez" userId="e7fac481abea6bd0" providerId="LiveId" clId="{79E365E8-22BC-4EC2-9606-9A9AC6CD1D22}" dt="2025-11-21T09:41:42.184" v="5752" actId="313"/>
       <pc:docMkLst>
         <pc:docMk/>
       </pc:docMkLst>
@@ -329,7 +329,7 @@
         </pc:spChg>
       </pc:sldChg>
       <pc:sldChg chg="addSp delSp modSp add del mod">
-        <pc:chgData name="Jean-Yves Vuillequez" userId="e7fac481abea6bd0" providerId="LiveId" clId="{79E365E8-22BC-4EC2-9606-9A9AC6CD1D22}" dt="2025-11-21T02:25:39.724" v="5607" actId="20577"/>
+        <pc:chgData name="Jean-Yves Vuillequez" userId="e7fac481abea6bd0" providerId="LiveId" clId="{79E365E8-22BC-4EC2-9606-9A9AC6CD1D22}" dt="2025-11-21T09:41:42.184" v="5752" actId="313"/>
         <pc:sldMkLst>
           <pc:docMk/>
           <pc:sldMk cId="0" sldId="263"/>
@@ -343,7 +343,7 @@
           </ac:spMkLst>
         </pc:spChg>
         <pc:spChg chg="mod">
-          <ac:chgData name="Jean-Yves Vuillequez" userId="e7fac481abea6bd0" providerId="LiveId" clId="{79E365E8-22BC-4EC2-9606-9A9AC6CD1D22}" dt="2025-11-21T02:25:31.718" v="5591" actId="20577"/>
+          <ac:chgData name="Jean-Yves Vuillequez" userId="e7fac481abea6bd0" providerId="LiveId" clId="{79E365E8-22BC-4EC2-9606-9A9AC6CD1D22}" dt="2025-11-21T09:41:42.184" v="5752" actId="313"/>
           <ac:spMkLst>
             <pc:docMk/>
             <pc:sldMk cId="0" sldId="263"/>
@@ -2350,7 +2350,7 @@
         </pc:spChg>
       </pc:sldChg>
       <pc:sldChg chg="addSp delSp modSp add mod ord delAnim modAnim modNotesTx">
-        <pc:chgData name="Jean-Yves Vuillequez" userId="e7fac481abea6bd0" providerId="LiveId" clId="{79E365E8-22BC-4EC2-9606-9A9AC6CD1D22}" dt="2025-11-21T09:08:53.483" v="5611"/>
+        <pc:chgData name="Jean-Yves Vuillequez" userId="e7fac481abea6bd0" providerId="LiveId" clId="{79E365E8-22BC-4EC2-9606-9A9AC6CD1D22}" dt="2025-11-21T09:41:24.918" v="5751" actId="113"/>
         <pc:sldMkLst>
           <pc:docMk/>
           <pc:sldMk cId="3315518580" sldId="292"/>
@@ -2412,7 +2412,7 @@
           </ac:spMkLst>
         </pc:spChg>
         <pc:spChg chg="add mod">
-          <ac:chgData name="Jean-Yves Vuillequez" userId="e7fac481abea6bd0" providerId="LiveId" clId="{79E365E8-22BC-4EC2-9606-9A9AC6CD1D22}" dt="2025-11-21T09:08:53.483" v="5611"/>
+          <ac:chgData name="Jean-Yves Vuillequez" userId="e7fac481abea6bd0" providerId="LiveId" clId="{79E365E8-22BC-4EC2-9606-9A9AC6CD1D22}" dt="2025-11-21T09:41:24.918" v="5751" actId="113"/>
           <ac:spMkLst>
             <pc:docMk/>
             <pc:sldMk cId="3315518580" sldId="292"/>
@@ -19105,7 +19105,7 @@
             </a:r>
             <a:r>
               <a:rPr lang="fr-FR" sz="1200" dirty="0"/>
-              <a:t>depuis le Dashboard (prédictions lancées en synchrone depuis le Dashboard)</a:t>
+              <a:t>depuis le Dashboard (prédictions lancées en synchrone)</a:t>
             </a:r>
           </a:p>
           <a:p>
@@ -19144,6 +19144,23 @@
             <a:r>
               <a:rPr lang="fr-FR" sz="1200" dirty="0"/>
               <a:t> (nuages, couverture atmosphérique)</a:t>
+            </a:r>
+          </a:p>
+          <a:p>
+            <a:pPr marL="285750" indent="-285750">
+              <a:spcBef>
+                <a:spcPts val="1200"/>
+              </a:spcBef>
+              <a:buFont typeface="Arial" panose="020B0604020202020204" pitchFamily="34" charset="0"/>
+              <a:buChar char="•"/>
+            </a:pPr>
+            <a:r>
+              <a:rPr lang="fr-FR" sz="1200" b="1" dirty="0"/>
+              <a:t>Généralisation</a:t>
+            </a:r>
+            <a:r>
+              <a:rPr lang="fr-FR" sz="1200" dirty="0"/>
+              <a:t> à d’autres filières énergétiques (Eolien, hydro électrique, …)</a:t>
             </a:r>
           </a:p>
           <a:p>
@@ -23956,18 +23973,6 @@
               <a:buNone/>
             </a:pPr>
             <a:r>
-              <a:rPr lang="fr-FR" sz="1400" b="0" i="0" u="none" strike="noStrike" cap="none" dirty="0" err="1">
-                <a:solidFill>
-                  <a:srgbClr val="000000"/>
-                </a:solidFill>
-                <a:latin typeface="Arial"/>
-                <a:ea typeface="Arial"/>
-                <a:cs typeface="Arial"/>
-                <a:sym typeface="Arial"/>
-              </a:rPr>
-              <a:t>Jhon</a:t>
-            </a:r>
-            <a:r>
               <a:rPr lang="fr-FR" sz="1400" b="0" i="0" u="none" strike="noStrike" cap="none" dirty="0">
                 <a:solidFill>
                   <a:srgbClr val="000000"/>
@@ -23977,7 +23982,7 @@
                 <a:cs typeface="Arial"/>
                 <a:sym typeface="Arial"/>
               </a:rPr>
-              <a:t> DUBOS</a:t>
+              <a:t>John DUBOS</a:t>
             </a:r>
             <a:endParaRPr sz="1400" b="0" i="0" u="none" strike="noStrike" cap="none" dirty="0">
               <a:solidFill>

--- a/presentation/dsfs_ft_36_Projet_REnergies_efficiency_prediction.pptx
+++ b/presentation/dsfs_ft_36_Projet_REnergies_efficiency_prediction.pptx
@@ -6,49 +6,50 @@
     <p:sldMasterId id="2147483660" r:id="rId2"/>
   </p:sldMasterIdLst>
   <p:notesMasterIdLst>
-    <p:notesMasterId r:id="rId19"/>
+    <p:notesMasterId r:id="rId20"/>
   </p:notesMasterIdLst>
   <p:sldIdLst>
     <p:sldId id="256" r:id="rId3"/>
     <p:sldId id="263" r:id="rId4"/>
-    <p:sldId id="287" r:id="rId5"/>
-    <p:sldId id="286" r:id="rId6"/>
-    <p:sldId id="274" r:id="rId7"/>
-    <p:sldId id="270" r:id="rId8"/>
-    <p:sldId id="293" r:id="rId9"/>
-    <p:sldId id="289" r:id="rId10"/>
-    <p:sldId id="291" r:id="rId11"/>
-    <p:sldId id="292" r:id="rId12"/>
-    <p:sldId id="273" r:id="rId13"/>
-    <p:sldId id="275" r:id="rId14"/>
-    <p:sldId id="294" r:id="rId15"/>
-    <p:sldId id="295" r:id="rId16"/>
-    <p:sldId id="296" r:id="rId17"/>
-    <p:sldId id="271" r:id="rId18"/>
+    <p:sldId id="264" r:id="rId5"/>
+    <p:sldId id="287" r:id="rId6"/>
+    <p:sldId id="286" r:id="rId7"/>
+    <p:sldId id="274" r:id="rId8"/>
+    <p:sldId id="270" r:id="rId9"/>
+    <p:sldId id="293" r:id="rId10"/>
+    <p:sldId id="289" r:id="rId11"/>
+    <p:sldId id="291" r:id="rId12"/>
+    <p:sldId id="292" r:id="rId13"/>
+    <p:sldId id="273" r:id="rId14"/>
+    <p:sldId id="275" r:id="rId15"/>
+    <p:sldId id="294" r:id="rId16"/>
+    <p:sldId id="295" r:id="rId17"/>
+    <p:sldId id="296" r:id="rId18"/>
+    <p:sldId id="271" r:id="rId19"/>
   </p:sldIdLst>
   <p:sldSz cx="9144000" cy="5143500" type="screen16x9"/>
   <p:notesSz cx="6858000" cy="9144000"/>
   <p:embeddedFontLst>
     <p:embeddedFont>
       <p:font typeface="Inter" panose="020B0604020202020204" charset="0"/>
-      <p:regular r:id="rId20"/>
-      <p:bold r:id="rId21"/>
-      <p:italic r:id="rId22"/>
-      <p:boldItalic r:id="rId23"/>
+      <p:regular r:id="rId21"/>
+      <p:bold r:id="rId22"/>
+      <p:italic r:id="rId23"/>
+      <p:boldItalic r:id="rId24"/>
     </p:embeddedFont>
     <p:embeddedFont>
       <p:font typeface="Inter Medium" panose="020B0604020202020204" charset="0"/>
-      <p:regular r:id="rId24"/>
-      <p:bold r:id="rId25"/>
-      <p:italic r:id="rId26"/>
-      <p:boldItalic r:id="rId27"/>
+      <p:regular r:id="rId25"/>
+      <p:bold r:id="rId26"/>
+      <p:italic r:id="rId27"/>
+      <p:boldItalic r:id="rId28"/>
     </p:embeddedFont>
     <p:embeddedFont>
       <p:font typeface="Inter SemiBold" panose="020B0604020202020204" charset="0"/>
-      <p:regular r:id="rId28"/>
-      <p:bold r:id="rId29"/>
-      <p:italic r:id="rId30"/>
-      <p:boldItalic r:id="rId31"/>
+      <p:regular r:id="rId29"/>
+      <p:bold r:id="rId30"/>
+      <p:italic r:id="rId31"/>
+      <p:boldItalic r:id="rId32"/>
     </p:embeddedFont>
   </p:embeddedFontLst>
   <p:defaultTextStyle>
@@ -291,7 +292,7 @@
 <file path=ppt/revisionInfo.xml><?xml version="1.0" encoding="utf-8"?>
 <p1510:revInfo xmlns:a="http://schemas.openxmlformats.org/drawingml/2006/main" xmlns:r="http://schemas.openxmlformats.org/officeDocument/2006/relationships" xmlns:p1510="http://schemas.microsoft.com/office/powerpoint/2015/10/main">
   <p1510:revLst>
-    <p1510:client id="{2EB72A00-7F79-4813-B4C2-C6564860F3F6}" v="1718" dt="2025-11-21T09:41:24.918"/>
+    <p1510:client id="{2EB72A00-7F79-4813-B4C2-C6564860F3F6}" v="1790" dt="2025-11-21T12:05:04.372"/>
   </p1510:revLst>
 </p1510:revInfo>
 </file>
@@ -301,7 +302,7 @@
   <pc:docChgLst>
     <pc:chgData name="Jean-Yves Vuillequez" userId="e7fac481abea6bd0" providerId="LiveId" clId="{79E365E8-22BC-4EC2-9606-9A9AC6CD1D22}"/>
     <pc:docChg chg="undo custSel addSld delSld modSld sldOrd">
-      <pc:chgData name="Jean-Yves Vuillequez" userId="e7fac481abea6bd0" providerId="LiveId" clId="{79E365E8-22BC-4EC2-9606-9A9AC6CD1D22}" dt="2025-11-21T09:41:42.184" v="5752" actId="313"/>
+      <pc:chgData name="Jean-Yves Vuillequez" userId="e7fac481abea6bd0" providerId="LiveId" clId="{79E365E8-22BC-4EC2-9606-9A9AC6CD1D22}" dt="2025-11-21T12:06:38.436" v="6160" actId="108"/>
       <pc:docMkLst>
         <pc:docMk/>
       </pc:docMkLst>
@@ -348,6 +349,213 @@
             <pc:docMk/>
             <pc:sldMk cId="0" sldId="263"/>
             <ac:spMk id="61" creationId="{00000000-0000-0000-0000-000000000000}"/>
+          </ac:spMkLst>
+        </pc:spChg>
+      </pc:sldChg>
+      <pc:sldChg chg="addSp delSp modSp add mod delAnim modAnim">
+        <pc:chgData name="Jean-Yves Vuillequez" userId="e7fac481abea6bd0" providerId="LiveId" clId="{79E365E8-22BC-4EC2-9606-9A9AC6CD1D22}" dt="2025-11-21T12:06:38.436" v="6160" actId="108"/>
+        <pc:sldMkLst>
+          <pc:docMk/>
+          <pc:sldMk cId="0" sldId="264"/>
+        </pc:sldMkLst>
+        <pc:spChg chg="del">
+          <ac:chgData name="Jean-Yves Vuillequez" userId="e7fac481abea6bd0" providerId="LiveId" clId="{79E365E8-22BC-4EC2-9606-9A9AC6CD1D22}" dt="2025-11-21T11:35:08.927" v="5790" actId="478"/>
+          <ac:spMkLst>
+            <pc:docMk/>
+            <pc:sldMk cId="0" sldId="264"/>
+            <ac:spMk id="2" creationId="{D9A2D66C-094F-8252-4AB9-1D218363DA6F}"/>
+          </ac:spMkLst>
+        </pc:spChg>
+        <pc:spChg chg="del">
+          <ac:chgData name="Jean-Yves Vuillequez" userId="e7fac481abea6bd0" providerId="LiveId" clId="{79E365E8-22BC-4EC2-9606-9A9AC6CD1D22}" dt="2025-11-21T11:35:08.927" v="5790" actId="478"/>
+          <ac:spMkLst>
+            <pc:docMk/>
+            <pc:sldMk cId="0" sldId="264"/>
+            <ac:spMk id="3" creationId="{7FF79EE1-EF4C-C032-2762-642CB4374D9E}"/>
+          </ac:spMkLst>
+        </pc:spChg>
+        <pc:spChg chg="del">
+          <ac:chgData name="Jean-Yves Vuillequez" userId="e7fac481abea6bd0" providerId="LiveId" clId="{79E365E8-22BC-4EC2-9606-9A9AC6CD1D22}" dt="2025-11-21T11:35:08.927" v="5790" actId="478"/>
+          <ac:spMkLst>
+            <pc:docMk/>
+            <pc:sldMk cId="0" sldId="264"/>
+            <ac:spMk id="4" creationId="{74B88362-D1CF-C90B-F395-C78CE911F3EF}"/>
+          </ac:spMkLst>
+        </pc:spChg>
+        <pc:spChg chg="del">
+          <ac:chgData name="Jean-Yves Vuillequez" userId="e7fac481abea6bd0" providerId="LiveId" clId="{79E365E8-22BC-4EC2-9606-9A9AC6CD1D22}" dt="2025-11-21T11:35:08.927" v="5790" actId="478"/>
+          <ac:spMkLst>
+            <pc:docMk/>
+            <pc:sldMk cId="0" sldId="264"/>
+            <ac:spMk id="5" creationId="{B8634BBC-9BFC-F3FD-159A-1BB03B177FBD}"/>
+          </ac:spMkLst>
+        </pc:spChg>
+        <pc:spChg chg="del">
+          <ac:chgData name="Jean-Yves Vuillequez" userId="e7fac481abea6bd0" providerId="LiveId" clId="{79E365E8-22BC-4EC2-9606-9A9AC6CD1D22}" dt="2025-11-21T11:35:08.927" v="5790" actId="478"/>
+          <ac:spMkLst>
+            <pc:docMk/>
+            <pc:sldMk cId="0" sldId="264"/>
+            <ac:spMk id="6" creationId="{D24ED56D-F7B0-2AFA-714B-EB43DAAC41C2}"/>
+          </ac:spMkLst>
+        </pc:spChg>
+        <pc:spChg chg="del">
+          <ac:chgData name="Jean-Yves Vuillequez" userId="e7fac481abea6bd0" providerId="LiveId" clId="{79E365E8-22BC-4EC2-9606-9A9AC6CD1D22}" dt="2025-11-21T11:35:08.927" v="5790" actId="478"/>
+          <ac:spMkLst>
+            <pc:docMk/>
+            <pc:sldMk cId="0" sldId="264"/>
+            <ac:spMk id="7" creationId="{72EE3BE6-BBB0-90D2-DB6E-C1B217378D14}"/>
+          </ac:spMkLst>
+        </pc:spChg>
+        <pc:spChg chg="del">
+          <ac:chgData name="Jean-Yves Vuillequez" userId="e7fac481abea6bd0" providerId="LiveId" clId="{79E365E8-22BC-4EC2-9606-9A9AC6CD1D22}" dt="2025-11-21T11:35:11.641" v="5791" actId="478"/>
+          <ac:spMkLst>
+            <pc:docMk/>
+            <pc:sldMk cId="0" sldId="264"/>
+            <ac:spMk id="8" creationId="{E91DB620-877D-C30D-0478-6C655CD107B0}"/>
+          </ac:spMkLst>
+        </pc:spChg>
+        <pc:spChg chg="del">
+          <ac:chgData name="Jean-Yves Vuillequez" userId="e7fac481abea6bd0" providerId="LiveId" clId="{79E365E8-22BC-4EC2-9606-9A9AC6CD1D22}" dt="2025-11-21T11:35:11.641" v="5791" actId="478"/>
+          <ac:spMkLst>
+            <pc:docMk/>
+            <pc:sldMk cId="0" sldId="264"/>
+            <ac:spMk id="9" creationId="{11CDC224-40D9-B526-36A3-CFBD4101FFBC}"/>
+          </ac:spMkLst>
+        </pc:spChg>
+        <pc:spChg chg="add mod">
+          <ac:chgData name="Jean-Yves Vuillequez" userId="e7fac481abea6bd0" providerId="LiveId" clId="{79E365E8-22BC-4EC2-9606-9A9AC6CD1D22}" dt="2025-11-21T12:01:02.283" v="6077" actId="1076"/>
+          <ac:spMkLst>
+            <pc:docMk/>
+            <pc:sldMk cId="0" sldId="264"/>
+            <ac:spMk id="10" creationId="{969F6912-24B4-86C3-A9BD-63A0B3EECE8F}"/>
+          </ac:spMkLst>
+        </pc:spChg>
+        <pc:spChg chg="add del mod">
+          <ac:chgData name="Jean-Yves Vuillequez" userId="e7fac481abea6bd0" providerId="LiveId" clId="{79E365E8-22BC-4EC2-9606-9A9AC6CD1D22}" dt="2025-11-21T11:44:36.133" v="6041" actId="478"/>
+          <ac:spMkLst>
+            <pc:docMk/>
+            <pc:sldMk cId="0" sldId="264"/>
+            <ac:spMk id="11" creationId="{7813ACC0-69E6-185E-DF42-22E2CB64BE2F}"/>
+          </ac:spMkLst>
+        </pc:spChg>
+        <pc:spChg chg="add del mod">
+          <ac:chgData name="Jean-Yves Vuillequez" userId="e7fac481abea6bd0" providerId="LiveId" clId="{79E365E8-22BC-4EC2-9606-9A9AC6CD1D22}" dt="2025-11-21T11:39:01.232" v="5886" actId="478"/>
+          <ac:spMkLst>
+            <pc:docMk/>
+            <pc:sldMk cId="0" sldId="264"/>
+            <ac:spMk id="12" creationId="{23CCC4AD-A6DE-3BB9-488F-72C626DEBCCF}"/>
+          </ac:spMkLst>
+        </pc:spChg>
+        <pc:spChg chg="add del mod">
+          <ac:chgData name="Jean-Yves Vuillequez" userId="e7fac481abea6bd0" providerId="LiveId" clId="{79E365E8-22BC-4EC2-9606-9A9AC6CD1D22}" dt="2025-11-21T11:42:39.285" v="6001" actId="478"/>
+          <ac:spMkLst>
+            <pc:docMk/>
+            <pc:sldMk cId="0" sldId="264"/>
+            <ac:spMk id="13" creationId="{9E9F0506-6FE8-08AF-1B83-C9550F56A61C}"/>
+          </ac:spMkLst>
+        </pc:spChg>
+        <pc:spChg chg="add del mod">
+          <ac:chgData name="Jean-Yves Vuillequez" userId="e7fac481abea6bd0" providerId="LiveId" clId="{79E365E8-22BC-4EC2-9606-9A9AC6CD1D22}" dt="2025-11-21T11:42:39.285" v="6001" actId="478"/>
+          <ac:spMkLst>
+            <pc:docMk/>
+            <pc:sldMk cId="0" sldId="264"/>
+            <ac:spMk id="14" creationId="{2A945BF2-0A42-F2CB-5C50-FE70838E27A5}"/>
+          </ac:spMkLst>
+        </pc:spChg>
+        <pc:spChg chg="add mod ord">
+          <ac:chgData name="Jean-Yves Vuillequez" userId="e7fac481abea6bd0" providerId="LiveId" clId="{79E365E8-22BC-4EC2-9606-9A9AC6CD1D22}" dt="2025-11-21T12:01:02.283" v="6077" actId="1076"/>
+          <ac:spMkLst>
+            <pc:docMk/>
+            <pc:sldMk cId="0" sldId="264"/>
+            <ac:spMk id="15" creationId="{F7BD46E7-960E-9FE8-AF1D-540B63B6E3BD}"/>
+          </ac:spMkLst>
+        </pc:spChg>
+        <pc:spChg chg="add mod">
+          <ac:chgData name="Jean-Yves Vuillequez" userId="e7fac481abea6bd0" providerId="LiveId" clId="{79E365E8-22BC-4EC2-9606-9A9AC6CD1D22}" dt="2025-11-21T12:04:19.077" v="6121" actId="14100"/>
+          <ac:spMkLst>
+            <pc:docMk/>
+            <pc:sldMk cId="0" sldId="264"/>
+            <ac:spMk id="16" creationId="{FD00A647-A6B0-BAD9-4462-05B36C528950}"/>
+          </ac:spMkLst>
+        </pc:spChg>
+        <pc:spChg chg="add mod">
+          <ac:chgData name="Jean-Yves Vuillequez" userId="e7fac481abea6bd0" providerId="LiveId" clId="{79E365E8-22BC-4EC2-9606-9A9AC6CD1D22}" dt="2025-11-21T12:01:02.283" v="6077" actId="1076"/>
+          <ac:spMkLst>
+            <pc:docMk/>
+            <pc:sldMk cId="0" sldId="264"/>
+            <ac:spMk id="17" creationId="{CA110F94-5779-164B-A681-281821A7140F}"/>
+          </ac:spMkLst>
+        </pc:spChg>
+        <pc:spChg chg="add del mod">
+          <ac:chgData name="Jean-Yves Vuillequez" userId="e7fac481abea6bd0" providerId="LiveId" clId="{79E365E8-22BC-4EC2-9606-9A9AC6CD1D22}" dt="2025-11-21T12:00:21.030" v="6069" actId="478"/>
+          <ac:spMkLst>
+            <pc:docMk/>
+            <pc:sldMk cId="0" sldId="264"/>
+            <ac:spMk id="18" creationId="{E7E7566B-F2E7-D36E-1873-BD9CE02F26E9}"/>
+          </ac:spMkLst>
+        </pc:spChg>
+        <pc:spChg chg="add mod">
+          <ac:chgData name="Jean-Yves Vuillequez" userId="e7fac481abea6bd0" providerId="LiveId" clId="{79E365E8-22BC-4EC2-9606-9A9AC6CD1D22}" dt="2025-11-21T12:00:49.531" v="6074" actId="1076"/>
+          <ac:spMkLst>
+            <pc:docMk/>
+            <pc:sldMk cId="0" sldId="264"/>
+            <ac:spMk id="19" creationId="{A3387E01-D8D0-5ADA-D534-65D80A3C2F50}"/>
+          </ac:spMkLst>
+        </pc:spChg>
+        <pc:spChg chg="add mod">
+          <ac:chgData name="Jean-Yves Vuillequez" userId="e7fac481abea6bd0" providerId="LiveId" clId="{79E365E8-22BC-4EC2-9606-9A9AC6CD1D22}" dt="2025-11-21T12:04:41.329" v="6128" actId="1076"/>
+          <ac:spMkLst>
+            <pc:docMk/>
+            <pc:sldMk cId="0" sldId="264"/>
+            <ac:spMk id="20" creationId="{027ADA1A-FB26-718D-5918-4A696CD7FAD0}"/>
+          </ac:spMkLst>
+        </pc:spChg>
+        <pc:spChg chg="add del mod">
+          <ac:chgData name="Jean-Yves Vuillequez" userId="e7fac481abea6bd0" providerId="LiveId" clId="{79E365E8-22BC-4EC2-9606-9A9AC6CD1D22}" dt="2025-11-21T12:04:04.549" v="6116" actId="478"/>
+          <ac:spMkLst>
+            <pc:docMk/>
+            <pc:sldMk cId="0" sldId="264"/>
+            <ac:spMk id="21" creationId="{ED5837DA-54D3-662C-D286-F133E4AA8974}"/>
+          </ac:spMkLst>
+        </pc:spChg>
+        <pc:spChg chg="add mod">
+          <ac:chgData name="Jean-Yves Vuillequez" userId="e7fac481abea6bd0" providerId="LiveId" clId="{79E365E8-22BC-4EC2-9606-9A9AC6CD1D22}" dt="2025-11-21T12:04:41.329" v="6128" actId="1076"/>
+          <ac:spMkLst>
+            <pc:docMk/>
+            <pc:sldMk cId="0" sldId="264"/>
+            <ac:spMk id="22" creationId="{9A64202F-AFAE-5CDF-BC8D-5777C30A07CB}"/>
+          </ac:spMkLst>
+        </pc:spChg>
+        <pc:spChg chg="add mod">
+          <ac:chgData name="Jean-Yves Vuillequez" userId="e7fac481abea6bd0" providerId="LiveId" clId="{79E365E8-22BC-4EC2-9606-9A9AC6CD1D22}" dt="2025-11-21T12:04:41.329" v="6128" actId="1076"/>
+          <ac:spMkLst>
+            <pc:docMk/>
+            <pc:sldMk cId="0" sldId="264"/>
+            <ac:spMk id="23" creationId="{56B8B58A-AB16-FC6C-4248-7061947495FF}"/>
+          </ac:spMkLst>
+        </pc:spChg>
+        <pc:spChg chg="add mod">
+          <ac:chgData name="Jean-Yves Vuillequez" userId="e7fac481abea6bd0" providerId="LiveId" clId="{79E365E8-22BC-4EC2-9606-9A9AC6CD1D22}" dt="2025-11-21T12:05:04.372" v="6151" actId="20577"/>
+          <ac:spMkLst>
+            <pc:docMk/>
+            <pc:sldMk cId="0" sldId="264"/>
+            <ac:spMk id="24" creationId="{3F9732E3-4982-9D73-E53B-ED7124F0A415}"/>
+          </ac:spMkLst>
+        </pc:spChg>
+        <pc:spChg chg="mod">
+          <ac:chgData name="Jean-Yves Vuillequez" userId="e7fac481abea6bd0" providerId="LiveId" clId="{79E365E8-22BC-4EC2-9606-9A9AC6CD1D22}" dt="2025-11-21T12:06:38.436" v="6160" actId="108"/>
+          <ac:spMkLst>
+            <pc:docMk/>
+            <pc:sldMk cId="0" sldId="264"/>
+            <ac:spMk id="70" creationId="{00000000-0000-0000-0000-000000000000}"/>
+          </ac:spMkLst>
+        </pc:spChg>
+        <pc:spChg chg="mod">
+          <ac:chgData name="Jean-Yves Vuillequez" userId="e7fac481abea6bd0" providerId="LiveId" clId="{79E365E8-22BC-4EC2-9606-9A9AC6CD1D22}" dt="2025-11-21T12:00:47.233" v="6073" actId="1076"/>
+          <ac:spMkLst>
+            <pc:docMk/>
+            <pc:sldMk cId="0" sldId="264"/>
+            <ac:spMk id="73" creationId="{00000000-0000-0000-0000-000000000000}"/>
           </ac:spMkLst>
         </pc:spChg>
       </pc:sldChg>
@@ -3258,6 +3466,150 @@
   <p:cSld>
     <p:spTree>
       <p:nvGrpSpPr>
+        <p:cNvPr id="1" name="Shape 174">
+          <a:extLst>
+            <a:ext uri="{FF2B5EF4-FFF2-40B4-BE49-F238E27FC236}">
+              <a16:creationId xmlns:a16="http://schemas.microsoft.com/office/drawing/2014/main" id="{8422C4C4-ACE3-1D1D-6CE8-F4388EDA18CD}"/>
+            </a:ext>
+          </a:extLst>
+        </p:cNvPr>
+        <p:cNvGrpSpPr/>
+        <p:nvPr/>
+      </p:nvGrpSpPr>
+      <p:grpSpPr>
+        <a:xfrm>
+          <a:off x="0" y="0"/>
+          <a:ext cx="0" cy="0"/>
+          <a:chOff x="0" y="0"/>
+          <a:chExt cx="0" cy="0"/>
+        </a:xfrm>
+      </p:grpSpPr>
+      <p:sp>
+        <p:nvSpPr>
+          <p:cNvPr id="175" name="Google Shape;175;p8:notes">
+            <a:extLst>
+              <a:ext uri="{FF2B5EF4-FFF2-40B4-BE49-F238E27FC236}">
+                <a16:creationId xmlns:a16="http://schemas.microsoft.com/office/drawing/2014/main" id="{EDA65F32-2626-DA27-4EFA-F86C12B29A9F}"/>
+              </a:ext>
+            </a:extLst>
+          </p:cNvPr>
+          <p:cNvSpPr>
+            <a:spLocks noGrp="1" noRot="1" noChangeAspect="1"/>
+          </p:cNvSpPr>
+          <p:nvPr>
+            <p:ph type="sldImg" idx="2"/>
+          </p:nvPr>
+        </p:nvSpPr>
+        <p:spPr>
+          <a:xfrm>
+            <a:off x="381000" y="685800"/>
+            <a:ext cx="6096000" cy="3429000"/>
+          </a:xfrm>
+          <a:custGeom>
+            <a:avLst/>
+            <a:gdLst/>
+            <a:ahLst/>
+            <a:cxnLst/>
+            <a:rect l="l" t="t" r="r" b="b"/>
+            <a:pathLst>
+              <a:path w="120000" h="120000" extrusionOk="0">
+                <a:moveTo>
+                  <a:pt x="0" y="0"/>
+                </a:moveTo>
+                <a:lnTo>
+                  <a:pt x="120000" y="0"/>
+                </a:lnTo>
+                <a:lnTo>
+                  <a:pt x="120000" y="120000"/>
+                </a:lnTo>
+                <a:lnTo>
+                  <a:pt x="0" y="120000"/>
+                </a:lnTo>
+                <a:close/>
+              </a:path>
+            </a:pathLst>
+          </a:custGeom>
+          <a:noFill/>
+          <a:ln w="9525" cap="flat" cmpd="sng">
+            <a:solidFill>
+              <a:srgbClr val="000000"/>
+            </a:solidFill>
+            <a:prstDash val="solid"/>
+            <a:round/>
+            <a:headEnd type="none" w="sm" len="sm"/>
+            <a:tailEnd type="none" w="sm" len="sm"/>
+          </a:ln>
+        </p:spPr>
+      </p:sp>
+      <p:sp>
+        <p:nvSpPr>
+          <p:cNvPr id="176" name="Google Shape;176;p8:notes">
+            <a:extLst>
+              <a:ext uri="{FF2B5EF4-FFF2-40B4-BE49-F238E27FC236}">
+                <a16:creationId xmlns:a16="http://schemas.microsoft.com/office/drawing/2014/main" id="{5B160CE0-54E8-5F62-A7F9-C0C3C0BE0FA3}"/>
+              </a:ext>
+            </a:extLst>
+          </p:cNvPr>
+          <p:cNvSpPr txBox="1">
+            <a:spLocks noGrp="1"/>
+          </p:cNvSpPr>
+          <p:nvPr>
+            <p:ph type="body" idx="1"/>
+          </p:nvPr>
+        </p:nvSpPr>
+        <p:spPr>
+          <a:xfrm>
+            <a:off x="685800" y="4343400"/>
+            <a:ext cx="5486400" cy="4114800"/>
+          </a:xfrm>
+          <a:prstGeom prst="rect">
+            <a:avLst/>
+          </a:prstGeom>
+          <a:noFill/>
+          <a:ln>
+            <a:noFill/>
+          </a:ln>
+        </p:spPr>
+        <p:txBody>
+          <a:bodyPr spcFirstLastPara="1" wrap="square" lIns="91425" tIns="91425" rIns="91425" bIns="91425" anchor="t" anchorCtr="0">
+            <a:noAutofit/>
+          </a:bodyPr>
+          <a:lstStyle/>
+          <a:p>
+            <a:pPr marL="457200" lvl="0" indent="0" algn="l" rtl="0">
+              <a:lnSpc>
+                <a:spcPct val="115000"/>
+              </a:lnSpc>
+              <a:spcBef>
+                <a:spcPts val="0"/>
+              </a:spcBef>
+              <a:spcAft>
+                <a:spcPts val="0"/>
+              </a:spcAft>
+              <a:buNone/>
+            </a:pPr>
+            <a:endParaRPr/>
+          </a:p>
+        </p:txBody>
+      </p:sp>
+    </p:spTree>
+    <p:extLst>
+      <p:ext uri="{BB962C8B-B14F-4D97-AF65-F5344CB8AC3E}">
+        <p14:creationId xmlns:p14="http://schemas.microsoft.com/office/powerpoint/2010/main" val="1099141733"/>
+      </p:ext>
+    </p:extLst>
+  </p:cSld>
+  <p:clrMapOvr>
+    <a:masterClrMapping/>
+  </p:clrMapOvr>
+</p:notes>
+</file>
+
+<file path=ppt/notesSlides/notesSlide11.xml><?xml version="1.0" encoding="utf-8"?>
+<p:notes xmlns:a="http://schemas.openxmlformats.org/drawingml/2006/main" xmlns:r="http://schemas.openxmlformats.org/officeDocument/2006/relationships" xmlns:p="http://schemas.openxmlformats.org/presentationml/2006/main" showMasterSp="0" showMasterPhAnim="0">
+  <p:cSld>
+    <p:spTree>
+      <p:nvGrpSpPr>
         <p:cNvPr id="1" name="Shape 65">
           <a:extLst>
             <a:ext uri="{FF2B5EF4-FFF2-40B4-BE49-F238E27FC236}">
@@ -3493,7 +3845,7 @@
 </p:notes>
 </file>
 
-<file path=ppt/notesSlides/notesSlide11.xml><?xml version="1.0" encoding="utf-8"?>
+<file path=ppt/notesSlides/notesSlide12.xml><?xml version="1.0" encoding="utf-8"?>
 <p:notes xmlns:a="http://schemas.openxmlformats.org/drawingml/2006/main" xmlns:r="http://schemas.openxmlformats.org/officeDocument/2006/relationships" xmlns:p="http://schemas.openxmlformats.org/presentationml/2006/main" showMasterSp="0" showMasterPhAnim="0">
   <p:cSld>
     <p:spTree>
@@ -3620,7 +3972,7 @@
 </p:notes>
 </file>
 
-<file path=ppt/notesSlides/notesSlide12.xml><?xml version="1.0" encoding="utf-8"?>
+<file path=ppt/notesSlides/notesSlide13.xml><?xml version="1.0" encoding="utf-8"?>
 <p:notes xmlns:a="http://schemas.openxmlformats.org/drawingml/2006/main" xmlns:r="http://schemas.openxmlformats.org/officeDocument/2006/relationships" xmlns:p="http://schemas.openxmlformats.org/presentationml/2006/main" showMasterSp="0" showMasterPhAnim="0">
   <p:cSld>
     <p:spTree>
@@ -3765,7 +4117,7 @@
 </p:notes>
 </file>
 
-<file path=ppt/notesSlides/notesSlide13.xml><?xml version="1.0" encoding="utf-8"?>
+<file path=ppt/notesSlides/notesSlide14.xml><?xml version="1.0" encoding="utf-8"?>
 <p:notes xmlns:a="http://schemas.openxmlformats.org/drawingml/2006/main" xmlns:r="http://schemas.openxmlformats.org/officeDocument/2006/relationships" xmlns:p="http://schemas.openxmlformats.org/presentationml/2006/main" showMasterSp="0" showMasterPhAnim="0">
   <p:cSld>
     <p:spTree>
@@ -3910,7 +4262,7 @@
 </p:notes>
 </file>
 
-<file path=ppt/notesSlides/notesSlide14.xml><?xml version="1.0" encoding="utf-8"?>
+<file path=ppt/notesSlides/notesSlide15.xml><?xml version="1.0" encoding="utf-8"?>
 <p:notes xmlns:a="http://schemas.openxmlformats.org/drawingml/2006/main" xmlns:r="http://schemas.openxmlformats.org/officeDocument/2006/relationships" xmlns:p="http://schemas.openxmlformats.org/presentationml/2006/main" showMasterSp="0" showMasterPhAnim="0">
   <p:cSld>
     <p:spTree>
@@ -4055,7 +4407,7 @@
 </p:notes>
 </file>
 
-<file path=ppt/notesSlides/notesSlide15.xml><?xml version="1.0" encoding="utf-8"?>
+<file path=ppt/notesSlides/notesSlide16.xml><?xml version="1.0" encoding="utf-8"?>
 <p:notes xmlns:a="http://schemas.openxmlformats.org/drawingml/2006/main" xmlns:r="http://schemas.openxmlformats.org/officeDocument/2006/relationships" xmlns:p="http://schemas.openxmlformats.org/presentationml/2006/main" showMasterSp="0" showMasterPhAnim="0">
   <p:cSld>
     <p:spTree>
@@ -4200,7 +4552,7 @@
 </p:notes>
 </file>
 
-<file path=ppt/notesSlides/notesSlide16.xml><?xml version="1.0" encoding="utf-8"?>
+<file path=ppt/notesSlides/notesSlide17.xml><?xml version="1.0" encoding="utf-8"?>
 <p:notes xmlns:a="http://schemas.openxmlformats.org/drawingml/2006/main" xmlns:r="http://schemas.openxmlformats.org/officeDocument/2006/relationships" xmlns:p="http://schemas.openxmlformats.org/presentationml/2006/main" showMasterSp="0" showMasterPhAnim="0">
   <p:cSld>
     <p:spTree>
@@ -4445,6 +4797,128 @@
 </file>
 
 <file path=ppt/notesSlides/notesSlide3.xml><?xml version="1.0" encoding="utf-8"?>
+<p:notes xmlns:a="http://schemas.openxmlformats.org/drawingml/2006/main" xmlns:r="http://schemas.openxmlformats.org/officeDocument/2006/relationships" xmlns:p="http://schemas.openxmlformats.org/presentationml/2006/main" showMasterSp="0" showMasterPhAnim="0">
+  <p:cSld>
+    <p:spTree>
+      <p:nvGrpSpPr>
+        <p:cNvPr id="1" name="Shape 65"/>
+        <p:cNvGrpSpPr/>
+        <p:nvPr/>
+      </p:nvGrpSpPr>
+      <p:grpSpPr>
+        <a:xfrm>
+          <a:off x="0" y="0"/>
+          <a:ext cx="0" cy="0"/>
+          <a:chOff x="0" y="0"/>
+          <a:chExt cx="0" cy="0"/>
+        </a:xfrm>
+      </p:grpSpPr>
+      <p:sp>
+        <p:nvSpPr>
+          <p:cNvPr id="66" name="Google Shape;66;p3:notes"/>
+          <p:cNvSpPr>
+            <a:spLocks noGrp="1" noRot="1" noChangeAspect="1"/>
+          </p:cNvSpPr>
+          <p:nvPr>
+            <p:ph type="sldImg" idx="2"/>
+          </p:nvPr>
+        </p:nvSpPr>
+        <p:spPr>
+          <a:xfrm>
+            <a:off x="381000" y="685800"/>
+            <a:ext cx="6096000" cy="3429000"/>
+          </a:xfrm>
+          <a:custGeom>
+            <a:avLst/>
+            <a:gdLst/>
+            <a:ahLst/>
+            <a:cxnLst/>
+            <a:rect l="l" t="t" r="r" b="b"/>
+            <a:pathLst>
+              <a:path w="120000" h="120000" extrusionOk="0">
+                <a:moveTo>
+                  <a:pt x="0" y="0"/>
+                </a:moveTo>
+                <a:lnTo>
+                  <a:pt x="120000" y="0"/>
+                </a:lnTo>
+                <a:lnTo>
+                  <a:pt x="120000" y="120000"/>
+                </a:lnTo>
+                <a:lnTo>
+                  <a:pt x="0" y="120000"/>
+                </a:lnTo>
+                <a:close/>
+              </a:path>
+            </a:pathLst>
+          </a:custGeom>
+          <a:noFill/>
+          <a:ln w="9525" cap="flat" cmpd="sng">
+            <a:solidFill>
+              <a:srgbClr val="000000"/>
+            </a:solidFill>
+            <a:prstDash val="solid"/>
+            <a:round/>
+            <a:headEnd type="none" w="sm" len="sm"/>
+            <a:tailEnd type="none" w="sm" len="sm"/>
+          </a:ln>
+        </p:spPr>
+      </p:sp>
+      <p:sp>
+        <p:nvSpPr>
+          <p:cNvPr id="67" name="Google Shape;67;p3:notes"/>
+          <p:cNvSpPr txBox="1">
+            <a:spLocks noGrp="1"/>
+          </p:cNvSpPr>
+          <p:nvPr>
+            <p:ph type="body" idx="1"/>
+          </p:nvPr>
+        </p:nvSpPr>
+        <p:spPr>
+          <a:xfrm>
+            <a:off x="685800" y="4343400"/>
+            <a:ext cx="5486400" cy="4114800"/>
+          </a:xfrm>
+          <a:prstGeom prst="rect">
+            <a:avLst/>
+          </a:prstGeom>
+          <a:noFill/>
+          <a:ln>
+            <a:noFill/>
+          </a:ln>
+        </p:spPr>
+        <p:txBody>
+          <a:bodyPr spcFirstLastPara="1" wrap="square" lIns="91425" tIns="91425" rIns="91425" bIns="91425" anchor="t" anchorCtr="0">
+            <a:noAutofit/>
+          </a:bodyPr>
+          <a:lstStyle/>
+          <a:p>
+            <a:pPr marL="0" lvl="0" indent="0" algn="l" rtl="0">
+              <a:lnSpc>
+                <a:spcPct val="100000"/>
+              </a:lnSpc>
+              <a:spcBef>
+                <a:spcPts val="0"/>
+              </a:spcBef>
+              <a:spcAft>
+                <a:spcPts val="0"/>
+              </a:spcAft>
+              <a:buSzPts val="1100"/>
+              <a:buNone/>
+            </a:pPr>
+            <a:endParaRPr/>
+          </a:p>
+        </p:txBody>
+      </p:sp>
+    </p:spTree>
+  </p:cSld>
+  <p:clrMapOvr>
+    <a:masterClrMapping/>
+  </p:clrMapOvr>
+</p:notes>
+</file>
+
+<file path=ppt/notesSlides/notesSlide4.xml><?xml version="1.0" encoding="utf-8"?>
 <p:notes xmlns:a="http://schemas.openxmlformats.org/drawingml/2006/main" xmlns:r="http://schemas.openxmlformats.org/officeDocument/2006/relationships" xmlns:p="http://schemas.openxmlformats.org/presentationml/2006/main" showMasterSp="0" showMasterPhAnim="0">
   <p:cSld>
     <p:spTree>
@@ -4589,7 +5063,7 @@
 </p:notes>
 </file>
 
-<file path=ppt/notesSlides/notesSlide4.xml><?xml version="1.0" encoding="utf-8"?>
+<file path=ppt/notesSlides/notesSlide5.xml><?xml version="1.0" encoding="utf-8"?>
 <p:notes xmlns:a="http://schemas.openxmlformats.org/drawingml/2006/main" xmlns:r="http://schemas.openxmlformats.org/officeDocument/2006/relationships" xmlns:p="http://schemas.openxmlformats.org/presentationml/2006/main" showMasterSp="0" showMasterPhAnim="0">
   <p:cSld>
     <p:spTree>
@@ -4900,7 +5374,7 @@
 </p:notes>
 </file>
 
-<file path=ppt/notesSlides/notesSlide5.xml><?xml version="1.0" encoding="utf-8"?>
+<file path=ppt/notesSlides/notesSlide6.xml><?xml version="1.0" encoding="utf-8"?>
 <p:notes xmlns:a="http://schemas.openxmlformats.org/drawingml/2006/main" xmlns:r="http://schemas.openxmlformats.org/officeDocument/2006/relationships" xmlns:p="http://schemas.openxmlformats.org/presentationml/2006/main" showMasterSp="0" showMasterPhAnim="0">
   <p:cSld>
     <p:spTree>
@@ -5273,7 +5747,7 @@
 </p:notes>
 </file>
 
-<file path=ppt/notesSlides/notesSlide6.xml><?xml version="1.0" encoding="utf-8"?>
+<file path=ppt/notesSlides/notesSlide7.xml><?xml version="1.0" encoding="utf-8"?>
 <p:notes xmlns:a="http://schemas.openxmlformats.org/drawingml/2006/main" xmlns:r="http://schemas.openxmlformats.org/officeDocument/2006/relationships" xmlns:p="http://schemas.openxmlformats.org/presentationml/2006/main" showMasterSp="0" showMasterPhAnim="0">
   <p:cSld>
     <p:spTree>
@@ -5434,7 +5908,7 @@
 </p:notes>
 </file>
 
-<file path=ppt/notesSlides/notesSlide7.xml><?xml version="1.0" encoding="utf-8"?>
+<file path=ppt/notesSlides/notesSlide8.xml><?xml version="1.0" encoding="utf-8"?>
 <p:notes xmlns:a="http://schemas.openxmlformats.org/drawingml/2006/main" xmlns:r="http://schemas.openxmlformats.org/officeDocument/2006/relationships" xmlns:p="http://schemas.openxmlformats.org/presentationml/2006/main" showMasterSp="0" showMasterPhAnim="0">
   <p:cSld>
     <p:spTree>
@@ -5618,7 +6092,7 @@
 </p:notes>
 </file>
 
-<file path=ppt/notesSlides/notesSlide8.xml><?xml version="1.0" encoding="utf-8"?>
+<file path=ppt/notesSlides/notesSlide9.xml><?xml version="1.0" encoding="utf-8"?>
 <p:notes xmlns:a="http://schemas.openxmlformats.org/drawingml/2006/main" xmlns:r="http://schemas.openxmlformats.org/officeDocument/2006/relationships" xmlns:p="http://schemas.openxmlformats.org/presentationml/2006/main" showMasterSp="0" showMasterPhAnim="0">
   <p:cSld>
     <p:spTree>
@@ -5753,150 +6227,6 @@
     <p:extLst>
       <p:ext uri="{BB962C8B-B14F-4D97-AF65-F5344CB8AC3E}">
         <p14:creationId xmlns:p14="http://schemas.microsoft.com/office/powerpoint/2010/main" val="2501015266"/>
-      </p:ext>
-    </p:extLst>
-  </p:cSld>
-  <p:clrMapOvr>
-    <a:masterClrMapping/>
-  </p:clrMapOvr>
-</p:notes>
-</file>
-
-<file path=ppt/notesSlides/notesSlide9.xml><?xml version="1.0" encoding="utf-8"?>
-<p:notes xmlns:a="http://schemas.openxmlformats.org/drawingml/2006/main" xmlns:r="http://schemas.openxmlformats.org/officeDocument/2006/relationships" xmlns:p="http://schemas.openxmlformats.org/presentationml/2006/main" showMasterSp="0" showMasterPhAnim="0">
-  <p:cSld>
-    <p:spTree>
-      <p:nvGrpSpPr>
-        <p:cNvPr id="1" name="Shape 174">
-          <a:extLst>
-            <a:ext uri="{FF2B5EF4-FFF2-40B4-BE49-F238E27FC236}">
-              <a16:creationId xmlns:a16="http://schemas.microsoft.com/office/drawing/2014/main" id="{8422C4C4-ACE3-1D1D-6CE8-F4388EDA18CD}"/>
-            </a:ext>
-          </a:extLst>
-        </p:cNvPr>
-        <p:cNvGrpSpPr/>
-        <p:nvPr/>
-      </p:nvGrpSpPr>
-      <p:grpSpPr>
-        <a:xfrm>
-          <a:off x="0" y="0"/>
-          <a:ext cx="0" cy="0"/>
-          <a:chOff x="0" y="0"/>
-          <a:chExt cx="0" cy="0"/>
-        </a:xfrm>
-      </p:grpSpPr>
-      <p:sp>
-        <p:nvSpPr>
-          <p:cNvPr id="175" name="Google Shape;175;p8:notes">
-            <a:extLst>
-              <a:ext uri="{FF2B5EF4-FFF2-40B4-BE49-F238E27FC236}">
-                <a16:creationId xmlns:a16="http://schemas.microsoft.com/office/drawing/2014/main" id="{EDA65F32-2626-DA27-4EFA-F86C12B29A9F}"/>
-              </a:ext>
-            </a:extLst>
-          </p:cNvPr>
-          <p:cNvSpPr>
-            <a:spLocks noGrp="1" noRot="1" noChangeAspect="1"/>
-          </p:cNvSpPr>
-          <p:nvPr>
-            <p:ph type="sldImg" idx="2"/>
-          </p:nvPr>
-        </p:nvSpPr>
-        <p:spPr>
-          <a:xfrm>
-            <a:off x="381000" y="685800"/>
-            <a:ext cx="6096000" cy="3429000"/>
-          </a:xfrm>
-          <a:custGeom>
-            <a:avLst/>
-            <a:gdLst/>
-            <a:ahLst/>
-            <a:cxnLst/>
-            <a:rect l="l" t="t" r="r" b="b"/>
-            <a:pathLst>
-              <a:path w="120000" h="120000" extrusionOk="0">
-                <a:moveTo>
-                  <a:pt x="0" y="0"/>
-                </a:moveTo>
-                <a:lnTo>
-                  <a:pt x="120000" y="0"/>
-                </a:lnTo>
-                <a:lnTo>
-                  <a:pt x="120000" y="120000"/>
-                </a:lnTo>
-                <a:lnTo>
-                  <a:pt x="0" y="120000"/>
-                </a:lnTo>
-                <a:close/>
-              </a:path>
-            </a:pathLst>
-          </a:custGeom>
-          <a:noFill/>
-          <a:ln w="9525" cap="flat" cmpd="sng">
-            <a:solidFill>
-              <a:srgbClr val="000000"/>
-            </a:solidFill>
-            <a:prstDash val="solid"/>
-            <a:round/>
-            <a:headEnd type="none" w="sm" len="sm"/>
-            <a:tailEnd type="none" w="sm" len="sm"/>
-          </a:ln>
-        </p:spPr>
-      </p:sp>
-      <p:sp>
-        <p:nvSpPr>
-          <p:cNvPr id="176" name="Google Shape;176;p8:notes">
-            <a:extLst>
-              <a:ext uri="{FF2B5EF4-FFF2-40B4-BE49-F238E27FC236}">
-                <a16:creationId xmlns:a16="http://schemas.microsoft.com/office/drawing/2014/main" id="{5B160CE0-54E8-5F62-A7F9-C0C3C0BE0FA3}"/>
-              </a:ext>
-            </a:extLst>
-          </p:cNvPr>
-          <p:cNvSpPr txBox="1">
-            <a:spLocks noGrp="1"/>
-          </p:cNvSpPr>
-          <p:nvPr>
-            <p:ph type="body" idx="1"/>
-          </p:nvPr>
-        </p:nvSpPr>
-        <p:spPr>
-          <a:xfrm>
-            <a:off x="685800" y="4343400"/>
-            <a:ext cx="5486400" cy="4114800"/>
-          </a:xfrm>
-          <a:prstGeom prst="rect">
-            <a:avLst/>
-          </a:prstGeom>
-          <a:noFill/>
-          <a:ln>
-            <a:noFill/>
-          </a:ln>
-        </p:spPr>
-        <p:txBody>
-          <a:bodyPr spcFirstLastPara="1" wrap="square" lIns="91425" tIns="91425" rIns="91425" bIns="91425" anchor="t" anchorCtr="0">
-            <a:noAutofit/>
-          </a:bodyPr>
-          <a:lstStyle/>
-          <a:p>
-            <a:pPr marL="457200" lvl="0" indent="0" algn="l" rtl="0">
-              <a:lnSpc>
-                <a:spcPct val="115000"/>
-              </a:lnSpc>
-              <a:spcBef>
-                <a:spcPts val="0"/>
-              </a:spcBef>
-              <a:spcAft>
-                <a:spcPts val="0"/>
-              </a:spcAft>
-              <a:buNone/>
-            </a:pPr>
-            <a:endParaRPr/>
-          </a:p>
-        </p:txBody>
-      </p:sp>
-    </p:spTree>
-    <p:extLst>
-      <p:ext uri="{BB962C8B-B14F-4D97-AF65-F5344CB8AC3E}">
-        <p14:creationId xmlns:p14="http://schemas.microsoft.com/office/powerpoint/2010/main" val="1099141733"/>
       </p:ext>
     </p:extLst>
   </p:cSld>
@@ -18690,6 +19020,594 @@
   <p:cSld>
     <p:spTree>
       <p:nvGrpSpPr>
+        <p:cNvPr id="1" name="Shape 177">
+          <a:extLst>
+            <a:ext uri="{FF2B5EF4-FFF2-40B4-BE49-F238E27FC236}">
+              <a16:creationId xmlns:a16="http://schemas.microsoft.com/office/drawing/2014/main" id="{C0DE9A44-9CF9-E733-9B6A-0F7633CFBC85}"/>
+            </a:ext>
+          </a:extLst>
+        </p:cNvPr>
+        <p:cNvGrpSpPr/>
+        <p:nvPr/>
+      </p:nvGrpSpPr>
+      <p:grpSpPr>
+        <a:xfrm>
+          <a:off x="0" y="0"/>
+          <a:ext cx="0" cy="0"/>
+          <a:chOff x="0" y="0"/>
+          <a:chExt cx="0" cy="0"/>
+        </a:xfrm>
+      </p:grpSpPr>
+      <p:sp>
+        <p:nvSpPr>
+          <p:cNvPr id="178" name="Google Shape;178;p8">
+            <a:extLst>
+              <a:ext uri="{FF2B5EF4-FFF2-40B4-BE49-F238E27FC236}">
+                <a16:creationId xmlns:a16="http://schemas.microsoft.com/office/drawing/2014/main" id="{1DE246AA-5B17-33A5-5EF2-125E8EA81EFC}"/>
+              </a:ext>
+            </a:extLst>
+          </p:cNvPr>
+          <p:cNvSpPr txBox="1">
+            <a:spLocks noGrp="1"/>
+          </p:cNvSpPr>
+          <p:nvPr>
+            <p:ph type="ctrTitle" idx="4294967295"/>
+          </p:nvPr>
+        </p:nvSpPr>
+        <p:spPr>
+          <a:xfrm>
+            <a:off x="1192664" y="403309"/>
+            <a:ext cx="5315100" cy="533100"/>
+          </a:xfrm>
+          <a:prstGeom prst="rect">
+            <a:avLst/>
+          </a:prstGeom>
+          <a:noFill/>
+          <a:ln>
+            <a:noFill/>
+          </a:ln>
+        </p:spPr>
+        <p:txBody>
+          <a:bodyPr spcFirstLastPara="1" wrap="square" lIns="91425" tIns="91425" rIns="91425" bIns="91425" anchor="t" anchorCtr="0">
+            <a:noAutofit/>
+          </a:bodyPr>
+          <a:lstStyle/>
+          <a:p>
+            <a:r>
+              <a:rPr lang="fr-FR" sz="2500" dirty="0">
+                <a:solidFill>
+                  <a:srgbClr val="0E3449"/>
+                </a:solidFill>
+                <a:latin typeface="Inter SemiBold"/>
+                <a:ea typeface="Inter SemiBold"/>
+              </a:rPr>
+              <a:t>Résultats du modèle</a:t>
+            </a:r>
+            <a:endParaRPr sz="2500" dirty="0">
+              <a:solidFill>
+                <a:srgbClr val="0E3449"/>
+              </a:solidFill>
+              <a:latin typeface="Inter SemiBold"/>
+              <a:ea typeface="Inter SemiBold"/>
+              <a:sym typeface="Inter SemiBold"/>
+            </a:endParaRPr>
+          </a:p>
+        </p:txBody>
+      </p:sp>
+      <p:pic>
+        <p:nvPicPr>
+          <p:cNvPr id="179" name="Google Shape;179;p8">
+            <a:extLst>
+              <a:ext uri="{FF2B5EF4-FFF2-40B4-BE49-F238E27FC236}">
+                <a16:creationId xmlns:a16="http://schemas.microsoft.com/office/drawing/2014/main" id="{9E380506-1D6F-31B2-517B-D06D18BF62B0}"/>
+              </a:ext>
+            </a:extLst>
+          </p:cNvPr>
+          <p:cNvPicPr preferRelativeResize="0"/>
+          <p:nvPr/>
+        </p:nvPicPr>
+        <p:blipFill rotWithShape="1">
+          <a:blip r:embed="rId3">
+            <a:alphaModFix/>
+          </a:blip>
+          <a:srcRect/>
+          <a:stretch/>
+        </p:blipFill>
+        <p:spPr>
+          <a:xfrm>
+            <a:off x="463375" y="482852"/>
+            <a:ext cx="576900" cy="385904"/>
+          </a:xfrm>
+          <a:prstGeom prst="rect">
+            <a:avLst/>
+          </a:prstGeom>
+          <a:noFill/>
+          <a:ln>
+            <a:noFill/>
+          </a:ln>
+        </p:spPr>
+      </p:pic>
+      <p:sp>
+        <p:nvSpPr>
+          <p:cNvPr id="180" name="Google Shape;180;p8">
+            <a:extLst>
+              <a:ext uri="{FF2B5EF4-FFF2-40B4-BE49-F238E27FC236}">
+                <a16:creationId xmlns:a16="http://schemas.microsoft.com/office/drawing/2014/main" id="{B33B5780-2AE1-5BF1-2FBD-D258D73D14AD}"/>
+              </a:ext>
+            </a:extLst>
+          </p:cNvPr>
+          <p:cNvSpPr/>
+          <p:nvPr/>
+        </p:nvSpPr>
+        <p:spPr>
+          <a:xfrm>
+            <a:off x="10225" y="4892025"/>
+            <a:ext cx="9144000" cy="251400"/>
+          </a:xfrm>
+          <a:prstGeom prst="rect">
+            <a:avLst/>
+          </a:prstGeom>
+          <a:solidFill>
+            <a:srgbClr val="C3FFFC"/>
+          </a:solidFill>
+          <a:ln>
+            <a:noFill/>
+          </a:ln>
+        </p:spPr>
+        <p:txBody>
+          <a:bodyPr spcFirstLastPara="1" wrap="square" lIns="91425" tIns="91425" rIns="91425" bIns="91425" anchor="ctr" anchorCtr="0">
+            <a:noAutofit/>
+          </a:bodyPr>
+          <a:lstStyle/>
+          <a:p>
+            <a:pPr marL="0" marR="0" lvl="0" indent="0" algn="l" rtl="0">
+              <a:lnSpc>
+                <a:spcPct val="100000"/>
+              </a:lnSpc>
+              <a:spcBef>
+                <a:spcPts val="0"/>
+              </a:spcBef>
+              <a:spcAft>
+                <a:spcPts val="0"/>
+              </a:spcAft>
+              <a:buClr>
+                <a:srgbClr val="000000"/>
+              </a:buClr>
+              <a:buSzPts val="1400"/>
+              <a:buFont typeface="Arial"/>
+              <a:buNone/>
+            </a:pPr>
+            <a:endParaRPr sz="1400" b="0" i="0" u="none" strike="noStrike" cap="none">
+              <a:solidFill>
+                <a:srgbClr val="000000"/>
+              </a:solidFill>
+              <a:latin typeface="Arial"/>
+              <a:ea typeface="Arial"/>
+              <a:cs typeface="Arial"/>
+              <a:sym typeface="Arial"/>
+            </a:endParaRPr>
+          </a:p>
+        </p:txBody>
+      </p:sp>
+      <p:sp>
+        <p:nvSpPr>
+          <p:cNvPr id="2" name="Google Shape;178;p8">
+            <a:extLst>
+              <a:ext uri="{FF2B5EF4-FFF2-40B4-BE49-F238E27FC236}">
+                <a16:creationId xmlns:a16="http://schemas.microsoft.com/office/drawing/2014/main" id="{010F41C2-7624-67DE-B008-1F392C11A870}"/>
+              </a:ext>
+            </a:extLst>
+          </p:cNvPr>
+          <p:cNvSpPr txBox="1">
+            <a:spLocks/>
+          </p:cNvSpPr>
+          <p:nvPr/>
+        </p:nvSpPr>
+        <p:spPr>
+          <a:xfrm>
+            <a:off x="1192664" y="779179"/>
+            <a:ext cx="5315100" cy="375870"/>
+          </a:xfrm>
+          <a:prstGeom prst="rect">
+            <a:avLst/>
+          </a:prstGeom>
+          <a:noFill/>
+          <a:ln>
+            <a:noFill/>
+          </a:ln>
+        </p:spPr>
+        <p:txBody>
+          <a:bodyPr spcFirstLastPara="1" wrap="square" lIns="91425" tIns="91425" rIns="91425" bIns="91425" anchor="t" anchorCtr="0">
+            <a:noAutofit/>
+          </a:bodyPr>
+          <a:lstStyle>
+            <a:defPPr marR="0" lvl="0" algn="l" rtl="0">
+              <a:lnSpc>
+                <a:spcPct val="100000"/>
+              </a:lnSpc>
+              <a:spcBef>
+                <a:spcPts val="0"/>
+              </a:spcBef>
+              <a:spcAft>
+                <a:spcPts val="0"/>
+              </a:spcAft>
+            </a:defPPr>
+            <a:lvl1pPr marR="0" lvl="0" algn="l" rtl="0">
+              <a:lnSpc>
+                <a:spcPct val="100000"/>
+              </a:lnSpc>
+              <a:spcBef>
+                <a:spcPts val="0"/>
+              </a:spcBef>
+              <a:spcAft>
+                <a:spcPts val="0"/>
+              </a:spcAft>
+              <a:buClr>
+                <a:schemeClr val="dk1"/>
+              </a:buClr>
+              <a:buSzPts val="2800"/>
+              <a:buFont typeface="Arial"/>
+              <a:buNone/>
+              <a:defRPr sz="2800" b="0" i="0" u="none" strike="noStrike" cap="none">
+                <a:solidFill>
+                  <a:schemeClr val="dk1"/>
+                </a:solidFill>
+                <a:latin typeface="Arial"/>
+                <a:ea typeface="Arial"/>
+                <a:cs typeface="Arial"/>
+                <a:sym typeface="Arial"/>
+              </a:defRPr>
+            </a:lvl1pPr>
+            <a:lvl2pPr marR="0" lvl="1" algn="l" rtl="0">
+              <a:lnSpc>
+                <a:spcPct val="100000"/>
+              </a:lnSpc>
+              <a:spcBef>
+                <a:spcPts val="0"/>
+              </a:spcBef>
+              <a:spcAft>
+                <a:spcPts val="0"/>
+              </a:spcAft>
+              <a:buClr>
+                <a:schemeClr val="dk1"/>
+              </a:buClr>
+              <a:buSzPts val="2800"/>
+              <a:buFont typeface="Arial"/>
+              <a:buNone/>
+              <a:defRPr sz="2800" b="0" i="0" u="none" strike="noStrike" cap="none">
+                <a:solidFill>
+                  <a:schemeClr val="dk1"/>
+                </a:solidFill>
+                <a:latin typeface="Arial"/>
+                <a:ea typeface="Arial"/>
+                <a:cs typeface="Arial"/>
+                <a:sym typeface="Arial"/>
+              </a:defRPr>
+            </a:lvl2pPr>
+            <a:lvl3pPr marR="0" lvl="2" algn="l" rtl="0">
+              <a:lnSpc>
+                <a:spcPct val="100000"/>
+              </a:lnSpc>
+              <a:spcBef>
+                <a:spcPts val="0"/>
+              </a:spcBef>
+              <a:spcAft>
+                <a:spcPts val="0"/>
+              </a:spcAft>
+              <a:buClr>
+                <a:schemeClr val="dk1"/>
+              </a:buClr>
+              <a:buSzPts val="2800"/>
+              <a:buFont typeface="Arial"/>
+              <a:buNone/>
+              <a:defRPr sz="2800" b="0" i="0" u="none" strike="noStrike" cap="none">
+                <a:solidFill>
+                  <a:schemeClr val="dk1"/>
+                </a:solidFill>
+                <a:latin typeface="Arial"/>
+                <a:ea typeface="Arial"/>
+                <a:cs typeface="Arial"/>
+                <a:sym typeface="Arial"/>
+              </a:defRPr>
+            </a:lvl3pPr>
+            <a:lvl4pPr marR="0" lvl="3" algn="l" rtl="0">
+              <a:lnSpc>
+                <a:spcPct val="100000"/>
+              </a:lnSpc>
+              <a:spcBef>
+                <a:spcPts val="0"/>
+              </a:spcBef>
+              <a:spcAft>
+                <a:spcPts val="0"/>
+              </a:spcAft>
+              <a:buClr>
+                <a:schemeClr val="dk1"/>
+              </a:buClr>
+              <a:buSzPts val="2800"/>
+              <a:buFont typeface="Arial"/>
+              <a:buNone/>
+              <a:defRPr sz="2800" b="0" i="0" u="none" strike="noStrike" cap="none">
+                <a:solidFill>
+                  <a:schemeClr val="dk1"/>
+                </a:solidFill>
+                <a:latin typeface="Arial"/>
+                <a:ea typeface="Arial"/>
+                <a:cs typeface="Arial"/>
+                <a:sym typeface="Arial"/>
+              </a:defRPr>
+            </a:lvl4pPr>
+            <a:lvl5pPr marR="0" lvl="4" algn="l" rtl="0">
+              <a:lnSpc>
+                <a:spcPct val="100000"/>
+              </a:lnSpc>
+              <a:spcBef>
+                <a:spcPts val="0"/>
+              </a:spcBef>
+              <a:spcAft>
+                <a:spcPts val="0"/>
+              </a:spcAft>
+              <a:buClr>
+                <a:schemeClr val="dk1"/>
+              </a:buClr>
+              <a:buSzPts val="2800"/>
+              <a:buFont typeface="Arial"/>
+              <a:buNone/>
+              <a:defRPr sz="2800" b="0" i="0" u="none" strike="noStrike" cap="none">
+                <a:solidFill>
+                  <a:schemeClr val="dk1"/>
+                </a:solidFill>
+                <a:latin typeface="Arial"/>
+                <a:ea typeface="Arial"/>
+                <a:cs typeface="Arial"/>
+                <a:sym typeface="Arial"/>
+              </a:defRPr>
+            </a:lvl5pPr>
+            <a:lvl6pPr marR="0" lvl="5" algn="l" rtl="0">
+              <a:lnSpc>
+                <a:spcPct val="100000"/>
+              </a:lnSpc>
+              <a:spcBef>
+                <a:spcPts val="0"/>
+              </a:spcBef>
+              <a:spcAft>
+                <a:spcPts val="0"/>
+              </a:spcAft>
+              <a:buClr>
+                <a:schemeClr val="dk1"/>
+              </a:buClr>
+              <a:buSzPts val="2800"/>
+              <a:buFont typeface="Arial"/>
+              <a:buNone/>
+              <a:defRPr sz="2800" b="0" i="0" u="none" strike="noStrike" cap="none">
+                <a:solidFill>
+                  <a:schemeClr val="dk1"/>
+                </a:solidFill>
+                <a:latin typeface="Arial"/>
+                <a:ea typeface="Arial"/>
+                <a:cs typeface="Arial"/>
+                <a:sym typeface="Arial"/>
+              </a:defRPr>
+            </a:lvl6pPr>
+            <a:lvl7pPr marR="0" lvl="6" algn="l" rtl="0">
+              <a:lnSpc>
+                <a:spcPct val="100000"/>
+              </a:lnSpc>
+              <a:spcBef>
+                <a:spcPts val="0"/>
+              </a:spcBef>
+              <a:spcAft>
+                <a:spcPts val="0"/>
+              </a:spcAft>
+              <a:buClr>
+                <a:schemeClr val="dk1"/>
+              </a:buClr>
+              <a:buSzPts val="2800"/>
+              <a:buFont typeface="Arial"/>
+              <a:buNone/>
+              <a:defRPr sz="2800" b="0" i="0" u="none" strike="noStrike" cap="none">
+                <a:solidFill>
+                  <a:schemeClr val="dk1"/>
+                </a:solidFill>
+                <a:latin typeface="Arial"/>
+                <a:ea typeface="Arial"/>
+                <a:cs typeface="Arial"/>
+                <a:sym typeface="Arial"/>
+              </a:defRPr>
+            </a:lvl7pPr>
+            <a:lvl8pPr marR="0" lvl="7" algn="l" rtl="0">
+              <a:lnSpc>
+                <a:spcPct val="100000"/>
+              </a:lnSpc>
+              <a:spcBef>
+                <a:spcPts val="0"/>
+              </a:spcBef>
+              <a:spcAft>
+                <a:spcPts val="0"/>
+              </a:spcAft>
+              <a:buClr>
+                <a:schemeClr val="dk1"/>
+              </a:buClr>
+              <a:buSzPts val="2800"/>
+              <a:buFont typeface="Arial"/>
+              <a:buNone/>
+              <a:defRPr sz="2800" b="0" i="0" u="none" strike="noStrike" cap="none">
+                <a:solidFill>
+                  <a:schemeClr val="dk1"/>
+                </a:solidFill>
+                <a:latin typeface="Arial"/>
+                <a:ea typeface="Arial"/>
+                <a:cs typeface="Arial"/>
+                <a:sym typeface="Arial"/>
+              </a:defRPr>
+            </a:lvl8pPr>
+            <a:lvl9pPr marR="0" lvl="8" algn="l" rtl="0">
+              <a:lnSpc>
+                <a:spcPct val="100000"/>
+              </a:lnSpc>
+              <a:spcBef>
+                <a:spcPts val="0"/>
+              </a:spcBef>
+              <a:spcAft>
+                <a:spcPts val="0"/>
+              </a:spcAft>
+              <a:buClr>
+                <a:schemeClr val="dk1"/>
+              </a:buClr>
+              <a:buSzPts val="2800"/>
+              <a:buFont typeface="Arial"/>
+              <a:buNone/>
+              <a:defRPr sz="2800" b="0" i="0" u="none" strike="noStrike" cap="none">
+                <a:solidFill>
+                  <a:schemeClr val="dk1"/>
+                </a:solidFill>
+                <a:latin typeface="Arial"/>
+                <a:ea typeface="Arial"/>
+                <a:cs typeface="Arial"/>
+                <a:sym typeface="Arial"/>
+              </a:defRPr>
+            </a:lvl9pPr>
+          </a:lstStyle>
+          <a:p>
+            <a:r>
+              <a:rPr lang="fr-FR" sz="1400" b="1" dirty="0">
+                <a:solidFill>
+                  <a:srgbClr val="0E3449"/>
+                </a:solidFill>
+                <a:latin typeface="Inter SemiBold"/>
+                <a:ea typeface="Inter SemiBold"/>
+              </a:rPr>
+              <a:t>Prévision sur 3 jours</a:t>
+            </a:r>
+            <a:endParaRPr lang="fr-FR" sz="1400" b="1" dirty="0">
+              <a:solidFill>
+                <a:srgbClr val="0E3449"/>
+              </a:solidFill>
+              <a:latin typeface="Inter SemiBold"/>
+              <a:ea typeface="Inter SemiBold"/>
+              <a:sym typeface="Inter SemiBold"/>
+            </a:endParaRPr>
+          </a:p>
+        </p:txBody>
+      </p:sp>
+      <p:sp>
+        <p:nvSpPr>
+          <p:cNvPr id="3" name="Google Shape;181;p8">
+            <a:extLst>
+              <a:ext uri="{FF2B5EF4-FFF2-40B4-BE49-F238E27FC236}">
+                <a16:creationId xmlns:a16="http://schemas.microsoft.com/office/drawing/2014/main" id="{4CE4F7BC-7633-613C-E54B-260F1EA040A9}"/>
+              </a:ext>
+            </a:extLst>
+          </p:cNvPr>
+          <p:cNvSpPr txBox="1">
+            <a:spLocks noGrp="1"/>
+          </p:cNvSpPr>
+          <p:nvPr>
+            <p:ph type="body" idx="1"/>
+          </p:nvPr>
+        </p:nvSpPr>
+        <p:spPr>
+          <a:xfrm>
+            <a:off x="311700" y="1155049"/>
+            <a:ext cx="8520600" cy="3585142"/>
+          </a:xfrm>
+          <a:prstGeom prst="rect">
+            <a:avLst/>
+          </a:prstGeom>
+          <a:noFill/>
+          <a:ln>
+            <a:noFill/>
+          </a:ln>
+        </p:spPr>
+        <p:txBody>
+          <a:bodyPr spcFirstLastPara="1" wrap="square" lIns="91425" tIns="91425" rIns="91425" bIns="91425" anchor="t" anchorCtr="0">
+            <a:noAutofit/>
+          </a:bodyPr>
+          <a:lstStyle/>
+          <a:p>
+            <a:pPr marL="114300" lvl="0" indent="0" algn="l" rtl="0">
+              <a:lnSpc>
+                <a:spcPct val="115000"/>
+              </a:lnSpc>
+              <a:spcBef>
+                <a:spcPts val="0"/>
+              </a:spcBef>
+              <a:spcAft>
+                <a:spcPts val="0"/>
+              </a:spcAft>
+              <a:buSzPts val="1800"/>
+              <a:buNone/>
+            </a:pPr>
+            <a:r>
+              <a:rPr lang="fr-FR" sz="1400" dirty="0" err="1"/>
+              <a:t>wwwww</a:t>
+            </a:r>
+            <a:endParaRPr sz="1400" dirty="0"/>
+          </a:p>
+        </p:txBody>
+      </p:sp>
+      <p:sp>
+        <p:nvSpPr>
+          <p:cNvPr id="4" name="ZoneTexte 3">
+            <a:extLst>
+              <a:ext uri="{FF2B5EF4-FFF2-40B4-BE49-F238E27FC236}">
+                <a16:creationId xmlns:a16="http://schemas.microsoft.com/office/drawing/2014/main" id="{AE6C0F5D-5C4B-4C9E-FDE6-2854D7F6D149}"/>
+              </a:ext>
+            </a:extLst>
+          </p:cNvPr>
+          <p:cNvSpPr txBox="1"/>
+          <p:nvPr/>
+        </p:nvSpPr>
+        <p:spPr>
+          <a:xfrm rot="1388443">
+            <a:off x="4673601" y="2279362"/>
+            <a:ext cx="3244850" cy="584775"/>
+          </a:xfrm>
+          <a:prstGeom prst="rect">
+            <a:avLst/>
+          </a:prstGeom>
+          <a:noFill/>
+          <a:ln>
+            <a:solidFill>
+              <a:srgbClr val="FF0000"/>
+            </a:solidFill>
+          </a:ln>
+        </p:spPr>
+        <p:txBody>
+          <a:bodyPr wrap="square" rtlCol="0">
+            <a:spAutoFit/>
+          </a:bodyPr>
+          <a:lstStyle/>
+          <a:p>
+            <a:pPr algn="ctr"/>
+            <a:r>
+              <a:rPr lang="fr-FR" sz="3200" dirty="0">
+                <a:solidFill>
+                  <a:srgbClr val="FF0000"/>
+                </a:solidFill>
+              </a:rPr>
+              <a:t>A mettre à jour</a:t>
+            </a:r>
+          </a:p>
+        </p:txBody>
+      </p:sp>
+    </p:spTree>
+    <p:extLst>
+      <p:ext uri="{BB962C8B-B14F-4D97-AF65-F5344CB8AC3E}">
+        <p14:creationId xmlns:p14="http://schemas.microsoft.com/office/powerpoint/2010/main" val="3332770"/>
+      </p:ext>
+    </p:extLst>
+  </p:cSld>
+  <p:clrMapOvr>
+    <a:masterClrMapping/>
+  </p:clrMapOvr>
+</p:sld>
+</file>
+
+<file path=ppt/slides/slide11.xml><?xml version="1.0" encoding="utf-8"?>
+<p:sld xmlns:a="http://schemas.openxmlformats.org/drawingml/2006/main" xmlns:r="http://schemas.openxmlformats.org/officeDocument/2006/relationships" xmlns:p="http://schemas.openxmlformats.org/presentationml/2006/main">
+  <p:cSld>
+    <p:spTree>
+      <p:nvGrpSpPr>
         <p:cNvPr id="1" name="Shape 68">
           <a:extLst>
             <a:ext uri="{FF2B5EF4-FFF2-40B4-BE49-F238E27FC236}">
@@ -19755,7 +20673,7 @@
 </p:sld>
 </file>
 
-<file path=ppt/slides/slide11.xml><?xml version="1.0" encoding="utf-8"?>
+<file path=ppt/slides/slide12.xml><?xml version="1.0" encoding="utf-8"?>
 <p:sld xmlns:a="http://schemas.openxmlformats.org/drawingml/2006/main" xmlns:r="http://schemas.openxmlformats.org/officeDocument/2006/relationships" xmlns:p="http://schemas.openxmlformats.org/presentationml/2006/main">
   <p:cSld>
     <p:spTree>
@@ -19889,7 +20807,7 @@
 </p:sld>
 </file>
 
-<file path=ppt/slides/slide12.xml><?xml version="1.0" encoding="utf-8"?>
+<file path=ppt/slides/slide13.xml><?xml version="1.0" encoding="utf-8"?>
 <p:sld xmlns:a="http://schemas.openxmlformats.org/drawingml/2006/main" xmlns:r="http://schemas.openxmlformats.org/officeDocument/2006/relationships" xmlns:p="http://schemas.openxmlformats.org/presentationml/2006/main">
   <p:cSld>
     <p:spTree>
@@ -20227,7 +21145,7 @@
 </p:sld>
 </file>
 
-<file path=ppt/slides/slide13.xml><?xml version="1.0" encoding="utf-8"?>
+<file path=ppt/slides/slide14.xml><?xml version="1.0" encoding="utf-8"?>
 <p:sld xmlns:a="http://schemas.openxmlformats.org/drawingml/2006/main" xmlns:r="http://schemas.openxmlformats.org/officeDocument/2006/relationships" xmlns:p="http://schemas.openxmlformats.org/presentationml/2006/main">
   <p:cSld>
     <p:spTree>
@@ -20939,7 +21857,7 @@
 </p:sld>
 </file>
 
-<file path=ppt/slides/slide14.xml><?xml version="1.0" encoding="utf-8"?>
+<file path=ppt/slides/slide15.xml><?xml version="1.0" encoding="utf-8"?>
 <p:sld xmlns:a="http://schemas.openxmlformats.org/drawingml/2006/main" xmlns:r="http://schemas.openxmlformats.org/officeDocument/2006/relationships" xmlns:p="http://schemas.openxmlformats.org/presentationml/2006/main">
   <p:cSld>
     <p:spTree>
@@ -22463,7 +23381,7 @@
 </p:sld>
 </file>
 
-<file path=ppt/slides/slide15.xml><?xml version="1.0" encoding="utf-8"?>
+<file path=ppt/slides/slide16.xml><?xml version="1.0" encoding="utf-8"?>
 <p:sld xmlns:a="http://schemas.openxmlformats.org/drawingml/2006/main" xmlns:r="http://schemas.openxmlformats.org/officeDocument/2006/relationships" xmlns:p="http://schemas.openxmlformats.org/presentationml/2006/main">
   <p:cSld>
     <p:spTree>
@@ -23638,7 +24556,7 @@
 </p:sld>
 </file>
 
-<file path=ppt/slides/slide16.xml><?xml version="1.0" encoding="utf-8"?>
+<file path=ppt/slides/slide17.xml><?xml version="1.0" encoding="utf-8"?>
 <p:sld xmlns:a="http://schemas.openxmlformats.org/drawingml/2006/main" xmlns:r="http://schemas.openxmlformats.org/officeDocument/2006/relationships" xmlns:p="http://schemas.openxmlformats.org/presentationml/2006/main">
   <p:cSld>
     <p:bg>
@@ -24200,6 +25118,1771 @@
 </file>
 
 <file path=ppt/slides/slide3.xml><?xml version="1.0" encoding="utf-8"?>
+<p:sld xmlns:a="http://schemas.openxmlformats.org/drawingml/2006/main" xmlns:r="http://schemas.openxmlformats.org/officeDocument/2006/relationships" xmlns:p="http://schemas.openxmlformats.org/presentationml/2006/main">
+  <p:cSld>
+    <p:spTree>
+      <p:nvGrpSpPr>
+        <p:cNvPr id="1" name="Shape 68"/>
+        <p:cNvGrpSpPr/>
+        <p:nvPr/>
+      </p:nvGrpSpPr>
+      <p:grpSpPr>
+        <a:xfrm>
+          <a:off x="0" y="0"/>
+          <a:ext cx="0" cy="0"/>
+          <a:chOff x="0" y="0"/>
+          <a:chExt cx="0" cy="0"/>
+        </a:xfrm>
+      </p:grpSpPr>
+      <p:sp>
+        <p:nvSpPr>
+          <p:cNvPr id="15" name="Rectangle 14">
+            <a:extLst>
+              <a:ext uri="{FF2B5EF4-FFF2-40B4-BE49-F238E27FC236}">
+                <a16:creationId xmlns:a16="http://schemas.microsoft.com/office/drawing/2014/main" id="{F7BD46E7-960E-9FE8-AF1D-540B63B6E3BD}"/>
+              </a:ext>
+            </a:extLst>
+          </p:cNvPr>
+          <p:cNvSpPr/>
+          <p:nvPr/>
+        </p:nvSpPr>
+        <p:spPr bwMode="auto">
+          <a:xfrm>
+            <a:off x="1764563" y="1975011"/>
+            <a:ext cx="5701947" cy="1519391"/>
+          </a:xfrm>
+          <a:prstGeom prst="rect">
+            <a:avLst/>
+          </a:prstGeom>
+          <a:solidFill>
+            <a:schemeClr val="bg1">
+              <a:lumMod val="95000"/>
+            </a:schemeClr>
+          </a:solidFill>
+          <a:ln w="9525" cap="flat" cmpd="sng" algn="ctr">
+            <a:noFill/>
+            <a:prstDash val="solid"/>
+            <a:round/>
+            <a:headEnd type="none" w="med" len="med"/>
+            <a:tailEnd type="none" w="med" len="med"/>
+          </a:ln>
+          <a:effectLst/>
+        </p:spPr>
+        <p:txBody>
+          <a:bodyPr vert="horz" wrap="square" lIns="91440" tIns="45720" rIns="91440" bIns="45720" numCol="1" rtlCol="0" anchor="ctr" anchorCtr="0" compatLnSpc="1">
+            <a:prstTxWarp prst="textNoShape">
+              <a:avLst/>
+            </a:prstTxWarp>
+          </a:bodyPr>
+          <a:lstStyle/>
+          <a:p>
+            <a:pPr defTabSz="914400" eaLnBrk="0" fontAlgn="base" hangingPunct="0">
+              <a:spcBef>
+                <a:spcPts val="600"/>
+              </a:spcBef>
+              <a:spcAft>
+                <a:spcPct val="0"/>
+              </a:spcAft>
+            </a:pPr>
+            <a:endParaRPr lang="fr-FR" dirty="0">
+              <a:latin typeface="+mj-lt"/>
+              <a:ea typeface="Calibri"/>
+              <a:cs typeface="Calibri"/>
+            </a:endParaRPr>
+          </a:p>
+        </p:txBody>
+      </p:sp>
+      <p:sp>
+        <p:nvSpPr>
+          <p:cNvPr id="70" name="Google Shape;70;p3"/>
+          <p:cNvSpPr txBox="1">
+            <a:spLocks noGrp="1"/>
+          </p:cNvSpPr>
+          <p:nvPr>
+            <p:ph type="ctrTitle" idx="4294967295"/>
+          </p:nvPr>
+        </p:nvSpPr>
+        <p:spPr>
+          <a:xfrm>
+            <a:off x="1192663" y="403309"/>
+            <a:ext cx="6961985" cy="533100"/>
+          </a:xfrm>
+          <a:prstGeom prst="rect">
+            <a:avLst/>
+          </a:prstGeom>
+          <a:noFill/>
+          <a:ln>
+            <a:noFill/>
+          </a:ln>
+        </p:spPr>
+        <p:txBody>
+          <a:bodyPr spcFirstLastPara="1" wrap="square" lIns="91425" tIns="91425" rIns="91425" bIns="91425" anchor="t" anchorCtr="0">
+            <a:noAutofit/>
+          </a:bodyPr>
+          <a:lstStyle/>
+          <a:p>
+            <a:r>
+              <a:rPr lang="fr" sz="2500" dirty="0">
+                <a:solidFill>
+                  <a:srgbClr val="0E3449"/>
+                </a:solidFill>
+                <a:latin typeface="Inter SemiBold"/>
+                <a:ea typeface="Inter SemiBold"/>
+                <a:sym typeface="Inter SemiBold"/>
+              </a:rPr>
+              <a:t>Qu’est ce que le taux de charge solaire ?</a:t>
+            </a:r>
+            <a:endParaRPr sz="2500" dirty="0">
+              <a:solidFill>
+                <a:srgbClr val="0E3449"/>
+              </a:solidFill>
+              <a:latin typeface="Inter SemiBold"/>
+              <a:ea typeface="Inter SemiBold"/>
+              <a:sym typeface="Inter SemiBold"/>
+            </a:endParaRPr>
+          </a:p>
+        </p:txBody>
+      </p:sp>
+      <p:sp>
+        <p:nvSpPr>
+          <p:cNvPr id="71" name="Google Shape;71;p3"/>
+          <p:cNvSpPr/>
+          <p:nvPr/>
+        </p:nvSpPr>
+        <p:spPr>
+          <a:xfrm>
+            <a:off x="10225" y="4892025"/>
+            <a:ext cx="9144000" cy="251400"/>
+          </a:xfrm>
+          <a:prstGeom prst="rect">
+            <a:avLst/>
+          </a:prstGeom>
+          <a:solidFill>
+            <a:srgbClr val="C3FFFC"/>
+          </a:solidFill>
+          <a:ln>
+            <a:noFill/>
+          </a:ln>
+        </p:spPr>
+        <p:txBody>
+          <a:bodyPr spcFirstLastPara="1" wrap="square" lIns="91425" tIns="91425" rIns="91425" bIns="91425" anchor="ctr" anchorCtr="0">
+            <a:noAutofit/>
+          </a:bodyPr>
+          <a:lstStyle/>
+          <a:p>
+            <a:pPr marL="0" marR="0" lvl="0" indent="0" algn="l" rtl="0">
+              <a:lnSpc>
+                <a:spcPct val="100000"/>
+              </a:lnSpc>
+              <a:spcBef>
+                <a:spcPts val="0"/>
+              </a:spcBef>
+              <a:spcAft>
+                <a:spcPts val="0"/>
+              </a:spcAft>
+              <a:buClr>
+                <a:srgbClr val="000000"/>
+              </a:buClr>
+              <a:buSzPts val="1400"/>
+              <a:buFont typeface="Arial"/>
+              <a:buNone/>
+            </a:pPr>
+            <a:endParaRPr sz="1400" b="0" i="0" u="none" strike="noStrike" cap="none">
+              <a:solidFill>
+                <a:srgbClr val="000000"/>
+              </a:solidFill>
+              <a:latin typeface="Arial"/>
+              <a:ea typeface="Arial"/>
+              <a:cs typeface="Arial"/>
+              <a:sym typeface="Arial"/>
+            </a:endParaRPr>
+          </a:p>
+        </p:txBody>
+      </p:sp>
+      <p:pic>
+        <p:nvPicPr>
+          <p:cNvPr id="72" name="Google Shape;72;p3"/>
+          <p:cNvPicPr preferRelativeResize="0"/>
+          <p:nvPr/>
+        </p:nvPicPr>
+        <p:blipFill rotWithShape="1">
+          <a:blip r:embed="rId3">
+            <a:alphaModFix/>
+          </a:blip>
+          <a:srcRect/>
+          <a:stretch/>
+        </p:blipFill>
+        <p:spPr>
+          <a:xfrm>
+            <a:off x="463375" y="482852"/>
+            <a:ext cx="576900" cy="385904"/>
+          </a:xfrm>
+          <a:prstGeom prst="rect">
+            <a:avLst/>
+          </a:prstGeom>
+          <a:noFill/>
+          <a:ln>
+            <a:noFill/>
+          </a:ln>
+        </p:spPr>
+      </p:pic>
+      <p:sp>
+        <p:nvSpPr>
+          <p:cNvPr id="73" name="Google Shape;73;p3"/>
+          <p:cNvSpPr txBox="1">
+            <a:spLocks noGrp="1"/>
+          </p:cNvSpPr>
+          <p:nvPr>
+            <p:ph type="body" idx="1"/>
+          </p:nvPr>
+        </p:nvSpPr>
+        <p:spPr>
+          <a:xfrm>
+            <a:off x="362482" y="1071393"/>
+            <a:ext cx="7792166" cy="419798"/>
+          </a:xfrm>
+          <a:prstGeom prst="rect">
+            <a:avLst/>
+          </a:prstGeom>
+          <a:noFill/>
+          <a:ln>
+            <a:noFill/>
+          </a:ln>
+        </p:spPr>
+        <p:txBody>
+          <a:bodyPr spcFirstLastPara="1" wrap="square" lIns="91425" tIns="91425" rIns="91425" bIns="91425" anchor="t" anchorCtr="0">
+            <a:noAutofit/>
+          </a:bodyPr>
+          <a:lstStyle/>
+          <a:p>
+            <a:pPr marL="114300" lvl="0" indent="0">
+              <a:buNone/>
+            </a:pPr>
+            <a:r>
+              <a:rPr lang="fr-FR" sz="1400" dirty="0"/>
+              <a:t>Il s’agit d’un un indicateur </a:t>
+            </a:r>
+            <a:r>
+              <a:rPr lang="fr-FR" sz="1600" b="1" dirty="0"/>
+              <a:t>énergétique</a:t>
+            </a:r>
+            <a:r>
+              <a:rPr lang="fr-FR" sz="1400" dirty="0"/>
+              <a:t>, utilisé pour suivre la production d’électricité solaire. </a:t>
+            </a:r>
+          </a:p>
+          <a:p>
+            <a:pPr marL="114300" lvl="0" indent="0">
+              <a:buNone/>
+            </a:pPr>
+            <a:endParaRPr lang="fr-FR" sz="1400" dirty="0"/>
+          </a:p>
+        </p:txBody>
+      </p:sp>
+      <p:sp>
+        <p:nvSpPr>
+          <p:cNvPr id="10" name="Google Shape;73;p3">
+            <a:extLst>
+              <a:ext uri="{FF2B5EF4-FFF2-40B4-BE49-F238E27FC236}">
+                <a16:creationId xmlns:a16="http://schemas.microsoft.com/office/drawing/2014/main" id="{969F6912-24B4-86C3-A9BD-63A0B3EECE8F}"/>
+              </a:ext>
+            </a:extLst>
+          </p:cNvPr>
+          <p:cNvSpPr txBox="1">
+            <a:spLocks/>
+          </p:cNvSpPr>
+          <p:nvPr/>
+        </p:nvSpPr>
+        <p:spPr>
+          <a:xfrm>
+            <a:off x="2299978" y="1975011"/>
+            <a:ext cx="4676607" cy="1475199"/>
+          </a:xfrm>
+          <a:prstGeom prst="rect">
+            <a:avLst/>
+          </a:prstGeom>
+          <a:noFill/>
+          <a:ln>
+            <a:noFill/>
+          </a:ln>
+        </p:spPr>
+        <p:txBody>
+          <a:bodyPr spcFirstLastPara="1" wrap="square" lIns="91425" tIns="91425" rIns="91425" bIns="91425" anchor="t" anchorCtr="0">
+            <a:noAutofit/>
+          </a:bodyPr>
+          <a:lstStyle>
+            <a:defPPr marR="0" lvl="0" algn="l" rtl="0">
+              <a:lnSpc>
+                <a:spcPct val="100000"/>
+              </a:lnSpc>
+              <a:spcBef>
+                <a:spcPts val="0"/>
+              </a:spcBef>
+              <a:spcAft>
+                <a:spcPts val="0"/>
+              </a:spcAft>
+            </a:defPPr>
+            <a:lvl1pPr marL="457200" marR="0" lvl="0" indent="-342900" algn="l" rtl="0">
+              <a:lnSpc>
+                <a:spcPct val="115000"/>
+              </a:lnSpc>
+              <a:spcBef>
+                <a:spcPts val="0"/>
+              </a:spcBef>
+              <a:spcAft>
+                <a:spcPts val="0"/>
+              </a:spcAft>
+              <a:buClr>
+                <a:schemeClr val="dk2"/>
+              </a:buClr>
+              <a:buSzPts val="1800"/>
+              <a:buFont typeface="Arial"/>
+              <a:buChar char="●"/>
+              <a:defRPr sz="1800" b="0" i="0" u="none" strike="noStrike" cap="none">
+                <a:solidFill>
+                  <a:schemeClr val="dk2"/>
+                </a:solidFill>
+                <a:latin typeface="Arial"/>
+                <a:ea typeface="Arial"/>
+                <a:cs typeface="Arial"/>
+                <a:sym typeface="Arial"/>
+              </a:defRPr>
+            </a:lvl1pPr>
+            <a:lvl2pPr marL="914400" marR="0" lvl="1" indent="-317500" algn="l" rtl="0">
+              <a:lnSpc>
+                <a:spcPct val="115000"/>
+              </a:lnSpc>
+              <a:spcBef>
+                <a:spcPts val="1600"/>
+              </a:spcBef>
+              <a:spcAft>
+                <a:spcPts val="0"/>
+              </a:spcAft>
+              <a:buClr>
+                <a:schemeClr val="dk2"/>
+              </a:buClr>
+              <a:buSzPts val="1400"/>
+              <a:buFont typeface="Arial"/>
+              <a:buChar char="○"/>
+              <a:defRPr sz="1400" b="0" i="0" u="none" strike="noStrike" cap="none">
+                <a:solidFill>
+                  <a:schemeClr val="dk2"/>
+                </a:solidFill>
+                <a:latin typeface="Arial"/>
+                <a:ea typeface="Arial"/>
+                <a:cs typeface="Arial"/>
+                <a:sym typeface="Arial"/>
+              </a:defRPr>
+            </a:lvl2pPr>
+            <a:lvl3pPr marL="1371600" marR="0" lvl="2" indent="-317500" algn="l" rtl="0">
+              <a:lnSpc>
+                <a:spcPct val="115000"/>
+              </a:lnSpc>
+              <a:spcBef>
+                <a:spcPts val="1600"/>
+              </a:spcBef>
+              <a:spcAft>
+                <a:spcPts val="0"/>
+              </a:spcAft>
+              <a:buClr>
+                <a:schemeClr val="dk2"/>
+              </a:buClr>
+              <a:buSzPts val="1400"/>
+              <a:buFont typeface="Arial"/>
+              <a:buChar char="■"/>
+              <a:defRPr sz="1400" b="0" i="0" u="none" strike="noStrike" cap="none">
+                <a:solidFill>
+                  <a:schemeClr val="dk2"/>
+                </a:solidFill>
+                <a:latin typeface="Arial"/>
+                <a:ea typeface="Arial"/>
+                <a:cs typeface="Arial"/>
+                <a:sym typeface="Arial"/>
+              </a:defRPr>
+            </a:lvl3pPr>
+            <a:lvl4pPr marL="1828800" marR="0" lvl="3" indent="-317500" algn="l" rtl="0">
+              <a:lnSpc>
+                <a:spcPct val="115000"/>
+              </a:lnSpc>
+              <a:spcBef>
+                <a:spcPts val="1600"/>
+              </a:spcBef>
+              <a:spcAft>
+                <a:spcPts val="0"/>
+              </a:spcAft>
+              <a:buClr>
+                <a:schemeClr val="dk2"/>
+              </a:buClr>
+              <a:buSzPts val="1400"/>
+              <a:buFont typeface="Arial"/>
+              <a:buChar char="●"/>
+              <a:defRPr sz="1400" b="0" i="0" u="none" strike="noStrike" cap="none">
+                <a:solidFill>
+                  <a:schemeClr val="dk2"/>
+                </a:solidFill>
+                <a:latin typeface="Arial"/>
+                <a:ea typeface="Arial"/>
+                <a:cs typeface="Arial"/>
+                <a:sym typeface="Arial"/>
+              </a:defRPr>
+            </a:lvl4pPr>
+            <a:lvl5pPr marL="2286000" marR="0" lvl="4" indent="-317500" algn="l" rtl="0">
+              <a:lnSpc>
+                <a:spcPct val="115000"/>
+              </a:lnSpc>
+              <a:spcBef>
+                <a:spcPts val="1600"/>
+              </a:spcBef>
+              <a:spcAft>
+                <a:spcPts val="0"/>
+              </a:spcAft>
+              <a:buClr>
+                <a:schemeClr val="dk2"/>
+              </a:buClr>
+              <a:buSzPts val="1400"/>
+              <a:buFont typeface="Arial"/>
+              <a:buChar char="○"/>
+              <a:defRPr sz="1400" b="0" i="0" u="none" strike="noStrike" cap="none">
+                <a:solidFill>
+                  <a:schemeClr val="dk2"/>
+                </a:solidFill>
+                <a:latin typeface="Arial"/>
+                <a:ea typeface="Arial"/>
+                <a:cs typeface="Arial"/>
+                <a:sym typeface="Arial"/>
+              </a:defRPr>
+            </a:lvl5pPr>
+            <a:lvl6pPr marL="2743200" marR="0" lvl="5" indent="-317500" algn="l" rtl="0">
+              <a:lnSpc>
+                <a:spcPct val="115000"/>
+              </a:lnSpc>
+              <a:spcBef>
+                <a:spcPts val="1600"/>
+              </a:spcBef>
+              <a:spcAft>
+                <a:spcPts val="0"/>
+              </a:spcAft>
+              <a:buClr>
+                <a:schemeClr val="dk2"/>
+              </a:buClr>
+              <a:buSzPts val="1400"/>
+              <a:buFont typeface="Arial"/>
+              <a:buChar char="■"/>
+              <a:defRPr sz="1400" b="0" i="0" u="none" strike="noStrike" cap="none">
+                <a:solidFill>
+                  <a:schemeClr val="dk2"/>
+                </a:solidFill>
+                <a:latin typeface="Arial"/>
+                <a:ea typeface="Arial"/>
+                <a:cs typeface="Arial"/>
+                <a:sym typeface="Arial"/>
+              </a:defRPr>
+            </a:lvl6pPr>
+            <a:lvl7pPr marL="3200400" marR="0" lvl="6" indent="-317500" algn="l" rtl="0">
+              <a:lnSpc>
+                <a:spcPct val="115000"/>
+              </a:lnSpc>
+              <a:spcBef>
+                <a:spcPts val="1600"/>
+              </a:spcBef>
+              <a:spcAft>
+                <a:spcPts val="0"/>
+              </a:spcAft>
+              <a:buClr>
+                <a:schemeClr val="dk2"/>
+              </a:buClr>
+              <a:buSzPts val="1400"/>
+              <a:buFont typeface="Arial"/>
+              <a:buChar char="●"/>
+              <a:defRPr sz="1400" b="0" i="0" u="none" strike="noStrike" cap="none">
+                <a:solidFill>
+                  <a:schemeClr val="dk2"/>
+                </a:solidFill>
+                <a:latin typeface="Arial"/>
+                <a:ea typeface="Arial"/>
+                <a:cs typeface="Arial"/>
+                <a:sym typeface="Arial"/>
+              </a:defRPr>
+            </a:lvl7pPr>
+            <a:lvl8pPr marL="3657600" marR="0" lvl="7" indent="-317500" algn="l" rtl="0">
+              <a:lnSpc>
+                <a:spcPct val="115000"/>
+              </a:lnSpc>
+              <a:spcBef>
+                <a:spcPts val="1600"/>
+              </a:spcBef>
+              <a:spcAft>
+                <a:spcPts val="0"/>
+              </a:spcAft>
+              <a:buClr>
+                <a:schemeClr val="dk2"/>
+              </a:buClr>
+              <a:buSzPts val="1400"/>
+              <a:buFont typeface="Arial"/>
+              <a:buChar char="○"/>
+              <a:defRPr sz="1400" b="0" i="0" u="none" strike="noStrike" cap="none">
+                <a:solidFill>
+                  <a:schemeClr val="dk2"/>
+                </a:solidFill>
+                <a:latin typeface="Arial"/>
+                <a:ea typeface="Arial"/>
+                <a:cs typeface="Arial"/>
+                <a:sym typeface="Arial"/>
+              </a:defRPr>
+            </a:lvl8pPr>
+            <a:lvl9pPr marL="4114800" marR="0" lvl="8" indent="-317500" algn="l" rtl="0">
+              <a:lnSpc>
+                <a:spcPct val="115000"/>
+              </a:lnSpc>
+              <a:spcBef>
+                <a:spcPts val="1600"/>
+              </a:spcBef>
+              <a:spcAft>
+                <a:spcPts val="1600"/>
+              </a:spcAft>
+              <a:buClr>
+                <a:schemeClr val="dk2"/>
+              </a:buClr>
+              <a:buSzPts val="1400"/>
+              <a:buFont typeface="Arial"/>
+              <a:buChar char="■"/>
+              <a:defRPr sz="1400" b="0" i="0" u="none" strike="noStrike" cap="none">
+                <a:solidFill>
+                  <a:schemeClr val="dk2"/>
+                </a:solidFill>
+                <a:latin typeface="Arial"/>
+                <a:ea typeface="Arial"/>
+                <a:cs typeface="Arial"/>
+                <a:sym typeface="Arial"/>
+              </a:defRPr>
+            </a:lvl9pPr>
+          </a:lstStyle>
+          <a:p>
+            <a:pPr marL="114300" indent="0">
+              <a:buFont typeface="Arial"/>
+              <a:buNone/>
+            </a:pPr>
+            <a:r>
+              <a:rPr lang="fr-FR" sz="1400" dirty="0"/>
+              <a:t>Le taux de charge permet de comprendre :</a:t>
+            </a:r>
+          </a:p>
+          <a:p>
+            <a:pPr>
+              <a:buFont typeface="Arial" panose="020B0604020202020204" pitchFamily="34" charset="0"/>
+              <a:buChar char="•"/>
+            </a:pPr>
+            <a:r>
+              <a:rPr lang="fr-FR" sz="1400" b="1" dirty="0"/>
+              <a:t>l'effet de la météo </a:t>
+            </a:r>
+            <a:r>
+              <a:rPr lang="fr-FR" sz="1400" dirty="0"/>
+              <a:t>sur la production solaire</a:t>
+            </a:r>
+          </a:p>
+          <a:p>
+            <a:pPr>
+              <a:buFont typeface="Arial" panose="020B0604020202020204" pitchFamily="34" charset="0"/>
+              <a:buChar char="•"/>
+            </a:pPr>
+            <a:r>
+              <a:rPr lang="fr-FR" sz="1400" dirty="0"/>
+              <a:t>la </a:t>
+            </a:r>
+            <a:r>
+              <a:rPr lang="fr-FR" sz="1400" b="1" dirty="0"/>
+              <a:t>performance des installations </a:t>
+            </a:r>
+            <a:r>
+              <a:rPr lang="fr-FR" sz="1400" dirty="0"/>
+              <a:t>photovoltaïques</a:t>
+            </a:r>
+          </a:p>
+          <a:p>
+            <a:pPr>
+              <a:buFont typeface="Arial" panose="020B0604020202020204" pitchFamily="34" charset="0"/>
+              <a:buChar char="•"/>
+            </a:pPr>
+            <a:r>
+              <a:rPr lang="fr-FR" sz="1400" dirty="0"/>
+              <a:t>la </a:t>
+            </a:r>
+            <a:r>
+              <a:rPr lang="fr-FR" sz="1400" b="1" dirty="0"/>
+              <a:t>disponibilité réelle </a:t>
+            </a:r>
+            <a:r>
+              <a:rPr lang="fr-FR" sz="1400" dirty="0"/>
+              <a:t>de l’énergie solaire</a:t>
+            </a:r>
+          </a:p>
+          <a:p>
+            <a:pPr>
+              <a:buFont typeface="Arial" panose="020B0604020202020204" pitchFamily="34" charset="0"/>
+              <a:buChar char="•"/>
+            </a:pPr>
+            <a:r>
+              <a:rPr lang="fr-FR" sz="1400" dirty="0"/>
+              <a:t>les </a:t>
+            </a:r>
+            <a:r>
+              <a:rPr lang="fr-FR" sz="1400" b="1" dirty="0"/>
+              <a:t>variations saisonnières </a:t>
+            </a:r>
+            <a:r>
+              <a:rPr lang="fr-FR" sz="1400" dirty="0"/>
+              <a:t>et journalières </a:t>
+            </a:r>
+            <a:endParaRPr lang="fr-FR" sz="1400" b="1" dirty="0">
+              <a:solidFill>
+                <a:srgbClr val="41545E"/>
+              </a:solidFill>
+            </a:endParaRPr>
+          </a:p>
+        </p:txBody>
+      </p:sp>
+      <p:sp>
+        <p:nvSpPr>
+          <p:cNvPr id="16" name="Flèche : courbe vers la droite 15">
+            <a:extLst>
+              <a:ext uri="{FF2B5EF4-FFF2-40B4-BE49-F238E27FC236}">
+                <a16:creationId xmlns:a16="http://schemas.microsoft.com/office/drawing/2014/main" id="{FD00A647-A6B0-BAD9-4462-05B36C528950}"/>
+              </a:ext>
+            </a:extLst>
+          </p:cNvPr>
+          <p:cNvSpPr/>
+          <p:nvPr/>
+        </p:nvSpPr>
+        <p:spPr>
+          <a:xfrm>
+            <a:off x="424170" y="2625173"/>
+            <a:ext cx="850467" cy="1833283"/>
+          </a:xfrm>
+          <a:prstGeom prst="curvedRightArrow">
+            <a:avLst/>
+          </a:prstGeom>
+          <a:solidFill>
+            <a:srgbClr val="E4E9EB"/>
+          </a:solidFill>
+          <a:ln>
+            <a:noFill/>
+          </a:ln>
+        </p:spPr>
+        <p:style>
+          <a:lnRef idx="2">
+            <a:schemeClr val="accent1">
+              <a:shade val="15000"/>
+            </a:schemeClr>
+          </a:lnRef>
+          <a:fillRef idx="1">
+            <a:schemeClr val="accent1"/>
+          </a:fillRef>
+          <a:effectRef idx="0">
+            <a:schemeClr val="accent1"/>
+          </a:effectRef>
+          <a:fontRef idx="minor">
+            <a:schemeClr val="lt1"/>
+          </a:fontRef>
+        </p:style>
+        <p:txBody>
+          <a:bodyPr rtlCol="0" anchor="ctr"/>
+          <a:lstStyle/>
+          <a:p>
+            <a:pPr algn="ctr"/>
+            <a:endParaRPr lang="fr-FR">
+              <a:solidFill>
+                <a:schemeClr val="tx1"/>
+              </a:solidFill>
+            </a:endParaRPr>
+          </a:p>
+        </p:txBody>
+      </p:sp>
+      <p:sp>
+        <p:nvSpPr>
+          <p:cNvPr id="17" name="Ellipse 16">
+            <a:extLst>
+              <a:ext uri="{FF2B5EF4-FFF2-40B4-BE49-F238E27FC236}">
+                <a16:creationId xmlns:a16="http://schemas.microsoft.com/office/drawing/2014/main" id="{CA110F94-5779-164B-A681-281821A7140F}"/>
+              </a:ext>
+            </a:extLst>
+          </p:cNvPr>
+          <p:cNvSpPr/>
+          <p:nvPr/>
+        </p:nvSpPr>
+        <p:spPr>
+          <a:xfrm>
+            <a:off x="1620617" y="1800241"/>
+            <a:ext cx="349540" cy="349540"/>
+          </a:xfrm>
+          <a:prstGeom prst="ellipse">
+            <a:avLst/>
+          </a:prstGeom>
+          <a:solidFill>
+            <a:schemeClr val="bg1"/>
+          </a:solidFill>
+          <a:ln>
+            <a:solidFill>
+              <a:srgbClr val="C00000"/>
+            </a:solidFill>
+          </a:ln>
+        </p:spPr>
+        <p:style>
+          <a:lnRef idx="2">
+            <a:schemeClr val="accent1">
+              <a:shade val="15000"/>
+            </a:schemeClr>
+          </a:lnRef>
+          <a:fillRef idx="1">
+            <a:schemeClr val="accent1"/>
+          </a:fillRef>
+          <a:effectRef idx="0">
+            <a:schemeClr val="accent1"/>
+          </a:effectRef>
+          <a:fontRef idx="minor">
+            <a:schemeClr val="lt1"/>
+          </a:fontRef>
+        </p:style>
+        <p:txBody>
+          <a:bodyPr rtlCol="0" anchor="ctr"/>
+          <a:lstStyle/>
+          <a:p>
+            <a:pPr algn="ctr"/>
+            <a:r>
+              <a:rPr lang="fr-FR" sz="1600" b="1" dirty="0">
+                <a:solidFill>
+                  <a:srgbClr val="C00000"/>
+                </a:solidFill>
+              </a:rPr>
+              <a:t>!</a:t>
+            </a:r>
+          </a:p>
+        </p:txBody>
+      </p:sp>
+      <p:sp>
+        <p:nvSpPr>
+          <p:cNvPr id="19" name="Flèche : courbe vers la gauche 18">
+            <a:extLst>
+              <a:ext uri="{FF2B5EF4-FFF2-40B4-BE49-F238E27FC236}">
+                <a16:creationId xmlns:a16="http://schemas.microsoft.com/office/drawing/2014/main" id="{A3387E01-D8D0-5ADA-D534-65D80A3C2F50}"/>
+              </a:ext>
+            </a:extLst>
+          </p:cNvPr>
+          <p:cNvSpPr/>
+          <p:nvPr/>
+        </p:nvSpPr>
+        <p:spPr>
+          <a:xfrm>
+            <a:off x="7923673" y="1281292"/>
+            <a:ext cx="951876" cy="1551482"/>
+          </a:xfrm>
+          <a:prstGeom prst="curvedLeftArrow">
+            <a:avLst>
+              <a:gd name="adj1" fmla="val 16999"/>
+              <a:gd name="adj2" fmla="val 50000"/>
+              <a:gd name="adj3" fmla="val 25000"/>
+            </a:avLst>
+          </a:prstGeom>
+          <a:solidFill>
+            <a:srgbClr val="E4E9EB"/>
+          </a:solidFill>
+          <a:ln>
+            <a:noFill/>
+          </a:ln>
+        </p:spPr>
+        <p:style>
+          <a:lnRef idx="2">
+            <a:schemeClr val="accent1">
+              <a:shade val="15000"/>
+            </a:schemeClr>
+          </a:lnRef>
+          <a:fillRef idx="1">
+            <a:schemeClr val="accent1"/>
+          </a:fillRef>
+          <a:effectRef idx="0">
+            <a:schemeClr val="accent1"/>
+          </a:effectRef>
+          <a:fontRef idx="minor">
+            <a:schemeClr val="lt1"/>
+          </a:fontRef>
+        </p:style>
+        <p:txBody>
+          <a:bodyPr rtlCol="0" anchor="ctr"/>
+          <a:lstStyle/>
+          <a:p>
+            <a:pPr algn="ctr"/>
+            <a:endParaRPr lang="fr-FR">
+              <a:solidFill>
+                <a:schemeClr val="tx1"/>
+              </a:solidFill>
+            </a:endParaRPr>
+          </a:p>
+        </p:txBody>
+      </p:sp>
+      <p:sp>
+        <p:nvSpPr>
+          <p:cNvPr id="20" name="Google Shape;73;p3">
+            <a:extLst>
+              <a:ext uri="{FF2B5EF4-FFF2-40B4-BE49-F238E27FC236}">
+                <a16:creationId xmlns:a16="http://schemas.microsoft.com/office/drawing/2014/main" id="{027ADA1A-FB26-718D-5918-4A696CD7FAD0}"/>
+              </a:ext>
+            </a:extLst>
+          </p:cNvPr>
+          <p:cNvSpPr txBox="1">
+            <a:spLocks/>
+          </p:cNvSpPr>
+          <p:nvPr/>
+        </p:nvSpPr>
+        <p:spPr>
+          <a:xfrm>
+            <a:off x="1504266" y="4072107"/>
+            <a:ext cx="3676413" cy="386350"/>
+          </a:xfrm>
+          <a:prstGeom prst="rect">
+            <a:avLst/>
+          </a:prstGeom>
+          <a:noFill/>
+          <a:ln>
+            <a:noFill/>
+          </a:ln>
+        </p:spPr>
+        <p:txBody>
+          <a:bodyPr spcFirstLastPara="1" wrap="square" lIns="91425" tIns="91425" rIns="91425" bIns="91425" anchor="t" anchorCtr="0">
+            <a:noAutofit/>
+          </a:bodyPr>
+          <a:lstStyle>
+            <a:defPPr marR="0" lvl="0" algn="l" rtl="0">
+              <a:lnSpc>
+                <a:spcPct val="100000"/>
+              </a:lnSpc>
+              <a:spcBef>
+                <a:spcPts val="0"/>
+              </a:spcBef>
+              <a:spcAft>
+                <a:spcPts val="0"/>
+              </a:spcAft>
+            </a:defPPr>
+            <a:lvl1pPr marL="457200" marR="0" lvl="0" indent="-342900" algn="l" rtl="0">
+              <a:lnSpc>
+                <a:spcPct val="115000"/>
+              </a:lnSpc>
+              <a:spcBef>
+                <a:spcPts val="0"/>
+              </a:spcBef>
+              <a:spcAft>
+                <a:spcPts val="0"/>
+              </a:spcAft>
+              <a:buClr>
+                <a:schemeClr val="dk2"/>
+              </a:buClr>
+              <a:buSzPts val="1800"/>
+              <a:buFont typeface="Arial"/>
+              <a:buChar char="●"/>
+              <a:defRPr sz="1800" b="0" i="0" u="none" strike="noStrike" cap="none">
+                <a:solidFill>
+                  <a:schemeClr val="dk2"/>
+                </a:solidFill>
+                <a:latin typeface="Arial"/>
+                <a:ea typeface="Arial"/>
+                <a:cs typeface="Arial"/>
+                <a:sym typeface="Arial"/>
+              </a:defRPr>
+            </a:lvl1pPr>
+            <a:lvl2pPr marL="914400" marR="0" lvl="1" indent="-317500" algn="l" rtl="0">
+              <a:lnSpc>
+                <a:spcPct val="115000"/>
+              </a:lnSpc>
+              <a:spcBef>
+                <a:spcPts val="1600"/>
+              </a:spcBef>
+              <a:spcAft>
+                <a:spcPts val="0"/>
+              </a:spcAft>
+              <a:buClr>
+                <a:schemeClr val="dk2"/>
+              </a:buClr>
+              <a:buSzPts val="1400"/>
+              <a:buFont typeface="Arial"/>
+              <a:buChar char="○"/>
+              <a:defRPr sz="1400" b="0" i="0" u="none" strike="noStrike" cap="none">
+                <a:solidFill>
+                  <a:schemeClr val="dk2"/>
+                </a:solidFill>
+                <a:latin typeface="Arial"/>
+                <a:ea typeface="Arial"/>
+                <a:cs typeface="Arial"/>
+                <a:sym typeface="Arial"/>
+              </a:defRPr>
+            </a:lvl2pPr>
+            <a:lvl3pPr marL="1371600" marR="0" lvl="2" indent="-317500" algn="l" rtl="0">
+              <a:lnSpc>
+                <a:spcPct val="115000"/>
+              </a:lnSpc>
+              <a:spcBef>
+                <a:spcPts val="1600"/>
+              </a:spcBef>
+              <a:spcAft>
+                <a:spcPts val="0"/>
+              </a:spcAft>
+              <a:buClr>
+                <a:schemeClr val="dk2"/>
+              </a:buClr>
+              <a:buSzPts val="1400"/>
+              <a:buFont typeface="Arial"/>
+              <a:buChar char="■"/>
+              <a:defRPr sz="1400" b="0" i="0" u="none" strike="noStrike" cap="none">
+                <a:solidFill>
+                  <a:schemeClr val="dk2"/>
+                </a:solidFill>
+                <a:latin typeface="Arial"/>
+                <a:ea typeface="Arial"/>
+                <a:cs typeface="Arial"/>
+                <a:sym typeface="Arial"/>
+              </a:defRPr>
+            </a:lvl3pPr>
+            <a:lvl4pPr marL="1828800" marR="0" lvl="3" indent="-317500" algn="l" rtl="0">
+              <a:lnSpc>
+                <a:spcPct val="115000"/>
+              </a:lnSpc>
+              <a:spcBef>
+                <a:spcPts val="1600"/>
+              </a:spcBef>
+              <a:spcAft>
+                <a:spcPts val="0"/>
+              </a:spcAft>
+              <a:buClr>
+                <a:schemeClr val="dk2"/>
+              </a:buClr>
+              <a:buSzPts val="1400"/>
+              <a:buFont typeface="Arial"/>
+              <a:buChar char="●"/>
+              <a:defRPr sz="1400" b="0" i="0" u="none" strike="noStrike" cap="none">
+                <a:solidFill>
+                  <a:schemeClr val="dk2"/>
+                </a:solidFill>
+                <a:latin typeface="Arial"/>
+                <a:ea typeface="Arial"/>
+                <a:cs typeface="Arial"/>
+                <a:sym typeface="Arial"/>
+              </a:defRPr>
+            </a:lvl4pPr>
+            <a:lvl5pPr marL="2286000" marR="0" lvl="4" indent="-317500" algn="l" rtl="0">
+              <a:lnSpc>
+                <a:spcPct val="115000"/>
+              </a:lnSpc>
+              <a:spcBef>
+                <a:spcPts val="1600"/>
+              </a:spcBef>
+              <a:spcAft>
+                <a:spcPts val="0"/>
+              </a:spcAft>
+              <a:buClr>
+                <a:schemeClr val="dk2"/>
+              </a:buClr>
+              <a:buSzPts val="1400"/>
+              <a:buFont typeface="Arial"/>
+              <a:buChar char="○"/>
+              <a:defRPr sz="1400" b="0" i="0" u="none" strike="noStrike" cap="none">
+                <a:solidFill>
+                  <a:schemeClr val="dk2"/>
+                </a:solidFill>
+                <a:latin typeface="Arial"/>
+                <a:ea typeface="Arial"/>
+                <a:cs typeface="Arial"/>
+                <a:sym typeface="Arial"/>
+              </a:defRPr>
+            </a:lvl5pPr>
+            <a:lvl6pPr marL="2743200" marR="0" lvl="5" indent="-317500" algn="l" rtl="0">
+              <a:lnSpc>
+                <a:spcPct val="115000"/>
+              </a:lnSpc>
+              <a:spcBef>
+                <a:spcPts val="1600"/>
+              </a:spcBef>
+              <a:spcAft>
+                <a:spcPts val="0"/>
+              </a:spcAft>
+              <a:buClr>
+                <a:schemeClr val="dk2"/>
+              </a:buClr>
+              <a:buSzPts val="1400"/>
+              <a:buFont typeface="Arial"/>
+              <a:buChar char="■"/>
+              <a:defRPr sz="1400" b="0" i="0" u="none" strike="noStrike" cap="none">
+                <a:solidFill>
+                  <a:schemeClr val="dk2"/>
+                </a:solidFill>
+                <a:latin typeface="Arial"/>
+                <a:ea typeface="Arial"/>
+                <a:cs typeface="Arial"/>
+                <a:sym typeface="Arial"/>
+              </a:defRPr>
+            </a:lvl6pPr>
+            <a:lvl7pPr marL="3200400" marR="0" lvl="6" indent="-317500" algn="l" rtl="0">
+              <a:lnSpc>
+                <a:spcPct val="115000"/>
+              </a:lnSpc>
+              <a:spcBef>
+                <a:spcPts val="1600"/>
+              </a:spcBef>
+              <a:spcAft>
+                <a:spcPts val="0"/>
+              </a:spcAft>
+              <a:buClr>
+                <a:schemeClr val="dk2"/>
+              </a:buClr>
+              <a:buSzPts val="1400"/>
+              <a:buFont typeface="Arial"/>
+              <a:buChar char="●"/>
+              <a:defRPr sz="1400" b="0" i="0" u="none" strike="noStrike" cap="none">
+                <a:solidFill>
+                  <a:schemeClr val="dk2"/>
+                </a:solidFill>
+                <a:latin typeface="Arial"/>
+                <a:ea typeface="Arial"/>
+                <a:cs typeface="Arial"/>
+                <a:sym typeface="Arial"/>
+              </a:defRPr>
+            </a:lvl7pPr>
+            <a:lvl8pPr marL="3657600" marR="0" lvl="7" indent="-317500" algn="l" rtl="0">
+              <a:lnSpc>
+                <a:spcPct val="115000"/>
+              </a:lnSpc>
+              <a:spcBef>
+                <a:spcPts val="1600"/>
+              </a:spcBef>
+              <a:spcAft>
+                <a:spcPts val="0"/>
+              </a:spcAft>
+              <a:buClr>
+                <a:schemeClr val="dk2"/>
+              </a:buClr>
+              <a:buSzPts val="1400"/>
+              <a:buFont typeface="Arial"/>
+              <a:buChar char="○"/>
+              <a:defRPr sz="1400" b="0" i="0" u="none" strike="noStrike" cap="none">
+                <a:solidFill>
+                  <a:schemeClr val="dk2"/>
+                </a:solidFill>
+                <a:latin typeface="Arial"/>
+                <a:ea typeface="Arial"/>
+                <a:cs typeface="Arial"/>
+                <a:sym typeface="Arial"/>
+              </a:defRPr>
+            </a:lvl8pPr>
+            <a:lvl9pPr marL="4114800" marR="0" lvl="8" indent="-317500" algn="l" rtl="0">
+              <a:lnSpc>
+                <a:spcPct val="115000"/>
+              </a:lnSpc>
+              <a:spcBef>
+                <a:spcPts val="1600"/>
+              </a:spcBef>
+              <a:spcAft>
+                <a:spcPts val="1600"/>
+              </a:spcAft>
+              <a:buClr>
+                <a:schemeClr val="dk2"/>
+              </a:buClr>
+              <a:buSzPts val="1400"/>
+              <a:buFont typeface="Arial"/>
+              <a:buChar char="■"/>
+              <a:defRPr sz="1400" b="0" i="0" u="none" strike="noStrike" cap="none">
+                <a:solidFill>
+                  <a:schemeClr val="dk2"/>
+                </a:solidFill>
+                <a:latin typeface="Arial"/>
+                <a:ea typeface="Arial"/>
+                <a:cs typeface="Arial"/>
+                <a:sym typeface="Arial"/>
+              </a:defRPr>
+            </a:lvl9pPr>
+          </a:lstStyle>
+          <a:p>
+            <a:pPr marL="114300" indent="0">
+              <a:buNone/>
+            </a:pPr>
+            <a:r>
+              <a:rPr lang="fr-FR" sz="1400" b="1" dirty="0"/>
+              <a:t>Entre 0 et 20% </a:t>
+            </a:r>
+            <a:r>
+              <a:rPr lang="fr-FR" sz="1400" dirty="0"/>
+              <a:t>= Faible ensoleillement</a:t>
+            </a:r>
+            <a:endParaRPr lang="fr-FR" sz="1400" b="1" dirty="0">
+              <a:solidFill>
+                <a:srgbClr val="41545E"/>
+              </a:solidFill>
+            </a:endParaRPr>
+          </a:p>
+        </p:txBody>
+      </p:sp>
+      <p:sp>
+        <p:nvSpPr>
+          <p:cNvPr id="22" name="Google Shape;111;g2e3f79b3bfd_3_0">
+            <a:extLst>
+              <a:ext uri="{FF2B5EF4-FFF2-40B4-BE49-F238E27FC236}">
+                <a16:creationId xmlns:a16="http://schemas.microsoft.com/office/drawing/2014/main" id="{9A64202F-AFAE-5CDF-BC8D-5777C30A07CB}"/>
+              </a:ext>
+            </a:extLst>
+          </p:cNvPr>
+          <p:cNvSpPr/>
+          <p:nvPr/>
+        </p:nvSpPr>
+        <p:spPr>
+          <a:xfrm>
+            <a:off x="1459362" y="4116436"/>
+            <a:ext cx="174911" cy="297692"/>
+          </a:xfrm>
+          <a:prstGeom prst="rightArrow">
+            <a:avLst>
+              <a:gd name="adj1" fmla="val 50000"/>
+              <a:gd name="adj2" fmla="val 50000"/>
+            </a:avLst>
+          </a:prstGeom>
+          <a:solidFill>
+            <a:srgbClr val="C00000"/>
+          </a:solidFill>
+          <a:ln>
+            <a:noFill/>
+          </a:ln>
+        </p:spPr>
+        <p:txBody>
+          <a:bodyPr spcFirstLastPara="1" wrap="square" lIns="91425" tIns="45700" rIns="91425" bIns="45700" anchor="ctr" anchorCtr="0">
+            <a:noAutofit/>
+          </a:bodyPr>
+          <a:lstStyle/>
+          <a:p>
+            <a:pPr marL="0" marR="0" lvl="0" indent="0" algn="ctr" rtl="0">
+              <a:lnSpc>
+                <a:spcPct val="100000"/>
+              </a:lnSpc>
+              <a:spcBef>
+                <a:spcPts val="0"/>
+              </a:spcBef>
+              <a:spcAft>
+                <a:spcPts val="0"/>
+              </a:spcAft>
+              <a:buClr>
+                <a:srgbClr val="000000"/>
+              </a:buClr>
+              <a:buSzPts val="1400"/>
+              <a:buFont typeface="Arial"/>
+              <a:buNone/>
+            </a:pPr>
+            <a:endParaRPr sz="1400" b="0" i="0" u="none" strike="noStrike" cap="none">
+              <a:solidFill>
+                <a:schemeClr val="lt1"/>
+              </a:solidFill>
+              <a:latin typeface="Arial"/>
+              <a:ea typeface="Arial"/>
+              <a:cs typeface="Arial"/>
+              <a:sym typeface="Arial"/>
+            </a:endParaRPr>
+          </a:p>
+        </p:txBody>
+      </p:sp>
+      <p:sp>
+        <p:nvSpPr>
+          <p:cNvPr id="23" name="Google Shape;111;g2e3f79b3bfd_3_0">
+            <a:extLst>
+              <a:ext uri="{FF2B5EF4-FFF2-40B4-BE49-F238E27FC236}">
+                <a16:creationId xmlns:a16="http://schemas.microsoft.com/office/drawing/2014/main" id="{56B8B58A-AB16-FC6C-4248-7061947495FF}"/>
+              </a:ext>
+            </a:extLst>
+          </p:cNvPr>
+          <p:cNvSpPr/>
+          <p:nvPr/>
+        </p:nvSpPr>
+        <p:spPr>
+          <a:xfrm>
+            <a:off x="5093224" y="4116436"/>
+            <a:ext cx="174911" cy="297692"/>
+          </a:xfrm>
+          <a:prstGeom prst="rightArrow">
+            <a:avLst>
+              <a:gd name="adj1" fmla="val 50000"/>
+              <a:gd name="adj2" fmla="val 50000"/>
+            </a:avLst>
+          </a:prstGeom>
+          <a:solidFill>
+            <a:srgbClr val="C00000"/>
+          </a:solidFill>
+          <a:ln>
+            <a:noFill/>
+          </a:ln>
+        </p:spPr>
+        <p:txBody>
+          <a:bodyPr spcFirstLastPara="1" wrap="square" lIns="91425" tIns="45700" rIns="91425" bIns="45700" anchor="ctr" anchorCtr="0">
+            <a:noAutofit/>
+          </a:bodyPr>
+          <a:lstStyle/>
+          <a:p>
+            <a:pPr marL="0" marR="0" lvl="0" indent="0" algn="ctr" rtl="0">
+              <a:lnSpc>
+                <a:spcPct val="100000"/>
+              </a:lnSpc>
+              <a:spcBef>
+                <a:spcPts val="0"/>
+              </a:spcBef>
+              <a:spcAft>
+                <a:spcPts val="0"/>
+              </a:spcAft>
+              <a:buClr>
+                <a:srgbClr val="000000"/>
+              </a:buClr>
+              <a:buSzPts val="1400"/>
+              <a:buFont typeface="Arial"/>
+              <a:buNone/>
+            </a:pPr>
+            <a:endParaRPr sz="1400" b="0" i="0" u="none" strike="noStrike" cap="none">
+              <a:solidFill>
+                <a:schemeClr val="lt1"/>
+              </a:solidFill>
+              <a:latin typeface="Arial"/>
+              <a:ea typeface="Arial"/>
+              <a:cs typeface="Arial"/>
+              <a:sym typeface="Arial"/>
+            </a:endParaRPr>
+          </a:p>
+        </p:txBody>
+      </p:sp>
+      <p:sp>
+        <p:nvSpPr>
+          <p:cNvPr id="24" name="Google Shape;73;p3">
+            <a:extLst>
+              <a:ext uri="{FF2B5EF4-FFF2-40B4-BE49-F238E27FC236}">
+                <a16:creationId xmlns:a16="http://schemas.microsoft.com/office/drawing/2014/main" id="{3F9732E3-4982-9D73-E53B-ED7124F0A415}"/>
+              </a:ext>
+            </a:extLst>
+          </p:cNvPr>
+          <p:cNvSpPr txBox="1">
+            <a:spLocks/>
+          </p:cNvSpPr>
+          <p:nvPr/>
+        </p:nvSpPr>
+        <p:spPr>
+          <a:xfrm>
+            <a:off x="5120567" y="4072107"/>
+            <a:ext cx="3676413" cy="386350"/>
+          </a:xfrm>
+          <a:prstGeom prst="rect">
+            <a:avLst/>
+          </a:prstGeom>
+          <a:noFill/>
+          <a:ln>
+            <a:noFill/>
+          </a:ln>
+        </p:spPr>
+        <p:txBody>
+          <a:bodyPr spcFirstLastPara="1" wrap="square" lIns="91425" tIns="91425" rIns="91425" bIns="91425" anchor="t" anchorCtr="0">
+            <a:noAutofit/>
+          </a:bodyPr>
+          <a:lstStyle>
+            <a:defPPr marR="0" lvl="0" algn="l" rtl="0">
+              <a:lnSpc>
+                <a:spcPct val="100000"/>
+              </a:lnSpc>
+              <a:spcBef>
+                <a:spcPts val="0"/>
+              </a:spcBef>
+              <a:spcAft>
+                <a:spcPts val="0"/>
+              </a:spcAft>
+            </a:defPPr>
+            <a:lvl1pPr marL="457200" marR="0" lvl="0" indent="-342900" algn="l" rtl="0">
+              <a:lnSpc>
+                <a:spcPct val="115000"/>
+              </a:lnSpc>
+              <a:spcBef>
+                <a:spcPts val="0"/>
+              </a:spcBef>
+              <a:spcAft>
+                <a:spcPts val="0"/>
+              </a:spcAft>
+              <a:buClr>
+                <a:schemeClr val="dk2"/>
+              </a:buClr>
+              <a:buSzPts val="1800"/>
+              <a:buFont typeface="Arial"/>
+              <a:buChar char="●"/>
+              <a:defRPr sz="1800" b="0" i="0" u="none" strike="noStrike" cap="none">
+                <a:solidFill>
+                  <a:schemeClr val="dk2"/>
+                </a:solidFill>
+                <a:latin typeface="Arial"/>
+                <a:ea typeface="Arial"/>
+                <a:cs typeface="Arial"/>
+                <a:sym typeface="Arial"/>
+              </a:defRPr>
+            </a:lvl1pPr>
+            <a:lvl2pPr marL="914400" marR="0" lvl="1" indent="-317500" algn="l" rtl="0">
+              <a:lnSpc>
+                <a:spcPct val="115000"/>
+              </a:lnSpc>
+              <a:spcBef>
+                <a:spcPts val="1600"/>
+              </a:spcBef>
+              <a:spcAft>
+                <a:spcPts val="0"/>
+              </a:spcAft>
+              <a:buClr>
+                <a:schemeClr val="dk2"/>
+              </a:buClr>
+              <a:buSzPts val="1400"/>
+              <a:buFont typeface="Arial"/>
+              <a:buChar char="○"/>
+              <a:defRPr sz="1400" b="0" i="0" u="none" strike="noStrike" cap="none">
+                <a:solidFill>
+                  <a:schemeClr val="dk2"/>
+                </a:solidFill>
+                <a:latin typeface="Arial"/>
+                <a:ea typeface="Arial"/>
+                <a:cs typeface="Arial"/>
+                <a:sym typeface="Arial"/>
+              </a:defRPr>
+            </a:lvl2pPr>
+            <a:lvl3pPr marL="1371600" marR="0" lvl="2" indent="-317500" algn="l" rtl="0">
+              <a:lnSpc>
+                <a:spcPct val="115000"/>
+              </a:lnSpc>
+              <a:spcBef>
+                <a:spcPts val="1600"/>
+              </a:spcBef>
+              <a:spcAft>
+                <a:spcPts val="0"/>
+              </a:spcAft>
+              <a:buClr>
+                <a:schemeClr val="dk2"/>
+              </a:buClr>
+              <a:buSzPts val="1400"/>
+              <a:buFont typeface="Arial"/>
+              <a:buChar char="■"/>
+              <a:defRPr sz="1400" b="0" i="0" u="none" strike="noStrike" cap="none">
+                <a:solidFill>
+                  <a:schemeClr val="dk2"/>
+                </a:solidFill>
+                <a:latin typeface="Arial"/>
+                <a:ea typeface="Arial"/>
+                <a:cs typeface="Arial"/>
+                <a:sym typeface="Arial"/>
+              </a:defRPr>
+            </a:lvl3pPr>
+            <a:lvl4pPr marL="1828800" marR="0" lvl="3" indent="-317500" algn="l" rtl="0">
+              <a:lnSpc>
+                <a:spcPct val="115000"/>
+              </a:lnSpc>
+              <a:spcBef>
+                <a:spcPts val="1600"/>
+              </a:spcBef>
+              <a:spcAft>
+                <a:spcPts val="0"/>
+              </a:spcAft>
+              <a:buClr>
+                <a:schemeClr val="dk2"/>
+              </a:buClr>
+              <a:buSzPts val="1400"/>
+              <a:buFont typeface="Arial"/>
+              <a:buChar char="●"/>
+              <a:defRPr sz="1400" b="0" i="0" u="none" strike="noStrike" cap="none">
+                <a:solidFill>
+                  <a:schemeClr val="dk2"/>
+                </a:solidFill>
+                <a:latin typeface="Arial"/>
+                <a:ea typeface="Arial"/>
+                <a:cs typeface="Arial"/>
+                <a:sym typeface="Arial"/>
+              </a:defRPr>
+            </a:lvl4pPr>
+            <a:lvl5pPr marL="2286000" marR="0" lvl="4" indent="-317500" algn="l" rtl="0">
+              <a:lnSpc>
+                <a:spcPct val="115000"/>
+              </a:lnSpc>
+              <a:spcBef>
+                <a:spcPts val="1600"/>
+              </a:spcBef>
+              <a:spcAft>
+                <a:spcPts val="0"/>
+              </a:spcAft>
+              <a:buClr>
+                <a:schemeClr val="dk2"/>
+              </a:buClr>
+              <a:buSzPts val="1400"/>
+              <a:buFont typeface="Arial"/>
+              <a:buChar char="○"/>
+              <a:defRPr sz="1400" b="0" i="0" u="none" strike="noStrike" cap="none">
+                <a:solidFill>
+                  <a:schemeClr val="dk2"/>
+                </a:solidFill>
+                <a:latin typeface="Arial"/>
+                <a:ea typeface="Arial"/>
+                <a:cs typeface="Arial"/>
+                <a:sym typeface="Arial"/>
+              </a:defRPr>
+            </a:lvl5pPr>
+            <a:lvl6pPr marL="2743200" marR="0" lvl="5" indent="-317500" algn="l" rtl="0">
+              <a:lnSpc>
+                <a:spcPct val="115000"/>
+              </a:lnSpc>
+              <a:spcBef>
+                <a:spcPts val="1600"/>
+              </a:spcBef>
+              <a:spcAft>
+                <a:spcPts val="0"/>
+              </a:spcAft>
+              <a:buClr>
+                <a:schemeClr val="dk2"/>
+              </a:buClr>
+              <a:buSzPts val="1400"/>
+              <a:buFont typeface="Arial"/>
+              <a:buChar char="■"/>
+              <a:defRPr sz="1400" b="0" i="0" u="none" strike="noStrike" cap="none">
+                <a:solidFill>
+                  <a:schemeClr val="dk2"/>
+                </a:solidFill>
+                <a:latin typeface="Arial"/>
+                <a:ea typeface="Arial"/>
+                <a:cs typeface="Arial"/>
+                <a:sym typeface="Arial"/>
+              </a:defRPr>
+            </a:lvl6pPr>
+            <a:lvl7pPr marL="3200400" marR="0" lvl="6" indent="-317500" algn="l" rtl="0">
+              <a:lnSpc>
+                <a:spcPct val="115000"/>
+              </a:lnSpc>
+              <a:spcBef>
+                <a:spcPts val="1600"/>
+              </a:spcBef>
+              <a:spcAft>
+                <a:spcPts val="0"/>
+              </a:spcAft>
+              <a:buClr>
+                <a:schemeClr val="dk2"/>
+              </a:buClr>
+              <a:buSzPts val="1400"/>
+              <a:buFont typeface="Arial"/>
+              <a:buChar char="●"/>
+              <a:defRPr sz="1400" b="0" i="0" u="none" strike="noStrike" cap="none">
+                <a:solidFill>
+                  <a:schemeClr val="dk2"/>
+                </a:solidFill>
+                <a:latin typeface="Arial"/>
+                <a:ea typeface="Arial"/>
+                <a:cs typeface="Arial"/>
+                <a:sym typeface="Arial"/>
+              </a:defRPr>
+            </a:lvl7pPr>
+            <a:lvl8pPr marL="3657600" marR="0" lvl="7" indent="-317500" algn="l" rtl="0">
+              <a:lnSpc>
+                <a:spcPct val="115000"/>
+              </a:lnSpc>
+              <a:spcBef>
+                <a:spcPts val="1600"/>
+              </a:spcBef>
+              <a:spcAft>
+                <a:spcPts val="0"/>
+              </a:spcAft>
+              <a:buClr>
+                <a:schemeClr val="dk2"/>
+              </a:buClr>
+              <a:buSzPts val="1400"/>
+              <a:buFont typeface="Arial"/>
+              <a:buChar char="○"/>
+              <a:defRPr sz="1400" b="0" i="0" u="none" strike="noStrike" cap="none">
+                <a:solidFill>
+                  <a:schemeClr val="dk2"/>
+                </a:solidFill>
+                <a:latin typeface="Arial"/>
+                <a:ea typeface="Arial"/>
+                <a:cs typeface="Arial"/>
+                <a:sym typeface="Arial"/>
+              </a:defRPr>
+            </a:lvl8pPr>
+            <a:lvl9pPr marL="4114800" marR="0" lvl="8" indent="-317500" algn="l" rtl="0">
+              <a:lnSpc>
+                <a:spcPct val="115000"/>
+              </a:lnSpc>
+              <a:spcBef>
+                <a:spcPts val="1600"/>
+              </a:spcBef>
+              <a:spcAft>
+                <a:spcPts val="1600"/>
+              </a:spcAft>
+              <a:buClr>
+                <a:schemeClr val="dk2"/>
+              </a:buClr>
+              <a:buSzPts val="1400"/>
+              <a:buFont typeface="Arial"/>
+              <a:buChar char="■"/>
+              <a:defRPr sz="1400" b="0" i="0" u="none" strike="noStrike" cap="none">
+                <a:solidFill>
+                  <a:schemeClr val="dk2"/>
+                </a:solidFill>
+                <a:latin typeface="Arial"/>
+                <a:ea typeface="Arial"/>
+                <a:cs typeface="Arial"/>
+                <a:sym typeface="Arial"/>
+              </a:defRPr>
+            </a:lvl9pPr>
+          </a:lstStyle>
+          <a:p>
+            <a:pPr marL="114300" indent="0">
+              <a:buNone/>
+            </a:pPr>
+            <a:r>
+              <a:rPr lang="fr-FR" sz="1400" b="1" dirty="0"/>
+              <a:t>Entre 20 et 60% </a:t>
+            </a:r>
+            <a:r>
+              <a:rPr lang="fr-FR" sz="1400" dirty="0"/>
+              <a:t>= Production normale</a:t>
+            </a:r>
+            <a:endParaRPr lang="fr-FR" sz="1400" b="1" dirty="0">
+              <a:solidFill>
+                <a:srgbClr val="41545E"/>
+              </a:solidFill>
+            </a:endParaRPr>
+          </a:p>
+        </p:txBody>
+      </p:sp>
+    </p:spTree>
+  </p:cSld>
+  <p:clrMapOvr>
+    <a:masterClrMapping/>
+  </p:clrMapOvr>
+  <p:timing>
+    <p:tnLst>
+      <p:par>
+        <p:cTn id="1" dur="indefinite" restart="never" nodeType="tmRoot">
+          <p:childTnLst>
+            <p:seq concurrent="1" nextAc="seek">
+              <p:cTn id="2" dur="indefinite" nodeType="mainSeq">
+                <p:childTnLst>
+                  <p:par>
+                    <p:cTn id="3" fill="hold">
+                      <p:stCondLst>
+                        <p:cond delay="indefinite"/>
+                        <p:cond evt="onBegin" delay="0">
+                          <p:tn val="2"/>
+                        </p:cond>
+                      </p:stCondLst>
+                      <p:childTnLst>
+                        <p:par>
+                          <p:cTn id="4" fill="hold">
+                            <p:stCondLst>
+                              <p:cond delay="0"/>
+                            </p:stCondLst>
+                            <p:childTnLst>
+                              <p:par>
+                                <p:cTn id="5" presetID="1" presetClass="entr" presetSubtype="0" fill="hold" grpId="0" nodeType="withEffect">
+                                  <p:stCondLst>
+                                    <p:cond delay="0"/>
+                                  </p:stCondLst>
+                                  <p:childTnLst>
+                                    <p:set>
+                                      <p:cBhvr>
+                                        <p:cTn id="6" dur="1" fill="hold">
+                                          <p:stCondLst>
+                                            <p:cond delay="0"/>
+                                          </p:stCondLst>
+                                        </p:cTn>
+                                        <p:tgtEl>
+                                          <p:spTgt spid="15"/>
+                                        </p:tgtEl>
+                                        <p:attrNameLst>
+                                          <p:attrName>style.visibility</p:attrName>
+                                        </p:attrNameLst>
+                                      </p:cBhvr>
+                                      <p:to>
+                                        <p:strVal val="visible"/>
+                                      </p:to>
+                                    </p:set>
+                                  </p:childTnLst>
+                                </p:cTn>
+                              </p:par>
+                            </p:childTnLst>
+                          </p:cTn>
+                        </p:par>
+                      </p:childTnLst>
+                    </p:cTn>
+                  </p:par>
+                  <p:par>
+                    <p:cTn id="7" fill="hold">
+                      <p:stCondLst>
+                        <p:cond delay="indefinite"/>
+                      </p:stCondLst>
+                      <p:childTnLst>
+                        <p:par>
+                          <p:cTn id="8" fill="hold">
+                            <p:stCondLst>
+                              <p:cond delay="0"/>
+                            </p:stCondLst>
+                            <p:childTnLst>
+                              <p:par>
+                                <p:cTn id="9" presetID="1" presetClass="entr" presetSubtype="0" fill="hold" grpId="0" nodeType="clickEffect">
+                                  <p:stCondLst>
+                                    <p:cond delay="0"/>
+                                  </p:stCondLst>
+                                  <p:childTnLst>
+                                    <p:set>
+                                      <p:cBhvr>
+                                        <p:cTn id="10" dur="1" fill="hold">
+                                          <p:stCondLst>
+                                            <p:cond delay="0"/>
+                                          </p:stCondLst>
+                                        </p:cTn>
+                                        <p:tgtEl>
+                                          <p:spTgt spid="22"/>
+                                        </p:tgtEl>
+                                        <p:attrNameLst>
+                                          <p:attrName>style.visibility</p:attrName>
+                                        </p:attrNameLst>
+                                      </p:cBhvr>
+                                      <p:to>
+                                        <p:strVal val="visible"/>
+                                      </p:to>
+                                    </p:set>
+                                  </p:childTnLst>
+                                </p:cTn>
+                              </p:par>
+                              <p:par>
+                                <p:cTn id="11" presetID="1" presetClass="entr" presetSubtype="0" fill="hold" grpId="0" nodeType="withEffect">
+                                  <p:stCondLst>
+                                    <p:cond delay="0"/>
+                                  </p:stCondLst>
+                                  <p:childTnLst>
+                                    <p:set>
+                                      <p:cBhvr>
+                                        <p:cTn id="12" dur="1" fill="hold">
+                                          <p:stCondLst>
+                                            <p:cond delay="0"/>
+                                          </p:stCondLst>
+                                        </p:cTn>
+                                        <p:tgtEl>
+                                          <p:spTgt spid="20"/>
+                                        </p:tgtEl>
+                                        <p:attrNameLst>
+                                          <p:attrName>style.visibility</p:attrName>
+                                        </p:attrNameLst>
+                                      </p:cBhvr>
+                                      <p:to>
+                                        <p:strVal val="visible"/>
+                                      </p:to>
+                                    </p:set>
+                                  </p:childTnLst>
+                                </p:cTn>
+                              </p:par>
+                            </p:childTnLst>
+                          </p:cTn>
+                        </p:par>
+                      </p:childTnLst>
+                    </p:cTn>
+                  </p:par>
+                  <p:par>
+                    <p:cTn id="13" fill="hold">
+                      <p:stCondLst>
+                        <p:cond delay="indefinite"/>
+                      </p:stCondLst>
+                      <p:childTnLst>
+                        <p:par>
+                          <p:cTn id="14" fill="hold">
+                            <p:stCondLst>
+                              <p:cond delay="0"/>
+                            </p:stCondLst>
+                            <p:childTnLst>
+                              <p:par>
+                                <p:cTn id="15" presetID="1" presetClass="entr" presetSubtype="0" fill="hold" grpId="0" nodeType="clickEffect">
+                                  <p:stCondLst>
+                                    <p:cond delay="0"/>
+                                  </p:stCondLst>
+                                  <p:childTnLst>
+                                    <p:set>
+                                      <p:cBhvr>
+                                        <p:cTn id="16" dur="1" fill="hold">
+                                          <p:stCondLst>
+                                            <p:cond delay="0"/>
+                                          </p:stCondLst>
+                                        </p:cTn>
+                                        <p:tgtEl>
+                                          <p:spTgt spid="23"/>
+                                        </p:tgtEl>
+                                        <p:attrNameLst>
+                                          <p:attrName>style.visibility</p:attrName>
+                                        </p:attrNameLst>
+                                      </p:cBhvr>
+                                      <p:to>
+                                        <p:strVal val="visible"/>
+                                      </p:to>
+                                    </p:set>
+                                  </p:childTnLst>
+                                </p:cTn>
+                              </p:par>
+                              <p:par>
+                                <p:cTn id="17" presetID="1" presetClass="entr" presetSubtype="0" fill="hold" grpId="0" nodeType="withEffect">
+                                  <p:stCondLst>
+                                    <p:cond delay="0"/>
+                                  </p:stCondLst>
+                                  <p:childTnLst>
+                                    <p:set>
+                                      <p:cBhvr>
+                                        <p:cTn id="18" dur="1" fill="hold">
+                                          <p:stCondLst>
+                                            <p:cond delay="0"/>
+                                          </p:stCondLst>
+                                        </p:cTn>
+                                        <p:tgtEl>
+                                          <p:spTgt spid="24"/>
+                                        </p:tgtEl>
+                                        <p:attrNameLst>
+                                          <p:attrName>style.visibility</p:attrName>
+                                        </p:attrNameLst>
+                                      </p:cBhvr>
+                                      <p:to>
+                                        <p:strVal val="visible"/>
+                                      </p:to>
+                                    </p:set>
+                                  </p:childTnLst>
+                                </p:cTn>
+                              </p:par>
+                            </p:childTnLst>
+                          </p:cTn>
+                        </p:par>
+                      </p:childTnLst>
+                    </p:cTn>
+                  </p:par>
+                </p:childTnLst>
+              </p:cTn>
+              <p:prevCondLst>
+                <p:cond evt="onPrev" delay="0">
+                  <p:tgtEl>
+                    <p:sldTgt/>
+                  </p:tgtEl>
+                </p:cond>
+              </p:prevCondLst>
+              <p:nextCondLst>
+                <p:cond evt="onNext" delay="0">
+                  <p:tgtEl>
+                    <p:sldTgt/>
+                  </p:tgtEl>
+                </p:cond>
+              </p:nextCondLst>
+            </p:seq>
+          </p:childTnLst>
+        </p:cTn>
+      </p:par>
+    </p:tnLst>
+    <p:bldLst>
+      <p:bldP spid="15" grpId="0" animBg="1"/>
+      <p:bldP spid="20" grpId="0"/>
+      <p:bldP spid="22" grpId="0" animBg="1"/>
+      <p:bldP spid="23" grpId="0" animBg="1"/>
+      <p:bldP spid="24" grpId="0"/>
+    </p:bldLst>
+  </p:timing>
+</p:sld>
+</file>
+
+<file path=ppt/slides/slide4.xml><?xml version="1.0" encoding="utf-8"?>
 <p:sld xmlns:a="http://schemas.openxmlformats.org/drawingml/2006/main" xmlns:r="http://schemas.openxmlformats.org/officeDocument/2006/relationships" xmlns:p="http://schemas.openxmlformats.org/presentationml/2006/main">
   <p:cSld>
     <p:spTree>
@@ -25269,7 +27952,7 @@
 </p:sld>
 </file>
 
-<file path=ppt/slides/slide4.xml><?xml version="1.0" encoding="utf-8"?>
+<file path=ppt/slides/slide5.xml><?xml version="1.0" encoding="utf-8"?>
 <p:sld xmlns:a="http://schemas.openxmlformats.org/drawingml/2006/main" xmlns:r="http://schemas.openxmlformats.org/officeDocument/2006/relationships" xmlns:p="http://schemas.openxmlformats.org/presentationml/2006/main">
   <p:cSld>
     <p:spTree>
@@ -27807,7 +30490,7 @@
 </p:sld>
 </file>
 
-<file path=ppt/slides/slide5.xml><?xml version="1.0" encoding="utf-8"?>
+<file path=ppt/slides/slide6.xml><?xml version="1.0" encoding="utf-8"?>
 <p:sld xmlns:a="http://schemas.openxmlformats.org/drawingml/2006/main" xmlns:r="http://schemas.openxmlformats.org/officeDocument/2006/relationships" xmlns:p="http://schemas.openxmlformats.org/presentationml/2006/main">
   <p:cSld>
     <p:spTree>
@@ -32235,7 +34918,7 @@
 </p:sld>
 </file>
 
-<file path=ppt/slides/slide6.xml><?xml version="1.0" encoding="utf-8"?>
+<file path=ppt/slides/slide7.xml><?xml version="1.0" encoding="utf-8"?>
 <p:sld xmlns:a="http://schemas.openxmlformats.org/drawingml/2006/main" xmlns:r="http://schemas.openxmlformats.org/officeDocument/2006/relationships" xmlns:p="http://schemas.openxmlformats.org/presentationml/2006/main">
   <p:cSld>
     <p:spTree>
@@ -34301,7 +36984,7 @@
 </p:sld>
 </file>
 
-<file path=ppt/slides/slide7.xml><?xml version="1.0" encoding="utf-8"?>
+<file path=ppt/slides/slide8.xml><?xml version="1.0" encoding="utf-8"?>
 <p:sld xmlns:a="http://schemas.openxmlformats.org/drawingml/2006/main" xmlns:r="http://schemas.openxmlformats.org/officeDocument/2006/relationships" xmlns:p="http://schemas.openxmlformats.org/presentationml/2006/main">
   <p:cSld>
     <p:spTree>
@@ -36394,7 +39077,7 @@
 </p:sld>
 </file>
 
-<file path=ppt/slides/slide8.xml><?xml version="1.0" encoding="utf-8"?>
+<file path=ppt/slides/slide9.xml><?xml version="1.0" encoding="utf-8"?>
 <p:sld xmlns:a="http://schemas.openxmlformats.org/drawingml/2006/main" xmlns:r="http://schemas.openxmlformats.org/officeDocument/2006/relationships" xmlns:p="http://schemas.openxmlformats.org/presentationml/2006/main">
   <p:cSld>
     <p:spTree>
@@ -36973,594 +39656,6 @@
     <p:extLst>
       <p:ext uri="{BB962C8B-B14F-4D97-AF65-F5344CB8AC3E}">
         <p14:creationId xmlns:p14="http://schemas.microsoft.com/office/powerpoint/2010/main" val="2290935718"/>
-      </p:ext>
-    </p:extLst>
-  </p:cSld>
-  <p:clrMapOvr>
-    <a:masterClrMapping/>
-  </p:clrMapOvr>
-</p:sld>
-</file>
-
-<file path=ppt/slides/slide9.xml><?xml version="1.0" encoding="utf-8"?>
-<p:sld xmlns:a="http://schemas.openxmlformats.org/drawingml/2006/main" xmlns:r="http://schemas.openxmlformats.org/officeDocument/2006/relationships" xmlns:p="http://schemas.openxmlformats.org/presentationml/2006/main">
-  <p:cSld>
-    <p:spTree>
-      <p:nvGrpSpPr>
-        <p:cNvPr id="1" name="Shape 177">
-          <a:extLst>
-            <a:ext uri="{FF2B5EF4-FFF2-40B4-BE49-F238E27FC236}">
-              <a16:creationId xmlns:a16="http://schemas.microsoft.com/office/drawing/2014/main" id="{C0DE9A44-9CF9-E733-9B6A-0F7633CFBC85}"/>
-            </a:ext>
-          </a:extLst>
-        </p:cNvPr>
-        <p:cNvGrpSpPr/>
-        <p:nvPr/>
-      </p:nvGrpSpPr>
-      <p:grpSpPr>
-        <a:xfrm>
-          <a:off x="0" y="0"/>
-          <a:ext cx="0" cy="0"/>
-          <a:chOff x="0" y="0"/>
-          <a:chExt cx="0" cy="0"/>
-        </a:xfrm>
-      </p:grpSpPr>
-      <p:sp>
-        <p:nvSpPr>
-          <p:cNvPr id="178" name="Google Shape;178;p8">
-            <a:extLst>
-              <a:ext uri="{FF2B5EF4-FFF2-40B4-BE49-F238E27FC236}">
-                <a16:creationId xmlns:a16="http://schemas.microsoft.com/office/drawing/2014/main" id="{1DE246AA-5B17-33A5-5EF2-125E8EA81EFC}"/>
-              </a:ext>
-            </a:extLst>
-          </p:cNvPr>
-          <p:cNvSpPr txBox="1">
-            <a:spLocks noGrp="1"/>
-          </p:cNvSpPr>
-          <p:nvPr>
-            <p:ph type="ctrTitle" idx="4294967295"/>
-          </p:nvPr>
-        </p:nvSpPr>
-        <p:spPr>
-          <a:xfrm>
-            <a:off x="1192664" y="403309"/>
-            <a:ext cx="5315100" cy="533100"/>
-          </a:xfrm>
-          <a:prstGeom prst="rect">
-            <a:avLst/>
-          </a:prstGeom>
-          <a:noFill/>
-          <a:ln>
-            <a:noFill/>
-          </a:ln>
-        </p:spPr>
-        <p:txBody>
-          <a:bodyPr spcFirstLastPara="1" wrap="square" lIns="91425" tIns="91425" rIns="91425" bIns="91425" anchor="t" anchorCtr="0">
-            <a:noAutofit/>
-          </a:bodyPr>
-          <a:lstStyle/>
-          <a:p>
-            <a:r>
-              <a:rPr lang="fr-FR" sz="2500" dirty="0">
-                <a:solidFill>
-                  <a:srgbClr val="0E3449"/>
-                </a:solidFill>
-                <a:latin typeface="Inter SemiBold"/>
-                <a:ea typeface="Inter SemiBold"/>
-              </a:rPr>
-              <a:t>Résultats du modèle</a:t>
-            </a:r>
-            <a:endParaRPr sz="2500" dirty="0">
-              <a:solidFill>
-                <a:srgbClr val="0E3449"/>
-              </a:solidFill>
-              <a:latin typeface="Inter SemiBold"/>
-              <a:ea typeface="Inter SemiBold"/>
-              <a:sym typeface="Inter SemiBold"/>
-            </a:endParaRPr>
-          </a:p>
-        </p:txBody>
-      </p:sp>
-      <p:pic>
-        <p:nvPicPr>
-          <p:cNvPr id="179" name="Google Shape;179;p8">
-            <a:extLst>
-              <a:ext uri="{FF2B5EF4-FFF2-40B4-BE49-F238E27FC236}">
-                <a16:creationId xmlns:a16="http://schemas.microsoft.com/office/drawing/2014/main" id="{9E380506-1D6F-31B2-517B-D06D18BF62B0}"/>
-              </a:ext>
-            </a:extLst>
-          </p:cNvPr>
-          <p:cNvPicPr preferRelativeResize="0"/>
-          <p:nvPr/>
-        </p:nvPicPr>
-        <p:blipFill rotWithShape="1">
-          <a:blip r:embed="rId3">
-            <a:alphaModFix/>
-          </a:blip>
-          <a:srcRect/>
-          <a:stretch/>
-        </p:blipFill>
-        <p:spPr>
-          <a:xfrm>
-            <a:off x="463375" y="482852"/>
-            <a:ext cx="576900" cy="385904"/>
-          </a:xfrm>
-          <a:prstGeom prst="rect">
-            <a:avLst/>
-          </a:prstGeom>
-          <a:noFill/>
-          <a:ln>
-            <a:noFill/>
-          </a:ln>
-        </p:spPr>
-      </p:pic>
-      <p:sp>
-        <p:nvSpPr>
-          <p:cNvPr id="180" name="Google Shape;180;p8">
-            <a:extLst>
-              <a:ext uri="{FF2B5EF4-FFF2-40B4-BE49-F238E27FC236}">
-                <a16:creationId xmlns:a16="http://schemas.microsoft.com/office/drawing/2014/main" id="{B33B5780-2AE1-5BF1-2FBD-D258D73D14AD}"/>
-              </a:ext>
-            </a:extLst>
-          </p:cNvPr>
-          <p:cNvSpPr/>
-          <p:nvPr/>
-        </p:nvSpPr>
-        <p:spPr>
-          <a:xfrm>
-            <a:off x="10225" y="4892025"/>
-            <a:ext cx="9144000" cy="251400"/>
-          </a:xfrm>
-          <a:prstGeom prst="rect">
-            <a:avLst/>
-          </a:prstGeom>
-          <a:solidFill>
-            <a:srgbClr val="C3FFFC"/>
-          </a:solidFill>
-          <a:ln>
-            <a:noFill/>
-          </a:ln>
-        </p:spPr>
-        <p:txBody>
-          <a:bodyPr spcFirstLastPara="1" wrap="square" lIns="91425" tIns="91425" rIns="91425" bIns="91425" anchor="ctr" anchorCtr="0">
-            <a:noAutofit/>
-          </a:bodyPr>
-          <a:lstStyle/>
-          <a:p>
-            <a:pPr marL="0" marR="0" lvl="0" indent="0" algn="l" rtl="0">
-              <a:lnSpc>
-                <a:spcPct val="100000"/>
-              </a:lnSpc>
-              <a:spcBef>
-                <a:spcPts val="0"/>
-              </a:spcBef>
-              <a:spcAft>
-                <a:spcPts val="0"/>
-              </a:spcAft>
-              <a:buClr>
-                <a:srgbClr val="000000"/>
-              </a:buClr>
-              <a:buSzPts val="1400"/>
-              <a:buFont typeface="Arial"/>
-              <a:buNone/>
-            </a:pPr>
-            <a:endParaRPr sz="1400" b="0" i="0" u="none" strike="noStrike" cap="none">
-              <a:solidFill>
-                <a:srgbClr val="000000"/>
-              </a:solidFill>
-              <a:latin typeface="Arial"/>
-              <a:ea typeface="Arial"/>
-              <a:cs typeface="Arial"/>
-              <a:sym typeface="Arial"/>
-            </a:endParaRPr>
-          </a:p>
-        </p:txBody>
-      </p:sp>
-      <p:sp>
-        <p:nvSpPr>
-          <p:cNvPr id="2" name="Google Shape;178;p8">
-            <a:extLst>
-              <a:ext uri="{FF2B5EF4-FFF2-40B4-BE49-F238E27FC236}">
-                <a16:creationId xmlns:a16="http://schemas.microsoft.com/office/drawing/2014/main" id="{010F41C2-7624-67DE-B008-1F392C11A870}"/>
-              </a:ext>
-            </a:extLst>
-          </p:cNvPr>
-          <p:cNvSpPr txBox="1">
-            <a:spLocks/>
-          </p:cNvSpPr>
-          <p:nvPr/>
-        </p:nvSpPr>
-        <p:spPr>
-          <a:xfrm>
-            <a:off x="1192664" y="779179"/>
-            <a:ext cx="5315100" cy="375870"/>
-          </a:xfrm>
-          <a:prstGeom prst="rect">
-            <a:avLst/>
-          </a:prstGeom>
-          <a:noFill/>
-          <a:ln>
-            <a:noFill/>
-          </a:ln>
-        </p:spPr>
-        <p:txBody>
-          <a:bodyPr spcFirstLastPara="1" wrap="square" lIns="91425" tIns="91425" rIns="91425" bIns="91425" anchor="t" anchorCtr="0">
-            <a:noAutofit/>
-          </a:bodyPr>
-          <a:lstStyle>
-            <a:defPPr marR="0" lvl="0" algn="l" rtl="0">
-              <a:lnSpc>
-                <a:spcPct val="100000"/>
-              </a:lnSpc>
-              <a:spcBef>
-                <a:spcPts val="0"/>
-              </a:spcBef>
-              <a:spcAft>
-                <a:spcPts val="0"/>
-              </a:spcAft>
-            </a:defPPr>
-            <a:lvl1pPr marR="0" lvl="0" algn="l" rtl="0">
-              <a:lnSpc>
-                <a:spcPct val="100000"/>
-              </a:lnSpc>
-              <a:spcBef>
-                <a:spcPts val="0"/>
-              </a:spcBef>
-              <a:spcAft>
-                <a:spcPts val="0"/>
-              </a:spcAft>
-              <a:buClr>
-                <a:schemeClr val="dk1"/>
-              </a:buClr>
-              <a:buSzPts val="2800"/>
-              <a:buFont typeface="Arial"/>
-              <a:buNone/>
-              <a:defRPr sz="2800" b="0" i="0" u="none" strike="noStrike" cap="none">
-                <a:solidFill>
-                  <a:schemeClr val="dk1"/>
-                </a:solidFill>
-                <a:latin typeface="Arial"/>
-                <a:ea typeface="Arial"/>
-                <a:cs typeface="Arial"/>
-                <a:sym typeface="Arial"/>
-              </a:defRPr>
-            </a:lvl1pPr>
-            <a:lvl2pPr marR="0" lvl="1" algn="l" rtl="0">
-              <a:lnSpc>
-                <a:spcPct val="100000"/>
-              </a:lnSpc>
-              <a:spcBef>
-                <a:spcPts val="0"/>
-              </a:spcBef>
-              <a:spcAft>
-                <a:spcPts val="0"/>
-              </a:spcAft>
-              <a:buClr>
-                <a:schemeClr val="dk1"/>
-              </a:buClr>
-              <a:buSzPts val="2800"/>
-              <a:buFont typeface="Arial"/>
-              <a:buNone/>
-              <a:defRPr sz="2800" b="0" i="0" u="none" strike="noStrike" cap="none">
-                <a:solidFill>
-                  <a:schemeClr val="dk1"/>
-                </a:solidFill>
-                <a:latin typeface="Arial"/>
-                <a:ea typeface="Arial"/>
-                <a:cs typeface="Arial"/>
-                <a:sym typeface="Arial"/>
-              </a:defRPr>
-            </a:lvl2pPr>
-            <a:lvl3pPr marR="0" lvl="2" algn="l" rtl="0">
-              <a:lnSpc>
-                <a:spcPct val="100000"/>
-              </a:lnSpc>
-              <a:spcBef>
-                <a:spcPts val="0"/>
-              </a:spcBef>
-              <a:spcAft>
-                <a:spcPts val="0"/>
-              </a:spcAft>
-              <a:buClr>
-                <a:schemeClr val="dk1"/>
-              </a:buClr>
-              <a:buSzPts val="2800"/>
-              <a:buFont typeface="Arial"/>
-              <a:buNone/>
-              <a:defRPr sz="2800" b="0" i="0" u="none" strike="noStrike" cap="none">
-                <a:solidFill>
-                  <a:schemeClr val="dk1"/>
-                </a:solidFill>
-                <a:latin typeface="Arial"/>
-                <a:ea typeface="Arial"/>
-                <a:cs typeface="Arial"/>
-                <a:sym typeface="Arial"/>
-              </a:defRPr>
-            </a:lvl3pPr>
-            <a:lvl4pPr marR="0" lvl="3" algn="l" rtl="0">
-              <a:lnSpc>
-                <a:spcPct val="100000"/>
-              </a:lnSpc>
-              <a:spcBef>
-                <a:spcPts val="0"/>
-              </a:spcBef>
-              <a:spcAft>
-                <a:spcPts val="0"/>
-              </a:spcAft>
-              <a:buClr>
-                <a:schemeClr val="dk1"/>
-              </a:buClr>
-              <a:buSzPts val="2800"/>
-              <a:buFont typeface="Arial"/>
-              <a:buNone/>
-              <a:defRPr sz="2800" b="0" i="0" u="none" strike="noStrike" cap="none">
-                <a:solidFill>
-                  <a:schemeClr val="dk1"/>
-                </a:solidFill>
-                <a:latin typeface="Arial"/>
-                <a:ea typeface="Arial"/>
-                <a:cs typeface="Arial"/>
-                <a:sym typeface="Arial"/>
-              </a:defRPr>
-            </a:lvl4pPr>
-            <a:lvl5pPr marR="0" lvl="4" algn="l" rtl="0">
-              <a:lnSpc>
-                <a:spcPct val="100000"/>
-              </a:lnSpc>
-              <a:spcBef>
-                <a:spcPts val="0"/>
-              </a:spcBef>
-              <a:spcAft>
-                <a:spcPts val="0"/>
-              </a:spcAft>
-              <a:buClr>
-                <a:schemeClr val="dk1"/>
-              </a:buClr>
-              <a:buSzPts val="2800"/>
-              <a:buFont typeface="Arial"/>
-              <a:buNone/>
-              <a:defRPr sz="2800" b="0" i="0" u="none" strike="noStrike" cap="none">
-                <a:solidFill>
-                  <a:schemeClr val="dk1"/>
-                </a:solidFill>
-                <a:latin typeface="Arial"/>
-                <a:ea typeface="Arial"/>
-                <a:cs typeface="Arial"/>
-                <a:sym typeface="Arial"/>
-              </a:defRPr>
-            </a:lvl5pPr>
-            <a:lvl6pPr marR="0" lvl="5" algn="l" rtl="0">
-              <a:lnSpc>
-                <a:spcPct val="100000"/>
-              </a:lnSpc>
-              <a:spcBef>
-                <a:spcPts val="0"/>
-              </a:spcBef>
-              <a:spcAft>
-                <a:spcPts val="0"/>
-              </a:spcAft>
-              <a:buClr>
-                <a:schemeClr val="dk1"/>
-              </a:buClr>
-              <a:buSzPts val="2800"/>
-              <a:buFont typeface="Arial"/>
-              <a:buNone/>
-              <a:defRPr sz="2800" b="0" i="0" u="none" strike="noStrike" cap="none">
-                <a:solidFill>
-                  <a:schemeClr val="dk1"/>
-                </a:solidFill>
-                <a:latin typeface="Arial"/>
-                <a:ea typeface="Arial"/>
-                <a:cs typeface="Arial"/>
-                <a:sym typeface="Arial"/>
-              </a:defRPr>
-            </a:lvl6pPr>
-            <a:lvl7pPr marR="0" lvl="6" algn="l" rtl="0">
-              <a:lnSpc>
-                <a:spcPct val="100000"/>
-              </a:lnSpc>
-              <a:spcBef>
-                <a:spcPts val="0"/>
-              </a:spcBef>
-              <a:spcAft>
-                <a:spcPts val="0"/>
-              </a:spcAft>
-              <a:buClr>
-                <a:schemeClr val="dk1"/>
-              </a:buClr>
-              <a:buSzPts val="2800"/>
-              <a:buFont typeface="Arial"/>
-              <a:buNone/>
-              <a:defRPr sz="2800" b="0" i="0" u="none" strike="noStrike" cap="none">
-                <a:solidFill>
-                  <a:schemeClr val="dk1"/>
-                </a:solidFill>
-                <a:latin typeface="Arial"/>
-                <a:ea typeface="Arial"/>
-                <a:cs typeface="Arial"/>
-                <a:sym typeface="Arial"/>
-              </a:defRPr>
-            </a:lvl7pPr>
-            <a:lvl8pPr marR="0" lvl="7" algn="l" rtl="0">
-              <a:lnSpc>
-                <a:spcPct val="100000"/>
-              </a:lnSpc>
-              <a:spcBef>
-                <a:spcPts val="0"/>
-              </a:spcBef>
-              <a:spcAft>
-                <a:spcPts val="0"/>
-              </a:spcAft>
-              <a:buClr>
-                <a:schemeClr val="dk1"/>
-              </a:buClr>
-              <a:buSzPts val="2800"/>
-              <a:buFont typeface="Arial"/>
-              <a:buNone/>
-              <a:defRPr sz="2800" b="0" i="0" u="none" strike="noStrike" cap="none">
-                <a:solidFill>
-                  <a:schemeClr val="dk1"/>
-                </a:solidFill>
-                <a:latin typeface="Arial"/>
-                <a:ea typeface="Arial"/>
-                <a:cs typeface="Arial"/>
-                <a:sym typeface="Arial"/>
-              </a:defRPr>
-            </a:lvl8pPr>
-            <a:lvl9pPr marR="0" lvl="8" algn="l" rtl="0">
-              <a:lnSpc>
-                <a:spcPct val="100000"/>
-              </a:lnSpc>
-              <a:spcBef>
-                <a:spcPts val="0"/>
-              </a:spcBef>
-              <a:spcAft>
-                <a:spcPts val="0"/>
-              </a:spcAft>
-              <a:buClr>
-                <a:schemeClr val="dk1"/>
-              </a:buClr>
-              <a:buSzPts val="2800"/>
-              <a:buFont typeface="Arial"/>
-              <a:buNone/>
-              <a:defRPr sz="2800" b="0" i="0" u="none" strike="noStrike" cap="none">
-                <a:solidFill>
-                  <a:schemeClr val="dk1"/>
-                </a:solidFill>
-                <a:latin typeface="Arial"/>
-                <a:ea typeface="Arial"/>
-                <a:cs typeface="Arial"/>
-                <a:sym typeface="Arial"/>
-              </a:defRPr>
-            </a:lvl9pPr>
-          </a:lstStyle>
-          <a:p>
-            <a:r>
-              <a:rPr lang="fr-FR" sz="1400" b="1" dirty="0">
-                <a:solidFill>
-                  <a:srgbClr val="0E3449"/>
-                </a:solidFill>
-                <a:latin typeface="Inter SemiBold"/>
-                <a:ea typeface="Inter SemiBold"/>
-              </a:rPr>
-              <a:t>Prévision sur 3 jours</a:t>
-            </a:r>
-            <a:endParaRPr lang="fr-FR" sz="1400" b="1" dirty="0">
-              <a:solidFill>
-                <a:srgbClr val="0E3449"/>
-              </a:solidFill>
-              <a:latin typeface="Inter SemiBold"/>
-              <a:ea typeface="Inter SemiBold"/>
-              <a:sym typeface="Inter SemiBold"/>
-            </a:endParaRPr>
-          </a:p>
-        </p:txBody>
-      </p:sp>
-      <p:sp>
-        <p:nvSpPr>
-          <p:cNvPr id="3" name="Google Shape;181;p8">
-            <a:extLst>
-              <a:ext uri="{FF2B5EF4-FFF2-40B4-BE49-F238E27FC236}">
-                <a16:creationId xmlns:a16="http://schemas.microsoft.com/office/drawing/2014/main" id="{4CE4F7BC-7633-613C-E54B-260F1EA040A9}"/>
-              </a:ext>
-            </a:extLst>
-          </p:cNvPr>
-          <p:cNvSpPr txBox="1">
-            <a:spLocks noGrp="1"/>
-          </p:cNvSpPr>
-          <p:nvPr>
-            <p:ph type="body" idx="1"/>
-          </p:nvPr>
-        </p:nvSpPr>
-        <p:spPr>
-          <a:xfrm>
-            <a:off x="311700" y="1155049"/>
-            <a:ext cx="8520600" cy="3585142"/>
-          </a:xfrm>
-          <a:prstGeom prst="rect">
-            <a:avLst/>
-          </a:prstGeom>
-          <a:noFill/>
-          <a:ln>
-            <a:noFill/>
-          </a:ln>
-        </p:spPr>
-        <p:txBody>
-          <a:bodyPr spcFirstLastPara="1" wrap="square" lIns="91425" tIns="91425" rIns="91425" bIns="91425" anchor="t" anchorCtr="0">
-            <a:noAutofit/>
-          </a:bodyPr>
-          <a:lstStyle/>
-          <a:p>
-            <a:pPr marL="114300" lvl="0" indent="0" algn="l" rtl="0">
-              <a:lnSpc>
-                <a:spcPct val="115000"/>
-              </a:lnSpc>
-              <a:spcBef>
-                <a:spcPts val="0"/>
-              </a:spcBef>
-              <a:spcAft>
-                <a:spcPts val="0"/>
-              </a:spcAft>
-              <a:buSzPts val="1800"/>
-              <a:buNone/>
-            </a:pPr>
-            <a:r>
-              <a:rPr lang="fr-FR" sz="1400" dirty="0" err="1"/>
-              <a:t>wwwww</a:t>
-            </a:r>
-            <a:endParaRPr sz="1400" dirty="0"/>
-          </a:p>
-        </p:txBody>
-      </p:sp>
-      <p:sp>
-        <p:nvSpPr>
-          <p:cNvPr id="4" name="ZoneTexte 3">
-            <a:extLst>
-              <a:ext uri="{FF2B5EF4-FFF2-40B4-BE49-F238E27FC236}">
-                <a16:creationId xmlns:a16="http://schemas.microsoft.com/office/drawing/2014/main" id="{AE6C0F5D-5C4B-4C9E-FDE6-2854D7F6D149}"/>
-              </a:ext>
-            </a:extLst>
-          </p:cNvPr>
-          <p:cNvSpPr txBox="1"/>
-          <p:nvPr/>
-        </p:nvSpPr>
-        <p:spPr>
-          <a:xfrm rot="1388443">
-            <a:off x="4673601" y="2279362"/>
-            <a:ext cx="3244850" cy="584775"/>
-          </a:xfrm>
-          <a:prstGeom prst="rect">
-            <a:avLst/>
-          </a:prstGeom>
-          <a:noFill/>
-          <a:ln>
-            <a:solidFill>
-              <a:srgbClr val="FF0000"/>
-            </a:solidFill>
-          </a:ln>
-        </p:spPr>
-        <p:txBody>
-          <a:bodyPr wrap="square" rtlCol="0">
-            <a:spAutoFit/>
-          </a:bodyPr>
-          <a:lstStyle/>
-          <a:p>
-            <a:pPr algn="ctr"/>
-            <a:r>
-              <a:rPr lang="fr-FR" sz="3200" dirty="0">
-                <a:solidFill>
-                  <a:srgbClr val="FF0000"/>
-                </a:solidFill>
-              </a:rPr>
-              <a:t>A mettre à jour</a:t>
-            </a:r>
-          </a:p>
-        </p:txBody>
-      </p:sp>
-    </p:spTree>
-    <p:extLst>
-      <p:ext uri="{BB962C8B-B14F-4D97-AF65-F5344CB8AC3E}">
-        <p14:creationId xmlns:p14="http://schemas.microsoft.com/office/powerpoint/2010/main" val="3332770"/>
       </p:ext>
     </p:extLst>
   </p:cSld>

--- a/presentation/dsfs_ft_36_Projet_REnergies_efficiency_prediction.pptx
+++ b/presentation/dsfs_ft_36_Projet_REnergies_efficiency_prediction.pptx
@@ -292,7 +292,7 @@
 <file path=ppt/revisionInfo.xml><?xml version="1.0" encoding="utf-8"?>
 <p1510:revInfo xmlns:a="http://schemas.openxmlformats.org/drawingml/2006/main" xmlns:r="http://schemas.openxmlformats.org/officeDocument/2006/relationships" xmlns:p1510="http://schemas.microsoft.com/office/powerpoint/2015/10/main">
   <p1510:revLst>
-    <p1510:client id="{2EB72A00-7F79-4813-B4C2-C6564860F3F6}" v="1790" dt="2025-11-21T12:05:04.372"/>
+    <p1510:client id="{2EB72A00-7F79-4813-B4C2-C6564860F3F6}" v="1851" dt="2025-11-21T14:58:21.376"/>
   </p1510:revLst>
 </p1510:revInfo>
 </file>
@@ -302,7 +302,7 @@
   <pc:docChgLst>
     <pc:chgData name="Jean-Yves Vuillequez" userId="e7fac481abea6bd0" providerId="LiveId" clId="{79E365E8-22BC-4EC2-9606-9A9AC6CD1D22}"/>
     <pc:docChg chg="undo custSel addSld delSld modSld sldOrd">
-      <pc:chgData name="Jean-Yves Vuillequez" userId="e7fac481abea6bd0" providerId="LiveId" clId="{79E365E8-22BC-4EC2-9606-9A9AC6CD1D22}" dt="2025-11-21T12:06:38.436" v="6160" actId="108"/>
+      <pc:chgData name="Jean-Yves Vuillequez" userId="e7fac481abea6bd0" providerId="LiveId" clId="{79E365E8-22BC-4EC2-9606-9A9AC6CD1D22}" dt="2025-11-21T14:58:23.369" v="7129" actId="1076"/>
       <pc:docMkLst>
         <pc:docMk/>
       </pc:docMkLst>
@@ -330,13 +330,13 @@
         </pc:spChg>
       </pc:sldChg>
       <pc:sldChg chg="addSp delSp modSp add del mod">
-        <pc:chgData name="Jean-Yves Vuillequez" userId="e7fac481abea6bd0" providerId="LiveId" clId="{79E365E8-22BC-4EC2-9606-9A9AC6CD1D22}" dt="2025-11-21T09:41:42.184" v="5752" actId="313"/>
+        <pc:chgData name="Jean-Yves Vuillequez" userId="e7fac481abea6bd0" providerId="LiveId" clId="{79E365E8-22BC-4EC2-9606-9A9AC6CD1D22}" dt="2025-11-21T14:09:00.301" v="6869" actId="478"/>
         <pc:sldMkLst>
           <pc:docMk/>
           <pc:sldMk cId="0" sldId="263"/>
         </pc:sldMkLst>
-        <pc:spChg chg="add mod">
-          <ac:chgData name="Jean-Yves Vuillequez" userId="e7fac481abea6bd0" providerId="LiveId" clId="{79E365E8-22BC-4EC2-9606-9A9AC6CD1D22}" dt="2025-11-21T02:25:39.724" v="5607" actId="20577"/>
+        <pc:spChg chg="add del mod">
+          <ac:chgData name="Jean-Yves Vuillequez" userId="e7fac481abea6bd0" providerId="LiveId" clId="{79E365E8-22BC-4EC2-9606-9A9AC6CD1D22}" dt="2025-11-21T14:09:00.301" v="6869" actId="478"/>
           <ac:spMkLst>
             <pc:docMk/>
             <pc:sldMk cId="0" sldId="263"/>
@@ -351,9 +351,17 @@
             <ac:spMk id="61" creationId="{00000000-0000-0000-0000-000000000000}"/>
           </ac:spMkLst>
         </pc:spChg>
+        <pc:picChg chg="add mod ord">
+          <ac:chgData name="Jean-Yves Vuillequez" userId="e7fac481abea6bd0" providerId="LiveId" clId="{79E365E8-22BC-4EC2-9606-9A9AC6CD1D22}" dt="2025-11-21T14:08:57.605" v="6868" actId="167"/>
+          <ac:picMkLst>
+            <pc:docMk/>
+            <pc:sldMk cId="0" sldId="263"/>
+            <ac:picMk id="4" creationId="{EC609326-E74D-C852-5772-0AF47814B3FA}"/>
+          </ac:picMkLst>
+        </pc:picChg>
       </pc:sldChg>
       <pc:sldChg chg="addSp delSp modSp add mod delAnim modAnim">
-        <pc:chgData name="Jean-Yves Vuillequez" userId="e7fac481abea6bd0" providerId="LiveId" clId="{79E365E8-22BC-4EC2-9606-9A9AC6CD1D22}" dt="2025-11-21T12:06:38.436" v="6160" actId="108"/>
+        <pc:chgData name="Jean-Yves Vuillequez" userId="e7fac481abea6bd0" providerId="LiveId" clId="{79E365E8-22BC-4EC2-9606-9A9AC6CD1D22}" dt="2025-11-21T12:16:37.075" v="6161" actId="1076"/>
         <pc:sldMkLst>
           <pc:docMk/>
           <pc:sldMk cId="0" sldId="264"/>
@@ -495,7 +503,7 @@
           </ac:spMkLst>
         </pc:spChg>
         <pc:spChg chg="add mod">
-          <ac:chgData name="Jean-Yves Vuillequez" userId="e7fac481abea6bd0" providerId="LiveId" clId="{79E365E8-22BC-4EC2-9606-9A9AC6CD1D22}" dt="2025-11-21T12:00:49.531" v="6074" actId="1076"/>
+          <ac:chgData name="Jean-Yves Vuillequez" userId="e7fac481abea6bd0" providerId="LiveId" clId="{79E365E8-22BC-4EC2-9606-9A9AC6CD1D22}" dt="2025-11-21T12:16:37.075" v="6161" actId="1076"/>
           <ac:spMkLst>
             <pc:docMk/>
             <pc:sldMk cId="0" sldId="264"/>
@@ -2479,8 +2487,8 @@
           </ac:picMkLst>
         </pc:picChg>
       </pc:sldChg>
-      <pc:sldChg chg="addSp modSp add mod">
-        <pc:chgData name="Jean-Yves Vuillequez" userId="e7fac481abea6bd0" providerId="LiveId" clId="{79E365E8-22BC-4EC2-9606-9A9AC6CD1D22}" dt="2025-11-20T14:45:35.008" v="3932" actId="1036"/>
+      <pc:sldChg chg="addSp delSp modSp add mod modNotesTx">
+        <pc:chgData name="Jean-Yves Vuillequez" userId="e7fac481abea6bd0" providerId="LiveId" clId="{79E365E8-22BC-4EC2-9606-9A9AC6CD1D22}" dt="2025-11-21T14:57:59.974" v="7127" actId="478"/>
         <pc:sldMkLst>
           <pc:docMk/>
           <pc:sldMk cId="2290935718" sldId="289"/>
@@ -2493,12 +2501,68 @@
             <ac:spMk id="2" creationId="{EBF06A3A-1FD1-62CC-FA82-868DA8F80F0D}"/>
           </ac:spMkLst>
         </pc:spChg>
-        <pc:spChg chg="add mod">
-          <ac:chgData name="Jean-Yves Vuillequez" userId="e7fac481abea6bd0" providerId="LiveId" clId="{79E365E8-22BC-4EC2-9606-9A9AC6CD1D22}" dt="2025-11-20T14:45:35.008" v="3932" actId="1036"/>
+        <pc:spChg chg="add del mod">
+          <ac:chgData name="Jean-Yves Vuillequez" userId="e7fac481abea6bd0" providerId="LiveId" clId="{79E365E8-22BC-4EC2-9606-9A9AC6CD1D22}" dt="2025-11-21T14:04:28.667" v="6851" actId="478"/>
           <ac:spMkLst>
             <pc:docMk/>
             <pc:sldMk cId="2290935718" sldId="289"/>
             <ac:spMk id="3" creationId="{4C5F35B7-8579-8AC5-69D7-CBEC39A33F7E}"/>
+          </ac:spMkLst>
+        </pc:spChg>
+        <pc:spChg chg="add del mod">
+          <ac:chgData name="Jean-Yves Vuillequez" userId="e7fac481abea6bd0" providerId="LiveId" clId="{79E365E8-22BC-4EC2-9606-9A9AC6CD1D22}" dt="2025-11-21T14:50:52.292" v="7058" actId="478"/>
+          <ac:spMkLst>
+            <pc:docMk/>
+            <pc:sldMk cId="2290935718" sldId="289"/>
+            <ac:spMk id="4" creationId="{AE6C0F5D-5C4B-4C9E-FDE6-2854D7F6D149}"/>
+          </ac:spMkLst>
+        </pc:spChg>
+        <pc:spChg chg="add mod">
+          <ac:chgData name="Jean-Yves Vuillequez" userId="e7fac481abea6bd0" providerId="LiveId" clId="{79E365E8-22BC-4EC2-9606-9A9AC6CD1D22}" dt="2025-11-21T14:51:09.527" v="7064" actId="1076"/>
+          <ac:spMkLst>
+            <pc:docMk/>
+            <pc:sldMk cId="2290935718" sldId="289"/>
+            <ac:spMk id="8" creationId="{91E5332C-F2D0-0543-DF7C-6D3B8D01B2FA}"/>
+          </ac:spMkLst>
+        </pc:spChg>
+        <pc:spChg chg="add mod">
+          <ac:chgData name="Jean-Yves Vuillequez" userId="e7fac481abea6bd0" providerId="LiveId" clId="{79E365E8-22BC-4EC2-9606-9A9AC6CD1D22}" dt="2025-11-21T14:51:30.458" v="7068"/>
+          <ac:spMkLst>
+            <pc:docMk/>
+            <pc:sldMk cId="2290935718" sldId="289"/>
+            <ac:spMk id="9" creationId="{F0B9A769-DDF6-9710-D866-D2F50F863B22}"/>
+          </ac:spMkLst>
+        </pc:spChg>
+        <pc:spChg chg="add mod">
+          <ac:chgData name="Jean-Yves Vuillequez" userId="e7fac481abea6bd0" providerId="LiveId" clId="{79E365E8-22BC-4EC2-9606-9A9AC6CD1D22}" dt="2025-11-21T14:57:50.116" v="7125" actId="1076"/>
+          <ac:spMkLst>
+            <pc:docMk/>
+            <pc:sldMk cId="2290935718" sldId="289"/>
+            <ac:spMk id="10" creationId="{DFD47DBC-035B-0B7D-9BB3-A4937ED2C9EB}"/>
+          </ac:spMkLst>
+        </pc:spChg>
+        <pc:spChg chg="add mod">
+          <ac:chgData name="Jean-Yves Vuillequez" userId="e7fac481abea6bd0" providerId="LiveId" clId="{79E365E8-22BC-4EC2-9606-9A9AC6CD1D22}" dt="2025-11-21T14:51:30.458" v="7068"/>
+          <ac:spMkLst>
+            <pc:docMk/>
+            <pc:sldMk cId="2290935718" sldId="289"/>
+            <ac:spMk id="11" creationId="{EEC86C4D-A9B4-4A74-ED37-29E01179A4EB}"/>
+          </ac:spMkLst>
+        </pc:spChg>
+        <pc:spChg chg="add">
+          <ac:chgData name="Jean-Yves Vuillequez" userId="e7fac481abea6bd0" providerId="LiveId" clId="{79E365E8-22BC-4EC2-9606-9A9AC6CD1D22}" dt="2025-11-21T14:55:42.052" v="7082"/>
+          <ac:spMkLst>
+            <pc:docMk/>
+            <pc:sldMk cId="2290935718" sldId="289"/>
+            <ac:spMk id="12" creationId="{7F64DC53-6064-24A9-B5E6-FD7B1F26CE1D}"/>
+          </ac:spMkLst>
+        </pc:spChg>
+        <pc:spChg chg="add">
+          <ac:chgData name="Jean-Yves Vuillequez" userId="e7fac481abea6bd0" providerId="LiveId" clId="{79E365E8-22BC-4EC2-9606-9A9AC6CD1D22}" dt="2025-11-21T14:55:44.247" v="7083"/>
+          <ac:spMkLst>
+            <pc:docMk/>
+            <pc:sldMk cId="2290935718" sldId="289"/>
+            <ac:spMk id="13" creationId="{A326F334-3EC1-4236-8394-F3ACC92B71D7}"/>
           </ac:spMkLst>
         </pc:spChg>
         <pc:spChg chg="mod">
@@ -2509,9 +2573,33 @@
             <ac:spMk id="178" creationId="{834EF362-0DAC-26BA-DE49-3126B33E851C}"/>
           </ac:spMkLst>
         </pc:spChg>
+        <pc:spChg chg="del mod">
+          <ac:chgData name="Jean-Yves Vuillequez" userId="e7fac481abea6bd0" providerId="LiveId" clId="{79E365E8-22BC-4EC2-9606-9A9AC6CD1D22}" dt="2025-11-21T14:57:59.974" v="7127" actId="478"/>
+          <ac:spMkLst>
+            <pc:docMk/>
+            <pc:sldMk cId="2290935718" sldId="289"/>
+            <ac:spMk id="181" creationId="{5B35C8BD-B301-3C0E-2AF6-DBB412DE249A}"/>
+          </ac:spMkLst>
+        </pc:spChg>
+        <pc:picChg chg="add mod">
+          <ac:chgData name="Jean-Yves Vuillequez" userId="e7fac481abea6bd0" providerId="LiveId" clId="{79E365E8-22BC-4EC2-9606-9A9AC6CD1D22}" dt="2025-11-21T14:51:53.241" v="7078" actId="1076"/>
+          <ac:picMkLst>
+            <pc:docMk/>
+            <pc:sldMk cId="2290935718" sldId="289"/>
+            <ac:picMk id="5" creationId="{937780E3-EE64-E9EA-5E8A-0FA88242AC93}"/>
+          </ac:picMkLst>
+        </pc:picChg>
+        <pc:picChg chg="add mod">
+          <ac:chgData name="Jean-Yves Vuillequez" userId="e7fac481abea6bd0" providerId="LiveId" clId="{79E365E8-22BC-4EC2-9606-9A9AC6CD1D22}" dt="2025-11-21T14:51:53.241" v="7078" actId="1076"/>
+          <ac:picMkLst>
+            <pc:docMk/>
+            <pc:sldMk cId="2290935718" sldId="289"/>
+            <ac:picMk id="7" creationId="{5FE561E2-56B0-D6A0-F0B7-7F202EE51386}"/>
+          </ac:picMkLst>
+        </pc:picChg>
       </pc:sldChg>
-      <pc:sldChg chg="addSp delSp modSp add mod">
-        <pc:chgData name="Jean-Yves Vuillequez" userId="e7fac481abea6bd0" providerId="LiveId" clId="{79E365E8-22BC-4EC2-9606-9A9AC6CD1D22}" dt="2025-11-20T14:45:38.621" v="3933"/>
+      <pc:sldChg chg="addSp delSp modSp add mod modNotesTx">
+        <pc:chgData name="Jean-Yves Vuillequez" userId="e7fac481abea6bd0" providerId="LiveId" clId="{79E365E8-22BC-4EC2-9606-9A9AC6CD1D22}" dt="2025-11-21T14:57:53.236" v="7126" actId="1076"/>
         <pc:sldMkLst>
           <pc:docMk/>
           <pc:sldMk cId="3332770" sldId="291"/>
@@ -2524,20 +2612,76 @@
             <ac:spMk id="2" creationId="{010F41C2-7624-67DE-B008-1F392C11A870}"/>
           </ac:spMkLst>
         </pc:spChg>
-        <pc:spChg chg="add mod">
-          <ac:chgData name="Jean-Yves Vuillequez" userId="e7fac481abea6bd0" providerId="LiveId" clId="{79E365E8-22BC-4EC2-9606-9A9AC6CD1D22}" dt="2025-11-20T10:29:52.350" v="1653"/>
+        <pc:spChg chg="add del mod">
+          <ac:chgData name="Jean-Yves Vuillequez" userId="e7fac481abea6bd0" providerId="LiveId" clId="{79E365E8-22BC-4EC2-9606-9A9AC6CD1D22}" dt="2025-11-21T14:27:01.785" v="6923" actId="478"/>
           <ac:spMkLst>
             <pc:docMk/>
             <pc:sldMk cId="3332770" sldId="291"/>
             <ac:spMk id="3" creationId="{4CE4F7BC-7633-613C-E54B-260F1EA040A9}"/>
           </ac:spMkLst>
         </pc:spChg>
-        <pc:spChg chg="add mod">
-          <ac:chgData name="Jean-Yves Vuillequez" userId="e7fac481abea6bd0" providerId="LiveId" clId="{79E365E8-22BC-4EC2-9606-9A9AC6CD1D22}" dt="2025-11-20T14:45:38.621" v="3933"/>
+        <pc:spChg chg="add del mod">
+          <ac:chgData name="Jean-Yves Vuillequez" userId="e7fac481abea6bd0" providerId="LiveId" clId="{79E365E8-22BC-4EC2-9606-9A9AC6CD1D22}" dt="2025-11-21T14:04:26.121" v="6850" actId="21"/>
           <ac:spMkLst>
             <pc:docMk/>
             <pc:sldMk cId="3332770" sldId="291"/>
             <ac:spMk id="4" creationId="{AE6C0F5D-5C4B-4C9E-FDE6-2854D7F6D149}"/>
+          </ac:spMkLst>
+        </pc:spChg>
+        <pc:spChg chg="add mod">
+          <ac:chgData name="Jean-Yves Vuillequez" userId="e7fac481abea6bd0" providerId="LiveId" clId="{79E365E8-22BC-4EC2-9606-9A9AC6CD1D22}" dt="2025-11-21T13:45:28.037" v="6647"/>
+          <ac:spMkLst>
+            <pc:docMk/>
+            <pc:sldMk cId="3332770" sldId="291"/>
+            <ac:spMk id="5" creationId="{106A5BFC-54FA-403D-6C73-A732BC1D4F71}"/>
+          </ac:spMkLst>
+        </pc:spChg>
+        <pc:spChg chg="add mod">
+          <ac:chgData name="Jean-Yves Vuillequez" userId="e7fac481abea6bd0" providerId="LiveId" clId="{79E365E8-22BC-4EC2-9606-9A9AC6CD1D22}" dt="2025-11-21T13:45:28.037" v="6647"/>
+          <ac:spMkLst>
+            <pc:docMk/>
+            <pc:sldMk cId="3332770" sldId="291"/>
+            <ac:spMk id="6" creationId="{EBF21BA6-F9E0-6E0C-29B6-304458B8661D}"/>
+          </ac:spMkLst>
+        </pc:spChg>
+        <pc:spChg chg="add del mod">
+          <ac:chgData name="Jean-Yves Vuillequez" userId="e7fac481abea6bd0" providerId="LiveId" clId="{79E365E8-22BC-4EC2-9606-9A9AC6CD1D22}" dt="2025-11-21T14:31:42.414" v="6967" actId="478"/>
+          <ac:spMkLst>
+            <pc:docMk/>
+            <pc:sldMk cId="3332770" sldId="291"/>
+            <ac:spMk id="8" creationId="{B18422F6-8518-A3E3-AADF-1C79685DFD59}"/>
+          </ac:spMkLst>
+        </pc:spChg>
+        <pc:spChg chg="add mod">
+          <ac:chgData name="Jean-Yves Vuillequez" userId="e7fac481abea6bd0" providerId="LiveId" clId="{79E365E8-22BC-4EC2-9606-9A9AC6CD1D22}" dt="2025-11-21T14:51:03.991" v="7062" actId="1076"/>
+          <ac:spMkLst>
+            <pc:docMk/>
+            <pc:sldMk cId="3332770" sldId="291"/>
+            <ac:spMk id="14" creationId="{17CF8155-98BE-4305-36ED-219473338E58}"/>
+          </ac:spMkLst>
+        </pc:spChg>
+        <pc:spChg chg="add mod">
+          <ac:chgData name="Jean-Yves Vuillequez" userId="e7fac481abea6bd0" providerId="LiveId" clId="{79E365E8-22BC-4EC2-9606-9A9AC6CD1D22}" dt="2025-11-21T14:41:37.210" v="6975" actId="1076"/>
+          <ac:spMkLst>
+            <pc:docMk/>
+            <pc:sldMk cId="3332770" sldId="291"/>
+            <ac:spMk id="15" creationId="{013ABAC4-C3BB-EC02-35DA-A3D2775495BD}"/>
+          </ac:spMkLst>
+        </pc:spChg>
+        <pc:spChg chg="add mod">
+          <ac:chgData name="Jean-Yves Vuillequez" userId="e7fac481abea6bd0" providerId="LiveId" clId="{79E365E8-22BC-4EC2-9606-9A9AC6CD1D22}" dt="2025-11-21T14:57:53.236" v="7126" actId="1076"/>
+          <ac:spMkLst>
+            <pc:docMk/>
+            <pc:sldMk cId="3332770" sldId="291"/>
+            <ac:spMk id="16" creationId="{351780FB-D45B-8CC9-9474-2419578455B1}"/>
+          </ac:spMkLst>
+        </pc:spChg>
+        <pc:spChg chg="add mod">
+          <ac:chgData name="Jean-Yves Vuillequez" userId="e7fac481abea6bd0" providerId="LiveId" clId="{79E365E8-22BC-4EC2-9606-9A9AC6CD1D22}" dt="2025-11-21T14:41:37.210" v="6975" actId="1076"/>
+          <ac:spMkLst>
+            <pc:docMk/>
+            <pc:sldMk cId="3332770" sldId="291"/>
+            <ac:spMk id="17" creationId="{4D10BBB2-7966-3E3A-0D09-F29E1C548804}"/>
           </ac:spMkLst>
         </pc:spChg>
         <pc:spChg chg="mod">
@@ -2556,15 +2700,47 @@
             <ac:spMk id="181" creationId="{8D7506E9-F193-B7D8-1AC3-28B8647B8462}"/>
           </ac:spMkLst>
         </pc:spChg>
+        <pc:picChg chg="add del mod">
+          <ac:chgData name="Jean-Yves Vuillequez" userId="e7fac481abea6bd0" providerId="LiveId" clId="{79E365E8-22BC-4EC2-9606-9A9AC6CD1D22}" dt="2025-11-21T14:30:45.634" v="6950" actId="478"/>
+          <ac:picMkLst>
+            <pc:docMk/>
+            <pc:sldMk cId="3332770" sldId="291"/>
+            <ac:picMk id="9" creationId="{73E49FAF-7FF4-FF9A-A726-0D1CEDA7DD7F}"/>
+          </ac:picMkLst>
+        </pc:picChg>
+        <pc:picChg chg="add mod">
+          <ac:chgData name="Jean-Yves Vuillequez" userId="e7fac481abea6bd0" providerId="LiveId" clId="{79E365E8-22BC-4EC2-9606-9A9AC6CD1D22}" dt="2025-11-21T14:41:50.316" v="6978" actId="1076"/>
+          <ac:picMkLst>
+            <pc:docMk/>
+            <pc:sldMk cId="3332770" sldId="291"/>
+            <ac:picMk id="11" creationId="{6B0F1A83-2432-176C-4AA5-8DD51C43E45F}"/>
+          </ac:picMkLst>
+        </pc:picChg>
+        <pc:picChg chg="add mod">
+          <ac:chgData name="Jean-Yves Vuillequez" userId="e7fac481abea6bd0" providerId="LiveId" clId="{79E365E8-22BC-4EC2-9606-9A9AC6CD1D22}" dt="2025-11-21T14:41:50.316" v="6978" actId="1076"/>
+          <ac:picMkLst>
+            <pc:docMk/>
+            <pc:sldMk cId="3332770" sldId="291"/>
+            <ac:picMk id="13" creationId="{42BBF9A1-C47F-62DF-F307-88D7E8C42892}"/>
+          </ac:picMkLst>
+        </pc:picChg>
+        <pc:cxnChg chg="add mod">
+          <ac:chgData name="Jean-Yves Vuillequez" userId="e7fac481abea6bd0" providerId="LiveId" clId="{79E365E8-22BC-4EC2-9606-9A9AC6CD1D22}" dt="2025-11-21T13:45:28.037" v="6647"/>
+          <ac:cxnSpMkLst>
+            <pc:docMk/>
+            <pc:sldMk cId="3332770" sldId="291"/>
+            <ac:cxnSpMk id="7" creationId="{224835CE-7645-B9BF-DF02-20730C1E63FF}"/>
+          </ac:cxnSpMkLst>
+        </pc:cxnChg>
       </pc:sldChg>
       <pc:sldChg chg="addSp delSp modSp add mod ord delAnim modAnim modNotesTx">
-        <pc:chgData name="Jean-Yves Vuillequez" userId="e7fac481abea6bd0" providerId="LiveId" clId="{79E365E8-22BC-4EC2-9606-9A9AC6CD1D22}" dt="2025-11-21T09:41:24.918" v="5751" actId="113"/>
+        <pc:chgData name="Jean-Yves Vuillequez" userId="e7fac481abea6bd0" providerId="LiveId" clId="{79E365E8-22BC-4EC2-9606-9A9AC6CD1D22}" dt="2025-11-21T14:58:23.369" v="7129" actId="1076"/>
         <pc:sldMkLst>
           <pc:docMk/>
           <pc:sldMk cId="3315518580" sldId="292"/>
         </pc:sldMkLst>
         <pc:spChg chg="add mod">
-          <ac:chgData name="Jean-Yves Vuillequez" userId="e7fac481abea6bd0" providerId="LiveId" clId="{79E365E8-22BC-4EC2-9606-9A9AC6CD1D22}" dt="2025-11-21T02:11:56.158" v="5290" actId="6549"/>
+          <ac:chgData name="Jean-Yves Vuillequez" userId="e7fac481abea6bd0" providerId="LiveId" clId="{79E365E8-22BC-4EC2-9606-9A9AC6CD1D22}" dt="2025-11-21T14:03:47.959" v="6805" actId="14100"/>
           <ac:spMkLst>
             <pc:docMk/>
             <pc:sldMk cId="3315518580" sldId="292"/>
@@ -2588,11 +2764,19 @@
           </ac:spMkLst>
         </pc:spChg>
         <pc:spChg chg="add mod">
-          <ac:chgData name="Jean-Yves Vuillequez" userId="e7fac481abea6bd0" providerId="LiveId" clId="{79E365E8-22BC-4EC2-9606-9A9AC6CD1D22}" dt="2025-11-20T20:36:47.745" v="5218" actId="207"/>
+          <ac:chgData name="Jean-Yves Vuillequez" userId="e7fac481abea6bd0" providerId="LiveId" clId="{79E365E8-22BC-4EC2-9606-9A9AC6CD1D22}" dt="2025-11-21T14:04:10.873" v="6846" actId="113"/>
           <ac:spMkLst>
             <pc:docMk/>
             <pc:sldMk cId="3315518580" sldId="292"/>
             <ac:spMk id="3" creationId="{8E129141-57FA-3782-2D29-46A01202FF38}"/>
+          </ac:spMkLst>
+        </pc:spChg>
+        <pc:spChg chg="add mod">
+          <ac:chgData name="Jean-Yves Vuillequez" userId="e7fac481abea6bd0" providerId="LiveId" clId="{79E365E8-22BC-4EC2-9606-9A9AC6CD1D22}" dt="2025-11-21T14:58:23.369" v="7129" actId="1076"/>
+          <ac:spMkLst>
+            <pc:docMk/>
+            <pc:sldMk cId="3315518580" sldId="292"/>
+            <ac:spMk id="4" creationId="{25709A3F-A7F7-C13C-1868-EF0F87D5A52C}"/>
           </ac:spMkLst>
         </pc:spChg>
         <pc:spChg chg="del mod">
@@ -2603,8 +2787,8 @@
             <ac:spMk id="4" creationId="{CDF36CC3-8438-C6F0-3E01-EC79EEB762E1}"/>
           </ac:spMkLst>
         </pc:spChg>
-        <pc:spChg chg="add mod">
-          <ac:chgData name="Jean-Yves Vuillequez" userId="e7fac481abea6bd0" providerId="LiveId" clId="{79E365E8-22BC-4EC2-9606-9A9AC6CD1D22}" dt="2025-11-21T02:14:36.257" v="5432" actId="1076"/>
+        <pc:spChg chg="add del mod">
+          <ac:chgData name="Jean-Yves Vuillequez" userId="e7fac481abea6bd0" providerId="LiveId" clId="{79E365E8-22BC-4EC2-9606-9A9AC6CD1D22}" dt="2025-11-21T14:04:15.466" v="6847" actId="478"/>
           <ac:spMkLst>
             <pc:docMk/>
             <pc:sldMk cId="3315518580" sldId="292"/>
@@ -3576,7 +3760,7 @@
           </a:bodyPr>
           <a:lstStyle/>
           <a:p>
-            <a:pPr marL="457200" lvl="0" indent="0" algn="l" rtl="0">
+            <a:pPr marL="114300" lvl="0" indent="0" algn="l" rtl="0">
               <a:lnSpc>
                 <a:spcPct val="115000"/>
               </a:lnSpc>
@@ -3586,9 +3770,42 @@
               <a:spcAft>
                 <a:spcPts val="0"/>
               </a:spcAft>
+              <a:buSzPts val="1800"/>
               <a:buNone/>
             </a:pPr>
-            <a:endParaRPr/>
+            <a:r>
+              <a:rPr lang="fr-FR" sz="1100" dirty="0"/>
+              <a:t>Plot des erreurs : prédiction meilleure sur données centrales que le sur valeurs basses et haute de la </a:t>
+            </a:r>
+            <a:r>
+              <a:rPr lang="fr-FR" sz="1100" dirty="0" err="1"/>
+              <a:t>target</a:t>
+            </a:r>
+            <a:endParaRPr lang="fr-FR" sz="1100" dirty="0"/>
+          </a:p>
+          <a:p>
+            <a:pPr marL="114300" lvl="0" indent="0" algn="l" rtl="0">
+              <a:lnSpc>
+                <a:spcPct val="115000"/>
+              </a:lnSpc>
+              <a:spcBef>
+                <a:spcPts val="0"/>
+              </a:spcBef>
+              <a:spcAft>
+                <a:spcPts val="0"/>
+              </a:spcAft>
+              <a:buSzPts val="1800"/>
+              <a:buNone/>
+            </a:pPr>
+            <a:r>
+              <a:rPr lang="fr-FR" sz="1100" dirty="0"/>
+              <a:t>Démonstration </a:t>
+            </a:r>
+            <a:r>
+              <a:rPr lang="fr-FR" sz="1100" dirty="0" err="1"/>
+              <a:t>dashboar</a:t>
+            </a:r>
+            <a:endParaRPr lang="fr-FR" sz="1100" dirty="0"/>
           </a:p>
         </p:txBody>
       </p:sp>
@@ -6207,7 +6424,7 @@
           </a:bodyPr>
           <a:lstStyle/>
           <a:p>
-            <a:pPr marL="457200" lvl="0" indent="0" algn="l" rtl="0">
+            <a:pPr marL="114300" lvl="0" indent="0" algn="l" rtl="0">
               <a:lnSpc>
                 <a:spcPct val="115000"/>
               </a:lnSpc>
@@ -6217,9 +6434,94 @@
               <a:spcAft>
                 <a:spcPts val="0"/>
               </a:spcAft>
+              <a:buSzPts val="1800"/>
               <a:buNone/>
             </a:pPr>
-            <a:endParaRPr/>
+            <a:r>
+              <a:rPr lang="fr-FR" sz="1100" dirty="0"/>
+              <a:t>Graph </a:t>
+            </a:r>
+            <a:r>
+              <a:rPr lang="fr-FR" sz="1100" dirty="0" err="1"/>
+              <a:t>feature</a:t>
+            </a:r>
+            <a:r>
+              <a:rPr lang="fr-FR" sz="1100" dirty="0"/>
+              <a:t> importance</a:t>
+            </a:r>
+          </a:p>
+          <a:p>
+            <a:pPr marL="114300" lvl="0" indent="0" algn="l" rtl="0">
+              <a:lnSpc>
+                <a:spcPct val="115000"/>
+              </a:lnSpc>
+              <a:spcBef>
+                <a:spcPts val="0"/>
+              </a:spcBef>
+              <a:spcAft>
+                <a:spcPts val="0"/>
+              </a:spcAft>
+              <a:buSzPts val="1800"/>
+              <a:buNone/>
+            </a:pPr>
+            <a:r>
+              <a:rPr lang="fr-FR" sz="1100" dirty="0" err="1"/>
+              <a:t>Scatter</a:t>
+            </a:r>
+            <a:r>
+              <a:rPr lang="fr-FR" sz="1100" dirty="0"/>
+              <a:t> plot pour monter linéarité et dispersion des points (ex. humidité </a:t>
+            </a:r>
+            <a:r>
+              <a:rPr lang="fr-FR" sz="1100" dirty="0">
+                <a:sym typeface="Wingdings" panose="05000000000000000000" pitchFamily="2" charset="2"/>
+              </a:rPr>
+              <a:t> </a:t>
+            </a:r>
+            <a:r>
+              <a:rPr lang="fr-FR" sz="1100" dirty="0" err="1">
+                <a:sym typeface="Wingdings" panose="05000000000000000000" pitchFamily="2" charset="2"/>
+              </a:rPr>
+              <a:t>feature</a:t>
+            </a:r>
+            <a:r>
+              <a:rPr lang="fr-FR" sz="1100" dirty="0">
+                <a:sym typeface="Wingdings" panose="05000000000000000000" pitchFamily="2" charset="2"/>
+              </a:rPr>
+              <a:t> principale</a:t>
+            </a:r>
+            <a:r>
+              <a:rPr lang="fr-FR" sz="1100" dirty="0"/>
+              <a:t>)</a:t>
+            </a:r>
+          </a:p>
+          <a:p>
+            <a:pPr marL="114300" lvl="0" indent="0">
+              <a:buNone/>
+            </a:pPr>
+            <a:r>
+              <a:rPr lang="fr-FR" sz="1100" dirty="0"/>
+              <a:t>Line plot avec la merge d’erreur (ex. humidité </a:t>
+            </a:r>
+            <a:r>
+              <a:rPr lang="fr-FR" sz="1100" dirty="0">
+                <a:sym typeface="Wingdings" panose="05000000000000000000" pitchFamily="2" charset="2"/>
+              </a:rPr>
+              <a:t> </a:t>
+            </a:r>
+            <a:r>
+              <a:rPr lang="fr-FR" sz="1100" dirty="0" err="1">
+                <a:sym typeface="Wingdings" panose="05000000000000000000" pitchFamily="2" charset="2"/>
+              </a:rPr>
+              <a:t>feature</a:t>
+            </a:r>
+            <a:r>
+              <a:rPr lang="fr-FR" sz="1100" dirty="0">
+                <a:sym typeface="Wingdings" panose="05000000000000000000" pitchFamily="2" charset="2"/>
+              </a:rPr>
+              <a:t> principale</a:t>
+            </a:r>
+            <a:endParaRPr lang="fr-FR" sz="1100" dirty="0"/>
           </a:p>
         </p:txBody>
       </p:sp>
@@ -19491,66 +19793,221 @@
       </p:sp>
       <p:sp>
         <p:nvSpPr>
-          <p:cNvPr id="3" name="Google Shape;181;p8">
+          <p:cNvPr id="5" name="Rectangle : coins arrondis 4">
             <a:extLst>
               <a:ext uri="{FF2B5EF4-FFF2-40B4-BE49-F238E27FC236}">
-                <a16:creationId xmlns:a16="http://schemas.microsoft.com/office/drawing/2014/main" id="{4CE4F7BC-7633-613C-E54B-260F1EA040A9}"/>
+                <a16:creationId xmlns:a16="http://schemas.microsoft.com/office/drawing/2014/main" id="{106A5BFC-54FA-403D-6C73-A732BC1D4F71}"/>
               </a:ext>
             </a:extLst>
           </p:cNvPr>
-          <p:cNvSpPr txBox="1">
-            <a:spLocks noGrp="1"/>
-          </p:cNvSpPr>
-          <p:nvPr>
-            <p:ph type="body" idx="1"/>
-          </p:nvPr>
+          <p:cNvSpPr/>
+          <p:nvPr/>
         </p:nvSpPr>
         <p:spPr>
           <a:xfrm>
-            <a:off x="311700" y="1155049"/>
-            <a:ext cx="8520600" cy="3585142"/>
+            <a:off x="7733615" y="270191"/>
+            <a:ext cx="1098685" cy="333041"/>
+          </a:xfrm>
+          <a:prstGeom prst="roundRect">
+            <a:avLst/>
+          </a:prstGeom>
+          <a:solidFill>
+            <a:schemeClr val="bg1">
+              <a:lumMod val="95000"/>
+            </a:schemeClr>
+          </a:solidFill>
+          <a:ln>
+            <a:noFill/>
+          </a:ln>
+        </p:spPr>
+        <p:style>
+          <a:lnRef idx="2">
+            <a:schemeClr val="accent1">
+              <a:shade val="15000"/>
+            </a:schemeClr>
+          </a:lnRef>
+          <a:fillRef idx="1">
+            <a:schemeClr val="accent1"/>
+          </a:fillRef>
+          <a:effectRef idx="0">
+            <a:schemeClr val="accent1"/>
+          </a:effectRef>
+          <a:fontRef idx="minor">
+            <a:schemeClr val="lt1"/>
+          </a:fontRef>
+        </p:style>
+        <p:txBody>
+          <a:bodyPr rtlCol="0" anchor="ctr"/>
+          <a:lstStyle/>
+          <a:p>
+            <a:pPr algn="ctr"/>
+            <a:endParaRPr lang="fr-FR"/>
+          </a:p>
+        </p:txBody>
+      </p:sp>
+      <p:sp>
+        <p:nvSpPr>
+          <p:cNvPr id="6" name="ZoneTexte 5">
+            <a:extLst>
+              <a:ext uri="{FF2B5EF4-FFF2-40B4-BE49-F238E27FC236}">
+                <a16:creationId xmlns:a16="http://schemas.microsoft.com/office/drawing/2014/main" id="{EBF21BA6-F9E0-6E0C-29B6-304458B8661D}"/>
+              </a:ext>
+            </a:extLst>
+          </p:cNvPr>
+          <p:cNvSpPr txBox="1"/>
+          <p:nvPr/>
+        </p:nvSpPr>
+        <p:spPr>
+          <a:xfrm>
+            <a:off x="7704792" y="313600"/>
+            <a:ext cx="1156330" cy="246221"/>
           </a:xfrm>
           <a:prstGeom prst="rect">
             <a:avLst/>
           </a:prstGeom>
           <a:noFill/>
-          <a:ln>
-            <a:noFill/>
-          </a:ln>
         </p:spPr>
         <p:txBody>
-          <a:bodyPr spcFirstLastPara="1" wrap="square" lIns="91425" tIns="91425" rIns="91425" bIns="91425" anchor="t" anchorCtr="0">
-            <a:noAutofit/>
+          <a:bodyPr wrap="square" rtlCol="0">
+            <a:spAutoFit/>
           </a:bodyPr>
           <a:lstStyle/>
           <a:p>
-            <a:pPr marL="114300" lvl="0" indent="0" algn="l" rtl="0">
-              <a:lnSpc>
-                <a:spcPct val="115000"/>
-              </a:lnSpc>
-              <a:spcBef>
-                <a:spcPts val="0"/>
-              </a:spcBef>
-              <a:spcAft>
-                <a:spcPts val="0"/>
-              </a:spcAft>
-              <a:buSzPts val="1800"/>
-              <a:buNone/>
-            </a:pPr>
+            <a:pPr algn="ctr"/>
             <a:r>
-              <a:rPr lang="fr-FR" sz="1400" dirty="0" err="1"/>
-              <a:t>wwwww</a:t>
+              <a:rPr lang="fr-FR" sz="1000" dirty="0">
+                <a:hlinkClick r:id="rId4"/>
+              </a:rPr>
+              <a:t>Lien Dashboard</a:t>
             </a:r>
-            <a:endParaRPr sz="1400" dirty="0"/>
+            <a:endParaRPr lang="fr-FR" sz="800" dirty="0"/>
           </a:p>
         </p:txBody>
       </p:sp>
+      <p:cxnSp>
+        <p:nvCxnSpPr>
+          <p:cNvPr id="7" name="Connecteur droit avec flèche 6">
+            <a:extLst>
+              <a:ext uri="{FF2B5EF4-FFF2-40B4-BE49-F238E27FC236}">
+                <a16:creationId xmlns:a16="http://schemas.microsoft.com/office/drawing/2014/main" id="{224835CE-7645-B9BF-DF02-20730C1E63FF}"/>
+              </a:ext>
+            </a:extLst>
+          </p:cNvPr>
+          <p:cNvCxnSpPr>
+            <a:cxnSpLocks/>
+          </p:cNvCxnSpPr>
+          <p:nvPr/>
+        </p:nvCxnSpPr>
+        <p:spPr>
+          <a:xfrm>
+            <a:off x="7134931" y="440687"/>
+            <a:ext cx="569861" cy="0"/>
+          </a:xfrm>
+          <a:prstGeom prst="straightConnector1">
+            <a:avLst/>
+          </a:prstGeom>
+          <a:ln w="76200">
+            <a:solidFill>
+              <a:srgbClr val="FFC000"/>
+            </a:solidFill>
+            <a:tailEnd type="triangle"/>
+          </a:ln>
+        </p:spPr>
+        <p:style>
+          <a:lnRef idx="1">
+            <a:schemeClr val="accent1"/>
+          </a:lnRef>
+          <a:fillRef idx="0">
+            <a:schemeClr val="accent1"/>
+          </a:fillRef>
+          <a:effectRef idx="0">
+            <a:schemeClr val="accent1"/>
+          </a:effectRef>
+          <a:fontRef idx="minor">
+            <a:schemeClr val="tx1"/>
+          </a:fontRef>
+        </p:style>
+      </p:cxnSp>
+      <p:pic>
+        <p:nvPicPr>
+          <p:cNvPr id="11" name="Image 10">
+            <a:extLst>
+              <a:ext uri="{FF2B5EF4-FFF2-40B4-BE49-F238E27FC236}">
+                <a16:creationId xmlns:a16="http://schemas.microsoft.com/office/drawing/2014/main" id="{6B0F1A83-2432-176C-4AA5-8DD51C43E45F}"/>
+              </a:ext>
+            </a:extLst>
+          </p:cNvPr>
+          <p:cNvPicPr>
+            <a:picLocks noChangeAspect="1"/>
+          </p:cNvPicPr>
+          <p:nvPr/>
+        </p:nvPicPr>
+        <p:blipFill>
+          <a:blip r:embed="rId5"/>
+          <a:stretch>
+            <a:fillRect/>
+          </a:stretch>
+        </p:blipFill>
+        <p:spPr>
+          <a:xfrm>
+            <a:off x="4597225" y="1335349"/>
+            <a:ext cx="4290207" cy="2609350"/>
+          </a:xfrm>
+          <a:prstGeom prst="rect">
+            <a:avLst/>
+          </a:prstGeom>
+          <a:ln>
+            <a:solidFill>
+              <a:schemeClr val="bg1">
+                <a:lumMod val="75000"/>
+              </a:schemeClr>
+            </a:solidFill>
+          </a:ln>
+        </p:spPr>
+      </p:pic>
+      <p:pic>
+        <p:nvPicPr>
+          <p:cNvPr id="13" name="Image 12">
+            <a:extLst>
+              <a:ext uri="{FF2B5EF4-FFF2-40B4-BE49-F238E27FC236}">
+                <a16:creationId xmlns:a16="http://schemas.microsoft.com/office/drawing/2014/main" id="{42BBF9A1-C47F-62DF-F307-88D7E8C42892}"/>
+              </a:ext>
+            </a:extLst>
+          </p:cNvPr>
+          <p:cNvPicPr>
+            <a:picLocks noChangeAspect="1"/>
+          </p:cNvPicPr>
+          <p:nvPr/>
+        </p:nvPicPr>
+        <p:blipFill>
+          <a:blip r:embed="rId6"/>
+          <a:stretch>
+            <a:fillRect/>
+          </a:stretch>
+        </p:blipFill>
+        <p:spPr>
+          <a:xfrm>
+            <a:off x="256568" y="1335349"/>
+            <a:ext cx="4214021" cy="2609311"/>
+          </a:xfrm>
+          <a:prstGeom prst="rect">
+            <a:avLst/>
+          </a:prstGeom>
+          <a:ln>
+            <a:solidFill>
+              <a:schemeClr val="bg1">
+                <a:lumMod val="75000"/>
+              </a:schemeClr>
+            </a:solidFill>
+          </a:ln>
+        </p:spPr>
+      </p:pic>
       <p:sp>
         <p:nvSpPr>
-          <p:cNvPr id="4" name="ZoneTexte 3">
+          <p:cNvPr id="14" name="ZoneTexte 13">
             <a:extLst>
               <a:ext uri="{FF2B5EF4-FFF2-40B4-BE49-F238E27FC236}">
-                <a16:creationId xmlns:a16="http://schemas.microsoft.com/office/drawing/2014/main" id="{AE6C0F5D-5C4B-4C9E-FDE6-2854D7F6D149}"/>
+                <a16:creationId xmlns:a16="http://schemas.microsoft.com/office/drawing/2014/main" id="{17CF8155-98BE-4305-36ED-219473338E58}"/>
               </a:ext>
             </a:extLst>
           </p:cNvPr>
@@ -19559,8 +20016,8 @@
         </p:nvSpPr>
         <p:spPr>
           <a:xfrm rot="1388443">
-            <a:off x="4673601" y="2279362"/>
-            <a:ext cx="3244850" cy="584775"/>
+            <a:off x="4572882" y="529595"/>
+            <a:ext cx="1481372" cy="307777"/>
           </a:xfrm>
           <a:prstGeom prst="rect">
             <a:avLst/>
@@ -19580,12 +20037,447 @@
           <a:p>
             <a:pPr algn="ctr"/>
             <a:r>
-              <a:rPr lang="fr-FR" sz="3200" dirty="0">
+              <a:rPr lang="fr-FR" dirty="0">
                 <a:solidFill>
                   <a:srgbClr val="FF0000"/>
                 </a:solidFill>
               </a:rPr>
               <a:t>A mettre à jour</a:t>
+            </a:r>
+          </a:p>
+        </p:txBody>
+      </p:sp>
+      <p:sp>
+        <p:nvSpPr>
+          <p:cNvPr id="15" name="Google Shape;69;p3">
+            <a:extLst>
+              <a:ext uri="{FF2B5EF4-FFF2-40B4-BE49-F238E27FC236}">
+                <a16:creationId xmlns:a16="http://schemas.microsoft.com/office/drawing/2014/main" id="{013ABAC4-C3BB-EC02-35DA-A3D2775495BD}"/>
+              </a:ext>
+            </a:extLst>
+          </p:cNvPr>
+          <p:cNvSpPr/>
+          <p:nvPr/>
+        </p:nvSpPr>
+        <p:spPr>
+          <a:xfrm>
+            <a:off x="256568" y="4146491"/>
+            <a:ext cx="8686385" cy="623043"/>
+          </a:xfrm>
+          <a:prstGeom prst="rect">
+            <a:avLst/>
+          </a:prstGeom>
+          <a:solidFill>
+            <a:schemeClr val="accent3">
+              <a:lumMod val="20000"/>
+              <a:lumOff val="80000"/>
+            </a:schemeClr>
+          </a:solidFill>
+          <a:ln>
+            <a:noFill/>
+          </a:ln>
+        </p:spPr>
+        <p:txBody>
+          <a:bodyPr spcFirstLastPara="1" wrap="square" lIns="91425" tIns="45700" rIns="91425" bIns="45700" anchor="ctr" anchorCtr="0">
+            <a:noAutofit/>
+          </a:bodyPr>
+          <a:lstStyle/>
+          <a:p>
+            <a:pPr marL="0" marR="0" lvl="0" indent="0" algn="ctr" rtl="0">
+              <a:lnSpc>
+                <a:spcPct val="100000"/>
+              </a:lnSpc>
+              <a:spcBef>
+                <a:spcPts val="0"/>
+              </a:spcBef>
+              <a:spcAft>
+                <a:spcPts val="0"/>
+              </a:spcAft>
+              <a:buClr>
+                <a:srgbClr val="000000"/>
+              </a:buClr>
+              <a:buSzPts val="1400"/>
+              <a:buFont typeface="Arial"/>
+              <a:buNone/>
+            </a:pPr>
+            <a:endParaRPr sz="1400" b="0" i="0" u="none" strike="noStrike" cap="none">
+              <a:solidFill>
+                <a:schemeClr val="lt1"/>
+              </a:solidFill>
+              <a:latin typeface="Arial"/>
+              <a:ea typeface="Arial"/>
+              <a:cs typeface="Arial"/>
+              <a:sym typeface="Arial"/>
+            </a:endParaRPr>
+          </a:p>
+        </p:txBody>
+      </p:sp>
+      <p:sp>
+        <p:nvSpPr>
+          <p:cNvPr id="16" name="Google Shape;73;p3">
+            <a:extLst>
+              <a:ext uri="{FF2B5EF4-FFF2-40B4-BE49-F238E27FC236}">
+                <a16:creationId xmlns:a16="http://schemas.microsoft.com/office/drawing/2014/main" id="{351780FB-D45B-8CC9-9474-2419578455B1}"/>
+              </a:ext>
+            </a:extLst>
+          </p:cNvPr>
+          <p:cNvSpPr txBox="1">
+            <a:spLocks/>
+          </p:cNvSpPr>
+          <p:nvPr/>
+        </p:nvSpPr>
+        <p:spPr>
+          <a:xfrm>
+            <a:off x="175098" y="4220811"/>
+            <a:ext cx="8923239" cy="690695"/>
+          </a:xfrm>
+          <a:prstGeom prst="rect">
+            <a:avLst/>
+          </a:prstGeom>
+          <a:noFill/>
+          <a:ln>
+            <a:noFill/>
+          </a:ln>
+        </p:spPr>
+        <p:txBody>
+          <a:bodyPr spcFirstLastPara="1" wrap="square" lIns="91425" tIns="91425" rIns="91425" bIns="91425" anchor="t" anchorCtr="0">
+            <a:noAutofit/>
+          </a:bodyPr>
+          <a:lstStyle>
+            <a:defPPr marR="0" lvl="0" algn="l" rtl="0">
+              <a:lnSpc>
+                <a:spcPct val="100000"/>
+              </a:lnSpc>
+              <a:spcBef>
+                <a:spcPts val="0"/>
+              </a:spcBef>
+              <a:spcAft>
+                <a:spcPts val="0"/>
+              </a:spcAft>
+            </a:defPPr>
+            <a:lvl1pPr marL="457200" marR="0" lvl="0" indent="-342900" algn="l" rtl="0">
+              <a:lnSpc>
+                <a:spcPct val="115000"/>
+              </a:lnSpc>
+              <a:spcBef>
+                <a:spcPts val="0"/>
+              </a:spcBef>
+              <a:spcAft>
+                <a:spcPts val="0"/>
+              </a:spcAft>
+              <a:buClr>
+                <a:schemeClr val="dk2"/>
+              </a:buClr>
+              <a:buSzPts val="1800"/>
+              <a:buFont typeface="Arial"/>
+              <a:buChar char="●"/>
+              <a:defRPr sz="1800" b="0" i="0" u="none" strike="noStrike" cap="none">
+                <a:solidFill>
+                  <a:schemeClr val="dk2"/>
+                </a:solidFill>
+                <a:latin typeface="Arial"/>
+                <a:ea typeface="Arial"/>
+                <a:cs typeface="Arial"/>
+                <a:sym typeface="Arial"/>
+              </a:defRPr>
+            </a:lvl1pPr>
+            <a:lvl2pPr marL="914400" marR="0" lvl="1" indent="-317500" algn="l" rtl="0">
+              <a:lnSpc>
+                <a:spcPct val="115000"/>
+              </a:lnSpc>
+              <a:spcBef>
+                <a:spcPts val="1600"/>
+              </a:spcBef>
+              <a:spcAft>
+                <a:spcPts val="0"/>
+              </a:spcAft>
+              <a:buClr>
+                <a:schemeClr val="dk2"/>
+              </a:buClr>
+              <a:buSzPts val="1400"/>
+              <a:buFont typeface="Arial"/>
+              <a:buChar char="○"/>
+              <a:defRPr sz="1400" b="0" i="0" u="none" strike="noStrike" cap="none">
+                <a:solidFill>
+                  <a:schemeClr val="dk2"/>
+                </a:solidFill>
+                <a:latin typeface="Arial"/>
+                <a:ea typeface="Arial"/>
+                <a:cs typeface="Arial"/>
+                <a:sym typeface="Arial"/>
+              </a:defRPr>
+            </a:lvl2pPr>
+            <a:lvl3pPr marL="1371600" marR="0" lvl="2" indent="-317500" algn="l" rtl="0">
+              <a:lnSpc>
+                <a:spcPct val="115000"/>
+              </a:lnSpc>
+              <a:spcBef>
+                <a:spcPts val="1600"/>
+              </a:spcBef>
+              <a:spcAft>
+                <a:spcPts val="0"/>
+              </a:spcAft>
+              <a:buClr>
+                <a:schemeClr val="dk2"/>
+              </a:buClr>
+              <a:buSzPts val="1400"/>
+              <a:buFont typeface="Arial"/>
+              <a:buChar char="■"/>
+              <a:defRPr sz="1400" b="0" i="0" u="none" strike="noStrike" cap="none">
+                <a:solidFill>
+                  <a:schemeClr val="dk2"/>
+                </a:solidFill>
+                <a:latin typeface="Arial"/>
+                <a:ea typeface="Arial"/>
+                <a:cs typeface="Arial"/>
+                <a:sym typeface="Arial"/>
+              </a:defRPr>
+            </a:lvl3pPr>
+            <a:lvl4pPr marL="1828800" marR="0" lvl="3" indent="-317500" algn="l" rtl="0">
+              <a:lnSpc>
+                <a:spcPct val="115000"/>
+              </a:lnSpc>
+              <a:spcBef>
+                <a:spcPts val="1600"/>
+              </a:spcBef>
+              <a:spcAft>
+                <a:spcPts val="0"/>
+              </a:spcAft>
+              <a:buClr>
+                <a:schemeClr val="dk2"/>
+              </a:buClr>
+              <a:buSzPts val="1400"/>
+              <a:buFont typeface="Arial"/>
+              <a:buChar char="●"/>
+              <a:defRPr sz="1400" b="0" i="0" u="none" strike="noStrike" cap="none">
+                <a:solidFill>
+                  <a:schemeClr val="dk2"/>
+                </a:solidFill>
+                <a:latin typeface="Arial"/>
+                <a:ea typeface="Arial"/>
+                <a:cs typeface="Arial"/>
+                <a:sym typeface="Arial"/>
+              </a:defRPr>
+            </a:lvl4pPr>
+            <a:lvl5pPr marL="2286000" marR="0" lvl="4" indent="-317500" algn="l" rtl="0">
+              <a:lnSpc>
+                <a:spcPct val="115000"/>
+              </a:lnSpc>
+              <a:spcBef>
+                <a:spcPts val="1600"/>
+              </a:spcBef>
+              <a:spcAft>
+                <a:spcPts val="0"/>
+              </a:spcAft>
+              <a:buClr>
+                <a:schemeClr val="dk2"/>
+              </a:buClr>
+              <a:buSzPts val="1400"/>
+              <a:buFont typeface="Arial"/>
+              <a:buChar char="○"/>
+              <a:defRPr sz="1400" b="0" i="0" u="none" strike="noStrike" cap="none">
+                <a:solidFill>
+                  <a:schemeClr val="dk2"/>
+                </a:solidFill>
+                <a:latin typeface="Arial"/>
+                <a:ea typeface="Arial"/>
+                <a:cs typeface="Arial"/>
+                <a:sym typeface="Arial"/>
+              </a:defRPr>
+            </a:lvl5pPr>
+            <a:lvl6pPr marL="2743200" marR="0" lvl="5" indent="-317500" algn="l" rtl="0">
+              <a:lnSpc>
+                <a:spcPct val="115000"/>
+              </a:lnSpc>
+              <a:spcBef>
+                <a:spcPts val="1600"/>
+              </a:spcBef>
+              <a:spcAft>
+                <a:spcPts val="0"/>
+              </a:spcAft>
+              <a:buClr>
+                <a:schemeClr val="dk2"/>
+              </a:buClr>
+              <a:buSzPts val="1400"/>
+              <a:buFont typeface="Arial"/>
+              <a:buChar char="■"/>
+              <a:defRPr sz="1400" b="0" i="0" u="none" strike="noStrike" cap="none">
+                <a:solidFill>
+                  <a:schemeClr val="dk2"/>
+                </a:solidFill>
+                <a:latin typeface="Arial"/>
+                <a:ea typeface="Arial"/>
+                <a:cs typeface="Arial"/>
+                <a:sym typeface="Arial"/>
+              </a:defRPr>
+            </a:lvl6pPr>
+            <a:lvl7pPr marL="3200400" marR="0" lvl="6" indent="-317500" algn="l" rtl="0">
+              <a:lnSpc>
+                <a:spcPct val="115000"/>
+              </a:lnSpc>
+              <a:spcBef>
+                <a:spcPts val="1600"/>
+              </a:spcBef>
+              <a:spcAft>
+                <a:spcPts val="0"/>
+              </a:spcAft>
+              <a:buClr>
+                <a:schemeClr val="dk2"/>
+              </a:buClr>
+              <a:buSzPts val="1400"/>
+              <a:buFont typeface="Arial"/>
+              <a:buChar char="●"/>
+              <a:defRPr sz="1400" b="0" i="0" u="none" strike="noStrike" cap="none">
+                <a:solidFill>
+                  <a:schemeClr val="dk2"/>
+                </a:solidFill>
+                <a:latin typeface="Arial"/>
+                <a:ea typeface="Arial"/>
+                <a:cs typeface="Arial"/>
+                <a:sym typeface="Arial"/>
+              </a:defRPr>
+            </a:lvl7pPr>
+            <a:lvl8pPr marL="3657600" marR="0" lvl="7" indent="-317500" algn="l" rtl="0">
+              <a:lnSpc>
+                <a:spcPct val="115000"/>
+              </a:lnSpc>
+              <a:spcBef>
+                <a:spcPts val="1600"/>
+              </a:spcBef>
+              <a:spcAft>
+                <a:spcPts val="0"/>
+              </a:spcAft>
+              <a:buClr>
+                <a:schemeClr val="dk2"/>
+              </a:buClr>
+              <a:buSzPts val="1400"/>
+              <a:buFont typeface="Arial"/>
+              <a:buChar char="○"/>
+              <a:defRPr sz="1400" b="0" i="0" u="none" strike="noStrike" cap="none">
+                <a:solidFill>
+                  <a:schemeClr val="dk2"/>
+                </a:solidFill>
+                <a:latin typeface="Arial"/>
+                <a:ea typeface="Arial"/>
+                <a:cs typeface="Arial"/>
+                <a:sym typeface="Arial"/>
+              </a:defRPr>
+            </a:lvl8pPr>
+            <a:lvl9pPr marL="4114800" marR="0" lvl="8" indent="-317500" algn="l" rtl="0">
+              <a:lnSpc>
+                <a:spcPct val="115000"/>
+              </a:lnSpc>
+              <a:spcBef>
+                <a:spcPts val="1600"/>
+              </a:spcBef>
+              <a:spcAft>
+                <a:spcPts val="1600"/>
+              </a:spcAft>
+              <a:buClr>
+                <a:schemeClr val="dk2"/>
+              </a:buClr>
+              <a:buSzPts val="1400"/>
+              <a:buFont typeface="Arial"/>
+              <a:buChar char="■"/>
+              <a:defRPr sz="1400" b="0" i="0" u="none" strike="noStrike" cap="none">
+                <a:solidFill>
+                  <a:schemeClr val="dk2"/>
+                </a:solidFill>
+                <a:latin typeface="Arial"/>
+                <a:ea typeface="Arial"/>
+                <a:cs typeface="Arial"/>
+                <a:sym typeface="Arial"/>
+              </a:defRPr>
+            </a:lvl9pPr>
+          </a:lstStyle>
+          <a:p>
+            <a:pPr>
+              <a:buSzPct val="100000"/>
+            </a:pPr>
+            <a:r>
+              <a:rPr lang="fr-FR" sz="900" dirty="0"/>
+              <a:t>Majorité des points alignés globalement le long de la diagonale : </a:t>
+            </a:r>
+            <a:r>
+              <a:rPr lang="fr-FR" sz="900" b="1" dirty="0"/>
+              <a:t>Le modèle capture bien la tendance globale du taux de charge solaire</a:t>
+            </a:r>
+            <a:endParaRPr lang="fr-FR" sz="900" dirty="0"/>
+          </a:p>
+          <a:p>
+            <a:pPr>
+              <a:buSzPct val="100000"/>
+            </a:pPr>
+            <a:r>
+              <a:rPr lang="fr-FR" sz="900" dirty="0"/>
+              <a:t>Meilleure prédiction sur les données centrales que sur les valeurs basses et haute de la Target</a:t>
+            </a:r>
+          </a:p>
+          <a:p>
+            <a:pPr>
+              <a:buSzPct val="100000"/>
+            </a:pPr>
+            <a:endParaRPr lang="fr-FR" sz="900" dirty="0"/>
+          </a:p>
+        </p:txBody>
+      </p:sp>
+      <p:sp>
+        <p:nvSpPr>
+          <p:cNvPr id="17" name="Ellipse 16">
+            <a:extLst>
+              <a:ext uri="{FF2B5EF4-FFF2-40B4-BE49-F238E27FC236}">
+                <a16:creationId xmlns:a16="http://schemas.microsoft.com/office/drawing/2014/main" id="{4D10BBB2-7966-3E3A-0D09-F29E1C548804}"/>
+              </a:ext>
+            </a:extLst>
+          </p:cNvPr>
+          <p:cNvSpPr/>
+          <p:nvPr/>
+        </p:nvSpPr>
+        <p:spPr>
+          <a:xfrm>
+            <a:off x="143711" y="4104239"/>
+            <a:ext cx="233145" cy="233145"/>
+          </a:xfrm>
+          <a:prstGeom prst="ellipse">
+            <a:avLst/>
+          </a:prstGeom>
+          <a:solidFill>
+            <a:schemeClr val="bg1"/>
+          </a:solidFill>
+          <a:ln>
+            <a:solidFill>
+              <a:srgbClr val="C00000"/>
+            </a:solidFill>
+          </a:ln>
+        </p:spPr>
+        <p:style>
+          <a:lnRef idx="2">
+            <a:schemeClr val="accent1">
+              <a:shade val="15000"/>
+            </a:schemeClr>
+          </a:lnRef>
+          <a:fillRef idx="1">
+            <a:schemeClr val="accent1"/>
+          </a:fillRef>
+          <a:effectRef idx="0">
+            <a:schemeClr val="accent1"/>
+          </a:effectRef>
+          <a:fontRef idx="minor">
+            <a:schemeClr val="lt1"/>
+          </a:fontRef>
+        </p:style>
+        <p:txBody>
+          <a:bodyPr rtlCol="0" anchor="ctr"/>
+          <a:lstStyle/>
+          <a:p>
+            <a:pPr algn="ctr"/>
+            <a:r>
+              <a:rPr lang="fr-FR" sz="1200" b="1">
+                <a:solidFill>
+                  <a:srgbClr val="C00000"/>
+                </a:solidFill>
+              </a:rPr>
+              <a:t>!</a:t>
             </a:r>
           </a:p>
         </p:txBody>
@@ -19812,7 +20704,7 @@
         <p:spPr>
           <a:xfrm>
             <a:off x="654529" y="1349809"/>
-            <a:ext cx="3767714" cy="3218932"/>
+            <a:ext cx="3007784" cy="3218932"/>
           </a:xfrm>
           <a:prstGeom prst="rect">
             <a:avLst/>
@@ -20314,8 +21206,8 @@
         </p:nvSpPr>
         <p:spPr>
           <a:xfrm>
-            <a:off x="4458214" y="2568491"/>
-            <a:ext cx="418726" cy="596535"/>
+            <a:off x="3756838" y="2568491"/>
+            <a:ext cx="1120102" cy="596535"/>
           </a:xfrm>
           <a:prstGeom prst="rightArrow">
             <a:avLst/>
@@ -20348,7 +21240,10 @@
           <a:lstStyle/>
           <a:p>
             <a:pPr algn="ctr"/>
-            <a:endParaRPr lang="fr-FR" dirty="0"/>
+            <a:r>
+              <a:rPr lang="fr-FR" sz="1000" b="1" dirty="0"/>
+              <a:t>Amélioration du modèle</a:t>
+            </a:r>
           </a:p>
         </p:txBody>
       </p:sp>
@@ -20357,7 +21252,7 @@
           <p:cNvPr id="4" name="ZoneTexte 3">
             <a:extLst>
               <a:ext uri="{FF2B5EF4-FFF2-40B4-BE49-F238E27FC236}">
-                <a16:creationId xmlns:a16="http://schemas.microsoft.com/office/drawing/2014/main" id="{DC681EF8-A850-D11F-7ECC-97847033BF06}"/>
+                <a16:creationId xmlns:a16="http://schemas.microsoft.com/office/drawing/2014/main" id="{25709A3F-A7F7-C13C-1868-EF0F87D5A52C}"/>
               </a:ext>
             </a:extLst>
           </p:cNvPr>
@@ -20365,9 +21260,9 @@
           <p:nvPr/>
         </p:nvSpPr>
         <p:spPr>
-          <a:xfrm rot="1199074">
-            <a:off x="5584842" y="806544"/>
-            <a:ext cx="3244850" cy="584775"/>
+          <a:xfrm rot="1388443">
+            <a:off x="6752416" y="529595"/>
+            <a:ext cx="1481372" cy="307777"/>
           </a:xfrm>
           <a:prstGeom prst="rect">
             <a:avLst/>
@@ -20387,12 +21282,12 @@
           <a:p>
             <a:pPr algn="ctr"/>
             <a:r>
-              <a:rPr lang="fr-FR" sz="3200" dirty="0">
+              <a:rPr lang="fr-FR" dirty="0">
                 <a:solidFill>
                   <a:srgbClr val="FF0000"/>
                 </a:solidFill>
               </a:rPr>
-              <a:t>A discuter</a:t>
+              <a:t>A mettre à jour</a:t>
             </a:r>
           </a:p>
         </p:txBody>
@@ -24742,6 +25637,36 @@
           <a:chExt cx="0" cy="0"/>
         </a:xfrm>
       </p:grpSpPr>
+      <p:pic>
+        <p:nvPicPr>
+          <p:cNvPr id="4" name="Image 3" descr="Une image contenant intérieur">
+            <a:extLst>
+              <a:ext uri="{FF2B5EF4-FFF2-40B4-BE49-F238E27FC236}">
+                <a16:creationId xmlns:a16="http://schemas.microsoft.com/office/drawing/2014/main" id="{EC609326-E74D-C852-5772-0AF47814B3FA}"/>
+              </a:ext>
+            </a:extLst>
+          </p:cNvPr>
+          <p:cNvPicPr>
+            <a:picLocks noChangeAspect="1"/>
+          </p:cNvPicPr>
+          <p:nvPr/>
+        </p:nvPicPr>
+        <p:blipFill>
+          <a:blip r:embed="rId3"/>
+          <a:stretch>
+            <a:fillRect/>
+          </a:stretch>
+        </p:blipFill>
+        <p:spPr>
+          <a:xfrm>
+            <a:off x="3469461" y="987052"/>
+            <a:ext cx="5471864" cy="3068804"/>
+          </a:xfrm>
+          <a:prstGeom prst="rect">
+            <a:avLst/>
+          </a:prstGeom>
+        </p:spPr>
+      </p:pic>
       <p:sp>
         <p:nvSpPr>
           <p:cNvPr id="61" name="Google Shape;61;p2"/>
@@ -25044,7 +25969,7 @@
           <p:nvPr/>
         </p:nvPicPr>
         <p:blipFill rotWithShape="1">
-          <a:blip r:embed="rId3">
+          <a:blip r:embed="rId4">
             <a:alphaModFix/>
           </a:blip>
           <a:srcRect/>
@@ -25064,51 +25989,6 @@
           </a:ln>
         </p:spPr>
       </p:pic>
-      <p:sp>
-        <p:nvSpPr>
-          <p:cNvPr id="2" name="ZoneTexte 1">
-            <a:extLst>
-              <a:ext uri="{FF2B5EF4-FFF2-40B4-BE49-F238E27FC236}">
-                <a16:creationId xmlns:a16="http://schemas.microsoft.com/office/drawing/2014/main" id="{84C75A5D-5A8E-E656-FAD3-37CEBF0CBDC6}"/>
-              </a:ext>
-            </a:extLst>
-          </p:cNvPr>
-          <p:cNvSpPr txBox="1"/>
-          <p:nvPr/>
-        </p:nvSpPr>
-        <p:spPr>
-          <a:xfrm rot="1388443">
-            <a:off x="4673601" y="2279362"/>
-            <a:ext cx="3244850" cy="584775"/>
-          </a:xfrm>
-          <a:prstGeom prst="rect">
-            <a:avLst/>
-          </a:prstGeom>
-          <a:noFill/>
-          <a:ln>
-            <a:solidFill>
-              <a:srgbClr val="FF0000"/>
-            </a:solidFill>
-          </a:ln>
-        </p:spPr>
-        <p:txBody>
-          <a:bodyPr wrap="square" rtlCol="0">
-            <a:spAutoFit/>
-          </a:bodyPr>
-          <a:lstStyle/>
-          <a:p>
-            <a:pPr algn="ctr"/>
-            <a:r>
-              <a:rPr lang="fr-FR" sz="3200" dirty="0">
-                <a:solidFill>
-                  <a:srgbClr val="FF0000"/>
-                </a:solidFill>
-              </a:rPr>
-              <a:t>MAJ illustration</a:t>
-            </a:r>
-          </a:p>
-        </p:txBody>
-      </p:sp>
     </p:spTree>
   </p:cSld>
   <p:clrMapOvr>
@@ -25873,7 +26753,7 @@
         </p:nvSpPr>
         <p:spPr>
           <a:xfrm>
-            <a:off x="7923673" y="1281292"/>
+            <a:off x="7923673" y="1267152"/>
             <a:ext cx="951876" cy="1551482"/>
           </a:xfrm>
           <a:prstGeom prst="curvedLeftArrow">
@@ -39253,62 +40133,6 @@
       </p:sp>
       <p:sp>
         <p:nvSpPr>
-          <p:cNvPr id="181" name="Google Shape;181;p8">
-            <a:extLst>
-              <a:ext uri="{FF2B5EF4-FFF2-40B4-BE49-F238E27FC236}">
-                <a16:creationId xmlns:a16="http://schemas.microsoft.com/office/drawing/2014/main" id="{5B35C8BD-B301-3C0E-2AF6-DBB412DE249A}"/>
-              </a:ext>
-            </a:extLst>
-          </p:cNvPr>
-          <p:cNvSpPr txBox="1">
-            <a:spLocks noGrp="1"/>
-          </p:cNvSpPr>
-          <p:nvPr>
-            <p:ph type="body" idx="1"/>
-          </p:nvPr>
-        </p:nvSpPr>
-        <p:spPr>
-          <a:xfrm>
-            <a:off x="311700" y="1155049"/>
-            <a:ext cx="8520600" cy="3585142"/>
-          </a:xfrm>
-          <a:prstGeom prst="rect">
-            <a:avLst/>
-          </a:prstGeom>
-          <a:noFill/>
-          <a:ln>
-            <a:noFill/>
-          </a:ln>
-        </p:spPr>
-        <p:txBody>
-          <a:bodyPr spcFirstLastPara="1" wrap="square" lIns="91425" tIns="91425" rIns="91425" bIns="91425" anchor="t" anchorCtr="0">
-            <a:noAutofit/>
-          </a:bodyPr>
-          <a:lstStyle/>
-          <a:p>
-            <a:pPr marL="114300" lvl="0" indent="0" algn="l" rtl="0">
-              <a:lnSpc>
-                <a:spcPct val="115000"/>
-              </a:lnSpc>
-              <a:spcBef>
-                <a:spcPts val="0"/>
-              </a:spcBef>
-              <a:spcAft>
-                <a:spcPts val="0"/>
-              </a:spcAft>
-              <a:buSzPts val="1800"/>
-              <a:buNone/>
-            </a:pPr>
-            <a:r>
-              <a:rPr lang="fr-FR" sz="1400" dirty="0" err="1"/>
-              <a:t>wwwww</a:t>
-            </a:r>
-            <a:endParaRPr sz="1400" dirty="0"/>
-          </a:p>
-        </p:txBody>
-      </p:sp>
-      <p:sp>
-        <p:nvSpPr>
           <p:cNvPr id="2" name="Google Shape;178;p8">
             <a:extLst>
               <a:ext uri="{FF2B5EF4-FFF2-40B4-BE49-F238E27FC236}">
@@ -39607,12 +40431,86 @@
           </a:p>
         </p:txBody>
       </p:sp>
+      <p:pic>
+        <p:nvPicPr>
+          <p:cNvPr id="5" name="Image 4">
+            <a:extLst>
+              <a:ext uri="{FF2B5EF4-FFF2-40B4-BE49-F238E27FC236}">
+                <a16:creationId xmlns:a16="http://schemas.microsoft.com/office/drawing/2014/main" id="{937780E3-EE64-E9EA-5E8A-0FA88242AC93}"/>
+              </a:ext>
+            </a:extLst>
+          </p:cNvPr>
+          <p:cNvPicPr>
+            <a:picLocks noChangeAspect="1"/>
+          </p:cNvPicPr>
+          <p:nvPr/>
+        </p:nvPicPr>
+        <p:blipFill>
+          <a:blip r:embed="rId4"/>
+          <a:stretch>
+            <a:fillRect/>
+          </a:stretch>
+        </p:blipFill>
+        <p:spPr>
+          <a:xfrm>
+            <a:off x="376856" y="1116074"/>
+            <a:ext cx="4246784" cy="2926040"/>
+          </a:xfrm>
+          <a:prstGeom prst="rect">
+            <a:avLst/>
+          </a:prstGeom>
+          <a:ln>
+            <a:solidFill>
+              <a:schemeClr val="bg1">
+                <a:lumMod val="75000"/>
+              </a:schemeClr>
+            </a:solidFill>
+          </a:ln>
+        </p:spPr>
+      </p:pic>
+      <p:pic>
+        <p:nvPicPr>
+          <p:cNvPr id="7" name="Image 6">
+            <a:extLst>
+              <a:ext uri="{FF2B5EF4-FFF2-40B4-BE49-F238E27FC236}">
+                <a16:creationId xmlns:a16="http://schemas.microsoft.com/office/drawing/2014/main" id="{5FE561E2-56B0-D6A0-F0B7-7F202EE51386}"/>
+              </a:ext>
+            </a:extLst>
+          </p:cNvPr>
+          <p:cNvPicPr>
+            <a:picLocks noChangeAspect="1"/>
+          </p:cNvPicPr>
+          <p:nvPr/>
+        </p:nvPicPr>
+        <p:blipFill>
+          <a:blip r:embed="rId5"/>
+          <a:stretch>
+            <a:fillRect/>
+          </a:stretch>
+        </p:blipFill>
+        <p:spPr>
+          <a:xfrm>
+            <a:off x="4953840" y="1116074"/>
+            <a:ext cx="3821225" cy="2932094"/>
+          </a:xfrm>
+          <a:prstGeom prst="rect">
+            <a:avLst/>
+          </a:prstGeom>
+          <a:ln>
+            <a:solidFill>
+              <a:schemeClr val="bg1">
+                <a:lumMod val="75000"/>
+              </a:schemeClr>
+            </a:solidFill>
+          </a:ln>
+        </p:spPr>
+      </p:pic>
       <p:sp>
         <p:nvSpPr>
-          <p:cNvPr id="3" name="ZoneTexte 2">
+          <p:cNvPr id="8" name="ZoneTexte 7">
             <a:extLst>
               <a:ext uri="{FF2B5EF4-FFF2-40B4-BE49-F238E27FC236}">
-                <a16:creationId xmlns:a16="http://schemas.microsoft.com/office/drawing/2014/main" id="{4C5F35B7-8579-8AC5-69D7-CBEC39A33F7E}"/>
+                <a16:creationId xmlns:a16="http://schemas.microsoft.com/office/drawing/2014/main" id="{91E5332C-F2D0-0543-DF7C-6D3B8D01B2FA}"/>
               </a:ext>
             </a:extLst>
           </p:cNvPr>
@@ -39621,8 +40519,8 @@
         </p:nvSpPr>
         <p:spPr>
           <a:xfrm rot="1388443">
-            <a:off x="4673601" y="2285712"/>
-            <a:ext cx="3244850" cy="584775"/>
+            <a:off x="6615041" y="529595"/>
+            <a:ext cx="1481372" cy="307777"/>
           </a:xfrm>
           <a:prstGeom prst="rect">
             <a:avLst/>
@@ -39642,12 +40540,448 @@
           <a:p>
             <a:pPr algn="ctr"/>
             <a:r>
-              <a:rPr lang="fr-FR" sz="3200" dirty="0">
+              <a:rPr lang="fr-FR" dirty="0">
                 <a:solidFill>
                   <a:srgbClr val="FF0000"/>
                 </a:solidFill>
               </a:rPr>
               <a:t>A mettre à jour</a:t>
+            </a:r>
+          </a:p>
+        </p:txBody>
+      </p:sp>
+      <p:sp>
+        <p:nvSpPr>
+          <p:cNvPr id="9" name="Google Shape;69;p3">
+            <a:extLst>
+              <a:ext uri="{FF2B5EF4-FFF2-40B4-BE49-F238E27FC236}">
+                <a16:creationId xmlns:a16="http://schemas.microsoft.com/office/drawing/2014/main" id="{F0B9A769-DDF6-9710-D866-D2F50F863B22}"/>
+              </a:ext>
+            </a:extLst>
+          </p:cNvPr>
+          <p:cNvSpPr/>
+          <p:nvPr/>
+        </p:nvSpPr>
+        <p:spPr>
+          <a:xfrm>
+            <a:off x="256568" y="4146491"/>
+            <a:ext cx="8686385" cy="623043"/>
+          </a:xfrm>
+          <a:prstGeom prst="rect">
+            <a:avLst/>
+          </a:prstGeom>
+          <a:solidFill>
+            <a:schemeClr val="accent3">
+              <a:lumMod val="20000"/>
+              <a:lumOff val="80000"/>
+            </a:schemeClr>
+          </a:solidFill>
+          <a:ln>
+            <a:noFill/>
+          </a:ln>
+        </p:spPr>
+        <p:txBody>
+          <a:bodyPr spcFirstLastPara="1" wrap="square" lIns="91425" tIns="45700" rIns="91425" bIns="45700" anchor="ctr" anchorCtr="0">
+            <a:noAutofit/>
+          </a:bodyPr>
+          <a:lstStyle/>
+          <a:p>
+            <a:pPr marL="0" marR="0" lvl="0" indent="0" algn="ctr" rtl="0">
+              <a:lnSpc>
+                <a:spcPct val="100000"/>
+              </a:lnSpc>
+              <a:spcBef>
+                <a:spcPts val="0"/>
+              </a:spcBef>
+              <a:spcAft>
+                <a:spcPts val="0"/>
+              </a:spcAft>
+              <a:buClr>
+                <a:srgbClr val="000000"/>
+              </a:buClr>
+              <a:buSzPts val="1400"/>
+              <a:buFont typeface="Arial"/>
+              <a:buNone/>
+            </a:pPr>
+            <a:endParaRPr sz="1400" b="0" i="0" u="none" strike="noStrike" cap="none">
+              <a:solidFill>
+                <a:schemeClr val="lt1"/>
+              </a:solidFill>
+              <a:latin typeface="Arial"/>
+              <a:ea typeface="Arial"/>
+              <a:cs typeface="Arial"/>
+              <a:sym typeface="Arial"/>
+            </a:endParaRPr>
+          </a:p>
+        </p:txBody>
+      </p:sp>
+      <p:sp>
+        <p:nvSpPr>
+          <p:cNvPr id="10" name="Google Shape;73;p3">
+            <a:extLst>
+              <a:ext uri="{FF2B5EF4-FFF2-40B4-BE49-F238E27FC236}">
+                <a16:creationId xmlns:a16="http://schemas.microsoft.com/office/drawing/2014/main" id="{DFD47DBC-035B-0B7D-9BB3-A4937ED2C9EB}"/>
+              </a:ext>
+            </a:extLst>
+          </p:cNvPr>
+          <p:cNvSpPr txBox="1">
+            <a:spLocks/>
+          </p:cNvSpPr>
+          <p:nvPr/>
+        </p:nvSpPr>
+        <p:spPr>
+          <a:xfrm>
+            <a:off x="175098" y="4208112"/>
+            <a:ext cx="8923239" cy="690695"/>
+          </a:xfrm>
+          <a:prstGeom prst="rect">
+            <a:avLst/>
+          </a:prstGeom>
+          <a:noFill/>
+          <a:ln>
+            <a:noFill/>
+          </a:ln>
+        </p:spPr>
+        <p:txBody>
+          <a:bodyPr spcFirstLastPara="1" wrap="square" lIns="91425" tIns="91425" rIns="91425" bIns="91425" anchor="t" anchorCtr="0">
+            <a:noAutofit/>
+          </a:bodyPr>
+          <a:lstStyle>
+            <a:defPPr marR="0" lvl="0" algn="l" rtl="0">
+              <a:lnSpc>
+                <a:spcPct val="100000"/>
+              </a:lnSpc>
+              <a:spcBef>
+                <a:spcPts val="0"/>
+              </a:spcBef>
+              <a:spcAft>
+                <a:spcPts val="0"/>
+              </a:spcAft>
+            </a:defPPr>
+            <a:lvl1pPr marL="457200" marR="0" lvl="0" indent="-342900" algn="l" rtl="0">
+              <a:lnSpc>
+                <a:spcPct val="115000"/>
+              </a:lnSpc>
+              <a:spcBef>
+                <a:spcPts val="0"/>
+              </a:spcBef>
+              <a:spcAft>
+                <a:spcPts val="0"/>
+              </a:spcAft>
+              <a:buClr>
+                <a:schemeClr val="dk2"/>
+              </a:buClr>
+              <a:buSzPts val="1800"/>
+              <a:buFont typeface="Arial"/>
+              <a:buChar char="●"/>
+              <a:defRPr sz="1800" b="0" i="0" u="none" strike="noStrike" cap="none">
+                <a:solidFill>
+                  <a:schemeClr val="dk2"/>
+                </a:solidFill>
+                <a:latin typeface="Arial"/>
+                <a:ea typeface="Arial"/>
+                <a:cs typeface="Arial"/>
+                <a:sym typeface="Arial"/>
+              </a:defRPr>
+            </a:lvl1pPr>
+            <a:lvl2pPr marL="914400" marR="0" lvl="1" indent="-317500" algn="l" rtl="0">
+              <a:lnSpc>
+                <a:spcPct val="115000"/>
+              </a:lnSpc>
+              <a:spcBef>
+                <a:spcPts val="1600"/>
+              </a:spcBef>
+              <a:spcAft>
+                <a:spcPts val="0"/>
+              </a:spcAft>
+              <a:buClr>
+                <a:schemeClr val="dk2"/>
+              </a:buClr>
+              <a:buSzPts val="1400"/>
+              <a:buFont typeface="Arial"/>
+              <a:buChar char="○"/>
+              <a:defRPr sz="1400" b="0" i="0" u="none" strike="noStrike" cap="none">
+                <a:solidFill>
+                  <a:schemeClr val="dk2"/>
+                </a:solidFill>
+                <a:latin typeface="Arial"/>
+                <a:ea typeface="Arial"/>
+                <a:cs typeface="Arial"/>
+                <a:sym typeface="Arial"/>
+              </a:defRPr>
+            </a:lvl2pPr>
+            <a:lvl3pPr marL="1371600" marR="0" lvl="2" indent="-317500" algn="l" rtl="0">
+              <a:lnSpc>
+                <a:spcPct val="115000"/>
+              </a:lnSpc>
+              <a:spcBef>
+                <a:spcPts val="1600"/>
+              </a:spcBef>
+              <a:spcAft>
+                <a:spcPts val="0"/>
+              </a:spcAft>
+              <a:buClr>
+                <a:schemeClr val="dk2"/>
+              </a:buClr>
+              <a:buSzPts val="1400"/>
+              <a:buFont typeface="Arial"/>
+              <a:buChar char="■"/>
+              <a:defRPr sz="1400" b="0" i="0" u="none" strike="noStrike" cap="none">
+                <a:solidFill>
+                  <a:schemeClr val="dk2"/>
+                </a:solidFill>
+                <a:latin typeface="Arial"/>
+                <a:ea typeface="Arial"/>
+                <a:cs typeface="Arial"/>
+                <a:sym typeface="Arial"/>
+              </a:defRPr>
+            </a:lvl3pPr>
+            <a:lvl4pPr marL="1828800" marR="0" lvl="3" indent="-317500" algn="l" rtl="0">
+              <a:lnSpc>
+                <a:spcPct val="115000"/>
+              </a:lnSpc>
+              <a:spcBef>
+                <a:spcPts val="1600"/>
+              </a:spcBef>
+              <a:spcAft>
+                <a:spcPts val="0"/>
+              </a:spcAft>
+              <a:buClr>
+                <a:schemeClr val="dk2"/>
+              </a:buClr>
+              <a:buSzPts val="1400"/>
+              <a:buFont typeface="Arial"/>
+              <a:buChar char="●"/>
+              <a:defRPr sz="1400" b="0" i="0" u="none" strike="noStrike" cap="none">
+                <a:solidFill>
+                  <a:schemeClr val="dk2"/>
+                </a:solidFill>
+                <a:latin typeface="Arial"/>
+                <a:ea typeface="Arial"/>
+                <a:cs typeface="Arial"/>
+                <a:sym typeface="Arial"/>
+              </a:defRPr>
+            </a:lvl4pPr>
+            <a:lvl5pPr marL="2286000" marR="0" lvl="4" indent="-317500" algn="l" rtl="0">
+              <a:lnSpc>
+                <a:spcPct val="115000"/>
+              </a:lnSpc>
+              <a:spcBef>
+                <a:spcPts val="1600"/>
+              </a:spcBef>
+              <a:spcAft>
+                <a:spcPts val="0"/>
+              </a:spcAft>
+              <a:buClr>
+                <a:schemeClr val="dk2"/>
+              </a:buClr>
+              <a:buSzPts val="1400"/>
+              <a:buFont typeface="Arial"/>
+              <a:buChar char="○"/>
+              <a:defRPr sz="1400" b="0" i="0" u="none" strike="noStrike" cap="none">
+                <a:solidFill>
+                  <a:schemeClr val="dk2"/>
+                </a:solidFill>
+                <a:latin typeface="Arial"/>
+                <a:ea typeface="Arial"/>
+                <a:cs typeface="Arial"/>
+                <a:sym typeface="Arial"/>
+              </a:defRPr>
+            </a:lvl5pPr>
+            <a:lvl6pPr marL="2743200" marR="0" lvl="5" indent="-317500" algn="l" rtl="0">
+              <a:lnSpc>
+                <a:spcPct val="115000"/>
+              </a:lnSpc>
+              <a:spcBef>
+                <a:spcPts val="1600"/>
+              </a:spcBef>
+              <a:spcAft>
+                <a:spcPts val="0"/>
+              </a:spcAft>
+              <a:buClr>
+                <a:schemeClr val="dk2"/>
+              </a:buClr>
+              <a:buSzPts val="1400"/>
+              <a:buFont typeface="Arial"/>
+              <a:buChar char="■"/>
+              <a:defRPr sz="1400" b="0" i="0" u="none" strike="noStrike" cap="none">
+                <a:solidFill>
+                  <a:schemeClr val="dk2"/>
+                </a:solidFill>
+                <a:latin typeface="Arial"/>
+                <a:ea typeface="Arial"/>
+                <a:cs typeface="Arial"/>
+                <a:sym typeface="Arial"/>
+              </a:defRPr>
+            </a:lvl6pPr>
+            <a:lvl7pPr marL="3200400" marR="0" lvl="6" indent="-317500" algn="l" rtl="0">
+              <a:lnSpc>
+                <a:spcPct val="115000"/>
+              </a:lnSpc>
+              <a:spcBef>
+                <a:spcPts val="1600"/>
+              </a:spcBef>
+              <a:spcAft>
+                <a:spcPts val="0"/>
+              </a:spcAft>
+              <a:buClr>
+                <a:schemeClr val="dk2"/>
+              </a:buClr>
+              <a:buSzPts val="1400"/>
+              <a:buFont typeface="Arial"/>
+              <a:buChar char="●"/>
+              <a:defRPr sz="1400" b="0" i="0" u="none" strike="noStrike" cap="none">
+                <a:solidFill>
+                  <a:schemeClr val="dk2"/>
+                </a:solidFill>
+                <a:latin typeface="Arial"/>
+                <a:ea typeface="Arial"/>
+                <a:cs typeface="Arial"/>
+                <a:sym typeface="Arial"/>
+              </a:defRPr>
+            </a:lvl7pPr>
+            <a:lvl8pPr marL="3657600" marR="0" lvl="7" indent="-317500" algn="l" rtl="0">
+              <a:lnSpc>
+                <a:spcPct val="115000"/>
+              </a:lnSpc>
+              <a:spcBef>
+                <a:spcPts val="1600"/>
+              </a:spcBef>
+              <a:spcAft>
+                <a:spcPts val="0"/>
+              </a:spcAft>
+              <a:buClr>
+                <a:schemeClr val="dk2"/>
+              </a:buClr>
+              <a:buSzPts val="1400"/>
+              <a:buFont typeface="Arial"/>
+              <a:buChar char="○"/>
+              <a:defRPr sz="1400" b="0" i="0" u="none" strike="noStrike" cap="none">
+                <a:solidFill>
+                  <a:schemeClr val="dk2"/>
+                </a:solidFill>
+                <a:latin typeface="Arial"/>
+                <a:ea typeface="Arial"/>
+                <a:cs typeface="Arial"/>
+                <a:sym typeface="Arial"/>
+              </a:defRPr>
+            </a:lvl8pPr>
+            <a:lvl9pPr marL="4114800" marR="0" lvl="8" indent="-317500" algn="l" rtl="0">
+              <a:lnSpc>
+                <a:spcPct val="115000"/>
+              </a:lnSpc>
+              <a:spcBef>
+                <a:spcPts val="1600"/>
+              </a:spcBef>
+              <a:spcAft>
+                <a:spcPts val="1600"/>
+              </a:spcAft>
+              <a:buClr>
+                <a:schemeClr val="dk2"/>
+              </a:buClr>
+              <a:buSzPts val="1400"/>
+              <a:buFont typeface="Arial"/>
+              <a:buChar char="■"/>
+              <a:defRPr sz="1400" b="0" i="0" u="none" strike="noStrike" cap="none">
+                <a:solidFill>
+                  <a:schemeClr val="dk2"/>
+                </a:solidFill>
+                <a:latin typeface="Arial"/>
+                <a:ea typeface="Arial"/>
+                <a:cs typeface="Arial"/>
+                <a:sym typeface="Arial"/>
+              </a:defRPr>
+            </a:lvl9pPr>
+          </a:lstStyle>
+          <a:p>
+            <a:pPr>
+              <a:buSzPct val="100000"/>
+            </a:pPr>
+            <a:r>
+              <a:rPr lang="fr-FR" sz="900" b="1" dirty="0"/>
+              <a:t>L’humidité</a:t>
+            </a:r>
+            <a:r>
+              <a:rPr lang="fr-FR" sz="900" dirty="0"/>
+              <a:t> est de loin la variable la plus déterminante, très au-dessus des autres</a:t>
+            </a:r>
+          </a:p>
+          <a:p>
+            <a:pPr>
+              <a:buSzPct val="100000"/>
+            </a:pPr>
+            <a:r>
+              <a:rPr lang="fr-FR" sz="900" dirty="0"/>
+              <a:t>Entre 30% et 60% d'humidité, le taux de charge solaire est </a:t>
+            </a:r>
+            <a:r>
+              <a:rPr lang="fr-FR" sz="900" b="1" dirty="0"/>
+              <a:t>globalement plus élevé</a:t>
+            </a:r>
+            <a:r>
+              <a:rPr lang="fr-FR" sz="900" dirty="0"/>
+              <a:t>. Au-delà de 70 / 80%, la performance du solaire s’effondre progressivement.</a:t>
+            </a:r>
+          </a:p>
+        </p:txBody>
+      </p:sp>
+      <p:sp>
+        <p:nvSpPr>
+          <p:cNvPr id="11" name="Ellipse 10">
+            <a:extLst>
+              <a:ext uri="{FF2B5EF4-FFF2-40B4-BE49-F238E27FC236}">
+                <a16:creationId xmlns:a16="http://schemas.microsoft.com/office/drawing/2014/main" id="{EEC86C4D-A9B4-4A74-ED37-29E01179A4EB}"/>
+              </a:ext>
+            </a:extLst>
+          </p:cNvPr>
+          <p:cNvSpPr/>
+          <p:nvPr/>
+        </p:nvSpPr>
+        <p:spPr>
+          <a:xfrm>
+            <a:off x="143711" y="4104239"/>
+            <a:ext cx="233145" cy="233145"/>
+          </a:xfrm>
+          <a:prstGeom prst="ellipse">
+            <a:avLst/>
+          </a:prstGeom>
+          <a:solidFill>
+            <a:schemeClr val="bg1"/>
+          </a:solidFill>
+          <a:ln>
+            <a:solidFill>
+              <a:srgbClr val="C00000"/>
+            </a:solidFill>
+          </a:ln>
+        </p:spPr>
+        <p:style>
+          <a:lnRef idx="2">
+            <a:schemeClr val="accent1">
+              <a:shade val="15000"/>
+            </a:schemeClr>
+          </a:lnRef>
+          <a:fillRef idx="1">
+            <a:schemeClr val="accent1"/>
+          </a:fillRef>
+          <a:effectRef idx="0">
+            <a:schemeClr val="accent1"/>
+          </a:effectRef>
+          <a:fontRef idx="minor">
+            <a:schemeClr val="lt1"/>
+          </a:fontRef>
+        </p:style>
+        <p:txBody>
+          <a:bodyPr rtlCol="0" anchor="ctr"/>
+          <a:lstStyle/>
+          <a:p>
+            <a:pPr algn="ctr"/>
+            <a:r>
+              <a:rPr lang="fr-FR" sz="1200" b="1">
+                <a:solidFill>
+                  <a:srgbClr val="C00000"/>
+                </a:solidFill>
+              </a:rPr>
+              <a:t>!</a:t>
             </a:r>
           </a:p>
         </p:txBody>

--- a/presentation/dsfs_ft_36_Projet_REnergies_efficiency_prediction.pptx
+++ b/presentation/dsfs_ft_36_Projet_REnergies_efficiency_prediction.pptx
@@ -20,12 +20,12 @@
     <p:sldId id="289" r:id="rId11"/>
     <p:sldId id="291" r:id="rId12"/>
     <p:sldId id="292" r:id="rId13"/>
-    <p:sldId id="273" r:id="rId14"/>
-    <p:sldId id="275" r:id="rId15"/>
-    <p:sldId id="294" r:id="rId16"/>
-    <p:sldId id="295" r:id="rId17"/>
-    <p:sldId id="296" r:id="rId18"/>
-    <p:sldId id="271" r:id="rId19"/>
+    <p:sldId id="271" r:id="rId14"/>
+    <p:sldId id="273" r:id="rId15"/>
+    <p:sldId id="275" r:id="rId16"/>
+    <p:sldId id="294" r:id="rId17"/>
+    <p:sldId id="295" r:id="rId18"/>
+    <p:sldId id="296" r:id="rId19"/>
   </p:sldIdLst>
   <p:sldSz cx="9144000" cy="5143500" type="screen16x9"/>
   <p:notesSz cx="6858000" cy="9144000"/>
@@ -292,7 +292,7 @@
 <file path=ppt/revisionInfo.xml><?xml version="1.0" encoding="utf-8"?>
 <p1510:revInfo xmlns:a="http://schemas.openxmlformats.org/drawingml/2006/main" xmlns:r="http://schemas.openxmlformats.org/officeDocument/2006/relationships" xmlns:p1510="http://schemas.microsoft.com/office/powerpoint/2015/10/main">
   <p1510:revLst>
-    <p1510:client id="{2EB72A00-7F79-4813-B4C2-C6564860F3F6}" v="1851" dt="2025-11-21T14:58:21.376"/>
+    <p1510:client id="{2EB72A00-7F79-4813-B4C2-C6564860F3F6}" v="2111" dt="2025-11-22T18:31:07.116"/>
   </p1510:revLst>
 </p1510:revInfo>
 </file>
@@ -302,7 +302,7 @@
   <pc:docChgLst>
     <pc:chgData name="Jean-Yves Vuillequez" userId="e7fac481abea6bd0" providerId="LiveId" clId="{79E365E8-22BC-4EC2-9606-9A9AC6CD1D22}"/>
     <pc:docChg chg="undo custSel addSld delSld modSld sldOrd">
-      <pc:chgData name="Jean-Yves Vuillequez" userId="e7fac481abea6bd0" providerId="LiveId" clId="{79E365E8-22BC-4EC2-9606-9A9AC6CD1D22}" dt="2025-11-21T14:58:23.369" v="7129" actId="1076"/>
+      <pc:chgData name="Jean-Yves Vuillequez" userId="e7fac481abea6bd0" providerId="LiveId" clId="{79E365E8-22BC-4EC2-9606-9A9AC6CD1D22}" dt="2025-11-22T18:31:30.300" v="7714" actId="14100"/>
       <pc:docMkLst>
         <pc:docMk/>
       </pc:docMkLst>
@@ -361,7 +361,7 @@
         </pc:picChg>
       </pc:sldChg>
       <pc:sldChg chg="addSp delSp modSp add mod delAnim modAnim">
-        <pc:chgData name="Jean-Yves Vuillequez" userId="e7fac481abea6bd0" providerId="LiveId" clId="{79E365E8-22BC-4EC2-9606-9A9AC6CD1D22}" dt="2025-11-21T12:16:37.075" v="6161" actId="1076"/>
+        <pc:chgData name="Jean-Yves Vuillequez" userId="e7fac481abea6bd0" providerId="LiveId" clId="{79E365E8-22BC-4EC2-9606-9A9AC6CD1D22}" dt="2025-11-21T15:21:22.933" v="7153"/>
         <pc:sldMkLst>
           <pc:docMk/>
           <pc:sldMk cId="0" sldId="264"/>
@@ -479,7 +479,7 @@
           </ac:spMkLst>
         </pc:spChg>
         <pc:spChg chg="add mod">
-          <ac:chgData name="Jean-Yves Vuillequez" userId="e7fac481abea6bd0" providerId="LiveId" clId="{79E365E8-22BC-4EC2-9606-9A9AC6CD1D22}" dt="2025-11-21T12:04:19.077" v="6121" actId="14100"/>
+          <ac:chgData name="Jean-Yves Vuillequez" userId="e7fac481abea6bd0" providerId="LiveId" clId="{79E365E8-22BC-4EC2-9606-9A9AC6CD1D22}" dt="2025-11-21T15:21:19.061" v="7152" actId="1076"/>
           <ac:spMkLst>
             <pc:docMk/>
             <pc:sldMk cId="0" sldId="264"/>
@@ -581,52 +581,12 @@
             <ac:spMk id="2" creationId="{A8AF3C33-4A88-5872-EAED-84B597DDCB98}"/>
           </ac:spMkLst>
         </pc:spChg>
-        <pc:spChg chg="add del mod">
-          <ac:chgData name="Jean-Yves Vuillequez" userId="e7fac481abea6bd0" providerId="LiveId" clId="{79E365E8-22BC-4EC2-9606-9A9AC6CD1D22}" dt="2025-11-20T10:05:28.670" v="648" actId="478"/>
-          <ac:spMkLst>
-            <pc:docMk/>
-            <pc:sldMk cId="0" sldId="270"/>
-            <ac:spMk id="4" creationId="{CFF3CFE9-35DD-FA20-F905-181316C559B6}"/>
-          </ac:spMkLst>
-        </pc:spChg>
         <pc:spChg chg="add mod">
           <ac:chgData name="Jean-Yves Vuillequez" userId="e7fac481abea6bd0" providerId="LiveId" clId="{79E365E8-22BC-4EC2-9606-9A9AC6CD1D22}" dt="2025-11-20T13:13:44.672" v="3099" actId="108"/>
           <ac:spMkLst>
             <pc:docMk/>
             <pc:sldMk cId="0" sldId="270"/>
             <ac:spMk id="5" creationId="{6E9B9A86-9FEE-4DF9-2C6B-AA0F6754EFCC}"/>
-          </ac:spMkLst>
-        </pc:spChg>
-        <pc:spChg chg="add mod">
-          <ac:chgData name="Jean-Yves Vuillequez" userId="e7fac481abea6bd0" providerId="LiveId" clId="{79E365E8-22BC-4EC2-9606-9A9AC6CD1D22}" dt="2025-11-20T10:05:42.543" v="665"/>
-          <ac:spMkLst>
-            <pc:docMk/>
-            <pc:sldMk cId="0" sldId="270"/>
-            <ac:spMk id="6" creationId="{49D47BAE-88E1-8FD3-90BE-51B6479B85BE}"/>
-          </ac:spMkLst>
-        </pc:spChg>
-        <pc:spChg chg="add del mod">
-          <ac:chgData name="Jean-Yves Vuillequez" userId="e7fac481abea6bd0" providerId="LiveId" clId="{79E365E8-22BC-4EC2-9606-9A9AC6CD1D22}" dt="2025-11-20T10:30:47.251" v="1672" actId="478"/>
-          <ac:spMkLst>
-            <pc:docMk/>
-            <pc:sldMk cId="0" sldId="270"/>
-            <ac:spMk id="7" creationId="{8FDC42F2-B714-150C-0107-EB7EC4E29659}"/>
-          </ac:spMkLst>
-        </pc:spChg>
-        <pc:spChg chg="add mod">
-          <ac:chgData name="Jean-Yves Vuillequez" userId="e7fac481abea6bd0" providerId="LiveId" clId="{79E365E8-22BC-4EC2-9606-9A9AC6CD1D22}" dt="2025-11-20T10:30:30.786" v="1666"/>
-          <ac:spMkLst>
-            <pc:docMk/>
-            <pc:sldMk cId="0" sldId="270"/>
-            <ac:spMk id="8" creationId="{7155EBE3-11A1-6D05-3702-A8B72D0858A0}"/>
-          </ac:spMkLst>
-        </pc:spChg>
-        <pc:spChg chg="add del mod">
-          <ac:chgData name="Jean-Yves Vuillequez" userId="e7fac481abea6bd0" providerId="LiveId" clId="{79E365E8-22BC-4EC2-9606-9A9AC6CD1D22}" dt="2025-11-20T12:47:06.310" v="2795" actId="478"/>
-          <ac:spMkLst>
-            <pc:docMk/>
-            <pc:sldMk cId="0" sldId="270"/>
-            <ac:spMk id="9" creationId="{1BEA6E70-4C5E-A40C-DF58-A907FBCCF538}"/>
           </ac:spMkLst>
         </pc:spChg>
         <pc:spChg chg="add mod">
@@ -645,14 +605,6 @@
             <ac:spMk id="12" creationId="{89323911-6E5E-E0F1-07ED-A6A7D389B824}"/>
           </ac:spMkLst>
         </pc:spChg>
-        <pc:spChg chg="add del mod">
-          <ac:chgData name="Jean-Yves Vuillequez" userId="e7fac481abea6bd0" providerId="LiveId" clId="{79E365E8-22BC-4EC2-9606-9A9AC6CD1D22}" dt="2025-11-20T12:57:06.749" v="2855" actId="478"/>
-          <ac:spMkLst>
-            <pc:docMk/>
-            <pc:sldMk cId="0" sldId="270"/>
-            <ac:spMk id="17" creationId="{74753835-66E1-D659-EDAB-7365C22BA1B3}"/>
-          </ac:spMkLst>
-        </pc:spChg>
         <pc:spChg chg="add mod">
           <ac:chgData name="Jean-Yves Vuillequez" userId="e7fac481abea6bd0" providerId="LiveId" clId="{79E365E8-22BC-4EC2-9606-9A9AC6CD1D22}" dt="2025-11-20T13:09:42.957" v="3014" actId="1035"/>
           <ac:spMkLst>
@@ -667,14 +619,6 @@
             <pc:docMk/>
             <pc:sldMk cId="0" sldId="270"/>
             <ac:spMk id="27" creationId="{D1939A7E-40F5-B89A-35FB-D12584E40447}"/>
-          </ac:spMkLst>
-        </pc:spChg>
-        <pc:spChg chg="add del mod">
-          <ac:chgData name="Jean-Yves Vuillequez" userId="e7fac481abea6bd0" providerId="LiveId" clId="{79E365E8-22BC-4EC2-9606-9A9AC6CD1D22}" dt="2025-11-20T13:11:05.923" v="3052" actId="478"/>
-          <ac:spMkLst>
-            <pc:docMk/>
-            <pc:sldMk cId="0" sldId="270"/>
-            <ac:spMk id="28" creationId="{982B57C7-4FA5-C653-6718-8FD1165D4F96}"/>
           </ac:spMkLst>
         </pc:spChg>
         <pc:spChg chg="add mod">
@@ -709,30 +653,6 @@
             <ac:spMk id="180" creationId="{00000000-0000-0000-0000-000000000000}"/>
           </ac:spMkLst>
         </pc:spChg>
-        <pc:spChg chg="del mod">
-          <ac:chgData name="Jean-Yves Vuillequez" userId="e7fac481abea6bd0" providerId="LiveId" clId="{79E365E8-22BC-4EC2-9606-9A9AC6CD1D22}" dt="2025-11-20T10:05:20.515" v="647" actId="478"/>
-          <ac:spMkLst>
-            <pc:docMk/>
-            <pc:sldMk cId="0" sldId="270"/>
-            <ac:spMk id="181" creationId="{00000000-0000-0000-0000-000000000000}"/>
-          </ac:spMkLst>
-        </pc:spChg>
-        <pc:picChg chg="add del mod">
-          <ac:chgData name="Jean-Yves Vuillequez" userId="e7fac481abea6bd0" providerId="LiveId" clId="{79E365E8-22BC-4EC2-9606-9A9AC6CD1D22}" dt="2025-11-20T12:53:29.722" v="2837" actId="478"/>
-          <ac:picMkLst>
-            <pc:docMk/>
-            <pc:sldMk cId="0" sldId="270"/>
-            <ac:picMk id="10" creationId="{858477D3-C5B2-4CE9-8F1C-EDB6BD1C4472}"/>
-          </ac:picMkLst>
-        </pc:picChg>
-        <pc:picChg chg="add del mod">
-          <ac:chgData name="Jean-Yves Vuillequez" userId="e7fac481abea6bd0" providerId="LiveId" clId="{79E365E8-22BC-4EC2-9606-9A9AC6CD1D22}" dt="2025-11-20T13:02:18.998" v="2875" actId="478"/>
-          <ac:picMkLst>
-            <pc:docMk/>
-            <pc:sldMk cId="0" sldId="270"/>
-            <ac:picMk id="21" creationId="{7D798BBA-0FCC-2129-BF6C-06BCB804C5A6}"/>
-          </ac:picMkLst>
-        </pc:picChg>
         <pc:picChg chg="add mod modCrop">
           <ac:chgData name="Jean-Yves Vuillequez" userId="e7fac481abea6bd0" providerId="LiveId" clId="{79E365E8-22BC-4EC2-9606-9A9AC6CD1D22}" dt="2025-11-20T13:14:00.213" v="3103" actId="208"/>
           <ac:picMkLst>
@@ -782,6 +702,13 @@
           </ac:cxnSpMkLst>
         </pc:cxnChg>
       </pc:sldChg>
+      <pc:sldChg chg="ord">
+        <pc:chgData name="Jean-Yves Vuillequez" userId="e7fac481abea6bd0" providerId="LiveId" clId="{79E365E8-22BC-4EC2-9606-9A9AC6CD1D22}" dt="2025-11-21T15:39:23.675" v="7162"/>
+        <pc:sldMkLst>
+          <pc:docMk/>
+          <pc:sldMk cId="0" sldId="271"/>
+        </pc:sldMkLst>
+      </pc:sldChg>
       <pc:sldChg chg="modSp add del mod">
         <pc:chgData name="Jean-Yves Vuillequez" userId="e7fac481abea6bd0" providerId="LiveId" clId="{79E365E8-22BC-4EC2-9606-9A9AC6CD1D22}" dt="2025-11-19T14:03:57.617" v="139" actId="20577"/>
         <pc:sldMkLst>
@@ -798,13 +725,13 @@
         </pc:spChg>
       </pc:sldChg>
       <pc:sldChg chg="addSp delSp modSp add mod ord delAnim modAnim modNotesTx">
-        <pc:chgData name="Jean-Yves Vuillequez" userId="e7fac481abea6bd0" providerId="LiveId" clId="{79E365E8-22BC-4EC2-9606-9A9AC6CD1D22}" dt="2025-11-20T20:34:08.981" v="5207" actId="478"/>
+        <pc:chgData name="Jean-Yves Vuillequez" userId="e7fac481abea6bd0" providerId="LiveId" clId="{79E365E8-22BC-4EC2-9606-9A9AC6CD1D22}" dt="2025-11-22T18:31:30.300" v="7714" actId="14100"/>
         <pc:sldMkLst>
           <pc:docMk/>
           <pc:sldMk cId="1821755839" sldId="274"/>
         </pc:sldMkLst>
         <pc:spChg chg="add mod">
-          <ac:chgData name="Jean-Yves Vuillequez" userId="e7fac481abea6bd0" providerId="LiveId" clId="{79E365E8-22BC-4EC2-9606-9A9AC6CD1D22}" dt="2025-11-20T12:02:50.125" v="2760" actId="403"/>
+          <ac:chgData name="Jean-Yves Vuillequez" userId="e7fac481abea6bd0" providerId="LiveId" clId="{79E365E8-22BC-4EC2-9606-9A9AC6CD1D22}" dt="2025-11-22T08:13:32.305" v="7198" actId="14100"/>
           <ac:spMkLst>
             <pc:docMk/>
             <pc:sldMk cId="1821755839" sldId="274"/>
@@ -812,143 +739,63 @@
           </ac:spMkLst>
         </pc:spChg>
         <pc:spChg chg="add del mod">
-          <ac:chgData name="Jean-Yves Vuillequez" userId="e7fac481abea6bd0" providerId="LiveId" clId="{79E365E8-22BC-4EC2-9606-9A9AC6CD1D22}" dt="2025-11-20T08:51:30.090" v="451" actId="478"/>
+          <ac:chgData name="Jean-Yves Vuillequez" userId="e7fac481abea6bd0" providerId="LiveId" clId="{79E365E8-22BC-4EC2-9606-9A9AC6CD1D22}" dt="2025-11-22T09:16:01.202" v="7226" actId="478"/>
           <ac:spMkLst>
             <pc:docMk/>
             <pc:sldMk cId="1821755839" sldId="274"/>
-            <ac:spMk id="4" creationId="{CBCFB9A3-164B-59E0-23FF-58CBDB2217D5}"/>
+            <ac:spMk id="3" creationId="{162FFC6F-D9F3-0E9D-8995-E9C5F33E53C6}"/>
           </ac:spMkLst>
         </pc:spChg>
-        <pc:spChg chg="add del mod">
-          <ac:chgData name="Jean-Yves Vuillequez" userId="e7fac481abea6bd0" providerId="LiveId" clId="{79E365E8-22BC-4EC2-9606-9A9AC6CD1D22}" dt="2025-11-20T08:51:30.090" v="451" actId="478"/>
+        <pc:spChg chg="add mod">
+          <ac:chgData name="Jean-Yves Vuillequez" userId="e7fac481abea6bd0" providerId="LiveId" clId="{79E365E8-22BC-4EC2-9606-9A9AC6CD1D22}" dt="2025-11-22T18:20:05.192" v="7659" actId="208"/>
           <ac:spMkLst>
             <pc:docMk/>
             <pc:sldMk cId="1821755839" sldId="274"/>
-            <ac:spMk id="5" creationId="{B0151B2E-5DD5-EFB0-A133-31629F32A90E}"/>
+            <ac:spMk id="3" creationId="{33B23519-5EFA-F17A-CAA2-6EF8A191B3CD}"/>
           </ac:spMkLst>
         </pc:spChg>
-        <pc:spChg chg="add del mod">
-          <ac:chgData name="Jean-Yves Vuillequez" userId="e7fac481abea6bd0" providerId="LiveId" clId="{79E365E8-22BC-4EC2-9606-9A9AC6CD1D22}" dt="2025-11-20T08:51:30.090" v="451" actId="478"/>
+        <pc:spChg chg="add mod">
+          <ac:chgData name="Jean-Yves Vuillequez" userId="e7fac481abea6bd0" providerId="LiveId" clId="{79E365E8-22BC-4EC2-9606-9A9AC6CD1D22}" dt="2025-11-22T09:16:55.604" v="7240" actId="1035"/>
           <ac:spMkLst>
             <pc:docMk/>
             <pc:sldMk cId="1821755839" sldId="274"/>
-            <ac:spMk id="6" creationId="{26E0203E-DA04-332A-75B9-CA2255A69CD4}"/>
+            <ac:spMk id="4" creationId="{967D4A6C-3756-2775-B55E-F408743583CC}"/>
           </ac:spMkLst>
         </pc:spChg>
-        <pc:spChg chg="add del mod">
-          <ac:chgData name="Jean-Yves Vuillequez" userId="e7fac481abea6bd0" providerId="LiveId" clId="{79E365E8-22BC-4EC2-9606-9A9AC6CD1D22}" dt="2025-11-20T08:38:09.094" v="365" actId="478"/>
+        <pc:spChg chg="add mod">
+          <ac:chgData name="Jean-Yves Vuillequez" userId="e7fac481abea6bd0" providerId="LiveId" clId="{79E365E8-22BC-4EC2-9606-9A9AC6CD1D22}" dt="2025-11-22T18:17:05.681" v="7617" actId="1076"/>
           <ac:spMkLst>
             <pc:docMk/>
             <pc:sldMk cId="1821755839" sldId="274"/>
-            <ac:spMk id="7" creationId="{67A62F17-EB69-4DE3-2CF4-7B669263DC3D}"/>
-          </ac:spMkLst>
-        </pc:spChg>
-        <pc:spChg chg="mod">
-          <ac:chgData name="Jean-Yves Vuillequez" userId="e7fac481abea6bd0" providerId="LiveId" clId="{79E365E8-22BC-4EC2-9606-9A9AC6CD1D22}" dt="2025-11-20T08:33:18.924" v="343"/>
-          <ac:spMkLst>
-            <pc:docMk/>
-            <pc:sldMk cId="1821755839" sldId="274"/>
-            <ac:spMk id="9" creationId="{7CF89CA7-8084-322B-0AD8-B63AD2B345E1}"/>
-          </ac:spMkLst>
-        </pc:spChg>
-        <pc:spChg chg="mod">
-          <ac:chgData name="Jean-Yves Vuillequez" userId="e7fac481abea6bd0" providerId="LiveId" clId="{79E365E8-22BC-4EC2-9606-9A9AC6CD1D22}" dt="2025-11-20T08:33:18.924" v="343"/>
-          <ac:spMkLst>
-            <pc:docMk/>
-            <pc:sldMk cId="1821755839" sldId="274"/>
-            <ac:spMk id="10" creationId="{0D00AC46-0B58-199D-CA2C-03DB3DC30259}"/>
-          </ac:spMkLst>
-        </pc:spChg>
-        <pc:spChg chg="mod">
-          <ac:chgData name="Jean-Yves Vuillequez" userId="e7fac481abea6bd0" providerId="LiveId" clId="{79E365E8-22BC-4EC2-9606-9A9AC6CD1D22}" dt="2025-11-20T08:37:56.666" v="361" actId="571"/>
-          <ac:spMkLst>
-            <pc:docMk/>
-            <pc:sldMk cId="1821755839" sldId="274"/>
-            <ac:spMk id="12" creationId="{0963EADB-748B-D0E7-5BF3-6EA168822480}"/>
-          </ac:spMkLst>
-        </pc:spChg>
-        <pc:spChg chg="mod">
-          <ac:chgData name="Jean-Yves Vuillequez" userId="e7fac481abea6bd0" providerId="LiveId" clId="{79E365E8-22BC-4EC2-9606-9A9AC6CD1D22}" dt="2025-11-20T08:37:56.666" v="361" actId="571"/>
-          <ac:spMkLst>
-            <pc:docMk/>
-            <pc:sldMk cId="1821755839" sldId="274"/>
-            <ac:spMk id="13" creationId="{E4E5A3DF-3C63-24CF-7B7B-328A2AD44B57}"/>
-          </ac:spMkLst>
-        </pc:spChg>
-        <pc:spChg chg="mod">
-          <ac:chgData name="Jean-Yves Vuillequez" userId="e7fac481abea6bd0" providerId="LiveId" clId="{79E365E8-22BC-4EC2-9606-9A9AC6CD1D22}" dt="2025-11-20T08:37:59.021" v="362" actId="571"/>
-          <ac:spMkLst>
-            <pc:docMk/>
-            <pc:sldMk cId="1821755839" sldId="274"/>
-            <ac:spMk id="15" creationId="{ACAD37B6-EF93-C275-C6AA-A8A46E685AC9}"/>
-          </ac:spMkLst>
-        </pc:spChg>
-        <pc:spChg chg="mod">
-          <ac:chgData name="Jean-Yves Vuillequez" userId="e7fac481abea6bd0" providerId="LiveId" clId="{79E365E8-22BC-4EC2-9606-9A9AC6CD1D22}" dt="2025-11-20T08:37:59.021" v="362" actId="571"/>
-          <ac:spMkLst>
-            <pc:docMk/>
-            <pc:sldMk cId="1821755839" sldId="274"/>
-            <ac:spMk id="16" creationId="{8ECB2D9A-ED98-FE7D-DED3-4DF3A449AE8B}"/>
-          </ac:spMkLst>
-        </pc:spChg>
-        <pc:spChg chg="add mod">
-          <ac:chgData name="Jean-Yves Vuillequez" userId="e7fac481abea6bd0" providerId="LiveId" clId="{79E365E8-22BC-4EC2-9606-9A9AC6CD1D22}" dt="2025-11-20T08:40:34.024" v="383" actId="571"/>
-          <ac:spMkLst>
-            <pc:docMk/>
-            <pc:sldMk cId="1821755839" sldId="274"/>
-            <ac:spMk id="17" creationId="{1EA46F47-0519-8E57-BAA8-62FE94F8E54F}"/>
+            <ac:spMk id="5" creationId="{564CE1A9-869C-774B-0E58-18DB76A3FCD2}"/>
           </ac:spMkLst>
         </pc:spChg>
         <pc:spChg chg="add mod ord">
-          <ac:chgData name="Jean-Yves Vuillequez" userId="e7fac481abea6bd0" providerId="LiveId" clId="{79E365E8-22BC-4EC2-9606-9A9AC6CD1D22}" dt="2025-11-20T20:27:28.016" v="5176" actId="1076"/>
+          <ac:chgData name="Jean-Yves Vuillequez" userId="e7fac481abea6bd0" providerId="LiveId" clId="{79E365E8-22BC-4EC2-9606-9A9AC6CD1D22}" dt="2025-11-22T08:13:32.305" v="7198" actId="14100"/>
           <ac:spMkLst>
             <pc:docMk/>
             <pc:sldMk cId="1821755839" sldId="274"/>
             <ac:spMk id="18" creationId="{44D928FD-3F68-ECAE-DF01-69E25D43D94B}"/>
           </ac:spMkLst>
         </pc:spChg>
-        <pc:spChg chg="mod">
-          <ac:chgData name="Jean-Yves Vuillequez" userId="e7fac481abea6bd0" providerId="LiveId" clId="{79E365E8-22BC-4EC2-9606-9A9AC6CD1D22}" dt="2025-11-20T11:57:23.294" v="2668" actId="1076"/>
-          <ac:spMkLst>
-            <pc:docMk/>
-            <pc:sldMk cId="1821755839" sldId="274"/>
-            <ac:spMk id="20" creationId="{6DDE20E4-CB2E-04FF-2DA9-1E1738D5C9E4}"/>
-          </ac:spMkLst>
-        </pc:spChg>
-        <pc:spChg chg="mod">
-          <ac:chgData name="Jean-Yves Vuillequez" userId="e7fac481abea6bd0" providerId="LiveId" clId="{79E365E8-22BC-4EC2-9606-9A9AC6CD1D22}" dt="2025-11-20T08:40:37.873" v="384" actId="571"/>
-          <ac:spMkLst>
-            <pc:docMk/>
-            <pc:sldMk cId="1821755839" sldId="274"/>
-            <ac:spMk id="21" creationId="{85EC5690-6283-B244-7760-CCEF398604E4}"/>
-          </ac:spMkLst>
-        </pc:spChg>
         <pc:spChg chg="add mod ord">
-          <ac:chgData name="Jean-Yves Vuillequez" userId="e7fac481abea6bd0" providerId="LiveId" clId="{79E365E8-22BC-4EC2-9606-9A9AC6CD1D22}" dt="2025-11-20T12:02:50.125" v="2760" actId="403"/>
+          <ac:chgData name="Jean-Yves Vuillequez" userId="e7fac481abea6bd0" providerId="LiveId" clId="{79E365E8-22BC-4EC2-9606-9A9AC6CD1D22}" dt="2025-11-22T08:13:32.305" v="7198" actId="14100"/>
           <ac:spMkLst>
             <pc:docMk/>
             <pc:sldMk cId="1821755839" sldId="274"/>
             <ac:spMk id="22" creationId="{55F95513-FB46-9FE4-91D4-34DF9BFEC6C4}"/>
           </ac:spMkLst>
         </pc:spChg>
-        <pc:spChg chg="mod">
-          <ac:chgData name="Jean-Yves Vuillequez" userId="e7fac481abea6bd0" providerId="LiveId" clId="{79E365E8-22BC-4EC2-9606-9A9AC6CD1D22}" dt="2025-11-20T08:41:11.131" v="394" actId="571"/>
+        <pc:spChg chg="add mod">
+          <ac:chgData name="Jean-Yves Vuillequez" userId="e7fac481abea6bd0" providerId="LiveId" clId="{79E365E8-22BC-4EC2-9606-9A9AC6CD1D22}" dt="2025-11-22T18:16:36.285" v="7612" actId="1076"/>
           <ac:spMkLst>
             <pc:docMk/>
             <pc:sldMk cId="1821755839" sldId="274"/>
-            <ac:spMk id="24" creationId="{7E04026A-4B4B-8456-8D1B-0738F4E374CD}"/>
-          </ac:spMkLst>
-        </pc:spChg>
-        <pc:spChg chg="mod">
-          <ac:chgData name="Jean-Yves Vuillequez" userId="e7fac481abea6bd0" providerId="LiveId" clId="{79E365E8-22BC-4EC2-9606-9A9AC6CD1D22}" dt="2025-11-20T11:57:23.294" v="2668" actId="1076"/>
-          <ac:spMkLst>
-            <pc:docMk/>
-            <pc:sldMk cId="1821755839" sldId="274"/>
-            <ac:spMk id="25" creationId="{D3C0BCCC-11D1-700F-BAD0-6BB53604F9B7}"/>
+            <ac:spMk id="23" creationId="{14BA37FE-DD89-0B23-6089-5FD37763331C}"/>
           </ac:spMkLst>
         </pc:spChg>
         <pc:spChg chg="add mod ord">
-          <ac:chgData name="Jean-Yves Vuillequez" userId="e7fac481abea6bd0" providerId="LiveId" clId="{79E365E8-22BC-4EC2-9606-9A9AC6CD1D22}" dt="2025-11-20T20:32:24.618" v="5200" actId="1076"/>
+          <ac:chgData name="Jean-Yves Vuillequez" userId="e7fac481abea6bd0" providerId="LiveId" clId="{79E365E8-22BC-4EC2-9606-9A9AC6CD1D22}" dt="2025-11-22T08:13:32.305" v="7198" actId="14100"/>
           <ac:spMkLst>
             <pc:docMk/>
             <pc:sldMk cId="1821755839" sldId="274"/>
@@ -956,23 +803,31 @@
           </ac:spMkLst>
         </pc:spChg>
         <pc:spChg chg="add mod">
-          <ac:chgData name="Jean-Yves Vuillequez" userId="e7fac481abea6bd0" providerId="LiveId" clId="{79E365E8-22BC-4EC2-9606-9A9AC6CD1D22}" dt="2025-11-20T20:30:15.752" v="5193" actId="164"/>
+          <ac:chgData name="Jean-Yves Vuillequez" userId="e7fac481abea6bd0" providerId="LiveId" clId="{79E365E8-22BC-4EC2-9606-9A9AC6CD1D22}" dt="2025-11-22T18:09:50.323" v="7601" actId="20577"/>
+          <ac:spMkLst>
+            <pc:docMk/>
+            <pc:sldMk cId="1821755839" sldId="274"/>
+            <ac:spMk id="31" creationId="{6F47604A-F072-9B2B-A28D-D050592AE8FB}"/>
+          </ac:spMkLst>
+        </pc:spChg>
+        <pc:spChg chg="add mod">
+          <ac:chgData name="Jean-Yves Vuillequez" userId="e7fac481abea6bd0" providerId="LiveId" clId="{79E365E8-22BC-4EC2-9606-9A9AC6CD1D22}" dt="2025-11-22T18:22:04.333" v="7677" actId="20577"/>
+          <ac:spMkLst>
+            <pc:docMk/>
+            <pc:sldMk cId="1821755839" sldId="274"/>
+            <ac:spMk id="32" creationId="{746A74A5-8390-A9B2-0686-BA8885C4CDA4}"/>
+          </ac:spMkLst>
+        </pc:spChg>
+        <pc:spChg chg="add mod topLvl">
+          <ac:chgData name="Jean-Yves Vuillequez" userId="e7fac481abea6bd0" providerId="LiveId" clId="{79E365E8-22BC-4EC2-9606-9A9AC6CD1D22}" dt="2025-11-22T18:03:46.416" v="7531" actId="165"/>
           <ac:spMkLst>
             <pc:docMk/>
             <pc:sldMk cId="1821755839" sldId="274"/>
             <ac:spMk id="44" creationId="{682088E1-064C-5214-7A97-A059E4869B55}"/>
           </ac:spMkLst>
         </pc:spChg>
-        <pc:spChg chg="add mod">
-          <ac:chgData name="Jean-Yves Vuillequez" userId="e7fac481abea6bd0" providerId="LiveId" clId="{79E365E8-22BC-4EC2-9606-9A9AC6CD1D22}" dt="2025-11-20T10:41:01.094" v="1794" actId="767"/>
-          <ac:spMkLst>
-            <pc:docMk/>
-            <pc:sldMk cId="1821755839" sldId="274"/>
-            <ac:spMk id="45" creationId="{77C8CBAA-AFDC-35B0-563B-DE2302D11CCA}"/>
-          </ac:spMkLst>
-        </pc:spChg>
-        <pc:spChg chg="add mod ord">
-          <ac:chgData name="Jean-Yves Vuillequez" userId="e7fac481abea6bd0" providerId="LiveId" clId="{79E365E8-22BC-4EC2-9606-9A9AC6CD1D22}" dt="2025-11-20T20:30:15.752" v="5193" actId="164"/>
+        <pc:spChg chg="add mod ord topLvl">
+          <ac:chgData name="Jean-Yves Vuillequez" userId="e7fac481abea6bd0" providerId="LiveId" clId="{79E365E8-22BC-4EC2-9606-9A9AC6CD1D22}" dt="2025-11-22T18:21:31.528" v="7661" actId="14100"/>
           <ac:spMkLst>
             <pc:docMk/>
             <pc:sldMk cId="1821755839" sldId="274"/>
@@ -980,7 +835,7 @@
           </ac:spMkLst>
         </pc:spChg>
         <pc:spChg chg="add mod">
-          <ac:chgData name="Jean-Yves Vuillequez" userId="e7fac481abea6bd0" providerId="LiveId" clId="{79E365E8-22BC-4EC2-9606-9A9AC6CD1D22}" dt="2025-11-20T20:26:58.742" v="5170" actId="164"/>
+          <ac:chgData name="Jean-Yves Vuillequez" userId="e7fac481abea6bd0" providerId="LiveId" clId="{79E365E8-22BC-4EC2-9606-9A9AC6CD1D22}" dt="2025-11-22T18:17:34.404" v="7627" actId="1036"/>
           <ac:spMkLst>
             <pc:docMk/>
             <pc:sldMk cId="1821755839" sldId="274"/>
@@ -988,7 +843,7 @@
           </ac:spMkLst>
         </pc:spChg>
         <pc:spChg chg="add mod">
-          <ac:chgData name="Jean-Yves Vuillequez" userId="e7fac481abea6bd0" providerId="LiveId" clId="{79E365E8-22BC-4EC2-9606-9A9AC6CD1D22}" dt="2025-11-20T20:26:58.742" v="5170" actId="164"/>
+          <ac:chgData name="Jean-Yves Vuillequez" userId="e7fac481abea6bd0" providerId="LiveId" clId="{79E365E8-22BC-4EC2-9606-9A9AC6CD1D22}" dt="2025-11-22T18:17:34.404" v="7627" actId="1036"/>
           <ac:spMkLst>
             <pc:docMk/>
             <pc:sldMk cId="1821755839" sldId="274"/>
@@ -996,7 +851,7 @@
           </ac:spMkLst>
         </pc:spChg>
         <pc:spChg chg="add mod">
-          <ac:chgData name="Jean-Yves Vuillequez" userId="e7fac481abea6bd0" providerId="LiveId" clId="{79E365E8-22BC-4EC2-9606-9A9AC6CD1D22}" dt="2025-11-20T20:26:58.742" v="5170" actId="164"/>
+          <ac:chgData name="Jean-Yves Vuillequez" userId="e7fac481abea6bd0" providerId="LiveId" clId="{79E365E8-22BC-4EC2-9606-9A9AC6CD1D22}" dt="2025-11-22T18:17:34.404" v="7627" actId="1036"/>
           <ac:spMkLst>
             <pc:docMk/>
             <pc:sldMk cId="1821755839" sldId="274"/>
@@ -1004,7 +859,7 @@
           </ac:spMkLst>
         </pc:spChg>
         <pc:spChg chg="add mod">
-          <ac:chgData name="Jean-Yves Vuillequez" userId="e7fac481abea6bd0" providerId="LiveId" clId="{79E365E8-22BC-4EC2-9606-9A9AC6CD1D22}" dt="2025-11-20T20:26:58.742" v="5170" actId="164"/>
+          <ac:chgData name="Jean-Yves Vuillequez" userId="e7fac481abea6bd0" providerId="LiveId" clId="{79E365E8-22BC-4EC2-9606-9A9AC6CD1D22}" dt="2025-11-22T18:17:34.404" v="7627" actId="1036"/>
           <ac:spMkLst>
             <pc:docMk/>
             <pc:sldMk cId="1821755839" sldId="274"/>
@@ -1012,7 +867,7 @@
           </ac:spMkLst>
         </pc:spChg>
         <pc:spChg chg="add mod">
-          <ac:chgData name="Jean-Yves Vuillequez" userId="e7fac481abea6bd0" providerId="LiveId" clId="{79E365E8-22BC-4EC2-9606-9A9AC6CD1D22}" dt="2025-11-20T20:26:58.742" v="5170" actId="164"/>
+          <ac:chgData name="Jean-Yves Vuillequez" userId="e7fac481abea6bd0" providerId="LiveId" clId="{79E365E8-22BC-4EC2-9606-9A9AC6CD1D22}" dt="2025-11-22T18:17:34.404" v="7627" actId="1036"/>
           <ac:spMkLst>
             <pc:docMk/>
             <pc:sldMk cId="1821755839" sldId="274"/>
@@ -1020,111 +875,87 @@
           </ac:spMkLst>
         </pc:spChg>
         <pc:spChg chg="add mod">
-          <ac:chgData name="Jean-Yves Vuillequez" userId="e7fac481abea6bd0" providerId="LiveId" clId="{79E365E8-22BC-4EC2-9606-9A9AC6CD1D22}" dt="2025-11-20T20:26:58.742" v="5170" actId="164"/>
+          <ac:chgData name="Jean-Yves Vuillequez" userId="e7fac481abea6bd0" providerId="LiveId" clId="{79E365E8-22BC-4EC2-9606-9A9AC6CD1D22}" dt="2025-11-22T18:31:30.300" v="7714" actId="14100"/>
           <ac:spMkLst>
             <pc:docMk/>
             <pc:sldMk cId="1821755839" sldId="274"/>
             <ac:spMk id="53" creationId="{CF1F8123-FC2A-EF28-8139-FC1D62216C5F}"/>
           </ac:spMkLst>
         </pc:spChg>
-        <pc:spChg chg="add mod">
-          <ac:chgData name="Jean-Yves Vuillequez" userId="e7fac481abea6bd0" providerId="LiveId" clId="{79E365E8-22BC-4EC2-9606-9A9AC6CD1D22}" dt="2025-11-20T20:32:44.585" v="5201" actId="164"/>
+        <pc:spChg chg="add mod topLvl">
+          <ac:chgData name="Jean-Yves Vuillequez" userId="e7fac481abea6bd0" providerId="LiveId" clId="{79E365E8-22BC-4EC2-9606-9A9AC6CD1D22}" dt="2025-11-22T18:16:36.285" v="7612" actId="1076"/>
           <ac:spMkLst>
             <pc:docMk/>
             <pc:sldMk cId="1821755839" sldId="274"/>
             <ac:spMk id="54" creationId="{3E4E5C19-19D1-7DB3-6126-771BB460CA7E}"/>
           </ac:spMkLst>
         </pc:spChg>
-        <pc:spChg chg="add mod">
-          <ac:chgData name="Jean-Yves Vuillequez" userId="e7fac481abea6bd0" providerId="LiveId" clId="{79E365E8-22BC-4EC2-9606-9A9AC6CD1D22}" dt="2025-11-20T20:32:44.585" v="5201" actId="164"/>
+        <pc:spChg chg="add mod topLvl">
+          <ac:chgData name="Jean-Yves Vuillequez" userId="e7fac481abea6bd0" providerId="LiveId" clId="{79E365E8-22BC-4EC2-9606-9A9AC6CD1D22}" dt="2025-11-22T18:16:36.285" v="7612" actId="1076"/>
           <ac:spMkLst>
             <pc:docMk/>
             <pc:sldMk cId="1821755839" sldId="274"/>
             <ac:spMk id="55" creationId="{C4EB1607-BC4B-15A3-0324-3D29B9154D63}"/>
           </ac:spMkLst>
         </pc:spChg>
-        <pc:spChg chg="add mod">
-          <ac:chgData name="Jean-Yves Vuillequez" userId="e7fac481abea6bd0" providerId="LiveId" clId="{79E365E8-22BC-4EC2-9606-9A9AC6CD1D22}" dt="2025-11-20T20:32:44.585" v="5201" actId="164"/>
+        <pc:spChg chg="add mod topLvl">
+          <ac:chgData name="Jean-Yves Vuillequez" userId="e7fac481abea6bd0" providerId="LiveId" clId="{79E365E8-22BC-4EC2-9606-9A9AC6CD1D22}" dt="2025-11-22T18:16:36.285" v="7612" actId="1076"/>
           <ac:spMkLst>
             <pc:docMk/>
             <pc:sldMk cId="1821755839" sldId="274"/>
             <ac:spMk id="56" creationId="{34BB09D2-59B3-0F52-1024-4F32B01B2F53}"/>
           </ac:spMkLst>
         </pc:spChg>
-        <pc:spChg chg="add mod">
-          <ac:chgData name="Jean-Yves Vuillequez" userId="e7fac481abea6bd0" providerId="LiveId" clId="{79E365E8-22BC-4EC2-9606-9A9AC6CD1D22}" dt="2025-11-20T20:32:44.585" v="5201" actId="164"/>
+        <pc:spChg chg="add mod topLvl">
+          <ac:chgData name="Jean-Yves Vuillequez" userId="e7fac481abea6bd0" providerId="LiveId" clId="{79E365E8-22BC-4EC2-9606-9A9AC6CD1D22}" dt="2025-11-22T18:16:36.285" v="7612" actId="1076"/>
           <ac:spMkLst>
             <pc:docMk/>
             <pc:sldMk cId="1821755839" sldId="274"/>
             <ac:spMk id="57" creationId="{685F5B80-27B1-45A6-3DF8-0CF7271056CC}"/>
           </ac:spMkLst>
         </pc:spChg>
-        <pc:spChg chg="add mod">
-          <ac:chgData name="Jean-Yves Vuillequez" userId="e7fac481abea6bd0" providerId="LiveId" clId="{79E365E8-22BC-4EC2-9606-9A9AC6CD1D22}" dt="2025-11-20T20:27:18.739" v="5174" actId="164"/>
+        <pc:spChg chg="add mod topLvl">
+          <ac:chgData name="Jean-Yves Vuillequez" userId="e7fac481abea6bd0" providerId="LiveId" clId="{79E365E8-22BC-4EC2-9606-9A9AC6CD1D22}" dt="2025-11-22T09:50:17.468" v="7485" actId="165"/>
           <ac:spMkLst>
             <pc:docMk/>
             <pc:sldMk cId="1821755839" sldId="274"/>
             <ac:spMk id="58" creationId="{42C67AD7-C645-5367-3E47-6D6A996C5FE8}"/>
           </ac:spMkLst>
         </pc:spChg>
-        <pc:spChg chg="add del mod">
-          <ac:chgData name="Jean-Yves Vuillequez" userId="e7fac481abea6bd0" providerId="LiveId" clId="{79E365E8-22BC-4EC2-9606-9A9AC6CD1D22}" dt="2025-11-20T11:13:26.956" v="2146" actId="478"/>
+        <pc:spChg chg="add del">
+          <ac:chgData name="Jean-Yves Vuillequez" userId="e7fac481abea6bd0" providerId="LiveId" clId="{79E365E8-22BC-4EC2-9606-9A9AC6CD1D22}" dt="2025-11-22T09:30:14.960" v="7330" actId="22"/>
           <ac:spMkLst>
             <pc:docMk/>
             <pc:sldMk cId="1821755839" sldId="274"/>
-            <ac:spMk id="59" creationId="{A71C0264-9568-3B10-80E9-BB4CC27D44A7}"/>
+            <ac:spMk id="61" creationId="{9604BE13-7DDD-AB2A-8533-AFDCA94F78A3}"/>
           </ac:spMkLst>
         </pc:spChg>
-        <pc:spChg chg="add del mod">
-          <ac:chgData name="Jean-Yves Vuillequez" userId="e7fac481abea6bd0" providerId="LiveId" clId="{79E365E8-22BC-4EC2-9606-9A9AC6CD1D22}" dt="2025-11-20T11:13:26.956" v="2146" actId="478"/>
-          <ac:spMkLst>
-            <pc:docMk/>
-            <pc:sldMk cId="1821755839" sldId="274"/>
-            <ac:spMk id="60" creationId="{F5E45CE2-9974-9A72-4F4A-D34C2A56EC66}"/>
-          </ac:spMkLst>
-        </pc:spChg>
-        <pc:spChg chg="add mod">
-          <ac:chgData name="Jean-Yves Vuillequez" userId="e7fac481abea6bd0" providerId="LiveId" clId="{79E365E8-22BC-4EC2-9606-9A9AC6CD1D22}" dt="2025-11-20T11:13:42.590" v="2151" actId="571"/>
-          <ac:spMkLst>
-            <pc:docMk/>
-            <pc:sldMk cId="1821755839" sldId="274"/>
-            <ac:spMk id="62" creationId="{25239851-DAB7-EC44-907B-FBAB11582572}"/>
-          </ac:spMkLst>
-        </pc:spChg>
-        <pc:spChg chg="add mod">
-          <ac:chgData name="Jean-Yves Vuillequez" userId="e7fac481abea6bd0" providerId="LiveId" clId="{79E365E8-22BC-4EC2-9606-9A9AC6CD1D22}" dt="2025-11-20T11:13:42.334" v="2150" actId="571"/>
-          <ac:spMkLst>
-            <pc:docMk/>
-            <pc:sldMk cId="1821755839" sldId="274"/>
-            <ac:spMk id="64" creationId="{272DACD5-9A17-6717-1FA4-D367D3083FF4}"/>
-          </ac:spMkLst>
-        </pc:spChg>
-        <pc:spChg chg="add mod">
-          <ac:chgData name="Jean-Yves Vuillequez" userId="e7fac481abea6bd0" providerId="LiveId" clId="{79E365E8-22BC-4EC2-9606-9A9AC6CD1D22}" dt="2025-11-20T20:27:18.739" v="5174" actId="164"/>
+        <pc:spChg chg="add mod topLvl">
+          <ac:chgData name="Jean-Yves Vuillequez" userId="e7fac481abea6bd0" providerId="LiveId" clId="{79E365E8-22BC-4EC2-9606-9A9AC6CD1D22}" dt="2025-11-22T09:50:17.468" v="7485" actId="165"/>
           <ac:spMkLst>
             <pc:docMk/>
             <pc:sldMk cId="1821755839" sldId="274"/>
             <ac:spMk id="67" creationId="{77C37EC6-CDFA-6EF5-9731-EDD14211D90B}"/>
           </ac:spMkLst>
         </pc:spChg>
-        <pc:spChg chg="add mod">
-          <ac:chgData name="Jean-Yves Vuillequez" userId="e7fac481abea6bd0" providerId="LiveId" clId="{79E365E8-22BC-4EC2-9606-9A9AC6CD1D22}" dt="2025-11-20T20:27:18.739" v="5174" actId="164"/>
+        <pc:spChg chg="add mod topLvl">
+          <ac:chgData name="Jean-Yves Vuillequez" userId="e7fac481abea6bd0" providerId="LiveId" clId="{79E365E8-22BC-4EC2-9606-9A9AC6CD1D22}" dt="2025-11-22T09:50:17.468" v="7485" actId="165"/>
           <ac:spMkLst>
             <pc:docMk/>
             <pc:sldMk cId="1821755839" sldId="274"/>
             <ac:spMk id="70" creationId="{78E1D7E3-9E06-E6A5-253E-A6CE2A2F1050}"/>
           </ac:spMkLst>
         </pc:spChg>
-        <pc:spChg chg="add mod">
-          <ac:chgData name="Jean-Yves Vuillequez" userId="e7fac481abea6bd0" providerId="LiveId" clId="{79E365E8-22BC-4EC2-9606-9A9AC6CD1D22}" dt="2025-11-20T20:28:42.563" v="5185" actId="164"/>
+        <pc:spChg chg="add mod topLvl">
+          <ac:chgData name="Jean-Yves Vuillequez" userId="e7fac481abea6bd0" providerId="LiveId" clId="{79E365E8-22BC-4EC2-9606-9A9AC6CD1D22}" dt="2025-11-22T18:30:42.838" v="7705" actId="14100"/>
           <ac:spMkLst>
             <pc:docMk/>
             <pc:sldMk cId="1821755839" sldId="274"/>
             <ac:spMk id="71" creationId="{E74B2057-34BC-1980-9671-44A128491597}"/>
           </ac:spMkLst>
         </pc:spChg>
-        <pc:spChg chg="add mod">
-          <ac:chgData name="Jean-Yves Vuillequez" userId="e7fac481abea6bd0" providerId="LiveId" clId="{79E365E8-22BC-4EC2-9606-9A9AC6CD1D22}" dt="2025-11-20T20:27:18.739" v="5174" actId="164"/>
+        <pc:spChg chg="add mod topLvl">
+          <ac:chgData name="Jean-Yves Vuillequez" userId="e7fac481abea6bd0" providerId="LiveId" clId="{79E365E8-22BC-4EC2-9606-9A9AC6CD1D22}" dt="2025-11-22T09:50:17.468" v="7485" actId="165"/>
           <ac:spMkLst>
             <pc:docMk/>
             <pc:sldMk cId="1821755839" sldId="274"/>
@@ -1132,35 +963,11 @@
           </ac:spMkLst>
         </pc:spChg>
         <pc:spChg chg="add mod">
-          <ac:chgData name="Jean-Yves Vuillequez" userId="e7fac481abea6bd0" providerId="LiveId" clId="{79E365E8-22BC-4EC2-9606-9A9AC6CD1D22}" dt="2025-11-20T11:19:33.767" v="2234" actId="571"/>
+          <ac:chgData name="Jean-Yves Vuillequez" userId="e7fac481abea6bd0" providerId="LiveId" clId="{79E365E8-22BC-4EC2-9606-9A9AC6CD1D22}" dt="2025-11-22T18:16:36.285" v="7612" actId="1076"/>
           <ac:spMkLst>
             <pc:docMk/>
             <pc:sldMk cId="1821755839" sldId="274"/>
-            <ac:spMk id="78" creationId="{F9DB8C53-77E9-0E4C-3E10-D82A96B2374C}"/>
-          </ac:spMkLst>
-        </pc:spChg>
-        <pc:spChg chg="add mod">
-          <ac:chgData name="Jean-Yves Vuillequez" userId="e7fac481abea6bd0" providerId="LiveId" clId="{79E365E8-22BC-4EC2-9606-9A9AC6CD1D22}" dt="2025-11-20T11:19:33.767" v="2234" actId="571"/>
-          <ac:spMkLst>
-            <pc:docMk/>
-            <pc:sldMk cId="1821755839" sldId="274"/>
-            <ac:spMk id="80" creationId="{4AEF642B-047A-466B-0C38-0E7FB8F94B27}"/>
-          </ac:spMkLst>
-        </pc:spChg>
-        <pc:spChg chg="add mod">
-          <ac:chgData name="Jean-Yves Vuillequez" userId="e7fac481abea6bd0" providerId="LiveId" clId="{79E365E8-22BC-4EC2-9606-9A9AC6CD1D22}" dt="2025-11-20T11:19:33.767" v="2234" actId="571"/>
-          <ac:spMkLst>
-            <pc:docMk/>
-            <pc:sldMk cId="1821755839" sldId="274"/>
-            <ac:spMk id="82" creationId="{8281DB0F-F9EB-C85E-E8CD-390770EDDFDB}"/>
-          </ac:spMkLst>
-        </pc:spChg>
-        <pc:spChg chg="add mod">
-          <ac:chgData name="Jean-Yves Vuillequez" userId="e7fac481abea6bd0" providerId="LiveId" clId="{79E365E8-22BC-4EC2-9606-9A9AC6CD1D22}" dt="2025-11-20T11:19:33.767" v="2234" actId="571"/>
-          <ac:spMkLst>
-            <pc:docMk/>
-            <pc:sldMk cId="1821755839" sldId="274"/>
-            <ac:spMk id="83" creationId="{388DE769-4A11-8C26-5CE9-5ED11841B676}"/>
+            <ac:spMk id="76" creationId="{0137AD1F-A369-4FCE-AD69-964680B420B5}"/>
           </ac:spMkLst>
         </pc:spChg>
         <pc:spChg chg="mod">
@@ -1171,32 +978,24 @@
             <ac:spMk id="96" creationId="{E0E7B8E7-F933-D99A-FC55-A7E0AFDF3556}"/>
           </ac:spMkLst>
         </pc:spChg>
-        <pc:spChg chg="del mod">
-          <ac:chgData name="Jean-Yves Vuillequez" userId="e7fac481abea6bd0" providerId="LiveId" clId="{79E365E8-22BC-4EC2-9606-9A9AC6CD1D22}" dt="2025-11-20T12:00:34.480" v="2714" actId="478"/>
-          <ac:spMkLst>
-            <pc:docMk/>
-            <pc:sldMk cId="1821755839" sldId="274"/>
-            <ac:spMk id="98" creationId="{0302C705-EB34-55B3-983C-81DA8BD20273}"/>
-          </ac:spMkLst>
-        </pc:spChg>
-        <pc:spChg chg="add del mod ord">
-          <ac:chgData name="Jean-Yves Vuillequez" userId="e7fac481abea6bd0" providerId="LiveId" clId="{79E365E8-22BC-4EC2-9606-9A9AC6CD1D22}" dt="2025-11-20T11:27:12.653" v="2342" actId="21"/>
-          <ac:spMkLst>
-            <pc:docMk/>
-            <pc:sldMk cId="1821755839" sldId="274"/>
-            <ac:spMk id="105" creationId="{70820C9A-B957-87A8-109D-6C661627DA4C}"/>
-          </ac:spMkLst>
-        </pc:spChg>
-        <pc:spChg chg="add mod">
-          <ac:chgData name="Jean-Yves Vuillequez" userId="e7fac481abea6bd0" providerId="LiveId" clId="{79E365E8-22BC-4EC2-9606-9A9AC6CD1D22}" dt="2025-11-20T20:28:42.563" v="5185" actId="164"/>
+        <pc:spChg chg="add mod topLvl">
+          <ac:chgData name="Jean-Yves Vuillequez" userId="e7fac481abea6bd0" providerId="LiveId" clId="{79E365E8-22BC-4EC2-9606-9A9AC6CD1D22}" dt="2025-11-22T18:30:48.419" v="7706" actId="1076"/>
           <ac:spMkLst>
             <pc:docMk/>
             <pc:sldMk cId="1821755839" sldId="274"/>
             <ac:spMk id="106" creationId="{70820C9A-B957-87A8-109D-6C661627DA4C}"/>
           </ac:spMkLst>
         </pc:spChg>
-        <pc:spChg chg="add mod">
-          <ac:chgData name="Jean-Yves Vuillequez" userId="e7fac481abea6bd0" providerId="LiveId" clId="{79E365E8-22BC-4EC2-9606-9A9AC6CD1D22}" dt="2025-11-20T20:32:44.585" v="5201" actId="164"/>
+        <pc:spChg chg="add del">
+          <ac:chgData name="Jean-Yves Vuillequez" userId="e7fac481abea6bd0" providerId="LiveId" clId="{79E365E8-22BC-4EC2-9606-9A9AC6CD1D22}" dt="2025-11-22T10:36:23.904" v="7493" actId="22"/>
+          <ac:spMkLst>
+            <pc:docMk/>
+            <pc:sldMk cId="1821755839" sldId="274"/>
+            <ac:spMk id="1031" creationId="{09D91F1B-81AB-FA01-B260-5DCC085FC57A}"/>
+          </ac:spMkLst>
+        </pc:spChg>
+        <pc:spChg chg="add mod topLvl">
+          <ac:chgData name="Jean-Yves Vuillequez" userId="e7fac481abea6bd0" providerId="LiveId" clId="{79E365E8-22BC-4EC2-9606-9A9AC6CD1D22}" dt="2025-11-22T18:16:36.285" v="7612" actId="1076"/>
           <ac:spMkLst>
             <pc:docMk/>
             <pc:sldMk cId="1821755839" sldId="274"/>
@@ -1211,80 +1010,32 @@
             <ac:spMk id="2096" creationId="{273A85B6-13FD-89FF-E669-100D308ACE82}"/>
           </ac:spMkLst>
         </pc:spChg>
-        <pc:spChg chg="add mod">
-          <ac:chgData name="Jean-Yves Vuillequez" userId="e7fac481abea6bd0" providerId="LiveId" clId="{79E365E8-22BC-4EC2-9606-9A9AC6CD1D22}" dt="2025-11-20T20:32:44.585" v="5201" actId="164"/>
+        <pc:spChg chg="add mod topLvl">
+          <ac:chgData name="Jean-Yves Vuillequez" userId="e7fac481abea6bd0" providerId="LiveId" clId="{79E365E8-22BC-4EC2-9606-9A9AC6CD1D22}" dt="2025-11-22T18:16:36.285" v="7612" actId="1076"/>
           <ac:spMkLst>
             <pc:docMk/>
             <pc:sldMk cId="1821755839" sldId="274"/>
             <ac:spMk id="2097" creationId="{ADF20F1D-E32A-83D7-1C9F-ED56E1ADF5A6}"/>
           </ac:spMkLst>
         </pc:spChg>
-        <pc:grpChg chg="add mod">
-          <ac:chgData name="Jean-Yves Vuillequez" userId="e7fac481abea6bd0" providerId="LiveId" clId="{79E365E8-22BC-4EC2-9606-9A9AC6CD1D22}" dt="2025-11-20T20:26:59.699" v="5173" actId="164"/>
-          <ac:grpSpMkLst>
-            <pc:docMk/>
-            <pc:sldMk cId="1821755839" sldId="274"/>
-            <ac:grpSpMk id="3" creationId="{23FD7915-E9FB-D50D-3D2C-DAA536A072F4}"/>
-          </ac:grpSpMkLst>
-        </pc:grpChg>
-        <pc:grpChg chg="add mod">
-          <ac:chgData name="Jean-Yves Vuillequez" userId="e7fac481abea6bd0" providerId="LiveId" clId="{79E365E8-22BC-4EC2-9606-9A9AC6CD1D22}" dt="2025-11-20T20:26:59.004" v="5171" actId="164"/>
-          <ac:grpSpMkLst>
-            <pc:docMk/>
-            <pc:sldMk cId="1821755839" sldId="274"/>
-            <ac:grpSpMk id="5" creationId="{C3A27509-F8DF-5392-E215-F9E129F2934C}"/>
-          </ac:grpSpMkLst>
-        </pc:grpChg>
-        <pc:grpChg chg="add mod">
-          <ac:chgData name="Jean-Yves Vuillequez" userId="e7fac481abea6bd0" providerId="LiveId" clId="{79E365E8-22BC-4EC2-9606-9A9AC6CD1D22}" dt="2025-11-20T20:26:58.491" v="5169" actId="164"/>
-          <ac:grpSpMkLst>
-            <pc:docMk/>
-            <pc:sldMk cId="1821755839" sldId="274"/>
-            <ac:grpSpMk id="7" creationId="{BCAC5398-48B7-D159-642C-6C1FB77F51AD}"/>
-          </ac:grpSpMkLst>
-        </pc:grpChg>
-        <pc:grpChg chg="add mod">
-          <ac:chgData name="Jean-Yves Vuillequez" userId="e7fac481abea6bd0" providerId="LiveId" clId="{79E365E8-22BC-4EC2-9606-9A9AC6CD1D22}" dt="2025-11-20T20:26:56.795" v="5163" actId="164"/>
-          <ac:grpSpMkLst>
-            <pc:docMk/>
-            <pc:sldMk cId="1821755839" sldId="274"/>
-            <ac:grpSpMk id="8" creationId="{2F3F1743-DDFF-E074-6078-31C09C5D19C9}"/>
-          </ac:grpSpMkLst>
-        </pc:grpChg>
         <pc:grpChg chg="add del mod">
-          <ac:chgData name="Jean-Yves Vuillequez" userId="e7fac481abea6bd0" providerId="LiveId" clId="{79E365E8-22BC-4EC2-9606-9A9AC6CD1D22}" dt="2025-11-20T08:51:30.090" v="451" actId="478"/>
-          <ac:grpSpMkLst>
-            <pc:docMk/>
-            <pc:sldMk cId="1821755839" sldId="274"/>
-            <ac:grpSpMk id="8" creationId="{A3B8CF28-56C6-32D7-D0F2-18444BE72F66}"/>
-          </ac:grpSpMkLst>
-        </pc:grpChg>
-        <pc:grpChg chg="add mod">
-          <ac:chgData name="Jean-Yves Vuillequez" userId="e7fac481abea6bd0" providerId="LiveId" clId="{79E365E8-22BC-4EC2-9606-9A9AC6CD1D22}" dt="2025-11-20T20:27:18.739" v="5174" actId="164"/>
+          <ac:chgData name="Jean-Yves Vuillequez" userId="e7fac481abea6bd0" providerId="LiveId" clId="{79E365E8-22BC-4EC2-9606-9A9AC6CD1D22}" dt="2025-11-22T09:50:17.468" v="7485" actId="165"/>
           <ac:grpSpMkLst>
             <pc:docMk/>
             <pc:sldMk cId="1821755839" sldId="274"/>
             <ac:grpSpMk id="9" creationId="{1942901F-9902-04A0-3544-E014B88B92FF}"/>
           </ac:grpSpMkLst>
         </pc:grpChg>
-        <pc:grpChg chg="add del mod">
-          <ac:chgData name="Jean-Yves Vuillequez" userId="e7fac481abea6bd0" providerId="LiveId" clId="{79E365E8-22BC-4EC2-9606-9A9AC6CD1D22}" dt="2025-11-20T08:51:30.090" v="451" actId="478"/>
-          <ac:grpSpMkLst>
-            <pc:docMk/>
-            <pc:sldMk cId="1821755839" sldId="274"/>
-            <ac:grpSpMk id="11" creationId="{C87BA6BA-2747-CFA1-7DD6-F4F77216FBA2}"/>
-          </ac:grpSpMkLst>
-        </pc:grpChg>
-        <pc:grpChg chg="add mod">
-          <ac:chgData name="Jean-Yves Vuillequez" userId="e7fac481abea6bd0" providerId="LiveId" clId="{79E365E8-22BC-4EC2-9606-9A9AC6CD1D22}" dt="2025-11-20T20:30:42.131" v="5196" actId="164"/>
+        <pc:grpChg chg="add del mod topLvl">
+          <ac:chgData name="Jean-Yves Vuillequez" userId="e7fac481abea6bd0" providerId="LiveId" clId="{79E365E8-22BC-4EC2-9606-9A9AC6CD1D22}" dt="2025-11-22T18:03:46.416" v="7531" actId="165"/>
           <ac:grpSpMkLst>
             <pc:docMk/>
             <pc:sldMk cId="1821755839" sldId="274"/>
             <ac:grpSpMk id="12" creationId="{A4F3950E-A273-3885-0546-EA789FEF3AD4}"/>
           </ac:grpSpMkLst>
         </pc:grpChg>
-        <pc:grpChg chg="add mod">
-          <ac:chgData name="Jean-Yves Vuillequez" userId="e7fac481abea6bd0" providerId="LiveId" clId="{79E365E8-22BC-4EC2-9606-9A9AC6CD1D22}" dt="2025-11-20T20:30:42.131" v="5196" actId="164"/>
+        <pc:grpChg chg="add del mod">
+          <ac:chgData name="Jean-Yves Vuillequez" userId="e7fac481abea6bd0" providerId="LiveId" clId="{79E365E8-22BC-4EC2-9606-9A9AC6CD1D22}" dt="2025-11-22T18:03:28.800" v="7530" actId="165"/>
           <ac:grpSpMkLst>
             <pc:docMk/>
             <pc:sldMk cId="1821755839" sldId="274"/>
@@ -1292,135 +1043,71 @@
           </ac:grpSpMkLst>
         </pc:grpChg>
         <pc:grpChg chg="add del mod">
-          <ac:chgData name="Jean-Yves Vuillequez" userId="e7fac481abea6bd0" providerId="LiveId" clId="{79E365E8-22BC-4EC2-9606-9A9AC6CD1D22}" dt="2025-11-20T20:34:08.981" v="5207" actId="478"/>
-          <ac:grpSpMkLst>
-            <pc:docMk/>
-            <pc:sldMk cId="1821755839" sldId="274"/>
-            <ac:grpSpMk id="14" creationId="{0D06F820-0C84-13EF-42FA-C8495BEA0636}"/>
-          </ac:grpSpMkLst>
-        </pc:grpChg>
-        <pc:grpChg chg="add mod">
-          <ac:chgData name="Jean-Yves Vuillequez" userId="e7fac481abea6bd0" providerId="LiveId" clId="{79E365E8-22BC-4EC2-9606-9A9AC6CD1D22}" dt="2025-11-20T20:32:44.585" v="5201" actId="164"/>
+          <ac:chgData name="Jean-Yves Vuillequez" userId="e7fac481abea6bd0" providerId="LiveId" clId="{79E365E8-22BC-4EC2-9606-9A9AC6CD1D22}" dt="2025-11-22T09:26:21.189" v="7280" actId="165"/>
           <ac:grpSpMkLst>
             <pc:docMk/>
             <pc:sldMk cId="1821755839" sldId="274"/>
             <ac:grpSpMk id="17" creationId="{618688FD-4D2F-7A63-8807-ABB66A2C4089}"/>
           </ac:grpSpMkLst>
         </pc:grpChg>
-        <pc:grpChg chg="add del mod ord">
-          <ac:chgData name="Jean-Yves Vuillequez" userId="e7fac481abea6bd0" providerId="LiveId" clId="{79E365E8-22BC-4EC2-9606-9A9AC6CD1D22}" dt="2025-11-20T20:34:08.981" v="5207" actId="478"/>
+        <pc:grpChg chg="add mod">
+          <ac:chgData name="Jean-Yves Vuillequez" userId="e7fac481abea6bd0" providerId="LiveId" clId="{79E365E8-22BC-4EC2-9606-9A9AC6CD1D22}" dt="2025-11-22T09:49:04.487" v="7454" actId="1076"/>
           <ac:grpSpMkLst>
             <pc:docMk/>
             <pc:sldMk cId="1821755839" sldId="274"/>
-            <ac:grpSpMk id="19" creationId="{D5364BFE-1394-DF84-7508-CE993349E3F7}"/>
+            <ac:grpSpMk id="78" creationId="{48BB1303-220D-775F-BC97-35D0BC10D7AC}"/>
           </ac:grpSpMkLst>
         </pc:grpChg>
         <pc:grpChg chg="add del mod">
-          <ac:chgData name="Jean-Yves Vuillequez" userId="e7fac481abea6bd0" providerId="LiveId" clId="{79E365E8-22BC-4EC2-9606-9A9AC6CD1D22}" dt="2025-11-20T20:34:08.981" v="5207" actId="478"/>
+          <ac:chgData name="Jean-Yves Vuillequez" userId="e7fac481abea6bd0" providerId="LiveId" clId="{79E365E8-22BC-4EC2-9606-9A9AC6CD1D22}" dt="2025-11-22T09:50:28.945" v="7488" actId="478"/>
           <ac:grpSpMkLst>
             <pc:docMk/>
             <pc:sldMk cId="1821755839" sldId="274"/>
-            <ac:grpSpMk id="23" creationId="{D68234D9-A2C6-161D-C55C-E509AF1EEB5C}"/>
+            <ac:grpSpMk id="1024" creationId="{DA7793AF-7555-0276-9AAD-DD92E5CEBF43}"/>
           </ac:grpSpMkLst>
         </pc:grpChg>
         <pc:picChg chg="add del mod">
-          <ac:chgData name="Jean-Yves Vuillequez" userId="e7fac481abea6bd0" providerId="LiveId" clId="{79E365E8-22BC-4EC2-9606-9A9AC6CD1D22}" dt="2025-11-20T12:00:46.445" v="2716" actId="478"/>
+          <ac:chgData name="Jean-Yves Vuillequez" userId="e7fac481abea6bd0" providerId="LiveId" clId="{79E365E8-22BC-4EC2-9606-9A9AC6CD1D22}" dt="2025-11-22T09:26:15.227" v="7279" actId="478"/>
           <ac:picMkLst>
             <pc:docMk/>
             <pc:sldMk cId="1821755839" sldId="274"/>
-            <ac:picMk id="3" creationId="{B2469126-D060-A3A0-24FE-3940B83EED58}"/>
+            <ac:picMk id="19" creationId="{B06A4583-878B-26D3-2EE9-8D9E4A4CD1F3}"/>
           </ac:picMkLst>
         </pc:picChg>
         <pc:picChg chg="add del mod">
-          <ac:chgData name="Jean-Yves Vuillequez" userId="e7fac481abea6bd0" providerId="LiveId" clId="{79E365E8-22BC-4EC2-9606-9A9AC6CD1D22}" dt="2025-11-20T11:27:12.653" v="2342" actId="21"/>
+          <ac:chgData name="Jean-Yves Vuillequez" userId="e7fac481abea6bd0" providerId="LiveId" clId="{79E365E8-22BC-4EC2-9606-9A9AC6CD1D22}" dt="2025-11-22T09:26:25.741" v="7282" actId="478"/>
           <ac:picMkLst>
             <pc:docMk/>
             <pc:sldMk cId="1821755839" sldId="274"/>
-            <ac:picMk id="32" creationId="{9E201599-7D6B-4671-395A-AB9C1CE55DB4}"/>
+            <ac:picMk id="20" creationId="{90F037CF-090B-C902-E6E2-089C3D502131}"/>
+          </ac:picMkLst>
+        </pc:picChg>
+        <pc:picChg chg="add mod">
+          <ac:chgData name="Jean-Yves Vuillequez" userId="e7fac481abea6bd0" providerId="LiveId" clId="{79E365E8-22BC-4EC2-9606-9A9AC6CD1D22}" dt="2025-11-22T18:15:44.176" v="7605" actId="1076"/>
+          <ac:picMkLst>
+            <pc:docMk/>
+            <pc:sldMk cId="1821755839" sldId="274"/>
+            <ac:picMk id="20" creationId="{9F92FB23-9D37-AEB9-493C-1E3DAE1913D2}"/>
+          </ac:picMkLst>
+        </pc:picChg>
+        <pc:picChg chg="add mod">
+          <ac:chgData name="Jean-Yves Vuillequez" userId="e7fac481abea6bd0" providerId="LiveId" clId="{79E365E8-22BC-4EC2-9606-9A9AC6CD1D22}" dt="2025-11-22T18:16:36.285" v="7612" actId="1076"/>
+          <ac:picMkLst>
+            <pc:docMk/>
+            <pc:sldMk cId="1821755839" sldId="274"/>
+            <ac:picMk id="21" creationId="{174134F5-72A3-DA25-E671-C7DDD8DFA83A}"/>
           </ac:picMkLst>
         </pc:picChg>
         <pc:picChg chg="add del mod">
-          <ac:chgData name="Jean-Yves Vuillequez" userId="e7fac481abea6bd0" providerId="LiveId" clId="{79E365E8-22BC-4EC2-9606-9A9AC6CD1D22}" dt="2025-11-20T10:35:03.107" v="1711" actId="478"/>
+          <ac:chgData name="Jean-Yves Vuillequez" userId="e7fac481abea6bd0" providerId="LiveId" clId="{79E365E8-22BC-4EC2-9606-9A9AC6CD1D22}" dt="2025-11-22T18:15:33.516" v="7603" actId="478"/>
           <ac:picMkLst>
             <pc:docMk/>
             <pc:sldMk cId="1821755839" sldId="274"/>
-            <ac:picMk id="33" creationId="{F84A0D41-8413-C686-CF95-956250D6C126}"/>
+            <ac:picMk id="25" creationId="{9A368348-C30E-D050-C4DB-B32BDBE3589F}"/>
           </ac:picMkLst>
         </pc:picChg>
-        <pc:picChg chg="add del mod">
-          <ac:chgData name="Jean-Yves Vuillequez" userId="e7fac481abea6bd0" providerId="LiveId" clId="{79E365E8-22BC-4EC2-9606-9A9AC6CD1D22}" dt="2025-11-20T10:35:03.107" v="1711" actId="478"/>
-          <ac:picMkLst>
-            <pc:docMk/>
-            <pc:sldMk cId="1821755839" sldId="274"/>
-            <ac:picMk id="34" creationId="{D197D56C-63EF-E00B-6948-D29AC2F32653}"/>
-          </ac:picMkLst>
-        </pc:picChg>
-        <pc:picChg chg="add del mod">
-          <ac:chgData name="Jean-Yves Vuillequez" userId="e7fac481abea6bd0" providerId="LiveId" clId="{79E365E8-22BC-4EC2-9606-9A9AC6CD1D22}" dt="2025-11-20T10:35:03.107" v="1711" actId="478"/>
-          <ac:picMkLst>
-            <pc:docMk/>
-            <pc:sldMk cId="1821755839" sldId="274"/>
-            <ac:picMk id="35" creationId="{E63F4BF5-F1AE-84EE-BBA7-B9087645F385}"/>
-          </ac:picMkLst>
-        </pc:picChg>
-        <pc:picChg chg="add del mod">
-          <ac:chgData name="Jean-Yves Vuillequez" userId="e7fac481abea6bd0" providerId="LiveId" clId="{79E365E8-22BC-4EC2-9606-9A9AC6CD1D22}" dt="2025-11-20T10:36:00.043" v="1726" actId="478"/>
-          <ac:picMkLst>
-            <pc:docMk/>
-            <pc:sldMk cId="1821755839" sldId="274"/>
-            <ac:picMk id="36" creationId="{FE0EF77C-92FF-24CE-BFC8-C932780C9C10}"/>
-          </ac:picMkLst>
-        </pc:picChg>
-        <pc:picChg chg="add del mod">
-          <ac:chgData name="Jean-Yves Vuillequez" userId="e7fac481abea6bd0" providerId="LiveId" clId="{79E365E8-22BC-4EC2-9606-9A9AC6CD1D22}" dt="2025-11-20T10:36:00.043" v="1726" actId="478"/>
-          <ac:picMkLst>
-            <pc:docMk/>
-            <pc:sldMk cId="1821755839" sldId="274"/>
-            <ac:picMk id="37" creationId="{FE5048AF-D52E-C07D-D8DA-FC15494FC388}"/>
-          </ac:picMkLst>
-        </pc:picChg>
-        <pc:picChg chg="add del mod">
-          <ac:chgData name="Jean-Yves Vuillequez" userId="e7fac481abea6bd0" providerId="LiveId" clId="{79E365E8-22BC-4EC2-9606-9A9AC6CD1D22}" dt="2025-11-20T11:23:30.840" v="2278" actId="478"/>
-          <ac:picMkLst>
-            <pc:docMk/>
-            <pc:sldMk cId="1821755839" sldId="274"/>
-            <ac:picMk id="38" creationId="{F9C7BF27-093B-7D0F-B6C3-274E3E854A39}"/>
-          </ac:picMkLst>
-        </pc:picChg>
-        <pc:picChg chg="add del mod">
-          <ac:chgData name="Jean-Yves Vuillequez" userId="e7fac481abea6bd0" providerId="LiveId" clId="{79E365E8-22BC-4EC2-9606-9A9AC6CD1D22}" dt="2025-11-20T11:13:26.956" v="2146" actId="478"/>
-          <ac:picMkLst>
-            <pc:docMk/>
-            <pc:sldMk cId="1821755839" sldId="274"/>
-            <ac:picMk id="39" creationId="{EE8CCEDC-08DE-94CB-B69A-D139F38B5AA7}"/>
-          </ac:picMkLst>
-        </pc:picChg>
-        <pc:picChg chg="add del mod">
-          <ac:chgData name="Jean-Yves Vuillequez" userId="e7fac481abea6bd0" providerId="LiveId" clId="{79E365E8-22BC-4EC2-9606-9A9AC6CD1D22}" dt="2025-11-20T11:13:26.956" v="2146" actId="478"/>
-          <ac:picMkLst>
-            <pc:docMk/>
-            <pc:sldMk cId="1821755839" sldId="274"/>
-            <ac:picMk id="40" creationId="{F8CDE158-F4C1-68B7-524C-CE32C39E8011}"/>
-          </ac:picMkLst>
-        </pc:picChg>
-        <pc:picChg chg="add del mod">
-          <ac:chgData name="Jean-Yves Vuillequez" userId="e7fac481abea6bd0" providerId="LiveId" clId="{79E365E8-22BC-4EC2-9606-9A9AC6CD1D22}" dt="2025-11-20T11:13:26.956" v="2146" actId="478"/>
-          <ac:picMkLst>
-            <pc:docMk/>
-            <pc:sldMk cId="1821755839" sldId="274"/>
-            <ac:picMk id="41" creationId="{8FB51A97-1436-5D14-3D5F-29843523E295}"/>
-          </ac:picMkLst>
-        </pc:picChg>
-        <pc:picChg chg="add del mod">
-          <ac:chgData name="Jean-Yves Vuillequez" userId="e7fac481abea6bd0" providerId="LiveId" clId="{79E365E8-22BC-4EC2-9606-9A9AC6CD1D22}" dt="2025-11-20T11:13:26.956" v="2146" actId="478"/>
-          <ac:picMkLst>
-            <pc:docMk/>
-            <pc:sldMk cId="1821755839" sldId="274"/>
-            <ac:picMk id="42" creationId="{6EC88DA7-684D-8A9E-B539-C30CBB6C50B2}"/>
-          </ac:picMkLst>
-        </pc:picChg>
-        <pc:picChg chg="add mod">
-          <ac:chgData name="Jean-Yves Vuillequez" userId="e7fac481abea6bd0" providerId="LiveId" clId="{79E365E8-22BC-4EC2-9606-9A9AC6CD1D22}" dt="2025-11-20T20:32:44.585" v="5201" actId="164"/>
+        <pc:picChg chg="add mod topLvl">
+          <ac:chgData name="Jean-Yves Vuillequez" userId="e7fac481abea6bd0" providerId="LiveId" clId="{79E365E8-22BC-4EC2-9606-9A9AC6CD1D22}" dt="2025-11-22T18:16:36.285" v="7612" actId="1076"/>
           <ac:picMkLst>
             <pc:docMk/>
             <pc:sldMk cId="1821755839" sldId="274"/>
@@ -1428,127 +1115,63 @@
           </ac:picMkLst>
         </pc:picChg>
         <pc:picChg chg="add mod">
-          <ac:chgData name="Jean-Yves Vuillequez" userId="e7fac481abea6bd0" providerId="LiveId" clId="{79E365E8-22BC-4EC2-9606-9A9AC6CD1D22}" dt="2025-11-20T20:26:58.742" v="5170" actId="164"/>
+          <ac:chgData name="Jean-Yves Vuillequez" userId="e7fac481abea6bd0" providerId="LiveId" clId="{79E365E8-22BC-4EC2-9606-9A9AC6CD1D22}" dt="2025-11-22T18:17:34.404" v="7627" actId="1036"/>
           <ac:picMkLst>
             <pc:docMk/>
             <pc:sldMk cId="1821755839" sldId="274"/>
             <ac:picMk id="51" creationId="{054FB5AB-F043-1139-CFA8-44C9034D1153}"/>
           </ac:picMkLst>
         </pc:picChg>
-        <pc:picChg chg="add mod">
-          <ac:chgData name="Jean-Yves Vuillequez" userId="e7fac481abea6bd0" providerId="LiveId" clId="{79E365E8-22BC-4EC2-9606-9A9AC6CD1D22}" dt="2025-11-20T11:13:42.590" v="2151" actId="571"/>
+        <pc:picChg chg="add mod ord">
+          <ac:chgData name="Jean-Yves Vuillequez" userId="e7fac481abea6bd0" providerId="LiveId" clId="{79E365E8-22BC-4EC2-9606-9A9AC6CD1D22}" dt="2025-11-22T09:48:44.342" v="7448" actId="1076"/>
           <ac:picMkLst>
             <pc:docMk/>
             <pc:sldMk cId="1821755839" sldId="274"/>
-            <ac:picMk id="61" creationId="{333CFB4B-1194-4081-2A31-D4135E89AE21}"/>
+            <ac:picMk id="62" creationId="{C5C7BA9B-2B99-4B7A-7436-5F82DE29B981}"/>
           </ac:picMkLst>
         </pc:picChg>
-        <pc:picChg chg="add mod">
-          <ac:chgData name="Jean-Yves Vuillequez" userId="e7fac481abea6bd0" providerId="LiveId" clId="{79E365E8-22BC-4EC2-9606-9A9AC6CD1D22}" dt="2025-11-20T11:13:42.334" v="2150" actId="571"/>
-          <ac:picMkLst>
-            <pc:docMk/>
-            <pc:sldMk cId="1821755839" sldId="274"/>
-            <ac:picMk id="63" creationId="{175008E9-657C-5DBC-AAF4-E297D014AA27}"/>
-          </ac:picMkLst>
-        </pc:picChg>
-        <pc:picChg chg="add mod">
-          <ac:chgData name="Jean-Yves Vuillequez" userId="e7fac481abea6bd0" providerId="LiveId" clId="{79E365E8-22BC-4EC2-9606-9A9AC6CD1D22}" dt="2025-11-20T20:27:18.739" v="5174" actId="164"/>
+        <pc:picChg chg="add mod topLvl">
+          <ac:chgData name="Jean-Yves Vuillequez" userId="e7fac481abea6bd0" providerId="LiveId" clId="{79E365E8-22BC-4EC2-9606-9A9AC6CD1D22}" dt="2025-11-22T09:50:17.468" v="7485" actId="165"/>
           <ac:picMkLst>
             <pc:docMk/>
             <pc:sldMk cId="1821755839" sldId="274"/>
             <ac:picMk id="65" creationId="{976AB5B9-1D61-B29C-C9DE-9051A31E8E27}"/>
           </ac:picMkLst>
         </pc:picChg>
-        <pc:picChg chg="add del mod">
-          <ac:chgData name="Jean-Yves Vuillequez" userId="e7fac481abea6bd0" providerId="LiveId" clId="{79E365E8-22BC-4EC2-9606-9A9AC6CD1D22}" dt="2025-11-20T11:23:39.857" v="2281" actId="478"/>
-          <ac:picMkLst>
-            <pc:docMk/>
-            <pc:sldMk cId="1821755839" sldId="274"/>
-            <ac:picMk id="66" creationId="{4C719004-3702-6AC4-5881-2BF1B98F17C7}"/>
-          </ac:picMkLst>
-        </pc:picChg>
-        <pc:picChg chg="add mod">
-          <ac:chgData name="Jean-Yves Vuillequez" userId="e7fac481abea6bd0" providerId="LiveId" clId="{79E365E8-22BC-4EC2-9606-9A9AC6CD1D22}" dt="2025-11-20T20:27:18.739" v="5174" actId="164"/>
+        <pc:picChg chg="add mod topLvl">
+          <ac:chgData name="Jean-Yves Vuillequez" userId="e7fac481abea6bd0" providerId="LiveId" clId="{79E365E8-22BC-4EC2-9606-9A9AC6CD1D22}" dt="2025-11-22T09:50:17.468" v="7485" actId="165"/>
           <ac:picMkLst>
             <pc:docMk/>
             <pc:sldMk cId="1821755839" sldId="274"/>
             <ac:picMk id="68" creationId="{6A1FE08D-DF15-8940-EAA5-98ED76914736}"/>
           </ac:picMkLst>
         </pc:picChg>
-        <pc:picChg chg="add del mod">
-          <ac:chgData name="Jean-Yves Vuillequez" userId="e7fac481abea6bd0" providerId="LiveId" clId="{79E365E8-22BC-4EC2-9606-9A9AC6CD1D22}" dt="2025-11-20T11:23:47.983" v="2284" actId="478"/>
-          <ac:picMkLst>
-            <pc:docMk/>
-            <pc:sldMk cId="1821755839" sldId="274"/>
-            <ac:picMk id="69" creationId="{7FECF56B-986A-87E0-8686-2AE09C51D00D}"/>
-          </ac:picMkLst>
-        </pc:picChg>
-        <pc:picChg chg="add mod">
-          <ac:chgData name="Jean-Yves Vuillequez" userId="e7fac481abea6bd0" providerId="LiveId" clId="{79E365E8-22BC-4EC2-9606-9A9AC6CD1D22}" dt="2025-11-20T11:17:34.624" v="2222" actId="571"/>
-          <ac:picMkLst>
-            <pc:docMk/>
-            <pc:sldMk cId="1821755839" sldId="274"/>
-            <ac:picMk id="72" creationId="{2ACF0BA3-0B26-FE99-F1D5-EFDA65D28D29}"/>
-          </ac:picMkLst>
-        </pc:picChg>
-        <pc:picChg chg="add mod">
-          <ac:chgData name="Jean-Yves Vuillequez" userId="e7fac481abea6bd0" providerId="LiveId" clId="{79E365E8-22BC-4EC2-9606-9A9AC6CD1D22}" dt="2025-11-20T11:19:33.767" v="2234" actId="571"/>
-          <ac:picMkLst>
-            <pc:docMk/>
-            <pc:sldMk cId="1821755839" sldId="274"/>
-            <ac:picMk id="76" creationId="{6E5FB138-1168-9548-0B46-4162D6507326}"/>
-          </ac:picMkLst>
-        </pc:picChg>
-        <pc:picChg chg="add mod">
-          <ac:chgData name="Jean-Yves Vuillequez" userId="e7fac481abea6bd0" providerId="LiveId" clId="{79E365E8-22BC-4EC2-9606-9A9AC6CD1D22}" dt="2025-11-20T11:19:33.767" v="2234" actId="571"/>
-          <ac:picMkLst>
-            <pc:docMk/>
-            <pc:sldMk cId="1821755839" sldId="274"/>
-            <ac:picMk id="77" creationId="{8B5DA2FE-31E0-AD38-ABCD-3B58F8D1D999}"/>
-          </ac:picMkLst>
-        </pc:picChg>
-        <pc:picChg chg="add mod">
-          <ac:chgData name="Jean-Yves Vuillequez" userId="e7fac481abea6bd0" providerId="LiveId" clId="{79E365E8-22BC-4EC2-9606-9A9AC6CD1D22}" dt="2025-11-20T11:19:33.767" v="2234" actId="571"/>
-          <ac:picMkLst>
-            <pc:docMk/>
-            <pc:sldMk cId="1821755839" sldId="274"/>
-            <ac:picMk id="79" creationId="{4D224554-64C5-D132-FF87-6B875BF236DB}"/>
-          </ac:picMkLst>
-        </pc:picChg>
-        <pc:picChg chg="add mod">
-          <ac:chgData name="Jean-Yves Vuillequez" userId="e7fac481abea6bd0" providerId="LiveId" clId="{79E365E8-22BC-4EC2-9606-9A9AC6CD1D22}" dt="2025-11-20T11:19:33.767" v="2234" actId="571"/>
-          <ac:picMkLst>
-            <pc:docMk/>
-            <pc:sldMk cId="1821755839" sldId="274"/>
-            <ac:picMk id="81" creationId="{7FCA9D15-A284-AFD1-1F00-F94CF748B1C3}"/>
-          </ac:picMkLst>
-        </pc:picChg>
-        <pc:picChg chg="add mod">
-          <ac:chgData name="Jean-Yves Vuillequez" userId="e7fac481abea6bd0" providerId="LiveId" clId="{79E365E8-22BC-4EC2-9606-9A9AC6CD1D22}" dt="2025-11-20T20:28:42.563" v="5185" actId="164"/>
+        <pc:picChg chg="add del mod topLvl">
+          <ac:chgData name="Jean-Yves Vuillequez" userId="e7fac481abea6bd0" providerId="LiveId" clId="{79E365E8-22BC-4EC2-9606-9A9AC6CD1D22}" dt="2025-11-22T09:49:27.118" v="7467" actId="478"/>
           <ac:picMkLst>
             <pc:docMk/>
             <pc:sldMk cId="1821755839" sldId="274"/>
             <ac:picMk id="102" creationId="{26F3760A-01F7-627E-27AC-B1F00D3B52C6}"/>
           </ac:picMkLst>
         </pc:picChg>
-        <pc:picChg chg="add mod">
-          <ac:chgData name="Jean-Yves Vuillequez" userId="e7fac481abea6bd0" providerId="LiveId" clId="{79E365E8-22BC-4EC2-9606-9A9AC6CD1D22}" dt="2025-11-20T20:28:42.563" v="5185" actId="164"/>
+        <pc:picChg chg="add del mod topLvl">
+          <ac:chgData name="Jean-Yves Vuillequez" userId="e7fac481abea6bd0" providerId="LiveId" clId="{79E365E8-22BC-4EC2-9606-9A9AC6CD1D22}" dt="2025-11-22T09:49:26.577" v="7466" actId="478"/>
           <ac:picMkLst>
             <pc:docMk/>
             <pc:sldMk cId="1821755839" sldId="274"/>
             <ac:picMk id="103" creationId="{B33DCAA7-8CDF-83ED-2AFC-66875EDF434A}"/>
           </ac:picMkLst>
         </pc:picChg>
-        <pc:picChg chg="add mod">
-          <ac:chgData name="Jean-Yves Vuillequez" userId="e7fac481abea6bd0" providerId="LiveId" clId="{79E365E8-22BC-4EC2-9606-9A9AC6CD1D22}" dt="2025-11-20T20:28:42.563" v="5185" actId="164"/>
+        <pc:picChg chg="add del mod topLvl">
+          <ac:chgData name="Jean-Yves Vuillequez" userId="e7fac481abea6bd0" providerId="LiveId" clId="{79E365E8-22BC-4EC2-9606-9A9AC6CD1D22}" dt="2025-11-22T09:49:26.577" v="7466" actId="478"/>
           <ac:picMkLst>
             <pc:docMk/>
             <pc:sldMk cId="1821755839" sldId="274"/>
             <ac:picMk id="104" creationId="{30EDEF50-F042-0782-1F82-E1015B7ED2D4}"/>
           </ac:picMkLst>
         </pc:picChg>
-        <pc:picChg chg="add mod">
-          <ac:chgData name="Jean-Yves Vuillequez" userId="e7fac481abea6bd0" providerId="LiveId" clId="{79E365E8-22BC-4EC2-9606-9A9AC6CD1D22}" dt="2025-11-20T20:28:42.563" v="5185" actId="164"/>
+        <pc:picChg chg="add mod topLvl">
+          <ac:chgData name="Jean-Yves Vuillequez" userId="e7fac481abea6bd0" providerId="LiveId" clId="{79E365E8-22BC-4EC2-9606-9A9AC6CD1D22}" dt="2025-11-22T18:30:48.419" v="7706" actId="1076"/>
           <ac:picMkLst>
             <pc:docMk/>
             <pc:sldMk cId="1821755839" sldId="274"/>
@@ -1556,31 +1179,47 @@
           </ac:picMkLst>
         </pc:picChg>
         <pc:picChg chg="add mod">
-          <ac:chgData name="Jean-Yves Vuillequez" userId="e7fac481abea6bd0" providerId="LiveId" clId="{79E365E8-22BC-4EC2-9606-9A9AC6CD1D22}" dt="2025-11-20T20:28:42.563" v="5185" actId="164"/>
+          <ac:chgData name="Jean-Yves Vuillequez" userId="e7fac481abea6bd0" providerId="LiveId" clId="{79E365E8-22BC-4EC2-9606-9A9AC6CD1D22}" dt="2025-11-22T18:04:18.127" v="7542" actId="1076"/>
+          <ac:picMkLst>
+            <pc:docMk/>
+            <pc:sldMk cId="1821755839" sldId="274"/>
+            <ac:picMk id="116" creationId="{B7DCCBAF-8A38-3C4F-0798-30A393D5D283}"/>
+          </ac:picMkLst>
+        </pc:picChg>
+        <pc:picChg chg="add mod">
+          <ac:chgData name="Jean-Yves Vuillequez" userId="e7fac481abea6bd0" providerId="LiveId" clId="{79E365E8-22BC-4EC2-9606-9A9AC6CD1D22}" dt="2025-11-22T18:09:27.039" v="7573" actId="1076"/>
+          <ac:picMkLst>
+            <pc:docMk/>
+            <pc:sldMk cId="1821755839" sldId="274"/>
+            <ac:picMk id="117" creationId="{B3747ED9-0378-A202-7151-54782D96CF66}"/>
+          </ac:picMkLst>
+        </pc:picChg>
+        <pc:picChg chg="add del mod topLvl">
+          <ac:chgData name="Jean-Yves Vuillequez" userId="e7fac481abea6bd0" providerId="LiveId" clId="{79E365E8-22BC-4EC2-9606-9A9AC6CD1D22}" dt="2025-11-22T09:49:27.564" v="7468" actId="478"/>
           <ac:picMkLst>
             <pc:docMk/>
             <pc:sldMk cId="1821755839" sldId="274"/>
             <ac:picMk id="123" creationId="{D715FB7A-A546-1D86-6C47-6E592D4CF67D}"/>
           </ac:picMkLst>
         </pc:picChg>
-        <pc:picChg chg="add mod">
-          <ac:chgData name="Jean-Yves Vuillequez" userId="e7fac481abea6bd0" providerId="LiveId" clId="{79E365E8-22BC-4EC2-9606-9A9AC6CD1D22}" dt="2025-11-20T20:28:42.563" v="5185" actId="164"/>
+        <pc:picChg chg="add del mod">
+          <ac:chgData name="Jean-Yves Vuillequez" userId="e7fac481abea6bd0" providerId="LiveId" clId="{79E365E8-22BC-4EC2-9606-9A9AC6CD1D22}" dt="2025-11-22T09:49:28.527" v="7469" actId="478"/>
           <ac:picMkLst>
             <pc:docMk/>
             <pc:sldMk cId="1821755839" sldId="274"/>
             <ac:picMk id="124" creationId="{C5293EF4-20E0-DF10-D159-DD1506BA9014}"/>
           </ac:picMkLst>
         </pc:picChg>
-        <pc:picChg chg="add mod">
-          <ac:chgData name="Jean-Yves Vuillequez" userId="e7fac481abea6bd0" providerId="LiveId" clId="{79E365E8-22BC-4EC2-9606-9A9AC6CD1D22}" dt="2025-11-20T20:27:51.832" v="5177" actId="164"/>
+        <pc:picChg chg="add del mod topLvl">
+          <ac:chgData name="Jean-Yves Vuillequez" userId="e7fac481abea6bd0" providerId="LiveId" clId="{79E365E8-22BC-4EC2-9606-9A9AC6CD1D22}" dt="2025-11-22T09:49:29.121" v="7470" actId="478"/>
           <ac:picMkLst>
             <pc:docMk/>
             <pc:sldMk cId="1821755839" sldId="274"/>
             <ac:picMk id="125" creationId="{33AAD6E8-755C-ADC6-DD82-513A7A7A0F5B}"/>
           </ac:picMkLst>
         </pc:picChg>
-        <pc:picChg chg="add mod">
-          <ac:chgData name="Jean-Yves Vuillequez" userId="e7fac481abea6bd0" providerId="LiveId" clId="{79E365E8-22BC-4EC2-9606-9A9AC6CD1D22}" dt="2025-11-20T20:28:32.286" v="5184" actId="164"/>
+        <pc:picChg chg="add del mod topLvl">
+          <ac:chgData name="Jean-Yves Vuillequez" userId="e7fac481abea6bd0" providerId="LiveId" clId="{79E365E8-22BC-4EC2-9606-9A9AC6CD1D22}" dt="2025-11-22T09:49:26.577" v="7466" actId="478"/>
           <ac:picMkLst>
             <pc:docMk/>
             <pc:sldMk cId="1821755839" sldId="274"/>
@@ -1588,39 +1227,39 @@
           </ac:picMkLst>
         </pc:picChg>
         <pc:picChg chg="add mod">
-          <ac:chgData name="Jean-Yves Vuillequez" userId="e7fac481abea6bd0" providerId="LiveId" clId="{79E365E8-22BC-4EC2-9606-9A9AC6CD1D22}" dt="2025-11-20T11:37:47.279" v="2433"/>
+          <ac:chgData name="Jean-Yves Vuillequez" userId="e7fac481abea6bd0" providerId="LiveId" clId="{79E365E8-22BC-4EC2-9606-9A9AC6CD1D22}" dt="2025-11-22T18:04:11.938" v="7538" actId="1076"/>
           <ac:picMkLst>
             <pc:docMk/>
             <pc:sldMk cId="1821755839" sldId="274"/>
-            <ac:picMk id="127" creationId="{9BE0A3A2-08AD-B71E-FF3C-BB36128FAD7D}"/>
+            <ac:picMk id="127" creationId="{0DF6E305-58E0-10D9-0E90-7E26126193AF}"/>
           </ac:picMkLst>
         </pc:picChg>
-        <pc:picChg chg="add mod">
-          <ac:chgData name="Jean-Yves Vuillequez" userId="e7fac481abea6bd0" providerId="LiveId" clId="{79E365E8-22BC-4EC2-9606-9A9AC6CD1D22}" dt="2025-11-20T20:27:18.739" v="5174" actId="164"/>
+        <pc:picChg chg="add mod topLvl">
+          <ac:chgData name="Jean-Yves Vuillequez" userId="e7fac481abea6bd0" providerId="LiveId" clId="{79E365E8-22BC-4EC2-9606-9A9AC6CD1D22}" dt="2025-11-22T18:31:07.116" v="7713" actId="1035"/>
           <ac:picMkLst>
             <pc:docMk/>
             <pc:sldMk cId="1821755839" sldId="274"/>
             <ac:picMk id="1026" creationId="{923FE2F2-F305-A7CE-975B-2A2BA912E4B7}"/>
           </ac:picMkLst>
         </pc:picChg>
-        <pc:picChg chg="add mod">
-          <ac:chgData name="Jean-Yves Vuillequez" userId="e7fac481abea6bd0" providerId="LiveId" clId="{79E365E8-22BC-4EC2-9606-9A9AC6CD1D22}" dt="2025-11-20T20:27:18.739" v="5174" actId="164"/>
+        <pc:picChg chg="add mod topLvl">
+          <ac:chgData name="Jean-Yves Vuillequez" userId="e7fac481abea6bd0" providerId="LiveId" clId="{79E365E8-22BC-4EC2-9606-9A9AC6CD1D22}" dt="2025-11-22T18:31:07.116" v="7713" actId="1035"/>
           <ac:picMkLst>
             <pc:docMk/>
             <pc:sldMk cId="1821755839" sldId="274"/>
             <ac:picMk id="1028" creationId="{D0C03EA7-EAD6-1A33-21AE-920B9121582F}"/>
           </ac:picMkLst>
         </pc:picChg>
-        <pc:picChg chg="add mod">
-          <ac:chgData name="Jean-Yves Vuillequez" userId="e7fac481abea6bd0" providerId="LiveId" clId="{79E365E8-22BC-4EC2-9606-9A9AC6CD1D22}" dt="2025-11-20T20:27:18.739" v="5174" actId="164"/>
+        <pc:picChg chg="add mod topLvl">
+          <ac:chgData name="Jean-Yves Vuillequez" userId="e7fac481abea6bd0" providerId="LiveId" clId="{79E365E8-22BC-4EC2-9606-9A9AC6CD1D22}" dt="2025-11-22T09:50:17.468" v="7485" actId="165"/>
           <ac:picMkLst>
             <pc:docMk/>
             <pc:sldMk cId="1821755839" sldId="274"/>
             <ac:picMk id="1030" creationId="{2941D76B-6840-C572-907F-F3680B66EBF7}"/>
           </ac:picMkLst>
         </pc:picChg>
-        <pc:picChg chg="add mod">
-          <ac:chgData name="Jean-Yves Vuillequez" userId="e7fac481abea6bd0" providerId="LiveId" clId="{79E365E8-22BC-4EC2-9606-9A9AC6CD1D22}" dt="2025-11-20T20:28:42.563" v="5185" actId="164"/>
+        <pc:picChg chg="add del mod topLvl">
+          <ac:chgData name="Jean-Yves Vuillequez" userId="e7fac481abea6bd0" providerId="LiveId" clId="{79E365E8-22BC-4EC2-9606-9A9AC6CD1D22}" dt="2025-11-22T09:50:28.945" v="7488" actId="478"/>
           <ac:picMkLst>
             <pc:docMk/>
             <pc:sldMk cId="1821755839" sldId="274"/>
@@ -1628,7 +1267,15 @@
           </ac:picMkLst>
         </pc:picChg>
         <pc:picChg chg="add mod">
-          <ac:chgData name="Jean-Yves Vuillequez" userId="e7fac481abea6bd0" providerId="LiveId" clId="{79E365E8-22BC-4EC2-9606-9A9AC6CD1D22}" dt="2025-11-20T20:30:15.752" v="5193" actId="164"/>
+          <ac:chgData name="Jean-Yves Vuillequez" userId="e7fac481abea6bd0" providerId="LiveId" clId="{79E365E8-22BC-4EC2-9606-9A9AC6CD1D22}" dt="2025-11-22T18:03:10.913" v="7529" actId="1076"/>
+          <ac:picMkLst>
+            <pc:docMk/>
+            <pc:sldMk cId="1821755839" sldId="274"/>
+            <ac:picMk id="1033" creationId="{FD816D59-77CA-1E04-DAC5-C8410FAC6198}"/>
+          </ac:picMkLst>
+        </pc:picChg>
+        <pc:picChg chg="add mod topLvl">
+          <ac:chgData name="Jean-Yves Vuillequez" userId="e7fac481abea6bd0" providerId="LiveId" clId="{79E365E8-22BC-4EC2-9606-9A9AC6CD1D22}" dt="2025-11-22T18:21:35.229" v="7662" actId="1076"/>
           <ac:picMkLst>
             <pc:docMk/>
             <pc:sldMk cId="1821755839" sldId="274"/>
@@ -1636,7 +1283,7 @@
           </ac:picMkLst>
         </pc:picChg>
         <pc:picChg chg="add mod">
-          <ac:chgData name="Jean-Yves Vuillequez" userId="e7fac481abea6bd0" providerId="LiveId" clId="{79E365E8-22BC-4EC2-9606-9A9AC6CD1D22}" dt="2025-11-20T20:26:58.742" v="5170" actId="164"/>
+          <ac:chgData name="Jean-Yves Vuillequez" userId="e7fac481abea6bd0" providerId="LiveId" clId="{79E365E8-22BC-4EC2-9606-9A9AC6CD1D22}" dt="2025-11-22T18:18:03.181" v="7649" actId="1038"/>
           <ac:picMkLst>
             <pc:docMk/>
             <pc:sldMk cId="1821755839" sldId="274"/>
@@ -1644,23 +1291,23 @@
           </ac:picMkLst>
         </pc:picChg>
         <pc:picChg chg="add mod">
-          <ac:chgData name="Jean-Yves Vuillequez" userId="e7fac481abea6bd0" providerId="LiveId" clId="{79E365E8-22BC-4EC2-9606-9A9AC6CD1D22}" dt="2025-11-20T20:26:58.742" v="5170" actId="164"/>
+          <ac:chgData name="Jean-Yves Vuillequez" userId="e7fac481abea6bd0" providerId="LiveId" clId="{79E365E8-22BC-4EC2-9606-9A9AC6CD1D22}" dt="2025-11-22T18:18:03.181" v="7649" actId="1038"/>
           <ac:picMkLst>
             <pc:docMk/>
             <pc:sldMk cId="1821755839" sldId="274"/>
             <ac:picMk id="1038" creationId="{1B3822DD-A0E9-A37F-0DE9-40781F1C3DF4}"/>
           </ac:picMkLst>
         </pc:picChg>
-        <pc:picChg chg="add mod">
-          <ac:chgData name="Jean-Yves Vuillequez" userId="e7fac481abea6bd0" providerId="LiveId" clId="{79E365E8-22BC-4EC2-9606-9A9AC6CD1D22}" dt="2025-11-20T20:28:42.563" v="5185" actId="164"/>
+        <pc:picChg chg="add del mod">
+          <ac:chgData name="Jean-Yves Vuillequez" userId="e7fac481abea6bd0" providerId="LiveId" clId="{79E365E8-22BC-4EC2-9606-9A9AC6CD1D22}" dt="2025-11-22T09:49:26.577" v="7466" actId="478"/>
           <ac:picMkLst>
             <pc:docMk/>
             <pc:sldMk cId="1821755839" sldId="274"/>
             <ac:picMk id="2050" creationId="{66BE5478-2C49-E651-22DF-909C00CA75C0}"/>
           </ac:picMkLst>
         </pc:picChg>
-        <pc:picChg chg="add mod">
-          <ac:chgData name="Jean-Yves Vuillequez" userId="e7fac481abea6bd0" providerId="LiveId" clId="{79E365E8-22BC-4EC2-9606-9A9AC6CD1D22}" dt="2025-11-20T20:32:44.585" v="5201" actId="164"/>
+        <pc:picChg chg="add mod topLvl">
+          <ac:chgData name="Jean-Yves Vuillequez" userId="e7fac481abea6bd0" providerId="LiveId" clId="{79E365E8-22BC-4EC2-9606-9A9AC6CD1D22}" dt="2025-11-22T09:27:45.100" v="7313" actId="1076"/>
           <ac:picMkLst>
             <pc:docMk/>
             <pc:sldMk cId="1821755839" sldId="274"/>
@@ -1668,7 +1315,7 @@
           </ac:picMkLst>
         </pc:picChg>
         <pc:picChg chg="add mod">
-          <ac:chgData name="Jean-Yves Vuillequez" userId="e7fac481abea6bd0" providerId="LiveId" clId="{79E365E8-22BC-4EC2-9606-9A9AC6CD1D22}" dt="2025-11-20T20:26:58.742" v="5170" actId="164"/>
+          <ac:chgData name="Jean-Yves Vuillequez" userId="e7fac481abea6bd0" providerId="LiveId" clId="{79E365E8-22BC-4EC2-9606-9A9AC6CD1D22}" dt="2025-11-22T18:17:34.404" v="7627" actId="1036"/>
           <ac:picMkLst>
             <pc:docMk/>
             <pc:sldMk cId="1821755839" sldId="274"/>
@@ -1676,13 +1323,61 @@
           </ac:picMkLst>
         </pc:picChg>
         <pc:picChg chg="add mod">
-          <ac:chgData name="Jean-Yves Vuillequez" userId="e7fac481abea6bd0" providerId="LiveId" clId="{79E365E8-22BC-4EC2-9606-9A9AC6CD1D22}" dt="2025-11-20T12:02:26.430" v="2757" actId="1035"/>
+          <ac:chgData name="Jean-Yves Vuillequez" userId="e7fac481abea6bd0" providerId="LiveId" clId="{79E365E8-22BC-4EC2-9606-9A9AC6CD1D22}" dt="2025-11-22T10:36:12.902" v="7491" actId="1076"/>
           <ac:picMkLst>
             <pc:docMk/>
             <pc:sldMk cId="1821755839" sldId="274"/>
             <ac:picMk id="2068" creationId="{9336168E-33DE-2E2C-3F3A-3E4FC0819D15}"/>
           </ac:picMkLst>
         </pc:picChg>
+        <pc:cxnChg chg="add mod">
+          <ac:chgData name="Jean-Yves Vuillequez" userId="e7fac481abea6bd0" providerId="LiveId" clId="{79E365E8-22BC-4EC2-9606-9A9AC6CD1D22}" dt="2025-11-22T18:26:55.253" v="7703" actId="1582"/>
+          <ac:cxnSpMkLst>
+            <pc:docMk/>
+            <pc:sldMk cId="1821755839" sldId="274"/>
+            <ac:cxnSpMk id="6" creationId="{804A8FE7-27C3-4C54-36F8-6A8C0900C5DA}"/>
+          </ac:cxnSpMkLst>
+        </pc:cxnChg>
+        <pc:cxnChg chg="add mod">
+          <ac:chgData name="Jean-Yves Vuillequez" userId="e7fac481abea6bd0" providerId="LiveId" clId="{79E365E8-22BC-4EC2-9606-9A9AC6CD1D22}" dt="2025-11-22T18:26:55.253" v="7703" actId="1582"/>
+          <ac:cxnSpMkLst>
+            <pc:docMk/>
+            <pc:sldMk cId="1821755839" sldId="274"/>
+            <ac:cxnSpMk id="10" creationId="{A34EFFD9-2B7F-223F-36C3-4CCC46291479}"/>
+          </ac:cxnSpMkLst>
+        </pc:cxnChg>
+        <pc:cxnChg chg="add mod">
+          <ac:chgData name="Jean-Yves Vuillequez" userId="e7fac481abea6bd0" providerId="LiveId" clId="{79E365E8-22BC-4EC2-9606-9A9AC6CD1D22}" dt="2025-11-22T18:26:55.253" v="7703" actId="1582"/>
+          <ac:cxnSpMkLst>
+            <pc:docMk/>
+            <pc:sldMk cId="1821755839" sldId="274"/>
+            <ac:cxnSpMk id="11" creationId="{D8A48580-543E-68C9-355D-6C2F58EACB96}"/>
+          </ac:cxnSpMkLst>
+        </pc:cxnChg>
+        <pc:cxnChg chg="add mod">
+          <ac:chgData name="Jean-Yves Vuillequez" userId="e7fac481abea6bd0" providerId="LiveId" clId="{79E365E8-22BC-4EC2-9606-9A9AC6CD1D22}" dt="2025-11-22T18:26:55.253" v="7703" actId="1582"/>
+          <ac:cxnSpMkLst>
+            <pc:docMk/>
+            <pc:sldMk cId="1821755839" sldId="274"/>
+            <ac:cxnSpMk id="19" creationId="{7965C0EE-9642-2EA9-734C-AF9138078030}"/>
+          </ac:cxnSpMkLst>
+        </pc:cxnChg>
+        <pc:cxnChg chg="add mod">
+          <ac:chgData name="Jean-Yves Vuillequez" userId="e7fac481abea6bd0" providerId="LiveId" clId="{79E365E8-22BC-4EC2-9606-9A9AC6CD1D22}" dt="2025-11-22T18:19:13.006" v="7656" actId="108"/>
+          <ac:cxnSpMkLst>
+            <pc:docMk/>
+            <pc:sldMk cId="1821755839" sldId="274"/>
+            <ac:cxnSpMk id="24" creationId="{9AD6B91C-AEA0-8BCF-42B4-76BEC72FDE00}"/>
+          </ac:cxnSpMkLst>
+        </pc:cxnChg>
+        <pc:cxnChg chg="add mod">
+          <ac:chgData name="Jean-Yves Vuillequez" userId="e7fac481abea6bd0" providerId="LiveId" clId="{79E365E8-22BC-4EC2-9606-9A9AC6CD1D22}" dt="2025-11-22T18:31:30.300" v="7714" actId="14100"/>
+          <ac:cxnSpMkLst>
+            <pc:docMk/>
+            <pc:sldMk cId="1821755839" sldId="274"/>
+            <ac:cxnSpMk id="27" creationId="{10B31F45-EE59-3B06-0BB0-9F63BE518A6D}"/>
+          </ac:cxnSpMkLst>
+        </pc:cxnChg>
         <pc:cxnChg chg="add mod">
           <ac:chgData name="Jean-Yves Vuillequez" userId="e7fac481abea6bd0" providerId="LiveId" clId="{79E365E8-22BC-4EC2-9606-9A9AC6CD1D22}" dt="2025-11-20T20:26:59.699" v="5173" actId="164"/>
           <ac:cxnSpMkLst>
@@ -1692,103 +1387,71 @@
           </ac:cxnSpMkLst>
         </pc:cxnChg>
         <pc:cxnChg chg="add mod">
-          <ac:chgData name="Jean-Yves Vuillequez" userId="e7fac481abea6bd0" providerId="LiveId" clId="{79E365E8-22BC-4EC2-9606-9A9AC6CD1D22}" dt="2025-11-20T11:42:02.384" v="2481" actId="1076"/>
+          <ac:chgData name="Jean-Yves Vuillequez" userId="e7fac481abea6bd0" providerId="LiveId" clId="{79E365E8-22BC-4EC2-9606-9A9AC6CD1D22}" dt="2025-11-22T18:17:26.646" v="7623" actId="1076"/>
           <ac:cxnSpMkLst>
             <pc:docMk/>
             <pc:sldMk cId="1821755839" sldId="274"/>
             <ac:cxnSpMk id="29" creationId="{2F5C326A-12BF-B849-9176-2CB67D7A7ED9}"/>
           </ac:cxnSpMkLst>
         </pc:cxnChg>
-        <pc:cxnChg chg="add mod">
-          <ac:chgData name="Jean-Yves Vuillequez" userId="e7fac481abea6bd0" providerId="LiveId" clId="{79E365E8-22BC-4EC2-9606-9A9AC6CD1D22}" dt="2025-11-20T20:30:42.131" v="5196" actId="164"/>
+        <pc:cxnChg chg="add mod topLvl">
+          <ac:chgData name="Jean-Yves Vuillequez" userId="e7fac481abea6bd0" providerId="LiveId" clId="{79E365E8-22BC-4EC2-9606-9A9AC6CD1D22}" dt="2025-11-22T18:03:28.800" v="7530" actId="165"/>
           <ac:cxnSpMkLst>
             <pc:docMk/>
             <pc:sldMk cId="1821755839" sldId="274"/>
             <ac:cxnSpMk id="30" creationId="{DD9C7B50-C6F5-7260-C61A-2CAE5E4C0BF7}"/>
           </ac:cxnSpMkLst>
         </pc:cxnChg>
-        <pc:cxnChg chg="add mod">
-          <ac:chgData name="Jean-Yves Vuillequez" userId="e7fac481abea6bd0" providerId="LiveId" clId="{79E365E8-22BC-4EC2-9606-9A9AC6CD1D22}" dt="2025-11-20T20:26:59.699" v="5173" actId="164"/>
+        <pc:cxnChg chg="add del mod">
+          <ac:chgData name="Jean-Yves Vuillequez" userId="e7fac481abea6bd0" providerId="LiveId" clId="{79E365E8-22BC-4EC2-9606-9A9AC6CD1D22}" dt="2025-11-22T09:50:09.002" v="7484" actId="478"/>
           <ac:cxnSpMkLst>
             <pc:docMk/>
             <pc:sldMk cId="1821755839" sldId="274"/>
             <ac:cxnSpMk id="75" creationId="{EA2D8E70-0E38-6F85-C46D-473AA9425B34}"/>
           </ac:cxnSpMkLst>
         </pc:cxnChg>
-        <pc:cxnChg chg="add mod">
-          <ac:chgData name="Jean-Yves Vuillequez" userId="e7fac481abea6bd0" providerId="LiveId" clId="{79E365E8-22BC-4EC2-9606-9A9AC6CD1D22}" dt="2025-11-20T11:19:33.767" v="2234" actId="571"/>
-          <ac:cxnSpMkLst>
-            <pc:docMk/>
-            <pc:sldMk cId="1821755839" sldId="274"/>
-            <ac:cxnSpMk id="84" creationId="{B3581349-5B65-EAF3-8AE3-EF99BFC653E0}"/>
-          </ac:cxnSpMkLst>
-        </pc:cxnChg>
         <pc:cxnChg chg="add del mod">
-          <ac:chgData name="Jean-Yves Vuillequez" userId="e7fac481abea6bd0" providerId="LiveId" clId="{79E365E8-22BC-4EC2-9606-9A9AC6CD1D22}" dt="2025-11-20T11:21:10.480" v="2243" actId="478"/>
-          <ac:cxnSpMkLst>
-            <pc:docMk/>
-            <pc:sldMk cId="1821755839" sldId="274"/>
-            <ac:cxnSpMk id="86" creationId="{29D35CB1-5CE6-AFD2-E231-5FC1F018A789}"/>
-          </ac:cxnSpMkLst>
-        </pc:cxnChg>
-        <pc:cxnChg chg="add del mod">
-          <ac:chgData name="Jean-Yves Vuillequez" userId="e7fac481abea6bd0" providerId="LiveId" clId="{79E365E8-22BC-4EC2-9606-9A9AC6CD1D22}" dt="2025-11-20T11:22:24.304" v="2266" actId="478"/>
-          <ac:cxnSpMkLst>
-            <pc:docMk/>
-            <pc:sldMk cId="1821755839" sldId="274"/>
-            <ac:cxnSpMk id="87" creationId="{E6644E27-C493-57FC-9D56-EEB4847C4129}"/>
-          </ac:cxnSpMkLst>
-        </pc:cxnChg>
-        <pc:cxnChg chg="add mod">
-          <ac:chgData name="Jean-Yves Vuillequez" userId="e7fac481abea6bd0" providerId="LiveId" clId="{79E365E8-22BC-4EC2-9606-9A9AC6CD1D22}" dt="2025-11-20T12:05:28.757" v="2791" actId="1076"/>
+          <ac:chgData name="Jean-Yves Vuillequez" userId="e7fac481abea6bd0" providerId="LiveId" clId="{79E365E8-22BC-4EC2-9606-9A9AC6CD1D22}" dt="2025-11-22T09:49:37" v="7474" actId="478"/>
           <ac:cxnSpMkLst>
             <pc:docMk/>
             <pc:sldMk cId="1821755839" sldId="274"/>
             <ac:cxnSpMk id="99" creationId="{1740FD3C-BB82-E8E4-4341-9F9B0A291611}"/>
           </ac:cxnSpMkLst>
         </pc:cxnChg>
-        <pc:cxnChg chg="add mod ord">
-          <ac:chgData name="Jean-Yves Vuillequez" userId="e7fac481abea6bd0" providerId="LiveId" clId="{79E365E8-22BC-4EC2-9606-9A9AC6CD1D22}" dt="2025-11-20T20:30:15.752" v="5193" actId="164"/>
+        <pc:cxnChg chg="add mod ord topLvl">
+          <ac:chgData name="Jean-Yves Vuillequez" userId="e7fac481abea6bd0" providerId="LiveId" clId="{79E365E8-22BC-4EC2-9606-9A9AC6CD1D22}" dt="2025-11-22T18:30:29.969" v="7704" actId="208"/>
           <ac:cxnSpMkLst>
             <pc:docMk/>
             <pc:sldMk cId="1821755839" sldId="274"/>
             <ac:cxnSpMk id="108" creationId="{8FC538F3-E888-6C1B-940B-D6B968D8FCEE}"/>
           </ac:cxnSpMkLst>
         </pc:cxnChg>
-        <pc:cxnChg chg="add mod">
-          <ac:chgData name="Jean-Yves Vuillequez" userId="e7fac481abea6bd0" providerId="LiveId" clId="{79E365E8-22BC-4EC2-9606-9A9AC6CD1D22}" dt="2025-11-20T12:05:02.357" v="2785" actId="1582"/>
+        <pc:cxnChg chg="add del mod">
+          <ac:chgData name="Jean-Yves Vuillequez" userId="e7fac481abea6bd0" providerId="LiveId" clId="{79E365E8-22BC-4EC2-9606-9A9AC6CD1D22}" dt="2025-11-22T09:49:30.751" v="7472" actId="478"/>
           <ac:cxnSpMkLst>
             <pc:docMk/>
             <pc:sldMk cId="1821755839" sldId="274"/>
             <ac:cxnSpMk id="111" creationId="{67D61FBD-E531-1326-0C48-8BF9669015EF}"/>
           </ac:cxnSpMkLst>
         </pc:cxnChg>
-        <pc:cxnChg chg="add mod">
-          <ac:chgData name="Jean-Yves Vuillequez" userId="e7fac481abea6bd0" providerId="LiveId" clId="{79E365E8-22BC-4EC2-9606-9A9AC6CD1D22}" dt="2025-11-20T12:05:02.357" v="2785" actId="1582"/>
+        <pc:cxnChg chg="add del mod">
+          <ac:chgData name="Jean-Yves Vuillequez" userId="e7fac481abea6bd0" providerId="LiveId" clId="{79E365E8-22BC-4EC2-9606-9A9AC6CD1D22}" dt="2025-11-22T09:49:30.107" v="7471" actId="478"/>
           <ac:cxnSpMkLst>
             <pc:docMk/>
             <pc:sldMk cId="1821755839" sldId="274"/>
             <ac:cxnSpMk id="114" creationId="{D838041E-F078-6C94-A2B0-03079C59425A}"/>
           </ac:cxnSpMkLst>
         </pc:cxnChg>
-        <pc:cxnChg chg="add mod">
-          <ac:chgData name="Jean-Yves Vuillequez" userId="e7fac481abea6bd0" providerId="LiveId" clId="{79E365E8-22BC-4EC2-9606-9A9AC6CD1D22}" dt="2025-11-20T12:05:02.357" v="2785" actId="1582"/>
+        <pc:cxnChg chg="add del mod">
+          <ac:chgData name="Jean-Yves Vuillequez" userId="e7fac481abea6bd0" providerId="LiveId" clId="{79E365E8-22BC-4EC2-9606-9A9AC6CD1D22}" dt="2025-11-22T09:49:26.577" v="7466" actId="478"/>
           <ac:cxnSpMkLst>
             <pc:docMk/>
             <pc:sldMk cId="1821755839" sldId="274"/>
             <ac:cxnSpMk id="119" creationId="{71456FE5-64C3-8B7D-7CCF-34EA9321C3CA}"/>
           </ac:cxnSpMkLst>
         </pc:cxnChg>
-        <pc:cxnChg chg="add del mod">
-          <ac:chgData name="Jean-Yves Vuillequez" userId="e7fac481abea6bd0" providerId="LiveId" clId="{79E365E8-22BC-4EC2-9606-9A9AC6CD1D22}" dt="2025-11-20T11:38:07.994" v="2438" actId="478"/>
-          <ac:cxnSpMkLst>
-            <pc:docMk/>
-            <pc:sldMk cId="1821755839" sldId="274"/>
-            <ac:cxnSpMk id="1024" creationId="{E59C6F56-E746-1D03-00A3-4AE085AB528D}"/>
-          </ac:cxnSpMkLst>
-        </pc:cxnChg>
         <pc:cxnChg chg="add mod">
-          <ac:chgData name="Jean-Yves Vuillequez" userId="e7fac481abea6bd0" providerId="LiveId" clId="{79E365E8-22BC-4EC2-9606-9A9AC6CD1D22}" dt="2025-11-20T12:02:04.482" v="2735" actId="1076"/>
+          <ac:chgData name="Jean-Yves Vuillequez" userId="e7fac481abea6bd0" providerId="LiveId" clId="{79E365E8-22BC-4EC2-9606-9A9AC6CD1D22}" dt="2025-11-22T18:23:16.737" v="7679" actId="14100"/>
           <ac:cxnSpMkLst>
             <pc:docMk/>
             <pc:sldMk cId="1821755839" sldId="274"/>
@@ -1796,63 +1459,15 @@
           </ac:cxnSpMkLst>
         </pc:cxnChg>
         <pc:cxnChg chg="add mod">
-          <ac:chgData name="Jean-Yves Vuillequez" userId="e7fac481abea6bd0" providerId="LiveId" clId="{79E365E8-22BC-4EC2-9606-9A9AC6CD1D22}" dt="2025-11-20T11:40:48.564" v="2466"/>
-          <ac:cxnSpMkLst>
-            <pc:docMk/>
-            <pc:sldMk cId="1821755839" sldId="274"/>
-            <ac:cxnSpMk id="1037" creationId="{012A69AD-D1B3-9810-B4DE-6794DB614A7D}"/>
-          </ac:cxnSpMkLst>
-        </pc:cxnChg>
-        <pc:cxnChg chg="add mod">
-          <ac:chgData name="Jean-Yves Vuillequez" userId="e7fac481abea6bd0" providerId="LiveId" clId="{79E365E8-22BC-4EC2-9606-9A9AC6CD1D22}" dt="2025-11-20T11:40:48.912" v="2467"/>
-          <ac:cxnSpMkLst>
-            <pc:docMk/>
-            <pc:sldMk cId="1821755839" sldId="274"/>
-            <ac:cxnSpMk id="1039" creationId="{624F829B-9940-FA2F-9371-2DBB32AD248A}"/>
-          </ac:cxnSpMkLst>
-        </pc:cxnChg>
-        <pc:cxnChg chg="add del mod">
-          <ac:chgData name="Jean-Yves Vuillequez" userId="e7fac481abea6bd0" providerId="LiveId" clId="{79E365E8-22BC-4EC2-9606-9A9AC6CD1D22}" dt="2025-11-20T11:41:05.761" v="2472" actId="478"/>
-          <ac:cxnSpMkLst>
-            <pc:docMk/>
-            <pc:sldMk cId="1821755839" sldId="274"/>
-            <ac:cxnSpMk id="1040" creationId="{1A28472F-E15F-F875-A7CE-2C6CE56D1A6B}"/>
-          </ac:cxnSpMkLst>
-        </pc:cxnChg>
-        <pc:cxnChg chg="add mod">
-          <ac:chgData name="Jean-Yves Vuillequez" userId="e7fac481abea6bd0" providerId="LiveId" clId="{79E365E8-22BC-4EC2-9606-9A9AC6CD1D22}" dt="2025-11-20T11:41:57.257" v="2478"/>
-          <ac:cxnSpMkLst>
-            <pc:docMk/>
-            <pc:sldMk cId="1821755839" sldId="274"/>
-            <ac:cxnSpMk id="1045" creationId="{B47D5FD3-A8EB-5EF1-4EB2-CAF3F6F464AB}"/>
-          </ac:cxnSpMkLst>
-        </pc:cxnChg>
-        <pc:cxnChg chg="add mod">
-          <ac:chgData name="Jean-Yves Vuillequez" userId="e7fac481abea6bd0" providerId="LiveId" clId="{79E365E8-22BC-4EC2-9606-9A9AC6CD1D22}" dt="2025-11-20T15:36:09.231" v="4051" actId="1037"/>
+          <ac:chgData name="Jean-Yves Vuillequez" userId="e7fac481abea6bd0" providerId="LiveId" clId="{79E365E8-22BC-4EC2-9606-9A9AC6CD1D22}" dt="2025-11-22T18:31:30.300" v="7714" actId="14100"/>
           <ac:cxnSpMkLst>
             <pc:docMk/>
             <pc:sldMk cId="1821755839" sldId="274"/>
             <ac:cxnSpMk id="1046" creationId="{F59A3777-3D90-7CA7-F89E-8874DA5F6283}"/>
           </ac:cxnSpMkLst>
         </pc:cxnChg>
-        <pc:cxnChg chg="add del mod">
-          <ac:chgData name="Jean-Yves Vuillequez" userId="e7fac481abea6bd0" providerId="LiveId" clId="{79E365E8-22BC-4EC2-9606-9A9AC6CD1D22}" dt="2025-11-20T11:44:39.434" v="2514" actId="478"/>
-          <ac:cxnSpMkLst>
-            <pc:docMk/>
-            <pc:sldMk cId="1821755839" sldId="274"/>
-            <ac:cxnSpMk id="1051" creationId="{2DE5DB89-7B0C-93CD-2FE0-25BDA4238711}"/>
-          </ac:cxnSpMkLst>
-        </pc:cxnChg>
-        <pc:cxnChg chg="add del mod">
-          <ac:chgData name="Jean-Yves Vuillequez" userId="e7fac481abea6bd0" providerId="LiveId" clId="{79E365E8-22BC-4EC2-9606-9A9AC6CD1D22}" dt="2025-11-20T11:44:52.399" v="2516" actId="11529"/>
-          <ac:cxnSpMkLst>
-            <pc:docMk/>
-            <pc:sldMk cId="1821755839" sldId="274"/>
-            <ac:cxnSpMk id="1060" creationId="{2CD49FD7-DD44-7611-D6BB-D1C241C40B8D}"/>
-          </ac:cxnSpMkLst>
-        </pc:cxnChg>
         <pc:cxnChg chg="add mod">
-          <ac:chgData name="Jean-Yves Vuillequez" userId="e7fac481abea6bd0" providerId="LiveId" clId="{79E365E8-22BC-4EC2-9606-9A9AC6CD1D22}" dt="2025-11-20T15:36:09.231" v="4051" actId="1037"/>
+          <ac:chgData name="Jean-Yves Vuillequez" userId="e7fac481abea6bd0" providerId="LiveId" clId="{79E365E8-22BC-4EC2-9606-9A9AC6CD1D22}" dt="2025-11-22T18:22:29.522" v="7678" actId="208"/>
           <ac:cxnSpMkLst>
             <pc:docMk/>
             <pc:sldMk cId="1821755839" sldId="274"/>
@@ -1868,15 +1483,15 @@
           </ac:cxnSpMkLst>
         </pc:cxnChg>
         <pc:cxnChg chg="add mod">
-          <ac:chgData name="Jean-Yves Vuillequez" userId="e7fac481abea6bd0" providerId="LiveId" clId="{79E365E8-22BC-4EC2-9606-9A9AC6CD1D22}" dt="2025-11-20T12:02:04.482" v="2735" actId="1076"/>
+          <ac:chgData name="Jean-Yves Vuillequez" userId="e7fac481abea6bd0" providerId="LiveId" clId="{79E365E8-22BC-4EC2-9606-9A9AC6CD1D22}" dt="2025-11-22T09:49:17.557" v="7465" actId="14100"/>
           <ac:cxnSpMkLst>
             <pc:docMk/>
             <pc:sldMk cId="1821755839" sldId="274"/>
             <ac:cxnSpMk id="1075" creationId="{EB70B985-2508-613E-3824-FAD3BB6966AC}"/>
           </ac:cxnSpMkLst>
         </pc:cxnChg>
-        <pc:cxnChg chg="add mod">
-          <ac:chgData name="Jean-Yves Vuillequez" userId="e7fac481abea6bd0" providerId="LiveId" clId="{79E365E8-22BC-4EC2-9606-9A9AC6CD1D22}" dt="2025-11-20T12:05:28.757" v="2791" actId="1076"/>
+        <pc:cxnChg chg="add del mod">
+          <ac:chgData name="Jean-Yves Vuillequez" userId="e7fac481abea6bd0" providerId="LiveId" clId="{79E365E8-22BC-4EC2-9606-9A9AC6CD1D22}" dt="2025-11-22T09:49:31.711" v="7473" actId="478"/>
           <ac:cxnSpMkLst>
             <pc:docMk/>
             <pc:sldMk cId="1821755839" sldId="274"/>
@@ -1884,7 +1499,7 @@
           </ac:cxnSpMkLst>
         </pc:cxnChg>
         <pc:cxnChg chg="add mod">
-          <ac:chgData name="Jean-Yves Vuillequez" userId="e7fac481abea6bd0" providerId="LiveId" clId="{79E365E8-22BC-4EC2-9606-9A9AC6CD1D22}" dt="2025-11-20T20:26:58.491" v="5169" actId="164"/>
+          <ac:chgData name="Jean-Yves Vuillequez" userId="e7fac481abea6bd0" providerId="LiveId" clId="{79E365E8-22BC-4EC2-9606-9A9AC6CD1D22}" dt="2025-11-22T18:15:55.951" v="7607" actId="1076"/>
           <ac:cxnSpMkLst>
             <pc:docMk/>
             <pc:sldMk cId="1821755839" sldId="274"/>
@@ -1898,44 +1513,12 @@
           <pc:docMk/>
           <pc:sldMk cId="4088050223" sldId="275"/>
         </pc:sldMkLst>
-        <pc:spChg chg="add del mod">
-          <ac:chgData name="Jean-Yves Vuillequez" userId="e7fac481abea6bd0" providerId="LiveId" clId="{79E365E8-22BC-4EC2-9606-9A9AC6CD1D22}" dt="2025-11-20T15:42:22.432" v="4056" actId="478"/>
-          <ac:spMkLst>
-            <pc:docMk/>
-            <pc:sldMk cId="4088050223" sldId="275"/>
-            <ac:spMk id="3" creationId="{37D278FD-EECE-B378-D23D-5AC1D6FCA09B}"/>
-          </ac:spMkLst>
-        </pc:spChg>
         <pc:spChg chg="add mod">
           <ac:chgData name="Jean-Yves Vuillequez" userId="e7fac481abea6bd0" providerId="LiveId" clId="{79E365E8-22BC-4EC2-9606-9A9AC6CD1D22}" dt="2025-11-20T16:11:43.034" v="4634" actId="948"/>
           <ac:spMkLst>
             <pc:docMk/>
             <pc:sldMk cId="4088050223" sldId="275"/>
             <ac:spMk id="4" creationId="{9EF8D937-D220-A74B-8191-12E681FE1A08}"/>
-          </ac:spMkLst>
-        </pc:spChg>
-        <pc:spChg chg="del">
-          <ac:chgData name="Jean-Yves Vuillequez" userId="e7fac481abea6bd0" providerId="LiveId" clId="{79E365E8-22BC-4EC2-9606-9A9AC6CD1D22}" dt="2025-11-20T16:04:24.463" v="4515" actId="478"/>
-          <ac:spMkLst>
-            <pc:docMk/>
-            <pc:sldMk cId="4088050223" sldId="275"/>
-            <ac:spMk id="12" creationId="{97F78E0E-BF81-816F-84D0-69489BA603AA}"/>
-          </ac:spMkLst>
-        </pc:spChg>
-        <pc:spChg chg="add del">
-          <ac:chgData name="Jean-Yves Vuillequez" userId="e7fac481abea6bd0" providerId="LiveId" clId="{79E365E8-22BC-4EC2-9606-9A9AC6CD1D22}" dt="2025-11-20T16:04:29.429" v="4517" actId="478"/>
-          <ac:spMkLst>
-            <pc:docMk/>
-            <pc:sldMk cId="4088050223" sldId="275"/>
-            <ac:spMk id="13" creationId="{A4E917A3-F694-3B96-CCCF-E8B993CF7914}"/>
-          </ac:spMkLst>
-        </pc:spChg>
-        <pc:spChg chg="add del">
-          <ac:chgData name="Jean-Yves Vuillequez" userId="e7fac481abea6bd0" providerId="LiveId" clId="{79E365E8-22BC-4EC2-9606-9A9AC6CD1D22}" dt="2025-11-20T16:04:27.356" v="4516" actId="478"/>
-          <ac:spMkLst>
-            <pc:docMk/>
-            <pc:sldMk cId="4088050223" sldId="275"/>
-            <ac:spMk id="14" creationId="{6490E61E-43C0-47B3-660A-106B5E881ADD}"/>
           </ac:spMkLst>
         </pc:spChg>
         <pc:spChg chg="mod">
@@ -1946,14 +1529,6 @@
             <ac:spMk id="96" creationId="{CFE260F2-EC75-DDF8-CE55-329FB5D8E4C4}"/>
           </ac:spMkLst>
         </pc:spChg>
-        <pc:graphicFrameChg chg="del mod modGraphic">
-          <ac:chgData name="Jean-Yves Vuillequez" userId="e7fac481abea6bd0" providerId="LiveId" clId="{79E365E8-22BC-4EC2-9606-9A9AC6CD1D22}" dt="2025-11-20T16:05:02.210" v="4547" actId="478"/>
-          <ac:graphicFrameMkLst>
-            <pc:docMk/>
-            <pc:sldMk cId="4088050223" sldId="275"/>
-            <ac:graphicFrameMk id="2" creationId="{B369D15F-B77E-9E89-4E59-4FB8C96A6FDE}"/>
-          </ac:graphicFrameMkLst>
-        </pc:graphicFrameChg>
       </pc:sldChg>
       <pc:sldChg chg="addSp delSp modSp mod addAnim delAnim modAnim modNotesTx">
         <pc:chgData name="Jean-Yves Vuillequez" userId="e7fac481abea6bd0" providerId="LiveId" clId="{79E365E8-22BC-4EC2-9606-9A9AC6CD1D22}" dt="2025-11-20T20:03:48.943" v="4847"/>
@@ -1961,28 +1536,12 @@
           <pc:docMk/>
           <pc:sldMk cId="406580661" sldId="286"/>
         </pc:sldMkLst>
-        <pc:spChg chg="add">
-          <ac:chgData name="Jean-Yves Vuillequez" userId="e7fac481abea6bd0" providerId="LiveId" clId="{79E365E8-22BC-4EC2-9606-9A9AC6CD1D22}" dt="2025-11-20T09:41:51.314" v="473"/>
-          <ac:spMkLst>
-            <pc:docMk/>
-            <pc:sldMk cId="406580661" sldId="286"/>
-            <ac:spMk id="2" creationId="{42BBF137-A4F8-10C8-E76C-714A4AC08CD8}"/>
-          </ac:spMkLst>
-        </pc:spChg>
         <pc:spChg chg="add mod">
           <ac:chgData name="Jean-Yves Vuillequez" userId="e7fac481abea6bd0" providerId="LiveId" clId="{79E365E8-22BC-4EC2-9606-9A9AC6CD1D22}" dt="2025-11-20T20:01:17.573" v="4830" actId="113"/>
           <ac:spMkLst>
             <pc:docMk/>
             <pc:sldMk cId="406580661" sldId="286"/>
             <ac:spMk id="3" creationId="{E62B04DD-611C-26E7-F33B-2490F943666E}"/>
-          </ac:spMkLst>
-        </pc:spChg>
-        <pc:spChg chg="add del mod">
-          <ac:chgData name="Jean-Yves Vuillequez" userId="e7fac481abea6bd0" providerId="LiveId" clId="{79E365E8-22BC-4EC2-9606-9A9AC6CD1D22}" dt="2025-11-20T14:03:49.127" v="3493" actId="478"/>
-          <ac:spMkLst>
-            <pc:docMk/>
-            <pc:sldMk cId="406580661" sldId="286"/>
-            <ac:spMk id="4" creationId="{0649B650-4A2A-7387-5E59-6EEF0B39EF13}"/>
           </ac:spMkLst>
         </pc:spChg>
         <pc:spChg chg="add mod">
@@ -2041,76 +1600,12 @@
             <ac:spMk id="14" creationId="{2FD38D0D-A22A-3A3C-C242-55050E7F3342}"/>
           </ac:spMkLst>
         </pc:spChg>
-        <pc:spChg chg="add del mod">
-          <ac:chgData name="Jean-Yves Vuillequez" userId="e7fac481abea6bd0" providerId="LiveId" clId="{79E365E8-22BC-4EC2-9606-9A9AC6CD1D22}" dt="2025-11-20T14:03:53.338" v="3494" actId="478"/>
-          <ac:spMkLst>
-            <pc:docMk/>
-            <pc:sldMk cId="406580661" sldId="286"/>
-            <ac:spMk id="16" creationId="{6C932EAC-9D77-E1AF-F55B-093700CC66D4}"/>
-          </ac:spMkLst>
-        </pc:spChg>
         <pc:spChg chg="mod topLvl">
           <ac:chgData name="Jean-Yves Vuillequez" userId="e7fac481abea6bd0" providerId="LiveId" clId="{79E365E8-22BC-4EC2-9606-9A9AC6CD1D22}" dt="2025-11-20T16:49:21.820" v="4776" actId="164"/>
           <ac:spMkLst>
             <pc:docMk/>
             <pc:sldMk cId="406580661" sldId="286"/>
             <ac:spMk id="18" creationId="{C17A729F-F9AB-A73C-CEFD-D87C2948A123}"/>
-          </ac:spMkLst>
-        </pc:spChg>
-        <pc:spChg chg="del mod topLvl">
-          <ac:chgData name="Jean-Yves Vuillequez" userId="e7fac481abea6bd0" providerId="LiveId" clId="{79E365E8-22BC-4EC2-9606-9A9AC6CD1D22}" dt="2025-11-20T14:07:59.184" v="3530" actId="478"/>
-          <ac:spMkLst>
-            <pc:docMk/>
-            <pc:sldMk cId="406580661" sldId="286"/>
-            <ac:spMk id="22" creationId="{3C237379-DB54-8C10-5CAB-555068513234}"/>
-          </ac:spMkLst>
-        </pc:spChg>
-        <pc:spChg chg="del mod">
-          <ac:chgData name="Jean-Yves Vuillequez" userId="e7fac481abea6bd0" providerId="LiveId" clId="{79E365E8-22BC-4EC2-9606-9A9AC6CD1D22}" dt="2025-11-20T14:07:31.884" v="3523" actId="478"/>
-          <ac:spMkLst>
-            <pc:docMk/>
-            <pc:sldMk cId="406580661" sldId="286"/>
-            <ac:spMk id="23" creationId="{B47EAD84-AD9B-69B1-236A-47036056634B}"/>
-          </ac:spMkLst>
-        </pc:spChg>
-        <pc:spChg chg="del mod topLvl">
-          <ac:chgData name="Jean-Yves Vuillequez" userId="e7fac481abea6bd0" providerId="LiveId" clId="{79E365E8-22BC-4EC2-9606-9A9AC6CD1D22}" dt="2025-11-20T14:07:45.858" v="3527" actId="478"/>
-          <ac:spMkLst>
-            <pc:docMk/>
-            <pc:sldMk cId="406580661" sldId="286"/>
-            <ac:spMk id="24" creationId="{F6770A64-7D4D-1ECC-B886-45CA1F497506}"/>
-          </ac:spMkLst>
-        </pc:spChg>
-        <pc:spChg chg="del mod">
-          <ac:chgData name="Jean-Yves Vuillequez" userId="e7fac481abea6bd0" providerId="LiveId" clId="{79E365E8-22BC-4EC2-9606-9A9AC6CD1D22}" dt="2025-11-20T14:07:29.951" v="3522" actId="478"/>
-          <ac:spMkLst>
-            <pc:docMk/>
-            <pc:sldMk cId="406580661" sldId="286"/>
-            <ac:spMk id="25" creationId="{06845810-55AC-B052-A363-9E68AD714724}"/>
-          </ac:spMkLst>
-        </pc:spChg>
-        <pc:spChg chg="del mod">
-          <ac:chgData name="Jean-Yves Vuillequez" userId="e7fac481abea6bd0" providerId="LiveId" clId="{79E365E8-22BC-4EC2-9606-9A9AC6CD1D22}" dt="2025-11-20T14:07:44.250" v="3526" actId="478"/>
-          <ac:spMkLst>
-            <pc:docMk/>
-            <pc:sldMk cId="406580661" sldId="286"/>
-            <ac:spMk id="26" creationId="{FB54BC18-1E4C-BCAB-65BA-0197B56CA834}"/>
-          </ac:spMkLst>
-        </pc:spChg>
-        <pc:spChg chg="del mod">
-          <ac:chgData name="Jean-Yves Vuillequez" userId="e7fac481abea6bd0" providerId="LiveId" clId="{79E365E8-22BC-4EC2-9606-9A9AC6CD1D22}" dt="2025-11-20T14:07:25.451" v="3519" actId="478"/>
-          <ac:spMkLst>
-            <pc:docMk/>
-            <pc:sldMk cId="406580661" sldId="286"/>
-            <ac:spMk id="27" creationId="{05D4FFA8-0742-EAD3-AC74-6A6B84E3C2E4}"/>
-          </ac:spMkLst>
-        </pc:spChg>
-        <pc:spChg chg="del mod">
-          <ac:chgData name="Jean-Yves Vuillequez" userId="e7fac481abea6bd0" providerId="LiveId" clId="{79E365E8-22BC-4EC2-9606-9A9AC6CD1D22}" dt="2025-11-20T14:07:36.804" v="3525" actId="478"/>
-          <ac:spMkLst>
-            <pc:docMk/>
-            <pc:sldMk cId="406580661" sldId="286"/>
-            <ac:spMk id="28" creationId="{DA1524FB-7977-208A-1263-DE47D7C4A3BF}"/>
           </ac:spMkLst>
         </pc:spChg>
         <pc:spChg chg="add mod">
@@ -2121,52 +1616,12 @@
             <ac:spMk id="30" creationId="{717391EF-3678-1116-53EE-765DF8F95C9C}"/>
           </ac:spMkLst>
         </pc:spChg>
-        <pc:spChg chg="add del">
-          <ac:chgData name="Jean-Yves Vuillequez" userId="e7fac481abea6bd0" providerId="LiveId" clId="{79E365E8-22BC-4EC2-9606-9A9AC6CD1D22}" dt="2025-11-20T14:09:26.668" v="3554" actId="11529"/>
-          <ac:spMkLst>
-            <pc:docMk/>
-            <pc:sldMk cId="406580661" sldId="286"/>
-            <ac:spMk id="31" creationId="{8E993513-E9EE-97FE-01CC-D7CE0C32AA22}"/>
-          </ac:spMkLst>
-        </pc:spChg>
-        <pc:spChg chg="add del mod">
-          <ac:chgData name="Jean-Yves Vuillequez" userId="e7fac481abea6bd0" providerId="LiveId" clId="{79E365E8-22BC-4EC2-9606-9A9AC6CD1D22}" dt="2025-11-20T14:10:04.564" v="3558" actId="478"/>
-          <ac:spMkLst>
-            <pc:docMk/>
-            <pc:sldMk cId="406580661" sldId="286"/>
-            <ac:spMk id="32" creationId="{8A84BA34-DB32-0874-81E3-B2EAE91679B2}"/>
-          </ac:spMkLst>
-        </pc:spChg>
-        <pc:spChg chg="add mod">
-          <ac:chgData name="Jean-Yves Vuillequez" userId="e7fac481abea6bd0" providerId="LiveId" clId="{79E365E8-22BC-4EC2-9606-9A9AC6CD1D22}" dt="2025-11-20T14:11:57.466" v="3568" actId="571"/>
-          <ac:spMkLst>
-            <pc:docMk/>
-            <pc:sldMk cId="406580661" sldId="286"/>
-            <ac:spMk id="33" creationId="{5A657496-ACF4-9152-D94A-2B3CCFB10F4B}"/>
-          </ac:spMkLst>
-        </pc:spChg>
-        <pc:spChg chg="add mod">
-          <ac:chgData name="Jean-Yves Vuillequez" userId="e7fac481abea6bd0" providerId="LiveId" clId="{79E365E8-22BC-4EC2-9606-9A9AC6CD1D22}" dt="2025-11-20T14:12:07.214" v="3570" actId="571"/>
-          <ac:spMkLst>
-            <pc:docMk/>
-            <pc:sldMk cId="406580661" sldId="286"/>
-            <ac:spMk id="34" creationId="{B926B066-217E-DF27-208E-E40B46814C20}"/>
-          </ac:spMkLst>
-        </pc:spChg>
         <pc:spChg chg="mod topLvl">
           <ac:chgData name="Jean-Yves Vuillequez" userId="e7fac481abea6bd0" providerId="LiveId" clId="{79E365E8-22BC-4EC2-9606-9A9AC6CD1D22}" dt="2025-11-20T16:49:15.530" v="4775" actId="164"/>
           <ac:spMkLst>
             <pc:docMk/>
             <pc:sldMk cId="406580661" sldId="286"/>
             <ac:spMk id="36" creationId="{D67E0D0C-C631-6E3B-A20F-F6A59723BAE6}"/>
-          </ac:spMkLst>
-        </pc:spChg>
-        <pc:spChg chg="add del mod">
-          <ac:chgData name="Jean-Yves Vuillequez" userId="e7fac481abea6bd0" providerId="LiveId" clId="{79E365E8-22BC-4EC2-9606-9A9AC6CD1D22}" dt="2025-11-20T14:17:51.203" v="3622" actId="478"/>
-          <ac:spMkLst>
-            <pc:docMk/>
-            <pc:sldMk cId="406580661" sldId="286"/>
-            <ac:spMk id="41" creationId="{CE995EDC-F144-32C4-0F9B-B06D60A0C5CC}"/>
           </ac:spMkLst>
         </pc:spChg>
         <pc:spChg chg="add mod">
@@ -2217,60 +1672,12 @@
             <ac:grpSpMk id="13" creationId="{4F2C3D66-D0D7-A86C-2848-AD50FAA4BBE5}"/>
           </ac:grpSpMkLst>
         </pc:grpChg>
-        <pc:grpChg chg="add del mod">
-          <ac:chgData name="Jean-Yves Vuillequez" userId="e7fac481abea6bd0" providerId="LiveId" clId="{79E365E8-22BC-4EC2-9606-9A9AC6CD1D22}" dt="2025-11-20T14:08:40.025" v="3548" actId="478"/>
-          <ac:grpSpMkLst>
-            <pc:docMk/>
-            <pc:sldMk cId="406580661" sldId="286"/>
-            <ac:grpSpMk id="17" creationId="{A75639C7-A161-9010-1A57-516F484DDF41}"/>
-          </ac:grpSpMkLst>
-        </pc:grpChg>
-        <pc:grpChg chg="add del mod">
-          <ac:chgData name="Jean-Yves Vuillequez" userId="e7fac481abea6bd0" providerId="LiveId" clId="{79E365E8-22BC-4EC2-9606-9A9AC6CD1D22}" dt="2025-11-20T14:07:45.858" v="3527" actId="478"/>
-          <ac:grpSpMkLst>
-            <pc:docMk/>
-            <pc:sldMk cId="406580661" sldId="286"/>
-            <ac:grpSpMk id="21" creationId="{D137CC4A-1BC1-13D8-B50C-BDE5B5C85CE5}"/>
-          </ac:grpSpMkLst>
-        </pc:grpChg>
-        <pc:grpChg chg="add del mod">
-          <ac:chgData name="Jean-Yves Vuillequez" userId="e7fac481abea6bd0" providerId="LiveId" clId="{79E365E8-22BC-4EC2-9606-9A9AC6CD1D22}" dt="2025-11-20T14:14:24.512" v="3577" actId="478"/>
-          <ac:grpSpMkLst>
-            <pc:docMk/>
-            <pc:sldMk cId="406580661" sldId="286"/>
-            <ac:grpSpMk id="35" creationId="{9B6C21F3-0FA7-F4E0-3CAF-C19A7A77268D}"/>
-          </ac:grpSpMkLst>
-        </pc:grpChg>
-        <pc:graphicFrameChg chg="add del modGraphic">
-          <ac:chgData name="Jean-Yves Vuillequez" userId="e7fac481abea6bd0" providerId="LiveId" clId="{79E365E8-22BC-4EC2-9606-9A9AC6CD1D22}" dt="2025-11-20T14:07:22.432" v="3518" actId="18245"/>
-          <ac:graphicFrameMkLst>
-            <pc:docMk/>
-            <pc:sldMk cId="406580661" sldId="286"/>
-            <ac:graphicFrameMk id="20" creationId="{2EEA1452-7AF3-2AA3-7598-A22D894268FF}"/>
-          </ac:graphicFrameMkLst>
-        </pc:graphicFrameChg>
         <pc:picChg chg="add mod">
           <ac:chgData name="Jean-Yves Vuillequez" userId="e7fac481abea6bd0" providerId="LiveId" clId="{79E365E8-22BC-4EC2-9606-9A9AC6CD1D22}" dt="2025-11-20T14:11:57.466" v="3568" actId="571"/>
           <ac:picMkLst>
             <pc:docMk/>
             <pc:sldMk cId="406580661" sldId="286"/>
             <ac:picMk id="11" creationId="{2D31D0A9-EF5E-70FA-7828-1FD6A1E4CECA}"/>
-          </ac:picMkLst>
-        </pc:picChg>
-        <pc:picChg chg="del mod topLvl">
-          <ac:chgData name="Jean-Yves Vuillequez" userId="e7fac481abea6bd0" providerId="LiveId" clId="{79E365E8-22BC-4EC2-9606-9A9AC6CD1D22}" dt="2025-11-20T14:08:40.025" v="3548" actId="478"/>
-          <ac:picMkLst>
-            <pc:docMk/>
-            <pc:sldMk cId="406580661" sldId="286"/>
-            <ac:picMk id="19" creationId="{51BBA295-1140-90F8-E017-CD3D8FC5AC2B}"/>
-          </ac:picMkLst>
-        </pc:picChg>
-        <pc:picChg chg="del mod topLvl">
-          <ac:chgData name="Jean-Yves Vuillequez" userId="e7fac481abea6bd0" providerId="LiveId" clId="{79E365E8-22BC-4EC2-9606-9A9AC6CD1D22}" dt="2025-11-20T14:14:24.512" v="3577" actId="478"/>
-          <ac:picMkLst>
-            <pc:docMk/>
-            <pc:sldMk cId="406580661" sldId="286"/>
-            <ac:picMk id="37" creationId="{219EC28F-CF2E-48FA-DA4A-699411DA710D}"/>
           </ac:picMkLst>
         </pc:picChg>
         <pc:picChg chg="add mod">
@@ -2294,14 +1701,6 @@
             <pc:docMk/>
             <pc:sldMk cId="3647836335" sldId="287"/>
             <ac:spMk id="4" creationId="{A5620247-49B7-3C5A-F47B-760300A2EB3C}"/>
-          </ac:spMkLst>
-        </pc:spChg>
-        <pc:spChg chg="add del mod">
-          <ac:chgData name="Jean-Yves Vuillequez" userId="e7fac481abea6bd0" providerId="LiveId" clId="{79E365E8-22BC-4EC2-9606-9A9AC6CD1D22}" dt="2025-11-20T14:43:08.155" v="3878" actId="478"/>
-          <ac:spMkLst>
-            <pc:docMk/>
-            <pc:sldMk cId="3647836335" sldId="287"/>
-            <ac:spMk id="5" creationId="{8D8F0222-1744-4F54-34A6-B8CF15FEFB60}"/>
           </ac:spMkLst>
         </pc:spChg>
         <pc:spChg chg="add mod">
@@ -2368,14 +1767,6 @@
             <ac:grpSpMk id="11" creationId="{5108A918-E4C6-F9A2-4BF9-64DD15B4F141}"/>
           </ac:grpSpMkLst>
         </pc:grpChg>
-        <pc:grpChg chg="add del mod">
-          <ac:chgData name="Jean-Yves Vuillequez" userId="e7fac481abea6bd0" providerId="LiveId" clId="{79E365E8-22BC-4EC2-9606-9A9AC6CD1D22}" dt="2025-11-20T14:40:38.972" v="3834" actId="478"/>
-          <ac:grpSpMkLst>
-            <pc:docMk/>
-            <pc:sldMk cId="3647836335" sldId="287"/>
-            <ac:grpSpMk id="12" creationId="{14D10F5B-33B7-6B9D-D368-3586D7599FDE}"/>
-          </ac:grpSpMkLst>
-        </pc:grpChg>
         <pc:picChg chg="add del mod ord modCrop">
           <ac:chgData name="Jean-Yves Vuillequez" userId="e7fac481abea6bd0" providerId="LiveId" clId="{79E365E8-22BC-4EC2-9606-9A9AC6CD1D22}" dt="2025-11-20T14:40:08.325" v="3828" actId="164"/>
           <ac:picMkLst>
@@ -2384,111 +1775,9 @@
             <ac:picMk id="3" creationId="{6A545F97-3B88-9E33-8963-86A0AF9F20D2}"/>
           </ac:picMkLst>
         </pc:picChg>
-        <pc:picChg chg="del mod topLvl">
-          <ac:chgData name="Jean-Yves Vuillequez" userId="e7fac481abea6bd0" providerId="LiveId" clId="{79E365E8-22BC-4EC2-9606-9A9AC6CD1D22}" dt="2025-11-20T14:40:38.972" v="3834" actId="478"/>
-          <ac:picMkLst>
-            <pc:docMk/>
-            <pc:sldMk cId="3647836335" sldId="287"/>
-            <ac:picMk id="14" creationId="{CBFA22F7-AA26-C039-5D33-945B7985A040}"/>
-          </ac:picMkLst>
-        </pc:picChg>
-        <pc:picChg chg="add del mod">
-          <ac:chgData name="Jean-Yves Vuillequez" userId="e7fac481abea6bd0" providerId="LiveId" clId="{79E365E8-22BC-4EC2-9606-9A9AC6CD1D22}" dt="2025-11-20T14:31:03.610" v="3682" actId="478"/>
-          <ac:picMkLst>
-            <pc:docMk/>
-            <pc:sldMk cId="3647836335" sldId="287"/>
-            <ac:picMk id="1026" creationId="{6F81C0BB-D0DD-2C53-349F-BD0A043D48A6}"/>
-          </ac:picMkLst>
-        </pc:picChg>
-      </pc:sldChg>
-      <pc:sldChg chg="add del">
-        <pc:chgData name="Jean-Yves Vuillequez" userId="e7fac481abea6bd0" providerId="LiveId" clId="{79E365E8-22BC-4EC2-9606-9A9AC6CD1D22}" dt="2025-11-20T16:28:21.698" v="4730"/>
-        <pc:sldMkLst>
-          <pc:docMk/>
-          <pc:sldMk cId="3650049617" sldId="288"/>
-        </pc:sldMkLst>
-      </pc:sldChg>
-      <pc:sldChg chg="addSp delSp modSp add del mod">
-        <pc:chgData name="Jean-Yves Vuillequez" userId="e7fac481abea6bd0" providerId="LiveId" clId="{79E365E8-22BC-4EC2-9606-9A9AC6CD1D22}" dt="2025-11-20T16:28:18.080" v="4728" actId="47"/>
-        <pc:sldMkLst>
-          <pc:docMk/>
-          <pc:sldMk cId="4156271710" sldId="288"/>
-        </pc:sldMkLst>
-        <pc:spChg chg="add del mod">
-          <ac:chgData name="Jean-Yves Vuillequez" userId="e7fac481abea6bd0" providerId="LiveId" clId="{79E365E8-22BC-4EC2-9606-9A9AC6CD1D22}" dt="2025-11-20T15:42:52.526" v="4080" actId="478"/>
-          <ac:spMkLst>
-            <pc:docMk/>
-            <pc:sldMk cId="4156271710" sldId="288"/>
-            <ac:spMk id="3" creationId="{F54C33F5-001F-CBAC-920A-2747911ED0E6}"/>
-          </ac:spMkLst>
-        </pc:spChg>
-        <pc:spChg chg="del">
-          <ac:chgData name="Jean-Yves Vuillequez" userId="e7fac481abea6bd0" providerId="LiveId" clId="{79E365E8-22BC-4EC2-9606-9A9AC6CD1D22}" dt="2025-11-20T15:42:55.370" v="4081" actId="478"/>
-          <ac:spMkLst>
-            <pc:docMk/>
-            <pc:sldMk cId="4156271710" sldId="288"/>
-            <ac:spMk id="12" creationId="{740BA0CF-4FE4-694B-1E0A-549DC46AD2EB}"/>
-          </ac:spMkLst>
-        </pc:spChg>
-        <pc:spChg chg="del mod">
-          <ac:chgData name="Jean-Yves Vuillequez" userId="e7fac481abea6bd0" providerId="LiveId" clId="{79E365E8-22BC-4EC2-9606-9A9AC6CD1D22}" dt="2025-11-20T15:44:13.753" v="4094" actId="478"/>
-          <ac:spMkLst>
-            <pc:docMk/>
-            <pc:sldMk cId="4156271710" sldId="288"/>
-            <ac:spMk id="13" creationId="{8F7E0CE5-A523-1A49-46A7-9DF1818C9F76}"/>
-          </ac:spMkLst>
-        </pc:spChg>
-        <pc:spChg chg="del">
-          <ac:chgData name="Jean-Yves Vuillequez" userId="e7fac481abea6bd0" providerId="LiveId" clId="{79E365E8-22BC-4EC2-9606-9A9AC6CD1D22}" dt="2025-11-20T15:42:55.370" v="4081" actId="478"/>
-          <ac:spMkLst>
-            <pc:docMk/>
-            <pc:sldMk cId="4156271710" sldId="288"/>
-            <ac:spMk id="14" creationId="{54AFD23F-A289-A5AF-3AE9-C30CBA50B293}"/>
-          </ac:spMkLst>
-        </pc:spChg>
-        <pc:spChg chg="mod">
-          <ac:chgData name="Jean-Yves Vuillequez" userId="e7fac481abea6bd0" providerId="LiveId" clId="{79E365E8-22BC-4EC2-9606-9A9AC6CD1D22}" dt="2025-11-20T16:18:23.577" v="4695" actId="113"/>
-          <ac:spMkLst>
-            <pc:docMk/>
-            <pc:sldMk cId="4156271710" sldId="288"/>
-            <ac:spMk id="96" creationId="{9496F4BA-6570-B121-53B0-E4B792AFAF9D}"/>
-          </ac:spMkLst>
-        </pc:spChg>
-        <pc:graphicFrameChg chg="add mod modGraphic">
-          <ac:chgData name="Jean-Yves Vuillequez" userId="e7fac481abea6bd0" providerId="LiveId" clId="{79E365E8-22BC-4EC2-9606-9A9AC6CD1D22}" dt="2025-11-20T16:26:07.879" v="4723" actId="14734"/>
-          <ac:graphicFrameMkLst>
-            <pc:docMk/>
-            <pc:sldMk cId="4156271710" sldId="288"/>
-            <ac:graphicFrameMk id="2" creationId="{173634DA-7419-95BC-CFC9-038472A87DB1}"/>
-          </ac:graphicFrameMkLst>
-        </pc:graphicFrameChg>
-        <pc:graphicFrameChg chg="del mod modGraphic">
-          <ac:chgData name="Jean-Yves Vuillequez" userId="e7fac481abea6bd0" providerId="LiveId" clId="{79E365E8-22BC-4EC2-9606-9A9AC6CD1D22}" dt="2025-11-20T16:12:22.646" v="4635" actId="478"/>
-          <ac:graphicFrameMkLst>
-            <pc:docMk/>
-            <pc:sldMk cId="4156271710" sldId="288"/>
-            <ac:graphicFrameMk id="2" creationId="{5775F0AF-38B3-FEEF-E777-FA7976DF9346}"/>
-          </ac:graphicFrameMkLst>
-        </pc:graphicFrameChg>
-        <pc:graphicFrameChg chg="add mod modGraphic">
-          <ac:chgData name="Jean-Yves Vuillequez" userId="e7fac481abea6bd0" providerId="LiveId" clId="{79E365E8-22BC-4EC2-9606-9A9AC6CD1D22}" dt="2025-11-20T16:13:43.019" v="4689" actId="14734"/>
-          <ac:graphicFrameMkLst>
-            <pc:docMk/>
-            <pc:sldMk cId="4156271710" sldId="288"/>
-            <ac:graphicFrameMk id="4" creationId="{07C3DCC2-88A3-887C-E579-46BF990D0E4D}"/>
-          </ac:graphicFrameMkLst>
-        </pc:graphicFrameChg>
-        <pc:picChg chg="add del mod">
-          <ac:chgData name="Jean-Yves Vuillequez" userId="e7fac481abea6bd0" providerId="LiveId" clId="{79E365E8-22BC-4EC2-9606-9A9AC6CD1D22}" dt="2025-11-20T16:24:46.312" v="4699" actId="478"/>
-          <ac:picMkLst>
-            <pc:docMk/>
-            <pc:sldMk cId="4156271710" sldId="288"/>
-            <ac:picMk id="5" creationId="{E25DBDF2-8A16-91EA-1A5E-D3FF88A8B183}"/>
-          </ac:picMkLst>
-        </pc:picChg>
       </pc:sldChg>
       <pc:sldChg chg="addSp delSp modSp add mod modNotesTx">
-        <pc:chgData name="Jean-Yves Vuillequez" userId="e7fac481abea6bd0" providerId="LiveId" clId="{79E365E8-22BC-4EC2-9606-9A9AC6CD1D22}" dt="2025-11-21T14:57:59.974" v="7127" actId="478"/>
+        <pc:chgData name="Jean-Yves Vuillequez" userId="e7fac481abea6bd0" providerId="LiveId" clId="{79E365E8-22BC-4EC2-9606-9A9AC6CD1D22}" dt="2025-11-21T15:51:02.429" v="7194" actId="14100"/>
         <pc:sldMkLst>
           <pc:docMk/>
           <pc:sldMk cId="2290935718" sldId="289"/>
@@ -2518,7 +1807,7 @@
           </ac:spMkLst>
         </pc:spChg>
         <pc:spChg chg="add mod">
-          <ac:chgData name="Jean-Yves Vuillequez" userId="e7fac481abea6bd0" providerId="LiveId" clId="{79E365E8-22BC-4EC2-9606-9A9AC6CD1D22}" dt="2025-11-21T14:51:09.527" v="7064" actId="1076"/>
+          <ac:chgData name="Jean-Yves Vuillequez" userId="e7fac481abea6bd0" providerId="LiveId" clId="{79E365E8-22BC-4EC2-9606-9A9AC6CD1D22}" dt="2025-11-21T15:51:02.429" v="7194" actId="14100"/>
           <ac:spMkLst>
             <pc:docMk/>
             <pc:sldMk cId="2290935718" sldId="289"/>
@@ -2599,7 +1888,7 @@
         </pc:picChg>
       </pc:sldChg>
       <pc:sldChg chg="addSp delSp modSp add mod modNotesTx">
-        <pc:chgData name="Jean-Yves Vuillequez" userId="e7fac481abea6bd0" providerId="LiveId" clId="{79E365E8-22BC-4EC2-9606-9A9AC6CD1D22}" dt="2025-11-21T14:57:53.236" v="7126" actId="1076"/>
+        <pc:chgData name="Jean-Yves Vuillequez" userId="e7fac481abea6bd0" providerId="LiveId" clId="{79E365E8-22BC-4EC2-9606-9A9AC6CD1D22}" dt="2025-11-21T15:51:10.968" v="7196" actId="478"/>
         <pc:sldMkLst>
           <pc:docMk/>
           <pc:sldMk cId="3332770" sldId="291"/>
@@ -2652,8 +1941,8 @@
             <ac:spMk id="8" creationId="{B18422F6-8518-A3E3-AADF-1C79685DFD59}"/>
           </ac:spMkLst>
         </pc:spChg>
-        <pc:spChg chg="add mod">
-          <ac:chgData name="Jean-Yves Vuillequez" userId="e7fac481abea6bd0" providerId="LiveId" clId="{79E365E8-22BC-4EC2-9606-9A9AC6CD1D22}" dt="2025-11-21T14:51:03.991" v="7062" actId="1076"/>
+        <pc:spChg chg="add del mod">
+          <ac:chgData name="Jean-Yves Vuillequez" userId="e7fac481abea6bd0" providerId="LiveId" clId="{79E365E8-22BC-4EC2-9606-9A9AC6CD1D22}" dt="2025-11-21T15:51:10.968" v="7196" actId="478"/>
           <ac:spMkLst>
             <pc:docMk/>
             <pc:sldMk cId="3332770" sldId="291"/>
@@ -2692,14 +1981,6 @@
             <ac:spMk id="178" creationId="{1DE246AA-5B17-33A5-5EF2-125E8EA81EFC}"/>
           </ac:spMkLst>
         </pc:spChg>
-        <pc:spChg chg="del mod">
-          <ac:chgData name="Jean-Yves Vuillequez" userId="e7fac481abea6bd0" providerId="LiveId" clId="{79E365E8-22BC-4EC2-9606-9A9AC6CD1D22}" dt="2025-11-20T10:24:44.695" v="1443" actId="478"/>
-          <ac:spMkLst>
-            <pc:docMk/>
-            <pc:sldMk cId="3332770" sldId="291"/>
-            <ac:spMk id="181" creationId="{8D7506E9-F193-B7D8-1AC3-28B8647B8462}"/>
-          </ac:spMkLst>
-        </pc:spChg>
         <pc:picChg chg="add del mod">
           <ac:chgData name="Jean-Yves Vuillequez" userId="e7fac481abea6bd0" providerId="LiveId" clId="{79E365E8-22BC-4EC2-9606-9A9AC6CD1D22}" dt="2025-11-21T14:30:45.634" v="6950" actId="478"/>
           <ac:picMkLst>
@@ -2734,7 +2015,7 @@
         </pc:cxnChg>
       </pc:sldChg>
       <pc:sldChg chg="addSp delSp modSp add mod ord delAnim modAnim modNotesTx">
-        <pc:chgData name="Jean-Yves Vuillequez" userId="e7fac481abea6bd0" providerId="LiveId" clId="{79E365E8-22BC-4EC2-9606-9A9AC6CD1D22}" dt="2025-11-21T14:58:23.369" v="7129" actId="1076"/>
+        <pc:chgData name="Jean-Yves Vuillequez" userId="e7fac481abea6bd0" providerId="LiveId" clId="{79E365E8-22BC-4EC2-9606-9A9AC6CD1D22}" dt="2025-11-21T15:51:07.122" v="7195" actId="478"/>
         <pc:sldMkLst>
           <pc:docMk/>
           <pc:sldMk cId="3315518580" sldId="292"/>
@@ -2747,22 +2028,6 @@
             <ac:spMk id="2" creationId="{6010F8FA-C28E-A43A-D055-D8E240B71778}"/>
           </ac:spMkLst>
         </pc:spChg>
-        <pc:spChg chg="add del mod">
-          <ac:chgData name="Jean-Yves Vuillequez" userId="e7fac481abea6bd0" providerId="LiveId" clId="{79E365E8-22BC-4EC2-9606-9A9AC6CD1D22}" dt="2025-11-20T11:04:53.802" v="2138" actId="478"/>
-          <ac:spMkLst>
-            <pc:docMk/>
-            <pc:sldMk cId="3315518580" sldId="292"/>
-            <ac:spMk id="2" creationId="{7259BD82-4060-5439-0ED6-5BD7288B7E42}"/>
-          </ac:spMkLst>
-        </pc:spChg>
-        <pc:spChg chg="add del mod">
-          <ac:chgData name="Jean-Yves Vuillequez" userId="e7fac481abea6bd0" providerId="LiveId" clId="{79E365E8-22BC-4EC2-9606-9A9AC6CD1D22}" dt="2025-11-20T15:05:37.281" v="3956" actId="478"/>
-          <ac:spMkLst>
-            <pc:docMk/>
-            <pc:sldMk cId="3315518580" sldId="292"/>
-            <ac:spMk id="3" creationId="{58C7CB4A-9D41-2B2B-3342-5448FB603161}"/>
-          </ac:spMkLst>
-        </pc:spChg>
         <pc:spChg chg="add mod">
           <ac:chgData name="Jean-Yves Vuillequez" userId="e7fac481abea6bd0" providerId="LiveId" clId="{79E365E8-22BC-4EC2-9606-9A9AC6CD1D22}" dt="2025-11-21T14:04:10.873" v="6846" actId="113"/>
           <ac:spMkLst>
@@ -2771,20 +2036,12 @@
             <ac:spMk id="3" creationId="{8E129141-57FA-3782-2D29-46A01202FF38}"/>
           </ac:spMkLst>
         </pc:spChg>
-        <pc:spChg chg="add mod">
-          <ac:chgData name="Jean-Yves Vuillequez" userId="e7fac481abea6bd0" providerId="LiveId" clId="{79E365E8-22BC-4EC2-9606-9A9AC6CD1D22}" dt="2025-11-21T14:58:23.369" v="7129" actId="1076"/>
+        <pc:spChg chg="add del mod">
+          <ac:chgData name="Jean-Yves Vuillequez" userId="e7fac481abea6bd0" providerId="LiveId" clId="{79E365E8-22BC-4EC2-9606-9A9AC6CD1D22}" dt="2025-11-21T15:51:07.122" v="7195" actId="478"/>
           <ac:spMkLst>
             <pc:docMk/>
             <pc:sldMk cId="3315518580" sldId="292"/>
             <ac:spMk id="4" creationId="{25709A3F-A7F7-C13C-1868-EF0F87D5A52C}"/>
-          </ac:spMkLst>
-        </pc:spChg>
-        <pc:spChg chg="del mod">
-          <ac:chgData name="Jean-Yves Vuillequez" userId="e7fac481abea6bd0" providerId="LiveId" clId="{79E365E8-22BC-4EC2-9606-9A9AC6CD1D22}" dt="2025-11-20T15:06:38.647" v="3967" actId="478"/>
-          <ac:spMkLst>
-            <pc:docMk/>
-            <pc:sldMk cId="3315518580" sldId="292"/>
-            <ac:spMk id="4" creationId="{CDF36CC3-8438-C6F0-3E01-EC79EEB762E1}"/>
           </ac:spMkLst>
         </pc:spChg>
         <pc:spChg chg="add del mod">
@@ -2795,14 +2052,6 @@
             <ac:spMk id="4" creationId="{DC681EF8-A850-D11F-7ECC-97847033BF06}"/>
           </ac:spMkLst>
         </pc:spChg>
-        <pc:spChg chg="add">
-          <ac:chgData name="Jean-Yves Vuillequez" userId="e7fac481abea6bd0" providerId="LiveId" clId="{79E365E8-22BC-4EC2-9606-9A9AC6CD1D22}" dt="2025-11-20T15:03:44.399" v="3944"/>
-          <ac:spMkLst>
-            <pc:docMk/>
-            <pc:sldMk cId="3315518580" sldId="292"/>
-            <ac:spMk id="5" creationId="{C510938D-3C4B-90E8-2CDD-C27A537026B9}"/>
-          </ac:spMkLst>
-        </pc:spChg>
         <pc:spChg chg="add mod">
           <ac:chgData name="Jean-Yves Vuillequez" userId="e7fac481abea6bd0" providerId="LiveId" clId="{79E365E8-22BC-4EC2-9606-9A9AC6CD1D22}" dt="2025-11-21T09:41:24.918" v="5751" actId="113"/>
           <ac:spMkLst>
@@ -2811,16 +2060,8 @@
             <ac:spMk id="6" creationId="{0E35907B-6989-788E-7DC3-A17A61D93F25}"/>
           </ac:spMkLst>
         </pc:spChg>
-        <pc:spChg chg="add del mod">
-          <ac:chgData name="Jean-Yves Vuillequez" userId="e7fac481abea6bd0" providerId="LiveId" clId="{79E365E8-22BC-4EC2-9606-9A9AC6CD1D22}" dt="2025-11-20T15:06:43.755" v="3968" actId="478"/>
-          <ac:spMkLst>
-            <pc:docMk/>
-            <pc:sldMk cId="3315518580" sldId="292"/>
-            <ac:spMk id="8" creationId="{A886364E-1017-D5CA-17FB-D8B8C16382D8}"/>
-          </ac:spMkLst>
-        </pc:spChg>
         <pc:spChg chg="add mod ord">
-          <ac:chgData name="Jean-Yves Vuillequez" userId="e7fac481abea6bd0" providerId="LiveId" clId="{79E365E8-22BC-4EC2-9606-9A9AC6CD1D22}" dt="2025-11-20T20:37:10.457" v="5221" actId="2085"/>
+          <ac:chgData name="Jean-Yves Vuillequez" userId="e7fac481abea6bd0" providerId="LiveId" clId="{79E365E8-22BC-4EC2-9606-9A9AC6CD1D22}" dt="2025-11-21T15:24:06.980" v="7159" actId="164"/>
           <ac:spMkLst>
             <pc:docMk/>
             <pc:sldMk cId="3315518580" sldId="292"/>
@@ -2836,15 +2077,7 @@
           </ac:spMkLst>
         </pc:spChg>
         <pc:spChg chg="add mod">
-          <ac:chgData name="Jean-Yves Vuillequez" userId="e7fac481abea6bd0" providerId="LiveId" clId="{79E365E8-22BC-4EC2-9606-9A9AC6CD1D22}" dt="2025-11-20T15:14:00.013" v="4004" actId="571"/>
-          <ac:spMkLst>
-            <pc:docMk/>
-            <pc:sldMk cId="3315518580" sldId="292"/>
-            <ac:spMk id="15" creationId="{B6BC862B-D336-EF9F-B52C-1377736430CA}"/>
-          </ac:spMkLst>
-        </pc:spChg>
-        <pc:spChg chg="add mod">
-          <ac:chgData name="Jean-Yves Vuillequez" userId="e7fac481abea6bd0" providerId="LiveId" clId="{79E365E8-22BC-4EC2-9606-9A9AC6CD1D22}" dt="2025-11-20T20:37:00.629" v="5220" actId="208"/>
+          <ac:chgData name="Jean-Yves Vuillequez" userId="e7fac481abea6bd0" providerId="LiveId" clId="{79E365E8-22BC-4EC2-9606-9A9AC6CD1D22}" dt="2025-11-21T15:24:06.980" v="7159" actId="164"/>
           <ac:spMkLst>
             <pc:docMk/>
             <pc:sldMk cId="3315518580" sldId="292"/>
@@ -2859,22 +2092,14 @@
             <ac:spMk id="70" creationId="{C70766F9-707C-9B0E-5A17-F03AA1792E9A}"/>
           </ac:spMkLst>
         </pc:spChg>
-        <pc:grpChg chg="add del mod">
-          <ac:chgData name="Jean-Yves Vuillequez" userId="e7fac481abea6bd0" providerId="LiveId" clId="{79E365E8-22BC-4EC2-9606-9A9AC6CD1D22}" dt="2025-11-20T15:12:24.584" v="3988" actId="478"/>
+        <pc:grpChg chg="add mod">
+          <ac:chgData name="Jean-Yves Vuillequez" userId="e7fac481abea6bd0" providerId="LiveId" clId="{79E365E8-22BC-4EC2-9606-9A9AC6CD1D22}" dt="2025-11-21T15:24:06.980" v="7159" actId="164"/>
           <ac:grpSpMkLst>
             <pc:docMk/>
             <pc:sldMk cId="3315518580" sldId="292"/>
-            <ac:grpSpMk id="10" creationId="{2EE0588F-279B-4A7B-CE56-4AB87368B0E6}"/>
+            <ac:grpSpMk id="5" creationId="{F4E17C80-100B-9769-D624-90E0C0132394}"/>
           </ac:grpSpMkLst>
         </pc:grpChg>
-        <pc:picChg chg="del mod topLvl">
-          <ac:chgData name="Jean-Yves Vuillequez" userId="e7fac481abea6bd0" providerId="LiveId" clId="{79E365E8-22BC-4EC2-9606-9A9AC6CD1D22}" dt="2025-11-20T15:12:24.584" v="3988" actId="478"/>
-          <ac:picMkLst>
-            <pc:docMk/>
-            <pc:sldMk cId="3315518580" sldId="292"/>
-            <ac:picMk id="12" creationId="{53E4A8FE-12C3-8F56-40E1-7C0F82EF5CE6}"/>
-          </ac:picMkLst>
-        </pc:picChg>
         <pc:picChg chg="add mod">
           <ac:chgData name="Jean-Yves Vuillequez" userId="e7fac481abea6bd0" providerId="LiveId" clId="{79E365E8-22BC-4EC2-9606-9A9AC6CD1D22}" dt="2025-11-20T15:12:42.291" v="3996" actId="1076"/>
           <ac:picMkLst>
@@ -2930,22 +2155,6 @@
             <ac:spMk id="32" creationId="{7F99F4F7-0E68-E50D-5D32-4D713CC22797}"/>
           </ac:spMkLst>
         </pc:spChg>
-        <pc:picChg chg="add del mod">
-          <ac:chgData name="Jean-Yves Vuillequez" userId="e7fac481abea6bd0" providerId="LiveId" clId="{79E365E8-22BC-4EC2-9606-9A9AC6CD1D22}" dt="2025-11-20T13:17:32.132" v="3147" actId="478"/>
-          <ac:picMkLst>
-            <pc:docMk/>
-            <pc:sldMk cId="1155304805" sldId="293"/>
-            <ac:picMk id="4" creationId="{36C1F654-2CEE-E31C-95BA-31F62FC4CDCF}"/>
-          </ac:picMkLst>
-        </pc:picChg>
-        <pc:picChg chg="add del mod">
-          <ac:chgData name="Jean-Yves Vuillequez" userId="e7fac481abea6bd0" providerId="LiveId" clId="{79E365E8-22BC-4EC2-9606-9A9AC6CD1D22}" dt="2025-11-20T13:18:00.027" v="3153" actId="478"/>
-          <ac:picMkLst>
-            <pc:docMk/>
-            <pc:sldMk cId="1155304805" sldId="293"/>
-            <ac:picMk id="7" creationId="{49E48C19-93C5-CFB0-CFF4-150E5294188A}"/>
-          </ac:picMkLst>
-        </pc:picChg>
         <pc:picChg chg="add mod ord">
           <ac:chgData name="Jean-Yves Vuillequez" userId="e7fac481abea6bd0" providerId="LiveId" clId="{79E365E8-22BC-4EC2-9606-9A9AC6CD1D22}" dt="2025-11-20T13:18:54.190" v="3161" actId="1076"/>
           <ac:picMkLst>
@@ -2978,53 +2187,6 @@
             <ac:picMk id="19" creationId="{47669945-4311-8D2F-8244-227CB848DB30}"/>
           </ac:picMkLst>
         </pc:picChg>
-        <pc:picChg chg="del mod">
-          <ac:chgData name="Jean-Yves Vuillequez" userId="e7fac481abea6bd0" providerId="LiveId" clId="{79E365E8-22BC-4EC2-9606-9A9AC6CD1D22}" dt="2025-11-20T13:16:33.661" v="3108" actId="478"/>
-          <ac:picMkLst>
-            <pc:docMk/>
-            <pc:sldMk cId="1155304805" sldId="293"/>
-            <ac:picMk id="24" creationId="{578D533D-4FAD-0F5D-DCFE-5888DF5D5256}"/>
-          </ac:picMkLst>
-        </pc:picChg>
-        <pc:picChg chg="del">
-          <ac:chgData name="Jean-Yves Vuillequez" userId="e7fac481abea6bd0" providerId="LiveId" clId="{79E365E8-22BC-4EC2-9606-9A9AC6CD1D22}" dt="2025-11-20T13:16:33.661" v="3108" actId="478"/>
-          <ac:picMkLst>
-            <pc:docMk/>
-            <pc:sldMk cId="1155304805" sldId="293"/>
-            <ac:picMk id="26" creationId="{7A80205B-455A-41F5-A7F0-3EE2C0D01BE3}"/>
-          </ac:picMkLst>
-        </pc:picChg>
-        <pc:picChg chg="del">
-          <ac:chgData name="Jean-Yves Vuillequez" userId="e7fac481abea6bd0" providerId="LiveId" clId="{79E365E8-22BC-4EC2-9606-9A9AC6CD1D22}" dt="2025-11-20T13:16:33.661" v="3108" actId="478"/>
-          <ac:picMkLst>
-            <pc:docMk/>
-            <pc:sldMk cId="1155304805" sldId="293"/>
-            <ac:picMk id="31" creationId="{CE35D7BC-D1EA-2A0E-729A-95E5CBE9EF63}"/>
-          </ac:picMkLst>
-        </pc:picChg>
-        <pc:picChg chg="del">
-          <ac:chgData name="Jean-Yves Vuillequez" userId="e7fac481abea6bd0" providerId="LiveId" clId="{79E365E8-22BC-4EC2-9606-9A9AC6CD1D22}" dt="2025-11-20T13:16:33.661" v="3108" actId="478"/>
-          <ac:picMkLst>
-            <pc:docMk/>
-            <pc:sldMk cId="1155304805" sldId="293"/>
-            <ac:picMk id="34" creationId="{B969A3D5-D60C-779A-557D-97AECC7C5017}"/>
-          </ac:picMkLst>
-        </pc:picChg>
-      </pc:sldChg>
-      <pc:sldChg chg="modSp add del mod">
-        <pc:chgData name="Jean-Yves Vuillequez" userId="e7fac481abea6bd0" providerId="LiveId" clId="{79E365E8-22BC-4EC2-9606-9A9AC6CD1D22}" dt="2025-11-20T16:04:19.173" v="4514" actId="47"/>
-        <pc:sldMkLst>
-          <pc:docMk/>
-          <pc:sldMk cId="2917870942" sldId="294"/>
-        </pc:sldMkLst>
-        <pc:spChg chg="mod">
-          <ac:chgData name="Jean-Yves Vuillequez" userId="e7fac481abea6bd0" providerId="LiveId" clId="{79E365E8-22BC-4EC2-9606-9A9AC6CD1D22}" dt="2025-11-20T16:04:10.438" v="4513" actId="20577"/>
-          <ac:spMkLst>
-            <pc:docMk/>
-            <pc:sldMk cId="2917870942" sldId="294"/>
-            <ac:spMk id="70" creationId="{B59C9D11-77CC-CBCA-D2BE-FD1CB6ED9BAC}"/>
-          </ac:spMkLst>
-        </pc:spChg>
       </pc:sldChg>
       <pc:sldChg chg="modSp add mod">
         <pc:chgData name="Jean-Yves Vuillequez" userId="e7fac481abea6bd0" providerId="LiveId" clId="{79E365E8-22BC-4EC2-9606-9A9AC6CD1D22}" dt="2025-11-21T02:29:34.535" v="5608" actId="6549"/>
@@ -4067,6 +3229,128 @@
   <p:cSld>
     <p:spTree>
       <p:nvGrpSpPr>
+        <p:cNvPr id="1" name="Shape 183"/>
+        <p:cNvGrpSpPr/>
+        <p:nvPr/>
+      </p:nvGrpSpPr>
+      <p:grpSpPr>
+        <a:xfrm>
+          <a:off x="0" y="0"/>
+          <a:ext cx="0" cy="0"/>
+          <a:chOff x="0" y="0"/>
+          <a:chExt cx="0" cy="0"/>
+        </a:xfrm>
+      </p:grpSpPr>
+      <p:sp>
+        <p:nvSpPr>
+          <p:cNvPr id="184" name="Google Shape;184;p9:notes"/>
+          <p:cNvSpPr>
+            <a:spLocks noGrp="1" noRot="1" noChangeAspect="1"/>
+          </p:cNvSpPr>
+          <p:nvPr>
+            <p:ph type="sldImg" idx="2"/>
+          </p:nvPr>
+        </p:nvSpPr>
+        <p:spPr>
+          <a:xfrm>
+            <a:off x="381000" y="685800"/>
+            <a:ext cx="6096000" cy="3429000"/>
+          </a:xfrm>
+          <a:custGeom>
+            <a:avLst/>
+            <a:gdLst/>
+            <a:ahLst/>
+            <a:cxnLst/>
+            <a:rect l="l" t="t" r="r" b="b"/>
+            <a:pathLst>
+              <a:path w="120000" h="120000" extrusionOk="0">
+                <a:moveTo>
+                  <a:pt x="0" y="0"/>
+                </a:moveTo>
+                <a:lnTo>
+                  <a:pt x="120000" y="0"/>
+                </a:lnTo>
+                <a:lnTo>
+                  <a:pt x="120000" y="120000"/>
+                </a:lnTo>
+                <a:lnTo>
+                  <a:pt x="0" y="120000"/>
+                </a:lnTo>
+                <a:close/>
+              </a:path>
+            </a:pathLst>
+          </a:custGeom>
+          <a:noFill/>
+          <a:ln w="9525" cap="flat" cmpd="sng">
+            <a:solidFill>
+              <a:srgbClr val="000000"/>
+            </a:solidFill>
+            <a:prstDash val="solid"/>
+            <a:round/>
+            <a:headEnd type="none" w="sm" len="sm"/>
+            <a:tailEnd type="none" w="sm" len="sm"/>
+          </a:ln>
+        </p:spPr>
+      </p:sp>
+      <p:sp>
+        <p:nvSpPr>
+          <p:cNvPr id="185" name="Google Shape;185;p9:notes"/>
+          <p:cNvSpPr txBox="1">
+            <a:spLocks noGrp="1"/>
+          </p:cNvSpPr>
+          <p:nvPr>
+            <p:ph type="body" idx="1"/>
+          </p:nvPr>
+        </p:nvSpPr>
+        <p:spPr>
+          <a:xfrm>
+            <a:off x="685800" y="4343400"/>
+            <a:ext cx="5486400" cy="4114800"/>
+          </a:xfrm>
+          <a:prstGeom prst="rect">
+            <a:avLst/>
+          </a:prstGeom>
+          <a:noFill/>
+          <a:ln>
+            <a:noFill/>
+          </a:ln>
+        </p:spPr>
+        <p:txBody>
+          <a:bodyPr spcFirstLastPara="1" wrap="square" lIns="91425" tIns="91425" rIns="91425" bIns="91425" anchor="t" anchorCtr="0">
+            <a:noAutofit/>
+          </a:bodyPr>
+          <a:lstStyle/>
+          <a:p>
+            <a:pPr marL="0" lvl="0" indent="0" algn="l" rtl="0">
+              <a:lnSpc>
+                <a:spcPct val="100000"/>
+              </a:lnSpc>
+              <a:spcBef>
+                <a:spcPts val="0"/>
+              </a:spcBef>
+              <a:spcAft>
+                <a:spcPts val="0"/>
+              </a:spcAft>
+              <a:buSzPts val="1100"/>
+              <a:buNone/>
+            </a:pPr>
+            <a:endParaRPr/>
+          </a:p>
+        </p:txBody>
+      </p:sp>
+    </p:spTree>
+  </p:cSld>
+  <p:clrMapOvr>
+    <a:masterClrMapping/>
+  </p:clrMapOvr>
+</p:notes>
+</file>
+
+<file path=ppt/notesSlides/notesSlide13.xml><?xml version="1.0" encoding="utf-8"?>
+<p:notes xmlns:a="http://schemas.openxmlformats.org/drawingml/2006/main" xmlns:r="http://schemas.openxmlformats.org/officeDocument/2006/relationships" xmlns:p="http://schemas.openxmlformats.org/presentationml/2006/main" showMasterSp="0" showMasterPhAnim="0">
+  <p:cSld>
+    <p:spTree>
+      <p:nvGrpSpPr>
         <p:cNvPr id="1" name="Shape 58">
           <a:extLst>
             <a:ext uri="{FF2B5EF4-FFF2-40B4-BE49-F238E27FC236}">
@@ -4189,7 +3473,7 @@
 </p:notes>
 </file>
 
-<file path=ppt/notesSlides/notesSlide13.xml><?xml version="1.0" encoding="utf-8"?>
+<file path=ppt/notesSlides/notesSlide14.xml><?xml version="1.0" encoding="utf-8"?>
 <p:notes xmlns:a="http://schemas.openxmlformats.org/drawingml/2006/main" xmlns:r="http://schemas.openxmlformats.org/officeDocument/2006/relationships" xmlns:p="http://schemas.openxmlformats.org/presentationml/2006/main" showMasterSp="0" showMasterPhAnim="0">
   <p:cSld>
     <p:spTree>
@@ -4334,7 +3618,7 @@
 </p:notes>
 </file>
 
-<file path=ppt/notesSlides/notesSlide14.xml><?xml version="1.0" encoding="utf-8"?>
+<file path=ppt/notesSlides/notesSlide15.xml><?xml version="1.0" encoding="utf-8"?>
 <p:notes xmlns:a="http://schemas.openxmlformats.org/drawingml/2006/main" xmlns:r="http://schemas.openxmlformats.org/officeDocument/2006/relationships" xmlns:p="http://schemas.openxmlformats.org/presentationml/2006/main" showMasterSp="0" showMasterPhAnim="0">
   <p:cSld>
     <p:spTree>
@@ -4479,7 +3763,7 @@
 </p:notes>
 </file>
 
-<file path=ppt/notesSlides/notesSlide15.xml><?xml version="1.0" encoding="utf-8"?>
+<file path=ppt/notesSlides/notesSlide16.xml><?xml version="1.0" encoding="utf-8"?>
 <p:notes xmlns:a="http://schemas.openxmlformats.org/drawingml/2006/main" xmlns:r="http://schemas.openxmlformats.org/officeDocument/2006/relationships" xmlns:p="http://schemas.openxmlformats.org/presentationml/2006/main" showMasterSp="0" showMasterPhAnim="0">
   <p:cSld>
     <p:spTree>
@@ -4624,7 +3908,7 @@
 </p:notes>
 </file>
 
-<file path=ppt/notesSlides/notesSlide16.xml><?xml version="1.0" encoding="utf-8"?>
+<file path=ppt/notesSlides/notesSlide17.xml><?xml version="1.0" encoding="utf-8"?>
 <p:notes xmlns:a="http://schemas.openxmlformats.org/drawingml/2006/main" xmlns:r="http://schemas.openxmlformats.org/officeDocument/2006/relationships" xmlns:p="http://schemas.openxmlformats.org/presentationml/2006/main" showMasterSp="0" showMasterPhAnim="0">
   <p:cSld>
     <p:spTree>
@@ -4762,128 +4046,6 @@
         <p14:creationId xmlns:p14="http://schemas.microsoft.com/office/powerpoint/2010/main" val="1915157264"/>
       </p:ext>
     </p:extLst>
-  </p:cSld>
-  <p:clrMapOvr>
-    <a:masterClrMapping/>
-  </p:clrMapOvr>
-</p:notes>
-</file>
-
-<file path=ppt/notesSlides/notesSlide17.xml><?xml version="1.0" encoding="utf-8"?>
-<p:notes xmlns:a="http://schemas.openxmlformats.org/drawingml/2006/main" xmlns:r="http://schemas.openxmlformats.org/officeDocument/2006/relationships" xmlns:p="http://schemas.openxmlformats.org/presentationml/2006/main" showMasterSp="0" showMasterPhAnim="0">
-  <p:cSld>
-    <p:spTree>
-      <p:nvGrpSpPr>
-        <p:cNvPr id="1" name="Shape 183"/>
-        <p:cNvGrpSpPr/>
-        <p:nvPr/>
-      </p:nvGrpSpPr>
-      <p:grpSpPr>
-        <a:xfrm>
-          <a:off x="0" y="0"/>
-          <a:ext cx="0" cy="0"/>
-          <a:chOff x="0" y="0"/>
-          <a:chExt cx="0" cy="0"/>
-        </a:xfrm>
-      </p:grpSpPr>
-      <p:sp>
-        <p:nvSpPr>
-          <p:cNvPr id="184" name="Google Shape;184;p9:notes"/>
-          <p:cNvSpPr>
-            <a:spLocks noGrp="1" noRot="1" noChangeAspect="1"/>
-          </p:cNvSpPr>
-          <p:nvPr>
-            <p:ph type="sldImg" idx="2"/>
-          </p:nvPr>
-        </p:nvSpPr>
-        <p:spPr>
-          <a:xfrm>
-            <a:off x="381000" y="685800"/>
-            <a:ext cx="6096000" cy="3429000"/>
-          </a:xfrm>
-          <a:custGeom>
-            <a:avLst/>
-            <a:gdLst/>
-            <a:ahLst/>
-            <a:cxnLst/>
-            <a:rect l="l" t="t" r="r" b="b"/>
-            <a:pathLst>
-              <a:path w="120000" h="120000" extrusionOk="0">
-                <a:moveTo>
-                  <a:pt x="0" y="0"/>
-                </a:moveTo>
-                <a:lnTo>
-                  <a:pt x="120000" y="0"/>
-                </a:lnTo>
-                <a:lnTo>
-                  <a:pt x="120000" y="120000"/>
-                </a:lnTo>
-                <a:lnTo>
-                  <a:pt x="0" y="120000"/>
-                </a:lnTo>
-                <a:close/>
-              </a:path>
-            </a:pathLst>
-          </a:custGeom>
-          <a:noFill/>
-          <a:ln w="9525" cap="flat" cmpd="sng">
-            <a:solidFill>
-              <a:srgbClr val="000000"/>
-            </a:solidFill>
-            <a:prstDash val="solid"/>
-            <a:round/>
-            <a:headEnd type="none" w="sm" len="sm"/>
-            <a:tailEnd type="none" w="sm" len="sm"/>
-          </a:ln>
-        </p:spPr>
-      </p:sp>
-      <p:sp>
-        <p:nvSpPr>
-          <p:cNvPr id="185" name="Google Shape;185;p9:notes"/>
-          <p:cNvSpPr txBox="1">
-            <a:spLocks noGrp="1"/>
-          </p:cNvSpPr>
-          <p:nvPr>
-            <p:ph type="body" idx="1"/>
-          </p:nvPr>
-        </p:nvSpPr>
-        <p:spPr>
-          <a:xfrm>
-            <a:off x="685800" y="4343400"/>
-            <a:ext cx="5486400" cy="4114800"/>
-          </a:xfrm>
-          <a:prstGeom prst="rect">
-            <a:avLst/>
-          </a:prstGeom>
-          <a:noFill/>
-          <a:ln>
-            <a:noFill/>
-          </a:ln>
-        </p:spPr>
-        <p:txBody>
-          <a:bodyPr spcFirstLastPara="1" wrap="square" lIns="91425" tIns="91425" rIns="91425" bIns="91425" anchor="t" anchorCtr="0">
-            <a:noAutofit/>
-          </a:bodyPr>
-          <a:lstStyle/>
-          <a:p>
-            <a:pPr marL="0" lvl="0" indent="0" algn="l" rtl="0">
-              <a:lnSpc>
-                <a:spcPct val="100000"/>
-              </a:lnSpc>
-              <a:spcBef>
-                <a:spcPts val="0"/>
-              </a:spcBef>
-              <a:spcAft>
-                <a:spcPts val="0"/>
-              </a:spcAft>
-              <a:buSzPts val="1100"/>
-              <a:buNone/>
-            </a:pPr>
-            <a:endParaRPr/>
-          </a:p>
-        </p:txBody>
-      </p:sp>
-    </p:spTree>
   </p:cSld>
   <p:clrMapOvr>
     <a:masterClrMapping/>
@@ -20004,51 +19166,6 @@
       </p:pic>
       <p:sp>
         <p:nvSpPr>
-          <p:cNvPr id="14" name="ZoneTexte 13">
-            <a:extLst>
-              <a:ext uri="{FF2B5EF4-FFF2-40B4-BE49-F238E27FC236}">
-                <a16:creationId xmlns:a16="http://schemas.microsoft.com/office/drawing/2014/main" id="{17CF8155-98BE-4305-36ED-219473338E58}"/>
-              </a:ext>
-            </a:extLst>
-          </p:cNvPr>
-          <p:cNvSpPr txBox="1"/>
-          <p:nvPr/>
-        </p:nvSpPr>
-        <p:spPr>
-          <a:xfrm rot="1388443">
-            <a:off x="4572882" y="529595"/>
-            <a:ext cx="1481372" cy="307777"/>
-          </a:xfrm>
-          <a:prstGeom prst="rect">
-            <a:avLst/>
-          </a:prstGeom>
-          <a:noFill/>
-          <a:ln>
-            <a:solidFill>
-              <a:srgbClr val="FF0000"/>
-            </a:solidFill>
-          </a:ln>
-        </p:spPr>
-        <p:txBody>
-          <a:bodyPr wrap="square" rtlCol="0">
-            <a:spAutoFit/>
-          </a:bodyPr>
-          <a:lstStyle/>
-          <a:p>
-            <a:pPr algn="ctr"/>
-            <a:r>
-              <a:rPr lang="fr-FR" dirty="0">
-                <a:solidFill>
-                  <a:srgbClr val="FF0000"/>
-                </a:solidFill>
-              </a:rPr>
-              <a:t>A mettre à jour</a:t>
-            </a:r>
-          </a:p>
-        </p:txBody>
-      </p:sp>
-      <p:sp>
-        <p:nvSpPr>
           <p:cNvPr id="15" name="Google Shape;69;p3">
             <a:extLst>
               <a:ext uri="{FF2B5EF4-FFF2-40B4-BE49-F238E27FC236}">
@@ -21069,129 +20186,150 @@
           </a:prstGeom>
         </p:spPr>
       </p:pic>
-      <p:sp>
-        <p:nvSpPr>
-          <p:cNvPr id="16" name="Ellipse 15">
+      <p:grpSp>
+        <p:nvGrpSpPr>
+          <p:cNvPr id="5" name="Groupe 4">
             <a:extLst>
               <a:ext uri="{FF2B5EF4-FFF2-40B4-BE49-F238E27FC236}">
-                <a16:creationId xmlns:a16="http://schemas.microsoft.com/office/drawing/2014/main" id="{5F896893-885B-D70B-25B5-CAABE54E0893}"/>
+                <a16:creationId xmlns:a16="http://schemas.microsoft.com/office/drawing/2014/main" id="{F4E17C80-100B-9769-D624-90E0C0132394}"/>
               </a:ext>
             </a:extLst>
           </p:cNvPr>
-          <p:cNvSpPr/>
+          <p:cNvGrpSpPr/>
           <p:nvPr/>
-        </p:nvSpPr>
-        <p:spPr>
+        </p:nvGrpSpPr>
+        <p:grpSpPr>
           <a:xfrm>
             <a:off x="4647650" y="1061359"/>
-            <a:ext cx="576900" cy="576900"/>
+            <a:ext cx="1522339" cy="576900"/>
+            <a:chOff x="4647650" y="1061359"/>
+            <a:chExt cx="1522339" cy="576900"/>
           </a:xfrm>
-          <a:prstGeom prst="ellipse">
-            <a:avLst/>
-          </a:prstGeom>
-          <a:solidFill>
-            <a:schemeClr val="bg1"/>
-          </a:solidFill>
-          <a:ln>
+        </p:grpSpPr>
+        <p:sp>
+          <p:nvSpPr>
+            <p:cNvPr id="16" name="Ellipse 15">
+              <a:extLst>
+                <a:ext uri="{FF2B5EF4-FFF2-40B4-BE49-F238E27FC236}">
+                  <a16:creationId xmlns:a16="http://schemas.microsoft.com/office/drawing/2014/main" id="{5F896893-885B-D70B-25B5-CAABE54E0893}"/>
+                </a:ext>
+              </a:extLst>
+            </p:cNvPr>
+            <p:cNvSpPr/>
+            <p:nvPr/>
+          </p:nvSpPr>
+          <p:spPr>
+            <a:xfrm>
+              <a:off x="4647650" y="1061359"/>
+              <a:ext cx="576900" cy="576900"/>
+            </a:xfrm>
+            <a:prstGeom prst="ellipse">
+              <a:avLst/>
+            </a:prstGeom>
             <a:solidFill>
-              <a:srgbClr val="FF0000"/>
+              <a:schemeClr val="bg1"/>
             </a:solidFill>
-          </a:ln>
-        </p:spPr>
-        <p:style>
-          <a:lnRef idx="2">
-            <a:schemeClr val="accent1">
-              <a:shade val="15000"/>
-            </a:schemeClr>
-          </a:lnRef>
-          <a:fillRef idx="1">
-            <a:schemeClr val="accent1"/>
-          </a:fillRef>
-          <a:effectRef idx="0">
-            <a:schemeClr val="accent1"/>
-          </a:effectRef>
-          <a:fontRef idx="minor">
-            <a:schemeClr val="lt1"/>
-          </a:fontRef>
-        </p:style>
-        <p:txBody>
-          <a:bodyPr rtlCol="0" anchor="ctr"/>
-          <a:lstStyle/>
-          <a:p>
-            <a:pPr algn="ctr"/>
-            <a:endParaRPr lang="fr-FR">
+            <a:ln>
               <a:solidFill>
                 <a:srgbClr val="FF0000"/>
               </a:solidFill>
-            </a:endParaRPr>
-          </a:p>
-        </p:txBody>
-      </p:sp>
-      <p:sp>
-        <p:nvSpPr>
-          <p:cNvPr id="9" name="ZoneTexte 8">
-            <a:extLst>
-              <a:ext uri="{FF2B5EF4-FFF2-40B4-BE49-F238E27FC236}">
-                <a16:creationId xmlns:a16="http://schemas.microsoft.com/office/drawing/2014/main" id="{B6EC7C46-975B-FBFB-4AEA-EBA9F7AF7291}"/>
-              </a:ext>
-            </a:extLst>
-          </p:cNvPr>
-          <p:cNvSpPr txBox="1"/>
-          <p:nvPr/>
-        </p:nvSpPr>
-        <p:spPr>
-          <a:xfrm>
-            <a:off x="4647650" y="1134365"/>
-            <a:ext cx="1522339" cy="430887"/>
-          </a:xfrm>
-          <a:prstGeom prst="rect">
-            <a:avLst/>
-          </a:prstGeom>
-          <a:noFill/>
-          <a:ln>
+            </a:ln>
+          </p:spPr>
+          <p:style>
+            <a:lnRef idx="2">
+              <a:schemeClr val="accent1">
+                <a:shade val="15000"/>
+              </a:schemeClr>
+            </a:lnRef>
+            <a:fillRef idx="1">
+              <a:schemeClr val="accent1"/>
+            </a:fillRef>
+            <a:effectRef idx="0">
+              <a:schemeClr val="accent1"/>
+            </a:effectRef>
+            <a:fontRef idx="minor">
+              <a:schemeClr val="lt1"/>
+            </a:fontRef>
+          </p:style>
+          <p:txBody>
+            <a:bodyPr rtlCol="0" anchor="ctr"/>
+            <a:lstStyle/>
+            <a:p>
+              <a:pPr algn="ctr"/>
+              <a:endParaRPr lang="fr-FR">
+                <a:solidFill>
+                  <a:srgbClr val="FF0000"/>
+                </a:solidFill>
+              </a:endParaRPr>
+            </a:p>
+          </p:txBody>
+        </p:sp>
+        <p:sp>
+          <p:nvSpPr>
+            <p:cNvPr id="9" name="ZoneTexte 8">
+              <a:extLst>
+                <a:ext uri="{FF2B5EF4-FFF2-40B4-BE49-F238E27FC236}">
+                  <a16:creationId xmlns:a16="http://schemas.microsoft.com/office/drawing/2014/main" id="{B6EC7C46-975B-FBFB-4AEA-EBA9F7AF7291}"/>
+                </a:ext>
+              </a:extLst>
+            </p:cNvPr>
+            <p:cNvSpPr txBox="1"/>
+            <p:nvPr/>
+          </p:nvSpPr>
+          <p:spPr>
+            <a:xfrm>
+              <a:off x="4647650" y="1134365"/>
+              <a:ext cx="1522339" cy="430887"/>
+            </a:xfrm>
+            <a:prstGeom prst="rect">
+              <a:avLst/>
+            </a:prstGeom>
             <a:noFill/>
-          </a:ln>
-        </p:spPr>
-        <p:txBody>
-          <a:bodyPr wrap="square" rtlCol="0">
-            <a:spAutoFit/>
-          </a:bodyPr>
-          <a:lstStyle/>
-          <a:p>
-            <a:r>
-              <a:rPr lang="fr-FR" sz="1050" b="1" dirty="0" err="1">
+            <a:ln>
+              <a:noFill/>
+            </a:ln>
+          </p:spPr>
+          <p:txBody>
+            <a:bodyPr wrap="square" rtlCol="0">
+              <a:spAutoFit/>
+            </a:bodyPr>
+            <a:lstStyle/>
+            <a:p>
+              <a:r>
+                <a:rPr lang="fr-FR" sz="1050" b="1" dirty="0" err="1">
+                  <a:solidFill>
+                    <a:srgbClr val="FF0000"/>
+                  </a:solidFill>
+                </a:rPr>
+                <a:t>What’s</a:t>
+              </a:r>
+              <a:endParaRPr lang="fr-FR" sz="1050" b="1" dirty="0">
                 <a:solidFill>
                   <a:srgbClr val="FF0000"/>
                 </a:solidFill>
-              </a:rPr>
-              <a:t>What’s</a:t>
-            </a:r>
-            <a:endParaRPr lang="fr-FR" sz="1050" b="1" dirty="0">
-              <a:solidFill>
-                <a:srgbClr val="FF0000"/>
-              </a:solidFill>
-            </a:endParaRPr>
-          </a:p>
-          <a:p>
-            <a:r>
-              <a:rPr lang="fr-FR" sz="1050" b="1" dirty="0" err="1">
-                <a:solidFill>
-                  <a:srgbClr val="FF0000"/>
-                </a:solidFill>
-              </a:rPr>
-              <a:t>next</a:t>
-            </a:r>
-            <a:r>
-              <a:rPr lang="fr-FR" sz="1050" b="1" dirty="0">
-                <a:solidFill>
-                  <a:srgbClr val="FF0000"/>
-                </a:solidFill>
-              </a:rPr>
-              <a:t> ?</a:t>
-            </a:r>
-          </a:p>
-        </p:txBody>
-      </p:sp>
+              </a:endParaRPr>
+            </a:p>
+            <a:p>
+              <a:r>
+                <a:rPr lang="fr-FR" sz="1050" b="1" dirty="0" err="1">
+                  <a:solidFill>
+                    <a:srgbClr val="FF0000"/>
+                  </a:solidFill>
+                </a:rPr>
+                <a:t>next</a:t>
+              </a:r>
+              <a:r>
+                <a:rPr lang="fr-FR" sz="1050" b="1" dirty="0">
+                  <a:solidFill>
+                    <a:srgbClr val="FF0000"/>
+                  </a:solidFill>
+                </a:rPr>
+                <a:t> ?</a:t>
+              </a:r>
+            </a:p>
+          </p:txBody>
+        </p:sp>
+      </p:grpSp>
       <p:sp>
         <p:nvSpPr>
           <p:cNvPr id="3" name="Flèche : droite 2">
@@ -21243,51 +20381,6 @@
             <a:r>
               <a:rPr lang="fr-FR" sz="1000" b="1" dirty="0"/>
               <a:t>Amélioration du modèle</a:t>
-            </a:r>
-          </a:p>
-        </p:txBody>
-      </p:sp>
-      <p:sp>
-        <p:nvSpPr>
-          <p:cNvPr id="4" name="ZoneTexte 3">
-            <a:extLst>
-              <a:ext uri="{FF2B5EF4-FFF2-40B4-BE49-F238E27FC236}">
-                <a16:creationId xmlns:a16="http://schemas.microsoft.com/office/drawing/2014/main" id="{25709A3F-A7F7-C13C-1868-EF0F87D5A52C}"/>
-              </a:ext>
-            </a:extLst>
-          </p:cNvPr>
-          <p:cNvSpPr txBox="1"/>
-          <p:nvPr/>
-        </p:nvSpPr>
-        <p:spPr>
-          <a:xfrm rot="1388443">
-            <a:off x="6752416" y="529595"/>
-            <a:ext cx="1481372" cy="307777"/>
-          </a:xfrm>
-          <a:prstGeom prst="rect">
-            <a:avLst/>
-          </a:prstGeom>
-          <a:noFill/>
-          <a:ln>
-            <a:solidFill>
-              <a:srgbClr val="FF0000"/>
-            </a:solidFill>
-          </a:ln>
-        </p:spPr>
-        <p:txBody>
-          <a:bodyPr wrap="square" rtlCol="0">
-            <a:spAutoFit/>
-          </a:bodyPr>
-          <a:lstStyle/>
-          <a:p>
-            <a:pPr algn="ctr"/>
-            <a:r>
-              <a:rPr lang="fr-FR" dirty="0">
-                <a:solidFill>
-                  <a:srgbClr val="FF0000"/>
-                </a:solidFill>
-              </a:rPr>
-              <a:t>A mettre à jour</a:t>
             </a:r>
           </a:p>
         </p:txBody>
@@ -21435,7 +20528,7 @@
                                           </p:stCondLst>
                                         </p:cTn>
                                         <p:tgtEl>
-                                          <p:spTgt spid="6"/>
+                                          <p:spTgt spid="3"/>
                                         </p:tgtEl>
                                         <p:attrNameLst>
                                           <p:attrName>style.visibility</p:attrName>
@@ -21448,35 +20541,26 @@
                                   </p:childTnLst>
                                 </p:cTn>
                               </p:par>
+                            </p:childTnLst>
+                          </p:cTn>
+                        </p:par>
+                      </p:childTnLst>
+                    </p:cTn>
+                  </p:par>
+                  <p:par>
+                    <p:cTn id="15" fill="hold">
+                      <p:stCondLst>
+                        <p:cond delay="indefinite"/>
+                      </p:stCondLst>
+                      <p:childTnLst>
+                        <p:par>
+                          <p:cTn id="16" fill="hold">
+                            <p:stCondLst>
+                              <p:cond delay="0"/>
+                            </p:stCondLst>
+                            <p:childTnLst>
                               <p:par>
-                                <p:cTn id="15" presetID="1" presetClass="entr" presetSubtype="0" fill="hold" grpId="0" nodeType="withEffect">
-                                  <p:stCondLst>
-                                    <p:cond delay="0"/>
-                                  </p:stCondLst>
-                                  <p:childTnLst>
-                                    <p:set>
-                                      <p:cBhvr>
-                                        <p:cTn id="16" dur="1" fill="hold">
-                                          <p:stCondLst>
-                                            <p:cond delay="0"/>
-                                          </p:stCondLst>
-                                        </p:cTn>
-                                        <p:tgtEl>
-                                          <p:spTgt spid="16"/>
-                                        </p:tgtEl>
-                                        <p:attrNameLst>
-                                          <p:attrName>style.visibility</p:attrName>
-                                        </p:attrNameLst>
-                                      </p:cBhvr>
-                                      <p:to>
-                                        <p:strVal val="visible"/>
-                                      </p:to>
-                                    </p:set>
-                                  </p:childTnLst>
-                                </p:cTn>
-                              </p:par>
-                              <p:par>
-                                <p:cTn id="17" presetID="1" presetClass="entr" presetSubtype="0" fill="hold" grpId="0" nodeType="withEffect">
+                                <p:cTn id="17" presetID="1" presetClass="entr" presetSubtype="0" fill="hold" nodeType="clickEffect">
                                   <p:stCondLst>
                                     <p:cond delay="0"/>
                                   </p:stCondLst>
@@ -21489,7 +20573,7 @@
                                           </p:stCondLst>
                                         </p:cTn>
                                         <p:tgtEl>
-                                          <p:spTgt spid="9"/>
+                                          <p:spTgt spid="5"/>
                                         </p:tgtEl>
                                         <p:attrNameLst>
                                           <p:attrName>style.visibility</p:attrName>
@@ -21516,7 +20600,7 @@
                                           </p:stCondLst>
                                         </p:cTn>
                                         <p:tgtEl>
-                                          <p:spTgt spid="3"/>
+                                          <p:spTgt spid="6"/>
                                         </p:tgtEl>
                                         <p:attrNameLst>
                                           <p:attrName>style.visibility</p:attrName>
@@ -21560,8 +20644,6 @@
       <p:bldP spid="2" grpId="0" animBg="1"/>
       <p:bldP spid="6" grpId="0" animBg="1"/>
       <p:bldP spid="11" grpId="0" animBg="1"/>
-      <p:bldP spid="16" grpId="0" animBg="1"/>
-      <p:bldP spid="9" grpId="0"/>
       <p:bldP spid="3" grpId="0" animBg="1"/>
     </p:bldLst>
   </p:timing>
@@ -21569,6 +20651,175 @@
 </file>
 
 <file path=ppt/slides/slide12.xml><?xml version="1.0" encoding="utf-8"?>
+<p:sld xmlns:a="http://schemas.openxmlformats.org/drawingml/2006/main" xmlns:r="http://schemas.openxmlformats.org/officeDocument/2006/relationships" xmlns:p="http://schemas.openxmlformats.org/presentationml/2006/main">
+  <p:cSld>
+    <p:bg>
+      <p:bgPr>
+        <a:solidFill>
+          <a:srgbClr val="00DBD0"/>
+        </a:solidFill>
+        <a:effectLst/>
+      </p:bgPr>
+    </p:bg>
+    <p:spTree>
+      <p:nvGrpSpPr>
+        <p:cNvPr id="1" name="Shape 186"/>
+        <p:cNvGrpSpPr/>
+        <p:nvPr/>
+      </p:nvGrpSpPr>
+      <p:grpSpPr>
+        <a:xfrm>
+          <a:off x="0" y="0"/>
+          <a:ext cx="0" cy="0"/>
+          <a:chOff x="0" y="0"/>
+          <a:chExt cx="0" cy="0"/>
+        </a:xfrm>
+      </p:grpSpPr>
+      <p:sp>
+        <p:nvSpPr>
+          <p:cNvPr id="187" name="Google Shape;187;p9"/>
+          <p:cNvSpPr txBox="1">
+            <a:spLocks noGrp="1"/>
+          </p:cNvSpPr>
+          <p:nvPr>
+            <p:ph type="ctrTitle" idx="4294967295"/>
+          </p:nvPr>
+        </p:nvSpPr>
+        <p:spPr>
+          <a:xfrm>
+            <a:off x="1089725" y="1970775"/>
+            <a:ext cx="6269100" cy="698400"/>
+          </a:xfrm>
+          <a:prstGeom prst="rect">
+            <a:avLst/>
+          </a:prstGeom>
+          <a:noFill/>
+          <a:ln>
+            <a:noFill/>
+          </a:ln>
+        </p:spPr>
+        <p:txBody>
+          <a:bodyPr spcFirstLastPara="1" wrap="square" lIns="91425" tIns="91425" rIns="91425" bIns="91425" anchor="t" anchorCtr="0">
+            <a:noAutofit/>
+          </a:bodyPr>
+          <a:lstStyle/>
+          <a:p>
+            <a:pPr marL="0" marR="0" lvl="0" indent="0" algn="l" rtl="0">
+              <a:lnSpc>
+                <a:spcPct val="100000"/>
+              </a:lnSpc>
+              <a:spcBef>
+                <a:spcPts val="0"/>
+              </a:spcBef>
+              <a:spcAft>
+                <a:spcPts val="0"/>
+              </a:spcAft>
+              <a:buClr>
+                <a:schemeClr val="dk1"/>
+              </a:buClr>
+              <a:buSzPts val="2800"/>
+              <a:buFont typeface="Arial"/>
+              <a:buNone/>
+            </a:pPr>
+            <a:r>
+              <a:rPr lang="fr" sz="5200">
+                <a:solidFill>
+                  <a:srgbClr val="0E3449"/>
+                </a:solidFill>
+                <a:latin typeface="Inter SemiBold"/>
+                <a:ea typeface="Inter SemiBold"/>
+                <a:cs typeface="Inter SemiBold"/>
+                <a:sym typeface="Inter SemiBold"/>
+              </a:rPr>
+              <a:t>Des</a:t>
+            </a:r>
+            <a:r>
+              <a:rPr lang="fr" sz="5200" b="0" i="0" u="none" strike="noStrike" cap="none">
+                <a:solidFill>
+                  <a:srgbClr val="0E3449"/>
+                </a:solidFill>
+                <a:latin typeface="Inter SemiBold"/>
+                <a:ea typeface="Inter SemiBold"/>
+                <a:cs typeface="Inter SemiBold"/>
+                <a:sym typeface="Inter SemiBold"/>
+              </a:rPr>
+              <a:t> questions ?</a:t>
+            </a:r>
+            <a:endParaRPr sz="5200" b="0" i="0" u="none" strike="noStrike" cap="none">
+              <a:solidFill>
+                <a:srgbClr val="0E3449"/>
+              </a:solidFill>
+              <a:latin typeface="Inter SemiBold"/>
+              <a:ea typeface="Inter SemiBold"/>
+              <a:cs typeface="Inter SemiBold"/>
+              <a:sym typeface="Inter SemiBold"/>
+            </a:endParaRPr>
+          </a:p>
+        </p:txBody>
+      </p:sp>
+      <p:pic>
+        <p:nvPicPr>
+          <p:cNvPr id="188" name="Google Shape;188;p9"/>
+          <p:cNvPicPr preferRelativeResize="0"/>
+          <p:nvPr/>
+        </p:nvPicPr>
+        <p:blipFill rotWithShape="1">
+          <a:blip r:embed="rId3">
+            <a:alphaModFix/>
+          </a:blip>
+          <a:srcRect/>
+          <a:stretch/>
+        </p:blipFill>
+        <p:spPr>
+          <a:xfrm>
+            <a:off x="3918625" y="3006625"/>
+            <a:ext cx="4599299" cy="2136876"/>
+          </a:xfrm>
+          <a:prstGeom prst="rect">
+            <a:avLst/>
+          </a:prstGeom>
+          <a:noFill/>
+          <a:ln>
+            <a:noFill/>
+          </a:ln>
+        </p:spPr>
+      </p:pic>
+      <p:pic>
+        <p:nvPicPr>
+          <p:cNvPr id="189" name="Google Shape;189;p9"/>
+          <p:cNvPicPr preferRelativeResize="0"/>
+          <p:nvPr/>
+        </p:nvPicPr>
+        <p:blipFill rotWithShape="1">
+          <a:blip r:embed="rId4">
+            <a:alphaModFix/>
+          </a:blip>
+          <a:srcRect/>
+          <a:stretch/>
+        </p:blipFill>
+        <p:spPr>
+          <a:xfrm>
+            <a:off x="1232375" y="915775"/>
+            <a:ext cx="797425" cy="839825"/>
+          </a:xfrm>
+          <a:prstGeom prst="rect">
+            <a:avLst/>
+          </a:prstGeom>
+          <a:noFill/>
+          <a:ln>
+            <a:noFill/>
+          </a:ln>
+        </p:spPr>
+      </p:pic>
+    </p:spTree>
+  </p:cSld>
+  <p:clrMapOvr>
+    <a:masterClrMapping/>
+  </p:clrMapOvr>
+</p:sld>
+</file>
+
+<file path=ppt/slides/slide13.xml><?xml version="1.0" encoding="utf-8"?>
 <p:sld xmlns:a="http://schemas.openxmlformats.org/drawingml/2006/main" xmlns:r="http://schemas.openxmlformats.org/officeDocument/2006/relationships" xmlns:p="http://schemas.openxmlformats.org/presentationml/2006/main">
   <p:cSld>
     <p:spTree>
@@ -21702,7 +20953,7 @@
 </p:sld>
 </file>
 
-<file path=ppt/slides/slide13.xml><?xml version="1.0" encoding="utf-8"?>
+<file path=ppt/slides/slide14.xml><?xml version="1.0" encoding="utf-8"?>
 <p:sld xmlns:a="http://schemas.openxmlformats.org/drawingml/2006/main" xmlns:r="http://schemas.openxmlformats.org/officeDocument/2006/relationships" xmlns:p="http://schemas.openxmlformats.org/presentationml/2006/main">
   <p:cSld>
     <p:spTree>
@@ -22040,7 +21291,7 @@
 </p:sld>
 </file>
 
-<file path=ppt/slides/slide14.xml><?xml version="1.0" encoding="utf-8"?>
+<file path=ppt/slides/slide15.xml><?xml version="1.0" encoding="utf-8"?>
 <p:sld xmlns:a="http://schemas.openxmlformats.org/drawingml/2006/main" xmlns:r="http://schemas.openxmlformats.org/officeDocument/2006/relationships" xmlns:p="http://schemas.openxmlformats.org/presentationml/2006/main">
   <p:cSld>
     <p:spTree>
@@ -22752,7 +22003,7 @@
 </p:sld>
 </file>
 
-<file path=ppt/slides/slide15.xml><?xml version="1.0" encoding="utf-8"?>
+<file path=ppt/slides/slide16.xml><?xml version="1.0" encoding="utf-8"?>
 <p:sld xmlns:a="http://schemas.openxmlformats.org/drawingml/2006/main" xmlns:r="http://schemas.openxmlformats.org/officeDocument/2006/relationships" xmlns:p="http://schemas.openxmlformats.org/presentationml/2006/main">
   <p:cSld>
     <p:spTree>
@@ -24276,7 +23527,7 @@
 </p:sld>
 </file>
 
-<file path=ppt/slides/slide16.xml><?xml version="1.0" encoding="utf-8"?>
+<file path=ppt/slides/slide17.xml><?xml version="1.0" encoding="utf-8"?>
 <p:sld xmlns:a="http://schemas.openxmlformats.org/drawingml/2006/main" xmlns:r="http://schemas.openxmlformats.org/officeDocument/2006/relationships" xmlns:p="http://schemas.openxmlformats.org/presentationml/2006/main">
   <p:cSld>
     <p:spTree>
@@ -25451,175 +24702,6 @@
 </p:sld>
 </file>
 
-<file path=ppt/slides/slide17.xml><?xml version="1.0" encoding="utf-8"?>
-<p:sld xmlns:a="http://schemas.openxmlformats.org/drawingml/2006/main" xmlns:r="http://schemas.openxmlformats.org/officeDocument/2006/relationships" xmlns:p="http://schemas.openxmlformats.org/presentationml/2006/main">
-  <p:cSld>
-    <p:bg>
-      <p:bgPr>
-        <a:solidFill>
-          <a:srgbClr val="00DBD0"/>
-        </a:solidFill>
-        <a:effectLst/>
-      </p:bgPr>
-    </p:bg>
-    <p:spTree>
-      <p:nvGrpSpPr>
-        <p:cNvPr id="1" name="Shape 186"/>
-        <p:cNvGrpSpPr/>
-        <p:nvPr/>
-      </p:nvGrpSpPr>
-      <p:grpSpPr>
-        <a:xfrm>
-          <a:off x="0" y="0"/>
-          <a:ext cx="0" cy="0"/>
-          <a:chOff x="0" y="0"/>
-          <a:chExt cx="0" cy="0"/>
-        </a:xfrm>
-      </p:grpSpPr>
-      <p:sp>
-        <p:nvSpPr>
-          <p:cNvPr id="187" name="Google Shape;187;p9"/>
-          <p:cNvSpPr txBox="1">
-            <a:spLocks noGrp="1"/>
-          </p:cNvSpPr>
-          <p:nvPr>
-            <p:ph type="ctrTitle" idx="4294967295"/>
-          </p:nvPr>
-        </p:nvSpPr>
-        <p:spPr>
-          <a:xfrm>
-            <a:off x="1089725" y="1970775"/>
-            <a:ext cx="6269100" cy="698400"/>
-          </a:xfrm>
-          <a:prstGeom prst="rect">
-            <a:avLst/>
-          </a:prstGeom>
-          <a:noFill/>
-          <a:ln>
-            <a:noFill/>
-          </a:ln>
-        </p:spPr>
-        <p:txBody>
-          <a:bodyPr spcFirstLastPara="1" wrap="square" lIns="91425" tIns="91425" rIns="91425" bIns="91425" anchor="t" anchorCtr="0">
-            <a:noAutofit/>
-          </a:bodyPr>
-          <a:lstStyle/>
-          <a:p>
-            <a:pPr marL="0" marR="0" lvl="0" indent="0" algn="l" rtl="0">
-              <a:lnSpc>
-                <a:spcPct val="100000"/>
-              </a:lnSpc>
-              <a:spcBef>
-                <a:spcPts val="0"/>
-              </a:spcBef>
-              <a:spcAft>
-                <a:spcPts val="0"/>
-              </a:spcAft>
-              <a:buClr>
-                <a:schemeClr val="dk1"/>
-              </a:buClr>
-              <a:buSzPts val="2800"/>
-              <a:buFont typeface="Arial"/>
-              <a:buNone/>
-            </a:pPr>
-            <a:r>
-              <a:rPr lang="fr" sz="5200">
-                <a:solidFill>
-                  <a:srgbClr val="0E3449"/>
-                </a:solidFill>
-                <a:latin typeface="Inter SemiBold"/>
-                <a:ea typeface="Inter SemiBold"/>
-                <a:cs typeface="Inter SemiBold"/>
-                <a:sym typeface="Inter SemiBold"/>
-              </a:rPr>
-              <a:t>Des</a:t>
-            </a:r>
-            <a:r>
-              <a:rPr lang="fr" sz="5200" b="0" i="0" u="none" strike="noStrike" cap="none">
-                <a:solidFill>
-                  <a:srgbClr val="0E3449"/>
-                </a:solidFill>
-                <a:latin typeface="Inter SemiBold"/>
-                <a:ea typeface="Inter SemiBold"/>
-                <a:cs typeface="Inter SemiBold"/>
-                <a:sym typeface="Inter SemiBold"/>
-              </a:rPr>
-              <a:t> questions ?</a:t>
-            </a:r>
-            <a:endParaRPr sz="5200" b="0" i="0" u="none" strike="noStrike" cap="none">
-              <a:solidFill>
-                <a:srgbClr val="0E3449"/>
-              </a:solidFill>
-              <a:latin typeface="Inter SemiBold"/>
-              <a:ea typeface="Inter SemiBold"/>
-              <a:cs typeface="Inter SemiBold"/>
-              <a:sym typeface="Inter SemiBold"/>
-            </a:endParaRPr>
-          </a:p>
-        </p:txBody>
-      </p:sp>
-      <p:pic>
-        <p:nvPicPr>
-          <p:cNvPr id="188" name="Google Shape;188;p9"/>
-          <p:cNvPicPr preferRelativeResize="0"/>
-          <p:nvPr/>
-        </p:nvPicPr>
-        <p:blipFill rotWithShape="1">
-          <a:blip r:embed="rId3">
-            <a:alphaModFix/>
-          </a:blip>
-          <a:srcRect/>
-          <a:stretch/>
-        </p:blipFill>
-        <p:spPr>
-          <a:xfrm>
-            <a:off x="3918625" y="3006625"/>
-            <a:ext cx="4599299" cy="2136876"/>
-          </a:xfrm>
-          <a:prstGeom prst="rect">
-            <a:avLst/>
-          </a:prstGeom>
-          <a:noFill/>
-          <a:ln>
-            <a:noFill/>
-          </a:ln>
-        </p:spPr>
-      </p:pic>
-      <p:pic>
-        <p:nvPicPr>
-          <p:cNvPr id="189" name="Google Shape;189;p9"/>
-          <p:cNvPicPr preferRelativeResize="0"/>
-          <p:nvPr/>
-        </p:nvPicPr>
-        <p:blipFill rotWithShape="1">
-          <a:blip r:embed="rId4">
-            <a:alphaModFix/>
-          </a:blip>
-          <a:srcRect/>
-          <a:stretch/>
-        </p:blipFill>
-        <p:spPr>
-          <a:xfrm>
-            <a:off x="1232375" y="915775"/>
-            <a:ext cx="797425" cy="839825"/>
-          </a:xfrm>
-          <a:prstGeom prst="rect">
-            <a:avLst/>
-          </a:prstGeom>
-          <a:noFill/>
-          <a:ln>
-            <a:noFill/>
-          </a:ln>
-        </p:spPr>
-      </p:pic>
-    </p:spTree>
-  </p:cSld>
-  <p:clrMapOvr>
-    <a:masterClrMapping/>
-  </p:clrMapOvr>
-</p:sld>
-</file>
-
 <file path=ppt/slides/slide2.xml><?xml version="1.0" encoding="utf-8"?>
 <p:sld xmlns:a="http://schemas.openxmlformats.org/drawingml/2006/main" xmlns:r="http://schemas.openxmlformats.org/officeDocument/2006/relationships" xmlns:p="http://schemas.openxmlformats.org/presentationml/2006/main">
   <p:cSld>
@@ -27542,9 +26624,6 @@
                     <p:cTn id="3" fill="hold">
                       <p:stCondLst>
                         <p:cond delay="indefinite"/>
-                        <p:cond evt="onBegin" delay="0">
-                          <p:tn val="2"/>
-                        </p:cond>
                       </p:stCondLst>
                       <p:childTnLst>
                         <p:par>
@@ -27554,7 +26633,7 @@
                             </p:stCondLst>
                             <p:childTnLst>
                               <p:par>
-                                <p:cTn id="5" presetID="1" presetClass="entr" presetSubtype="0" fill="hold" grpId="0" nodeType="withEffect">
+                                <p:cTn id="5" presetID="1" presetClass="entr" presetSubtype="0" fill="hold" grpId="0" nodeType="clickEffect">
                                   <p:stCondLst>
                                     <p:cond delay="0"/>
                                   </p:stCondLst>
@@ -27567,7 +26646,11 @@
                                           </p:stCondLst>
                                         </p:cTn>
                                         <p:tgtEl>
-                                          <p:spTgt spid="15"/>
+                                          <p:spTgt spid="73">
+                                            <p:txEl>
+                                              <p:pRg st="0" end="0"/>
+                                            </p:txEl>
+                                          </p:spTgt>
                                         </p:tgtEl>
                                         <p:attrNameLst>
                                           <p:attrName>style.visibility</p:attrName>
@@ -27612,7 +26695,7 @@
                                           </p:stCondLst>
                                         </p:cTn>
                                         <p:tgtEl>
-                                          <p:spTgt spid="22"/>
+                                          <p:spTgt spid="19"/>
                                         </p:tgtEl>
                                         <p:attrNameLst>
                                           <p:attrName>style.visibility</p:attrName>
@@ -27639,7 +26722,61 @@
                                           </p:stCondLst>
                                         </p:cTn>
                                         <p:tgtEl>
-                                          <p:spTgt spid="20"/>
+                                          <p:spTgt spid="10"/>
+                                        </p:tgtEl>
+                                        <p:attrNameLst>
+                                          <p:attrName>style.visibility</p:attrName>
+                                        </p:attrNameLst>
+                                      </p:cBhvr>
+                                      <p:to>
+                                        <p:strVal val="visible"/>
+                                      </p:to>
+                                    </p:set>
+                                  </p:childTnLst>
+                                </p:cTn>
+                              </p:par>
+                              <p:par>
+                                <p:cTn id="13" presetID="1" presetClass="entr" presetSubtype="0" fill="hold" grpId="0" nodeType="withEffect">
+                                  <p:stCondLst>
+                                    <p:cond delay="0"/>
+                                  </p:stCondLst>
+                                  <p:childTnLst>
+                                    <p:set>
+                                      <p:cBhvr>
+                                        <p:cTn id="14" dur="1" fill="hold">
+                                          <p:stCondLst>
+                                            <p:cond delay="0"/>
+                                          </p:stCondLst>
+                                        </p:cTn>
+                                        <p:tgtEl>
+                                          <p:spTgt spid="15"/>
+                                        </p:tgtEl>
+                                        <p:attrNameLst>
+                                          <p:attrName>style.visibility</p:attrName>
+                                        </p:attrNameLst>
+                                      </p:cBhvr>
+                                      <p:to>
+                                        <p:strVal val="visible"/>
+                                      </p:to>
+                                    </p:set>
+                                  </p:childTnLst>
+                                </p:cTn>
+                              </p:par>
+                              <p:par>
+                                <p:cTn id="15" presetID="1" presetClass="entr" presetSubtype="0" fill="hold" grpId="0" nodeType="withEffect">
+                                  <p:stCondLst>
+                                    <p:cond delay="0"/>
+                                  </p:stCondLst>
+                                  <p:childTnLst>
+                                    <p:set>
+                                      <p:cBhvr>
+                                        <p:cTn id="16" dur="1" fill="hold">
+                                          <p:stCondLst>
+                                            <p:cond delay="0"/>
+                                          </p:stCondLst>
+                                        </p:cTn>
+                                        <p:tgtEl>
+                                          <p:spTgt spid="17"/>
                                         </p:tgtEl>
                                         <p:attrNameLst>
                                           <p:attrName>style.visibility</p:attrName>
@@ -27659,26 +26796,107 @@
                     </p:cTn>
                   </p:par>
                   <p:par>
-                    <p:cTn id="13" fill="hold">
+                    <p:cTn id="17" fill="hold">
                       <p:stCondLst>
                         <p:cond delay="indefinite"/>
                       </p:stCondLst>
                       <p:childTnLst>
                         <p:par>
-                          <p:cTn id="14" fill="hold">
+                          <p:cTn id="18" fill="hold">
                             <p:stCondLst>
                               <p:cond delay="0"/>
                             </p:stCondLst>
                             <p:childTnLst>
                               <p:par>
-                                <p:cTn id="15" presetID="1" presetClass="entr" presetSubtype="0" fill="hold" grpId="0" nodeType="clickEffect">
+                                <p:cTn id="19" presetID="1" presetClass="entr" presetSubtype="0" fill="hold" grpId="0" nodeType="clickEffect">
                                   <p:stCondLst>
                                     <p:cond delay="0"/>
                                   </p:stCondLst>
                                   <p:childTnLst>
                                     <p:set>
                                       <p:cBhvr>
-                                        <p:cTn id="16" dur="1" fill="hold">
+                                        <p:cTn id="20" dur="1" fill="hold">
+                                          <p:stCondLst>
+                                            <p:cond delay="0"/>
+                                          </p:stCondLst>
+                                        </p:cTn>
+                                        <p:tgtEl>
+                                          <p:spTgt spid="16"/>
+                                        </p:tgtEl>
+                                        <p:attrNameLst>
+                                          <p:attrName>style.visibility</p:attrName>
+                                        </p:attrNameLst>
+                                      </p:cBhvr>
+                                      <p:to>
+                                        <p:strVal val="visible"/>
+                                      </p:to>
+                                    </p:set>
+                                  </p:childTnLst>
+                                </p:cTn>
+                              </p:par>
+                              <p:par>
+                                <p:cTn id="21" presetID="1" presetClass="entr" presetSubtype="0" fill="hold" grpId="0" nodeType="withEffect">
+                                  <p:stCondLst>
+                                    <p:cond delay="0"/>
+                                  </p:stCondLst>
+                                  <p:childTnLst>
+                                    <p:set>
+                                      <p:cBhvr>
+                                        <p:cTn id="22" dur="1" fill="hold">
+                                          <p:stCondLst>
+                                            <p:cond delay="0"/>
+                                          </p:stCondLst>
+                                        </p:cTn>
+                                        <p:tgtEl>
+                                          <p:spTgt spid="20"/>
+                                        </p:tgtEl>
+                                        <p:attrNameLst>
+                                          <p:attrName>style.visibility</p:attrName>
+                                        </p:attrNameLst>
+                                      </p:cBhvr>
+                                      <p:to>
+                                        <p:strVal val="visible"/>
+                                      </p:to>
+                                    </p:set>
+                                  </p:childTnLst>
+                                </p:cTn>
+                              </p:par>
+                              <p:par>
+                                <p:cTn id="23" presetID="1" presetClass="entr" presetSubtype="0" fill="hold" grpId="0" nodeType="withEffect">
+                                  <p:stCondLst>
+                                    <p:cond delay="0"/>
+                                  </p:stCondLst>
+                                  <p:childTnLst>
+                                    <p:set>
+                                      <p:cBhvr>
+                                        <p:cTn id="24" dur="1" fill="hold">
+                                          <p:stCondLst>
+                                            <p:cond delay="0"/>
+                                          </p:stCondLst>
+                                        </p:cTn>
+                                        <p:tgtEl>
+                                          <p:spTgt spid="22"/>
+                                        </p:tgtEl>
+                                        <p:attrNameLst>
+                                          <p:attrName>style.visibility</p:attrName>
+                                        </p:attrNameLst>
+                                      </p:cBhvr>
+                                      <p:to>
+                                        <p:strVal val="visible"/>
+                                      </p:to>
+                                    </p:set>
+                                  </p:childTnLst>
+                                </p:cTn>
+                              </p:par>
+                              <p:par>
+                                <p:cTn id="25" presetID="1" presetClass="entr" presetSubtype="0" fill="hold" grpId="0" nodeType="withEffect">
+                                  <p:stCondLst>
+                                    <p:cond delay="0"/>
+                                  </p:stCondLst>
+                                  <p:childTnLst>
+                                    <p:set>
+                                      <p:cBhvr>
+                                        <p:cTn id="26" dur="1" fill="hold">
                                           <p:stCondLst>
                                             <p:cond delay="0"/>
                                           </p:stCondLst>
@@ -27698,14 +26916,14 @@
                                 </p:cTn>
                               </p:par>
                               <p:par>
-                                <p:cTn id="17" presetID="1" presetClass="entr" presetSubtype="0" fill="hold" grpId="0" nodeType="withEffect">
+                                <p:cTn id="27" presetID="1" presetClass="entr" presetSubtype="0" fill="hold" grpId="0" nodeType="withEffect">
                                   <p:stCondLst>
                                     <p:cond delay="0"/>
                                   </p:stCondLst>
                                   <p:childTnLst>
                                     <p:set>
                                       <p:cBhvr>
-                                        <p:cTn id="18" dur="1" fill="hold">
+                                        <p:cTn id="28" dur="1" fill="hold">
                                           <p:stCondLst>
                                             <p:cond delay="0"/>
                                           </p:stCondLst>
@@ -27753,6 +26971,11 @@
     </p:tnLst>
     <p:bldLst>
       <p:bldP spid="15" grpId="0" animBg="1"/>
+      <p:bldP spid="73" grpId="0" build="p"/>
+      <p:bldP spid="10" grpId="0"/>
+      <p:bldP spid="16" grpId="0" animBg="1"/>
+      <p:bldP spid="17" grpId="0" animBg="1"/>
+      <p:bldP spid="19" grpId="0" animBg="1"/>
       <p:bldP spid="20" grpId="0"/>
       <p:bldP spid="22" grpId="0" animBg="1"/>
       <p:bldP spid="23" grpId="0" animBg="1"/>
@@ -31408,7 +30631,7 @@
         <p:spPr>
           <a:xfrm>
             <a:off x="6374912" y="936409"/>
-            <a:ext cx="2310321" cy="393656"/>
+            <a:ext cx="2310321" cy="348427"/>
           </a:xfrm>
           <a:custGeom>
             <a:avLst/>
@@ -31522,7 +30745,7 @@
               <a:buNone/>
             </a:pPr>
             <a:r>
-              <a:rPr lang="fr-FR" sz="900" b="1" dirty="0"/>
+              <a:rPr lang="fr-FR" sz="800" b="1" dirty="0"/>
               <a:t>API et</a:t>
             </a:r>
           </a:p>
@@ -31531,7 +30754,7 @@
               <a:buNone/>
             </a:pPr>
             <a:r>
-              <a:rPr lang="fr-FR" sz="900" b="1" dirty="0"/>
+              <a:rPr lang="fr-FR" sz="800" b="1" dirty="0"/>
               <a:t>Application</a:t>
             </a:r>
           </a:p>
@@ -31552,7 +30775,7 @@
         <p:spPr>
           <a:xfrm>
             <a:off x="4334095" y="936409"/>
-            <a:ext cx="2310321" cy="393656"/>
+            <a:ext cx="2310321" cy="348427"/>
           </a:xfrm>
           <a:custGeom>
             <a:avLst/>
@@ -31675,7 +30898,7 @@
               <a:buNone/>
             </a:pPr>
             <a:r>
-              <a:rPr lang="fr-FR" sz="900" b="1" dirty="0"/>
+              <a:rPr lang="fr-FR" sz="800" b="1" dirty="0"/>
               <a:t>Entraînement et </a:t>
             </a:r>
           </a:p>
@@ -31693,10 +30916,10 @@
               <a:buNone/>
             </a:pPr>
             <a:r>
-              <a:rPr lang="fr-FR" sz="900" b="1" dirty="0"/>
+              <a:rPr lang="fr-FR" sz="800" b="1" dirty="0"/>
               <a:t>suivi du modèle</a:t>
             </a:r>
-            <a:endParaRPr lang="fr-FR" sz="900" kern="1200" dirty="0"/>
+            <a:endParaRPr lang="fr-FR" sz="800" kern="1200" dirty="0"/>
           </a:p>
         </p:txBody>
       </p:sp>
@@ -31715,7 +30938,7 @@
         <p:spPr>
           <a:xfrm>
             <a:off x="2293137" y="936409"/>
-            <a:ext cx="2310321" cy="393656"/>
+            <a:ext cx="2310321" cy="348427"/>
           </a:xfrm>
           <a:custGeom>
             <a:avLst/>
@@ -31829,7 +31052,7 @@
               <a:buNone/>
             </a:pPr>
             <a:r>
-              <a:rPr lang="fr-FR" sz="900" b="1"/>
+              <a:rPr lang="fr-FR" sz="800" b="1"/>
               <a:t>Préparation et </a:t>
             </a:r>
           </a:p>
@@ -31838,10 +31061,10 @@
               <a:buNone/>
             </a:pPr>
             <a:r>
-              <a:rPr lang="fr-FR" sz="900" b="1"/>
+              <a:rPr lang="fr-FR" sz="800" b="1"/>
               <a:t>nettoyage</a:t>
             </a:r>
-            <a:endParaRPr lang="fr-FR" sz="900" b="1" dirty="0"/>
+            <a:endParaRPr lang="fr-FR" sz="800" b="1" dirty="0"/>
           </a:p>
         </p:txBody>
       </p:sp>
@@ -31956,8 +31179,8 @@
         </p:blipFill>
         <p:spPr bwMode="auto">
           <a:xfrm>
-            <a:off x="5548423" y="2495311"/>
-            <a:ext cx="821560" cy="593349"/>
+            <a:off x="5550811" y="2524266"/>
+            <a:ext cx="781468" cy="564394"/>
           </a:xfrm>
           <a:prstGeom prst="rect">
             <a:avLst/>
@@ -32003,8 +31226,8 @@
         </p:blipFill>
         <p:spPr bwMode="auto">
           <a:xfrm>
-            <a:off x="4549208" y="2694398"/>
-            <a:ext cx="1060915" cy="237484"/>
+            <a:off x="4563276" y="2705986"/>
+            <a:ext cx="1009143" cy="225895"/>
           </a:xfrm>
           <a:prstGeom prst="rect">
             <a:avLst/>
@@ -32036,7 +31259,7 @@
         <p:spPr>
           <a:xfrm>
             <a:off x="252179" y="936409"/>
-            <a:ext cx="2310321" cy="393656"/>
+            <a:ext cx="2310321" cy="348427"/>
           </a:xfrm>
           <a:custGeom>
             <a:avLst/>
@@ -32159,10 +31382,10 @@
               <a:buNone/>
             </a:pPr>
             <a:r>
-              <a:rPr lang="fr-FR" sz="900" b="1" dirty="0"/>
+              <a:rPr lang="fr-FR" sz="800" b="1" dirty="0"/>
               <a:t>Collecte des données</a:t>
             </a:r>
-            <a:endParaRPr lang="fr-FR" sz="900" kern="1200" dirty="0"/>
+            <a:endParaRPr lang="fr-FR" sz="800" kern="1200" dirty="0"/>
           </a:p>
         </p:txBody>
       </p:sp>
@@ -32496,16 +31719,18 @@
         </p:nvSpPr>
         <p:spPr>
           <a:xfrm>
-            <a:off x="4519292" y="2618880"/>
+            <a:off x="4519292" y="2628306"/>
             <a:ext cx="1796425" cy="1870262"/>
           </a:xfrm>
           <a:prstGeom prst="roundRect">
-            <a:avLst/>
+            <a:avLst>
+              <a:gd name="adj" fmla="val 10895"/>
+            </a:avLst>
           </a:prstGeom>
           <a:noFill/>
           <a:ln w="9525">
             <a:solidFill>
-              <a:srgbClr val="FFC000"/>
+              <a:srgbClr val="FF0080"/>
             </a:solidFill>
             <a:prstDash val="dash"/>
           </a:ln>
@@ -32535,498 +31760,389 @@
           </a:p>
         </p:txBody>
       </p:sp>
-      <p:grpSp>
-        <p:nvGrpSpPr>
-          <p:cNvPr id="9" name="Groupe 8">
+      <p:pic>
+        <p:nvPicPr>
+          <p:cNvPr id="1028" name="Picture 4">
             <a:extLst>
               <a:ext uri="{FF2B5EF4-FFF2-40B4-BE49-F238E27FC236}">
-                <a16:creationId xmlns:a16="http://schemas.microsoft.com/office/drawing/2014/main" id="{1942901F-9902-04A0-3544-E014B88B92FF}"/>
+                <a16:creationId xmlns:a16="http://schemas.microsoft.com/office/drawing/2014/main" id="{D0C03EA7-EAD6-1A33-21AE-920B9121582F}"/>
               </a:ext>
             </a:extLst>
           </p:cNvPr>
-          <p:cNvGrpSpPr/>
+          <p:cNvPicPr>
+            <a:picLocks noChangeAspect="1" noChangeArrowheads="1"/>
+          </p:cNvPicPr>
           <p:nvPr/>
-        </p:nvGrpSpPr>
-        <p:grpSpPr>
-          <a:xfrm>
-            <a:off x="246312" y="1458686"/>
-            <a:ext cx="2046825" cy="3272971"/>
-            <a:chOff x="246312" y="1458686"/>
-            <a:chExt cx="2046825" cy="3272971"/>
-          </a:xfrm>
-        </p:grpSpPr>
-        <p:pic>
-          <p:nvPicPr>
-            <p:cNvPr id="1026" name="Picture 2">
-              <a:extLst>
-                <a:ext uri="{FF2B5EF4-FFF2-40B4-BE49-F238E27FC236}">
-                  <a16:creationId xmlns:a16="http://schemas.microsoft.com/office/drawing/2014/main" id="{923FE2F2-F305-A7CE-975B-2A2BA912E4B7}"/>
-                </a:ext>
-              </a:extLst>
-            </p:cNvPr>
-            <p:cNvPicPr>
-              <a:picLocks noChangeAspect="1" noChangeArrowheads="1"/>
-            </p:cNvPicPr>
-            <p:nvPr/>
-          </p:nvPicPr>
-          <p:blipFill rotWithShape="1">
-            <a:blip r:embed="rId8">
-              <a:extLst>
-                <a:ext uri="{28A0092B-C50C-407E-A947-70E740481C1C}">
-                  <a14:useLocalDpi xmlns:a14="http://schemas.microsoft.com/office/drawing/2010/main" val="0"/>
-                </a:ext>
-              </a:extLst>
-            </a:blip>
-            <a:srcRect l="14585" t="12264" r="16331" b="16417"/>
-            <a:stretch>
-              <a:fillRect/>
-            </a:stretch>
-          </p:blipFill>
-          <p:spPr bwMode="auto">
-            <a:xfrm>
-              <a:off x="1765455" y="1652962"/>
-              <a:ext cx="381317" cy="393656"/>
-            </a:xfrm>
-            <a:prstGeom prst="rect">
-              <a:avLst/>
-            </a:prstGeom>
-            <a:noFill/>
+        </p:nvPicPr>
+        <p:blipFill rotWithShape="1">
+          <a:blip r:embed="rId8">
             <a:extLst>
-              <a:ext uri="{909E8E84-426E-40DD-AFC4-6F175D3DCCD1}">
-                <a14:hiddenFill xmlns:a14="http://schemas.microsoft.com/office/drawing/2010/main">
-                  <a:solidFill>
-                    <a:srgbClr val="FFFFFF"/>
-                  </a:solidFill>
-                </a14:hiddenFill>
+              <a:ext uri="{28A0092B-C50C-407E-A947-70E740481C1C}">
+                <a14:useLocalDpi xmlns:a14="http://schemas.microsoft.com/office/drawing/2010/main" val="0"/>
               </a:ext>
             </a:extLst>
-          </p:spPr>
-        </p:pic>
-        <p:pic>
-          <p:nvPicPr>
-            <p:cNvPr id="1028" name="Picture 4">
-              <a:extLst>
-                <a:ext uri="{FF2B5EF4-FFF2-40B4-BE49-F238E27FC236}">
-                  <a16:creationId xmlns:a16="http://schemas.microsoft.com/office/drawing/2014/main" id="{D0C03EA7-EAD6-1A33-21AE-920B9121582F}"/>
-                </a:ext>
-              </a:extLst>
-            </p:cNvPr>
-            <p:cNvPicPr>
-              <a:picLocks noChangeAspect="1" noChangeArrowheads="1"/>
-            </p:cNvPicPr>
-            <p:nvPr/>
-          </p:nvPicPr>
-          <p:blipFill rotWithShape="1">
-            <a:blip r:embed="rId9">
-              <a:extLst>
-                <a:ext uri="{28A0092B-C50C-407E-A947-70E740481C1C}">
-                  <a14:useLocalDpi xmlns:a14="http://schemas.microsoft.com/office/drawing/2010/main" val="0"/>
-                </a:ext>
-              </a:extLst>
-            </a:blip>
-            <a:srcRect l="11432" t="21688" r="13291" b="23045"/>
-            <a:stretch>
-              <a:fillRect/>
-            </a:stretch>
-          </p:blipFill>
-          <p:spPr bwMode="auto">
-            <a:xfrm>
-              <a:off x="583256" y="1682497"/>
-              <a:ext cx="792868" cy="332636"/>
-            </a:xfrm>
-            <a:prstGeom prst="rect">
-              <a:avLst/>
-            </a:prstGeom>
-            <a:noFill/>
+          </a:blip>
+          <a:srcRect l="11432" t="21688" r="13291" b="23045"/>
+          <a:stretch>
+            <a:fillRect/>
+          </a:stretch>
+        </p:blipFill>
+        <p:spPr bwMode="auto">
+          <a:xfrm>
+            <a:off x="626281" y="1716520"/>
+            <a:ext cx="653142" cy="274016"/>
+          </a:xfrm>
+          <a:prstGeom prst="rect">
+            <a:avLst/>
+          </a:prstGeom>
+          <a:noFill/>
+          <a:extLst>
+            <a:ext uri="{909E8E84-426E-40DD-AFC4-6F175D3DCCD1}">
+              <a14:hiddenFill xmlns:a14="http://schemas.microsoft.com/office/drawing/2010/main">
+                <a:solidFill>
+                  <a:srgbClr val="FFFFFF"/>
+                </a:solidFill>
+              </a14:hiddenFill>
+            </a:ext>
+          </a:extLst>
+        </p:spPr>
+      </p:pic>
+      <p:pic>
+        <p:nvPicPr>
+          <p:cNvPr id="1030" name="Picture 6">
             <a:extLst>
-              <a:ext uri="{909E8E84-426E-40DD-AFC4-6F175D3DCCD1}">
-                <a14:hiddenFill xmlns:a14="http://schemas.microsoft.com/office/drawing/2010/main">
-                  <a:solidFill>
-                    <a:srgbClr val="FFFFFF"/>
-                  </a:solidFill>
-                </a14:hiddenFill>
+              <a:ext uri="{FF2B5EF4-FFF2-40B4-BE49-F238E27FC236}">
+                <a16:creationId xmlns:a16="http://schemas.microsoft.com/office/drawing/2014/main" id="{2941D76B-6840-C572-907F-F3680B66EBF7}"/>
               </a:ext>
             </a:extLst>
-          </p:spPr>
-        </p:pic>
-        <p:pic>
-          <p:nvPicPr>
-            <p:cNvPr id="1030" name="Picture 6">
-              <a:extLst>
-                <a:ext uri="{FF2B5EF4-FFF2-40B4-BE49-F238E27FC236}">
-                  <a16:creationId xmlns:a16="http://schemas.microsoft.com/office/drawing/2014/main" id="{2941D76B-6840-C572-907F-F3680B66EBF7}"/>
-                </a:ext>
-              </a:extLst>
-            </p:cNvPr>
-            <p:cNvPicPr>
-              <a:picLocks noChangeAspect="1" noChangeArrowheads="1"/>
-            </p:cNvPicPr>
-            <p:nvPr/>
-          </p:nvPicPr>
-          <p:blipFill rotWithShape="1">
-            <a:blip r:embed="rId10">
-              <a:extLst>
-                <a:ext uri="{28A0092B-C50C-407E-A947-70E740481C1C}">
-                  <a14:useLocalDpi xmlns:a14="http://schemas.microsoft.com/office/drawing/2010/main" val="0"/>
-                </a:ext>
-              </a:extLst>
-            </a:blip>
-            <a:srcRect l="30624" r="31046" b="34033"/>
-            <a:stretch>
-              <a:fillRect/>
-            </a:stretch>
-          </p:blipFill>
-          <p:spPr bwMode="auto">
-            <a:xfrm>
-              <a:off x="756608" y="2258501"/>
-              <a:ext cx="386389" cy="485958"/>
-            </a:xfrm>
-            <a:prstGeom prst="rect">
-              <a:avLst/>
-            </a:prstGeom>
-            <a:noFill/>
+          </p:cNvPr>
+          <p:cNvPicPr>
+            <a:picLocks noChangeAspect="1" noChangeArrowheads="1"/>
+          </p:cNvPicPr>
+          <p:nvPr/>
+        </p:nvPicPr>
+        <p:blipFill rotWithShape="1">
+          <a:blip r:embed="rId9">
             <a:extLst>
-              <a:ext uri="{909E8E84-426E-40DD-AFC4-6F175D3DCCD1}">
-                <a14:hiddenFill xmlns:a14="http://schemas.microsoft.com/office/drawing/2010/main">
-                  <a:solidFill>
-                    <a:srgbClr val="FFFFFF"/>
-                  </a:solidFill>
-                </a14:hiddenFill>
+              <a:ext uri="{28A0092B-C50C-407E-A947-70E740481C1C}">
+                <a14:useLocalDpi xmlns:a14="http://schemas.microsoft.com/office/drawing/2010/main" val="0"/>
               </a:ext>
             </a:extLst>
-          </p:spPr>
-        </p:pic>
-        <p:cxnSp>
-          <p:nvCxnSpPr>
-            <p:cNvPr id="28" name="Connecteur droit 27">
-              <a:extLst>
-                <a:ext uri="{FF2B5EF4-FFF2-40B4-BE49-F238E27FC236}">
-                  <a16:creationId xmlns:a16="http://schemas.microsoft.com/office/drawing/2014/main" id="{66A68388-D1A7-6AC6-5F1F-65E1A6494D4A}"/>
-                </a:ext>
-              </a:extLst>
-            </p:cNvPr>
-            <p:cNvCxnSpPr/>
-            <p:nvPr/>
-          </p:nvCxnSpPr>
-          <p:spPr>
-            <a:xfrm>
-              <a:off x="2293137" y="1458686"/>
-              <a:ext cx="0" cy="3272971"/>
-            </a:xfrm>
-            <a:prstGeom prst="line">
-              <a:avLst/>
-            </a:prstGeom>
-            <a:ln w="19050">
-              <a:solidFill>
-                <a:schemeClr val="bg1">
-                  <a:lumMod val="75000"/>
-                </a:schemeClr>
-              </a:solidFill>
-              <a:prstDash val="dash"/>
-            </a:ln>
-          </p:spPr>
-          <p:style>
-            <a:lnRef idx="1">
-              <a:schemeClr val="dk1"/>
-            </a:lnRef>
-            <a:fillRef idx="0">
-              <a:schemeClr val="dk1"/>
-            </a:fillRef>
-            <a:effectRef idx="0">
-              <a:schemeClr val="dk1"/>
-            </a:effectRef>
-            <a:fontRef idx="minor">
-              <a:schemeClr val="tx1"/>
-            </a:fontRef>
-          </p:style>
-        </p:cxnSp>
-        <p:sp>
-          <p:nvSpPr>
-            <p:cNvPr id="58" name="ZoneTexte 57">
-              <a:extLst>
-                <a:ext uri="{FF2B5EF4-FFF2-40B4-BE49-F238E27FC236}">
-                  <a16:creationId xmlns:a16="http://schemas.microsoft.com/office/drawing/2014/main" id="{42C67AD7-C645-5367-3E47-6D6A996C5FE8}"/>
-                </a:ext>
-              </a:extLst>
-            </p:cNvPr>
-            <p:cNvSpPr txBox="1"/>
-            <p:nvPr/>
-          </p:nvSpPr>
-          <p:spPr>
-            <a:xfrm>
-              <a:off x="246312" y="2674581"/>
-              <a:ext cx="1390212" cy="200055"/>
-            </a:xfrm>
-            <a:prstGeom prst="rect">
-              <a:avLst/>
-            </a:prstGeom>
-            <a:noFill/>
-          </p:spPr>
-          <p:txBody>
-            <a:bodyPr wrap="square" rtlCol="0">
-              <a:spAutoFit/>
-            </a:bodyPr>
-            <a:lstStyle/>
-            <a:p>
-              <a:pPr algn="ctr"/>
-              <a:r>
-                <a:rPr lang="fr-FR" sz="700" b="1" dirty="0"/>
-                <a:t>USGS / Landsat</a:t>
-              </a:r>
-            </a:p>
-          </p:txBody>
-        </p:sp>
-        <p:pic>
-          <p:nvPicPr>
-            <p:cNvPr id="65" name="Picture 6">
-              <a:extLst>
-                <a:ext uri="{FF2B5EF4-FFF2-40B4-BE49-F238E27FC236}">
-                  <a16:creationId xmlns:a16="http://schemas.microsoft.com/office/drawing/2014/main" id="{976AB5B9-1D61-B29C-C9DE-9051A31E8E27}"/>
-                </a:ext>
-              </a:extLst>
-            </p:cNvPr>
-            <p:cNvPicPr>
-              <a:picLocks noChangeAspect="1" noChangeArrowheads="1"/>
-            </p:cNvPicPr>
-            <p:nvPr/>
-          </p:nvPicPr>
-          <p:blipFill rotWithShape="1">
-            <a:blip r:embed="rId10">
-              <a:extLst>
-                <a:ext uri="{28A0092B-C50C-407E-A947-70E740481C1C}">
-                  <a14:useLocalDpi xmlns:a14="http://schemas.microsoft.com/office/drawing/2010/main" val="0"/>
-                </a:ext>
-              </a:extLst>
-            </a:blip>
-            <a:srcRect l="33049" r="31047" b="34033"/>
-            <a:stretch>
-              <a:fillRect/>
-            </a:stretch>
-          </p:blipFill>
-          <p:spPr bwMode="auto">
-            <a:xfrm>
-              <a:off x="781055" y="2922466"/>
-              <a:ext cx="361938" cy="485958"/>
-            </a:xfrm>
-            <a:prstGeom prst="rect">
-              <a:avLst/>
-            </a:prstGeom>
-            <a:noFill/>
+          </a:blip>
+          <a:srcRect l="30624" r="31046" b="34033"/>
+          <a:stretch>
+            <a:fillRect/>
+          </a:stretch>
+        </p:blipFill>
+        <p:spPr bwMode="auto">
+          <a:xfrm>
+            <a:off x="756608" y="2258501"/>
+            <a:ext cx="386389" cy="485958"/>
+          </a:xfrm>
+          <a:prstGeom prst="rect">
+            <a:avLst/>
+          </a:prstGeom>
+          <a:noFill/>
+          <a:extLst>
+            <a:ext uri="{909E8E84-426E-40DD-AFC4-6F175D3DCCD1}">
+              <a14:hiddenFill xmlns:a14="http://schemas.microsoft.com/office/drawing/2010/main">
+                <a:solidFill>
+                  <a:srgbClr val="FFFFFF"/>
+                </a:solidFill>
+              </a14:hiddenFill>
+            </a:ext>
+          </a:extLst>
+        </p:spPr>
+      </p:pic>
+      <p:cxnSp>
+        <p:nvCxnSpPr>
+          <p:cNvPr id="28" name="Connecteur droit 27">
             <a:extLst>
-              <a:ext uri="{909E8E84-426E-40DD-AFC4-6F175D3DCCD1}">
-                <a14:hiddenFill xmlns:a14="http://schemas.microsoft.com/office/drawing/2010/main">
-                  <a:solidFill>
-                    <a:srgbClr val="FFFFFF"/>
-                  </a:solidFill>
-                </a14:hiddenFill>
+              <a:ext uri="{FF2B5EF4-FFF2-40B4-BE49-F238E27FC236}">
+                <a16:creationId xmlns:a16="http://schemas.microsoft.com/office/drawing/2014/main" id="{66A68388-D1A7-6AC6-5F1F-65E1A6494D4A}"/>
               </a:ext>
             </a:extLst>
-          </p:spPr>
-        </p:pic>
-        <p:sp>
-          <p:nvSpPr>
-            <p:cNvPr id="67" name="ZoneTexte 66">
-              <a:extLst>
-                <a:ext uri="{FF2B5EF4-FFF2-40B4-BE49-F238E27FC236}">
-                  <a16:creationId xmlns:a16="http://schemas.microsoft.com/office/drawing/2014/main" id="{77C37EC6-CDFA-6EF5-9731-EDD14211D90B}"/>
-                </a:ext>
-              </a:extLst>
-            </p:cNvPr>
-            <p:cNvSpPr txBox="1"/>
-            <p:nvPr/>
-          </p:nvSpPr>
-          <p:spPr>
-            <a:xfrm>
-              <a:off x="246312" y="3396825"/>
-              <a:ext cx="1390212" cy="200055"/>
-            </a:xfrm>
-            <a:prstGeom prst="rect">
-              <a:avLst/>
-            </a:prstGeom>
-            <a:noFill/>
-          </p:spPr>
-          <p:txBody>
-            <a:bodyPr wrap="square" rtlCol="0">
-              <a:spAutoFit/>
-            </a:bodyPr>
-            <a:lstStyle/>
-            <a:p>
-              <a:pPr algn="ctr"/>
-              <a:r>
-                <a:rPr lang="fr-FR" sz="700" b="1" dirty="0"/>
-                <a:t>Production RTE</a:t>
-              </a:r>
-            </a:p>
-          </p:txBody>
-        </p:sp>
-        <p:pic>
-          <p:nvPicPr>
-            <p:cNvPr id="68" name="Picture 6">
-              <a:extLst>
-                <a:ext uri="{FF2B5EF4-FFF2-40B4-BE49-F238E27FC236}">
-                  <a16:creationId xmlns:a16="http://schemas.microsoft.com/office/drawing/2014/main" id="{6A1FE08D-DF15-8940-EAA5-98ED76914736}"/>
-                </a:ext>
-              </a:extLst>
-            </p:cNvPr>
-            <p:cNvPicPr>
-              <a:picLocks noChangeAspect="1" noChangeArrowheads="1"/>
-            </p:cNvPicPr>
-            <p:nvPr/>
-          </p:nvPicPr>
-          <p:blipFill rotWithShape="1">
-            <a:blip r:embed="rId10">
-              <a:extLst>
-                <a:ext uri="{28A0092B-C50C-407E-A947-70E740481C1C}">
-                  <a14:useLocalDpi xmlns:a14="http://schemas.microsoft.com/office/drawing/2010/main" val="0"/>
-                </a:ext>
-              </a:extLst>
-            </a:blip>
-            <a:srcRect l="33049" r="31047" b="34033"/>
-            <a:stretch>
-              <a:fillRect/>
-            </a:stretch>
-          </p:blipFill>
-          <p:spPr bwMode="auto">
-            <a:xfrm>
-              <a:off x="781054" y="3634159"/>
-              <a:ext cx="361937" cy="485958"/>
-            </a:xfrm>
-            <a:prstGeom prst="rect">
-              <a:avLst/>
-            </a:prstGeom>
-            <a:noFill/>
+          </p:cNvPr>
+          <p:cNvCxnSpPr/>
+          <p:nvPr/>
+        </p:nvCxnSpPr>
+        <p:spPr>
+          <a:xfrm>
+            <a:off x="2293137" y="1458686"/>
+            <a:ext cx="0" cy="3272971"/>
+          </a:xfrm>
+          <a:prstGeom prst="line">
+            <a:avLst/>
+          </a:prstGeom>
+          <a:ln w="19050">
+            <a:solidFill>
+              <a:schemeClr val="bg1">
+                <a:lumMod val="75000"/>
+              </a:schemeClr>
+            </a:solidFill>
+            <a:prstDash val="dash"/>
+          </a:ln>
+        </p:spPr>
+        <p:style>
+          <a:lnRef idx="1">
+            <a:schemeClr val="dk1"/>
+          </a:lnRef>
+          <a:fillRef idx="0">
+            <a:schemeClr val="dk1"/>
+          </a:fillRef>
+          <a:effectRef idx="0">
+            <a:schemeClr val="dk1"/>
+          </a:effectRef>
+          <a:fontRef idx="minor">
+            <a:schemeClr val="tx1"/>
+          </a:fontRef>
+        </p:style>
+      </p:cxnSp>
+      <p:sp>
+        <p:nvSpPr>
+          <p:cNvPr id="58" name="ZoneTexte 57">
             <a:extLst>
-              <a:ext uri="{909E8E84-426E-40DD-AFC4-6F175D3DCCD1}">
-                <a14:hiddenFill xmlns:a14="http://schemas.microsoft.com/office/drawing/2010/main">
-                  <a:solidFill>
-                    <a:srgbClr val="FFFFFF"/>
-                  </a:solidFill>
-                </a14:hiddenFill>
+              <a:ext uri="{FF2B5EF4-FFF2-40B4-BE49-F238E27FC236}">
+                <a16:creationId xmlns:a16="http://schemas.microsoft.com/office/drawing/2014/main" id="{42C67AD7-C645-5367-3E47-6D6A996C5FE8}"/>
               </a:ext>
             </a:extLst>
-          </p:spPr>
-        </p:pic>
-        <p:sp>
-          <p:nvSpPr>
-            <p:cNvPr id="70" name="ZoneTexte 69">
-              <a:extLst>
-                <a:ext uri="{FF2B5EF4-FFF2-40B4-BE49-F238E27FC236}">
-                  <a16:creationId xmlns:a16="http://schemas.microsoft.com/office/drawing/2014/main" id="{78E1D7E3-9E06-E6A5-253E-A6CE2A2F1050}"/>
-                </a:ext>
-              </a:extLst>
-            </p:cNvPr>
-            <p:cNvSpPr txBox="1"/>
-            <p:nvPr/>
-          </p:nvSpPr>
-          <p:spPr>
-            <a:xfrm>
-              <a:off x="246312" y="4108518"/>
-              <a:ext cx="1390212" cy="200055"/>
-            </a:xfrm>
-            <a:prstGeom prst="rect">
-              <a:avLst/>
-            </a:prstGeom>
-            <a:noFill/>
-          </p:spPr>
-          <p:txBody>
-            <a:bodyPr wrap="square" rtlCol="0">
-              <a:spAutoFit/>
-            </a:bodyPr>
-            <a:lstStyle/>
-            <a:p>
-              <a:pPr algn="ctr"/>
-              <a:r>
-                <a:rPr lang="fr-FR" sz="700" b="1" dirty="0"/>
-                <a:t>Solar Data</a:t>
-              </a:r>
-            </a:p>
-          </p:txBody>
-        </p:sp>
-        <p:sp>
-          <p:nvSpPr>
-            <p:cNvPr id="73" name="ZoneTexte 72">
-              <a:extLst>
-                <a:ext uri="{FF2B5EF4-FFF2-40B4-BE49-F238E27FC236}">
-                  <a16:creationId xmlns:a16="http://schemas.microsoft.com/office/drawing/2014/main" id="{33C41871-317D-BA64-26E2-EBEE7A51AE73}"/>
-                </a:ext>
-              </a:extLst>
-            </p:cNvPr>
-            <p:cNvSpPr txBox="1"/>
-            <p:nvPr/>
-          </p:nvSpPr>
-          <p:spPr>
-            <a:xfrm>
-              <a:off x="263070" y="2047148"/>
-              <a:ext cx="1390212" cy="200055"/>
-            </a:xfrm>
-            <a:prstGeom prst="rect">
-              <a:avLst/>
-            </a:prstGeom>
-            <a:noFill/>
-          </p:spPr>
-          <p:txBody>
-            <a:bodyPr wrap="square" rtlCol="0">
-              <a:spAutoFit/>
-            </a:bodyPr>
-            <a:lstStyle/>
-            <a:p>
-              <a:pPr algn="ctr"/>
-              <a:r>
-                <a:rPr lang="fr-FR" sz="700" b="1" dirty="0"/>
-                <a:t>Météo</a:t>
-              </a:r>
-            </a:p>
-          </p:txBody>
-        </p:sp>
-        <p:cxnSp>
-          <p:nvCxnSpPr>
-            <p:cNvPr id="75" name="Connecteur droit avec flèche 74">
-              <a:extLst>
-                <a:ext uri="{FF2B5EF4-FFF2-40B4-BE49-F238E27FC236}">
-                  <a16:creationId xmlns:a16="http://schemas.microsoft.com/office/drawing/2014/main" id="{EA2D8E70-0E38-6F85-C46D-473AA9425B34}"/>
-                </a:ext>
-              </a:extLst>
-            </p:cNvPr>
-            <p:cNvCxnSpPr>
-              <a:cxnSpLocks/>
-              <a:stCxn id="1028" idx="3"/>
-              <a:endCxn id="1026" idx="1"/>
-            </p:cNvCxnSpPr>
-            <p:nvPr/>
-          </p:nvCxnSpPr>
-          <p:spPr>
-            <a:xfrm>
-              <a:off x="1376124" y="1848815"/>
-              <a:ext cx="389331" cy="975"/>
-            </a:xfrm>
-            <a:prstGeom prst="straightConnector1">
-              <a:avLst/>
-            </a:prstGeom>
-            <a:ln w="9525">
-              <a:solidFill>
-                <a:schemeClr val="bg1">
-                  <a:lumMod val="65000"/>
-                </a:schemeClr>
-              </a:solidFill>
-              <a:tailEnd type="triangle"/>
-            </a:ln>
-          </p:spPr>
-          <p:style>
-            <a:lnRef idx="1">
-              <a:schemeClr val="accent1"/>
-            </a:lnRef>
-            <a:fillRef idx="0">
-              <a:schemeClr val="accent1"/>
-            </a:fillRef>
-            <a:effectRef idx="0">
-              <a:schemeClr val="accent1"/>
-            </a:effectRef>
-            <a:fontRef idx="minor">
-              <a:schemeClr val="tx1"/>
-            </a:fontRef>
-          </p:style>
-        </p:cxnSp>
-      </p:grpSp>
+          </p:cNvPr>
+          <p:cNvSpPr txBox="1"/>
+          <p:nvPr/>
+        </p:nvSpPr>
+        <p:spPr>
+          <a:xfrm>
+            <a:off x="246312" y="2674581"/>
+            <a:ext cx="1390212" cy="292388"/>
+          </a:xfrm>
+          <a:prstGeom prst="rect">
+            <a:avLst/>
+          </a:prstGeom>
+          <a:noFill/>
+        </p:spPr>
+        <p:txBody>
+          <a:bodyPr wrap="square" rtlCol="0">
+            <a:spAutoFit/>
+          </a:bodyPr>
+          <a:lstStyle/>
+          <a:p>
+            <a:pPr algn="ctr"/>
+            <a:r>
+              <a:rPr lang="fr-FR" sz="700" b="1" dirty="0"/>
+              <a:t>USGS / Landsat</a:t>
+            </a:r>
+          </a:p>
+          <a:p>
+            <a:pPr algn="ctr"/>
+            <a:r>
+              <a:rPr lang="fr-FR" sz="600" b="1" dirty="0"/>
+              <a:t>(métadonnées)</a:t>
+            </a:r>
+          </a:p>
+        </p:txBody>
+      </p:sp>
+      <p:pic>
+        <p:nvPicPr>
+          <p:cNvPr id="65" name="Picture 6">
+            <a:extLst>
+              <a:ext uri="{FF2B5EF4-FFF2-40B4-BE49-F238E27FC236}">
+                <a16:creationId xmlns:a16="http://schemas.microsoft.com/office/drawing/2014/main" id="{976AB5B9-1D61-B29C-C9DE-9051A31E8E27}"/>
+              </a:ext>
+            </a:extLst>
+          </p:cNvPr>
+          <p:cNvPicPr>
+            <a:picLocks noChangeAspect="1" noChangeArrowheads="1"/>
+          </p:cNvPicPr>
+          <p:nvPr/>
+        </p:nvPicPr>
+        <p:blipFill rotWithShape="1">
+          <a:blip r:embed="rId9">
+            <a:extLst>
+              <a:ext uri="{28A0092B-C50C-407E-A947-70E740481C1C}">
+                <a14:useLocalDpi xmlns:a14="http://schemas.microsoft.com/office/drawing/2010/main" val="0"/>
+              </a:ext>
+            </a:extLst>
+          </a:blip>
+          <a:srcRect l="33049" r="31047" b="34033"/>
+          <a:stretch>
+            <a:fillRect/>
+          </a:stretch>
+        </p:blipFill>
+        <p:spPr bwMode="auto">
+          <a:xfrm>
+            <a:off x="781055" y="2922466"/>
+            <a:ext cx="361938" cy="485958"/>
+          </a:xfrm>
+          <a:prstGeom prst="rect">
+            <a:avLst/>
+          </a:prstGeom>
+          <a:noFill/>
+          <a:extLst>
+            <a:ext uri="{909E8E84-426E-40DD-AFC4-6F175D3DCCD1}">
+              <a14:hiddenFill xmlns:a14="http://schemas.microsoft.com/office/drawing/2010/main">
+                <a:solidFill>
+                  <a:srgbClr val="FFFFFF"/>
+                </a:solidFill>
+              </a14:hiddenFill>
+            </a:ext>
+          </a:extLst>
+        </p:spPr>
+      </p:pic>
+      <p:sp>
+        <p:nvSpPr>
+          <p:cNvPr id="67" name="ZoneTexte 66">
+            <a:extLst>
+              <a:ext uri="{FF2B5EF4-FFF2-40B4-BE49-F238E27FC236}">
+                <a16:creationId xmlns:a16="http://schemas.microsoft.com/office/drawing/2014/main" id="{77C37EC6-CDFA-6EF5-9731-EDD14211D90B}"/>
+              </a:ext>
+            </a:extLst>
+          </p:cNvPr>
+          <p:cNvSpPr txBox="1"/>
+          <p:nvPr/>
+        </p:nvSpPr>
+        <p:spPr>
+          <a:xfrm>
+            <a:off x="246312" y="3396825"/>
+            <a:ext cx="1390212" cy="200055"/>
+          </a:xfrm>
+          <a:prstGeom prst="rect">
+            <a:avLst/>
+          </a:prstGeom>
+          <a:noFill/>
+        </p:spPr>
+        <p:txBody>
+          <a:bodyPr wrap="square" rtlCol="0">
+            <a:spAutoFit/>
+          </a:bodyPr>
+          <a:lstStyle/>
+          <a:p>
+            <a:pPr algn="ctr"/>
+            <a:r>
+              <a:rPr lang="fr-FR" sz="700" b="1" dirty="0"/>
+              <a:t>Production RTE</a:t>
+            </a:r>
+          </a:p>
+        </p:txBody>
+      </p:sp>
+      <p:pic>
+        <p:nvPicPr>
+          <p:cNvPr id="68" name="Picture 6">
+            <a:extLst>
+              <a:ext uri="{FF2B5EF4-FFF2-40B4-BE49-F238E27FC236}">
+                <a16:creationId xmlns:a16="http://schemas.microsoft.com/office/drawing/2014/main" id="{6A1FE08D-DF15-8940-EAA5-98ED76914736}"/>
+              </a:ext>
+            </a:extLst>
+          </p:cNvPr>
+          <p:cNvPicPr>
+            <a:picLocks noChangeAspect="1" noChangeArrowheads="1"/>
+          </p:cNvPicPr>
+          <p:nvPr/>
+        </p:nvPicPr>
+        <p:blipFill rotWithShape="1">
+          <a:blip r:embed="rId9">
+            <a:extLst>
+              <a:ext uri="{28A0092B-C50C-407E-A947-70E740481C1C}">
+                <a14:useLocalDpi xmlns:a14="http://schemas.microsoft.com/office/drawing/2010/main" val="0"/>
+              </a:ext>
+            </a:extLst>
+          </a:blip>
+          <a:srcRect l="33049" r="31047" b="34033"/>
+          <a:stretch>
+            <a:fillRect/>
+          </a:stretch>
+        </p:blipFill>
+        <p:spPr bwMode="auto">
+          <a:xfrm>
+            <a:off x="781054" y="3634159"/>
+            <a:ext cx="361937" cy="485958"/>
+          </a:xfrm>
+          <a:prstGeom prst="rect">
+            <a:avLst/>
+          </a:prstGeom>
+          <a:noFill/>
+          <a:extLst>
+            <a:ext uri="{909E8E84-426E-40DD-AFC4-6F175D3DCCD1}">
+              <a14:hiddenFill xmlns:a14="http://schemas.microsoft.com/office/drawing/2010/main">
+                <a:solidFill>
+                  <a:srgbClr val="FFFFFF"/>
+                </a:solidFill>
+              </a14:hiddenFill>
+            </a:ext>
+          </a:extLst>
+        </p:spPr>
+      </p:pic>
+      <p:sp>
+        <p:nvSpPr>
+          <p:cNvPr id="70" name="ZoneTexte 69">
+            <a:extLst>
+              <a:ext uri="{FF2B5EF4-FFF2-40B4-BE49-F238E27FC236}">
+                <a16:creationId xmlns:a16="http://schemas.microsoft.com/office/drawing/2014/main" id="{78E1D7E3-9E06-E6A5-253E-A6CE2A2F1050}"/>
+              </a:ext>
+            </a:extLst>
+          </p:cNvPr>
+          <p:cNvSpPr txBox="1"/>
+          <p:nvPr/>
+        </p:nvSpPr>
+        <p:spPr>
+          <a:xfrm>
+            <a:off x="246312" y="4108518"/>
+            <a:ext cx="1390212" cy="200055"/>
+          </a:xfrm>
+          <a:prstGeom prst="rect">
+            <a:avLst/>
+          </a:prstGeom>
+          <a:noFill/>
+        </p:spPr>
+        <p:txBody>
+          <a:bodyPr wrap="square" rtlCol="0">
+            <a:spAutoFit/>
+          </a:bodyPr>
+          <a:lstStyle/>
+          <a:p>
+            <a:pPr algn="ctr"/>
+            <a:r>
+              <a:rPr lang="fr-FR" sz="700" b="1" dirty="0"/>
+              <a:t>Solar Data</a:t>
+            </a:r>
+          </a:p>
+        </p:txBody>
+      </p:sp>
+      <p:sp>
+        <p:nvSpPr>
+          <p:cNvPr id="73" name="ZoneTexte 72">
+            <a:extLst>
+              <a:ext uri="{FF2B5EF4-FFF2-40B4-BE49-F238E27FC236}">
+                <a16:creationId xmlns:a16="http://schemas.microsoft.com/office/drawing/2014/main" id="{33C41871-317D-BA64-26E2-EBEE7A51AE73}"/>
+              </a:ext>
+            </a:extLst>
+          </p:cNvPr>
+          <p:cNvSpPr txBox="1"/>
+          <p:nvPr/>
+        </p:nvSpPr>
+        <p:spPr>
+          <a:xfrm>
+            <a:off x="263070" y="2047148"/>
+            <a:ext cx="1390212" cy="200055"/>
+          </a:xfrm>
+          <a:prstGeom prst="rect">
+            <a:avLst/>
+          </a:prstGeom>
+          <a:noFill/>
+        </p:spPr>
+        <p:txBody>
+          <a:bodyPr wrap="square" rtlCol="0">
+            <a:spAutoFit/>
+          </a:bodyPr>
+          <a:lstStyle/>
+          <a:p>
+            <a:pPr algn="ctr"/>
+            <a:r>
+              <a:rPr lang="fr-FR" sz="700" b="1" dirty="0"/>
+              <a:t>Météo</a:t>
+            </a:r>
+          </a:p>
+        </p:txBody>
+      </p:sp>
       <p:cxnSp>
         <p:nvCxnSpPr>
           <p:cNvPr id="1029" name="Connecteur : en angle 1028">
@@ -33038,23 +32154,25 @@
           </p:cNvPr>
           <p:cNvCxnSpPr>
             <a:cxnSpLocks/>
-            <a:stCxn id="106" idx="2"/>
-            <a:endCxn id="2097" idx="3"/>
+            <a:stCxn id="20" idx="0"/>
+            <a:endCxn id="1074" idx="0"/>
           </p:cNvCxnSpPr>
           <p:nvPr/>
         </p:nvCxnSpPr>
         <p:spPr>
           <a:xfrm rot="5400000" flipH="1" flipV="1">
-            <a:off x="5499377" y="1796203"/>
-            <a:ext cx="1021775" cy="4422698"/>
+            <a:off x="5577195" y="211592"/>
+            <a:ext cx="331453" cy="3655528"/>
           </a:xfrm>
-          <a:prstGeom prst="bentConnector4">
+          <a:prstGeom prst="bentConnector3">
             <a:avLst>
-              <a:gd name="adj1" fmla="val -22373"/>
-              <a:gd name="adj2" fmla="val 105169"/>
+              <a:gd name="adj1" fmla="val 195988"/>
             </a:avLst>
           </a:prstGeom>
           <a:ln w="12700">
+            <a:solidFill>
+              <a:srgbClr val="B266FF"/>
+            </a:solidFill>
             <a:tailEnd type="triangle"/>
           </a:ln>
         </p:spPr>
@@ -33092,14 +32210,14 @@
         <p:spPr>
           <a:xfrm>
             <a:off x="5415383" y="2302794"/>
-            <a:ext cx="2122" cy="316086"/>
+            <a:ext cx="2122" cy="325512"/>
           </a:xfrm>
           <a:prstGeom prst="straightConnector1">
             <a:avLst/>
           </a:prstGeom>
-          <a:ln w="57150">
+          <a:ln w="38100">
             <a:solidFill>
-              <a:srgbClr val="FFC000"/>
+              <a:srgbClr val="00B050"/>
             </a:solidFill>
             <a:tailEnd type="triangle"/>
           </a:ln>
@@ -33130,20 +32248,22 @@
           </p:cNvPr>
           <p:cNvCxnSpPr>
             <a:cxnSpLocks/>
-            <a:stCxn id="53" idx="3"/>
             <a:endCxn id="43" idx="0"/>
           </p:cNvCxnSpPr>
           <p:nvPr/>
         </p:nvCxnSpPr>
         <p:spPr>
           <a:xfrm>
-            <a:off x="6315717" y="3554011"/>
-            <a:ext cx="507811" cy="396815"/>
+            <a:off x="6315717" y="3825217"/>
+            <a:ext cx="1174186" cy="243725"/>
           </a:xfrm>
           <a:prstGeom prst="bentConnector2">
             <a:avLst/>
           </a:prstGeom>
           <a:ln>
+            <a:solidFill>
+              <a:srgbClr val="FF0080"/>
+            </a:solidFill>
             <a:headEnd type="triangle"/>
             <a:tailEnd type="triangle"/>
           </a:ln>
@@ -33220,15 +32340,15 @@
           </p:cNvPr>
           <p:cNvCxnSpPr>
             <a:cxnSpLocks/>
-            <a:stCxn id="1074" idx="2"/>
+            <a:stCxn id="2097" idx="2"/>
             <a:endCxn id="43" idx="3"/>
           </p:cNvCxnSpPr>
           <p:nvPr/>
         </p:nvCxnSpPr>
         <p:spPr>
           <a:xfrm rot="5400000">
-            <a:off x="7078558" y="3733110"/>
-            <a:ext cx="518484" cy="462902"/>
+            <a:off x="7570819" y="3859448"/>
+            <a:ext cx="739989" cy="298315"/>
           </a:xfrm>
           <a:prstGeom prst="bentConnector2">
             <a:avLst/>
@@ -33253,821 +32373,240 @@
           </a:fontRef>
         </p:style>
       </p:cxnSp>
-      <p:grpSp>
-        <p:nvGrpSpPr>
-          <p:cNvPr id="11" name="Groupe 10">
+      <p:pic>
+        <p:nvPicPr>
+          <p:cNvPr id="1026" name="Picture 2">
             <a:extLst>
               <a:ext uri="{FF2B5EF4-FFF2-40B4-BE49-F238E27FC236}">
-                <a16:creationId xmlns:a16="http://schemas.microsoft.com/office/drawing/2014/main" id="{2CB2D600-7028-C267-C7F2-4B9481AE645B}"/>
+                <a16:creationId xmlns:a16="http://schemas.microsoft.com/office/drawing/2014/main" id="{923FE2F2-F305-A7CE-975B-2A2BA912E4B7}"/>
               </a:ext>
             </a:extLst>
           </p:cNvPr>
-          <p:cNvGrpSpPr/>
+          <p:cNvPicPr>
+            <a:picLocks noChangeAspect="1" noChangeArrowheads="1"/>
+          </p:cNvPicPr>
           <p:nvPr/>
-        </p:nvGrpSpPr>
-        <p:grpSpPr>
-          <a:xfrm>
-            <a:off x="1142991" y="1458686"/>
-            <a:ext cx="3235914" cy="3272971"/>
-            <a:chOff x="1142991" y="1458686"/>
-            <a:chExt cx="3235914" cy="3272971"/>
-          </a:xfrm>
-        </p:grpSpPr>
-        <p:pic>
-          <p:nvPicPr>
-            <p:cNvPr id="1032" name="Picture 8">
-              <a:extLst>
-                <a:ext uri="{FF2B5EF4-FFF2-40B4-BE49-F238E27FC236}">
-                  <a16:creationId xmlns:a16="http://schemas.microsoft.com/office/drawing/2014/main" id="{0AA62D0C-7533-F64F-5205-AC2C6EB164FE}"/>
-                </a:ext>
-              </a:extLst>
-            </p:cNvPr>
-            <p:cNvPicPr>
-              <a:picLocks noChangeAspect="1" noChangeArrowheads="1"/>
-            </p:cNvPicPr>
-            <p:nvPr/>
-          </p:nvPicPr>
-          <p:blipFill rotWithShape="1">
-            <a:blip r:embed="rId11">
-              <a:extLst>
-                <a:ext uri="{28A0092B-C50C-407E-A947-70E740481C1C}">
-                  <a14:useLocalDpi xmlns:a14="http://schemas.microsoft.com/office/drawing/2010/main" val="0"/>
-                </a:ext>
-              </a:extLst>
-            </a:blip>
-            <a:srcRect l="18372" t="16968" r="15985" b="15970"/>
-            <a:stretch>
-              <a:fillRect/>
-            </a:stretch>
-          </p:blipFill>
-          <p:spPr bwMode="auto">
-            <a:xfrm>
-              <a:off x="2696327" y="1707018"/>
-              <a:ext cx="277594" cy="283594"/>
-            </a:xfrm>
-            <a:prstGeom prst="rect">
-              <a:avLst/>
-            </a:prstGeom>
-            <a:noFill/>
+        </p:nvPicPr>
+        <p:blipFill rotWithShape="1">
+          <a:blip r:embed="rId10">
             <a:extLst>
-              <a:ext uri="{909E8E84-426E-40DD-AFC4-6F175D3DCCD1}">
-                <a14:hiddenFill xmlns:a14="http://schemas.microsoft.com/office/drawing/2010/main">
-                  <a:solidFill>
-                    <a:srgbClr val="FFFFFF"/>
-                  </a:solidFill>
-                </a14:hiddenFill>
+              <a:ext uri="{28A0092B-C50C-407E-A947-70E740481C1C}">
+                <a14:useLocalDpi xmlns:a14="http://schemas.microsoft.com/office/drawing/2010/main" val="0"/>
               </a:ext>
             </a:extLst>
-          </p:spPr>
-        </p:pic>
-        <p:cxnSp>
-          <p:nvCxnSpPr>
-            <p:cNvPr id="29" name="Connecteur droit 28">
-              <a:extLst>
-                <a:ext uri="{FF2B5EF4-FFF2-40B4-BE49-F238E27FC236}">
-                  <a16:creationId xmlns:a16="http://schemas.microsoft.com/office/drawing/2014/main" id="{2F5C326A-12BF-B849-9176-2CB67D7A7ED9}"/>
-                </a:ext>
-              </a:extLst>
-            </p:cNvPr>
-            <p:cNvCxnSpPr/>
-            <p:nvPr/>
-          </p:nvCxnSpPr>
-          <p:spPr>
-            <a:xfrm>
-              <a:off x="4378905" y="1458686"/>
-              <a:ext cx="0" cy="3272971"/>
-            </a:xfrm>
-            <a:prstGeom prst="line">
-              <a:avLst/>
-            </a:prstGeom>
-            <a:ln w="19050">
-              <a:solidFill>
-                <a:schemeClr val="bg1">
-                  <a:lumMod val="75000"/>
-                </a:schemeClr>
-              </a:solidFill>
-              <a:prstDash val="dash"/>
-            </a:ln>
-          </p:spPr>
-          <p:style>
-            <a:lnRef idx="1">
-              <a:schemeClr val="dk1"/>
-            </a:lnRef>
-            <a:fillRef idx="0">
-              <a:schemeClr val="dk1"/>
-            </a:fillRef>
-            <a:effectRef idx="0">
-              <a:schemeClr val="dk1"/>
-            </a:effectRef>
-            <a:fontRef idx="minor">
-              <a:schemeClr val="tx1"/>
-            </a:fontRef>
-          </p:style>
-        </p:cxnSp>
-        <p:pic>
-          <p:nvPicPr>
-            <p:cNvPr id="2050" name="Picture 2">
-              <a:extLst>
-                <a:ext uri="{FF2B5EF4-FFF2-40B4-BE49-F238E27FC236}">
-                  <a16:creationId xmlns:a16="http://schemas.microsoft.com/office/drawing/2014/main" id="{66BE5478-2C49-E651-22DF-909C00CA75C0}"/>
-                </a:ext>
-              </a:extLst>
-            </p:cNvPr>
-            <p:cNvPicPr>
-              <a:picLocks noChangeAspect="1" noChangeArrowheads="1"/>
-            </p:cNvPicPr>
-            <p:nvPr/>
-          </p:nvPicPr>
-          <p:blipFill rotWithShape="1">
-            <a:blip r:embed="rId12">
-              <a:extLst>
-                <a:ext uri="{28A0092B-C50C-407E-A947-70E740481C1C}">
-                  <a14:useLocalDpi xmlns:a14="http://schemas.microsoft.com/office/drawing/2010/main" val="0"/>
-                </a:ext>
-              </a:extLst>
-            </a:blip>
-            <a:srcRect l="15800" t="16870" r="16971" b="17050"/>
-            <a:stretch>
-              <a:fillRect/>
-            </a:stretch>
-          </p:blipFill>
-          <p:spPr bwMode="auto">
-            <a:xfrm>
-              <a:off x="3369783" y="2328613"/>
-              <a:ext cx="350993" cy="344994"/>
-            </a:xfrm>
-            <a:prstGeom prst="rect">
-              <a:avLst/>
-            </a:prstGeom>
-            <a:noFill/>
+          </a:blip>
+          <a:srcRect l="14585" t="12264" r="16331" b="16417"/>
+          <a:stretch>
+            <a:fillRect/>
+          </a:stretch>
+        </p:blipFill>
+        <p:spPr bwMode="auto">
+          <a:xfrm>
+            <a:off x="1095600" y="1606201"/>
+            <a:ext cx="264768" cy="273335"/>
+          </a:xfrm>
+          <a:prstGeom prst="rect">
+            <a:avLst/>
+          </a:prstGeom>
+          <a:noFill/>
+          <a:extLst>
+            <a:ext uri="{909E8E84-426E-40DD-AFC4-6F175D3DCCD1}">
+              <a14:hiddenFill xmlns:a14="http://schemas.microsoft.com/office/drawing/2010/main">
+                <a:solidFill>
+                  <a:srgbClr val="FFFFFF"/>
+                </a:solidFill>
+              </a14:hiddenFill>
+            </a:ext>
+          </a:extLst>
+        </p:spPr>
+      </p:pic>
+      <p:cxnSp>
+        <p:nvCxnSpPr>
+          <p:cNvPr id="29" name="Connecteur droit 28">
             <a:extLst>
-              <a:ext uri="{909E8E84-426E-40DD-AFC4-6F175D3DCCD1}">
-                <a14:hiddenFill xmlns:a14="http://schemas.microsoft.com/office/drawing/2010/main">
-                  <a:solidFill>
-                    <a:srgbClr val="FFFFFF"/>
-                  </a:solidFill>
-                </a14:hiddenFill>
+              <a:ext uri="{FF2B5EF4-FFF2-40B4-BE49-F238E27FC236}">
+                <a16:creationId xmlns:a16="http://schemas.microsoft.com/office/drawing/2014/main" id="{2F5C326A-12BF-B849-9176-2CB67D7A7ED9}"/>
               </a:ext>
             </a:extLst>
-          </p:spPr>
-        </p:pic>
-        <p:sp>
-          <p:nvSpPr>
-            <p:cNvPr id="71" name="Rectangle : coins arrondis 70">
-              <a:extLst>
-                <a:ext uri="{FF2B5EF4-FFF2-40B4-BE49-F238E27FC236}">
-                  <a16:creationId xmlns:a16="http://schemas.microsoft.com/office/drawing/2014/main" id="{E74B2057-34BC-1980-9671-44A128491597}"/>
-                </a:ext>
-              </a:extLst>
-            </p:cNvPr>
-            <p:cNvSpPr/>
-            <p:nvPr/>
-          </p:nvSpPr>
-          <p:spPr>
-            <a:xfrm>
-              <a:off x="2461359" y="1469509"/>
-              <a:ext cx="1776005" cy="2957143"/>
-            </a:xfrm>
-            <a:prstGeom prst="roundRect">
-              <a:avLst/>
-            </a:prstGeom>
-            <a:noFill/>
-            <a:ln w="9525">
-              <a:solidFill>
-                <a:srgbClr val="FFC000"/>
-              </a:solidFill>
-              <a:prstDash val="dash"/>
-            </a:ln>
-          </p:spPr>
-          <p:style>
-            <a:lnRef idx="2">
-              <a:schemeClr val="accent1">
-                <a:shade val="15000"/>
+          </p:cNvPr>
+          <p:cNvCxnSpPr/>
+          <p:nvPr/>
+        </p:nvCxnSpPr>
+        <p:spPr>
+          <a:xfrm>
+            <a:off x="4378905" y="1458686"/>
+            <a:ext cx="0" cy="3272971"/>
+          </a:xfrm>
+          <a:prstGeom prst="line">
+            <a:avLst/>
+          </a:prstGeom>
+          <a:ln w="19050">
+            <a:solidFill>
+              <a:schemeClr val="bg1">
+                <a:lumMod val="75000"/>
               </a:schemeClr>
-            </a:lnRef>
-            <a:fillRef idx="1">
-              <a:schemeClr val="accent1"/>
-            </a:fillRef>
-            <a:effectRef idx="0">
-              <a:schemeClr val="accent1"/>
-            </a:effectRef>
-            <a:fontRef idx="minor">
-              <a:schemeClr val="lt1"/>
-            </a:fontRef>
-          </p:style>
-          <p:txBody>
-            <a:bodyPr rtlCol="0" anchor="ctr"/>
-            <a:lstStyle/>
-            <a:p>
-              <a:pPr algn="ctr"/>
-              <a:endParaRPr lang="fr-FR" dirty="0"/>
-            </a:p>
-          </p:txBody>
-        </p:sp>
-        <p:cxnSp>
-          <p:nvCxnSpPr>
-            <p:cNvPr id="99" name="Connecteur droit avec flèche 98">
-              <a:extLst>
-                <a:ext uri="{FF2B5EF4-FFF2-40B4-BE49-F238E27FC236}">
-                  <a16:creationId xmlns:a16="http://schemas.microsoft.com/office/drawing/2014/main" id="{1740FD3C-BB82-E8E4-4341-9F9B0A291611}"/>
-                </a:ext>
-              </a:extLst>
-            </p:cNvPr>
-            <p:cNvCxnSpPr>
-              <a:cxnSpLocks/>
-              <a:stCxn id="1026" idx="3"/>
-              <a:endCxn id="1032" idx="1"/>
-            </p:cNvCxnSpPr>
-            <p:nvPr/>
-          </p:nvCxnSpPr>
-          <p:spPr>
-            <a:xfrm flipV="1">
-              <a:off x="2146772" y="1848815"/>
-              <a:ext cx="549555" cy="975"/>
-            </a:xfrm>
-            <a:prstGeom prst="straightConnector1">
-              <a:avLst/>
-            </a:prstGeom>
-            <a:ln w="9525">
-              <a:solidFill>
-                <a:schemeClr val="bg1">
-                  <a:lumMod val="65000"/>
-                </a:schemeClr>
-              </a:solidFill>
-              <a:tailEnd type="triangle"/>
-            </a:ln>
-          </p:spPr>
-          <p:style>
-            <a:lnRef idx="1">
-              <a:schemeClr val="accent1"/>
-            </a:lnRef>
-            <a:fillRef idx="0">
-              <a:schemeClr val="accent1"/>
-            </a:fillRef>
-            <a:effectRef idx="0">
-              <a:schemeClr val="accent1"/>
-            </a:effectRef>
-            <a:fontRef idx="minor">
-              <a:schemeClr val="tx1"/>
-            </a:fontRef>
-          </p:style>
-        </p:cxnSp>
-        <p:pic>
-          <p:nvPicPr>
-            <p:cNvPr id="102" name="Picture 2">
-              <a:extLst>
-                <a:ext uri="{FF2B5EF4-FFF2-40B4-BE49-F238E27FC236}">
-                  <a16:creationId xmlns:a16="http://schemas.microsoft.com/office/drawing/2014/main" id="{26F3760A-01F7-627E-27AC-B1F00D3B52C6}"/>
-                </a:ext>
-              </a:extLst>
-            </p:cNvPr>
-            <p:cNvPicPr>
-              <a:picLocks noChangeAspect="1" noChangeArrowheads="1"/>
-            </p:cNvPicPr>
-            <p:nvPr/>
-          </p:nvPicPr>
-          <p:blipFill rotWithShape="1">
-            <a:blip r:embed="rId12">
-              <a:extLst>
-                <a:ext uri="{28A0092B-C50C-407E-A947-70E740481C1C}">
-                  <a14:useLocalDpi xmlns:a14="http://schemas.microsoft.com/office/drawing/2010/main" val="0"/>
-                </a:ext>
-              </a:extLst>
-            </a:blip>
-            <a:srcRect l="15800" t="16870" r="16971" b="17050"/>
-            <a:stretch>
-              <a:fillRect/>
-            </a:stretch>
-          </p:blipFill>
-          <p:spPr bwMode="auto">
-            <a:xfrm>
-              <a:off x="3378283" y="1676305"/>
-              <a:ext cx="350993" cy="344994"/>
-            </a:xfrm>
-            <a:prstGeom prst="rect">
-              <a:avLst/>
-            </a:prstGeom>
-            <a:noFill/>
+            </a:solidFill>
+            <a:prstDash val="dash"/>
+          </a:ln>
+        </p:spPr>
+        <p:style>
+          <a:lnRef idx="1">
+            <a:schemeClr val="dk1"/>
+          </a:lnRef>
+          <a:fillRef idx="0">
+            <a:schemeClr val="dk1"/>
+          </a:fillRef>
+          <a:effectRef idx="0">
+            <a:schemeClr val="dk1"/>
+          </a:effectRef>
+          <a:fontRef idx="minor">
+            <a:schemeClr val="tx1"/>
+          </a:fontRef>
+        </p:style>
+      </p:cxnSp>
+      <p:sp>
+        <p:nvSpPr>
+          <p:cNvPr id="71" name="Rectangle : coins arrondis 70">
             <a:extLst>
-              <a:ext uri="{909E8E84-426E-40DD-AFC4-6F175D3DCCD1}">
-                <a14:hiddenFill xmlns:a14="http://schemas.microsoft.com/office/drawing/2010/main">
-                  <a:solidFill>
-                    <a:srgbClr val="FFFFFF"/>
-                  </a:solidFill>
-                </a14:hiddenFill>
+              <a:ext uri="{FF2B5EF4-FFF2-40B4-BE49-F238E27FC236}">
+                <a16:creationId xmlns:a16="http://schemas.microsoft.com/office/drawing/2014/main" id="{E74B2057-34BC-1980-9671-44A128491597}"/>
               </a:ext>
             </a:extLst>
-          </p:spPr>
-        </p:pic>
-        <p:pic>
-          <p:nvPicPr>
-            <p:cNvPr id="103" name="Picture 2">
-              <a:extLst>
-                <a:ext uri="{FF2B5EF4-FFF2-40B4-BE49-F238E27FC236}">
-                  <a16:creationId xmlns:a16="http://schemas.microsoft.com/office/drawing/2014/main" id="{B33DCAA7-8CDF-83ED-2AFC-66875EDF434A}"/>
-                </a:ext>
-              </a:extLst>
-            </p:cNvPr>
-            <p:cNvPicPr>
-              <a:picLocks noChangeAspect="1" noChangeArrowheads="1"/>
-            </p:cNvPicPr>
-            <p:nvPr/>
-          </p:nvPicPr>
-          <p:blipFill rotWithShape="1">
-            <a:blip r:embed="rId12">
-              <a:extLst>
-                <a:ext uri="{28A0092B-C50C-407E-A947-70E740481C1C}">
-                  <a14:useLocalDpi xmlns:a14="http://schemas.microsoft.com/office/drawing/2010/main" val="0"/>
-                </a:ext>
-              </a:extLst>
-            </a:blip>
-            <a:srcRect l="15800" t="16870" r="16971" b="17050"/>
-            <a:stretch>
-              <a:fillRect/>
-            </a:stretch>
-          </p:blipFill>
-          <p:spPr bwMode="auto">
-            <a:xfrm>
-              <a:off x="3364720" y="2990820"/>
-              <a:ext cx="350993" cy="344994"/>
-            </a:xfrm>
-            <a:prstGeom prst="rect">
-              <a:avLst/>
-            </a:prstGeom>
-            <a:noFill/>
+          </p:cNvPr>
+          <p:cNvSpPr/>
+          <p:nvPr/>
+        </p:nvSpPr>
+        <p:spPr>
+          <a:xfrm>
+            <a:off x="2461359" y="1711807"/>
+            <a:ext cx="1776005" cy="2786761"/>
+          </a:xfrm>
+          <a:prstGeom prst="roundRect">
+            <a:avLst/>
+          </a:prstGeom>
+          <a:noFill/>
+          <a:ln w="9525">
+            <a:solidFill>
+              <a:srgbClr val="00B050"/>
+            </a:solidFill>
+            <a:prstDash val="dash"/>
+          </a:ln>
+        </p:spPr>
+        <p:style>
+          <a:lnRef idx="2">
+            <a:schemeClr val="accent1">
+              <a:shade val="15000"/>
+            </a:schemeClr>
+          </a:lnRef>
+          <a:fillRef idx="1">
+            <a:schemeClr val="accent1"/>
+          </a:fillRef>
+          <a:effectRef idx="0">
+            <a:schemeClr val="accent1"/>
+          </a:effectRef>
+          <a:fontRef idx="minor">
+            <a:schemeClr val="lt1"/>
+          </a:fontRef>
+        </p:style>
+        <p:txBody>
+          <a:bodyPr rtlCol="0" anchor="ctr"/>
+          <a:lstStyle/>
+          <a:p>
+            <a:pPr algn="ctr"/>
+            <a:endParaRPr lang="fr-FR" dirty="0"/>
+          </a:p>
+        </p:txBody>
+      </p:sp>
+      <p:sp>
+        <p:nvSpPr>
+          <p:cNvPr id="106" name="Rectangle : coins arrondis 105">
             <a:extLst>
-              <a:ext uri="{909E8E84-426E-40DD-AFC4-6F175D3DCCD1}">
-                <a14:hiddenFill xmlns:a14="http://schemas.microsoft.com/office/drawing/2010/main">
-                  <a:solidFill>
-                    <a:srgbClr val="FFFFFF"/>
-                  </a:solidFill>
-                </a14:hiddenFill>
+              <a:ext uri="{FF2B5EF4-FFF2-40B4-BE49-F238E27FC236}">
+                <a16:creationId xmlns:a16="http://schemas.microsoft.com/office/drawing/2014/main" id="{70820C9A-B957-87A8-109D-6C661627DA4C}"/>
               </a:ext>
             </a:extLst>
-          </p:spPr>
-        </p:pic>
-        <p:pic>
-          <p:nvPicPr>
-            <p:cNvPr id="104" name="Picture 2">
-              <a:extLst>
-                <a:ext uri="{FF2B5EF4-FFF2-40B4-BE49-F238E27FC236}">
-                  <a16:creationId xmlns:a16="http://schemas.microsoft.com/office/drawing/2014/main" id="{30EDEF50-F042-0782-1F82-E1015B7ED2D4}"/>
-                </a:ext>
-              </a:extLst>
-            </p:cNvPr>
-            <p:cNvPicPr>
-              <a:picLocks noChangeAspect="1" noChangeArrowheads="1"/>
-            </p:cNvPicPr>
-            <p:nvPr/>
-          </p:nvPicPr>
-          <p:blipFill rotWithShape="1">
-            <a:blip r:embed="rId12">
-              <a:extLst>
-                <a:ext uri="{28A0092B-C50C-407E-A947-70E740481C1C}">
-                  <a14:useLocalDpi xmlns:a14="http://schemas.microsoft.com/office/drawing/2010/main" val="0"/>
-                </a:ext>
-              </a:extLst>
-            </a:blip>
-            <a:srcRect l="15800" t="16870" r="16971" b="17050"/>
-            <a:stretch>
-              <a:fillRect/>
-            </a:stretch>
-          </p:blipFill>
-          <p:spPr bwMode="auto">
-            <a:xfrm>
-              <a:off x="3339191" y="3703859"/>
-              <a:ext cx="350993" cy="344994"/>
-            </a:xfrm>
-            <a:prstGeom prst="rect">
-              <a:avLst/>
-            </a:prstGeom>
+          </p:cNvPr>
+          <p:cNvSpPr/>
+          <p:nvPr/>
+        </p:nvSpPr>
+        <p:spPr>
+          <a:xfrm>
+            <a:off x="3364720" y="4340702"/>
+            <a:ext cx="868391" cy="252609"/>
+          </a:xfrm>
+          <a:prstGeom prst="roundRect">
+            <a:avLst/>
+          </a:prstGeom>
+          <a:solidFill>
+            <a:schemeClr val="bg1">
+              <a:lumMod val="95000"/>
+            </a:schemeClr>
+          </a:solidFill>
+          <a:ln>
             <a:noFill/>
+          </a:ln>
+        </p:spPr>
+        <p:style>
+          <a:lnRef idx="2">
+            <a:schemeClr val="accent1">
+              <a:shade val="15000"/>
+            </a:schemeClr>
+          </a:lnRef>
+          <a:fillRef idx="1">
+            <a:schemeClr val="accent1"/>
+          </a:fillRef>
+          <a:effectRef idx="0">
+            <a:schemeClr val="accent1"/>
+          </a:effectRef>
+          <a:fontRef idx="minor">
+            <a:schemeClr val="lt1"/>
+          </a:fontRef>
+        </p:style>
+        <p:txBody>
+          <a:bodyPr rtlCol="0" anchor="ctr"/>
+          <a:lstStyle/>
+          <a:p>
+            <a:r>
+              <a:rPr lang="fr-FR" sz="700" b="1" dirty="0">
+                <a:solidFill>
+                  <a:schemeClr val="tx1"/>
+                </a:solidFill>
+              </a:rPr>
+              <a:t>AWS S3</a:t>
+            </a:r>
+          </a:p>
+        </p:txBody>
+      </p:sp>
+      <p:pic>
+        <p:nvPicPr>
+          <p:cNvPr id="107" name="Image 106" descr="Une image contenant art, pixel, conception&#10;&#10;Le contenu généré par l’IA peut être incorrect.">
             <a:extLst>
-              <a:ext uri="{909E8E84-426E-40DD-AFC4-6F175D3DCCD1}">
-                <a14:hiddenFill xmlns:a14="http://schemas.microsoft.com/office/drawing/2010/main">
-                  <a:solidFill>
-                    <a:srgbClr val="FFFFFF"/>
-                  </a:solidFill>
-                </a14:hiddenFill>
+              <a:ext uri="{FF2B5EF4-FFF2-40B4-BE49-F238E27FC236}">
+                <a16:creationId xmlns:a16="http://schemas.microsoft.com/office/drawing/2014/main" id="{9E201599-7D6B-4671-395A-AB9C1CE55DB4}"/>
               </a:ext>
             </a:extLst>
-          </p:spPr>
-        </p:pic>
-        <p:sp>
-          <p:nvSpPr>
-            <p:cNvPr id="106" name="Rectangle : coins arrondis 105">
-              <a:extLst>
-                <a:ext uri="{FF2B5EF4-FFF2-40B4-BE49-F238E27FC236}">
-                  <a16:creationId xmlns:a16="http://schemas.microsoft.com/office/drawing/2014/main" id="{70820C9A-B957-87A8-109D-6C661627DA4C}"/>
-                </a:ext>
-              </a:extLst>
-            </p:cNvPr>
-            <p:cNvSpPr/>
-            <p:nvPr/>
-          </p:nvSpPr>
-          <p:spPr>
-            <a:xfrm>
-              <a:off x="3364720" y="4265830"/>
-              <a:ext cx="868391" cy="252609"/>
-            </a:xfrm>
-            <a:prstGeom prst="roundRect">
-              <a:avLst/>
-            </a:prstGeom>
-            <a:solidFill>
-              <a:schemeClr val="bg1">
-                <a:lumMod val="95000"/>
-              </a:schemeClr>
-            </a:solidFill>
-            <a:ln>
-              <a:noFill/>
-            </a:ln>
-          </p:spPr>
-          <p:style>
-            <a:lnRef idx="2">
-              <a:schemeClr val="accent1">
-                <a:shade val="15000"/>
-              </a:schemeClr>
-            </a:lnRef>
-            <a:fillRef idx="1">
-              <a:schemeClr val="accent1"/>
-            </a:fillRef>
-            <a:effectRef idx="0">
-              <a:schemeClr val="accent1"/>
-            </a:effectRef>
-            <a:fontRef idx="minor">
-              <a:schemeClr val="lt1"/>
-            </a:fontRef>
-          </p:style>
-          <p:txBody>
-            <a:bodyPr rtlCol="0" anchor="ctr"/>
-            <a:lstStyle/>
-            <a:p>
-              <a:r>
-                <a:rPr lang="fr-FR" sz="700" b="1" dirty="0">
-                  <a:solidFill>
-                    <a:schemeClr val="tx1"/>
-                  </a:solidFill>
-                </a:rPr>
-                <a:t>AWS S3</a:t>
-              </a:r>
-            </a:p>
-          </p:txBody>
-        </p:sp>
-        <p:pic>
-          <p:nvPicPr>
-            <p:cNvPr id="107" name="Image 106" descr="Une image contenant art, pixel, conception&#10;&#10;Le contenu généré par l’IA peut être incorrect.">
-              <a:extLst>
-                <a:ext uri="{FF2B5EF4-FFF2-40B4-BE49-F238E27FC236}">
-                  <a16:creationId xmlns:a16="http://schemas.microsoft.com/office/drawing/2014/main" id="{9E201599-7D6B-4671-395A-AB9C1CE55DB4}"/>
-                </a:ext>
-              </a:extLst>
-            </p:cNvPr>
-            <p:cNvPicPr>
-              <a:picLocks noChangeAspect="1"/>
-            </p:cNvPicPr>
-            <p:nvPr/>
-          </p:nvPicPr>
-          <p:blipFill>
-            <a:blip r:embed="rId7"/>
-            <a:stretch>
-              <a:fillRect/>
-            </a:stretch>
-          </p:blipFill>
-          <p:spPr>
-            <a:xfrm>
-              <a:off x="3927166" y="4032093"/>
-              <a:ext cx="347790" cy="416048"/>
-            </a:xfrm>
-            <a:prstGeom prst="rect">
-              <a:avLst/>
-            </a:prstGeom>
-          </p:spPr>
-        </p:pic>
-        <p:cxnSp>
-          <p:nvCxnSpPr>
-            <p:cNvPr id="111" name="Connecteur droit avec flèche 110">
-              <a:extLst>
-                <a:ext uri="{FF2B5EF4-FFF2-40B4-BE49-F238E27FC236}">
-                  <a16:creationId xmlns:a16="http://schemas.microsoft.com/office/drawing/2014/main" id="{67D61FBD-E531-1326-0C48-8BF9669015EF}"/>
-                </a:ext>
-              </a:extLst>
-            </p:cNvPr>
-            <p:cNvCxnSpPr>
-              <a:cxnSpLocks/>
-              <a:stCxn id="1030" idx="3"/>
-              <a:endCxn id="2050" idx="1"/>
-            </p:cNvCxnSpPr>
-            <p:nvPr/>
-          </p:nvCxnSpPr>
-          <p:spPr>
-            <a:xfrm flipV="1">
-              <a:off x="1142997" y="2501110"/>
-              <a:ext cx="2226786" cy="370"/>
-            </a:xfrm>
-            <a:prstGeom prst="straightConnector1">
-              <a:avLst/>
-            </a:prstGeom>
-            <a:ln w="9525">
-              <a:solidFill>
-                <a:schemeClr val="bg1">
-                  <a:lumMod val="65000"/>
-                </a:schemeClr>
-              </a:solidFill>
-              <a:tailEnd type="triangle"/>
-            </a:ln>
-          </p:spPr>
-          <p:style>
-            <a:lnRef idx="1">
-              <a:schemeClr val="accent1"/>
-            </a:lnRef>
-            <a:fillRef idx="0">
-              <a:schemeClr val="accent1"/>
-            </a:fillRef>
-            <a:effectRef idx="0">
-              <a:schemeClr val="accent1"/>
-            </a:effectRef>
-            <a:fontRef idx="minor">
-              <a:schemeClr val="tx1"/>
-            </a:fontRef>
-          </p:style>
-        </p:cxnSp>
-        <p:cxnSp>
-          <p:nvCxnSpPr>
-            <p:cNvPr id="114" name="Connecteur droit avec flèche 113">
-              <a:extLst>
-                <a:ext uri="{FF2B5EF4-FFF2-40B4-BE49-F238E27FC236}">
-                  <a16:creationId xmlns:a16="http://schemas.microsoft.com/office/drawing/2014/main" id="{D838041E-F078-6C94-A2B0-03079C59425A}"/>
-                </a:ext>
-              </a:extLst>
-            </p:cNvPr>
-            <p:cNvCxnSpPr>
-              <a:cxnSpLocks/>
-              <a:stCxn id="65" idx="3"/>
-              <a:endCxn id="103" idx="1"/>
-            </p:cNvCxnSpPr>
-            <p:nvPr/>
-          </p:nvCxnSpPr>
-          <p:spPr>
-            <a:xfrm flipV="1">
-              <a:off x="1142993" y="3163317"/>
-              <a:ext cx="2221727" cy="2128"/>
-            </a:xfrm>
-            <a:prstGeom prst="straightConnector1">
-              <a:avLst/>
-            </a:prstGeom>
-            <a:ln w="9525">
-              <a:solidFill>
-                <a:schemeClr val="bg1">
-                  <a:lumMod val="65000"/>
-                </a:schemeClr>
-              </a:solidFill>
-              <a:tailEnd type="triangle"/>
-            </a:ln>
-          </p:spPr>
-          <p:style>
-            <a:lnRef idx="1">
-              <a:schemeClr val="accent1"/>
-            </a:lnRef>
-            <a:fillRef idx="0">
-              <a:schemeClr val="accent1"/>
-            </a:fillRef>
-            <a:effectRef idx="0">
-              <a:schemeClr val="accent1"/>
-            </a:effectRef>
-            <a:fontRef idx="minor">
-              <a:schemeClr val="tx1"/>
-            </a:fontRef>
-          </p:style>
-        </p:cxnSp>
-        <p:cxnSp>
-          <p:nvCxnSpPr>
-            <p:cNvPr id="119" name="Connecteur droit avec flèche 118">
-              <a:extLst>
-                <a:ext uri="{FF2B5EF4-FFF2-40B4-BE49-F238E27FC236}">
-                  <a16:creationId xmlns:a16="http://schemas.microsoft.com/office/drawing/2014/main" id="{71456FE5-64C3-8B7D-7CCF-34EA9321C3CA}"/>
-                </a:ext>
-              </a:extLst>
-            </p:cNvPr>
-            <p:cNvCxnSpPr>
-              <a:cxnSpLocks/>
-              <a:stCxn id="68" idx="3"/>
-              <a:endCxn id="104" idx="1"/>
-            </p:cNvCxnSpPr>
-            <p:nvPr/>
-          </p:nvCxnSpPr>
-          <p:spPr>
-            <a:xfrm flipV="1">
-              <a:off x="1142991" y="3876356"/>
-              <a:ext cx="2196200" cy="782"/>
-            </a:xfrm>
-            <a:prstGeom prst="straightConnector1">
-              <a:avLst/>
-            </a:prstGeom>
-            <a:ln w="9525">
-              <a:solidFill>
-                <a:schemeClr val="bg1">
-                  <a:lumMod val="65000"/>
-                </a:schemeClr>
-              </a:solidFill>
-              <a:tailEnd type="triangle"/>
-            </a:ln>
-          </p:spPr>
-          <p:style>
-            <a:lnRef idx="1">
-              <a:schemeClr val="accent1"/>
-            </a:lnRef>
-            <a:fillRef idx="0">
-              <a:schemeClr val="accent1"/>
-            </a:fillRef>
-            <a:effectRef idx="0">
-              <a:schemeClr val="accent1"/>
-            </a:effectRef>
-            <a:fontRef idx="minor">
-              <a:schemeClr val="tx1"/>
-            </a:fontRef>
-          </p:style>
-        </p:cxnSp>
-        <p:pic>
-          <p:nvPicPr>
-            <p:cNvPr id="123" name="Image 122">
-              <a:extLst>
-                <a:ext uri="{FF2B5EF4-FFF2-40B4-BE49-F238E27FC236}">
-                  <a16:creationId xmlns:a16="http://schemas.microsoft.com/office/drawing/2014/main" id="{D715FB7A-A546-1D86-6C47-6E592D4CF67D}"/>
-                </a:ext>
-              </a:extLst>
-            </p:cNvPr>
-            <p:cNvPicPr>
-              <a:picLocks noChangeAspect="1"/>
-            </p:cNvPicPr>
-            <p:nvPr/>
-          </p:nvPicPr>
-          <p:blipFill>
-            <a:blip r:embed="rId13"/>
-            <a:stretch>
-              <a:fillRect/>
-            </a:stretch>
-          </p:blipFill>
-          <p:spPr>
-            <a:xfrm>
-              <a:off x="3305340" y="2221695"/>
-              <a:ext cx="277668" cy="193267"/>
-            </a:xfrm>
-            <a:prstGeom prst="rect">
-              <a:avLst/>
-            </a:prstGeom>
-            <a:ln>
-              <a:noFill/>
-            </a:ln>
-          </p:spPr>
-        </p:pic>
-        <p:pic>
-          <p:nvPicPr>
-            <p:cNvPr id="124" name="Image 123">
-              <a:extLst>
-                <a:ext uri="{FF2B5EF4-FFF2-40B4-BE49-F238E27FC236}">
-                  <a16:creationId xmlns:a16="http://schemas.microsoft.com/office/drawing/2014/main" id="{C5293EF4-20E0-DF10-D159-DD1506BA9014}"/>
-                </a:ext>
-              </a:extLst>
-            </p:cNvPr>
-            <p:cNvPicPr>
-              <a:picLocks noChangeAspect="1"/>
-            </p:cNvPicPr>
-            <p:nvPr/>
-          </p:nvPicPr>
-          <p:blipFill>
-            <a:blip r:embed="rId13"/>
-            <a:stretch>
-              <a:fillRect/>
-            </a:stretch>
-          </p:blipFill>
-          <p:spPr>
-            <a:xfrm>
-              <a:off x="3316145" y="2905022"/>
-              <a:ext cx="277668" cy="193267"/>
-            </a:xfrm>
-            <a:prstGeom prst="rect">
-              <a:avLst/>
-            </a:prstGeom>
-            <a:ln>
-              <a:noFill/>
-            </a:ln>
-          </p:spPr>
-        </p:pic>
-        <p:pic>
-          <p:nvPicPr>
-            <p:cNvPr id="125" name="Image 124">
-              <a:extLst>
-                <a:ext uri="{FF2B5EF4-FFF2-40B4-BE49-F238E27FC236}">
-                  <a16:creationId xmlns:a16="http://schemas.microsoft.com/office/drawing/2014/main" id="{33AAD6E8-755C-ADC6-DD82-513A7A7A0F5B}"/>
-                </a:ext>
-              </a:extLst>
-            </p:cNvPr>
-            <p:cNvPicPr>
-              <a:picLocks noChangeAspect="1"/>
-            </p:cNvPicPr>
-            <p:nvPr/>
-          </p:nvPicPr>
-          <p:blipFill>
-            <a:blip r:embed="rId13"/>
-            <a:stretch>
-              <a:fillRect/>
-            </a:stretch>
-          </p:blipFill>
-          <p:spPr>
-            <a:xfrm>
-              <a:off x="3305323" y="3593675"/>
-              <a:ext cx="277668" cy="193267"/>
-            </a:xfrm>
-            <a:prstGeom prst="rect">
-              <a:avLst/>
-            </a:prstGeom>
-            <a:ln>
-              <a:noFill/>
-            </a:ln>
-          </p:spPr>
-        </p:pic>
-        <p:pic>
-          <p:nvPicPr>
-            <p:cNvPr id="126" name="Image 125">
-              <a:extLst>
-                <a:ext uri="{FF2B5EF4-FFF2-40B4-BE49-F238E27FC236}">
-                  <a16:creationId xmlns:a16="http://schemas.microsoft.com/office/drawing/2014/main" id="{CDFE02BC-1F91-5E6A-387E-5166BAEB4B47}"/>
-                </a:ext>
-              </a:extLst>
-            </p:cNvPr>
-            <p:cNvPicPr>
-              <a:picLocks noChangeAspect="1"/>
-            </p:cNvPicPr>
-            <p:nvPr/>
-          </p:nvPicPr>
-          <p:blipFill>
-            <a:blip r:embed="rId13"/>
-            <a:stretch>
-              <a:fillRect/>
-            </a:stretch>
-          </p:blipFill>
-          <p:spPr>
-            <a:xfrm>
-              <a:off x="3324300" y="1569286"/>
-              <a:ext cx="277668" cy="193267"/>
-            </a:xfrm>
-            <a:prstGeom prst="rect">
-              <a:avLst/>
-            </a:prstGeom>
-            <a:ln>
-              <a:noFill/>
-            </a:ln>
-          </p:spPr>
-        </p:pic>
-        <p:cxnSp>
-          <p:nvCxnSpPr>
-            <p:cNvPr id="2055" name="Connecteur droit avec flèche 2054">
-              <a:extLst>
-                <a:ext uri="{FF2B5EF4-FFF2-40B4-BE49-F238E27FC236}">
-                  <a16:creationId xmlns:a16="http://schemas.microsoft.com/office/drawing/2014/main" id="{87E620DB-CBC1-5464-4E1E-A4B454C8BE5D}"/>
-                </a:ext>
-              </a:extLst>
-            </p:cNvPr>
-            <p:cNvCxnSpPr>
-              <a:cxnSpLocks/>
-              <a:stCxn id="1032" idx="3"/>
-              <a:endCxn id="102" idx="1"/>
-            </p:cNvCxnSpPr>
-            <p:nvPr/>
-          </p:nvCxnSpPr>
-          <p:spPr>
-            <a:xfrm flipV="1">
-              <a:off x="2973921" y="1848802"/>
-              <a:ext cx="404362" cy="13"/>
-            </a:xfrm>
-            <a:prstGeom prst="straightConnector1">
-              <a:avLst/>
-            </a:prstGeom>
-            <a:ln w="9525">
-              <a:solidFill>
-                <a:schemeClr val="bg1">
-                  <a:lumMod val="65000"/>
-                </a:schemeClr>
-              </a:solidFill>
-              <a:tailEnd type="triangle"/>
-            </a:ln>
-          </p:spPr>
-          <p:style>
-            <a:lnRef idx="1">
-              <a:schemeClr val="accent1"/>
-            </a:lnRef>
-            <a:fillRef idx="0">
-              <a:schemeClr val="accent1"/>
-            </a:fillRef>
-            <a:effectRef idx="0">
-              <a:schemeClr val="accent1"/>
-            </a:effectRef>
-            <a:fontRef idx="minor">
-              <a:schemeClr val="tx1"/>
-            </a:fontRef>
-          </p:style>
-        </p:cxnSp>
-      </p:grpSp>
+          </p:cNvPr>
+          <p:cNvPicPr>
+            <a:picLocks noChangeAspect="1"/>
+          </p:cNvPicPr>
+          <p:nvPr/>
+        </p:nvPicPr>
+        <p:blipFill>
+          <a:blip r:embed="rId7"/>
+          <a:stretch>
+            <a:fillRect/>
+          </a:stretch>
+        </p:blipFill>
+        <p:spPr>
+          <a:xfrm>
+            <a:off x="3927166" y="4106965"/>
+            <a:ext cx="347790" cy="416048"/>
+          </a:xfrm>
+          <a:prstGeom prst="rect">
+            <a:avLst/>
+          </a:prstGeom>
+        </p:spPr>
+      </p:pic>
       <p:pic>
         <p:nvPicPr>
           <p:cNvPr id="2068" name="Picture 8">
@@ -34083,7 +32622,7 @@
           <p:nvPr/>
         </p:nvPicPr>
         <p:blipFill>
-          <a:blip r:embed="rId14">
+          <a:blip r:embed="rId11">
             <a:extLst>
               <a:ext uri="{28A0092B-C50C-407E-A947-70E740481C1C}">
                 <a14:useLocalDpi xmlns:a14="http://schemas.microsoft.com/office/drawing/2010/main" val="0"/>
@@ -34097,7 +32636,7 @@
         </p:blipFill>
         <p:spPr bwMode="auto">
           <a:xfrm>
-            <a:off x="8471325" y="2460200"/>
+            <a:off x="8471325" y="2409930"/>
             <a:ext cx="519001" cy="692001"/>
           </a:xfrm>
           <a:prstGeom prst="rect">
@@ -34177,420 +32716,399 @@
           </a:p>
         </p:txBody>
       </p:sp>
-      <p:grpSp>
-        <p:nvGrpSpPr>
-          <p:cNvPr id="17" name="Groupe 16">
+      <p:pic>
+        <p:nvPicPr>
+          <p:cNvPr id="2052" name="Picture 4">
             <a:extLst>
               <a:ext uri="{FF2B5EF4-FFF2-40B4-BE49-F238E27FC236}">
-                <a16:creationId xmlns:a16="http://schemas.microsoft.com/office/drawing/2014/main" id="{618688FD-4D2F-7A63-8807-ABB66A2C4089}"/>
+                <a16:creationId xmlns:a16="http://schemas.microsoft.com/office/drawing/2014/main" id="{FCCA093A-E48A-7B59-31BE-E1F8F80AD69D}"/>
               </a:ext>
             </a:extLst>
           </p:cNvPr>
-          <p:cNvGrpSpPr/>
+          <p:cNvPicPr>
+            <a:picLocks noChangeAspect="1" noChangeArrowheads="1"/>
+          </p:cNvPicPr>
           <p:nvPr/>
-        </p:nvGrpSpPr>
-        <p:grpSpPr>
-          <a:xfrm>
-            <a:off x="6540706" y="1351552"/>
-            <a:ext cx="1680908" cy="3145228"/>
-            <a:chOff x="6540706" y="1351552"/>
-            <a:chExt cx="1680908" cy="3145228"/>
-          </a:xfrm>
-        </p:grpSpPr>
-        <p:pic>
-          <p:nvPicPr>
-            <p:cNvPr id="2052" name="Picture 4">
-              <a:extLst>
-                <a:ext uri="{FF2B5EF4-FFF2-40B4-BE49-F238E27FC236}">
-                  <a16:creationId xmlns:a16="http://schemas.microsoft.com/office/drawing/2014/main" id="{FCCA093A-E48A-7B59-31BE-E1F8F80AD69D}"/>
-                </a:ext>
-              </a:extLst>
-            </p:cNvPr>
-            <p:cNvPicPr>
-              <a:picLocks noChangeAspect="1" noChangeArrowheads="1"/>
-            </p:cNvPicPr>
-            <p:nvPr/>
-          </p:nvPicPr>
-          <p:blipFill>
-            <a:blip r:embed="rId15">
-              <a:extLst>
-                <a:ext uri="{28A0092B-C50C-407E-A947-70E740481C1C}">
-                  <a14:useLocalDpi xmlns:a14="http://schemas.microsoft.com/office/drawing/2010/main" val="0"/>
-                </a:ext>
-              </a:extLst>
-            </a:blip>
-            <a:srcRect/>
-            <a:stretch>
-              <a:fillRect/>
-            </a:stretch>
-          </p:blipFill>
-          <p:spPr bwMode="auto">
-            <a:xfrm>
-              <a:off x="7151687" y="1351552"/>
-              <a:ext cx="872238" cy="688609"/>
-            </a:xfrm>
-            <a:prstGeom prst="rect">
-              <a:avLst/>
-            </a:prstGeom>
-            <a:noFill/>
+        </p:nvPicPr>
+        <p:blipFill rotWithShape="1">
+          <a:blip r:embed="rId12">
             <a:extLst>
-              <a:ext uri="{909E8E84-426E-40DD-AFC4-6F175D3DCCD1}">
-                <a14:hiddenFill xmlns:a14="http://schemas.microsoft.com/office/drawing/2010/main">
-                  <a:solidFill>
-                    <a:srgbClr val="FFFFFF"/>
-                  </a:solidFill>
-                </a14:hiddenFill>
+              <a:ext uri="{28A0092B-C50C-407E-A947-70E740481C1C}">
+                <a14:useLocalDpi xmlns:a14="http://schemas.microsoft.com/office/drawing/2010/main" val="0"/>
               </a:ext>
             </a:extLst>
-          </p:spPr>
-        </p:pic>
-        <p:pic>
-          <p:nvPicPr>
-            <p:cNvPr id="43" name="Picture 2">
-              <a:extLst>
-                <a:ext uri="{FF2B5EF4-FFF2-40B4-BE49-F238E27FC236}">
-                  <a16:creationId xmlns:a16="http://schemas.microsoft.com/office/drawing/2014/main" id="{A31CCBD7-31A9-6123-B61B-FB210F650877}"/>
-                </a:ext>
-              </a:extLst>
-            </p:cNvPr>
-            <p:cNvPicPr>
-              <a:picLocks noChangeAspect="1" noChangeArrowheads="1"/>
-            </p:cNvPicPr>
-            <p:nvPr/>
-          </p:nvPicPr>
-          <p:blipFill rotWithShape="1">
-            <a:blip r:embed="rId8">
-              <a:extLst>
-                <a:ext uri="{28A0092B-C50C-407E-A947-70E740481C1C}">
-                  <a14:useLocalDpi xmlns:a14="http://schemas.microsoft.com/office/drawing/2010/main" val="0"/>
-                </a:ext>
-              </a:extLst>
-            </a:blip>
-            <a:srcRect l="15783" t="15290" r="14205" b="17134"/>
-            <a:stretch>
-              <a:fillRect/>
-            </a:stretch>
-          </p:blipFill>
-          <p:spPr bwMode="auto">
-            <a:xfrm>
-              <a:off x="6540706" y="3950826"/>
-              <a:ext cx="565643" cy="545954"/>
-            </a:xfrm>
-            <a:prstGeom prst="rect">
-              <a:avLst/>
-            </a:prstGeom>
-            <a:noFill/>
+          </a:blip>
+          <a:srcRect l="12661" t="20885" r="16005" b="23808"/>
+          <a:stretch>
+            <a:fillRect/>
+          </a:stretch>
+        </p:blipFill>
+        <p:spPr bwMode="auto">
+          <a:xfrm>
+            <a:off x="7785778" y="1885388"/>
+            <a:ext cx="435834" cy="266773"/>
+          </a:xfrm>
+          <a:prstGeom prst="rect">
+            <a:avLst/>
+          </a:prstGeom>
+          <a:noFill/>
+          <a:extLst>
+            <a:ext uri="{909E8E84-426E-40DD-AFC4-6F175D3DCCD1}">
+              <a14:hiddenFill xmlns:a14="http://schemas.microsoft.com/office/drawing/2010/main">
+                <a:solidFill>
+                  <a:srgbClr val="FFFFFF"/>
+                </a:solidFill>
+              </a14:hiddenFill>
+            </a:ext>
+          </a:extLst>
+        </p:spPr>
+      </p:pic>
+      <p:pic>
+        <p:nvPicPr>
+          <p:cNvPr id="43" name="Picture 2">
             <a:extLst>
-              <a:ext uri="{909E8E84-426E-40DD-AFC4-6F175D3DCCD1}">
-                <a14:hiddenFill xmlns:a14="http://schemas.microsoft.com/office/drawing/2010/main">
-                  <a:solidFill>
-                    <a:srgbClr val="FFFFFF"/>
-                  </a:solidFill>
-                </a14:hiddenFill>
+              <a:ext uri="{FF2B5EF4-FFF2-40B4-BE49-F238E27FC236}">
+                <a16:creationId xmlns:a16="http://schemas.microsoft.com/office/drawing/2014/main" id="{A31CCBD7-31A9-6123-B61B-FB210F650877}"/>
               </a:ext>
             </a:extLst>
-          </p:spPr>
-        </p:pic>
-        <p:sp>
-          <p:nvSpPr>
-            <p:cNvPr id="54" name="Rectangle : coins arrondis 53">
-              <a:extLst>
-                <a:ext uri="{FF2B5EF4-FFF2-40B4-BE49-F238E27FC236}">
-                  <a16:creationId xmlns:a16="http://schemas.microsoft.com/office/drawing/2014/main" id="{3E4E5C19-19D1-7DB3-6126-771BB460CA7E}"/>
-                </a:ext>
-              </a:extLst>
-            </p:cNvPr>
-            <p:cNvSpPr/>
-            <p:nvPr/>
-          </p:nvSpPr>
-          <p:spPr>
-            <a:xfrm>
-              <a:off x="7018263" y="1968834"/>
-              <a:ext cx="1098685" cy="584200"/>
-            </a:xfrm>
-            <a:prstGeom prst="roundRect">
-              <a:avLst/>
-            </a:prstGeom>
+          </p:cNvPr>
+          <p:cNvPicPr>
+            <a:picLocks noChangeAspect="1" noChangeArrowheads="1"/>
+          </p:cNvPicPr>
+          <p:nvPr/>
+        </p:nvPicPr>
+        <p:blipFill rotWithShape="1">
+          <a:blip r:embed="rId10">
+            <a:extLst>
+              <a:ext uri="{28A0092B-C50C-407E-A947-70E740481C1C}">
+                <a14:useLocalDpi xmlns:a14="http://schemas.microsoft.com/office/drawing/2010/main" val="0"/>
+              </a:ext>
+            </a:extLst>
+          </a:blip>
+          <a:srcRect l="18363" t="15290" r="18027" b="19432"/>
+          <a:stretch>
+            <a:fillRect/>
+          </a:stretch>
+        </p:blipFill>
+        <p:spPr bwMode="auto">
+          <a:xfrm>
+            <a:off x="7188151" y="4068942"/>
+            <a:ext cx="603504" cy="619316"/>
+          </a:xfrm>
+          <a:prstGeom prst="rect">
+            <a:avLst/>
+          </a:prstGeom>
+          <a:noFill/>
+          <a:extLst>
+            <a:ext uri="{909E8E84-426E-40DD-AFC4-6F175D3DCCD1}">
+              <a14:hiddenFill xmlns:a14="http://schemas.microsoft.com/office/drawing/2010/main">
+                <a:solidFill>
+                  <a:srgbClr val="FFFFFF"/>
+                </a:solidFill>
+              </a14:hiddenFill>
+            </a:ext>
+          </a:extLst>
+        </p:spPr>
+      </p:pic>
+      <p:sp>
+        <p:nvSpPr>
+          <p:cNvPr id="54" name="Rectangle : coins arrondis 53">
+            <a:extLst>
+              <a:ext uri="{FF2B5EF4-FFF2-40B4-BE49-F238E27FC236}">
+                <a16:creationId xmlns:a16="http://schemas.microsoft.com/office/drawing/2014/main" id="{3E4E5C19-19D1-7DB3-6126-771BB460CA7E}"/>
+              </a:ext>
+            </a:extLst>
+          </p:cNvPr>
+          <p:cNvSpPr/>
+          <p:nvPr/>
+        </p:nvSpPr>
+        <p:spPr>
+          <a:xfrm>
+            <a:off x="7018263" y="2271252"/>
+            <a:ext cx="1098685" cy="584200"/>
+          </a:xfrm>
+          <a:prstGeom prst="roundRect">
+            <a:avLst/>
+          </a:prstGeom>
+          <a:solidFill>
+            <a:schemeClr val="bg1">
+              <a:lumMod val="95000"/>
+            </a:schemeClr>
+          </a:solidFill>
+          <a:ln>
+            <a:noFill/>
+          </a:ln>
+        </p:spPr>
+        <p:style>
+          <a:lnRef idx="2">
+            <a:schemeClr val="accent1">
+              <a:shade val="15000"/>
+            </a:schemeClr>
+          </a:lnRef>
+          <a:fillRef idx="1">
+            <a:schemeClr val="accent1"/>
+          </a:fillRef>
+          <a:effectRef idx="0">
+            <a:schemeClr val="accent1"/>
+          </a:effectRef>
+          <a:fontRef idx="minor">
+            <a:schemeClr val="lt1"/>
+          </a:fontRef>
+        </p:style>
+        <p:txBody>
+          <a:bodyPr rtlCol="0" anchor="ctr"/>
+          <a:lstStyle/>
+          <a:p>
+            <a:pPr algn="ctr"/>
+            <a:endParaRPr lang="fr-FR"/>
+          </a:p>
+        </p:txBody>
+      </p:sp>
+      <p:sp>
+        <p:nvSpPr>
+          <p:cNvPr id="55" name="ZoneTexte 54">
+            <a:extLst>
+              <a:ext uri="{FF2B5EF4-FFF2-40B4-BE49-F238E27FC236}">
+                <a16:creationId xmlns:a16="http://schemas.microsoft.com/office/drawing/2014/main" id="{C4EB1607-BC4B-15A3-0324-3D29B9154D63}"/>
+              </a:ext>
+            </a:extLst>
+          </p:cNvPr>
+          <p:cNvSpPr txBox="1"/>
+          <p:nvPr/>
+        </p:nvSpPr>
+        <p:spPr>
+          <a:xfrm>
+            <a:off x="6985463" y="2328730"/>
+            <a:ext cx="1156330" cy="446276"/>
+          </a:xfrm>
+          <a:prstGeom prst="rect">
+            <a:avLst/>
+          </a:prstGeom>
+          <a:noFill/>
+        </p:spPr>
+        <p:txBody>
+          <a:bodyPr wrap="square" rtlCol="0">
+            <a:spAutoFit/>
+          </a:bodyPr>
+          <a:lstStyle/>
+          <a:p>
+            <a:pPr algn="ctr"/>
+            <a:r>
+              <a:rPr lang="fr-FR" sz="900" dirty="0"/>
+              <a:t>EDA </a:t>
+            </a:r>
+          </a:p>
+          <a:p>
+            <a:pPr algn="ctr"/>
+            <a:r>
+              <a:rPr lang="fr-FR" sz="700" dirty="0"/>
+              <a:t>descriptive et comparative</a:t>
+            </a:r>
+          </a:p>
+        </p:txBody>
+      </p:sp>
+      <p:sp>
+        <p:nvSpPr>
+          <p:cNvPr id="56" name="Rectangle : coins arrondis 55">
+            <a:extLst>
+              <a:ext uri="{FF2B5EF4-FFF2-40B4-BE49-F238E27FC236}">
+                <a16:creationId xmlns:a16="http://schemas.microsoft.com/office/drawing/2014/main" id="{34BB09D2-59B3-0F52-1024-4F32B01B2F53}"/>
+              </a:ext>
+            </a:extLst>
+          </p:cNvPr>
+          <p:cNvSpPr/>
+          <p:nvPr/>
+        </p:nvSpPr>
+        <p:spPr>
+          <a:xfrm>
+            <a:off x="7012431" y="2970222"/>
+            <a:ext cx="1104517" cy="584200"/>
+          </a:xfrm>
+          <a:prstGeom prst="roundRect">
+            <a:avLst/>
+          </a:prstGeom>
+          <a:solidFill>
+            <a:schemeClr val="bg1">
+              <a:lumMod val="95000"/>
+            </a:schemeClr>
+          </a:solidFill>
+          <a:ln>
+            <a:noFill/>
+          </a:ln>
+        </p:spPr>
+        <p:style>
+          <a:lnRef idx="2">
+            <a:schemeClr val="accent1">
+              <a:shade val="15000"/>
+            </a:schemeClr>
+          </a:lnRef>
+          <a:fillRef idx="1">
+            <a:schemeClr val="accent1"/>
+          </a:fillRef>
+          <a:effectRef idx="0">
+            <a:schemeClr val="accent1"/>
+          </a:effectRef>
+          <a:fontRef idx="minor">
+            <a:schemeClr val="lt1"/>
+          </a:fontRef>
+        </p:style>
+        <p:txBody>
+          <a:bodyPr rtlCol="0" anchor="ctr"/>
+          <a:lstStyle/>
+          <a:p>
+            <a:pPr algn="ctr"/>
+            <a:endParaRPr lang="fr-FR"/>
+          </a:p>
+        </p:txBody>
+      </p:sp>
+      <p:sp>
+        <p:nvSpPr>
+          <p:cNvPr id="57" name="ZoneTexte 56">
+            <a:extLst>
+              <a:ext uri="{FF2B5EF4-FFF2-40B4-BE49-F238E27FC236}">
+                <a16:creationId xmlns:a16="http://schemas.microsoft.com/office/drawing/2014/main" id="{685F5B80-27B1-45A6-3DF8-0CF7271056CC}"/>
+              </a:ext>
+            </a:extLst>
+          </p:cNvPr>
+          <p:cNvSpPr txBox="1"/>
+          <p:nvPr/>
+        </p:nvSpPr>
+        <p:spPr>
+          <a:xfrm>
+            <a:off x="6985463" y="3085576"/>
+            <a:ext cx="1156330" cy="338554"/>
+          </a:xfrm>
+          <a:prstGeom prst="rect">
+            <a:avLst/>
+          </a:prstGeom>
+          <a:noFill/>
+        </p:spPr>
+        <p:txBody>
+          <a:bodyPr wrap="square" rtlCol="0">
+            <a:spAutoFit/>
+          </a:bodyPr>
+          <a:lstStyle/>
+          <a:p>
+            <a:pPr algn="ctr"/>
+            <a:r>
+              <a:rPr lang="fr-FR" sz="900" dirty="0"/>
+              <a:t>PREDICT </a:t>
+            </a:r>
+          </a:p>
+          <a:p>
+            <a:pPr algn="ctr"/>
+            <a:r>
+              <a:rPr lang="fr-FR" sz="700" dirty="0"/>
+              <a:t>Sur 3 jours glissants</a:t>
+            </a:r>
+          </a:p>
+        </p:txBody>
+      </p:sp>
+      <p:sp>
+        <p:nvSpPr>
+          <p:cNvPr id="1074" name="Rectangle : coins arrondis 1073">
+            <a:extLst>
+              <a:ext uri="{FF2B5EF4-FFF2-40B4-BE49-F238E27FC236}">
+                <a16:creationId xmlns:a16="http://schemas.microsoft.com/office/drawing/2014/main" id="{4162FACA-EA89-9D97-B392-632929E9443D}"/>
+              </a:ext>
+            </a:extLst>
+          </p:cNvPr>
+          <p:cNvSpPr/>
+          <p:nvPr/>
+        </p:nvSpPr>
+        <p:spPr>
+          <a:xfrm>
+            <a:off x="6881481" y="1873629"/>
+            <a:ext cx="1378407" cy="1764604"/>
+          </a:xfrm>
+          <a:prstGeom prst="roundRect">
+            <a:avLst>
+              <a:gd name="adj" fmla="val 7978"/>
+            </a:avLst>
+          </a:prstGeom>
+          <a:noFill/>
+          <a:ln w="9525">
             <a:solidFill>
-              <a:schemeClr val="bg1">
-                <a:lumMod val="95000"/>
-              </a:schemeClr>
+              <a:srgbClr val="FFC000"/>
             </a:solidFill>
-            <a:ln>
-              <a:noFill/>
-            </a:ln>
-          </p:spPr>
-          <p:style>
-            <a:lnRef idx="2">
-              <a:schemeClr val="accent1">
-                <a:shade val="15000"/>
-              </a:schemeClr>
-            </a:lnRef>
-            <a:fillRef idx="1">
-              <a:schemeClr val="accent1"/>
-            </a:fillRef>
-            <a:effectRef idx="0">
-              <a:schemeClr val="accent1"/>
-            </a:effectRef>
-            <a:fontRef idx="minor">
-              <a:schemeClr val="lt1"/>
-            </a:fontRef>
-          </p:style>
-          <p:txBody>
-            <a:bodyPr rtlCol="0" anchor="ctr"/>
-            <a:lstStyle/>
-            <a:p>
-              <a:pPr algn="ctr"/>
-              <a:endParaRPr lang="fr-FR"/>
-            </a:p>
-          </p:txBody>
-        </p:sp>
-        <p:sp>
-          <p:nvSpPr>
-            <p:cNvPr id="55" name="ZoneTexte 54">
-              <a:extLst>
-                <a:ext uri="{FF2B5EF4-FFF2-40B4-BE49-F238E27FC236}">
-                  <a16:creationId xmlns:a16="http://schemas.microsoft.com/office/drawing/2014/main" id="{C4EB1607-BC4B-15A3-0324-3D29B9154D63}"/>
-                </a:ext>
-              </a:extLst>
-            </p:cNvPr>
-            <p:cNvSpPr txBox="1"/>
-            <p:nvPr/>
-          </p:nvSpPr>
-          <p:spPr>
-            <a:xfrm>
-              <a:off x="6985463" y="2026312"/>
-              <a:ext cx="1156330" cy="492443"/>
-            </a:xfrm>
-            <a:prstGeom prst="rect">
-              <a:avLst/>
-            </a:prstGeom>
+            <a:prstDash val="dash"/>
+          </a:ln>
+        </p:spPr>
+        <p:style>
+          <a:lnRef idx="2">
+            <a:schemeClr val="accent1">
+              <a:shade val="15000"/>
+            </a:schemeClr>
+          </a:lnRef>
+          <a:fillRef idx="1">
+            <a:schemeClr val="accent1"/>
+          </a:fillRef>
+          <a:effectRef idx="0">
+            <a:schemeClr val="accent1"/>
+          </a:effectRef>
+          <a:fontRef idx="minor">
+            <a:schemeClr val="lt1"/>
+          </a:fontRef>
+        </p:style>
+        <p:txBody>
+          <a:bodyPr rtlCol="0" anchor="ctr"/>
+          <a:lstStyle/>
+          <a:p>
+            <a:pPr algn="ctr"/>
+            <a:endParaRPr lang="fr-FR" dirty="0"/>
+          </a:p>
+        </p:txBody>
+      </p:sp>
+      <p:sp>
+        <p:nvSpPr>
+          <p:cNvPr id="2097" name="Rectangle 2096">
+            <a:extLst>
+              <a:ext uri="{FF2B5EF4-FFF2-40B4-BE49-F238E27FC236}">
+                <a16:creationId xmlns:a16="http://schemas.microsoft.com/office/drawing/2014/main" id="{ADF20F1D-E32A-83D7-1C9F-ED56E1ADF5A6}"/>
+              </a:ext>
+            </a:extLst>
+          </p:cNvPr>
+          <p:cNvSpPr/>
+          <p:nvPr/>
+        </p:nvSpPr>
+        <p:spPr>
+          <a:xfrm>
+            <a:off x="7908699" y="3312398"/>
+            <a:ext cx="362541" cy="326213"/>
+          </a:xfrm>
+          <a:prstGeom prst="rect">
+            <a:avLst/>
+          </a:prstGeom>
+          <a:noFill/>
+          <a:ln>
             <a:noFill/>
-          </p:spPr>
-          <p:txBody>
-            <a:bodyPr wrap="square" rtlCol="0">
-              <a:spAutoFit/>
-            </a:bodyPr>
-            <a:lstStyle/>
-            <a:p>
-              <a:pPr algn="ctr"/>
-              <a:r>
-                <a:rPr lang="fr-FR" sz="1000" dirty="0"/>
-                <a:t>EDA </a:t>
-              </a:r>
-            </a:p>
-            <a:p>
-              <a:pPr algn="ctr"/>
-              <a:r>
-                <a:rPr lang="fr-FR" sz="800" dirty="0"/>
-                <a:t>descriptive et comparative</a:t>
-              </a:r>
-            </a:p>
-          </p:txBody>
-        </p:sp>
-        <p:sp>
-          <p:nvSpPr>
-            <p:cNvPr id="56" name="Rectangle : coins arrondis 55">
-              <a:extLst>
-                <a:ext uri="{FF2B5EF4-FFF2-40B4-BE49-F238E27FC236}">
-                  <a16:creationId xmlns:a16="http://schemas.microsoft.com/office/drawing/2014/main" id="{34BB09D2-59B3-0F52-1024-4F32B01B2F53}"/>
-                </a:ext>
-              </a:extLst>
-            </p:cNvPr>
-            <p:cNvSpPr/>
-            <p:nvPr/>
-          </p:nvSpPr>
-          <p:spPr>
-            <a:xfrm>
-              <a:off x="6981071" y="2960216"/>
-              <a:ext cx="1135877" cy="584200"/>
-            </a:xfrm>
-            <a:prstGeom prst="roundRect">
-              <a:avLst/>
-            </a:prstGeom>
-            <a:solidFill>
-              <a:schemeClr val="bg1">
-                <a:lumMod val="95000"/>
-              </a:schemeClr>
-            </a:solidFill>
-            <a:ln>
-              <a:noFill/>
-            </a:ln>
-          </p:spPr>
-          <p:style>
-            <a:lnRef idx="2">
-              <a:schemeClr val="accent1">
-                <a:shade val="15000"/>
-              </a:schemeClr>
-            </a:lnRef>
-            <a:fillRef idx="1">
-              <a:schemeClr val="accent1"/>
-            </a:fillRef>
-            <a:effectRef idx="0">
-              <a:schemeClr val="accent1"/>
-            </a:effectRef>
-            <a:fontRef idx="minor">
-              <a:schemeClr val="lt1"/>
-            </a:fontRef>
-          </p:style>
-          <p:txBody>
-            <a:bodyPr rtlCol="0" anchor="ctr"/>
-            <a:lstStyle/>
-            <a:p>
-              <a:pPr algn="ctr"/>
-              <a:endParaRPr lang="fr-FR"/>
-            </a:p>
-          </p:txBody>
-        </p:sp>
-        <p:sp>
-          <p:nvSpPr>
-            <p:cNvPr id="57" name="ZoneTexte 56">
-              <a:extLst>
-                <a:ext uri="{FF2B5EF4-FFF2-40B4-BE49-F238E27FC236}">
-                  <a16:creationId xmlns:a16="http://schemas.microsoft.com/office/drawing/2014/main" id="{685F5B80-27B1-45A6-3DF8-0CF7271056CC}"/>
-                </a:ext>
-              </a:extLst>
-            </p:cNvPr>
-            <p:cNvSpPr txBox="1"/>
-            <p:nvPr/>
-          </p:nvSpPr>
-          <p:spPr>
-            <a:xfrm>
-              <a:off x="6985463" y="3075570"/>
-              <a:ext cx="1156330" cy="369332"/>
-            </a:xfrm>
-            <a:prstGeom prst="rect">
-              <a:avLst/>
-            </a:prstGeom>
-            <a:noFill/>
-          </p:spPr>
-          <p:txBody>
-            <a:bodyPr wrap="square" rtlCol="0">
-              <a:spAutoFit/>
-            </a:bodyPr>
-            <a:lstStyle/>
-            <a:p>
-              <a:pPr algn="ctr"/>
-              <a:r>
-                <a:rPr lang="fr-FR" sz="1000" dirty="0"/>
-                <a:t>PREDICT </a:t>
-              </a:r>
-            </a:p>
-            <a:p>
-              <a:pPr algn="ctr"/>
-              <a:r>
-                <a:rPr lang="fr-FR" sz="800" dirty="0"/>
-                <a:t>Sur 3 jours glissants</a:t>
-              </a:r>
-            </a:p>
-          </p:txBody>
-        </p:sp>
-        <p:sp>
-          <p:nvSpPr>
-            <p:cNvPr id="1074" name="Rectangle : coins arrondis 1073">
-              <a:extLst>
-                <a:ext uri="{FF2B5EF4-FFF2-40B4-BE49-F238E27FC236}">
-                  <a16:creationId xmlns:a16="http://schemas.microsoft.com/office/drawing/2014/main" id="{4162FACA-EA89-9D97-B392-632929E9443D}"/>
-                </a:ext>
-              </a:extLst>
-            </p:cNvPr>
-            <p:cNvSpPr/>
-            <p:nvPr/>
-          </p:nvSpPr>
-          <p:spPr>
-            <a:xfrm>
-              <a:off x="6955001" y="1904349"/>
-              <a:ext cx="1228499" cy="1800970"/>
-            </a:xfrm>
-            <a:prstGeom prst="roundRect">
-              <a:avLst>
-                <a:gd name="adj" fmla="val 7978"/>
-              </a:avLst>
-            </a:prstGeom>
-            <a:noFill/>
-            <a:ln w="9525">
-              <a:solidFill>
-                <a:srgbClr val="FFC000"/>
-              </a:solidFill>
-              <a:prstDash val="dash"/>
-            </a:ln>
-          </p:spPr>
-          <p:style>
-            <a:lnRef idx="2">
-              <a:schemeClr val="accent1">
-                <a:shade val="15000"/>
-              </a:schemeClr>
-            </a:lnRef>
-            <a:fillRef idx="1">
-              <a:schemeClr val="accent1"/>
-            </a:fillRef>
-            <a:effectRef idx="0">
-              <a:schemeClr val="accent1"/>
-            </a:effectRef>
-            <a:fontRef idx="minor">
-              <a:schemeClr val="lt1"/>
-            </a:fontRef>
-          </p:style>
-          <p:txBody>
-            <a:bodyPr rtlCol="0" anchor="ctr"/>
-            <a:lstStyle/>
-            <a:p>
-              <a:pPr algn="ctr"/>
-              <a:endParaRPr lang="fr-FR" dirty="0"/>
-            </a:p>
-          </p:txBody>
-        </p:sp>
-        <p:sp>
-          <p:nvSpPr>
-            <p:cNvPr id="2097" name="Rectangle 2096">
-              <a:extLst>
-                <a:ext uri="{FF2B5EF4-FFF2-40B4-BE49-F238E27FC236}">
-                  <a16:creationId xmlns:a16="http://schemas.microsoft.com/office/drawing/2014/main" id="{ADF20F1D-E32A-83D7-1C9F-ED56E1ADF5A6}"/>
-                </a:ext>
-              </a:extLst>
-            </p:cNvPr>
-            <p:cNvSpPr/>
-            <p:nvPr/>
-          </p:nvSpPr>
-          <p:spPr>
-            <a:xfrm>
-              <a:off x="7859073" y="3333557"/>
-              <a:ext cx="362541" cy="326213"/>
-            </a:xfrm>
-            <a:prstGeom prst="rect">
-              <a:avLst/>
-            </a:prstGeom>
-            <a:noFill/>
-            <a:ln>
-              <a:noFill/>
-            </a:ln>
-          </p:spPr>
-          <p:style>
-            <a:lnRef idx="2">
-              <a:schemeClr val="accent1">
-                <a:shade val="15000"/>
-              </a:schemeClr>
-            </a:lnRef>
-            <a:fillRef idx="1">
-              <a:schemeClr val="accent1"/>
-            </a:fillRef>
-            <a:effectRef idx="0">
-              <a:schemeClr val="accent1"/>
-            </a:effectRef>
-            <a:fontRef idx="minor">
-              <a:schemeClr val="lt1"/>
-            </a:fontRef>
-          </p:style>
-          <p:txBody>
-            <a:bodyPr rtlCol="0" anchor="ctr"/>
-            <a:lstStyle/>
-            <a:p>
-              <a:pPr algn="ctr"/>
-              <a:endParaRPr lang="fr-FR"/>
-            </a:p>
-          </p:txBody>
-        </p:sp>
-      </p:grpSp>
+          </a:ln>
+        </p:spPr>
+        <p:style>
+          <a:lnRef idx="2">
+            <a:schemeClr val="accent1">
+              <a:shade val="15000"/>
+            </a:schemeClr>
+          </a:lnRef>
+          <a:fillRef idx="1">
+            <a:schemeClr val="accent1"/>
+          </a:fillRef>
+          <a:effectRef idx="0">
+            <a:schemeClr val="accent1"/>
+          </a:effectRef>
+          <a:fontRef idx="minor">
+            <a:schemeClr val="lt1"/>
+          </a:fontRef>
+        </p:style>
+        <p:txBody>
+          <a:bodyPr rtlCol="0" anchor="ctr"/>
+          <a:lstStyle/>
+          <a:p>
+            <a:pPr algn="ctr"/>
+            <a:endParaRPr lang="fr-FR" dirty="0"/>
+          </a:p>
+        </p:txBody>
+      </p:sp>
       <p:cxnSp>
         <p:nvCxnSpPr>
           <p:cNvPr id="2101" name="Connecteur droit avec flèche 2100">
@@ -34609,8 +33127,8 @@
         </p:nvCxnSpPr>
         <p:spPr>
           <a:xfrm>
-            <a:off x="8183500" y="2804834"/>
-            <a:ext cx="287825" cy="1367"/>
+            <a:off x="8259888" y="2755931"/>
+            <a:ext cx="211437" cy="0"/>
           </a:xfrm>
           <a:prstGeom prst="straightConnector1">
             <a:avLst/>
@@ -34639,12 +33157,448 @@
           </a:fontRef>
         </p:style>
       </p:cxnSp>
+      <p:cxnSp>
+        <p:nvCxnSpPr>
+          <p:cNvPr id="30" name="Connecteur droit 29">
+            <a:extLst>
+              <a:ext uri="{FF2B5EF4-FFF2-40B4-BE49-F238E27FC236}">
+                <a16:creationId xmlns:a16="http://schemas.microsoft.com/office/drawing/2014/main" id="{DD9C7B50-C6F5-7260-C61A-2CAE5E4C0BF7}"/>
+              </a:ext>
+            </a:extLst>
+          </p:cNvPr>
+          <p:cNvCxnSpPr/>
+          <p:nvPr/>
+        </p:nvCxnSpPr>
+        <p:spPr>
+          <a:xfrm>
+            <a:off x="6450928" y="1458686"/>
+            <a:ext cx="0" cy="3272971"/>
+          </a:xfrm>
+          <a:prstGeom prst="line">
+            <a:avLst/>
+          </a:prstGeom>
+          <a:ln w="19050">
+            <a:solidFill>
+              <a:schemeClr val="bg1">
+                <a:lumMod val="75000"/>
+              </a:schemeClr>
+            </a:solidFill>
+            <a:prstDash val="dash"/>
+          </a:ln>
+        </p:spPr>
+        <p:style>
+          <a:lnRef idx="1">
+            <a:schemeClr val="dk1"/>
+          </a:lnRef>
+          <a:fillRef idx="0">
+            <a:schemeClr val="dk1"/>
+          </a:fillRef>
+          <a:effectRef idx="0">
+            <a:schemeClr val="dk1"/>
+          </a:effectRef>
+          <a:fontRef idx="minor">
+            <a:schemeClr val="tx1"/>
+          </a:fontRef>
+        </p:style>
+      </p:cxnSp>
+      <p:sp>
+        <p:nvSpPr>
+          <p:cNvPr id="46" name="Rectangle : coins arrondis 45">
+            <a:extLst>
+              <a:ext uri="{FF2B5EF4-FFF2-40B4-BE49-F238E27FC236}">
+                <a16:creationId xmlns:a16="http://schemas.microsoft.com/office/drawing/2014/main" id="{E433E364-4228-6856-536E-34873F6A6DC3}"/>
+              </a:ext>
+            </a:extLst>
+          </p:cNvPr>
+          <p:cNvSpPr/>
+          <p:nvPr/>
+        </p:nvSpPr>
+        <p:spPr>
+          <a:xfrm>
+            <a:off x="4797443" y="1817936"/>
+            <a:ext cx="1235879" cy="484858"/>
+          </a:xfrm>
+          <a:prstGeom prst="roundRect">
+            <a:avLst/>
+          </a:prstGeom>
+          <a:solidFill>
+            <a:schemeClr val="bg1">
+              <a:lumMod val="95000"/>
+            </a:schemeClr>
+          </a:solidFill>
+          <a:ln>
+            <a:noFill/>
+          </a:ln>
+        </p:spPr>
+        <p:style>
+          <a:lnRef idx="2">
+            <a:schemeClr val="accent1">
+              <a:shade val="15000"/>
+            </a:schemeClr>
+          </a:lnRef>
+          <a:fillRef idx="1">
+            <a:schemeClr val="accent1"/>
+          </a:fillRef>
+          <a:effectRef idx="0">
+            <a:schemeClr val="accent1"/>
+          </a:effectRef>
+          <a:fontRef idx="minor">
+            <a:schemeClr val="lt1"/>
+          </a:fontRef>
+        </p:style>
+        <p:txBody>
+          <a:bodyPr rtlCol="0" anchor="ctr"/>
+          <a:lstStyle/>
+          <a:p>
+            <a:pPr algn="ctr"/>
+            <a:endParaRPr lang="fr-FR" dirty="0"/>
+          </a:p>
+        </p:txBody>
+      </p:sp>
+      <p:pic>
+        <p:nvPicPr>
+          <p:cNvPr id="1034" name="Picture 10">
+            <a:extLst>
+              <a:ext uri="{FF2B5EF4-FFF2-40B4-BE49-F238E27FC236}">
+                <a16:creationId xmlns:a16="http://schemas.microsoft.com/office/drawing/2014/main" id="{748B16F9-6C53-91C1-4712-424BF6CE8989}"/>
+              </a:ext>
+            </a:extLst>
+          </p:cNvPr>
+          <p:cNvPicPr>
+            <a:picLocks noChangeAspect="1" noChangeArrowheads="1"/>
+          </p:cNvPicPr>
+          <p:nvPr/>
+        </p:nvPicPr>
+        <p:blipFill>
+          <a:blip r:embed="rId13">
+            <a:extLst>
+              <a:ext uri="{28A0092B-C50C-407E-A947-70E740481C1C}">
+                <a14:useLocalDpi xmlns:a14="http://schemas.microsoft.com/office/drawing/2010/main" val="0"/>
+              </a:ext>
+            </a:extLst>
+          </a:blip>
+          <a:srcRect/>
+          <a:stretch>
+            <a:fillRect/>
+          </a:stretch>
+        </p:blipFill>
+        <p:spPr bwMode="auto">
+          <a:xfrm>
+            <a:off x="4595812" y="1580684"/>
+            <a:ext cx="506762" cy="506762"/>
+          </a:xfrm>
+          <a:prstGeom prst="rect">
+            <a:avLst/>
+          </a:prstGeom>
+          <a:noFill/>
+          <a:extLst>
+            <a:ext uri="{909E8E84-426E-40DD-AFC4-6F175D3DCCD1}">
+              <a14:hiddenFill xmlns:a14="http://schemas.microsoft.com/office/drawing/2010/main">
+                <a:solidFill>
+                  <a:srgbClr val="FFFFFF"/>
+                </a:solidFill>
+              </a14:hiddenFill>
+            </a:ext>
+          </a:extLst>
+        </p:spPr>
+      </p:pic>
+      <p:sp>
+        <p:nvSpPr>
+          <p:cNvPr id="44" name="ZoneTexte 43">
+            <a:extLst>
+              <a:ext uri="{FF2B5EF4-FFF2-40B4-BE49-F238E27FC236}">
+                <a16:creationId xmlns:a16="http://schemas.microsoft.com/office/drawing/2014/main" id="{682088E1-064C-5214-7A97-A059E4869B55}"/>
+              </a:ext>
+            </a:extLst>
+          </p:cNvPr>
+          <p:cNvSpPr txBox="1"/>
+          <p:nvPr/>
+        </p:nvSpPr>
+        <p:spPr>
+          <a:xfrm>
+            <a:off x="4900942" y="1841943"/>
+            <a:ext cx="1079654" cy="338554"/>
+          </a:xfrm>
+          <a:prstGeom prst="rect">
+            <a:avLst/>
+          </a:prstGeom>
+          <a:noFill/>
+        </p:spPr>
+        <p:txBody>
+          <a:bodyPr wrap="square" rtlCol="0">
+            <a:spAutoFit/>
+          </a:bodyPr>
+          <a:lstStyle/>
+          <a:p>
+            <a:pPr algn="ctr"/>
+            <a:r>
+              <a:rPr lang="fr-FR" sz="800" b="1" dirty="0"/>
+              <a:t>Entraînement du modèle</a:t>
+            </a:r>
+          </a:p>
+        </p:txBody>
+      </p:sp>
+      <p:cxnSp>
+        <p:nvCxnSpPr>
+          <p:cNvPr id="108" name="Connecteur droit avec flèche 107">
+            <a:extLst>
+              <a:ext uri="{FF2B5EF4-FFF2-40B4-BE49-F238E27FC236}">
+                <a16:creationId xmlns:a16="http://schemas.microsoft.com/office/drawing/2014/main" id="{8FC538F3-E888-6C1B-940B-D6B968D8FCEE}"/>
+              </a:ext>
+            </a:extLst>
+          </p:cNvPr>
+          <p:cNvCxnSpPr>
+            <a:cxnSpLocks/>
+          </p:cNvCxnSpPr>
+          <p:nvPr/>
+        </p:nvCxnSpPr>
+        <p:spPr>
+          <a:xfrm>
+            <a:off x="4233111" y="2035648"/>
+            <a:ext cx="551235" cy="0"/>
+          </a:xfrm>
+          <a:prstGeom prst="straightConnector1">
+            <a:avLst/>
+          </a:prstGeom>
+          <a:ln w="38100">
+            <a:solidFill>
+              <a:srgbClr val="00B050"/>
+            </a:solidFill>
+            <a:tailEnd type="triangle"/>
+          </a:ln>
+        </p:spPr>
+        <p:style>
+          <a:lnRef idx="1">
+            <a:schemeClr val="accent1"/>
+          </a:lnRef>
+          <a:fillRef idx="0">
+            <a:schemeClr val="accent1"/>
+          </a:fillRef>
+          <a:effectRef idx="0">
+            <a:schemeClr val="accent1"/>
+          </a:effectRef>
+          <a:fontRef idx="minor">
+            <a:schemeClr val="tx1"/>
+          </a:fontRef>
+        </p:style>
+      </p:cxnSp>
+      <p:sp>
+        <p:nvSpPr>
+          <p:cNvPr id="4" name="Rectangle : coins arrondis 3">
+            <a:extLst>
+              <a:ext uri="{FF2B5EF4-FFF2-40B4-BE49-F238E27FC236}">
+                <a16:creationId xmlns:a16="http://schemas.microsoft.com/office/drawing/2014/main" id="{967D4A6C-3756-2775-B55E-F408743583CC}"/>
+              </a:ext>
+            </a:extLst>
+          </p:cNvPr>
+          <p:cNvSpPr/>
+          <p:nvPr/>
+        </p:nvSpPr>
+        <p:spPr>
+          <a:xfrm>
+            <a:off x="6450927" y="1304200"/>
+            <a:ext cx="2214439" cy="106642"/>
+          </a:xfrm>
+          <a:prstGeom prst="roundRect">
+            <a:avLst/>
+          </a:prstGeom>
+          <a:solidFill>
+            <a:srgbClr val="FFC000"/>
+          </a:solidFill>
+          <a:ln w="12700" cap="flat" cmpd="sng" algn="ctr">
+            <a:noFill/>
+            <a:prstDash val="solid"/>
+            <a:miter lim="800000"/>
+          </a:ln>
+          <a:effectLst/>
+        </p:spPr>
+        <p:txBody>
+          <a:bodyPr rot="0" spcFirstLastPara="0" vertOverflow="overflow" horzOverflow="overflow" vert="horz" wrap="square" lIns="74295" tIns="37148" rIns="74295" bIns="37148" numCol="1" spcCol="0" rtlCol="0" fromWordArt="0" anchor="ctr" anchorCtr="0" forceAA="0" compatLnSpc="1">
+            <a:prstTxWarp prst="textNoShape">
+              <a:avLst/>
+            </a:prstTxWarp>
+            <a:noAutofit/>
+          </a:bodyPr>
+          <a:lstStyle/>
+          <a:p>
+            <a:pPr algn="ctr">
+              <a:buClrTx/>
+            </a:pPr>
+            <a:r>
+              <a:rPr lang="fr-FR" sz="800" b="1" kern="1200" dirty="0">
+                <a:latin typeface="Calibri" panose="020F0502020204030204" pitchFamily="34" charset="0"/>
+                <a:ea typeface="+mn-ea"/>
+                <a:cs typeface="Calibri" panose="020F0502020204030204" pitchFamily="34" charset="0"/>
+              </a:rPr>
+              <a:t>Frontend</a:t>
+            </a:r>
+          </a:p>
+        </p:txBody>
+      </p:sp>
+      <p:sp>
+        <p:nvSpPr>
+          <p:cNvPr id="5" name="Rectangle : coins arrondis 4">
+            <a:extLst>
+              <a:ext uri="{FF2B5EF4-FFF2-40B4-BE49-F238E27FC236}">
+                <a16:creationId xmlns:a16="http://schemas.microsoft.com/office/drawing/2014/main" id="{564CE1A9-869C-774B-0E58-18DB76A3FCD2}"/>
+              </a:ext>
+            </a:extLst>
+          </p:cNvPr>
+          <p:cNvSpPr/>
+          <p:nvPr/>
+        </p:nvSpPr>
+        <p:spPr>
+          <a:xfrm>
+            <a:off x="2293137" y="1304200"/>
+            <a:ext cx="4118299" cy="106642"/>
+          </a:xfrm>
+          <a:prstGeom prst="roundRect">
+            <a:avLst/>
+          </a:prstGeom>
+          <a:solidFill>
+            <a:srgbClr val="00B050"/>
+          </a:solidFill>
+          <a:ln w="12700" cap="flat" cmpd="sng" algn="ctr">
+            <a:noFill/>
+            <a:prstDash val="solid"/>
+            <a:miter lim="800000"/>
+          </a:ln>
+          <a:effectLst/>
+        </p:spPr>
+        <p:txBody>
+          <a:bodyPr rot="0" spcFirstLastPara="0" vertOverflow="overflow" horzOverflow="overflow" vert="horz" wrap="square" lIns="74295" tIns="37148" rIns="74295" bIns="37148" numCol="1" spcCol="0" rtlCol="0" fromWordArt="0" anchor="ctr" anchorCtr="0" forceAA="0" compatLnSpc="1">
+            <a:prstTxWarp prst="textNoShape">
+              <a:avLst/>
+            </a:prstTxWarp>
+            <a:noAutofit/>
+          </a:bodyPr>
+          <a:lstStyle/>
+          <a:p>
+            <a:pPr algn="ctr">
+              <a:buClrTx/>
+            </a:pPr>
+            <a:r>
+              <a:rPr lang="fr-FR" sz="800" b="1" kern="1200" dirty="0">
+                <a:solidFill>
+                  <a:schemeClr val="bg1"/>
+                </a:solidFill>
+                <a:latin typeface="Calibri" panose="020F0502020204030204" pitchFamily="34" charset="0"/>
+                <a:ea typeface="+mn-ea"/>
+                <a:cs typeface="Calibri" panose="020F0502020204030204" pitchFamily="34" charset="0"/>
+              </a:rPr>
+              <a:t>Backend</a:t>
+            </a:r>
+          </a:p>
+        </p:txBody>
+      </p:sp>
+      <p:pic>
+        <p:nvPicPr>
+          <p:cNvPr id="21" name="Picture 14">
+            <a:extLst>
+              <a:ext uri="{FF2B5EF4-FFF2-40B4-BE49-F238E27FC236}">
+                <a16:creationId xmlns:a16="http://schemas.microsoft.com/office/drawing/2014/main" id="{174134F5-72A3-DA25-E671-C7DDD8DFA83A}"/>
+              </a:ext>
+            </a:extLst>
+          </p:cNvPr>
+          <p:cNvPicPr>
+            <a:picLocks noChangeAspect="1" noChangeArrowheads="1"/>
+          </p:cNvPicPr>
+          <p:nvPr/>
+        </p:nvPicPr>
+        <p:blipFill rotWithShape="1">
+          <a:blip r:embed="rId5">
+            <a:extLst>
+              <a:ext uri="{28A0092B-C50C-407E-A947-70E740481C1C}">
+                <a14:useLocalDpi xmlns:a14="http://schemas.microsoft.com/office/drawing/2010/main" val="0"/>
+              </a:ext>
+            </a:extLst>
+          </a:blip>
+          <a:srcRect l="6454" t="18548" b="24342"/>
+          <a:stretch>
+            <a:fillRect/>
+          </a:stretch>
+        </p:blipFill>
+        <p:spPr bwMode="auto">
+          <a:xfrm>
+            <a:off x="6885019" y="1985270"/>
+            <a:ext cx="800992" cy="179300"/>
+          </a:xfrm>
+          <a:prstGeom prst="rect">
+            <a:avLst/>
+          </a:prstGeom>
+          <a:noFill/>
+          <a:extLst>
+            <a:ext uri="{909E8E84-426E-40DD-AFC4-6F175D3DCCD1}">
+              <a14:hiddenFill xmlns:a14="http://schemas.microsoft.com/office/drawing/2010/main">
+                <a:solidFill>
+                  <a:srgbClr val="FFFFFF"/>
+                </a:solidFill>
+              </a14:hiddenFill>
+            </a:ext>
+          </a:extLst>
+        </p:spPr>
+      </p:pic>
+      <p:sp>
+        <p:nvSpPr>
+          <p:cNvPr id="23" name="Ellipse 22">
+            <a:extLst>
+              <a:ext uri="{FF2B5EF4-FFF2-40B4-BE49-F238E27FC236}">
+                <a16:creationId xmlns:a16="http://schemas.microsoft.com/office/drawing/2014/main" id="{14BA37FE-DD89-0B23-6089-5FD37763331C}"/>
+              </a:ext>
+            </a:extLst>
+          </p:cNvPr>
+          <p:cNvSpPr/>
+          <p:nvPr/>
+        </p:nvSpPr>
+        <p:spPr>
+          <a:xfrm>
+            <a:off x="7624519" y="2020902"/>
+            <a:ext cx="122984" cy="122984"/>
+          </a:xfrm>
+          <a:prstGeom prst="ellipse">
+            <a:avLst/>
+          </a:prstGeom>
+          <a:solidFill>
+            <a:srgbClr val="41545E"/>
+          </a:solidFill>
+          <a:ln>
+            <a:noFill/>
+          </a:ln>
+        </p:spPr>
+        <p:style>
+          <a:lnRef idx="2">
+            <a:schemeClr val="accent1">
+              <a:shade val="15000"/>
+            </a:schemeClr>
+          </a:lnRef>
+          <a:fillRef idx="1">
+            <a:schemeClr val="accent1"/>
+          </a:fillRef>
+          <a:effectRef idx="0">
+            <a:schemeClr val="accent1"/>
+          </a:effectRef>
+          <a:fontRef idx="minor">
+            <a:schemeClr val="lt1"/>
+          </a:fontRef>
+        </p:style>
+        <p:txBody>
+          <a:bodyPr rtlCol="0" anchor="ctr"/>
+          <a:lstStyle/>
+          <a:p>
+            <a:pPr algn="ctr"/>
+            <a:r>
+              <a:rPr lang="fr-FR" sz="900" dirty="0"/>
+              <a:t>+</a:t>
+            </a:r>
+          </a:p>
+        </p:txBody>
+      </p:sp>
       <p:grpSp>
         <p:nvGrpSpPr>
-          <p:cNvPr id="13" name="Groupe 12">
+          <p:cNvPr id="78" name="Groupe 77">
             <a:extLst>
               <a:ext uri="{FF2B5EF4-FFF2-40B4-BE49-F238E27FC236}">
-                <a16:creationId xmlns:a16="http://schemas.microsoft.com/office/drawing/2014/main" id="{17A2B2F0-AB99-333B-30C9-EC04234D17C0}"/>
+                <a16:creationId xmlns:a16="http://schemas.microsoft.com/office/drawing/2014/main" id="{48BB1303-220D-775F-BC97-35D0BC10D7AC}"/>
               </a:ext>
             </a:extLst>
           </p:cNvPr>
@@ -34653,259 +33607,730 @@
         </p:nvGrpSpPr>
         <p:grpSpPr>
           <a:xfrm>
-            <a:off x="4233111" y="1458686"/>
-            <a:ext cx="2217817" cy="3272971"/>
-            <a:chOff x="4233111" y="1458686"/>
-            <a:chExt cx="2217817" cy="3272971"/>
+            <a:off x="6670344" y="3995036"/>
+            <a:ext cx="703440" cy="410340"/>
+            <a:chOff x="7750640" y="4242260"/>
+            <a:chExt cx="447927" cy="261290"/>
           </a:xfrm>
         </p:grpSpPr>
-        <p:cxnSp>
-          <p:nvCxnSpPr>
-            <p:cNvPr id="30" name="Connecteur droit 29">
+        <p:sp>
+          <p:nvSpPr>
+            <p:cNvPr id="76" name="Rectangle : coins arrondis 75">
               <a:extLst>
                 <a:ext uri="{FF2B5EF4-FFF2-40B4-BE49-F238E27FC236}">
-                  <a16:creationId xmlns:a16="http://schemas.microsoft.com/office/drawing/2014/main" id="{DD9C7B50-C6F5-7260-C61A-2CAE5E4C0BF7}"/>
+                  <a16:creationId xmlns:a16="http://schemas.microsoft.com/office/drawing/2014/main" id="{0137AD1F-A369-4FCE-AD69-964680B420B5}"/>
                 </a:ext>
               </a:extLst>
             </p:cNvPr>
-            <p:cNvCxnSpPr/>
+            <p:cNvSpPr/>
             <p:nvPr/>
-          </p:nvCxnSpPr>
+          </p:nvSpPr>
           <p:spPr>
             <a:xfrm>
-              <a:off x="6450928" y="1458686"/>
-              <a:ext cx="0" cy="3272971"/>
+              <a:off x="7785777" y="4265830"/>
+              <a:ext cx="373983" cy="223312"/>
             </a:xfrm>
-            <a:prstGeom prst="line">
+            <a:prstGeom prst="roundRect">
               <a:avLst/>
             </a:prstGeom>
-            <a:ln w="19050">
-              <a:solidFill>
-                <a:schemeClr val="bg1">
-                  <a:lumMod val="75000"/>
-                </a:schemeClr>
-              </a:solidFill>
-              <a:prstDash val="dash"/>
-            </a:ln>
+            <a:solidFill>
+              <a:schemeClr val="bg1"/>
+            </a:solidFill>
+            <a:ln w="3175"/>
           </p:spPr>
           <p:style>
-            <a:lnRef idx="1">
-              <a:schemeClr val="dk1"/>
+            <a:lnRef idx="2">
+              <a:schemeClr val="accent1">
+                <a:shade val="15000"/>
+              </a:schemeClr>
             </a:lnRef>
-            <a:fillRef idx="0">
-              <a:schemeClr val="dk1"/>
+            <a:fillRef idx="1">
+              <a:schemeClr val="accent1"/>
             </a:fillRef>
             <a:effectRef idx="0">
-              <a:schemeClr val="dk1"/>
+              <a:schemeClr val="accent1"/>
             </a:effectRef>
             <a:fontRef idx="minor">
-              <a:schemeClr val="tx1"/>
+              <a:schemeClr val="lt1"/>
             </a:fontRef>
           </p:style>
-        </p:cxnSp>
-        <p:grpSp>
-          <p:nvGrpSpPr>
-            <p:cNvPr id="12" name="Groupe 11">
+          <p:txBody>
+            <a:bodyPr rtlCol="0" anchor="ctr"/>
+            <a:lstStyle/>
+            <a:p>
+              <a:pPr algn="ctr"/>
+              <a:endParaRPr lang="fr-FR"/>
+            </a:p>
+          </p:txBody>
+        </p:sp>
+        <p:pic>
+          <p:nvPicPr>
+            <p:cNvPr id="62" name="Picture 2">
               <a:extLst>
                 <a:ext uri="{FF2B5EF4-FFF2-40B4-BE49-F238E27FC236}">
-                  <a16:creationId xmlns:a16="http://schemas.microsoft.com/office/drawing/2014/main" id="{A4F3950E-A273-3885-0546-EA789FEF3AD4}"/>
+                  <a16:creationId xmlns:a16="http://schemas.microsoft.com/office/drawing/2014/main" id="{C5C7BA9B-2B99-4B7A-7436-5F82DE29B981}"/>
                 </a:ext>
               </a:extLst>
             </p:cNvPr>
-            <p:cNvGrpSpPr/>
+            <p:cNvPicPr>
+              <a:picLocks noChangeAspect="1" noChangeArrowheads="1"/>
+            </p:cNvPicPr>
             <p:nvPr/>
-          </p:nvGrpSpPr>
-          <p:grpSpPr>
-            <a:xfrm>
-              <a:off x="4233111" y="1495363"/>
-              <a:ext cx="1800211" cy="807431"/>
-              <a:chOff x="4233111" y="1495363"/>
-              <a:chExt cx="1800211" cy="807431"/>
-            </a:xfrm>
-          </p:grpSpPr>
-          <p:sp>
-            <p:nvSpPr>
-              <p:cNvPr id="46" name="Rectangle : coins arrondis 45">
-                <a:extLst>
-                  <a:ext uri="{FF2B5EF4-FFF2-40B4-BE49-F238E27FC236}">
-                    <a16:creationId xmlns:a16="http://schemas.microsoft.com/office/drawing/2014/main" id="{E433E364-4228-6856-536E-34873F6A6DC3}"/>
-                  </a:ext>
-                </a:extLst>
-              </p:cNvPr>
-              <p:cNvSpPr/>
-              <p:nvPr/>
-            </p:nvSpPr>
-            <p:spPr>
-              <a:xfrm>
-                <a:off x="4797443" y="1718594"/>
-                <a:ext cx="1235879" cy="584200"/>
-              </a:xfrm>
-              <a:prstGeom prst="roundRect">
-                <a:avLst/>
-              </a:prstGeom>
-              <a:solidFill>
-                <a:schemeClr val="bg1">
-                  <a:lumMod val="95000"/>
-                </a:schemeClr>
-              </a:solidFill>
-              <a:ln>
-                <a:noFill/>
-              </a:ln>
-            </p:spPr>
-            <p:style>
-              <a:lnRef idx="2">
-                <a:schemeClr val="accent1">
-                  <a:shade val="15000"/>
-                </a:schemeClr>
-              </a:lnRef>
-              <a:fillRef idx="1">
-                <a:schemeClr val="accent1"/>
-              </a:fillRef>
-              <a:effectRef idx="0">
-                <a:schemeClr val="accent1"/>
-              </a:effectRef>
-              <a:fontRef idx="minor">
-                <a:schemeClr val="lt1"/>
-              </a:fontRef>
-            </p:style>
-            <p:txBody>
-              <a:bodyPr rtlCol="0" anchor="ctr"/>
-              <a:lstStyle/>
-              <a:p>
-                <a:pPr algn="ctr"/>
-                <a:endParaRPr lang="fr-FR" dirty="0"/>
-              </a:p>
-            </p:txBody>
-          </p:sp>
-          <p:pic>
-            <p:nvPicPr>
-              <p:cNvPr id="1034" name="Picture 10">
-                <a:extLst>
-                  <a:ext uri="{FF2B5EF4-FFF2-40B4-BE49-F238E27FC236}">
-                    <a16:creationId xmlns:a16="http://schemas.microsoft.com/office/drawing/2014/main" id="{748B16F9-6C53-91C1-4712-424BF6CE8989}"/>
-                  </a:ext>
-                </a:extLst>
-              </p:cNvPr>
-              <p:cNvPicPr>
-                <a:picLocks noChangeAspect="1" noChangeArrowheads="1"/>
-              </p:cNvPicPr>
-              <p:nvPr/>
-            </p:nvPicPr>
-            <p:blipFill>
-              <a:blip r:embed="rId16">
-                <a:extLst>
-                  <a:ext uri="{28A0092B-C50C-407E-A947-70E740481C1C}">
-                    <a14:useLocalDpi xmlns:a14="http://schemas.microsoft.com/office/drawing/2010/main" val="0"/>
-                  </a:ext>
-                </a:extLst>
-              </a:blip>
-              <a:srcRect/>
-              <a:stretch>
-                <a:fillRect/>
-              </a:stretch>
-            </p:blipFill>
-            <p:spPr bwMode="auto">
-              <a:xfrm>
-                <a:off x="4595812" y="1495363"/>
-                <a:ext cx="506762" cy="506762"/>
-              </a:xfrm>
-              <a:prstGeom prst="rect">
-                <a:avLst/>
-              </a:prstGeom>
-              <a:noFill/>
+          </p:nvPicPr>
+          <p:blipFill>
+            <a:blip r:embed="rId14">
               <a:extLst>
-                <a:ext uri="{909E8E84-426E-40DD-AFC4-6F175D3DCCD1}">
-                  <a14:hiddenFill xmlns:a14="http://schemas.microsoft.com/office/drawing/2010/main">
-                    <a:solidFill>
-                      <a:srgbClr val="FFFFFF"/>
-                    </a:solidFill>
-                  </a14:hiddenFill>
+                <a:ext uri="{28A0092B-C50C-407E-A947-70E740481C1C}">
+                  <a14:useLocalDpi xmlns:a14="http://schemas.microsoft.com/office/drawing/2010/main" val="0"/>
                 </a:ext>
               </a:extLst>
-            </p:spPr>
-          </p:pic>
-          <p:sp>
-            <p:nvSpPr>
-              <p:cNvPr id="44" name="ZoneTexte 43">
-                <a:extLst>
-                  <a:ext uri="{FF2B5EF4-FFF2-40B4-BE49-F238E27FC236}">
-                    <a16:creationId xmlns:a16="http://schemas.microsoft.com/office/drawing/2014/main" id="{682088E1-064C-5214-7A97-A059E4869B55}"/>
-                  </a:ext>
-                </a:extLst>
-              </p:cNvPr>
-              <p:cNvSpPr txBox="1"/>
-              <p:nvPr/>
-            </p:nvSpPr>
-            <p:spPr>
-              <a:xfrm>
-                <a:off x="4900942" y="1841943"/>
-                <a:ext cx="1079654" cy="338554"/>
-              </a:xfrm>
-              <a:prstGeom prst="rect">
-                <a:avLst/>
-              </a:prstGeom>
-              <a:noFill/>
-            </p:spPr>
-            <p:txBody>
-              <a:bodyPr wrap="square" rtlCol="0">
-                <a:spAutoFit/>
-              </a:bodyPr>
-              <a:lstStyle/>
-              <a:p>
-                <a:pPr algn="ctr"/>
-                <a:r>
-                  <a:rPr lang="fr-FR" sz="800" b="1" dirty="0"/>
-                  <a:t>Entraînement du modèle</a:t>
-                </a:r>
-              </a:p>
-            </p:txBody>
-          </p:sp>
-          <p:cxnSp>
-            <p:nvCxnSpPr>
-              <p:cNvPr id="108" name="Connecteur droit avec flèche 107">
-                <a:extLst>
-                  <a:ext uri="{FF2B5EF4-FFF2-40B4-BE49-F238E27FC236}">
-                    <a16:creationId xmlns:a16="http://schemas.microsoft.com/office/drawing/2014/main" id="{8FC538F3-E888-6C1B-940B-D6B968D8FCEE}"/>
-                  </a:ext>
-                </a:extLst>
-              </p:cNvPr>
-              <p:cNvCxnSpPr>
-                <a:cxnSpLocks/>
-              </p:cNvCxnSpPr>
-              <p:nvPr/>
-            </p:nvCxnSpPr>
-            <p:spPr>
-              <a:xfrm>
-                <a:off x="4233111" y="2035648"/>
-                <a:ext cx="551235" cy="0"/>
-              </a:xfrm>
-              <a:prstGeom prst="straightConnector1">
-                <a:avLst/>
-              </a:prstGeom>
-              <a:ln w="57150">
-                <a:solidFill>
-                  <a:srgbClr val="FFC000"/>
-                </a:solidFill>
-                <a:tailEnd type="triangle"/>
-              </a:ln>
-            </p:spPr>
-            <p:style>
-              <a:lnRef idx="1">
-                <a:schemeClr val="accent1"/>
-              </a:lnRef>
-              <a:fillRef idx="0">
-                <a:schemeClr val="accent1"/>
-              </a:fillRef>
-              <a:effectRef idx="0">
-                <a:schemeClr val="accent1"/>
-              </a:effectRef>
-              <a:fontRef idx="minor">
-                <a:schemeClr val="tx1"/>
-              </a:fontRef>
-            </p:style>
-          </p:cxnSp>
-        </p:grpSp>
+            </a:blip>
+            <a:srcRect/>
+            <a:stretch>
+              <a:fillRect/>
+            </a:stretch>
+          </p:blipFill>
+          <p:spPr bwMode="auto">
+            <a:xfrm>
+              <a:off x="7750640" y="4242260"/>
+              <a:ext cx="447927" cy="261290"/>
+            </a:xfrm>
+            <a:prstGeom prst="rect">
+              <a:avLst/>
+            </a:prstGeom>
+            <a:noFill/>
+          </p:spPr>
+        </p:pic>
       </p:grpSp>
+      <p:pic>
+        <p:nvPicPr>
+          <p:cNvPr id="116" name="Picture 4">
+            <a:extLst>
+              <a:ext uri="{FF2B5EF4-FFF2-40B4-BE49-F238E27FC236}">
+                <a16:creationId xmlns:a16="http://schemas.microsoft.com/office/drawing/2014/main" id="{B7DCCBAF-8A38-3C4F-0798-30A393D5D283}"/>
+              </a:ext>
+            </a:extLst>
+          </p:cNvPr>
+          <p:cNvPicPr>
+            <a:picLocks noChangeAspect="1" noChangeArrowheads="1"/>
+          </p:cNvPicPr>
+          <p:nvPr/>
+        </p:nvPicPr>
+        <p:blipFill rotWithShape="1">
+          <a:blip r:embed="rId15">
+            <a:extLst>
+              <a:ext uri="{28A0092B-C50C-407E-A947-70E740481C1C}">
+                <a14:useLocalDpi xmlns:a14="http://schemas.microsoft.com/office/drawing/2010/main" val="0"/>
+              </a:ext>
+            </a:extLst>
+          </a:blip>
+          <a:srcRect l="13093" t="7524" r="12698" b="43966"/>
+          <a:stretch>
+            <a:fillRect/>
+          </a:stretch>
+        </p:blipFill>
+        <p:spPr bwMode="auto">
+          <a:xfrm>
+            <a:off x="2717304" y="2067458"/>
+            <a:ext cx="602696" cy="615588"/>
+          </a:xfrm>
+          <a:prstGeom prst="rect">
+            <a:avLst/>
+          </a:prstGeom>
+          <a:noFill/>
+          <a:extLst>
+            <a:ext uri="{909E8E84-426E-40DD-AFC4-6F175D3DCCD1}">
+              <a14:hiddenFill xmlns:a14="http://schemas.microsoft.com/office/drawing/2010/main">
+                <a:solidFill>
+                  <a:srgbClr val="FFFFFF"/>
+                </a:solidFill>
+              </a14:hiddenFill>
+            </a:ext>
+          </a:extLst>
+        </p:spPr>
+      </p:pic>
+      <p:pic>
+        <p:nvPicPr>
+          <p:cNvPr id="117" name="Picture 6">
+            <a:extLst>
+              <a:ext uri="{FF2B5EF4-FFF2-40B4-BE49-F238E27FC236}">
+                <a16:creationId xmlns:a16="http://schemas.microsoft.com/office/drawing/2014/main" id="{B3747ED9-0378-A202-7151-54782D96CF66}"/>
+              </a:ext>
+            </a:extLst>
+          </p:cNvPr>
+          <p:cNvPicPr>
+            <a:picLocks noChangeAspect="1" noChangeArrowheads="1"/>
+          </p:cNvPicPr>
+          <p:nvPr/>
+        </p:nvPicPr>
+        <p:blipFill rotWithShape="1">
+          <a:blip r:embed="rId16">
+            <a:extLst>
+              <a:ext uri="{28A0092B-C50C-407E-A947-70E740481C1C}">
+                <a14:useLocalDpi xmlns:a14="http://schemas.microsoft.com/office/drawing/2010/main" val="0"/>
+              </a:ext>
+            </a:extLst>
+          </a:blip>
+          <a:srcRect l="31615" t="12234" r="33730" b="47839"/>
+          <a:stretch>
+            <a:fillRect/>
+          </a:stretch>
+        </p:blipFill>
+        <p:spPr bwMode="auto">
+          <a:xfrm>
+            <a:off x="2671095" y="3245811"/>
+            <a:ext cx="664926" cy="638415"/>
+          </a:xfrm>
+          <a:prstGeom prst="rect">
+            <a:avLst/>
+          </a:prstGeom>
+          <a:noFill/>
+          <a:extLst>
+            <a:ext uri="{909E8E84-426E-40DD-AFC4-6F175D3DCCD1}">
+              <a14:hiddenFill xmlns:a14="http://schemas.microsoft.com/office/drawing/2010/main">
+                <a:solidFill>
+                  <a:srgbClr val="FFFFFF"/>
+                </a:solidFill>
+              </a14:hiddenFill>
+            </a:ext>
+          </a:extLst>
+        </p:spPr>
+      </p:pic>
+      <p:pic>
+        <p:nvPicPr>
+          <p:cNvPr id="127" name="Picture 8">
+            <a:extLst>
+              <a:ext uri="{FF2B5EF4-FFF2-40B4-BE49-F238E27FC236}">
+                <a16:creationId xmlns:a16="http://schemas.microsoft.com/office/drawing/2014/main" id="{0DF6E305-58E0-10D9-0E90-7E26126193AF}"/>
+              </a:ext>
+            </a:extLst>
+          </p:cNvPr>
+          <p:cNvPicPr>
+            <a:picLocks noChangeAspect="1" noChangeArrowheads="1"/>
+          </p:cNvPicPr>
+          <p:nvPr/>
+        </p:nvPicPr>
+        <p:blipFill>
+          <a:blip r:embed="rId17">
+            <a:extLst>
+              <a:ext uri="{28A0092B-C50C-407E-A947-70E740481C1C}">
+                <a14:useLocalDpi xmlns:a14="http://schemas.microsoft.com/office/drawing/2010/main" val="0"/>
+              </a:ext>
+            </a:extLst>
+          </a:blip>
+          <a:srcRect/>
+          <a:stretch>
+            <a:fillRect/>
+          </a:stretch>
+        </p:blipFill>
+        <p:spPr bwMode="auto">
+          <a:xfrm>
+            <a:off x="1666945" y="2093612"/>
+            <a:ext cx="574201" cy="574192"/>
+          </a:xfrm>
+          <a:prstGeom prst="rect">
+            <a:avLst/>
+          </a:prstGeom>
+          <a:noFill/>
+          <a:extLst>
+            <a:ext uri="{909E8E84-426E-40DD-AFC4-6F175D3DCCD1}">
+              <a14:hiddenFill xmlns:a14="http://schemas.microsoft.com/office/drawing/2010/main">
+                <a:solidFill>
+                  <a:srgbClr val="FFFFFF"/>
+                </a:solidFill>
+              </a14:hiddenFill>
+            </a:ext>
+          </a:extLst>
+        </p:spPr>
+      </p:pic>
+      <p:pic>
+        <p:nvPicPr>
+          <p:cNvPr id="1033" name="Picture 10">
+            <a:extLst>
+              <a:ext uri="{FF2B5EF4-FFF2-40B4-BE49-F238E27FC236}">
+                <a16:creationId xmlns:a16="http://schemas.microsoft.com/office/drawing/2014/main" id="{FD816D59-77CA-1E04-DAC5-C8410FAC6198}"/>
+              </a:ext>
+            </a:extLst>
+          </p:cNvPr>
+          <p:cNvPicPr>
+            <a:picLocks noChangeAspect="1" noChangeArrowheads="1"/>
+          </p:cNvPicPr>
+          <p:nvPr/>
+        </p:nvPicPr>
+        <p:blipFill>
+          <a:blip r:embed="rId18">
+            <a:extLst>
+              <a:ext uri="{28A0092B-C50C-407E-A947-70E740481C1C}">
+                <a14:useLocalDpi xmlns:a14="http://schemas.microsoft.com/office/drawing/2010/main" val="0"/>
+              </a:ext>
+            </a:extLst>
+          </a:blip>
+          <a:srcRect/>
+          <a:stretch>
+            <a:fillRect/>
+          </a:stretch>
+        </p:blipFill>
+        <p:spPr bwMode="auto">
+          <a:xfrm>
+            <a:off x="1684197" y="3264975"/>
+            <a:ext cx="578072" cy="578072"/>
+          </a:xfrm>
+          <a:prstGeom prst="rect">
+            <a:avLst/>
+          </a:prstGeom>
+          <a:noFill/>
+          <a:extLst>
+            <a:ext uri="{909E8E84-426E-40DD-AFC4-6F175D3DCCD1}">
+              <a14:hiddenFill xmlns:a14="http://schemas.microsoft.com/office/drawing/2010/main">
+                <a:solidFill>
+                  <a:srgbClr val="FFFFFF"/>
+                </a:solidFill>
+              </a14:hiddenFill>
+            </a:ext>
+          </a:extLst>
+        </p:spPr>
+      </p:pic>
+      <p:sp>
+        <p:nvSpPr>
+          <p:cNvPr id="3" name="Rectangle : coins arrondis 2">
+            <a:extLst>
+              <a:ext uri="{FF2B5EF4-FFF2-40B4-BE49-F238E27FC236}">
+                <a16:creationId xmlns:a16="http://schemas.microsoft.com/office/drawing/2014/main" id="{33B23519-5EFA-F17A-CAA2-6EF8A191B3CD}"/>
+              </a:ext>
+            </a:extLst>
+          </p:cNvPr>
+          <p:cNvSpPr/>
+          <p:nvPr/>
+        </p:nvSpPr>
+        <p:spPr>
+          <a:xfrm>
+            <a:off x="456709" y="1469509"/>
+            <a:ext cx="972305" cy="2957143"/>
+          </a:xfrm>
+          <a:prstGeom prst="roundRect">
+            <a:avLst/>
+          </a:prstGeom>
+          <a:noFill/>
+          <a:ln w="9525">
+            <a:solidFill>
+              <a:schemeClr val="bg1">
+                <a:lumMod val="65000"/>
+              </a:schemeClr>
+            </a:solidFill>
+            <a:prstDash val="dash"/>
+          </a:ln>
+        </p:spPr>
+        <p:style>
+          <a:lnRef idx="2">
+            <a:schemeClr val="accent1">
+              <a:shade val="15000"/>
+            </a:schemeClr>
+          </a:lnRef>
+          <a:fillRef idx="1">
+            <a:schemeClr val="accent1"/>
+          </a:fillRef>
+          <a:effectRef idx="0">
+            <a:schemeClr val="accent1"/>
+          </a:effectRef>
+          <a:fontRef idx="minor">
+            <a:schemeClr val="lt1"/>
+          </a:fontRef>
+        </p:style>
+        <p:txBody>
+          <a:bodyPr rtlCol="0" anchor="ctr"/>
+          <a:lstStyle/>
+          <a:p>
+            <a:pPr algn="ctr"/>
+            <a:endParaRPr lang="fr-FR" dirty="0"/>
+          </a:p>
+        </p:txBody>
+      </p:sp>
+      <p:cxnSp>
+        <p:nvCxnSpPr>
+          <p:cNvPr id="6" name="Connecteur droit avec flèche 5">
+            <a:extLst>
+              <a:ext uri="{FF2B5EF4-FFF2-40B4-BE49-F238E27FC236}">
+                <a16:creationId xmlns:a16="http://schemas.microsoft.com/office/drawing/2014/main" id="{804A8FE7-27C3-4C54-36F8-6A8C0900C5DA}"/>
+              </a:ext>
+            </a:extLst>
+          </p:cNvPr>
+          <p:cNvCxnSpPr>
+            <a:cxnSpLocks/>
+          </p:cNvCxnSpPr>
+          <p:nvPr/>
+        </p:nvCxnSpPr>
+        <p:spPr>
+          <a:xfrm>
+            <a:off x="1429014" y="2391164"/>
+            <a:ext cx="362079" cy="0"/>
+          </a:xfrm>
+          <a:prstGeom prst="straightConnector1">
+            <a:avLst/>
+          </a:prstGeom>
+          <a:ln w="38100">
+            <a:solidFill>
+              <a:srgbClr val="B266FF"/>
+            </a:solidFill>
+            <a:tailEnd type="triangle"/>
+          </a:ln>
+        </p:spPr>
+        <p:style>
+          <a:lnRef idx="1">
+            <a:schemeClr val="accent1"/>
+          </a:lnRef>
+          <a:fillRef idx="0">
+            <a:schemeClr val="accent1"/>
+          </a:fillRef>
+          <a:effectRef idx="0">
+            <a:schemeClr val="accent1"/>
+          </a:effectRef>
+          <a:fontRef idx="minor">
+            <a:schemeClr val="tx1"/>
+          </a:fontRef>
+        </p:style>
+      </p:cxnSp>
+      <p:cxnSp>
+        <p:nvCxnSpPr>
+          <p:cNvPr id="10" name="Connecteur droit avec flèche 9">
+            <a:extLst>
+              <a:ext uri="{FF2B5EF4-FFF2-40B4-BE49-F238E27FC236}">
+                <a16:creationId xmlns:a16="http://schemas.microsoft.com/office/drawing/2014/main" id="{A34EFFD9-2B7F-223F-36C3-4CCC46291479}"/>
+              </a:ext>
+            </a:extLst>
+          </p:cNvPr>
+          <p:cNvCxnSpPr>
+            <a:cxnSpLocks/>
+          </p:cNvCxnSpPr>
+          <p:nvPr/>
+        </p:nvCxnSpPr>
+        <p:spPr>
+          <a:xfrm>
+            <a:off x="1429014" y="3554011"/>
+            <a:ext cx="362079" cy="0"/>
+          </a:xfrm>
+          <a:prstGeom prst="straightConnector1">
+            <a:avLst/>
+          </a:prstGeom>
+          <a:ln w="38100">
+            <a:solidFill>
+              <a:srgbClr val="FF0080"/>
+            </a:solidFill>
+            <a:tailEnd type="triangle"/>
+          </a:ln>
+        </p:spPr>
+        <p:style>
+          <a:lnRef idx="1">
+            <a:schemeClr val="accent1"/>
+          </a:lnRef>
+          <a:fillRef idx="0">
+            <a:schemeClr val="accent1"/>
+          </a:fillRef>
+          <a:effectRef idx="0">
+            <a:schemeClr val="accent1"/>
+          </a:effectRef>
+          <a:fontRef idx="minor">
+            <a:schemeClr val="tx1"/>
+          </a:fontRef>
+        </p:style>
+      </p:cxnSp>
+      <p:cxnSp>
+        <p:nvCxnSpPr>
+          <p:cNvPr id="11" name="Connecteur droit avec flèche 10">
+            <a:extLst>
+              <a:ext uri="{FF2B5EF4-FFF2-40B4-BE49-F238E27FC236}">
+                <a16:creationId xmlns:a16="http://schemas.microsoft.com/office/drawing/2014/main" id="{D8A48580-543E-68C9-355D-6C2F58EACB96}"/>
+              </a:ext>
+            </a:extLst>
+          </p:cNvPr>
+          <p:cNvCxnSpPr>
+            <a:cxnSpLocks/>
+          </p:cNvCxnSpPr>
+          <p:nvPr/>
+        </p:nvCxnSpPr>
+        <p:spPr>
+          <a:xfrm>
+            <a:off x="2159509" y="2391164"/>
+            <a:ext cx="551235" cy="0"/>
+          </a:xfrm>
+          <a:prstGeom prst="straightConnector1">
+            <a:avLst/>
+          </a:prstGeom>
+          <a:ln w="38100">
+            <a:solidFill>
+              <a:srgbClr val="B266FF"/>
+            </a:solidFill>
+            <a:tailEnd type="triangle"/>
+          </a:ln>
+        </p:spPr>
+        <p:style>
+          <a:lnRef idx="1">
+            <a:schemeClr val="accent1"/>
+          </a:lnRef>
+          <a:fillRef idx="0">
+            <a:schemeClr val="accent1"/>
+          </a:fillRef>
+          <a:effectRef idx="0">
+            <a:schemeClr val="accent1"/>
+          </a:effectRef>
+          <a:fontRef idx="minor">
+            <a:schemeClr val="tx1"/>
+          </a:fontRef>
+        </p:style>
+      </p:cxnSp>
+      <p:cxnSp>
+        <p:nvCxnSpPr>
+          <p:cNvPr id="19" name="Connecteur droit avec flèche 18">
+            <a:extLst>
+              <a:ext uri="{FF2B5EF4-FFF2-40B4-BE49-F238E27FC236}">
+                <a16:creationId xmlns:a16="http://schemas.microsoft.com/office/drawing/2014/main" id="{7965C0EE-9642-2EA9-734C-AF9138078030}"/>
+              </a:ext>
+            </a:extLst>
+          </p:cNvPr>
+          <p:cNvCxnSpPr>
+            <a:cxnSpLocks/>
+          </p:cNvCxnSpPr>
+          <p:nvPr/>
+        </p:nvCxnSpPr>
+        <p:spPr>
+          <a:xfrm>
+            <a:off x="2183074" y="3554011"/>
+            <a:ext cx="551235" cy="0"/>
+          </a:xfrm>
+          <a:prstGeom prst="straightConnector1">
+            <a:avLst/>
+          </a:prstGeom>
+          <a:ln w="38100">
+            <a:solidFill>
+              <a:srgbClr val="FF0080"/>
+            </a:solidFill>
+            <a:tailEnd type="triangle"/>
+          </a:ln>
+        </p:spPr>
+        <p:style>
+          <a:lnRef idx="1">
+            <a:schemeClr val="accent1"/>
+          </a:lnRef>
+          <a:fillRef idx="0">
+            <a:schemeClr val="accent1"/>
+          </a:fillRef>
+          <a:effectRef idx="0">
+            <a:schemeClr val="accent1"/>
+          </a:effectRef>
+          <a:fontRef idx="minor">
+            <a:schemeClr val="tx1"/>
+          </a:fontRef>
+        </p:style>
+      </p:cxnSp>
+      <p:pic>
+        <p:nvPicPr>
+          <p:cNvPr id="20" name="Picture 2">
+            <a:extLst>
+              <a:ext uri="{FF2B5EF4-FFF2-40B4-BE49-F238E27FC236}">
+                <a16:creationId xmlns:a16="http://schemas.microsoft.com/office/drawing/2014/main" id="{9F92FB23-9D37-AEB9-493C-1E3DAE1913D2}"/>
+              </a:ext>
+            </a:extLst>
+          </p:cNvPr>
+          <p:cNvPicPr>
+            <a:picLocks noChangeAspect="1" noChangeArrowheads="1"/>
+          </p:cNvPicPr>
+          <p:nvPr/>
+        </p:nvPicPr>
+        <p:blipFill rotWithShape="1">
+          <a:blip r:embed="rId19">
+            <a:extLst>
+              <a:ext uri="{28A0092B-C50C-407E-A947-70E740481C1C}">
+                <a14:useLocalDpi xmlns:a14="http://schemas.microsoft.com/office/drawing/2010/main" val="0"/>
+              </a:ext>
+            </a:extLst>
+          </a:blip>
+          <a:srcRect l="15800" t="16870" r="16971" b="17050"/>
+          <a:stretch>
+            <a:fillRect/>
+          </a:stretch>
+        </p:blipFill>
+        <p:spPr bwMode="auto">
+          <a:xfrm>
+            <a:off x="3739660" y="2205082"/>
+            <a:ext cx="350993" cy="344994"/>
+          </a:xfrm>
+          <a:prstGeom prst="rect">
+            <a:avLst/>
+          </a:prstGeom>
+          <a:noFill/>
+          <a:extLst>
+            <a:ext uri="{909E8E84-426E-40DD-AFC4-6F175D3DCCD1}">
+              <a14:hiddenFill xmlns:a14="http://schemas.microsoft.com/office/drawing/2010/main">
+                <a:solidFill>
+                  <a:srgbClr val="FFFFFF"/>
+                </a:solidFill>
+              </a14:hiddenFill>
+            </a:ext>
+          </a:extLst>
+        </p:spPr>
+      </p:pic>
+      <p:cxnSp>
+        <p:nvCxnSpPr>
+          <p:cNvPr id="24" name="Connecteur droit avec flèche 23">
+            <a:extLst>
+              <a:ext uri="{FF2B5EF4-FFF2-40B4-BE49-F238E27FC236}">
+                <a16:creationId xmlns:a16="http://schemas.microsoft.com/office/drawing/2014/main" id="{9AD6B91C-AEA0-8BCF-42B4-76BEC72FDE00}"/>
+              </a:ext>
+            </a:extLst>
+          </p:cNvPr>
+          <p:cNvCxnSpPr>
+            <a:cxnSpLocks/>
+            <a:endCxn id="20" idx="1"/>
+          </p:cNvCxnSpPr>
+          <p:nvPr/>
+        </p:nvCxnSpPr>
+        <p:spPr>
+          <a:xfrm flipV="1">
+            <a:off x="3335298" y="2377579"/>
+            <a:ext cx="404362" cy="13"/>
+          </a:xfrm>
+          <a:prstGeom prst="straightConnector1">
+            <a:avLst/>
+          </a:prstGeom>
+          <a:ln w="12700">
+            <a:solidFill>
+              <a:srgbClr val="B266FF"/>
+            </a:solidFill>
+            <a:tailEnd type="triangle"/>
+          </a:ln>
+        </p:spPr>
+        <p:style>
+          <a:lnRef idx="1">
+            <a:schemeClr val="accent1"/>
+          </a:lnRef>
+          <a:fillRef idx="0">
+            <a:schemeClr val="accent1"/>
+          </a:fillRef>
+          <a:effectRef idx="0">
+            <a:schemeClr val="accent1"/>
+          </a:effectRef>
+          <a:fontRef idx="minor">
+            <a:schemeClr val="tx1"/>
+          </a:fontRef>
+        </p:style>
+      </p:cxnSp>
+      <p:cxnSp>
+        <p:nvCxnSpPr>
+          <p:cNvPr id="27" name="Connecteur droit avec flèche 26">
+            <a:extLst>
+              <a:ext uri="{FF2B5EF4-FFF2-40B4-BE49-F238E27FC236}">
+                <a16:creationId xmlns:a16="http://schemas.microsoft.com/office/drawing/2014/main" id="{10B31F45-EE59-3B06-0BB0-9F63BE518A6D}"/>
+              </a:ext>
+            </a:extLst>
+          </p:cNvPr>
+          <p:cNvCxnSpPr>
+            <a:cxnSpLocks/>
+            <a:stCxn id="117" idx="3"/>
+            <a:endCxn id="53" idx="1"/>
+          </p:cNvCxnSpPr>
+          <p:nvPr/>
+        </p:nvCxnSpPr>
+        <p:spPr>
+          <a:xfrm flipV="1">
+            <a:off x="3336021" y="3563437"/>
+            <a:ext cx="1183271" cy="1582"/>
+          </a:xfrm>
+          <a:prstGeom prst="straightConnector1">
+            <a:avLst/>
+          </a:prstGeom>
+          <a:ln w="38100">
+            <a:solidFill>
+              <a:srgbClr val="FF0080"/>
+            </a:solidFill>
+            <a:tailEnd type="triangle"/>
+          </a:ln>
+        </p:spPr>
+        <p:style>
+          <a:lnRef idx="1">
+            <a:schemeClr val="accent1"/>
+          </a:lnRef>
+          <a:fillRef idx="0">
+            <a:schemeClr val="accent1"/>
+          </a:fillRef>
+          <a:effectRef idx="0">
+            <a:schemeClr val="accent1"/>
+          </a:effectRef>
+          <a:fontRef idx="minor">
+            <a:schemeClr val="tx1"/>
+          </a:fontRef>
+        </p:style>
+      </p:cxnSp>
+      <p:sp>
+        <p:nvSpPr>
+          <p:cNvPr id="31" name="ZoneTexte 30">
+            <a:extLst>
+              <a:ext uri="{FF2B5EF4-FFF2-40B4-BE49-F238E27FC236}">
+                <a16:creationId xmlns:a16="http://schemas.microsoft.com/office/drawing/2014/main" id="{6F47604A-F072-9B2B-A28D-D050592AE8FB}"/>
+              </a:ext>
+            </a:extLst>
+          </p:cNvPr>
+          <p:cNvSpPr txBox="1"/>
+          <p:nvPr/>
+        </p:nvSpPr>
+        <p:spPr>
+          <a:xfrm>
+            <a:off x="2317948" y="2666332"/>
+            <a:ext cx="1390212" cy="200055"/>
+          </a:xfrm>
+          <a:prstGeom prst="rect">
+            <a:avLst/>
+          </a:prstGeom>
+          <a:noFill/>
+        </p:spPr>
+        <p:txBody>
+          <a:bodyPr wrap="square" rtlCol="0">
+            <a:spAutoFit/>
+          </a:bodyPr>
+          <a:lstStyle/>
+          <a:p>
+            <a:pPr algn="ctr"/>
+            <a:r>
+              <a:rPr lang="fr-FR" sz="700" b="1" dirty="0"/>
+              <a:t>Données historiques</a:t>
+            </a:r>
+          </a:p>
+        </p:txBody>
+      </p:sp>
+      <p:sp>
+        <p:nvSpPr>
+          <p:cNvPr id="32" name="ZoneTexte 31">
+            <a:extLst>
+              <a:ext uri="{FF2B5EF4-FFF2-40B4-BE49-F238E27FC236}">
+                <a16:creationId xmlns:a16="http://schemas.microsoft.com/office/drawing/2014/main" id="{746A74A5-8390-A9B2-0686-BA8885C4CDA4}"/>
+              </a:ext>
+            </a:extLst>
+          </p:cNvPr>
+          <p:cNvSpPr txBox="1"/>
+          <p:nvPr/>
+        </p:nvSpPr>
+        <p:spPr>
+          <a:xfrm>
+            <a:off x="2317948" y="3823045"/>
+            <a:ext cx="1390212" cy="200055"/>
+          </a:xfrm>
+          <a:prstGeom prst="rect">
+            <a:avLst/>
+          </a:prstGeom>
+          <a:noFill/>
+        </p:spPr>
+        <p:txBody>
+          <a:bodyPr wrap="square" rtlCol="0">
+            <a:spAutoFit/>
+          </a:bodyPr>
+          <a:lstStyle/>
+          <a:p>
+            <a:pPr algn="ctr"/>
+            <a:r>
+              <a:rPr lang="fr-FR" sz="700" b="1" dirty="0"/>
+              <a:t>Données prédictives</a:t>
+            </a:r>
+          </a:p>
+        </p:txBody>
+      </p:sp>
     </p:spTree>
     <p:extLst>
       <p:ext uri="{BB962C8B-B14F-4D97-AF65-F5344CB8AC3E}">
@@ -34916,885 +34341,6 @@
   <p:clrMapOvr>
     <a:masterClrMapping/>
   </p:clrMapOvr>
-  <p:timing>
-    <p:tnLst>
-      <p:par>
-        <p:cTn id="1" dur="indefinite" restart="never" nodeType="tmRoot">
-          <p:childTnLst>
-            <p:seq concurrent="1" nextAc="seek">
-              <p:cTn id="2" dur="indefinite" nodeType="mainSeq">
-                <p:childTnLst>
-                  <p:par>
-                    <p:cTn id="3" fill="hold">
-                      <p:stCondLst>
-                        <p:cond delay="indefinite"/>
-                      </p:stCondLst>
-                      <p:childTnLst>
-                        <p:par>
-                          <p:cTn id="4" fill="hold">
-                            <p:stCondLst>
-                              <p:cond delay="0"/>
-                            </p:stCondLst>
-                            <p:childTnLst>
-                              <p:par>
-                                <p:cTn id="5" presetID="1" presetClass="entr" presetSubtype="0" fill="hold" nodeType="clickEffect">
-                                  <p:stCondLst>
-                                    <p:cond delay="0"/>
-                                  </p:stCondLst>
-                                  <p:childTnLst>
-                                    <p:set>
-                                      <p:cBhvr>
-                                        <p:cTn id="6" dur="1" fill="hold">
-                                          <p:stCondLst>
-                                            <p:cond delay="0"/>
-                                          </p:stCondLst>
-                                        </p:cTn>
-                                        <p:tgtEl>
-                                          <p:spTgt spid="9"/>
-                                        </p:tgtEl>
-                                        <p:attrNameLst>
-                                          <p:attrName>style.visibility</p:attrName>
-                                        </p:attrNameLst>
-                                      </p:cBhvr>
-                                      <p:to>
-                                        <p:strVal val="visible"/>
-                                      </p:to>
-                                    </p:set>
-                                  </p:childTnLst>
-                                </p:cTn>
-                              </p:par>
-                              <p:par>
-                                <p:cTn id="7" presetID="1" presetClass="entr" presetSubtype="0" fill="hold" grpId="0" nodeType="withEffect">
-                                  <p:stCondLst>
-                                    <p:cond delay="0"/>
-                                  </p:stCondLst>
-                                  <p:childTnLst>
-                                    <p:set>
-                                      <p:cBhvr>
-                                        <p:cTn id="8" dur="1" fill="hold">
-                                          <p:stCondLst>
-                                            <p:cond delay="0"/>
-                                          </p:stCondLst>
-                                        </p:cTn>
-                                        <p:tgtEl>
-                                          <p:spTgt spid="2"/>
-                                        </p:tgtEl>
-                                        <p:attrNameLst>
-                                          <p:attrName>style.visibility</p:attrName>
-                                        </p:attrNameLst>
-                                      </p:cBhvr>
-                                      <p:to>
-                                        <p:strVal val="visible"/>
-                                      </p:to>
-                                    </p:set>
-                                  </p:childTnLst>
-                                </p:cTn>
-                              </p:par>
-                            </p:childTnLst>
-                          </p:cTn>
-                        </p:par>
-                      </p:childTnLst>
-                    </p:cTn>
-                  </p:par>
-                  <p:par>
-                    <p:cTn id="9" fill="hold">
-                      <p:stCondLst>
-                        <p:cond delay="indefinite"/>
-                      </p:stCondLst>
-                      <p:childTnLst>
-                        <p:par>
-                          <p:cTn id="10" fill="hold">
-                            <p:stCondLst>
-                              <p:cond delay="0"/>
-                            </p:stCondLst>
-                            <p:childTnLst>
-                              <p:par>
-                                <p:cTn id="11" presetID="1" presetClass="entr" presetSubtype="0" fill="hold" nodeType="clickEffect">
-                                  <p:stCondLst>
-                                    <p:cond delay="0"/>
-                                  </p:stCondLst>
-                                  <p:childTnLst>
-                                    <p:set>
-                                      <p:cBhvr>
-                                        <p:cTn id="12" dur="1" fill="hold">
-                                          <p:stCondLst>
-                                            <p:cond delay="0"/>
-                                          </p:stCondLst>
-                                        </p:cTn>
-                                        <p:tgtEl>
-                                          <p:spTgt spid="11"/>
-                                        </p:tgtEl>
-                                        <p:attrNameLst>
-                                          <p:attrName>style.visibility</p:attrName>
-                                        </p:attrNameLst>
-                                      </p:cBhvr>
-                                      <p:to>
-                                        <p:strVal val="visible"/>
-                                      </p:to>
-                                    </p:set>
-                                  </p:childTnLst>
-                                </p:cTn>
-                              </p:par>
-                              <p:par>
-                                <p:cTn id="13" presetID="1" presetClass="entr" presetSubtype="0" fill="hold" grpId="0" nodeType="withEffect">
-                                  <p:stCondLst>
-                                    <p:cond delay="0"/>
-                                  </p:stCondLst>
-                                  <p:childTnLst>
-                                    <p:set>
-                                      <p:cBhvr>
-                                        <p:cTn id="14" dur="1" fill="hold">
-                                          <p:stCondLst>
-                                            <p:cond delay="0"/>
-                                          </p:stCondLst>
-                                        </p:cTn>
-                                        <p:tgtEl>
-                                          <p:spTgt spid="18"/>
-                                        </p:tgtEl>
-                                        <p:attrNameLst>
-                                          <p:attrName>style.visibility</p:attrName>
-                                        </p:attrNameLst>
-                                      </p:cBhvr>
-                                      <p:to>
-                                        <p:strVal val="visible"/>
-                                      </p:to>
-                                    </p:set>
-                                  </p:childTnLst>
-                                </p:cTn>
-                              </p:par>
-                            </p:childTnLst>
-                          </p:cTn>
-                        </p:par>
-                      </p:childTnLst>
-                    </p:cTn>
-                  </p:par>
-                  <p:par>
-                    <p:cTn id="15" fill="hold">
-                      <p:stCondLst>
-                        <p:cond delay="indefinite"/>
-                      </p:stCondLst>
-                      <p:childTnLst>
-                        <p:par>
-                          <p:cTn id="16" fill="hold">
-                            <p:stCondLst>
-                              <p:cond delay="0"/>
-                            </p:stCondLst>
-                            <p:childTnLst>
-                              <p:par>
-                                <p:cTn id="17" presetID="1" presetClass="entr" presetSubtype="0" fill="hold" nodeType="clickEffect">
-                                  <p:stCondLst>
-                                    <p:cond delay="0"/>
-                                  </p:stCondLst>
-                                  <p:childTnLst>
-                                    <p:set>
-                                      <p:cBhvr>
-                                        <p:cTn id="18" dur="1" fill="hold">
-                                          <p:stCondLst>
-                                            <p:cond delay="0"/>
-                                          </p:stCondLst>
-                                        </p:cTn>
-                                        <p:tgtEl>
-                                          <p:spTgt spid="13"/>
-                                        </p:tgtEl>
-                                        <p:attrNameLst>
-                                          <p:attrName>style.visibility</p:attrName>
-                                        </p:attrNameLst>
-                                      </p:cBhvr>
-                                      <p:to>
-                                        <p:strVal val="visible"/>
-                                      </p:to>
-                                    </p:set>
-                                  </p:childTnLst>
-                                </p:cTn>
-                              </p:par>
-                              <p:par>
-                                <p:cTn id="19" presetID="1" presetClass="entr" presetSubtype="0" fill="hold" grpId="0" nodeType="withEffect">
-                                  <p:stCondLst>
-                                    <p:cond delay="0"/>
-                                  </p:stCondLst>
-                                  <p:childTnLst>
-                                    <p:set>
-                                      <p:cBhvr>
-                                        <p:cTn id="20" dur="1" fill="hold">
-                                          <p:stCondLst>
-                                            <p:cond delay="0"/>
-                                          </p:stCondLst>
-                                        </p:cTn>
-                                        <p:tgtEl>
-                                          <p:spTgt spid="22"/>
-                                        </p:tgtEl>
-                                        <p:attrNameLst>
-                                          <p:attrName>style.visibility</p:attrName>
-                                        </p:attrNameLst>
-                                      </p:cBhvr>
-                                      <p:to>
-                                        <p:strVal val="visible"/>
-                                      </p:to>
-                                    </p:set>
-                                  </p:childTnLst>
-                                </p:cTn>
-                              </p:par>
-                            </p:childTnLst>
-                          </p:cTn>
-                        </p:par>
-                      </p:childTnLst>
-                    </p:cTn>
-                  </p:par>
-                  <p:par>
-                    <p:cTn id="21" fill="hold">
-                      <p:stCondLst>
-                        <p:cond delay="indefinite"/>
-                      </p:stCondLst>
-                      <p:childTnLst>
-                        <p:par>
-                          <p:cTn id="22" fill="hold">
-                            <p:stCondLst>
-                              <p:cond delay="0"/>
-                            </p:stCondLst>
-                            <p:childTnLst>
-                              <p:par>
-                                <p:cTn id="23" presetID="1" presetClass="entr" presetSubtype="0" fill="hold" nodeType="clickEffect">
-                                  <p:stCondLst>
-                                    <p:cond delay="0"/>
-                                  </p:stCondLst>
-                                  <p:childTnLst>
-                                    <p:set>
-                                      <p:cBhvr>
-                                        <p:cTn id="24" dur="1" fill="hold">
-                                          <p:stCondLst>
-                                            <p:cond delay="0"/>
-                                          </p:stCondLst>
-                                        </p:cTn>
-                                        <p:tgtEl>
-                                          <p:spTgt spid="1036"/>
-                                        </p:tgtEl>
-                                        <p:attrNameLst>
-                                          <p:attrName>style.visibility</p:attrName>
-                                        </p:attrNameLst>
-                                      </p:cBhvr>
-                                      <p:to>
-                                        <p:strVal val="visible"/>
-                                      </p:to>
-                                    </p:set>
-                                  </p:childTnLst>
-                                </p:cTn>
-                              </p:par>
-                              <p:par>
-                                <p:cTn id="25" presetID="1" presetClass="entr" presetSubtype="0" fill="hold" nodeType="withEffect">
-                                  <p:stCondLst>
-                                    <p:cond delay="0"/>
-                                  </p:stCondLst>
-                                  <p:childTnLst>
-                                    <p:set>
-                                      <p:cBhvr>
-                                        <p:cTn id="26" dur="1" fill="hold">
-                                          <p:stCondLst>
-                                            <p:cond delay="0"/>
-                                          </p:stCondLst>
-                                        </p:cTn>
-                                        <p:tgtEl>
-                                          <p:spTgt spid="1038"/>
-                                        </p:tgtEl>
-                                        <p:attrNameLst>
-                                          <p:attrName>style.visibility</p:attrName>
-                                        </p:attrNameLst>
-                                      </p:cBhvr>
-                                      <p:to>
-                                        <p:strVal val="visible"/>
-                                      </p:to>
-                                    </p:set>
-                                  </p:childTnLst>
-                                </p:cTn>
-                              </p:par>
-                              <p:par>
-                                <p:cTn id="27" presetID="1" presetClass="entr" presetSubtype="0" fill="hold" grpId="0" nodeType="withEffect">
-                                  <p:stCondLst>
-                                    <p:cond delay="0"/>
-                                  </p:stCondLst>
-                                  <p:childTnLst>
-                                    <p:set>
-                                      <p:cBhvr>
-                                        <p:cTn id="28" dur="1" fill="hold">
-                                          <p:stCondLst>
-                                            <p:cond delay="0"/>
-                                          </p:stCondLst>
-                                        </p:cTn>
-                                        <p:tgtEl>
-                                          <p:spTgt spid="47"/>
-                                        </p:tgtEl>
-                                        <p:attrNameLst>
-                                          <p:attrName>style.visibility</p:attrName>
-                                        </p:attrNameLst>
-                                      </p:cBhvr>
-                                      <p:to>
-                                        <p:strVal val="visible"/>
-                                      </p:to>
-                                    </p:set>
-                                  </p:childTnLst>
-                                </p:cTn>
-                              </p:par>
-                              <p:par>
-                                <p:cTn id="29" presetID="1" presetClass="entr" presetSubtype="0" fill="hold" grpId="0" nodeType="withEffect">
-                                  <p:stCondLst>
-                                    <p:cond delay="0"/>
-                                  </p:stCondLst>
-                                  <p:childTnLst>
-                                    <p:set>
-                                      <p:cBhvr>
-                                        <p:cTn id="30" dur="1" fill="hold">
-                                          <p:stCondLst>
-                                            <p:cond delay="0"/>
-                                          </p:stCondLst>
-                                        </p:cTn>
-                                        <p:tgtEl>
-                                          <p:spTgt spid="48"/>
-                                        </p:tgtEl>
-                                        <p:attrNameLst>
-                                          <p:attrName>style.visibility</p:attrName>
-                                        </p:attrNameLst>
-                                      </p:cBhvr>
-                                      <p:to>
-                                        <p:strVal val="visible"/>
-                                      </p:to>
-                                    </p:set>
-                                  </p:childTnLst>
-                                </p:cTn>
-                              </p:par>
-                              <p:par>
-                                <p:cTn id="31" presetID="1" presetClass="entr" presetSubtype="0" fill="hold" grpId="0" nodeType="withEffect">
-                                  <p:stCondLst>
-                                    <p:cond delay="0"/>
-                                  </p:stCondLst>
-                                  <p:childTnLst>
-                                    <p:set>
-                                      <p:cBhvr>
-                                        <p:cTn id="32" dur="1" fill="hold">
-                                          <p:stCondLst>
-                                            <p:cond delay="0"/>
-                                          </p:stCondLst>
-                                        </p:cTn>
-                                        <p:tgtEl>
-                                          <p:spTgt spid="49"/>
-                                        </p:tgtEl>
-                                        <p:attrNameLst>
-                                          <p:attrName>style.visibility</p:attrName>
-                                        </p:attrNameLst>
-                                      </p:cBhvr>
-                                      <p:to>
-                                        <p:strVal val="visible"/>
-                                      </p:to>
-                                    </p:set>
-                                  </p:childTnLst>
-                                </p:cTn>
-                              </p:par>
-                              <p:par>
-                                <p:cTn id="33" presetID="1" presetClass="entr" presetSubtype="0" fill="hold" grpId="0" nodeType="withEffect">
-                                  <p:stCondLst>
-                                    <p:cond delay="0"/>
-                                  </p:stCondLst>
-                                  <p:childTnLst>
-                                    <p:set>
-                                      <p:cBhvr>
-                                        <p:cTn id="34" dur="1" fill="hold">
-                                          <p:stCondLst>
-                                            <p:cond delay="0"/>
-                                          </p:stCondLst>
-                                        </p:cTn>
-                                        <p:tgtEl>
-                                          <p:spTgt spid="50"/>
-                                        </p:tgtEl>
-                                        <p:attrNameLst>
-                                          <p:attrName>style.visibility</p:attrName>
-                                        </p:attrNameLst>
-                                      </p:cBhvr>
-                                      <p:to>
-                                        <p:strVal val="visible"/>
-                                      </p:to>
-                                    </p:set>
-                                  </p:childTnLst>
-                                </p:cTn>
-                              </p:par>
-                              <p:par>
-                                <p:cTn id="35" presetID="1" presetClass="entr" presetSubtype="0" fill="hold" nodeType="withEffect">
-                                  <p:stCondLst>
-                                    <p:cond delay="0"/>
-                                  </p:stCondLst>
-                                  <p:childTnLst>
-                                    <p:set>
-                                      <p:cBhvr>
-                                        <p:cTn id="36" dur="1" fill="hold">
-                                          <p:stCondLst>
-                                            <p:cond delay="0"/>
-                                          </p:stCondLst>
-                                        </p:cTn>
-                                        <p:tgtEl>
-                                          <p:spTgt spid="2054"/>
-                                        </p:tgtEl>
-                                        <p:attrNameLst>
-                                          <p:attrName>style.visibility</p:attrName>
-                                        </p:attrNameLst>
-                                      </p:cBhvr>
-                                      <p:to>
-                                        <p:strVal val="visible"/>
-                                      </p:to>
-                                    </p:set>
-                                  </p:childTnLst>
-                                </p:cTn>
-                              </p:par>
-                              <p:par>
-                                <p:cTn id="37" presetID="1" presetClass="entr" presetSubtype="0" fill="hold" nodeType="withEffect">
-                                  <p:stCondLst>
-                                    <p:cond delay="0"/>
-                                  </p:stCondLst>
-                                  <p:childTnLst>
-                                    <p:set>
-                                      <p:cBhvr>
-                                        <p:cTn id="38" dur="1" fill="hold">
-                                          <p:stCondLst>
-                                            <p:cond delay="0"/>
-                                          </p:stCondLst>
-                                        </p:cTn>
-                                        <p:tgtEl>
-                                          <p:spTgt spid="51"/>
-                                        </p:tgtEl>
-                                        <p:attrNameLst>
-                                          <p:attrName>style.visibility</p:attrName>
-                                        </p:attrNameLst>
-                                      </p:cBhvr>
-                                      <p:to>
-                                        <p:strVal val="visible"/>
-                                      </p:to>
-                                    </p:set>
-                                  </p:childTnLst>
-                                </p:cTn>
-                              </p:par>
-                              <p:par>
-                                <p:cTn id="39" presetID="1" presetClass="entr" presetSubtype="0" fill="hold" grpId="0" nodeType="withEffect">
-                                  <p:stCondLst>
-                                    <p:cond delay="0"/>
-                                  </p:stCondLst>
-                                  <p:childTnLst>
-                                    <p:set>
-                                      <p:cBhvr>
-                                        <p:cTn id="40" dur="1" fill="hold">
-                                          <p:stCondLst>
-                                            <p:cond delay="0"/>
-                                          </p:stCondLst>
-                                        </p:cTn>
-                                        <p:tgtEl>
-                                          <p:spTgt spid="52"/>
-                                        </p:tgtEl>
-                                        <p:attrNameLst>
-                                          <p:attrName>style.visibility</p:attrName>
-                                        </p:attrNameLst>
-                                      </p:cBhvr>
-                                      <p:to>
-                                        <p:strVal val="visible"/>
-                                      </p:to>
-                                    </p:set>
-                                  </p:childTnLst>
-                                </p:cTn>
-                              </p:par>
-                              <p:par>
-                                <p:cTn id="41" presetID="1" presetClass="entr" presetSubtype="0" fill="hold" nodeType="withEffect">
-                                  <p:stCondLst>
-                                    <p:cond delay="0"/>
-                                  </p:stCondLst>
-                                  <p:childTnLst>
-                                    <p:set>
-                                      <p:cBhvr>
-                                        <p:cTn id="42" dur="1" fill="hold">
-                                          <p:stCondLst>
-                                            <p:cond delay="0"/>
-                                          </p:stCondLst>
-                                        </p:cTn>
-                                        <p:tgtEl>
-                                          <p:spTgt spid="1068"/>
-                                        </p:tgtEl>
-                                        <p:attrNameLst>
-                                          <p:attrName>style.visibility</p:attrName>
-                                        </p:attrNameLst>
-                                      </p:cBhvr>
-                                      <p:to>
-                                        <p:strVal val="visible"/>
-                                      </p:to>
-                                    </p:set>
-                                  </p:childTnLst>
-                                </p:cTn>
-                              </p:par>
-                              <p:par>
-                                <p:cTn id="43" presetID="1" presetClass="entr" presetSubtype="0" fill="hold" grpId="0" nodeType="withEffect">
-                                  <p:stCondLst>
-                                    <p:cond delay="0"/>
-                                  </p:stCondLst>
-                                  <p:childTnLst>
-                                    <p:set>
-                                      <p:cBhvr>
-                                        <p:cTn id="44" dur="1" fill="hold">
-                                          <p:stCondLst>
-                                            <p:cond delay="0"/>
-                                          </p:stCondLst>
-                                        </p:cTn>
-                                        <p:tgtEl>
-                                          <p:spTgt spid="53"/>
-                                        </p:tgtEl>
-                                        <p:attrNameLst>
-                                          <p:attrName>style.visibility</p:attrName>
-                                        </p:attrNameLst>
-                                      </p:cBhvr>
-                                      <p:to>
-                                        <p:strVal val="visible"/>
-                                      </p:to>
-                                    </p:set>
-                                  </p:childTnLst>
-                                </p:cTn>
-                              </p:par>
-                              <p:par>
-                                <p:cTn id="45" presetID="1" presetClass="entr" presetSubtype="0" fill="hold" nodeType="withEffect">
-                                  <p:stCondLst>
-                                    <p:cond delay="0"/>
-                                  </p:stCondLst>
-                                  <p:childTnLst>
-                                    <p:set>
-                                      <p:cBhvr>
-                                        <p:cTn id="46" dur="1" fill="hold">
-                                          <p:stCondLst>
-                                            <p:cond delay="0"/>
-                                          </p:stCondLst>
-                                        </p:cTn>
-                                        <p:tgtEl>
-                                          <p:spTgt spid="1046"/>
-                                        </p:tgtEl>
-                                        <p:attrNameLst>
-                                          <p:attrName>style.visibility</p:attrName>
-                                        </p:attrNameLst>
-                                      </p:cBhvr>
-                                      <p:to>
-                                        <p:strVal val="visible"/>
-                                      </p:to>
-                                    </p:set>
-                                  </p:childTnLst>
-                                </p:cTn>
-                              </p:par>
-                            </p:childTnLst>
-                          </p:cTn>
-                        </p:par>
-                      </p:childTnLst>
-                    </p:cTn>
-                  </p:par>
-                  <p:par>
-                    <p:cTn id="47" fill="hold">
-                      <p:stCondLst>
-                        <p:cond delay="indefinite"/>
-                      </p:stCondLst>
-                      <p:childTnLst>
-                        <p:par>
-                          <p:cTn id="48" fill="hold">
-                            <p:stCondLst>
-                              <p:cond delay="0"/>
-                            </p:stCondLst>
-                            <p:childTnLst>
-                              <p:par>
-                                <p:cTn id="49" presetID="1" presetClass="entr" presetSubtype="0" fill="hold" grpId="0" nodeType="clickEffect">
-                                  <p:stCondLst>
-                                    <p:cond delay="0"/>
-                                  </p:stCondLst>
-                                  <p:childTnLst>
-                                    <p:set>
-                                      <p:cBhvr>
-                                        <p:cTn id="50" dur="1" fill="hold">
-                                          <p:stCondLst>
-                                            <p:cond delay="0"/>
-                                          </p:stCondLst>
-                                        </p:cTn>
-                                        <p:tgtEl>
-                                          <p:spTgt spid="26"/>
-                                        </p:tgtEl>
-                                        <p:attrNameLst>
-                                          <p:attrName>style.visibility</p:attrName>
-                                        </p:attrNameLst>
-                                      </p:cBhvr>
-                                      <p:to>
-                                        <p:strVal val="visible"/>
-                                      </p:to>
-                                    </p:set>
-                                  </p:childTnLst>
-                                </p:cTn>
-                              </p:par>
-                              <p:par>
-                                <p:cTn id="51" presetID="1" presetClass="entr" presetSubtype="0" fill="hold" nodeType="withEffect">
-                                  <p:stCondLst>
-                                    <p:cond delay="0"/>
-                                  </p:stCondLst>
-                                  <p:childTnLst>
-                                    <p:set>
-                                      <p:cBhvr>
-                                        <p:cTn id="52" dur="1" fill="hold">
-                                          <p:stCondLst>
-                                            <p:cond delay="0"/>
-                                          </p:stCondLst>
-                                        </p:cTn>
-                                        <p:tgtEl>
-                                          <p:spTgt spid="17"/>
-                                        </p:tgtEl>
-                                        <p:attrNameLst>
-                                          <p:attrName>style.visibility</p:attrName>
-                                        </p:attrNameLst>
-                                      </p:cBhvr>
-                                      <p:to>
-                                        <p:strVal val="visible"/>
-                                      </p:to>
-                                    </p:set>
-                                  </p:childTnLst>
-                                </p:cTn>
-                              </p:par>
-                            </p:childTnLst>
-                          </p:cTn>
-                        </p:par>
-                      </p:childTnLst>
-                    </p:cTn>
-                  </p:par>
-                  <p:par>
-                    <p:cTn id="53" fill="hold">
-                      <p:stCondLst>
-                        <p:cond delay="indefinite"/>
-                      </p:stCondLst>
-                      <p:childTnLst>
-                        <p:par>
-                          <p:cTn id="54" fill="hold">
-                            <p:stCondLst>
-                              <p:cond delay="0"/>
-                            </p:stCondLst>
-                            <p:childTnLst>
-                              <p:par>
-                                <p:cTn id="55" presetID="1" presetClass="entr" presetSubtype="0" fill="hold" nodeType="clickEffect">
-                                  <p:stCondLst>
-                                    <p:cond delay="0"/>
-                                  </p:stCondLst>
-                                  <p:childTnLst>
-                                    <p:set>
-                                      <p:cBhvr>
-                                        <p:cTn id="56" dur="1" fill="hold">
-                                          <p:stCondLst>
-                                            <p:cond delay="0"/>
-                                          </p:stCondLst>
-                                        </p:cTn>
-                                        <p:tgtEl>
-                                          <p:spTgt spid="1029"/>
-                                        </p:tgtEl>
-                                        <p:attrNameLst>
-                                          <p:attrName>style.visibility</p:attrName>
-                                        </p:attrNameLst>
-                                      </p:cBhvr>
-                                      <p:to>
-                                        <p:strVal val="visible"/>
-                                      </p:to>
-                                    </p:set>
-                                  </p:childTnLst>
-                                </p:cTn>
-                              </p:par>
-                            </p:childTnLst>
-                          </p:cTn>
-                        </p:par>
-                      </p:childTnLst>
-                    </p:cTn>
-                  </p:par>
-                  <p:par>
-                    <p:cTn id="57" fill="hold">
-                      <p:stCondLst>
-                        <p:cond delay="indefinite"/>
-                      </p:stCondLst>
-                      <p:childTnLst>
-                        <p:par>
-                          <p:cTn id="58" fill="hold">
-                            <p:stCondLst>
-                              <p:cond delay="0"/>
-                            </p:stCondLst>
-                            <p:childTnLst>
-                              <p:par>
-                                <p:cTn id="59" presetID="1" presetClass="entr" presetSubtype="0" fill="hold" nodeType="clickEffect">
-                                  <p:stCondLst>
-                                    <p:cond delay="0"/>
-                                  </p:stCondLst>
-                                  <p:childTnLst>
-                                    <p:set>
-                                      <p:cBhvr>
-                                        <p:cTn id="60" dur="1" fill="hold">
-                                          <p:stCondLst>
-                                            <p:cond delay="0"/>
-                                          </p:stCondLst>
-                                        </p:cTn>
-                                        <p:tgtEl>
-                                          <p:spTgt spid="1062"/>
-                                        </p:tgtEl>
-                                        <p:attrNameLst>
-                                          <p:attrName>style.visibility</p:attrName>
-                                        </p:attrNameLst>
-                                      </p:cBhvr>
-                                      <p:to>
-                                        <p:strVal val="visible"/>
-                                      </p:to>
-                                    </p:set>
-                                  </p:childTnLst>
-                                </p:cTn>
-                              </p:par>
-                            </p:childTnLst>
-                          </p:cTn>
-                        </p:par>
-                      </p:childTnLst>
-                    </p:cTn>
-                  </p:par>
-                  <p:par>
-                    <p:cTn id="61" fill="hold">
-                      <p:stCondLst>
-                        <p:cond delay="indefinite"/>
-                      </p:stCondLst>
-                      <p:childTnLst>
-                        <p:par>
-                          <p:cTn id="62" fill="hold">
-                            <p:stCondLst>
-                              <p:cond delay="0"/>
-                            </p:stCondLst>
-                            <p:childTnLst>
-                              <p:par>
-                                <p:cTn id="63" presetID="1" presetClass="entr" presetSubtype="0" fill="hold" nodeType="clickEffect">
-                                  <p:stCondLst>
-                                    <p:cond delay="0"/>
-                                  </p:stCondLst>
-                                  <p:childTnLst>
-                                    <p:set>
-                                      <p:cBhvr>
-                                        <p:cTn id="64" dur="1" fill="hold">
-                                          <p:stCondLst>
-                                            <p:cond delay="0"/>
-                                          </p:stCondLst>
-                                        </p:cTn>
-                                        <p:tgtEl>
-                                          <p:spTgt spid="1075"/>
-                                        </p:tgtEl>
-                                        <p:attrNameLst>
-                                          <p:attrName>style.visibility</p:attrName>
-                                        </p:attrNameLst>
-                                      </p:cBhvr>
-                                      <p:to>
-                                        <p:strVal val="visible"/>
-                                      </p:to>
-                                    </p:set>
-                                  </p:childTnLst>
-                                </p:cTn>
-                              </p:par>
-                            </p:childTnLst>
-                          </p:cTn>
-                        </p:par>
-                      </p:childTnLst>
-                    </p:cTn>
-                  </p:par>
-                  <p:par>
-                    <p:cTn id="65" fill="hold">
-                      <p:stCondLst>
-                        <p:cond delay="indefinite"/>
-                      </p:stCondLst>
-                      <p:childTnLst>
-                        <p:par>
-                          <p:cTn id="66" fill="hold">
-                            <p:stCondLst>
-                              <p:cond delay="0"/>
-                            </p:stCondLst>
-                            <p:childTnLst>
-                              <p:par>
-                                <p:cTn id="67" presetID="1" presetClass="entr" presetSubtype="0" fill="hold" nodeType="clickEffect">
-                                  <p:stCondLst>
-                                    <p:cond delay="0"/>
-                                  </p:stCondLst>
-                                  <p:childTnLst>
-                                    <p:set>
-                                      <p:cBhvr>
-                                        <p:cTn id="68" dur="1" fill="hold">
-                                          <p:stCondLst>
-                                            <p:cond delay="0"/>
-                                          </p:stCondLst>
-                                        </p:cTn>
-                                        <p:tgtEl>
-                                          <p:spTgt spid="2101"/>
-                                        </p:tgtEl>
-                                        <p:attrNameLst>
-                                          <p:attrName>style.visibility</p:attrName>
-                                        </p:attrNameLst>
-                                      </p:cBhvr>
-                                      <p:to>
-                                        <p:strVal val="visible"/>
-                                      </p:to>
-                                    </p:set>
-                                  </p:childTnLst>
-                                </p:cTn>
-                              </p:par>
-                              <p:par>
-                                <p:cTn id="69" presetID="1" presetClass="entr" presetSubtype="0" fill="hold" nodeType="withEffect">
-                                  <p:stCondLst>
-                                    <p:cond delay="0"/>
-                                  </p:stCondLst>
-                                  <p:childTnLst>
-                                    <p:set>
-                                      <p:cBhvr>
-                                        <p:cTn id="70" dur="1" fill="hold">
-                                          <p:stCondLst>
-                                            <p:cond delay="0"/>
-                                          </p:stCondLst>
-                                        </p:cTn>
-                                        <p:tgtEl>
-                                          <p:spTgt spid="2068"/>
-                                        </p:tgtEl>
-                                        <p:attrNameLst>
-                                          <p:attrName>style.visibility</p:attrName>
-                                        </p:attrNameLst>
-                                      </p:cBhvr>
-                                      <p:to>
-                                        <p:strVal val="visible"/>
-                                      </p:to>
-                                    </p:set>
-                                  </p:childTnLst>
-                                </p:cTn>
-                              </p:par>
-                            </p:childTnLst>
-                          </p:cTn>
-                        </p:par>
-                      </p:childTnLst>
-                    </p:cTn>
-                  </p:par>
-                </p:childTnLst>
-              </p:cTn>
-              <p:prevCondLst>
-                <p:cond evt="onPrev" delay="0">
-                  <p:tgtEl>
-                    <p:sldTgt/>
-                  </p:tgtEl>
-                </p:cond>
-              </p:prevCondLst>
-              <p:nextCondLst>
-                <p:cond evt="onNext" delay="0">
-                  <p:tgtEl>
-                    <p:sldTgt/>
-                  </p:tgtEl>
-                </p:cond>
-              </p:nextCondLst>
-            </p:seq>
-          </p:childTnLst>
-        </p:cTn>
-      </p:par>
-    </p:tnLst>
-    <p:bldLst>
-      <p:bldP spid="26" grpId="0" animBg="1"/>
-      <p:bldP spid="22" grpId="0" animBg="1"/>
-      <p:bldP spid="18" grpId="0" animBg="1"/>
-      <p:bldP spid="2" grpId="0" animBg="1"/>
-      <p:bldP spid="47" grpId="0" animBg="1"/>
-      <p:bldP spid="48" grpId="0"/>
-      <p:bldP spid="49" grpId="0" animBg="1"/>
-      <p:bldP spid="50" grpId="0"/>
-      <p:bldP spid="52" grpId="0" animBg="1"/>
-      <p:bldP spid="53" grpId="0" animBg="1"/>
-    </p:bldLst>
-  </p:timing>
 </p:sld>
 </file>
 
@@ -40518,9 +39064,9 @@
           <p:nvPr/>
         </p:nvSpPr>
         <p:spPr>
-          <a:xfrm rot="1388443">
-            <a:off x="6615041" y="529595"/>
-            <a:ext cx="1481372" cy="307777"/>
+          <a:xfrm>
+            <a:off x="6754305" y="726955"/>
+            <a:ext cx="2020760" cy="307777"/>
           </a:xfrm>
           <a:prstGeom prst="rect">
             <a:avLst/>
@@ -40545,7 +39091,7 @@
                   <a:srgbClr val="FF0000"/>
                 </a:solidFill>
               </a:rPr>
-              <a:t>A mettre à jour</a:t>
+              <a:t>MAE du modèle : 6,57</a:t>
             </a:r>
           </a:p>
         </p:txBody>

--- a/presentation/dsfs_ft_36_Projet_REnergies_efficiency_prediction.pptx
+++ b/presentation/dsfs_ft_36_Projet_REnergies_efficiency_prediction.pptx
@@ -302,7 +302,7 @@
   <pc:docChgLst>
     <pc:chgData name="Jean-Yves Vuillequez" userId="e7fac481abea6bd0" providerId="LiveId" clId="{79E365E8-22BC-4EC2-9606-9A9AC6CD1D22}"/>
     <pc:docChg chg="undo custSel addSld delSld modSld sldOrd">
-      <pc:chgData name="Jean-Yves Vuillequez" userId="e7fac481abea6bd0" providerId="LiveId" clId="{79E365E8-22BC-4EC2-9606-9A9AC6CD1D22}" dt="2025-11-22T18:31:30.300" v="7714" actId="14100"/>
+      <pc:chgData name="Jean-Yves Vuillequez" userId="e7fac481abea6bd0" providerId="LiveId" clId="{79E365E8-22BC-4EC2-9606-9A9AC6CD1D22}" dt="2025-11-23T09:52:32.533" v="7718" actId="1037"/>
       <pc:docMkLst>
         <pc:docMk/>
       </pc:docMkLst>
@@ -335,14 +335,6 @@
           <pc:docMk/>
           <pc:sldMk cId="0" sldId="263"/>
         </pc:sldMkLst>
-        <pc:spChg chg="add del mod">
-          <ac:chgData name="Jean-Yves Vuillequez" userId="e7fac481abea6bd0" providerId="LiveId" clId="{79E365E8-22BC-4EC2-9606-9A9AC6CD1D22}" dt="2025-11-21T14:09:00.301" v="6869" actId="478"/>
-          <ac:spMkLst>
-            <pc:docMk/>
-            <pc:sldMk cId="0" sldId="263"/>
-            <ac:spMk id="2" creationId="{84C75A5D-5A8E-E656-FAD3-37CEBF0CBDC6}"/>
-          </ac:spMkLst>
-        </pc:spChg>
         <pc:spChg chg="mod">
           <ac:chgData name="Jean-Yves Vuillequez" userId="e7fac481abea6bd0" providerId="LiveId" clId="{79E365E8-22BC-4EC2-9606-9A9AC6CD1D22}" dt="2025-11-21T09:41:42.184" v="5752" actId="313"/>
           <ac:spMkLst>
@@ -366,108 +358,12 @@
           <pc:docMk/>
           <pc:sldMk cId="0" sldId="264"/>
         </pc:sldMkLst>
-        <pc:spChg chg="del">
-          <ac:chgData name="Jean-Yves Vuillequez" userId="e7fac481abea6bd0" providerId="LiveId" clId="{79E365E8-22BC-4EC2-9606-9A9AC6CD1D22}" dt="2025-11-21T11:35:08.927" v="5790" actId="478"/>
-          <ac:spMkLst>
-            <pc:docMk/>
-            <pc:sldMk cId="0" sldId="264"/>
-            <ac:spMk id="2" creationId="{D9A2D66C-094F-8252-4AB9-1D218363DA6F}"/>
-          </ac:spMkLst>
-        </pc:spChg>
-        <pc:spChg chg="del">
-          <ac:chgData name="Jean-Yves Vuillequez" userId="e7fac481abea6bd0" providerId="LiveId" clId="{79E365E8-22BC-4EC2-9606-9A9AC6CD1D22}" dt="2025-11-21T11:35:08.927" v="5790" actId="478"/>
-          <ac:spMkLst>
-            <pc:docMk/>
-            <pc:sldMk cId="0" sldId="264"/>
-            <ac:spMk id="3" creationId="{7FF79EE1-EF4C-C032-2762-642CB4374D9E}"/>
-          </ac:spMkLst>
-        </pc:spChg>
-        <pc:spChg chg="del">
-          <ac:chgData name="Jean-Yves Vuillequez" userId="e7fac481abea6bd0" providerId="LiveId" clId="{79E365E8-22BC-4EC2-9606-9A9AC6CD1D22}" dt="2025-11-21T11:35:08.927" v="5790" actId="478"/>
-          <ac:spMkLst>
-            <pc:docMk/>
-            <pc:sldMk cId="0" sldId="264"/>
-            <ac:spMk id="4" creationId="{74B88362-D1CF-C90B-F395-C78CE911F3EF}"/>
-          </ac:spMkLst>
-        </pc:spChg>
-        <pc:spChg chg="del">
-          <ac:chgData name="Jean-Yves Vuillequez" userId="e7fac481abea6bd0" providerId="LiveId" clId="{79E365E8-22BC-4EC2-9606-9A9AC6CD1D22}" dt="2025-11-21T11:35:08.927" v="5790" actId="478"/>
-          <ac:spMkLst>
-            <pc:docMk/>
-            <pc:sldMk cId="0" sldId="264"/>
-            <ac:spMk id="5" creationId="{B8634BBC-9BFC-F3FD-159A-1BB03B177FBD}"/>
-          </ac:spMkLst>
-        </pc:spChg>
-        <pc:spChg chg="del">
-          <ac:chgData name="Jean-Yves Vuillequez" userId="e7fac481abea6bd0" providerId="LiveId" clId="{79E365E8-22BC-4EC2-9606-9A9AC6CD1D22}" dt="2025-11-21T11:35:08.927" v="5790" actId="478"/>
-          <ac:spMkLst>
-            <pc:docMk/>
-            <pc:sldMk cId="0" sldId="264"/>
-            <ac:spMk id="6" creationId="{D24ED56D-F7B0-2AFA-714B-EB43DAAC41C2}"/>
-          </ac:spMkLst>
-        </pc:spChg>
-        <pc:spChg chg="del">
-          <ac:chgData name="Jean-Yves Vuillequez" userId="e7fac481abea6bd0" providerId="LiveId" clId="{79E365E8-22BC-4EC2-9606-9A9AC6CD1D22}" dt="2025-11-21T11:35:08.927" v="5790" actId="478"/>
-          <ac:spMkLst>
-            <pc:docMk/>
-            <pc:sldMk cId="0" sldId="264"/>
-            <ac:spMk id="7" creationId="{72EE3BE6-BBB0-90D2-DB6E-C1B217378D14}"/>
-          </ac:spMkLst>
-        </pc:spChg>
-        <pc:spChg chg="del">
-          <ac:chgData name="Jean-Yves Vuillequez" userId="e7fac481abea6bd0" providerId="LiveId" clId="{79E365E8-22BC-4EC2-9606-9A9AC6CD1D22}" dt="2025-11-21T11:35:11.641" v="5791" actId="478"/>
-          <ac:spMkLst>
-            <pc:docMk/>
-            <pc:sldMk cId="0" sldId="264"/>
-            <ac:spMk id="8" creationId="{E91DB620-877D-C30D-0478-6C655CD107B0}"/>
-          </ac:spMkLst>
-        </pc:spChg>
-        <pc:spChg chg="del">
-          <ac:chgData name="Jean-Yves Vuillequez" userId="e7fac481abea6bd0" providerId="LiveId" clId="{79E365E8-22BC-4EC2-9606-9A9AC6CD1D22}" dt="2025-11-21T11:35:11.641" v="5791" actId="478"/>
-          <ac:spMkLst>
-            <pc:docMk/>
-            <pc:sldMk cId="0" sldId="264"/>
-            <ac:spMk id="9" creationId="{11CDC224-40D9-B526-36A3-CFBD4101FFBC}"/>
-          </ac:spMkLst>
-        </pc:spChg>
         <pc:spChg chg="add mod">
           <ac:chgData name="Jean-Yves Vuillequez" userId="e7fac481abea6bd0" providerId="LiveId" clId="{79E365E8-22BC-4EC2-9606-9A9AC6CD1D22}" dt="2025-11-21T12:01:02.283" v="6077" actId="1076"/>
           <ac:spMkLst>
             <pc:docMk/>
             <pc:sldMk cId="0" sldId="264"/>
             <ac:spMk id="10" creationId="{969F6912-24B4-86C3-A9BD-63A0B3EECE8F}"/>
-          </ac:spMkLst>
-        </pc:spChg>
-        <pc:spChg chg="add del mod">
-          <ac:chgData name="Jean-Yves Vuillequez" userId="e7fac481abea6bd0" providerId="LiveId" clId="{79E365E8-22BC-4EC2-9606-9A9AC6CD1D22}" dt="2025-11-21T11:44:36.133" v="6041" actId="478"/>
-          <ac:spMkLst>
-            <pc:docMk/>
-            <pc:sldMk cId="0" sldId="264"/>
-            <ac:spMk id="11" creationId="{7813ACC0-69E6-185E-DF42-22E2CB64BE2F}"/>
-          </ac:spMkLst>
-        </pc:spChg>
-        <pc:spChg chg="add del mod">
-          <ac:chgData name="Jean-Yves Vuillequez" userId="e7fac481abea6bd0" providerId="LiveId" clId="{79E365E8-22BC-4EC2-9606-9A9AC6CD1D22}" dt="2025-11-21T11:39:01.232" v="5886" actId="478"/>
-          <ac:spMkLst>
-            <pc:docMk/>
-            <pc:sldMk cId="0" sldId="264"/>
-            <ac:spMk id="12" creationId="{23CCC4AD-A6DE-3BB9-488F-72C626DEBCCF}"/>
-          </ac:spMkLst>
-        </pc:spChg>
-        <pc:spChg chg="add del mod">
-          <ac:chgData name="Jean-Yves Vuillequez" userId="e7fac481abea6bd0" providerId="LiveId" clId="{79E365E8-22BC-4EC2-9606-9A9AC6CD1D22}" dt="2025-11-21T11:42:39.285" v="6001" actId="478"/>
-          <ac:spMkLst>
-            <pc:docMk/>
-            <pc:sldMk cId="0" sldId="264"/>
-            <ac:spMk id="13" creationId="{9E9F0506-6FE8-08AF-1B83-C9550F56A61C}"/>
-          </ac:spMkLst>
-        </pc:spChg>
-        <pc:spChg chg="add del mod">
-          <ac:chgData name="Jean-Yves Vuillequez" userId="e7fac481abea6bd0" providerId="LiveId" clId="{79E365E8-22BC-4EC2-9606-9A9AC6CD1D22}" dt="2025-11-21T11:42:39.285" v="6001" actId="478"/>
-          <ac:spMkLst>
-            <pc:docMk/>
-            <pc:sldMk cId="0" sldId="264"/>
-            <ac:spMk id="14" creationId="{2A945BF2-0A42-F2CB-5C50-FE70838E27A5}"/>
           </ac:spMkLst>
         </pc:spChg>
         <pc:spChg chg="add mod ord">
@@ -494,14 +390,6 @@
             <ac:spMk id="17" creationId="{CA110F94-5779-164B-A681-281821A7140F}"/>
           </ac:spMkLst>
         </pc:spChg>
-        <pc:spChg chg="add del mod">
-          <ac:chgData name="Jean-Yves Vuillequez" userId="e7fac481abea6bd0" providerId="LiveId" clId="{79E365E8-22BC-4EC2-9606-9A9AC6CD1D22}" dt="2025-11-21T12:00:21.030" v="6069" actId="478"/>
-          <ac:spMkLst>
-            <pc:docMk/>
-            <pc:sldMk cId="0" sldId="264"/>
-            <ac:spMk id="18" creationId="{E7E7566B-F2E7-D36E-1873-BD9CE02F26E9}"/>
-          </ac:spMkLst>
-        </pc:spChg>
         <pc:spChg chg="add mod">
           <ac:chgData name="Jean-Yves Vuillequez" userId="e7fac481abea6bd0" providerId="LiveId" clId="{79E365E8-22BC-4EC2-9606-9A9AC6CD1D22}" dt="2025-11-21T12:16:37.075" v="6161" actId="1076"/>
           <ac:spMkLst>
@@ -516,14 +404,6 @@
             <pc:docMk/>
             <pc:sldMk cId="0" sldId="264"/>
             <ac:spMk id="20" creationId="{027ADA1A-FB26-718D-5918-4A696CD7FAD0}"/>
-          </ac:spMkLst>
-        </pc:spChg>
-        <pc:spChg chg="add del mod">
-          <ac:chgData name="Jean-Yves Vuillequez" userId="e7fac481abea6bd0" providerId="LiveId" clId="{79E365E8-22BC-4EC2-9606-9A9AC6CD1D22}" dt="2025-11-21T12:04:04.549" v="6116" actId="478"/>
-          <ac:spMkLst>
-            <pc:docMk/>
-            <pc:sldMk cId="0" sldId="264"/>
-            <ac:spMk id="21" creationId="{ED5837DA-54D3-662C-D286-F133E4AA8974}"/>
           </ac:spMkLst>
         </pc:spChg>
         <pc:spChg chg="add mod">
@@ -725,7 +605,7 @@
         </pc:spChg>
       </pc:sldChg>
       <pc:sldChg chg="addSp delSp modSp add mod ord delAnim modAnim modNotesTx">
-        <pc:chgData name="Jean-Yves Vuillequez" userId="e7fac481abea6bd0" providerId="LiveId" clId="{79E365E8-22BC-4EC2-9606-9A9AC6CD1D22}" dt="2025-11-22T18:31:30.300" v="7714" actId="14100"/>
+        <pc:chgData name="Jean-Yves Vuillequez" userId="e7fac481abea6bd0" providerId="LiveId" clId="{79E365E8-22BC-4EC2-9606-9A9AC6CD1D22}" dt="2025-11-23T09:52:32.533" v="7718" actId="1037"/>
         <pc:sldMkLst>
           <pc:docMk/>
           <pc:sldMk cId="1821755839" sldId="274"/>
@@ -747,7 +627,7 @@
           </ac:spMkLst>
         </pc:spChg>
         <pc:spChg chg="add mod">
-          <ac:chgData name="Jean-Yves Vuillequez" userId="e7fac481abea6bd0" providerId="LiveId" clId="{79E365E8-22BC-4EC2-9606-9A9AC6CD1D22}" dt="2025-11-22T18:20:05.192" v="7659" actId="208"/>
+          <ac:chgData name="Jean-Yves Vuillequez" userId="e7fac481abea6bd0" providerId="LiveId" clId="{79E365E8-22BC-4EC2-9606-9A9AC6CD1D22}" dt="2025-11-23T08:59:51.254" v="7715" actId="14100"/>
           <ac:spMkLst>
             <pc:docMk/>
             <pc:sldMk cId="1821755839" sldId="274"/>
@@ -1003,7 +883,7 @@
           </ac:spMkLst>
         </pc:spChg>
         <pc:spChg chg="add mod">
-          <ac:chgData name="Jean-Yves Vuillequez" userId="e7fac481abea6bd0" providerId="LiveId" clId="{79E365E8-22BC-4EC2-9606-9A9AC6CD1D22}" dt="2025-11-20T12:00:39.030" v="2715"/>
+          <ac:chgData name="Jean-Yves Vuillequez" userId="e7fac481abea6bd0" providerId="LiveId" clId="{79E365E8-22BC-4EC2-9606-9A9AC6CD1D22}" dt="2025-11-23T09:52:32.533" v="7718" actId="1037"/>
           <ac:spMkLst>
             <pc:docMk/>
             <pc:sldMk cId="1821755839" sldId="274"/>
@@ -1790,22 +1670,6 @@
             <ac:spMk id="2" creationId="{EBF06A3A-1FD1-62CC-FA82-868DA8F80F0D}"/>
           </ac:spMkLst>
         </pc:spChg>
-        <pc:spChg chg="add del mod">
-          <ac:chgData name="Jean-Yves Vuillequez" userId="e7fac481abea6bd0" providerId="LiveId" clId="{79E365E8-22BC-4EC2-9606-9A9AC6CD1D22}" dt="2025-11-21T14:04:28.667" v="6851" actId="478"/>
-          <ac:spMkLst>
-            <pc:docMk/>
-            <pc:sldMk cId="2290935718" sldId="289"/>
-            <ac:spMk id="3" creationId="{4C5F35B7-8579-8AC5-69D7-CBEC39A33F7E}"/>
-          </ac:spMkLst>
-        </pc:spChg>
-        <pc:spChg chg="add del mod">
-          <ac:chgData name="Jean-Yves Vuillequez" userId="e7fac481abea6bd0" providerId="LiveId" clId="{79E365E8-22BC-4EC2-9606-9A9AC6CD1D22}" dt="2025-11-21T14:50:52.292" v="7058" actId="478"/>
-          <ac:spMkLst>
-            <pc:docMk/>
-            <pc:sldMk cId="2290935718" sldId="289"/>
-            <ac:spMk id="4" creationId="{AE6C0F5D-5C4B-4C9E-FDE6-2854D7F6D149}"/>
-          </ac:spMkLst>
-        </pc:spChg>
         <pc:spChg chg="add mod">
           <ac:chgData name="Jean-Yves Vuillequez" userId="e7fac481abea6bd0" providerId="LiveId" clId="{79E365E8-22BC-4EC2-9606-9A9AC6CD1D22}" dt="2025-11-21T15:51:02.429" v="7194" actId="14100"/>
           <ac:spMkLst>
@@ -1838,36 +1702,12 @@
             <ac:spMk id="11" creationId="{EEC86C4D-A9B4-4A74-ED37-29E01179A4EB}"/>
           </ac:spMkLst>
         </pc:spChg>
-        <pc:spChg chg="add">
-          <ac:chgData name="Jean-Yves Vuillequez" userId="e7fac481abea6bd0" providerId="LiveId" clId="{79E365E8-22BC-4EC2-9606-9A9AC6CD1D22}" dt="2025-11-21T14:55:42.052" v="7082"/>
-          <ac:spMkLst>
-            <pc:docMk/>
-            <pc:sldMk cId="2290935718" sldId="289"/>
-            <ac:spMk id="12" creationId="{7F64DC53-6064-24A9-B5E6-FD7B1F26CE1D}"/>
-          </ac:spMkLst>
-        </pc:spChg>
-        <pc:spChg chg="add">
-          <ac:chgData name="Jean-Yves Vuillequez" userId="e7fac481abea6bd0" providerId="LiveId" clId="{79E365E8-22BC-4EC2-9606-9A9AC6CD1D22}" dt="2025-11-21T14:55:44.247" v="7083"/>
-          <ac:spMkLst>
-            <pc:docMk/>
-            <pc:sldMk cId="2290935718" sldId="289"/>
-            <ac:spMk id="13" creationId="{A326F334-3EC1-4236-8394-F3ACC92B71D7}"/>
-          </ac:spMkLst>
-        </pc:spChg>
         <pc:spChg chg="mod">
           <ac:chgData name="Jean-Yves Vuillequez" userId="e7fac481abea6bd0" providerId="LiveId" clId="{79E365E8-22BC-4EC2-9606-9A9AC6CD1D22}" dt="2025-11-20T08:33:54.226" v="351" actId="113"/>
           <ac:spMkLst>
             <pc:docMk/>
             <pc:sldMk cId="2290935718" sldId="289"/>
             <ac:spMk id="178" creationId="{834EF362-0DAC-26BA-DE49-3126B33E851C}"/>
-          </ac:spMkLst>
-        </pc:spChg>
-        <pc:spChg chg="del mod">
-          <ac:chgData name="Jean-Yves Vuillequez" userId="e7fac481abea6bd0" providerId="LiveId" clId="{79E365E8-22BC-4EC2-9606-9A9AC6CD1D22}" dt="2025-11-21T14:57:59.974" v="7127" actId="478"/>
-          <ac:spMkLst>
-            <pc:docMk/>
-            <pc:sldMk cId="2290935718" sldId="289"/>
-            <ac:spMk id="181" creationId="{5B35C8BD-B301-3C0E-2AF6-DBB412DE249A}"/>
           </ac:spMkLst>
         </pc:spChg>
         <pc:picChg chg="add mod">
@@ -1901,22 +1741,6 @@
             <ac:spMk id="2" creationId="{010F41C2-7624-67DE-B008-1F392C11A870}"/>
           </ac:spMkLst>
         </pc:spChg>
-        <pc:spChg chg="add del mod">
-          <ac:chgData name="Jean-Yves Vuillequez" userId="e7fac481abea6bd0" providerId="LiveId" clId="{79E365E8-22BC-4EC2-9606-9A9AC6CD1D22}" dt="2025-11-21T14:27:01.785" v="6923" actId="478"/>
-          <ac:spMkLst>
-            <pc:docMk/>
-            <pc:sldMk cId="3332770" sldId="291"/>
-            <ac:spMk id="3" creationId="{4CE4F7BC-7633-613C-E54B-260F1EA040A9}"/>
-          </ac:spMkLst>
-        </pc:spChg>
-        <pc:spChg chg="add del mod">
-          <ac:chgData name="Jean-Yves Vuillequez" userId="e7fac481abea6bd0" providerId="LiveId" clId="{79E365E8-22BC-4EC2-9606-9A9AC6CD1D22}" dt="2025-11-21T14:04:26.121" v="6850" actId="21"/>
-          <ac:spMkLst>
-            <pc:docMk/>
-            <pc:sldMk cId="3332770" sldId="291"/>
-            <ac:spMk id="4" creationId="{AE6C0F5D-5C4B-4C9E-FDE6-2854D7F6D149}"/>
-          </ac:spMkLst>
-        </pc:spChg>
         <pc:spChg chg="add mod">
           <ac:chgData name="Jean-Yves Vuillequez" userId="e7fac481abea6bd0" providerId="LiveId" clId="{79E365E8-22BC-4EC2-9606-9A9AC6CD1D22}" dt="2025-11-21T13:45:28.037" v="6647"/>
           <ac:spMkLst>
@@ -1931,22 +1755,6 @@
             <pc:docMk/>
             <pc:sldMk cId="3332770" sldId="291"/>
             <ac:spMk id="6" creationId="{EBF21BA6-F9E0-6E0C-29B6-304458B8661D}"/>
-          </ac:spMkLst>
-        </pc:spChg>
-        <pc:spChg chg="add del mod">
-          <ac:chgData name="Jean-Yves Vuillequez" userId="e7fac481abea6bd0" providerId="LiveId" clId="{79E365E8-22BC-4EC2-9606-9A9AC6CD1D22}" dt="2025-11-21T14:31:42.414" v="6967" actId="478"/>
-          <ac:spMkLst>
-            <pc:docMk/>
-            <pc:sldMk cId="3332770" sldId="291"/>
-            <ac:spMk id="8" creationId="{B18422F6-8518-A3E3-AADF-1C79685DFD59}"/>
-          </ac:spMkLst>
-        </pc:spChg>
-        <pc:spChg chg="add del mod">
-          <ac:chgData name="Jean-Yves Vuillequez" userId="e7fac481abea6bd0" providerId="LiveId" clId="{79E365E8-22BC-4EC2-9606-9A9AC6CD1D22}" dt="2025-11-21T15:51:10.968" v="7196" actId="478"/>
-          <ac:spMkLst>
-            <pc:docMk/>
-            <pc:sldMk cId="3332770" sldId="291"/>
-            <ac:spMk id="14" creationId="{17CF8155-98BE-4305-36ED-219473338E58}"/>
           </ac:spMkLst>
         </pc:spChg>
         <pc:spChg chg="add mod">
@@ -1981,14 +1789,6 @@
             <ac:spMk id="178" creationId="{1DE246AA-5B17-33A5-5EF2-125E8EA81EFC}"/>
           </ac:spMkLst>
         </pc:spChg>
-        <pc:picChg chg="add del mod">
-          <ac:chgData name="Jean-Yves Vuillequez" userId="e7fac481abea6bd0" providerId="LiveId" clId="{79E365E8-22BC-4EC2-9606-9A9AC6CD1D22}" dt="2025-11-21T14:30:45.634" v="6950" actId="478"/>
-          <ac:picMkLst>
-            <pc:docMk/>
-            <pc:sldMk cId="3332770" sldId="291"/>
-            <ac:picMk id="9" creationId="{73E49FAF-7FF4-FF9A-A726-0D1CEDA7DD7F}"/>
-          </ac:picMkLst>
-        </pc:picChg>
         <pc:picChg chg="add mod">
           <ac:chgData name="Jean-Yves Vuillequez" userId="e7fac481abea6bd0" providerId="LiveId" clId="{79E365E8-22BC-4EC2-9606-9A9AC6CD1D22}" dt="2025-11-21T14:41:50.316" v="6978" actId="1076"/>
           <ac:picMkLst>
@@ -2034,22 +1834,6 @@
             <pc:docMk/>
             <pc:sldMk cId="3315518580" sldId="292"/>
             <ac:spMk id="3" creationId="{8E129141-57FA-3782-2D29-46A01202FF38}"/>
-          </ac:spMkLst>
-        </pc:spChg>
-        <pc:spChg chg="add del mod">
-          <ac:chgData name="Jean-Yves Vuillequez" userId="e7fac481abea6bd0" providerId="LiveId" clId="{79E365E8-22BC-4EC2-9606-9A9AC6CD1D22}" dt="2025-11-21T15:51:07.122" v="7195" actId="478"/>
-          <ac:spMkLst>
-            <pc:docMk/>
-            <pc:sldMk cId="3315518580" sldId="292"/>
-            <ac:spMk id="4" creationId="{25709A3F-A7F7-C13C-1868-EF0F87D5A52C}"/>
-          </ac:spMkLst>
-        </pc:spChg>
-        <pc:spChg chg="add del mod">
-          <ac:chgData name="Jean-Yves Vuillequez" userId="e7fac481abea6bd0" providerId="LiveId" clId="{79E365E8-22BC-4EC2-9606-9A9AC6CD1D22}" dt="2025-11-21T14:04:15.466" v="6847" actId="478"/>
-          <ac:spMkLst>
-            <pc:docMk/>
-            <pc:sldMk cId="3315518580" sldId="292"/>
-            <ac:spMk id="4" creationId="{DC681EF8-A850-D11F-7ECC-97847033BF06}"/>
           </ac:spMkLst>
         </pc:spChg>
         <pc:spChg chg="add mod">
@@ -32668,7 +32452,7 @@
         </p:nvSpPr>
         <p:spPr>
           <a:xfrm>
-            <a:off x="10225" y="4892025"/>
+            <a:off x="5512" y="4892025"/>
             <a:ext cx="9144000" cy="251400"/>
           </a:xfrm>
           <a:prstGeom prst="rect">
@@ -33905,7 +33689,7 @@
         <p:spPr>
           <a:xfrm>
             <a:off x="456709" y="1469509"/>
-            <a:ext cx="972305" cy="2957143"/>
+            <a:ext cx="972305" cy="3029059"/>
           </a:xfrm>
           <a:prstGeom prst="roundRect">
             <a:avLst/>

--- a/presentation/dsfs_ft_36_Projet_REnergies_efficiency_prediction.pptx
+++ b/presentation/dsfs_ft_36_Projet_REnergies_efficiency_prediction.pptx
@@ -292,7 +292,7 @@
 <file path=ppt/revisionInfo.xml><?xml version="1.0" encoding="utf-8"?>
 <p1510:revInfo xmlns:a="http://schemas.openxmlformats.org/drawingml/2006/main" xmlns:r="http://schemas.openxmlformats.org/officeDocument/2006/relationships" xmlns:p1510="http://schemas.microsoft.com/office/powerpoint/2015/10/main">
   <p1510:revLst>
-    <p1510:client id="{2EB72A00-7F79-4813-B4C2-C6564860F3F6}" v="2111" dt="2025-11-22T18:31:07.116"/>
+    <p1510:client id="{2EB72A00-7F79-4813-B4C2-C6564860F3F6}" v="2136" dt="2025-11-24T09:25:37.185"/>
   </p1510:revLst>
 </p1510:revInfo>
 </file>
@@ -302,7 +302,7 @@
   <pc:docChgLst>
     <pc:chgData name="Jean-Yves Vuillequez" userId="e7fac481abea6bd0" providerId="LiveId" clId="{79E365E8-22BC-4EC2-9606-9A9AC6CD1D22}"/>
     <pc:docChg chg="undo custSel addSld delSld modSld sldOrd">
-      <pc:chgData name="Jean-Yves Vuillequez" userId="e7fac481abea6bd0" providerId="LiveId" clId="{79E365E8-22BC-4EC2-9606-9A9AC6CD1D22}" dt="2025-11-23T09:52:32.533" v="7718" actId="1037"/>
+      <pc:chgData name="Jean-Yves Vuillequez" userId="e7fac481abea6bd0" providerId="LiveId" clId="{79E365E8-22BC-4EC2-9606-9A9AC6CD1D22}" dt="2025-11-24T09:28:51.221" v="7814" actId="1076"/>
       <pc:docMkLst>
         <pc:docMk/>
       </pc:docMkLst>
@@ -605,7 +605,7 @@
         </pc:spChg>
       </pc:sldChg>
       <pc:sldChg chg="addSp delSp modSp add mod ord delAnim modAnim modNotesTx">
-        <pc:chgData name="Jean-Yves Vuillequez" userId="e7fac481abea6bd0" providerId="LiveId" clId="{79E365E8-22BC-4EC2-9606-9A9AC6CD1D22}" dt="2025-11-23T09:52:32.533" v="7718" actId="1037"/>
+        <pc:chgData name="Jean-Yves Vuillequez" userId="e7fac481abea6bd0" providerId="LiveId" clId="{79E365E8-22BC-4EC2-9606-9A9AC6CD1D22}" dt="2025-11-24T08:29:20.359" v="7736"/>
         <pc:sldMkLst>
           <pc:docMk/>
           <pc:sldMk cId="1821755839" sldId="274"/>
@@ -616,14 +616,6 @@
             <pc:docMk/>
             <pc:sldMk cId="1821755839" sldId="274"/>
             <ac:spMk id="2" creationId="{F584810C-5501-210A-FC09-7E76BEE6CF2D}"/>
-          </ac:spMkLst>
-        </pc:spChg>
-        <pc:spChg chg="add del mod">
-          <ac:chgData name="Jean-Yves Vuillequez" userId="e7fac481abea6bd0" providerId="LiveId" clId="{79E365E8-22BC-4EC2-9606-9A9AC6CD1D22}" dt="2025-11-22T09:16:01.202" v="7226" actId="478"/>
-          <ac:spMkLst>
-            <pc:docMk/>
-            <pc:sldMk cId="1821755839" sldId="274"/>
-            <ac:spMk id="3" creationId="{162FFC6F-D9F3-0E9D-8995-E9C5F33E53C6}"/>
           </ac:spMkLst>
         </pc:spChg>
         <pc:spChg chg="add mod">
@@ -802,14 +794,6 @@
             <ac:spMk id="58" creationId="{42C67AD7-C645-5367-3E47-6D6A996C5FE8}"/>
           </ac:spMkLst>
         </pc:spChg>
-        <pc:spChg chg="add del">
-          <ac:chgData name="Jean-Yves Vuillequez" userId="e7fac481abea6bd0" providerId="LiveId" clId="{79E365E8-22BC-4EC2-9606-9A9AC6CD1D22}" dt="2025-11-22T09:30:14.960" v="7330" actId="22"/>
-          <ac:spMkLst>
-            <pc:docMk/>
-            <pc:sldMk cId="1821755839" sldId="274"/>
-            <ac:spMk id="61" creationId="{9604BE13-7DDD-AB2A-8533-AFDCA94F78A3}"/>
-          </ac:spMkLst>
-        </pc:spChg>
         <pc:spChg chg="add mod topLvl">
           <ac:chgData name="Jean-Yves Vuillequez" userId="e7fac481abea6bd0" providerId="LiveId" clId="{79E365E8-22BC-4EC2-9606-9A9AC6CD1D22}" dt="2025-11-22T09:50:17.468" v="7485" actId="165"/>
           <ac:spMkLst>
@@ -851,7 +835,7 @@
           </ac:spMkLst>
         </pc:spChg>
         <pc:spChg chg="mod">
-          <ac:chgData name="Jean-Yves Vuillequez" userId="e7fac481abea6bd0" providerId="LiveId" clId="{79E365E8-22BC-4EC2-9606-9A9AC6CD1D22}" dt="2025-11-20T08:33:39.048" v="348" actId="108"/>
+          <ac:chgData name="Jean-Yves Vuillequez" userId="e7fac481abea6bd0" providerId="LiveId" clId="{79E365E8-22BC-4EC2-9606-9A9AC6CD1D22}" dt="2025-11-24T08:27:20.212" v="7732" actId="1076"/>
           <ac:spMkLst>
             <pc:docMk/>
             <pc:sldMk cId="1821755839" sldId="274"/>
@@ -864,14 +848,6 @@
             <pc:docMk/>
             <pc:sldMk cId="1821755839" sldId="274"/>
             <ac:spMk id="106" creationId="{70820C9A-B957-87A8-109D-6C661627DA4C}"/>
-          </ac:spMkLst>
-        </pc:spChg>
-        <pc:spChg chg="add del">
-          <ac:chgData name="Jean-Yves Vuillequez" userId="e7fac481abea6bd0" providerId="LiveId" clId="{79E365E8-22BC-4EC2-9606-9A9AC6CD1D22}" dt="2025-11-22T10:36:23.904" v="7493" actId="22"/>
-          <ac:spMkLst>
-            <pc:docMk/>
-            <pc:sldMk cId="1821755839" sldId="274"/>
-            <ac:spMk id="1031" creationId="{09D91F1B-81AB-FA01-B260-5DCC085FC57A}"/>
           </ac:spMkLst>
         </pc:spChg>
         <pc:spChg chg="add mod topLvl">
@@ -898,38 +874,6 @@
             <ac:spMk id="2097" creationId="{ADF20F1D-E32A-83D7-1C9F-ED56E1ADF5A6}"/>
           </ac:spMkLst>
         </pc:spChg>
-        <pc:grpChg chg="add del mod">
-          <ac:chgData name="Jean-Yves Vuillequez" userId="e7fac481abea6bd0" providerId="LiveId" clId="{79E365E8-22BC-4EC2-9606-9A9AC6CD1D22}" dt="2025-11-22T09:50:17.468" v="7485" actId="165"/>
-          <ac:grpSpMkLst>
-            <pc:docMk/>
-            <pc:sldMk cId="1821755839" sldId="274"/>
-            <ac:grpSpMk id="9" creationId="{1942901F-9902-04A0-3544-E014B88B92FF}"/>
-          </ac:grpSpMkLst>
-        </pc:grpChg>
-        <pc:grpChg chg="add del mod topLvl">
-          <ac:chgData name="Jean-Yves Vuillequez" userId="e7fac481abea6bd0" providerId="LiveId" clId="{79E365E8-22BC-4EC2-9606-9A9AC6CD1D22}" dt="2025-11-22T18:03:46.416" v="7531" actId="165"/>
-          <ac:grpSpMkLst>
-            <pc:docMk/>
-            <pc:sldMk cId="1821755839" sldId="274"/>
-            <ac:grpSpMk id="12" creationId="{A4F3950E-A273-3885-0546-EA789FEF3AD4}"/>
-          </ac:grpSpMkLst>
-        </pc:grpChg>
-        <pc:grpChg chg="add del mod">
-          <ac:chgData name="Jean-Yves Vuillequez" userId="e7fac481abea6bd0" providerId="LiveId" clId="{79E365E8-22BC-4EC2-9606-9A9AC6CD1D22}" dt="2025-11-22T18:03:28.800" v="7530" actId="165"/>
-          <ac:grpSpMkLst>
-            <pc:docMk/>
-            <pc:sldMk cId="1821755839" sldId="274"/>
-            <ac:grpSpMk id="13" creationId="{17A2B2F0-AB99-333B-30C9-EC04234D17C0}"/>
-          </ac:grpSpMkLst>
-        </pc:grpChg>
-        <pc:grpChg chg="add del mod">
-          <ac:chgData name="Jean-Yves Vuillequez" userId="e7fac481abea6bd0" providerId="LiveId" clId="{79E365E8-22BC-4EC2-9606-9A9AC6CD1D22}" dt="2025-11-22T09:26:21.189" v="7280" actId="165"/>
-          <ac:grpSpMkLst>
-            <pc:docMk/>
-            <pc:sldMk cId="1821755839" sldId="274"/>
-            <ac:grpSpMk id="17" creationId="{618688FD-4D2F-7A63-8807-ABB66A2C4089}"/>
-          </ac:grpSpMkLst>
-        </pc:grpChg>
         <pc:grpChg chg="add mod">
           <ac:chgData name="Jean-Yves Vuillequez" userId="e7fac481abea6bd0" providerId="LiveId" clId="{79E365E8-22BC-4EC2-9606-9A9AC6CD1D22}" dt="2025-11-22T09:49:04.487" v="7454" actId="1076"/>
           <ac:grpSpMkLst>
@@ -938,30 +882,6 @@
             <ac:grpSpMk id="78" creationId="{48BB1303-220D-775F-BC97-35D0BC10D7AC}"/>
           </ac:grpSpMkLst>
         </pc:grpChg>
-        <pc:grpChg chg="add del mod">
-          <ac:chgData name="Jean-Yves Vuillequez" userId="e7fac481abea6bd0" providerId="LiveId" clId="{79E365E8-22BC-4EC2-9606-9A9AC6CD1D22}" dt="2025-11-22T09:50:28.945" v="7488" actId="478"/>
-          <ac:grpSpMkLst>
-            <pc:docMk/>
-            <pc:sldMk cId="1821755839" sldId="274"/>
-            <ac:grpSpMk id="1024" creationId="{DA7793AF-7555-0276-9AAD-DD92E5CEBF43}"/>
-          </ac:grpSpMkLst>
-        </pc:grpChg>
-        <pc:picChg chg="add del mod">
-          <ac:chgData name="Jean-Yves Vuillequez" userId="e7fac481abea6bd0" providerId="LiveId" clId="{79E365E8-22BC-4EC2-9606-9A9AC6CD1D22}" dt="2025-11-22T09:26:15.227" v="7279" actId="478"/>
-          <ac:picMkLst>
-            <pc:docMk/>
-            <pc:sldMk cId="1821755839" sldId="274"/>
-            <ac:picMk id="19" creationId="{B06A4583-878B-26D3-2EE9-8D9E4A4CD1F3}"/>
-          </ac:picMkLst>
-        </pc:picChg>
-        <pc:picChg chg="add del mod">
-          <ac:chgData name="Jean-Yves Vuillequez" userId="e7fac481abea6bd0" providerId="LiveId" clId="{79E365E8-22BC-4EC2-9606-9A9AC6CD1D22}" dt="2025-11-22T09:26:25.741" v="7282" actId="478"/>
-          <ac:picMkLst>
-            <pc:docMk/>
-            <pc:sldMk cId="1821755839" sldId="274"/>
-            <ac:picMk id="20" creationId="{90F037CF-090B-C902-E6E2-089C3D502131}"/>
-          </ac:picMkLst>
-        </pc:picChg>
         <pc:picChg chg="add mod">
           <ac:chgData name="Jean-Yves Vuillequez" userId="e7fac481abea6bd0" providerId="LiveId" clId="{79E365E8-22BC-4EC2-9606-9A9AC6CD1D22}" dt="2025-11-22T18:15:44.176" v="7605" actId="1076"/>
           <ac:picMkLst>
@@ -976,14 +896,6 @@
             <pc:docMk/>
             <pc:sldMk cId="1821755839" sldId="274"/>
             <ac:picMk id="21" creationId="{174134F5-72A3-DA25-E671-C7DDD8DFA83A}"/>
-          </ac:picMkLst>
-        </pc:picChg>
-        <pc:picChg chg="add del mod">
-          <ac:chgData name="Jean-Yves Vuillequez" userId="e7fac481abea6bd0" providerId="LiveId" clId="{79E365E8-22BC-4EC2-9606-9A9AC6CD1D22}" dt="2025-11-22T18:15:33.516" v="7603" actId="478"/>
-          <ac:picMkLst>
-            <pc:docMk/>
-            <pc:sldMk cId="1821755839" sldId="274"/>
-            <ac:picMk id="25" creationId="{9A368348-C30E-D050-C4DB-B32BDBE3589F}"/>
           </ac:picMkLst>
         </pc:picChg>
         <pc:picChg chg="add mod topLvl">
@@ -1026,30 +938,6 @@
             <ac:picMk id="68" creationId="{6A1FE08D-DF15-8940-EAA5-98ED76914736}"/>
           </ac:picMkLst>
         </pc:picChg>
-        <pc:picChg chg="add del mod topLvl">
-          <ac:chgData name="Jean-Yves Vuillequez" userId="e7fac481abea6bd0" providerId="LiveId" clId="{79E365E8-22BC-4EC2-9606-9A9AC6CD1D22}" dt="2025-11-22T09:49:27.118" v="7467" actId="478"/>
-          <ac:picMkLst>
-            <pc:docMk/>
-            <pc:sldMk cId="1821755839" sldId="274"/>
-            <ac:picMk id="102" creationId="{26F3760A-01F7-627E-27AC-B1F00D3B52C6}"/>
-          </ac:picMkLst>
-        </pc:picChg>
-        <pc:picChg chg="add del mod topLvl">
-          <ac:chgData name="Jean-Yves Vuillequez" userId="e7fac481abea6bd0" providerId="LiveId" clId="{79E365E8-22BC-4EC2-9606-9A9AC6CD1D22}" dt="2025-11-22T09:49:26.577" v="7466" actId="478"/>
-          <ac:picMkLst>
-            <pc:docMk/>
-            <pc:sldMk cId="1821755839" sldId="274"/>
-            <ac:picMk id="103" creationId="{B33DCAA7-8CDF-83ED-2AFC-66875EDF434A}"/>
-          </ac:picMkLst>
-        </pc:picChg>
-        <pc:picChg chg="add del mod topLvl">
-          <ac:chgData name="Jean-Yves Vuillequez" userId="e7fac481abea6bd0" providerId="LiveId" clId="{79E365E8-22BC-4EC2-9606-9A9AC6CD1D22}" dt="2025-11-22T09:49:26.577" v="7466" actId="478"/>
-          <ac:picMkLst>
-            <pc:docMk/>
-            <pc:sldMk cId="1821755839" sldId="274"/>
-            <ac:picMk id="104" creationId="{30EDEF50-F042-0782-1F82-E1015B7ED2D4}"/>
-          </ac:picMkLst>
-        </pc:picChg>
         <pc:picChg chg="add mod topLvl">
           <ac:chgData name="Jean-Yves Vuillequez" userId="e7fac481abea6bd0" providerId="LiveId" clId="{79E365E8-22BC-4EC2-9606-9A9AC6CD1D22}" dt="2025-11-22T18:30:48.419" v="7706" actId="1076"/>
           <ac:picMkLst>
@@ -1072,38 +960,6 @@
             <pc:docMk/>
             <pc:sldMk cId="1821755839" sldId="274"/>
             <ac:picMk id="117" creationId="{B3747ED9-0378-A202-7151-54782D96CF66}"/>
-          </ac:picMkLst>
-        </pc:picChg>
-        <pc:picChg chg="add del mod topLvl">
-          <ac:chgData name="Jean-Yves Vuillequez" userId="e7fac481abea6bd0" providerId="LiveId" clId="{79E365E8-22BC-4EC2-9606-9A9AC6CD1D22}" dt="2025-11-22T09:49:27.564" v="7468" actId="478"/>
-          <ac:picMkLst>
-            <pc:docMk/>
-            <pc:sldMk cId="1821755839" sldId="274"/>
-            <ac:picMk id="123" creationId="{D715FB7A-A546-1D86-6C47-6E592D4CF67D}"/>
-          </ac:picMkLst>
-        </pc:picChg>
-        <pc:picChg chg="add del mod">
-          <ac:chgData name="Jean-Yves Vuillequez" userId="e7fac481abea6bd0" providerId="LiveId" clId="{79E365E8-22BC-4EC2-9606-9A9AC6CD1D22}" dt="2025-11-22T09:49:28.527" v="7469" actId="478"/>
-          <ac:picMkLst>
-            <pc:docMk/>
-            <pc:sldMk cId="1821755839" sldId="274"/>
-            <ac:picMk id="124" creationId="{C5293EF4-20E0-DF10-D159-DD1506BA9014}"/>
-          </ac:picMkLst>
-        </pc:picChg>
-        <pc:picChg chg="add del mod topLvl">
-          <ac:chgData name="Jean-Yves Vuillequez" userId="e7fac481abea6bd0" providerId="LiveId" clId="{79E365E8-22BC-4EC2-9606-9A9AC6CD1D22}" dt="2025-11-22T09:49:29.121" v="7470" actId="478"/>
-          <ac:picMkLst>
-            <pc:docMk/>
-            <pc:sldMk cId="1821755839" sldId="274"/>
-            <ac:picMk id="125" creationId="{33AAD6E8-755C-ADC6-DD82-513A7A7A0F5B}"/>
-          </ac:picMkLst>
-        </pc:picChg>
-        <pc:picChg chg="add del mod topLvl">
-          <ac:chgData name="Jean-Yves Vuillequez" userId="e7fac481abea6bd0" providerId="LiveId" clId="{79E365E8-22BC-4EC2-9606-9A9AC6CD1D22}" dt="2025-11-22T09:49:26.577" v="7466" actId="478"/>
-          <ac:picMkLst>
-            <pc:docMk/>
-            <pc:sldMk cId="1821755839" sldId="274"/>
-            <ac:picMk id="126" creationId="{CDFE02BC-1F91-5E6A-387E-5166BAEB4B47}"/>
           </ac:picMkLst>
         </pc:picChg>
         <pc:picChg chg="add mod">
@@ -1138,14 +994,6 @@
             <ac:picMk id="1030" creationId="{2941D76B-6840-C572-907F-F3680B66EBF7}"/>
           </ac:picMkLst>
         </pc:picChg>
-        <pc:picChg chg="add del mod topLvl">
-          <ac:chgData name="Jean-Yves Vuillequez" userId="e7fac481abea6bd0" providerId="LiveId" clId="{79E365E8-22BC-4EC2-9606-9A9AC6CD1D22}" dt="2025-11-22T09:50:28.945" v="7488" actId="478"/>
-          <ac:picMkLst>
-            <pc:docMk/>
-            <pc:sldMk cId="1821755839" sldId="274"/>
-            <ac:picMk id="1032" creationId="{0AA62D0C-7533-F64F-5205-AC2C6EB164FE}"/>
-          </ac:picMkLst>
-        </pc:picChg>
         <pc:picChg chg="add mod">
           <ac:chgData name="Jean-Yves Vuillequez" userId="e7fac481abea6bd0" providerId="LiveId" clId="{79E365E8-22BC-4EC2-9606-9A9AC6CD1D22}" dt="2025-11-22T18:03:10.913" v="7529" actId="1076"/>
           <ac:picMkLst>
@@ -1176,14 +1024,6 @@
             <pc:docMk/>
             <pc:sldMk cId="1821755839" sldId="274"/>
             <ac:picMk id="1038" creationId="{1B3822DD-A0E9-A37F-0DE9-40781F1C3DF4}"/>
-          </ac:picMkLst>
-        </pc:picChg>
-        <pc:picChg chg="add del mod">
-          <ac:chgData name="Jean-Yves Vuillequez" userId="e7fac481abea6bd0" providerId="LiveId" clId="{79E365E8-22BC-4EC2-9606-9A9AC6CD1D22}" dt="2025-11-22T09:49:26.577" v="7466" actId="478"/>
-          <ac:picMkLst>
-            <pc:docMk/>
-            <pc:sldMk cId="1821755839" sldId="274"/>
-            <ac:picMk id="2050" creationId="{66BE5478-2C49-E651-22DF-909C00CA75C0}"/>
           </ac:picMkLst>
         </pc:picChg>
         <pc:picChg chg="add mod topLvl">
@@ -1282,52 +1122,12 @@
             <ac:cxnSpMk id="30" creationId="{DD9C7B50-C6F5-7260-C61A-2CAE5E4C0BF7}"/>
           </ac:cxnSpMkLst>
         </pc:cxnChg>
-        <pc:cxnChg chg="add del mod">
-          <ac:chgData name="Jean-Yves Vuillequez" userId="e7fac481abea6bd0" providerId="LiveId" clId="{79E365E8-22BC-4EC2-9606-9A9AC6CD1D22}" dt="2025-11-22T09:50:09.002" v="7484" actId="478"/>
-          <ac:cxnSpMkLst>
-            <pc:docMk/>
-            <pc:sldMk cId="1821755839" sldId="274"/>
-            <ac:cxnSpMk id="75" creationId="{EA2D8E70-0E38-6F85-C46D-473AA9425B34}"/>
-          </ac:cxnSpMkLst>
-        </pc:cxnChg>
-        <pc:cxnChg chg="add del mod">
-          <ac:chgData name="Jean-Yves Vuillequez" userId="e7fac481abea6bd0" providerId="LiveId" clId="{79E365E8-22BC-4EC2-9606-9A9AC6CD1D22}" dt="2025-11-22T09:49:37" v="7474" actId="478"/>
-          <ac:cxnSpMkLst>
-            <pc:docMk/>
-            <pc:sldMk cId="1821755839" sldId="274"/>
-            <ac:cxnSpMk id="99" creationId="{1740FD3C-BB82-E8E4-4341-9F9B0A291611}"/>
-          </ac:cxnSpMkLst>
-        </pc:cxnChg>
         <pc:cxnChg chg="add mod ord topLvl">
           <ac:chgData name="Jean-Yves Vuillequez" userId="e7fac481abea6bd0" providerId="LiveId" clId="{79E365E8-22BC-4EC2-9606-9A9AC6CD1D22}" dt="2025-11-22T18:30:29.969" v="7704" actId="208"/>
           <ac:cxnSpMkLst>
             <pc:docMk/>
             <pc:sldMk cId="1821755839" sldId="274"/>
             <ac:cxnSpMk id="108" creationId="{8FC538F3-E888-6C1B-940B-D6B968D8FCEE}"/>
-          </ac:cxnSpMkLst>
-        </pc:cxnChg>
-        <pc:cxnChg chg="add del mod">
-          <ac:chgData name="Jean-Yves Vuillequez" userId="e7fac481abea6bd0" providerId="LiveId" clId="{79E365E8-22BC-4EC2-9606-9A9AC6CD1D22}" dt="2025-11-22T09:49:30.751" v="7472" actId="478"/>
-          <ac:cxnSpMkLst>
-            <pc:docMk/>
-            <pc:sldMk cId="1821755839" sldId="274"/>
-            <ac:cxnSpMk id="111" creationId="{67D61FBD-E531-1326-0C48-8BF9669015EF}"/>
-          </ac:cxnSpMkLst>
-        </pc:cxnChg>
-        <pc:cxnChg chg="add del mod">
-          <ac:chgData name="Jean-Yves Vuillequez" userId="e7fac481abea6bd0" providerId="LiveId" clId="{79E365E8-22BC-4EC2-9606-9A9AC6CD1D22}" dt="2025-11-22T09:49:30.107" v="7471" actId="478"/>
-          <ac:cxnSpMkLst>
-            <pc:docMk/>
-            <pc:sldMk cId="1821755839" sldId="274"/>
-            <ac:cxnSpMk id="114" creationId="{D838041E-F078-6C94-A2B0-03079C59425A}"/>
-          </ac:cxnSpMkLst>
-        </pc:cxnChg>
-        <pc:cxnChg chg="add del mod">
-          <ac:chgData name="Jean-Yves Vuillequez" userId="e7fac481abea6bd0" providerId="LiveId" clId="{79E365E8-22BC-4EC2-9606-9A9AC6CD1D22}" dt="2025-11-22T09:49:26.577" v="7466" actId="478"/>
-          <ac:cxnSpMkLst>
-            <pc:docMk/>
-            <pc:sldMk cId="1821755839" sldId="274"/>
-            <ac:cxnSpMk id="119" creationId="{71456FE5-64C3-8B7D-7CCF-34EA9321C3CA}"/>
           </ac:cxnSpMkLst>
         </pc:cxnChg>
         <pc:cxnChg chg="add mod">
@@ -1368,14 +1168,6 @@
             <pc:docMk/>
             <pc:sldMk cId="1821755839" sldId="274"/>
             <ac:cxnSpMk id="1075" creationId="{EB70B985-2508-613E-3824-FAD3BB6966AC}"/>
-          </ac:cxnSpMkLst>
-        </pc:cxnChg>
-        <pc:cxnChg chg="add del mod">
-          <ac:chgData name="Jean-Yves Vuillequez" userId="e7fac481abea6bd0" providerId="LiveId" clId="{79E365E8-22BC-4EC2-9606-9A9AC6CD1D22}" dt="2025-11-22T09:49:31.711" v="7473" actId="478"/>
-          <ac:cxnSpMkLst>
-            <pc:docMk/>
-            <pc:sldMk cId="1821755839" sldId="274"/>
-            <ac:cxnSpMk id="2055" creationId="{87E620DB-CBC1-5464-4E1E-A4B454C8BE5D}"/>
           </ac:cxnSpMkLst>
         </pc:cxnChg>
         <pc:cxnChg chg="add mod">
@@ -1656,8 +1448,8 @@
           </ac:picMkLst>
         </pc:picChg>
       </pc:sldChg>
-      <pc:sldChg chg="addSp delSp modSp add mod modNotesTx">
-        <pc:chgData name="Jean-Yves Vuillequez" userId="e7fac481abea6bd0" providerId="LiveId" clId="{79E365E8-22BC-4EC2-9606-9A9AC6CD1D22}" dt="2025-11-21T15:51:02.429" v="7194" actId="14100"/>
+      <pc:sldChg chg="addSp delSp modSp add mod modAnim modNotesTx">
+        <pc:chgData name="Jean-Yves Vuillequez" userId="e7fac481abea6bd0" providerId="LiveId" clId="{79E365E8-22BC-4EC2-9606-9A9AC6CD1D22}" dt="2025-11-24T09:28:44.476" v="7813" actId="1076"/>
         <pc:sldMkLst>
           <pc:docMk/>
           <pc:sldMk cId="2290935718" sldId="289"/>
@@ -1671,7 +1463,23 @@
           </ac:spMkLst>
         </pc:spChg>
         <pc:spChg chg="add mod">
-          <ac:chgData name="Jean-Yves Vuillequez" userId="e7fac481abea6bd0" providerId="LiveId" clId="{79E365E8-22BC-4EC2-9606-9A9AC6CD1D22}" dt="2025-11-21T15:51:02.429" v="7194" actId="14100"/>
+          <ac:chgData name="Jean-Yves Vuillequez" userId="e7fac481abea6bd0" providerId="LiveId" clId="{79E365E8-22BC-4EC2-9606-9A9AC6CD1D22}" dt="2025-11-24T08:55:57.791" v="7744" actId="1076"/>
+          <ac:spMkLst>
+            <pc:docMk/>
+            <pc:sldMk cId="2290935718" sldId="289"/>
+            <ac:spMk id="3" creationId="{E869AAB6-05E5-7ABD-6265-0FBFDCCB98A9}"/>
+          </ac:spMkLst>
+        </pc:spChg>
+        <pc:spChg chg="add mod">
+          <ac:chgData name="Jean-Yves Vuillequez" userId="e7fac481abea6bd0" providerId="LiveId" clId="{79E365E8-22BC-4EC2-9606-9A9AC6CD1D22}" dt="2025-11-24T09:28:44.476" v="7813" actId="1076"/>
+          <ac:spMkLst>
+            <pc:docMk/>
+            <pc:sldMk cId="2290935718" sldId="289"/>
+            <ac:spMk id="4" creationId="{786453DB-D6FB-CB5F-9376-5629883FAC60}"/>
+          </ac:spMkLst>
+        </pc:spChg>
+        <pc:spChg chg="add mod">
+          <ac:chgData name="Jean-Yves Vuillequez" userId="e7fac481abea6bd0" providerId="LiveId" clId="{79E365E8-22BC-4EC2-9606-9A9AC6CD1D22}" dt="2025-11-24T08:56:09.895" v="7746" actId="207"/>
           <ac:spMkLst>
             <pc:docMk/>
             <pc:sldMk cId="2290935718" sldId="289"/>
@@ -1710,8 +1518,8 @@
             <ac:spMk id="178" creationId="{834EF362-0DAC-26BA-DE49-3126B33E851C}"/>
           </ac:spMkLst>
         </pc:spChg>
-        <pc:picChg chg="add mod">
-          <ac:chgData name="Jean-Yves Vuillequez" userId="e7fac481abea6bd0" providerId="LiveId" clId="{79E365E8-22BC-4EC2-9606-9A9AC6CD1D22}" dt="2025-11-21T14:51:53.241" v="7078" actId="1076"/>
+        <pc:picChg chg="add del mod">
+          <ac:chgData name="Jean-Yves Vuillequez" userId="e7fac481abea6bd0" providerId="LiveId" clId="{79E365E8-22BC-4EC2-9606-9A9AC6CD1D22}" dt="2025-11-24T09:17:46.771" v="7796" actId="478"/>
           <ac:picMkLst>
             <pc:docMk/>
             <pc:sldMk cId="2290935718" sldId="289"/>
@@ -1726,9 +1534,25 @@
             <ac:picMk id="7" creationId="{5FE561E2-56B0-D6A0-F0B7-7F202EE51386}"/>
           </ac:picMkLst>
         </pc:picChg>
+        <pc:picChg chg="add del mod">
+          <ac:chgData name="Jean-Yves Vuillequez" userId="e7fac481abea6bd0" providerId="LiveId" clId="{79E365E8-22BC-4EC2-9606-9A9AC6CD1D22}" dt="2025-11-24T09:17:44.883" v="7795" actId="21"/>
+          <ac:picMkLst>
+            <pc:docMk/>
+            <pc:sldMk cId="2290935718" sldId="289"/>
+            <ac:picMk id="12" creationId="{7D6B0B43-8628-A21E-C82B-D058DBA5452A}"/>
+          </ac:picMkLst>
+        </pc:picChg>
+        <pc:picChg chg="add mod">
+          <ac:chgData name="Jean-Yves Vuillequez" userId="e7fac481abea6bd0" providerId="LiveId" clId="{79E365E8-22BC-4EC2-9606-9A9AC6CD1D22}" dt="2025-11-24T09:17:55.495" v="7798" actId="14100"/>
+          <ac:picMkLst>
+            <pc:docMk/>
+            <pc:sldMk cId="2290935718" sldId="289"/>
+            <ac:picMk id="13" creationId="{7D6B0B43-8628-A21E-C82B-D058DBA5452A}"/>
+          </ac:picMkLst>
+        </pc:picChg>
       </pc:sldChg>
       <pc:sldChg chg="addSp delSp modSp add mod modNotesTx">
-        <pc:chgData name="Jean-Yves Vuillequez" userId="e7fac481abea6bd0" providerId="LiveId" clId="{79E365E8-22BC-4EC2-9606-9A9AC6CD1D22}" dt="2025-11-21T15:51:10.968" v="7196" actId="478"/>
+        <pc:chgData name="Jean-Yves Vuillequez" userId="e7fac481abea6bd0" providerId="LiveId" clId="{79E365E8-22BC-4EC2-9606-9A9AC6CD1D22}" dt="2025-11-24T09:28:51.221" v="7814" actId="1076"/>
         <pc:sldMkLst>
           <pc:docMk/>
           <pc:sldMk cId="3332770" sldId="291"/>
@@ -1739,6 +1563,14 @@
             <pc:docMk/>
             <pc:sldMk cId="3332770" sldId="291"/>
             <ac:spMk id="2" creationId="{010F41C2-7624-67DE-B008-1F392C11A870}"/>
+          </ac:spMkLst>
+        </pc:spChg>
+        <pc:spChg chg="add mod">
+          <ac:chgData name="Jean-Yves Vuillequez" userId="e7fac481abea6bd0" providerId="LiveId" clId="{79E365E8-22BC-4EC2-9606-9A9AC6CD1D22}" dt="2025-11-24T09:28:51.221" v="7814" actId="1076"/>
+          <ac:spMkLst>
+            <pc:docMk/>
+            <pc:sldMk cId="3332770" sldId="291"/>
+            <ac:spMk id="3" creationId="{6C8C8F79-17EE-7C7E-88F5-83418E095E94}"/>
           </ac:spMkLst>
         </pc:spChg>
         <pc:spChg chg="add mod">
@@ -1789,8 +1621,24 @@
             <ac:spMk id="178" creationId="{1DE246AA-5B17-33A5-5EF2-125E8EA81EFC}"/>
           </ac:spMkLst>
         </pc:spChg>
-        <pc:picChg chg="add mod">
-          <ac:chgData name="Jean-Yves Vuillequez" userId="e7fac481abea6bd0" providerId="LiveId" clId="{79E365E8-22BC-4EC2-9606-9A9AC6CD1D22}" dt="2025-11-21T14:41:50.316" v="6978" actId="1076"/>
+        <pc:picChg chg="add del mod">
+          <ac:chgData name="Jean-Yves Vuillequez" userId="e7fac481abea6bd0" providerId="LiveId" clId="{79E365E8-22BC-4EC2-9606-9A9AC6CD1D22}" dt="2025-11-24T09:25:34.626" v="7809" actId="21"/>
+          <ac:picMkLst>
+            <pc:docMk/>
+            <pc:sldMk cId="3332770" sldId="291"/>
+            <ac:picMk id="8" creationId="{1C4C223B-DBE1-9C23-F6A9-F0D53C7554EA}"/>
+          </ac:picMkLst>
+        </pc:picChg>
+        <pc:picChg chg="add mod ord">
+          <ac:chgData name="Jean-Yves Vuillequez" userId="e7fac481abea6bd0" providerId="LiveId" clId="{79E365E8-22BC-4EC2-9606-9A9AC6CD1D22}" dt="2025-11-24T09:25:47.374" v="7812" actId="167"/>
+          <ac:picMkLst>
+            <pc:docMk/>
+            <pc:sldMk cId="3332770" sldId="291"/>
+            <ac:picMk id="9" creationId="{1C4C223B-DBE1-9C23-F6A9-F0D53C7554EA}"/>
+          </ac:picMkLst>
+        </pc:picChg>
+        <pc:picChg chg="add del mod">
+          <ac:chgData name="Jean-Yves Vuillequez" userId="e7fac481abea6bd0" providerId="LiveId" clId="{79E365E8-22BC-4EC2-9606-9A9AC6CD1D22}" dt="2025-11-24T09:25:36.785" v="7810" actId="478"/>
           <ac:picMkLst>
             <pc:docMk/>
             <pc:sldMk cId="3332770" sldId="291"/>
@@ -1995,12 +1843,20 @@
           </ac:graphicFrameMkLst>
         </pc:graphicFrameChg>
       </pc:sldChg>
-      <pc:sldChg chg="modSp add mod">
-        <pc:chgData name="Jean-Yves Vuillequez" userId="e7fac481abea6bd0" providerId="LiveId" clId="{79E365E8-22BC-4EC2-9606-9A9AC6CD1D22}" dt="2025-11-20T20:45:26.230" v="5250" actId="20577"/>
+      <pc:sldChg chg="addSp modSp add mod">
+        <pc:chgData name="Jean-Yves Vuillequez" userId="e7fac481abea6bd0" providerId="LiveId" clId="{79E365E8-22BC-4EC2-9606-9A9AC6CD1D22}" dt="2025-11-24T08:57:28.398" v="7786" actId="207"/>
         <pc:sldMkLst>
           <pc:docMk/>
           <pc:sldMk cId="2817282669" sldId="295"/>
         </pc:sldMkLst>
+        <pc:spChg chg="add mod">
+          <ac:chgData name="Jean-Yves Vuillequez" userId="e7fac481abea6bd0" providerId="LiveId" clId="{79E365E8-22BC-4EC2-9606-9A9AC6CD1D22}" dt="2025-11-24T08:57:28.398" v="7786" actId="207"/>
+          <ac:spMkLst>
+            <pc:docMk/>
+            <pc:sldMk cId="2817282669" sldId="295"/>
+            <ac:spMk id="3" creationId="{89EE8D39-D478-0817-1A92-C3865BB10A61}"/>
+          </ac:spMkLst>
+        </pc:spChg>
         <pc:spChg chg="mod">
           <ac:chgData name="Jean-Yves Vuillequez" userId="e7fac481abea6bd0" providerId="LiveId" clId="{79E365E8-22BC-4EC2-9606-9A9AC6CD1D22}" dt="2025-11-20T16:41:51.642" v="4742" actId="113"/>
           <ac:spMkLst>
@@ -2018,12 +1874,20 @@
           </ac:graphicFrameMkLst>
         </pc:graphicFrameChg>
       </pc:sldChg>
-      <pc:sldChg chg="modSp add mod">
-        <pc:chgData name="Jean-Yves Vuillequez" userId="e7fac481abea6bd0" providerId="LiveId" clId="{79E365E8-22BC-4EC2-9606-9A9AC6CD1D22}" dt="2025-11-21T02:15:47.871" v="5462" actId="20577"/>
+      <pc:sldChg chg="addSp modSp add mod">
+        <pc:chgData name="Jean-Yves Vuillequez" userId="e7fac481abea6bd0" providerId="LiveId" clId="{79E365E8-22BC-4EC2-9606-9A9AC6CD1D22}" dt="2025-11-24T08:57:30.272" v="7787"/>
         <pc:sldMkLst>
           <pc:docMk/>
           <pc:sldMk cId="2552402859" sldId="296"/>
         </pc:sldMkLst>
+        <pc:spChg chg="add mod">
+          <ac:chgData name="Jean-Yves Vuillequez" userId="e7fac481abea6bd0" providerId="LiveId" clId="{79E365E8-22BC-4EC2-9606-9A9AC6CD1D22}" dt="2025-11-24T08:57:30.272" v="7787"/>
+          <ac:spMkLst>
+            <pc:docMk/>
+            <pc:sldMk cId="2552402859" sldId="296"/>
+            <ac:spMk id="3" creationId="{5B05B1FD-33BF-DA06-1EDF-2A61D6895874}"/>
+          </ac:spMkLst>
+        </pc:spChg>
         <pc:spChg chg="mod">
           <ac:chgData name="Jean-Yves Vuillequez" userId="e7fac481abea6bd0" providerId="LiveId" clId="{79E365E8-22BC-4EC2-9606-9A9AC6CD1D22}" dt="2025-11-20T16:41:57.627" v="4743" actId="113"/>
           <ac:spMkLst>
@@ -18286,6 +18150,43 @@
           <a:chExt cx="0" cy="0"/>
         </a:xfrm>
       </p:grpSpPr>
+      <p:pic>
+        <p:nvPicPr>
+          <p:cNvPr id="9" name="Image 8">
+            <a:extLst>
+              <a:ext uri="{FF2B5EF4-FFF2-40B4-BE49-F238E27FC236}">
+                <a16:creationId xmlns:a16="http://schemas.microsoft.com/office/drawing/2014/main" id="{1C4C223B-DBE1-9C23-F6A9-F0D53C7554EA}"/>
+              </a:ext>
+            </a:extLst>
+          </p:cNvPr>
+          <p:cNvPicPr>
+            <a:picLocks noChangeAspect="1"/>
+          </p:cNvPicPr>
+          <p:nvPr/>
+        </p:nvPicPr>
+        <p:blipFill>
+          <a:blip r:embed="rId3"/>
+          <a:stretch>
+            <a:fillRect/>
+          </a:stretch>
+        </p:blipFill>
+        <p:spPr>
+          <a:xfrm>
+            <a:off x="4528035" y="1337691"/>
+            <a:ext cx="4414918" cy="2603869"/>
+          </a:xfrm>
+          <a:prstGeom prst="rect">
+            <a:avLst/>
+          </a:prstGeom>
+          <a:ln>
+            <a:solidFill>
+              <a:schemeClr val="bg1">
+                <a:lumMod val="75000"/>
+              </a:schemeClr>
+            </a:solidFill>
+          </a:ln>
+        </p:spPr>
+      </p:pic>
       <p:sp>
         <p:nvSpPr>
           <p:cNvPr id="178" name="Google Shape;178;p8">
@@ -18355,7 +18256,7 @@
           <p:nvPr/>
         </p:nvPicPr>
         <p:blipFill rotWithShape="1">
-          <a:blip r:embed="rId3">
+          <a:blip r:embed="rId4">
             <a:alphaModFix/>
           </a:blip>
           <a:srcRect/>
@@ -18822,7 +18723,7 @@
             <a:pPr algn="ctr"/>
             <a:r>
               <a:rPr lang="fr-FR" sz="1000" dirty="0">
-                <a:hlinkClick r:id="rId4"/>
+                <a:hlinkClick r:id="rId5"/>
               </a:rPr>
               <a:t>Lien Dashboard</a:t>
             </a:r>
@@ -18874,43 +18775,6 @@
           </a:fontRef>
         </p:style>
       </p:cxnSp>
-      <p:pic>
-        <p:nvPicPr>
-          <p:cNvPr id="11" name="Image 10">
-            <a:extLst>
-              <a:ext uri="{FF2B5EF4-FFF2-40B4-BE49-F238E27FC236}">
-                <a16:creationId xmlns:a16="http://schemas.microsoft.com/office/drawing/2014/main" id="{6B0F1A83-2432-176C-4AA5-8DD51C43E45F}"/>
-              </a:ext>
-            </a:extLst>
-          </p:cNvPr>
-          <p:cNvPicPr>
-            <a:picLocks noChangeAspect="1"/>
-          </p:cNvPicPr>
-          <p:nvPr/>
-        </p:nvPicPr>
-        <p:blipFill>
-          <a:blip r:embed="rId5"/>
-          <a:stretch>
-            <a:fillRect/>
-          </a:stretch>
-        </p:blipFill>
-        <p:spPr>
-          <a:xfrm>
-            <a:off x="4597225" y="1335349"/>
-            <a:ext cx="4290207" cy="2609350"/>
-          </a:xfrm>
-          <a:prstGeom prst="rect">
-            <a:avLst/>
-          </a:prstGeom>
-          <a:ln>
-            <a:solidFill>
-              <a:schemeClr val="bg1">
-                <a:lumMod val="75000"/>
-              </a:schemeClr>
-            </a:solidFill>
-          </a:ln>
-        </p:spPr>
-      </p:pic>
       <p:pic>
         <p:nvPicPr>
           <p:cNvPr id="13" name="Image 12">
@@ -19379,6 +19243,51 @@
                 </a:solidFill>
               </a:rPr>
               <a:t>!</a:t>
+            </a:r>
+          </a:p>
+        </p:txBody>
+      </p:sp>
+      <p:sp>
+        <p:nvSpPr>
+          <p:cNvPr id="3" name="ZoneTexte 2">
+            <a:extLst>
+              <a:ext uri="{FF2B5EF4-FFF2-40B4-BE49-F238E27FC236}">
+                <a16:creationId xmlns:a16="http://schemas.microsoft.com/office/drawing/2014/main" id="{6C8C8F79-17EE-7C7E-88F5-83418E095E94}"/>
+              </a:ext>
+            </a:extLst>
+          </p:cNvPr>
+          <p:cNvSpPr txBox="1"/>
+          <p:nvPr/>
+        </p:nvSpPr>
+        <p:spPr>
+          <a:xfrm rot="1276305">
+            <a:off x="3235574" y="1414184"/>
+            <a:ext cx="1220771" cy="307777"/>
+          </a:xfrm>
+          <a:prstGeom prst="rect">
+            <a:avLst/>
+          </a:prstGeom>
+          <a:noFill/>
+          <a:ln>
+            <a:solidFill>
+              <a:srgbClr val="FF0000"/>
+            </a:solidFill>
+          </a:ln>
+        </p:spPr>
+        <p:txBody>
+          <a:bodyPr wrap="square" rtlCol="0">
+            <a:spAutoFit/>
+          </a:bodyPr>
+          <a:lstStyle/>
+          <a:p>
+            <a:pPr algn="ctr"/>
+            <a:r>
+              <a:rPr lang="fr-FR" dirty="0">
+                <a:solidFill>
+                  <a:srgbClr val="FF0000"/>
+                </a:solidFill>
+              </a:rPr>
+              <a:t>Mettre à jour</a:t>
             </a:r>
           </a:p>
         </p:txBody>
@@ -23298,6 +23207,53 @@
           </a:graphicData>
         </a:graphic>
       </p:graphicFrame>
+      <p:sp>
+        <p:nvSpPr>
+          <p:cNvPr id="3" name="ZoneTexte 2">
+            <a:extLst>
+              <a:ext uri="{FF2B5EF4-FFF2-40B4-BE49-F238E27FC236}">
+                <a16:creationId xmlns:a16="http://schemas.microsoft.com/office/drawing/2014/main" id="{89EE8D39-D478-0817-1A92-C3865BB10A61}"/>
+              </a:ext>
+            </a:extLst>
+          </p:cNvPr>
+          <p:cNvSpPr txBox="1"/>
+          <p:nvPr/>
+        </p:nvSpPr>
+        <p:spPr>
+          <a:xfrm rot="1276305">
+            <a:off x="6809476" y="1363286"/>
+            <a:ext cx="1220771" cy="307777"/>
+          </a:xfrm>
+          <a:prstGeom prst="rect">
+            <a:avLst/>
+          </a:prstGeom>
+          <a:solidFill>
+            <a:schemeClr val="bg1"/>
+          </a:solidFill>
+          <a:ln>
+            <a:solidFill>
+              <a:srgbClr val="FF0000"/>
+            </a:solidFill>
+          </a:ln>
+        </p:spPr>
+        <p:txBody>
+          <a:bodyPr wrap="square" rtlCol="0">
+            <a:spAutoFit/>
+          </a:bodyPr>
+          <a:lstStyle/>
+          <a:p>
+            <a:pPr algn="ctr"/>
+            <a:r>
+              <a:rPr lang="fr-FR" dirty="0">
+                <a:solidFill>
+                  <a:srgbClr val="FF0000"/>
+                </a:solidFill>
+              </a:rPr>
+              <a:t>Mettre à jour</a:t>
+            </a:r>
+          </a:p>
+        </p:txBody>
+      </p:sp>
     </p:spTree>
     <p:extLst>
       <p:ext uri="{BB962C8B-B14F-4D97-AF65-F5344CB8AC3E}">
@@ -24473,6 +24429,53 @@
           </a:graphicData>
         </a:graphic>
       </p:graphicFrame>
+      <p:sp>
+        <p:nvSpPr>
+          <p:cNvPr id="3" name="ZoneTexte 2">
+            <a:extLst>
+              <a:ext uri="{FF2B5EF4-FFF2-40B4-BE49-F238E27FC236}">
+                <a16:creationId xmlns:a16="http://schemas.microsoft.com/office/drawing/2014/main" id="{5B05B1FD-33BF-DA06-1EDF-2A61D6895874}"/>
+              </a:ext>
+            </a:extLst>
+          </p:cNvPr>
+          <p:cNvSpPr txBox="1"/>
+          <p:nvPr/>
+        </p:nvSpPr>
+        <p:spPr>
+          <a:xfrm rot="1276305">
+            <a:off x="6809476" y="1363286"/>
+            <a:ext cx="1220771" cy="307777"/>
+          </a:xfrm>
+          <a:prstGeom prst="rect">
+            <a:avLst/>
+          </a:prstGeom>
+          <a:solidFill>
+            <a:schemeClr val="bg1"/>
+          </a:solidFill>
+          <a:ln>
+            <a:solidFill>
+              <a:srgbClr val="FF0000"/>
+            </a:solidFill>
+          </a:ln>
+        </p:spPr>
+        <p:txBody>
+          <a:bodyPr wrap="square" rtlCol="0">
+            <a:spAutoFit/>
+          </a:bodyPr>
+          <a:lstStyle/>
+          <a:p>
+            <a:pPr algn="ctr"/>
+            <a:r>
+              <a:rPr lang="fr-FR" dirty="0">
+                <a:solidFill>
+                  <a:srgbClr val="FF0000"/>
+                </a:solidFill>
+              </a:rPr>
+              <a:t>Mettre à jour</a:t>
+            </a:r>
+          </a:p>
+        </p:txBody>
+      </p:sp>
     </p:spTree>
     <p:extLst>
       <p:ext uri="{BB962C8B-B14F-4D97-AF65-F5344CB8AC3E}">
@@ -34125,6 +34128,1990 @@
   <p:clrMapOvr>
     <a:masterClrMapping/>
   </p:clrMapOvr>
+  <p:timing>
+    <p:tnLst>
+      <p:par>
+        <p:cTn id="1" dur="indefinite" restart="never" nodeType="tmRoot">
+          <p:childTnLst>
+            <p:seq concurrent="1" nextAc="seek">
+              <p:cTn id="2" dur="indefinite" nodeType="mainSeq">
+                <p:childTnLst>
+                  <p:par>
+                    <p:cTn id="3" fill="hold">
+                      <p:stCondLst>
+                        <p:cond delay="indefinite"/>
+                      </p:stCondLst>
+                      <p:childTnLst>
+                        <p:par>
+                          <p:cTn id="4" fill="hold">
+                            <p:stCondLst>
+                              <p:cond delay="0"/>
+                            </p:stCondLst>
+                            <p:childTnLst>
+                              <p:par>
+                                <p:cTn id="5" presetID="1" presetClass="entr" presetSubtype="0" fill="hold" nodeType="clickEffect">
+                                  <p:stCondLst>
+                                    <p:cond delay="0"/>
+                                  </p:stCondLst>
+                                  <p:childTnLst>
+                                    <p:set>
+                                      <p:cBhvr>
+                                        <p:cTn id="6" dur="1" fill="hold">
+                                          <p:stCondLst>
+                                            <p:cond delay="0"/>
+                                          </p:stCondLst>
+                                        </p:cTn>
+                                        <p:tgtEl>
+                                          <p:spTgt spid="1028"/>
+                                        </p:tgtEl>
+                                        <p:attrNameLst>
+                                          <p:attrName>style.visibility</p:attrName>
+                                        </p:attrNameLst>
+                                      </p:cBhvr>
+                                      <p:to>
+                                        <p:strVal val="visible"/>
+                                      </p:to>
+                                    </p:set>
+                                  </p:childTnLst>
+                                </p:cTn>
+                              </p:par>
+                              <p:par>
+                                <p:cTn id="7" presetID="1" presetClass="entr" presetSubtype="0" fill="hold" nodeType="withEffect">
+                                  <p:stCondLst>
+                                    <p:cond delay="0"/>
+                                  </p:stCondLst>
+                                  <p:childTnLst>
+                                    <p:set>
+                                      <p:cBhvr>
+                                        <p:cTn id="8" dur="1" fill="hold">
+                                          <p:stCondLst>
+                                            <p:cond delay="0"/>
+                                          </p:stCondLst>
+                                        </p:cTn>
+                                        <p:tgtEl>
+                                          <p:spTgt spid="1030"/>
+                                        </p:tgtEl>
+                                        <p:attrNameLst>
+                                          <p:attrName>style.visibility</p:attrName>
+                                        </p:attrNameLst>
+                                      </p:cBhvr>
+                                      <p:to>
+                                        <p:strVal val="visible"/>
+                                      </p:to>
+                                    </p:set>
+                                  </p:childTnLst>
+                                </p:cTn>
+                              </p:par>
+                              <p:par>
+                                <p:cTn id="9" presetID="1" presetClass="entr" presetSubtype="0" fill="hold" grpId="0" nodeType="withEffect">
+                                  <p:stCondLst>
+                                    <p:cond delay="0"/>
+                                  </p:stCondLst>
+                                  <p:childTnLst>
+                                    <p:set>
+                                      <p:cBhvr>
+                                        <p:cTn id="10" dur="1" fill="hold">
+                                          <p:stCondLst>
+                                            <p:cond delay="0"/>
+                                          </p:stCondLst>
+                                        </p:cTn>
+                                        <p:tgtEl>
+                                          <p:spTgt spid="58"/>
+                                        </p:tgtEl>
+                                        <p:attrNameLst>
+                                          <p:attrName>style.visibility</p:attrName>
+                                        </p:attrNameLst>
+                                      </p:cBhvr>
+                                      <p:to>
+                                        <p:strVal val="visible"/>
+                                      </p:to>
+                                    </p:set>
+                                  </p:childTnLst>
+                                </p:cTn>
+                              </p:par>
+                              <p:par>
+                                <p:cTn id="11" presetID="1" presetClass="entr" presetSubtype="0" fill="hold" nodeType="withEffect">
+                                  <p:stCondLst>
+                                    <p:cond delay="0"/>
+                                  </p:stCondLst>
+                                  <p:childTnLst>
+                                    <p:set>
+                                      <p:cBhvr>
+                                        <p:cTn id="12" dur="1" fill="hold">
+                                          <p:stCondLst>
+                                            <p:cond delay="0"/>
+                                          </p:stCondLst>
+                                        </p:cTn>
+                                        <p:tgtEl>
+                                          <p:spTgt spid="65"/>
+                                        </p:tgtEl>
+                                        <p:attrNameLst>
+                                          <p:attrName>style.visibility</p:attrName>
+                                        </p:attrNameLst>
+                                      </p:cBhvr>
+                                      <p:to>
+                                        <p:strVal val="visible"/>
+                                      </p:to>
+                                    </p:set>
+                                  </p:childTnLst>
+                                </p:cTn>
+                              </p:par>
+                              <p:par>
+                                <p:cTn id="13" presetID="1" presetClass="entr" presetSubtype="0" fill="hold" grpId="0" nodeType="withEffect">
+                                  <p:stCondLst>
+                                    <p:cond delay="0"/>
+                                  </p:stCondLst>
+                                  <p:childTnLst>
+                                    <p:set>
+                                      <p:cBhvr>
+                                        <p:cTn id="14" dur="1" fill="hold">
+                                          <p:stCondLst>
+                                            <p:cond delay="0"/>
+                                          </p:stCondLst>
+                                        </p:cTn>
+                                        <p:tgtEl>
+                                          <p:spTgt spid="67"/>
+                                        </p:tgtEl>
+                                        <p:attrNameLst>
+                                          <p:attrName>style.visibility</p:attrName>
+                                        </p:attrNameLst>
+                                      </p:cBhvr>
+                                      <p:to>
+                                        <p:strVal val="visible"/>
+                                      </p:to>
+                                    </p:set>
+                                  </p:childTnLst>
+                                </p:cTn>
+                              </p:par>
+                              <p:par>
+                                <p:cTn id="15" presetID="1" presetClass="entr" presetSubtype="0" fill="hold" nodeType="withEffect">
+                                  <p:stCondLst>
+                                    <p:cond delay="0"/>
+                                  </p:stCondLst>
+                                  <p:childTnLst>
+                                    <p:set>
+                                      <p:cBhvr>
+                                        <p:cTn id="16" dur="1" fill="hold">
+                                          <p:stCondLst>
+                                            <p:cond delay="0"/>
+                                          </p:stCondLst>
+                                        </p:cTn>
+                                        <p:tgtEl>
+                                          <p:spTgt spid="68"/>
+                                        </p:tgtEl>
+                                        <p:attrNameLst>
+                                          <p:attrName>style.visibility</p:attrName>
+                                        </p:attrNameLst>
+                                      </p:cBhvr>
+                                      <p:to>
+                                        <p:strVal val="visible"/>
+                                      </p:to>
+                                    </p:set>
+                                  </p:childTnLst>
+                                </p:cTn>
+                              </p:par>
+                              <p:par>
+                                <p:cTn id="17" presetID="1" presetClass="entr" presetSubtype="0" fill="hold" grpId="0" nodeType="withEffect">
+                                  <p:stCondLst>
+                                    <p:cond delay="0"/>
+                                  </p:stCondLst>
+                                  <p:childTnLst>
+                                    <p:set>
+                                      <p:cBhvr>
+                                        <p:cTn id="18" dur="1" fill="hold">
+                                          <p:stCondLst>
+                                            <p:cond delay="0"/>
+                                          </p:stCondLst>
+                                        </p:cTn>
+                                        <p:tgtEl>
+                                          <p:spTgt spid="70"/>
+                                        </p:tgtEl>
+                                        <p:attrNameLst>
+                                          <p:attrName>style.visibility</p:attrName>
+                                        </p:attrNameLst>
+                                      </p:cBhvr>
+                                      <p:to>
+                                        <p:strVal val="visible"/>
+                                      </p:to>
+                                    </p:set>
+                                  </p:childTnLst>
+                                </p:cTn>
+                              </p:par>
+                              <p:par>
+                                <p:cTn id="19" presetID="1" presetClass="entr" presetSubtype="0" fill="hold" grpId="0" nodeType="withEffect">
+                                  <p:stCondLst>
+                                    <p:cond delay="0"/>
+                                  </p:stCondLst>
+                                  <p:childTnLst>
+                                    <p:set>
+                                      <p:cBhvr>
+                                        <p:cTn id="20" dur="1" fill="hold">
+                                          <p:stCondLst>
+                                            <p:cond delay="0"/>
+                                          </p:stCondLst>
+                                        </p:cTn>
+                                        <p:tgtEl>
+                                          <p:spTgt spid="73"/>
+                                        </p:tgtEl>
+                                        <p:attrNameLst>
+                                          <p:attrName>style.visibility</p:attrName>
+                                        </p:attrNameLst>
+                                      </p:cBhvr>
+                                      <p:to>
+                                        <p:strVal val="visible"/>
+                                      </p:to>
+                                    </p:set>
+                                  </p:childTnLst>
+                                </p:cTn>
+                              </p:par>
+                              <p:par>
+                                <p:cTn id="21" presetID="1" presetClass="entr" presetSubtype="0" fill="hold" nodeType="withEffect">
+                                  <p:stCondLst>
+                                    <p:cond delay="0"/>
+                                  </p:stCondLst>
+                                  <p:childTnLst>
+                                    <p:set>
+                                      <p:cBhvr>
+                                        <p:cTn id="22" dur="1" fill="hold">
+                                          <p:stCondLst>
+                                            <p:cond delay="0"/>
+                                          </p:stCondLst>
+                                        </p:cTn>
+                                        <p:tgtEl>
+                                          <p:spTgt spid="1026"/>
+                                        </p:tgtEl>
+                                        <p:attrNameLst>
+                                          <p:attrName>style.visibility</p:attrName>
+                                        </p:attrNameLst>
+                                      </p:cBhvr>
+                                      <p:to>
+                                        <p:strVal val="visible"/>
+                                      </p:to>
+                                    </p:set>
+                                  </p:childTnLst>
+                                </p:cTn>
+                              </p:par>
+                              <p:par>
+                                <p:cTn id="23" presetID="1" presetClass="entr" presetSubtype="0" fill="hold" nodeType="withEffect">
+                                  <p:stCondLst>
+                                    <p:cond delay="0"/>
+                                  </p:stCondLst>
+                                  <p:childTnLst>
+                                    <p:set>
+                                      <p:cBhvr>
+                                        <p:cTn id="24" dur="1" fill="hold">
+                                          <p:stCondLst>
+                                            <p:cond delay="0"/>
+                                          </p:stCondLst>
+                                        </p:cTn>
+                                        <p:tgtEl>
+                                          <p:spTgt spid="127"/>
+                                        </p:tgtEl>
+                                        <p:attrNameLst>
+                                          <p:attrName>style.visibility</p:attrName>
+                                        </p:attrNameLst>
+                                      </p:cBhvr>
+                                      <p:to>
+                                        <p:strVal val="visible"/>
+                                      </p:to>
+                                    </p:set>
+                                  </p:childTnLst>
+                                </p:cTn>
+                              </p:par>
+                              <p:par>
+                                <p:cTn id="25" presetID="1" presetClass="entr" presetSubtype="0" fill="hold" nodeType="withEffect">
+                                  <p:stCondLst>
+                                    <p:cond delay="0"/>
+                                  </p:stCondLst>
+                                  <p:childTnLst>
+                                    <p:set>
+                                      <p:cBhvr>
+                                        <p:cTn id="26" dur="1" fill="hold">
+                                          <p:stCondLst>
+                                            <p:cond delay="0"/>
+                                          </p:stCondLst>
+                                        </p:cTn>
+                                        <p:tgtEl>
+                                          <p:spTgt spid="1033"/>
+                                        </p:tgtEl>
+                                        <p:attrNameLst>
+                                          <p:attrName>style.visibility</p:attrName>
+                                        </p:attrNameLst>
+                                      </p:cBhvr>
+                                      <p:to>
+                                        <p:strVal val="visible"/>
+                                      </p:to>
+                                    </p:set>
+                                  </p:childTnLst>
+                                </p:cTn>
+                              </p:par>
+                              <p:par>
+                                <p:cTn id="27" presetID="1" presetClass="entr" presetSubtype="0" fill="hold" grpId="0" nodeType="withEffect">
+                                  <p:stCondLst>
+                                    <p:cond delay="0"/>
+                                  </p:stCondLst>
+                                  <p:childTnLst>
+                                    <p:set>
+                                      <p:cBhvr>
+                                        <p:cTn id="28" dur="1" fill="hold">
+                                          <p:stCondLst>
+                                            <p:cond delay="0"/>
+                                          </p:stCondLst>
+                                        </p:cTn>
+                                        <p:tgtEl>
+                                          <p:spTgt spid="3"/>
+                                        </p:tgtEl>
+                                        <p:attrNameLst>
+                                          <p:attrName>style.visibility</p:attrName>
+                                        </p:attrNameLst>
+                                      </p:cBhvr>
+                                      <p:to>
+                                        <p:strVal val="visible"/>
+                                      </p:to>
+                                    </p:set>
+                                  </p:childTnLst>
+                                </p:cTn>
+                              </p:par>
+                              <p:par>
+                                <p:cTn id="29" presetID="1" presetClass="entr" presetSubtype="0" fill="hold" nodeType="withEffect">
+                                  <p:stCondLst>
+                                    <p:cond delay="0"/>
+                                  </p:stCondLst>
+                                  <p:childTnLst>
+                                    <p:set>
+                                      <p:cBhvr>
+                                        <p:cTn id="30" dur="1" fill="hold">
+                                          <p:stCondLst>
+                                            <p:cond delay="0"/>
+                                          </p:stCondLst>
+                                        </p:cTn>
+                                        <p:tgtEl>
+                                          <p:spTgt spid="6"/>
+                                        </p:tgtEl>
+                                        <p:attrNameLst>
+                                          <p:attrName>style.visibility</p:attrName>
+                                        </p:attrNameLst>
+                                      </p:cBhvr>
+                                      <p:to>
+                                        <p:strVal val="visible"/>
+                                      </p:to>
+                                    </p:set>
+                                  </p:childTnLst>
+                                </p:cTn>
+                              </p:par>
+                              <p:par>
+                                <p:cTn id="31" presetID="1" presetClass="entr" presetSubtype="0" fill="hold" nodeType="withEffect">
+                                  <p:stCondLst>
+                                    <p:cond delay="0"/>
+                                  </p:stCondLst>
+                                  <p:childTnLst>
+                                    <p:set>
+                                      <p:cBhvr>
+                                        <p:cTn id="32" dur="1" fill="hold">
+                                          <p:stCondLst>
+                                            <p:cond delay="0"/>
+                                          </p:stCondLst>
+                                        </p:cTn>
+                                        <p:tgtEl>
+                                          <p:spTgt spid="10"/>
+                                        </p:tgtEl>
+                                        <p:attrNameLst>
+                                          <p:attrName>style.visibility</p:attrName>
+                                        </p:attrNameLst>
+                                      </p:cBhvr>
+                                      <p:to>
+                                        <p:strVal val="visible"/>
+                                      </p:to>
+                                    </p:set>
+                                  </p:childTnLst>
+                                </p:cTn>
+                              </p:par>
+                              <p:par>
+                                <p:cTn id="33" presetID="1" presetClass="entr" presetSubtype="0" fill="hold" grpId="0" nodeType="withEffect">
+                                  <p:stCondLst>
+                                    <p:cond delay="0"/>
+                                  </p:stCondLst>
+                                  <p:childTnLst>
+                                    <p:set>
+                                      <p:cBhvr>
+                                        <p:cTn id="34" dur="1" fill="hold">
+                                          <p:stCondLst>
+                                            <p:cond delay="0"/>
+                                          </p:stCondLst>
+                                        </p:cTn>
+                                        <p:tgtEl>
+                                          <p:spTgt spid="2"/>
+                                        </p:tgtEl>
+                                        <p:attrNameLst>
+                                          <p:attrName>style.visibility</p:attrName>
+                                        </p:attrNameLst>
+                                      </p:cBhvr>
+                                      <p:to>
+                                        <p:strVal val="visible"/>
+                                      </p:to>
+                                    </p:set>
+                                  </p:childTnLst>
+                                </p:cTn>
+                              </p:par>
+                            </p:childTnLst>
+                          </p:cTn>
+                        </p:par>
+                      </p:childTnLst>
+                    </p:cTn>
+                  </p:par>
+                  <p:par>
+                    <p:cTn id="35" fill="hold">
+                      <p:stCondLst>
+                        <p:cond delay="indefinite"/>
+                      </p:stCondLst>
+                      <p:childTnLst>
+                        <p:par>
+                          <p:cTn id="36" fill="hold">
+                            <p:stCondLst>
+                              <p:cond delay="0"/>
+                            </p:stCondLst>
+                            <p:childTnLst>
+                              <p:par>
+                                <p:cTn id="37" presetID="1" presetClass="entr" presetSubtype="0" fill="hold" nodeType="clickEffect">
+                                  <p:stCondLst>
+                                    <p:cond delay="0"/>
+                                  </p:stCondLst>
+                                  <p:childTnLst>
+                                    <p:set>
+                                      <p:cBhvr>
+                                        <p:cTn id="38" dur="1" fill="hold">
+                                          <p:stCondLst>
+                                            <p:cond delay="0"/>
+                                          </p:stCondLst>
+                                        </p:cTn>
+                                        <p:tgtEl>
+                                          <p:spTgt spid="28"/>
+                                        </p:tgtEl>
+                                        <p:attrNameLst>
+                                          <p:attrName>style.visibility</p:attrName>
+                                        </p:attrNameLst>
+                                      </p:cBhvr>
+                                      <p:to>
+                                        <p:strVal val="visible"/>
+                                      </p:to>
+                                    </p:set>
+                                  </p:childTnLst>
+                                </p:cTn>
+                              </p:par>
+                              <p:par>
+                                <p:cTn id="39" presetID="1" presetClass="entr" presetSubtype="0" fill="hold" nodeType="withEffect">
+                                  <p:stCondLst>
+                                    <p:cond delay="0"/>
+                                  </p:stCondLst>
+                                  <p:childTnLst>
+                                    <p:set>
+                                      <p:cBhvr>
+                                        <p:cTn id="40" dur="1" fill="hold">
+                                          <p:stCondLst>
+                                            <p:cond delay="0"/>
+                                          </p:stCondLst>
+                                        </p:cTn>
+                                        <p:tgtEl>
+                                          <p:spTgt spid="29"/>
+                                        </p:tgtEl>
+                                        <p:attrNameLst>
+                                          <p:attrName>style.visibility</p:attrName>
+                                        </p:attrNameLst>
+                                      </p:cBhvr>
+                                      <p:to>
+                                        <p:strVal val="visible"/>
+                                      </p:to>
+                                    </p:set>
+                                  </p:childTnLst>
+                                </p:cTn>
+                              </p:par>
+                              <p:par>
+                                <p:cTn id="41" presetID="1" presetClass="entr" presetSubtype="0" fill="hold" grpId="0" nodeType="withEffect">
+                                  <p:stCondLst>
+                                    <p:cond delay="0"/>
+                                  </p:stCondLst>
+                                  <p:childTnLst>
+                                    <p:set>
+                                      <p:cBhvr>
+                                        <p:cTn id="42" dur="1" fill="hold">
+                                          <p:stCondLst>
+                                            <p:cond delay="0"/>
+                                          </p:stCondLst>
+                                        </p:cTn>
+                                        <p:tgtEl>
+                                          <p:spTgt spid="71"/>
+                                        </p:tgtEl>
+                                        <p:attrNameLst>
+                                          <p:attrName>style.visibility</p:attrName>
+                                        </p:attrNameLst>
+                                      </p:cBhvr>
+                                      <p:to>
+                                        <p:strVal val="visible"/>
+                                      </p:to>
+                                    </p:set>
+                                  </p:childTnLst>
+                                </p:cTn>
+                              </p:par>
+                              <p:par>
+                                <p:cTn id="43" presetID="1" presetClass="entr" presetSubtype="0" fill="hold" grpId="0" nodeType="withEffect">
+                                  <p:stCondLst>
+                                    <p:cond delay="0"/>
+                                  </p:stCondLst>
+                                  <p:childTnLst>
+                                    <p:set>
+                                      <p:cBhvr>
+                                        <p:cTn id="44" dur="1" fill="hold">
+                                          <p:stCondLst>
+                                            <p:cond delay="0"/>
+                                          </p:stCondLst>
+                                        </p:cTn>
+                                        <p:tgtEl>
+                                          <p:spTgt spid="106"/>
+                                        </p:tgtEl>
+                                        <p:attrNameLst>
+                                          <p:attrName>style.visibility</p:attrName>
+                                        </p:attrNameLst>
+                                      </p:cBhvr>
+                                      <p:to>
+                                        <p:strVal val="visible"/>
+                                      </p:to>
+                                    </p:set>
+                                  </p:childTnLst>
+                                </p:cTn>
+                              </p:par>
+                              <p:par>
+                                <p:cTn id="45" presetID="1" presetClass="entr" presetSubtype="0" fill="hold" nodeType="withEffect">
+                                  <p:stCondLst>
+                                    <p:cond delay="0"/>
+                                  </p:stCondLst>
+                                  <p:childTnLst>
+                                    <p:set>
+                                      <p:cBhvr>
+                                        <p:cTn id="46" dur="1" fill="hold">
+                                          <p:stCondLst>
+                                            <p:cond delay="0"/>
+                                          </p:stCondLst>
+                                        </p:cTn>
+                                        <p:tgtEl>
+                                          <p:spTgt spid="107"/>
+                                        </p:tgtEl>
+                                        <p:attrNameLst>
+                                          <p:attrName>style.visibility</p:attrName>
+                                        </p:attrNameLst>
+                                      </p:cBhvr>
+                                      <p:to>
+                                        <p:strVal val="visible"/>
+                                      </p:to>
+                                    </p:set>
+                                  </p:childTnLst>
+                                </p:cTn>
+                              </p:par>
+                              <p:par>
+                                <p:cTn id="47" presetID="1" presetClass="entr" presetSubtype="0" fill="hold" nodeType="withEffect">
+                                  <p:stCondLst>
+                                    <p:cond delay="0"/>
+                                  </p:stCondLst>
+                                  <p:childTnLst>
+                                    <p:set>
+                                      <p:cBhvr>
+                                        <p:cTn id="48" dur="1" fill="hold">
+                                          <p:stCondLst>
+                                            <p:cond delay="0"/>
+                                          </p:stCondLst>
+                                        </p:cTn>
+                                        <p:tgtEl>
+                                          <p:spTgt spid="116"/>
+                                        </p:tgtEl>
+                                        <p:attrNameLst>
+                                          <p:attrName>style.visibility</p:attrName>
+                                        </p:attrNameLst>
+                                      </p:cBhvr>
+                                      <p:to>
+                                        <p:strVal val="visible"/>
+                                      </p:to>
+                                    </p:set>
+                                  </p:childTnLst>
+                                </p:cTn>
+                              </p:par>
+                              <p:par>
+                                <p:cTn id="49" presetID="1" presetClass="entr" presetSubtype="0" fill="hold" nodeType="withEffect">
+                                  <p:stCondLst>
+                                    <p:cond delay="0"/>
+                                  </p:stCondLst>
+                                  <p:childTnLst>
+                                    <p:set>
+                                      <p:cBhvr>
+                                        <p:cTn id="50" dur="1" fill="hold">
+                                          <p:stCondLst>
+                                            <p:cond delay="0"/>
+                                          </p:stCondLst>
+                                        </p:cTn>
+                                        <p:tgtEl>
+                                          <p:spTgt spid="117"/>
+                                        </p:tgtEl>
+                                        <p:attrNameLst>
+                                          <p:attrName>style.visibility</p:attrName>
+                                        </p:attrNameLst>
+                                      </p:cBhvr>
+                                      <p:to>
+                                        <p:strVal val="visible"/>
+                                      </p:to>
+                                    </p:set>
+                                  </p:childTnLst>
+                                </p:cTn>
+                              </p:par>
+                              <p:par>
+                                <p:cTn id="51" presetID="1" presetClass="entr" presetSubtype="0" fill="hold" nodeType="withEffect">
+                                  <p:stCondLst>
+                                    <p:cond delay="0"/>
+                                  </p:stCondLst>
+                                  <p:childTnLst>
+                                    <p:set>
+                                      <p:cBhvr>
+                                        <p:cTn id="52" dur="1" fill="hold">
+                                          <p:stCondLst>
+                                            <p:cond delay="0"/>
+                                          </p:stCondLst>
+                                        </p:cTn>
+                                        <p:tgtEl>
+                                          <p:spTgt spid="11"/>
+                                        </p:tgtEl>
+                                        <p:attrNameLst>
+                                          <p:attrName>style.visibility</p:attrName>
+                                        </p:attrNameLst>
+                                      </p:cBhvr>
+                                      <p:to>
+                                        <p:strVal val="visible"/>
+                                      </p:to>
+                                    </p:set>
+                                  </p:childTnLst>
+                                </p:cTn>
+                              </p:par>
+                              <p:par>
+                                <p:cTn id="53" presetID="1" presetClass="entr" presetSubtype="0" fill="hold" nodeType="withEffect">
+                                  <p:stCondLst>
+                                    <p:cond delay="0"/>
+                                  </p:stCondLst>
+                                  <p:childTnLst>
+                                    <p:set>
+                                      <p:cBhvr>
+                                        <p:cTn id="54" dur="1" fill="hold">
+                                          <p:stCondLst>
+                                            <p:cond delay="0"/>
+                                          </p:stCondLst>
+                                        </p:cTn>
+                                        <p:tgtEl>
+                                          <p:spTgt spid="19"/>
+                                        </p:tgtEl>
+                                        <p:attrNameLst>
+                                          <p:attrName>style.visibility</p:attrName>
+                                        </p:attrNameLst>
+                                      </p:cBhvr>
+                                      <p:to>
+                                        <p:strVal val="visible"/>
+                                      </p:to>
+                                    </p:set>
+                                  </p:childTnLst>
+                                </p:cTn>
+                              </p:par>
+                              <p:par>
+                                <p:cTn id="55" presetID="1" presetClass="entr" presetSubtype="0" fill="hold" nodeType="withEffect">
+                                  <p:stCondLst>
+                                    <p:cond delay="0"/>
+                                  </p:stCondLst>
+                                  <p:childTnLst>
+                                    <p:set>
+                                      <p:cBhvr>
+                                        <p:cTn id="56" dur="1" fill="hold">
+                                          <p:stCondLst>
+                                            <p:cond delay="0"/>
+                                          </p:stCondLst>
+                                        </p:cTn>
+                                        <p:tgtEl>
+                                          <p:spTgt spid="20"/>
+                                        </p:tgtEl>
+                                        <p:attrNameLst>
+                                          <p:attrName>style.visibility</p:attrName>
+                                        </p:attrNameLst>
+                                      </p:cBhvr>
+                                      <p:to>
+                                        <p:strVal val="visible"/>
+                                      </p:to>
+                                    </p:set>
+                                  </p:childTnLst>
+                                </p:cTn>
+                              </p:par>
+                              <p:par>
+                                <p:cTn id="57" presetID="1" presetClass="entr" presetSubtype="0" fill="hold" nodeType="withEffect">
+                                  <p:stCondLst>
+                                    <p:cond delay="0"/>
+                                  </p:stCondLst>
+                                  <p:childTnLst>
+                                    <p:set>
+                                      <p:cBhvr>
+                                        <p:cTn id="58" dur="1" fill="hold">
+                                          <p:stCondLst>
+                                            <p:cond delay="0"/>
+                                          </p:stCondLst>
+                                        </p:cTn>
+                                        <p:tgtEl>
+                                          <p:spTgt spid="24"/>
+                                        </p:tgtEl>
+                                        <p:attrNameLst>
+                                          <p:attrName>style.visibility</p:attrName>
+                                        </p:attrNameLst>
+                                      </p:cBhvr>
+                                      <p:to>
+                                        <p:strVal val="visible"/>
+                                      </p:to>
+                                    </p:set>
+                                  </p:childTnLst>
+                                </p:cTn>
+                              </p:par>
+                              <p:par>
+                                <p:cTn id="59" presetID="1" presetClass="entr" presetSubtype="0" fill="hold" grpId="0" nodeType="withEffect">
+                                  <p:stCondLst>
+                                    <p:cond delay="0"/>
+                                  </p:stCondLst>
+                                  <p:childTnLst>
+                                    <p:set>
+                                      <p:cBhvr>
+                                        <p:cTn id="60" dur="1" fill="hold">
+                                          <p:stCondLst>
+                                            <p:cond delay="0"/>
+                                          </p:stCondLst>
+                                        </p:cTn>
+                                        <p:tgtEl>
+                                          <p:spTgt spid="31"/>
+                                        </p:tgtEl>
+                                        <p:attrNameLst>
+                                          <p:attrName>style.visibility</p:attrName>
+                                        </p:attrNameLst>
+                                      </p:cBhvr>
+                                      <p:to>
+                                        <p:strVal val="visible"/>
+                                      </p:to>
+                                    </p:set>
+                                  </p:childTnLst>
+                                </p:cTn>
+                              </p:par>
+                              <p:par>
+                                <p:cTn id="61" presetID="1" presetClass="entr" presetSubtype="0" fill="hold" grpId="0" nodeType="withEffect">
+                                  <p:stCondLst>
+                                    <p:cond delay="0"/>
+                                  </p:stCondLst>
+                                  <p:childTnLst>
+                                    <p:set>
+                                      <p:cBhvr>
+                                        <p:cTn id="62" dur="1" fill="hold">
+                                          <p:stCondLst>
+                                            <p:cond delay="0"/>
+                                          </p:stCondLst>
+                                        </p:cTn>
+                                        <p:tgtEl>
+                                          <p:spTgt spid="32"/>
+                                        </p:tgtEl>
+                                        <p:attrNameLst>
+                                          <p:attrName>style.visibility</p:attrName>
+                                        </p:attrNameLst>
+                                      </p:cBhvr>
+                                      <p:to>
+                                        <p:strVal val="visible"/>
+                                      </p:to>
+                                    </p:set>
+                                  </p:childTnLst>
+                                </p:cTn>
+                              </p:par>
+                              <p:par>
+                                <p:cTn id="63" presetID="1" presetClass="entr" presetSubtype="0" fill="hold" grpId="0" nodeType="withEffect">
+                                  <p:stCondLst>
+                                    <p:cond delay="0"/>
+                                  </p:stCondLst>
+                                  <p:childTnLst>
+                                    <p:set>
+                                      <p:cBhvr>
+                                        <p:cTn id="64" dur="1" fill="hold">
+                                          <p:stCondLst>
+                                            <p:cond delay="0"/>
+                                          </p:stCondLst>
+                                        </p:cTn>
+                                        <p:tgtEl>
+                                          <p:spTgt spid="18"/>
+                                        </p:tgtEl>
+                                        <p:attrNameLst>
+                                          <p:attrName>style.visibility</p:attrName>
+                                        </p:attrNameLst>
+                                      </p:cBhvr>
+                                      <p:to>
+                                        <p:strVal val="visible"/>
+                                      </p:to>
+                                    </p:set>
+                                  </p:childTnLst>
+                                </p:cTn>
+                              </p:par>
+                            </p:childTnLst>
+                          </p:cTn>
+                        </p:par>
+                      </p:childTnLst>
+                    </p:cTn>
+                  </p:par>
+                  <p:par>
+                    <p:cTn id="65" fill="hold">
+                      <p:stCondLst>
+                        <p:cond delay="indefinite"/>
+                      </p:stCondLst>
+                      <p:childTnLst>
+                        <p:par>
+                          <p:cTn id="66" fill="hold">
+                            <p:stCondLst>
+                              <p:cond delay="0"/>
+                            </p:stCondLst>
+                            <p:childTnLst>
+                              <p:par>
+                                <p:cTn id="67" presetID="1" presetClass="entr" presetSubtype="0" fill="hold" grpId="0" nodeType="clickEffect">
+                                  <p:stCondLst>
+                                    <p:cond delay="0"/>
+                                  </p:stCondLst>
+                                  <p:childTnLst>
+                                    <p:set>
+                                      <p:cBhvr>
+                                        <p:cTn id="68" dur="1" fill="hold">
+                                          <p:stCondLst>
+                                            <p:cond delay="0"/>
+                                          </p:stCondLst>
+                                        </p:cTn>
+                                        <p:tgtEl>
+                                          <p:spTgt spid="22"/>
+                                        </p:tgtEl>
+                                        <p:attrNameLst>
+                                          <p:attrName>style.visibility</p:attrName>
+                                        </p:attrNameLst>
+                                      </p:cBhvr>
+                                      <p:to>
+                                        <p:strVal val="visible"/>
+                                      </p:to>
+                                    </p:set>
+                                  </p:childTnLst>
+                                </p:cTn>
+                              </p:par>
+                              <p:par>
+                                <p:cTn id="69" presetID="1" presetClass="entr" presetSubtype="0" fill="hold" nodeType="withEffect">
+                                  <p:stCondLst>
+                                    <p:cond delay="0"/>
+                                  </p:stCondLst>
+                                  <p:childTnLst>
+                                    <p:set>
+                                      <p:cBhvr>
+                                        <p:cTn id="70" dur="1" fill="hold">
+                                          <p:stCondLst>
+                                            <p:cond delay="0"/>
+                                          </p:stCondLst>
+                                        </p:cTn>
+                                        <p:tgtEl>
+                                          <p:spTgt spid="1036"/>
+                                        </p:tgtEl>
+                                        <p:attrNameLst>
+                                          <p:attrName>style.visibility</p:attrName>
+                                        </p:attrNameLst>
+                                      </p:cBhvr>
+                                      <p:to>
+                                        <p:strVal val="visible"/>
+                                      </p:to>
+                                    </p:set>
+                                  </p:childTnLst>
+                                </p:cTn>
+                              </p:par>
+                              <p:par>
+                                <p:cTn id="71" presetID="1" presetClass="entr" presetSubtype="0" fill="hold" nodeType="withEffect">
+                                  <p:stCondLst>
+                                    <p:cond delay="0"/>
+                                  </p:stCondLst>
+                                  <p:childTnLst>
+                                    <p:set>
+                                      <p:cBhvr>
+                                        <p:cTn id="72" dur="1" fill="hold">
+                                          <p:stCondLst>
+                                            <p:cond delay="0"/>
+                                          </p:stCondLst>
+                                        </p:cTn>
+                                        <p:tgtEl>
+                                          <p:spTgt spid="1038"/>
+                                        </p:tgtEl>
+                                        <p:attrNameLst>
+                                          <p:attrName>style.visibility</p:attrName>
+                                        </p:attrNameLst>
+                                      </p:cBhvr>
+                                      <p:to>
+                                        <p:strVal val="visible"/>
+                                      </p:to>
+                                    </p:set>
+                                  </p:childTnLst>
+                                </p:cTn>
+                              </p:par>
+                              <p:par>
+                                <p:cTn id="73" presetID="1" presetClass="entr" presetSubtype="0" fill="hold" grpId="0" nodeType="withEffect">
+                                  <p:stCondLst>
+                                    <p:cond delay="0"/>
+                                  </p:stCondLst>
+                                  <p:childTnLst>
+                                    <p:set>
+                                      <p:cBhvr>
+                                        <p:cTn id="74" dur="1" fill="hold">
+                                          <p:stCondLst>
+                                            <p:cond delay="0"/>
+                                          </p:stCondLst>
+                                        </p:cTn>
+                                        <p:tgtEl>
+                                          <p:spTgt spid="47"/>
+                                        </p:tgtEl>
+                                        <p:attrNameLst>
+                                          <p:attrName>style.visibility</p:attrName>
+                                        </p:attrNameLst>
+                                      </p:cBhvr>
+                                      <p:to>
+                                        <p:strVal val="visible"/>
+                                      </p:to>
+                                    </p:set>
+                                  </p:childTnLst>
+                                </p:cTn>
+                              </p:par>
+                              <p:par>
+                                <p:cTn id="75" presetID="1" presetClass="entr" presetSubtype="0" fill="hold" grpId="0" nodeType="withEffect">
+                                  <p:stCondLst>
+                                    <p:cond delay="0"/>
+                                  </p:stCondLst>
+                                  <p:childTnLst>
+                                    <p:set>
+                                      <p:cBhvr>
+                                        <p:cTn id="76" dur="1" fill="hold">
+                                          <p:stCondLst>
+                                            <p:cond delay="0"/>
+                                          </p:stCondLst>
+                                        </p:cTn>
+                                        <p:tgtEl>
+                                          <p:spTgt spid="48"/>
+                                        </p:tgtEl>
+                                        <p:attrNameLst>
+                                          <p:attrName>style.visibility</p:attrName>
+                                        </p:attrNameLst>
+                                      </p:cBhvr>
+                                      <p:to>
+                                        <p:strVal val="visible"/>
+                                      </p:to>
+                                    </p:set>
+                                  </p:childTnLst>
+                                </p:cTn>
+                              </p:par>
+                              <p:par>
+                                <p:cTn id="77" presetID="1" presetClass="entr" presetSubtype="0" fill="hold" grpId="0" nodeType="withEffect">
+                                  <p:stCondLst>
+                                    <p:cond delay="0"/>
+                                  </p:stCondLst>
+                                  <p:childTnLst>
+                                    <p:set>
+                                      <p:cBhvr>
+                                        <p:cTn id="78" dur="1" fill="hold">
+                                          <p:stCondLst>
+                                            <p:cond delay="0"/>
+                                          </p:stCondLst>
+                                        </p:cTn>
+                                        <p:tgtEl>
+                                          <p:spTgt spid="49"/>
+                                        </p:tgtEl>
+                                        <p:attrNameLst>
+                                          <p:attrName>style.visibility</p:attrName>
+                                        </p:attrNameLst>
+                                      </p:cBhvr>
+                                      <p:to>
+                                        <p:strVal val="visible"/>
+                                      </p:to>
+                                    </p:set>
+                                  </p:childTnLst>
+                                </p:cTn>
+                              </p:par>
+                              <p:par>
+                                <p:cTn id="79" presetID="1" presetClass="entr" presetSubtype="0" fill="hold" grpId="0" nodeType="withEffect">
+                                  <p:stCondLst>
+                                    <p:cond delay="0"/>
+                                  </p:stCondLst>
+                                  <p:childTnLst>
+                                    <p:set>
+                                      <p:cBhvr>
+                                        <p:cTn id="80" dur="1" fill="hold">
+                                          <p:stCondLst>
+                                            <p:cond delay="0"/>
+                                          </p:stCondLst>
+                                        </p:cTn>
+                                        <p:tgtEl>
+                                          <p:spTgt spid="50"/>
+                                        </p:tgtEl>
+                                        <p:attrNameLst>
+                                          <p:attrName>style.visibility</p:attrName>
+                                        </p:attrNameLst>
+                                      </p:cBhvr>
+                                      <p:to>
+                                        <p:strVal val="visible"/>
+                                      </p:to>
+                                    </p:set>
+                                  </p:childTnLst>
+                                </p:cTn>
+                              </p:par>
+                              <p:par>
+                                <p:cTn id="81" presetID="1" presetClass="entr" presetSubtype="0" fill="hold" nodeType="withEffect">
+                                  <p:stCondLst>
+                                    <p:cond delay="0"/>
+                                  </p:stCondLst>
+                                  <p:childTnLst>
+                                    <p:set>
+                                      <p:cBhvr>
+                                        <p:cTn id="82" dur="1" fill="hold">
+                                          <p:stCondLst>
+                                            <p:cond delay="0"/>
+                                          </p:stCondLst>
+                                        </p:cTn>
+                                        <p:tgtEl>
+                                          <p:spTgt spid="2054"/>
+                                        </p:tgtEl>
+                                        <p:attrNameLst>
+                                          <p:attrName>style.visibility</p:attrName>
+                                        </p:attrNameLst>
+                                      </p:cBhvr>
+                                      <p:to>
+                                        <p:strVal val="visible"/>
+                                      </p:to>
+                                    </p:set>
+                                  </p:childTnLst>
+                                </p:cTn>
+                              </p:par>
+                              <p:par>
+                                <p:cTn id="83" presetID="1" presetClass="entr" presetSubtype="0" fill="hold" nodeType="withEffect">
+                                  <p:stCondLst>
+                                    <p:cond delay="0"/>
+                                  </p:stCondLst>
+                                  <p:childTnLst>
+                                    <p:set>
+                                      <p:cBhvr>
+                                        <p:cTn id="84" dur="1" fill="hold">
+                                          <p:stCondLst>
+                                            <p:cond delay="0"/>
+                                          </p:stCondLst>
+                                        </p:cTn>
+                                        <p:tgtEl>
+                                          <p:spTgt spid="51"/>
+                                        </p:tgtEl>
+                                        <p:attrNameLst>
+                                          <p:attrName>style.visibility</p:attrName>
+                                        </p:attrNameLst>
+                                      </p:cBhvr>
+                                      <p:to>
+                                        <p:strVal val="visible"/>
+                                      </p:to>
+                                    </p:set>
+                                  </p:childTnLst>
+                                </p:cTn>
+                              </p:par>
+                              <p:par>
+                                <p:cTn id="85" presetID="1" presetClass="entr" presetSubtype="0" fill="hold" grpId="0" nodeType="withEffect">
+                                  <p:stCondLst>
+                                    <p:cond delay="0"/>
+                                  </p:stCondLst>
+                                  <p:childTnLst>
+                                    <p:set>
+                                      <p:cBhvr>
+                                        <p:cTn id="86" dur="1" fill="hold">
+                                          <p:stCondLst>
+                                            <p:cond delay="0"/>
+                                          </p:stCondLst>
+                                        </p:cTn>
+                                        <p:tgtEl>
+                                          <p:spTgt spid="52"/>
+                                        </p:tgtEl>
+                                        <p:attrNameLst>
+                                          <p:attrName>style.visibility</p:attrName>
+                                        </p:attrNameLst>
+                                      </p:cBhvr>
+                                      <p:to>
+                                        <p:strVal val="visible"/>
+                                      </p:to>
+                                    </p:set>
+                                  </p:childTnLst>
+                                </p:cTn>
+                              </p:par>
+                              <p:par>
+                                <p:cTn id="87" presetID="1" presetClass="entr" presetSubtype="0" fill="hold" grpId="0" nodeType="withEffect">
+                                  <p:stCondLst>
+                                    <p:cond delay="0"/>
+                                  </p:stCondLst>
+                                  <p:childTnLst>
+                                    <p:set>
+                                      <p:cBhvr>
+                                        <p:cTn id="88" dur="1" fill="hold">
+                                          <p:stCondLst>
+                                            <p:cond delay="0"/>
+                                          </p:stCondLst>
+                                        </p:cTn>
+                                        <p:tgtEl>
+                                          <p:spTgt spid="53"/>
+                                        </p:tgtEl>
+                                        <p:attrNameLst>
+                                          <p:attrName>style.visibility</p:attrName>
+                                        </p:attrNameLst>
+                                      </p:cBhvr>
+                                      <p:to>
+                                        <p:strVal val="visible"/>
+                                      </p:to>
+                                    </p:set>
+                                  </p:childTnLst>
+                                </p:cTn>
+                              </p:par>
+                              <p:par>
+                                <p:cTn id="89" presetID="1" presetClass="entr" presetSubtype="0" fill="hold" nodeType="withEffect">
+                                  <p:stCondLst>
+                                    <p:cond delay="0"/>
+                                  </p:stCondLst>
+                                  <p:childTnLst>
+                                    <p:set>
+                                      <p:cBhvr>
+                                        <p:cTn id="90" dur="1" fill="hold">
+                                          <p:stCondLst>
+                                            <p:cond delay="0"/>
+                                          </p:stCondLst>
+                                        </p:cTn>
+                                        <p:tgtEl>
+                                          <p:spTgt spid="1046"/>
+                                        </p:tgtEl>
+                                        <p:attrNameLst>
+                                          <p:attrName>style.visibility</p:attrName>
+                                        </p:attrNameLst>
+                                      </p:cBhvr>
+                                      <p:to>
+                                        <p:strVal val="visible"/>
+                                      </p:to>
+                                    </p:set>
+                                  </p:childTnLst>
+                                </p:cTn>
+                              </p:par>
+                              <p:par>
+                                <p:cTn id="91" presetID="1" presetClass="entr" presetSubtype="0" fill="hold" nodeType="withEffect">
+                                  <p:stCondLst>
+                                    <p:cond delay="0"/>
+                                  </p:stCondLst>
+                                  <p:childTnLst>
+                                    <p:set>
+                                      <p:cBhvr>
+                                        <p:cTn id="92" dur="1" fill="hold">
+                                          <p:stCondLst>
+                                            <p:cond delay="0"/>
+                                          </p:stCondLst>
+                                        </p:cTn>
+                                        <p:tgtEl>
+                                          <p:spTgt spid="1068"/>
+                                        </p:tgtEl>
+                                        <p:attrNameLst>
+                                          <p:attrName>style.visibility</p:attrName>
+                                        </p:attrNameLst>
+                                      </p:cBhvr>
+                                      <p:to>
+                                        <p:strVal val="visible"/>
+                                      </p:to>
+                                    </p:set>
+                                  </p:childTnLst>
+                                </p:cTn>
+                              </p:par>
+                              <p:par>
+                                <p:cTn id="93" presetID="1" presetClass="entr" presetSubtype="0" fill="hold" nodeType="withEffect">
+                                  <p:stCondLst>
+                                    <p:cond delay="0"/>
+                                  </p:stCondLst>
+                                  <p:childTnLst>
+                                    <p:set>
+                                      <p:cBhvr>
+                                        <p:cTn id="94" dur="1" fill="hold">
+                                          <p:stCondLst>
+                                            <p:cond delay="0"/>
+                                          </p:stCondLst>
+                                        </p:cTn>
+                                        <p:tgtEl>
+                                          <p:spTgt spid="30"/>
+                                        </p:tgtEl>
+                                        <p:attrNameLst>
+                                          <p:attrName>style.visibility</p:attrName>
+                                        </p:attrNameLst>
+                                      </p:cBhvr>
+                                      <p:to>
+                                        <p:strVal val="visible"/>
+                                      </p:to>
+                                    </p:set>
+                                  </p:childTnLst>
+                                </p:cTn>
+                              </p:par>
+                              <p:par>
+                                <p:cTn id="95" presetID="1" presetClass="entr" presetSubtype="0" fill="hold" grpId="0" nodeType="withEffect">
+                                  <p:stCondLst>
+                                    <p:cond delay="0"/>
+                                  </p:stCondLst>
+                                  <p:childTnLst>
+                                    <p:set>
+                                      <p:cBhvr>
+                                        <p:cTn id="96" dur="1" fill="hold">
+                                          <p:stCondLst>
+                                            <p:cond delay="0"/>
+                                          </p:stCondLst>
+                                        </p:cTn>
+                                        <p:tgtEl>
+                                          <p:spTgt spid="46"/>
+                                        </p:tgtEl>
+                                        <p:attrNameLst>
+                                          <p:attrName>style.visibility</p:attrName>
+                                        </p:attrNameLst>
+                                      </p:cBhvr>
+                                      <p:to>
+                                        <p:strVal val="visible"/>
+                                      </p:to>
+                                    </p:set>
+                                  </p:childTnLst>
+                                </p:cTn>
+                              </p:par>
+                              <p:par>
+                                <p:cTn id="97" presetID="1" presetClass="entr" presetSubtype="0" fill="hold" nodeType="withEffect">
+                                  <p:stCondLst>
+                                    <p:cond delay="0"/>
+                                  </p:stCondLst>
+                                  <p:childTnLst>
+                                    <p:set>
+                                      <p:cBhvr>
+                                        <p:cTn id="98" dur="1" fill="hold">
+                                          <p:stCondLst>
+                                            <p:cond delay="0"/>
+                                          </p:stCondLst>
+                                        </p:cTn>
+                                        <p:tgtEl>
+                                          <p:spTgt spid="1034"/>
+                                        </p:tgtEl>
+                                        <p:attrNameLst>
+                                          <p:attrName>style.visibility</p:attrName>
+                                        </p:attrNameLst>
+                                      </p:cBhvr>
+                                      <p:to>
+                                        <p:strVal val="visible"/>
+                                      </p:to>
+                                    </p:set>
+                                  </p:childTnLst>
+                                </p:cTn>
+                              </p:par>
+                              <p:par>
+                                <p:cTn id="99" presetID="1" presetClass="entr" presetSubtype="0" fill="hold" grpId="0" nodeType="withEffect">
+                                  <p:stCondLst>
+                                    <p:cond delay="0"/>
+                                  </p:stCondLst>
+                                  <p:childTnLst>
+                                    <p:set>
+                                      <p:cBhvr>
+                                        <p:cTn id="100" dur="1" fill="hold">
+                                          <p:stCondLst>
+                                            <p:cond delay="0"/>
+                                          </p:stCondLst>
+                                        </p:cTn>
+                                        <p:tgtEl>
+                                          <p:spTgt spid="44"/>
+                                        </p:tgtEl>
+                                        <p:attrNameLst>
+                                          <p:attrName>style.visibility</p:attrName>
+                                        </p:attrNameLst>
+                                      </p:cBhvr>
+                                      <p:to>
+                                        <p:strVal val="visible"/>
+                                      </p:to>
+                                    </p:set>
+                                  </p:childTnLst>
+                                </p:cTn>
+                              </p:par>
+                              <p:par>
+                                <p:cTn id="101" presetID="1" presetClass="entr" presetSubtype="0" fill="hold" nodeType="withEffect">
+                                  <p:stCondLst>
+                                    <p:cond delay="0"/>
+                                  </p:stCondLst>
+                                  <p:childTnLst>
+                                    <p:set>
+                                      <p:cBhvr>
+                                        <p:cTn id="102" dur="1" fill="hold">
+                                          <p:stCondLst>
+                                            <p:cond delay="0"/>
+                                          </p:stCondLst>
+                                        </p:cTn>
+                                        <p:tgtEl>
+                                          <p:spTgt spid="108"/>
+                                        </p:tgtEl>
+                                        <p:attrNameLst>
+                                          <p:attrName>style.visibility</p:attrName>
+                                        </p:attrNameLst>
+                                      </p:cBhvr>
+                                      <p:to>
+                                        <p:strVal val="visible"/>
+                                      </p:to>
+                                    </p:set>
+                                  </p:childTnLst>
+                                </p:cTn>
+                              </p:par>
+                              <p:par>
+                                <p:cTn id="103" presetID="1" presetClass="entr" presetSubtype="0" fill="hold" nodeType="withEffect">
+                                  <p:stCondLst>
+                                    <p:cond delay="0"/>
+                                  </p:stCondLst>
+                                  <p:childTnLst>
+                                    <p:set>
+                                      <p:cBhvr>
+                                        <p:cTn id="104" dur="1" fill="hold">
+                                          <p:stCondLst>
+                                            <p:cond delay="0"/>
+                                          </p:stCondLst>
+                                        </p:cTn>
+                                        <p:tgtEl>
+                                          <p:spTgt spid="27"/>
+                                        </p:tgtEl>
+                                        <p:attrNameLst>
+                                          <p:attrName>style.visibility</p:attrName>
+                                        </p:attrNameLst>
+                                      </p:cBhvr>
+                                      <p:to>
+                                        <p:strVal val="visible"/>
+                                      </p:to>
+                                    </p:set>
+                                  </p:childTnLst>
+                                </p:cTn>
+                              </p:par>
+                              <p:par>
+                                <p:cTn id="105" presetID="1" presetClass="entr" presetSubtype="0" fill="hold" grpId="0" nodeType="withEffect">
+                                  <p:stCondLst>
+                                    <p:cond delay="0"/>
+                                  </p:stCondLst>
+                                  <p:childTnLst>
+                                    <p:set>
+                                      <p:cBhvr>
+                                        <p:cTn id="106" dur="1" fill="hold">
+                                          <p:stCondLst>
+                                            <p:cond delay="0"/>
+                                          </p:stCondLst>
+                                        </p:cTn>
+                                        <p:tgtEl>
+                                          <p:spTgt spid="5"/>
+                                        </p:tgtEl>
+                                        <p:attrNameLst>
+                                          <p:attrName>style.visibility</p:attrName>
+                                        </p:attrNameLst>
+                                      </p:cBhvr>
+                                      <p:to>
+                                        <p:strVal val="visible"/>
+                                      </p:to>
+                                    </p:set>
+                                  </p:childTnLst>
+                                </p:cTn>
+                              </p:par>
+                            </p:childTnLst>
+                          </p:cTn>
+                        </p:par>
+                      </p:childTnLst>
+                    </p:cTn>
+                  </p:par>
+                  <p:par>
+                    <p:cTn id="107" fill="hold">
+                      <p:stCondLst>
+                        <p:cond delay="indefinite"/>
+                      </p:stCondLst>
+                      <p:childTnLst>
+                        <p:par>
+                          <p:cTn id="108" fill="hold">
+                            <p:stCondLst>
+                              <p:cond delay="0"/>
+                            </p:stCondLst>
+                            <p:childTnLst>
+                              <p:par>
+                                <p:cTn id="109" presetID="1" presetClass="entr" presetSubtype="0" fill="hold" nodeType="clickEffect">
+                                  <p:stCondLst>
+                                    <p:cond delay="0"/>
+                                  </p:stCondLst>
+                                  <p:childTnLst>
+                                    <p:set>
+                                      <p:cBhvr>
+                                        <p:cTn id="110" dur="1" fill="hold">
+                                          <p:stCondLst>
+                                            <p:cond delay="0"/>
+                                          </p:stCondLst>
+                                        </p:cTn>
+                                        <p:tgtEl>
+                                          <p:spTgt spid="2052"/>
+                                        </p:tgtEl>
+                                        <p:attrNameLst>
+                                          <p:attrName>style.visibility</p:attrName>
+                                        </p:attrNameLst>
+                                      </p:cBhvr>
+                                      <p:to>
+                                        <p:strVal val="visible"/>
+                                      </p:to>
+                                    </p:set>
+                                  </p:childTnLst>
+                                </p:cTn>
+                              </p:par>
+                              <p:par>
+                                <p:cTn id="111" presetID="1" presetClass="entr" presetSubtype="0" fill="hold" nodeType="withEffect">
+                                  <p:stCondLst>
+                                    <p:cond delay="0"/>
+                                  </p:stCondLst>
+                                  <p:childTnLst>
+                                    <p:set>
+                                      <p:cBhvr>
+                                        <p:cTn id="112" dur="1" fill="hold">
+                                          <p:stCondLst>
+                                            <p:cond delay="0"/>
+                                          </p:stCondLst>
+                                        </p:cTn>
+                                        <p:tgtEl>
+                                          <p:spTgt spid="43"/>
+                                        </p:tgtEl>
+                                        <p:attrNameLst>
+                                          <p:attrName>style.visibility</p:attrName>
+                                        </p:attrNameLst>
+                                      </p:cBhvr>
+                                      <p:to>
+                                        <p:strVal val="visible"/>
+                                      </p:to>
+                                    </p:set>
+                                  </p:childTnLst>
+                                </p:cTn>
+                              </p:par>
+                              <p:par>
+                                <p:cTn id="113" presetID="1" presetClass="entr" presetSubtype="0" fill="hold" grpId="0" nodeType="withEffect">
+                                  <p:stCondLst>
+                                    <p:cond delay="0"/>
+                                  </p:stCondLst>
+                                  <p:childTnLst>
+                                    <p:set>
+                                      <p:cBhvr>
+                                        <p:cTn id="114" dur="1" fill="hold">
+                                          <p:stCondLst>
+                                            <p:cond delay="0"/>
+                                          </p:stCondLst>
+                                        </p:cTn>
+                                        <p:tgtEl>
+                                          <p:spTgt spid="54"/>
+                                        </p:tgtEl>
+                                        <p:attrNameLst>
+                                          <p:attrName>style.visibility</p:attrName>
+                                        </p:attrNameLst>
+                                      </p:cBhvr>
+                                      <p:to>
+                                        <p:strVal val="visible"/>
+                                      </p:to>
+                                    </p:set>
+                                  </p:childTnLst>
+                                </p:cTn>
+                              </p:par>
+                              <p:par>
+                                <p:cTn id="115" presetID="1" presetClass="entr" presetSubtype="0" fill="hold" grpId="0" nodeType="withEffect">
+                                  <p:stCondLst>
+                                    <p:cond delay="0"/>
+                                  </p:stCondLst>
+                                  <p:childTnLst>
+                                    <p:set>
+                                      <p:cBhvr>
+                                        <p:cTn id="116" dur="1" fill="hold">
+                                          <p:stCondLst>
+                                            <p:cond delay="0"/>
+                                          </p:stCondLst>
+                                        </p:cTn>
+                                        <p:tgtEl>
+                                          <p:spTgt spid="55"/>
+                                        </p:tgtEl>
+                                        <p:attrNameLst>
+                                          <p:attrName>style.visibility</p:attrName>
+                                        </p:attrNameLst>
+                                      </p:cBhvr>
+                                      <p:to>
+                                        <p:strVal val="visible"/>
+                                      </p:to>
+                                    </p:set>
+                                  </p:childTnLst>
+                                </p:cTn>
+                              </p:par>
+                              <p:par>
+                                <p:cTn id="117" presetID="1" presetClass="entr" presetSubtype="0" fill="hold" grpId="0" nodeType="withEffect">
+                                  <p:stCondLst>
+                                    <p:cond delay="0"/>
+                                  </p:stCondLst>
+                                  <p:childTnLst>
+                                    <p:set>
+                                      <p:cBhvr>
+                                        <p:cTn id="118" dur="1" fill="hold">
+                                          <p:stCondLst>
+                                            <p:cond delay="0"/>
+                                          </p:stCondLst>
+                                        </p:cTn>
+                                        <p:tgtEl>
+                                          <p:spTgt spid="56"/>
+                                        </p:tgtEl>
+                                        <p:attrNameLst>
+                                          <p:attrName>style.visibility</p:attrName>
+                                        </p:attrNameLst>
+                                      </p:cBhvr>
+                                      <p:to>
+                                        <p:strVal val="visible"/>
+                                      </p:to>
+                                    </p:set>
+                                  </p:childTnLst>
+                                </p:cTn>
+                              </p:par>
+                              <p:par>
+                                <p:cTn id="119" presetID="1" presetClass="entr" presetSubtype="0" fill="hold" grpId="0" nodeType="withEffect">
+                                  <p:stCondLst>
+                                    <p:cond delay="0"/>
+                                  </p:stCondLst>
+                                  <p:childTnLst>
+                                    <p:set>
+                                      <p:cBhvr>
+                                        <p:cTn id="120" dur="1" fill="hold">
+                                          <p:stCondLst>
+                                            <p:cond delay="0"/>
+                                          </p:stCondLst>
+                                        </p:cTn>
+                                        <p:tgtEl>
+                                          <p:spTgt spid="57"/>
+                                        </p:tgtEl>
+                                        <p:attrNameLst>
+                                          <p:attrName>style.visibility</p:attrName>
+                                        </p:attrNameLst>
+                                      </p:cBhvr>
+                                      <p:to>
+                                        <p:strVal val="visible"/>
+                                      </p:to>
+                                    </p:set>
+                                  </p:childTnLst>
+                                </p:cTn>
+                              </p:par>
+                              <p:par>
+                                <p:cTn id="121" presetID="1" presetClass="entr" presetSubtype="0" fill="hold" grpId="0" nodeType="withEffect">
+                                  <p:stCondLst>
+                                    <p:cond delay="0"/>
+                                  </p:stCondLst>
+                                  <p:childTnLst>
+                                    <p:set>
+                                      <p:cBhvr>
+                                        <p:cTn id="122" dur="1" fill="hold">
+                                          <p:stCondLst>
+                                            <p:cond delay="0"/>
+                                          </p:stCondLst>
+                                        </p:cTn>
+                                        <p:tgtEl>
+                                          <p:spTgt spid="1074"/>
+                                        </p:tgtEl>
+                                        <p:attrNameLst>
+                                          <p:attrName>style.visibility</p:attrName>
+                                        </p:attrNameLst>
+                                      </p:cBhvr>
+                                      <p:to>
+                                        <p:strVal val="visible"/>
+                                      </p:to>
+                                    </p:set>
+                                  </p:childTnLst>
+                                </p:cTn>
+                              </p:par>
+                              <p:par>
+                                <p:cTn id="123" presetID="1" presetClass="entr" presetSubtype="0" fill="hold" grpId="0" nodeType="withEffect" nodePh="1">
+                                  <p:stCondLst>
+                                    <p:cond delay="0"/>
+                                  </p:stCondLst>
+                                  <p:endCondLst>
+                                    <p:cond evt="begin" delay="0">
+                                      <p:tn val="123"/>
+                                    </p:cond>
+                                  </p:endCondLst>
+                                  <p:childTnLst>
+                                    <p:set>
+                                      <p:cBhvr>
+                                        <p:cTn id="124" dur="1" fill="hold">
+                                          <p:stCondLst>
+                                            <p:cond delay="0"/>
+                                          </p:stCondLst>
+                                        </p:cTn>
+                                        <p:tgtEl>
+                                          <p:spTgt spid="2097"/>
+                                        </p:tgtEl>
+                                        <p:attrNameLst>
+                                          <p:attrName>style.visibility</p:attrName>
+                                        </p:attrNameLst>
+                                      </p:cBhvr>
+                                      <p:to>
+                                        <p:strVal val="visible"/>
+                                      </p:to>
+                                    </p:set>
+                                  </p:childTnLst>
+                                </p:cTn>
+                              </p:par>
+                              <p:par>
+                                <p:cTn id="125" presetID="1" presetClass="entr" presetSubtype="0" fill="hold" grpId="0" nodeType="withEffect">
+                                  <p:stCondLst>
+                                    <p:cond delay="0"/>
+                                  </p:stCondLst>
+                                  <p:childTnLst>
+                                    <p:set>
+                                      <p:cBhvr>
+                                        <p:cTn id="126" dur="1" fill="hold">
+                                          <p:stCondLst>
+                                            <p:cond delay="0"/>
+                                          </p:stCondLst>
+                                        </p:cTn>
+                                        <p:tgtEl>
+                                          <p:spTgt spid="4"/>
+                                        </p:tgtEl>
+                                        <p:attrNameLst>
+                                          <p:attrName>style.visibility</p:attrName>
+                                        </p:attrNameLst>
+                                      </p:cBhvr>
+                                      <p:to>
+                                        <p:strVal val="visible"/>
+                                      </p:to>
+                                    </p:set>
+                                  </p:childTnLst>
+                                </p:cTn>
+                              </p:par>
+                              <p:par>
+                                <p:cTn id="127" presetID="1" presetClass="entr" presetSubtype="0" fill="hold" nodeType="withEffect">
+                                  <p:stCondLst>
+                                    <p:cond delay="0"/>
+                                  </p:stCondLst>
+                                  <p:childTnLst>
+                                    <p:set>
+                                      <p:cBhvr>
+                                        <p:cTn id="128" dur="1" fill="hold">
+                                          <p:stCondLst>
+                                            <p:cond delay="0"/>
+                                          </p:stCondLst>
+                                        </p:cTn>
+                                        <p:tgtEl>
+                                          <p:spTgt spid="21"/>
+                                        </p:tgtEl>
+                                        <p:attrNameLst>
+                                          <p:attrName>style.visibility</p:attrName>
+                                        </p:attrNameLst>
+                                      </p:cBhvr>
+                                      <p:to>
+                                        <p:strVal val="visible"/>
+                                      </p:to>
+                                    </p:set>
+                                  </p:childTnLst>
+                                </p:cTn>
+                              </p:par>
+                              <p:par>
+                                <p:cTn id="129" presetID="1" presetClass="entr" presetSubtype="0" fill="hold" grpId="0" nodeType="withEffect">
+                                  <p:stCondLst>
+                                    <p:cond delay="0"/>
+                                  </p:stCondLst>
+                                  <p:childTnLst>
+                                    <p:set>
+                                      <p:cBhvr>
+                                        <p:cTn id="130" dur="1" fill="hold">
+                                          <p:stCondLst>
+                                            <p:cond delay="0"/>
+                                          </p:stCondLst>
+                                        </p:cTn>
+                                        <p:tgtEl>
+                                          <p:spTgt spid="23"/>
+                                        </p:tgtEl>
+                                        <p:attrNameLst>
+                                          <p:attrName>style.visibility</p:attrName>
+                                        </p:attrNameLst>
+                                      </p:cBhvr>
+                                      <p:to>
+                                        <p:strVal val="visible"/>
+                                      </p:to>
+                                    </p:set>
+                                  </p:childTnLst>
+                                </p:cTn>
+                              </p:par>
+                              <p:par>
+                                <p:cTn id="131" presetID="1" presetClass="entr" presetSubtype="0" fill="hold" nodeType="withEffect">
+                                  <p:stCondLst>
+                                    <p:cond delay="0"/>
+                                  </p:stCondLst>
+                                  <p:childTnLst>
+                                    <p:set>
+                                      <p:cBhvr>
+                                        <p:cTn id="132" dur="1" fill="hold">
+                                          <p:stCondLst>
+                                            <p:cond delay="0"/>
+                                          </p:stCondLst>
+                                        </p:cTn>
+                                        <p:tgtEl>
+                                          <p:spTgt spid="78"/>
+                                        </p:tgtEl>
+                                        <p:attrNameLst>
+                                          <p:attrName>style.visibility</p:attrName>
+                                        </p:attrNameLst>
+                                      </p:cBhvr>
+                                      <p:to>
+                                        <p:strVal val="visible"/>
+                                      </p:to>
+                                    </p:set>
+                                  </p:childTnLst>
+                                </p:cTn>
+                              </p:par>
+                              <p:par>
+                                <p:cTn id="133" presetID="1" presetClass="entr" presetSubtype="0" fill="hold" grpId="0" nodeType="withEffect">
+                                  <p:stCondLst>
+                                    <p:cond delay="0"/>
+                                  </p:stCondLst>
+                                  <p:childTnLst>
+                                    <p:set>
+                                      <p:cBhvr>
+                                        <p:cTn id="134" dur="1" fill="hold">
+                                          <p:stCondLst>
+                                            <p:cond delay="0"/>
+                                          </p:stCondLst>
+                                        </p:cTn>
+                                        <p:tgtEl>
+                                          <p:spTgt spid="26"/>
+                                        </p:tgtEl>
+                                        <p:attrNameLst>
+                                          <p:attrName>style.visibility</p:attrName>
+                                        </p:attrNameLst>
+                                      </p:cBhvr>
+                                      <p:to>
+                                        <p:strVal val="visible"/>
+                                      </p:to>
+                                    </p:set>
+                                  </p:childTnLst>
+                                </p:cTn>
+                              </p:par>
+                              <p:par>
+                                <p:cTn id="135" presetID="1" presetClass="entr" presetSubtype="0" fill="hold" nodeType="withEffect">
+                                  <p:stCondLst>
+                                    <p:cond delay="0"/>
+                                  </p:stCondLst>
+                                  <p:childTnLst>
+                                    <p:set>
+                                      <p:cBhvr>
+                                        <p:cTn id="136" dur="1" fill="hold">
+                                          <p:stCondLst>
+                                            <p:cond delay="0"/>
+                                          </p:stCondLst>
+                                        </p:cTn>
+                                        <p:tgtEl>
+                                          <p:spTgt spid="1029"/>
+                                        </p:tgtEl>
+                                        <p:attrNameLst>
+                                          <p:attrName>style.visibility</p:attrName>
+                                        </p:attrNameLst>
+                                      </p:cBhvr>
+                                      <p:to>
+                                        <p:strVal val="visible"/>
+                                      </p:to>
+                                    </p:set>
+                                  </p:childTnLst>
+                                </p:cTn>
+                              </p:par>
+                              <p:par>
+                                <p:cTn id="137" presetID="1" presetClass="entr" presetSubtype="0" fill="hold" nodeType="withEffect">
+                                  <p:stCondLst>
+                                    <p:cond delay="0"/>
+                                  </p:stCondLst>
+                                  <p:childTnLst>
+                                    <p:set>
+                                      <p:cBhvr>
+                                        <p:cTn id="138" dur="1" fill="hold">
+                                          <p:stCondLst>
+                                            <p:cond delay="0"/>
+                                          </p:stCondLst>
+                                        </p:cTn>
+                                        <p:tgtEl>
+                                          <p:spTgt spid="1062"/>
+                                        </p:tgtEl>
+                                        <p:attrNameLst>
+                                          <p:attrName>style.visibility</p:attrName>
+                                        </p:attrNameLst>
+                                      </p:cBhvr>
+                                      <p:to>
+                                        <p:strVal val="visible"/>
+                                      </p:to>
+                                    </p:set>
+                                  </p:childTnLst>
+                                </p:cTn>
+                              </p:par>
+                            </p:childTnLst>
+                          </p:cTn>
+                        </p:par>
+                      </p:childTnLst>
+                    </p:cTn>
+                  </p:par>
+                  <p:par>
+                    <p:cTn id="139" fill="hold">
+                      <p:stCondLst>
+                        <p:cond delay="indefinite"/>
+                      </p:stCondLst>
+                      <p:childTnLst>
+                        <p:par>
+                          <p:cTn id="140" fill="hold">
+                            <p:stCondLst>
+                              <p:cond delay="0"/>
+                            </p:stCondLst>
+                            <p:childTnLst>
+                              <p:par>
+                                <p:cTn id="141" presetID="1" presetClass="entr" presetSubtype="0" fill="hold" nodeType="clickEffect">
+                                  <p:stCondLst>
+                                    <p:cond delay="0"/>
+                                  </p:stCondLst>
+                                  <p:childTnLst>
+                                    <p:set>
+                                      <p:cBhvr>
+                                        <p:cTn id="142" dur="1" fill="hold">
+                                          <p:stCondLst>
+                                            <p:cond delay="0"/>
+                                          </p:stCondLst>
+                                        </p:cTn>
+                                        <p:tgtEl>
+                                          <p:spTgt spid="1075"/>
+                                        </p:tgtEl>
+                                        <p:attrNameLst>
+                                          <p:attrName>style.visibility</p:attrName>
+                                        </p:attrNameLst>
+                                      </p:cBhvr>
+                                      <p:to>
+                                        <p:strVal val="visible"/>
+                                      </p:to>
+                                    </p:set>
+                                  </p:childTnLst>
+                                </p:cTn>
+                              </p:par>
+                            </p:childTnLst>
+                          </p:cTn>
+                        </p:par>
+                      </p:childTnLst>
+                    </p:cTn>
+                  </p:par>
+                  <p:par>
+                    <p:cTn id="143" fill="hold">
+                      <p:stCondLst>
+                        <p:cond delay="indefinite"/>
+                      </p:stCondLst>
+                      <p:childTnLst>
+                        <p:par>
+                          <p:cTn id="144" fill="hold">
+                            <p:stCondLst>
+                              <p:cond delay="0"/>
+                            </p:stCondLst>
+                            <p:childTnLst>
+                              <p:par>
+                                <p:cTn id="145" presetID="1" presetClass="entr" presetSubtype="0" fill="hold" nodeType="clickEffect">
+                                  <p:stCondLst>
+                                    <p:cond delay="0"/>
+                                  </p:stCondLst>
+                                  <p:childTnLst>
+                                    <p:set>
+                                      <p:cBhvr>
+                                        <p:cTn id="146" dur="1" fill="hold">
+                                          <p:stCondLst>
+                                            <p:cond delay="0"/>
+                                          </p:stCondLst>
+                                        </p:cTn>
+                                        <p:tgtEl>
+                                          <p:spTgt spid="2068"/>
+                                        </p:tgtEl>
+                                        <p:attrNameLst>
+                                          <p:attrName>style.visibility</p:attrName>
+                                        </p:attrNameLst>
+                                      </p:cBhvr>
+                                      <p:to>
+                                        <p:strVal val="visible"/>
+                                      </p:to>
+                                    </p:set>
+                                  </p:childTnLst>
+                                </p:cTn>
+                              </p:par>
+                              <p:par>
+                                <p:cTn id="147" presetID="1" presetClass="entr" presetSubtype="0" fill="hold" nodeType="withEffect">
+                                  <p:stCondLst>
+                                    <p:cond delay="0"/>
+                                  </p:stCondLst>
+                                  <p:childTnLst>
+                                    <p:set>
+                                      <p:cBhvr>
+                                        <p:cTn id="148" dur="1" fill="hold">
+                                          <p:stCondLst>
+                                            <p:cond delay="0"/>
+                                          </p:stCondLst>
+                                        </p:cTn>
+                                        <p:tgtEl>
+                                          <p:spTgt spid="2101"/>
+                                        </p:tgtEl>
+                                        <p:attrNameLst>
+                                          <p:attrName>style.visibility</p:attrName>
+                                        </p:attrNameLst>
+                                      </p:cBhvr>
+                                      <p:to>
+                                        <p:strVal val="visible"/>
+                                      </p:to>
+                                    </p:set>
+                                  </p:childTnLst>
+                                </p:cTn>
+                              </p:par>
+                            </p:childTnLst>
+                          </p:cTn>
+                        </p:par>
+                      </p:childTnLst>
+                    </p:cTn>
+                  </p:par>
+                </p:childTnLst>
+              </p:cTn>
+              <p:prevCondLst>
+                <p:cond evt="onPrev" delay="0">
+                  <p:tgtEl>
+                    <p:sldTgt/>
+                  </p:tgtEl>
+                </p:cond>
+              </p:prevCondLst>
+              <p:nextCondLst>
+                <p:cond evt="onNext" delay="0">
+                  <p:tgtEl>
+                    <p:sldTgt/>
+                  </p:tgtEl>
+                </p:cond>
+              </p:nextCondLst>
+            </p:seq>
+          </p:childTnLst>
+        </p:cTn>
+      </p:par>
+    </p:tnLst>
+    <p:bldLst>
+      <p:bldP spid="26" grpId="0" animBg="1"/>
+      <p:bldP spid="22" grpId="0" animBg="1"/>
+      <p:bldP spid="18" grpId="0" animBg="1"/>
+      <p:bldP spid="2" grpId="0" animBg="1"/>
+      <p:bldP spid="47" grpId="0" animBg="1"/>
+      <p:bldP spid="48" grpId="0"/>
+      <p:bldP spid="49" grpId="0" animBg="1"/>
+      <p:bldP spid="50" grpId="0"/>
+      <p:bldP spid="52" grpId="0" animBg="1"/>
+      <p:bldP spid="53" grpId="0" animBg="1"/>
+      <p:bldP spid="58" grpId="0"/>
+      <p:bldP spid="67" grpId="0"/>
+      <p:bldP spid="70" grpId="0"/>
+      <p:bldP spid="73" grpId="0"/>
+      <p:bldP spid="71" grpId="0" animBg="1"/>
+      <p:bldP spid="106" grpId="0" animBg="1"/>
+      <p:bldP spid="54" grpId="0" animBg="1"/>
+      <p:bldP spid="55" grpId="0"/>
+      <p:bldP spid="56" grpId="0" animBg="1"/>
+      <p:bldP spid="57" grpId="0"/>
+      <p:bldP spid="1074" grpId="0" animBg="1"/>
+      <p:bldP spid="2097" grpId="0"/>
+      <p:bldP spid="46" grpId="0" animBg="1"/>
+      <p:bldP spid="44" grpId="0"/>
+      <p:bldP spid="4" grpId="0" animBg="1"/>
+      <p:bldP spid="5" grpId="0" animBg="1"/>
+      <p:bldP spid="23" grpId="0" animBg="1"/>
+      <p:bldP spid="3" grpId="0" animBg="1"/>
+      <p:bldP spid="31" grpId="0"/>
+      <p:bldP spid="32" grpId="0"/>
+    </p:bldLst>
+  </p:timing>
 </p:sld>
 </file>
 
@@ -38763,43 +40750,6 @@
       </p:sp>
       <p:pic>
         <p:nvPicPr>
-          <p:cNvPr id="5" name="Image 4">
-            <a:extLst>
-              <a:ext uri="{FF2B5EF4-FFF2-40B4-BE49-F238E27FC236}">
-                <a16:creationId xmlns:a16="http://schemas.microsoft.com/office/drawing/2014/main" id="{937780E3-EE64-E9EA-5E8A-0FA88242AC93}"/>
-              </a:ext>
-            </a:extLst>
-          </p:cNvPr>
-          <p:cNvPicPr>
-            <a:picLocks noChangeAspect="1"/>
-          </p:cNvPicPr>
-          <p:nvPr/>
-        </p:nvPicPr>
-        <p:blipFill>
-          <a:blip r:embed="rId4"/>
-          <a:stretch>
-            <a:fillRect/>
-          </a:stretch>
-        </p:blipFill>
-        <p:spPr>
-          <a:xfrm>
-            <a:off x="376856" y="1116074"/>
-            <a:ext cx="4246784" cy="2926040"/>
-          </a:xfrm>
-          <a:prstGeom prst="rect">
-            <a:avLst/>
-          </a:prstGeom>
-          <a:ln>
-            <a:solidFill>
-              <a:schemeClr val="bg1">
-                <a:lumMod val="75000"/>
-              </a:schemeClr>
-            </a:solidFill>
-          </a:ln>
-        </p:spPr>
-      </p:pic>
-      <p:pic>
-        <p:nvPicPr>
           <p:cNvPr id="7" name="Image 6">
             <a:extLst>
               <a:ext uri="{FF2B5EF4-FFF2-40B4-BE49-F238E27FC236}">
@@ -38813,7 +40763,7 @@
           <p:nvPr/>
         </p:nvPicPr>
         <p:blipFill>
-          <a:blip r:embed="rId5"/>
+          <a:blip r:embed="rId4"/>
           <a:stretch>
             <a:fillRect/>
           </a:stretch>
@@ -38849,16 +40799,18 @@
         </p:nvSpPr>
         <p:spPr>
           <a:xfrm>
-            <a:off x="6754305" y="726955"/>
-            <a:ext cx="2020760" cy="307777"/>
+            <a:off x="6754305" y="698496"/>
+            <a:ext cx="2020760" cy="340519"/>
           </a:xfrm>
-          <a:prstGeom prst="rect">
+          <a:prstGeom prst="roundRect">
             <a:avLst/>
           </a:prstGeom>
-          <a:noFill/>
+          <a:solidFill>
+            <a:schemeClr val="bg1"/>
+          </a:solidFill>
           <a:ln>
             <a:solidFill>
-              <a:srgbClr val="FF0000"/>
+              <a:srgbClr val="C00000"/>
             </a:solidFill>
           </a:ln>
         </p:spPr>
@@ -38872,7 +40824,7 @@
             <a:r>
               <a:rPr lang="fr-FR" dirty="0">
                 <a:solidFill>
-                  <a:srgbClr val="FF0000"/>
+                  <a:srgbClr val="C00000"/>
                 </a:solidFill>
               </a:rPr>
               <a:t>MAE du modèle : 6,57</a:t>
@@ -39316,6 +41268,151 @@
           </a:p>
         </p:txBody>
       </p:sp>
+      <p:sp>
+        <p:nvSpPr>
+          <p:cNvPr id="3" name="Ellipse 2">
+            <a:extLst>
+              <a:ext uri="{FF2B5EF4-FFF2-40B4-BE49-F238E27FC236}">
+                <a16:creationId xmlns:a16="http://schemas.microsoft.com/office/drawing/2014/main" id="{E869AAB6-05E5-7ABD-6265-0FBFDCCB98A9}"/>
+              </a:ext>
+            </a:extLst>
+          </p:cNvPr>
+          <p:cNvSpPr/>
+          <p:nvPr/>
+        </p:nvSpPr>
+        <p:spPr>
+          <a:xfrm>
+            <a:off x="6608002" y="486574"/>
+            <a:ext cx="292605" cy="292605"/>
+          </a:xfrm>
+          <a:prstGeom prst="ellipse">
+            <a:avLst/>
+          </a:prstGeom>
+          <a:solidFill>
+            <a:schemeClr val="bg1"/>
+          </a:solidFill>
+          <a:ln>
+            <a:solidFill>
+              <a:srgbClr val="C00000"/>
+            </a:solidFill>
+          </a:ln>
+        </p:spPr>
+        <p:style>
+          <a:lnRef idx="2">
+            <a:schemeClr val="accent1">
+              <a:shade val="15000"/>
+            </a:schemeClr>
+          </a:lnRef>
+          <a:fillRef idx="1">
+            <a:schemeClr val="accent1"/>
+          </a:fillRef>
+          <a:effectRef idx="0">
+            <a:schemeClr val="accent1"/>
+          </a:effectRef>
+          <a:fontRef idx="minor">
+            <a:schemeClr val="lt1"/>
+          </a:fontRef>
+        </p:style>
+        <p:txBody>
+          <a:bodyPr rtlCol="0" anchor="ctr"/>
+          <a:lstStyle/>
+          <a:p>
+            <a:pPr algn="ctr"/>
+            <a:r>
+              <a:rPr lang="fr-FR" sz="1600" b="1" dirty="0">
+                <a:solidFill>
+                  <a:srgbClr val="C00000"/>
+                </a:solidFill>
+              </a:rPr>
+              <a:t>!</a:t>
+            </a:r>
+          </a:p>
+        </p:txBody>
+      </p:sp>
+      <p:sp>
+        <p:nvSpPr>
+          <p:cNvPr id="4" name="ZoneTexte 3">
+            <a:extLst>
+              <a:ext uri="{FF2B5EF4-FFF2-40B4-BE49-F238E27FC236}">
+                <a16:creationId xmlns:a16="http://schemas.microsoft.com/office/drawing/2014/main" id="{786453DB-D6FB-CB5F-9376-5629883FAC60}"/>
+              </a:ext>
+            </a:extLst>
+          </p:cNvPr>
+          <p:cNvSpPr txBox="1"/>
+          <p:nvPr/>
+        </p:nvSpPr>
+        <p:spPr>
+          <a:xfrm rot="1276305">
+            <a:off x="7445610" y="243080"/>
+            <a:ext cx="1220771" cy="307777"/>
+          </a:xfrm>
+          <a:prstGeom prst="rect">
+            <a:avLst/>
+          </a:prstGeom>
+          <a:solidFill>
+            <a:schemeClr val="bg1"/>
+          </a:solidFill>
+          <a:ln>
+            <a:solidFill>
+              <a:srgbClr val="FF0000"/>
+            </a:solidFill>
+          </a:ln>
+        </p:spPr>
+        <p:txBody>
+          <a:bodyPr wrap="square" rtlCol="0">
+            <a:spAutoFit/>
+          </a:bodyPr>
+          <a:lstStyle/>
+          <a:p>
+            <a:pPr algn="ctr"/>
+            <a:r>
+              <a:rPr lang="fr-FR" dirty="0">
+                <a:solidFill>
+                  <a:srgbClr val="FF0000"/>
+                </a:solidFill>
+              </a:rPr>
+              <a:t>Mettre à jour</a:t>
+            </a:r>
+          </a:p>
+        </p:txBody>
+      </p:sp>
+      <p:pic>
+        <p:nvPicPr>
+          <p:cNvPr id="13" name="Image 12" descr="Une image contenant texte, capture d’écran, affichage, nombre&#10;&#10;Le contenu généré par l’IA peut être incorrect.">
+            <a:extLst>
+              <a:ext uri="{FF2B5EF4-FFF2-40B4-BE49-F238E27FC236}">
+                <a16:creationId xmlns:a16="http://schemas.microsoft.com/office/drawing/2014/main" id="{7D6B0B43-8628-A21E-C82B-D058DBA5452A}"/>
+              </a:ext>
+            </a:extLst>
+          </p:cNvPr>
+          <p:cNvPicPr>
+            <a:picLocks noChangeAspect="1"/>
+          </p:cNvPicPr>
+          <p:nvPr/>
+        </p:nvPicPr>
+        <p:blipFill>
+          <a:blip r:embed="rId5"/>
+          <a:stretch>
+            <a:fillRect/>
+          </a:stretch>
+        </p:blipFill>
+        <p:spPr>
+          <a:xfrm>
+            <a:off x="365409" y="1109296"/>
+            <a:ext cx="4267865" cy="2932817"/>
+          </a:xfrm>
+          <a:prstGeom prst="rect">
+            <a:avLst/>
+          </a:prstGeom>
+          <a:ln>
+            <a:solidFill>
+              <a:schemeClr val="bg1">
+                <a:lumMod val="75000"/>
+              </a:schemeClr>
+            </a:solidFill>
+          </a:ln>
+        </p:spPr>
+      </p:pic>
     </p:spTree>
     <p:extLst>
       <p:ext uri="{BB962C8B-B14F-4D97-AF65-F5344CB8AC3E}">
@@ -39326,6 +41423,87 @@
   <p:clrMapOvr>
     <a:masterClrMapping/>
   </p:clrMapOvr>
+  <p:timing>
+    <p:tnLst>
+      <p:par>
+        <p:cTn id="1" dur="indefinite" restart="never" nodeType="tmRoot">
+          <p:childTnLst>
+            <p:seq concurrent="1" nextAc="seek">
+              <p:cTn id="2" dur="indefinite" nodeType="mainSeq">
+                <p:childTnLst>
+                  <p:par>
+                    <p:cTn id="3" fill="hold">
+                      <p:stCondLst>
+                        <p:cond delay="indefinite"/>
+                        <p:cond evt="onBegin" delay="0">
+                          <p:tn val="2"/>
+                        </p:cond>
+                      </p:stCondLst>
+                      <p:childTnLst>
+                        <p:par>
+                          <p:cTn id="4" fill="hold">
+                            <p:stCondLst>
+                              <p:cond delay="0"/>
+                            </p:stCondLst>
+                            <p:childTnLst>
+                              <p:par>
+                                <p:cTn id="5" presetID="1" presetClass="entr" presetSubtype="0" fill="hold" grpId="0" nodeType="withEffect">
+                                  <p:stCondLst>
+                                    <p:cond delay="0"/>
+                                  </p:stCondLst>
+                                  <p:childTnLst>
+                                    <p:set>
+                                      <p:cBhvr>
+                                        <p:cTn id="6" dur="1" fill="hold">
+                                          <p:stCondLst>
+                                            <p:cond delay="0"/>
+                                          </p:stCondLst>
+                                        </p:cTn>
+                                        <p:tgtEl>
+                                          <p:spTgt spid="3"/>
+                                        </p:tgtEl>
+                                        <p:attrNameLst>
+                                          <p:attrName>style.visibility</p:attrName>
+                                        </p:attrNameLst>
+                                      </p:cBhvr>
+                                      <p:to>
+                                        <p:strVal val="visible"/>
+                                      </p:to>
+                                    </p:set>
+                                  </p:childTnLst>
+                                </p:cTn>
+                              </p:par>
+                            </p:childTnLst>
+                          </p:cTn>
+                        </p:par>
+                      </p:childTnLst>
+                    </p:cTn>
+                  </p:par>
+                </p:childTnLst>
+              </p:cTn>
+              <p:prevCondLst>
+                <p:cond evt="onPrev" delay="0">
+                  <p:tgtEl>
+                    <p:sldTgt/>
+                  </p:tgtEl>
+                </p:cond>
+              </p:prevCondLst>
+              <p:nextCondLst>
+                <p:cond evt="onNext" delay="0">
+                  <p:tgtEl>
+                    <p:sldTgt/>
+                  </p:tgtEl>
+                </p:cond>
+              </p:nextCondLst>
+            </p:seq>
+          </p:childTnLst>
+        </p:cTn>
+      </p:par>
+    </p:tnLst>
+    <p:bldLst>
+      <p:bldP spid="3" grpId="0" animBg="1"/>
+    </p:bldLst>
+  </p:timing>
 </p:sld>
 </file>
 

--- a/presentation/dsfs_ft_36_Projet_REnergies_efficiency_prediction.pptx
+++ b/presentation/dsfs_ft_36_Projet_REnergies_efficiency_prediction.pptx
@@ -292,7 +292,7 @@
 <file path=ppt/revisionInfo.xml><?xml version="1.0" encoding="utf-8"?>
 <p1510:revInfo xmlns:a="http://schemas.openxmlformats.org/drawingml/2006/main" xmlns:r="http://schemas.openxmlformats.org/officeDocument/2006/relationships" xmlns:p1510="http://schemas.microsoft.com/office/powerpoint/2015/10/main">
   <p1510:revLst>
-    <p1510:client id="{2EB72A00-7F79-4813-B4C2-C6564860F3F6}" v="2136" dt="2025-11-24T09:25:37.185"/>
+    <p1510:client id="{2EB72A00-7F79-4813-B4C2-C6564860F3F6}" v="2440" dt="2025-11-24T11:30:37.964"/>
   </p1510:revLst>
 </p1510:revInfo>
 </file>
@@ -302,7 +302,7 @@
   <pc:docChgLst>
     <pc:chgData name="Jean-Yves Vuillequez" userId="e7fac481abea6bd0" providerId="LiveId" clId="{79E365E8-22BC-4EC2-9606-9A9AC6CD1D22}"/>
     <pc:docChg chg="undo custSel addSld delSld modSld sldOrd">
-      <pc:chgData name="Jean-Yves Vuillequez" userId="e7fac481abea6bd0" providerId="LiveId" clId="{79E365E8-22BC-4EC2-9606-9A9AC6CD1D22}" dt="2025-11-24T09:28:51.221" v="7814" actId="1076"/>
+      <pc:chgData name="Jean-Yves Vuillequez" userId="e7fac481abea6bd0" providerId="LiveId" clId="{79E365E8-22BC-4EC2-9606-9A9AC6CD1D22}" dt="2025-11-24T11:30:37.964" v="8326" actId="1076"/>
       <pc:docMkLst>
         <pc:docMk/>
       </pc:docMkLst>
@@ -605,7 +605,7 @@
         </pc:spChg>
       </pc:sldChg>
       <pc:sldChg chg="addSp delSp modSp add mod ord delAnim modAnim modNotesTx">
-        <pc:chgData name="Jean-Yves Vuillequez" userId="e7fac481abea6bd0" providerId="LiveId" clId="{79E365E8-22BC-4EC2-9606-9A9AC6CD1D22}" dt="2025-11-24T08:29:20.359" v="7736"/>
+        <pc:chgData name="Jean-Yves Vuillequez" userId="e7fac481abea6bd0" providerId="LiveId" clId="{79E365E8-22BC-4EC2-9606-9A9AC6CD1D22}" dt="2025-11-24T11:30:37.964" v="8326" actId="1076"/>
         <pc:sldMkLst>
           <pc:docMk/>
           <pc:sldMk cId="1821755839" sldId="274"/>
@@ -619,7 +619,7 @@
           </ac:spMkLst>
         </pc:spChg>
         <pc:spChg chg="add mod">
-          <ac:chgData name="Jean-Yves Vuillequez" userId="e7fac481abea6bd0" providerId="LiveId" clId="{79E365E8-22BC-4EC2-9606-9A9AC6CD1D22}" dt="2025-11-23T08:59:51.254" v="7715" actId="14100"/>
+          <ac:chgData name="Jean-Yves Vuillequez" userId="e7fac481abea6bd0" providerId="LiveId" clId="{79E365E8-22BC-4EC2-9606-9A9AC6CD1D22}" dt="2025-11-24T11:30:09.628" v="8314" actId="14100"/>
           <ac:spMkLst>
             <pc:docMk/>
             <pc:sldMk cId="1821755839" sldId="274"/>
@@ -627,7 +627,7 @@
           </ac:spMkLst>
         </pc:spChg>
         <pc:spChg chg="add mod">
-          <ac:chgData name="Jean-Yves Vuillequez" userId="e7fac481abea6bd0" providerId="LiveId" clId="{79E365E8-22BC-4EC2-9606-9A9AC6CD1D22}" dt="2025-11-22T09:16:55.604" v="7240" actId="1035"/>
+          <ac:chgData name="Jean-Yves Vuillequez" userId="e7fac481abea6bd0" providerId="LiveId" clId="{79E365E8-22BC-4EC2-9606-9A9AC6CD1D22}" dt="2025-11-24T10:42:29.706" v="8024" actId="164"/>
           <ac:spMkLst>
             <pc:docMk/>
             <pc:sldMk cId="1821755839" sldId="274"/>
@@ -635,11 +635,27 @@
           </ac:spMkLst>
         </pc:spChg>
         <pc:spChg chg="add mod">
-          <ac:chgData name="Jean-Yves Vuillequez" userId="e7fac481abea6bd0" providerId="LiveId" clId="{79E365E8-22BC-4EC2-9606-9A9AC6CD1D22}" dt="2025-11-22T18:17:05.681" v="7617" actId="1076"/>
+          <ac:chgData name="Jean-Yves Vuillequez" userId="e7fac481abea6bd0" providerId="LiveId" clId="{79E365E8-22BC-4EC2-9606-9A9AC6CD1D22}" dt="2025-11-24T10:41:51.408" v="8021" actId="1076"/>
           <ac:spMkLst>
             <pc:docMk/>
             <pc:sldMk cId="1821755839" sldId="274"/>
             <ac:spMk id="5" creationId="{564CE1A9-869C-774B-0E58-18DB76A3FCD2}"/>
+          </ac:spMkLst>
+        </pc:spChg>
+        <pc:spChg chg="add del mod">
+          <ac:chgData name="Jean-Yves Vuillequez" userId="e7fac481abea6bd0" providerId="LiveId" clId="{79E365E8-22BC-4EC2-9606-9A9AC6CD1D22}" dt="2025-11-24T11:14:50.738" v="8282" actId="478"/>
+          <ac:spMkLst>
+            <pc:docMk/>
+            <pc:sldMk cId="1821755839" sldId="274"/>
+            <ac:spMk id="7" creationId="{6D06EF0E-A17A-1744-5FF9-9D4CD5E1F964}"/>
+          </ac:spMkLst>
+        </pc:spChg>
+        <pc:spChg chg="add del mod">
+          <ac:chgData name="Jean-Yves Vuillequez" userId="e7fac481abea6bd0" providerId="LiveId" clId="{79E365E8-22BC-4EC2-9606-9A9AC6CD1D22}" dt="2025-11-24T11:10:41.028" v="8249" actId="478"/>
+          <ac:spMkLst>
+            <pc:docMk/>
+            <pc:sldMk cId="1821755839" sldId="274"/>
+            <ac:spMk id="8" creationId="{6C567287-A0C5-DA9A-1CC9-83D899179884}"/>
           </ac:spMkLst>
         </pc:spChg>
         <pc:spChg chg="add mod ord">
@@ -651,15 +667,15 @@
           </ac:spMkLst>
         </pc:spChg>
         <pc:spChg chg="add mod ord">
-          <ac:chgData name="Jean-Yves Vuillequez" userId="e7fac481abea6bd0" providerId="LiveId" clId="{79E365E8-22BC-4EC2-9606-9A9AC6CD1D22}" dt="2025-11-22T08:13:32.305" v="7198" actId="14100"/>
+          <ac:chgData name="Jean-Yves Vuillequez" userId="e7fac481abea6bd0" providerId="LiveId" clId="{79E365E8-22BC-4EC2-9606-9A9AC6CD1D22}" dt="2025-11-24T10:41:51.408" v="8021" actId="1076"/>
           <ac:spMkLst>
             <pc:docMk/>
             <pc:sldMk cId="1821755839" sldId="274"/>
             <ac:spMk id="22" creationId="{55F95513-FB46-9FE4-91D4-34DF9BFEC6C4}"/>
           </ac:spMkLst>
         </pc:spChg>
-        <pc:spChg chg="add mod">
-          <ac:chgData name="Jean-Yves Vuillequez" userId="e7fac481abea6bd0" providerId="LiveId" clId="{79E365E8-22BC-4EC2-9606-9A9AC6CD1D22}" dt="2025-11-22T18:16:36.285" v="7612" actId="1076"/>
+        <pc:spChg chg="add mod topLvl">
+          <ac:chgData name="Jean-Yves Vuillequez" userId="e7fac481abea6bd0" providerId="LiveId" clId="{79E365E8-22BC-4EC2-9606-9A9AC6CD1D22}" dt="2025-11-24T10:58:15.516" v="8147" actId="165"/>
           <ac:spMkLst>
             <pc:docMk/>
             <pc:sldMk cId="1821755839" sldId="274"/>
@@ -667,7 +683,7 @@
           </ac:spMkLst>
         </pc:spChg>
         <pc:spChg chg="add mod ord">
-          <ac:chgData name="Jean-Yves Vuillequez" userId="e7fac481abea6bd0" providerId="LiveId" clId="{79E365E8-22BC-4EC2-9606-9A9AC6CD1D22}" dt="2025-11-22T08:13:32.305" v="7198" actId="14100"/>
+          <ac:chgData name="Jean-Yves Vuillequez" userId="e7fac481abea6bd0" providerId="LiveId" clId="{79E365E8-22BC-4EC2-9606-9A9AC6CD1D22}" dt="2025-11-24T10:42:29.706" v="8024" actId="164"/>
           <ac:spMkLst>
             <pc:docMk/>
             <pc:sldMk cId="1821755839" sldId="274"/>
@@ -675,7 +691,7 @@
           </ac:spMkLst>
         </pc:spChg>
         <pc:spChg chg="add mod">
-          <ac:chgData name="Jean-Yves Vuillequez" userId="e7fac481abea6bd0" providerId="LiveId" clId="{79E365E8-22BC-4EC2-9606-9A9AC6CD1D22}" dt="2025-11-22T18:09:50.323" v="7601" actId="20577"/>
+          <ac:chgData name="Jean-Yves Vuillequez" userId="e7fac481abea6bd0" providerId="LiveId" clId="{79E365E8-22BC-4EC2-9606-9A9AC6CD1D22}" dt="2025-11-24T11:07:38.610" v="8240" actId="1076"/>
           <ac:spMkLst>
             <pc:docMk/>
             <pc:sldMk cId="1821755839" sldId="274"/>
@@ -683,23 +699,39 @@
           </ac:spMkLst>
         </pc:spChg>
         <pc:spChg chg="add mod">
-          <ac:chgData name="Jean-Yves Vuillequez" userId="e7fac481abea6bd0" providerId="LiveId" clId="{79E365E8-22BC-4EC2-9606-9A9AC6CD1D22}" dt="2025-11-22T18:22:04.333" v="7677" actId="20577"/>
+          <ac:chgData name="Jean-Yves Vuillequez" userId="e7fac481abea6bd0" providerId="LiveId" clId="{79E365E8-22BC-4EC2-9606-9A9AC6CD1D22}" dt="2025-11-24T11:11:22.983" v="8258" actId="1076"/>
           <ac:spMkLst>
             <pc:docMk/>
             <pc:sldMk cId="1821755839" sldId="274"/>
             <ac:spMk id="32" creationId="{746A74A5-8390-A9B2-0686-BA8885C4CDA4}"/>
           </ac:spMkLst>
         </pc:spChg>
+        <pc:spChg chg="add mod ord">
+          <ac:chgData name="Jean-Yves Vuillequez" userId="e7fac481abea6bd0" providerId="LiveId" clId="{79E365E8-22BC-4EC2-9606-9A9AC6CD1D22}" dt="2025-11-24T11:18:34.857" v="8293" actId="167"/>
+          <ac:spMkLst>
+            <pc:docMk/>
+            <pc:sldMk cId="1821755839" sldId="274"/>
+            <ac:spMk id="39" creationId="{AEAEB6F6-E6B3-2BA6-860A-9983C6A790DD}"/>
+          </ac:spMkLst>
+        </pc:spChg>
         <pc:spChg chg="add mod topLvl">
-          <ac:chgData name="Jean-Yves Vuillequez" userId="e7fac481abea6bd0" providerId="LiveId" clId="{79E365E8-22BC-4EC2-9606-9A9AC6CD1D22}" dt="2025-11-22T18:03:46.416" v="7531" actId="165"/>
+          <ac:chgData name="Jean-Yves Vuillequez" userId="e7fac481abea6bd0" providerId="LiveId" clId="{79E365E8-22BC-4EC2-9606-9A9AC6CD1D22}" dt="2025-11-24T10:58:15.516" v="8147" actId="165"/>
           <ac:spMkLst>
             <pc:docMk/>
             <pc:sldMk cId="1821755839" sldId="274"/>
             <ac:spMk id="44" creationId="{682088E1-064C-5214-7A97-A059E4869B55}"/>
           </ac:spMkLst>
         </pc:spChg>
+        <pc:spChg chg="mod">
+          <ac:chgData name="Jean-Yves Vuillequez" userId="e7fac481abea6bd0" providerId="LiveId" clId="{79E365E8-22BC-4EC2-9606-9A9AC6CD1D22}" dt="2025-11-24T11:10:49.345" v="8251"/>
+          <ac:spMkLst>
+            <pc:docMk/>
+            <pc:sldMk cId="1821755839" sldId="274"/>
+            <ac:spMk id="45" creationId="{D7F593C2-1139-09D7-2E16-9F2706484D71}"/>
+          </ac:spMkLst>
+        </pc:spChg>
         <pc:spChg chg="add mod ord topLvl">
-          <ac:chgData name="Jean-Yves Vuillequez" userId="e7fac481abea6bd0" providerId="LiveId" clId="{79E365E8-22BC-4EC2-9606-9A9AC6CD1D22}" dt="2025-11-22T18:21:31.528" v="7661" actId="14100"/>
+          <ac:chgData name="Jean-Yves Vuillequez" userId="e7fac481abea6bd0" providerId="LiveId" clId="{79E365E8-22BC-4EC2-9606-9A9AC6CD1D22}" dt="2025-11-24T10:57:22.450" v="8107" actId="1076"/>
           <ac:spMkLst>
             <pc:docMk/>
             <pc:sldMk cId="1821755839" sldId="274"/>
@@ -707,7 +739,7 @@
           </ac:spMkLst>
         </pc:spChg>
         <pc:spChg chg="add mod">
-          <ac:chgData name="Jean-Yves Vuillequez" userId="e7fac481abea6bd0" providerId="LiveId" clId="{79E365E8-22BC-4EC2-9606-9A9AC6CD1D22}" dt="2025-11-22T18:17:34.404" v="7627" actId="1036"/>
+          <ac:chgData name="Jean-Yves Vuillequez" userId="e7fac481abea6bd0" providerId="LiveId" clId="{79E365E8-22BC-4EC2-9606-9A9AC6CD1D22}" dt="2025-11-24T10:57:22.450" v="8107" actId="1076"/>
           <ac:spMkLst>
             <pc:docMk/>
             <pc:sldMk cId="1821755839" sldId="274"/>
@@ -715,15 +747,15 @@
           </ac:spMkLst>
         </pc:spChg>
         <pc:spChg chg="add mod">
-          <ac:chgData name="Jean-Yves Vuillequez" userId="e7fac481abea6bd0" providerId="LiveId" clId="{79E365E8-22BC-4EC2-9606-9A9AC6CD1D22}" dt="2025-11-22T18:17:34.404" v="7627" actId="1036"/>
+          <ac:chgData name="Jean-Yves Vuillequez" userId="e7fac481abea6bd0" providerId="LiveId" clId="{79E365E8-22BC-4EC2-9606-9A9AC6CD1D22}" dt="2025-11-24T10:57:22.450" v="8107" actId="1076"/>
           <ac:spMkLst>
             <pc:docMk/>
             <pc:sldMk cId="1821755839" sldId="274"/>
             <ac:spMk id="48" creationId="{FE31E2F0-6B8A-B0EE-9044-0597F28AE28A}"/>
           </ac:spMkLst>
         </pc:spChg>
-        <pc:spChg chg="add mod">
-          <ac:chgData name="Jean-Yves Vuillequez" userId="e7fac481abea6bd0" providerId="LiveId" clId="{79E365E8-22BC-4EC2-9606-9A9AC6CD1D22}" dt="2025-11-22T18:17:34.404" v="7627" actId="1036"/>
+        <pc:spChg chg="add mod topLvl">
+          <ac:chgData name="Jean-Yves Vuillequez" userId="e7fac481abea6bd0" providerId="LiveId" clId="{79E365E8-22BC-4EC2-9606-9A9AC6CD1D22}" dt="2025-11-24T10:58:15.516" v="8147" actId="165"/>
           <ac:spMkLst>
             <pc:docMk/>
             <pc:sldMk cId="1821755839" sldId="274"/>
@@ -731,7 +763,7 @@
           </ac:spMkLst>
         </pc:spChg>
         <pc:spChg chg="add mod">
-          <ac:chgData name="Jean-Yves Vuillequez" userId="e7fac481abea6bd0" providerId="LiveId" clId="{79E365E8-22BC-4EC2-9606-9A9AC6CD1D22}" dt="2025-11-22T18:17:34.404" v="7627" actId="1036"/>
+          <ac:chgData name="Jean-Yves Vuillequez" userId="e7fac481abea6bd0" providerId="LiveId" clId="{79E365E8-22BC-4EC2-9606-9A9AC6CD1D22}" dt="2025-11-24T10:57:22.450" v="8107" actId="1076"/>
           <ac:spMkLst>
             <pc:docMk/>
             <pc:sldMk cId="1821755839" sldId="274"/>
@@ -739,15 +771,15 @@
           </ac:spMkLst>
         </pc:spChg>
         <pc:spChg chg="add mod">
-          <ac:chgData name="Jean-Yves Vuillequez" userId="e7fac481abea6bd0" providerId="LiveId" clId="{79E365E8-22BC-4EC2-9606-9A9AC6CD1D22}" dt="2025-11-22T18:17:34.404" v="7627" actId="1036"/>
+          <ac:chgData name="Jean-Yves Vuillequez" userId="e7fac481abea6bd0" providerId="LiveId" clId="{79E365E8-22BC-4EC2-9606-9A9AC6CD1D22}" dt="2025-11-24T10:57:22.450" v="8107" actId="1076"/>
           <ac:spMkLst>
             <pc:docMk/>
             <pc:sldMk cId="1821755839" sldId="274"/>
             <ac:spMk id="52" creationId="{7A45A31B-42CC-CB8B-442E-3576FB243381}"/>
           </ac:spMkLst>
         </pc:spChg>
-        <pc:spChg chg="add mod">
-          <ac:chgData name="Jean-Yves Vuillequez" userId="e7fac481abea6bd0" providerId="LiveId" clId="{79E365E8-22BC-4EC2-9606-9A9AC6CD1D22}" dt="2025-11-22T18:31:30.300" v="7714" actId="14100"/>
+        <pc:spChg chg="add mod topLvl">
+          <ac:chgData name="Jean-Yves Vuillequez" userId="e7fac481abea6bd0" providerId="LiveId" clId="{79E365E8-22BC-4EC2-9606-9A9AC6CD1D22}" dt="2025-11-24T11:12:15.409" v="8277" actId="208"/>
           <ac:spMkLst>
             <pc:docMk/>
             <pc:sldMk cId="1821755839" sldId="274"/>
@@ -755,7 +787,7 @@
           </ac:spMkLst>
         </pc:spChg>
         <pc:spChg chg="add mod topLvl">
-          <ac:chgData name="Jean-Yves Vuillequez" userId="e7fac481abea6bd0" providerId="LiveId" clId="{79E365E8-22BC-4EC2-9606-9A9AC6CD1D22}" dt="2025-11-22T18:16:36.285" v="7612" actId="1076"/>
+          <ac:chgData name="Jean-Yves Vuillequez" userId="e7fac481abea6bd0" providerId="LiveId" clId="{79E365E8-22BC-4EC2-9606-9A9AC6CD1D22}" dt="2025-11-24T10:58:15.516" v="8147" actId="165"/>
           <ac:spMkLst>
             <pc:docMk/>
             <pc:sldMk cId="1821755839" sldId="274"/>
@@ -763,7 +795,7 @@
           </ac:spMkLst>
         </pc:spChg>
         <pc:spChg chg="add mod topLvl">
-          <ac:chgData name="Jean-Yves Vuillequez" userId="e7fac481abea6bd0" providerId="LiveId" clId="{79E365E8-22BC-4EC2-9606-9A9AC6CD1D22}" dt="2025-11-22T18:16:36.285" v="7612" actId="1076"/>
+          <ac:chgData name="Jean-Yves Vuillequez" userId="e7fac481abea6bd0" providerId="LiveId" clId="{79E365E8-22BC-4EC2-9606-9A9AC6CD1D22}" dt="2025-11-24T10:58:15.516" v="8147" actId="165"/>
           <ac:spMkLst>
             <pc:docMk/>
             <pc:sldMk cId="1821755839" sldId="274"/>
@@ -771,7 +803,7 @@
           </ac:spMkLst>
         </pc:spChg>
         <pc:spChg chg="add mod topLvl">
-          <ac:chgData name="Jean-Yves Vuillequez" userId="e7fac481abea6bd0" providerId="LiveId" clId="{79E365E8-22BC-4EC2-9606-9A9AC6CD1D22}" dt="2025-11-22T18:16:36.285" v="7612" actId="1076"/>
+          <ac:chgData name="Jean-Yves Vuillequez" userId="e7fac481abea6bd0" providerId="LiveId" clId="{79E365E8-22BC-4EC2-9606-9A9AC6CD1D22}" dt="2025-11-24T10:58:15.516" v="8147" actId="165"/>
           <ac:spMkLst>
             <pc:docMk/>
             <pc:sldMk cId="1821755839" sldId="274"/>
@@ -779,7 +811,7 @@
           </ac:spMkLst>
         </pc:spChg>
         <pc:spChg chg="add mod topLvl">
-          <ac:chgData name="Jean-Yves Vuillequez" userId="e7fac481abea6bd0" providerId="LiveId" clId="{79E365E8-22BC-4EC2-9606-9A9AC6CD1D22}" dt="2025-11-22T18:16:36.285" v="7612" actId="1076"/>
+          <ac:chgData name="Jean-Yves Vuillequez" userId="e7fac481abea6bd0" providerId="LiveId" clId="{79E365E8-22BC-4EC2-9606-9A9AC6CD1D22}" dt="2025-11-24T10:55:28.761" v="8105" actId="1076"/>
           <ac:spMkLst>
             <pc:docMk/>
             <pc:sldMk cId="1821755839" sldId="274"/>
@@ -787,7 +819,7 @@
           </ac:spMkLst>
         </pc:spChg>
         <pc:spChg chg="add mod topLvl">
-          <ac:chgData name="Jean-Yves Vuillequez" userId="e7fac481abea6bd0" providerId="LiveId" clId="{79E365E8-22BC-4EC2-9606-9A9AC6CD1D22}" dt="2025-11-22T09:50:17.468" v="7485" actId="165"/>
+          <ac:chgData name="Jean-Yves Vuillequez" userId="e7fac481abea6bd0" providerId="LiveId" clId="{79E365E8-22BC-4EC2-9606-9A9AC6CD1D22}" dt="2025-11-24T11:30:35.012" v="8324" actId="1076"/>
           <ac:spMkLst>
             <pc:docMk/>
             <pc:sldMk cId="1821755839" sldId="274"/>
@@ -795,7 +827,7 @@
           </ac:spMkLst>
         </pc:spChg>
         <pc:spChg chg="add mod topLvl">
-          <ac:chgData name="Jean-Yves Vuillequez" userId="e7fac481abea6bd0" providerId="LiveId" clId="{79E365E8-22BC-4EC2-9606-9A9AC6CD1D22}" dt="2025-11-22T09:50:17.468" v="7485" actId="165"/>
+          <ac:chgData name="Jean-Yves Vuillequez" userId="e7fac481abea6bd0" providerId="LiveId" clId="{79E365E8-22BC-4EC2-9606-9A9AC6CD1D22}" dt="2025-11-24T11:30:32.128" v="8323" actId="1076"/>
           <ac:spMkLst>
             <pc:docMk/>
             <pc:sldMk cId="1821755839" sldId="274"/>
@@ -803,7 +835,7 @@
           </ac:spMkLst>
         </pc:spChg>
         <pc:spChg chg="add mod topLvl">
-          <ac:chgData name="Jean-Yves Vuillequez" userId="e7fac481abea6bd0" providerId="LiveId" clId="{79E365E8-22BC-4EC2-9606-9A9AC6CD1D22}" dt="2025-11-22T09:50:17.468" v="7485" actId="165"/>
+          <ac:chgData name="Jean-Yves Vuillequez" userId="e7fac481abea6bd0" providerId="LiveId" clId="{79E365E8-22BC-4EC2-9606-9A9AC6CD1D22}" dt="2025-11-24T11:30:37.964" v="8326" actId="1076"/>
           <ac:spMkLst>
             <pc:docMk/>
             <pc:sldMk cId="1821755839" sldId="274"/>
@@ -811,7 +843,7 @@
           </ac:spMkLst>
         </pc:spChg>
         <pc:spChg chg="add mod topLvl">
-          <ac:chgData name="Jean-Yves Vuillequez" userId="e7fac481abea6bd0" providerId="LiveId" clId="{79E365E8-22BC-4EC2-9606-9A9AC6CD1D22}" dt="2025-11-22T18:30:42.838" v="7705" actId="14100"/>
+          <ac:chgData name="Jean-Yves Vuillequez" userId="e7fac481abea6bd0" providerId="LiveId" clId="{79E365E8-22BC-4EC2-9606-9A9AC6CD1D22}" dt="2025-11-24T11:08:02.246" v="8242" actId="1076"/>
           <ac:spMkLst>
             <pc:docMk/>
             <pc:sldMk cId="1821755839" sldId="274"/>
@@ -826,12 +858,36 @@
             <ac:spMk id="73" creationId="{33C41871-317D-BA64-26E2-EBEE7A51AE73}"/>
           </ac:spMkLst>
         </pc:spChg>
+        <pc:spChg chg="mod">
+          <ac:chgData name="Jean-Yves Vuillequez" userId="e7fac481abea6bd0" providerId="LiveId" clId="{79E365E8-22BC-4EC2-9606-9A9AC6CD1D22}" dt="2025-11-24T11:15:07.707" v="8283"/>
+          <ac:spMkLst>
+            <pc:docMk/>
+            <pc:sldMk cId="1821755839" sldId="274"/>
+            <ac:spMk id="74" creationId="{26095706-054B-32B8-76C9-580C8A4D3C09}"/>
+          </ac:spMkLst>
+        </pc:spChg>
         <pc:spChg chg="add mod">
-          <ac:chgData name="Jean-Yves Vuillequez" userId="e7fac481abea6bd0" providerId="LiveId" clId="{79E365E8-22BC-4EC2-9606-9A9AC6CD1D22}" dt="2025-11-22T18:16:36.285" v="7612" actId="1076"/>
+          <ac:chgData name="Jean-Yves Vuillequez" userId="e7fac481abea6bd0" providerId="LiveId" clId="{79E365E8-22BC-4EC2-9606-9A9AC6CD1D22}" dt="2025-11-24T10:58:15.516" v="8147" actId="165"/>
           <ac:spMkLst>
             <pc:docMk/>
             <pc:sldMk cId="1821755839" sldId="274"/>
             <ac:spMk id="76" creationId="{0137AD1F-A369-4FCE-AD69-964680B420B5}"/>
+          </ac:spMkLst>
+        </pc:spChg>
+        <pc:spChg chg="mod">
+          <ac:chgData name="Jean-Yves Vuillequez" userId="e7fac481abea6bd0" providerId="LiveId" clId="{79E365E8-22BC-4EC2-9606-9A9AC6CD1D22}" dt="2025-11-24T11:15:14.203" v="8284"/>
+          <ac:spMkLst>
+            <pc:docMk/>
+            <pc:sldMk cId="1821755839" sldId="274"/>
+            <ac:spMk id="79" creationId="{61FAC2B4-497C-99AF-7507-9699F89C2CB8}"/>
+          </ac:spMkLst>
+        </pc:spChg>
+        <pc:spChg chg="mod">
+          <ac:chgData name="Jean-Yves Vuillequez" userId="e7fac481abea6bd0" providerId="LiveId" clId="{79E365E8-22BC-4EC2-9606-9A9AC6CD1D22}" dt="2025-11-24T11:15:36.398" v="8286" actId="571"/>
+          <ac:spMkLst>
+            <pc:docMk/>
+            <pc:sldMk cId="1821755839" sldId="274"/>
+            <ac:spMk id="82" creationId="{18C06A43-2495-F8A2-C1D3-AC93D4524D92}"/>
           </ac:spMkLst>
         </pc:spChg>
         <pc:spChg chg="mod">
@@ -843,7 +899,7 @@
           </ac:spMkLst>
         </pc:spChg>
         <pc:spChg chg="add mod topLvl">
-          <ac:chgData name="Jean-Yves Vuillequez" userId="e7fac481abea6bd0" providerId="LiveId" clId="{79E365E8-22BC-4EC2-9606-9A9AC6CD1D22}" dt="2025-11-22T18:30:48.419" v="7706" actId="1076"/>
+          <ac:chgData name="Jean-Yves Vuillequez" userId="e7fac481abea6bd0" providerId="LiveId" clId="{79E365E8-22BC-4EC2-9606-9A9AC6CD1D22}" dt="2025-11-24T11:30:01.793" v="8313" actId="1076"/>
           <ac:spMkLst>
             <pc:docMk/>
             <pc:sldMk cId="1821755839" sldId="274"/>
@@ -851,7 +907,7 @@
           </ac:spMkLst>
         </pc:spChg>
         <pc:spChg chg="add mod topLvl">
-          <ac:chgData name="Jean-Yves Vuillequez" userId="e7fac481abea6bd0" providerId="LiveId" clId="{79E365E8-22BC-4EC2-9606-9A9AC6CD1D22}" dt="2025-11-22T18:16:36.285" v="7612" actId="1076"/>
+          <ac:chgData name="Jean-Yves Vuillequez" userId="e7fac481abea6bd0" providerId="LiveId" clId="{79E365E8-22BC-4EC2-9606-9A9AC6CD1D22}" dt="2025-11-24T10:58:15.516" v="8147" actId="165"/>
           <ac:spMkLst>
             <pc:docMk/>
             <pc:sldMk cId="1821755839" sldId="274"/>
@@ -867,7 +923,7 @@
           </ac:spMkLst>
         </pc:spChg>
         <pc:spChg chg="add mod topLvl">
-          <ac:chgData name="Jean-Yves Vuillequez" userId="e7fac481abea6bd0" providerId="LiveId" clId="{79E365E8-22BC-4EC2-9606-9A9AC6CD1D22}" dt="2025-11-22T18:16:36.285" v="7612" actId="1076"/>
+          <ac:chgData name="Jean-Yves Vuillequez" userId="e7fac481abea6bd0" providerId="LiveId" clId="{79E365E8-22BC-4EC2-9606-9A9AC6CD1D22}" dt="2025-11-24T10:58:15.516" v="8147" actId="165"/>
           <ac:spMkLst>
             <pc:docMk/>
             <pc:sldMk cId="1821755839" sldId="274"/>
@@ -875,11 +931,43 @@
           </ac:spMkLst>
         </pc:spChg>
         <pc:grpChg chg="add mod">
-          <ac:chgData name="Jean-Yves Vuillequez" userId="e7fac481abea6bd0" providerId="LiveId" clId="{79E365E8-22BC-4EC2-9606-9A9AC6CD1D22}" dt="2025-11-22T09:49:04.487" v="7454" actId="1076"/>
+          <ac:chgData name="Jean-Yves Vuillequez" userId="e7fac481abea6bd0" providerId="LiveId" clId="{79E365E8-22BC-4EC2-9606-9A9AC6CD1D22}" dt="2025-11-24T11:10:55.415" v="8253" actId="1076"/>
+          <ac:grpSpMkLst>
+            <pc:docMk/>
+            <pc:sldMk cId="1821755839" sldId="274"/>
+            <ac:grpSpMk id="42" creationId="{ABFDE930-E8FD-AEFC-C080-0E20435636B0}"/>
+          </ac:grpSpMkLst>
+        </pc:grpChg>
+        <pc:grpChg chg="add mod">
+          <ac:chgData name="Jean-Yves Vuillequez" userId="e7fac481abea6bd0" providerId="LiveId" clId="{79E365E8-22BC-4EC2-9606-9A9AC6CD1D22}" dt="2025-11-24T11:15:07.707" v="8283"/>
+          <ac:grpSpMkLst>
+            <pc:docMk/>
+            <pc:sldMk cId="1821755839" sldId="274"/>
+            <ac:grpSpMk id="72" creationId="{47EA9FF2-9DF7-7639-BD18-76EE2D042084}"/>
+          </ac:grpSpMkLst>
+        </pc:grpChg>
+        <pc:grpChg chg="add mod">
+          <ac:chgData name="Jean-Yves Vuillequez" userId="e7fac481abea6bd0" providerId="LiveId" clId="{79E365E8-22BC-4EC2-9606-9A9AC6CD1D22}" dt="2025-11-24T11:16:04.837" v="8291" actId="1076"/>
+          <ac:grpSpMkLst>
+            <pc:docMk/>
+            <pc:sldMk cId="1821755839" sldId="274"/>
+            <ac:grpSpMk id="77" creationId="{09848BCD-B655-BAB2-9F3C-2A743C138D6B}"/>
+          </ac:grpSpMkLst>
+        </pc:grpChg>
+        <pc:grpChg chg="add mod ord">
+          <ac:chgData name="Jean-Yves Vuillequez" userId="e7fac481abea6bd0" providerId="LiveId" clId="{79E365E8-22BC-4EC2-9606-9A9AC6CD1D22}" dt="2025-11-24T11:14:25.114" v="8281" actId="166"/>
           <ac:grpSpMkLst>
             <pc:docMk/>
             <pc:sldMk cId="1821755839" sldId="274"/>
             <ac:grpSpMk id="78" creationId="{48BB1303-220D-775F-BC97-35D0BC10D7AC}"/>
+          </ac:grpSpMkLst>
+        </pc:grpChg>
+        <pc:grpChg chg="add del mod">
+          <ac:chgData name="Jean-Yves Vuillequez" userId="e7fac481abea6bd0" providerId="LiveId" clId="{79E365E8-22BC-4EC2-9606-9A9AC6CD1D22}" dt="2025-11-24T11:16:06.972" v="8292" actId="478"/>
+          <ac:grpSpMkLst>
+            <pc:docMk/>
+            <pc:sldMk cId="1821755839" sldId="274"/>
+            <ac:grpSpMk id="81" creationId="{761C14D8-9764-3A3C-A6F0-A9FF5EFCBD6B}"/>
           </ac:grpSpMkLst>
         </pc:grpChg>
         <pc:picChg chg="add mod">
@@ -891,11 +979,27 @@
           </ac:picMkLst>
         </pc:picChg>
         <pc:picChg chg="add mod">
-          <ac:chgData name="Jean-Yves Vuillequez" userId="e7fac481abea6bd0" providerId="LiveId" clId="{79E365E8-22BC-4EC2-9606-9A9AC6CD1D22}" dt="2025-11-22T18:16:36.285" v="7612" actId="1076"/>
+          <ac:chgData name="Jean-Yves Vuillequez" userId="e7fac481abea6bd0" providerId="LiveId" clId="{79E365E8-22BC-4EC2-9606-9A9AC6CD1D22}" dt="2025-11-24T10:55:28.761" v="8105" actId="1076"/>
           <ac:picMkLst>
             <pc:docMk/>
             <pc:sldMk cId="1821755839" sldId="274"/>
             <ac:picMk id="21" creationId="{174134F5-72A3-DA25-E671-C7DDD8DFA83A}"/>
+          </ac:picMkLst>
+        </pc:picChg>
+        <pc:picChg chg="add del mod">
+          <ac:chgData name="Jean-Yves Vuillequez" userId="e7fac481abea6bd0" providerId="LiveId" clId="{79E365E8-22BC-4EC2-9606-9A9AC6CD1D22}" dt="2025-11-24T11:09:57.506" v="8246" actId="478"/>
+          <ac:picMkLst>
+            <pc:docMk/>
+            <pc:sldMk cId="1821755839" sldId="274"/>
+            <ac:picMk id="38" creationId="{61B9E27D-C2EF-72CE-94C6-361123613D5A}"/>
+          </ac:picMkLst>
+        </pc:picChg>
+        <pc:picChg chg="add mod">
+          <ac:chgData name="Jean-Yves Vuillequez" userId="e7fac481abea6bd0" providerId="LiveId" clId="{79E365E8-22BC-4EC2-9606-9A9AC6CD1D22}" dt="2025-11-24T11:10:46.266" v="8250"/>
+          <ac:picMkLst>
+            <pc:docMk/>
+            <pc:sldMk cId="1821755839" sldId="274"/>
+            <ac:picMk id="41" creationId="{423CD652-2D44-79D0-9F09-9A9E0A116B0C}"/>
           </ac:picMkLst>
         </pc:picChg>
         <pc:picChg chg="add mod topLvl">
@@ -914,8 +1018,16 @@
             <ac:picMk id="51" creationId="{054FB5AB-F043-1139-CFA8-44C9034D1153}"/>
           </ac:picMkLst>
         </pc:picChg>
+        <pc:picChg chg="mod">
+          <ac:chgData name="Jean-Yves Vuillequez" userId="e7fac481abea6bd0" providerId="LiveId" clId="{79E365E8-22BC-4EC2-9606-9A9AC6CD1D22}" dt="2025-11-24T11:10:49.345" v="8251"/>
+          <ac:picMkLst>
+            <pc:docMk/>
+            <pc:sldMk cId="1821755839" sldId="274"/>
+            <ac:picMk id="59" creationId="{66E29ABD-B82C-FAB9-3744-D1866DC79A32}"/>
+          </ac:picMkLst>
+        </pc:picChg>
         <pc:picChg chg="add mod ord">
-          <ac:chgData name="Jean-Yves Vuillequez" userId="e7fac481abea6bd0" providerId="LiveId" clId="{79E365E8-22BC-4EC2-9606-9A9AC6CD1D22}" dt="2025-11-22T09:48:44.342" v="7448" actId="1076"/>
+          <ac:chgData name="Jean-Yves Vuillequez" userId="e7fac481abea6bd0" providerId="LiveId" clId="{79E365E8-22BC-4EC2-9606-9A9AC6CD1D22}" dt="2025-11-24T10:43:09.954" v="8030" actId="164"/>
           <ac:picMkLst>
             <pc:docMk/>
             <pc:sldMk cId="1821755839" sldId="274"/>
@@ -923,7 +1035,7 @@
           </ac:picMkLst>
         </pc:picChg>
         <pc:picChg chg="add mod topLvl">
-          <ac:chgData name="Jean-Yves Vuillequez" userId="e7fac481abea6bd0" providerId="LiveId" clId="{79E365E8-22BC-4EC2-9606-9A9AC6CD1D22}" dt="2025-11-22T09:50:17.468" v="7485" actId="165"/>
+          <ac:chgData name="Jean-Yves Vuillequez" userId="e7fac481abea6bd0" providerId="LiveId" clId="{79E365E8-22BC-4EC2-9606-9A9AC6CD1D22}" dt="2025-11-24T11:30:32.128" v="8323" actId="1076"/>
           <ac:picMkLst>
             <pc:docMk/>
             <pc:sldMk cId="1821755839" sldId="274"/>
@@ -931,15 +1043,39 @@
           </ac:picMkLst>
         </pc:picChg>
         <pc:picChg chg="add mod topLvl">
-          <ac:chgData name="Jean-Yves Vuillequez" userId="e7fac481abea6bd0" providerId="LiveId" clId="{79E365E8-22BC-4EC2-9606-9A9AC6CD1D22}" dt="2025-11-22T09:50:17.468" v="7485" actId="165"/>
+          <ac:chgData name="Jean-Yves Vuillequez" userId="e7fac481abea6bd0" providerId="LiveId" clId="{79E365E8-22BC-4EC2-9606-9A9AC6CD1D22}" dt="2025-11-24T11:30:37.964" v="8326" actId="1076"/>
           <ac:picMkLst>
             <pc:docMk/>
             <pc:sldMk cId="1821755839" sldId="274"/>
             <ac:picMk id="68" creationId="{6A1FE08D-DF15-8940-EAA5-98ED76914736}"/>
           </ac:picMkLst>
         </pc:picChg>
+        <pc:picChg chg="mod">
+          <ac:chgData name="Jean-Yves Vuillequez" userId="e7fac481abea6bd0" providerId="LiveId" clId="{79E365E8-22BC-4EC2-9606-9A9AC6CD1D22}" dt="2025-11-24T11:15:07.707" v="8283"/>
+          <ac:picMkLst>
+            <pc:docMk/>
+            <pc:sldMk cId="1821755839" sldId="274"/>
+            <ac:picMk id="75" creationId="{586886EB-4D25-9840-8F7B-CD58BBADAFA6}"/>
+          </ac:picMkLst>
+        </pc:picChg>
+        <pc:picChg chg="mod">
+          <ac:chgData name="Jean-Yves Vuillequez" userId="e7fac481abea6bd0" providerId="LiveId" clId="{79E365E8-22BC-4EC2-9606-9A9AC6CD1D22}" dt="2025-11-24T11:15:14.203" v="8284"/>
+          <ac:picMkLst>
+            <pc:docMk/>
+            <pc:sldMk cId="1821755839" sldId="274"/>
+            <ac:picMk id="80" creationId="{FEC09453-8329-B943-E8CD-D18A9746E3DE}"/>
+          </ac:picMkLst>
+        </pc:picChg>
+        <pc:picChg chg="mod">
+          <ac:chgData name="Jean-Yves Vuillequez" userId="e7fac481abea6bd0" providerId="LiveId" clId="{79E365E8-22BC-4EC2-9606-9A9AC6CD1D22}" dt="2025-11-24T11:15:36.398" v="8286" actId="571"/>
+          <ac:picMkLst>
+            <pc:docMk/>
+            <pc:sldMk cId="1821755839" sldId="274"/>
+            <ac:picMk id="83" creationId="{98F38E63-7956-4830-D851-BEFE1B62BA8D}"/>
+          </ac:picMkLst>
+        </pc:picChg>
         <pc:picChg chg="add mod topLvl">
-          <ac:chgData name="Jean-Yves Vuillequez" userId="e7fac481abea6bd0" providerId="LiveId" clId="{79E365E8-22BC-4EC2-9606-9A9AC6CD1D22}" dt="2025-11-22T18:30:48.419" v="7706" actId="1076"/>
+          <ac:chgData name="Jean-Yves Vuillequez" userId="e7fac481abea6bd0" providerId="LiveId" clId="{79E365E8-22BC-4EC2-9606-9A9AC6CD1D22}" dt="2025-11-24T11:30:01.793" v="8313" actId="1076"/>
           <ac:picMkLst>
             <pc:docMk/>
             <pc:sldMk cId="1821755839" sldId="274"/>
@@ -955,7 +1091,7 @@
           </ac:picMkLst>
         </pc:picChg>
         <pc:picChg chg="add mod">
-          <ac:chgData name="Jean-Yves Vuillequez" userId="e7fac481abea6bd0" providerId="LiveId" clId="{79E365E8-22BC-4EC2-9606-9A9AC6CD1D22}" dt="2025-11-22T18:09:27.039" v="7573" actId="1076"/>
+          <ac:chgData name="Jean-Yves Vuillequez" userId="e7fac481abea6bd0" providerId="LiveId" clId="{79E365E8-22BC-4EC2-9606-9A9AC6CD1D22}" dt="2025-11-24T11:11:43.683" v="8272" actId="1036"/>
           <ac:picMkLst>
             <pc:docMk/>
             <pc:sldMk cId="1821755839" sldId="274"/>
@@ -987,7 +1123,7 @@
           </ac:picMkLst>
         </pc:picChg>
         <pc:picChg chg="add mod topLvl">
-          <ac:chgData name="Jean-Yves Vuillequez" userId="e7fac481abea6bd0" providerId="LiveId" clId="{79E365E8-22BC-4EC2-9606-9A9AC6CD1D22}" dt="2025-11-22T09:50:17.468" v="7485" actId="165"/>
+          <ac:chgData name="Jean-Yves Vuillequez" userId="e7fac481abea6bd0" providerId="LiveId" clId="{79E365E8-22BC-4EC2-9606-9A9AC6CD1D22}" dt="2025-11-24T11:30:35.012" v="8324" actId="1076"/>
           <ac:picMkLst>
             <pc:docMk/>
             <pc:sldMk cId="1821755839" sldId="274"/>
@@ -1003,7 +1139,7 @@
           </ac:picMkLst>
         </pc:picChg>
         <pc:picChg chg="add mod topLvl">
-          <ac:chgData name="Jean-Yves Vuillequez" userId="e7fac481abea6bd0" providerId="LiveId" clId="{79E365E8-22BC-4EC2-9606-9A9AC6CD1D22}" dt="2025-11-22T18:21:35.229" v="7662" actId="1076"/>
+          <ac:chgData name="Jean-Yves Vuillequez" userId="e7fac481abea6bd0" providerId="LiveId" clId="{79E365E8-22BC-4EC2-9606-9A9AC6CD1D22}" dt="2025-11-24T10:57:22.450" v="8107" actId="1076"/>
           <ac:picMkLst>
             <pc:docMk/>
             <pc:sldMk cId="1821755839" sldId="274"/>
@@ -1011,7 +1147,7 @@
           </ac:picMkLst>
         </pc:picChg>
         <pc:picChg chg="add mod">
-          <ac:chgData name="Jean-Yves Vuillequez" userId="e7fac481abea6bd0" providerId="LiveId" clId="{79E365E8-22BC-4EC2-9606-9A9AC6CD1D22}" dt="2025-11-22T18:18:03.181" v="7649" actId="1038"/>
+          <ac:chgData name="Jean-Yves Vuillequez" userId="e7fac481abea6bd0" providerId="LiveId" clId="{79E365E8-22BC-4EC2-9606-9A9AC6CD1D22}" dt="2025-11-24T10:57:22.450" v="8107" actId="1076"/>
           <ac:picMkLst>
             <pc:docMk/>
             <pc:sldMk cId="1821755839" sldId="274"/>
@@ -1019,7 +1155,7 @@
           </ac:picMkLst>
         </pc:picChg>
         <pc:picChg chg="add mod">
-          <ac:chgData name="Jean-Yves Vuillequez" userId="e7fac481abea6bd0" providerId="LiveId" clId="{79E365E8-22BC-4EC2-9606-9A9AC6CD1D22}" dt="2025-11-22T18:18:03.181" v="7649" actId="1038"/>
+          <ac:chgData name="Jean-Yves Vuillequez" userId="e7fac481abea6bd0" providerId="LiveId" clId="{79E365E8-22BC-4EC2-9606-9A9AC6CD1D22}" dt="2025-11-24T10:41:03.494" v="8014" actId="1076"/>
           <ac:picMkLst>
             <pc:docMk/>
             <pc:sldMk cId="1821755839" sldId="274"/>
@@ -1027,7 +1163,7 @@
           </ac:picMkLst>
         </pc:picChg>
         <pc:picChg chg="add mod topLvl">
-          <ac:chgData name="Jean-Yves Vuillequez" userId="e7fac481abea6bd0" providerId="LiveId" clId="{79E365E8-22BC-4EC2-9606-9A9AC6CD1D22}" dt="2025-11-22T09:27:45.100" v="7313" actId="1076"/>
+          <ac:chgData name="Jean-Yves Vuillequez" userId="e7fac481abea6bd0" providerId="LiveId" clId="{79E365E8-22BC-4EC2-9606-9A9AC6CD1D22}" dt="2025-11-24T10:43:36.896" v="8031" actId="164"/>
           <ac:picMkLst>
             <pc:docMk/>
             <pc:sldMk cId="1821755839" sldId="274"/>
@@ -1035,7 +1171,7 @@
           </ac:picMkLst>
         </pc:picChg>
         <pc:picChg chg="add mod">
-          <ac:chgData name="Jean-Yves Vuillequez" userId="e7fac481abea6bd0" providerId="LiveId" clId="{79E365E8-22BC-4EC2-9606-9A9AC6CD1D22}" dt="2025-11-22T18:17:34.404" v="7627" actId="1036"/>
+          <ac:chgData name="Jean-Yves Vuillequez" userId="e7fac481abea6bd0" providerId="LiveId" clId="{79E365E8-22BC-4EC2-9606-9A9AC6CD1D22}" dt="2025-11-24T10:41:03.494" v="8014" actId="1076"/>
           <ac:picMkLst>
             <pc:docMk/>
             <pc:sldMk cId="1821755839" sldId="274"/>
@@ -1043,7 +1179,7 @@
           </ac:picMkLst>
         </pc:picChg>
         <pc:picChg chg="add mod">
-          <ac:chgData name="Jean-Yves Vuillequez" userId="e7fac481abea6bd0" providerId="LiveId" clId="{79E365E8-22BC-4EC2-9606-9A9AC6CD1D22}" dt="2025-11-22T10:36:12.902" v="7491" actId="1076"/>
+          <ac:chgData name="Jean-Yves Vuillequez" userId="e7fac481abea6bd0" providerId="LiveId" clId="{79E365E8-22BC-4EC2-9606-9A9AC6CD1D22}" dt="2025-11-24T11:29:41.163" v="8310" actId="1036"/>
           <ac:picMkLst>
             <pc:docMk/>
             <pc:sldMk cId="1821755839" sldId="274"/>
@@ -1075,7 +1211,15 @@
           </ac:cxnSpMkLst>
         </pc:cxnChg>
         <pc:cxnChg chg="add mod">
-          <ac:chgData name="Jean-Yves Vuillequez" userId="e7fac481abea6bd0" providerId="LiveId" clId="{79E365E8-22BC-4EC2-9606-9A9AC6CD1D22}" dt="2025-11-22T18:26:55.253" v="7703" actId="1582"/>
+          <ac:chgData name="Jean-Yves Vuillequez" userId="e7fac481abea6bd0" providerId="LiveId" clId="{79E365E8-22BC-4EC2-9606-9A9AC6CD1D22}" dt="2025-11-24T11:11:54.035" v="8274" actId="14100"/>
+          <ac:cxnSpMkLst>
+            <pc:docMk/>
+            <pc:sldMk cId="1821755839" sldId="274"/>
+            <ac:cxnSpMk id="17" creationId="{E363E85D-958E-F6A6-C279-98695543B49C}"/>
+          </ac:cxnSpMkLst>
+        </pc:cxnChg>
+        <pc:cxnChg chg="add mod">
+          <ac:chgData name="Jean-Yves Vuillequez" userId="e7fac481abea6bd0" providerId="LiveId" clId="{79E365E8-22BC-4EC2-9606-9A9AC6CD1D22}" dt="2025-11-24T11:11:43.683" v="8272" actId="1036"/>
           <ac:cxnSpMkLst>
             <pc:docMk/>
             <pc:sldMk cId="1821755839" sldId="274"/>
@@ -1090,8 +1234,8 @@
             <ac:cxnSpMk id="24" creationId="{9AD6B91C-AEA0-8BCF-42B4-76BEC72FDE00}"/>
           </ac:cxnSpMkLst>
         </pc:cxnChg>
-        <pc:cxnChg chg="add mod">
-          <ac:chgData name="Jean-Yves Vuillequez" userId="e7fac481abea6bd0" providerId="LiveId" clId="{79E365E8-22BC-4EC2-9606-9A9AC6CD1D22}" dt="2025-11-22T18:31:30.300" v="7714" actId="14100"/>
+        <pc:cxnChg chg="add del mod">
+          <ac:chgData name="Jean-Yves Vuillequez" userId="e7fac481abea6bd0" providerId="LiveId" clId="{79E365E8-22BC-4EC2-9606-9A9AC6CD1D22}" dt="2025-11-24T10:58:22.172" v="8149" actId="478"/>
           <ac:cxnSpMkLst>
             <pc:docMk/>
             <pc:sldMk cId="1821755839" sldId="274"/>
@@ -1122,8 +1266,16 @@
             <ac:cxnSpMk id="30" creationId="{DD9C7B50-C6F5-7260-C61A-2CAE5E4C0BF7}"/>
           </ac:cxnSpMkLst>
         </pc:cxnChg>
+        <pc:cxnChg chg="add mod">
+          <ac:chgData name="Jean-Yves Vuillequez" userId="e7fac481abea6bd0" providerId="LiveId" clId="{79E365E8-22BC-4EC2-9606-9A9AC6CD1D22}" dt="2025-11-24T11:29:41.163" v="8310" actId="1036"/>
+          <ac:cxnSpMkLst>
+            <pc:docMk/>
+            <pc:sldMk cId="1821755839" sldId="274"/>
+            <ac:cxnSpMk id="84" creationId="{9FB5173D-B04A-5921-8DF1-AA3A6807A99D}"/>
+          </ac:cxnSpMkLst>
+        </pc:cxnChg>
         <pc:cxnChg chg="add mod ord topLvl">
-          <ac:chgData name="Jean-Yves Vuillequez" userId="e7fac481abea6bd0" providerId="LiveId" clId="{79E365E8-22BC-4EC2-9606-9A9AC6CD1D22}" dt="2025-11-22T18:30:29.969" v="7704" actId="208"/>
+          <ac:chgData name="Jean-Yves Vuillequez" userId="e7fac481abea6bd0" providerId="LiveId" clId="{79E365E8-22BC-4EC2-9606-9A9AC6CD1D22}" dt="2025-11-24T10:41:01.075" v="8012" actId="1076"/>
           <ac:cxnSpMkLst>
             <pc:docMk/>
             <pc:sldMk cId="1821755839" sldId="274"/>
@@ -1139,7 +1291,7 @@
           </ac:cxnSpMkLst>
         </pc:cxnChg>
         <pc:cxnChg chg="add mod">
-          <ac:chgData name="Jean-Yves Vuillequez" userId="e7fac481abea6bd0" providerId="LiveId" clId="{79E365E8-22BC-4EC2-9606-9A9AC6CD1D22}" dt="2025-11-22T18:31:30.300" v="7714" actId="14100"/>
+          <ac:chgData name="Jean-Yves Vuillequez" userId="e7fac481abea6bd0" providerId="LiveId" clId="{79E365E8-22BC-4EC2-9606-9A9AC6CD1D22}" dt="2025-11-24T10:41:01.075" v="8012" actId="1076"/>
           <ac:cxnSpMkLst>
             <pc:docMk/>
             <pc:sldMk cId="1821755839" sldId="274"/>
@@ -1155,7 +1307,7 @@
           </ac:cxnSpMkLst>
         </pc:cxnChg>
         <pc:cxnChg chg="add mod">
-          <ac:chgData name="Jean-Yves Vuillequez" userId="e7fac481abea6bd0" providerId="LiveId" clId="{79E365E8-22BC-4EC2-9606-9A9AC6CD1D22}" dt="2025-11-20T12:05:49.967" v="2793" actId="1076"/>
+          <ac:chgData name="Jean-Yves Vuillequez" userId="e7fac481abea6bd0" providerId="LiveId" clId="{79E365E8-22BC-4EC2-9606-9A9AC6CD1D22}" dt="2025-11-24T11:12:43.152" v="8278" actId="208"/>
           <ac:cxnSpMkLst>
             <pc:docMk/>
             <pc:sldMk cId="1821755839" sldId="274"/>
@@ -1163,7 +1315,7 @@
           </ac:cxnSpMkLst>
         </pc:cxnChg>
         <pc:cxnChg chg="add mod">
-          <ac:chgData name="Jean-Yves Vuillequez" userId="e7fac481abea6bd0" providerId="LiveId" clId="{79E365E8-22BC-4EC2-9606-9A9AC6CD1D22}" dt="2025-11-22T09:49:17.557" v="7465" actId="14100"/>
+          <ac:chgData name="Jean-Yves Vuillequez" userId="e7fac481abea6bd0" providerId="LiveId" clId="{79E365E8-22BC-4EC2-9606-9A9AC6CD1D22}" dt="2025-11-24T11:10:35.885" v="8248" actId="108"/>
           <ac:cxnSpMkLst>
             <pc:docMk/>
             <pc:sldMk cId="1821755839" sldId="274"/>
@@ -1171,7 +1323,7 @@
           </ac:cxnSpMkLst>
         </pc:cxnChg>
         <pc:cxnChg chg="add mod">
-          <ac:chgData name="Jean-Yves Vuillequez" userId="e7fac481abea6bd0" providerId="LiveId" clId="{79E365E8-22BC-4EC2-9606-9A9AC6CD1D22}" dt="2025-11-22T18:15:55.951" v="7607" actId="1076"/>
+          <ac:chgData name="Jean-Yves Vuillequez" userId="e7fac481abea6bd0" providerId="LiveId" clId="{79E365E8-22BC-4EC2-9606-9A9AC6CD1D22}" dt="2025-11-24T11:29:41.163" v="8310" actId="1036"/>
           <ac:cxnSpMkLst>
             <pc:docMk/>
             <pc:sldMk cId="1821755839" sldId="274"/>
@@ -1449,7 +1601,7 @@
         </pc:picChg>
       </pc:sldChg>
       <pc:sldChg chg="addSp delSp modSp add mod modAnim modNotesTx">
-        <pc:chgData name="Jean-Yves Vuillequez" userId="e7fac481abea6bd0" providerId="LiveId" clId="{79E365E8-22BC-4EC2-9606-9A9AC6CD1D22}" dt="2025-11-24T09:28:44.476" v="7813" actId="1076"/>
+        <pc:chgData name="Jean-Yves Vuillequez" userId="e7fac481abea6bd0" providerId="LiveId" clId="{79E365E8-22BC-4EC2-9606-9A9AC6CD1D22}" dt="2025-11-24T11:06:11.041" v="8233" actId="14100"/>
         <pc:sldMkLst>
           <pc:docMk/>
           <pc:sldMk cId="2290935718" sldId="289"/>
@@ -1463,7 +1615,7 @@
           </ac:spMkLst>
         </pc:spChg>
         <pc:spChg chg="add mod">
-          <ac:chgData name="Jean-Yves Vuillequez" userId="e7fac481abea6bd0" providerId="LiveId" clId="{79E365E8-22BC-4EC2-9606-9A9AC6CD1D22}" dt="2025-11-24T08:55:57.791" v="7744" actId="1076"/>
+          <ac:chgData name="Jean-Yves Vuillequez" userId="e7fac481abea6bd0" providerId="LiveId" clId="{79E365E8-22BC-4EC2-9606-9A9AC6CD1D22}" dt="2025-11-24T11:04:45.958" v="8202" actId="1076"/>
           <ac:spMkLst>
             <pc:docMk/>
             <pc:sldMk cId="2290935718" sldId="289"/>
@@ -1471,7 +1623,7 @@
           </ac:spMkLst>
         </pc:spChg>
         <pc:spChg chg="add mod">
-          <ac:chgData name="Jean-Yves Vuillequez" userId="e7fac481abea6bd0" providerId="LiveId" clId="{79E365E8-22BC-4EC2-9606-9A9AC6CD1D22}" dt="2025-11-24T09:28:44.476" v="7813" actId="1076"/>
+          <ac:chgData name="Jean-Yves Vuillequez" userId="e7fac481abea6bd0" providerId="LiveId" clId="{79E365E8-22BC-4EC2-9606-9A9AC6CD1D22}" dt="2025-11-24T11:04:45.958" v="8202" actId="1076"/>
           <ac:spMkLst>
             <pc:docMk/>
             <pc:sldMk cId="2290935718" sldId="289"/>
@@ -1479,7 +1631,7 @@
           </ac:spMkLst>
         </pc:spChg>
         <pc:spChg chg="add mod">
-          <ac:chgData name="Jean-Yves Vuillequez" userId="e7fac481abea6bd0" providerId="LiveId" clId="{79E365E8-22BC-4EC2-9606-9A9AC6CD1D22}" dt="2025-11-24T08:56:09.895" v="7746" actId="207"/>
+          <ac:chgData name="Jean-Yves Vuillequez" userId="e7fac481abea6bd0" providerId="LiveId" clId="{79E365E8-22BC-4EC2-9606-9A9AC6CD1D22}" dt="2025-11-24T11:04:45.958" v="8202" actId="1076"/>
           <ac:spMkLst>
             <pc:docMk/>
             <pc:sldMk cId="2290935718" sldId="289"/>
@@ -1495,7 +1647,7 @@
           </ac:spMkLst>
         </pc:spChg>
         <pc:spChg chg="add mod">
-          <ac:chgData name="Jean-Yves Vuillequez" userId="e7fac481abea6bd0" providerId="LiveId" clId="{79E365E8-22BC-4EC2-9606-9A9AC6CD1D22}" dt="2025-11-21T14:57:50.116" v="7125" actId="1076"/>
+          <ac:chgData name="Jean-Yves Vuillequez" userId="e7fac481abea6bd0" providerId="LiveId" clId="{79E365E8-22BC-4EC2-9606-9A9AC6CD1D22}" dt="2025-11-24T10:49:59.420" v="8048" actId="6549"/>
           <ac:spMkLst>
             <pc:docMk/>
             <pc:sldMk cId="2290935718" sldId="289"/>
@@ -1526,8 +1678,16 @@
             <ac:picMk id="5" creationId="{937780E3-EE64-E9EA-5E8A-0FA88242AC93}"/>
           </ac:picMkLst>
         </pc:picChg>
-        <pc:picChg chg="add mod">
-          <ac:chgData name="Jean-Yves Vuillequez" userId="e7fac481abea6bd0" providerId="LiveId" clId="{79E365E8-22BC-4EC2-9606-9A9AC6CD1D22}" dt="2025-11-21T14:51:53.241" v="7078" actId="1076"/>
+        <pc:picChg chg="add mod modCrop">
+          <ac:chgData name="Jean-Yves Vuillequez" userId="e7fac481abea6bd0" providerId="LiveId" clId="{79E365E8-22BC-4EC2-9606-9A9AC6CD1D22}" dt="2025-11-24T11:05:59.736" v="8230" actId="14100"/>
+          <ac:picMkLst>
+            <pc:docMk/>
+            <pc:sldMk cId="2290935718" sldId="289"/>
+            <ac:picMk id="6" creationId="{1DCCBE42-74DB-3DFF-14EF-68BE24C6FA39}"/>
+          </ac:picMkLst>
+        </pc:picChg>
+        <pc:picChg chg="add del mod">
+          <ac:chgData name="Jean-Yves Vuillequez" userId="e7fac481abea6bd0" providerId="LiveId" clId="{79E365E8-22BC-4EC2-9606-9A9AC6CD1D22}" dt="2025-11-24T11:04:10.956" v="8191" actId="478"/>
           <ac:picMkLst>
             <pc:docMk/>
             <pc:sldMk cId="2290935718" sldId="289"/>
@@ -1543,11 +1703,19 @@
           </ac:picMkLst>
         </pc:picChg>
         <pc:picChg chg="add mod">
-          <ac:chgData name="Jean-Yves Vuillequez" userId="e7fac481abea6bd0" providerId="LiveId" clId="{79E365E8-22BC-4EC2-9606-9A9AC6CD1D22}" dt="2025-11-24T09:17:55.495" v="7798" actId="14100"/>
+          <ac:chgData name="Jean-Yves Vuillequez" userId="e7fac481abea6bd0" providerId="LiveId" clId="{79E365E8-22BC-4EC2-9606-9A9AC6CD1D22}" dt="2025-11-24T11:05:38.029" v="8220" actId="1076"/>
           <ac:picMkLst>
             <pc:docMk/>
             <pc:sldMk cId="2290935718" sldId="289"/>
             <ac:picMk id="13" creationId="{7D6B0B43-8628-A21E-C82B-D058DBA5452A}"/>
+          </ac:picMkLst>
+        </pc:picChg>
+        <pc:picChg chg="add mod">
+          <ac:chgData name="Jean-Yves Vuillequez" userId="e7fac481abea6bd0" providerId="LiveId" clId="{79E365E8-22BC-4EC2-9606-9A9AC6CD1D22}" dt="2025-11-24T11:06:11.041" v="8233" actId="14100"/>
+          <ac:picMkLst>
+            <pc:docMk/>
+            <pc:sldMk cId="2290935718" sldId="289"/>
+            <ac:picMk id="14" creationId="{291A7323-DA08-B6B0-D55B-6BCFB1C0351B}"/>
           </ac:picMkLst>
         </pc:picChg>
       </pc:sldChg>
@@ -30405,6 +30573,59 @@
       </p:grpSpPr>
       <p:sp>
         <p:nvSpPr>
+          <p:cNvPr id="39" name="Rectangle : coins arrondis 38">
+            <a:extLst>
+              <a:ext uri="{FF2B5EF4-FFF2-40B4-BE49-F238E27FC236}">
+                <a16:creationId xmlns:a16="http://schemas.microsoft.com/office/drawing/2014/main" id="{AEAEB6F6-E6B3-2BA6-860A-9983C6A790DD}"/>
+              </a:ext>
+            </a:extLst>
+          </p:cNvPr>
+          <p:cNvSpPr/>
+          <p:nvPr/>
+        </p:nvSpPr>
+        <p:spPr>
+          <a:xfrm>
+            <a:off x="2461359" y="3203187"/>
+            <a:ext cx="1776005" cy="1390124"/>
+          </a:xfrm>
+          <a:prstGeom prst="roundRect">
+            <a:avLst/>
+          </a:prstGeom>
+          <a:noFill/>
+          <a:ln w="9525">
+            <a:solidFill>
+              <a:srgbClr val="FF0080"/>
+            </a:solidFill>
+            <a:prstDash val="dash"/>
+          </a:ln>
+        </p:spPr>
+        <p:style>
+          <a:lnRef idx="2">
+            <a:schemeClr val="accent1">
+              <a:shade val="15000"/>
+            </a:schemeClr>
+          </a:lnRef>
+          <a:fillRef idx="1">
+            <a:schemeClr val="accent1"/>
+          </a:fillRef>
+          <a:effectRef idx="0">
+            <a:schemeClr val="accent1"/>
+          </a:effectRef>
+          <a:fontRef idx="minor">
+            <a:schemeClr val="lt1"/>
+          </a:fontRef>
+        </p:style>
+        <p:txBody>
+          <a:bodyPr rtlCol="0" anchor="ctr"/>
+          <a:lstStyle/>
+          <a:p>
+            <a:pPr algn="ctr"/>
+            <a:endParaRPr lang="fr-FR" dirty="0"/>
+          </a:p>
+        </p:txBody>
+      </p:sp>
+      <p:sp>
+        <p:nvSpPr>
           <p:cNvPr id="26" name="Forme libre : forme 25">
             <a:extLst>
               <a:ext uri="{FF2B5EF4-FFF2-40B4-BE49-F238E27FC236}">
@@ -30561,7 +30782,7 @@
         </p:nvSpPr>
         <p:spPr>
           <a:xfrm>
-            <a:off x="4334095" y="936409"/>
+            <a:off x="4346332" y="936409"/>
             <a:ext cx="2310321" cy="348427"/>
           </a:xfrm>
           <a:custGeom>
@@ -30937,100 +31158,6 @@
           </a:ln>
         </p:spPr>
       </p:pic>
-      <p:pic>
-        <p:nvPicPr>
-          <p:cNvPr id="1036" name="Picture 12">
-            <a:extLst>
-              <a:ext uri="{FF2B5EF4-FFF2-40B4-BE49-F238E27FC236}">
-                <a16:creationId xmlns:a16="http://schemas.microsoft.com/office/drawing/2014/main" id="{135630BC-F5F0-17C1-438A-A312C16997F8}"/>
-              </a:ext>
-            </a:extLst>
-          </p:cNvPr>
-          <p:cNvPicPr>
-            <a:picLocks noChangeAspect="1" noChangeArrowheads="1"/>
-          </p:cNvPicPr>
-          <p:nvPr/>
-        </p:nvPicPr>
-        <p:blipFill>
-          <a:blip r:embed="rId4">
-            <a:extLst>
-              <a:ext uri="{28A0092B-C50C-407E-A947-70E740481C1C}">
-                <a14:useLocalDpi xmlns:a14="http://schemas.microsoft.com/office/drawing/2010/main" val="0"/>
-              </a:ext>
-            </a:extLst>
-          </a:blip>
-          <a:srcRect/>
-          <a:stretch>
-            <a:fillRect/>
-          </a:stretch>
-        </p:blipFill>
-        <p:spPr bwMode="auto">
-          <a:xfrm>
-            <a:off x="5550811" y="2524266"/>
-            <a:ext cx="781468" cy="564394"/>
-          </a:xfrm>
-          <a:prstGeom prst="rect">
-            <a:avLst/>
-          </a:prstGeom>
-          <a:noFill/>
-          <a:extLst>
-            <a:ext uri="{909E8E84-426E-40DD-AFC4-6F175D3DCCD1}">
-              <a14:hiddenFill xmlns:a14="http://schemas.microsoft.com/office/drawing/2010/main">
-                <a:solidFill>
-                  <a:srgbClr val="FFFFFF"/>
-                </a:solidFill>
-              </a14:hiddenFill>
-            </a:ext>
-          </a:extLst>
-        </p:spPr>
-      </p:pic>
-      <p:pic>
-        <p:nvPicPr>
-          <p:cNvPr id="1038" name="Picture 14">
-            <a:extLst>
-              <a:ext uri="{FF2B5EF4-FFF2-40B4-BE49-F238E27FC236}">
-                <a16:creationId xmlns:a16="http://schemas.microsoft.com/office/drawing/2014/main" id="{1B3822DD-A0E9-A37F-0DE9-40781F1C3DF4}"/>
-              </a:ext>
-            </a:extLst>
-          </p:cNvPr>
-          <p:cNvPicPr>
-            <a:picLocks noChangeAspect="1" noChangeArrowheads="1"/>
-          </p:cNvPicPr>
-          <p:nvPr/>
-        </p:nvPicPr>
-        <p:blipFill rotWithShape="1">
-          <a:blip r:embed="rId5">
-            <a:extLst>
-              <a:ext uri="{28A0092B-C50C-407E-A947-70E740481C1C}">
-                <a14:useLocalDpi xmlns:a14="http://schemas.microsoft.com/office/drawing/2010/main" val="0"/>
-              </a:ext>
-            </a:extLst>
-          </a:blip>
-          <a:srcRect l="6454" t="18548" b="24342"/>
-          <a:stretch>
-            <a:fillRect/>
-          </a:stretch>
-        </p:blipFill>
-        <p:spPr bwMode="auto">
-          <a:xfrm>
-            <a:off x="4563276" y="2705986"/>
-            <a:ext cx="1009143" cy="225895"/>
-          </a:xfrm>
-          <a:prstGeom prst="rect">
-            <a:avLst/>
-          </a:prstGeom>
-          <a:noFill/>
-          <a:extLst>
-            <a:ext uri="{909E8E84-426E-40DD-AFC4-6F175D3DCCD1}">
-              <a14:hiddenFill xmlns:a14="http://schemas.microsoft.com/office/drawing/2010/main">
-                <a:solidFill>
-                  <a:srgbClr val="FFFFFF"/>
-                </a:solidFill>
-              </a14:hiddenFill>
-            </a:ext>
-          </a:extLst>
-        </p:spPr>
-      </p:pic>
       <p:sp>
         <p:nvSpPr>
           <p:cNvPr id="2" name="Forme libre : forme 1">
@@ -31176,377 +31303,6 @@
           </a:p>
         </p:txBody>
       </p:sp>
-      <p:sp>
-        <p:nvSpPr>
-          <p:cNvPr id="47" name="Rectangle : coins arrondis 46">
-            <a:extLst>
-              <a:ext uri="{FF2B5EF4-FFF2-40B4-BE49-F238E27FC236}">
-                <a16:creationId xmlns:a16="http://schemas.microsoft.com/office/drawing/2014/main" id="{481D51B6-7D43-7926-6891-407782B836DE}"/>
-              </a:ext>
-            </a:extLst>
-          </p:cNvPr>
-          <p:cNvSpPr/>
-          <p:nvPr/>
-        </p:nvSpPr>
-        <p:spPr>
-          <a:xfrm>
-            <a:off x="4871109" y="3012224"/>
-            <a:ext cx="1107899" cy="560285"/>
-          </a:xfrm>
-          <a:prstGeom prst="roundRect">
-            <a:avLst/>
-          </a:prstGeom>
-          <a:solidFill>
-            <a:schemeClr val="bg1">
-              <a:lumMod val="95000"/>
-            </a:schemeClr>
-          </a:solidFill>
-          <a:ln>
-            <a:noFill/>
-          </a:ln>
-        </p:spPr>
-        <p:style>
-          <a:lnRef idx="2">
-            <a:schemeClr val="accent1">
-              <a:shade val="15000"/>
-            </a:schemeClr>
-          </a:lnRef>
-          <a:fillRef idx="1">
-            <a:schemeClr val="accent1"/>
-          </a:fillRef>
-          <a:effectRef idx="0">
-            <a:schemeClr val="accent1"/>
-          </a:effectRef>
-          <a:fontRef idx="minor">
-            <a:schemeClr val="lt1"/>
-          </a:fontRef>
-        </p:style>
-        <p:txBody>
-          <a:bodyPr rtlCol="0" anchor="ctr"/>
-          <a:lstStyle/>
-          <a:p>
-            <a:pPr algn="ctr"/>
-            <a:endParaRPr lang="fr-FR" dirty="0"/>
-          </a:p>
-        </p:txBody>
-      </p:sp>
-      <p:sp>
-        <p:nvSpPr>
-          <p:cNvPr id="48" name="ZoneTexte 47">
-            <a:extLst>
-              <a:ext uri="{FF2B5EF4-FFF2-40B4-BE49-F238E27FC236}">
-                <a16:creationId xmlns:a16="http://schemas.microsoft.com/office/drawing/2014/main" id="{FE31E2F0-6B8A-B0EE-9044-0597F28AE28A}"/>
-              </a:ext>
-            </a:extLst>
-          </p:cNvPr>
-          <p:cNvSpPr txBox="1"/>
-          <p:nvPr/>
-        </p:nvSpPr>
-        <p:spPr>
-          <a:xfrm>
-            <a:off x="4896915" y="3149942"/>
-            <a:ext cx="1079654" cy="338554"/>
-          </a:xfrm>
-          <a:prstGeom prst="rect">
-            <a:avLst/>
-          </a:prstGeom>
-          <a:noFill/>
-        </p:spPr>
-        <p:txBody>
-          <a:bodyPr wrap="square" rtlCol="0">
-            <a:spAutoFit/>
-          </a:bodyPr>
-          <a:lstStyle/>
-          <a:p>
-            <a:pPr algn="ctr"/>
-            <a:r>
-              <a:rPr lang="fr-FR" sz="800" b="1" dirty="0" err="1"/>
-              <a:t>Tracking</a:t>
-            </a:r>
-            <a:r>
-              <a:rPr lang="fr-FR" sz="800" b="1" dirty="0"/>
-              <a:t> du modèle</a:t>
-            </a:r>
-          </a:p>
-        </p:txBody>
-      </p:sp>
-      <p:sp>
-        <p:nvSpPr>
-          <p:cNvPr id="49" name="Rectangle : coins arrondis 48">
-            <a:extLst>
-              <a:ext uri="{FF2B5EF4-FFF2-40B4-BE49-F238E27FC236}">
-                <a16:creationId xmlns:a16="http://schemas.microsoft.com/office/drawing/2014/main" id="{8486A803-5325-E4EE-E6D1-9C2310E9372C}"/>
-              </a:ext>
-            </a:extLst>
-          </p:cNvPr>
-          <p:cNvSpPr/>
-          <p:nvPr/>
-        </p:nvSpPr>
-        <p:spPr>
-          <a:xfrm>
-            <a:off x="4869399" y="3862081"/>
-            <a:ext cx="1109609" cy="525360"/>
-          </a:xfrm>
-          <a:prstGeom prst="roundRect">
-            <a:avLst/>
-          </a:prstGeom>
-          <a:solidFill>
-            <a:schemeClr val="bg1">
-              <a:lumMod val="95000"/>
-            </a:schemeClr>
-          </a:solidFill>
-          <a:ln>
-            <a:noFill/>
-          </a:ln>
-        </p:spPr>
-        <p:style>
-          <a:lnRef idx="2">
-            <a:schemeClr val="accent1">
-              <a:shade val="15000"/>
-            </a:schemeClr>
-          </a:lnRef>
-          <a:fillRef idx="1">
-            <a:schemeClr val="accent1"/>
-          </a:fillRef>
-          <a:effectRef idx="0">
-            <a:schemeClr val="accent1"/>
-          </a:effectRef>
-          <a:fontRef idx="minor">
-            <a:schemeClr val="lt1"/>
-          </a:fontRef>
-        </p:style>
-        <p:txBody>
-          <a:bodyPr rtlCol="0" anchor="ctr"/>
-          <a:lstStyle/>
-          <a:p>
-            <a:pPr algn="ctr"/>
-            <a:endParaRPr lang="fr-FR"/>
-          </a:p>
-        </p:txBody>
-      </p:sp>
-      <p:sp>
-        <p:nvSpPr>
-          <p:cNvPr id="50" name="ZoneTexte 49">
-            <a:extLst>
-              <a:ext uri="{FF2B5EF4-FFF2-40B4-BE49-F238E27FC236}">
-                <a16:creationId xmlns:a16="http://schemas.microsoft.com/office/drawing/2014/main" id="{D45817E9-F26B-F5AC-E969-2DB4F41AE334}"/>
-              </a:ext>
-            </a:extLst>
-          </p:cNvPr>
-          <p:cNvSpPr txBox="1"/>
-          <p:nvPr/>
-        </p:nvSpPr>
-        <p:spPr>
-          <a:xfrm>
-            <a:off x="4899354" y="3977728"/>
-            <a:ext cx="1079654" cy="338554"/>
-          </a:xfrm>
-          <a:prstGeom prst="rect">
-            <a:avLst/>
-          </a:prstGeom>
-          <a:noFill/>
-        </p:spPr>
-        <p:txBody>
-          <a:bodyPr wrap="square" rtlCol="0">
-            <a:spAutoFit/>
-          </a:bodyPr>
-          <a:lstStyle/>
-          <a:p>
-            <a:pPr algn="ctr"/>
-            <a:r>
-              <a:rPr lang="fr-FR" sz="800" b="1" dirty="0"/>
-              <a:t>Registre et runs du modèle</a:t>
-            </a:r>
-          </a:p>
-        </p:txBody>
-      </p:sp>
-      <p:pic>
-        <p:nvPicPr>
-          <p:cNvPr id="2054" name="Picture 6">
-            <a:extLst>
-              <a:ext uri="{FF2B5EF4-FFF2-40B4-BE49-F238E27FC236}">
-                <a16:creationId xmlns:a16="http://schemas.microsoft.com/office/drawing/2014/main" id="{A2294E8E-D08B-505D-5B9D-D8788A9CD32B}"/>
-              </a:ext>
-            </a:extLst>
-          </p:cNvPr>
-          <p:cNvPicPr>
-            <a:picLocks noChangeAspect="1" noChangeArrowheads="1"/>
-          </p:cNvPicPr>
-          <p:nvPr/>
-        </p:nvPicPr>
-        <p:blipFill>
-          <a:blip r:embed="rId6">
-            <a:extLst>
-              <a:ext uri="{28A0092B-C50C-407E-A947-70E740481C1C}">
-                <a14:useLocalDpi xmlns:a14="http://schemas.microsoft.com/office/drawing/2010/main" val="0"/>
-              </a:ext>
-            </a:extLst>
-          </a:blip>
-          <a:srcRect/>
-          <a:stretch>
-            <a:fillRect/>
-          </a:stretch>
-        </p:blipFill>
-        <p:spPr bwMode="auto">
-          <a:xfrm>
-            <a:off x="4678903" y="2843961"/>
-            <a:ext cx="711670" cy="374563"/>
-          </a:xfrm>
-          <a:prstGeom prst="rect">
-            <a:avLst/>
-          </a:prstGeom>
-          <a:noFill/>
-          <a:extLst>
-            <a:ext uri="{909E8E84-426E-40DD-AFC4-6F175D3DCCD1}">
-              <a14:hiddenFill xmlns:a14="http://schemas.microsoft.com/office/drawing/2010/main">
-                <a:solidFill>
-                  <a:srgbClr val="FFFFFF"/>
-                </a:solidFill>
-              </a14:hiddenFill>
-            </a:ext>
-          </a:extLst>
-        </p:spPr>
-      </p:pic>
-      <p:pic>
-        <p:nvPicPr>
-          <p:cNvPr id="51" name="Image 50" descr="Une image contenant art, pixel, conception&#10;&#10;Le contenu généré par l’IA peut être incorrect.">
-            <a:extLst>
-              <a:ext uri="{FF2B5EF4-FFF2-40B4-BE49-F238E27FC236}">
-                <a16:creationId xmlns:a16="http://schemas.microsoft.com/office/drawing/2014/main" id="{054FB5AB-F043-1139-CFA8-44C9034D1153}"/>
-              </a:ext>
-            </a:extLst>
-          </p:cNvPr>
-          <p:cNvPicPr>
-            <a:picLocks noChangeAspect="1"/>
-          </p:cNvPicPr>
-          <p:nvPr/>
-        </p:nvPicPr>
-        <p:blipFill>
-          <a:blip r:embed="rId7"/>
-          <a:stretch>
-            <a:fillRect/>
-          </a:stretch>
-        </p:blipFill>
-        <p:spPr>
-          <a:xfrm>
-            <a:off x="4764143" y="3775222"/>
-            <a:ext cx="247189" cy="295703"/>
-          </a:xfrm>
-          <a:prstGeom prst="rect">
-            <a:avLst/>
-          </a:prstGeom>
-        </p:spPr>
-      </p:pic>
-      <p:sp>
-        <p:nvSpPr>
-          <p:cNvPr id="52" name="Ellipse 51">
-            <a:extLst>
-              <a:ext uri="{FF2B5EF4-FFF2-40B4-BE49-F238E27FC236}">
-                <a16:creationId xmlns:a16="http://schemas.microsoft.com/office/drawing/2014/main" id="{7A45A31B-42CC-CB8B-442E-3576FB243381}"/>
-              </a:ext>
-            </a:extLst>
-          </p:cNvPr>
-          <p:cNvSpPr/>
-          <p:nvPr/>
-        </p:nvSpPr>
-        <p:spPr>
-          <a:xfrm>
-            <a:off x="5523613" y="2751648"/>
-            <a:ext cx="122984" cy="122984"/>
-          </a:xfrm>
-          <a:prstGeom prst="ellipse">
-            <a:avLst/>
-          </a:prstGeom>
-          <a:solidFill>
-            <a:srgbClr val="41545E"/>
-          </a:solidFill>
-          <a:ln>
-            <a:noFill/>
-          </a:ln>
-        </p:spPr>
-        <p:style>
-          <a:lnRef idx="2">
-            <a:schemeClr val="accent1">
-              <a:shade val="15000"/>
-            </a:schemeClr>
-          </a:lnRef>
-          <a:fillRef idx="1">
-            <a:schemeClr val="accent1"/>
-          </a:fillRef>
-          <a:effectRef idx="0">
-            <a:schemeClr val="accent1"/>
-          </a:effectRef>
-          <a:fontRef idx="minor">
-            <a:schemeClr val="lt1"/>
-          </a:fontRef>
-        </p:style>
-        <p:txBody>
-          <a:bodyPr rtlCol="0" anchor="ctr"/>
-          <a:lstStyle/>
-          <a:p>
-            <a:pPr algn="ctr"/>
-            <a:r>
-              <a:rPr lang="fr-FR" sz="900" dirty="0"/>
-              <a:t>+</a:t>
-            </a:r>
-          </a:p>
-        </p:txBody>
-      </p:sp>
-      <p:sp>
-        <p:nvSpPr>
-          <p:cNvPr id="53" name="Rectangle : coins arrondis 52">
-            <a:extLst>
-              <a:ext uri="{FF2B5EF4-FFF2-40B4-BE49-F238E27FC236}">
-                <a16:creationId xmlns:a16="http://schemas.microsoft.com/office/drawing/2014/main" id="{CF1F8123-FC2A-EF28-8139-FC1D62216C5F}"/>
-              </a:ext>
-            </a:extLst>
-          </p:cNvPr>
-          <p:cNvSpPr/>
-          <p:nvPr/>
-        </p:nvSpPr>
-        <p:spPr>
-          <a:xfrm>
-            <a:off x="4519292" y="2628306"/>
-            <a:ext cx="1796425" cy="1870262"/>
-          </a:xfrm>
-          <a:prstGeom prst="roundRect">
-            <a:avLst>
-              <a:gd name="adj" fmla="val 10895"/>
-            </a:avLst>
-          </a:prstGeom>
-          <a:noFill/>
-          <a:ln w="9525">
-            <a:solidFill>
-              <a:srgbClr val="FF0080"/>
-            </a:solidFill>
-            <a:prstDash val="dash"/>
-          </a:ln>
-        </p:spPr>
-        <p:style>
-          <a:lnRef idx="2">
-            <a:schemeClr val="accent1">
-              <a:shade val="15000"/>
-            </a:schemeClr>
-          </a:lnRef>
-          <a:fillRef idx="1">
-            <a:schemeClr val="accent1"/>
-          </a:fillRef>
-          <a:effectRef idx="0">
-            <a:schemeClr val="accent1"/>
-          </a:effectRef>
-          <a:fontRef idx="minor">
-            <a:schemeClr val="lt1"/>
-          </a:fontRef>
-        </p:style>
-        <p:txBody>
-          <a:bodyPr rtlCol="0" anchor="ctr"/>
-          <a:lstStyle/>
-          <a:p>
-            <a:pPr algn="ctr"/>
-            <a:endParaRPr lang="fr-FR" dirty="0"/>
-          </a:p>
-        </p:txBody>
-      </p:sp>
       <p:pic>
         <p:nvPicPr>
           <p:cNvPr id="1028" name="Picture 4">
@@ -31562,7 +31318,7 @@
           <p:nvPr/>
         </p:nvPicPr>
         <p:blipFill rotWithShape="1">
-          <a:blip r:embed="rId8">
+          <a:blip r:embed="rId4">
             <a:extLst>
               <a:ext uri="{28A0092B-C50C-407E-A947-70E740481C1C}">
                 <a14:useLocalDpi xmlns:a14="http://schemas.microsoft.com/office/drawing/2010/main" val="0"/>
@@ -31609,7 +31365,7 @@
           <p:nvPr/>
         </p:nvPicPr>
         <p:blipFill rotWithShape="1">
-          <a:blip r:embed="rId9">
+          <a:blip r:embed="rId5">
             <a:extLst>
               <a:ext uri="{28A0092B-C50C-407E-A947-70E740481C1C}">
                 <a14:useLocalDpi xmlns:a14="http://schemas.microsoft.com/office/drawing/2010/main" val="0"/>
@@ -31623,7 +31379,7 @@
         </p:blipFill>
         <p:spPr bwMode="auto">
           <a:xfrm>
-            <a:off x="756608" y="2258501"/>
+            <a:off x="756608" y="2278455"/>
             <a:ext cx="386389" cy="485958"/>
           </a:xfrm>
           <a:prstGeom prst="rect">
@@ -31699,8 +31455,8 @@
         </p:nvSpPr>
         <p:spPr>
           <a:xfrm>
-            <a:off x="246312" y="2674581"/>
-            <a:ext cx="1390212" cy="292388"/>
+            <a:off x="512232" y="2694535"/>
+            <a:ext cx="863541" cy="292388"/>
           </a:xfrm>
           <a:prstGeom prst="rect">
             <a:avLst/>
@@ -31743,7 +31499,7 @@
           <p:nvPr/>
         </p:nvPicPr>
         <p:blipFill rotWithShape="1">
-          <a:blip r:embed="rId9">
+          <a:blip r:embed="rId5">
             <a:extLst>
               <a:ext uri="{28A0092B-C50C-407E-A947-70E740481C1C}">
                 <a14:useLocalDpi xmlns:a14="http://schemas.microsoft.com/office/drawing/2010/main" val="0"/>
@@ -31757,7 +31513,7 @@
         </p:blipFill>
         <p:spPr bwMode="auto">
           <a:xfrm>
-            <a:off x="781055" y="2922466"/>
+            <a:off x="781055" y="3014137"/>
             <a:ext cx="361938" cy="485958"/>
           </a:xfrm>
           <a:prstGeom prst="rect">
@@ -31789,8 +31545,8 @@
         </p:nvSpPr>
         <p:spPr>
           <a:xfrm>
-            <a:off x="246312" y="3396825"/>
-            <a:ext cx="1390212" cy="200055"/>
+            <a:off x="463375" y="3488496"/>
+            <a:ext cx="949270" cy="200055"/>
           </a:xfrm>
           <a:prstGeom prst="rect">
             <a:avLst/>
@@ -31826,7 +31582,7 @@
           <p:nvPr/>
         </p:nvPicPr>
         <p:blipFill rotWithShape="1">
-          <a:blip r:embed="rId9">
+          <a:blip r:embed="rId5">
             <a:extLst>
               <a:ext uri="{28A0092B-C50C-407E-A947-70E740481C1C}">
                 <a14:useLocalDpi xmlns:a14="http://schemas.microsoft.com/office/drawing/2010/main" val="0"/>
@@ -31840,7 +31596,7 @@
         </p:blipFill>
         <p:spPr bwMode="auto">
           <a:xfrm>
-            <a:off x="781054" y="3634159"/>
+            <a:off x="793739" y="3762369"/>
             <a:ext cx="361937" cy="485958"/>
           </a:xfrm>
           <a:prstGeom prst="rect">
@@ -31872,8 +31628,8 @@
         </p:nvSpPr>
         <p:spPr>
           <a:xfrm>
-            <a:off x="246312" y="4108518"/>
-            <a:ext cx="1390212" cy="200055"/>
+            <a:off x="463374" y="4238831"/>
+            <a:ext cx="959011" cy="200055"/>
           </a:xfrm>
           <a:prstGeom prst="rect">
             <a:avLst/>
@@ -31932,6 +31688,1946 @@
       </p:sp>
       <p:cxnSp>
         <p:nvCxnSpPr>
+          <p:cNvPr id="1075" name="Connecteur : en angle 1074">
+            <a:extLst>
+              <a:ext uri="{FF2B5EF4-FFF2-40B4-BE49-F238E27FC236}">
+                <a16:creationId xmlns:a16="http://schemas.microsoft.com/office/drawing/2014/main" id="{EB70B985-2508-613E-3824-FAD3BB6966AC}"/>
+              </a:ext>
+            </a:extLst>
+          </p:cNvPr>
+          <p:cNvCxnSpPr>
+            <a:cxnSpLocks/>
+            <a:stCxn id="2097" idx="2"/>
+            <a:endCxn id="43" idx="3"/>
+          </p:cNvCxnSpPr>
+          <p:nvPr/>
+        </p:nvCxnSpPr>
+        <p:spPr>
+          <a:xfrm rot="5400000">
+            <a:off x="7570819" y="3859448"/>
+            <a:ext cx="739989" cy="298315"/>
+          </a:xfrm>
+          <a:prstGeom prst="bentConnector2">
+            <a:avLst/>
+          </a:prstGeom>
+          <a:ln>
+            <a:solidFill>
+              <a:srgbClr val="FF0080"/>
+            </a:solidFill>
+            <a:headEnd type="triangle"/>
+            <a:tailEnd type="triangle"/>
+          </a:ln>
+        </p:spPr>
+        <p:style>
+          <a:lnRef idx="1">
+            <a:schemeClr val="accent1"/>
+          </a:lnRef>
+          <a:fillRef idx="0">
+            <a:schemeClr val="accent1"/>
+          </a:fillRef>
+          <a:effectRef idx="0">
+            <a:schemeClr val="accent1"/>
+          </a:effectRef>
+          <a:fontRef idx="minor">
+            <a:schemeClr val="tx1"/>
+          </a:fontRef>
+        </p:style>
+      </p:cxnSp>
+      <p:pic>
+        <p:nvPicPr>
+          <p:cNvPr id="1026" name="Picture 2">
+            <a:extLst>
+              <a:ext uri="{FF2B5EF4-FFF2-40B4-BE49-F238E27FC236}">
+                <a16:creationId xmlns:a16="http://schemas.microsoft.com/office/drawing/2014/main" id="{923FE2F2-F305-A7CE-975B-2A2BA912E4B7}"/>
+              </a:ext>
+            </a:extLst>
+          </p:cNvPr>
+          <p:cNvPicPr>
+            <a:picLocks noChangeAspect="1" noChangeArrowheads="1"/>
+          </p:cNvPicPr>
+          <p:nvPr/>
+        </p:nvPicPr>
+        <p:blipFill rotWithShape="1">
+          <a:blip r:embed="rId6">
+            <a:extLst>
+              <a:ext uri="{28A0092B-C50C-407E-A947-70E740481C1C}">
+                <a14:useLocalDpi xmlns:a14="http://schemas.microsoft.com/office/drawing/2010/main" val="0"/>
+              </a:ext>
+            </a:extLst>
+          </a:blip>
+          <a:srcRect l="14585" t="12264" r="16331" b="16417"/>
+          <a:stretch>
+            <a:fillRect/>
+          </a:stretch>
+        </p:blipFill>
+        <p:spPr bwMode="auto">
+          <a:xfrm>
+            <a:off x="1095600" y="1606201"/>
+            <a:ext cx="264768" cy="273335"/>
+          </a:xfrm>
+          <a:prstGeom prst="rect">
+            <a:avLst/>
+          </a:prstGeom>
+          <a:noFill/>
+          <a:extLst>
+            <a:ext uri="{909E8E84-426E-40DD-AFC4-6F175D3DCCD1}">
+              <a14:hiddenFill xmlns:a14="http://schemas.microsoft.com/office/drawing/2010/main">
+                <a:solidFill>
+                  <a:srgbClr val="FFFFFF"/>
+                </a:solidFill>
+              </a14:hiddenFill>
+            </a:ext>
+          </a:extLst>
+        </p:spPr>
+      </p:pic>
+      <p:cxnSp>
+        <p:nvCxnSpPr>
+          <p:cNvPr id="29" name="Connecteur droit 28">
+            <a:extLst>
+              <a:ext uri="{FF2B5EF4-FFF2-40B4-BE49-F238E27FC236}">
+                <a16:creationId xmlns:a16="http://schemas.microsoft.com/office/drawing/2014/main" id="{2F5C326A-12BF-B849-9176-2CB67D7A7ED9}"/>
+              </a:ext>
+            </a:extLst>
+          </p:cNvPr>
+          <p:cNvCxnSpPr/>
+          <p:nvPr/>
+        </p:nvCxnSpPr>
+        <p:spPr>
+          <a:xfrm>
+            <a:off x="4378905" y="1458686"/>
+            <a:ext cx="0" cy="3272971"/>
+          </a:xfrm>
+          <a:prstGeom prst="line">
+            <a:avLst/>
+          </a:prstGeom>
+          <a:ln w="19050">
+            <a:solidFill>
+              <a:schemeClr val="bg1">
+                <a:lumMod val="75000"/>
+              </a:schemeClr>
+            </a:solidFill>
+            <a:prstDash val="dash"/>
+          </a:ln>
+        </p:spPr>
+        <p:style>
+          <a:lnRef idx="1">
+            <a:schemeClr val="dk1"/>
+          </a:lnRef>
+          <a:fillRef idx="0">
+            <a:schemeClr val="dk1"/>
+          </a:fillRef>
+          <a:effectRef idx="0">
+            <a:schemeClr val="dk1"/>
+          </a:effectRef>
+          <a:fontRef idx="minor">
+            <a:schemeClr val="tx1"/>
+          </a:fontRef>
+        </p:style>
+      </p:cxnSp>
+      <p:sp>
+        <p:nvSpPr>
+          <p:cNvPr id="71" name="Rectangle : coins arrondis 70">
+            <a:extLst>
+              <a:ext uri="{FF2B5EF4-FFF2-40B4-BE49-F238E27FC236}">
+                <a16:creationId xmlns:a16="http://schemas.microsoft.com/office/drawing/2014/main" id="{E74B2057-34BC-1980-9671-44A128491597}"/>
+              </a:ext>
+            </a:extLst>
+          </p:cNvPr>
+          <p:cNvSpPr/>
+          <p:nvPr/>
+        </p:nvSpPr>
+        <p:spPr>
+          <a:xfrm>
+            <a:off x="2461359" y="1711808"/>
+            <a:ext cx="1776005" cy="1390124"/>
+          </a:xfrm>
+          <a:prstGeom prst="roundRect">
+            <a:avLst/>
+          </a:prstGeom>
+          <a:noFill/>
+          <a:ln w="9525">
+            <a:solidFill>
+              <a:srgbClr val="00B050"/>
+            </a:solidFill>
+            <a:prstDash val="dash"/>
+          </a:ln>
+        </p:spPr>
+        <p:style>
+          <a:lnRef idx="2">
+            <a:schemeClr val="accent1">
+              <a:shade val="15000"/>
+            </a:schemeClr>
+          </a:lnRef>
+          <a:fillRef idx="1">
+            <a:schemeClr val="accent1"/>
+          </a:fillRef>
+          <a:effectRef idx="0">
+            <a:schemeClr val="accent1"/>
+          </a:effectRef>
+          <a:fontRef idx="minor">
+            <a:schemeClr val="lt1"/>
+          </a:fontRef>
+        </p:style>
+        <p:txBody>
+          <a:bodyPr rtlCol="0" anchor="ctr"/>
+          <a:lstStyle/>
+          <a:p>
+            <a:pPr algn="ctr"/>
+            <a:endParaRPr lang="fr-FR" dirty="0"/>
+          </a:p>
+        </p:txBody>
+      </p:sp>
+      <p:sp>
+        <p:nvSpPr>
+          <p:cNvPr id="106" name="Rectangle : coins arrondis 105">
+            <a:extLst>
+              <a:ext uri="{FF2B5EF4-FFF2-40B4-BE49-F238E27FC236}">
+                <a16:creationId xmlns:a16="http://schemas.microsoft.com/office/drawing/2014/main" id="{70820C9A-B957-87A8-109D-6C661627DA4C}"/>
+              </a:ext>
+            </a:extLst>
+          </p:cNvPr>
+          <p:cNvSpPr/>
+          <p:nvPr/>
+        </p:nvSpPr>
+        <p:spPr>
+          <a:xfrm>
+            <a:off x="3428104" y="3028817"/>
+            <a:ext cx="868391" cy="252609"/>
+          </a:xfrm>
+          <a:prstGeom prst="roundRect">
+            <a:avLst/>
+          </a:prstGeom>
+          <a:solidFill>
+            <a:schemeClr val="bg1">
+              <a:lumMod val="95000"/>
+            </a:schemeClr>
+          </a:solidFill>
+          <a:ln>
+            <a:noFill/>
+          </a:ln>
+        </p:spPr>
+        <p:style>
+          <a:lnRef idx="2">
+            <a:schemeClr val="accent1">
+              <a:shade val="15000"/>
+            </a:schemeClr>
+          </a:lnRef>
+          <a:fillRef idx="1">
+            <a:schemeClr val="accent1"/>
+          </a:fillRef>
+          <a:effectRef idx="0">
+            <a:schemeClr val="accent1"/>
+          </a:effectRef>
+          <a:fontRef idx="minor">
+            <a:schemeClr val="lt1"/>
+          </a:fontRef>
+        </p:style>
+        <p:txBody>
+          <a:bodyPr rtlCol="0" anchor="ctr"/>
+          <a:lstStyle/>
+          <a:p>
+            <a:r>
+              <a:rPr lang="fr-FR" sz="900" b="1" dirty="0">
+                <a:solidFill>
+                  <a:schemeClr val="tx1"/>
+                </a:solidFill>
+              </a:rPr>
+              <a:t>AWS S3</a:t>
+            </a:r>
+          </a:p>
+        </p:txBody>
+      </p:sp>
+      <p:pic>
+        <p:nvPicPr>
+          <p:cNvPr id="107" name="Image 106" descr="Une image contenant art, pixel, conception&#10;&#10;Le contenu généré par l’IA peut être incorrect.">
+            <a:extLst>
+              <a:ext uri="{FF2B5EF4-FFF2-40B4-BE49-F238E27FC236}">
+                <a16:creationId xmlns:a16="http://schemas.microsoft.com/office/drawing/2014/main" id="{9E201599-7D6B-4671-395A-AB9C1CE55DB4}"/>
+              </a:ext>
+            </a:extLst>
+          </p:cNvPr>
+          <p:cNvPicPr>
+            <a:picLocks noChangeAspect="1"/>
+          </p:cNvPicPr>
+          <p:nvPr/>
+        </p:nvPicPr>
+        <p:blipFill>
+          <a:blip r:embed="rId7"/>
+          <a:stretch>
+            <a:fillRect/>
+          </a:stretch>
+        </p:blipFill>
+        <p:spPr>
+          <a:xfrm>
+            <a:off x="3990550" y="2795080"/>
+            <a:ext cx="347790" cy="416048"/>
+          </a:xfrm>
+          <a:prstGeom prst="rect">
+            <a:avLst/>
+          </a:prstGeom>
+        </p:spPr>
+      </p:pic>
+      <p:pic>
+        <p:nvPicPr>
+          <p:cNvPr id="2068" name="Picture 8">
+            <a:extLst>
+              <a:ext uri="{FF2B5EF4-FFF2-40B4-BE49-F238E27FC236}">
+                <a16:creationId xmlns:a16="http://schemas.microsoft.com/office/drawing/2014/main" id="{9336168E-33DE-2E2C-3F3A-3E4FC0819D15}"/>
+              </a:ext>
+            </a:extLst>
+          </p:cNvPr>
+          <p:cNvPicPr>
+            <a:picLocks noChangeAspect="1" noChangeArrowheads="1"/>
+          </p:cNvPicPr>
+          <p:nvPr/>
+        </p:nvPicPr>
+        <p:blipFill rotWithShape="1">
+          <a:blip r:embed="rId8">
+            <a:extLst>
+              <a:ext uri="{28A0092B-C50C-407E-A947-70E740481C1C}">
+                <a14:useLocalDpi xmlns:a14="http://schemas.microsoft.com/office/drawing/2010/main" val="0"/>
+              </a:ext>
+            </a:extLst>
+          </a:blip>
+          <a:srcRect t="7209" b="12963"/>
+          <a:stretch>
+            <a:fillRect/>
+          </a:stretch>
+        </p:blipFill>
+        <p:spPr bwMode="auto">
+          <a:xfrm>
+            <a:off x="8471325" y="2479951"/>
+            <a:ext cx="519001" cy="552405"/>
+          </a:xfrm>
+          <a:prstGeom prst="rect">
+            <a:avLst/>
+          </a:prstGeom>
+          <a:noFill/>
+          <a:extLst>
+            <a:ext uri="{909E8E84-426E-40DD-AFC4-6F175D3DCCD1}">
+              <a14:hiddenFill xmlns:a14="http://schemas.microsoft.com/office/drawing/2010/main">
+                <a:solidFill>
+                  <a:srgbClr val="FFFFFF"/>
+                </a:solidFill>
+              </a14:hiddenFill>
+            </a:ext>
+          </a:extLst>
+        </p:spPr>
+      </p:pic>
+      <p:sp>
+        <p:nvSpPr>
+          <p:cNvPr id="2096" name="Google Shape;180;p8">
+            <a:extLst>
+              <a:ext uri="{FF2B5EF4-FFF2-40B4-BE49-F238E27FC236}">
+                <a16:creationId xmlns:a16="http://schemas.microsoft.com/office/drawing/2014/main" id="{273A85B6-13FD-89FF-E669-100D308ACE82}"/>
+              </a:ext>
+            </a:extLst>
+          </p:cNvPr>
+          <p:cNvSpPr/>
+          <p:nvPr/>
+        </p:nvSpPr>
+        <p:spPr>
+          <a:xfrm>
+            <a:off x="5512" y="4892025"/>
+            <a:ext cx="9144000" cy="251400"/>
+          </a:xfrm>
+          <a:prstGeom prst="rect">
+            <a:avLst/>
+          </a:prstGeom>
+          <a:solidFill>
+            <a:srgbClr val="C3FFFC"/>
+          </a:solidFill>
+          <a:ln>
+            <a:noFill/>
+          </a:ln>
+        </p:spPr>
+        <p:txBody>
+          <a:bodyPr spcFirstLastPara="1" wrap="square" lIns="91425" tIns="91425" rIns="91425" bIns="91425" anchor="ctr" anchorCtr="0">
+            <a:noAutofit/>
+          </a:bodyPr>
+          <a:lstStyle/>
+          <a:p>
+            <a:pPr marL="0" marR="0" lvl="0" indent="0" algn="l" rtl="0">
+              <a:lnSpc>
+                <a:spcPct val="100000"/>
+              </a:lnSpc>
+              <a:spcBef>
+                <a:spcPts val="0"/>
+              </a:spcBef>
+              <a:spcAft>
+                <a:spcPts val="0"/>
+              </a:spcAft>
+              <a:buClr>
+                <a:srgbClr val="000000"/>
+              </a:buClr>
+              <a:buSzPts val="1400"/>
+              <a:buFont typeface="Arial"/>
+              <a:buNone/>
+            </a:pPr>
+            <a:endParaRPr sz="1400" b="0" i="0" u="none" strike="noStrike" cap="none">
+              <a:solidFill>
+                <a:srgbClr val="000000"/>
+              </a:solidFill>
+              <a:latin typeface="Arial"/>
+              <a:ea typeface="Arial"/>
+              <a:cs typeface="Arial"/>
+              <a:sym typeface="Arial"/>
+            </a:endParaRPr>
+          </a:p>
+        </p:txBody>
+      </p:sp>
+      <p:cxnSp>
+        <p:nvCxnSpPr>
+          <p:cNvPr id="2101" name="Connecteur droit avec flèche 2100">
+            <a:extLst>
+              <a:ext uri="{FF2B5EF4-FFF2-40B4-BE49-F238E27FC236}">
+                <a16:creationId xmlns:a16="http://schemas.microsoft.com/office/drawing/2014/main" id="{47334CC6-EC52-DED0-C7E9-A5E77BF2B99A}"/>
+              </a:ext>
+            </a:extLst>
+          </p:cNvPr>
+          <p:cNvCxnSpPr>
+            <a:cxnSpLocks/>
+            <a:stCxn id="1074" idx="3"/>
+            <a:endCxn id="2068" idx="1"/>
+          </p:cNvCxnSpPr>
+          <p:nvPr/>
+        </p:nvCxnSpPr>
+        <p:spPr>
+          <a:xfrm>
+            <a:off x="8259888" y="2755931"/>
+            <a:ext cx="211437" cy="223"/>
+          </a:xfrm>
+          <a:prstGeom prst="straightConnector1">
+            <a:avLst/>
+          </a:prstGeom>
+          <a:ln w="19050">
+            <a:solidFill>
+              <a:schemeClr val="bg1">
+                <a:lumMod val="65000"/>
+              </a:schemeClr>
+            </a:solidFill>
+            <a:tailEnd type="triangle"/>
+          </a:ln>
+        </p:spPr>
+        <p:style>
+          <a:lnRef idx="1">
+            <a:schemeClr val="accent1"/>
+          </a:lnRef>
+          <a:fillRef idx="0">
+            <a:schemeClr val="accent1"/>
+          </a:fillRef>
+          <a:effectRef idx="0">
+            <a:schemeClr val="accent1"/>
+          </a:effectRef>
+          <a:fontRef idx="minor">
+            <a:schemeClr val="tx1"/>
+          </a:fontRef>
+        </p:style>
+      </p:cxnSp>
+      <p:sp>
+        <p:nvSpPr>
+          <p:cNvPr id="4" name="Rectangle : coins arrondis 3">
+            <a:extLst>
+              <a:ext uri="{FF2B5EF4-FFF2-40B4-BE49-F238E27FC236}">
+                <a16:creationId xmlns:a16="http://schemas.microsoft.com/office/drawing/2014/main" id="{967D4A6C-3756-2775-B55E-F408743583CC}"/>
+              </a:ext>
+            </a:extLst>
+          </p:cNvPr>
+          <p:cNvSpPr/>
+          <p:nvPr/>
+        </p:nvSpPr>
+        <p:spPr>
+          <a:xfrm>
+            <a:off x="6450927" y="1304200"/>
+            <a:ext cx="2214439" cy="106642"/>
+          </a:xfrm>
+          <a:prstGeom prst="roundRect">
+            <a:avLst/>
+          </a:prstGeom>
+          <a:solidFill>
+            <a:srgbClr val="FFC000"/>
+          </a:solidFill>
+          <a:ln w="12700" cap="flat" cmpd="sng" algn="ctr">
+            <a:noFill/>
+            <a:prstDash val="solid"/>
+            <a:miter lim="800000"/>
+          </a:ln>
+          <a:effectLst/>
+        </p:spPr>
+        <p:txBody>
+          <a:bodyPr rot="0" spcFirstLastPara="0" vertOverflow="overflow" horzOverflow="overflow" vert="horz" wrap="square" lIns="74295" tIns="37148" rIns="74295" bIns="37148" numCol="1" spcCol="0" rtlCol="0" fromWordArt="0" anchor="ctr" anchorCtr="0" forceAA="0" compatLnSpc="1">
+            <a:prstTxWarp prst="textNoShape">
+              <a:avLst/>
+            </a:prstTxWarp>
+            <a:noAutofit/>
+          </a:bodyPr>
+          <a:lstStyle/>
+          <a:p>
+            <a:pPr algn="ctr">
+              <a:buClrTx/>
+            </a:pPr>
+            <a:r>
+              <a:rPr lang="fr-FR" sz="800" b="1" kern="1200" dirty="0">
+                <a:latin typeface="Calibri" panose="020F0502020204030204" pitchFamily="34" charset="0"/>
+                <a:ea typeface="+mn-ea"/>
+                <a:cs typeface="Calibri" panose="020F0502020204030204" pitchFamily="34" charset="0"/>
+              </a:rPr>
+              <a:t>Frontend</a:t>
+            </a:r>
+          </a:p>
+        </p:txBody>
+      </p:sp>
+      <p:sp>
+        <p:nvSpPr>
+          <p:cNvPr id="5" name="Rectangle : coins arrondis 4">
+            <a:extLst>
+              <a:ext uri="{FF2B5EF4-FFF2-40B4-BE49-F238E27FC236}">
+                <a16:creationId xmlns:a16="http://schemas.microsoft.com/office/drawing/2014/main" id="{564CE1A9-869C-774B-0E58-18DB76A3FCD2}"/>
+              </a:ext>
+            </a:extLst>
+          </p:cNvPr>
+          <p:cNvSpPr/>
+          <p:nvPr/>
+        </p:nvSpPr>
+        <p:spPr>
+          <a:xfrm>
+            <a:off x="2305374" y="1304200"/>
+            <a:ext cx="4118299" cy="106642"/>
+          </a:xfrm>
+          <a:prstGeom prst="roundRect">
+            <a:avLst/>
+          </a:prstGeom>
+          <a:solidFill>
+            <a:srgbClr val="00B050"/>
+          </a:solidFill>
+          <a:ln w="12700" cap="flat" cmpd="sng" algn="ctr">
+            <a:noFill/>
+            <a:prstDash val="solid"/>
+            <a:miter lim="800000"/>
+          </a:ln>
+          <a:effectLst/>
+        </p:spPr>
+        <p:txBody>
+          <a:bodyPr rot="0" spcFirstLastPara="0" vertOverflow="overflow" horzOverflow="overflow" vert="horz" wrap="square" lIns="74295" tIns="37148" rIns="74295" bIns="37148" numCol="1" spcCol="0" rtlCol="0" fromWordArt="0" anchor="ctr" anchorCtr="0" forceAA="0" compatLnSpc="1">
+            <a:prstTxWarp prst="textNoShape">
+              <a:avLst/>
+            </a:prstTxWarp>
+            <a:noAutofit/>
+          </a:bodyPr>
+          <a:lstStyle/>
+          <a:p>
+            <a:pPr algn="ctr">
+              <a:buClrTx/>
+            </a:pPr>
+            <a:r>
+              <a:rPr lang="fr-FR" sz="800" b="1" kern="1200" dirty="0">
+                <a:solidFill>
+                  <a:schemeClr val="bg1"/>
+                </a:solidFill>
+                <a:latin typeface="Calibri" panose="020F0502020204030204" pitchFamily="34" charset="0"/>
+                <a:ea typeface="+mn-ea"/>
+                <a:cs typeface="Calibri" panose="020F0502020204030204" pitchFamily="34" charset="0"/>
+              </a:rPr>
+              <a:t>Backend</a:t>
+            </a:r>
+          </a:p>
+        </p:txBody>
+      </p:sp>
+      <p:pic>
+        <p:nvPicPr>
+          <p:cNvPr id="116" name="Picture 4">
+            <a:extLst>
+              <a:ext uri="{FF2B5EF4-FFF2-40B4-BE49-F238E27FC236}">
+                <a16:creationId xmlns:a16="http://schemas.microsoft.com/office/drawing/2014/main" id="{B7DCCBAF-8A38-3C4F-0798-30A393D5D283}"/>
+              </a:ext>
+            </a:extLst>
+          </p:cNvPr>
+          <p:cNvPicPr>
+            <a:picLocks noChangeAspect="1" noChangeArrowheads="1"/>
+          </p:cNvPicPr>
+          <p:nvPr/>
+        </p:nvPicPr>
+        <p:blipFill rotWithShape="1">
+          <a:blip r:embed="rId9">
+            <a:extLst>
+              <a:ext uri="{28A0092B-C50C-407E-A947-70E740481C1C}">
+                <a14:useLocalDpi xmlns:a14="http://schemas.microsoft.com/office/drawing/2010/main" val="0"/>
+              </a:ext>
+            </a:extLst>
+          </a:blip>
+          <a:srcRect l="13093" t="7524" r="12698" b="43966"/>
+          <a:stretch>
+            <a:fillRect/>
+          </a:stretch>
+        </p:blipFill>
+        <p:spPr bwMode="auto">
+          <a:xfrm>
+            <a:off x="2717304" y="2067458"/>
+            <a:ext cx="602696" cy="615588"/>
+          </a:xfrm>
+          <a:prstGeom prst="rect">
+            <a:avLst/>
+          </a:prstGeom>
+          <a:noFill/>
+          <a:extLst>
+            <a:ext uri="{909E8E84-426E-40DD-AFC4-6F175D3DCCD1}">
+              <a14:hiddenFill xmlns:a14="http://schemas.microsoft.com/office/drawing/2010/main">
+                <a:solidFill>
+                  <a:srgbClr val="FFFFFF"/>
+                </a:solidFill>
+              </a14:hiddenFill>
+            </a:ext>
+          </a:extLst>
+        </p:spPr>
+      </p:pic>
+      <p:pic>
+        <p:nvPicPr>
+          <p:cNvPr id="117" name="Picture 6">
+            <a:extLst>
+              <a:ext uri="{FF2B5EF4-FFF2-40B4-BE49-F238E27FC236}">
+                <a16:creationId xmlns:a16="http://schemas.microsoft.com/office/drawing/2014/main" id="{B3747ED9-0378-A202-7151-54782D96CF66}"/>
+              </a:ext>
+            </a:extLst>
+          </p:cNvPr>
+          <p:cNvPicPr>
+            <a:picLocks noChangeAspect="1" noChangeArrowheads="1"/>
+          </p:cNvPicPr>
+          <p:nvPr/>
+        </p:nvPicPr>
+        <p:blipFill rotWithShape="1">
+          <a:blip r:embed="rId10">
+            <a:extLst>
+              <a:ext uri="{28A0092B-C50C-407E-A947-70E740481C1C}">
+                <a14:useLocalDpi xmlns:a14="http://schemas.microsoft.com/office/drawing/2010/main" val="0"/>
+              </a:ext>
+            </a:extLst>
+          </a:blip>
+          <a:srcRect l="31615" t="12234" r="33730" b="47839"/>
+          <a:stretch>
+            <a:fillRect/>
+          </a:stretch>
+        </p:blipFill>
+        <p:spPr bwMode="auto">
+          <a:xfrm>
+            <a:off x="2939586" y="3240731"/>
+            <a:ext cx="664926" cy="638415"/>
+          </a:xfrm>
+          <a:prstGeom prst="rect">
+            <a:avLst/>
+          </a:prstGeom>
+          <a:noFill/>
+          <a:extLst>
+            <a:ext uri="{909E8E84-426E-40DD-AFC4-6F175D3DCCD1}">
+              <a14:hiddenFill xmlns:a14="http://schemas.microsoft.com/office/drawing/2010/main">
+                <a:solidFill>
+                  <a:srgbClr val="FFFFFF"/>
+                </a:solidFill>
+              </a14:hiddenFill>
+            </a:ext>
+          </a:extLst>
+        </p:spPr>
+      </p:pic>
+      <p:pic>
+        <p:nvPicPr>
+          <p:cNvPr id="127" name="Picture 8">
+            <a:extLst>
+              <a:ext uri="{FF2B5EF4-FFF2-40B4-BE49-F238E27FC236}">
+                <a16:creationId xmlns:a16="http://schemas.microsoft.com/office/drawing/2014/main" id="{0DF6E305-58E0-10D9-0E90-7E26126193AF}"/>
+              </a:ext>
+            </a:extLst>
+          </p:cNvPr>
+          <p:cNvPicPr>
+            <a:picLocks noChangeAspect="1" noChangeArrowheads="1"/>
+          </p:cNvPicPr>
+          <p:nvPr/>
+        </p:nvPicPr>
+        <p:blipFill>
+          <a:blip r:embed="rId11">
+            <a:extLst>
+              <a:ext uri="{28A0092B-C50C-407E-A947-70E740481C1C}">
+                <a14:useLocalDpi xmlns:a14="http://schemas.microsoft.com/office/drawing/2010/main" val="0"/>
+              </a:ext>
+            </a:extLst>
+          </a:blip>
+          <a:srcRect/>
+          <a:stretch>
+            <a:fillRect/>
+          </a:stretch>
+        </p:blipFill>
+        <p:spPr bwMode="auto">
+          <a:xfrm>
+            <a:off x="1666945" y="2093612"/>
+            <a:ext cx="574201" cy="574192"/>
+          </a:xfrm>
+          <a:prstGeom prst="rect">
+            <a:avLst/>
+          </a:prstGeom>
+          <a:noFill/>
+          <a:extLst>
+            <a:ext uri="{909E8E84-426E-40DD-AFC4-6F175D3DCCD1}">
+              <a14:hiddenFill xmlns:a14="http://schemas.microsoft.com/office/drawing/2010/main">
+                <a:solidFill>
+                  <a:srgbClr val="FFFFFF"/>
+                </a:solidFill>
+              </a14:hiddenFill>
+            </a:ext>
+          </a:extLst>
+        </p:spPr>
+      </p:pic>
+      <p:pic>
+        <p:nvPicPr>
+          <p:cNvPr id="1033" name="Picture 10">
+            <a:extLst>
+              <a:ext uri="{FF2B5EF4-FFF2-40B4-BE49-F238E27FC236}">
+                <a16:creationId xmlns:a16="http://schemas.microsoft.com/office/drawing/2014/main" id="{FD816D59-77CA-1E04-DAC5-C8410FAC6198}"/>
+              </a:ext>
+            </a:extLst>
+          </p:cNvPr>
+          <p:cNvPicPr>
+            <a:picLocks noChangeAspect="1" noChangeArrowheads="1"/>
+          </p:cNvPicPr>
+          <p:nvPr/>
+        </p:nvPicPr>
+        <p:blipFill>
+          <a:blip r:embed="rId12">
+            <a:extLst>
+              <a:ext uri="{28A0092B-C50C-407E-A947-70E740481C1C}">
+                <a14:useLocalDpi xmlns:a14="http://schemas.microsoft.com/office/drawing/2010/main" val="0"/>
+              </a:ext>
+            </a:extLst>
+          </a:blip>
+          <a:srcRect/>
+          <a:stretch>
+            <a:fillRect/>
+          </a:stretch>
+        </p:blipFill>
+        <p:spPr bwMode="auto">
+          <a:xfrm>
+            <a:off x="1684197" y="3264975"/>
+            <a:ext cx="578072" cy="578072"/>
+          </a:xfrm>
+          <a:prstGeom prst="rect">
+            <a:avLst/>
+          </a:prstGeom>
+          <a:noFill/>
+          <a:extLst>
+            <a:ext uri="{909E8E84-426E-40DD-AFC4-6F175D3DCCD1}">
+              <a14:hiddenFill xmlns:a14="http://schemas.microsoft.com/office/drawing/2010/main">
+                <a:solidFill>
+                  <a:srgbClr val="FFFFFF"/>
+                </a:solidFill>
+              </a14:hiddenFill>
+            </a:ext>
+          </a:extLst>
+        </p:spPr>
+      </p:pic>
+      <p:sp>
+        <p:nvSpPr>
+          <p:cNvPr id="3" name="Rectangle : coins arrondis 2">
+            <a:extLst>
+              <a:ext uri="{FF2B5EF4-FFF2-40B4-BE49-F238E27FC236}">
+                <a16:creationId xmlns:a16="http://schemas.microsoft.com/office/drawing/2014/main" id="{33B23519-5EFA-F17A-CAA2-6EF8A191B3CD}"/>
+              </a:ext>
+            </a:extLst>
+          </p:cNvPr>
+          <p:cNvSpPr/>
+          <p:nvPr/>
+        </p:nvSpPr>
+        <p:spPr>
+          <a:xfrm>
+            <a:off x="456709" y="1469509"/>
+            <a:ext cx="972305" cy="3123802"/>
+          </a:xfrm>
+          <a:prstGeom prst="roundRect">
+            <a:avLst/>
+          </a:prstGeom>
+          <a:noFill/>
+          <a:ln w="9525">
+            <a:solidFill>
+              <a:schemeClr val="bg1">
+                <a:lumMod val="65000"/>
+              </a:schemeClr>
+            </a:solidFill>
+            <a:prstDash val="dash"/>
+          </a:ln>
+        </p:spPr>
+        <p:style>
+          <a:lnRef idx="2">
+            <a:schemeClr val="accent1">
+              <a:shade val="15000"/>
+            </a:schemeClr>
+          </a:lnRef>
+          <a:fillRef idx="1">
+            <a:schemeClr val="accent1"/>
+          </a:fillRef>
+          <a:effectRef idx="0">
+            <a:schemeClr val="accent1"/>
+          </a:effectRef>
+          <a:fontRef idx="minor">
+            <a:schemeClr val="lt1"/>
+          </a:fontRef>
+        </p:style>
+        <p:txBody>
+          <a:bodyPr rtlCol="0" anchor="ctr"/>
+          <a:lstStyle/>
+          <a:p>
+            <a:pPr algn="ctr"/>
+            <a:endParaRPr lang="fr-FR" dirty="0"/>
+          </a:p>
+        </p:txBody>
+      </p:sp>
+      <p:cxnSp>
+        <p:nvCxnSpPr>
+          <p:cNvPr id="6" name="Connecteur droit avec flèche 5">
+            <a:extLst>
+              <a:ext uri="{FF2B5EF4-FFF2-40B4-BE49-F238E27FC236}">
+                <a16:creationId xmlns:a16="http://schemas.microsoft.com/office/drawing/2014/main" id="{804A8FE7-27C3-4C54-36F8-6A8C0900C5DA}"/>
+              </a:ext>
+            </a:extLst>
+          </p:cNvPr>
+          <p:cNvCxnSpPr>
+            <a:cxnSpLocks/>
+          </p:cNvCxnSpPr>
+          <p:nvPr/>
+        </p:nvCxnSpPr>
+        <p:spPr>
+          <a:xfrm>
+            <a:off x="1429014" y="2391164"/>
+            <a:ext cx="362079" cy="0"/>
+          </a:xfrm>
+          <a:prstGeom prst="straightConnector1">
+            <a:avLst/>
+          </a:prstGeom>
+          <a:ln w="38100">
+            <a:solidFill>
+              <a:srgbClr val="B266FF"/>
+            </a:solidFill>
+            <a:tailEnd type="triangle"/>
+          </a:ln>
+        </p:spPr>
+        <p:style>
+          <a:lnRef idx="1">
+            <a:schemeClr val="accent1"/>
+          </a:lnRef>
+          <a:fillRef idx="0">
+            <a:schemeClr val="accent1"/>
+          </a:fillRef>
+          <a:effectRef idx="0">
+            <a:schemeClr val="accent1"/>
+          </a:effectRef>
+          <a:fontRef idx="minor">
+            <a:schemeClr val="tx1"/>
+          </a:fontRef>
+        </p:style>
+      </p:cxnSp>
+      <p:cxnSp>
+        <p:nvCxnSpPr>
+          <p:cNvPr id="10" name="Connecteur droit avec flèche 9">
+            <a:extLst>
+              <a:ext uri="{FF2B5EF4-FFF2-40B4-BE49-F238E27FC236}">
+                <a16:creationId xmlns:a16="http://schemas.microsoft.com/office/drawing/2014/main" id="{A34EFFD9-2B7F-223F-36C3-4CCC46291479}"/>
+              </a:ext>
+            </a:extLst>
+          </p:cNvPr>
+          <p:cNvCxnSpPr>
+            <a:cxnSpLocks/>
+          </p:cNvCxnSpPr>
+          <p:nvPr/>
+        </p:nvCxnSpPr>
+        <p:spPr>
+          <a:xfrm>
+            <a:off x="1429014" y="3554011"/>
+            <a:ext cx="362079" cy="0"/>
+          </a:xfrm>
+          <a:prstGeom prst="straightConnector1">
+            <a:avLst/>
+          </a:prstGeom>
+          <a:ln w="38100">
+            <a:solidFill>
+              <a:srgbClr val="FF0080"/>
+            </a:solidFill>
+            <a:tailEnd type="triangle"/>
+          </a:ln>
+        </p:spPr>
+        <p:style>
+          <a:lnRef idx="1">
+            <a:schemeClr val="accent1"/>
+          </a:lnRef>
+          <a:fillRef idx="0">
+            <a:schemeClr val="accent1"/>
+          </a:fillRef>
+          <a:effectRef idx="0">
+            <a:schemeClr val="accent1"/>
+          </a:effectRef>
+          <a:fontRef idx="minor">
+            <a:schemeClr val="tx1"/>
+          </a:fontRef>
+        </p:style>
+      </p:cxnSp>
+      <p:cxnSp>
+        <p:nvCxnSpPr>
+          <p:cNvPr id="11" name="Connecteur droit avec flèche 10">
+            <a:extLst>
+              <a:ext uri="{FF2B5EF4-FFF2-40B4-BE49-F238E27FC236}">
+                <a16:creationId xmlns:a16="http://schemas.microsoft.com/office/drawing/2014/main" id="{D8A48580-543E-68C9-355D-6C2F58EACB96}"/>
+              </a:ext>
+            </a:extLst>
+          </p:cNvPr>
+          <p:cNvCxnSpPr>
+            <a:cxnSpLocks/>
+          </p:cNvCxnSpPr>
+          <p:nvPr/>
+        </p:nvCxnSpPr>
+        <p:spPr>
+          <a:xfrm>
+            <a:off x="2159509" y="2391164"/>
+            <a:ext cx="551235" cy="0"/>
+          </a:xfrm>
+          <a:prstGeom prst="straightConnector1">
+            <a:avLst/>
+          </a:prstGeom>
+          <a:ln w="38100">
+            <a:solidFill>
+              <a:srgbClr val="B266FF"/>
+            </a:solidFill>
+            <a:tailEnd type="triangle"/>
+          </a:ln>
+        </p:spPr>
+        <p:style>
+          <a:lnRef idx="1">
+            <a:schemeClr val="accent1"/>
+          </a:lnRef>
+          <a:fillRef idx="0">
+            <a:schemeClr val="accent1"/>
+          </a:fillRef>
+          <a:effectRef idx="0">
+            <a:schemeClr val="accent1"/>
+          </a:effectRef>
+          <a:fontRef idx="minor">
+            <a:schemeClr val="tx1"/>
+          </a:fontRef>
+        </p:style>
+      </p:cxnSp>
+      <p:cxnSp>
+        <p:nvCxnSpPr>
+          <p:cNvPr id="19" name="Connecteur droit avec flèche 18">
+            <a:extLst>
+              <a:ext uri="{FF2B5EF4-FFF2-40B4-BE49-F238E27FC236}">
+                <a16:creationId xmlns:a16="http://schemas.microsoft.com/office/drawing/2014/main" id="{7965C0EE-9642-2EA9-734C-AF9138078030}"/>
+              </a:ext>
+            </a:extLst>
+          </p:cNvPr>
+          <p:cNvCxnSpPr>
+            <a:cxnSpLocks/>
+            <a:stCxn id="1033" idx="3"/>
+            <a:endCxn id="117" idx="1"/>
+          </p:cNvCxnSpPr>
+          <p:nvPr/>
+        </p:nvCxnSpPr>
+        <p:spPr>
+          <a:xfrm>
+            <a:off x="2262269" y="3554011"/>
+            <a:ext cx="677317" cy="5928"/>
+          </a:xfrm>
+          <a:prstGeom prst="straightConnector1">
+            <a:avLst/>
+          </a:prstGeom>
+          <a:ln w="38100">
+            <a:solidFill>
+              <a:srgbClr val="FF0080"/>
+            </a:solidFill>
+            <a:tailEnd type="triangle"/>
+          </a:ln>
+        </p:spPr>
+        <p:style>
+          <a:lnRef idx="1">
+            <a:schemeClr val="accent1"/>
+          </a:lnRef>
+          <a:fillRef idx="0">
+            <a:schemeClr val="accent1"/>
+          </a:fillRef>
+          <a:effectRef idx="0">
+            <a:schemeClr val="accent1"/>
+          </a:effectRef>
+          <a:fontRef idx="minor">
+            <a:schemeClr val="tx1"/>
+          </a:fontRef>
+        </p:style>
+      </p:cxnSp>
+      <p:pic>
+        <p:nvPicPr>
+          <p:cNvPr id="20" name="Picture 2">
+            <a:extLst>
+              <a:ext uri="{FF2B5EF4-FFF2-40B4-BE49-F238E27FC236}">
+                <a16:creationId xmlns:a16="http://schemas.microsoft.com/office/drawing/2014/main" id="{9F92FB23-9D37-AEB9-493C-1E3DAE1913D2}"/>
+              </a:ext>
+            </a:extLst>
+          </p:cNvPr>
+          <p:cNvPicPr>
+            <a:picLocks noChangeAspect="1" noChangeArrowheads="1"/>
+          </p:cNvPicPr>
+          <p:nvPr/>
+        </p:nvPicPr>
+        <p:blipFill rotWithShape="1">
+          <a:blip r:embed="rId13">
+            <a:extLst>
+              <a:ext uri="{28A0092B-C50C-407E-A947-70E740481C1C}">
+                <a14:useLocalDpi xmlns:a14="http://schemas.microsoft.com/office/drawing/2010/main" val="0"/>
+              </a:ext>
+            </a:extLst>
+          </a:blip>
+          <a:srcRect l="15800" t="16870" r="16971" b="17050"/>
+          <a:stretch>
+            <a:fillRect/>
+          </a:stretch>
+        </p:blipFill>
+        <p:spPr bwMode="auto">
+          <a:xfrm>
+            <a:off x="3739660" y="2205082"/>
+            <a:ext cx="350993" cy="344994"/>
+          </a:xfrm>
+          <a:prstGeom prst="rect">
+            <a:avLst/>
+          </a:prstGeom>
+          <a:noFill/>
+          <a:extLst>
+            <a:ext uri="{909E8E84-426E-40DD-AFC4-6F175D3DCCD1}">
+              <a14:hiddenFill xmlns:a14="http://schemas.microsoft.com/office/drawing/2010/main">
+                <a:solidFill>
+                  <a:srgbClr val="FFFFFF"/>
+                </a:solidFill>
+              </a14:hiddenFill>
+            </a:ext>
+          </a:extLst>
+        </p:spPr>
+      </p:pic>
+      <p:cxnSp>
+        <p:nvCxnSpPr>
+          <p:cNvPr id="24" name="Connecteur droit avec flèche 23">
+            <a:extLst>
+              <a:ext uri="{FF2B5EF4-FFF2-40B4-BE49-F238E27FC236}">
+                <a16:creationId xmlns:a16="http://schemas.microsoft.com/office/drawing/2014/main" id="{9AD6B91C-AEA0-8BCF-42B4-76BEC72FDE00}"/>
+              </a:ext>
+            </a:extLst>
+          </p:cNvPr>
+          <p:cNvCxnSpPr>
+            <a:cxnSpLocks/>
+            <a:endCxn id="20" idx="1"/>
+          </p:cNvCxnSpPr>
+          <p:nvPr/>
+        </p:nvCxnSpPr>
+        <p:spPr>
+          <a:xfrm flipV="1">
+            <a:off x="3335298" y="2377579"/>
+            <a:ext cx="404362" cy="13"/>
+          </a:xfrm>
+          <a:prstGeom prst="straightConnector1">
+            <a:avLst/>
+          </a:prstGeom>
+          <a:ln w="12700">
+            <a:solidFill>
+              <a:srgbClr val="B266FF"/>
+            </a:solidFill>
+            <a:tailEnd type="triangle"/>
+          </a:ln>
+        </p:spPr>
+        <p:style>
+          <a:lnRef idx="1">
+            <a:schemeClr val="accent1"/>
+          </a:lnRef>
+          <a:fillRef idx="0">
+            <a:schemeClr val="accent1"/>
+          </a:fillRef>
+          <a:effectRef idx="0">
+            <a:schemeClr val="accent1"/>
+          </a:effectRef>
+          <a:fontRef idx="minor">
+            <a:schemeClr val="tx1"/>
+          </a:fontRef>
+        </p:style>
+      </p:cxnSp>
+      <p:pic>
+        <p:nvPicPr>
+          <p:cNvPr id="1036" name="Picture 12">
+            <a:extLst>
+              <a:ext uri="{FF2B5EF4-FFF2-40B4-BE49-F238E27FC236}">
+                <a16:creationId xmlns:a16="http://schemas.microsoft.com/office/drawing/2014/main" id="{135630BC-F5F0-17C1-438A-A312C16997F8}"/>
+              </a:ext>
+            </a:extLst>
+          </p:cNvPr>
+          <p:cNvPicPr>
+            <a:picLocks noChangeAspect="1" noChangeArrowheads="1"/>
+          </p:cNvPicPr>
+          <p:nvPr/>
+        </p:nvPicPr>
+        <p:blipFill>
+          <a:blip r:embed="rId14">
+            <a:extLst>
+              <a:ext uri="{28A0092B-C50C-407E-A947-70E740481C1C}">
+                <a14:useLocalDpi xmlns:a14="http://schemas.microsoft.com/office/drawing/2010/main" val="0"/>
+              </a:ext>
+            </a:extLst>
+          </a:blip>
+          <a:srcRect/>
+          <a:stretch>
+            <a:fillRect/>
+          </a:stretch>
+        </p:blipFill>
+        <p:spPr bwMode="auto">
+          <a:xfrm>
+            <a:off x="5590470" y="2524037"/>
+            <a:ext cx="781468" cy="564394"/>
+          </a:xfrm>
+          <a:prstGeom prst="rect">
+            <a:avLst/>
+          </a:prstGeom>
+          <a:noFill/>
+          <a:extLst>
+            <a:ext uri="{909E8E84-426E-40DD-AFC4-6F175D3DCCD1}">
+              <a14:hiddenFill xmlns:a14="http://schemas.microsoft.com/office/drawing/2010/main">
+                <a:solidFill>
+                  <a:srgbClr val="FFFFFF"/>
+                </a:solidFill>
+              </a14:hiddenFill>
+            </a:ext>
+          </a:extLst>
+        </p:spPr>
+      </p:pic>
+      <p:pic>
+        <p:nvPicPr>
+          <p:cNvPr id="1038" name="Picture 14">
+            <a:extLst>
+              <a:ext uri="{FF2B5EF4-FFF2-40B4-BE49-F238E27FC236}">
+                <a16:creationId xmlns:a16="http://schemas.microsoft.com/office/drawing/2014/main" id="{1B3822DD-A0E9-A37F-0DE9-40781F1C3DF4}"/>
+              </a:ext>
+            </a:extLst>
+          </p:cNvPr>
+          <p:cNvPicPr>
+            <a:picLocks noChangeAspect="1" noChangeArrowheads="1"/>
+          </p:cNvPicPr>
+          <p:nvPr/>
+        </p:nvPicPr>
+        <p:blipFill rotWithShape="1">
+          <a:blip r:embed="rId15">
+            <a:extLst>
+              <a:ext uri="{28A0092B-C50C-407E-A947-70E740481C1C}">
+                <a14:useLocalDpi xmlns:a14="http://schemas.microsoft.com/office/drawing/2010/main" val="0"/>
+              </a:ext>
+            </a:extLst>
+          </a:blip>
+          <a:srcRect l="6454" t="18548" b="24342"/>
+          <a:stretch>
+            <a:fillRect/>
+          </a:stretch>
+        </p:blipFill>
+        <p:spPr bwMode="auto">
+          <a:xfrm>
+            <a:off x="4575513" y="2705986"/>
+            <a:ext cx="1009143" cy="225895"/>
+          </a:xfrm>
+          <a:prstGeom prst="rect">
+            <a:avLst/>
+          </a:prstGeom>
+          <a:noFill/>
+          <a:extLst>
+            <a:ext uri="{909E8E84-426E-40DD-AFC4-6F175D3DCCD1}">
+              <a14:hiddenFill xmlns:a14="http://schemas.microsoft.com/office/drawing/2010/main">
+                <a:solidFill>
+                  <a:srgbClr val="FFFFFF"/>
+                </a:solidFill>
+              </a14:hiddenFill>
+            </a:ext>
+          </a:extLst>
+        </p:spPr>
+      </p:pic>
+      <p:sp>
+        <p:nvSpPr>
+          <p:cNvPr id="47" name="Rectangle : coins arrondis 46">
+            <a:extLst>
+              <a:ext uri="{FF2B5EF4-FFF2-40B4-BE49-F238E27FC236}">
+                <a16:creationId xmlns:a16="http://schemas.microsoft.com/office/drawing/2014/main" id="{481D51B6-7D43-7926-6891-407782B836DE}"/>
+              </a:ext>
+            </a:extLst>
+          </p:cNvPr>
+          <p:cNvSpPr/>
+          <p:nvPr/>
+        </p:nvSpPr>
+        <p:spPr>
+          <a:xfrm>
+            <a:off x="4883346" y="3012224"/>
+            <a:ext cx="1107899" cy="560285"/>
+          </a:xfrm>
+          <a:prstGeom prst="roundRect">
+            <a:avLst/>
+          </a:prstGeom>
+          <a:solidFill>
+            <a:schemeClr val="bg1">
+              <a:lumMod val="95000"/>
+            </a:schemeClr>
+          </a:solidFill>
+          <a:ln>
+            <a:noFill/>
+          </a:ln>
+        </p:spPr>
+        <p:style>
+          <a:lnRef idx="2">
+            <a:schemeClr val="accent1">
+              <a:shade val="15000"/>
+            </a:schemeClr>
+          </a:lnRef>
+          <a:fillRef idx="1">
+            <a:schemeClr val="accent1"/>
+          </a:fillRef>
+          <a:effectRef idx="0">
+            <a:schemeClr val="accent1"/>
+          </a:effectRef>
+          <a:fontRef idx="minor">
+            <a:schemeClr val="lt1"/>
+          </a:fontRef>
+        </p:style>
+        <p:txBody>
+          <a:bodyPr rtlCol="0" anchor="ctr"/>
+          <a:lstStyle/>
+          <a:p>
+            <a:pPr algn="ctr"/>
+            <a:endParaRPr lang="fr-FR" dirty="0"/>
+          </a:p>
+        </p:txBody>
+      </p:sp>
+      <p:sp>
+        <p:nvSpPr>
+          <p:cNvPr id="48" name="ZoneTexte 47">
+            <a:extLst>
+              <a:ext uri="{FF2B5EF4-FFF2-40B4-BE49-F238E27FC236}">
+                <a16:creationId xmlns:a16="http://schemas.microsoft.com/office/drawing/2014/main" id="{FE31E2F0-6B8A-B0EE-9044-0597F28AE28A}"/>
+              </a:ext>
+            </a:extLst>
+          </p:cNvPr>
+          <p:cNvSpPr txBox="1"/>
+          <p:nvPr/>
+        </p:nvSpPr>
+        <p:spPr>
+          <a:xfrm>
+            <a:off x="4909152" y="3149942"/>
+            <a:ext cx="1079654" cy="338554"/>
+          </a:xfrm>
+          <a:prstGeom prst="rect">
+            <a:avLst/>
+          </a:prstGeom>
+          <a:noFill/>
+        </p:spPr>
+        <p:txBody>
+          <a:bodyPr wrap="square" rtlCol="0">
+            <a:spAutoFit/>
+          </a:bodyPr>
+          <a:lstStyle/>
+          <a:p>
+            <a:pPr algn="ctr"/>
+            <a:r>
+              <a:rPr lang="fr-FR" sz="800" b="1" dirty="0" err="1"/>
+              <a:t>Tracking</a:t>
+            </a:r>
+            <a:r>
+              <a:rPr lang="fr-FR" sz="800" b="1" dirty="0"/>
+              <a:t> du modèle</a:t>
+            </a:r>
+          </a:p>
+        </p:txBody>
+      </p:sp>
+      <p:sp>
+        <p:nvSpPr>
+          <p:cNvPr id="49" name="Rectangle : coins arrondis 48">
+            <a:extLst>
+              <a:ext uri="{FF2B5EF4-FFF2-40B4-BE49-F238E27FC236}">
+                <a16:creationId xmlns:a16="http://schemas.microsoft.com/office/drawing/2014/main" id="{8486A803-5325-E4EE-E6D1-9C2310E9372C}"/>
+              </a:ext>
+            </a:extLst>
+          </p:cNvPr>
+          <p:cNvSpPr/>
+          <p:nvPr/>
+        </p:nvSpPr>
+        <p:spPr>
+          <a:xfrm>
+            <a:off x="4881636" y="3862081"/>
+            <a:ext cx="1109609" cy="525360"/>
+          </a:xfrm>
+          <a:prstGeom prst="roundRect">
+            <a:avLst/>
+          </a:prstGeom>
+          <a:solidFill>
+            <a:schemeClr val="bg1">
+              <a:lumMod val="95000"/>
+            </a:schemeClr>
+          </a:solidFill>
+          <a:ln>
+            <a:noFill/>
+          </a:ln>
+        </p:spPr>
+        <p:style>
+          <a:lnRef idx="2">
+            <a:schemeClr val="accent1">
+              <a:shade val="15000"/>
+            </a:schemeClr>
+          </a:lnRef>
+          <a:fillRef idx="1">
+            <a:schemeClr val="accent1"/>
+          </a:fillRef>
+          <a:effectRef idx="0">
+            <a:schemeClr val="accent1"/>
+          </a:effectRef>
+          <a:fontRef idx="minor">
+            <a:schemeClr val="lt1"/>
+          </a:fontRef>
+        </p:style>
+        <p:txBody>
+          <a:bodyPr rtlCol="0" anchor="ctr"/>
+          <a:lstStyle/>
+          <a:p>
+            <a:pPr algn="ctr"/>
+            <a:endParaRPr lang="fr-FR"/>
+          </a:p>
+        </p:txBody>
+      </p:sp>
+      <p:sp>
+        <p:nvSpPr>
+          <p:cNvPr id="50" name="ZoneTexte 49">
+            <a:extLst>
+              <a:ext uri="{FF2B5EF4-FFF2-40B4-BE49-F238E27FC236}">
+                <a16:creationId xmlns:a16="http://schemas.microsoft.com/office/drawing/2014/main" id="{D45817E9-F26B-F5AC-E969-2DB4F41AE334}"/>
+              </a:ext>
+            </a:extLst>
+          </p:cNvPr>
+          <p:cNvSpPr txBox="1"/>
+          <p:nvPr/>
+        </p:nvSpPr>
+        <p:spPr>
+          <a:xfrm>
+            <a:off x="4911591" y="3977728"/>
+            <a:ext cx="1079654" cy="338554"/>
+          </a:xfrm>
+          <a:prstGeom prst="rect">
+            <a:avLst/>
+          </a:prstGeom>
+          <a:noFill/>
+        </p:spPr>
+        <p:txBody>
+          <a:bodyPr wrap="square" rtlCol="0">
+            <a:spAutoFit/>
+          </a:bodyPr>
+          <a:lstStyle/>
+          <a:p>
+            <a:pPr algn="ctr"/>
+            <a:r>
+              <a:rPr lang="fr-FR" sz="800" b="1" dirty="0"/>
+              <a:t>Registre et runs du modèle</a:t>
+            </a:r>
+          </a:p>
+        </p:txBody>
+      </p:sp>
+      <p:pic>
+        <p:nvPicPr>
+          <p:cNvPr id="2054" name="Picture 6">
+            <a:extLst>
+              <a:ext uri="{FF2B5EF4-FFF2-40B4-BE49-F238E27FC236}">
+                <a16:creationId xmlns:a16="http://schemas.microsoft.com/office/drawing/2014/main" id="{A2294E8E-D08B-505D-5B9D-D8788A9CD32B}"/>
+              </a:ext>
+            </a:extLst>
+          </p:cNvPr>
+          <p:cNvPicPr>
+            <a:picLocks noChangeAspect="1" noChangeArrowheads="1"/>
+          </p:cNvPicPr>
+          <p:nvPr/>
+        </p:nvPicPr>
+        <p:blipFill>
+          <a:blip r:embed="rId16">
+            <a:extLst>
+              <a:ext uri="{28A0092B-C50C-407E-A947-70E740481C1C}">
+                <a14:useLocalDpi xmlns:a14="http://schemas.microsoft.com/office/drawing/2010/main" val="0"/>
+              </a:ext>
+            </a:extLst>
+          </a:blip>
+          <a:srcRect/>
+          <a:stretch>
+            <a:fillRect/>
+          </a:stretch>
+        </p:blipFill>
+        <p:spPr bwMode="auto">
+          <a:xfrm>
+            <a:off x="4691140" y="2843961"/>
+            <a:ext cx="711670" cy="374563"/>
+          </a:xfrm>
+          <a:prstGeom prst="rect">
+            <a:avLst/>
+          </a:prstGeom>
+          <a:noFill/>
+          <a:extLst>
+            <a:ext uri="{909E8E84-426E-40DD-AFC4-6F175D3DCCD1}">
+              <a14:hiddenFill xmlns:a14="http://schemas.microsoft.com/office/drawing/2010/main">
+                <a:solidFill>
+                  <a:srgbClr val="FFFFFF"/>
+                </a:solidFill>
+              </a14:hiddenFill>
+            </a:ext>
+          </a:extLst>
+        </p:spPr>
+      </p:pic>
+      <p:pic>
+        <p:nvPicPr>
+          <p:cNvPr id="51" name="Image 50" descr="Une image contenant art, pixel, conception&#10;&#10;Le contenu généré par l’IA peut être incorrect.">
+            <a:extLst>
+              <a:ext uri="{FF2B5EF4-FFF2-40B4-BE49-F238E27FC236}">
+                <a16:creationId xmlns:a16="http://schemas.microsoft.com/office/drawing/2014/main" id="{054FB5AB-F043-1139-CFA8-44C9034D1153}"/>
+              </a:ext>
+            </a:extLst>
+          </p:cNvPr>
+          <p:cNvPicPr>
+            <a:picLocks noChangeAspect="1"/>
+          </p:cNvPicPr>
+          <p:nvPr/>
+        </p:nvPicPr>
+        <p:blipFill>
+          <a:blip r:embed="rId7"/>
+          <a:stretch>
+            <a:fillRect/>
+          </a:stretch>
+        </p:blipFill>
+        <p:spPr>
+          <a:xfrm>
+            <a:off x="4776380" y="3775222"/>
+            <a:ext cx="247189" cy="295703"/>
+          </a:xfrm>
+          <a:prstGeom prst="rect">
+            <a:avLst/>
+          </a:prstGeom>
+        </p:spPr>
+      </p:pic>
+      <p:sp>
+        <p:nvSpPr>
+          <p:cNvPr id="52" name="Ellipse 51">
+            <a:extLst>
+              <a:ext uri="{FF2B5EF4-FFF2-40B4-BE49-F238E27FC236}">
+                <a16:creationId xmlns:a16="http://schemas.microsoft.com/office/drawing/2014/main" id="{7A45A31B-42CC-CB8B-442E-3576FB243381}"/>
+              </a:ext>
+            </a:extLst>
+          </p:cNvPr>
+          <p:cNvSpPr/>
+          <p:nvPr/>
+        </p:nvSpPr>
+        <p:spPr>
+          <a:xfrm>
+            <a:off x="5535850" y="2751648"/>
+            <a:ext cx="122984" cy="122984"/>
+          </a:xfrm>
+          <a:prstGeom prst="ellipse">
+            <a:avLst/>
+          </a:prstGeom>
+          <a:solidFill>
+            <a:srgbClr val="41545E"/>
+          </a:solidFill>
+          <a:ln>
+            <a:noFill/>
+          </a:ln>
+        </p:spPr>
+        <p:style>
+          <a:lnRef idx="2">
+            <a:schemeClr val="accent1">
+              <a:shade val="15000"/>
+            </a:schemeClr>
+          </a:lnRef>
+          <a:fillRef idx="1">
+            <a:schemeClr val="accent1"/>
+          </a:fillRef>
+          <a:effectRef idx="0">
+            <a:schemeClr val="accent1"/>
+          </a:effectRef>
+          <a:fontRef idx="minor">
+            <a:schemeClr val="lt1"/>
+          </a:fontRef>
+        </p:style>
+        <p:txBody>
+          <a:bodyPr rtlCol="0" anchor="ctr"/>
+          <a:lstStyle/>
+          <a:p>
+            <a:pPr algn="ctr"/>
+            <a:r>
+              <a:rPr lang="fr-FR" sz="900" dirty="0"/>
+              <a:t>+</a:t>
+            </a:r>
+          </a:p>
+        </p:txBody>
+      </p:sp>
+      <p:sp>
+        <p:nvSpPr>
+          <p:cNvPr id="53" name="Rectangle : coins arrondis 52">
+            <a:extLst>
+              <a:ext uri="{FF2B5EF4-FFF2-40B4-BE49-F238E27FC236}">
+                <a16:creationId xmlns:a16="http://schemas.microsoft.com/office/drawing/2014/main" id="{CF1F8123-FC2A-EF28-8139-FC1D62216C5F}"/>
+              </a:ext>
+            </a:extLst>
+          </p:cNvPr>
+          <p:cNvSpPr/>
+          <p:nvPr/>
+        </p:nvSpPr>
+        <p:spPr>
+          <a:xfrm>
+            <a:off x="4531529" y="2628306"/>
+            <a:ext cx="1796425" cy="1870262"/>
+          </a:xfrm>
+          <a:prstGeom prst="roundRect">
+            <a:avLst>
+              <a:gd name="adj" fmla="val 10895"/>
+            </a:avLst>
+          </a:prstGeom>
+          <a:noFill/>
+          <a:ln w="9525">
+            <a:solidFill>
+              <a:srgbClr val="00B050"/>
+            </a:solidFill>
+            <a:prstDash val="dash"/>
+          </a:ln>
+        </p:spPr>
+        <p:style>
+          <a:lnRef idx="2">
+            <a:schemeClr val="accent1">
+              <a:shade val="15000"/>
+            </a:schemeClr>
+          </a:lnRef>
+          <a:fillRef idx="1">
+            <a:schemeClr val="accent1"/>
+          </a:fillRef>
+          <a:effectRef idx="0">
+            <a:schemeClr val="accent1"/>
+          </a:effectRef>
+          <a:fontRef idx="minor">
+            <a:schemeClr val="lt1"/>
+          </a:fontRef>
+        </p:style>
+        <p:txBody>
+          <a:bodyPr rtlCol="0" anchor="ctr"/>
+          <a:lstStyle/>
+          <a:p>
+            <a:pPr algn="ctr"/>
+            <a:endParaRPr lang="fr-FR" dirty="0"/>
+          </a:p>
+        </p:txBody>
+      </p:sp>
+      <p:cxnSp>
+        <p:nvCxnSpPr>
+          <p:cNvPr id="1046" name="Connecteur droit avec flèche 1045">
+            <a:extLst>
+              <a:ext uri="{FF2B5EF4-FFF2-40B4-BE49-F238E27FC236}">
+                <a16:creationId xmlns:a16="http://schemas.microsoft.com/office/drawing/2014/main" id="{F59A3777-3D90-7CA7-F89E-8874DA5F6283}"/>
+              </a:ext>
+            </a:extLst>
+          </p:cNvPr>
+          <p:cNvCxnSpPr>
+            <a:cxnSpLocks/>
+            <a:stCxn id="46" idx="2"/>
+          </p:cNvCxnSpPr>
+          <p:nvPr/>
+        </p:nvCxnSpPr>
+        <p:spPr>
+          <a:xfrm>
+            <a:off x="5427620" y="2302794"/>
+            <a:ext cx="2122" cy="325512"/>
+          </a:xfrm>
+          <a:prstGeom prst="straightConnector1">
+            <a:avLst/>
+          </a:prstGeom>
+          <a:ln w="38100">
+            <a:solidFill>
+              <a:srgbClr val="00B050"/>
+            </a:solidFill>
+            <a:tailEnd type="triangle"/>
+          </a:ln>
+        </p:spPr>
+        <p:style>
+          <a:lnRef idx="1">
+            <a:schemeClr val="accent1"/>
+          </a:lnRef>
+          <a:fillRef idx="0">
+            <a:schemeClr val="accent1"/>
+          </a:fillRef>
+          <a:effectRef idx="0">
+            <a:schemeClr val="accent1"/>
+          </a:effectRef>
+          <a:fontRef idx="minor">
+            <a:schemeClr val="tx1"/>
+          </a:fontRef>
+        </p:style>
+      </p:cxnSp>
+      <p:cxnSp>
+        <p:nvCxnSpPr>
+          <p:cNvPr id="1068" name="Connecteur droit avec flèche 1067">
+            <a:extLst>
+              <a:ext uri="{FF2B5EF4-FFF2-40B4-BE49-F238E27FC236}">
+                <a16:creationId xmlns:a16="http://schemas.microsoft.com/office/drawing/2014/main" id="{3FF98031-1DCE-7770-7F38-10F134A37AB2}"/>
+              </a:ext>
+            </a:extLst>
+          </p:cNvPr>
+          <p:cNvCxnSpPr>
+            <a:cxnSpLocks/>
+            <a:stCxn id="47" idx="2"/>
+            <a:endCxn id="49" idx="0"/>
+          </p:cNvCxnSpPr>
+          <p:nvPr/>
+        </p:nvCxnSpPr>
+        <p:spPr>
+          <a:xfrm flipH="1">
+            <a:off x="5436441" y="3572509"/>
+            <a:ext cx="855" cy="289572"/>
+          </a:xfrm>
+          <a:prstGeom prst="straightConnector1">
+            <a:avLst/>
+          </a:prstGeom>
+          <a:ln w="12700">
+            <a:solidFill>
+              <a:srgbClr val="00B050"/>
+            </a:solidFill>
+            <a:tailEnd type="triangle"/>
+          </a:ln>
+        </p:spPr>
+        <p:style>
+          <a:lnRef idx="1">
+            <a:schemeClr val="accent1"/>
+          </a:lnRef>
+          <a:fillRef idx="0">
+            <a:schemeClr val="accent1"/>
+          </a:fillRef>
+          <a:effectRef idx="0">
+            <a:schemeClr val="accent1"/>
+          </a:effectRef>
+          <a:fontRef idx="minor">
+            <a:schemeClr val="tx1"/>
+          </a:fontRef>
+        </p:style>
+      </p:cxnSp>
+      <p:cxnSp>
+        <p:nvCxnSpPr>
+          <p:cNvPr id="30" name="Connecteur droit 29">
+            <a:extLst>
+              <a:ext uri="{FF2B5EF4-FFF2-40B4-BE49-F238E27FC236}">
+                <a16:creationId xmlns:a16="http://schemas.microsoft.com/office/drawing/2014/main" id="{DD9C7B50-C6F5-7260-C61A-2CAE5E4C0BF7}"/>
+              </a:ext>
+            </a:extLst>
+          </p:cNvPr>
+          <p:cNvCxnSpPr/>
+          <p:nvPr/>
+        </p:nvCxnSpPr>
+        <p:spPr>
+          <a:xfrm>
+            <a:off x="6450928" y="1458686"/>
+            <a:ext cx="0" cy="3272971"/>
+          </a:xfrm>
+          <a:prstGeom prst="line">
+            <a:avLst/>
+          </a:prstGeom>
+          <a:ln w="19050">
+            <a:solidFill>
+              <a:schemeClr val="bg1">
+                <a:lumMod val="75000"/>
+              </a:schemeClr>
+            </a:solidFill>
+            <a:prstDash val="dash"/>
+          </a:ln>
+        </p:spPr>
+        <p:style>
+          <a:lnRef idx="1">
+            <a:schemeClr val="dk1"/>
+          </a:lnRef>
+          <a:fillRef idx="0">
+            <a:schemeClr val="dk1"/>
+          </a:fillRef>
+          <a:effectRef idx="0">
+            <a:schemeClr val="dk1"/>
+          </a:effectRef>
+          <a:fontRef idx="minor">
+            <a:schemeClr val="tx1"/>
+          </a:fontRef>
+        </p:style>
+      </p:cxnSp>
+      <p:sp>
+        <p:nvSpPr>
+          <p:cNvPr id="46" name="Rectangle : coins arrondis 45">
+            <a:extLst>
+              <a:ext uri="{FF2B5EF4-FFF2-40B4-BE49-F238E27FC236}">
+                <a16:creationId xmlns:a16="http://schemas.microsoft.com/office/drawing/2014/main" id="{E433E364-4228-6856-536E-34873F6A6DC3}"/>
+              </a:ext>
+            </a:extLst>
+          </p:cNvPr>
+          <p:cNvSpPr/>
+          <p:nvPr/>
+        </p:nvSpPr>
+        <p:spPr>
+          <a:xfrm>
+            <a:off x="4809680" y="1817936"/>
+            <a:ext cx="1235879" cy="484858"/>
+          </a:xfrm>
+          <a:prstGeom prst="roundRect">
+            <a:avLst/>
+          </a:prstGeom>
+          <a:solidFill>
+            <a:schemeClr val="bg1">
+              <a:lumMod val="95000"/>
+            </a:schemeClr>
+          </a:solidFill>
+          <a:ln>
+            <a:noFill/>
+          </a:ln>
+        </p:spPr>
+        <p:style>
+          <a:lnRef idx="2">
+            <a:schemeClr val="accent1">
+              <a:shade val="15000"/>
+            </a:schemeClr>
+          </a:lnRef>
+          <a:fillRef idx="1">
+            <a:schemeClr val="accent1"/>
+          </a:fillRef>
+          <a:effectRef idx="0">
+            <a:schemeClr val="accent1"/>
+          </a:effectRef>
+          <a:fontRef idx="minor">
+            <a:schemeClr val="lt1"/>
+          </a:fontRef>
+        </p:style>
+        <p:txBody>
+          <a:bodyPr rtlCol="0" anchor="ctr"/>
+          <a:lstStyle/>
+          <a:p>
+            <a:pPr algn="ctr"/>
+            <a:endParaRPr lang="fr-FR" dirty="0"/>
+          </a:p>
+        </p:txBody>
+      </p:sp>
+      <p:pic>
+        <p:nvPicPr>
+          <p:cNvPr id="1034" name="Picture 10">
+            <a:extLst>
+              <a:ext uri="{FF2B5EF4-FFF2-40B4-BE49-F238E27FC236}">
+                <a16:creationId xmlns:a16="http://schemas.microsoft.com/office/drawing/2014/main" id="{748B16F9-6C53-91C1-4712-424BF6CE8989}"/>
+              </a:ext>
+            </a:extLst>
+          </p:cNvPr>
+          <p:cNvPicPr>
+            <a:picLocks noChangeAspect="1" noChangeArrowheads="1"/>
+          </p:cNvPicPr>
+          <p:nvPr/>
+        </p:nvPicPr>
+        <p:blipFill>
+          <a:blip r:embed="rId17">
+            <a:extLst>
+              <a:ext uri="{28A0092B-C50C-407E-A947-70E740481C1C}">
+                <a14:useLocalDpi xmlns:a14="http://schemas.microsoft.com/office/drawing/2010/main" val="0"/>
+              </a:ext>
+            </a:extLst>
+          </a:blip>
+          <a:srcRect/>
+          <a:stretch>
+            <a:fillRect/>
+          </a:stretch>
+        </p:blipFill>
+        <p:spPr bwMode="auto">
+          <a:xfrm>
+            <a:off x="4608049" y="1580684"/>
+            <a:ext cx="506762" cy="506762"/>
+          </a:xfrm>
+          <a:prstGeom prst="rect">
+            <a:avLst/>
+          </a:prstGeom>
+          <a:noFill/>
+          <a:extLst>
+            <a:ext uri="{909E8E84-426E-40DD-AFC4-6F175D3DCCD1}">
+              <a14:hiddenFill xmlns:a14="http://schemas.microsoft.com/office/drawing/2010/main">
+                <a:solidFill>
+                  <a:srgbClr val="FFFFFF"/>
+                </a:solidFill>
+              </a14:hiddenFill>
+            </a:ext>
+          </a:extLst>
+        </p:spPr>
+      </p:pic>
+      <p:sp>
+        <p:nvSpPr>
+          <p:cNvPr id="44" name="ZoneTexte 43">
+            <a:extLst>
+              <a:ext uri="{FF2B5EF4-FFF2-40B4-BE49-F238E27FC236}">
+                <a16:creationId xmlns:a16="http://schemas.microsoft.com/office/drawing/2014/main" id="{682088E1-064C-5214-7A97-A059E4869B55}"/>
+              </a:ext>
+            </a:extLst>
+          </p:cNvPr>
+          <p:cNvSpPr txBox="1"/>
+          <p:nvPr/>
+        </p:nvSpPr>
+        <p:spPr>
+          <a:xfrm>
+            <a:off x="4913179" y="1841943"/>
+            <a:ext cx="1079654" cy="338554"/>
+          </a:xfrm>
+          <a:prstGeom prst="rect">
+            <a:avLst/>
+          </a:prstGeom>
+          <a:noFill/>
+        </p:spPr>
+        <p:txBody>
+          <a:bodyPr wrap="square" rtlCol="0">
+            <a:spAutoFit/>
+          </a:bodyPr>
+          <a:lstStyle/>
+          <a:p>
+            <a:pPr algn="ctr"/>
+            <a:r>
+              <a:rPr lang="fr-FR" sz="800" b="1" dirty="0"/>
+              <a:t>Entraînement du modèle</a:t>
+            </a:r>
+          </a:p>
+        </p:txBody>
+      </p:sp>
+      <p:cxnSp>
+        <p:nvCxnSpPr>
+          <p:cNvPr id="108" name="Connecteur droit avec flèche 107">
+            <a:extLst>
+              <a:ext uri="{FF2B5EF4-FFF2-40B4-BE49-F238E27FC236}">
+                <a16:creationId xmlns:a16="http://schemas.microsoft.com/office/drawing/2014/main" id="{8FC538F3-E888-6C1B-940B-D6B968D8FCEE}"/>
+              </a:ext>
+            </a:extLst>
+          </p:cNvPr>
+          <p:cNvCxnSpPr>
+            <a:cxnSpLocks/>
+          </p:cNvCxnSpPr>
+          <p:nvPr/>
+        </p:nvCxnSpPr>
+        <p:spPr>
+          <a:xfrm>
+            <a:off x="4245348" y="2035648"/>
+            <a:ext cx="551235" cy="0"/>
+          </a:xfrm>
+          <a:prstGeom prst="straightConnector1">
+            <a:avLst/>
+          </a:prstGeom>
+          <a:ln w="38100">
+            <a:solidFill>
+              <a:srgbClr val="00B050"/>
+            </a:solidFill>
+            <a:tailEnd type="triangle"/>
+          </a:ln>
+        </p:spPr>
+        <p:style>
+          <a:lnRef idx="1">
+            <a:schemeClr val="accent1"/>
+          </a:lnRef>
+          <a:fillRef idx="0">
+            <a:schemeClr val="accent1"/>
+          </a:fillRef>
+          <a:effectRef idx="0">
+            <a:schemeClr val="accent1"/>
+          </a:effectRef>
+          <a:fontRef idx="minor">
+            <a:schemeClr val="tx1"/>
+          </a:fontRef>
+        </p:style>
+      </p:cxnSp>
+      <p:sp>
+        <p:nvSpPr>
+          <p:cNvPr id="31" name="ZoneTexte 30">
+            <a:extLst>
+              <a:ext uri="{FF2B5EF4-FFF2-40B4-BE49-F238E27FC236}">
+                <a16:creationId xmlns:a16="http://schemas.microsoft.com/office/drawing/2014/main" id="{6F47604A-F072-9B2B-A28D-D050592AE8FB}"/>
+              </a:ext>
+            </a:extLst>
+          </p:cNvPr>
+          <p:cNvSpPr txBox="1"/>
+          <p:nvPr/>
+        </p:nvSpPr>
+        <p:spPr>
+          <a:xfrm>
+            <a:off x="2394220" y="2666628"/>
+            <a:ext cx="1390212" cy="307777"/>
+          </a:xfrm>
+          <a:prstGeom prst="rect">
+            <a:avLst/>
+          </a:prstGeom>
+          <a:noFill/>
+        </p:spPr>
+        <p:txBody>
+          <a:bodyPr wrap="square" rtlCol="0">
+            <a:spAutoFit/>
+          </a:bodyPr>
+          <a:lstStyle/>
+          <a:p>
+            <a:pPr algn="ctr"/>
+            <a:r>
+              <a:rPr lang="fr-FR" sz="700" b="1" dirty="0"/>
+              <a:t>Données historiques :</a:t>
+            </a:r>
+          </a:p>
+          <a:p>
+            <a:pPr algn="ctr"/>
+            <a:r>
+              <a:rPr lang="fr-FR" sz="700" b="1" dirty="0"/>
+              <a:t>RTE, Solar, </a:t>
+            </a:r>
+            <a:r>
+              <a:rPr lang="fr-FR" sz="700" b="1" dirty="0" err="1"/>
+              <a:t>Openweather</a:t>
+            </a:r>
+            <a:r>
+              <a:rPr lang="fr-FR" sz="700" b="1" dirty="0"/>
+              <a:t> </a:t>
+            </a:r>
+          </a:p>
+        </p:txBody>
+      </p:sp>
+      <p:sp>
+        <p:nvSpPr>
+          <p:cNvPr id="32" name="ZoneTexte 31">
+            <a:extLst>
+              <a:ext uri="{FF2B5EF4-FFF2-40B4-BE49-F238E27FC236}">
+                <a16:creationId xmlns:a16="http://schemas.microsoft.com/office/drawing/2014/main" id="{746A74A5-8390-A9B2-0686-BA8885C4CDA4}"/>
+              </a:ext>
+            </a:extLst>
+          </p:cNvPr>
+          <p:cNvSpPr txBox="1"/>
+          <p:nvPr/>
+        </p:nvSpPr>
+        <p:spPr>
+          <a:xfrm>
+            <a:off x="2586439" y="3823045"/>
+            <a:ext cx="1390212" cy="307777"/>
+          </a:xfrm>
+          <a:prstGeom prst="rect">
+            <a:avLst/>
+          </a:prstGeom>
+          <a:noFill/>
+        </p:spPr>
+        <p:txBody>
+          <a:bodyPr wrap="square" rtlCol="0">
+            <a:spAutoFit/>
+          </a:bodyPr>
+          <a:lstStyle/>
+          <a:p>
+            <a:pPr algn="ctr"/>
+            <a:r>
+              <a:rPr lang="fr-FR" sz="700" b="1" dirty="0"/>
+              <a:t>Données prédictives : </a:t>
+            </a:r>
+          </a:p>
+          <a:p>
+            <a:pPr algn="ctr"/>
+            <a:r>
+              <a:rPr lang="fr-FR" sz="700" b="1" dirty="0"/>
+              <a:t>Solar, </a:t>
+            </a:r>
+            <a:r>
+              <a:rPr lang="fr-FR" sz="700" b="1" dirty="0" err="1"/>
+              <a:t>Openweather</a:t>
+            </a:r>
+            <a:endParaRPr lang="fr-FR" sz="700" b="1" dirty="0"/>
+          </a:p>
+        </p:txBody>
+      </p:sp>
+      <p:cxnSp>
+        <p:nvCxnSpPr>
           <p:cNvPr id="1029" name="Connecteur : en angle 1028">
             <a:extLst>
               <a:ext uri="{FF2B5EF4-FFF2-40B4-BE49-F238E27FC236}">
@@ -31959,52 +33655,6 @@
           <a:ln w="12700">
             <a:solidFill>
               <a:srgbClr val="B266FF"/>
-            </a:solidFill>
-            <a:tailEnd type="triangle"/>
-          </a:ln>
-        </p:spPr>
-        <p:style>
-          <a:lnRef idx="1">
-            <a:schemeClr val="accent1"/>
-          </a:lnRef>
-          <a:fillRef idx="0">
-            <a:schemeClr val="accent1"/>
-          </a:fillRef>
-          <a:effectRef idx="0">
-            <a:schemeClr val="accent1"/>
-          </a:effectRef>
-          <a:fontRef idx="minor">
-            <a:schemeClr val="tx1"/>
-          </a:fontRef>
-        </p:style>
-      </p:cxnSp>
-      <p:cxnSp>
-        <p:nvCxnSpPr>
-          <p:cNvPr id="1046" name="Connecteur droit avec flèche 1045">
-            <a:extLst>
-              <a:ext uri="{FF2B5EF4-FFF2-40B4-BE49-F238E27FC236}">
-                <a16:creationId xmlns:a16="http://schemas.microsoft.com/office/drawing/2014/main" id="{F59A3777-3D90-7CA7-F89E-8874DA5F6283}"/>
-              </a:ext>
-            </a:extLst>
-          </p:cNvPr>
-          <p:cNvCxnSpPr>
-            <a:cxnSpLocks/>
-            <a:stCxn id="46" idx="2"/>
-            <a:endCxn id="53" idx="0"/>
-          </p:cNvCxnSpPr>
-          <p:nvPr/>
-        </p:nvCxnSpPr>
-        <p:spPr>
-          <a:xfrm>
-            <a:off x="5415383" y="2302794"/>
-            <a:ext cx="2122" cy="325512"/>
-          </a:xfrm>
-          <a:prstGeom prst="straightConnector1">
-            <a:avLst/>
-          </a:prstGeom>
-          <a:ln w="38100">
-            <a:solidFill>
-              <a:srgbClr val="00B050"/>
             </a:solidFill>
             <a:tailEnd type="triangle"/>
           </a:ln>
@@ -32070,439 +33720,6 @@
           </a:fontRef>
         </p:style>
       </p:cxnSp>
-      <p:cxnSp>
-        <p:nvCxnSpPr>
-          <p:cNvPr id="1068" name="Connecteur droit avec flèche 1067">
-            <a:extLst>
-              <a:ext uri="{FF2B5EF4-FFF2-40B4-BE49-F238E27FC236}">
-                <a16:creationId xmlns:a16="http://schemas.microsoft.com/office/drawing/2014/main" id="{3FF98031-1DCE-7770-7F38-10F134A37AB2}"/>
-              </a:ext>
-            </a:extLst>
-          </p:cNvPr>
-          <p:cNvCxnSpPr>
-            <a:cxnSpLocks/>
-            <a:stCxn id="47" idx="2"/>
-            <a:endCxn id="49" idx="0"/>
-          </p:cNvCxnSpPr>
-          <p:nvPr/>
-        </p:nvCxnSpPr>
-        <p:spPr>
-          <a:xfrm flipH="1">
-            <a:off x="5424204" y="3572509"/>
-            <a:ext cx="855" cy="289572"/>
-          </a:xfrm>
-          <a:prstGeom prst="straightConnector1">
-            <a:avLst/>
-          </a:prstGeom>
-          <a:ln w="12700">
-            <a:solidFill>
-              <a:srgbClr val="FFC000"/>
-            </a:solidFill>
-            <a:tailEnd type="triangle"/>
-          </a:ln>
-        </p:spPr>
-        <p:style>
-          <a:lnRef idx="1">
-            <a:schemeClr val="accent1"/>
-          </a:lnRef>
-          <a:fillRef idx="0">
-            <a:schemeClr val="accent1"/>
-          </a:fillRef>
-          <a:effectRef idx="0">
-            <a:schemeClr val="accent1"/>
-          </a:effectRef>
-          <a:fontRef idx="minor">
-            <a:schemeClr val="tx1"/>
-          </a:fontRef>
-        </p:style>
-      </p:cxnSp>
-      <p:cxnSp>
-        <p:nvCxnSpPr>
-          <p:cNvPr id="1075" name="Connecteur : en angle 1074">
-            <a:extLst>
-              <a:ext uri="{FF2B5EF4-FFF2-40B4-BE49-F238E27FC236}">
-                <a16:creationId xmlns:a16="http://schemas.microsoft.com/office/drawing/2014/main" id="{EB70B985-2508-613E-3824-FAD3BB6966AC}"/>
-              </a:ext>
-            </a:extLst>
-          </p:cNvPr>
-          <p:cNvCxnSpPr>
-            <a:cxnSpLocks/>
-            <a:stCxn id="2097" idx="2"/>
-            <a:endCxn id="43" idx="3"/>
-          </p:cNvCxnSpPr>
-          <p:nvPr/>
-        </p:nvCxnSpPr>
-        <p:spPr>
-          <a:xfrm rot="5400000">
-            <a:off x="7570819" y="3859448"/>
-            <a:ext cx="739989" cy="298315"/>
-          </a:xfrm>
-          <a:prstGeom prst="bentConnector2">
-            <a:avLst/>
-          </a:prstGeom>
-          <a:ln>
-            <a:headEnd type="triangle"/>
-            <a:tailEnd type="triangle"/>
-          </a:ln>
-        </p:spPr>
-        <p:style>
-          <a:lnRef idx="1">
-            <a:schemeClr val="accent1"/>
-          </a:lnRef>
-          <a:fillRef idx="0">
-            <a:schemeClr val="accent1"/>
-          </a:fillRef>
-          <a:effectRef idx="0">
-            <a:schemeClr val="accent1"/>
-          </a:effectRef>
-          <a:fontRef idx="minor">
-            <a:schemeClr val="tx1"/>
-          </a:fontRef>
-        </p:style>
-      </p:cxnSp>
-      <p:pic>
-        <p:nvPicPr>
-          <p:cNvPr id="1026" name="Picture 2">
-            <a:extLst>
-              <a:ext uri="{FF2B5EF4-FFF2-40B4-BE49-F238E27FC236}">
-                <a16:creationId xmlns:a16="http://schemas.microsoft.com/office/drawing/2014/main" id="{923FE2F2-F305-A7CE-975B-2A2BA912E4B7}"/>
-              </a:ext>
-            </a:extLst>
-          </p:cNvPr>
-          <p:cNvPicPr>
-            <a:picLocks noChangeAspect="1" noChangeArrowheads="1"/>
-          </p:cNvPicPr>
-          <p:nvPr/>
-        </p:nvPicPr>
-        <p:blipFill rotWithShape="1">
-          <a:blip r:embed="rId10">
-            <a:extLst>
-              <a:ext uri="{28A0092B-C50C-407E-A947-70E740481C1C}">
-                <a14:useLocalDpi xmlns:a14="http://schemas.microsoft.com/office/drawing/2010/main" val="0"/>
-              </a:ext>
-            </a:extLst>
-          </a:blip>
-          <a:srcRect l="14585" t="12264" r="16331" b="16417"/>
-          <a:stretch>
-            <a:fillRect/>
-          </a:stretch>
-        </p:blipFill>
-        <p:spPr bwMode="auto">
-          <a:xfrm>
-            <a:off x="1095600" y="1606201"/>
-            <a:ext cx="264768" cy="273335"/>
-          </a:xfrm>
-          <a:prstGeom prst="rect">
-            <a:avLst/>
-          </a:prstGeom>
-          <a:noFill/>
-          <a:extLst>
-            <a:ext uri="{909E8E84-426E-40DD-AFC4-6F175D3DCCD1}">
-              <a14:hiddenFill xmlns:a14="http://schemas.microsoft.com/office/drawing/2010/main">
-                <a:solidFill>
-                  <a:srgbClr val="FFFFFF"/>
-                </a:solidFill>
-              </a14:hiddenFill>
-            </a:ext>
-          </a:extLst>
-        </p:spPr>
-      </p:pic>
-      <p:cxnSp>
-        <p:nvCxnSpPr>
-          <p:cNvPr id="29" name="Connecteur droit 28">
-            <a:extLst>
-              <a:ext uri="{FF2B5EF4-FFF2-40B4-BE49-F238E27FC236}">
-                <a16:creationId xmlns:a16="http://schemas.microsoft.com/office/drawing/2014/main" id="{2F5C326A-12BF-B849-9176-2CB67D7A7ED9}"/>
-              </a:ext>
-            </a:extLst>
-          </p:cNvPr>
-          <p:cNvCxnSpPr/>
-          <p:nvPr/>
-        </p:nvCxnSpPr>
-        <p:spPr>
-          <a:xfrm>
-            <a:off x="4378905" y="1458686"/>
-            <a:ext cx="0" cy="3272971"/>
-          </a:xfrm>
-          <a:prstGeom prst="line">
-            <a:avLst/>
-          </a:prstGeom>
-          <a:ln w="19050">
-            <a:solidFill>
-              <a:schemeClr val="bg1">
-                <a:lumMod val="75000"/>
-              </a:schemeClr>
-            </a:solidFill>
-            <a:prstDash val="dash"/>
-          </a:ln>
-        </p:spPr>
-        <p:style>
-          <a:lnRef idx="1">
-            <a:schemeClr val="dk1"/>
-          </a:lnRef>
-          <a:fillRef idx="0">
-            <a:schemeClr val="dk1"/>
-          </a:fillRef>
-          <a:effectRef idx="0">
-            <a:schemeClr val="dk1"/>
-          </a:effectRef>
-          <a:fontRef idx="minor">
-            <a:schemeClr val="tx1"/>
-          </a:fontRef>
-        </p:style>
-      </p:cxnSp>
-      <p:sp>
-        <p:nvSpPr>
-          <p:cNvPr id="71" name="Rectangle : coins arrondis 70">
-            <a:extLst>
-              <a:ext uri="{FF2B5EF4-FFF2-40B4-BE49-F238E27FC236}">
-                <a16:creationId xmlns:a16="http://schemas.microsoft.com/office/drawing/2014/main" id="{E74B2057-34BC-1980-9671-44A128491597}"/>
-              </a:ext>
-            </a:extLst>
-          </p:cNvPr>
-          <p:cNvSpPr/>
-          <p:nvPr/>
-        </p:nvSpPr>
-        <p:spPr>
-          <a:xfrm>
-            <a:off x="2461359" y="1711807"/>
-            <a:ext cx="1776005" cy="2786761"/>
-          </a:xfrm>
-          <a:prstGeom prst="roundRect">
-            <a:avLst/>
-          </a:prstGeom>
-          <a:noFill/>
-          <a:ln w="9525">
-            <a:solidFill>
-              <a:srgbClr val="00B050"/>
-            </a:solidFill>
-            <a:prstDash val="dash"/>
-          </a:ln>
-        </p:spPr>
-        <p:style>
-          <a:lnRef idx="2">
-            <a:schemeClr val="accent1">
-              <a:shade val="15000"/>
-            </a:schemeClr>
-          </a:lnRef>
-          <a:fillRef idx="1">
-            <a:schemeClr val="accent1"/>
-          </a:fillRef>
-          <a:effectRef idx="0">
-            <a:schemeClr val="accent1"/>
-          </a:effectRef>
-          <a:fontRef idx="minor">
-            <a:schemeClr val="lt1"/>
-          </a:fontRef>
-        </p:style>
-        <p:txBody>
-          <a:bodyPr rtlCol="0" anchor="ctr"/>
-          <a:lstStyle/>
-          <a:p>
-            <a:pPr algn="ctr"/>
-            <a:endParaRPr lang="fr-FR" dirty="0"/>
-          </a:p>
-        </p:txBody>
-      </p:sp>
-      <p:sp>
-        <p:nvSpPr>
-          <p:cNvPr id="106" name="Rectangle : coins arrondis 105">
-            <a:extLst>
-              <a:ext uri="{FF2B5EF4-FFF2-40B4-BE49-F238E27FC236}">
-                <a16:creationId xmlns:a16="http://schemas.microsoft.com/office/drawing/2014/main" id="{70820C9A-B957-87A8-109D-6C661627DA4C}"/>
-              </a:ext>
-            </a:extLst>
-          </p:cNvPr>
-          <p:cNvSpPr/>
-          <p:nvPr/>
-        </p:nvSpPr>
-        <p:spPr>
-          <a:xfrm>
-            <a:off x="3364720" y="4340702"/>
-            <a:ext cx="868391" cy="252609"/>
-          </a:xfrm>
-          <a:prstGeom prst="roundRect">
-            <a:avLst/>
-          </a:prstGeom>
-          <a:solidFill>
-            <a:schemeClr val="bg1">
-              <a:lumMod val="95000"/>
-            </a:schemeClr>
-          </a:solidFill>
-          <a:ln>
-            <a:noFill/>
-          </a:ln>
-        </p:spPr>
-        <p:style>
-          <a:lnRef idx="2">
-            <a:schemeClr val="accent1">
-              <a:shade val="15000"/>
-            </a:schemeClr>
-          </a:lnRef>
-          <a:fillRef idx="1">
-            <a:schemeClr val="accent1"/>
-          </a:fillRef>
-          <a:effectRef idx="0">
-            <a:schemeClr val="accent1"/>
-          </a:effectRef>
-          <a:fontRef idx="minor">
-            <a:schemeClr val="lt1"/>
-          </a:fontRef>
-        </p:style>
-        <p:txBody>
-          <a:bodyPr rtlCol="0" anchor="ctr"/>
-          <a:lstStyle/>
-          <a:p>
-            <a:r>
-              <a:rPr lang="fr-FR" sz="700" b="1" dirty="0">
-                <a:solidFill>
-                  <a:schemeClr val="tx1"/>
-                </a:solidFill>
-              </a:rPr>
-              <a:t>AWS S3</a:t>
-            </a:r>
-          </a:p>
-        </p:txBody>
-      </p:sp>
-      <p:pic>
-        <p:nvPicPr>
-          <p:cNvPr id="107" name="Image 106" descr="Une image contenant art, pixel, conception&#10;&#10;Le contenu généré par l’IA peut être incorrect.">
-            <a:extLst>
-              <a:ext uri="{FF2B5EF4-FFF2-40B4-BE49-F238E27FC236}">
-                <a16:creationId xmlns:a16="http://schemas.microsoft.com/office/drawing/2014/main" id="{9E201599-7D6B-4671-395A-AB9C1CE55DB4}"/>
-              </a:ext>
-            </a:extLst>
-          </p:cNvPr>
-          <p:cNvPicPr>
-            <a:picLocks noChangeAspect="1"/>
-          </p:cNvPicPr>
-          <p:nvPr/>
-        </p:nvPicPr>
-        <p:blipFill>
-          <a:blip r:embed="rId7"/>
-          <a:stretch>
-            <a:fillRect/>
-          </a:stretch>
-        </p:blipFill>
-        <p:spPr>
-          <a:xfrm>
-            <a:off x="3927166" y="4106965"/>
-            <a:ext cx="347790" cy="416048"/>
-          </a:xfrm>
-          <a:prstGeom prst="rect">
-            <a:avLst/>
-          </a:prstGeom>
-        </p:spPr>
-      </p:pic>
-      <p:pic>
-        <p:nvPicPr>
-          <p:cNvPr id="2068" name="Picture 8">
-            <a:extLst>
-              <a:ext uri="{FF2B5EF4-FFF2-40B4-BE49-F238E27FC236}">
-                <a16:creationId xmlns:a16="http://schemas.microsoft.com/office/drawing/2014/main" id="{9336168E-33DE-2E2C-3F3A-3E4FC0819D15}"/>
-              </a:ext>
-            </a:extLst>
-          </p:cNvPr>
-          <p:cNvPicPr>
-            <a:picLocks noChangeAspect="1" noChangeArrowheads="1"/>
-          </p:cNvPicPr>
-          <p:nvPr/>
-        </p:nvPicPr>
-        <p:blipFill>
-          <a:blip r:embed="rId11">
-            <a:extLst>
-              <a:ext uri="{28A0092B-C50C-407E-A947-70E740481C1C}">
-                <a14:useLocalDpi xmlns:a14="http://schemas.microsoft.com/office/drawing/2010/main" val="0"/>
-              </a:ext>
-            </a:extLst>
-          </a:blip>
-          <a:srcRect/>
-          <a:stretch>
-            <a:fillRect/>
-          </a:stretch>
-        </p:blipFill>
-        <p:spPr bwMode="auto">
-          <a:xfrm>
-            <a:off x="8471325" y="2409930"/>
-            <a:ext cx="519001" cy="692001"/>
-          </a:xfrm>
-          <a:prstGeom prst="rect">
-            <a:avLst/>
-          </a:prstGeom>
-          <a:noFill/>
-          <a:extLst>
-            <a:ext uri="{909E8E84-426E-40DD-AFC4-6F175D3DCCD1}">
-              <a14:hiddenFill xmlns:a14="http://schemas.microsoft.com/office/drawing/2010/main">
-                <a:solidFill>
-                  <a:srgbClr val="FFFFFF"/>
-                </a:solidFill>
-              </a14:hiddenFill>
-            </a:ext>
-          </a:extLst>
-        </p:spPr>
-      </p:pic>
-      <p:sp>
-        <p:nvSpPr>
-          <p:cNvPr id="2096" name="Google Shape;180;p8">
-            <a:extLst>
-              <a:ext uri="{FF2B5EF4-FFF2-40B4-BE49-F238E27FC236}">
-                <a16:creationId xmlns:a16="http://schemas.microsoft.com/office/drawing/2014/main" id="{273A85B6-13FD-89FF-E669-100D308ACE82}"/>
-              </a:ext>
-            </a:extLst>
-          </p:cNvPr>
-          <p:cNvSpPr/>
-          <p:nvPr/>
-        </p:nvSpPr>
-        <p:spPr>
-          <a:xfrm>
-            <a:off x="5512" y="4892025"/>
-            <a:ext cx="9144000" cy="251400"/>
-          </a:xfrm>
-          <a:prstGeom prst="rect">
-            <a:avLst/>
-          </a:prstGeom>
-          <a:solidFill>
-            <a:srgbClr val="C3FFFC"/>
-          </a:solidFill>
-          <a:ln>
-            <a:noFill/>
-          </a:ln>
-        </p:spPr>
-        <p:txBody>
-          <a:bodyPr spcFirstLastPara="1" wrap="square" lIns="91425" tIns="91425" rIns="91425" bIns="91425" anchor="ctr" anchorCtr="0">
-            <a:noAutofit/>
-          </a:bodyPr>
-          <a:lstStyle/>
-          <a:p>
-            <a:pPr marL="0" marR="0" lvl="0" indent="0" algn="l" rtl="0">
-              <a:lnSpc>
-                <a:spcPct val="100000"/>
-              </a:lnSpc>
-              <a:spcBef>
-                <a:spcPts val="0"/>
-              </a:spcBef>
-              <a:spcAft>
-                <a:spcPts val="0"/>
-              </a:spcAft>
-              <a:buClr>
-                <a:srgbClr val="000000"/>
-              </a:buClr>
-              <a:buSzPts val="1400"/>
-              <a:buFont typeface="Arial"/>
-              <a:buNone/>
-            </a:pPr>
-            <a:endParaRPr sz="1400" b="0" i="0" u="none" strike="noStrike" cap="none">
-              <a:solidFill>
-                <a:srgbClr val="000000"/>
-              </a:solidFill>
-              <a:latin typeface="Arial"/>
-              <a:ea typeface="Arial"/>
-              <a:cs typeface="Arial"/>
-              <a:sym typeface="Arial"/>
-            </a:endParaRPr>
-          </a:p>
-        </p:txBody>
-      </p:sp>
       <p:pic>
         <p:nvPicPr>
           <p:cNvPr id="2052" name="Picture 4">
@@ -32518,7 +33735,7 @@
           <p:nvPr/>
         </p:nvPicPr>
         <p:blipFill rotWithShape="1">
-          <a:blip r:embed="rId12">
+          <a:blip r:embed="rId18">
             <a:extLst>
               <a:ext uri="{28A0092B-C50C-407E-A947-70E740481C1C}">
                 <a14:useLocalDpi xmlns:a14="http://schemas.microsoft.com/office/drawing/2010/main" val="0"/>
@@ -32565,7 +33782,7 @@
           <p:nvPr/>
         </p:nvPicPr>
         <p:blipFill rotWithShape="1">
-          <a:blip r:embed="rId10">
+          <a:blip r:embed="rId6">
             <a:extLst>
               <a:ext uri="{28A0092B-C50C-407E-A947-70E740481C1C}">
                 <a14:useLocalDpi xmlns:a14="http://schemas.microsoft.com/office/drawing/2010/main" val="0"/>
@@ -32896,388 +34113,6 @@
           </a:p>
         </p:txBody>
       </p:sp>
-      <p:cxnSp>
-        <p:nvCxnSpPr>
-          <p:cNvPr id="2101" name="Connecteur droit avec flèche 2100">
-            <a:extLst>
-              <a:ext uri="{FF2B5EF4-FFF2-40B4-BE49-F238E27FC236}">
-                <a16:creationId xmlns:a16="http://schemas.microsoft.com/office/drawing/2014/main" id="{47334CC6-EC52-DED0-C7E9-A5E77BF2B99A}"/>
-              </a:ext>
-            </a:extLst>
-          </p:cNvPr>
-          <p:cNvCxnSpPr>
-            <a:cxnSpLocks/>
-            <a:stCxn id="1074" idx="3"/>
-            <a:endCxn id="2068" idx="1"/>
-          </p:cNvCxnSpPr>
-          <p:nvPr/>
-        </p:nvCxnSpPr>
-        <p:spPr>
-          <a:xfrm>
-            <a:off x="8259888" y="2755931"/>
-            <a:ext cx="211437" cy="0"/>
-          </a:xfrm>
-          <a:prstGeom prst="straightConnector1">
-            <a:avLst/>
-          </a:prstGeom>
-          <a:ln w="19050">
-            <a:solidFill>
-              <a:schemeClr val="bg1">
-                <a:lumMod val="65000"/>
-              </a:schemeClr>
-            </a:solidFill>
-            <a:tailEnd type="triangle"/>
-          </a:ln>
-        </p:spPr>
-        <p:style>
-          <a:lnRef idx="1">
-            <a:schemeClr val="accent1"/>
-          </a:lnRef>
-          <a:fillRef idx="0">
-            <a:schemeClr val="accent1"/>
-          </a:fillRef>
-          <a:effectRef idx="0">
-            <a:schemeClr val="accent1"/>
-          </a:effectRef>
-          <a:fontRef idx="minor">
-            <a:schemeClr val="tx1"/>
-          </a:fontRef>
-        </p:style>
-      </p:cxnSp>
-      <p:cxnSp>
-        <p:nvCxnSpPr>
-          <p:cNvPr id="30" name="Connecteur droit 29">
-            <a:extLst>
-              <a:ext uri="{FF2B5EF4-FFF2-40B4-BE49-F238E27FC236}">
-                <a16:creationId xmlns:a16="http://schemas.microsoft.com/office/drawing/2014/main" id="{DD9C7B50-C6F5-7260-C61A-2CAE5E4C0BF7}"/>
-              </a:ext>
-            </a:extLst>
-          </p:cNvPr>
-          <p:cNvCxnSpPr/>
-          <p:nvPr/>
-        </p:nvCxnSpPr>
-        <p:spPr>
-          <a:xfrm>
-            <a:off x="6450928" y="1458686"/>
-            <a:ext cx="0" cy="3272971"/>
-          </a:xfrm>
-          <a:prstGeom prst="line">
-            <a:avLst/>
-          </a:prstGeom>
-          <a:ln w="19050">
-            <a:solidFill>
-              <a:schemeClr val="bg1">
-                <a:lumMod val="75000"/>
-              </a:schemeClr>
-            </a:solidFill>
-            <a:prstDash val="dash"/>
-          </a:ln>
-        </p:spPr>
-        <p:style>
-          <a:lnRef idx="1">
-            <a:schemeClr val="dk1"/>
-          </a:lnRef>
-          <a:fillRef idx="0">
-            <a:schemeClr val="dk1"/>
-          </a:fillRef>
-          <a:effectRef idx="0">
-            <a:schemeClr val="dk1"/>
-          </a:effectRef>
-          <a:fontRef idx="minor">
-            <a:schemeClr val="tx1"/>
-          </a:fontRef>
-        </p:style>
-      </p:cxnSp>
-      <p:sp>
-        <p:nvSpPr>
-          <p:cNvPr id="46" name="Rectangle : coins arrondis 45">
-            <a:extLst>
-              <a:ext uri="{FF2B5EF4-FFF2-40B4-BE49-F238E27FC236}">
-                <a16:creationId xmlns:a16="http://schemas.microsoft.com/office/drawing/2014/main" id="{E433E364-4228-6856-536E-34873F6A6DC3}"/>
-              </a:ext>
-            </a:extLst>
-          </p:cNvPr>
-          <p:cNvSpPr/>
-          <p:nvPr/>
-        </p:nvSpPr>
-        <p:spPr>
-          <a:xfrm>
-            <a:off x="4797443" y="1817936"/>
-            <a:ext cx="1235879" cy="484858"/>
-          </a:xfrm>
-          <a:prstGeom prst="roundRect">
-            <a:avLst/>
-          </a:prstGeom>
-          <a:solidFill>
-            <a:schemeClr val="bg1">
-              <a:lumMod val="95000"/>
-            </a:schemeClr>
-          </a:solidFill>
-          <a:ln>
-            <a:noFill/>
-          </a:ln>
-        </p:spPr>
-        <p:style>
-          <a:lnRef idx="2">
-            <a:schemeClr val="accent1">
-              <a:shade val="15000"/>
-            </a:schemeClr>
-          </a:lnRef>
-          <a:fillRef idx="1">
-            <a:schemeClr val="accent1"/>
-          </a:fillRef>
-          <a:effectRef idx="0">
-            <a:schemeClr val="accent1"/>
-          </a:effectRef>
-          <a:fontRef idx="minor">
-            <a:schemeClr val="lt1"/>
-          </a:fontRef>
-        </p:style>
-        <p:txBody>
-          <a:bodyPr rtlCol="0" anchor="ctr"/>
-          <a:lstStyle/>
-          <a:p>
-            <a:pPr algn="ctr"/>
-            <a:endParaRPr lang="fr-FR" dirty="0"/>
-          </a:p>
-        </p:txBody>
-      </p:sp>
-      <p:pic>
-        <p:nvPicPr>
-          <p:cNvPr id="1034" name="Picture 10">
-            <a:extLst>
-              <a:ext uri="{FF2B5EF4-FFF2-40B4-BE49-F238E27FC236}">
-                <a16:creationId xmlns:a16="http://schemas.microsoft.com/office/drawing/2014/main" id="{748B16F9-6C53-91C1-4712-424BF6CE8989}"/>
-              </a:ext>
-            </a:extLst>
-          </p:cNvPr>
-          <p:cNvPicPr>
-            <a:picLocks noChangeAspect="1" noChangeArrowheads="1"/>
-          </p:cNvPicPr>
-          <p:nvPr/>
-        </p:nvPicPr>
-        <p:blipFill>
-          <a:blip r:embed="rId13">
-            <a:extLst>
-              <a:ext uri="{28A0092B-C50C-407E-A947-70E740481C1C}">
-                <a14:useLocalDpi xmlns:a14="http://schemas.microsoft.com/office/drawing/2010/main" val="0"/>
-              </a:ext>
-            </a:extLst>
-          </a:blip>
-          <a:srcRect/>
-          <a:stretch>
-            <a:fillRect/>
-          </a:stretch>
-        </p:blipFill>
-        <p:spPr bwMode="auto">
-          <a:xfrm>
-            <a:off x="4595812" y="1580684"/>
-            <a:ext cx="506762" cy="506762"/>
-          </a:xfrm>
-          <a:prstGeom prst="rect">
-            <a:avLst/>
-          </a:prstGeom>
-          <a:noFill/>
-          <a:extLst>
-            <a:ext uri="{909E8E84-426E-40DD-AFC4-6F175D3DCCD1}">
-              <a14:hiddenFill xmlns:a14="http://schemas.microsoft.com/office/drawing/2010/main">
-                <a:solidFill>
-                  <a:srgbClr val="FFFFFF"/>
-                </a:solidFill>
-              </a14:hiddenFill>
-            </a:ext>
-          </a:extLst>
-        </p:spPr>
-      </p:pic>
-      <p:sp>
-        <p:nvSpPr>
-          <p:cNvPr id="44" name="ZoneTexte 43">
-            <a:extLst>
-              <a:ext uri="{FF2B5EF4-FFF2-40B4-BE49-F238E27FC236}">
-                <a16:creationId xmlns:a16="http://schemas.microsoft.com/office/drawing/2014/main" id="{682088E1-064C-5214-7A97-A059E4869B55}"/>
-              </a:ext>
-            </a:extLst>
-          </p:cNvPr>
-          <p:cNvSpPr txBox="1"/>
-          <p:nvPr/>
-        </p:nvSpPr>
-        <p:spPr>
-          <a:xfrm>
-            <a:off x="4900942" y="1841943"/>
-            <a:ext cx="1079654" cy="338554"/>
-          </a:xfrm>
-          <a:prstGeom prst="rect">
-            <a:avLst/>
-          </a:prstGeom>
-          <a:noFill/>
-        </p:spPr>
-        <p:txBody>
-          <a:bodyPr wrap="square" rtlCol="0">
-            <a:spAutoFit/>
-          </a:bodyPr>
-          <a:lstStyle/>
-          <a:p>
-            <a:pPr algn="ctr"/>
-            <a:r>
-              <a:rPr lang="fr-FR" sz="800" b="1" dirty="0"/>
-              <a:t>Entraînement du modèle</a:t>
-            </a:r>
-          </a:p>
-        </p:txBody>
-      </p:sp>
-      <p:cxnSp>
-        <p:nvCxnSpPr>
-          <p:cNvPr id="108" name="Connecteur droit avec flèche 107">
-            <a:extLst>
-              <a:ext uri="{FF2B5EF4-FFF2-40B4-BE49-F238E27FC236}">
-                <a16:creationId xmlns:a16="http://schemas.microsoft.com/office/drawing/2014/main" id="{8FC538F3-E888-6C1B-940B-D6B968D8FCEE}"/>
-              </a:ext>
-            </a:extLst>
-          </p:cNvPr>
-          <p:cNvCxnSpPr>
-            <a:cxnSpLocks/>
-          </p:cNvCxnSpPr>
-          <p:nvPr/>
-        </p:nvCxnSpPr>
-        <p:spPr>
-          <a:xfrm>
-            <a:off x="4233111" y="2035648"/>
-            <a:ext cx="551235" cy="0"/>
-          </a:xfrm>
-          <a:prstGeom prst="straightConnector1">
-            <a:avLst/>
-          </a:prstGeom>
-          <a:ln w="38100">
-            <a:solidFill>
-              <a:srgbClr val="00B050"/>
-            </a:solidFill>
-            <a:tailEnd type="triangle"/>
-          </a:ln>
-        </p:spPr>
-        <p:style>
-          <a:lnRef idx="1">
-            <a:schemeClr val="accent1"/>
-          </a:lnRef>
-          <a:fillRef idx="0">
-            <a:schemeClr val="accent1"/>
-          </a:fillRef>
-          <a:effectRef idx="0">
-            <a:schemeClr val="accent1"/>
-          </a:effectRef>
-          <a:fontRef idx="minor">
-            <a:schemeClr val="tx1"/>
-          </a:fontRef>
-        </p:style>
-      </p:cxnSp>
-      <p:sp>
-        <p:nvSpPr>
-          <p:cNvPr id="4" name="Rectangle : coins arrondis 3">
-            <a:extLst>
-              <a:ext uri="{FF2B5EF4-FFF2-40B4-BE49-F238E27FC236}">
-                <a16:creationId xmlns:a16="http://schemas.microsoft.com/office/drawing/2014/main" id="{967D4A6C-3756-2775-B55E-F408743583CC}"/>
-              </a:ext>
-            </a:extLst>
-          </p:cNvPr>
-          <p:cNvSpPr/>
-          <p:nvPr/>
-        </p:nvSpPr>
-        <p:spPr>
-          <a:xfrm>
-            <a:off x="6450927" y="1304200"/>
-            <a:ext cx="2214439" cy="106642"/>
-          </a:xfrm>
-          <a:prstGeom prst="roundRect">
-            <a:avLst/>
-          </a:prstGeom>
-          <a:solidFill>
-            <a:srgbClr val="FFC000"/>
-          </a:solidFill>
-          <a:ln w="12700" cap="flat" cmpd="sng" algn="ctr">
-            <a:noFill/>
-            <a:prstDash val="solid"/>
-            <a:miter lim="800000"/>
-          </a:ln>
-          <a:effectLst/>
-        </p:spPr>
-        <p:txBody>
-          <a:bodyPr rot="0" spcFirstLastPara="0" vertOverflow="overflow" horzOverflow="overflow" vert="horz" wrap="square" lIns="74295" tIns="37148" rIns="74295" bIns="37148" numCol="1" spcCol="0" rtlCol="0" fromWordArt="0" anchor="ctr" anchorCtr="0" forceAA="0" compatLnSpc="1">
-            <a:prstTxWarp prst="textNoShape">
-              <a:avLst/>
-            </a:prstTxWarp>
-            <a:noAutofit/>
-          </a:bodyPr>
-          <a:lstStyle/>
-          <a:p>
-            <a:pPr algn="ctr">
-              <a:buClrTx/>
-            </a:pPr>
-            <a:r>
-              <a:rPr lang="fr-FR" sz="800" b="1" kern="1200" dirty="0">
-                <a:latin typeface="Calibri" panose="020F0502020204030204" pitchFamily="34" charset="0"/>
-                <a:ea typeface="+mn-ea"/>
-                <a:cs typeface="Calibri" panose="020F0502020204030204" pitchFamily="34" charset="0"/>
-              </a:rPr>
-              <a:t>Frontend</a:t>
-            </a:r>
-          </a:p>
-        </p:txBody>
-      </p:sp>
-      <p:sp>
-        <p:nvSpPr>
-          <p:cNvPr id="5" name="Rectangle : coins arrondis 4">
-            <a:extLst>
-              <a:ext uri="{FF2B5EF4-FFF2-40B4-BE49-F238E27FC236}">
-                <a16:creationId xmlns:a16="http://schemas.microsoft.com/office/drawing/2014/main" id="{564CE1A9-869C-774B-0E58-18DB76A3FCD2}"/>
-              </a:ext>
-            </a:extLst>
-          </p:cNvPr>
-          <p:cNvSpPr/>
-          <p:nvPr/>
-        </p:nvSpPr>
-        <p:spPr>
-          <a:xfrm>
-            <a:off x="2293137" y="1304200"/>
-            <a:ext cx="4118299" cy="106642"/>
-          </a:xfrm>
-          <a:prstGeom prst="roundRect">
-            <a:avLst/>
-          </a:prstGeom>
-          <a:solidFill>
-            <a:srgbClr val="00B050"/>
-          </a:solidFill>
-          <a:ln w="12700" cap="flat" cmpd="sng" algn="ctr">
-            <a:noFill/>
-            <a:prstDash val="solid"/>
-            <a:miter lim="800000"/>
-          </a:ln>
-          <a:effectLst/>
-        </p:spPr>
-        <p:txBody>
-          <a:bodyPr rot="0" spcFirstLastPara="0" vertOverflow="overflow" horzOverflow="overflow" vert="horz" wrap="square" lIns="74295" tIns="37148" rIns="74295" bIns="37148" numCol="1" spcCol="0" rtlCol="0" fromWordArt="0" anchor="ctr" anchorCtr="0" forceAA="0" compatLnSpc="1">
-            <a:prstTxWarp prst="textNoShape">
-              <a:avLst/>
-            </a:prstTxWarp>
-            <a:noAutofit/>
-          </a:bodyPr>
-          <a:lstStyle/>
-          <a:p>
-            <a:pPr algn="ctr">
-              <a:buClrTx/>
-            </a:pPr>
-            <a:r>
-              <a:rPr lang="fr-FR" sz="800" b="1" kern="1200" dirty="0">
-                <a:solidFill>
-                  <a:schemeClr val="bg1"/>
-                </a:solidFill>
-                <a:latin typeface="Calibri" panose="020F0502020204030204" pitchFamily="34" charset="0"/>
-                <a:ea typeface="+mn-ea"/>
-                <a:cs typeface="Calibri" panose="020F0502020204030204" pitchFamily="34" charset="0"/>
-              </a:rPr>
-              <a:t>Backend</a:t>
-            </a:r>
-          </a:p>
-        </p:txBody>
-      </p:sp>
       <p:pic>
         <p:nvPicPr>
           <p:cNvPr id="21" name="Picture 14">
@@ -33293,7 +34128,7 @@
           <p:nvPr/>
         </p:nvPicPr>
         <p:blipFill rotWithShape="1">
-          <a:blip r:embed="rId5">
+          <a:blip r:embed="rId15">
             <a:extLst>
               <a:ext uri="{28A0092B-C50C-407E-A947-70E740481C1C}">
                 <a14:useLocalDpi xmlns:a14="http://schemas.microsoft.com/office/drawing/2010/main" val="0"/>
@@ -33380,6 +34215,164 @@
           </a:p>
         </p:txBody>
       </p:sp>
+      <p:cxnSp>
+        <p:nvCxnSpPr>
+          <p:cNvPr id="17" name="Connecteur : en angle 16">
+            <a:extLst>
+              <a:ext uri="{FF2B5EF4-FFF2-40B4-BE49-F238E27FC236}">
+                <a16:creationId xmlns:a16="http://schemas.microsoft.com/office/drawing/2014/main" id="{E363E85D-958E-F6A6-C279-98695543B49C}"/>
+              </a:ext>
+            </a:extLst>
+          </p:cNvPr>
+          <p:cNvCxnSpPr>
+            <a:cxnSpLocks/>
+            <a:stCxn id="43" idx="2"/>
+            <a:endCxn id="32" idx="2"/>
+          </p:cNvCxnSpPr>
+          <p:nvPr/>
+        </p:nvCxnSpPr>
+        <p:spPr>
+          <a:xfrm rot="5400000" flipH="1">
+            <a:off x="5107006" y="2305361"/>
+            <a:ext cx="557436" cy="4208358"/>
+          </a:xfrm>
+          <a:prstGeom prst="bentConnector3">
+            <a:avLst>
+              <a:gd name="adj1" fmla="val -20049"/>
+            </a:avLst>
+          </a:prstGeom>
+          <a:ln>
+            <a:solidFill>
+              <a:srgbClr val="FF0080"/>
+            </a:solidFill>
+            <a:headEnd type="triangle"/>
+            <a:tailEnd type="triangle"/>
+          </a:ln>
+        </p:spPr>
+        <p:style>
+          <a:lnRef idx="1">
+            <a:schemeClr val="accent1"/>
+          </a:lnRef>
+          <a:fillRef idx="0">
+            <a:schemeClr val="accent1"/>
+          </a:fillRef>
+          <a:effectRef idx="0">
+            <a:schemeClr val="accent1"/>
+          </a:effectRef>
+          <a:fontRef idx="minor">
+            <a:schemeClr val="tx1"/>
+          </a:fontRef>
+        </p:style>
+      </p:cxnSp>
+      <p:grpSp>
+        <p:nvGrpSpPr>
+          <p:cNvPr id="42" name="Groupe 41">
+            <a:extLst>
+              <a:ext uri="{FF2B5EF4-FFF2-40B4-BE49-F238E27FC236}">
+                <a16:creationId xmlns:a16="http://schemas.microsoft.com/office/drawing/2014/main" id="{ABFDE930-E8FD-AEFC-C080-0E20435636B0}"/>
+              </a:ext>
+            </a:extLst>
+          </p:cNvPr>
+          <p:cNvGrpSpPr/>
+          <p:nvPr/>
+        </p:nvGrpSpPr>
+        <p:grpSpPr>
+          <a:xfrm>
+            <a:off x="6685555" y="3898233"/>
+            <a:ext cx="703440" cy="410340"/>
+            <a:chOff x="7750640" y="4242260"/>
+            <a:chExt cx="447927" cy="261290"/>
+          </a:xfrm>
+        </p:grpSpPr>
+        <p:sp>
+          <p:nvSpPr>
+            <p:cNvPr id="45" name="Rectangle : coins arrondis 44">
+              <a:extLst>
+                <a:ext uri="{FF2B5EF4-FFF2-40B4-BE49-F238E27FC236}">
+                  <a16:creationId xmlns:a16="http://schemas.microsoft.com/office/drawing/2014/main" id="{D7F593C2-1139-09D7-2E16-9F2706484D71}"/>
+                </a:ext>
+              </a:extLst>
+            </p:cNvPr>
+            <p:cNvSpPr/>
+            <p:nvPr/>
+          </p:nvSpPr>
+          <p:spPr>
+            <a:xfrm>
+              <a:off x="7785777" y="4265830"/>
+              <a:ext cx="373983" cy="223312"/>
+            </a:xfrm>
+            <a:prstGeom prst="roundRect">
+              <a:avLst/>
+            </a:prstGeom>
+            <a:solidFill>
+              <a:schemeClr val="bg1"/>
+            </a:solidFill>
+            <a:ln w="3175"/>
+          </p:spPr>
+          <p:style>
+            <a:lnRef idx="2">
+              <a:schemeClr val="accent1">
+                <a:shade val="15000"/>
+              </a:schemeClr>
+            </a:lnRef>
+            <a:fillRef idx="1">
+              <a:schemeClr val="accent1"/>
+            </a:fillRef>
+            <a:effectRef idx="0">
+              <a:schemeClr val="accent1"/>
+            </a:effectRef>
+            <a:fontRef idx="minor">
+              <a:schemeClr val="lt1"/>
+            </a:fontRef>
+          </p:style>
+          <p:txBody>
+            <a:bodyPr rtlCol="0" anchor="ctr"/>
+            <a:lstStyle/>
+            <a:p>
+              <a:pPr algn="ctr"/>
+              <a:endParaRPr lang="fr-FR"/>
+            </a:p>
+          </p:txBody>
+        </p:sp>
+        <p:pic>
+          <p:nvPicPr>
+            <p:cNvPr id="59" name="Picture 2">
+              <a:extLst>
+                <a:ext uri="{FF2B5EF4-FFF2-40B4-BE49-F238E27FC236}">
+                  <a16:creationId xmlns:a16="http://schemas.microsoft.com/office/drawing/2014/main" id="{66E29ABD-B82C-FAB9-3744-D1866DC79A32}"/>
+                </a:ext>
+              </a:extLst>
+            </p:cNvPr>
+            <p:cNvPicPr>
+              <a:picLocks noChangeAspect="1" noChangeArrowheads="1"/>
+            </p:cNvPicPr>
+            <p:nvPr/>
+          </p:nvPicPr>
+          <p:blipFill>
+            <a:blip r:embed="rId19">
+              <a:extLst>
+                <a:ext uri="{28A0092B-C50C-407E-A947-70E740481C1C}">
+                  <a14:useLocalDpi xmlns:a14="http://schemas.microsoft.com/office/drawing/2010/main" val="0"/>
+                </a:ext>
+              </a:extLst>
+            </a:blip>
+            <a:srcRect/>
+            <a:stretch>
+              <a:fillRect/>
+            </a:stretch>
+          </p:blipFill>
+          <p:spPr bwMode="auto">
+            <a:xfrm>
+              <a:off x="7750640" y="4242260"/>
+              <a:ext cx="447927" cy="261290"/>
+            </a:xfrm>
+            <a:prstGeom prst="rect">
+              <a:avLst/>
+            </a:prstGeom>
+            <a:noFill/>
+          </p:spPr>
+        </p:pic>
+      </p:grpSp>
       <p:grpSp>
         <p:nvGrpSpPr>
           <p:cNvPr id="78" name="Groupe 77">
@@ -33394,8 +34387,8 @@
         </p:nvGrpSpPr>
         <p:grpSpPr>
           <a:xfrm>
-            <a:off x="6670344" y="3995036"/>
-            <a:ext cx="703440" cy="410340"/>
+            <a:off x="3017736" y="4221213"/>
+            <a:ext cx="527618" cy="307777"/>
             <a:chOff x="7750640" y="4242260"/>
             <a:chExt cx="447927" cy="261290"/>
           </a:xfrm>
@@ -33465,7 +34458,7 @@
             <p:nvPr/>
           </p:nvPicPr>
           <p:blipFill>
-            <a:blip r:embed="rId14">
+            <a:blip r:embed="rId19">
               <a:extLst>
                 <a:ext uri="{28A0092B-C50C-407E-A947-70E740481C1C}">
                   <a14:useLocalDpi xmlns:a14="http://schemas.microsoft.com/office/drawing/2010/main" val="0"/>
@@ -33489,275 +34482,147 @@
           </p:spPr>
         </p:pic>
       </p:grpSp>
-      <p:pic>
-        <p:nvPicPr>
-          <p:cNvPr id="116" name="Picture 4">
+      <p:grpSp>
+        <p:nvGrpSpPr>
+          <p:cNvPr id="77" name="Groupe 76">
             <a:extLst>
               <a:ext uri="{FF2B5EF4-FFF2-40B4-BE49-F238E27FC236}">
-                <a16:creationId xmlns:a16="http://schemas.microsoft.com/office/drawing/2014/main" id="{B7DCCBAF-8A38-3C4F-0798-30A393D5D283}"/>
+                <a16:creationId xmlns:a16="http://schemas.microsoft.com/office/drawing/2014/main" id="{09848BCD-B655-BAB2-9F3C-2A743C138D6B}"/>
               </a:ext>
             </a:extLst>
           </p:cNvPr>
-          <p:cNvPicPr>
-            <a:picLocks noChangeAspect="1" noChangeArrowheads="1"/>
-          </p:cNvPicPr>
+          <p:cNvGrpSpPr/>
           <p:nvPr/>
-        </p:nvPicPr>
-        <p:blipFill rotWithShape="1">
-          <a:blip r:embed="rId15">
-            <a:extLst>
-              <a:ext uri="{28A0092B-C50C-407E-A947-70E740481C1C}">
-                <a14:useLocalDpi xmlns:a14="http://schemas.microsoft.com/office/drawing/2010/main" val="0"/>
-              </a:ext>
-            </a:extLst>
-          </a:blip>
-          <a:srcRect l="13093" t="7524" r="12698" b="43966"/>
-          <a:stretch>
-            <a:fillRect/>
-          </a:stretch>
-        </p:blipFill>
-        <p:spPr bwMode="auto">
+        </p:nvGrpSpPr>
+        <p:grpSpPr>
           <a:xfrm>
-            <a:off x="2717304" y="2067458"/>
-            <a:ext cx="602696" cy="615588"/>
+            <a:off x="3373833" y="2002169"/>
+            <a:ext cx="527618" cy="307777"/>
+            <a:chOff x="7750640" y="4242260"/>
+            <a:chExt cx="447927" cy="261290"/>
           </a:xfrm>
-          <a:prstGeom prst="rect">
-            <a:avLst/>
-          </a:prstGeom>
-          <a:noFill/>
-          <a:extLst>
-            <a:ext uri="{909E8E84-426E-40DD-AFC4-6F175D3DCCD1}">
-              <a14:hiddenFill xmlns:a14="http://schemas.microsoft.com/office/drawing/2010/main">
-                <a:solidFill>
-                  <a:srgbClr val="FFFFFF"/>
-                </a:solidFill>
-              </a14:hiddenFill>
-            </a:ext>
-          </a:extLst>
-        </p:spPr>
-      </p:pic>
-      <p:pic>
-        <p:nvPicPr>
-          <p:cNvPr id="117" name="Picture 6">
+        </p:grpSpPr>
+        <p:sp>
+          <p:nvSpPr>
+            <p:cNvPr id="79" name="Rectangle : coins arrondis 78">
+              <a:extLst>
+                <a:ext uri="{FF2B5EF4-FFF2-40B4-BE49-F238E27FC236}">
+                  <a16:creationId xmlns:a16="http://schemas.microsoft.com/office/drawing/2014/main" id="{61FAC2B4-497C-99AF-7507-9699F89C2CB8}"/>
+                </a:ext>
+              </a:extLst>
+            </p:cNvPr>
+            <p:cNvSpPr/>
+            <p:nvPr/>
+          </p:nvSpPr>
+          <p:spPr>
+            <a:xfrm>
+              <a:off x="7785777" y="4265830"/>
+              <a:ext cx="373983" cy="223312"/>
+            </a:xfrm>
+            <a:prstGeom prst="roundRect">
+              <a:avLst/>
+            </a:prstGeom>
+            <a:solidFill>
+              <a:schemeClr val="bg1"/>
+            </a:solidFill>
+            <a:ln w="3175"/>
+          </p:spPr>
+          <p:style>
+            <a:lnRef idx="2">
+              <a:schemeClr val="accent1">
+                <a:shade val="15000"/>
+              </a:schemeClr>
+            </a:lnRef>
+            <a:fillRef idx="1">
+              <a:schemeClr val="accent1"/>
+            </a:fillRef>
+            <a:effectRef idx="0">
+              <a:schemeClr val="accent1"/>
+            </a:effectRef>
+            <a:fontRef idx="minor">
+              <a:schemeClr val="lt1"/>
+            </a:fontRef>
+          </p:style>
+          <p:txBody>
+            <a:bodyPr rtlCol="0" anchor="ctr"/>
+            <a:lstStyle/>
+            <a:p>
+              <a:pPr algn="ctr"/>
+              <a:endParaRPr lang="fr-FR"/>
+            </a:p>
+          </p:txBody>
+        </p:sp>
+        <p:pic>
+          <p:nvPicPr>
+            <p:cNvPr id="80" name="Picture 2">
+              <a:extLst>
+                <a:ext uri="{FF2B5EF4-FFF2-40B4-BE49-F238E27FC236}">
+                  <a16:creationId xmlns:a16="http://schemas.microsoft.com/office/drawing/2014/main" id="{FEC09453-8329-B943-E8CD-D18A9746E3DE}"/>
+                </a:ext>
+              </a:extLst>
+            </p:cNvPr>
+            <p:cNvPicPr>
+              <a:picLocks noChangeAspect="1" noChangeArrowheads="1"/>
+            </p:cNvPicPr>
+            <p:nvPr/>
+          </p:nvPicPr>
+          <p:blipFill>
+            <a:blip r:embed="rId19">
+              <a:extLst>
+                <a:ext uri="{28A0092B-C50C-407E-A947-70E740481C1C}">
+                  <a14:useLocalDpi xmlns:a14="http://schemas.microsoft.com/office/drawing/2010/main" val="0"/>
+                </a:ext>
+              </a:extLst>
+            </a:blip>
+            <a:srcRect/>
+            <a:stretch>
+              <a:fillRect/>
+            </a:stretch>
+          </p:blipFill>
+          <p:spPr bwMode="auto">
+            <a:xfrm>
+              <a:off x="7750640" y="4242260"/>
+              <a:ext cx="447927" cy="261290"/>
+            </a:xfrm>
+            <a:prstGeom prst="rect">
+              <a:avLst/>
+            </a:prstGeom>
+            <a:noFill/>
+          </p:spPr>
+        </p:pic>
+      </p:grpSp>
+      <p:cxnSp>
+        <p:nvCxnSpPr>
+          <p:cNvPr id="84" name="Connecteur : en angle 83">
             <a:extLst>
               <a:ext uri="{FF2B5EF4-FFF2-40B4-BE49-F238E27FC236}">
-                <a16:creationId xmlns:a16="http://schemas.microsoft.com/office/drawing/2014/main" id="{B3747ED9-0378-A202-7151-54782D96CF66}"/>
+                <a16:creationId xmlns:a16="http://schemas.microsoft.com/office/drawing/2014/main" id="{9FB5173D-B04A-5921-8DF1-AA3A6807A99D}"/>
               </a:ext>
             </a:extLst>
           </p:cNvPr>
-          <p:cNvPicPr>
-            <a:picLocks noChangeAspect="1" noChangeArrowheads="1"/>
-          </p:cNvPicPr>
+          <p:cNvCxnSpPr>
+            <a:cxnSpLocks/>
+            <a:stCxn id="2068" idx="2"/>
+            <a:endCxn id="2097" idx="3"/>
+          </p:cNvCxnSpPr>
           <p:nvPr/>
-        </p:nvPicPr>
-        <p:blipFill rotWithShape="1">
-          <a:blip r:embed="rId16">
-            <a:extLst>
-              <a:ext uri="{28A0092B-C50C-407E-A947-70E740481C1C}">
-                <a14:useLocalDpi xmlns:a14="http://schemas.microsoft.com/office/drawing/2010/main" val="0"/>
-              </a:ext>
-            </a:extLst>
-          </a:blip>
-          <a:srcRect l="31615" t="12234" r="33730" b="47839"/>
-          <a:stretch>
-            <a:fillRect/>
-          </a:stretch>
-        </p:blipFill>
-        <p:spPr bwMode="auto">
-          <a:xfrm>
-            <a:off x="2671095" y="3245811"/>
-            <a:ext cx="664926" cy="638415"/>
+        </p:nvCxnSpPr>
+        <p:spPr>
+          <a:xfrm rot="5400000">
+            <a:off x="8279459" y="3024137"/>
+            <a:ext cx="443149" cy="459586"/>
           </a:xfrm>
-          <a:prstGeom prst="rect">
+          <a:prstGeom prst="bentConnector2">
             <a:avLst/>
           </a:prstGeom>
-          <a:noFill/>
-          <a:extLst>
-            <a:ext uri="{909E8E84-426E-40DD-AFC4-6F175D3DCCD1}">
-              <a14:hiddenFill xmlns:a14="http://schemas.microsoft.com/office/drawing/2010/main">
-                <a:solidFill>
-                  <a:srgbClr val="FFFFFF"/>
-                </a:solidFill>
-              </a14:hiddenFill>
-            </a:ext>
-          </a:extLst>
-        </p:spPr>
-      </p:pic>
-      <p:pic>
-        <p:nvPicPr>
-          <p:cNvPr id="127" name="Picture 8">
-            <a:extLst>
-              <a:ext uri="{FF2B5EF4-FFF2-40B4-BE49-F238E27FC236}">
-                <a16:creationId xmlns:a16="http://schemas.microsoft.com/office/drawing/2014/main" id="{0DF6E305-58E0-10D9-0E90-7E26126193AF}"/>
-              </a:ext>
-            </a:extLst>
-          </p:cNvPr>
-          <p:cNvPicPr>
-            <a:picLocks noChangeAspect="1" noChangeArrowheads="1"/>
-          </p:cNvPicPr>
-          <p:nvPr/>
-        </p:nvPicPr>
-        <p:blipFill>
-          <a:blip r:embed="rId17">
-            <a:extLst>
-              <a:ext uri="{28A0092B-C50C-407E-A947-70E740481C1C}">
-                <a14:useLocalDpi xmlns:a14="http://schemas.microsoft.com/office/drawing/2010/main" val="0"/>
-              </a:ext>
-            </a:extLst>
-          </a:blip>
-          <a:srcRect/>
-          <a:stretch>
-            <a:fillRect/>
-          </a:stretch>
-        </p:blipFill>
-        <p:spPr bwMode="auto">
-          <a:xfrm>
-            <a:off x="1666945" y="2093612"/>
-            <a:ext cx="574201" cy="574192"/>
-          </a:xfrm>
-          <a:prstGeom prst="rect">
-            <a:avLst/>
-          </a:prstGeom>
-          <a:noFill/>
-          <a:extLst>
-            <a:ext uri="{909E8E84-426E-40DD-AFC4-6F175D3DCCD1}">
-              <a14:hiddenFill xmlns:a14="http://schemas.microsoft.com/office/drawing/2010/main">
-                <a:solidFill>
-                  <a:srgbClr val="FFFFFF"/>
-                </a:solidFill>
-              </a14:hiddenFill>
-            </a:ext>
-          </a:extLst>
-        </p:spPr>
-      </p:pic>
-      <p:pic>
-        <p:nvPicPr>
-          <p:cNvPr id="1033" name="Picture 10">
-            <a:extLst>
-              <a:ext uri="{FF2B5EF4-FFF2-40B4-BE49-F238E27FC236}">
-                <a16:creationId xmlns:a16="http://schemas.microsoft.com/office/drawing/2014/main" id="{FD816D59-77CA-1E04-DAC5-C8410FAC6198}"/>
-              </a:ext>
-            </a:extLst>
-          </p:cNvPr>
-          <p:cNvPicPr>
-            <a:picLocks noChangeAspect="1" noChangeArrowheads="1"/>
-          </p:cNvPicPr>
-          <p:nvPr/>
-        </p:nvPicPr>
-        <p:blipFill>
-          <a:blip r:embed="rId18">
-            <a:extLst>
-              <a:ext uri="{28A0092B-C50C-407E-A947-70E740481C1C}">
-                <a14:useLocalDpi xmlns:a14="http://schemas.microsoft.com/office/drawing/2010/main" val="0"/>
-              </a:ext>
-            </a:extLst>
-          </a:blip>
-          <a:srcRect/>
-          <a:stretch>
-            <a:fillRect/>
-          </a:stretch>
-        </p:blipFill>
-        <p:spPr bwMode="auto">
-          <a:xfrm>
-            <a:off x="1684197" y="3264975"/>
-            <a:ext cx="578072" cy="578072"/>
-          </a:xfrm>
-          <a:prstGeom prst="rect">
-            <a:avLst/>
-          </a:prstGeom>
-          <a:noFill/>
-          <a:extLst>
-            <a:ext uri="{909E8E84-426E-40DD-AFC4-6F175D3DCCD1}">
-              <a14:hiddenFill xmlns:a14="http://schemas.microsoft.com/office/drawing/2010/main">
-                <a:solidFill>
-                  <a:srgbClr val="FFFFFF"/>
-                </a:solidFill>
-              </a14:hiddenFill>
-            </a:ext>
-          </a:extLst>
-        </p:spPr>
-      </p:pic>
-      <p:sp>
-        <p:nvSpPr>
-          <p:cNvPr id="3" name="Rectangle : coins arrondis 2">
-            <a:extLst>
-              <a:ext uri="{FF2B5EF4-FFF2-40B4-BE49-F238E27FC236}">
-                <a16:creationId xmlns:a16="http://schemas.microsoft.com/office/drawing/2014/main" id="{33B23519-5EFA-F17A-CAA2-6EF8A191B3CD}"/>
-              </a:ext>
-            </a:extLst>
-          </p:cNvPr>
-          <p:cNvSpPr/>
-          <p:nvPr/>
-        </p:nvSpPr>
-        <p:spPr>
-          <a:xfrm>
-            <a:off x="456709" y="1469509"/>
-            <a:ext cx="972305" cy="3029059"/>
-          </a:xfrm>
-          <a:prstGeom prst="roundRect">
-            <a:avLst/>
-          </a:prstGeom>
-          <a:noFill/>
-          <a:ln w="9525">
+          <a:ln>
             <a:solidFill>
               <a:schemeClr val="bg1">
                 <a:lumMod val="65000"/>
               </a:schemeClr>
             </a:solidFill>
             <a:prstDash val="dash"/>
-          </a:ln>
-        </p:spPr>
-        <p:style>
-          <a:lnRef idx="2">
-            <a:schemeClr val="accent1">
-              <a:shade val="15000"/>
-            </a:schemeClr>
-          </a:lnRef>
-          <a:fillRef idx="1">
-            <a:schemeClr val="accent1"/>
-          </a:fillRef>
-          <a:effectRef idx="0">
-            <a:schemeClr val="accent1"/>
-          </a:effectRef>
-          <a:fontRef idx="minor">
-            <a:schemeClr val="lt1"/>
-          </a:fontRef>
-        </p:style>
-        <p:txBody>
-          <a:bodyPr rtlCol="0" anchor="ctr"/>
-          <a:lstStyle/>
-          <a:p>
-            <a:pPr algn="ctr"/>
-            <a:endParaRPr lang="fr-FR" dirty="0"/>
-          </a:p>
-        </p:txBody>
-      </p:sp>
-      <p:cxnSp>
-        <p:nvCxnSpPr>
-          <p:cNvPr id="6" name="Connecteur droit avec flèche 5">
-            <a:extLst>
-              <a:ext uri="{FF2B5EF4-FFF2-40B4-BE49-F238E27FC236}">
-                <a16:creationId xmlns:a16="http://schemas.microsoft.com/office/drawing/2014/main" id="{804A8FE7-27C3-4C54-36F8-6A8C0900C5DA}"/>
-              </a:ext>
-            </a:extLst>
-          </p:cNvPr>
-          <p:cNvCxnSpPr>
-            <a:cxnSpLocks/>
-          </p:cNvCxnSpPr>
-          <p:nvPr/>
-        </p:nvCxnSpPr>
-        <p:spPr>
-          <a:xfrm>
-            <a:off x="1429014" y="2391164"/>
-            <a:ext cx="362079" cy="0"/>
-          </a:xfrm>
-          <a:prstGeom prst="straightConnector1">
-            <a:avLst/>
-          </a:prstGeom>
-          <a:ln w="38100">
-            <a:solidFill>
-              <a:srgbClr val="B266FF"/>
-            </a:solidFill>
+            <a:headEnd type="triangle"/>
             <a:tailEnd type="triangle"/>
           </a:ln>
         </p:spPr>
@@ -33776,348 +34641,6 @@
           </a:fontRef>
         </p:style>
       </p:cxnSp>
-      <p:cxnSp>
-        <p:nvCxnSpPr>
-          <p:cNvPr id="10" name="Connecteur droit avec flèche 9">
-            <a:extLst>
-              <a:ext uri="{FF2B5EF4-FFF2-40B4-BE49-F238E27FC236}">
-                <a16:creationId xmlns:a16="http://schemas.microsoft.com/office/drawing/2014/main" id="{A34EFFD9-2B7F-223F-36C3-4CCC46291479}"/>
-              </a:ext>
-            </a:extLst>
-          </p:cNvPr>
-          <p:cNvCxnSpPr>
-            <a:cxnSpLocks/>
-          </p:cNvCxnSpPr>
-          <p:nvPr/>
-        </p:nvCxnSpPr>
-        <p:spPr>
-          <a:xfrm>
-            <a:off x="1429014" y="3554011"/>
-            <a:ext cx="362079" cy="0"/>
-          </a:xfrm>
-          <a:prstGeom prst="straightConnector1">
-            <a:avLst/>
-          </a:prstGeom>
-          <a:ln w="38100">
-            <a:solidFill>
-              <a:srgbClr val="FF0080"/>
-            </a:solidFill>
-            <a:tailEnd type="triangle"/>
-          </a:ln>
-        </p:spPr>
-        <p:style>
-          <a:lnRef idx="1">
-            <a:schemeClr val="accent1"/>
-          </a:lnRef>
-          <a:fillRef idx="0">
-            <a:schemeClr val="accent1"/>
-          </a:fillRef>
-          <a:effectRef idx="0">
-            <a:schemeClr val="accent1"/>
-          </a:effectRef>
-          <a:fontRef idx="minor">
-            <a:schemeClr val="tx1"/>
-          </a:fontRef>
-        </p:style>
-      </p:cxnSp>
-      <p:cxnSp>
-        <p:nvCxnSpPr>
-          <p:cNvPr id="11" name="Connecteur droit avec flèche 10">
-            <a:extLst>
-              <a:ext uri="{FF2B5EF4-FFF2-40B4-BE49-F238E27FC236}">
-                <a16:creationId xmlns:a16="http://schemas.microsoft.com/office/drawing/2014/main" id="{D8A48580-543E-68C9-355D-6C2F58EACB96}"/>
-              </a:ext>
-            </a:extLst>
-          </p:cNvPr>
-          <p:cNvCxnSpPr>
-            <a:cxnSpLocks/>
-          </p:cNvCxnSpPr>
-          <p:nvPr/>
-        </p:nvCxnSpPr>
-        <p:spPr>
-          <a:xfrm>
-            <a:off x="2159509" y="2391164"/>
-            <a:ext cx="551235" cy="0"/>
-          </a:xfrm>
-          <a:prstGeom prst="straightConnector1">
-            <a:avLst/>
-          </a:prstGeom>
-          <a:ln w="38100">
-            <a:solidFill>
-              <a:srgbClr val="B266FF"/>
-            </a:solidFill>
-            <a:tailEnd type="triangle"/>
-          </a:ln>
-        </p:spPr>
-        <p:style>
-          <a:lnRef idx="1">
-            <a:schemeClr val="accent1"/>
-          </a:lnRef>
-          <a:fillRef idx="0">
-            <a:schemeClr val="accent1"/>
-          </a:fillRef>
-          <a:effectRef idx="0">
-            <a:schemeClr val="accent1"/>
-          </a:effectRef>
-          <a:fontRef idx="minor">
-            <a:schemeClr val="tx1"/>
-          </a:fontRef>
-        </p:style>
-      </p:cxnSp>
-      <p:cxnSp>
-        <p:nvCxnSpPr>
-          <p:cNvPr id="19" name="Connecteur droit avec flèche 18">
-            <a:extLst>
-              <a:ext uri="{FF2B5EF4-FFF2-40B4-BE49-F238E27FC236}">
-                <a16:creationId xmlns:a16="http://schemas.microsoft.com/office/drawing/2014/main" id="{7965C0EE-9642-2EA9-734C-AF9138078030}"/>
-              </a:ext>
-            </a:extLst>
-          </p:cNvPr>
-          <p:cNvCxnSpPr>
-            <a:cxnSpLocks/>
-          </p:cNvCxnSpPr>
-          <p:nvPr/>
-        </p:nvCxnSpPr>
-        <p:spPr>
-          <a:xfrm>
-            <a:off x="2183074" y="3554011"/>
-            <a:ext cx="551235" cy="0"/>
-          </a:xfrm>
-          <a:prstGeom prst="straightConnector1">
-            <a:avLst/>
-          </a:prstGeom>
-          <a:ln w="38100">
-            <a:solidFill>
-              <a:srgbClr val="FF0080"/>
-            </a:solidFill>
-            <a:tailEnd type="triangle"/>
-          </a:ln>
-        </p:spPr>
-        <p:style>
-          <a:lnRef idx="1">
-            <a:schemeClr val="accent1"/>
-          </a:lnRef>
-          <a:fillRef idx="0">
-            <a:schemeClr val="accent1"/>
-          </a:fillRef>
-          <a:effectRef idx="0">
-            <a:schemeClr val="accent1"/>
-          </a:effectRef>
-          <a:fontRef idx="minor">
-            <a:schemeClr val="tx1"/>
-          </a:fontRef>
-        </p:style>
-      </p:cxnSp>
-      <p:pic>
-        <p:nvPicPr>
-          <p:cNvPr id="20" name="Picture 2">
-            <a:extLst>
-              <a:ext uri="{FF2B5EF4-FFF2-40B4-BE49-F238E27FC236}">
-                <a16:creationId xmlns:a16="http://schemas.microsoft.com/office/drawing/2014/main" id="{9F92FB23-9D37-AEB9-493C-1E3DAE1913D2}"/>
-              </a:ext>
-            </a:extLst>
-          </p:cNvPr>
-          <p:cNvPicPr>
-            <a:picLocks noChangeAspect="1" noChangeArrowheads="1"/>
-          </p:cNvPicPr>
-          <p:nvPr/>
-        </p:nvPicPr>
-        <p:blipFill rotWithShape="1">
-          <a:blip r:embed="rId19">
-            <a:extLst>
-              <a:ext uri="{28A0092B-C50C-407E-A947-70E740481C1C}">
-                <a14:useLocalDpi xmlns:a14="http://schemas.microsoft.com/office/drawing/2010/main" val="0"/>
-              </a:ext>
-            </a:extLst>
-          </a:blip>
-          <a:srcRect l="15800" t="16870" r="16971" b="17050"/>
-          <a:stretch>
-            <a:fillRect/>
-          </a:stretch>
-        </p:blipFill>
-        <p:spPr bwMode="auto">
-          <a:xfrm>
-            <a:off x="3739660" y="2205082"/>
-            <a:ext cx="350993" cy="344994"/>
-          </a:xfrm>
-          <a:prstGeom prst="rect">
-            <a:avLst/>
-          </a:prstGeom>
-          <a:noFill/>
-          <a:extLst>
-            <a:ext uri="{909E8E84-426E-40DD-AFC4-6F175D3DCCD1}">
-              <a14:hiddenFill xmlns:a14="http://schemas.microsoft.com/office/drawing/2010/main">
-                <a:solidFill>
-                  <a:srgbClr val="FFFFFF"/>
-                </a:solidFill>
-              </a14:hiddenFill>
-            </a:ext>
-          </a:extLst>
-        </p:spPr>
-      </p:pic>
-      <p:cxnSp>
-        <p:nvCxnSpPr>
-          <p:cNvPr id="24" name="Connecteur droit avec flèche 23">
-            <a:extLst>
-              <a:ext uri="{FF2B5EF4-FFF2-40B4-BE49-F238E27FC236}">
-                <a16:creationId xmlns:a16="http://schemas.microsoft.com/office/drawing/2014/main" id="{9AD6B91C-AEA0-8BCF-42B4-76BEC72FDE00}"/>
-              </a:ext>
-            </a:extLst>
-          </p:cNvPr>
-          <p:cNvCxnSpPr>
-            <a:cxnSpLocks/>
-            <a:endCxn id="20" idx="1"/>
-          </p:cNvCxnSpPr>
-          <p:nvPr/>
-        </p:nvCxnSpPr>
-        <p:spPr>
-          <a:xfrm flipV="1">
-            <a:off x="3335298" y="2377579"/>
-            <a:ext cx="404362" cy="13"/>
-          </a:xfrm>
-          <a:prstGeom prst="straightConnector1">
-            <a:avLst/>
-          </a:prstGeom>
-          <a:ln w="12700">
-            <a:solidFill>
-              <a:srgbClr val="B266FF"/>
-            </a:solidFill>
-            <a:tailEnd type="triangle"/>
-          </a:ln>
-        </p:spPr>
-        <p:style>
-          <a:lnRef idx="1">
-            <a:schemeClr val="accent1"/>
-          </a:lnRef>
-          <a:fillRef idx="0">
-            <a:schemeClr val="accent1"/>
-          </a:fillRef>
-          <a:effectRef idx="0">
-            <a:schemeClr val="accent1"/>
-          </a:effectRef>
-          <a:fontRef idx="minor">
-            <a:schemeClr val="tx1"/>
-          </a:fontRef>
-        </p:style>
-      </p:cxnSp>
-      <p:cxnSp>
-        <p:nvCxnSpPr>
-          <p:cNvPr id="27" name="Connecteur droit avec flèche 26">
-            <a:extLst>
-              <a:ext uri="{FF2B5EF4-FFF2-40B4-BE49-F238E27FC236}">
-                <a16:creationId xmlns:a16="http://schemas.microsoft.com/office/drawing/2014/main" id="{10B31F45-EE59-3B06-0BB0-9F63BE518A6D}"/>
-              </a:ext>
-            </a:extLst>
-          </p:cNvPr>
-          <p:cNvCxnSpPr>
-            <a:cxnSpLocks/>
-            <a:stCxn id="117" idx="3"/>
-            <a:endCxn id="53" idx="1"/>
-          </p:cNvCxnSpPr>
-          <p:nvPr/>
-        </p:nvCxnSpPr>
-        <p:spPr>
-          <a:xfrm flipV="1">
-            <a:off x="3336021" y="3563437"/>
-            <a:ext cx="1183271" cy="1582"/>
-          </a:xfrm>
-          <a:prstGeom prst="straightConnector1">
-            <a:avLst/>
-          </a:prstGeom>
-          <a:ln w="38100">
-            <a:solidFill>
-              <a:srgbClr val="FF0080"/>
-            </a:solidFill>
-            <a:tailEnd type="triangle"/>
-          </a:ln>
-        </p:spPr>
-        <p:style>
-          <a:lnRef idx="1">
-            <a:schemeClr val="accent1"/>
-          </a:lnRef>
-          <a:fillRef idx="0">
-            <a:schemeClr val="accent1"/>
-          </a:fillRef>
-          <a:effectRef idx="0">
-            <a:schemeClr val="accent1"/>
-          </a:effectRef>
-          <a:fontRef idx="minor">
-            <a:schemeClr val="tx1"/>
-          </a:fontRef>
-        </p:style>
-      </p:cxnSp>
-      <p:sp>
-        <p:nvSpPr>
-          <p:cNvPr id="31" name="ZoneTexte 30">
-            <a:extLst>
-              <a:ext uri="{FF2B5EF4-FFF2-40B4-BE49-F238E27FC236}">
-                <a16:creationId xmlns:a16="http://schemas.microsoft.com/office/drawing/2014/main" id="{6F47604A-F072-9B2B-A28D-D050592AE8FB}"/>
-              </a:ext>
-            </a:extLst>
-          </p:cNvPr>
-          <p:cNvSpPr txBox="1"/>
-          <p:nvPr/>
-        </p:nvSpPr>
-        <p:spPr>
-          <a:xfrm>
-            <a:off x="2317948" y="2666332"/>
-            <a:ext cx="1390212" cy="200055"/>
-          </a:xfrm>
-          <a:prstGeom prst="rect">
-            <a:avLst/>
-          </a:prstGeom>
-          <a:noFill/>
-        </p:spPr>
-        <p:txBody>
-          <a:bodyPr wrap="square" rtlCol="0">
-            <a:spAutoFit/>
-          </a:bodyPr>
-          <a:lstStyle/>
-          <a:p>
-            <a:pPr algn="ctr"/>
-            <a:r>
-              <a:rPr lang="fr-FR" sz="700" b="1" dirty="0"/>
-              <a:t>Données historiques</a:t>
-            </a:r>
-          </a:p>
-        </p:txBody>
-      </p:sp>
-      <p:sp>
-        <p:nvSpPr>
-          <p:cNvPr id="32" name="ZoneTexte 31">
-            <a:extLst>
-              <a:ext uri="{FF2B5EF4-FFF2-40B4-BE49-F238E27FC236}">
-                <a16:creationId xmlns:a16="http://schemas.microsoft.com/office/drawing/2014/main" id="{746A74A5-8390-A9B2-0686-BA8885C4CDA4}"/>
-              </a:ext>
-            </a:extLst>
-          </p:cNvPr>
-          <p:cNvSpPr txBox="1"/>
-          <p:nvPr/>
-        </p:nvSpPr>
-        <p:spPr>
-          <a:xfrm>
-            <a:off x="2317948" y="3823045"/>
-            <a:ext cx="1390212" cy="200055"/>
-          </a:xfrm>
-          <a:prstGeom prst="rect">
-            <a:avLst/>
-          </a:prstGeom>
-          <a:noFill/>
-        </p:spPr>
-        <p:txBody>
-          <a:bodyPr wrap="square" rtlCol="0">
-            <a:spAutoFit/>
-          </a:bodyPr>
-          <a:lstStyle/>
-          <a:p>
-            <a:pPr algn="ctr"/>
-            <a:r>
-              <a:rPr lang="fr-FR" sz="700" b="1" dirty="0"/>
-              <a:t>Données prédictives</a:t>
-            </a:r>
-          </a:p>
-        </p:txBody>
-      </p:sp>
     </p:spTree>
     <p:extLst>
       <p:ext uri="{BB962C8B-B14F-4D97-AF65-F5344CB8AC3E}">
@@ -34128,1990 +34651,6 @@
   <p:clrMapOvr>
     <a:masterClrMapping/>
   </p:clrMapOvr>
-  <p:timing>
-    <p:tnLst>
-      <p:par>
-        <p:cTn id="1" dur="indefinite" restart="never" nodeType="tmRoot">
-          <p:childTnLst>
-            <p:seq concurrent="1" nextAc="seek">
-              <p:cTn id="2" dur="indefinite" nodeType="mainSeq">
-                <p:childTnLst>
-                  <p:par>
-                    <p:cTn id="3" fill="hold">
-                      <p:stCondLst>
-                        <p:cond delay="indefinite"/>
-                      </p:stCondLst>
-                      <p:childTnLst>
-                        <p:par>
-                          <p:cTn id="4" fill="hold">
-                            <p:stCondLst>
-                              <p:cond delay="0"/>
-                            </p:stCondLst>
-                            <p:childTnLst>
-                              <p:par>
-                                <p:cTn id="5" presetID="1" presetClass="entr" presetSubtype="0" fill="hold" nodeType="clickEffect">
-                                  <p:stCondLst>
-                                    <p:cond delay="0"/>
-                                  </p:stCondLst>
-                                  <p:childTnLst>
-                                    <p:set>
-                                      <p:cBhvr>
-                                        <p:cTn id="6" dur="1" fill="hold">
-                                          <p:stCondLst>
-                                            <p:cond delay="0"/>
-                                          </p:stCondLst>
-                                        </p:cTn>
-                                        <p:tgtEl>
-                                          <p:spTgt spid="1028"/>
-                                        </p:tgtEl>
-                                        <p:attrNameLst>
-                                          <p:attrName>style.visibility</p:attrName>
-                                        </p:attrNameLst>
-                                      </p:cBhvr>
-                                      <p:to>
-                                        <p:strVal val="visible"/>
-                                      </p:to>
-                                    </p:set>
-                                  </p:childTnLst>
-                                </p:cTn>
-                              </p:par>
-                              <p:par>
-                                <p:cTn id="7" presetID="1" presetClass="entr" presetSubtype="0" fill="hold" nodeType="withEffect">
-                                  <p:stCondLst>
-                                    <p:cond delay="0"/>
-                                  </p:stCondLst>
-                                  <p:childTnLst>
-                                    <p:set>
-                                      <p:cBhvr>
-                                        <p:cTn id="8" dur="1" fill="hold">
-                                          <p:stCondLst>
-                                            <p:cond delay="0"/>
-                                          </p:stCondLst>
-                                        </p:cTn>
-                                        <p:tgtEl>
-                                          <p:spTgt spid="1030"/>
-                                        </p:tgtEl>
-                                        <p:attrNameLst>
-                                          <p:attrName>style.visibility</p:attrName>
-                                        </p:attrNameLst>
-                                      </p:cBhvr>
-                                      <p:to>
-                                        <p:strVal val="visible"/>
-                                      </p:to>
-                                    </p:set>
-                                  </p:childTnLst>
-                                </p:cTn>
-                              </p:par>
-                              <p:par>
-                                <p:cTn id="9" presetID="1" presetClass="entr" presetSubtype="0" fill="hold" grpId="0" nodeType="withEffect">
-                                  <p:stCondLst>
-                                    <p:cond delay="0"/>
-                                  </p:stCondLst>
-                                  <p:childTnLst>
-                                    <p:set>
-                                      <p:cBhvr>
-                                        <p:cTn id="10" dur="1" fill="hold">
-                                          <p:stCondLst>
-                                            <p:cond delay="0"/>
-                                          </p:stCondLst>
-                                        </p:cTn>
-                                        <p:tgtEl>
-                                          <p:spTgt spid="58"/>
-                                        </p:tgtEl>
-                                        <p:attrNameLst>
-                                          <p:attrName>style.visibility</p:attrName>
-                                        </p:attrNameLst>
-                                      </p:cBhvr>
-                                      <p:to>
-                                        <p:strVal val="visible"/>
-                                      </p:to>
-                                    </p:set>
-                                  </p:childTnLst>
-                                </p:cTn>
-                              </p:par>
-                              <p:par>
-                                <p:cTn id="11" presetID="1" presetClass="entr" presetSubtype="0" fill="hold" nodeType="withEffect">
-                                  <p:stCondLst>
-                                    <p:cond delay="0"/>
-                                  </p:stCondLst>
-                                  <p:childTnLst>
-                                    <p:set>
-                                      <p:cBhvr>
-                                        <p:cTn id="12" dur="1" fill="hold">
-                                          <p:stCondLst>
-                                            <p:cond delay="0"/>
-                                          </p:stCondLst>
-                                        </p:cTn>
-                                        <p:tgtEl>
-                                          <p:spTgt spid="65"/>
-                                        </p:tgtEl>
-                                        <p:attrNameLst>
-                                          <p:attrName>style.visibility</p:attrName>
-                                        </p:attrNameLst>
-                                      </p:cBhvr>
-                                      <p:to>
-                                        <p:strVal val="visible"/>
-                                      </p:to>
-                                    </p:set>
-                                  </p:childTnLst>
-                                </p:cTn>
-                              </p:par>
-                              <p:par>
-                                <p:cTn id="13" presetID="1" presetClass="entr" presetSubtype="0" fill="hold" grpId="0" nodeType="withEffect">
-                                  <p:stCondLst>
-                                    <p:cond delay="0"/>
-                                  </p:stCondLst>
-                                  <p:childTnLst>
-                                    <p:set>
-                                      <p:cBhvr>
-                                        <p:cTn id="14" dur="1" fill="hold">
-                                          <p:stCondLst>
-                                            <p:cond delay="0"/>
-                                          </p:stCondLst>
-                                        </p:cTn>
-                                        <p:tgtEl>
-                                          <p:spTgt spid="67"/>
-                                        </p:tgtEl>
-                                        <p:attrNameLst>
-                                          <p:attrName>style.visibility</p:attrName>
-                                        </p:attrNameLst>
-                                      </p:cBhvr>
-                                      <p:to>
-                                        <p:strVal val="visible"/>
-                                      </p:to>
-                                    </p:set>
-                                  </p:childTnLst>
-                                </p:cTn>
-                              </p:par>
-                              <p:par>
-                                <p:cTn id="15" presetID="1" presetClass="entr" presetSubtype="0" fill="hold" nodeType="withEffect">
-                                  <p:stCondLst>
-                                    <p:cond delay="0"/>
-                                  </p:stCondLst>
-                                  <p:childTnLst>
-                                    <p:set>
-                                      <p:cBhvr>
-                                        <p:cTn id="16" dur="1" fill="hold">
-                                          <p:stCondLst>
-                                            <p:cond delay="0"/>
-                                          </p:stCondLst>
-                                        </p:cTn>
-                                        <p:tgtEl>
-                                          <p:spTgt spid="68"/>
-                                        </p:tgtEl>
-                                        <p:attrNameLst>
-                                          <p:attrName>style.visibility</p:attrName>
-                                        </p:attrNameLst>
-                                      </p:cBhvr>
-                                      <p:to>
-                                        <p:strVal val="visible"/>
-                                      </p:to>
-                                    </p:set>
-                                  </p:childTnLst>
-                                </p:cTn>
-                              </p:par>
-                              <p:par>
-                                <p:cTn id="17" presetID="1" presetClass="entr" presetSubtype="0" fill="hold" grpId="0" nodeType="withEffect">
-                                  <p:stCondLst>
-                                    <p:cond delay="0"/>
-                                  </p:stCondLst>
-                                  <p:childTnLst>
-                                    <p:set>
-                                      <p:cBhvr>
-                                        <p:cTn id="18" dur="1" fill="hold">
-                                          <p:stCondLst>
-                                            <p:cond delay="0"/>
-                                          </p:stCondLst>
-                                        </p:cTn>
-                                        <p:tgtEl>
-                                          <p:spTgt spid="70"/>
-                                        </p:tgtEl>
-                                        <p:attrNameLst>
-                                          <p:attrName>style.visibility</p:attrName>
-                                        </p:attrNameLst>
-                                      </p:cBhvr>
-                                      <p:to>
-                                        <p:strVal val="visible"/>
-                                      </p:to>
-                                    </p:set>
-                                  </p:childTnLst>
-                                </p:cTn>
-                              </p:par>
-                              <p:par>
-                                <p:cTn id="19" presetID="1" presetClass="entr" presetSubtype="0" fill="hold" grpId="0" nodeType="withEffect">
-                                  <p:stCondLst>
-                                    <p:cond delay="0"/>
-                                  </p:stCondLst>
-                                  <p:childTnLst>
-                                    <p:set>
-                                      <p:cBhvr>
-                                        <p:cTn id="20" dur="1" fill="hold">
-                                          <p:stCondLst>
-                                            <p:cond delay="0"/>
-                                          </p:stCondLst>
-                                        </p:cTn>
-                                        <p:tgtEl>
-                                          <p:spTgt spid="73"/>
-                                        </p:tgtEl>
-                                        <p:attrNameLst>
-                                          <p:attrName>style.visibility</p:attrName>
-                                        </p:attrNameLst>
-                                      </p:cBhvr>
-                                      <p:to>
-                                        <p:strVal val="visible"/>
-                                      </p:to>
-                                    </p:set>
-                                  </p:childTnLst>
-                                </p:cTn>
-                              </p:par>
-                              <p:par>
-                                <p:cTn id="21" presetID="1" presetClass="entr" presetSubtype="0" fill="hold" nodeType="withEffect">
-                                  <p:stCondLst>
-                                    <p:cond delay="0"/>
-                                  </p:stCondLst>
-                                  <p:childTnLst>
-                                    <p:set>
-                                      <p:cBhvr>
-                                        <p:cTn id="22" dur="1" fill="hold">
-                                          <p:stCondLst>
-                                            <p:cond delay="0"/>
-                                          </p:stCondLst>
-                                        </p:cTn>
-                                        <p:tgtEl>
-                                          <p:spTgt spid="1026"/>
-                                        </p:tgtEl>
-                                        <p:attrNameLst>
-                                          <p:attrName>style.visibility</p:attrName>
-                                        </p:attrNameLst>
-                                      </p:cBhvr>
-                                      <p:to>
-                                        <p:strVal val="visible"/>
-                                      </p:to>
-                                    </p:set>
-                                  </p:childTnLst>
-                                </p:cTn>
-                              </p:par>
-                              <p:par>
-                                <p:cTn id="23" presetID="1" presetClass="entr" presetSubtype="0" fill="hold" nodeType="withEffect">
-                                  <p:stCondLst>
-                                    <p:cond delay="0"/>
-                                  </p:stCondLst>
-                                  <p:childTnLst>
-                                    <p:set>
-                                      <p:cBhvr>
-                                        <p:cTn id="24" dur="1" fill="hold">
-                                          <p:stCondLst>
-                                            <p:cond delay="0"/>
-                                          </p:stCondLst>
-                                        </p:cTn>
-                                        <p:tgtEl>
-                                          <p:spTgt spid="127"/>
-                                        </p:tgtEl>
-                                        <p:attrNameLst>
-                                          <p:attrName>style.visibility</p:attrName>
-                                        </p:attrNameLst>
-                                      </p:cBhvr>
-                                      <p:to>
-                                        <p:strVal val="visible"/>
-                                      </p:to>
-                                    </p:set>
-                                  </p:childTnLst>
-                                </p:cTn>
-                              </p:par>
-                              <p:par>
-                                <p:cTn id="25" presetID="1" presetClass="entr" presetSubtype="0" fill="hold" nodeType="withEffect">
-                                  <p:stCondLst>
-                                    <p:cond delay="0"/>
-                                  </p:stCondLst>
-                                  <p:childTnLst>
-                                    <p:set>
-                                      <p:cBhvr>
-                                        <p:cTn id="26" dur="1" fill="hold">
-                                          <p:stCondLst>
-                                            <p:cond delay="0"/>
-                                          </p:stCondLst>
-                                        </p:cTn>
-                                        <p:tgtEl>
-                                          <p:spTgt spid="1033"/>
-                                        </p:tgtEl>
-                                        <p:attrNameLst>
-                                          <p:attrName>style.visibility</p:attrName>
-                                        </p:attrNameLst>
-                                      </p:cBhvr>
-                                      <p:to>
-                                        <p:strVal val="visible"/>
-                                      </p:to>
-                                    </p:set>
-                                  </p:childTnLst>
-                                </p:cTn>
-                              </p:par>
-                              <p:par>
-                                <p:cTn id="27" presetID="1" presetClass="entr" presetSubtype="0" fill="hold" grpId="0" nodeType="withEffect">
-                                  <p:stCondLst>
-                                    <p:cond delay="0"/>
-                                  </p:stCondLst>
-                                  <p:childTnLst>
-                                    <p:set>
-                                      <p:cBhvr>
-                                        <p:cTn id="28" dur="1" fill="hold">
-                                          <p:stCondLst>
-                                            <p:cond delay="0"/>
-                                          </p:stCondLst>
-                                        </p:cTn>
-                                        <p:tgtEl>
-                                          <p:spTgt spid="3"/>
-                                        </p:tgtEl>
-                                        <p:attrNameLst>
-                                          <p:attrName>style.visibility</p:attrName>
-                                        </p:attrNameLst>
-                                      </p:cBhvr>
-                                      <p:to>
-                                        <p:strVal val="visible"/>
-                                      </p:to>
-                                    </p:set>
-                                  </p:childTnLst>
-                                </p:cTn>
-                              </p:par>
-                              <p:par>
-                                <p:cTn id="29" presetID="1" presetClass="entr" presetSubtype="0" fill="hold" nodeType="withEffect">
-                                  <p:stCondLst>
-                                    <p:cond delay="0"/>
-                                  </p:stCondLst>
-                                  <p:childTnLst>
-                                    <p:set>
-                                      <p:cBhvr>
-                                        <p:cTn id="30" dur="1" fill="hold">
-                                          <p:stCondLst>
-                                            <p:cond delay="0"/>
-                                          </p:stCondLst>
-                                        </p:cTn>
-                                        <p:tgtEl>
-                                          <p:spTgt spid="6"/>
-                                        </p:tgtEl>
-                                        <p:attrNameLst>
-                                          <p:attrName>style.visibility</p:attrName>
-                                        </p:attrNameLst>
-                                      </p:cBhvr>
-                                      <p:to>
-                                        <p:strVal val="visible"/>
-                                      </p:to>
-                                    </p:set>
-                                  </p:childTnLst>
-                                </p:cTn>
-                              </p:par>
-                              <p:par>
-                                <p:cTn id="31" presetID="1" presetClass="entr" presetSubtype="0" fill="hold" nodeType="withEffect">
-                                  <p:stCondLst>
-                                    <p:cond delay="0"/>
-                                  </p:stCondLst>
-                                  <p:childTnLst>
-                                    <p:set>
-                                      <p:cBhvr>
-                                        <p:cTn id="32" dur="1" fill="hold">
-                                          <p:stCondLst>
-                                            <p:cond delay="0"/>
-                                          </p:stCondLst>
-                                        </p:cTn>
-                                        <p:tgtEl>
-                                          <p:spTgt spid="10"/>
-                                        </p:tgtEl>
-                                        <p:attrNameLst>
-                                          <p:attrName>style.visibility</p:attrName>
-                                        </p:attrNameLst>
-                                      </p:cBhvr>
-                                      <p:to>
-                                        <p:strVal val="visible"/>
-                                      </p:to>
-                                    </p:set>
-                                  </p:childTnLst>
-                                </p:cTn>
-                              </p:par>
-                              <p:par>
-                                <p:cTn id="33" presetID="1" presetClass="entr" presetSubtype="0" fill="hold" grpId="0" nodeType="withEffect">
-                                  <p:stCondLst>
-                                    <p:cond delay="0"/>
-                                  </p:stCondLst>
-                                  <p:childTnLst>
-                                    <p:set>
-                                      <p:cBhvr>
-                                        <p:cTn id="34" dur="1" fill="hold">
-                                          <p:stCondLst>
-                                            <p:cond delay="0"/>
-                                          </p:stCondLst>
-                                        </p:cTn>
-                                        <p:tgtEl>
-                                          <p:spTgt spid="2"/>
-                                        </p:tgtEl>
-                                        <p:attrNameLst>
-                                          <p:attrName>style.visibility</p:attrName>
-                                        </p:attrNameLst>
-                                      </p:cBhvr>
-                                      <p:to>
-                                        <p:strVal val="visible"/>
-                                      </p:to>
-                                    </p:set>
-                                  </p:childTnLst>
-                                </p:cTn>
-                              </p:par>
-                            </p:childTnLst>
-                          </p:cTn>
-                        </p:par>
-                      </p:childTnLst>
-                    </p:cTn>
-                  </p:par>
-                  <p:par>
-                    <p:cTn id="35" fill="hold">
-                      <p:stCondLst>
-                        <p:cond delay="indefinite"/>
-                      </p:stCondLst>
-                      <p:childTnLst>
-                        <p:par>
-                          <p:cTn id="36" fill="hold">
-                            <p:stCondLst>
-                              <p:cond delay="0"/>
-                            </p:stCondLst>
-                            <p:childTnLst>
-                              <p:par>
-                                <p:cTn id="37" presetID="1" presetClass="entr" presetSubtype="0" fill="hold" nodeType="clickEffect">
-                                  <p:stCondLst>
-                                    <p:cond delay="0"/>
-                                  </p:stCondLst>
-                                  <p:childTnLst>
-                                    <p:set>
-                                      <p:cBhvr>
-                                        <p:cTn id="38" dur="1" fill="hold">
-                                          <p:stCondLst>
-                                            <p:cond delay="0"/>
-                                          </p:stCondLst>
-                                        </p:cTn>
-                                        <p:tgtEl>
-                                          <p:spTgt spid="28"/>
-                                        </p:tgtEl>
-                                        <p:attrNameLst>
-                                          <p:attrName>style.visibility</p:attrName>
-                                        </p:attrNameLst>
-                                      </p:cBhvr>
-                                      <p:to>
-                                        <p:strVal val="visible"/>
-                                      </p:to>
-                                    </p:set>
-                                  </p:childTnLst>
-                                </p:cTn>
-                              </p:par>
-                              <p:par>
-                                <p:cTn id="39" presetID="1" presetClass="entr" presetSubtype="0" fill="hold" nodeType="withEffect">
-                                  <p:stCondLst>
-                                    <p:cond delay="0"/>
-                                  </p:stCondLst>
-                                  <p:childTnLst>
-                                    <p:set>
-                                      <p:cBhvr>
-                                        <p:cTn id="40" dur="1" fill="hold">
-                                          <p:stCondLst>
-                                            <p:cond delay="0"/>
-                                          </p:stCondLst>
-                                        </p:cTn>
-                                        <p:tgtEl>
-                                          <p:spTgt spid="29"/>
-                                        </p:tgtEl>
-                                        <p:attrNameLst>
-                                          <p:attrName>style.visibility</p:attrName>
-                                        </p:attrNameLst>
-                                      </p:cBhvr>
-                                      <p:to>
-                                        <p:strVal val="visible"/>
-                                      </p:to>
-                                    </p:set>
-                                  </p:childTnLst>
-                                </p:cTn>
-                              </p:par>
-                              <p:par>
-                                <p:cTn id="41" presetID="1" presetClass="entr" presetSubtype="0" fill="hold" grpId="0" nodeType="withEffect">
-                                  <p:stCondLst>
-                                    <p:cond delay="0"/>
-                                  </p:stCondLst>
-                                  <p:childTnLst>
-                                    <p:set>
-                                      <p:cBhvr>
-                                        <p:cTn id="42" dur="1" fill="hold">
-                                          <p:stCondLst>
-                                            <p:cond delay="0"/>
-                                          </p:stCondLst>
-                                        </p:cTn>
-                                        <p:tgtEl>
-                                          <p:spTgt spid="71"/>
-                                        </p:tgtEl>
-                                        <p:attrNameLst>
-                                          <p:attrName>style.visibility</p:attrName>
-                                        </p:attrNameLst>
-                                      </p:cBhvr>
-                                      <p:to>
-                                        <p:strVal val="visible"/>
-                                      </p:to>
-                                    </p:set>
-                                  </p:childTnLst>
-                                </p:cTn>
-                              </p:par>
-                              <p:par>
-                                <p:cTn id="43" presetID="1" presetClass="entr" presetSubtype="0" fill="hold" grpId="0" nodeType="withEffect">
-                                  <p:stCondLst>
-                                    <p:cond delay="0"/>
-                                  </p:stCondLst>
-                                  <p:childTnLst>
-                                    <p:set>
-                                      <p:cBhvr>
-                                        <p:cTn id="44" dur="1" fill="hold">
-                                          <p:stCondLst>
-                                            <p:cond delay="0"/>
-                                          </p:stCondLst>
-                                        </p:cTn>
-                                        <p:tgtEl>
-                                          <p:spTgt spid="106"/>
-                                        </p:tgtEl>
-                                        <p:attrNameLst>
-                                          <p:attrName>style.visibility</p:attrName>
-                                        </p:attrNameLst>
-                                      </p:cBhvr>
-                                      <p:to>
-                                        <p:strVal val="visible"/>
-                                      </p:to>
-                                    </p:set>
-                                  </p:childTnLst>
-                                </p:cTn>
-                              </p:par>
-                              <p:par>
-                                <p:cTn id="45" presetID="1" presetClass="entr" presetSubtype="0" fill="hold" nodeType="withEffect">
-                                  <p:stCondLst>
-                                    <p:cond delay="0"/>
-                                  </p:stCondLst>
-                                  <p:childTnLst>
-                                    <p:set>
-                                      <p:cBhvr>
-                                        <p:cTn id="46" dur="1" fill="hold">
-                                          <p:stCondLst>
-                                            <p:cond delay="0"/>
-                                          </p:stCondLst>
-                                        </p:cTn>
-                                        <p:tgtEl>
-                                          <p:spTgt spid="107"/>
-                                        </p:tgtEl>
-                                        <p:attrNameLst>
-                                          <p:attrName>style.visibility</p:attrName>
-                                        </p:attrNameLst>
-                                      </p:cBhvr>
-                                      <p:to>
-                                        <p:strVal val="visible"/>
-                                      </p:to>
-                                    </p:set>
-                                  </p:childTnLst>
-                                </p:cTn>
-                              </p:par>
-                              <p:par>
-                                <p:cTn id="47" presetID="1" presetClass="entr" presetSubtype="0" fill="hold" nodeType="withEffect">
-                                  <p:stCondLst>
-                                    <p:cond delay="0"/>
-                                  </p:stCondLst>
-                                  <p:childTnLst>
-                                    <p:set>
-                                      <p:cBhvr>
-                                        <p:cTn id="48" dur="1" fill="hold">
-                                          <p:stCondLst>
-                                            <p:cond delay="0"/>
-                                          </p:stCondLst>
-                                        </p:cTn>
-                                        <p:tgtEl>
-                                          <p:spTgt spid="116"/>
-                                        </p:tgtEl>
-                                        <p:attrNameLst>
-                                          <p:attrName>style.visibility</p:attrName>
-                                        </p:attrNameLst>
-                                      </p:cBhvr>
-                                      <p:to>
-                                        <p:strVal val="visible"/>
-                                      </p:to>
-                                    </p:set>
-                                  </p:childTnLst>
-                                </p:cTn>
-                              </p:par>
-                              <p:par>
-                                <p:cTn id="49" presetID="1" presetClass="entr" presetSubtype="0" fill="hold" nodeType="withEffect">
-                                  <p:stCondLst>
-                                    <p:cond delay="0"/>
-                                  </p:stCondLst>
-                                  <p:childTnLst>
-                                    <p:set>
-                                      <p:cBhvr>
-                                        <p:cTn id="50" dur="1" fill="hold">
-                                          <p:stCondLst>
-                                            <p:cond delay="0"/>
-                                          </p:stCondLst>
-                                        </p:cTn>
-                                        <p:tgtEl>
-                                          <p:spTgt spid="117"/>
-                                        </p:tgtEl>
-                                        <p:attrNameLst>
-                                          <p:attrName>style.visibility</p:attrName>
-                                        </p:attrNameLst>
-                                      </p:cBhvr>
-                                      <p:to>
-                                        <p:strVal val="visible"/>
-                                      </p:to>
-                                    </p:set>
-                                  </p:childTnLst>
-                                </p:cTn>
-                              </p:par>
-                              <p:par>
-                                <p:cTn id="51" presetID="1" presetClass="entr" presetSubtype="0" fill="hold" nodeType="withEffect">
-                                  <p:stCondLst>
-                                    <p:cond delay="0"/>
-                                  </p:stCondLst>
-                                  <p:childTnLst>
-                                    <p:set>
-                                      <p:cBhvr>
-                                        <p:cTn id="52" dur="1" fill="hold">
-                                          <p:stCondLst>
-                                            <p:cond delay="0"/>
-                                          </p:stCondLst>
-                                        </p:cTn>
-                                        <p:tgtEl>
-                                          <p:spTgt spid="11"/>
-                                        </p:tgtEl>
-                                        <p:attrNameLst>
-                                          <p:attrName>style.visibility</p:attrName>
-                                        </p:attrNameLst>
-                                      </p:cBhvr>
-                                      <p:to>
-                                        <p:strVal val="visible"/>
-                                      </p:to>
-                                    </p:set>
-                                  </p:childTnLst>
-                                </p:cTn>
-                              </p:par>
-                              <p:par>
-                                <p:cTn id="53" presetID="1" presetClass="entr" presetSubtype="0" fill="hold" nodeType="withEffect">
-                                  <p:stCondLst>
-                                    <p:cond delay="0"/>
-                                  </p:stCondLst>
-                                  <p:childTnLst>
-                                    <p:set>
-                                      <p:cBhvr>
-                                        <p:cTn id="54" dur="1" fill="hold">
-                                          <p:stCondLst>
-                                            <p:cond delay="0"/>
-                                          </p:stCondLst>
-                                        </p:cTn>
-                                        <p:tgtEl>
-                                          <p:spTgt spid="19"/>
-                                        </p:tgtEl>
-                                        <p:attrNameLst>
-                                          <p:attrName>style.visibility</p:attrName>
-                                        </p:attrNameLst>
-                                      </p:cBhvr>
-                                      <p:to>
-                                        <p:strVal val="visible"/>
-                                      </p:to>
-                                    </p:set>
-                                  </p:childTnLst>
-                                </p:cTn>
-                              </p:par>
-                              <p:par>
-                                <p:cTn id="55" presetID="1" presetClass="entr" presetSubtype="0" fill="hold" nodeType="withEffect">
-                                  <p:stCondLst>
-                                    <p:cond delay="0"/>
-                                  </p:stCondLst>
-                                  <p:childTnLst>
-                                    <p:set>
-                                      <p:cBhvr>
-                                        <p:cTn id="56" dur="1" fill="hold">
-                                          <p:stCondLst>
-                                            <p:cond delay="0"/>
-                                          </p:stCondLst>
-                                        </p:cTn>
-                                        <p:tgtEl>
-                                          <p:spTgt spid="20"/>
-                                        </p:tgtEl>
-                                        <p:attrNameLst>
-                                          <p:attrName>style.visibility</p:attrName>
-                                        </p:attrNameLst>
-                                      </p:cBhvr>
-                                      <p:to>
-                                        <p:strVal val="visible"/>
-                                      </p:to>
-                                    </p:set>
-                                  </p:childTnLst>
-                                </p:cTn>
-                              </p:par>
-                              <p:par>
-                                <p:cTn id="57" presetID="1" presetClass="entr" presetSubtype="0" fill="hold" nodeType="withEffect">
-                                  <p:stCondLst>
-                                    <p:cond delay="0"/>
-                                  </p:stCondLst>
-                                  <p:childTnLst>
-                                    <p:set>
-                                      <p:cBhvr>
-                                        <p:cTn id="58" dur="1" fill="hold">
-                                          <p:stCondLst>
-                                            <p:cond delay="0"/>
-                                          </p:stCondLst>
-                                        </p:cTn>
-                                        <p:tgtEl>
-                                          <p:spTgt spid="24"/>
-                                        </p:tgtEl>
-                                        <p:attrNameLst>
-                                          <p:attrName>style.visibility</p:attrName>
-                                        </p:attrNameLst>
-                                      </p:cBhvr>
-                                      <p:to>
-                                        <p:strVal val="visible"/>
-                                      </p:to>
-                                    </p:set>
-                                  </p:childTnLst>
-                                </p:cTn>
-                              </p:par>
-                              <p:par>
-                                <p:cTn id="59" presetID="1" presetClass="entr" presetSubtype="0" fill="hold" grpId="0" nodeType="withEffect">
-                                  <p:stCondLst>
-                                    <p:cond delay="0"/>
-                                  </p:stCondLst>
-                                  <p:childTnLst>
-                                    <p:set>
-                                      <p:cBhvr>
-                                        <p:cTn id="60" dur="1" fill="hold">
-                                          <p:stCondLst>
-                                            <p:cond delay="0"/>
-                                          </p:stCondLst>
-                                        </p:cTn>
-                                        <p:tgtEl>
-                                          <p:spTgt spid="31"/>
-                                        </p:tgtEl>
-                                        <p:attrNameLst>
-                                          <p:attrName>style.visibility</p:attrName>
-                                        </p:attrNameLst>
-                                      </p:cBhvr>
-                                      <p:to>
-                                        <p:strVal val="visible"/>
-                                      </p:to>
-                                    </p:set>
-                                  </p:childTnLst>
-                                </p:cTn>
-                              </p:par>
-                              <p:par>
-                                <p:cTn id="61" presetID="1" presetClass="entr" presetSubtype="0" fill="hold" grpId="0" nodeType="withEffect">
-                                  <p:stCondLst>
-                                    <p:cond delay="0"/>
-                                  </p:stCondLst>
-                                  <p:childTnLst>
-                                    <p:set>
-                                      <p:cBhvr>
-                                        <p:cTn id="62" dur="1" fill="hold">
-                                          <p:stCondLst>
-                                            <p:cond delay="0"/>
-                                          </p:stCondLst>
-                                        </p:cTn>
-                                        <p:tgtEl>
-                                          <p:spTgt spid="32"/>
-                                        </p:tgtEl>
-                                        <p:attrNameLst>
-                                          <p:attrName>style.visibility</p:attrName>
-                                        </p:attrNameLst>
-                                      </p:cBhvr>
-                                      <p:to>
-                                        <p:strVal val="visible"/>
-                                      </p:to>
-                                    </p:set>
-                                  </p:childTnLst>
-                                </p:cTn>
-                              </p:par>
-                              <p:par>
-                                <p:cTn id="63" presetID="1" presetClass="entr" presetSubtype="0" fill="hold" grpId="0" nodeType="withEffect">
-                                  <p:stCondLst>
-                                    <p:cond delay="0"/>
-                                  </p:stCondLst>
-                                  <p:childTnLst>
-                                    <p:set>
-                                      <p:cBhvr>
-                                        <p:cTn id="64" dur="1" fill="hold">
-                                          <p:stCondLst>
-                                            <p:cond delay="0"/>
-                                          </p:stCondLst>
-                                        </p:cTn>
-                                        <p:tgtEl>
-                                          <p:spTgt spid="18"/>
-                                        </p:tgtEl>
-                                        <p:attrNameLst>
-                                          <p:attrName>style.visibility</p:attrName>
-                                        </p:attrNameLst>
-                                      </p:cBhvr>
-                                      <p:to>
-                                        <p:strVal val="visible"/>
-                                      </p:to>
-                                    </p:set>
-                                  </p:childTnLst>
-                                </p:cTn>
-                              </p:par>
-                            </p:childTnLst>
-                          </p:cTn>
-                        </p:par>
-                      </p:childTnLst>
-                    </p:cTn>
-                  </p:par>
-                  <p:par>
-                    <p:cTn id="65" fill="hold">
-                      <p:stCondLst>
-                        <p:cond delay="indefinite"/>
-                      </p:stCondLst>
-                      <p:childTnLst>
-                        <p:par>
-                          <p:cTn id="66" fill="hold">
-                            <p:stCondLst>
-                              <p:cond delay="0"/>
-                            </p:stCondLst>
-                            <p:childTnLst>
-                              <p:par>
-                                <p:cTn id="67" presetID="1" presetClass="entr" presetSubtype="0" fill="hold" grpId="0" nodeType="clickEffect">
-                                  <p:stCondLst>
-                                    <p:cond delay="0"/>
-                                  </p:stCondLst>
-                                  <p:childTnLst>
-                                    <p:set>
-                                      <p:cBhvr>
-                                        <p:cTn id="68" dur="1" fill="hold">
-                                          <p:stCondLst>
-                                            <p:cond delay="0"/>
-                                          </p:stCondLst>
-                                        </p:cTn>
-                                        <p:tgtEl>
-                                          <p:spTgt spid="22"/>
-                                        </p:tgtEl>
-                                        <p:attrNameLst>
-                                          <p:attrName>style.visibility</p:attrName>
-                                        </p:attrNameLst>
-                                      </p:cBhvr>
-                                      <p:to>
-                                        <p:strVal val="visible"/>
-                                      </p:to>
-                                    </p:set>
-                                  </p:childTnLst>
-                                </p:cTn>
-                              </p:par>
-                              <p:par>
-                                <p:cTn id="69" presetID="1" presetClass="entr" presetSubtype="0" fill="hold" nodeType="withEffect">
-                                  <p:stCondLst>
-                                    <p:cond delay="0"/>
-                                  </p:stCondLst>
-                                  <p:childTnLst>
-                                    <p:set>
-                                      <p:cBhvr>
-                                        <p:cTn id="70" dur="1" fill="hold">
-                                          <p:stCondLst>
-                                            <p:cond delay="0"/>
-                                          </p:stCondLst>
-                                        </p:cTn>
-                                        <p:tgtEl>
-                                          <p:spTgt spid="1036"/>
-                                        </p:tgtEl>
-                                        <p:attrNameLst>
-                                          <p:attrName>style.visibility</p:attrName>
-                                        </p:attrNameLst>
-                                      </p:cBhvr>
-                                      <p:to>
-                                        <p:strVal val="visible"/>
-                                      </p:to>
-                                    </p:set>
-                                  </p:childTnLst>
-                                </p:cTn>
-                              </p:par>
-                              <p:par>
-                                <p:cTn id="71" presetID="1" presetClass="entr" presetSubtype="0" fill="hold" nodeType="withEffect">
-                                  <p:stCondLst>
-                                    <p:cond delay="0"/>
-                                  </p:stCondLst>
-                                  <p:childTnLst>
-                                    <p:set>
-                                      <p:cBhvr>
-                                        <p:cTn id="72" dur="1" fill="hold">
-                                          <p:stCondLst>
-                                            <p:cond delay="0"/>
-                                          </p:stCondLst>
-                                        </p:cTn>
-                                        <p:tgtEl>
-                                          <p:spTgt spid="1038"/>
-                                        </p:tgtEl>
-                                        <p:attrNameLst>
-                                          <p:attrName>style.visibility</p:attrName>
-                                        </p:attrNameLst>
-                                      </p:cBhvr>
-                                      <p:to>
-                                        <p:strVal val="visible"/>
-                                      </p:to>
-                                    </p:set>
-                                  </p:childTnLst>
-                                </p:cTn>
-                              </p:par>
-                              <p:par>
-                                <p:cTn id="73" presetID="1" presetClass="entr" presetSubtype="0" fill="hold" grpId="0" nodeType="withEffect">
-                                  <p:stCondLst>
-                                    <p:cond delay="0"/>
-                                  </p:stCondLst>
-                                  <p:childTnLst>
-                                    <p:set>
-                                      <p:cBhvr>
-                                        <p:cTn id="74" dur="1" fill="hold">
-                                          <p:stCondLst>
-                                            <p:cond delay="0"/>
-                                          </p:stCondLst>
-                                        </p:cTn>
-                                        <p:tgtEl>
-                                          <p:spTgt spid="47"/>
-                                        </p:tgtEl>
-                                        <p:attrNameLst>
-                                          <p:attrName>style.visibility</p:attrName>
-                                        </p:attrNameLst>
-                                      </p:cBhvr>
-                                      <p:to>
-                                        <p:strVal val="visible"/>
-                                      </p:to>
-                                    </p:set>
-                                  </p:childTnLst>
-                                </p:cTn>
-                              </p:par>
-                              <p:par>
-                                <p:cTn id="75" presetID="1" presetClass="entr" presetSubtype="0" fill="hold" grpId="0" nodeType="withEffect">
-                                  <p:stCondLst>
-                                    <p:cond delay="0"/>
-                                  </p:stCondLst>
-                                  <p:childTnLst>
-                                    <p:set>
-                                      <p:cBhvr>
-                                        <p:cTn id="76" dur="1" fill="hold">
-                                          <p:stCondLst>
-                                            <p:cond delay="0"/>
-                                          </p:stCondLst>
-                                        </p:cTn>
-                                        <p:tgtEl>
-                                          <p:spTgt spid="48"/>
-                                        </p:tgtEl>
-                                        <p:attrNameLst>
-                                          <p:attrName>style.visibility</p:attrName>
-                                        </p:attrNameLst>
-                                      </p:cBhvr>
-                                      <p:to>
-                                        <p:strVal val="visible"/>
-                                      </p:to>
-                                    </p:set>
-                                  </p:childTnLst>
-                                </p:cTn>
-                              </p:par>
-                              <p:par>
-                                <p:cTn id="77" presetID="1" presetClass="entr" presetSubtype="0" fill="hold" grpId="0" nodeType="withEffect">
-                                  <p:stCondLst>
-                                    <p:cond delay="0"/>
-                                  </p:stCondLst>
-                                  <p:childTnLst>
-                                    <p:set>
-                                      <p:cBhvr>
-                                        <p:cTn id="78" dur="1" fill="hold">
-                                          <p:stCondLst>
-                                            <p:cond delay="0"/>
-                                          </p:stCondLst>
-                                        </p:cTn>
-                                        <p:tgtEl>
-                                          <p:spTgt spid="49"/>
-                                        </p:tgtEl>
-                                        <p:attrNameLst>
-                                          <p:attrName>style.visibility</p:attrName>
-                                        </p:attrNameLst>
-                                      </p:cBhvr>
-                                      <p:to>
-                                        <p:strVal val="visible"/>
-                                      </p:to>
-                                    </p:set>
-                                  </p:childTnLst>
-                                </p:cTn>
-                              </p:par>
-                              <p:par>
-                                <p:cTn id="79" presetID="1" presetClass="entr" presetSubtype="0" fill="hold" grpId="0" nodeType="withEffect">
-                                  <p:stCondLst>
-                                    <p:cond delay="0"/>
-                                  </p:stCondLst>
-                                  <p:childTnLst>
-                                    <p:set>
-                                      <p:cBhvr>
-                                        <p:cTn id="80" dur="1" fill="hold">
-                                          <p:stCondLst>
-                                            <p:cond delay="0"/>
-                                          </p:stCondLst>
-                                        </p:cTn>
-                                        <p:tgtEl>
-                                          <p:spTgt spid="50"/>
-                                        </p:tgtEl>
-                                        <p:attrNameLst>
-                                          <p:attrName>style.visibility</p:attrName>
-                                        </p:attrNameLst>
-                                      </p:cBhvr>
-                                      <p:to>
-                                        <p:strVal val="visible"/>
-                                      </p:to>
-                                    </p:set>
-                                  </p:childTnLst>
-                                </p:cTn>
-                              </p:par>
-                              <p:par>
-                                <p:cTn id="81" presetID="1" presetClass="entr" presetSubtype="0" fill="hold" nodeType="withEffect">
-                                  <p:stCondLst>
-                                    <p:cond delay="0"/>
-                                  </p:stCondLst>
-                                  <p:childTnLst>
-                                    <p:set>
-                                      <p:cBhvr>
-                                        <p:cTn id="82" dur="1" fill="hold">
-                                          <p:stCondLst>
-                                            <p:cond delay="0"/>
-                                          </p:stCondLst>
-                                        </p:cTn>
-                                        <p:tgtEl>
-                                          <p:spTgt spid="2054"/>
-                                        </p:tgtEl>
-                                        <p:attrNameLst>
-                                          <p:attrName>style.visibility</p:attrName>
-                                        </p:attrNameLst>
-                                      </p:cBhvr>
-                                      <p:to>
-                                        <p:strVal val="visible"/>
-                                      </p:to>
-                                    </p:set>
-                                  </p:childTnLst>
-                                </p:cTn>
-                              </p:par>
-                              <p:par>
-                                <p:cTn id="83" presetID="1" presetClass="entr" presetSubtype="0" fill="hold" nodeType="withEffect">
-                                  <p:stCondLst>
-                                    <p:cond delay="0"/>
-                                  </p:stCondLst>
-                                  <p:childTnLst>
-                                    <p:set>
-                                      <p:cBhvr>
-                                        <p:cTn id="84" dur="1" fill="hold">
-                                          <p:stCondLst>
-                                            <p:cond delay="0"/>
-                                          </p:stCondLst>
-                                        </p:cTn>
-                                        <p:tgtEl>
-                                          <p:spTgt spid="51"/>
-                                        </p:tgtEl>
-                                        <p:attrNameLst>
-                                          <p:attrName>style.visibility</p:attrName>
-                                        </p:attrNameLst>
-                                      </p:cBhvr>
-                                      <p:to>
-                                        <p:strVal val="visible"/>
-                                      </p:to>
-                                    </p:set>
-                                  </p:childTnLst>
-                                </p:cTn>
-                              </p:par>
-                              <p:par>
-                                <p:cTn id="85" presetID="1" presetClass="entr" presetSubtype="0" fill="hold" grpId="0" nodeType="withEffect">
-                                  <p:stCondLst>
-                                    <p:cond delay="0"/>
-                                  </p:stCondLst>
-                                  <p:childTnLst>
-                                    <p:set>
-                                      <p:cBhvr>
-                                        <p:cTn id="86" dur="1" fill="hold">
-                                          <p:stCondLst>
-                                            <p:cond delay="0"/>
-                                          </p:stCondLst>
-                                        </p:cTn>
-                                        <p:tgtEl>
-                                          <p:spTgt spid="52"/>
-                                        </p:tgtEl>
-                                        <p:attrNameLst>
-                                          <p:attrName>style.visibility</p:attrName>
-                                        </p:attrNameLst>
-                                      </p:cBhvr>
-                                      <p:to>
-                                        <p:strVal val="visible"/>
-                                      </p:to>
-                                    </p:set>
-                                  </p:childTnLst>
-                                </p:cTn>
-                              </p:par>
-                              <p:par>
-                                <p:cTn id="87" presetID="1" presetClass="entr" presetSubtype="0" fill="hold" grpId="0" nodeType="withEffect">
-                                  <p:stCondLst>
-                                    <p:cond delay="0"/>
-                                  </p:stCondLst>
-                                  <p:childTnLst>
-                                    <p:set>
-                                      <p:cBhvr>
-                                        <p:cTn id="88" dur="1" fill="hold">
-                                          <p:stCondLst>
-                                            <p:cond delay="0"/>
-                                          </p:stCondLst>
-                                        </p:cTn>
-                                        <p:tgtEl>
-                                          <p:spTgt spid="53"/>
-                                        </p:tgtEl>
-                                        <p:attrNameLst>
-                                          <p:attrName>style.visibility</p:attrName>
-                                        </p:attrNameLst>
-                                      </p:cBhvr>
-                                      <p:to>
-                                        <p:strVal val="visible"/>
-                                      </p:to>
-                                    </p:set>
-                                  </p:childTnLst>
-                                </p:cTn>
-                              </p:par>
-                              <p:par>
-                                <p:cTn id="89" presetID="1" presetClass="entr" presetSubtype="0" fill="hold" nodeType="withEffect">
-                                  <p:stCondLst>
-                                    <p:cond delay="0"/>
-                                  </p:stCondLst>
-                                  <p:childTnLst>
-                                    <p:set>
-                                      <p:cBhvr>
-                                        <p:cTn id="90" dur="1" fill="hold">
-                                          <p:stCondLst>
-                                            <p:cond delay="0"/>
-                                          </p:stCondLst>
-                                        </p:cTn>
-                                        <p:tgtEl>
-                                          <p:spTgt spid="1046"/>
-                                        </p:tgtEl>
-                                        <p:attrNameLst>
-                                          <p:attrName>style.visibility</p:attrName>
-                                        </p:attrNameLst>
-                                      </p:cBhvr>
-                                      <p:to>
-                                        <p:strVal val="visible"/>
-                                      </p:to>
-                                    </p:set>
-                                  </p:childTnLst>
-                                </p:cTn>
-                              </p:par>
-                              <p:par>
-                                <p:cTn id="91" presetID="1" presetClass="entr" presetSubtype="0" fill="hold" nodeType="withEffect">
-                                  <p:stCondLst>
-                                    <p:cond delay="0"/>
-                                  </p:stCondLst>
-                                  <p:childTnLst>
-                                    <p:set>
-                                      <p:cBhvr>
-                                        <p:cTn id="92" dur="1" fill="hold">
-                                          <p:stCondLst>
-                                            <p:cond delay="0"/>
-                                          </p:stCondLst>
-                                        </p:cTn>
-                                        <p:tgtEl>
-                                          <p:spTgt spid="1068"/>
-                                        </p:tgtEl>
-                                        <p:attrNameLst>
-                                          <p:attrName>style.visibility</p:attrName>
-                                        </p:attrNameLst>
-                                      </p:cBhvr>
-                                      <p:to>
-                                        <p:strVal val="visible"/>
-                                      </p:to>
-                                    </p:set>
-                                  </p:childTnLst>
-                                </p:cTn>
-                              </p:par>
-                              <p:par>
-                                <p:cTn id="93" presetID="1" presetClass="entr" presetSubtype="0" fill="hold" nodeType="withEffect">
-                                  <p:stCondLst>
-                                    <p:cond delay="0"/>
-                                  </p:stCondLst>
-                                  <p:childTnLst>
-                                    <p:set>
-                                      <p:cBhvr>
-                                        <p:cTn id="94" dur="1" fill="hold">
-                                          <p:stCondLst>
-                                            <p:cond delay="0"/>
-                                          </p:stCondLst>
-                                        </p:cTn>
-                                        <p:tgtEl>
-                                          <p:spTgt spid="30"/>
-                                        </p:tgtEl>
-                                        <p:attrNameLst>
-                                          <p:attrName>style.visibility</p:attrName>
-                                        </p:attrNameLst>
-                                      </p:cBhvr>
-                                      <p:to>
-                                        <p:strVal val="visible"/>
-                                      </p:to>
-                                    </p:set>
-                                  </p:childTnLst>
-                                </p:cTn>
-                              </p:par>
-                              <p:par>
-                                <p:cTn id="95" presetID="1" presetClass="entr" presetSubtype="0" fill="hold" grpId="0" nodeType="withEffect">
-                                  <p:stCondLst>
-                                    <p:cond delay="0"/>
-                                  </p:stCondLst>
-                                  <p:childTnLst>
-                                    <p:set>
-                                      <p:cBhvr>
-                                        <p:cTn id="96" dur="1" fill="hold">
-                                          <p:stCondLst>
-                                            <p:cond delay="0"/>
-                                          </p:stCondLst>
-                                        </p:cTn>
-                                        <p:tgtEl>
-                                          <p:spTgt spid="46"/>
-                                        </p:tgtEl>
-                                        <p:attrNameLst>
-                                          <p:attrName>style.visibility</p:attrName>
-                                        </p:attrNameLst>
-                                      </p:cBhvr>
-                                      <p:to>
-                                        <p:strVal val="visible"/>
-                                      </p:to>
-                                    </p:set>
-                                  </p:childTnLst>
-                                </p:cTn>
-                              </p:par>
-                              <p:par>
-                                <p:cTn id="97" presetID="1" presetClass="entr" presetSubtype="0" fill="hold" nodeType="withEffect">
-                                  <p:stCondLst>
-                                    <p:cond delay="0"/>
-                                  </p:stCondLst>
-                                  <p:childTnLst>
-                                    <p:set>
-                                      <p:cBhvr>
-                                        <p:cTn id="98" dur="1" fill="hold">
-                                          <p:stCondLst>
-                                            <p:cond delay="0"/>
-                                          </p:stCondLst>
-                                        </p:cTn>
-                                        <p:tgtEl>
-                                          <p:spTgt spid="1034"/>
-                                        </p:tgtEl>
-                                        <p:attrNameLst>
-                                          <p:attrName>style.visibility</p:attrName>
-                                        </p:attrNameLst>
-                                      </p:cBhvr>
-                                      <p:to>
-                                        <p:strVal val="visible"/>
-                                      </p:to>
-                                    </p:set>
-                                  </p:childTnLst>
-                                </p:cTn>
-                              </p:par>
-                              <p:par>
-                                <p:cTn id="99" presetID="1" presetClass="entr" presetSubtype="0" fill="hold" grpId="0" nodeType="withEffect">
-                                  <p:stCondLst>
-                                    <p:cond delay="0"/>
-                                  </p:stCondLst>
-                                  <p:childTnLst>
-                                    <p:set>
-                                      <p:cBhvr>
-                                        <p:cTn id="100" dur="1" fill="hold">
-                                          <p:stCondLst>
-                                            <p:cond delay="0"/>
-                                          </p:stCondLst>
-                                        </p:cTn>
-                                        <p:tgtEl>
-                                          <p:spTgt spid="44"/>
-                                        </p:tgtEl>
-                                        <p:attrNameLst>
-                                          <p:attrName>style.visibility</p:attrName>
-                                        </p:attrNameLst>
-                                      </p:cBhvr>
-                                      <p:to>
-                                        <p:strVal val="visible"/>
-                                      </p:to>
-                                    </p:set>
-                                  </p:childTnLst>
-                                </p:cTn>
-                              </p:par>
-                              <p:par>
-                                <p:cTn id="101" presetID="1" presetClass="entr" presetSubtype="0" fill="hold" nodeType="withEffect">
-                                  <p:stCondLst>
-                                    <p:cond delay="0"/>
-                                  </p:stCondLst>
-                                  <p:childTnLst>
-                                    <p:set>
-                                      <p:cBhvr>
-                                        <p:cTn id="102" dur="1" fill="hold">
-                                          <p:stCondLst>
-                                            <p:cond delay="0"/>
-                                          </p:stCondLst>
-                                        </p:cTn>
-                                        <p:tgtEl>
-                                          <p:spTgt spid="108"/>
-                                        </p:tgtEl>
-                                        <p:attrNameLst>
-                                          <p:attrName>style.visibility</p:attrName>
-                                        </p:attrNameLst>
-                                      </p:cBhvr>
-                                      <p:to>
-                                        <p:strVal val="visible"/>
-                                      </p:to>
-                                    </p:set>
-                                  </p:childTnLst>
-                                </p:cTn>
-                              </p:par>
-                              <p:par>
-                                <p:cTn id="103" presetID="1" presetClass="entr" presetSubtype="0" fill="hold" nodeType="withEffect">
-                                  <p:stCondLst>
-                                    <p:cond delay="0"/>
-                                  </p:stCondLst>
-                                  <p:childTnLst>
-                                    <p:set>
-                                      <p:cBhvr>
-                                        <p:cTn id="104" dur="1" fill="hold">
-                                          <p:stCondLst>
-                                            <p:cond delay="0"/>
-                                          </p:stCondLst>
-                                        </p:cTn>
-                                        <p:tgtEl>
-                                          <p:spTgt spid="27"/>
-                                        </p:tgtEl>
-                                        <p:attrNameLst>
-                                          <p:attrName>style.visibility</p:attrName>
-                                        </p:attrNameLst>
-                                      </p:cBhvr>
-                                      <p:to>
-                                        <p:strVal val="visible"/>
-                                      </p:to>
-                                    </p:set>
-                                  </p:childTnLst>
-                                </p:cTn>
-                              </p:par>
-                              <p:par>
-                                <p:cTn id="105" presetID="1" presetClass="entr" presetSubtype="0" fill="hold" grpId="0" nodeType="withEffect">
-                                  <p:stCondLst>
-                                    <p:cond delay="0"/>
-                                  </p:stCondLst>
-                                  <p:childTnLst>
-                                    <p:set>
-                                      <p:cBhvr>
-                                        <p:cTn id="106" dur="1" fill="hold">
-                                          <p:stCondLst>
-                                            <p:cond delay="0"/>
-                                          </p:stCondLst>
-                                        </p:cTn>
-                                        <p:tgtEl>
-                                          <p:spTgt spid="5"/>
-                                        </p:tgtEl>
-                                        <p:attrNameLst>
-                                          <p:attrName>style.visibility</p:attrName>
-                                        </p:attrNameLst>
-                                      </p:cBhvr>
-                                      <p:to>
-                                        <p:strVal val="visible"/>
-                                      </p:to>
-                                    </p:set>
-                                  </p:childTnLst>
-                                </p:cTn>
-                              </p:par>
-                            </p:childTnLst>
-                          </p:cTn>
-                        </p:par>
-                      </p:childTnLst>
-                    </p:cTn>
-                  </p:par>
-                  <p:par>
-                    <p:cTn id="107" fill="hold">
-                      <p:stCondLst>
-                        <p:cond delay="indefinite"/>
-                      </p:stCondLst>
-                      <p:childTnLst>
-                        <p:par>
-                          <p:cTn id="108" fill="hold">
-                            <p:stCondLst>
-                              <p:cond delay="0"/>
-                            </p:stCondLst>
-                            <p:childTnLst>
-                              <p:par>
-                                <p:cTn id="109" presetID="1" presetClass="entr" presetSubtype="0" fill="hold" nodeType="clickEffect">
-                                  <p:stCondLst>
-                                    <p:cond delay="0"/>
-                                  </p:stCondLst>
-                                  <p:childTnLst>
-                                    <p:set>
-                                      <p:cBhvr>
-                                        <p:cTn id="110" dur="1" fill="hold">
-                                          <p:stCondLst>
-                                            <p:cond delay="0"/>
-                                          </p:stCondLst>
-                                        </p:cTn>
-                                        <p:tgtEl>
-                                          <p:spTgt spid="2052"/>
-                                        </p:tgtEl>
-                                        <p:attrNameLst>
-                                          <p:attrName>style.visibility</p:attrName>
-                                        </p:attrNameLst>
-                                      </p:cBhvr>
-                                      <p:to>
-                                        <p:strVal val="visible"/>
-                                      </p:to>
-                                    </p:set>
-                                  </p:childTnLst>
-                                </p:cTn>
-                              </p:par>
-                              <p:par>
-                                <p:cTn id="111" presetID="1" presetClass="entr" presetSubtype="0" fill="hold" nodeType="withEffect">
-                                  <p:stCondLst>
-                                    <p:cond delay="0"/>
-                                  </p:stCondLst>
-                                  <p:childTnLst>
-                                    <p:set>
-                                      <p:cBhvr>
-                                        <p:cTn id="112" dur="1" fill="hold">
-                                          <p:stCondLst>
-                                            <p:cond delay="0"/>
-                                          </p:stCondLst>
-                                        </p:cTn>
-                                        <p:tgtEl>
-                                          <p:spTgt spid="43"/>
-                                        </p:tgtEl>
-                                        <p:attrNameLst>
-                                          <p:attrName>style.visibility</p:attrName>
-                                        </p:attrNameLst>
-                                      </p:cBhvr>
-                                      <p:to>
-                                        <p:strVal val="visible"/>
-                                      </p:to>
-                                    </p:set>
-                                  </p:childTnLst>
-                                </p:cTn>
-                              </p:par>
-                              <p:par>
-                                <p:cTn id="113" presetID="1" presetClass="entr" presetSubtype="0" fill="hold" grpId="0" nodeType="withEffect">
-                                  <p:stCondLst>
-                                    <p:cond delay="0"/>
-                                  </p:stCondLst>
-                                  <p:childTnLst>
-                                    <p:set>
-                                      <p:cBhvr>
-                                        <p:cTn id="114" dur="1" fill="hold">
-                                          <p:stCondLst>
-                                            <p:cond delay="0"/>
-                                          </p:stCondLst>
-                                        </p:cTn>
-                                        <p:tgtEl>
-                                          <p:spTgt spid="54"/>
-                                        </p:tgtEl>
-                                        <p:attrNameLst>
-                                          <p:attrName>style.visibility</p:attrName>
-                                        </p:attrNameLst>
-                                      </p:cBhvr>
-                                      <p:to>
-                                        <p:strVal val="visible"/>
-                                      </p:to>
-                                    </p:set>
-                                  </p:childTnLst>
-                                </p:cTn>
-                              </p:par>
-                              <p:par>
-                                <p:cTn id="115" presetID="1" presetClass="entr" presetSubtype="0" fill="hold" grpId="0" nodeType="withEffect">
-                                  <p:stCondLst>
-                                    <p:cond delay="0"/>
-                                  </p:stCondLst>
-                                  <p:childTnLst>
-                                    <p:set>
-                                      <p:cBhvr>
-                                        <p:cTn id="116" dur="1" fill="hold">
-                                          <p:stCondLst>
-                                            <p:cond delay="0"/>
-                                          </p:stCondLst>
-                                        </p:cTn>
-                                        <p:tgtEl>
-                                          <p:spTgt spid="55"/>
-                                        </p:tgtEl>
-                                        <p:attrNameLst>
-                                          <p:attrName>style.visibility</p:attrName>
-                                        </p:attrNameLst>
-                                      </p:cBhvr>
-                                      <p:to>
-                                        <p:strVal val="visible"/>
-                                      </p:to>
-                                    </p:set>
-                                  </p:childTnLst>
-                                </p:cTn>
-                              </p:par>
-                              <p:par>
-                                <p:cTn id="117" presetID="1" presetClass="entr" presetSubtype="0" fill="hold" grpId="0" nodeType="withEffect">
-                                  <p:stCondLst>
-                                    <p:cond delay="0"/>
-                                  </p:stCondLst>
-                                  <p:childTnLst>
-                                    <p:set>
-                                      <p:cBhvr>
-                                        <p:cTn id="118" dur="1" fill="hold">
-                                          <p:stCondLst>
-                                            <p:cond delay="0"/>
-                                          </p:stCondLst>
-                                        </p:cTn>
-                                        <p:tgtEl>
-                                          <p:spTgt spid="56"/>
-                                        </p:tgtEl>
-                                        <p:attrNameLst>
-                                          <p:attrName>style.visibility</p:attrName>
-                                        </p:attrNameLst>
-                                      </p:cBhvr>
-                                      <p:to>
-                                        <p:strVal val="visible"/>
-                                      </p:to>
-                                    </p:set>
-                                  </p:childTnLst>
-                                </p:cTn>
-                              </p:par>
-                              <p:par>
-                                <p:cTn id="119" presetID="1" presetClass="entr" presetSubtype="0" fill="hold" grpId="0" nodeType="withEffect">
-                                  <p:stCondLst>
-                                    <p:cond delay="0"/>
-                                  </p:stCondLst>
-                                  <p:childTnLst>
-                                    <p:set>
-                                      <p:cBhvr>
-                                        <p:cTn id="120" dur="1" fill="hold">
-                                          <p:stCondLst>
-                                            <p:cond delay="0"/>
-                                          </p:stCondLst>
-                                        </p:cTn>
-                                        <p:tgtEl>
-                                          <p:spTgt spid="57"/>
-                                        </p:tgtEl>
-                                        <p:attrNameLst>
-                                          <p:attrName>style.visibility</p:attrName>
-                                        </p:attrNameLst>
-                                      </p:cBhvr>
-                                      <p:to>
-                                        <p:strVal val="visible"/>
-                                      </p:to>
-                                    </p:set>
-                                  </p:childTnLst>
-                                </p:cTn>
-                              </p:par>
-                              <p:par>
-                                <p:cTn id="121" presetID="1" presetClass="entr" presetSubtype="0" fill="hold" grpId="0" nodeType="withEffect">
-                                  <p:stCondLst>
-                                    <p:cond delay="0"/>
-                                  </p:stCondLst>
-                                  <p:childTnLst>
-                                    <p:set>
-                                      <p:cBhvr>
-                                        <p:cTn id="122" dur="1" fill="hold">
-                                          <p:stCondLst>
-                                            <p:cond delay="0"/>
-                                          </p:stCondLst>
-                                        </p:cTn>
-                                        <p:tgtEl>
-                                          <p:spTgt spid="1074"/>
-                                        </p:tgtEl>
-                                        <p:attrNameLst>
-                                          <p:attrName>style.visibility</p:attrName>
-                                        </p:attrNameLst>
-                                      </p:cBhvr>
-                                      <p:to>
-                                        <p:strVal val="visible"/>
-                                      </p:to>
-                                    </p:set>
-                                  </p:childTnLst>
-                                </p:cTn>
-                              </p:par>
-                              <p:par>
-                                <p:cTn id="123" presetID="1" presetClass="entr" presetSubtype="0" fill="hold" grpId="0" nodeType="withEffect" nodePh="1">
-                                  <p:stCondLst>
-                                    <p:cond delay="0"/>
-                                  </p:stCondLst>
-                                  <p:endCondLst>
-                                    <p:cond evt="begin" delay="0">
-                                      <p:tn val="123"/>
-                                    </p:cond>
-                                  </p:endCondLst>
-                                  <p:childTnLst>
-                                    <p:set>
-                                      <p:cBhvr>
-                                        <p:cTn id="124" dur="1" fill="hold">
-                                          <p:stCondLst>
-                                            <p:cond delay="0"/>
-                                          </p:stCondLst>
-                                        </p:cTn>
-                                        <p:tgtEl>
-                                          <p:spTgt spid="2097"/>
-                                        </p:tgtEl>
-                                        <p:attrNameLst>
-                                          <p:attrName>style.visibility</p:attrName>
-                                        </p:attrNameLst>
-                                      </p:cBhvr>
-                                      <p:to>
-                                        <p:strVal val="visible"/>
-                                      </p:to>
-                                    </p:set>
-                                  </p:childTnLst>
-                                </p:cTn>
-                              </p:par>
-                              <p:par>
-                                <p:cTn id="125" presetID="1" presetClass="entr" presetSubtype="0" fill="hold" grpId="0" nodeType="withEffect">
-                                  <p:stCondLst>
-                                    <p:cond delay="0"/>
-                                  </p:stCondLst>
-                                  <p:childTnLst>
-                                    <p:set>
-                                      <p:cBhvr>
-                                        <p:cTn id="126" dur="1" fill="hold">
-                                          <p:stCondLst>
-                                            <p:cond delay="0"/>
-                                          </p:stCondLst>
-                                        </p:cTn>
-                                        <p:tgtEl>
-                                          <p:spTgt spid="4"/>
-                                        </p:tgtEl>
-                                        <p:attrNameLst>
-                                          <p:attrName>style.visibility</p:attrName>
-                                        </p:attrNameLst>
-                                      </p:cBhvr>
-                                      <p:to>
-                                        <p:strVal val="visible"/>
-                                      </p:to>
-                                    </p:set>
-                                  </p:childTnLst>
-                                </p:cTn>
-                              </p:par>
-                              <p:par>
-                                <p:cTn id="127" presetID="1" presetClass="entr" presetSubtype="0" fill="hold" nodeType="withEffect">
-                                  <p:stCondLst>
-                                    <p:cond delay="0"/>
-                                  </p:stCondLst>
-                                  <p:childTnLst>
-                                    <p:set>
-                                      <p:cBhvr>
-                                        <p:cTn id="128" dur="1" fill="hold">
-                                          <p:stCondLst>
-                                            <p:cond delay="0"/>
-                                          </p:stCondLst>
-                                        </p:cTn>
-                                        <p:tgtEl>
-                                          <p:spTgt spid="21"/>
-                                        </p:tgtEl>
-                                        <p:attrNameLst>
-                                          <p:attrName>style.visibility</p:attrName>
-                                        </p:attrNameLst>
-                                      </p:cBhvr>
-                                      <p:to>
-                                        <p:strVal val="visible"/>
-                                      </p:to>
-                                    </p:set>
-                                  </p:childTnLst>
-                                </p:cTn>
-                              </p:par>
-                              <p:par>
-                                <p:cTn id="129" presetID="1" presetClass="entr" presetSubtype="0" fill="hold" grpId="0" nodeType="withEffect">
-                                  <p:stCondLst>
-                                    <p:cond delay="0"/>
-                                  </p:stCondLst>
-                                  <p:childTnLst>
-                                    <p:set>
-                                      <p:cBhvr>
-                                        <p:cTn id="130" dur="1" fill="hold">
-                                          <p:stCondLst>
-                                            <p:cond delay="0"/>
-                                          </p:stCondLst>
-                                        </p:cTn>
-                                        <p:tgtEl>
-                                          <p:spTgt spid="23"/>
-                                        </p:tgtEl>
-                                        <p:attrNameLst>
-                                          <p:attrName>style.visibility</p:attrName>
-                                        </p:attrNameLst>
-                                      </p:cBhvr>
-                                      <p:to>
-                                        <p:strVal val="visible"/>
-                                      </p:to>
-                                    </p:set>
-                                  </p:childTnLst>
-                                </p:cTn>
-                              </p:par>
-                              <p:par>
-                                <p:cTn id="131" presetID="1" presetClass="entr" presetSubtype="0" fill="hold" nodeType="withEffect">
-                                  <p:stCondLst>
-                                    <p:cond delay="0"/>
-                                  </p:stCondLst>
-                                  <p:childTnLst>
-                                    <p:set>
-                                      <p:cBhvr>
-                                        <p:cTn id="132" dur="1" fill="hold">
-                                          <p:stCondLst>
-                                            <p:cond delay="0"/>
-                                          </p:stCondLst>
-                                        </p:cTn>
-                                        <p:tgtEl>
-                                          <p:spTgt spid="78"/>
-                                        </p:tgtEl>
-                                        <p:attrNameLst>
-                                          <p:attrName>style.visibility</p:attrName>
-                                        </p:attrNameLst>
-                                      </p:cBhvr>
-                                      <p:to>
-                                        <p:strVal val="visible"/>
-                                      </p:to>
-                                    </p:set>
-                                  </p:childTnLst>
-                                </p:cTn>
-                              </p:par>
-                              <p:par>
-                                <p:cTn id="133" presetID="1" presetClass="entr" presetSubtype="0" fill="hold" grpId="0" nodeType="withEffect">
-                                  <p:stCondLst>
-                                    <p:cond delay="0"/>
-                                  </p:stCondLst>
-                                  <p:childTnLst>
-                                    <p:set>
-                                      <p:cBhvr>
-                                        <p:cTn id="134" dur="1" fill="hold">
-                                          <p:stCondLst>
-                                            <p:cond delay="0"/>
-                                          </p:stCondLst>
-                                        </p:cTn>
-                                        <p:tgtEl>
-                                          <p:spTgt spid="26"/>
-                                        </p:tgtEl>
-                                        <p:attrNameLst>
-                                          <p:attrName>style.visibility</p:attrName>
-                                        </p:attrNameLst>
-                                      </p:cBhvr>
-                                      <p:to>
-                                        <p:strVal val="visible"/>
-                                      </p:to>
-                                    </p:set>
-                                  </p:childTnLst>
-                                </p:cTn>
-                              </p:par>
-                              <p:par>
-                                <p:cTn id="135" presetID="1" presetClass="entr" presetSubtype="0" fill="hold" nodeType="withEffect">
-                                  <p:stCondLst>
-                                    <p:cond delay="0"/>
-                                  </p:stCondLst>
-                                  <p:childTnLst>
-                                    <p:set>
-                                      <p:cBhvr>
-                                        <p:cTn id="136" dur="1" fill="hold">
-                                          <p:stCondLst>
-                                            <p:cond delay="0"/>
-                                          </p:stCondLst>
-                                        </p:cTn>
-                                        <p:tgtEl>
-                                          <p:spTgt spid="1029"/>
-                                        </p:tgtEl>
-                                        <p:attrNameLst>
-                                          <p:attrName>style.visibility</p:attrName>
-                                        </p:attrNameLst>
-                                      </p:cBhvr>
-                                      <p:to>
-                                        <p:strVal val="visible"/>
-                                      </p:to>
-                                    </p:set>
-                                  </p:childTnLst>
-                                </p:cTn>
-                              </p:par>
-                              <p:par>
-                                <p:cTn id="137" presetID="1" presetClass="entr" presetSubtype="0" fill="hold" nodeType="withEffect">
-                                  <p:stCondLst>
-                                    <p:cond delay="0"/>
-                                  </p:stCondLst>
-                                  <p:childTnLst>
-                                    <p:set>
-                                      <p:cBhvr>
-                                        <p:cTn id="138" dur="1" fill="hold">
-                                          <p:stCondLst>
-                                            <p:cond delay="0"/>
-                                          </p:stCondLst>
-                                        </p:cTn>
-                                        <p:tgtEl>
-                                          <p:spTgt spid="1062"/>
-                                        </p:tgtEl>
-                                        <p:attrNameLst>
-                                          <p:attrName>style.visibility</p:attrName>
-                                        </p:attrNameLst>
-                                      </p:cBhvr>
-                                      <p:to>
-                                        <p:strVal val="visible"/>
-                                      </p:to>
-                                    </p:set>
-                                  </p:childTnLst>
-                                </p:cTn>
-                              </p:par>
-                            </p:childTnLst>
-                          </p:cTn>
-                        </p:par>
-                      </p:childTnLst>
-                    </p:cTn>
-                  </p:par>
-                  <p:par>
-                    <p:cTn id="139" fill="hold">
-                      <p:stCondLst>
-                        <p:cond delay="indefinite"/>
-                      </p:stCondLst>
-                      <p:childTnLst>
-                        <p:par>
-                          <p:cTn id="140" fill="hold">
-                            <p:stCondLst>
-                              <p:cond delay="0"/>
-                            </p:stCondLst>
-                            <p:childTnLst>
-                              <p:par>
-                                <p:cTn id="141" presetID="1" presetClass="entr" presetSubtype="0" fill="hold" nodeType="clickEffect">
-                                  <p:stCondLst>
-                                    <p:cond delay="0"/>
-                                  </p:stCondLst>
-                                  <p:childTnLst>
-                                    <p:set>
-                                      <p:cBhvr>
-                                        <p:cTn id="142" dur="1" fill="hold">
-                                          <p:stCondLst>
-                                            <p:cond delay="0"/>
-                                          </p:stCondLst>
-                                        </p:cTn>
-                                        <p:tgtEl>
-                                          <p:spTgt spid="1075"/>
-                                        </p:tgtEl>
-                                        <p:attrNameLst>
-                                          <p:attrName>style.visibility</p:attrName>
-                                        </p:attrNameLst>
-                                      </p:cBhvr>
-                                      <p:to>
-                                        <p:strVal val="visible"/>
-                                      </p:to>
-                                    </p:set>
-                                  </p:childTnLst>
-                                </p:cTn>
-                              </p:par>
-                            </p:childTnLst>
-                          </p:cTn>
-                        </p:par>
-                      </p:childTnLst>
-                    </p:cTn>
-                  </p:par>
-                  <p:par>
-                    <p:cTn id="143" fill="hold">
-                      <p:stCondLst>
-                        <p:cond delay="indefinite"/>
-                      </p:stCondLst>
-                      <p:childTnLst>
-                        <p:par>
-                          <p:cTn id="144" fill="hold">
-                            <p:stCondLst>
-                              <p:cond delay="0"/>
-                            </p:stCondLst>
-                            <p:childTnLst>
-                              <p:par>
-                                <p:cTn id="145" presetID="1" presetClass="entr" presetSubtype="0" fill="hold" nodeType="clickEffect">
-                                  <p:stCondLst>
-                                    <p:cond delay="0"/>
-                                  </p:stCondLst>
-                                  <p:childTnLst>
-                                    <p:set>
-                                      <p:cBhvr>
-                                        <p:cTn id="146" dur="1" fill="hold">
-                                          <p:stCondLst>
-                                            <p:cond delay="0"/>
-                                          </p:stCondLst>
-                                        </p:cTn>
-                                        <p:tgtEl>
-                                          <p:spTgt spid="2068"/>
-                                        </p:tgtEl>
-                                        <p:attrNameLst>
-                                          <p:attrName>style.visibility</p:attrName>
-                                        </p:attrNameLst>
-                                      </p:cBhvr>
-                                      <p:to>
-                                        <p:strVal val="visible"/>
-                                      </p:to>
-                                    </p:set>
-                                  </p:childTnLst>
-                                </p:cTn>
-                              </p:par>
-                              <p:par>
-                                <p:cTn id="147" presetID="1" presetClass="entr" presetSubtype="0" fill="hold" nodeType="withEffect">
-                                  <p:stCondLst>
-                                    <p:cond delay="0"/>
-                                  </p:stCondLst>
-                                  <p:childTnLst>
-                                    <p:set>
-                                      <p:cBhvr>
-                                        <p:cTn id="148" dur="1" fill="hold">
-                                          <p:stCondLst>
-                                            <p:cond delay="0"/>
-                                          </p:stCondLst>
-                                        </p:cTn>
-                                        <p:tgtEl>
-                                          <p:spTgt spid="2101"/>
-                                        </p:tgtEl>
-                                        <p:attrNameLst>
-                                          <p:attrName>style.visibility</p:attrName>
-                                        </p:attrNameLst>
-                                      </p:cBhvr>
-                                      <p:to>
-                                        <p:strVal val="visible"/>
-                                      </p:to>
-                                    </p:set>
-                                  </p:childTnLst>
-                                </p:cTn>
-                              </p:par>
-                            </p:childTnLst>
-                          </p:cTn>
-                        </p:par>
-                      </p:childTnLst>
-                    </p:cTn>
-                  </p:par>
-                </p:childTnLst>
-              </p:cTn>
-              <p:prevCondLst>
-                <p:cond evt="onPrev" delay="0">
-                  <p:tgtEl>
-                    <p:sldTgt/>
-                  </p:tgtEl>
-                </p:cond>
-              </p:prevCondLst>
-              <p:nextCondLst>
-                <p:cond evt="onNext" delay="0">
-                  <p:tgtEl>
-                    <p:sldTgt/>
-                  </p:tgtEl>
-                </p:cond>
-              </p:nextCondLst>
-            </p:seq>
-          </p:childTnLst>
-        </p:cTn>
-      </p:par>
-    </p:tnLst>
-    <p:bldLst>
-      <p:bldP spid="26" grpId="0" animBg="1"/>
-      <p:bldP spid="22" grpId="0" animBg="1"/>
-      <p:bldP spid="18" grpId="0" animBg="1"/>
-      <p:bldP spid="2" grpId="0" animBg="1"/>
-      <p:bldP spid="47" grpId="0" animBg="1"/>
-      <p:bldP spid="48" grpId="0"/>
-      <p:bldP spid="49" grpId="0" animBg="1"/>
-      <p:bldP spid="50" grpId="0"/>
-      <p:bldP spid="52" grpId="0" animBg="1"/>
-      <p:bldP spid="53" grpId="0" animBg="1"/>
-      <p:bldP spid="58" grpId="0"/>
-      <p:bldP spid="67" grpId="0"/>
-      <p:bldP spid="70" grpId="0"/>
-      <p:bldP spid="73" grpId="0"/>
-      <p:bldP spid="71" grpId="0" animBg="1"/>
-      <p:bldP spid="106" grpId="0" animBg="1"/>
-      <p:bldP spid="54" grpId="0" animBg="1"/>
-      <p:bldP spid="55" grpId="0"/>
-      <p:bldP spid="56" grpId="0" animBg="1"/>
-      <p:bldP spid="57" grpId="0"/>
-      <p:bldP spid="1074" grpId="0" animBg="1"/>
-      <p:bldP spid="2097" grpId="0"/>
-      <p:bldP spid="46" grpId="0" animBg="1"/>
-      <p:bldP spid="44" grpId="0"/>
-      <p:bldP spid="4" grpId="0" animBg="1"/>
-      <p:bldP spid="5" grpId="0" animBg="1"/>
-      <p:bldP spid="23" grpId="0" animBg="1"/>
-      <p:bldP spid="3" grpId="0" animBg="1"/>
-      <p:bldP spid="31" grpId="0"/>
-      <p:bldP spid="32" grpId="0"/>
-    </p:bldLst>
-  </p:timing>
 </p:sld>
 </file>
 
@@ -40748,43 +39287,6 @@
           </a:p>
         </p:txBody>
       </p:sp>
-      <p:pic>
-        <p:nvPicPr>
-          <p:cNvPr id="7" name="Image 6">
-            <a:extLst>
-              <a:ext uri="{FF2B5EF4-FFF2-40B4-BE49-F238E27FC236}">
-                <a16:creationId xmlns:a16="http://schemas.microsoft.com/office/drawing/2014/main" id="{5FE561E2-56B0-D6A0-F0B7-7F202EE51386}"/>
-              </a:ext>
-            </a:extLst>
-          </p:cNvPr>
-          <p:cNvPicPr>
-            <a:picLocks noChangeAspect="1"/>
-          </p:cNvPicPr>
-          <p:nvPr/>
-        </p:nvPicPr>
-        <p:blipFill>
-          <a:blip r:embed="rId4"/>
-          <a:stretch>
-            <a:fillRect/>
-          </a:stretch>
-        </p:blipFill>
-        <p:spPr>
-          <a:xfrm>
-            <a:off x="4953840" y="1116074"/>
-            <a:ext cx="3821225" cy="2932094"/>
-          </a:xfrm>
-          <a:prstGeom prst="rect">
-            <a:avLst/>
-          </a:prstGeom>
-          <a:ln>
-            <a:solidFill>
-              <a:schemeClr val="bg1">
-                <a:lumMod val="75000"/>
-              </a:schemeClr>
-            </a:solidFill>
-          </a:ln>
-        </p:spPr>
-      </p:pic>
       <p:sp>
         <p:nvSpPr>
           <p:cNvPr id="8" name="ZoneTexte 7">
@@ -40799,8 +39301,8 @@
         </p:nvSpPr>
         <p:spPr>
           <a:xfrm>
-            <a:off x="6754305" y="698496"/>
-            <a:ext cx="2020760" cy="340519"/>
+            <a:off x="6375400" y="420404"/>
+            <a:ext cx="2399665" cy="340519"/>
           </a:xfrm>
           <a:prstGeom prst="roundRect">
             <a:avLst/>
@@ -40827,7 +39329,7 @@
                   <a:srgbClr val="C00000"/>
                 </a:solidFill>
               </a:rPr>
-              <a:t>MAE du modèle : 6,57</a:t>
+              <a:t>MAE du modèle : 5,125</a:t>
             </a:r>
           </a:p>
         </p:txBody>
@@ -41202,7 +39704,7 @@
             </a:r>
             <a:r>
               <a:rPr lang="fr-FR" sz="900" dirty="0"/>
-              <a:t>. Au-delà de 70 / 80%, la performance du solaire s’effondre progressivement.</a:t>
+              <a:t>. Au-delà de 70 / 80%, la performance du solaire s’effondre progressivement</a:t>
             </a:r>
           </a:p>
         </p:txBody>
@@ -41282,7 +39784,7 @@
         </p:nvSpPr>
         <p:spPr>
           <a:xfrm>
-            <a:off x="6608002" y="486574"/>
+            <a:off x="6262378" y="208482"/>
             <a:ext cx="292605" cy="292605"/>
           </a:xfrm>
           <a:prstGeom prst="ellipse">
@@ -41343,7 +39845,7 @@
         </p:nvSpPr>
         <p:spPr>
           <a:xfrm rot="1276305">
-            <a:off x="7445610" y="243080"/>
+            <a:off x="7445610" y="-35012"/>
             <a:ext cx="1220771" cy="307777"/>
           </a:xfrm>
           <a:prstGeom prst="rect">
@@ -41391,15 +39893,90 @@
           <p:nvPr/>
         </p:nvPicPr>
         <p:blipFill>
-          <a:blip r:embed="rId5"/>
+          <a:blip r:embed="rId4"/>
           <a:stretch>
             <a:fillRect/>
           </a:stretch>
         </p:blipFill>
         <p:spPr>
           <a:xfrm>
-            <a:off x="365409" y="1109296"/>
-            <a:ext cx="4267865" cy="2932817"/>
+            <a:off x="256567" y="1155049"/>
+            <a:ext cx="4052965" cy="2785141"/>
+          </a:xfrm>
+          <a:prstGeom prst="rect">
+            <a:avLst/>
+          </a:prstGeom>
+          <a:ln>
+            <a:solidFill>
+              <a:schemeClr val="bg1">
+                <a:lumMod val="75000"/>
+              </a:schemeClr>
+            </a:solidFill>
+          </a:ln>
+        </p:spPr>
+      </p:pic>
+      <p:pic>
+        <p:nvPicPr>
+          <p:cNvPr id="6" name="Image 5" descr="Une image contenant diagramme, capture d’écran, pixel, conception&#10;&#10;Le contenu généré par l’IA peut être incorrect.">
+            <a:extLst>
+              <a:ext uri="{FF2B5EF4-FFF2-40B4-BE49-F238E27FC236}">
+                <a16:creationId xmlns:a16="http://schemas.microsoft.com/office/drawing/2014/main" id="{1DCCBE42-74DB-3DFF-14EF-68BE24C6FA39}"/>
+              </a:ext>
+            </a:extLst>
+          </p:cNvPr>
+          <p:cNvPicPr>
+            <a:picLocks noChangeAspect="1"/>
+          </p:cNvPicPr>
+          <p:nvPr/>
+        </p:nvPicPr>
+        <p:blipFill>
+          <a:blip r:embed="rId5"/>
+          <a:srcRect t="15314" b="6085"/>
+          <a:stretch>
+            <a:fillRect/>
+          </a:stretch>
+        </p:blipFill>
+        <p:spPr>
+          <a:xfrm>
+            <a:off x="4558210" y="2531530"/>
+            <a:ext cx="4019529" cy="1572709"/>
+          </a:xfrm>
+          <a:prstGeom prst="rect">
+            <a:avLst/>
+          </a:prstGeom>
+          <a:ln>
+            <a:solidFill>
+              <a:schemeClr val="bg1">
+                <a:lumMod val="75000"/>
+              </a:schemeClr>
+            </a:solidFill>
+          </a:ln>
+        </p:spPr>
+      </p:pic>
+      <p:pic>
+        <p:nvPicPr>
+          <p:cNvPr id="14" name="Image 13" descr="Une image contenant Tracé, texte, ligne, diagramme&#10;&#10;Le contenu généré par l’IA peut être incorrect.">
+            <a:extLst>
+              <a:ext uri="{FF2B5EF4-FFF2-40B4-BE49-F238E27FC236}">
+                <a16:creationId xmlns:a16="http://schemas.microsoft.com/office/drawing/2014/main" id="{291A7323-DA08-B6B0-D55B-6BCFB1C0351B}"/>
+              </a:ext>
+            </a:extLst>
+          </p:cNvPr>
+          <p:cNvPicPr>
+            <a:picLocks noChangeAspect="1"/>
+          </p:cNvPicPr>
+          <p:nvPr/>
+        </p:nvPicPr>
+        <p:blipFill>
+          <a:blip r:embed="rId6"/>
+          <a:stretch>
+            <a:fillRect/>
+          </a:stretch>
+        </p:blipFill>
+        <p:spPr>
+          <a:xfrm>
+            <a:off x="4557113" y="953504"/>
+            <a:ext cx="4015885" cy="1535774"/>
           </a:xfrm>
           <a:prstGeom prst="rect">
             <a:avLst/>

--- a/presentation/dsfs_ft_36_Projet_REnergies_efficiency_prediction.pptx
+++ b/presentation/dsfs_ft_36_Projet_REnergies_efficiency_prediction.pptx
@@ -18944,43 +18944,6 @@
           </a:p>
         </p:txBody>
       </p:sp>
-      <p:pic>
-        <p:nvPicPr>
-          <p:cNvPr id="13" name="Image 12">
-            <a:extLst>
-              <a:ext uri="{FF2B5EF4-FFF2-40B4-BE49-F238E27FC236}">
-                <a16:creationId xmlns:a16="http://schemas.microsoft.com/office/drawing/2014/main" id="{42BBF9A1-C47F-62DF-F307-88D7E8C42892}"/>
-              </a:ext>
-            </a:extLst>
-          </p:cNvPr>
-          <p:cNvPicPr>
-            <a:picLocks noChangeAspect="1"/>
-          </p:cNvPicPr>
-          <p:nvPr/>
-        </p:nvPicPr>
-        <p:blipFill>
-          <a:blip r:embed="rId4"/>
-          <a:stretch>
-            <a:fillRect/>
-          </a:stretch>
-        </p:blipFill>
-        <p:spPr>
-          <a:xfrm>
-            <a:off x="463375" y="1335349"/>
-            <a:ext cx="4139602" cy="2563231"/>
-          </a:xfrm>
-          <a:prstGeom prst="rect">
-            <a:avLst/>
-          </a:prstGeom>
-          <a:ln>
-            <a:solidFill>
-              <a:schemeClr val="bg1">
-                <a:lumMod val="75000"/>
-              </a:schemeClr>
-            </a:solidFill>
-          </a:ln>
-        </p:spPr>
-      </p:pic>
       <p:sp>
         <p:nvSpPr>
           <p:cNvPr id="15" name="Google Shape;69;p3">
@@ -19560,7 +19523,7 @@
           <p:nvPr/>
         </p:nvPicPr>
         <p:blipFill>
-          <a:blip r:embed="rId5"/>
+          <a:blip r:embed="rId4"/>
           <a:srcRect t="5437" b="3975"/>
           <a:stretch>
             <a:fillRect/>
@@ -19568,8 +19531,45 @@
         </p:blipFill>
         <p:spPr>
           <a:xfrm>
-            <a:off x="5016923" y="1335350"/>
-            <a:ext cx="3770637" cy="2561800"/>
+            <a:off x="5131783" y="1335349"/>
+            <a:ext cx="3709114" cy="2520000"/>
+          </a:xfrm>
+          <a:prstGeom prst="rect">
+            <a:avLst/>
+          </a:prstGeom>
+          <a:ln>
+            <a:solidFill>
+              <a:schemeClr val="bg1">
+                <a:lumMod val="75000"/>
+              </a:schemeClr>
+            </a:solidFill>
+          </a:ln>
+        </p:spPr>
+      </p:pic>
+      <p:pic>
+        <p:nvPicPr>
+          <p:cNvPr id="26" name="Image 25">
+            <a:extLst>
+              <a:ext uri="{FF2B5EF4-FFF2-40B4-BE49-F238E27FC236}">
+                <a16:creationId xmlns:a16="http://schemas.microsoft.com/office/drawing/2014/main" id="{3B7D5584-7363-72AF-3C4F-E64B8D6461F7}"/>
+              </a:ext>
+            </a:extLst>
+          </p:cNvPr>
+          <p:cNvPicPr>
+            <a:picLocks noChangeAspect="1"/>
+          </p:cNvPicPr>
+          <p:nvPr/>
+        </p:nvPicPr>
+        <p:blipFill>
+          <a:blip r:embed="rId5"/>
+          <a:stretch>
+            <a:fillRect/>
+          </a:stretch>
+        </p:blipFill>
+        <p:spPr>
+          <a:xfrm>
+            <a:off x="690620" y="1335349"/>
+            <a:ext cx="4199999" cy="2520000"/>
           </a:xfrm>
           <a:prstGeom prst="rect">
             <a:avLst/>
@@ -42036,19 +42036,11 @@
             </a:r>
             <a:r>
               <a:rPr lang="fr-FR" sz="900" b="1" dirty="0"/>
-              <a:t>10.7 cm </a:t>
+              <a:t>10.7 cm</a:t>
             </a:r>
             <a:r>
               <a:rPr lang="fr-FR" sz="900" dirty="0"/>
-              <a:t>(cf. 10cm dans le </a:t>
-            </a:r>
-            <a:r>
-              <a:rPr lang="fr-FR" sz="900" dirty="0" err="1"/>
-              <a:t>Dataset</a:t>
-            </a:r>
-            <a:r>
-              <a:rPr lang="fr-FR" sz="900" dirty="0"/>
-              <a:t>) est </a:t>
+              <a:t> est </a:t>
             </a:r>
             <a:r>
               <a:rPr lang="fr-FR" sz="900" b="1" dirty="0"/>
@@ -42140,10 +42132,10 @@
       </p:sp>
       <p:pic>
         <p:nvPicPr>
-          <p:cNvPr id="13" name="Image 12" descr="Une image contenant texte, capture d’écran, affichage, nombre&#10;&#10;Le contenu généré par l’IA peut être incorrect.">
+          <p:cNvPr id="7" name="Image 6" descr="Une image contenant texte, diagramme, Tracé, capture d’écran">
             <a:extLst>
               <a:ext uri="{FF2B5EF4-FFF2-40B4-BE49-F238E27FC236}">
-                <a16:creationId xmlns:a16="http://schemas.microsoft.com/office/drawing/2014/main" id="{7D6B0B43-8628-A21E-C82B-D058DBA5452A}"/>
+                <a16:creationId xmlns:a16="http://schemas.microsoft.com/office/drawing/2014/main" id="{D843FCAE-84D8-B3E1-4B7A-0383F76C878B}"/>
               </a:ext>
             </a:extLst>
           </p:cNvPr>
@@ -42160,8 +42152,8 @@
         </p:blipFill>
         <p:spPr>
           <a:xfrm>
-            <a:off x="256566" y="1149395"/>
-            <a:ext cx="4174031" cy="2868336"/>
+            <a:off x="4922672" y="1155049"/>
+            <a:ext cx="3595361" cy="2862681"/>
           </a:xfrm>
           <a:prstGeom prst="rect">
             <a:avLst/>
@@ -42177,10 +42169,10 @@
       </p:pic>
       <p:pic>
         <p:nvPicPr>
-          <p:cNvPr id="7" name="Image 6" descr="Une image contenant texte, diagramme, Tracé, capture d’écran">
+          <p:cNvPr id="4" name="Image 3">
             <a:extLst>
               <a:ext uri="{FF2B5EF4-FFF2-40B4-BE49-F238E27FC236}">
-                <a16:creationId xmlns:a16="http://schemas.microsoft.com/office/drawing/2014/main" id="{D843FCAE-84D8-B3E1-4B7A-0383F76C878B}"/>
+                <a16:creationId xmlns:a16="http://schemas.microsoft.com/office/drawing/2014/main" id="{0057AF76-0C79-E1FE-94F2-038DE6A4D033}"/>
               </a:ext>
             </a:extLst>
           </p:cNvPr>
@@ -42197,8 +42189,8 @@
         </p:blipFill>
         <p:spPr>
           <a:xfrm>
-            <a:off x="4922672" y="1155049"/>
-            <a:ext cx="3595361" cy="2862681"/>
+            <a:off x="268239" y="1134334"/>
+            <a:ext cx="4193746" cy="2881883"/>
           </a:xfrm>
           <a:prstGeom prst="rect">
             <a:avLst/>

--- a/presentation/dsfs_ft_36_Projet_REnergies_efficiency_prediction.pptx
+++ b/presentation/dsfs_ft_36_Projet_REnergies_efficiency_prediction.pptx
@@ -293,7 +293,7 @@
 <file path=ppt/revisionInfo.xml><?xml version="1.0" encoding="utf-8"?>
 <p1510:revInfo xmlns:a="http://schemas.openxmlformats.org/drawingml/2006/main" xmlns:r="http://schemas.openxmlformats.org/officeDocument/2006/relationships" xmlns:p1510="http://schemas.microsoft.com/office/powerpoint/2015/10/main">
   <p1510:revLst>
-    <p1510:client id="{2EB72A00-7F79-4813-B4C2-C6564860F3F6}" v="2869" dt="2025-11-24T15:49:49.333"/>
+    <p1510:client id="{2EB72A00-7F79-4813-B4C2-C6564860F3F6}" v="2871" dt="2025-11-25T08:16:16.131"/>
   </p1510:revLst>
 </p1510:revInfo>
 </file>
@@ -303,7 +303,7 @@
   <pc:docChgLst>
     <pc:chgData name="Jean-Yves Vuillequez" userId="e7fac481abea6bd0" providerId="LiveId" clId="{79E365E8-22BC-4EC2-9606-9A9AC6CD1D22}"/>
     <pc:docChg chg="undo custSel addSld delSld modSld sldOrd">
-      <pc:chgData name="Jean-Yves Vuillequez" userId="e7fac481abea6bd0" providerId="LiveId" clId="{79E365E8-22BC-4EC2-9606-9A9AC6CD1D22}" dt="2025-11-24T15:49:49.330" v="9475" actId="113"/>
+      <pc:chgData name="Jean-Yves Vuillequez" userId="e7fac481abea6bd0" providerId="LiveId" clId="{79E365E8-22BC-4EC2-9606-9A9AC6CD1D22}" dt="2025-11-25T08:11:49.893" v="9528" actId="1076"/>
       <pc:docMkLst>
         <pc:docMk/>
       </pc:docMkLst>
@@ -599,12 +599,44 @@
           </ac:cxnSpMkLst>
         </pc:cxnChg>
       </pc:sldChg>
-      <pc:sldChg chg="ord">
-        <pc:chgData name="Jean-Yves Vuillequez" userId="e7fac481abea6bd0" providerId="LiveId" clId="{79E365E8-22BC-4EC2-9606-9A9AC6CD1D22}" dt="2025-11-21T15:39:23.675" v="7162"/>
+      <pc:sldChg chg="addSp delSp modSp mod ord">
+        <pc:chgData name="Jean-Yves Vuillequez" userId="e7fac481abea6bd0" providerId="LiveId" clId="{79E365E8-22BC-4EC2-9606-9A9AC6CD1D22}" dt="2025-11-25T08:11:49.893" v="9528" actId="1076"/>
         <pc:sldMkLst>
           <pc:docMk/>
           <pc:sldMk cId="0" sldId="271"/>
         </pc:sldMkLst>
+        <pc:spChg chg="add mod">
+          <ac:chgData name="Jean-Yves Vuillequez" userId="e7fac481abea6bd0" providerId="LiveId" clId="{79E365E8-22BC-4EC2-9606-9A9AC6CD1D22}" dt="2025-11-25T08:11:49.893" v="9528" actId="1076"/>
+          <ac:spMkLst>
+            <pc:docMk/>
+            <pc:sldMk cId="0" sldId="271"/>
+            <ac:spMk id="2" creationId="{85EE54CA-1CA7-BBB2-C3CA-7AD11745D0CB}"/>
+          </ac:spMkLst>
+        </pc:spChg>
+        <pc:spChg chg="add mod">
+          <ac:chgData name="Jean-Yves Vuillequez" userId="e7fac481abea6bd0" providerId="LiveId" clId="{79E365E8-22BC-4EC2-9606-9A9AC6CD1D22}" dt="2025-11-25T08:11:49.893" v="9528" actId="1076"/>
+          <ac:spMkLst>
+            <pc:docMk/>
+            <pc:sldMk cId="0" sldId="271"/>
+            <ac:spMk id="3" creationId="{3A33F078-F242-EE97-2251-526C53A316B8}"/>
+          </ac:spMkLst>
+        </pc:spChg>
+        <pc:picChg chg="add del">
+          <ac:chgData name="Jean-Yves Vuillequez" userId="e7fac481abea6bd0" providerId="LiveId" clId="{79E365E8-22BC-4EC2-9606-9A9AC6CD1D22}" dt="2025-11-25T08:11:41.798" v="9527" actId="478"/>
+          <ac:picMkLst>
+            <pc:docMk/>
+            <pc:sldMk cId="0" sldId="271"/>
+            <ac:picMk id="188" creationId="{00000000-0000-0000-0000-000000000000}"/>
+          </ac:picMkLst>
+        </pc:picChg>
+        <pc:cxnChg chg="add mod">
+          <ac:chgData name="Jean-Yves Vuillequez" userId="e7fac481abea6bd0" providerId="LiveId" clId="{79E365E8-22BC-4EC2-9606-9A9AC6CD1D22}" dt="2025-11-25T08:11:49.893" v="9528" actId="1076"/>
+          <ac:cxnSpMkLst>
+            <pc:docMk/>
+            <pc:sldMk cId="0" sldId="271"/>
+            <ac:cxnSpMk id="4" creationId="{E56D7E92-4368-94BE-9AB2-02EC3C191FD2}"/>
+          </ac:cxnSpMkLst>
+        </pc:cxnChg>
       </pc:sldChg>
       <pc:sldChg chg="modSp add del mod">
         <pc:chgData name="Jean-Yves Vuillequez" userId="e7fac481abea6bd0" providerId="LiveId" clId="{79E365E8-22BC-4EC2-9606-9A9AC6CD1D22}" dt="2025-11-19T14:03:57.617" v="139" actId="20577"/>
@@ -21447,6 +21479,143 @@
           </a:ln>
         </p:spPr>
       </p:pic>
+      <p:sp>
+        <p:nvSpPr>
+          <p:cNvPr id="2" name="Rectangle : coins arrondis 1">
+            <a:extLst>
+              <a:ext uri="{FF2B5EF4-FFF2-40B4-BE49-F238E27FC236}">
+                <a16:creationId xmlns:a16="http://schemas.microsoft.com/office/drawing/2014/main" id="{85EE54CA-1CA7-BBB2-C3CA-7AD11745D0CB}"/>
+              </a:ext>
+            </a:extLst>
+          </p:cNvPr>
+          <p:cNvSpPr/>
+          <p:nvPr/>
+        </p:nvSpPr>
+        <p:spPr>
+          <a:xfrm>
+            <a:off x="1799442" y="3006625"/>
+            <a:ext cx="1485799" cy="545226"/>
+          </a:xfrm>
+          <a:prstGeom prst="roundRect">
+            <a:avLst/>
+          </a:prstGeom>
+          <a:solidFill>
+            <a:schemeClr val="bg1">
+              <a:lumMod val="95000"/>
+            </a:schemeClr>
+          </a:solidFill>
+          <a:ln>
+            <a:noFill/>
+          </a:ln>
+        </p:spPr>
+        <p:style>
+          <a:lnRef idx="2">
+            <a:schemeClr val="accent1">
+              <a:shade val="15000"/>
+            </a:schemeClr>
+          </a:lnRef>
+          <a:fillRef idx="1">
+            <a:schemeClr val="accent1"/>
+          </a:fillRef>
+          <a:effectRef idx="0">
+            <a:schemeClr val="accent1"/>
+          </a:effectRef>
+          <a:fontRef idx="minor">
+            <a:schemeClr val="lt1"/>
+          </a:fontRef>
+        </p:style>
+        <p:txBody>
+          <a:bodyPr rtlCol="0" anchor="ctr"/>
+          <a:lstStyle/>
+          <a:p>
+            <a:pPr algn="ctr"/>
+            <a:endParaRPr lang="fr-FR"/>
+          </a:p>
+        </p:txBody>
+      </p:sp>
+      <p:sp>
+        <p:nvSpPr>
+          <p:cNvPr id="3" name="ZoneTexte 2">
+            <a:extLst>
+              <a:ext uri="{FF2B5EF4-FFF2-40B4-BE49-F238E27FC236}">
+                <a16:creationId xmlns:a16="http://schemas.microsoft.com/office/drawing/2014/main" id="{3A33F078-F242-EE97-2251-526C53A316B8}"/>
+              </a:ext>
+            </a:extLst>
+          </p:cNvPr>
+          <p:cNvSpPr txBox="1"/>
+          <p:nvPr/>
+        </p:nvSpPr>
+        <p:spPr>
+          <a:xfrm>
+            <a:off x="1799442" y="3079183"/>
+            <a:ext cx="1485799" cy="400110"/>
+          </a:xfrm>
+          <a:prstGeom prst="rect">
+            <a:avLst/>
+          </a:prstGeom>
+          <a:noFill/>
+        </p:spPr>
+        <p:txBody>
+          <a:bodyPr wrap="square" rtlCol="0">
+            <a:spAutoFit/>
+          </a:bodyPr>
+          <a:lstStyle/>
+          <a:p>
+            <a:pPr algn="ctr"/>
+            <a:r>
+              <a:rPr lang="fr-FR" sz="1000" dirty="0">
+                <a:hlinkClick r:id="rId5" action="ppaction://hlinksldjump"/>
+              </a:rPr>
+              <a:t>Ressources projet en annexes</a:t>
+            </a:r>
+            <a:endParaRPr lang="fr-FR" sz="800" dirty="0"/>
+          </a:p>
+        </p:txBody>
+      </p:sp>
+      <p:cxnSp>
+        <p:nvCxnSpPr>
+          <p:cNvPr id="4" name="Connecteur droit avec flèche 3">
+            <a:extLst>
+              <a:ext uri="{FF2B5EF4-FFF2-40B4-BE49-F238E27FC236}">
+                <a16:creationId xmlns:a16="http://schemas.microsoft.com/office/drawing/2014/main" id="{E56D7E92-4368-94BE-9AB2-02EC3C191FD2}"/>
+              </a:ext>
+            </a:extLst>
+          </p:cNvPr>
+          <p:cNvCxnSpPr>
+            <a:cxnSpLocks/>
+          </p:cNvCxnSpPr>
+          <p:nvPr/>
+        </p:nvCxnSpPr>
+        <p:spPr>
+          <a:xfrm>
+            <a:off x="1200757" y="3279238"/>
+            <a:ext cx="569861" cy="0"/>
+          </a:xfrm>
+          <a:prstGeom prst="straightConnector1">
+            <a:avLst/>
+          </a:prstGeom>
+          <a:ln w="76200">
+            <a:solidFill>
+              <a:srgbClr val="FFC000"/>
+            </a:solidFill>
+            <a:tailEnd type="triangle"/>
+          </a:ln>
+        </p:spPr>
+        <p:style>
+          <a:lnRef idx="1">
+            <a:schemeClr val="accent1"/>
+          </a:lnRef>
+          <a:fillRef idx="0">
+            <a:schemeClr val="accent1"/>
+          </a:fillRef>
+          <a:effectRef idx="0">
+            <a:schemeClr val="accent1"/>
+          </a:effectRef>
+          <a:fontRef idx="minor">
+            <a:schemeClr val="tx1"/>
+          </a:fontRef>
+        </p:style>
+      </p:cxnSp>
     </p:spTree>
   </p:cSld>
   <p:clrMapOvr>

--- a/presentation/dsfs_ft_36_Projet_REnergies_efficiency_prediction.pptx
+++ b/presentation/dsfs_ft_36_Projet_REnergies_efficiency_prediction.pptx
@@ -23,10 +23,10 @@
     <p:sldId id="292" r:id="rId14"/>
     <p:sldId id="271" r:id="rId15"/>
     <p:sldId id="273" r:id="rId16"/>
-    <p:sldId id="275" r:id="rId17"/>
-    <p:sldId id="294" r:id="rId18"/>
-    <p:sldId id="295" r:id="rId19"/>
-    <p:sldId id="296" r:id="rId20"/>
+    <p:sldId id="295" r:id="rId17"/>
+    <p:sldId id="296" r:id="rId18"/>
+    <p:sldId id="275" r:id="rId19"/>
+    <p:sldId id="294" r:id="rId20"/>
   </p:sldIdLst>
   <p:sldSz cx="9144000" cy="5143500" type="screen16x9"/>
   <p:notesSz cx="6858000" cy="9144000"/>
@@ -293,7 +293,7 @@
 <file path=ppt/revisionInfo.xml><?xml version="1.0" encoding="utf-8"?>
 <p1510:revInfo xmlns:a="http://schemas.openxmlformats.org/drawingml/2006/main" xmlns:r="http://schemas.openxmlformats.org/officeDocument/2006/relationships" xmlns:p1510="http://schemas.microsoft.com/office/powerpoint/2015/10/main">
   <p1510:revLst>
-    <p1510:client id="{2EB72A00-7F79-4813-B4C2-C6564860F3F6}" v="2871" dt="2025-11-25T08:16:16.131"/>
+    <p1510:client id="{2EB72A00-7F79-4813-B4C2-C6564860F3F6}" v="2872" dt="2025-11-25T08:53:15.397"/>
   </p1510:revLst>
 </p1510:revInfo>
 </file>
@@ -303,7 +303,7 @@
   <pc:docChgLst>
     <pc:chgData name="Jean-Yves Vuillequez" userId="e7fac481abea6bd0" providerId="LiveId" clId="{79E365E8-22BC-4EC2-9606-9A9AC6CD1D22}"/>
     <pc:docChg chg="undo custSel addSld delSld modSld sldOrd">
-      <pc:chgData name="Jean-Yves Vuillequez" userId="e7fac481abea6bd0" providerId="LiveId" clId="{79E365E8-22BC-4EC2-9606-9A9AC6CD1D22}" dt="2025-11-25T08:11:49.893" v="9528" actId="1076"/>
+      <pc:chgData name="Jean-Yves Vuillequez" userId="e7fac481abea6bd0" providerId="LiveId" clId="{79E365E8-22BC-4EC2-9606-9A9AC6CD1D22}" dt="2025-11-25T08:54:23.746" v="9534"/>
       <pc:docMkLst>
         <pc:docMk/>
       </pc:docMkLst>
@@ -600,13 +600,13 @@
         </pc:cxnChg>
       </pc:sldChg>
       <pc:sldChg chg="addSp delSp modSp mod ord">
-        <pc:chgData name="Jean-Yves Vuillequez" userId="e7fac481abea6bd0" providerId="LiveId" clId="{79E365E8-22BC-4EC2-9606-9A9AC6CD1D22}" dt="2025-11-25T08:11:49.893" v="9528" actId="1076"/>
+        <pc:chgData name="Jean-Yves Vuillequez" userId="e7fac481abea6bd0" providerId="LiveId" clId="{79E365E8-22BC-4EC2-9606-9A9AC6CD1D22}" dt="2025-11-25T08:54:11.101" v="9532" actId="208"/>
         <pc:sldMkLst>
           <pc:docMk/>
           <pc:sldMk cId="0" sldId="271"/>
         </pc:sldMkLst>
         <pc:spChg chg="add mod">
-          <ac:chgData name="Jean-Yves Vuillequez" userId="e7fac481abea6bd0" providerId="LiveId" clId="{79E365E8-22BC-4EC2-9606-9A9AC6CD1D22}" dt="2025-11-25T08:11:49.893" v="9528" actId="1076"/>
+          <ac:chgData name="Jean-Yves Vuillequez" userId="e7fac481abea6bd0" providerId="LiveId" clId="{79E365E8-22BC-4EC2-9606-9A9AC6CD1D22}" dt="2025-11-25T08:54:04.024" v="9531" actId="1076"/>
           <ac:spMkLst>
             <pc:docMk/>
             <pc:sldMk cId="0" sldId="271"/>
@@ -614,7 +614,7 @@
           </ac:spMkLst>
         </pc:spChg>
         <pc:spChg chg="add mod">
-          <ac:chgData name="Jean-Yves Vuillequez" userId="e7fac481abea6bd0" providerId="LiveId" clId="{79E365E8-22BC-4EC2-9606-9A9AC6CD1D22}" dt="2025-11-25T08:11:49.893" v="9528" actId="1076"/>
+          <ac:chgData name="Jean-Yves Vuillequez" userId="e7fac481abea6bd0" providerId="LiveId" clId="{79E365E8-22BC-4EC2-9606-9A9AC6CD1D22}" dt="2025-11-25T08:54:04.024" v="9531" actId="1076"/>
           <ac:spMkLst>
             <pc:docMk/>
             <pc:sldMk cId="0" sldId="271"/>
@@ -630,7 +630,7 @@
           </ac:picMkLst>
         </pc:picChg>
         <pc:cxnChg chg="add mod">
-          <ac:chgData name="Jean-Yves Vuillequez" userId="e7fac481abea6bd0" providerId="LiveId" clId="{79E365E8-22BC-4EC2-9606-9A9AC6CD1D22}" dt="2025-11-25T08:11:49.893" v="9528" actId="1076"/>
+          <ac:chgData name="Jean-Yves Vuillequez" userId="e7fac481abea6bd0" providerId="LiveId" clId="{79E365E8-22BC-4EC2-9606-9A9AC6CD1D22}" dt="2025-11-25T08:54:11.101" v="9532" actId="208"/>
           <ac:cxnSpMkLst>
             <pc:docMk/>
             <pc:sldMk cId="0" sldId="271"/>
@@ -1873,7 +1873,7 @@
         </pc:picChg>
       </pc:sldChg>
       <pc:sldChg chg="addSp delSp modSp add mod modNotesTx">
-        <pc:chgData name="Jean-Yves Vuillequez" userId="e7fac481abea6bd0" providerId="LiveId" clId="{79E365E8-22BC-4EC2-9606-9A9AC6CD1D22}" dt="2025-11-24T14:57:45.264" v="9201" actId="113"/>
+        <pc:chgData name="Jean-Yves Vuillequez" userId="e7fac481abea6bd0" providerId="LiveId" clId="{79E365E8-22BC-4EC2-9606-9A9AC6CD1D22}" dt="2025-11-25T08:53:15.397" v="9530"/>
         <pc:sldMkLst>
           <pc:docMk/>
           <pc:sldMk cId="3332770" sldId="291"/>
@@ -1958,6 +1958,22 @@
             <ac:spMk id="178" creationId="{1DE246AA-5B17-33A5-5EF2-125E8EA81EFC}"/>
           </ac:spMkLst>
         </pc:spChg>
+        <pc:picChg chg="add mod">
+          <ac:chgData name="Jean-Yves Vuillequez" userId="e7fac481abea6bd0" providerId="LiveId" clId="{79E365E8-22BC-4EC2-9606-9A9AC6CD1D22}" dt="2025-11-25T08:53:15.397" v="9530"/>
+          <ac:picMkLst>
+            <pc:docMk/>
+            <pc:sldMk cId="3332770" sldId="291"/>
+            <ac:picMk id="2" creationId="{BFC65734-9253-849D-5A6F-F7D5EA9D0712}"/>
+          </ac:picMkLst>
+        </pc:picChg>
+        <pc:picChg chg="add mod">
+          <ac:chgData name="Jean-Yves Vuillequez" userId="e7fac481abea6bd0" providerId="LiveId" clId="{79E365E8-22BC-4EC2-9606-9A9AC6CD1D22}" dt="2025-11-25T08:53:15.397" v="9530"/>
+          <ac:picMkLst>
+            <pc:docMk/>
+            <pc:sldMk cId="3332770" sldId="291"/>
+            <ac:picMk id="3" creationId="{F42D4AB1-28C7-BB89-AEEE-DABEB2514D1E}"/>
+          </ac:picMkLst>
+        </pc:picChg>
         <pc:picChg chg="add del mod">
           <ac:chgData name="Jean-Yves Vuillequez" userId="e7fac481abea6bd0" providerId="LiveId" clId="{79E365E8-22BC-4EC2-9606-9A9AC6CD1D22}" dt="2025-11-24T13:08:48.053" v="8345" actId="21"/>
           <ac:picMkLst>
@@ -2006,8 +2022,8 @@
             <ac:picMk id="11" creationId="{6B0F1A83-2432-176C-4AA5-8DD51C43E45F}"/>
           </ac:picMkLst>
         </pc:picChg>
-        <pc:picChg chg="add mod">
-          <ac:chgData name="Jean-Yves Vuillequez" userId="e7fac481abea6bd0" providerId="LiveId" clId="{79E365E8-22BC-4EC2-9606-9A9AC6CD1D22}" dt="2025-11-24T14:25:33.099" v="9096" actId="1076"/>
+        <pc:picChg chg="add del mod">
+          <ac:chgData name="Jean-Yves Vuillequez" userId="e7fac481abea6bd0" providerId="LiveId" clId="{79E365E8-22BC-4EC2-9606-9A9AC6CD1D22}" dt="2025-11-25T08:53:14.980" v="9529" actId="478"/>
           <ac:picMkLst>
             <pc:docMk/>
             <pc:sldMk cId="3332770" sldId="291"/>
@@ -2022,8 +2038,8 @@
             <ac:picMk id="19" creationId="{251AEA8F-A473-62AD-0FE9-02E7F916FB2E}"/>
           </ac:picMkLst>
         </pc:picChg>
-        <pc:picChg chg="add mod modCrop">
-          <ac:chgData name="Jean-Yves Vuillequez" userId="e7fac481abea6bd0" providerId="LiveId" clId="{79E365E8-22BC-4EC2-9606-9A9AC6CD1D22}" dt="2025-11-24T14:25:55.763" v="9101" actId="14100"/>
+        <pc:picChg chg="add del mod modCrop">
+          <ac:chgData name="Jean-Yves Vuillequez" userId="e7fac481abea6bd0" providerId="LiveId" clId="{79E365E8-22BC-4EC2-9606-9A9AC6CD1D22}" dt="2025-11-25T08:53:14.980" v="9529" actId="478"/>
           <ac:picMkLst>
             <pc:docMk/>
             <pc:sldMk cId="3332770" sldId="291"/>
@@ -2220,8 +2236,8 @@
           </ac:graphicFrameMkLst>
         </pc:graphicFrameChg>
       </pc:sldChg>
-      <pc:sldChg chg="addSp delSp modSp add mod">
-        <pc:chgData name="Jean-Yves Vuillequez" userId="e7fac481abea6bd0" providerId="LiveId" clId="{79E365E8-22BC-4EC2-9606-9A9AC6CD1D22}" dt="2025-11-24T15:29:09.327" v="9309" actId="20577"/>
+      <pc:sldChg chg="addSp delSp modSp add mod ord">
+        <pc:chgData name="Jean-Yves Vuillequez" userId="e7fac481abea6bd0" providerId="LiveId" clId="{79E365E8-22BC-4EC2-9606-9A9AC6CD1D22}" dt="2025-11-25T08:54:23.746" v="9534"/>
         <pc:sldMkLst>
           <pc:docMk/>
           <pc:sldMk cId="2817282669" sldId="295"/>
@@ -2251,8 +2267,8 @@
           </ac:graphicFrameMkLst>
         </pc:graphicFrameChg>
       </pc:sldChg>
-      <pc:sldChg chg="addSp delSp modSp add mod">
-        <pc:chgData name="Jean-Yves Vuillequez" userId="e7fac481abea6bd0" providerId="LiveId" clId="{79E365E8-22BC-4EC2-9606-9A9AC6CD1D22}" dt="2025-11-24T15:44:59.685" v="9438" actId="20577"/>
+      <pc:sldChg chg="addSp delSp modSp add mod ord">
+        <pc:chgData name="Jean-Yves Vuillequez" userId="e7fac481abea6bd0" providerId="LiveId" clId="{79E365E8-22BC-4EC2-9606-9A9AC6CD1D22}" dt="2025-11-25T08:54:23.746" v="9534"/>
         <pc:sldMkLst>
           <pc:docMk/>
           <pc:sldMk cId="2552402859" sldId="296"/>
@@ -3756,6 +3772,296 @@
         <p:cNvPr id="1" name="Shape 92">
           <a:extLst>
             <a:ext uri="{FF2B5EF4-FFF2-40B4-BE49-F238E27FC236}">
+              <a16:creationId xmlns:a16="http://schemas.microsoft.com/office/drawing/2014/main" id="{87D078D1-2A3F-0DA7-5A85-C8E1BAE85CC6}"/>
+            </a:ext>
+          </a:extLst>
+        </p:cNvPr>
+        <p:cNvGrpSpPr/>
+        <p:nvPr/>
+      </p:nvGrpSpPr>
+      <p:grpSpPr>
+        <a:xfrm>
+          <a:off x="0" y="0"/>
+          <a:ext cx="0" cy="0"/>
+          <a:chOff x="0" y="0"/>
+          <a:chExt cx="0" cy="0"/>
+        </a:xfrm>
+      </p:grpSpPr>
+      <p:sp>
+        <p:nvSpPr>
+          <p:cNvPr id="93" name="Google Shape;93;p5:notes">
+            <a:extLst>
+              <a:ext uri="{FF2B5EF4-FFF2-40B4-BE49-F238E27FC236}">
+                <a16:creationId xmlns:a16="http://schemas.microsoft.com/office/drawing/2014/main" id="{6C127E2B-7A52-00DD-B688-335EB1E07C31}"/>
+              </a:ext>
+            </a:extLst>
+          </p:cNvPr>
+          <p:cNvSpPr>
+            <a:spLocks noGrp="1" noRot="1" noChangeAspect="1"/>
+          </p:cNvSpPr>
+          <p:nvPr>
+            <p:ph type="sldImg" idx="2"/>
+          </p:nvPr>
+        </p:nvSpPr>
+        <p:spPr>
+          <a:xfrm>
+            <a:off x="381000" y="685800"/>
+            <a:ext cx="6096000" cy="3429000"/>
+          </a:xfrm>
+          <a:custGeom>
+            <a:avLst/>
+            <a:gdLst/>
+            <a:ahLst/>
+            <a:cxnLst/>
+            <a:rect l="l" t="t" r="r" b="b"/>
+            <a:pathLst>
+              <a:path w="120000" h="120000" extrusionOk="0">
+                <a:moveTo>
+                  <a:pt x="0" y="0"/>
+                </a:moveTo>
+                <a:lnTo>
+                  <a:pt x="120000" y="0"/>
+                </a:lnTo>
+                <a:lnTo>
+                  <a:pt x="120000" y="120000"/>
+                </a:lnTo>
+                <a:lnTo>
+                  <a:pt x="0" y="120000"/>
+                </a:lnTo>
+                <a:close/>
+              </a:path>
+            </a:pathLst>
+          </a:custGeom>
+          <a:noFill/>
+          <a:ln w="9525" cap="flat" cmpd="sng">
+            <a:solidFill>
+              <a:srgbClr val="000000"/>
+            </a:solidFill>
+            <a:prstDash val="solid"/>
+            <a:round/>
+            <a:headEnd type="none" w="sm" len="sm"/>
+            <a:tailEnd type="none" w="sm" len="sm"/>
+          </a:ln>
+        </p:spPr>
+      </p:sp>
+      <p:sp>
+        <p:nvSpPr>
+          <p:cNvPr id="94" name="Google Shape;94;p5:notes">
+            <a:extLst>
+              <a:ext uri="{FF2B5EF4-FFF2-40B4-BE49-F238E27FC236}">
+                <a16:creationId xmlns:a16="http://schemas.microsoft.com/office/drawing/2014/main" id="{DF3A9133-13B1-F98B-09D0-39C018095629}"/>
+              </a:ext>
+            </a:extLst>
+          </p:cNvPr>
+          <p:cNvSpPr txBox="1">
+            <a:spLocks noGrp="1"/>
+          </p:cNvSpPr>
+          <p:nvPr>
+            <p:ph type="body" idx="1"/>
+          </p:nvPr>
+        </p:nvSpPr>
+        <p:spPr>
+          <a:xfrm>
+            <a:off x="685800" y="4343400"/>
+            <a:ext cx="5486400" cy="4114800"/>
+          </a:xfrm>
+          <a:prstGeom prst="rect">
+            <a:avLst/>
+          </a:prstGeom>
+          <a:noFill/>
+          <a:ln>
+            <a:noFill/>
+          </a:ln>
+        </p:spPr>
+        <p:txBody>
+          <a:bodyPr spcFirstLastPara="1" wrap="square" lIns="91425" tIns="91425" rIns="91425" bIns="91425" anchor="t" anchorCtr="0">
+            <a:noAutofit/>
+          </a:bodyPr>
+          <a:lstStyle/>
+          <a:p>
+            <a:pPr marL="0" lvl="0" indent="0" algn="l" rtl="0">
+              <a:lnSpc>
+                <a:spcPct val="100000"/>
+              </a:lnSpc>
+              <a:spcBef>
+                <a:spcPts val="0"/>
+              </a:spcBef>
+              <a:spcAft>
+                <a:spcPts val="0"/>
+              </a:spcAft>
+              <a:buSzPts val="1100"/>
+              <a:buNone/>
+            </a:pPr>
+            <a:endParaRPr/>
+          </a:p>
+        </p:txBody>
+      </p:sp>
+    </p:spTree>
+    <p:extLst>
+      <p:ext uri="{BB962C8B-B14F-4D97-AF65-F5344CB8AC3E}">
+        <p14:creationId xmlns:p14="http://schemas.microsoft.com/office/powerpoint/2010/main" val="2688779081"/>
+      </p:ext>
+    </p:extLst>
+  </p:cSld>
+  <p:clrMapOvr>
+    <a:masterClrMapping/>
+  </p:clrMapOvr>
+</p:notes>
+</file>
+
+<file path=ppt/notesSlides/notesSlide16.xml><?xml version="1.0" encoding="utf-8"?>
+<p:notes xmlns:a="http://schemas.openxmlformats.org/drawingml/2006/main" xmlns:r="http://schemas.openxmlformats.org/officeDocument/2006/relationships" xmlns:p="http://schemas.openxmlformats.org/presentationml/2006/main" showMasterSp="0" showMasterPhAnim="0">
+  <p:cSld>
+    <p:spTree>
+      <p:nvGrpSpPr>
+        <p:cNvPr id="1" name="Shape 92">
+          <a:extLst>
+            <a:ext uri="{FF2B5EF4-FFF2-40B4-BE49-F238E27FC236}">
+              <a16:creationId xmlns:a16="http://schemas.microsoft.com/office/drawing/2014/main" id="{583FB797-51ED-429D-BC0E-259203E92814}"/>
+            </a:ext>
+          </a:extLst>
+        </p:cNvPr>
+        <p:cNvGrpSpPr/>
+        <p:nvPr/>
+      </p:nvGrpSpPr>
+      <p:grpSpPr>
+        <a:xfrm>
+          <a:off x="0" y="0"/>
+          <a:ext cx="0" cy="0"/>
+          <a:chOff x="0" y="0"/>
+          <a:chExt cx="0" cy="0"/>
+        </a:xfrm>
+      </p:grpSpPr>
+      <p:sp>
+        <p:nvSpPr>
+          <p:cNvPr id="93" name="Google Shape;93;p5:notes">
+            <a:extLst>
+              <a:ext uri="{FF2B5EF4-FFF2-40B4-BE49-F238E27FC236}">
+                <a16:creationId xmlns:a16="http://schemas.microsoft.com/office/drawing/2014/main" id="{991DF715-0CB1-F533-20EE-5958E34FAF3F}"/>
+              </a:ext>
+            </a:extLst>
+          </p:cNvPr>
+          <p:cNvSpPr>
+            <a:spLocks noGrp="1" noRot="1" noChangeAspect="1"/>
+          </p:cNvSpPr>
+          <p:nvPr>
+            <p:ph type="sldImg" idx="2"/>
+          </p:nvPr>
+        </p:nvSpPr>
+        <p:spPr>
+          <a:xfrm>
+            <a:off x="381000" y="685800"/>
+            <a:ext cx="6096000" cy="3429000"/>
+          </a:xfrm>
+          <a:custGeom>
+            <a:avLst/>
+            <a:gdLst/>
+            <a:ahLst/>
+            <a:cxnLst/>
+            <a:rect l="l" t="t" r="r" b="b"/>
+            <a:pathLst>
+              <a:path w="120000" h="120000" extrusionOk="0">
+                <a:moveTo>
+                  <a:pt x="0" y="0"/>
+                </a:moveTo>
+                <a:lnTo>
+                  <a:pt x="120000" y="0"/>
+                </a:lnTo>
+                <a:lnTo>
+                  <a:pt x="120000" y="120000"/>
+                </a:lnTo>
+                <a:lnTo>
+                  <a:pt x="0" y="120000"/>
+                </a:lnTo>
+                <a:close/>
+              </a:path>
+            </a:pathLst>
+          </a:custGeom>
+          <a:noFill/>
+          <a:ln w="9525" cap="flat" cmpd="sng">
+            <a:solidFill>
+              <a:srgbClr val="000000"/>
+            </a:solidFill>
+            <a:prstDash val="solid"/>
+            <a:round/>
+            <a:headEnd type="none" w="sm" len="sm"/>
+            <a:tailEnd type="none" w="sm" len="sm"/>
+          </a:ln>
+        </p:spPr>
+      </p:sp>
+      <p:sp>
+        <p:nvSpPr>
+          <p:cNvPr id="94" name="Google Shape;94;p5:notes">
+            <a:extLst>
+              <a:ext uri="{FF2B5EF4-FFF2-40B4-BE49-F238E27FC236}">
+                <a16:creationId xmlns:a16="http://schemas.microsoft.com/office/drawing/2014/main" id="{EFEEF117-B5DF-FDDE-96F9-176F90EBCF01}"/>
+              </a:ext>
+            </a:extLst>
+          </p:cNvPr>
+          <p:cNvSpPr txBox="1">
+            <a:spLocks noGrp="1"/>
+          </p:cNvSpPr>
+          <p:nvPr>
+            <p:ph type="body" idx="1"/>
+          </p:nvPr>
+        </p:nvSpPr>
+        <p:spPr>
+          <a:xfrm>
+            <a:off x="685800" y="4343400"/>
+            <a:ext cx="5486400" cy="4114800"/>
+          </a:xfrm>
+          <a:prstGeom prst="rect">
+            <a:avLst/>
+          </a:prstGeom>
+          <a:noFill/>
+          <a:ln>
+            <a:noFill/>
+          </a:ln>
+        </p:spPr>
+        <p:txBody>
+          <a:bodyPr spcFirstLastPara="1" wrap="square" lIns="91425" tIns="91425" rIns="91425" bIns="91425" anchor="t" anchorCtr="0">
+            <a:noAutofit/>
+          </a:bodyPr>
+          <a:lstStyle/>
+          <a:p>
+            <a:pPr marL="0" lvl="0" indent="0" algn="l" rtl="0">
+              <a:lnSpc>
+                <a:spcPct val="100000"/>
+              </a:lnSpc>
+              <a:spcBef>
+                <a:spcPts val="0"/>
+              </a:spcBef>
+              <a:spcAft>
+                <a:spcPts val="0"/>
+              </a:spcAft>
+              <a:buSzPts val="1100"/>
+              <a:buNone/>
+            </a:pPr>
+            <a:endParaRPr/>
+          </a:p>
+        </p:txBody>
+      </p:sp>
+    </p:spTree>
+    <p:extLst>
+      <p:ext uri="{BB962C8B-B14F-4D97-AF65-F5344CB8AC3E}">
+        <p14:creationId xmlns:p14="http://schemas.microsoft.com/office/powerpoint/2010/main" val="1915157264"/>
+      </p:ext>
+    </p:extLst>
+  </p:cSld>
+  <p:clrMapOvr>
+    <a:masterClrMapping/>
+  </p:clrMapOvr>
+</p:notes>
+</file>
+
+<file path=ppt/notesSlides/notesSlide17.xml><?xml version="1.0" encoding="utf-8"?>
+<p:notes xmlns:a="http://schemas.openxmlformats.org/drawingml/2006/main" xmlns:r="http://schemas.openxmlformats.org/officeDocument/2006/relationships" xmlns:p="http://schemas.openxmlformats.org/presentationml/2006/main" showMasterSp="0" showMasterPhAnim="0">
+  <p:cSld>
+    <p:spTree>
+      <p:nvGrpSpPr>
+        <p:cNvPr id="1" name="Shape 92">
+          <a:extLst>
+            <a:ext uri="{FF2B5EF4-FFF2-40B4-BE49-F238E27FC236}">
               <a16:creationId xmlns:a16="http://schemas.microsoft.com/office/drawing/2014/main" id="{F7CC36C7-11D0-8ADD-0BBF-ADF4FC60E857}"/>
             </a:ext>
           </a:extLst>
@@ -3893,7 +4199,7 @@
 </p:notes>
 </file>
 
-<file path=ppt/notesSlides/notesSlide16.xml><?xml version="1.0" encoding="utf-8"?>
+<file path=ppt/notesSlides/notesSlide18.xml><?xml version="1.0" encoding="utf-8"?>
 <p:notes xmlns:a="http://schemas.openxmlformats.org/drawingml/2006/main" xmlns:r="http://schemas.openxmlformats.org/officeDocument/2006/relationships" xmlns:p="http://schemas.openxmlformats.org/presentationml/2006/main" showMasterSp="0" showMasterPhAnim="0">
   <p:cSld>
     <p:spTree>
@@ -4029,296 +4335,6 @@
     <p:extLst>
       <p:ext uri="{BB962C8B-B14F-4D97-AF65-F5344CB8AC3E}">
         <p14:creationId xmlns:p14="http://schemas.microsoft.com/office/powerpoint/2010/main" val="4242962007"/>
-      </p:ext>
-    </p:extLst>
-  </p:cSld>
-  <p:clrMapOvr>
-    <a:masterClrMapping/>
-  </p:clrMapOvr>
-</p:notes>
-</file>
-
-<file path=ppt/notesSlides/notesSlide17.xml><?xml version="1.0" encoding="utf-8"?>
-<p:notes xmlns:a="http://schemas.openxmlformats.org/drawingml/2006/main" xmlns:r="http://schemas.openxmlformats.org/officeDocument/2006/relationships" xmlns:p="http://schemas.openxmlformats.org/presentationml/2006/main" showMasterSp="0" showMasterPhAnim="0">
-  <p:cSld>
-    <p:spTree>
-      <p:nvGrpSpPr>
-        <p:cNvPr id="1" name="Shape 92">
-          <a:extLst>
-            <a:ext uri="{FF2B5EF4-FFF2-40B4-BE49-F238E27FC236}">
-              <a16:creationId xmlns:a16="http://schemas.microsoft.com/office/drawing/2014/main" id="{87D078D1-2A3F-0DA7-5A85-C8E1BAE85CC6}"/>
-            </a:ext>
-          </a:extLst>
-        </p:cNvPr>
-        <p:cNvGrpSpPr/>
-        <p:nvPr/>
-      </p:nvGrpSpPr>
-      <p:grpSpPr>
-        <a:xfrm>
-          <a:off x="0" y="0"/>
-          <a:ext cx="0" cy="0"/>
-          <a:chOff x="0" y="0"/>
-          <a:chExt cx="0" cy="0"/>
-        </a:xfrm>
-      </p:grpSpPr>
-      <p:sp>
-        <p:nvSpPr>
-          <p:cNvPr id="93" name="Google Shape;93;p5:notes">
-            <a:extLst>
-              <a:ext uri="{FF2B5EF4-FFF2-40B4-BE49-F238E27FC236}">
-                <a16:creationId xmlns:a16="http://schemas.microsoft.com/office/drawing/2014/main" id="{6C127E2B-7A52-00DD-B688-335EB1E07C31}"/>
-              </a:ext>
-            </a:extLst>
-          </p:cNvPr>
-          <p:cNvSpPr>
-            <a:spLocks noGrp="1" noRot="1" noChangeAspect="1"/>
-          </p:cNvSpPr>
-          <p:nvPr>
-            <p:ph type="sldImg" idx="2"/>
-          </p:nvPr>
-        </p:nvSpPr>
-        <p:spPr>
-          <a:xfrm>
-            <a:off x="381000" y="685800"/>
-            <a:ext cx="6096000" cy="3429000"/>
-          </a:xfrm>
-          <a:custGeom>
-            <a:avLst/>
-            <a:gdLst/>
-            <a:ahLst/>
-            <a:cxnLst/>
-            <a:rect l="l" t="t" r="r" b="b"/>
-            <a:pathLst>
-              <a:path w="120000" h="120000" extrusionOk="0">
-                <a:moveTo>
-                  <a:pt x="0" y="0"/>
-                </a:moveTo>
-                <a:lnTo>
-                  <a:pt x="120000" y="0"/>
-                </a:lnTo>
-                <a:lnTo>
-                  <a:pt x="120000" y="120000"/>
-                </a:lnTo>
-                <a:lnTo>
-                  <a:pt x="0" y="120000"/>
-                </a:lnTo>
-                <a:close/>
-              </a:path>
-            </a:pathLst>
-          </a:custGeom>
-          <a:noFill/>
-          <a:ln w="9525" cap="flat" cmpd="sng">
-            <a:solidFill>
-              <a:srgbClr val="000000"/>
-            </a:solidFill>
-            <a:prstDash val="solid"/>
-            <a:round/>
-            <a:headEnd type="none" w="sm" len="sm"/>
-            <a:tailEnd type="none" w="sm" len="sm"/>
-          </a:ln>
-        </p:spPr>
-      </p:sp>
-      <p:sp>
-        <p:nvSpPr>
-          <p:cNvPr id="94" name="Google Shape;94;p5:notes">
-            <a:extLst>
-              <a:ext uri="{FF2B5EF4-FFF2-40B4-BE49-F238E27FC236}">
-                <a16:creationId xmlns:a16="http://schemas.microsoft.com/office/drawing/2014/main" id="{DF3A9133-13B1-F98B-09D0-39C018095629}"/>
-              </a:ext>
-            </a:extLst>
-          </p:cNvPr>
-          <p:cNvSpPr txBox="1">
-            <a:spLocks noGrp="1"/>
-          </p:cNvSpPr>
-          <p:nvPr>
-            <p:ph type="body" idx="1"/>
-          </p:nvPr>
-        </p:nvSpPr>
-        <p:spPr>
-          <a:xfrm>
-            <a:off x="685800" y="4343400"/>
-            <a:ext cx="5486400" cy="4114800"/>
-          </a:xfrm>
-          <a:prstGeom prst="rect">
-            <a:avLst/>
-          </a:prstGeom>
-          <a:noFill/>
-          <a:ln>
-            <a:noFill/>
-          </a:ln>
-        </p:spPr>
-        <p:txBody>
-          <a:bodyPr spcFirstLastPara="1" wrap="square" lIns="91425" tIns="91425" rIns="91425" bIns="91425" anchor="t" anchorCtr="0">
-            <a:noAutofit/>
-          </a:bodyPr>
-          <a:lstStyle/>
-          <a:p>
-            <a:pPr marL="0" lvl="0" indent="0" algn="l" rtl="0">
-              <a:lnSpc>
-                <a:spcPct val="100000"/>
-              </a:lnSpc>
-              <a:spcBef>
-                <a:spcPts val="0"/>
-              </a:spcBef>
-              <a:spcAft>
-                <a:spcPts val="0"/>
-              </a:spcAft>
-              <a:buSzPts val="1100"/>
-              <a:buNone/>
-            </a:pPr>
-            <a:endParaRPr/>
-          </a:p>
-        </p:txBody>
-      </p:sp>
-    </p:spTree>
-    <p:extLst>
-      <p:ext uri="{BB962C8B-B14F-4D97-AF65-F5344CB8AC3E}">
-        <p14:creationId xmlns:p14="http://schemas.microsoft.com/office/powerpoint/2010/main" val="2688779081"/>
-      </p:ext>
-    </p:extLst>
-  </p:cSld>
-  <p:clrMapOvr>
-    <a:masterClrMapping/>
-  </p:clrMapOvr>
-</p:notes>
-</file>
-
-<file path=ppt/notesSlides/notesSlide18.xml><?xml version="1.0" encoding="utf-8"?>
-<p:notes xmlns:a="http://schemas.openxmlformats.org/drawingml/2006/main" xmlns:r="http://schemas.openxmlformats.org/officeDocument/2006/relationships" xmlns:p="http://schemas.openxmlformats.org/presentationml/2006/main" showMasterSp="0" showMasterPhAnim="0">
-  <p:cSld>
-    <p:spTree>
-      <p:nvGrpSpPr>
-        <p:cNvPr id="1" name="Shape 92">
-          <a:extLst>
-            <a:ext uri="{FF2B5EF4-FFF2-40B4-BE49-F238E27FC236}">
-              <a16:creationId xmlns:a16="http://schemas.microsoft.com/office/drawing/2014/main" id="{583FB797-51ED-429D-BC0E-259203E92814}"/>
-            </a:ext>
-          </a:extLst>
-        </p:cNvPr>
-        <p:cNvGrpSpPr/>
-        <p:nvPr/>
-      </p:nvGrpSpPr>
-      <p:grpSpPr>
-        <a:xfrm>
-          <a:off x="0" y="0"/>
-          <a:ext cx="0" cy="0"/>
-          <a:chOff x="0" y="0"/>
-          <a:chExt cx="0" cy="0"/>
-        </a:xfrm>
-      </p:grpSpPr>
-      <p:sp>
-        <p:nvSpPr>
-          <p:cNvPr id="93" name="Google Shape;93;p5:notes">
-            <a:extLst>
-              <a:ext uri="{FF2B5EF4-FFF2-40B4-BE49-F238E27FC236}">
-                <a16:creationId xmlns:a16="http://schemas.microsoft.com/office/drawing/2014/main" id="{991DF715-0CB1-F533-20EE-5958E34FAF3F}"/>
-              </a:ext>
-            </a:extLst>
-          </p:cNvPr>
-          <p:cNvSpPr>
-            <a:spLocks noGrp="1" noRot="1" noChangeAspect="1"/>
-          </p:cNvSpPr>
-          <p:nvPr>
-            <p:ph type="sldImg" idx="2"/>
-          </p:nvPr>
-        </p:nvSpPr>
-        <p:spPr>
-          <a:xfrm>
-            <a:off x="381000" y="685800"/>
-            <a:ext cx="6096000" cy="3429000"/>
-          </a:xfrm>
-          <a:custGeom>
-            <a:avLst/>
-            <a:gdLst/>
-            <a:ahLst/>
-            <a:cxnLst/>
-            <a:rect l="l" t="t" r="r" b="b"/>
-            <a:pathLst>
-              <a:path w="120000" h="120000" extrusionOk="0">
-                <a:moveTo>
-                  <a:pt x="0" y="0"/>
-                </a:moveTo>
-                <a:lnTo>
-                  <a:pt x="120000" y="0"/>
-                </a:lnTo>
-                <a:lnTo>
-                  <a:pt x="120000" y="120000"/>
-                </a:lnTo>
-                <a:lnTo>
-                  <a:pt x="0" y="120000"/>
-                </a:lnTo>
-                <a:close/>
-              </a:path>
-            </a:pathLst>
-          </a:custGeom>
-          <a:noFill/>
-          <a:ln w="9525" cap="flat" cmpd="sng">
-            <a:solidFill>
-              <a:srgbClr val="000000"/>
-            </a:solidFill>
-            <a:prstDash val="solid"/>
-            <a:round/>
-            <a:headEnd type="none" w="sm" len="sm"/>
-            <a:tailEnd type="none" w="sm" len="sm"/>
-          </a:ln>
-        </p:spPr>
-      </p:sp>
-      <p:sp>
-        <p:nvSpPr>
-          <p:cNvPr id="94" name="Google Shape;94;p5:notes">
-            <a:extLst>
-              <a:ext uri="{FF2B5EF4-FFF2-40B4-BE49-F238E27FC236}">
-                <a16:creationId xmlns:a16="http://schemas.microsoft.com/office/drawing/2014/main" id="{EFEEF117-B5DF-FDDE-96F9-176F90EBCF01}"/>
-              </a:ext>
-            </a:extLst>
-          </p:cNvPr>
-          <p:cNvSpPr txBox="1">
-            <a:spLocks noGrp="1"/>
-          </p:cNvSpPr>
-          <p:nvPr>
-            <p:ph type="body" idx="1"/>
-          </p:nvPr>
-        </p:nvSpPr>
-        <p:spPr>
-          <a:xfrm>
-            <a:off x="685800" y="4343400"/>
-            <a:ext cx="5486400" cy="4114800"/>
-          </a:xfrm>
-          <a:prstGeom prst="rect">
-            <a:avLst/>
-          </a:prstGeom>
-          <a:noFill/>
-          <a:ln>
-            <a:noFill/>
-          </a:ln>
-        </p:spPr>
-        <p:txBody>
-          <a:bodyPr spcFirstLastPara="1" wrap="square" lIns="91425" tIns="91425" rIns="91425" bIns="91425" anchor="t" anchorCtr="0">
-            <a:noAutofit/>
-          </a:bodyPr>
-          <a:lstStyle/>
-          <a:p>
-            <a:pPr marL="0" lvl="0" indent="0" algn="l" rtl="0">
-              <a:lnSpc>
-                <a:spcPct val="100000"/>
-              </a:lnSpc>
-              <a:spcBef>
-                <a:spcPts val="0"/>
-              </a:spcBef>
-              <a:spcAft>
-                <a:spcPts val="0"/>
-              </a:spcAft>
-              <a:buSzPts val="1100"/>
-              <a:buNone/>
-            </a:pPr>
-            <a:endParaRPr/>
-          </a:p>
-        </p:txBody>
-      </p:sp>
-    </p:spTree>
-    <p:extLst>
-      <p:ext uri="{BB962C8B-B14F-4D97-AF65-F5344CB8AC3E}">
-        <p14:creationId xmlns:p14="http://schemas.microsoft.com/office/powerpoint/2010/main" val="1915157264"/>
       </p:ext>
     </p:extLst>
   </p:cSld>
@@ -18976,43 +18992,6 @@
           </a:p>
         </p:txBody>
       </p:sp>
-      <p:pic>
-        <p:nvPicPr>
-          <p:cNvPr id="13" name="Image 12">
-            <a:extLst>
-              <a:ext uri="{FF2B5EF4-FFF2-40B4-BE49-F238E27FC236}">
-                <a16:creationId xmlns:a16="http://schemas.microsoft.com/office/drawing/2014/main" id="{42BBF9A1-C47F-62DF-F307-88D7E8C42892}"/>
-              </a:ext>
-            </a:extLst>
-          </p:cNvPr>
-          <p:cNvPicPr>
-            <a:picLocks noChangeAspect="1"/>
-          </p:cNvPicPr>
-          <p:nvPr/>
-        </p:nvPicPr>
-        <p:blipFill>
-          <a:blip r:embed="rId4"/>
-          <a:stretch>
-            <a:fillRect/>
-          </a:stretch>
-        </p:blipFill>
-        <p:spPr>
-          <a:xfrm>
-            <a:off x="463375" y="1335349"/>
-            <a:ext cx="4139602" cy="2563231"/>
-          </a:xfrm>
-          <a:prstGeom prst="rect">
-            <a:avLst/>
-          </a:prstGeom>
-          <a:ln>
-            <a:solidFill>
-              <a:schemeClr val="bg1">
-                <a:lumMod val="75000"/>
-              </a:schemeClr>
-            </a:solidFill>
-          </a:ln>
-        </p:spPr>
-      </p:pic>
       <p:sp>
         <p:nvSpPr>
           <p:cNvPr id="15" name="Google Shape;69;p3">
@@ -19579,10 +19558,48 @@
       </p:sp>
       <p:pic>
         <p:nvPicPr>
-          <p:cNvPr id="21" name="Image 20" descr="Une image contenant capture d’écran, diagramme, Tracé, conception">
+          <p:cNvPr id="2" name="Image 1" descr="Une image contenant capture d’écran, diagramme, Tracé, conception">
             <a:extLst>
               <a:ext uri="{FF2B5EF4-FFF2-40B4-BE49-F238E27FC236}">
-                <a16:creationId xmlns:a16="http://schemas.microsoft.com/office/drawing/2014/main" id="{A65574E9-E5BD-6A21-1763-F42B66A783B7}"/>
+                <a16:creationId xmlns:a16="http://schemas.microsoft.com/office/drawing/2014/main" id="{BFC65734-9253-849D-5A6F-F7D5EA9D0712}"/>
+              </a:ext>
+            </a:extLst>
+          </p:cNvPr>
+          <p:cNvPicPr>
+            <a:picLocks noChangeAspect="1"/>
+          </p:cNvPicPr>
+          <p:nvPr/>
+        </p:nvPicPr>
+        <p:blipFill>
+          <a:blip r:embed="rId4"/>
+          <a:srcRect t="5437" b="3975"/>
+          <a:stretch>
+            <a:fillRect/>
+          </a:stretch>
+        </p:blipFill>
+        <p:spPr>
+          <a:xfrm>
+            <a:off x="5131783" y="1335349"/>
+            <a:ext cx="3709114" cy="2520000"/>
+          </a:xfrm>
+          <a:prstGeom prst="rect">
+            <a:avLst/>
+          </a:prstGeom>
+          <a:ln>
+            <a:solidFill>
+              <a:schemeClr val="bg1">
+                <a:lumMod val="75000"/>
+              </a:schemeClr>
+            </a:solidFill>
+          </a:ln>
+        </p:spPr>
+      </p:pic>
+      <p:pic>
+        <p:nvPicPr>
+          <p:cNvPr id="3" name="Image 2">
+            <a:extLst>
+              <a:ext uri="{FF2B5EF4-FFF2-40B4-BE49-F238E27FC236}">
+                <a16:creationId xmlns:a16="http://schemas.microsoft.com/office/drawing/2014/main" id="{F42D4AB1-28C7-BB89-AEEE-DABEB2514D1E}"/>
               </a:ext>
             </a:extLst>
           </p:cNvPr>
@@ -19593,15 +19610,14 @@
         </p:nvPicPr>
         <p:blipFill>
           <a:blip r:embed="rId5"/>
-          <a:srcRect t="5437" b="3975"/>
           <a:stretch>
             <a:fillRect/>
           </a:stretch>
         </p:blipFill>
         <p:spPr>
           <a:xfrm>
-            <a:off x="5016923" y="1335350"/>
-            <a:ext cx="3770637" cy="2561800"/>
+            <a:off x="690620" y="1335349"/>
+            <a:ext cx="4199999" cy="2520000"/>
           </a:xfrm>
           <a:prstGeom prst="rect">
             <a:avLst/>
@@ -21493,7 +21509,7 @@
         </p:nvSpPr>
         <p:spPr>
           <a:xfrm>
-            <a:off x="1799442" y="3006625"/>
+            <a:off x="1799442" y="3228155"/>
             <a:ext cx="1485799" cy="545226"/>
           </a:xfrm>
           <a:prstGeom prst="roundRect">
@@ -21547,7 +21563,7 @@
         </p:nvSpPr>
         <p:spPr>
           <a:xfrm>
-            <a:off x="1799442" y="3079183"/>
+            <a:off x="1799442" y="3300713"/>
             <a:ext cx="1485799" cy="400110"/>
           </a:xfrm>
           <a:prstGeom prst="rect">
@@ -21588,7 +21604,7 @@
         </p:nvCxnSpPr>
         <p:spPr>
           <a:xfrm>
-            <a:off x="1200757" y="3279238"/>
+            <a:off x="1200757" y="3500768"/>
             <a:ext cx="569861" cy="0"/>
           </a:xfrm>
           <a:prstGeom prst="straightConnector1">
@@ -21596,7 +21612,7 @@
           </a:prstGeom>
           <a:ln w="76200">
             <a:solidFill>
-              <a:srgbClr val="FFC000"/>
+              <a:srgbClr val="FF0000"/>
             </a:solidFill>
             <a:tailEnd type="triangle"/>
           </a:ln>
@@ -21759,1056 +21775,6 @@
 </file>
 
 <file path=ppt/slides/slide15.xml><?xml version="1.0" encoding="utf-8"?>
-<p:sld xmlns:a="http://schemas.openxmlformats.org/drawingml/2006/main" xmlns:r="http://schemas.openxmlformats.org/officeDocument/2006/relationships" xmlns:p="http://schemas.openxmlformats.org/presentationml/2006/main">
-  <p:cSld>
-    <p:spTree>
-      <p:nvGrpSpPr>
-        <p:cNvPr id="1" name="Shape 95">
-          <a:extLst>
-            <a:ext uri="{FF2B5EF4-FFF2-40B4-BE49-F238E27FC236}">
-              <a16:creationId xmlns:a16="http://schemas.microsoft.com/office/drawing/2014/main" id="{06EDD131-5809-747C-6E95-185A073DB048}"/>
-            </a:ext>
-          </a:extLst>
-        </p:cNvPr>
-        <p:cNvGrpSpPr/>
-        <p:nvPr/>
-      </p:nvGrpSpPr>
-      <p:grpSpPr>
-        <a:xfrm>
-          <a:off x="0" y="0"/>
-          <a:ext cx="0" cy="0"/>
-          <a:chOff x="0" y="0"/>
-          <a:chExt cx="0" cy="0"/>
-        </a:xfrm>
-      </p:grpSpPr>
-      <p:sp>
-        <p:nvSpPr>
-          <p:cNvPr id="96" name="Google Shape;96;p5">
-            <a:extLst>
-              <a:ext uri="{FF2B5EF4-FFF2-40B4-BE49-F238E27FC236}">
-                <a16:creationId xmlns:a16="http://schemas.microsoft.com/office/drawing/2014/main" id="{CFE260F2-EC75-DDF8-CE55-329FB5D8E4C4}"/>
-              </a:ext>
-            </a:extLst>
-          </p:cNvPr>
-          <p:cNvSpPr txBox="1">
-            <a:spLocks noGrp="1"/>
-          </p:cNvSpPr>
-          <p:nvPr>
-            <p:ph type="ctrTitle" idx="4294967295"/>
-          </p:nvPr>
-        </p:nvSpPr>
-        <p:spPr>
-          <a:xfrm>
-            <a:off x="1192664" y="403309"/>
-            <a:ext cx="5315100" cy="533100"/>
-          </a:xfrm>
-          <a:prstGeom prst="rect">
-            <a:avLst/>
-          </a:prstGeom>
-          <a:noFill/>
-          <a:ln>
-            <a:noFill/>
-          </a:ln>
-        </p:spPr>
-        <p:txBody>
-          <a:bodyPr spcFirstLastPara="1" wrap="square" lIns="91425" tIns="91425" rIns="91425" bIns="91425" anchor="t" anchorCtr="0">
-            <a:noAutofit/>
-          </a:bodyPr>
-          <a:lstStyle/>
-          <a:p>
-            <a:pPr marL="0" marR="0" lvl="0" indent="0" algn="l" rtl="0">
-              <a:lnSpc>
-                <a:spcPct val="100000"/>
-              </a:lnSpc>
-              <a:spcBef>
-                <a:spcPts val="0"/>
-              </a:spcBef>
-              <a:spcAft>
-                <a:spcPts val="0"/>
-              </a:spcAft>
-              <a:buClr>
-                <a:schemeClr val="dk1"/>
-              </a:buClr>
-              <a:buSzPts val="2800"/>
-              <a:buFont typeface="Arial"/>
-              <a:buNone/>
-            </a:pPr>
-            <a:r>
-              <a:rPr lang="it-IT" sz="2500" i="0" u="none" strike="noStrike" cap="none" dirty="0">
-                <a:solidFill>
-                  <a:srgbClr val="0E3449"/>
-                </a:solidFill>
-                <a:latin typeface="Inter SemiBold"/>
-                <a:ea typeface="Inter SemiBold"/>
-                <a:cs typeface="Inter SemiBold"/>
-                <a:sym typeface="Inter SemiBold"/>
-              </a:rPr>
-              <a:t>Ressourses projet</a:t>
-            </a:r>
-          </a:p>
-        </p:txBody>
-      </p:sp>
-      <p:pic>
-        <p:nvPicPr>
-          <p:cNvPr id="97" name="Google Shape;97;p5">
-            <a:extLst>
-              <a:ext uri="{FF2B5EF4-FFF2-40B4-BE49-F238E27FC236}">
-                <a16:creationId xmlns:a16="http://schemas.microsoft.com/office/drawing/2014/main" id="{66739ED7-F6B1-16FF-21A5-52FBD2C06D52}"/>
-              </a:ext>
-            </a:extLst>
-          </p:cNvPr>
-          <p:cNvPicPr preferRelativeResize="0"/>
-          <p:nvPr/>
-        </p:nvPicPr>
-        <p:blipFill rotWithShape="1">
-          <a:blip r:embed="rId3">
-            <a:alphaModFix/>
-          </a:blip>
-          <a:srcRect/>
-          <a:stretch/>
-        </p:blipFill>
-        <p:spPr>
-          <a:xfrm>
-            <a:off x="463375" y="482852"/>
-            <a:ext cx="576900" cy="385904"/>
-          </a:xfrm>
-          <a:prstGeom prst="rect">
-            <a:avLst/>
-          </a:prstGeom>
-          <a:noFill/>
-          <a:ln>
-            <a:noFill/>
-          </a:ln>
-        </p:spPr>
-      </p:pic>
-      <p:sp>
-        <p:nvSpPr>
-          <p:cNvPr id="98" name="Google Shape;98;p5">
-            <a:extLst>
-              <a:ext uri="{FF2B5EF4-FFF2-40B4-BE49-F238E27FC236}">
-                <a16:creationId xmlns:a16="http://schemas.microsoft.com/office/drawing/2014/main" id="{CF1380DA-0568-3714-99DF-1C8C31BCE89D}"/>
-              </a:ext>
-            </a:extLst>
-          </p:cNvPr>
-          <p:cNvSpPr/>
-          <p:nvPr/>
-        </p:nvSpPr>
-        <p:spPr>
-          <a:xfrm>
-            <a:off x="10225" y="4892025"/>
-            <a:ext cx="9144000" cy="251400"/>
-          </a:xfrm>
-          <a:prstGeom prst="rect">
-            <a:avLst/>
-          </a:prstGeom>
-          <a:solidFill>
-            <a:srgbClr val="C3FFFC"/>
-          </a:solidFill>
-          <a:ln>
-            <a:noFill/>
-          </a:ln>
-        </p:spPr>
-        <p:txBody>
-          <a:bodyPr spcFirstLastPara="1" wrap="square" lIns="91425" tIns="91425" rIns="91425" bIns="91425" anchor="ctr" anchorCtr="0">
-            <a:noAutofit/>
-          </a:bodyPr>
-          <a:lstStyle/>
-          <a:p>
-            <a:pPr marL="0" marR="0" lvl="0" indent="0" algn="l" rtl="0">
-              <a:lnSpc>
-                <a:spcPct val="100000"/>
-              </a:lnSpc>
-              <a:spcBef>
-                <a:spcPts val="0"/>
-              </a:spcBef>
-              <a:spcAft>
-                <a:spcPts val="0"/>
-              </a:spcAft>
-              <a:buClr>
-                <a:srgbClr val="000000"/>
-              </a:buClr>
-              <a:buSzPts val="1400"/>
-              <a:buFont typeface="Arial"/>
-              <a:buNone/>
-            </a:pPr>
-            <a:endParaRPr sz="1400" b="0" i="0" u="none" strike="noStrike" cap="none">
-              <a:solidFill>
-                <a:srgbClr val="000000"/>
-              </a:solidFill>
-              <a:latin typeface="Arial"/>
-              <a:ea typeface="Arial"/>
-              <a:cs typeface="Arial"/>
-              <a:sym typeface="Arial"/>
-            </a:endParaRPr>
-          </a:p>
-        </p:txBody>
-      </p:sp>
-      <p:sp>
-        <p:nvSpPr>
-          <p:cNvPr id="4" name="Google Shape;181;p8">
-            <a:extLst>
-              <a:ext uri="{FF2B5EF4-FFF2-40B4-BE49-F238E27FC236}">
-                <a16:creationId xmlns:a16="http://schemas.microsoft.com/office/drawing/2014/main" id="{9EF8D937-D220-A74B-8191-12E681FE1A08}"/>
-              </a:ext>
-            </a:extLst>
-          </p:cNvPr>
-          <p:cNvSpPr txBox="1">
-            <a:spLocks noGrp="1"/>
-          </p:cNvSpPr>
-          <p:nvPr>
-            <p:ph type="body" idx="1"/>
-          </p:nvPr>
-        </p:nvSpPr>
-        <p:spPr>
-          <a:xfrm>
-            <a:off x="311700" y="1155049"/>
-            <a:ext cx="8520600" cy="3585142"/>
-          </a:xfrm>
-          <a:prstGeom prst="rect">
-            <a:avLst/>
-          </a:prstGeom>
-          <a:noFill/>
-          <a:ln>
-            <a:noFill/>
-          </a:ln>
-        </p:spPr>
-        <p:txBody>
-          <a:bodyPr spcFirstLastPara="1" wrap="square" lIns="91425" tIns="91425" rIns="91425" bIns="91425" anchor="t" anchorCtr="0">
-            <a:noAutofit/>
-          </a:bodyPr>
-          <a:lstStyle/>
-          <a:p>
-            <a:pPr marL="114300" lvl="0" indent="0">
-              <a:spcBef>
-                <a:spcPts val="1200"/>
-              </a:spcBef>
-              <a:buNone/>
-            </a:pPr>
-            <a:r>
-              <a:rPr lang="fr-FR" sz="1400" b="1" dirty="0"/>
-              <a:t>Lien </a:t>
-            </a:r>
-            <a:r>
-              <a:rPr lang="fr-FR" sz="1400" b="1" dirty="0" err="1"/>
-              <a:t>Github</a:t>
-            </a:r>
-            <a:r>
-              <a:rPr lang="fr-FR" sz="1400" b="1" dirty="0"/>
-              <a:t> : </a:t>
-            </a:r>
-            <a:r>
-              <a:rPr lang="fr-FR" sz="1400" dirty="0">
-                <a:hlinkClick r:id="rId4"/>
-              </a:rPr>
-              <a:t>https://github.com/Sheikoh/REnergies_efficiency_prediction.git</a:t>
-            </a:r>
-            <a:endParaRPr lang="fr-FR" sz="1400" dirty="0"/>
-          </a:p>
-          <a:p>
-            <a:pPr marL="114300" lvl="0" indent="0">
-              <a:spcBef>
-                <a:spcPts val="1200"/>
-              </a:spcBef>
-              <a:buNone/>
-            </a:pPr>
-            <a:r>
-              <a:rPr lang="fr-FR" sz="1400" b="1" dirty="0"/>
-              <a:t>Lien Dashboard : </a:t>
-            </a:r>
-            <a:r>
-              <a:rPr lang="fr-FR" sz="1400" dirty="0">
-                <a:hlinkClick r:id="rId5"/>
-              </a:rPr>
-              <a:t>https://renergies99-dashboard.hf.space/</a:t>
-            </a:r>
-            <a:endParaRPr lang="fr-FR" sz="1400" dirty="0"/>
-          </a:p>
-          <a:p>
-            <a:pPr marL="114300" lvl="0" indent="0">
-              <a:spcBef>
-                <a:spcPts val="1200"/>
-              </a:spcBef>
-              <a:buNone/>
-            </a:pPr>
-            <a:r>
-              <a:rPr lang="fr-FR" sz="1400" b="1" dirty="0"/>
-              <a:t>Lien </a:t>
-            </a:r>
-            <a:r>
-              <a:rPr lang="fr-FR" sz="1400" b="1" dirty="0" err="1"/>
-              <a:t>Mlflow</a:t>
-            </a:r>
-            <a:r>
-              <a:rPr lang="fr-FR" sz="1400" b="1" dirty="0"/>
-              <a:t> : </a:t>
-            </a:r>
-            <a:r>
-              <a:rPr lang="fr-FR" sz="1400" dirty="0">
-                <a:hlinkClick r:id="rId6"/>
-              </a:rPr>
-              <a:t>https://renergies99-mlflow.hf.space/</a:t>
-            </a:r>
-            <a:endParaRPr lang="fr-FR" sz="1400" dirty="0"/>
-          </a:p>
-          <a:p>
-            <a:pPr marL="114300" lvl="0" indent="0">
-              <a:spcBef>
-                <a:spcPts val="1200"/>
-              </a:spcBef>
-              <a:buNone/>
-            </a:pPr>
-            <a:r>
-              <a:rPr lang="fr-FR" sz="1400" b="1" dirty="0"/>
-              <a:t>Lien API : </a:t>
-            </a:r>
-            <a:r>
-              <a:rPr lang="fr-FR" sz="1400" dirty="0">
-                <a:hlinkClick r:id="rId7"/>
-              </a:rPr>
-              <a:t>https://renergies99-api-renergy.hf.space/</a:t>
-            </a:r>
-            <a:endParaRPr lang="fr-FR" sz="1400" dirty="0"/>
-          </a:p>
-          <a:p>
-            <a:pPr marL="114300" lvl="0" indent="0">
-              <a:buNone/>
-            </a:pPr>
-            <a:endParaRPr lang="fr-FR" sz="1400" dirty="0"/>
-          </a:p>
-          <a:p>
-            <a:pPr marL="114300" lvl="0" indent="0">
-              <a:buNone/>
-            </a:pPr>
-            <a:endParaRPr sz="1400" dirty="0"/>
-          </a:p>
-        </p:txBody>
-      </p:sp>
-    </p:spTree>
-    <p:extLst>
-      <p:ext uri="{BB962C8B-B14F-4D97-AF65-F5344CB8AC3E}">
-        <p14:creationId xmlns:p14="http://schemas.microsoft.com/office/powerpoint/2010/main" val="4088050223"/>
-      </p:ext>
-    </p:extLst>
-  </p:cSld>
-  <p:clrMapOvr>
-    <a:masterClrMapping/>
-  </p:clrMapOvr>
-</p:sld>
-</file>
-
-<file path=ppt/slides/slide16.xml><?xml version="1.0" encoding="utf-8"?>
-<p:sld xmlns:a="http://schemas.openxmlformats.org/drawingml/2006/main" xmlns:r="http://schemas.openxmlformats.org/officeDocument/2006/relationships" xmlns:p="http://schemas.openxmlformats.org/presentationml/2006/main">
-  <p:cSld>
-    <p:spTree>
-      <p:nvGrpSpPr>
-        <p:cNvPr id="1" name="Shape 95">
-          <a:extLst>
-            <a:ext uri="{FF2B5EF4-FFF2-40B4-BE49-F238E27FC236}">
-              <a16:creationId xmlns:a16="http://schemas.microsoft.com/office/drawing/2014/main" id="{54B39E8E-2AB4-298D-C3FD-3B563ED89E4A}"/>
-            </a:ext>
-          </a:extLst>
-        </p:cNvPr>
-        <p:cNvGrpSpPr/>
-        <p:nvPr/>
-      </p:nvGrpSpPr>
-      <p:grpSpPr>
-        <a:xfrm>
-          <a:off x="0" y="0"/>
-          <a:ext cx="0" cy="0"/>
-          <a:chOff x="0" y="0"/>
-          <a:chExt cx="0" cy="0"/>
-        </a:xfrm>
-      </p:grpSpPr>
-      <p:sp>
-        <p:nvSpPr>
-          <p:cNvPr id="96" name="Google Shape;96;p5">
-            <a:extLst>
-              <a:ext uri="{FF2B5EF4-FFF2-40B4-BE49-F238E27FC236}">
-                <a16:creationId xmlns:a16="http://schemas.microsoft.com/office/drawing/2014/main" id="{A01AE6FF-5294-F6EC-FB0D-D63D7D63D71C}"/>
-              </a:ext>
-            </a:extLst>
-          </p:cNvPr>
-          <p:cNvSpPr txBox="1">
-            <a:spLocks noGrp="1"/>
-          </p:cNvSpPr>
-          <p:nvPr>
-            <p:ph type="ctrTitle" idx="4294967295"/>
-          </p:nvPr>
-        </p:nvSpPr>
-        <p:spPr>
-          <a:xfrm>
-            <a:off x="1192664" y="403309"/>
-            <a:ext cx="5315100" cy="533100"/>
-          </a:xfrm>
-          <a:prstGeom prst="rect">
-            <a:avLst/>
-          </a:prstGeom>
-          <a:noFill/>
-          <a:ln>
-            <a:noFill/>
-          </a:ln>
-        </p:spPr>
-        <p:txBody>
-          <a:bodyPr spcFirstLastPara="1" wrap="square" lIns="91425" tIns="91425" rIns="91425" bIns="91425" anchor="t" anchorCtr="0">
-            <a:noAutofit/>
-          </a:bodyPr>
-          <a:lstStyle/>
-          <a:p>
-            <a:pPr marL="0" marR="0" lvl="0" indent="0" algn="l" rtl="0">
-              <a:lnSpc>
-                <a:spcPct val="100000"/>
-              </a:lnSpc>
-              <a:spcBef>
-                <a:spcPts val="0"/>
-              </a:spcBef>
-              <a:spcAft>
-                <a:spcPts val="0"/>
-              </a:spcAft>
-              <a:buClr>
-                <a:schemeClr val="dk1"/>
-              </a:buClr>
-              <a:buSzPts val="2800"/>
-              <a:buFont typeface="Arial"/>
-              <a:buNone/>
-            </a:pPr>
-            <a:r>
-              <a:rPr lang="it-IT" sz="2500" i="0" u="none" strike="noStrike" cap="none" dirty="0">
-                <a:solidFill>
-                  <a:srgbClr val="0E3449"/>
-                </a:solidFill>
-                <a:latin typeface="Inter SemiBold"/>
-                <a:ea typeface="Inter SemiBold"/>
-                <a:cs typeface="Inter SemiBold"/>
-                <a:sym typeface="Inter SemiBold"/>
-              </a:rPr>
-              <a:t>Sources de données</a:t>
-            </a:r>
-          </a:p>
-        </p:txBody>
-      </p:sp>
-      <p:pic>
-        <p:nvPicPr>
-          <p:cNvPr id="97" name="Google Shape;97;p5">
-            <a:extLst>
-              <a:ext uri="{FF2B5EF4-FFF2-40B4-BE49-F238E27FC236}">
-                <a16:creationId xmlns:a16="http://schemas.microsoft.com/office/drawing/2014/main" id="{7FFB1AFA-ABA9-029D-77BD-FB2682A2296B}"/>
-              </a:ext>
-            </a:extLst>
-          </p:cNvPr>
-          <p:cNvPicPr preferRelativeResize="0"/>
-          <p:nvPr/>
-        </p:nvPicPr>
-        <p:blipFill rotWithShape="1">
-          <a:blip r:embed="rId3">
-            <a:alphaModFix/>
-          </a:blip>
-          <a:srcRect/>
-          <a:stretch/>
-        </p:blipFill>
-        <p:spPr>
-          <a:xfrm>
-            <a:off x="463375" y="482852"/>
-            <a:ext cx="576900" cy="385904"/>
-          </a:xfrm>
-          <a:prstGeom prst="rect">
-            <a:avLst/>
-          </a:prstGeom>
-          <a:noFill/>
-          <a:ln>
-            <a:noFill/>
-          </a:ln>
-        </p:spPr>
-      </p:pic>
-      <p:sp>
-        <p:nvSpPr>
-          <p:cNvPr id="98" name="Google Shape;98;p5">
-            <a:extLst>
-              <a:ext uri="{FF2B5EF4-FFF2-40B4-BE49-F238E27FC236}">
-                <a16:creationId xmlns:a16="http://schemas.microsoft.com/office/drawing/2014/main" id="{33F93AD1-3891-482A-2CFB-204DAC688B8B}"/>
-              </a:ext>
-            </a:extLst>
-          </p:cNvPr>
-          <p:cNvSpPr/>
-          <p:nvPr/>
-        </p:nvSpPr>
-        <p:spPr>
-          <a:xfrm>
-            <a:off x="10225" y="4892025"/>
-            <a:ext cx="9144000" cy="251400"/>
-          </a:xfrm>
-          <a:prstGeom prst="rect">
-            <a:avLst/>
-          </a:prstGeom>
-          <a:solidFill>
-            <a:srgbClr val="C3FFFC"/>
-          </a:solidFill>
-          <a:ln>
-            <a:noFill/>
-          </a:ln>
-        </p:spPr>
-        <p:txBody>
-          <a:bodyPr spcFirstLastPara="1" wrap="square" lIns="91425" tIns="91425" rIns="91425" bIns="91425" anchor="ctr" anchorCtr="0">
-            <a:noAutofit/>
-          </a:bodyPr>
-          <a:lstStyle/>
-          <a:p>
-            <a:pPr marL="0" marR="0" lvl="0" indent="0" algn="l" rtl="0">
-              <a:lnSpc>
-                <a:spcPct val="100000"/>
-              </a:lnSpc>
-              <a:spcBef>
-                <a:spcPts val="0"/>
-              </a:spcBef>
-              <a:spcAft>
-                <a:spcPts val="0"/>
-              </a:spcAft>
-              <a:buClr>
-                <a:srgbClr val="000000"/>
-              </a:buClr>
-              <a:buSzPts val="1400"/>
-              <a:buFont typeface="Arial"/>
-              <a:buNone/>
-            </a:pPr>
-            <a:endParaRPr sz="1400" b="0" i="0" u="none" strike="noStrike" cap="none">
-              <a:solidFill>
-                <a:srgbClr val="000000"/>
-              </a:solidFill>
-              <a:latin typeface="Arial"/>
-              <a:ea typeface="Arial"/>
-              <a:cs typeface="Arial"/>
-              <a:sym typeface="Arial"/>
-            </a:endParaRPr>
-          </a:p>
-        </p:txBody>
-      </p:sp>
-      <p:graphicFrame>
-        <p:nvGraphicFramePr>
-          <p:cNvPr id="2" name="Tableau 1">
-            <a:extLst>
-              <a:ext uri="{FF2B5EF4-FFF2-40B4-BE49-F238E27FC236}">
-                <a16:creationId xmlns:a16="http://schemas.microsoft.com/office/drawing/2014/main" id="{1F110593-1E38-6872-65AA-F9F3DBB52889}"/>
-              </a:ext>
-            </a:extLst>
-          </p:cNvPr>
-          <p:cNvGraphicFramePr>
-            <a:graphicFrameLocks noGrp="1"/>
-          </p:cNvGraphicFramePr>
-          <p:nvPr>
-            <p:extLst>
-              <p:ext uri="{D42A27DB-BD31-4B8C-83A1-F6EECF244321}">
-                <p14:modId xmlns:p14="http://schemas.microsoft.com/office/powerpoint/2010/main" val="2643252541"/>
-              </p:ext>
-            </p:extLst>
-          </p:nvPr>
-        </p:nvGraphicFramePr>
-        <p:xfrm>
-          <a:off x="463375" y="1160010"/>
-          <a:ext cx="8283386" cy="2486560"/>
-        </p:xfrm>
-        <a:graphic>
-          <a:graphicData uri="http://schemas.openxmlformats.org/drawingml/2006/table">
-            <a:tbl>
-              <a:tblPr firstRow="1" bandRow="1">
-                <a:tableStyleId>{5C22544A-7EE6-4342-B048-85BDC9FD1C3A}</a:tableStyleId>
-              </a:tblPr>
-              <a:tblGrid>
-                <a:gridCol w="908225">
-                  <a:extLst>
-                    <a:ext uri="{9D8B030D-6E8A-4147-A177-3AD203B41FA5}">
-                      <a16:colId xmlns:a16="http://schemas.microsoft.com/office/drawing/2014/main" val="2306203329"/>
-                    </a:ext>
-                  </a:extLst>
-                </a:gridCol>
-                <a:gridCol w="3031958">
-                  <a:extLst>
-                    <a:ext uri="{9D8B030D-6E8A-4147-A177-3AD203B41FA5}">
-                      <a16:colId xmlns:a16="http://schemas.microsoft.com/office/drawing/2014/main" val="2541688145"/>
-                    </a:ext>
-                  </a:extLst>
-                </a:gridCol>
-                <a:gridCol w="2033256">
-                  <a:extLst>
-                    <a:ext uri="{9D8B030D-6E8A-4147-A177-3AD203B41FA5}">
-                      <a16:colId xmlns:a16="http://schemas.microsoft.com/office/drawing/2014/main" val="3557785877"/>
-                    </a:ext>
-                  </a:extLst>
-                </a:gridCol>
-                <a:gridCol w="2309947">
-                  <a:extLst>
-                    <a:ext uri="{9D8B030D-6E8A-4147-A177-3AD203B41FA5}">
-                      <a16:colId xmlns:a16="http://schemas.microsoft.com/office/drawing/2014/main" val="3224508020"/>
-                    </a:ext>
-                  </a:extLst>
-                </a:gridCol>
-              </a:tblGrid>
-              <a:tr h="226137">
-                <a:tc>
-                  <a:txBody>
-                    <a:bodyPr/>
-                    <a:lstStyle/>
-                    <a:p>
-                      <a:r>
-                        <a:rPr lang="fr-FR" sz="1000"/>
-                        <a:t>Type</a:t>
-                      </a:r>
-                    </a:p>
-                  </a:txBody>
-                  <a:tcPr/>
-                </a:tc>
-                <a:tc>
-                  <a:txBody>
-                    <a:bodyPr/>
-                    <a:lstStyle/>
-                    <a:p>
-                      <a:r>
-                        <a:rPr lang="fr-FR" sz="1000"/>
-                        <a:t>Description</a:t>
-                      </a:r>
-                    </a:p>
-                  </a:txBody>
-                  <a:tcPr/>
-                </a:tc>
-                <a:tc>
-                  <a:txBody>
-                    <a:bodyPr/>
-                    <a:lstStyle/>
-                    <a:p>
-                      <a:r>
-                        <a:rPr lang="fr-FR" sz="1000" dirty="0"/>
-                        <a:t>Commentaires</a:t>
-                      </a:r>
-                    </a:p>
-                  </a:txBody>
-                  <a:tcPr/>
-                </a:tc>
-                <a:tc>
-                  <a:txBody>
-                    <a:bodyPr/>
-                    <a:lstStyle/>
-                    <a:p>
-                      <a:r>
-                        <a:rPr lang="fr-FR" sz="1000"/>
-                        <a:t>Lien</a:t>
-                      </a:r>
-                    </a:p>
-                  </a:txBody>
-                  <a:tcPr/>
-                </a:tc>
-                <a:extLst>
-                  <a:ext uri="{0D108BD9-81ED-4DB2-BD59-A6C34878D82A}">
-                    <a16:rowId xmlns:a16="http://schemas.microsoft.com/office/drawing/2014/main" val="1404536746"/>
-                  </a:ext>
-                </a:extLst>
-              </a:tr>
-              <a:tr h="476255">
-                <a:tc>
-                  <a:txBody>
-                    <a:bodyPr/>
-                    <a:lstStyle/>
-                    <a:p>
-                      <a:r>
-                        <a:rPr lang="fr-FR" sz="800" dirty="0" err="1"/>
-                        <a:t>Dataset</a:t>
-                      </a:r>
-                      <a:endParaRPr lang="fr-FR" sz="800" dirty="0"/>
-                    </a:p>
-                  </a:txBody>
-                  <a:tcPr anchor="ctr"/>
-                </a:tc>
-                <a:tc>
-                  <a:txBody>
-                    <a:bodyPr/>
-                    <a:lstStyle/>
-                    <a:p>
-                      <a:r>
-                        <a:rPr lang="fr-FR" sz="900" b="1" dirty="0"/>
-                        <a:t>Données de production RTE</a:t>
-                      </a:r>
-                    </a:p>
-                  </a:txBody>
-                  <a:tcPr anchor="ctr"/>
-                </a:tc>
-                <a:tc>
-                  <a:txBody>
-                    <a:bodyPr/>
-                    <a:lstStyle/>
-                    <a:p>
-                      <a:r>
-                        <a:rPr lang="fr-FR" sz="900" dirty="0"/>
-                        <a:t>National : historique sur 14 ans</a:t>
-                      </a:r>
-                    </a:p>
-                    <a:p>
-                      <a:r>
-                        <a:rPr lang="fr-FR" sz="900" dirty="0"/>
-                        <a:t>Régional : historique sur 5 ans</a:t>
-                      </a:r>
-                    </a:p>
-                  </a:txBody>
-                  <a:tcPr anchor="ctr"/>
-                </a:tc>
-                <a:tc>
-                  <a:txBody>
-                    <a:bodyPr/>
-                    <a:lstStyle/>
-                    <a:p>
-                      <a:r>
-                        <a:rPr lang="fr-FR" sz="700" dirty="0">
-                          <a:hlinkClick r:id="rId4"/>
-                        </a:rPr>
-                        <a:t>https://www.rte-france.com/donnees-publications/eco2mix-donnees-temps-reel/telecharger-indicateurs</a:t>
-                      </a:r>
-                      <a:endParaRPr lang="fr-FR" sz="700" dirty="0"/>
-                    </a:p>
-                  </a:txBody>
-                  <a:tcPr anchor="ctr"/>
-                </a:tc>
-                <a:extLst>
-                  <a:ext uri="{0D108BD9-81ED-4DB2-BD59-A6C34878D82A}">
-                    <a16:rowId xmlns:a16="http://schemas.microsoft.com/office/drawing/2014/main" val="594868334"/>
-                  </a:ext>
-                </a:extLst>
-              </a:tr>
-              <a:tr h="476255">
-                <a:tc>
-                  <a:txBody>
-                    <a:bodyPr/>
-                    <a:lstStyle/>
-                    <a:p>
-                      <a:pPr marL="0" marR="0" lvl="0" indent="0" algn="l" defTabSz="914400" rtl="0" eaLnBrk="1" fontAlgn="auto" latinLnBrk="0" hangingPunct="1">
-                        <a:lnSpc>
-                          <a:spcPct val="100000"/>
-                        </a:lnSpc>
-                        <a:spcBef>
-                          <a:spcPts val="0"/>
-                        </a:spcBef>
-                        <a:spcAft>
-                          <a:spcPts val="0"/>
-                        </a:spcAft>
-                        <a:buClr>
-                          <a:srgbClr val="000000"/>
-                        </a:buClr>
-                        <a:buSzTx/>
-                        <a:buFont typeface="Arial"/>
-                        <a:buNone/>
-                        <a:tabLst/>
-                        <a:defRPr/>
-                      </a:pPr>
-                      <a:r>
-                        <a:rPr lang="fr-FR" sz="800" dirty="0" err="1"/>
-                        <a:t>Dataset</a:t>
-                      </a:r>
-                      <a:endParaRPr lang="fr-FR" sz="800" dirty="0"/>
-                    </a:p>
-                  </a:txBody>
-                  <a:tcPr anchor="ctr"/>
-                </a:tc>
-                <a:tc>
-                  <a:txBody>
-                    <a:bodyPr/>
-                    <a:lstStyle/>
-                    <a:p>
-                      <a:r>
-                        <a:rPr lang="fr-FR" sz="900" b="1" i="0" u="none" strike="noStrike" cap="none" dirty="0">
-                          <a:solidFill>
-                            <a:schemeClr val="dk1"/>
-                          </a:solidFill>
-                          <a:latin typeface="+mn-lt"/>
-                          <a:ea typeface="+mn-ea"/>
-                          <a:cs typeface="+mn-cs"/>
-                          <a:sym typeface="Arial"/>
-                        </a:rPr>
-                        <a:t>Imagerie satellite Landsat</a:t>
-                      </a:r>
-                    </a:p>
-                  </a:txBody>
-                  <a:tcPr anchor="ctr"/>
-                </a:tc>
-                <a:tc>
-                  <a:txBody>
-                    <a:bodyPr/>
-                    <a:lstStyle/>
-                    <a:p>
-                      <a:r>
-                        <a:rPr lang="fr-FR" sz="900" dirty="0"/>
-                        <a:t>Images satellites et métadonnées </a:t>
-                      </a:r>
-                    </a:p>
-                  </a:txBody>
-                  <a:tcPr anchor="ctr"/>
-                </a:tc>
-                <a:tc>
-                  <a:txBody>
-                    <a:bodyPr/>
-                    <a:lstStyle/>
-                    <a:p>
-                      <a:r>
-                        <a:rPr lang="fr-FR" sz="700" dirty="0">
-                          <a:hlinkClick r:id="rId5"/>
-                        </a:rPr>
-                        <a:t>https://code.usgs.gov/eros-user-services/accessing_landsat_data</a:t>
-                      </a:r>
-                      <a:endParaRPr lang="fr-FR" sz="700" dirty="0"/>
-                    </a:p>
-                  </a:txBody>
-                  <a:tcPr anchor="ctr"/>
-                </a:tc>
-                <a:extLst>
-                  <a:ext uri="{0D108BD9-81ED-4DB2-BD59-A6C34878D82A}">
-                    <a16:rowId xmlns:a16="http://schemas.microsoft.com/office/drawing/2014/main" val="506933637"/>
-                  </a:ext>
-                </a:extLst>
-              </a:tr>
-              <a:tr h="558690">
-                <a:tc>
-                  <a:txBody>
-                    <a:bodyPr/>
-                    <a:lstStyle/>
-                    <a:p>
-                      <a:pPr marL="0" marR="0" lvl="0" indent="0" algn="l" defTabSz="914400" rtl="0" eaLnBrk="1" fontAlgn="auto" latinLnBrk="0" hangingPunct="1">
-                        <a:lnSpc>
-                          <a:spcPct val="100000"/>
-                        </a:lnSpc>
-                        <a:spcBef>
-                          <a:spcPts val="0"/>
-                        </a:spcBef>
-                        <a:spcAft>
-                          <a:spcPts val="0"/>
-                        </a:spcAft>
-                        <a:buClr>
-                          <a:srgbClr val="000000"/>
-                        </a:buClr>
-                        <a:buSzTx/>
-                        <a:buFont typeface="Arial"/>
-                        <a:buNone/>
-                        <a:tabLst/>
-                        <a:defRPr/>
-                      </a:pPr>
-                      <a:r>
-                        <a:rPr lang="fr-FR" sz="800" dirty="0"/>
-                        <a:t>API</a:t>
-                      </a:r>
-                    </a:p>
-                  </a:txBody>
-                  <a:tcPr anchor="ctr"/>
-                </a:tc>
-                <a:tc>
-                  <a:txBody>
-                    <a:bodyPr/>
-                    <a:lstStyle/>
-                    <a:p>
-                      <a:pPr marL="0" marR="0" lvl="0" indent="0" algn="l" defTabSz="914400" rtl="0" eaLnBrk="1" fontAlgn="auto" latinLnBrk="0" hangingPunct="1">
-                        <a:lnSpc>
-                          <a:spcPct val="100000"/>
-                        </a:lnSpc>
-                        <a:spcBef>
-                          <a:spcPts val="0"/>
-                        </a:spcBef>
-                        <a:spcAft>
-                          <a:spcPts val="0"/>
-                        </a:spcAft>
-                        <a:buClr>
-                          <a:srgbClr val="000000"/>
-                        </a:buClr>
-                        <a:buSzTx/>
-                        <a:buFont typeface="Arial"/>
-                        <a:buNone/>
-                        <a:tabLst/>
-                        <a:defRPr/>
-                      </a:pPr>
-                      <a:r>
-                        <a:rPr lang="fr-FR" sz="900" b="1" dirty="0"/>
-                        <a:t>Données météo</a:t>
-                      </a:r>
-                    </a:p>
-                  </a:txBody>
-                  <a:tcPr anchor="ctr"/>
-                </a:tc>
-                <a:tc>
-                  <a:txBody>
-                    <a:bodyPr/>
-                    <a:lstStyle/>
-                    <a:p>
-                      <a:r>
-                        <a:rPr lang="fr-FR" sz="900" dirty="0"/>
-                        <a:t>Données historiques et données prédictives</a:t>
-                      </a:r>
-                    </a:p>
-                  </a:txBody>
-                  <a:tcPr anchor="ctr"/>
-                </a:tc>
-                <a:tc>
-                  <a:txBody>
-                    <a:bodyPr/>
-                    <a:lstStyle/>
-                    <a:p>
-                      <a:r>
-                        <a:rPr lang="fr-FR" sz="700" dirty="0">
-                          <a:hlinkClick r:id="rId6"/>
-                        </a:rPr>
-                        <a:t>https://openweathermap.org/api/one-call-3</a:t>
-                      </a:r>
-                      <a:endParaRPr lang="fr-FR" sz="700" dirty="0"/>
-                    </a:p>
-                  </a:txBody>
-                  <a:tcPr anchor="ctr"/>
-                </a:tc>
-                <a:extLst>
-                  <a:ext uri="{0D108BD9-81ED-4DB2-BD59-A6C34878D82A}">
-                    <a16:rowId xmlns:a16="http://schemas.microsoft.com/office/drawing/2014/main" val="2477866597"/>
-                  </a:ext>
-                </a:extLst>
-              </a:tr>
-              <a:tr h="558690">
-                <a:tc>
-                  <a:txBody>
-                    <a:bodyPr/>
-                    <a:lstStyle/>
-                    <a:p>
-                      <a:pPr marL="0" marR="0" lvl="0" indent="0" algn="l" defTabSz="914400" rtl="0" eaLnBrk="1" fontAlgn="auto" latinLnBrk="0" hangingPunct="1">
-                        <a:lnSpc>
-                          <a:spcPct val="100000"/>
-                        </a:lnSpc>
-                        <a:spcBef>
-                          <a:spcPts val="0"/>
-                        </a:spcBef>
-                        <a:spcAft>
-                          <a:spcPts val="0"/>
-                        </a:spcAft>
-                        <a:buClr>
-                          <a:srgbClr val="000000"/>
-                        </a:buClr>
-                        <a:buSzTx/>
-                        <a:buFont typeface="Arial"/>
-                        <a:buNone/>
-                        <a:tabLst/>
-                        <a:defRPr/>
-                      </a:pPr>
-                      <a:r>
-                        <a:rPr lang="fr-FR" sz="800" dirty="0" err="1"/>
-                        <a:t>Dataset</a:t>
-                      </a:r>
-                      <a:endParaRPr lang="fr-FR" sz="800" dirty="0"/>
-                    </a:p>
-                  </a:txBody>
-                  <a:tcPr anchor="ctr"/>
-                </a:tc>
-                <a:tc>
-                  <a:txBody>
-                    <a:bodyPr/>
-                    <a:lstStyle/>
-                    <a:p>
-                      <a:pPr marL="0" marR="0" lvl="0" indent="0" algn="l" defTabSz="914400" rtl="0" eaLnBrk="1" fontAlgn="auto" latinLnBrk="0" hangingPunct="1">
-                        <a:lnSpc>
-                          <a:spcPct val="100000"/>
-                        </a:lnSpc>
-                        <a:spcBef>
-                          <a:spcPts val="0"/>
-                        </a:spcBef>
-                        <a:spcAft>
-                          <a:spcPts val="0"/>
-                        </a:spcAft>
-                        <a:buClr>
-                          <a:srgbClr val="000000"/>
-                        </a:buClr>
-                        <a:buSzTx/>
-                        <a:buFont typeface="Arial"/>
-                        <a:buNone/>
-                        <a:tabLst/>
-                        <a:defRPr/>
-                      </a:pPr>
-                      <a:r>
-                        <a:rPr lang="fr-FR" sz="900" b="1" dirty="0"/>
-                        <a:t>Données activité solaire </a:t>
-                      </a:r>
-                    </a:p>
-                  </a:txBody>
-                  <a:tcPr anchor="ctr"/>
-                </a:tc>
-                <a:tc>
-                  <a:txBody>
-                    <a:bodyPr/>
-                    <a:lstStyle/>
-                    <a:p>
-                      <a:pPr marL="0" marR="0" lvl="0" indent="0" algn="l" defTabSz="914400" rtl="0" eaLnBrk="1" fontAlgn="auto" latinLnBrk="0" hangingPunct="1">
-                        <a:lnSpc>
-                          <a:spcPct val="100000"/>
-                        </a:lnSpc>
-                        <a:spcBef>
-                          <a:spcPts val="0"/>
-                        </a:spcBef>
-                        <a:spcAft>
-                          <a:spcPts val="0"/>
-                        </a:spcAft>
-                        <a:buClr>
-                          <a:srgbClr val="000000"/>
-                        </a:buClr>
-                        <a:buSzTx/>
-                        <a:buFont typeface="Arial"/>
-                        <a:buNone/>
-                        <a:tabLst/>
-                        <a:defRPr/>
-                      </a:pPr>
-                      <a:r>
-                        <a:rPr lang="fr-FR" sz="900" dirty="0"/>
-                        <a:t>Données historiques et données prédictives</a:t>
-                      </a:r>
-                    </a:p>
-                  </a:txBody>
-                  <a:tcPr anchor="ctr"/>
-                </a:tc>
-                <a:tc>
-                  <a:txBody>
-                    <a:bodyPr/>
-                    <a:lstStyle/>
-                    <a:p>
-                      <a:r>
-                        <a:rPr lang="fr-FR" sz="700" dirty="0">
-                          <a:hlinkClick r:id="rId7"/>
-                        </a:rPr>
-                        <a:t>https://www.ngdc.noaa.gov/stp/space-weather/swpc-products/daily_reports/solar_geophysical_activity_summaries/</a:t>
-                      </a:r>
-                      <a:endParaRPr lang="fr-FR" sz="700" dirty="0"/>
-                    </a:p>
-                    <a:p>
-                      <a:endParaRPr lang="fr-FR" sz="700" dirty="0"/>
-                    </a:p>
-                    <a:p>
-                      <a:r>
-                        <a:rPr lang="fr-FR" sz="700" dirty="0">
-                          <a:hlinkClick r:id="rId8"/>
-                        </a:rPr>
-                        <a:t>https://www.ngdc.noaa.gov/stp/space-weather/swpc-products/daily_reports/daypre/</a:t>
-                      </a:r>
-                      <a:endParaRPr lang="fr-FR" sz="700" dirty="0"/>
-                    </a:p>
-                  </a:txBody>
-                  <a:tcPr anchor="ctr"/>
-                </a:tc>
-                <a:extLst>
-                  <a:ext uri="{0D108BD9-81ED-4DB2-BD59-A6C34878D82A}">
-                    <a16:rowId xmlns:a16="http://schemas.microsoft.com/office/drawing/2014/main" val="2084688575"/>
-                  </a:ext>
-                </a:extLst>
-              </a:tr>
-            </a:tbl>
-          </a:graphicData>
-        </a:graphic>
-      </p:graphicFrame>
-    </p:spTree>
-    <p:extLst>
-      <p:ext uri="{BB962C8B-B14F-4D97-AF65-F5344CB8AC3E}">
-        <p14:creationId xmlns:p14="http://schemas.microsoft.com/office/powerpoint/2010/main" val="4010613788"/>
-      </p:ext>
-    </p:extLst>
-  </p:cSld>
-  <p:clrMapOvr>
-    <a:masterClrMapping/>
-  </p:clrMapOvr>
-</p:sld>
-</file>
-
-<file path=ppt/slides/slide17.xml><?xml version="1.0" encoding="utf-8"?>
 <p:sld xmlns:a="http://schemas.openxmlformats.org/drawingml/2006/main" xmlns:r="http://schemas.openxmlformats.org/officeDocument/2006/relationships" xmlns:p="http://schemas.openxmlformats.org/presentationml/2006/main">
   <p:cSld>
     <p:spTree>
@@ -24508,7 +23474,7 @@
 </p:sld>
 </file>
 
-<file path=ppt/slides/slide18.xml><?xml version="1.0" encoding="utf-8"?>
+<file path=ppt/slides/slide16.xml><?xml version="1.0" encoding="utf-8"?>
 <p:sld xmlns:a="http://schemas.openxmlformats.org/drawingml/2006/main" xmlns:r="http://schemas.openxmlformats.org/officeDocument/2006/relationships" xmlns:p="http://schemas.openxmlformats.org/presentationml/2006/main">
   <p:cSld>
     <p:spTree>
@@ -25913,6 +24879,1056 @@
     <p:extLst>
       <p:ext uri="{BB962C8B-B14F-4D97-AF65-F5344CB8AC3E}">
         <p14:creationId xmlns:p14="http://schemas.microsoft.com/office/powerpoint/2010/main" val="2552402859"/>
+      </p:ext>
+    </p:extLst>
+  </p:cSld>
+  <p:clrMapOvr>
+    <a:masterClrMapping/>
+  </p:clrMapOvr>
+</p:sld>
+</file>
+
+<file path=ppt/slides/slide17.xml><?xml version="1.0" encoding="utf-8"?>
+<p:sld xmlns:a="http://schemas.openxmlformats.org/drawingml/2006/main" xmlns:r="http://schemas.openxmlformats.org/officeDocument/2006/relationships" xmlns:p="http://schemas.openxmlformats.org/presentationml/2006/main">
+  <p:cSld>
+    <p:spTree>
+      <p:nvGrpSpPr>
+        <p:cNvPr id="1" name="Shape 95">
+          <a:extLst>
+            <a:ext uri="{FF2B5EF4-FFF2-40B4-BE49-F238E27FC236}">
+              <a16:creationId xmlns:a16="http://schemas.microsoft.com/office/drawing/2014/main" id="{06EDD131-5809-747C-6E95-185A073DB048}"/>
+            </a:ext>
+          </a:extLst>
+        </p:cNvPr>
+        <p:cNvGrpSpPr/>
+        <p:nvPr/>
+      </p:nvGrpSpPr>
+      <p:grpSpPr>
+        <a:xfrm>
+          <a:off x="0" y="0"/>
+          <a:ext cx="0" cy="0"/>
+          <a:chOff x="0" y="0"/>
+          <a:chExt cx="0" cy="0"/>
+        </a:xfrm>
+      </p:grpSpPr>
+      <p:sp>
+        <p:nvSpPr>
+          <p:cNvPr id="96" name="Google Shape;96;p5">
+            <a:extLst>
+              <a:ext uri="{FF2B5EF4-FFF2-40B4-BE49-F238E27FC236}">
+                <a16:creationId xmlns:a16="http://schemas.microsoft.com/office/drawing/2014/main" id="{CFE260F2-EC75-DDF8-CE55-329FB5D8E4C4}"/>
+              </a:ext>
+            </a:extLst>
+          </p:cNvPr>
+          <p:cNvSpPr txBox="1">
+            <a:spLocks noGrp="1"/>
+          </p:cNvSpPr>
+          <p:nvPr>
+            <p:ph type="ctrTitle" idx="4294967295"/>
+          </p:nvPr>
+        </p:nvSpPr>
+        <p:spPr>
+          <a:xfrm>
+            <a:off x="1192664" y="403309"/>
+            <a:ext cx="5315100" cy="533100"/>
+          </a:xfrm>
+          <a:prstGeom prst="rect">
+            <a:avLst/>
+          </a:prstGeom>
+          <a:noFill/>
+          <a:ln>
+            <a:noFill/>
+          </a:ln>
+        </p:spPr>
+        <p:txBody>
+          <a:bodyPr spcFirstLastPara="1" wrap="square" lIns="91425" tIns="91425" rIns="91425" bIns="91425" anchor="t" anchorCtr="0">
+            <a:noAutofit/>
+          </a:bodyPr>
+          <a:lstStyle/>
+          <a:p>
+            <a:pPr marL="0" marR="0" lvl="0" indent="0" algn="l" rtl="0">
+              <a:lnSpc>
+                <a:spcPct val="100000"/>
+              </a:lnSpc>
+              <a:spcBef>
+                <a:spcPts val="0"/>
+              </a:spcBef>
+              <a:spcAft>
+                <a:spcPts val="0"/>
+              </a:spcAft>
+              <a:buClr>
+                <a:schemeClr val="dk1"/>
+              </a:buClr>
+              <a:buSzPts val="2800"/>
+              <a:buFont typeface="Arial"/>
+              <a:buNone/>
+            </a:pPr>
+            <a:r>
+              <a:rPr lang="it-IT" sz="2500" i="0" u="none" strike="noStrike" cap="none" dirty="0">
+                <a:solidFill>
+                  <a:srgbClr val="0E3449"/>
+                </a:solidFill>
+                <a:latin typeface="Inter SemiBold"/>
+                <a:ea typeface="Inter SemiBold"/>
+                <a:cs typeface="Inter SemiBold"/>
+                <a:sym typeface="Inter SemiBold"/>
+              </a:rPr>
+              <a:t>Ressourses projet</a:t>
+            </a:r>
+          </a:p>
+        </p:txBody>
+      </p:sp>
+      <p:pic>
+        <p:nvPicPr>
+          <p:cNvPr id="97" name="Google Shape;97;p5">
+            <a:extLst>
+              <a:ext uri="{FF2B5EF4-FFF2-40B4-BE49-F238E27FC236}">
+                <a16:creationId xmlns:a16="http://schemas.microsoft.com/office/drawing/2014/main" id="{66739ED7-F6B1-16FF-21A5-52FBD2C06D52}"/>
+              </a:ext>
+            </a:extLst>
+          </p:cNvPr>
+          <p:cNvPicPr preferRelativeResize="0"/>
+          <p:nvPr/>
+        </p:nvPicPr>
+        <p:blipFill rotWithShape="1">
+          <a:blip r:embed="rId3">
+            <a:alphaModFix/>
+          </a:blip>
+          <a:srcRect/>
+          <a:stretch/>
+        </p:blipFill>
+        <p:spPr>
+          <a:xfrm>
+            <a:off x="463375" y="482852"/>
+            <a:ext cx="576900" cy="385904"/>
+          </a:xfrm>
+          <a:prstGeom prst="rect">
+            <a:avLst/>
+          </a:prstGeom>
+          <a:noFill/>
+          <a:ln>
+            <a:noFill/>
+          </a:ln>
+        </p:spPr>
+      </p:pic>
+      <p:sp>
+        <p:nvSpPr>
+          <p:cNvPr id="98" name="Google Shape;98;p5">
+            <a:extLst>
+              <a:ext uri="{FF2B5EF4-FFF2-40B4-BE49-F238E27FC236}">
+                <a16:creationId xmlns:a16="http://schemas.microsoft.com/office/drawing/2014/main" id="{CF1380DA-0568-3714-99DF-1C8C31BCE89D}"/>
+              </a:ext>
+            </a:extLst>
+          </p:cNvPr>
+          <p:cNvSpPr/>
+          <p:nvPr/>
+        </p:nvSpPr>
+        <p:spPr>
+          <a:xfrm>
+            <a:off x="10225" y="4892025"/>
+            <a:ext cx="9144000" cy="251400"/>
+          </a:xfrm>
+          <a:prstGeom prst="rect">
+            <a:avLst/>
+          </a:prstGeom>
+          <a:solidFill>
+            <a:srgbClr val="C3FFFC"/>
+          </a:solidFill>
+          <a:ln>
+            <a:noFill/>
+          </a:ln>
+        </p:spPr>
+        <p:txBody>
+          <a:bodyPr spcFirstLastPara="1" wrap="square" lIns="91425" tIns="91425" rIns="91425" bIns="91425" anchor="ctr" anchorCtr="0">
+            <a:noAutofit/>
+          </a:bodyPr>
+          <a:lstStyle/>
+          <a:p>
+            <a:pPr marL="0" marR="0" lvl="0" indent="0" algn="l" rtl="0">
+              <a:lnSpc>
+                <a:spcPct val="100000"/>
+              </a:lnSpc>
+              <a:spcBef>
+                <a:spcPts val="0"/>
+              </a:spcBef>
+              <a:spcAft>
+                <a:spcPts val="0"/>
+              </a:spcAft>
+              <a:buClr>
+                <a:srgbClr val="000000"/>
+              </a:buClr>
+              <a:buSzPts val="1400"/>
+              <a:buFont typeface="Arial"/>
+              <a:buNone/>
+            </a:pPr>
+            <a:endParaRPr sz="1400" b="0" i="0" u="none" strike="noStrike" cap="none">
+              <a:solidFill>
+                <a:srgbClr val="000000"/>
+              </a:solidFill>
+              <a:latin typeface="Arial"/>
+              <a:ea typeface="Arial"/>
+              <a:cs typeface="Arial"/>
+              <a:sym typeface="Arial"/>
+            </a:endParaRPr>
+          </a:p>
+        </p:txBody>
+      </p:sp>
+      <p:sp>
+        <p:nvSpPr>
+          <p:cNvPr id="4" name="Google Shape;181;p8">
+            <a:extLst>
+              <a:ext uri="{FF2B5EF4-FFF2-40B4-BE49-F238E27FC236}">
+                <a16:creationId xmlns:a16="http://schemas.microsoft.com/office/drawing/2014/main" id="{9EF8D937-D220-A74B-8191-12E681FE1A08}"/>
+              </a:ext>
+            </a:extLst>
+          </p:cNvPr>
+          <p:cNvSpPr txBox="1">
+            <a:spLocks noGrp="1"/>
+          </p:cNvSpPr>
+          <p:nvPr>
+            <p:ph type="body" idx="1"/>
+          </p:nvPr>
+        </p:nvSpPr>
+        <p:spPr>
+          <a:xfrm>
+            <a:off x="311700" y="1155049"/>
+            <a:ext cx="8520600" cy="3585142"/>
+          </a:xfrm>
+          <a:prstGeom prst="rect">
+            <a:avLst/>
+          </a:prstGeom>
+          <a:noFill/>
+          <a:ln>
+            <a:noFill/>
+          </a:ln>
+        </p:spPr>
+        <p:txBody>
+          <a:bodyPr spcFirstLastPara="1" wrap="square" lIns="91425" tIns="91425" rIns="91425" bIns="91425" anchor="t" anchorCtr="0">
+            <a:noAutofit/>
+          </a:bodyPr>
+          <a:lstStyle/>
+          <a:p>
+            <a:pPr marL="114300" lvl="0" indent="0">
+              <a:spcBef>
+                <a:spcPts val="1200"/>
+              </a:spcBef>
+              <a:buNone/>
+            </a:pPr>
+            <a:r>
+              <a:rPr lang="fr-FR" sz="1400" b="1" dirty="0"/>
+              <a:t>Lien </a:t>
+            </a:r>
+            <a:r>
+              <a:rPr lang="fr-FR" sz="1400" b="1" dirty="0" err="1"/>
+              <a:t>Github</a:t>
+            </a:r>
+            <a:r>
+              <a:rPr lang="fr-FR" sz="1400" b="1" dirty="0"/>
+              <a:t> : </a:t>
+            </a:r>
+            <a:r>
+              <a:rPr lang="fr-FR" sz="1400" dirty="0">
+                <a:hlinkClick r:id="rId4"/>
+              </a:rPr>
+              <a:t>https://github.com/Sheikoh/REnergies_efficiency_prediction.git</a:t>
+            </a:r>
+            <a:endParaRPr lang="fr-FR" sz="1400" dirty="0"/>
+          </a:p>
+          <a:p>
+            <a:pPr marL="114300" lvl="0" indent="0">
+              <a:spcBef>
+                <a:spcPts val="1200"/>
+              </a:spcBef>
+              <a:buNone/>
+            </a:pPr>
+            <a:r>
+              <a:rPr lang="fr-FR" sz="1400" b="1" dirty="0"/>
+              <a:t>Lien Dashboard : </a:t>
+            </a:r>
+            <a:r>
+              <a:rPr lang="fr-FR" sz="1400" dirty="0">
+                <a:hlinkClick r:id="rId5"/>
+              </a:rPr>
+              <a:t>https://renergies99-dashboard.hf.space/</a:t>
+            </a:r>
+            <a:endParaRPr lang="fr-FR" sz="1400" dirty="0"/>
+          </a:p>
+          <a:p>
+            <a:pPr marL="114300" lvl="0" indent="0">
+              <a:spcBef>
+                <a:spcPts val="1200"/>
+              </a:spcBef>
+              <a:buNone/>
+            </a:pPr>
+            <a:r>
+              <a:rPr lang="fr-FR" sz="1400" b="1" dirty="0"/>
+              <a:t>Lien </a:t>
+            </a:r>
+            <a:r>
+              <a:rPr lang="fr-FR" sz="1400" b="1" dirty="0" err="1"/>
+              <a:t>Mlflow</a:t>
+            </a:r>
+            <a:r>
+              <a:rPr lang="fr-FR" sz="1400" b="1" dirty="0"/>
+              <a:t> : </a:t>
+            </a:r>
+            <a:r>
+              <a:rPr lang="fr-FR" sz="1400" dirty="0">
+                <a:hlinkClick r:id="rId6"/>
+              </a:rPr>
+              <a:t>https://renergies99-mlflow.hf.space/</a:t>
+            </a:r>
+            <a:endParaRPr lang="fr-FR" sz="1400" dirty="0"/>
+          </a:p>
+          <a:p>
+            <a:pPr marL="114300" lvl="0" indent="0">
+              <a:spcBef>
+                <a:spcPts val="1200"/>
+              </a:spcBef>
+              <a:buNone/>
+            </a:pPr>
+            <a:r>
+              <a:rPr lang="fr-FR" sz="1400" b="1" dirty="0"/>
+              <a:t>Lien API : </a:t>
+            </a:r>
+            <a:r>
+              <a:rPr lang="fr-FR" sz="1400" dirty="0">
+                <a:hlinkClick r:id="rId7"/>
+              </a:rPr>
+              <a:t>https://renergies99-api-renergy.hf.space/</a:t>
+            </a:r>
+            <a:endParaRPr lang="fr-FR" sz="1400" dirty="0"/>
+          </a:p>
+          <a:p>
+            <a:pPr marL="114300" lvl="0" indent="0">
+              <a:buNone/>
+            </a:pPr>
+            <a:endParaRPr lang="fr-FR" sz="1400" dirty="0"/>
+          </a:p>
+          <a:p>
+            <a:pPr marL="114300" lvl="0" indent="0">
+              <a:buNone/>
+            </a:pPr>
+            <a:endParaRPr sz="1400" dirty="0"/>
+          </a:p>
+        </p:txBody>
+      </p:sp>
+    </p:spTree>
+    <p:extLst>
+      <p:ext uri="{BB962C8B-B14F-4D97-AF65-F5344CB8AC3E}">
+        <p14:creationId xmlns:p14="http://schemas.microsoft.com/office/powerpoint/2010/main" val="4088050223"/>
+      </p:ext>
+    </p:extLst>
+  </p:cSld>
+  <p:clrMapOvr>
+    <a:masterClrMapping/>
+  </p:clrMapOvr>
+</p:sld>
+</file>
+
+<file path=ppt/slides/slide18.xml><?xml version="1.0" encoding="utf-8"?>
+<p:sld xmlns:a="http://schemas.openxmlformats.org/drawingml/2006/main" xmlns:r="http://schemas.openxmlformats.org/officeDocument/2006/relationships" xmlns:p="http://schemas.openxmlformats.org/presentationml/2006/main">
+  <p:cSld>
+    <p:spTree>
+      <p:nvGrpSpPr>
+        <p:cNvPr id="1" name="Shape 95">
+          <a:extLst>
+            <a:ext uri="{FF2B5EF4-FFF2-40B4-BE49-F238E27FC236}">
+              <a16:creationId xmlns:a16="http://schemas.microsoft.com/office/drawing/2014/main" id="{54B39E8E-2AB4-298D-C3FD-3B563ED89E4A}"/>
+            </a:ext>
+          </a:extLst>
+        </p:cNvPr>
+        <p:cNvGrpSpPr/>
+        <p:nvPr/>
+      </p:nvGrpSpPr>
+      <p:grpSpPr>
+        <a:xfrm>
+          <a:off x="0" y="0"/>
+          <a:ext cx="0" cy="0"/>
+          <a:chOff x="0" y="0"/>
+          <a:chExt cx="0" cy="0"/>
+        </a:xfrm>
+      </p:grpSpPr>
+      <p:sp>
+        <p:nvSpPr>
+          <p:cNvPr id="96" name="Google Shape;96;p5">
+            <a:extLst>
+              <a:ext uri="{FF2B5EF4-FFF2-40B4-BE49-F238E27FC236}">
+                <a16:creationId xmlns:a16="http://schemas.microsoft.com/office/drawing/2014/main" id="{A01AE6FF-5294-F6EC-FB0D-D63D7D63D71C}"/>
+              </a:ext>
+            </a:extLst>
+          </p:cNvPr>
+          <p:cNvSpPr txBox="1">
+            <a:spLocks noGrp="1"/>
+          </p:cNvSpPr>
+          <p:nvPr>
+            <p:ph type="ctrTitle" idx="4294967295"/>
+          </p:nvPr>
+        </p:nvSpPr>
+        <p:spPr>
+          <a:xfrm>
+            <a:off x="1192664" y="403309"/>
+            <a:ext cx="5315100" cy="533100"/>
+          </a:xfrm>
+          <a:prstGeom prst="rect">
+            <a:avLst/>
+          </a:prstGeom>
+          <a:noFill/>
+          <a:ln>
+            <a:noFill/>
+          </a:ln>
+        </p:spPr>
+        <p:txBody>
+          <a:bodyPr spcFirstLastPara="1" wrap="square" lIns="91425" tIns="91425" rIns="91425" bIns="91425" anchor="t" anchorCtr="0">
+            <a:noAutofit/>
+          </a:bodyPr>
+          <a:lstStyle/>
+          <a:p>
+            <a:pPr marL="0" marR="0" lvl="0" indent="0" algn="l" rtl="0">
+              <a:lnSpc>
+                <a:spcPct val="100000"/>
+              </a:lnSpc>
+              <a:spcBef>
+                <a:spcPts val="0"/>
+              </a:spcBef>
+              <a:spcAft>
+                <a:spcPts val="0"/>
+              </a:spcAft>
+              <a:buClr>
+                <a:schemeClr val="dk1"/>
+              </a:buClr>
+              <a:buSzPts val="2800"/>
+              <a:buFont typeface="Arial"/>
+              <a:buNone/>
+            </a:pPr>
+            <a:r>
+              <a:rPr lang="it-IT" sz="2500" i="0" u="none" strike="noStrike" cap="none" dirty="0">
+                <a:solidFill>
+                  <a:srgbClr val="0E3449"/>
+                </a:solidFill>
+                <a:latin typeface="Inter SemiBold"/>
+                <a:ea typeface="Inter SemiBold"/>
+                <a:cs typeface="Inter SemiBold"/>
+                <a:sym typeface="Inter SemiBold"/>
+              </a:rPr>
+              <a:t>Sources de données</a:t>
+            </a:r>
+          </a:p>
+        </p:txBody>
+      </p:sp>
+      <p:pic>
+        <p:nvPicPr>
+          <p:cNvPr id="97" name="Google Shape;97;p5">
+            <a:extLst>
+              <a:ext uri="{FF2B5EF4-FFF2-40B4-BE49-F238E27FC236}">
+                <a16:creationId xmlns:a16="http://schemas.microsoft.com/office/drawing/2014/main" id="{7FFB1AFA-ABA9-029D-77BD-FB2682A2296B}"/>
+              </a:ext>
+            </a:extLst>
+          </p:cNvPr>
+          <p:cNvPicPr preferRelativeResize="0"/>
+          <p:nvPr/>
+        </p:nvPicPr>
+        <p:blipFill rotWithShape="1">
+          <a:blip r:embed="rId3">
+            <a:alphaModFix/>
+          </a:blip>
+          <a:srcRect/>
+          <a:stretch/>
+        </p:blipFill>
+        <p:spPr>
+          <a:xfrm>
+            <a:off x="463375" y="482852"/>
+            <a:ext cx="576900" cy="385904"/>
+          </a:xfrm>
+          <a:prstGeom prst="rect">
+            <a:avLst/>
+          </a:prstGeom>
+          <a:noFill/>
+          <a:ln>
+            <a:noFill/>
+          </a:ln>
+        </p:spPr>
+      </p:pic>
+      <p:sp>
+        <p:nvSpPr>
+          <p:cNvPr id="98" name="Google Shape;98;p5">
+            <a:extLst>
+              <a:ext uri="{FF2B5EF4-FFF2-40B4-BE49-F238E27FC236}">
+                <a16:creationId xmlns:a16="http://schemas.microsoft.com/office/drawing/2014/main" id="{33F93AD1-3891-482A-2CFB-204DAC688B8B}"/>
+              </a:ext>
+            </a:extLst>
+          </p:cNvPr>
+          <p:cNvSpPr/>
+          <p:nvPr/>
+        </p:nvSpPr>
+        <p:spPr>
+          <a:xfrm>
+            <a:off x="10225" y="4892025"/>
+            <a:ext cx="9144000" cy="251400"/>
+          </a:xfrm>
+          <a:prstGeom prst="rect">
+            <a:avLst/>
+          </a:prstGeom>
+          <a:solidFill>
+            <a:srgbClr val="C3FFFC"/>
+          </a:solidFill>
+          <a:ln>
+            <a:noFill/>
+          </a:ln>
+        </p:spPr>
+        <p:txBody>
+          <a:bodyPr spcFirstLastPara="1" wrap="square" lIns="91425" tIns="91425" rIns="91425" bIns="91425" anchor="ctr" anchorCtr="0">
+            <a:noAutofit/>
+          </a:bodyPr>
+          <a:lstStyle/>
+          <a:p>
+            <a:pPr marL="0" marR="0" lvl="0" indent="0" algn="l" rtl="0">
+              <a:lnSpc>
+                <a:spcPct val="100000"/>
+              </a:lnSpc>
+              <a:spcBef>
+                <a:spcPts val="0"/>
+              </a:spcBef>
+              <a:spcAft>
+                <a:spcPts val="0"/>
+              </a:spcAft>
+              <a:buClr>
+                <a:srgbClr val="000000"/>
+              </a:buClr>
+              <a:buSzPts val="1400"/>
+              <a:buFont typeface="Arial"/>
+              <a:buNone/>
+            </a:pPr>
+            <a:endParaRPr sz="1400" b="0" i="0" u="none" strike="noStrike" cap="none">
+              <a:solidFill>
+                <a:srgbClr val="000000"/>
+              </a:solidFill>
+              <a:latin typeface="Arial"/>
+              <a:ea typeface="Arial"/>
+              <a:cs typeface="Arial"/>
+              <a:sym typeface="Arial"/>
+            </a:endParaRPr>
+          </a:p>
+        </p:txBody>
+      </p:sp>
+      <p:graphicFrame>
+        <p:nvGraphicFramePr>
+          <p:cNvPr id="2" name="Tableau 1">
+            <a:extLst>
+              <a:ext uri="{FF2B5EF4-FFF2-40B4-BE49-F238E27FC236}">
+                <a16:creationId xmlns:a16="http://schemas.microsoft.com/office/drawing/2014/main" id="{1F110593-1E38-6872-65AA-F9F3DBB52889}"/>
+              </a:ext>
+            </a:extLst>
+          </p:cNvPr>
+          <p:cNvGraphicFramePr>
+            <a:graphicFrameLocks noGrp="1"/>
+          </p:cNvGraphicFramePr>
+          <p:nvPr>
+            <p:extLst>
+              <p:ext uri="{D42A27DB-BD31-4B8C-83A1-F6EECF244321}">
+                <p14:modId xmlns:p14="http://schemas.microsoft.com/office/powerpoint/2010/main" val="2643252541"/>
+              </p:ext>
+            </p:extLst>
+          </p:nvPr>
+        </p:nvGraphicFramePr>
+        <p:xfrm>
+          <a:off x="463375" y="1160010"/>
+          <a:ext cx="8283386" cy="2486560"/>
+        </p:xfrm>
+        <a:graphic>
+          <a:graphicData uri="http://schemas.openxmlformats.org/drawingml/2006/table">
+            <a:tbl>
+              <a:tblPr firstRow="1" bandRow="1">
+                <a:tableStyleId>{5C22544A-7EE6-4342-B048-85BDC9FD1C3A}</a:tableStyleId>
+              </a:tblPr>
+              <a:tblGrid>
+                <a:gridCol w="908225">
+                  <a:extLst>
+                    <a:ext uri="{9D8B030D-6E8A-4147-A177-3AD203B41FA5}">
+                      <a16:colId xmlns:a16="http://schemas.microsoft.com/office/drawing/2014/main" val="2306203329"/>
+                    </a:ext>
+                  </a:extLst>
+                </a:gridCol>
+                <a:gridCol w="3031958">
+                  <a:extLst>
+                    <a:ext uri="{9D8B030D-6E8A-4147-A177-3AD203B41FA5}">
+                      <a16:colId xmlns:a16="http://schemas.microsoft.com/office/drawing/2014/main" val="2541688145"/>
+                    </a:ext>
+                  </a:extLst>
+                </a:gridCol>
+                <a:gridCol w="2033256">
+                  <a:extLst>
+                    <a:ext uri="{9D8B030D-6E8A-4147-A177-3AD203B41FA5}">
+                      <a16:colId xmlns:a16="http://schemas.microsoft.com/office/drawing/2014/main" val="3557785877"/>
+                    </a:ext>
+                  </a:extLst>
+                </a:gridCol>
+                <a:gridCol w="2309947">
+                  <a:extLst>
+                    <a:ext uri="{9D8B030D-6E8A-4147-A177-3AD203B41FA5}">
+                      <a16:colId xmlns:a16="http://schemas.microsoft.com/office/drawing/2014/main" val="3224508020"/>
+                    </a:ext>
+                  </a:extLst>
+                </a:gridCol>
+              </a:tblGrid>
+              <a:tr h="226137">
+                <a:tc>
+                  <a:txBody>
+                    <a:bodyPr/>
+                    <a:lstStyle/>
+                    <a:p>
+                      <a:r>
+                        <a:rPr lang="fr-FR" sz="1000"/>
+                        <a:t>Type</a:t>
+                      </a:r>
+                    </a:p>
+                  </a:txBody>
+                  <a:tcPr/>
+                </a:tc>
+                <a:tc>
+                  <a:txBody>
+                    <a:bodyPr/>
+                    <a:lstStyle/>
+                    <a:p>
+                      <a:r>
+                        <a:rPr lang="fr-FR" sz="1000"/>
+                        <a:t>Description</a:t>
+                      </a:r>
+                    </a:p>
+                  </a:txBody>
+                  <a:tcPr/>
+                </a:tc>
+                <a:tc>
+                  <a:txBody>
+                    <a:bodyPr/>
+                    <a:lstStyle/>
+                    <a:p>
+                      <a:r>
+                        <a:rPr lang="fr-FR" sz="1000" dirty="0"/>
+                        <a:t>Commentaires</a:t>
+                      </a:r>
+                    </a:p>
+                  </a:txBody>
+                  <a:tcPr/>
+                </a:tc>
+                <a:tc>
+                  <a:txBody>
+                    <a:bodyPr/>
+                    <a:lstStyle/>
+                    <a:p>
+                      <a:r>
+                        <a:rPr lang="fr-FR" sz="1000"/>
+                        <a:t>Lien</a:t>
+                      </a:r>
+                    </a:p>
+                  </a:txBody>
+                  <a:tcPr/>
+                </a:tc>
+                <a:extLst>
+                  <a:ext uri="{0D108BD9-81ED-4DB2-BD59-A6C34878D82A}">
+                    <a16:rowId xmlns:a16="http://schemas.microsoft.com/office/drawing/2014/main" val="1404536746"/>
+                  </a:ext>
+                </a:extLst>
+              </a:tr>
+              <a:tr h="476255">
+                <a:tc>
+                  <a:txBody>
+                    <a:bodyPr/>
+                    <a:lstStyle/>
+                    <a:p>
+                      <a:r>
+                        <a:rPr lang="fr-FR" sz="800" dirty="0" err="1"/>
+                        <a:t>Dataset</a:t>
+                      </a:r>
+                      <a:endParaRPr lang="fr-FR" sz="800" dirty="0"/>
+                    </a:p>
+                  </a:txBody>
+                  <a:tcPr anchor="ctr"/>
+                </a:tc>
+                <a:tc>
+                  <a:txBody>
+                    <a:bodyPr/>
+                    <a:lstStyle/>
+                    <a:p>
+                      <a:r>
+                        <a:rPr lang="fr-FR" sz="900" b="1" dirty="0"/>
+                        <a:t>Données de production RTE</a:t>
+                      </a:r>
+                    </a:p>
+                  </a:txBody>
+                  <a:tcPr anchor="ctr"/>
+                </a:tc>
+                <a:tc>
+                  <a:txBody>
+                    <a:bodyPr/>
+                    <a:lstStyle/>
+                    <a:p>
+                      <a:r>
+                        <a:rPr lang="fr-FR" sz="900" dirty="0"/>
+                        <a:t>National : historique sur 14 ans</a:t>
+                      </a:r>
+                    </a:p>
+                    <a:p>
+                      <a:r>
+                        <a:rPr lang="fr-FR" sz="900" dirty="0"/>
+                        <a:t>Régional : historique sur 5 ans</a:t>
+                      </a:r>
+                    </a:p>
+                  </a:txBody>
+                  <a:tcPr anchor="ctr"/>
+                </a:tc>
+                <a:tc>
+                  <a:txBody>
+                    <a:bodyPr/>
+                    <a:lstStyle/>
+                    <a:p>
+                      <a:r>
+                        <a:rPr lang="fr-FR" sz="700" dirty="0">
+                          <a:hlinkClick r:id="rId4"/>
+                        </a:rPr>
+                        <a:t>https://www.rte-france.com/donnees-publications/eco2mix-donnees-temps-reel/telecharger-indicateurs</a:t>
+                      </a:r>
+                      <a:endParaRPr lang="fr-FR" sz="700" dirty="0"/>
+                    </a:p>
+                  </a:txBody>
+                  <a:tcPr anchor="ctr"/>
+                </a:tc>
+                <a:extLst>
+                  <a:ext uri="{0D108BD9-81ED-4DB2-BD59-A6C34878D82A}">
+                    <a16:rowId xmlns:a16="http://schemas.microsoft.com/office/drawing/2014/main" val="594868334"/>
+                  </a:ext>
+                </a:extLst>
+              </a:tr>
+              <a:tr h="476255">
+                <a:tc>
+                  <a:txBody>
+                    <a:bodyPr/>
+                    <a:lstStyle/>
+                    <a:p>
+                      <a:pPr marL="0" marR="0" lvl="0" indent="0" algn="l" defTabSz="914400" rtl="0" eaLnBrk="1" fontAlgn="auto" latinLnBrk="0" hangingPunct="1">
+                        <a:lnSpc>
+                          <a:spcPct val="100000"/>
+                        </a:lnSpc>
+                        <a:spcBef>
+                          <a:spcPts val="0"/>
+                        </a:spcBef>
+                        <a:spcAft>
+                          <a:spcPts val="0"/>
+                        </a:spcAft>
+                        <a:buClr>
+                          <a:srgbClr val="000000"/>
+                        </a:buClr>
+                        <a:buSzTx/>
+                        <a:buFont typeface="Arial"/>
+                        <a:buNone/>
+                        <a:tabLst/>
+                        <a:defRPr/>
+                      </a:pPr>
+                      <a:r>
+                        <a:rPr lang="fr-FR" sz="800" dirty="0" err="1"/>
+                        <a:t>Dataset</a:t>
+                      </a:r>
+                      <a:endParaRPr lang="fr-FR" sz="800" dirty="0"/>
+                    </a:p>
+                  </a:txBody>
+                  <a:tcPr anchor="ctr"/>
+                </a:tc>
+                <a:tc>
+                  <a:txBody>
+                    <a:bodyPr/>
+                    <a:lstStyle/>
+                    <a:p>
+                      <a:r>
+                        <a:rPr lang="fr-FR" sz="900" b="1" i="0" u="none" strike="noStrike" cap="none" dirty="0">
+                          <a:solidFill>
+                            <a:schemeClr val="dk1"/>
+                          </a:solidFill>
+                          <a:latin typeface="+mn-lt"/>
+                          <a:ea typeface="+mn-ea"/>
+                          <a:cs typeface="+mn-cs"/>
+                          <a:sym typeface="Arial"/>
+                        </a:rPr>
+                        <a:t>Imagerie satellite Landsat</a:t>
+                      </a:r>
+                    </a:p>
+                  </a:txBody>
+                  <a:tcPr anchor="ctr"/>
+                </a:tc>
+                <a:tc>
+                  <a:txBody>
+                    <a:bodyPr/>
+                    <a:lstStyle/>
+                    <a:p>
+                      <a:r>
+                        <a:rPr lang="fr-FR" sz="900" dirty="0"/>
+                        <a:t>Images satellites et métadonnées </a:t>
+                      </a:r>
+                    </a:p>
+                  </a:txBody>
+                  <a:tcPr anchor="ctr"/>
+                </a:tc>
+                <a:tc>
+                  <a:txBody>
+                    <a:bodyPr/>
+                    <a:lstStyle/>
+                    <a:p>
+                      <a:r>
+                        <a:rPr lang="fr-FR" sz="700" dirty="0">
+                          <a:hlinkClick r:id="rId5"/>
+                        </a:rPr>
+                        <a:t>https://code.usgs.gov/eros-user-services/accessing_landsat_data</a:t>
+                      </a:r>
+                      <a:endParaRPr lang="fr-FR" sz="700" dirty="0"/>
+                    </a:p>
+                  </a:txBody>
+                  <a:tcPr anchor="ctr"/>
+                </a:tc>
+                <a:extLst>
+                  <a:ext uri="{0D108BD9-81ED-4DB2-BD59-A6C34878D82A}">
+                    <a16:rowId xmlns:a16="http://schemas.microsoft.com/office/drawing/2014/main" val="506933637"/>
+                  </a:ext>
+                </a:extLst>
+              </a:tr>
+              <a:tr h="558690">
+                <a:tc>
+                  <a:txBody>
+                    <a:bodyPr/>
+                    <a:lstStyle/>
+                    <a:p>
+                      <a:pPr marL="0" marR="0" lvl="0" indent="0" algn="l" defTabSz="914400" rtl="0" eaLnBrk="1" fontAlgn="auto" latinLnBrk="0" hangingPunct="1">
+                        <a:lnSpc>
+                          <a:spcPct val="100000"/>
+                        </a:lnSpc>
+                        <a:spcBef>
+                          <a:spcPts val="0"/>
+                        </a:spcBef>
+                        <a:spcAft>
+                          <a:spcPts val="0"/>
+                        </a:spcAft>
+                        <a:buClr>
+                          <a:srgbClr val="000000"/>
+                        </a:buClr>
+                        <a:buSzTx/>
+                        <a:buFont typeface="Arial"/>
+                        <a:buNone/>
+                        <a:tabLst/>
+                        <a:defRPr/>
+                      </a:pPr>
+                      <a:r>
+                        <a:rPr lang="fr-FR" sz="800" dirty="0"/>
+                        <a:t>API</a:t>
+                      </a:r>
+                    </a:p>
+                  </a:txBody>
+                  <a:tcPr anchor="ctr"/>
+                </a:tc>
+                <a:tc>
+                  <a:txBody>
+                    <a:bodyPr/>
+                    <a:lstStyle/>
+                    <a:p>
+                      <a:pPr marL="0" marR="0" lvl="0" indent="0" algn="l" defTabSz="914400" rtl="0" eaLnBrk="1" fontAlgn="auto" latinLnBrk="0" hangingPunct="1">
+                        <a:lnSpc>
+                          <a:spcPct val="100000"/>
+                        </a:lnSpc>
+                        <a:spcBef>
+                          <a:spcPts val="0"/>
+                        </a:spcBef>
+                        <a:spcAft>
+                          <a:spcPts val="0"/>
+                        </a:spcAft>
+                        <a:buClr>
+                          <a:srgbClr val="000000"/>
+                        </a:buClr>
+                        <a:buSzTx/>
+                        <a:buFont typeface="Arial"/>
+                        <a:buNone/>
+                        <a:tabLst/>
+                        <a:defRPr/>
+                      </a:pPr>
+                      <a:r>
+                        <a:rPr lang="fr-FR" sz="900" b="1" dirty="0"/>
+                        <a:t>Données météo</a:t>
+                      </a:r>
+                    </a:p>
+                  </a:txBody>
+                  <a:tcPr anchor="ctr"/>
+                </a:tc>
+                <a:tc>
+                  <a:txBody>
+                    <a:bodyPr/>
+                    <a:lstStyle/>
+                    <a:p>
+                      <a:r>
+                        <a:rPr lang="fr-FR" sz="900" dirty="0"/>
+                        <a:t>Données historiques et données prédictives</a:t>
+                      </a:r>
+                    </a:p>
+                  </a:txBody>
+                  <a:tcPr anchor="ctr"/>
+                </a:tc>
+                <a:tc>
+                  <a:txBody>
+                    <a:bodyPr/>
+                    <a:lstStyle/>
+                    <a:p>
+                      <a:r>
+                        <a:rPr lang="fr-FR" sz="700" dirty="0">
+                          <a:hlinkClick r:id="rId6"/>
+                        </a:rPr>
+                        <a:t>https://openweathermap.org/api/one-call-3</a:t>
+                      </a:r>
+                      <a:endParaRPr lang="fr-FR" sz="700" dirty="0"/>
+                    </a:p>
+                  </a:txBody>
+                  <a:tcPr anchor="ctr"/>
+                </a:tc>
+                <a:extLst>
+                  <a:ext uri="{0D108BD9-81ED-4DB2-BD59-A6C34878D82A}">
+                    <a16:rowId xmlns:a16="http://schemas.microsoft.com/office/drawing/2014/main" val="2477866597"/>
+                  </a:ext>
+                </a:extLst>
+              </a:tr>
+              <a:tr h="558690">
+                <a:tc>
+                  <a:txBody>
+                    <a:bodyPr/>
+                    <a:lstStyle/>
+                    <a:p>
+                      <a:pPr marL="0" marR="0" lvl="0" indent="0" algn="l" defTabSz="914400" rtl="0" eaLnBrk="1" fontAlgn="auto" latinLnBrk="0" hangingPunct="1">
+                        <a:lnSpc>
+                          <a:spcPct val="100000"/>
+                        </a:lnSpc>
+                        <a:spcBef>
+                          <a:spcPts val="0"/>
+                        </a:spcBef>
+                        <a:spcAft>
+                          <a:spcPts val="0"/>
+                        </a:spcAft>
+                        <a:buClr>
+                          <a:srgbClr val="000000"/>
+                        </a:buClr>
+                        <a:buSzTx/>
+                        <a:buFont typeface="Arial"/>
+                        <a:buNone/>
+                        <a:tabLst/>
+                        <a:defRPr/>
+                      </a:pPr>
+                      <a:r>
+                        <a:rPr lang="fr-FR" sz="800" dirty="0" err="1"/>
+                        <a:t>Dataset</a:t>
+                      </a:r>
+                      <a:endParaRPr lang="fr-FR" sz="800" dirty="0"/>
+                    </a:p>
+                  </a:txBody>
+                  <a:tcPr anchor="ctr"/>
+                </a:tc>
+                <a:tc>
+                  <a:txBody>
+                    <a:bodyPr/>
+                    <a:lstStyle/>
+                    <a:p>
+                      <a:pPr marL="0" marR="0" lvl="0" indent="0" algn="l" defTabSz="914400" rtl="0" eaLnBrk="1" fontAlgn="auto" latinLnBrk="0" hangingPunct="1">
+                        <a:lnSpc>
+                          <a:spcPct val="100000"/>
+                        </a:lnSpc>
+                        <a:spcBef>
+                          <a:spcPts val="0"/>
+                        </a:spcBef>
+                        <a:spcAft>
+                          <a:spcPts val="0"/>
+                        </a:spcAft>
+                        <a:buClr>
+                          <a:srgbClr val="000000"/>
+                        </a:buClr>
+                        <a:buSzTx/>
+                        <a:buFont typeface="Arial"/>
+                        <a:buNone/>
+                        <a:tabLst/>
+                        <a:defRPr/>
+                      </a:pPr>
+                      <a:r>
+                        <a:rPr lang="fr-FR" sz="900" b="1" dirty="0"/>
+                        <a:t>Données activité solaire </a:t>
+                      </a:r>
+                    </a:p>
+                  </a:txBody>
+                  <a:tcPr anchor="ctr"/>
+                </a:tc>
+                <a:tc>
+                  <a:txBody>
+                    <a:bodyPr/>
+                    <a:lstStyle/>
+                    <a:p>
+                      <a:pPr marL="0" marR="0" lvl="0" indent="0" algn="l" defTabSz="914400" rtl="0" eaLnBrk="1" fontAlgn="auto" latinLnBrk="0" hangingPunct="1">
+                        <a:lnSpc>
+                          <a:spcPct val="100000"/>
+                        </a:lnSpc>
+                        <a:spcBef>
+                          <a:spcPts val="0"/>
+                        </a:spcBef>
+                        <a:spcAft>
+                          <a:spcPts val="0"/>
+                        </a:spcAft>
+                        <a:buClr>
+                          <a:srgbClr val="000000"/>
+                        </a:buClr>
+                        <a:buSzTx/>
+                        <a:buFont typeface="Arial"/>
+                        <a:buNone/>
+                        <a:tabLst/>
+                        <a:defRPr/>
+                      </a:pPr>
+                      <a:r>
+                        <a:rPr lang="fr-FR" sz="900" dirty="0"/>
+                        <a:t>Données historiques et données prédictives</a:t>
+                      </a:r>
+                    </a:p>
+                  </a:txBody>
+                  <a:tcPr anchor="ctr"/>
+                </a:tc>
+                <a:tc>
+                  <a:txBody>
+                    <a:bodyPr/>
+                    <a:lstStyle/>
+                    <a:p>
+                      <a:r>
+                        <a:rPr lang="fr-FR" sz="700" dirty="0">
+                          <a:hlinkClick r:id="rId7"/>
+                        </a:rPr>
+                        <a:t>https://www.ngdc.noaa.gov/stp/space-weather/swpc-products/daily_reports/solar_geophysical_activity_summaries/</a:t>
+                      </a:r>
+                      <a:endParaRPr lang="fr-FR" sz="700" dirty="0"/>
+                    </a:p>
+                    <a:p>
+                      <a:endParaRPr lang="fr-FR" sz="700" dirty="0"/>
+                    </a:p>
+                    <a:p>
+                      <a:r>
+                        <a:rPr lang="fr-FR" sz="700" dirty="0">
+                          <a:hlinkClick r:id="rId8"/>
+                        </a:rPr>
+                        <a:t>https://www.ngdc.noaa.gov/stp/space-weather/swpc-products/daily_reports/daypre/</a:t>
+                      </a:r>
+                      <a:endParaRPr lang="fr-FR" sz="700" dirty="0"/>
+                    </a:p>
+                  </a:txBody>
+                  <a:tcPr anchor="ctr"/>
+                </a:tc>
+                <a:extLst>
+                  <a:ext uri="{0D108BD9-81ED-4DB2-BD59-A6C34878D82A}">
+                    <a16:rowId xmlns:a16="http://schemas.microsoft.com/office/drawing/2014/main" val="2084688575"/>
+                  </a:ext>
+                </a:extLst>
+              </a:tr>
+            </a:tbl>
+          </a:graphicData>
+        </a:graphic>
+      </p:graphicFrame>
+    </p:spTree>
+    <p:extLst>
+      <p:ext uri="{BB962C8B-B14F-4D97-AF65-F5344CB8AC3E}">
+        <p14:creationId xmlns:p14="http://schemas.microsoft.com/office/powerpoint/2010/main" val="4010613788"/>
       </p:ext>
     </p:extLst>
   </p:cSld>

--- a/presentation/dsfs_ft_36_Projet_REnergies_efficiency_prediction.pptx
+++ b/presentation/dsfs_ft_36_Projet_REnergies_efficiency_prediction.pptx
@@ -6,7 +6,7 @@
     <p:sldMasterId id="2147483660" r:id="rId2"/>
   </p:sldMasterIdLst>
   <p:notesMasterIdLst>
-    <p:notesMasterId r:id="rId21"/>
+    <p:notesMasterId r:id="rId22"/>
   </p:notesMasterIdLst>
   <p:sldIdLst>
     <p:sldId id="256" r:id="rId3"/>
@@ -21,36 +21,37 @@
     <p:sldId id="291" r:id="rId12"/>
     <p:sldId id="297" r:id="rId13"/>
     <p:sldId id="292" r:id="rId14"/>
-    <p:sldId id="271" r:id="rId15"/>
-    <p:sldId id="273" r:id="rId16"/>
-    <p:sldId id="295" r:id="rId17"/>
-    <p:sldId id="296" r:id="rId18"/>
-    <p:sldId id="275" r:id="rId19"/>
-    <p:sldId id="294" r:id="rId20"/>
+    <p:sldId id="298" r:id="rId15"/>
+    <p:sldId id="271" r:id="rId16"/>
+    <p:sldId id="273" r:id="rId17"/>
+    <p:sldId id="295" r:id="rId18"/>
+    <p:sldId id="296" r:id="rId19"/>
+    <p:sldId id="275" r:id="rId20"/>
+    <p:sldId id="294" r:id="rId21"/>
   </p:sldIdLst>
   <p:sldSz cx="9144000" cy="5143500" type="screen16x9"/>
   <p:notesSz cx="6858000" cy="9144000"/>
   <p:embeddedFontLst>
     <p:embeddedFont>
       <p:font typeface="Inter" panose="020B0604020202020204" charset="0"/>
-      <p:regular r:id="rId22"/>
-      <p:bold r:id="rId23"/>
-      <p:italic r:id="rId24"/>
-      <p:boldItalic r:id="rId25"/>
+      <p:regular r:id="rId23"/>
+      <p:bold r:id="rId24"/>
+      <p:italic r:id="rId25"/>
+      <p:boldItalic r:id="rId26"/>
     </p:embeddedFont>
     <p:embeddedFont>
       <p:font typeface="Inter Medium" panose="020B0604020202020204" charset="0"/>
-      <p:regular r:id="rId26"/>
-      <p:bold r:id="rId27"/>
-      <p:italic r:id="rId28"/>
-      <p:boldItalic r:id="rId29"/>
+      <p:regular r:id="rId27"/>
+      <p:bold r:id="rId28"/>
+      <p:italic r:id="rId29"/>
+      <p:boldItalic r:id="rId30"/>
     </p:embeddedFont>
     <p:embeddedFont>
       <p:font typeface="Inter SemiBold" panose="020B0604020202020204" charset="0"/>
-      <p:regular r:id="rId30"/>
-      <p:bold r:id="rId31"/>
-      <p:italic r:id="rId32"/>
-      <p:boldItalic r:id="rId33"/>
+      <p:regular r:id="rId31"/>
+      <p:bold r:id="rId32"/>
+      <p:italic r:id="rId33"/>
+      <p:boldItalic r:id="rId34"/>
     </p:embeddedFont>
   </p:embeddedFontLst>
   <p:defaultTextStyle>
@@ -293,7 +294,7 @@
 <file path=ppt/revisionInfo.xml><?xml version="1.0" encoding="utf-8"?>
 <p1510:revInfo xmlns:a="http://schemas.openxmlformats.org/drawingml/2006/main" xmlns:r="http://schemas.openxmlformats.org/officeDocument/2006/relationships" xmlns:p1510="http://schemas.microsoft.com/office/powerpoint/2015/10/main">
   <p1510:revLst>
-    <p1510:client id="{2EB72A00-7F79-4813-B4C2-C6564860F3F6}" v="2872" dt="2025-11-25T08:53:15.397"/>
+    <p1510:client id="{2EB72A00-7F79-4813-B4C2-C6564860F3F6}" v="2919" dt="2025-11-25T09:56:49.003"/>
   </p1510:revLst>
 </p1510:revInfo>
 </file>
@@ -302,8 +303,8 @@
 <pc:chgInfo xmlns:a="http://schemas.openxmlformats.org/drawingml/2006/main" xmlns:r="http://schemas.openxmlformats.org/officeDocument/2006/relationships" xmlns:ac="http://schemas.microsoft.com/office/drawing/2013/main/command" xmlns:pc="http://schemas.microsoft.com/office/powerpoint/2013/main/command">
   <pc:docChgLst>
     <pc:chgData name="Jean-Yves Vuillequez" userId="e7fac481abea6bd0" providerId="LiveId" clId="{79E365E8-22BC-4EC2-9606-9A9AC6CD1D22}"/>
-    <pc:docChg chg="undo custSel addSld delSld modSld sldOrd">
-      <pc:chgData name="Jean-Yves Vuillequez" userId="e7fac481abea6bd0" providerId="LiveId" clId="{79E365E8-22BC-4EC2-9606-9A9AC6CD1D22}" dt="2025-11-25T08:54:23.746" v="9534"/>
+    <pc:docChg chg="undo redo custSel addSld delSld modSld sldOrd">
+      <pc:chgData name="Jean-Yves Vuillequez" userId="e7fac481abea6bd0" providerId="LiveId" clId="{79E365E8-22BC-4EC2-9606-9A9AC6CD1D22}" dt="2025-11-25T09:56:49.003" v="9726"/>
       <pc:docMkLst>
         <pc:docMk/>
       </pc:docMkLst>
@@ -1627,7 +1628,7 @@
         </pc:picChg>
       </pc:sldChg>
       <pc:sldChg chg="addSp delSp modSp add mod ord modAnim">
-        <pc:chgData name="Jean-Yves Vuillequez" userId="e7fac481abea6bd0" providerId="LiveId" clId="{79E365E8-22BC-4EC2-9606-9A9AC6CD1D22}" dt="2025-11-24T15:42:47.576" v="9435" actId="1076"/>
+        <pc:chgData name="Jean-Yves Vuillequez" userId="e7fac481abea6bd0" providerId="LiveId" clId="{79E365E8-22BC-4EC2-9606-9A9AC6CD1D22}" dt="2025-11-25T09:33:18.885" v="9545"/>
         <pc:sldMkLst>
           <pc:docMk/>
           <pc:sldMk cId="3647836335" sldId="287"/>
@@ -1746,7 +1747,7 @@
         </pc:picChg>
       </pc:sldChg>
       <pc:sldChg chg="addSp delSp modSp add mod modAnim modNotesTx">
-        <pc:chgData name="Jean-Yves Vuillequez" userId="e7fac481abea6bd0" providerId="LiveId" clId="{79E365E8-22BC-4EC2-9606-9A9AC6CD1D22}" dt="2025-11-24T15:49:49.330" v="9475" actId="113"/>
+        <pc:chgData name="Jean-Yves Vuillequez" userId="e7fac481abea6bd0" providerId="LiveId" clId="{79E365E8-22BC-4EC2-9606-9A9AC6CD1D22}" dt="2025-11-25T09:56:49.003" v="9726"/>
         <pc:sldMkLst>
           <pc:docMk/>
           <pc:sldMk cId="2290935718" sldId="289"/>
@@ -1792,7 +1793,7 @@
           </ac:spMkLst>
         </pc:spChg>
         <pc:spChg chg="add mod">
-          <ac:chgData name="Jean-Yves Vuillequez" userId="e7fac481abea6bd0" providerId="LiveId" clId="{79E365E8-22BC-4EC2-9606-9A9AC6CD1D22}" dt="2025-11-24T15:49:49.330" v="9475" actId="113"/>
+          <ac:chgData name="Jean-Yves Vuillequez" userId="e7fac481abea6bd0" providerId="LiveId" clId="{79E365E8-22BC-4EC2-9606-9A9AC6CD1D22}" dt="2025-11-25T09:55:44.740" v="9709" actId="20577"/>
           <ac:spMkLst>
             <pc:docMk/>
             <pc:sldMk cId="2290935718" sldId="289"/>
@@ -1815,6 +1816,22 @@
             <ac:spMk id="178" creationId="{834EF362-0DAC-26BA-DE49-3126B33E851C}"/>
           </ac:spMkLst>
         </pc:spChg>
+        <pc:picChg chg="add del mod">
+          <ac:chgData name="Jean-Yves Vuillequez" userId="e7fac481abea6bd0" providerId="LiveId" clId="{79E365E8-22BC-4EC2-9606-9A9AC6CD1D22}" dt="2025-11-25T09:55:33.394" v="9706" actId="21"/>
+          <ac:picMkLst>
+            <pc:docMk/>
+            <pc:sldMk cId="2290935718" sldId="289"/>
+            <ac:picMk id="4" creationId="{000A3F10-64A4-99A8-2113-EEBBDD6801ED}"/>
+          </ac:picMkLst>
+        </pc:picChg>
+        <pc:picChg chg="add mod">
+          <ac:chgData name="Jean-Yves Vuillequez" userId="e7fac481abea6bd0" providerId="LiveId" clId="{79E365E8-22BC-4EC2-9606-9A9AC6CD1D22}" dt="2025-11-25T09:55:35.312" v="9708"/>
+          <ac:picMkLst>
+            <pc:docMk/>
+            <pc:sldMk cId="2290935718" sldId="289"/>
+            <ac:picMk id="5" creationId="{000A3F10-64A4-99A8-2113-EEBBDD6801ED}"/>
+          </ac:picMkLst>
+        </pc:picChg>
         <pc:picChg chg="add del mod">
           <ac:chgData name="Jean-Yves Vuillequez" userId="e7fac481abea6bd0" providerId="LiveId" clId="{79E365E8-22BC-4EC2-9606-9A9AC6CD1D22}" dt="2025-11-24T09:17:46.771" v="7796" actId="478"/>
           <ac:picMkLst>
@@ -1839,12 +1856,20 @@
             <ac:picMk id="7" creationId="{5FE561E2-56B0-D6A0-F0B7-7F202EE51386}"/>
           </ac:picMkLst>
         </pc:picChg>
-        <pc:picChg chg="add mod">
-          <ac:chgData name="Jean-Yves Vuillequez" userId="e7fac481abea6bd0" providerId="LiveId" clId="{79E365E8-22BC-4EC2-9606-9A9AC6CD1D22}" dt="2025-11-24T14:15:26.350" v="8996" actId="1076"/>
+        <pc:picChg chg="add del mod">
+          <ac:chgData name="Jean-Yves Vuillequez" userId="e7fac481abea6bd0" providerId="LiveId" clId="{79E365E8-22BC-4EC2-9606-9A9AC6CD1D22}" dt="2025-11-25T09:56:47.735" v="9725" actId="478"/>
           <ac:picMkLst>
             <pc:docMk/>
             <pc:sldMk cId="2290935718" sldId="289"/>
             <ac:picMk id="7" creationId="{D843FCAE-84D8-B3E1-4B7A-0383F76C878B}"/>
+          </ac:picMkLst>
+        </pc:picChg>
+        <pc:picChg chg="add del mod">
+          <ac:chgData name="Jean-Yves Vuillequez" userId="e7fac481abea6bd0" providerId="LiveId" clId="{79E365E8-22BC-4EC2-9606-9A9AC6CD1D22}" dt="2025-11-25T09:56:28.999" v="9717" actId="478"/>
+          <ac:picMkLst>
+            <pc:docMk/>
+            <pc:sldMk cId="2290935718" sldId="289"/>
+            <ac:picMk id="8" creationId="{75BB14DA-0E1D-6252-77D5-F3B18DB8E908}"/>
           </ac:picMkLst>
         </pc:picChg>
         <pc:picChg chg="add del mod">
@@ -1855,8 +1880,8 @@
             <ac:picMk id="12" creationId="{7D6B0B43-8628-A21E-C82B-D058DBA5452A}"/>
           </ac:picMkLst>
         </pc:picChg>
-        <pc:picChg chg="add mod">
-          <ac:chgData name="Jean-Yves Vuillequez" userId="e7fac481abea6bd0" providerId="LiveId" clId="{79E365E8-22BC-4EC2-9606-9A9AC6CD1D22}" dt="2025-11-24T14:48:29.277" v="9172" actId="14100"/>
+        <pc:picChg chg="add del mod">
+          <ac:chgData name="Jean-Yves Vuillequez" userId="e7fac481abea6bd0" providerId="LiveId" clId="{79E365E8-22BC-4EC2-9606-9A9AC6CD1D22}" dt="2025-11-25T09:55:34.360" v="9707" actId="478"/>
           <ac:picMkLst>
             <pc:docMk/>
             <pc:sldMk cId="2290935718" sldId="289"/>
@@ -1869,6 +1894,22 @@
             <pc:docMk/>
             <pc:sldMk cId="2290935718" sldId="289"/>
             <ac:picMk id="14" creationId="{291A7323-DA08-B6B0-D55B-6BCFB1C0351B}"/>
+          </ac:picMkLst>
+        </pc:picChg>
+        <pc:picChg chg="add del mod">
+          <ac:chgData name="Jean-Yves Vuillequez" userId="e7fac481abea6bd0" providerId="LiveId" clId="{79E365E8-22BC-4EC2-9606-9A9AC6CD1D22}" dt="2025-11-25T09:56:46.881" v="9724" actId="21"/>
+          <ac:picMkLst>
+            <pc:docMk/>
+            <pc:sldMk cId="2290935718" sldId="289"/>
+            <ac:picMk id="14" creationId="{BC10BE04-1AA9-616C-9AB5-9507462BB970}"/>
+          </ac:picMkLst>
+        </pc:picChg>
+        <pc:picChg chg="add mod">
+          <ac:chgData name="Jean-Yves Vuillequez" userId="e7fac481abea6bd0" providerId="LiveId" clId="{79E365E8-22BC-4EC2-9606-9A9AC6CD1D22}" dt="2025-11-25T09:56:49.003" v="9726"/>
+          <ac:picMkLst>
+            <pc:docMk/>
+            <pc:sldMk cId="2290935718" sldId="289"/>
+            <ac:picMk id="15" creationId="{BC10BE04-1AA9-616C-9AB5-9507462BB970}"/>
           </ac:picMkLst>
         </pc:picChg>
       </pc:sldChg>
@@ -2056,13 +2097,13 @@
         </pc:cxnChg>
       </pc:sldChg>
       <pc:sldChg chg="addSp delSp modSp add mod ord delAnim modAnim modNotesTx">
-        <pc:chgData name="Jean-Yves Vuillequez" userId="e7fac481abea6bd0" providerId="LiveId" clId="{79E365E8-22BC-4EC2-9606-9A9AC6CD1D22}" dt="2025-11-24T15:04:25.227" v="9205" actId="113"/>
+        <pc:chgData name="Jean-Yves Vuillequez" userId="e7fac481abea6bd0" providerId="LiveId" clId="{79E365E8-22BC-4EC2-9606-9A9AC6CD1D22}" dt="2025-11-25T09:41:19.311" v="9574" actId="14100"/>
         <pc:sldMkLst>
           <pc:docMk/>
           <pc:sldMk cId="3315518580" sldId="292"/>
         </pc:sldMkLst>
         <pc:spChg chg="add mod">
-          <ac:chgData name="Jean-Yves Vuillequez" userId="e7fac481abea6bd0" providerId="LiveId" clId="{79E365E8-22BC-4EC2-9606-9A9AC6CD1D22}" dt="2025-11-21T14:03:47.959" v="6805" actId="14100"/>
+          <ac:chgData name="Jean-Yves Vuillequez" userId="e7fac481abea6bd0" providerId="LiveId" clId="{79E365E8-22BC-4EC2-9606-9A9AC6CD1D22}" dt="2025-11-25T09:41:19.311" v="9574" actId="14100"/>
           <ac:spMkLst>
             <pc:docMk/>
             <pc:sldMk cId="3315518580" sldId="292"/>
@@ -2070,7 +2111,7 @@
           </ac:spMkLst>
         </pc:spChg>
         <pc:spChg chg="add mod">
-          <ac:chgData name="Jean-Yves Vuillequez" userId="e7fac481abea6bd0" providerId="LiveId" clId="{79E365E8-22BC-4EC2-9606-9A9AC6CD1D22}" dt="2025-11-21T14:04:10.873" v="6846" actId="113"/>
+          <ac:chgData name="Jean-Yves Vuillequez" userId="e7fac481abea6bd0" providerId="LiveId" clId="{79E365E8-22BC-4EC2-9606-9A9AC6CD1D22}" dt="2025-11-25T09:41:18.557" v="9573" actId="1076"/>
           <ac:spMkLst>
             <pc:docMk/>
             <pc:sldMk cId="3315518580" sldId="292"/>
@@ -2078,7 +2119,7 @@
           </ac:spMkLst>
         </pc:spChg>
         <pc:spChg chg="add mod">
-          <ac:chgData name="Jean-Yves Vuillequez" userId="e7fac481abea6bd0" providerId="LiveId" clId="{79E365E8-22BC-4EC2-9606-9A9AC6CD1D22}" dt="2025-11-24T15:04:25.227" v="9205" actId="113"/>
+          <ac:chgData name="Jean-Yves Vuillequez" userId="e7fac481abea6bd0" providerId="LiveId" clId="{79E365E8-22BC-4EC2-9606-9A9AC6CD1D22}" dt="2025-11-25T09:41:19.311" v="9574" actId="14100"/>
           <ac:spMkLst>
             <pc:docMk/>
             <pc:sldMk cId="3315518580" sldId="292"/>
@@ -2094,7 +2135,7 @@
           </ac:spMkLst>
         </pc:spChg>
         <pc:spChg chg="mod topLvl">
-          <ac:chgData name="Jean-Yves Vuillequez" userId="e7fac481abea6bd0" providerId="LiveId" clId="{79E365E8-22BC-4EC2-9606-9A9AC6CD1D22}" dt="2025-11-20T15:12:24.584" v="3988" actId="478"/>
+          <ac:chgData name="Jean-Yves Vuillequez" userId="e7fac481abea6bd0" providerId="LiveId" clId="{79E365E8-22BC-4EC2-9606-9A9AC6CD1D22}" dt="2025-11-25T09:41:17.970" v="9572" actId="1076"/>
           <ac:spMkLst>
             <pc:docMk/>
             <pc:sldMk cId="3315518580" sldId="292"/>
@@ -2118,15 +2159,23 @@
           </ac:spMkLst>
         </pc:spChg>
         <pc:grpChg chg="add mod">
-          <ac:chgData name="Jean-Yves Vuillequez" userId="e7fac481abea6bd0" providerId="LiveId" clId="{79E365E8-22BC-4EC2-9606-9A9AC6CD1D22}" dt="2025-11-21T15:24:06.980" v="7159" actId="164"/>
+          <ac:chgData name="Jean-Yves Vuillequez" userId="e7fac481abea6bd0" providerId="LiveId" clId="{79E365E8-22BC-4EC2-9606-9A9AC6CD1D22}" dt="2025-11-25T09:41:17.970" v="9572" actId="1076"/>
           <ac:grpSpMkLst>
             <pc:docMk/>
             <pc:sldMk cId="3315518580" sldId="292"/>
             <ac:grpSpMk id="5" creationId="{F4E17C80-100B-9769-D624-90E0C0132394}"/>
           </ac:grpSpMkLst>
         </pc:grpChg>
+        <pc:picChg chg="add del mod">
+          <ac:chgData name="Jean-Yves Vuillequez" userId="e7fac481abea6bd0" providerId="LiveId" clId="{79E365E8-22BC-4EC2-9606-9A9AC6CD1D22}" dt="2025-11-25T09:41:16.373" v="9568"/>
+          <ac:picMkLst>
+            <pc:docMk/>
+            <pc:sldMk cId="3315518580" sldId="292"/>
+            <ac:picMk id="7" creationId="{E33D8126-FD17-736C-5FBC-B9AF511D26AF}"/>
+          </ac:picMkLst>
+        </pc:picChg>
         <pc:picChg chg="add mod">
-          <ac:chgData name="Jean-Yves Vuillequez" userId="e7fac481abea6bd0" providerId="LiveId" clId="{79E365E8-22BC-4EC2-9606-9A9AC6CD1D22}" dt="2025-11-20T15:12:42.291" v="3996" actId="1076"/>
+          <ac:chgData name="Jean-Yves Vuillequez" userId="e7fac481abea6bd0" providerId="LiveId" clId="{79E365E8-22BC-4EC2-9606-9A9AC6CD1D22}" dt="2025-11-25T09:41:17.970" v="9572" actId="1076"/>
           <ac:picMkLst>
             <pc:docMk/>
             <pc:sldMk cId="3315518580" sldId="292"/>
@@ -2135,7 +2184,7 @@
         </pc:picChg>
       </pc:sldChg>
       <pc:sldChg chg="addSp delSp modSp add mod modAnim">
-        <pc:chgData name="Jean-Yves Vuillequez" userId="e7fac481abea6bd0" providerId="LiveId" clId="{79E365E8-22BC-4EC2-9606-9A9AC6CD1D22}" dt="2025-11-20T20:39:03.631" v="5241"/>
+        <pc:chgData name="Jean-Yves Vuillequez" userId="e7fac481abea6bd0" providerId="LiveId" clId="{79E365E8-22BC-4EC2-9606-9A9AC6CD1D22}" dt="2025-11-25T09:47:24.190" v="9695" actId="1076"/>
         <pc:sldMkLst>
           <pc:docMk/>
           <pc:sldMk cId="1155304805" sldId="293"/>
@@ -2146,6 +2195,22 @@
             <pc:docMk/>
             <pc:sldMk cId="1155304805" sldId="293"/>
             <ac:spMk id="2" creationId="{1563EBE9-16C3-6238-4969-9E03C7CCE61D}"/>
+          </ac:spMkLst>
+        </pc:spChg>
+        <pc:spChg chg="add mod">
+          <ac:chgData name="Jean-Yves Vuillequez" userId="e7fac481abea6bd0" providerId="LiveId" clId="{79E365E8-22BC-4EC2-9606-9A9AC6CD1D22}" dt="2025-11-25T09:45:21.036" v="9692" actId="1076"/>
+          <ac:spMkLst>
+            <pc:docMk/>
+            <pc:sldMk cId="1155304805" sldId="293"/>
+            <ac:spMk id="3" creationId="{DEBF304F-77EB-BA94-CD84-BF91A9CC35D2}"/>
+          </ac:spMkLst>
+        </pc:spChg>
+        <pc:spChg chg="add mod">
+          <ac:chgData name="Jean-Yves Vuillequez" userId="e7fac481abea6bd0" providerId="LiveId" clId="{79E365E8-22BC-4EC2-9606-9A9AC6CD1D22}" dt="2025-11-25T09:44:58.571" v="9687"/>
+          <ac:spMkLst>
+            <pc:docMk/>
+            <pc:sldMk cId="1155304805" sldId="293"/>
+            <ac:spMk id="4" creationId="{1A25B44F-3D72-A752-04D6-8C3086471959}"/>
           </ac:spMkLst>
         </pc:spChg>
         <pc:spChg chg="mod">
@@ -2197,7 +2262,7 @@
           </ac:picMkLst>
         </pc:picChg>
         <pc:picChg chg="add mod">
-          <ac:chgData name="Jean-Yves Vuillequez" userId="e7fac481abea6bd0" providerId="LiveId" clId="{79E365E8-22BC-4EC2-9606-9A9AC6CD1D22}" dt="2025-11-20T13:23:14.504" v="3231" actId="1076"/>
+          <ac:chgData name="Jean-Yves Vuillequez" userId="e7fac481abea6bd0" providerId="LiveId" clId="{79E365E8-22BC-4EC2-9606-9A9AC6CD1D22}" dt="2025-11-25T09:47:17.251" v="9693" actId="14100"/>
           <ac:picMkLst>
             <pc:docMk/>
             <pc:sldMk cId="1155304805" sldId="293"/>
@@ -2205,7 +2270,7 @@
           </ac:picMkLst>
         </pc:picChg>
         <pc:picChg chg="add mod">
-          <ac:chgData name="Jean-Yves Vuillequez" userId="e7fac481abea6bd0" providerId="LiveId" clId="{79E365E8-22BC-4EC2-9606-9A9AC6CD1D22}" dt="2025-11-20T13:25:16.756" v="3238" actId="1076"/>
+          <ac:chgData name="Jean-Yves Vuillequez" userId="e7fac481abea6bd0" providerId="LiveId" clId="{79E365E8-22BC-4EC2-9606-9A9AC6CD1D22}" dt="2025-11-25T09:47:24.190" v="9695" actId="1076"/>
           <ac:picMkLst>
             <pc:docMk/>
             <pc:sldMk cId="1155304805" sldId="293"/>
@@ -2391,6 +2456,109 @@
           <pc:docMk/>
           <pc:sldMk cId="1637271805" sldId="297"/>
         </pc:sldMkLst>
+      </pc:sldChg>
+      <pc:sldChg chg="addSp delSp modSp add mod delAnim modAnim">
+        <pc:chgData name="Jean-Yves Vuillequez" userId="e7fac481abea6bd0" providerId="LiveId" clId="{79E365E8-22BC-4EC2-9606-9A9AC6CD1D22}" dt="2025-11-25T09:51:50.968" v="9700"/>
+        <pc:sldMkLst>
+          <pc:docMk/>
+          <pc:sldMk cId="1528976140" sldId="298"/>
+        </pc:sldMkLst>
+        <pc:spChg chg="del">
+          <ac:chgData name="Jean-Yves Vuillequez" userId="e7fac481abea6bd0" providerId="LiveId" clId="{79E365E8-22BC-4EC2-9606-9A9AC6CD1D22}" dt="2025-11-25T09:41:27.680" v="9576" actId="478"/>
+          <ac:spMkLst>
+            <pc:docMk/>
+            <pc:sldMk cId="1528976140" sldId="298"/>
+            <ac:spMk id="2" creationId="{533C9DFD-6E8E-88F1-7225-5C3975042C24}"/>
+          </ac:spMkLst>
+        </pc:spChg>
+        <pc:spChg chg="del">
+          <ac:chgData name="Jean-Yves Vuillequez" userId="e7fac481abea6bd0" providerId="LiveId" clId="{79E365E8-22BC-4EC2-9606-9A9AC6CD1D22}" dt="2025-11-25T09:41:27.680" v="9576" actId="478"/>
+          <ac:spMkLst>
+            <pc:docMk/>
+            <pc:sldMk cId="1528976140" sldId="298"/>
+            <ac:spMk id="3" creationId="{8785E37A-885C-D1C2-87DF-533478F56CB4}"/>
+          </ac:spMkLst>
+        </pc:spChg>
+        <pc:spChg chg="add mod">
+          <ac:chgData name="Jean-Yves Vuillequez" userId="e7fac481abea6bd0" providerId="LiveId" clId="{79E365E8-22BC-4EC2-9606-9A9AC6CD1D22}" dt="2025-11-25T09:41:48.200" v="9618" actId="20577"/>
+          <ac:spMkLst>
+            <pc:docMk/>
+            <pc:sldMk cId="1528976140" sldId="298"/>
+            <ac:spMk id="4" creationId="{B4652961-82E1-E9F1-B367-5278489897BB}"/>
+          </ac:spMkLst>
+        </pc:spChg>
+        <pc:spChg chg="del">
+          <ac:chgData name="Jean-Yves Vuillequez" userId="e7fac481abea6bd0" providerId="LiveId" clId="{79E365E8-22BC-4EC2-9606-9A9AC6CD1D22}" dt="2025-11-25T09:41:27.680" v="9576" actId="478"/>
+          <ac:spMkLst>
+            <pc:docMk/>
+            <pc:sldMk cId="1528976140" sldId="298"/>
+            <ac:spMk id="6" creationId="{8794308E-6A49-D3F2-09A4-7DDEF1CE7AE5}"/>
+          </ac:spMkLst>
+        </pc:spChg>
+        <pc:spChg chg="del">
+          <ac:chgData name="Jean-Yves Vuillequez" userId="e7fac481abea6bd0" providerId="LiveId" clId="{79E365E8-22BC-4EC2-9606-9A9AC6CD1D22}" dt="2025-11-25T09:41:27.680" v="9576" actId="478"/>
+          <ac:spMkLst>
+            <pc:docMk/>
+            <pc:sldMk cId="1528976140" sldId="298"/>
+            <ac:spMk id="11" creationId="{4EA49E74-8FBD-25AE-94C8-C376AB937BEF}"/>
+          </ac:spMkLst>
+        </pc:spChg>
+        <pc:spChg chg="add mod">
+          <ac:chgData name="Jean-Yves Vuillequez" userId="e7fac481abea6bd0" providerId="LiveId" clId="{79E365E8-22BC-4EC2-9606-9A9AC6CD1D22}" dt="2025-11-25T09:43:46.651" v="9667" actId="1076"/>
+          <ac:spMkLst>
+            <pc:docMk/>
+            <pc:sldMk cId="1528976140" sldId="298"/>
+            <ac:spMk id="13" creationId="{A0C660C5-C6B4-4D60-632C-38AA341D4E42}"/>
+          </ac:spMkLst>
+        </pc:spChg>
+        <pc:spChg chg="add mod">
+          <ac:chgData name="Jean-Yves Vuillequez" userId="e7fac481abea6bd0" providerId="LiveId" clId="{79E365E8-22BC-4EC2-9606-9A9AC6CD1D22}" dt="2025-11-25T09:44:01.713" v="9686" actId="14100"/>
+          <ac:spMkLst>
+            <pc:docMk/>
+            <pc:sldMk cId="1528976140" sldId="298"/>
+            <ac:spMk id="15" creationId="{7B02442F-1F39-3A7F-A132-603CFB285A80}"/>
+          </ac:spMkLst>
+        </pc:spChg>
+        <pc:spChg chg="mod">
+          <ac:chgData name="Jean-Yves Vuillequez" userId="e7fac481abea6bd0" providerId="LiveId" clId="{79E365E8-22BC-4EC2-9606-9A9AC6CD1D22}" dt="2025-11-25T09:42:21.129" v="9640" actId="1076"/>
+          <ac:spMkLst>
+            <pc:docMk/>
+            <pc:sldMk cId="1528976140" sldId="298"/>
+            <ac:spMk id="71" creationId="{B282795F-CC32-9B21-2C73-46BD6A694971}"/>
+          </ac:spMkLst>
+        </pc:spChg>
+        <pc:grpChg chg="del">
+          <ac:chgData name="Jean-Yves Vuillequez" userId="e7fac481abea6bd0" providerId="LiveId" clId="{79E365E8-22BC-4EC2-9606-9A9AC6CD1D22}" dt="2025-11-25T09:41:27.680" v="9576" actId="478"/>
+          <ac:grpSpMkLst>
+            <pc:docMk/>
+            <pc:sldMk cId="1528976140" sldId="298"/>
+            <ac:grpSpMk id="5" creationId="{716D0D9E-884E-53FC-BF93-5F07B985ACC1}"/>
+          </ac:grpSpMkLst>
+        </pc:grpChg>
+        <pc:picChg chg="add mod ord">
+          <ac:chgData name="Jean-Yves Vuillequez" userId="e7fac481abea6bd0" providerId="LiveId" clId="{79E365E8-22BC-4EC2-9606-9A9AC6CD1D22}" dt="2025-11-25T09:51:43.823" v="9698" actId="1076"/>
+          <ac:picMkLst>
+            <pc:docMk/>
+            <pc:sldMk cId="1528976140" sldId="298"/>
+            <ac:picMk id="8" creationId="{36374721-DBF6-6DC3-7F02-E2A019B585B7}"/>
+          </ac:picMkLst>
+        </pc:picChg>
+        <pc:picChg chg="add mod">
+          <ac:chgData name="Jean-Yves Vuillequez" userId="e7fac481abea6bd0" providerId="LiveId" clId="{79E365E8-22BC-4EC2-9606-9A9AC6CD1D22}" dt="2025-11-25T09:43:08.174" v="9659" actId="1076"/>
+          <ac:picMkLst>
+            <pc:docMk/>
+            <pc:sldMk cId="1528976140" sldId="298"/>
+            <ac:picMk id="12" creationId="{D61A617B-D6B7-1A94-495F-DC4E854385A5}"/>
+          </ac:picMkLst>
+        </pc:picChg>
+        <pc:picChg chg="del">
+          <ac:chgData name="Jean-Yves Vuillequez" userId="e7fac481abea6bd0" providerId="LiveId" clId="{79E365E8-22BC-4EC2-9606-9A9AC6CD1D22}" dt="2025-11-25T09:41:27.680" v="9576" actId="478"/>
+          <ac:picMkLst>
+            <pc:docMk/>
+            <pc:sldMk cId="1528976140" sldId="298"/>
+            <ac:picMk id="14" creationId="{00FAD22A-9740-C05B-F72B-F96EA58B04F4}"/>
+          </ac:picMkLst>
+        </pc:picChg>
       </pc:sldChg>
     </pc:docChg>
   </pc:docChgLst>
@@ -3520,6 +3688,249 @@
   <p:cSld>
     <p:spTree>
       <p:nvGrpSpPr>
+        <p:cNvPr id="1" name="Shape 65">
+          <a:extLst>
+            <a:ext uri="{FF2B5EF4-FFF2-40B4-BE49-F238E27FC236}">
+              <a16:creationId xmlns:a16="http://schemas.microsoft.com/office/drawing/2014/main" id="{46888412-051D-A3DD-D553-7665D0C04847}"/>
+            </a:ext>
+          </a:extLst>
+        </p:cNvPr>
+        <p:cNvGrpSpPr/>
+        <p:nvPr/>
+      </p:nvGrpSpPr>
+      <p:grpSpPr>
+        <a:xfrm>
+          <a:off x="0" y="0"/>
+          <a:ext cx="0" cy="0"/>
+          <a:chOff x="0" y="0"/>
+          <a:chExt cx="0" cy="0"/>
+        </a:xfrm>
+      </p:grpSpPr>
+      <p:sp>
+        <p:nvSpPr>
+          <p:cNvPr id="66" name="Google Shape;66;p3:notes">
+            <a:extLst>
+              <a:ext uri="{FF2B5EF4-FFF2-40B4-BE49-F238E27FC236}">
+                <a16:creationId xmlns:a16="http://schemas.microsoft.com/office/drawing/2014/main" id="{26D0A05E-F9D6-869F-CEEA-413C0CB68668}"/>
+              </a:ext>
+            </a:extLst>
+          </p:cNvPr>
+          <p:cNvSpPr>
+            <a:spLocks noGrp="1" noRot="1" noChangeAspect="1"/>
+          </p:cNvSpPr>
+          <p:nvPr>
+            <p:ph type="sldImg" idx="2"/>
+          </p:nvPr>
+        </p:nvSpPr>
+        <p:spPr>
+          <a:xfrm>
+            <a:off x="381000" y="685800"/>
+            <a:ext cx="6096000" cy="3429000"/>
+          </a:xfrm>
+          <a:custGeom>
+            <a:avLst/>
+            <a:gdLst/>
+            <a:ahLst/>
+            <a:cxnLst/>
+            <a:rect l="l" t="t" r="r" b="b"/>
+            <a:pathLst>
+              <a:path w="120000" h="120000" extrusionOk="0">
+                <a:moveTo>
+                  <a:pt x="0" y="0"/>
+                </a:moveTo>
+                <a:lnTo>
+                  <a:pt x="120000" y="0"/>
+                </a:lnTo>
+                <a:lnTo>
+                  <a:pt x="120000" y="120000"/>
+                </a:lnTo>
+                <a:lnTo>
+                  <a:pt x="0" y="120000"/>
+                </a:lnTo>
+                <a:close/>
+              </a:path>
+            </a:pathLst>
+          </a:custGeom>
+          <a:noFill/>
+          <a:ln w="9525" cap="flat" cmpd="sng">
+            <a:solidFill>
+              <a:srgbClr val="000000"/>
+            </a:solidFill>
+            <a:prstDash val="solid"/>
+            <a:round/>
+            <a:headEnd type="none" w="sm" len="sm"/>
+            <a:tailEnd type="none" w="sm" len="sm"/>
+          </a:ln>
+        </p:spPr>
+      </p:sp>
+      <p:sp>
+        <p:nvSpPr>
+          <p:cNvPr id="67" name="Google Shape;67;p3:notes">
+            <a:extLst>
+              <a:ext uri="{FF2B5EF4-FFF2-40B4-BE49-F238E27FC236}">
+                <a16:creationId xmlns:a16="http://schemas.microsoft.com/office/drawing/2014/main" id="{8EF31D09-A55E-2754-61F7-B234B4AD781A}"/>
+              </a:ext>
+            </a:extLst>
+          </p:cNvPr>
+          <p:cNvSpPr txBox="1">
+            <a:spLocks noGrp="1"/>
+          </p:cNvSpPr>
+          <p:nvPr>
+            <p:ph type="body" idx="1"/>
+          </p:nvPr>
+        </p:nvSpPr>
+        <p:spPr>
+          <a:xfrm>
+            <a:off x="685800" y="4343400"/>
+            <a:ext cx="5486400" cy="4114800"/>
+          </a:xfrm>
+          <a:prstGeom prst="rect">
+            <a:avLst/>
+          </a:prstGeom>
+          <a:noFill/>
+          <a:ln>
+            <a:noFill/>
+          </a:ln>
+        </p:spPr>
+        <p:txBody>
+          <a:bodyPr spcFirstLastPara="1" wrap="square" lIns="91425" tIns="91425" rIns="91425" bIns="91425" anchor="t" anchorCtr="0">
+            <a:noAutofit/>
+          </a:bodyPr>
+          <a:lstStyle/>
+          <a:p>
+            <a:pPr marL="114300" indent="0">
+              <a:buNone/>
+            </a:pPr>
+            <a:r>
+              <a:rPr lang="fr-FR" sz="1100" b="1" dirty="0"/>
+              <a:t>Valeur immédiate :</a:t>
+            </a:r>
+          </a:p>
+          <a:p>
+            <a:pPr marL="114300" indent="0">
+              <a:buNone/>
+            </a:pPr>
+            <a:r>
+              <a:rPr lang="fr-FR" sz="1100" dirty="0"/>
+              <a:t>Visibilité sur 3 jours → meilleure planification.</a:t>
+            </a:r>
+          </a:p>
+          <a:p>
+            <a:pPr marL="114300" indent="0">
+              <a:buNone/>
+            </a:pPr>
+            <a:r>
+              <a:rPr lang="fr-FR" sz="1100" dirty="0"/>
+              <a:t>Anticipation des pics et baisses → réseau plus stable, délestage de l’hydro électrique au profit du solaire</a:t>
+            </a:r>
+          </a:p>
+          <a:p>
+            <a:pPr marL="114300" indent="0">
+              <a:buNone/>
+            </a:pPr>
+            <a:r>
+              <a:rPr lang="fr-FR" sz="1100" dirty="0"/>
+              <a:t>Lecture régionale fine → priorisation des investissements ??</a:t>
+            </a:r>
+          </a:p>
+          <a:p>
+            <a:pPr marL="114300" indent="0">
+              <a:buNone/>
+            </a:pPr>
+            <a:r>
+              <a:rPr lang="fr-FR" sz="1100" dirty="0"/>
+              <a:t>Outil d’aide à la décision clair et exploitable</a:t>
+            </a:r>
+          </a:p>
+          <a:p>
+            <a:endParaRPr lang="fr-FR" sz="1100" b="1" dirty="0"/>
+          </a:p>
+          <a:p>
+            <a:pPr marL="114300" indent="0">
+              <a:buNone/>
+            </a:pPr>
+            <a:r>
+              <a:rPr lang="fr-FR" sz="1100" b="1" dirty="0"/>
+              <a:t>Perspectives :</a:t>
+            </a:r>
+          </a:p>
+          <a:p>
+            <a:pPr marL="114300" indent="0">
+              <a:buNone/>
+            </a:pPr>
+            <a:r>
+              <a:rPr lang="fr-FR" sz="1100" dirty="0"/>
+              <a:t>Passage en temps réel</a:t>
+            </a:r>
+          </a:p>
+          <a:p>
+            <a:pPr marL="114300" indent="0">
+              <a:buNone/>
+            </a:pPr>
+            <a:r>
+              <a:rPr lang="fr-FR" sz="1100" dirty="0"/>
+              <a:t>Ajout de la prévision intra </a:t>
+            </a:r>
+            <a:r>
+              <a:rPr lang="fr-FR" sz="1100" dirty="0" err="1"/>
+              <a:t>day</a:t>
+            </a:r>
+            <a:r>
+              <a:rPr lang="fr-FR" sz="1100" dirty="0"/>
+              <a:t> (données de prod RTE disponibles à la demi heure)</a:t>
+            </a:r>
+          </a:p>
+          <a:p>
+            <a:pPr marL="114300" indent="0">
+              <a:buNone/>
+            </a:pPr>
+            <a:r>
+              <a:rPr lang="fr-FR" sz="1100" dirty="0"/>
+              <a:t>Enrichissement par données satellitaires</a:t>
+            </a:r>
+          </a:p>
+          <a:p>
+            <a:pPr marL="158750" indent="0">
+              <a:buNone/>
+            </a:pPr>
+            <a:endParaRPr lang="fr-FR" dirty="0"/>
+          </a:p>
+          <a:p>
+            <a:pPr marL="0" lvl="0" indent="0" algn="l" rtl="0">
+              <a:lnSpc>
+                <a:spcPct val="100000"/>
+              </a:lnSpc>
+              <a:spcBef>
+                <a:spcPts val="0"/>
+              </a:spcBef>
+              <a:spcAft>
+                <a:spcPts val="0"/>
+              </a:spcAft>
+              <a:buSzPts val="1100"/>
+              <a:buNone/>
+            </a:pPr>
+            <a:endParaRPr dirty="0"/>
+          </a:p>
+        </p:txBody>
+      </p:sp>
+    </p:spTree>
+    <p:extLst>
+      <p:ext uri="{BB962C8B-B14F-4D97-AF65-F5344CB8AC3E}">
+        <p14:creationId xmlns:p14="http://schemas.microsoft.com/office/powerpoint/2010/main" val="3763191641"/>
+      </p:ext>
+    </p:extLst>
+  </p:cSld>
+  <p:clrMapOvr>
+    <a:masterClrMapping/>
+  </p:clrMapOvr>
+</p:notes>
+</file>
+
+<file path=ppt/notesSlides/notesSlide14.xml><?xml version="1.0" encoding="utf-8"?>
+<p:notes xmlns:a="http://schemas.openxmlformats.org/drawingml/2006/main" xmlns:r="http://schemas.openxmlformats.org/officeDocument/2006/relationships" xmlns:p="http://schemas.openxmlformats.org/presentationml/2006/main" showMasterSp="0" showMasterPhAnim="0">
+  <p:cSld>
+    <p:spTree>
+      <p:nvGrpSpPr>
         <p:cNvPr id="1" name="Shape 183"/>
         <p:cNvGrpSpPr/>
         <p:nvPr/>
@@ -3637,7 +4048,7 @@
 </p:notes>
 </file>
 
-<file path=ppt/notesSlides/notesSlide14.xml><?xml version="1.0" encoding="utf-8"?>
+<file path=ppt/notesSlides/notesSlide15.xml><?xml version="1.0" encoding="utf-8"?>
 <p:notes xmlns:a="http://schemas.openxmlformats.org/drawingml/2006/main" xmlns:r="http://schemas.openxmlformats.org/officeDocument/2006/relationships" xmlns:p="http://schemas.openxmlformats.org/presentationml/2006/main" showMasterSp="0" showMasterPhAnim="0">
   <p:cSld>
     <p:spTree>
@@ -3764,7 +4175,7 @@
 </p:notes>
 </file>
 
-<file path=ppt/notesSlides/notesSlide15.xml><?xml version="1.0" encoding="utf-8"?>
+<file path=ppt/notesSlides/notesSlide16.xml><?xml version="1.0" encoding="utf-8"?>
 <p:notes xmlns:a="http://schemas.openxmlformats.org/drawingml/2006/main" xmlns:r="http://schemas.openxmlformats.org/officeDocument/2006/relationships" xmlns:p="http://schemas.openxmlformats.org/presentationml/2006/main" showMasterSp="0" showMasterPhAnim="0">
   <p:cSld>
     <p:spTree>
@@ -3909,7 +4320,7 @@
 </p:notes>
 </file>
 
-<file path=ppt/notesSlides/notesSlide16.xml><?xml version="1.0" encoding="utf-8"?>
+<file path=ppt/notesSlides/notesSlide17.xml><?xml version="1.0" encoding="utf-8"?>
 <p:notes xmlns:a="http://schemas.openxmlformats.org/drawingml/2006/main" xmlns:r="http://schemas.openxmlformats.org/officeDocument/2006/relationships" xmlns:p="http://schemas.openxmlformats.org/presentationml/2006/main" showMasterSp="0" showMasterPhAnim="0">
   <p:cSld>
     <p:spTree>
@@ -4054,7 +4465,7 @@
 </p:notes>
 </file>
 
-<file path=ppt/notesSlides/notesSlide17.xml><?xml version="1.0" encoding="utf-8"?>
+<file path=ppt/notesSlides/notesSlide18.xml><?xml version="1.0" encoding="utf-8"?>
 <p:notes xmlns:a="http://schemas.openxmlformats.org/drawingml/2006/main" xmlns:r="http://schemas.openxmlformats.org/officeDocument/2006/relationships" xmlns:p="http://schemas.openxmlformats.org/presentationml/2006/main" showMasterSp="0" showMasterPhAnim="0">
   <p:cSld>
     <p:spTree>
@@ -4199,7 +4610,7 @@
 </p:notes>
 </file>
 
-<file path=ppt/notesSlides/notesSlide18.xml><?xml version="1.0" encoding="utf-8"?>
+<file path=ppt/notesSlides/notesSlide19.xml><?xml version="1.0" encoding="utf-8"?>
 <p:notes xmlns:a="http://schemas.openxmlformats.org/drawingml/2006/main" xmlns:r="http://schemas.openxmlformats.org/officeDocument/2006/relationships" xmlns:p="http://schemas.openxmlformats.org/presentationml/2006/main" showMasterSp="0" showMasterPhAnim="0">
   <p:cSld>
     <p:spTree>
@@ -21337,6 +21748,854 @@
 <file path=ppt/slides/slide13.xml><?xml version="1.0" encoding="utf-8"?>
 <p:sld xmlns:a="http://schemas.openxmlformats.org/drawingml/2006/main" xmlns:r="http://schemas.openxmlformats.org/officeDocument/2006/relationships" xmlns:p="http://schemas.openxmlformats.org/presentationml/2006/main">
   <p:cSld>
+    <p:spTree>
+      <p:nvGrpSpPr>
+        <p:cNvPr id="1" name="Shape 68">
+          <a:extLst>
+            <a:ext uri="{FF2B5EF4-FFF2-40B4-BE49-F238E27FC236}">
+              <a16:creationId xmlns:a16="http://schemas.microsoft.com/office/drawing/2014/main" id="{FE12E16B-A392-6E24-A2D3-8948C24A757B}"/>
+            </a:ext>
+          </a:extLst>
+        </p:cNvPr>
+        <p:cNvGrpSpPr/>
+        <p:nvPr/>
+      </p:nvGrpSpPr>
+      <p:grpSpPr>
+        <a:xfrm>
+          <a:off x="0" y="0"/>
+          <a:ext cx="0" cy="0"/>
+          <a:chOff x="0" y="0"/>
+          <a:chExt cx="0" cy="0"/>
+        </a:xfrm>
+      </p:grpSpPr>
+      <p:pic>
+        <p:nvPicPr>
+          <p:cNvPr id="8" name="Image 7" descr="Une image contenant texte, capture d’écran, ligne, Tracé&#10;&#10;Le contenu généré par l’IA peut être incorrect.">
+            <a:extLst>
+              <a:ext uri="{FF2B5EF4-FFF2-40B4-BE49-F238E27FC236}">
+                <a16:creationId xmlns:a16="http://schemas.microsoft.com/office/drawing/2014/main" id="{36374721-DBF6-6DC3-7F02-E2A019B585B7}"/>
+              </a:ext>
+            </a:extLst>
+          </p:cNvPr>
+          <p:cNvPicPr>
+            <a:picLocks noChangeAspect="1"/>
+          </p:cNvPicPr>
+          <p:nvPr/>
+        </p:nvPicPr>
+        <p:blipFill>
+          <a:blip r:embed="rId3"/>
+          <a:stretch>
+            <a:fillRect/>
+          </a:stretch>
+        </p:blipFill>
+        <p:spPr>
+          <a:xfrm>
+            <a:off x="56562" y="1058637"/>
+            <a:ext cx="5976983" cy="2111572"/>
+          </a:xfrm>
+          <a:prstGeom prst="rect">
+            <a:avLst/>
+          </a:prstGeom>
+        </p:spPr>
+      </p:pic>
+      <p:sp>
+        <p:nvSpPr>
+          <p:cNvPr id="70" name="Google Shape;70;p3">
+            <a:extLst>
+              <a:ext uri="{FF2B5EF4-FFF2-40B4-BE49-F238E27FC236}">
+                <a16:creationId xmlns:a16="http://schemas.microsoft.com/office/drawing/2014/main" id="{9F6F2A3B-E718-0677-1AF3-47945BA37F79}"/>
+              </a:ext>
+            </a:extLst>
+          </p:cNvPr>
+          <p:cNvSpPr txBox="1">
+            <a:spLocks noGrp="1"/>
+          </p:cNvSpPr>
+          <p:nvPr>
+            <p:ph type="ctrTitle" idx="4294967295"/>
+          </p:nvPr>
+        </p:nvSpPr>
+        <p:spPr>
+          <a:xfrm>
+            <a:off x="1192664" y="403309"/>
+            <a:ext cx="5315100" cy="533100"/>
+          </a:xfrm>
+          <a:prstGeom prst="rect">
+            <a:avLst/>
+          </a:prstGeom>
+          <a:noFill/>
+          <a:ln>
+            <a:noFill/>
+          </a:ln>
+        </p:spPr>
+        <p:txBody>
+          <a:bodyPr spcFirstLastPara="1" wrap="square" lIns="91425" tIns="91425" rIns="91425" bIns="91425" anchor="t" anchorCtr="0">
+            <a:noAutofit/>
+          </a:bodyPr>
+          <a:lstStyle/>
+          <a:p>
+            <a:pPr marL="0" marR="0" lvl="0" indent="0" algn="l" rtl="0">
+              <a:lnSpc>
+                <a:spcPct val="100000"/>
+              </a:lnSpc>
+              <a:spcBef>
+                <a:spcPts val="0"/>
+              </a:spcBef>
+              <a:spcAft>
+                <a:spcPts val="0"/>
+              </a:spcAft>
+              <a:buClr>
+                <a:schemeClr val="dk1"/>
+              </a:buClr>
+              <a:buSzPts val="2800"/>
+              <a:buFont typeface="Arial"/>
+              <a:buNone/>
+            </a:pPr>
+            <a:r>
+              <a:rPr lang="fr-FR" sz="2500" i="0" u="none" strike="noStrike" cap="none" dirty="0">
+                <a:solidFill>
+                  <a:srgbClr val="0E3449"/>
+                </a:solidFill>
+                <a:latin typeface="Inter SemiBold"/>
+                <a:ea typeface="Inter SemiBold"/>
+                <a:cs typeface="Inter SemiBold"/>
+                <a:sym typeface="Inter SemiBold"/>
+              </a:rPr>
+              <a:t>Valeur ajoutée et perspectives</a:t>
+            </a:r>
+            <a:endParaRPr sz="2500" i="0" u="none" strike="noStrike" cap="none" dirty="0">
+              <a:solidFill>
+                <a:srgbClr val="0E3449"/>
+              </a:solidFill>
+              <a:latin typeface="Inter SemiBold"/>
+              <a:ea typeface="Inter SemiBold"/>
+              <a:cs typeface="Inter SemiBold"/>
+              <a:sym typeface="Inter SemiBold"/>
+            </a:endParaRPr>
+          </a:p>
+        </p:txBody>
+      </p:sp>
+      <p:sp>
+        <p:nvSpPr>
+          <p:cNvPr id="71" name="Google Shape;71;p3">
+            <a:extLst>
+              <a:ext uri="{FF2B5EF4-FFF2-40B4-BE49-F238E27FC236}">
+                <a16:creationId xmlns:a16="http://schemas.microsoft.com/office/drawing/2014/main" id="{B282795F-CC32-9B21-2C73-46BD6A694971}"/>
+              </a:ext>
+            </a:extLst>
+          </p:cNvPr>
+          <p:cNvSpPr/>
+          <p:nvPr/>
+        </p:nvSpPr>
+        <p:spPr>
+          <a:xfrm>
+            <a:off x="10225" y="4892025"/>
+            <a:ext cx="9144000" cy="251400"/>
+          </a:xfrm>
+          <a:prstGeom prst="rect">
+            <a:avLst/>
+          </a:prstGeom>
+          <a:solidFill>
+            <a:srgbClr val="C3FFFC"/>
+          </a:solidFill>
+          <a:ln>
+            <a:noFill/>
+          </a:ln>
+        </p:spPr>
+        <p:txBody>
+          <a:bodyPr spcFirstLastPara="1" wrap="square" lIns="91425" tIns="91425" rIns="91425" bIns="91425" anchor="ctr" anchorCtr="0">
+            <a:noAutofit/>
+          </a:bodyPr>
+          <a:lstStyle/>
+          <a:p>
+            <a:pPr marL="0" marR="0" lvl="0" indent="0" algn="l" rtl="0">
+              <a:lnSpc>
+                <a:spcPct val="100000"/>
+              </a:lnSpc>
+              <a:spcBef>
+                <a:spcPts val="0"/>
+              </a:spcBef>
+              <a:spcAft>
+                <a:spcPts val="0"/>
+              </a:spcAft>
+              <a:buClr>
+                <a:srgbClr val="000000"/>
+              </a:buClr>
+              <a:buSzPts val="1400"/>
+              <a:buFont typeface="Arial"/>
+              <a:buNone/>
+            </a:pPr>
+            <a:endParaRPr sz="1400" b="0" i="0" u="none" strike="noStrike" cap="none" dirty="0">
+              <a:solidFill>
+                <a:srgbClr val="000000"/>
+              </a:solidFill>
+              <a:latin typeface="Arial"/>
+              <a:ea typeface="Arial"/>
+              <a:cs typeface="Arial"/>
+              <a:sym typeface="Arial"/>
+            </a:endParaRPr>
+          </a:p>
+        </p:txBody>
+      </p:sp>
+      <p:pic>
+        <p:nvPicPr>
+          <p:cNvPr id="72" name="Google Shape;72;p3">
+            <a:extLst>
+              <a:ext uri="{FF2B5EF4-FFF2-40B4-BE49-F238E27FC236}">
+                <a16:creationId xmlns:a16="http://schemas.microsoft.com/office/drawing/2014/main" id="{D133BC4D-117A-A7BD-E1C1-78AEAF7CE4AC}"/>
+              </a:ext>
+            </a:extLst>
+          </p:cNvPr>
+          <p:cNvPicPr preferRelativeResize="0"/>
+          <p:nvPr/>
+        </p:nvPicPr>
+        <p:blipFill rotWithShape="1">
+          <a:blip r:embed="rId4">
+            <a:alphaModFix/>
+          </a:blip>
+          <a:srcRect/>
+          <a:stretch/>
+        </p:blipFill>
+        <p:spPr>
+          <a:xfrm>
+            <a:off x="463375" y="482852"/>
+            <a:ext cx="576900" cy="385904"/>
+          </a:xfrm>
+          <a:prstGeom prst="rect">
+            <a:avLst/>
+          </a:prstGeom>
+          <a:noFill/>
+          <a:ln>
+            <a:noFill/>
+          </a:ln>
+        </p:spPr>
+      </p:pic>
+      <p:sp>
+        <p:nvSpPr>
+          <p:cNvPr id="4" name="Google Shape;178;p8">
+            <a:extLst>
+              <a:ext uri="{FF2B5EF4-FFF2-40B4-BE49-F238E27FC236}">
+                <a16:creationId xmlns:a16="http://schemas.microsoft.com/office/drawing/2014/main" id="{B4652961-82E1-E9F1-B367-5278489897BB}"/>
+              </a:ext>
+            </a:extLst>
+          </p:cNvPr>
+          <p:cNvSpPr txBox="1">
+            <a:spLocks/>
+          </p:cNvSpPr>
+          <p:nvPr/>
+        </p:nvSpPr>
+        <p:spPr>
+          <a:xfrm>
+            <a:off x="1192664" y="779179"/>
+            <a:ext cx="5315100" cy="375870"/>
+          </a:xfrm>
+          <a:prstGeom prst="rect">
+            <a:avLst/>
+          </a:prstGeom>
+          <a:noFill/>
+          <a:ln>
+            <a:noFill/>
+          </a:ln>
+        </p:spPr>
+        <p:txBody>
+          <a:bodyPr spcFirstLastPara="1" wrap="square" lIns="91425" tIns="91425" rIns="91425" bIns="91425" anchor="t" anchorCtr="0">
+            <a:noAutofit/>
+          </a:bodyPr>
+          <a:lstStyle>
+            <a:defPPr marR="0" lvl="0" algn="l" rtl="0">
+              <a:lnSpc>
+                <a:spcPct val="100000"/>
+              </a:lnSpc>
+              <a:spcBef>
+                <a:spcPts val="0"/>
+              </a:spcBef>
+              <a:spcAft>
+                <a:spcPts val="0"/>
+              </a:spcAft>
+            </a:defPPr>
+            <a:lvl1pPr marR="0" lvl="0" algn="l" rtl="0">
+              <a:lnSpc>
+                <a:spcPct val="100000"/>
+              </a:lnSpc>
+              <a:spcBef>
+                <a:spcPts val="0"/>
+              </a:spcBef>
+              <a:spcAft>
+                <a:spcPts val="0"/>
+              </a:spcAft>
+              <a:buClr>
+                <a:schemeClr val="dk1"/>
+              </a:buClr>
+              <a:buSzPts val="2800"/>
+              <a:buFont typeface="Arial"/>
+              <a:buNone/>
+              <a:defRPr sz="2800" b="0" i="0" u="none" strike="noStrike" cap="none">
+                <a:solidFill>
+                  <a:schemeClr val="dk1"/>
+                </a:solidFill>
+                <a:latin typeface="Arial"/>
+                <a:ea typeface="Arial"/>
+                <a:cs typeface="Arial"/>
+                <a:sym typeface="Arial"/>
+              </a:defRPr>
+            </a:lvl1pPr>
+            <a:lvl2pPr marR="0" lvl="1" algn="l" rtl="0">
+              <a:lnSpc>
+                <a:spcPct val="100000"/>
+              </a:lnSpc>
+              <a:spcBef>
+                <a:spcPts val="0"/>
+              </a:spcBef>
+              <a:spcAft>
+                <a:spcPts val="0"/>
+              </a:spcAft>
+              <a:buClr>
+                <a:schemeClr val="dk1"/>
+              </a:buClr>
+              <a:buSzPts val="2800"/>
+              <a:buFont typeface="Arial"/>
+              <a:buNone/>
+              <a:defRPr sz="2800" b="0" i="0" u="none" strike="noStrike" cap="none">
+                <a:solidFill>
+                  <a:schemeClr val="dk1"/>
+                </a:solidFill>
+                <a:latin typeface="Arial"/>
+                <a:ea typeface="Arial"/>
+                <a:cs typeface="Arial"/>
+                <a:sym typeface="Arial"/>
+              </a:defRPr>
+            </a:lvl2pPr>
+            <a:lvl3pPr marR="0" lvl="2" algn="l" rtl="0">
+              <a:lnSpc>
+                <a:spcPct val="100000"/>
+              </a:lnSpc>
+              <a:spcBef>
+                <a:spcPts val="0"/>
+              </a:spcBef>
+              <a:spcAft>
+                <a:spcPts val="0"/>
+              </a:spcAft>
+              <a:buClr>
+                <a:schemeClr val="dk1"/>
+              </a:buClr>
+              <a:buSzPts val="2800"/>
+              <a:buFont typeface="Arial"/>
+              <a:buNone/>
+              <a:defRPr sz="2800" b="0" i="0" u="none" strike="noStrike" cap="none">
+                <a:solidFill>
+                  <a:schemeClr val="dk1"/>
+                </a:solidFill>
+                <a:latin typeface="Arial"/>
+                <a:ea typeface="Arial"/>
+                <a:cs typeface="Arial"/>
+                <a:sym typeface="Arial"/>
+              </a:defRPr>
+            </a:lvl3pPr>
+            <a:lvl4pPr marR="0" lvl="3" algn="l" rtl="0">
+              <a:lnSpc>
+                <a:spcPct val="100000"/>
+              </a:lnSpc>
+              <a:spcBef>
+                <a:spcPts val="0"/>
+              </a:spcBef>
+              <a:spcAft>
+                <a:spcPts val="0"/>
+              </a:spcAft>
+              <a:buClr>
+                <a:schemeClr val="dk1"/>
+              </a:buClr>
+              <a:buSzPts val="2800"/>
+              <a:buFont typeface="Arial"/>
+              <a:buNone/>
+              <a:defRPr sz="2800" b="0" i="0" u="none" strike="noStrike" cap="none">
+                <a:solidFill>
+                  <a:schemeClr val="dk1"/>
+                </a:solidFill>
+                <a:latin typeface="Arial"/>
+                <a:ea typeface="Arial"/>
+                <a:cs typeface="Arial"/>
+                <a:sym typeface="Arial"/>
+              </a:defRPr>
+            </a:lvl4pPr>
+            <a:lvl5pPr marR="0" lvl="4" algn="l" rtl="0">
+              <a:lnSpc>
+                <a:spcPct val="100000"/>
+              </a:lnSpc>
+              <a:spcBef>
+                <a:spcPts val="0"/>
+              </a:spcBef>
+              <a:spcAft>
+                <a:spcPts val="0"/>
+              </a:spcAft>
+              <a:buClr>
+                <a:schemeClr val="dk1"/>
+              </a:buClr>
+              <a:buSzPts val="2800"/>
+              <a:buFont typeface="Arial"/>
+              <a:buNone/>
+              <a:defRPr sz="2800" b="0" i="0" u="none" strike="noStrike" cap="none">
+                <a:solidFill>
+                  <a:schemeClr val="dk1"/>
+                </a:solidFill>
+                <a:latin typeface="Arial"/>
+                <a:ea typeface="Arial"/>
+                <a:cs typeface="Arial"/>
+                <a:sym typeface="Arial"/>
+              </a:defRPr>
+            </a:lvl5pPr>
+            <a:lvl6pPr marR="0" lvl="5" algn="l" rtl="0">
+              <a:lnSpc>
+                <a:spcPct val="100000"/>
+              </a:lnSpc>
+              <a:spcBef>
+                <a:spcPts val="0"/>
+              </a:spcBef>
+              <a:spcAft>
+                <a:spcPts val="0"/>
+              </a:spcAft>
+              <a:buClr>
+                <a:schemeClr val="dk1"/>
+              </a:buClr>
+              <a:buSzPts val="2800"/>
+              <a:buFont typeface="Arial"/>
+              <a:buNone/>
+              <a:defRPr sz="2800" b="0" i="0" u="none" strike="noStrike" cap="none">
+                <a:solidFill>
+                  <a:schemeClr val="dk1"/>
+                </a:solidFill>
+                <a:latin typeface="Arial"/>
+                <a:ea typeface="Arial"/>
+                <a:cs typeface="Arial"/>
+                <a:sym typeface="Arial"/>
+              </a:defRPr>
+            </a:lvl6pPr>
+            <a:lvl7pPr marR="0" lvl="6" algn="l" rtl="0">
+              <a:lnSpc>
+                <a:spcPct val="100000"/>
+              </a:lnSpc>
+              <a:spcBef>
+                <a:spcPts val="0"/>
+              </a:spcBef>
+              <a:spcAft>
+                <a:spcPts val="0"/>
+              </a:spcAft>
+              <a:buClr>
+                <a:schemeClr val="dk1"/>
+              </a:buClr>
+              <a:buSzPts val="2800"/>
+              <a:buFont typeface="Arial"/>
+              <a:buNone/>
+              <a:defRPr sz="2800" b="0" i="0" u="none" strike="noStrike" cap="none">
+                <a:solidFill>
+                  <a:schemeClr val="dk1"/>
+                </a:solidFill>
+                <a:latin typeface="Arial"/>
+                <a:ea typeface="Arial"/>
+                <a:cs typeface="Arial"/>
+                <a:sym typeface="Arial"/>
+              </a:defRPr>
+            </a:lvl7pPr>
+            <a:lvl8pPr marR="0" lvl="7" algn="l" rtl="0">
+              <a:lnSpc>
+                <a:spcPct val="100000"/>
+              </a:lnSpc>
+              <a:spcBef>
+                <a:spcPts val="0"/>
+              </a:spcBef>
+              <a:spcAft>
+                <a:spcPts val="0"/>
+              </a:spcAft>
+              <a:buClr>
+                <a:schemeClr val="dk1"/>
+              </a:buClr>
+              <a:buSzPts val="2800"/>
+              <a:buFont typeface="Arial"/>
+              <a:buNone/>
+              <a:defRPr sz="2800" b="0" i="0" u="none" strike="noStrike" cap="none">
+                <a:solidFill>
+                  <a:schemeClr val="dk1"/>
+                </a:solidFill>
+                <a:latin typeface="Arial"/>
+                <a:ea typeface="Arial"/>
+                <a:cs typeface="Arial"/>
+                <a:sym typeface="Arial"/>
+              </a:defRPr>
+            </a:lvl8pPr>
+            <a:lvl9pPr marR="0" lvl="8" algn="l" rtl="0">
+              <a:lnSpc>
+                <a:spcPct val="100000"/>
+              </a:lnSpc>
+              <a:spcBef>
+                <a:spcPts val="0"/>
+              </a:spcBef>
+              <a:spcAft>
+                <a:spcPts val="0"/>
+              </a:spcAft>
+              <a:buClr>
+                <a:schemeClr val="dk1"/>
+              </a:buClr>
+              <a:buSzPts val="2800"/>
+              <a:buFont typeface="Arial"/>
+              <a:buNone/>
+              <a:defRPr sz="2800" b="0" i="0" u="none" strike="noStrike" cap="none">
+                <a:solidFill>
+                  <a:schemeClr val="dk1"/>
+                </a:solidFill>
+                <a:latin typeface="Arial"/>
+                <a:ea typeface="Arial"/>
+                <a:cs typeface="Arial"/>
+                <a:sym typeface="Arial"/>
+              </a:defRPr>
+            </a:lvl9pPr>
+          </a:lstStyle>
+          <a:p>
+            <a:r>
+              <a:rPr lang="fr-FR" sz="1400" b="1" dirty="0">
+                <a:solidFill>
+                  <a:srgbClr val="0E3449"/>
+                </a:solidFill>
+                <a:latin typeface="Inter SemiBold"/>
+                <a:ea typeface="Inter SemiBold"/>
+                <a:sym typeface="Inter SemiBold"/>
+              </a:rPr>
+              <a:t>En cours : Amélioration du modèle</a:t>
+            </a:r>
+          </a:p>
+        </p:txBody>
+      </p:sp>
+      <p:pic>
+        <p:nvPicPr>
+          <p:cNvPr id="12" name="Image 11" descr="Une image contenant texte, capture d’écran, ligne, Tracé">
+            <a:extLst>
+              <a:ext uri="{FF2B5EF4-FFF2-40B4-BE49-F238E27FC236}">
+                <a16:creationId xmlns:a16="http://schemas.microsoft.com/office/drawing/2014/main" id="{D61A617B-D6B7-1A94-495F-DC4E854385A5}"/>
+              </a:ext>
+            </a:extLst>
+          </p:cNvPr>
+          <p:cNvPicPr>
+            <a:picLocks noChangeAspect="1"/>
+          </p:cNvPicPr>
+          <p:nvPr/>
+        </p:nvPicPr>
+        <p:blipFill>
+          <a:blip r:embed="rId5"/>
+          <a:stretch>
+            <a:fillRect/>
+          </a:stretch>
+        </p:blipFill>
+        <p:spPr>
+          <a:xfrm>
+            <a:off x="3431357" y="2917309"/>
+            <a:ext cx="5561813" cy="1974716"/>
+          </a:xfrm>
+          <a:prstGeom prst="rect">
+            <a:avLst/>
+          </a:prstGeom>
+        </p:spPr>
+      </p:pic>
+      <p:sp>
+        <p:nvSpPr>
+          <p:cNvPr id="13" name="Flèche : droite 12">
+            <a:extLst>
+              <a:ext uri="{FF2B5EF4-FFF2-40B4-BE49-F238E27FC236}">
+                <a16:creationId xmlns:a16="http://schemas.microsoft.com/office/drawing/2014/main" id="{A0C660C5-C6B4-4D60-632C-38AA341D4E42}"/>
+              </a:ext>
+            </a:extLst>
+          </p:cNvPr>
+          <p:cNvSpPr/>
+          <p:nvPr/>
+        </p:nvSpPr>
+        <p:spPr>
+          <a:xfrm flipH="1">
+            <a:off x="5962454" y="1835009"/>
+            <a:ext cx="1202174" cy="596535"/>
+          </a:xfrm>
+          <a:prstGeom prst="rightArrow">
+            <a:avLst/>
+          </a:prstGeom>
+          <a:solidFill>
+            <a:srgbClr val="FF0000"/>
+          </a:solidFill>
+          <a:ln>
+            <a:noFill/>
+          </a:ln>
+        </p:spPr>
+        <p:style>
+          <a:lnRef idx="2">
+            <a:schemeClr val="accent1">
+              <a:shade val="15000"/>
+            </a:schemeClr>
+          </a:lnRef>
+          <a:fillRef idx="1">
+            <a:schemeClr val="accent1"/>
+          </a:fillRef>
+          <a:effectRef idx="0">
+            <a:schemeClr val="accent1"/>
+          </a:effectRef>
+          <a:fontRef idx="minor">
+            <a:schemeClr val="lt1"/>
+          </a:fontRef>
+        </p:style>
+        <p:txBody>
+          <a:bodyPr rtlCol="0" anchor="ctr"/>
+          <a:lstStyle/>
+          <a:p>
+            <a:pPr algn="ctr"/>
+            <a:r>
+              <a:rPr lang="fr-FR" sz="1000" b="1" dirty="0"/>
+              <a:t>Amélioration du modèle</a:t>
+            </a:r>
+          </a:p>
+        </p:txBody>
+      </p:sp>
+      <p:sp>
+        <p:nvSpPr>
+          <p:cNvPr id="15" name="Flèche : droite 14">
+            <a:extLst>
+              <a:ext uri="{FF2B5EF4-FFF2-40B4-BE49-F238E27FC236}">
+                <a16:creationId xmlns:a16="http://schemas.microsoft.com/office/drawing/2014/main" id="{7B02442F-1F39-3A7F-A132-603CFB285A80}"/>
+              </a:ext>
+            </a:extLst>
+          </p:cNvPr>
+          <p:cNvSpPr/>
+          <p:nvPr/>
+        </p:nvSpPr>
+        <p:spPr>
+          <a:xfrm>
+            <a:off x="1956062" y="3539452"/>
+            <a:ext cx="1314240" cy="596535"/>
+          </a:xfrm>
+          <a:prstGeom prst="rightArrow">
+            <a:avLst/>
+          </a:prstGeom>
+          <a:solidFill>
+            <a:srgbClr val="FF0000"/>
+          </a:solidFill>
+          <a:ln>
+            <a:noFill/>
+          </a:ln>
+        </p:spPr>
+        <p:style>
+          <a:lnRef idx="2">
+            <a:schemeClr val="accent1">
+              <a:shade val="15000"/>
+            </a:schemeClr>
+          </a:lnRef>
+          <a:fillRef idx="1">
+            <a:schemeClr val="accent1"/>
+          </a:fillRef>
+          <a:effectRef idx="0">
+            <a:schemeClr val="accent1"/>
+          </a:effectRef>
+          <a:fontRef idx="minor">
+            <a:schemeClr val="lt1"/>
+          </a:fontRef>
+        </p:style>
+        <p:txBody>
+          <a:bodyPr rtlCol="0" anchor="ctr"/>
+          <a:lstStyle/>
+          <a:p>
+            <a:pPr algn="ctr"/>
+            <a:r>
+              <a:rPr lang="fr-FR" sz="1000" b="1" dirty="0"/>
+              <a:t>Généralisation</a:t>
+            </a:r>
+          </a:p>
+        </p:txBody>
+      </p:sp>
+    </p:spTree>
+    <p:extLst>
+      <p:ext uri="{BB962C8B-B14F-4D97-AF65-F5344CB8AC3E}">
+        <p14:creationId xmlns:p14="http://schemas.microsoft.com/office/powerpoint/2010/main" val="1528976140"/>
+      </p:ext>
+    </p:extLst>
+  </p:cSld>
+  <p:clrMapOvr>
+    <a:masterClrMapping/>
+  </p:clrMapOvr>
+  <p:timing>
+    <p:tnLst>
+      <p:par>
+        <p:cTn id="1" dur="indefinite" restart="never" nodeType="tmRoot">
+          <p:childTnLst>
+            <p:seq concurrent="1" nextAc="seek">
+              <p:cTn id="2" dur="indefinite" nodeType="mainSeq">
+                <p:childTnLst>
+                  <p:par>
+                    <p:cTn id="3" fill="hold">
+                      <p:stCondLst>
+                        <p:cond delay="indefinite"/>
+                      </p:stCondLst>
+                      <p:childTnLst>
+                        <p:par>
+                          <p:cTn id="4" fill="hold">
+                            <p:stCondLst>
+                              <p:cond delay="0"/>
+                            </p:stCondLst>
+                            <p:childTnLst>
+                              <p:par>
+                                <p:cTn id="5" presetID="1" presetClass="entr" presetSubtype="0" fill="hold" nodeType="clickEffect">
+                                  <p:stCondLst>
+                                    <p:cond delay="0"/>
+                                  </p:stCondLst>
+                                  <p:childTnLst>
+                                    <p:set>
+                                      <p:cBhvr>
+                                        <p:cTn id="6" dur="1" fill="hold">
+                                          <p:stCondLst>
+                                            <p:cond delay="0"/>
+                                          </p:stCondLst>
+                                        </p:cTn>
+                                        <p:tgtEl>
+                                          <p:spTgt spid="8"/>
+                                        </p:tgtEl>
+                                        <p:attrNameLst>
+                                          <p:attrName>style.visibility</p:attrName>
+                                        </p:attrNameLst>
+                                      </p:cBhvr>
+                                      <p:to>
+                                        <p:strVal val="visible"/>
+                                      </p:to>
+                                    </p:set>
+                                  </p:childTnLst>
+                                </p:cTn>
+                              </p:par>
+                              <p:par>
+                                <p:cTn id="7" presetID="1" presetClass="entr" presetSubtype="0" fill="hold" grpId="0" nodeType="withEffect">
+                                  <p:stCondLst>
+                                    <p:cond delay="0"/>
+                                  </p:stCondLst>
+                                  <p:childTnLst>
+                                    <p:set>
+                                      <p:cBhvr>
+                                        <p:cTn id="8" dur="1" fill="hold">
+                                          <p:stCondLst>
+                                            <p:cond delay="0"/>
+                                          </p:stCondLst>
+                                        </p:cTn>
+                                        <p:tgtEl>
+                                          <p:spTgt spid="13"/>
+                                        </p:tgtEl>
+                                        <p:attrNameLst>
+                                          <p:attrName>style.visibility</p:attrName>
+                                        </p:attrNameLst>
+                                      </p:cBhvr>
+                                      <p:to>
+                                        <p:strVal val="visible"/>
+                                      </p:to>
+                                    </p:set>
+                                  </p:childTnLst>
+                                </p:cTn>
+                              </p:par>
+                            </p:childTnLst>
+                          </p:cTn>
+                        </p:par>
+                      </p:childTnLst>
+                    </p:cTn>
+                  </p:par>
+                  <p:par>
+                    <p:cTn id="9" fill="hold">
+                      <p:stCondLst>
+                        <p:cond delay="indefinite"/>
+                      </p:stCondLst>
+                      <p:childTnLst>
+                        <p:par>
+                          <p:cTn id="10" fill="hold">
+                            <p:stCondLst>
+                              <p:cond delay="0"/>
+                            </p:stCondLst>
+                            <p:childTnLst>
+                              <p:par>
+                                <p:cTn id="11" presetID="1" presetClass="entr" presetSubtype="0" fill="hold" grpId="0" nodeType="clickEffect">
+                                  <p:stCondLst>
+                                    <p:cond delay="0"/>
+                                  </p:stCondLst>
+                                  <p:childTnLst>
+                                    <p:set>
+                                      <p:cBhvr>
+                                        <p:cTn id="12" dur="1" fill="hold">
+                                          <p:stCondLst>
+                                            <p:cond delay="0"/>
+                                          </p:stCondLst>
+                                        </p:cTn>
+                                        <p:tgtEl>
+                                          <p:spTgt spid="15"/>
+                                        </p:tgtEl>
+                                        <p:attrNameLst>
+                                          <p:attrName>style.visibility</p:attrName>
+                                        </p:attrNameLst>
+                                      </p:cBhvr>
+                                      <p:to>
+                                        <p:strVal val="visible"/>
+                                      </p:to>
+                                    </p:set>
+                                  </p:childTnLst>
+                                </p:cTn>
+                              </p:par>
+                              <p:par>
+                                <p:cTn id="13" presetID="1" presetClass="entr" presetSubtype="0" fill="hold" nodeType="withEffect">
+                                  <p:stCondLst>
+                                    <p:cond delay="0"/>
+                                  </p:stCondLst>
+                                  <p:childTnLst>
+                                    <p:set>
+                                      <p:cBhvr>
+                                        <p:cTn id="14" dur="1" fill="hold">
+                                          <p:stCondLst>
+                                            <p:cond delay="0"/>
+                                          </p:stCondLst>
+                                        </p:cTn>
+                                        <p:tgtEl>
+                                          <p:spTgt spid="12"/>
+                                        </p:tgtEl>
+                                        <p:attrNameLst>
+                                          <p:attrName>style.visibility</p:attrName>
+                                        </p:attrNameLst>
+                                      </p:cBhvr>
+                                      <p:to>
+                                        <p:strVal val="visible"/>
+                                      </p:to>
+                                    </p:set>
+                                  </p:childTnLst>
+                                </p:cTn>
+                              </p:par>
+                            </p:childTnLst>
+                          </p:cTn>
+                        </p:par>
+                      </p:childTnLst>
+                    </p:cTn>
+                  </p:par>
+                </p:childTnLst>
+              </p:cTn>
+              <p:prevCondLst>
+                <p:cond evt="onPrev" delay="0">
+                  <p:tgtEl>
+                    <p:sldTgt/>
+                  </p:tgtEl>
+                </p:cond>
+              </p:prevCondLst>
+              <p:nextCondLst>
+                <p:cond evt="onNext" delay="0">
+                  <p:tgtEl>
+                    <p:sldTgt/>
+                  </p:tgtEl>
+                </p:cond>
+              </p:nextCondLst>
+            </p:seq>
+          </p:childTnLst>
+        </p:cTn>
+      </p:par>
+    </p:tnLst>
+    <p:bldLst>
+      <p:bldP spid="13" grpId="0" animBg="1"/>
+      <p:bldP spid="15" grpId="0" animBg="1"/>
+    </p:bldLst>
+  </p:timing>
+</p:sld>
+</file>
+
+<file path=ppt/slides/slide14.xml><?xml version="1.0" encoding="utf-8"?>
+<p:sld xmlns:a="http://schemas.openxmlformats.org/drawingml/2006/main" xmlns:r="http://schemas.openxmlformats.org/officeDocument/2006/relationships" xmlns:p="http://schemas.openxmlformats.org/presentationml/2006/main">
+  <p:cSld>
     <p:bg>
       <p:bgPr>
         <a:solidFill>
@@ -21640,7 +22899,7 @@
 </p:sld>
 </file>
 
-<file path=ppt/slides/slide14.xml><?xml version="1.0" encoding="utf-8"?>
+<file path=ppt/slides/slide15.xml><?xml version="1.0" encoding="utf-8"?>
 <p:sld xmlns:a="http://schemas.openxmlformats.org/drawingml/2006/main" xmlns:r="http://schemas.openxmlformats.org/officeDocument/2006/relationships" xmlns:p="http://schemas.openxmlformats.org/presentationml/2006/main">
   <p:cSld>
     <p:spTree>
@@ -21774,7 +23033,7 @@
 </p:sld>
 </file>
 
-<file path=ppt/slides/slide15.xml><?xml version="1.0" encoding="utf-8"?>
+<file path=ppt/slides/slide16.xml><?xml version="1.0" encoding="utf-8"?>
 <p:sld xmlns:a="http://schemas.openxmlformats.org/drawingml/2006/main" xmlns:r="http://schemas.openxmlformats.org/officeDocument/2006/relationships" xmlns:p="http://schemas.openxmlformats.org/presentationml/2006/main">
   <p:cSld>
     <p:spTree>
@@ -23474,7 +24733,7 @@
 </p:sld>
 </file>
 
-<file path=ppt/slides/slide16.xml><?xml version="1.0" encoding="utf-8"?>
+<file path=ppt/slides/slide17.xml><?xml version="1.0" encoding="utf-8"?>
 <p:sld xmlns:a="http://schemas.openxmlformats.org/drawingml/2006/main" xmlns:r="http://schemas.openxmlformats.org/officeDocument/2006/relationships" xmlns:p="http://schemas.openxmlformats.org/presentationml/2006/main">
   <p:cSld>
     <p:spTree>
@@ -24888,7 +26147,7 @@
 </p:sld>
 </file>
 
-<file path=ppt/slides/slide17.xml><?xml version="1.0" encoding="utf-8"?>
+<file path=ppt/slides/slide18.xml><?xml version="1.0" encoding="utf-8"?>
 <p:sld xmlns:a="http://schemas.openxmlformats.org/drawingml/2006/main" xmlns:r="http://schemas.openxmlformats.org/officeDocument/2006/relationships" xmlns:p="http://schemas.openxmlformats.org/presentationml/2006/main">
   <p:cSld>
     <p:spTree>
@@ -25226,7 +26485,7 @@
 </p:sld>
 </file>
 
-<file path=ppt/slides/slide18.xml><?xml version="1.0" encoding="utf-8"?>
+<file path=ppt/slides/slide19.xml><?xml version="1.0" encoding="utf-8"?>
 <p:sld xmlns:a="http://schemas.openxmlformats.org/drawingml/2006/main" xmlns:r="http://schemas.openxmlformats.org/officeDocument/2006/relationships" xmlns:p="http://schemas.openxmlformats.org/presentationml/2006/main">
   <p:cSld>
     <p:spTree>
@@ -29211,7 +30470,7 @@
                                           </p:stCondLst>
                                         </p:cTn>
                                         <p:tgtEl>
-                                          <p:spTgt spid="6"/>
+                                          <p:spTgt spid="12"/>
                                         </p:tgtEl>
                                         <p:attrNameLst>
                                           <p:attrName>style.visibility</p:attrName>
@@ -29238,34 +30497,7 @@
                                           </p:stCondLst>
                                         </p:cTn>
                                         <p:tgtEl>
-                                          <p:spTgt spid="7"/>
-                                        </p:tgtEl>
-                                        <p:attrNameLst>
-                                          <p:attrName>style.visibility</p:attrName>
-                                        </p:attrNameLst>
-                                      </p:cBhvr>
-                                      <p:to>
-                                        <p:strVal val="visible"/>
-                                      </p:to>
-                                    </p:set>
-                                  </p:childTnLst>
-                                </p:cTn>
-                              </p:par>
-                              <p:par>
-                                <p:cTn id="13" presetID="1" presetClass="entr" presetSubtype="0" fill="hold" nodeType="withEffect">
-                                  <p:stCondLst>
-                                    <p:cond delay="0"/>
-                                  </p:stCondLst>
-                                  <p:childTnLst>
-                                    <p:set>
-                                      <p:cBhvr>
-                                        <p:cTn id="14" dur="1" fill="hold">
-                                          <p:stCondLst>
-                                            <p:cond delay="0"/>
-                                          </p:stCondLst>
-                                        </p:cTn>
-                                        <p:tgtEl>
-                                          <p:spTgt spid="11"/>
+                                          <p:spTgt spid="5"/>
                                         </p:tgtEl>
                                         <p:attrNameLst>
                                           <p:attrName>style.visibility</p:attrName>
@@ -29285,19 +30517,46 @@
                     </p:cTn>
                   </p:par>
                   <p:par>
-                    <p:cTn id="15" fill="hold">
+                    <p:cTn id="13" fill="hold">
                       <p:stCondLst>
                         <p:cond delay="indefinite"/>
                       </p:stCondLst>
                       <p:childTnLst>
                         <p:par>
-                          <p:cTn id="16" fill="hold">
+                          <p:cTn id="14" fill="hold">
                             <p:stCondLst>
                               <p:cond delay="0"/>
                             </p:stCondLst>
                             <p:childTnLst>
                               <p:par>
-                                <p:cTn id="17" presetID="1" presetClass="entr" presetSubtype="0" fill="hold" grpId="0" nodeType="clickEffect">
+                                <p:cTn id="15" presetID="1" presetClass="entr" presetSubtype="0" fill="hold" nodeType="clickEffect">
+                                  <p:stCondLst>
+                                    <p:cond delay="0"/>
+                                  </p:stCondLst>
+                                  <p:childTnLst>
+                                    <p:set>
+                                      <p:cBhvr>
+                                        <p:cTn id="16" dur="1" fill="hold">
+                                          <p:stCondLst>
+                                            <p:cond delay="0"/>
+                                          </p:stCondLst>
+                                        </p:cTn>
+                                        <p:tgtEl>
+                                          <p:spTgt spid="11"/>
+                                        </p:tgtEl>
+                                        <p:attrNameLst>
+                                          <p:attrName>style.visibility</p:attrName>
+                                        </p:attrNameLst>
+                                      </p:cBhvr>
+                                      <p:to>
+                                        <p:strVal val="visible"/>
+                                      </p:to>
+                                    </p:set>
+                                  </p:childTnLst>
+                                </p:cTn>
+                              </p:par>
+                              <p:par>
+                                <p:cTn id="17" presetID="1" presetClass="entr" presetSubtype="0" fill="hold" grpId="0" nodeType="withEffect">
                                   <p:stCondLst>
                                     <p:cond delay="0"/>
                                   </p:stCondLst>
@@ -29310,7 +30569,7 @@
                                           </p:stCondLst>
                                         </p:cTn>
                                         <p:tgtEl>
-                                          <p:spTgt spid="8"/>
+                                          <p:spTgt spid="6"/>
                                         </p:tgtEl>
                                         <p:attrNameLst>
                                           <p:attrName>style.visibility</p:attrName>
@@ -29337,7 +30596,52 @@
                                           </p:stCondLst>
                                         </p:cTn>
                                         <p:tgtEl>
-                                          <p:spTgt spid="9"/>
+                                          <p:spTgt spid="7"/>
+                                        </p:tgtEl>
+                                        <p:attrNameLst>
+                                          <p:attrName>style.visibility</p:attrName>
+                                        </p:attrNameLst>
+                                      </p:cBhvr>
+                                      <p:to>
+                                        <p:strVal val="visible"/>
+                                      </p:to>
+                                    </p:set>
+                                  </p:childTnLst>
+                                </p:cTn>
+                              </p:par>
+                            </p:childTnLst>
+                          </p:cTn>
+                        </p:par>
+                      </p:childTnLst>
+                    </p:cTn>
+                  </p:par>
+                  <p:par>
+                    <p:cTn id="21" fill="hold">
+                      <p:stCondLst>
+                        <p:cond delay="indefinite"/>
+                      </p:stCondLst>
+                      <p:childTnLst>
+                        <p:par>
+                          <p:cTn id="22" fill="hold">
+                            <p:stCondLst>
+                              <p:cond delay="0"/>
+                            </p:stCondLst>
+                            <p:childTnLst>
+                              <p:par>
+                                <p:cTn id="23" presetID="1" presetClass="entr" presetSubtype="0" fill="hold" grpId="0" nodeType="clickEffect">
+                                  <p:stCondLst>
+                                    <p:cond delay="0"/>
+                                  </p:stCondLst>
+                                  <p:childTnLst>
+                                    <p:set>
+                                      <p:cBhvr>
+                                        <p:cTn id="24" dur="1" fill="hold">
+                                          <p:stCondLst>
+                                            <p:cond delay="0"/>
+                                          </p:stCondLst>
+                                        </p:cTn>
+                                        <p:tgtEl>
+                                          <p:spTgt spid="13"/>
                                         </p:tgtEl>
                                         <p:attrNameLst>
                                           <p:attrName>style.visibility</p:attrName>
@@ -29351,20 +30655,47 @@
                                 </p:cTn>
                               </p:par>
                               <p:par>
-                                <p:cTn id="21" presetID="1" presetClass="entr" presetSubtype="0" fill="hold" grpId="0" nodeType="withEffect">
+                                <p:cTn id="25" presetID="1" presetClass="entr" presetSubtype="0" fill="hold" grpId="0" nodeType="withEffect">
                                   <p:stCondLst>
                                     <p:cond delay="0"/>
                                   </p:stCondLst>
                                   <p:childTnLst>
                                     <p:set>
                                       <p:cBhvr>
-                                        <p:cTn id="22" dur="1" fill="hold">
+                                        <p:cTn id="26" dur="1" fill="hold">
                                           <p:stCondLst>
                                             <p:cond delay="0"/>
                                           </p:stCondLst>
                                         </p:cTn>
                                         <p:tgtEl>
-                                          <p:spTgt spid="13"/>
+                                          <p:spTgt spid="8"/>
+                                        </p:tgtEl>
+                                        <p:attrNameLst>
+                                          <p:attrName>style.visibility</p:attrName>
+                                        </p:attrNameLst>
+                                      </p:cBhvr>
+                                      <p:to>
+                                        <p:strVal val="visible"/>
+                                      </p:to>
+                                    </p:set>
+                                  </p:childTnLst>
+                                </p:cTn>
+                              </p:par>
+                              <p:par>
+                                <p:cTn id="27" presetID="1" presetClass="entr" presetSubtype="0" fill="hold" grpId="0" nodeType="withEffect">
+                                  <p:stCondLst>
+                                    <p:cond delay="0"/>
+                                  </p:stCondLst>
+                                  <p:childTnLst>
+                                    <p:set>
+                                      <p:cBhvr>
+                                        <p:cTn id="28" dur="1" fill="hold">
+                                          <p:stCondLst>
+                                            <p:cond delay="0"/>
+                                          </p:stCondLst>
+                                        </p:cTn>
+                                        <p:tgtEl>
+                                          <p:spTgt spid="9"/>
                                         </p:tgtEl>
                                         <p:attrNameLst>
                                           <p:attrName>style.visibility</p:attrName>
@@ -29411,6 +30742,8 @@
       <p:bldP spid="8" grpId="0" animBg="1"/>
       <p:bldP spid="9" grpId="0" animBg="1"/>
       <p:bldP spid="13" grpId="0" animBg="1"/>
+      <p:bldP spid="5" grpId="0" animBg="1"/>
+      <p:bldP spid="12" grpId="0" animBg="1"/>
     </p:bldLst>
   </p:timing>
 </p:sld>
@@ -41032,8 +42365,8 @@
         </p:blipFill>
         <p:spPr>
           <a:xfrm>
-            <a:off x="4976649" y="3166441"/>
-            <a:ext cx="3357640" cy="1698504"/>
+            <a:off x="4963214" y="3159645"/>
+            <a:ext cx="3371075" cy="1705300"/>
           </a:xfrm>
           <a:prstGeom prst="rect">
             <a:avLst/>
@@ -41062,14 +42395,348 @@
         </p:blipFill>
         <p:spPr>
           <a:xfrm>
-            <a:off x="311699" y="3180270"/>
-            <a:ext cx="3466770" cy="1711699"/>
+            <a:off x="311699" y="3159645"/>
+            <a:ext cx="3430740" cy="1693909"/>
           </a:xfrm>
           <a:prstGeom prst="rect">
             <a:avLst/>
           </a:prstGeom>
         </p:spPr>
       </p:pic>
+      <p:sp>
+        <p:nvSpPr>
+          <p:cNvPr id="3" name="Google Shape;178;p8">
+            <a:extLst>
+              <a:ext uri="{FF2B5EF4-FFF2-40B4-BE49-F238E27FC236}">
+                <a16:creationId xmlns:a16="http://schemas.microsoft.com/office/drawing/2014/main" id="{DEBF304F-77EB-BA94-CD84-BF91A9CC35D2}"/>
+              </a:ext>
+            </a:extLst>
+          </p:cNvPr>
+          <p:cNvSpPr txBox="1">
+            <a:spLocks/>
+          </p:cNvSpPr>
+          <p:nvPr/>
+        </p:nvSpPr>
+        <p:spPr>
+          <a:xfrm>
+            <a:off x="258304" y="4717038"/>
+            <a:ext cx="3233278" cy="125564"/>
+          </a:xfrm>
+          <a:prstGeom prst="rect">
+            <a:avLst/>
+          </a:prstGeom>
+          <a:noFill/>
+          <a:ln>
+            <a:noFill/>
+          </a:ln>
+        </p:spPr>
+        <p:txBody>
+          <a:bodyPr spcFirstLastPara="1" wrap="square" lIns="91425" tIns="91425" rIns="91425" bIns="91425" anchor="t" anchorCtr="0">
+            <a:noAutofit/>
+          </a:bodyPr>
+          <a:lstStyle>
+            <a:defPPr marR="0" lvl="0" algn="l" rtl="0">
+              <a:lnSpc>
+                <a:spcPct val="100000"/>
+              </a:lnSpc>
+              <a:spcBef>
+                <a:spcPts val="0"/>
+              </a:spcBef>
+              <a:spcAft>
+                <a:spcPts val="0"/>
+              </a:spcAft>
+              <a:defRPr/>
+            </a:defPPr>
+            <a:lvl1pPr>
+              <a:buClr>
+                <a:schemeClr val="dk1"/>
+              </a:buClr>
+              <a:buSzPts val="2800"/>
+              <a:buNone/>
+              <a:defRPr sz="800" b="1">
+                <a:solidFill>
+                  <a:srgbClr val="0E3449"/>
+                </a:solidFill>
+                <a:latin typeface="Inter SemiBold"/>
+                <a:ea typeface="Inter SemiBold"/>
+              </a:defRPr>
+            </a:lvl1pPr>
+            <a:lvl2pPr>
+              <a:buClr>
+                <a:schemeClr val="dk1"/>
+              </a:buClr>
+              <a:buSzPts val="2800"/>
+              <a:buNone/>
+              <a:defRPr sz="2800">
+                <a:solidFill>
+                  <a:schemeClr val="dk1"/>
+                </a:solidFill>
+              </a:defRPr>
+            </a:lvl2pPr>
+            <a:lvl3pPr>
+              <a:buClr>
+                <a:schemeClr val="dk1"/>
+              </a:buClr>
+              <a:buSzPts val="2800"/>
+              <a:buNone/>
+              <a:defRPr sz="2800">
+                <a:solidFill>
+                  <a:schemeClr val="dk1"/>
+                </a:solidFill>
+              </a:defRPr>
+            </a:lvl3pPr>
+            <a:lvl4pPr>
+              <a:buClr>
+                <a:schemeClr val="dk1"/>
+              </a:buClr>
+              <a:buSzPts val="2800"/>
+              <a:buNone/>
+              <a:defRPr sz="2800">
+                <a:solidFill>
+                  <a:schemeClr val="dk1"/>
+                </a:solidFill>
+              </a:defRPr>
+            </a:lvl4pPr>
+            <a:lvl5pPr>
+              <a:buClr>
+                <a:schemeClr val="dk1"/>
+              </a:buClr>
+              <a:buSzPts val="2800"/>
+              <a:buNone/>
+              <a:defRPr sz="2800">
+                <a:solidFill>
+                  <a:schemeClr val="dk1"/>
+                </a:solidFill>
+              </a:defRPr>
+            </a:lvl5pPr>
+            <a:lvl6pPr>
+              <a:buClr>
+                <a:schemeClr val="dk1"/>
+              </a:buClr>
+              <a:buSzPts val="2800"/>
+              <a:buNone/>
+              <a:defRPr sz="2800">
+                <a:solidFill>
+                  <a:schemeClr val="dk1"/>
+                </a:solidFill>
+              </a:defRPr>
+            </a:lvl6pPr>
+            <a:lvl7pPr>
+              <a:buClr>
+                <a:schemeClr val="dk1"/>
+              </a:buClr>
+              <a:buSzPts val="2800"/>
+              <a:buNone/>
+              <a:defRPr sz="2800">
+                <a:solidFill>
+                  <a:schemeClr val="dk1"/>
+                </a:solidFill>
+              </a:defRPr>
+            </a:lvl7pPr>
+            <a:lvl8pPr>
+              <a:buClr>
+                <a:schemeClr val="dk1"/>
+              </a:buClr>
+              <a:buSzPts val="2800"/>
+              <a:buNone/>
+              <a:defRPr sz="2800">
+                <a:solidFill>
+                  <a:schemeClr val="dk1"/>
+                </a:solidFill>
+              </a:defRPr>
+            </a:lvl8pPr>
+            <a:lvl9pPr>
+              <a:buClr>
+                <a:schemeClr val="dk1"/>
+              </a:buClr>
+              <a:buSzPts val="2800"/>
+              <a:buNone/>
+              <a:defRPr sz="2800">
+                <a:solidFill>
+                  <a:schemeClr val="dk1"/>
+                </a:solidFill>
+              </a:defRPr>
+            </a:lvl9pPr>
+          </a:lstStyle>
+          <a:p>
+            <a:pPr algn="ctr"/>
+            <a:r>
+              <a:rPr lang="fr-FR" sz="500" b="0" dirty="0"/>
+              <a:t>heure</a:t>
+            </a:r>
+            <a:endParaRPr lang="fr-FR" sz="500" b="0" dirty="0">
+              <a:sym typeface="Inter SemiBold"/>
+            </a:endParaRPr>
+          </a:p>
+        </p:txBody>
+      </p:sp>
+      <p:sp>
+        <p:nvSpPr>
+          <p:cNvPr id="4" name="Google Shape;178;p8">
+            <a:extLst>
+              <a:ext uri="{FF2B5EF4-FFF2-40B4-BE49-F238E27FC236}">
+                <a16:creationId xmlns:a16="http://schemas.microsoft.com/office/drawing/2014/main" id="{1A25B44F-3D72-A752-04D6-8C3086471959}"/>
+              </a:ext>
+            </a:extLst>
+          </p:cNvPr>
+          <p:cNvSpPr txBox="1">
+            <a:spLocks/>
+          </p:cNvSpPr>
+          <p:nvPr/>
+        </p:nvSpPr>
+        <p:spPr>
+          <a:xfrm>
+            <a:off x="4891125" y="4717038"/>
+            <a:ext cx="3233278" cy="125564"/>
+          </a:xfrm>
+          <a:prstGeom prst="rect">
+            <a:avLst/>
+          </a:prstGeom>
+          <a:noFill/>
+          <a:ln>
+            <a:noFill/>
+          </a:ln>
+        </p:spPr>
+        <p:txBody>
+          <a:bodyPr spcFirstLastPara="1" wrap="square" lIns="91425" tIns="91425" rIns="91425" bIns="91425" anchor="t" anchorCtr="0">
+            <a:noAutofit/>
+          </a:bodyPr>
+          <a:lstStyle>
+            <a:defPPr marR="0" lvl="0" algn="l" rtl="0">
+              <a:lnSpc>
+                <a:spcPct val="100000"/>
+              </a:lnSpc>
+              <a:spcBef>
+                <a:spcPts val="0"/>
+              </a:spcBef>
+              <a:spcAft>
+                <a:spcPts val="0"/>
+              </a:spcAft>
+              <a:defRPr/>
+            </a:defPPr>
+            <a:lvl1pPr>
+              <a:buClr>
+                <a:schemeClr val="dk1"/>
+              </a:buClr>
+              <a:buSzPts val="2800"/>
+              <a:buNone/>
+              <a:defRPr sz="800" b="1">
+                <a:solidFill>
+                  <a:srgbClr val="0E3449"/>
+                </a:solidFill>
+                <a:latin typeface="Inter SemiBold"/>
+                <a:ea typeface="Inter SemiBold"/>
+              </a:defRPr>
+            </a:lvl1pPr>
+            <a:lvl2pPr>
+              <a:buClr>
+                <a:schemeClr val="dk1"/>
+              </a:buClr>
+              <a:buSzPts val="2800"/>
+              <a:buNone/>
+              <a:defRPr sz="2800">
+                <a:solidFill>
+                  <a:schemeClr val="dk1"/>
+                </a:solidFill>
+              </a:defRPr>
+            </a:lvl2pPr>
+            <a:lvl3pPr>
+              <a:buClr>
+                <a:schemeClr val="dk1"/>
+              </a:buClr>
+              <a:buSzPts val="2800"/>
+              <a:buNone/>
+              <a:defRPr sz="2800">
+                <a:solidFill>
+                  <a:schemeClr val="dk1"/>
+                </a:solidFill>
+              </a:defRPr>
+            </a:lvl3pPr>
+            <a:lvl4pPr>
+              <a:buClr>
+                <a:schemeClr val="dk1"/>
+              </a:buClr>
+              <a:buSzPts val="2800"/>
+              <a:buNone/>
+              <a:defRPr sz="2800">
+                <a:solidFill>
+                  <a:schemeClr val="dk1"/>
+                </a:solidFill>
+              </a:defRPr>
+            </a:lvl4pPr>
+            <a:lvl5pPr>
+              <a:buClr>
+                <a:schemeClr val="dk1"/>
+              </a:buClr>
+              <a:buSzPts val="2800"/>
+              <a:buNone/>
+              <a:defRPr sz="2800">
+                <a:solidFill>
+                  <a:schemeClr val="dk1"/>
+                </a:solidFill>
+              </a:defRPr>
+            </a:lvl5pPr>
+            <a:lvl6pPr>
+              <a:buClr>
+                <a:schemeClr val="dk1"/>
+              </a:buClr>
+              <a:buSzPts val="2800"/>
+              <a:buNone/>
+              <a:defRPr sz="2800">
+                <a:solidFill>
+                  <a:schemeClr val="dk1"/>
+                </a:solidFill>
+              </a:defRPr>
+            </a:lvl6pPr>
+            <a:lvl7pPr>
+              <a:buClr>
+                <a:schemeClr val="dk1"/>
+              </a:buClr>
+              <a:buSzPts val="2800"/>
+              <a:buNone/>
+              <a:defRPr sz="2800">
+                <a:solidFill>
+                  <a:schemeClr val="dk1"/>
+                </a:solidFill>
+              </a:defRPr>
+            </a:lvl7pPr>
+            <a:lvl8pPr>
+              <a:buClr>
+                <a:schemeClr val="dk1"/>
+              </a:buClr>
+              <a:buSzPts val="2800"/>
+              <a:buNone/>
+              <a:defRPr sz="2800">
+                <a:solidFill>
+                  <a:schemeClr val="dk1"/>
+                </a:solidFill>
+              </a:defRPr>
+            </a:lvl8pPr>
+            <a:lvl9pPr>
+              <a:buClr>
+                <a:schemeClr val="dk1"/>
+              </a:buClr>
+              <a:buSzPts val="2800"/>
+              <a:buNone/>
+              <a:defRPr sz="2800">
+                <a:solidFill>
+                  <a:schemeClr val="dk1"/>
+                </a:solidFill>
+              </a:defRPr>
+            </a:lvl9pPr>
+          </a:lstStyle>
+          <a:p>
+            <a:pPr algn="ctr"/>
+            <a:r>
+              <a:rPr lang="fr-FR" sz="500" b="0" dirty="0"/>
+              <a:t>heure</a:t>
+            </a:r>
+            <a:endParaRPr lang="fr-FR" sz="500" b="0" dirty="0">
+              <a:sym typeface="Inter SemiBold"/>
+            </a:endParaRPr>
+          </a:p>
+        </p:txBody>
+      </p:sp>
     </p:spTree>
     <p:extLst>
       <p:ext uri="{BB962C8B-B14F-4D97-AF65-F5344CB8AC3E}">
@@ -41334,6 +43001,60 @@
                                   </p:childTnLst>
                                 </p:cTn>
                               </p:par>
+                              <p:par>
+                                <p:cTn id="23" presetID="1" presetClass="entr" presetSubtype="0" fill="hold" grpId="0" nodeType="withEffect">
+                                  <p:stCondLst>
+                                    <p:cond delay="0"/>
+                                  </p:stCondLst>
+                                  <p:childTnLst>
+                                    <p:set>
+                                      <p:cBhvr>
+                                        <p:cTn id="24" dur="1" fill="hold">
+                                          <p:stCondLst>
+                                            <p:cond delay="0"/>
+                                          </p:stCondLst>
+                                        </p:cTn>
+                                        <p:tgtEl>
+                                          <p:spTgt spid="3"/>
+                                        </p:tgtEl>
+                                        <p:attrNameLst>
+                                          <p:attrName>style.visibility</p:attrName>
+                                        </p:attrNameLst>
+                                      </p:cBhvr>
+                                      <p:to>
+                                        <p:strVal val="visible"/>
+                                      </p:to>
+                                    </p:set>
+                                  </p:childTnLst>
+                                </p:cTn>
+                              </p:par>
+                              <p:par>
+                                <p:cTn id="25" presetID="1" presetClass="entr" presetSubtype="0" fill="hold" grpId="0" nodeType="withEffect">
+                                  <p:stCondLst>
+                                    <p:cond delay="0"/>
+                                  </p:stCondLst>
+                                  <p:childTnLst>
+                                    <p:set>
+                                      <p:cBhvr>
+                                        <p:cTn id="26" dur="1" fill="hold">
+                                          <p:stCondLst>
+                                            <p:cond delay="0"/>
+                                          </p:stCondLst>
+                                        </p:cTn>
+                                        <p:tgtEl>
+                                          <p:spTgt spid="4"/>
+                                        </p:tgtEl>
+                                        <p:attrNameLst>
+                                          <p:attrName>style.visibility</p:attrName>
+                                        </p:attrNameLst>
+                                      </p:cBhvr>
+                                      <p:to>
+                                        <p:strVal val="visible"/>
+                                      </p:to>
+                                    </p:set>
+                                  </p:childTnLst>
+                                </p:cTn>
+                              </p:par>
                             </p:childTnLst>
                           </p:cTn>
                         </p:par>
@@ -41366,6 +43087,8 @@
       <p:bldP spid="27" grpId="0"/>
       <p:bldP spid="29" grpId="0"/>
       <p:bldP spid="32" grpId="0"/>
+      <p:bldP spid="3" grpId="0"/>
+      <p:bldP spid="4" grpId="0"/>
     </p:bldLst>
   </p:timing>
 </p:sld>
@@ -42225,15 +43948,7 @@
             </a:r>
             <a:r>
               <a:rPr lang="fr-FR" sz="900" dirty="0"/>
-              <a:t>(cf. 10cm dans le </a:t>
-            </a:r>
-            <a:r>
-              <a:rPr lang="fr-FR" sz="900" dirty="0" err="1"/>
-              <a:t>Dataset</a:t>
-            </a:r>
-            <a:r>
-              <a:rPr lang="fr-FR" sz="900" dirty="0"/>
-              <a:t>) est </a:t>
+              <a:t>est </a:t>
             </a:r>
             <a:r>
               <a:rPr lang="fr-FR" sz="900" b="1" dirty="0"/>
@@ -42325,10 +44040,10 @@
       </p:sp>
       <p:pic>
         <p:nvPicPr>
-          <p:cNvPr id="13" name="Image 12" descr="Une image contenant texte, capture d’écran, affichage, nombre&#10;&#10;Le contenu généré par l’IA peut être incorrect.">
+          <p:cNvPr id="5" name="Image 4">
             <a:extLst>
               <a:ext uri="{FF2B5EF4-FFF2-40B4-BE49-F238E27FC236}">
-                <a16:creationId xmlns:a16="http://schemas.microsoft.com/office/drawing/2014/main" id="{7D6B0B43-8628-A21E-C82B-D058DBA5452A}"/>
+                <a16:creationId xmlns:a16="http://schemas.microsoft.com/office/drawing/2014/main" id="{000A3F10-64A4-99A8-2113-EEBBDD6801ED}"/>
               </a:ext>
             </a:extLst>
           </p:cNvPr>
@@ -42362,10 +44077,10 @@
       </p:pic>
       <p:pic>
         <p:nvPicPr>
-          <p:cNvPr id="7" name="Image 6" descr="Une image contenant texte, diagramme, Tracé, capture d’écran">
+          <p:cNvPr id="15" name="Image 14">
             <a:extLst>
               <a:ext uri="{FF2B5EF4-FFF2-40B4-BE49-F238E27FC236}">
-                <a16:creationId xmlns:a16="http://schemas.microsoft.com/office/drawing/2014/main" id="{D843FCAE-84D8-B3E1-4B7A-0383F76C878B}"/>
+                <a16:creationId xmlns:a16="http://schemas.microsoft.com/office/drawing/2014/main" id="{BC10BE04-1AA9-616C-9AB5-9507462BB970}"/>
               </a:ext>
             </a:extLst>
           </p:cNvPr>
@@ -42382,8 +44097,8 @@
         </p:blipFill>
         <p:spPr>
           <a:xfrm>
-            <a:off x="4922672" y="1155049"/>
-            <a:ext cx="3595361" cy="2862681"/>
+            <a:off x="4919646" y="1156260"/>
+            <a:ext cx="3595360" cy="2862681"/>
           </a:xfrm>
           <a:prstGeom prst="rect">
             <a:avLst/>

--- a/presentation/dsfs_ft_36_Projet_REnergies_efficiency_prediction.pptx
+++ b/presentation/dsfs_ft_36_Projet_REnergies_efficiency_prediction.pptx
@@ -294,7 +294,7 @@
 <file path=ppt/revisionInfo.xml><?xml version="1.0" encoding="utf-8"?>
 <p1510:revInfo xmlns:a="http://schemas.openxmlformats.org/drawingml/2006/main" xmlns:r="http://schemas.openxmlformats.org/officeDocument/2006/relationships" xmlns:p1510="http://schemas.microsoft.com/office/powerpoint/2015/10/main">
   <p1510:revLst>
-    <p1510:client id="{2EB72A00-7F79-4813-B4C2-C6564860F3F6}" v="2919" dt="2025-11-25T09:56:49.003"/>
+    <p1510:client id="{5B867508-BD38-46D7-B6E0-43AEAA44C858}" v="66" dt="2026-02-15T09:37:15.623"/>
   </p1510:revLst>
 </p1510:revInfo>
 </file>
@@ -304,2261 +304,217 @@
   <pc:docChgLst>
     <pc:chgData name="Jean-Yves Vuillequez" userId="e7fac481abea6bd0" providerId="LiveId" clId="{79E365E8-22BC-4EC2-9606-9A9AC6CD1D22}"/>
     <pc:docChg chg="undo redo custSel addSld delSld modSld sldOrd">
-      <pc:chgData name="Jean-Yves Vuillequez" userId="e7fac481abea6bd0" providerId="LiveId" clId="{79E365E8-22BC-4EC2-9606-9A9AC6CD1D22}" dt="2025-11-25T09:56:49.003" v="9726"/>
+      <pc:chgData name="Jean-Yves Vuillequez" userId="e7fac481abea6bd0" providerId="LiveId" clId="{79E365E8-22BC-4EC2-9606-9A9AC6CD1D22}" dt="2026-02-15T09:41:16.431" v="10026" actId="20577"/>
       <pc:docMkLst>
         <pc:docMk/>
       </pc:docMkLst>
-      <pc:sldChg chg="modSp mod">
-        <pc:chgData name="Jean-Yves Vuillequez" userId="e7fac481abea6bd0" providerId="LiveId" clId="{79E365E8-22BC-4EC2-9606-9A9AC6CD1D22}" dt="2025-11-20T10:46:33.143" v="1845" actId="1076"/>
-        <pc:sldMkLst>
-          <pc:docMk/>
-          <pc:sldMk cId="0" sldId="256"/>
-        </pc:sldMkLst>
-        <pc:spChg chg="mod">
-          <ac:chgData name="Jean-Yves Vuillequez" userId="e7fac481abea6bd0" providerId="LiveId" clId="{79E365E8-22BC-4EC2-9606-9A9AC6CD1D22}" dt="2025-11-20T10:46:27.739" v="1844" actId="14100"/>
-          <ac:spMkLst>
-            <pc:docMk/>
-            <pc:sldMk cId="0" sldId="256"/>
-            <ac:spMk id="54" creationId="{00000000-0000-0000-0000-000000000000}"/>
-          </ac:spMkLst>
-        </pc:spChg>
-        <pc:spChg chg="mod">
-          <ac:chgData name="Jean-Yves Vuillequez" userId="e7fac481abea6bd0" providerId="LiveId" clId="{79E365E8-22BC-4EC2-9606-9A9AC6CD1D22}" dt="2025-11-20T10:46:33.143" v="1845" actId="1076"/>
-          <ac:spMkLst>
-            <pc:docMk/>
-            <pc:sldMk cId="0" sldId="256"/>
-            <ac:spMk id="57" creationId="{00000000-0000-0000-0000-000000000000}"/>
-          </ac:spMkLst>
-        </pc:spChg>
-      </pc:sldChg>
-      <pc:sldChg chg="addSp delSp modSp add del mod">
-        <pc:chgData name="Jean-Yves Vuillequez" userId="e7fac481abea6bd0" providerId="LiveId" clId="{79E365E8-22BC-4EC2-9606-9A9AC6CD1D22}" dt="2025-11-21T14:09:00.301" v="6869" actId="478"/>
-        <pc:sldMkLst>
-          <pc:docMk/>
-          <pc:sldMk cId="0" sldId="263"/>
-        </pc:sldMkLst>
-        <pc:spChg chg="mod">
-          <ac:chgData name="Jean-Yves Vuillequez" userId="e7fac481abea6bd0" providerId="LiveId" clId="{79E365E8-22BC-4EC2-9606-9A9AC6CD1D22}" dt="2025-11-21T09:41:42.184" v="5752" actId="313"/>
-          <ac:spMkLst>
-            <pc:docMk/>
-            <pc:sldMk cId="0" sldId="263"/>
-            <ac:spMk id="61" creationId="{00000000-0000-0000-0000-000000000000}"/>
-          </ac:spMkLst>
-        </pc:spChg>
-        <pc:picChg chg="add mod ord">
-          <ac:chgData name="Jean-Yves Vuillequez" userId="e7fac481abea6bd0" providerId="LiveId" clId="{79E365E8-22BC-4EC2-9606-9A9AC6CD1D22}" dt="2025-11-21T14:08:57.605" v="6868" actId="167"/>
-          <ac:picMkLst>
-            <pc:docMk/>
-            <pc:sldMk cId="0" sldId="263"/>
-            <ac:picMk id="4" creationId="{EC609326-E74D-C852-5772-0AF47814B3FA}"/>
-          </ac:picMkLst>
-        </pc:picChg>
-      </pc:sldChg>
-      <pc:sldChg chg="addSp delSp modSp add mod delAnim modAnim modNotesTx">
-        <pc:chgData name="Jean-Yves Vuillequez" userId="e7fac481abea6bd0" providerId="LiveId" clId="{79E365E8-22BC-4EC2-9606-9A9AC6CD1D22}" dt="2025-11-24T15:46:13.544" v="9439" actId="20577"/>
-        <pc:sldMkLst>
-          <pc:docMk/>
-          <pc:sldMk cId="0" sldId="264"/>
-        </pc:sldMkLst>
-        <pc:spChg chg="add mod">
-          <ac:chgData name="Jean-Yves Vuillequez" userId="e7fac481abea6bd0" providerId="LiveId" clId="{79E365E8-22BC-4EC2-9606-9A9AC6CD1D22}" dt="2025-11-21T12:01:02.283" v="6077" actId="1076"/>
-          <ac:spMkLst>
-            <pc:docMk/>
-            <pc:sldMk cId="0" sldId="264"/>
-            <ac:spMk id="10" creationId="{969F6912-24B4-86C3-A9BD-63A0B3EECE8F}"/>
-          </ac:spMkLst>
-        </pc:spChg>
-        <pc:spChg chg="add mod ord">
-          <ac:chgData name="Jean-Yves Vuillequez" userId="e7fac481abea6bd0" providerId="LiveId" clId="{79E365E8-22BC-4EC2-9606-9A9AC6CD1D22}" dt="2025-11-21T12:01:02.283" v="6077" actId="1076"/>
-          <ac:spMkLst>
-            <pc:docMk/>
-            <pc:sldMk cId="0" sldId="264"/>
-            <ac:spMk id="15" creationId="{F7BD46E7-960E-9FE8-AF1D-540B63B6E3BD}"/>
-          </ac:spMkLst>
-        </pc:spChg>
-        <pc:spChg chg="add mod">
-          <ac:chgData name="Jean-Yves Vuillequez" userId="e7fac481abea6bd0" providerId="LiveId" clId="{79E365E8-22BC-4EC2-9606-9A9AC6CD1D22}" dt="2025-11-21T15:21:19.061" v="7152" actId="1076"/>
-          <ac:spMkLst>
-            <pc:docMk/>
-            <pc:sldMk cId="0" sldId="264"/>
-            <ac:spMk id="16" creationId="{FD00A647-A6B0-BAD9-4462-05B36C528950}"/>
-          </ac:spMkLst>
-        </pc:spChg>
-        <pc:spChg chg="add mod">
-          <ac:chgData name="Jean-Yves Vuillequez" userId="e7fac481abea6bd0" providerId="LiveId" clId="{79E365E8-22BC-4EC2-9606-9A9AC6CD1D22}" dt="2025-11-21T12:01:02.283" v="6077" actId="1076"/>
-          <ac:spMkLst>
-            <pc:docMk/>
-            <pc:sldMk cId="0" sldId="264"/>
-            <ac:spMk id="17" creationId="{CA110F94-5779-164B-A681-281821A7140F}"/>
-          </ac:spMkLst>
-        </pc:spChg>
-        <pc:spChg chg="add mod">
-          <ac:chgData name="Jean-Yves Vuillequez" userId="e7fac481abea6bd0" providerId="LiveId" clId="{79E365E8-22BC-4EC2-9606-9A9AC6CD1D22}" dt="2025-11-21T12:16:37.075" v="6161" actId="1076"/>
-          <ac:spMkLst>
-            <pc:docMk/>
-            <pc:sldMk cId="0" sldId="264"/>
-            <ac:spMk id="19" creationId="{A3387E01-D8D0-5ADA-D534-65D80A3C2F50}"/>
-          </ac:spMkLst>
-        </pc:spChg>
-        <pc:spChg chg="add mod">
-          <ac:chgData name="Jean-Yves Vuillequez" userId="e7fac481abea6bd0" providerId="LiveId" clId="{79E365E8-22BC-4EC2-9606-9A9AC6CD1D22}" dt="2025-11-21T12:04:41.329" v="6128" actId="1076"/>
-          <ac:spMkLst>
-            <pc:docMk/>
-            <pc:sldMk cId="0" sldId="264"/>
-            <ac:spMk id="20" creationId="{027ADA1A-FB26-718D-5918-4A696CD7FAD0}"/>
-          </ac:spMkLst>
-        </pc:spChg>
-        <pc:spChg chg="add mod">
-          <ac:chgData name="Jean-Yves Vuillequez" userId="e7fac481abea6bd0" providerId="LiveId" clId="{79E365E8-22BC-4EC2-9606-9A9AC6CD1D22}" dt="2025-11-21T12:04:41.329" v="6128" actId="1076"/>
-          <ac:spMkLst>
-            <pc:docMk/>
-            <pc:sldMk cId="0" sldId="264"/>
-            <ac:spMk id="22" creationId="{9A64202F-AFAE-5CDF-BC8D-5777C30A07CB}"/>
-          </ac:spMkLst>
-        </pc:spChg>
-        <pc:spChg chg="add mod">
-          <ac:chgData name="Jean-Yves Vuillequez" userId="e7fac481abea6bd0" providerId="LiveId" clId="{79E365E8-22BC-4EC2-9606-9A9AC6CD1D22}" dt="2025-11-21T12:04:41.329" v="6128" actId="1076"/>
-          <ac:spMkLst>
-            <pc:docMk/>
-            <pc:sldMk cId="0" sldId="264"/>
-            <ac:spMk id="23" creationId="{56B8B58A-AB16-FC6C-4248-7061947495FF}"/>
-          </ac:spMkLst>
-        </pc:spChg>
-        <pc:spChg chg="add mod">
-          <ac:chgData name="Jean-Yves Vuillequez" userId="e7fac481abea6bd0" providerId="LiveId" clId="{79E365E8-22BC-4EC2-9606-9A9AC6CD1D22}" dt="2025-11-21T12:05:04.372" v="6151" actId="20577"/>
-          <ac:spMkLst>
-            <pc:docMk/>
-            <pc:sldMk cId="0" sldId="264"/>
-            <ac:spMk id="24" creationId="{3F9732E3-4982-9D73-E53B-ED7124F0A415}"/>
-          </ac:spMkLst>
-        </pc:spChg>
-        <pc:spChg chg="mod">
-          <ac:chgData name="Jean-Yves Vuillequez" userId="e7fac481abea6bd0" providerId="LiveId" clId="{79E365E8-22BC-4EC2-9606-9A9AC6CD1D22}" dt="2025-11-21T12:06:38.436" v="6160" actId="108"/>
-          <ac:spMkLst>
-            <pc:docMk/>
-            <pc:sldMk cId="0" sldId="264"/>
-            <ac:spMk id="70" creationId="{00000000-0000-0000-0000-000000000000}"/>
-          </ac:spMkLst>
-        </pc:spChg>
-        <pc:spChg chg="mod">
-          <ac:chgData name="Jean-Yves Vuillequez" userId="e7fac481abea6bd0" providerId="LiveId" clId="{79E365E8-22BC-4EC2-9606-9A9AC6CD1D22}" dt="2025-11-24T15:46:13.544" v="9439" actId="20577"/>
-          <ac:spMkLst>
-            <pc:docMk/>
-            <pc:sldMk cId="0" sldId="264"/>
-            <ac:spMk id="73" creationId="{00000000-0000-0000-0000-000000000000}"/>
-          </ac:spMkLst>
-        </pc:spChg>
-      </pc:sldChg>
-      <pc:sldChg chg="addSp delSp modSp mod modAnim modNotesTx">
-        <pc:chgData name="Jean-Yves Vuillequez" userId="e7fac481abea6bd0" providerId="LiveId" clId="{79E365E8-22BC-4EC2-9606-9A9AC6CD1D22}" dt="2025-11-24T14:03:41.945" v="8835" actId="20577"/>
-        <pc:sldMkLst>
-          <pc:docMk/>
-          <pc:sldMk cId="0" sldId="270"/>
-        </pc:sldMkLst>
-        <pc:spChg chg="add mod">
-          <ac:chgData name="Jean-Yves Vuillequez" userId="e7fac481abea6bd0" providerId="LiveId" clId="{79E365E8-22BC-4EC2-9606-9A9AC6CD1D22}" dt="2025-11-20T13:25:35.424" v="3240" actId="1076"/>
-          <ac:spMkLst>
-            <pc:docMk/>
-            <pc:sldMk cId="0" sldId="270"/>
-            <ac:spMk id="2" creationId="{A8AF3C33-4A88-5872-EAED-84B597DDCB98}"/>
-          </ac:spMkLst>
-        </pc:spChg>
-        <pc:spChg chg="add mod">
-          <ac:chgData name="Jean-Yves Vuillequez" userId="e7fac481abea6bd0" providerId="LiveId" clId="{79E365E8-22BC-4EC2-9606-9A9AC6CD1D22}" dt="2025-11-24T13:55:55.293" v="8831" actId="1076"/>
-          <ac:spMkLst>
-            <pc:docMk/>
-            <pc:sldMk cId="0" sldId="270"/>
-            <ac:spMk id="3" creationId="{35D30AE4-40E2-1500-ADDE-34C7E592AC53}"/>
-          </ac:spMkLst>
-        </pc:spChg>
-        <pc:spChg chg="add mod">
-          <ac:chgData name="Jean-Yves Vuillequez" userId="e7fac481abea6bd0" providerId="LiveId" clId="{79E365E8-22BC-4EC2-9606-9A9AC6CD1D22}" dt="2025-11-24T13:55:58.472" v="8832" actId="571"/>
-          <ac:spMkLst>
-            <pc:docMk/>
-            <pc:sldMk cId="0" sldId="270"/>
-            <ac:spMk id="4" creationId="{1276B7C1-B3AC-EE95-FC17-C4066D8DD80E}"/>
-          </ac:spMkLst>
-        </pc:spChg>
-        <pc:spChg chg="add mod">
-          <ac:chgData name="Jean-Yves Vuillequez" userId="e7fac481abea6bd0" providerId="LiveId" clId="{79E365E8-22BC-4EC2-9606-9A9AC6CD1D22}" dt="2025-11-20T13:13:44.672" v="3099" actId="108"/>
-          <ac:spMkLst>
-            <pc:docMk/>
-            <pc:sldMk cId="0" sldId="270"/>
-            <ac:spMk id="5" creationId="{6E9B9A86-9FEE-4DF9-2C6B-AA0F6754EFCC}"/>
-          </ac:spMkLst>
-        </pc:spChg>
-        <pc:spChg chg="add mod">
-          <ac:chgData name="Jean-Yves Vuillequez" userId="e7fac481abea6bd0" providerId="LiveId" clId="{79E365E8-22BC-4EC2-9606-9A9AC6CD1D22}" dt="2025-11-20T12:56:32.124" v="2848" actId="1076"/>
-          <ac:spMkLst>
-            <pc:docMk/>
-            <pc:sldMk cId="0" sldId="270"/>
-            <ac:spMk id="11" creationId="{54F499A7-E85C-A18E-220A-597D1BD5296D}"/>
-          </ac:spMkLst>
-        </pc:spChg>
-        <pc:spChg chg="add mod">
-          <ac:chgData name="Jean-Yves Vuillequez" userId="e7fac481abea6bd0" providerId="LiveId" clId="{79E365E8-22BC-4EC2-9606-9A9AC6CD1D22}" dt="2025-11-20T12:56:32.124" v="2848" actId="1076"/>
-          <ac:spMkLst>
-            <pc:docMk/>
-            <pc:sldMk cId="0" sldId="270"/>
-            <ac:spMk id="12" creationId="{89323911-6E5E-E0F1-07ED-A6A7D389B824}"/>
-          </ac:spMkLst>
-        </pc:spChg>
-        <pc:spChg chg="add mod">
-          <ac:chgData name="Jean-Yves Vuillequez" userId="e7fac481abea6bd0" providerId="LiveId" clId="{79E365E8-22BC-4EC2-9606-9A9AC6CD1D22}" dt="2025-11-20T13:09:42.957" v="3014" actId="1035"/>
-          <ac:spMkLst>
-            <pc:docMk/>
-            <pc:sldMk cId="0" sldId="270"/>
-            <ac:spMk id="22" creationId="{5F91EB25-5676-9A78-8FB2-CA08F937A4E7}"/>
-          </ac:spMkLst>
-        </pc:spChg>
-        <pc:spChg chg="add mod">
-          <ac:chgData name="Jean-Yves Vuillequez" userId="e7fac481abea6bd0" providerId="LiveId" clId="{79E365E8-22BC-4EC2-9606-9A9AC6CD1D22}" dt="2025-11-20T13:09:42.957" v="3014" actId="1035"/>
-          <ac:spMkLst>
-            <pc:docMk/>
-            <pc:sldMk cId="0" sldId="270"/>
-            <ac:spMk id="27" creationId="{D1939A7E-40F5-B89A-35FB-D12584E40447}"/>
-          </ac:spMkLst>
-        </pc:spChg>
-        <pc:spChg chg="add mod">
-          <ac:chgData name="Jean-Yves Vuillequez" userId="e7fac481abea6bd0" providerId="LiveId" clId="{79E365E8-22BC-4EC2-9606-9A9AC6CD1D22}" dt="2025-11-24T13:55:46.961" v="8829" actId="1076"/>
-          <ac:spMkLst>
-            <pc:docMk/>
-            <pc:sldMk cId="0" sldId="270"/>
-            <ac:spMk id="29" creationId="{AB5E3F7B-4D5B-A282-729D-54099846D04E}"/>
-          </ac:spMkLst>
-        </pc:spChg>
-        <pc:spChg chg="add mod">
-          <ac:chgData name="Jean-Yves Vuillequez" userId="e7fac481abea6bd0" providerId="LiveId" clId="{79E365E8-22BC-4EC2-9606-9A9AC6CD1D22}" dt="2025-11-24T13:54:49.930" v="8811" actId="1076"/>
-          <ac:spMkLst>
-            <pc:docMk/>
-            <pc:sldMk cId="0" sldId="270"/>
-            <ac:spMk id="32" creationId="{02F91474-2263-4339-0707-4E587447276F}"/>
-          </ac:spMkLst>
-        </pc:spChg>
-        <pc:spChg chg="mod">
-          <ac:chgData name="Jean-Yves Vuillequez" userId="e7fac481abea6bd0" providerId="LiveId" clId="{79E365E8-22BC-4EC2-9606-9A9AC6CD1D22}" dt="2025-11-20T08:33:42.341" v="349" actId="108"/>
-          <ac:spMkLst>
-            <pc:docMk/>
-            <pc:sldMk cId="0" sldId="270"/>
-            <ac:spMk id="178" creationId="{00000000-0000-0000-0000-000000000000}"/>
-          </ac:spMkLst>
-        </pc:spChg>
-        <pc:spChg chg="add del">
-          <ac:chgData name="Jean-Yves Vuillequez" userId="e7fac481abea6bd0" providerId="LiveId" clId="{79E365E8-22BC-4EC2-9606-9A9AC6CD1D22}" dt="2025-11-20T13:10:12.769" v="3022" actId="478"/>
-          <ac:spMkLst>
-            <pc:docMk/>
-            <pc:sldMk cId="0" sldId="270"/>
-            <ac:spMk id="180" creationId="{00000000-0000-0000-0000-000000000000}"/>
-          </ac:spMkLst>
-        </pc:spChg>
-        <pc:picChg chg="add mod modCrop">
-          <ac:chgData name="Jean-Yves Vuillequez" userId="e7fac481abea6bd0" providerId="LiveId" clId="{79E365E8-22BC-4EC2-9606-9A9AC6CD1D22}" dt="2025-11-20T13:14:00.213" v="3103" actId="208"/>
-          <ac:picMkLst>
-            <pc:docMk/>
-            <pc:sldMk cId="0" sldId="270"/>
-            <ac:picMk id="24" creationId="{303DB536-0266-DA20-7307-FDFD2DD7F064}"/>
-          </ac:picMkLst>
-        </pc:picChg>
-        <pc:picChg chg="add mod">
-          <ac:chgData name="Jean-Yves Vuillequez" userId="e7fac481abea6bd0" providerId="LiveId" clId="{79E365E8-22BC-4EC2-9606-9A9AC6CD1D22}" dt="2025-11-20T13:13:59.285" v="3101" actId="108"/>
-          <ac:picMkLst>
-            <pc:docMk/>
-            <pc:sldMk cId="0" sldId="270"/>
-            <ac:picMk id="26" creationId="{82E18E6C-452B-91DA-6F62-9BAF1FA73FF6}"/>
-          </ac:picMkLst>
-        </pc:picChg>
-        <pc:picChg chg="add mod ord modCrop">
-          <ac:chgData name="Jean-Yves Vuillequez" userId="e7fac481abea6bd0" providerId="LiveId" clId="{79E365E8-22BC-4EC2-9606-9A9AC6CD1D22}" dt="2025-11-24T13:55:54.399" v="8830" actId="1076"/>
-          <ac:picMkLst>
-            <pc:docMk/>
-            <pc:sldMk cId="0" sldId="270"/>
-            <ac:picMk id="31" creationId="{6BD4617F-BC09-EF25-6D51-0C11F38E66E0}"/>
-          </ac:picMkLst>
-        </pc:picChg>
-        <pc:picChg chg="add mod">
-          <ac:chgData name="Jean-Yves Vuillequez" userId="e7fac481abea6bd0" providerId="LiveId" clId="{79E365E8-22BC-4EC2-9606-9A9AC6CD1D22}" dt="2025-11-24T13:54:52.641" v="8812" actId="1076"/>
-          <ac:picMkLst>
-            <pc:docMk/>
-            <pc:sldMk cId="0" sldId="270"/>
-            <ac:picMk id="34" creationId="{3415ED82-BAC3-4FDA-B013-D0CB9DF7A0EB}"/>
-          </ac:picMkLst>
-        </pc:picChg>
-        <pc:cxnChg chg="add mod">
-          <ac:chgData name="Jean-Yves Vuillequez" userId="e7fac481abea6bd0" providerId="LiveId" clId="{79E365E8-22BC-4EC2-9606-9A9AC6CD1D22}" dt="2025-11-20T12:57:50.765" v="2862" actId="1076"/>
-          <ac:cxnSpMkLst>
-            <pc:docMk/>
-            <pc:sldMk cId="0" sldId="270"/>
-            <ac:cxnSpMk id="13" creationId="{D6A6FE1A-72C1-055E-8B81-8233E403EFDF}"/>
-          </ac:cxnSpMkLst>
-        </pc:cxnChg>
-        <pc:cxnChg chg="add mod">
-          <ac:chgData name="Jean-Yves Vuillequez" userId="e7fac481abea6bd0" providerId="LiveId" clId="{79E365E8-22BC-4EC2-9606-9A9AC6CD1D22}" dt="2025-11-20T12:57:23.056" v="2858" actId="1076"/>
-          <ac:cxnSpMkLst>
-            <pc:docMk/>
-            <pc:sldMk cId="0" sldId="270"/>
-            <ac:cxnSpMk id="15" creationId="{E056DC62-8C9E-3FFB-6932-372DF4AF0062}"/>
-          </ac:cxnSpMkLst>
-        </pc:cxnChg>
-      </pc:sldChg>
-      <pc:sldChg chg="addSp delSp modSp mod ord">
-        <pc:chgData name="Jean-Yves Vuillequez" userId="e7fac481abea6bd0" providerId="LiveId" clId="{79E365E8-22BC-4EC2-9606-9A9AC6CD1D22}" dt="2025-11-25T08:54:11.101" v="9532" actId="208"/>
-        <pc:sldMkLst>
-          <pc:docMk/>
-          <pc:sldMk cId="0" sldId="271"/>
-        </pc:sldMkLst>
-        <pc:spChg chg="add mod">
-          <ac:chgData name="Jean-Yves Vuillequez" userId="e7fac481abea6bd0" providerId="LiveId" clId="{79E365E8-22BC-4EC2-9606-9A9AC6CD1D22}" dt="2025-11-25T08:54:04.024" v="9531" actId="1076"/>
-          <ac:spMkLst>
-            <pc:docMk/>
-            <pc:sldMk cId="0" sldId="271"/>
-            <ac:spMk id="2" creationId="{85EE54CA-1CA7-BBB2-C3CA-7AD11745D0CB}"/>
-          </ac:spMkLst>
-        </pc:spChg>
-        <pc:spChg chg="add mod">
-          <ac:chgData name="Jean-Yves Vuillequez" userId="e7fac481abea6bd0" providerId="LiveId" clId="{79E365E8-22BC-4EC2-9606-9A9AC6CD1D22}" dt="2025-11-25T08:54:04.024" v="9531" actId="1076"/>
-          <ac:spMkLst>
-            <pc:docMk/>
-            <pc:sldMk cId="0" sldId="271"/>
-            <ac:spMk id="3" creationId="{3A33F078-F242-EE97-2251-526C53A316B8}"/>
-          </ac:spMkLst>
-        </pc:spChg>
-        <pc:picChg chg="add del">
-          <ac:chgData name="Jean-Yves Vuillequez" userId="e7fac481abea6bd0" providerId="LiveId" clId="{79E365E8-22BC-4EC2-9606-9A9AC6CD1D22}" dt="2025-11-25T08:11:41.798" v="9527" actId="478"/>
-          <ac:picMkLst>
-            <pc:docMk/>
-            <pc:sldMk cId="0" sldId="271"/>
-            <ac:picMk id="188" creationId="{00000000-0000-0000-0000-000000000000}"/>
-          </ac:picMkLst>
-        </pc:picChg>
-        <pc:cxnChg chg="add mod">
-          <ac:chgData name="Jean-Yves Vuillequez" userId="e7fac481abea6bd0" providerId="LiveId" clId="{79E365E8-22BC-4EC2-9606-9A9AC6CD1D22}" dt="2025-11-25T08:54:11.101" v="9532" actId="208"/>
-          <ac:cxnSpMkLst>
-            <pc:docMk/>
-            <pc:sldMk cId="0" sldId="271"/>
-            <ac:cxnSpMk id="4" creationId="{E56D7E92-4368-94BE-9AB2-02EC3C191FD2}"/>
-          </ac:cxnSpMkLst>
-        </pc:cxnChg>
-      </pc:sldChg>
-      <pc:sldChg chg="modSp add del mod">
-        <pc:chgData name="Jean-Yves Vuillequez" userId="e7fac481abea6bd0" providerId="LiveId" clId="{79E365E8-22BC-4EC2-9606-9A9AC6CD1D22}" dt="2025-11-19T14:03:57.617" v="139" actId="20577"/>
-        <pc:sldMkLst>
-          <pc:docMk/>
-          <pc:sldMk cId="1558646683" sldId="273"/>
-        </pc:sldMkLst>
-        <pc:spChg chg="mod">
-          <ac:chgData name="Jean-Yves Vuillequez" userId="e7fac481abea6bd0" providerId="LiveId" clId="{79E365E8-22BC-4EC2-9606-9A9AC6CD1D22}" dt="2025-11-19T14:03:57.617" v="139" actId="20577"/>
-          <ac:spMkLst>
-            <pc:docMk/>
-            <pc:sldMk cId="1558646683" sldId="273"/>
-            <ac:spMk id="62" creationId="{1465D56F-7913-AD4E-8248-AEC9AC3FBC16}"/>
-          </ac:spMkLst>
-        </pc:spChg>
-      </pc:sldChg>
-      <pc:sldChg chg="addSp delSp modSp add mod ord delAnim modAnim modNotesTx">
-        <pc:chgData name="Jean-Yves Vuillequez" userId="e7fac481abea6bd0" providerId="LiveId" clId="{79E365E8-22BC-4EC2-9606-9A9AC6CD1D22}" dt="2025-11-24T15:07:08.350" v="9225" actId="1035"/>
+      <pc:sldChg chg="modNotesTx">
+        <pc:chgData name="Jean-Yves Vuillequez" userId="e7fac481abea6bd0" providerId="LiveId" clId="{79E365E8-22BC-4EC2-9606-9A9AC6CD1D22}" dt="2026-02-15T07:25:22.255" v="9730" actId="6549"/>
         <pc:sldMkLst>
           <pc:docMk/>
           <pc:sldMk cId="1821755839" sldId="274"/>
         </pc:sldMkLst>
-        <pc:spChg chg="add mod">
-          <ac:chgData name="Jean-Yves Vuillequez" userId="e7fac481abea6bd0" providerId="LiveId" clId="{79E365E8-22BC-4EC2-9606-9A9AC6CD1D22}" dt="2025-11-22T08:13:32.305" v="7198" actId="14100"/>
-          <ac:spMkLst>
-            <pc:docMk/>
-            <pc:sldMk cId="1821755839" sldId="274"/>
-            <ac:spMk id="2" creationId="{F584810C-5501-210A-FC09-7E76BEE6CF2D}"/>
-          </ac:spMkLst>
-        </pc:spChg>
-        <pc:spChg chg="add mod topLvl">
-          <ac:chgData name="Jean-Yves Vuillequez" userId="e7fac481abea6bd0" providerId="LiveId" clId="{79E365E8-22BC-4EC2-9606-9A9AC6CD1D22}" dt="2025-11-24T15:06:59.309" v="9219" actId="1035"/>
-          <ac:spMkLst>
-            <pc:docMk/>
-            <pc:sldMk cId="1821755839" sldId="274"/>
-            <ac:spMk id="3" creationId="{33B23519-5EFA-F17A-CAA2-6EF8A191B3CD}"/>
-          </ac:spMkLst>
-        </pc:spChg>
-        <pc:spChg chg="add mod">
-          <ac:chgData name="Jean-Yves Vuillequez" userId="e7fac481abea6bd0" providerId="LiveId" clId="{79E365E8-22BC-4EC2-9606-9A9AC6CD1D22}" dt="2025-11-24T10:42:29.706" v="8024" actId="164"/>
-          <ac:spMkLst>
-            <pc:docMk/>
-            <pc:sldMk cId="1821755839" sldId="274"/>
-            <ac:spMk id="4" creationId="{967D4A6C-3756-2775-B55E-F408743583CC}"/>
-          </ac:spMkLst>
-        </pc:spChg>
-        <pc:spChg chg="add mod">
-          <ac:chgData name="Jean-Yves Vuillequez" userId="e7fac481abea6bd0" providerId="LiveId" clId="{79E365E8-22BC-4EC2-9606-9A9AC6CD1D22}" dt="2025-11-24T10:41:51.408" v="8021" actId="1076"/>
-          <ac:spMkLst>
-            <pc:docMk/>
-            <pc:sldMk cId="1821755839" sldId="274"/>
-            <ac:spMk id="5" creationId="{564CE1A9-869C-774B-0E58-18DB76A3FCD2}"/>
-          </ac:spMkLst>
-        </pc:spChg>
-        <pc:spChg chg="add del mod">
-          <ac:chgData name="Jean-Yves Vuillequez" userId="e7fac481abea6bd0" providerId="LiveId" clId="{79E365E8-22BC-4EC2-9606-9A9AC6CD1D22}" dt="2025-11-24T11:14:50.738" v="8282" actId="478"/>
-          <ac:spMkLst>
-            <pc:docMk/>
-            <pc:sldMk cId="1821755839" sldId="274"/>
-            <ac:spMk id="7" creationId="{6D06EF0E-A17A-1744-5FF9-9D4CD5E1F964}"/>
-          </ac:spMkLst>
-        </pc:spChg>
-        <pc:spChg chg="add del mod">
-          <ac:chgData name="Jean-Yves Vuillequez" userId="e7fac481abea6bd0" providerId="LiveId" clId="{79E365E8-22BC-4EC2-9606-9A9AC6CD1D22}" dt="2025-11-24T11:10:41.028" v="8249" actId="478"/>
-          <ac:spMkLst>
-            <pc:docMk/>
-            <pc:sldMk cId="1821755839" sldId="274"/>
-            <ac:spMk id="8" creationId="{6C567287-A0C5-DA9A-1CC9-83D899179884}"/>
-          </ac:spMkLst>
-        </pc:spChg>
-        <pc:spChg chg="add mod ord">
-          <ac:chgData name="Jean-Yves Vuillequez" userId="e7fac481abea6bd0" providerId="LiveId" clId="{79E365E8-22BC-4EC2-9606-9A9AC6CD1D22}" dt="2025-11-22T08:13:32.305" v="7198" actId="14100"/>
-          <ac:spMkLst>
-            <pc:docMk/>
-            <pc:sldMk cId="1821755839" sldId="274"/>
-            <ac:spMk id="18" creationId="{44D928FD-3F68-ECAE-DF01-69E25D43D94B}"/>
-          </ac:spMkLst>
-        </pc:spChg>
-        <pc:spChg chg="add mod ord">
-          <ac:chgData name="Jean-Yves Vuillequez" userId="e7fac481abea6bd0" providerId="LiveId" clId="{79E365E8-22BC-4EC2-9606-9A9AC6CD1D22}" dt="2025-11-24T10:41:51.408" v="8021" actId="1076"/>
-          <ac:spMkLst>
-            <pc:docMk/>
-            <pc:sldMk cId="1821755839" sldId="274"/>
-            <ac:spMk id="22" creationId="{55F95513-FB46-9FE4-91D4-34DF9BFEC6C4}"/>
-          </ac:spMkLst>
-        </pc:spChg>
-        <pc:spChg chg="add mod topLvl">
-          <ac:chgData name="Jean-Yves Vuillequez" userId="e7fac481abea6bd0" providerId="LiveId" clId="{79E365E8-22BC-4EC2-9606-9A9AC6CD1D22}" dt="2025-11-24T14:43:38.162" v="9166" actId="164"/>
-          <ac:spMkLst>
-            <pc:docMk/>
-            <pc:sldMk cId="1821755839" sldId="274"/>
-            <ac:spMk id="23" creationId="{14BA37FE-DD89-0B23-6089-5FD37763331C}"/>
-          </ac:spMkLst>
-        </pc:spChg>
-        <pc:spChg chg="add mod ord">
-          <ac:chgData name="Jean-Yves Vuillequez" userId="e7fac481abea6bd0" providerId="LiveId" clId="{79E365E8-22BC-4EC2-9606-9A9AC6CD1D22}" dt="2025-11-24T10:42:29.706" v="8024" actId="164"/>
-          <ac:spMkLst>
-            <pc:docMk/>
-            <pc:sldMk cId="1821755839" sldId="274"/>
-            <ac:spMk id="26" creationId="{CCAE5A27-B2A2-0280-F66C-5CDBE7E24E20}"/>
-          </ac:spMkLst>
-        </pc:spChg>
-        <pc:spChg chg="add mod topLvl">
-          <ac:chgData name="Jean-Yves Vuillequez" userId="e7fac481abea6bd0" providerId="LiveId" clId="{79E365E8-22BC-4EC2-9606-9A9AC6CD1D22}" dt="2025-11-24T15:06:59.309" v="9219" actId="1035"/>
-          <ac:spMkLst>
-            <pc:docMk/>
-            <pc:sldMk cId="1821755839" sldId="274"/>
-            <ac:spMk id="31" creationId="{6F47604A-F072-9B2B-A28D-D050592AE8FB}"/>
-          </ac:spMkLst>
-        </pc:spChg>
-        <pc:spChg chg="add mod topLvl">
-          <ac:chgData name="Jean-Yves Vuillequez" userId="e7fac481abea6bd0" providerId="LiveId" clId="{79E365E8-22BC-4EC2-9606-9A9AC6CD1D22}" dt="2025-11-24T15:06:59.309" v="9219" actId="1035"/>
-          <ac:spMkLst>
-            <pc:docMk/>
-            <pc:sldMk cId="1821755839" sldId="274"/>
-            <ac:spMk id="32" creationId="{746A74A5-8390-A9B2-0686-BA8885C4CDA4}"/>
-          </ac:spMkLst>
-        </pc:spChg>
-        <pc:spChg chg="add mod ord topLvl">
-          <ac:chgData name="Jean-Yves Vuillequez" userId="e7fac481abea6bd0" providerId="LiveId" clId="{79E365E8-22BC-4EC2-9606-9A9AC6CD1D22}" dt="2025-11-24T15:06:59.309" v="9219" actId="1035"/>
-          <ac:spMkLst>
-            <pc:docMk/>
-            <pc:sldMk cId="1821755839" sldId="274"/>
-            <ac:spMk id="39" creationId="{AEAEB6F6-E6B3-2BA6-860A-9983C6A790DD}"/>
-          </ac:spMkLst>
-        </pc:spChg>
-        <pc:spChg chg="add mod topLvl">
-          <ac:chgData name="Jean-Yves Vuillequez" userId="e7fac481abea6bd0" providerId="LiveId" clId="{79E365E8-22BC-4EC2-9606-9A9AC6CD1D22}" dt="2025-11-24T14:42:18.867" v="9159" actId="164"/>
-          <ac:spMkLst>
-            <pc:docMk/>
-            <pc:sldMk cId="1821755839" sldId="274"/>
-            <ac:spMk id="44" creationId="{682088E1-064C-5214-7A97-A059E4869B55}"/>
-          </ac:spMkLst>
-        </pc:spChg>
-        <pc:spChg chg="mod">
-          <ac:chgData name="Jean-Yves Vuillequez" userId="e7fac481abea6bd0" providerId="LiveId" clId="{79E365E8-22BC-4EC2-9606-9A9AC6CD1D22}" dt="2025-11-24T14:43:20.946" v="9165" actId="165"/>
-          <ac:spMkLst>
-            <pc:docMk/>
-            <pc:sldMk cId="1821755839" sldId="274"/>
-            <ac:spMk id="45" creationId="{D7F593C2-1139-09D7-2E16-9F2706484D71}"/>
-          </ac:spMkLst>
-        </pc:spChg>
-        <pc:spChg chg="add mod ord topLvl">
-          <ac:chgData name="Jean-Yves Vuillequez" userId="e7fac481abea6bd0" providerId="LiveId" clId="{79E365E8-22BC-4EC2-9606-9A9AC6CD1D22}" dt="2025-11-24T14:42:18.867" v="9159" actId="164"/>
-          <ac:spMkLst>
-            <pc:docMk/>
-            <pc:sldMk cId="1821755839" sldId="274"/>
-            <ac:spMk id="46" creationId="{E433E364-4228-6856-536E-34873F6A6DC3}"/>
-          </ac:spMkLst>
-        </pc:spChg>
-        <pc:spChg chg="add mod topLvl">
-          <ac:chgData name="Jean-Yves Vuillequez" userId="e7fac481abea6bd0" providerId="LiveId" clId="{79E365E8-22BC-4EC2-9606-9A9AC6CD1D22}" dt="2025-11-24T14:42:18.867" v="9159" actId="164"/>
-          <ac:spMkLst>
-            <pc:docMk/>
-            <pc:sldMk cId="1821755839" sldId="274"/>
-            <ac:spMk id="47" creationId="{481D51B6-7D43-7926-6891-407782B836DE}"/>
-          </ac:spMkLst>
-        </pc:spChg>
-        <pc:spChg chg="add mod topLvl">
-          <ac:chgData name="Jean-Yves Vuillequez" userId="e7fac481abea6bd0" providerId="LiveId" clId="{79E365E8-22BC-4EC2-9606-9A9AC6CD1D22}" dt="2025-11-24T14:42:18.867" v="9159" actId="164"/>
-          <ac:spMkLst>
-            <pc:docMk/>
-            <pc:sldMk cId="1821755839" sldId="274"/>
-            <ac:spMk id="48" creationId="{FE31E2F0-6B8A-B0EE-9044-0597F28AE28A}"/>
-          </ac:spMkLst>
-        </pc:spChg>
-        <pc:spChg chg="add mod topLvl">
-          <ac:chgData name="Jean-Yves Vuillequez" userId="e7fac481abea6bd0" providerId="LiveId" clId="{79E365E8-22BC-4EC2-9606-9A9AC6CD1D22}" dt="2025-11-24T14:42:18.867" v="9159" actId="164"/>
-          <ac:spMkLst>
-            <pc:docMk/>
-            <pc:sldMk cId="1821755839" sldId="274"/>
-            <ac:spMk id="49" creationId="{8486A803-5325-E4EE-E6D1-9C2310E9372C}"/>
-          </ac:spMkLst>
-        </pc:spChg>
-        <pc:spChg chg="add mod topLvl">
-          <ac:chgData name="Jean-Yves Vuillequez" userId="e7fac481abea6bd0" providerId="LiveId" clId="{79E365E8-22BC-4EC2-9606-9A9AC6CD1D22}" dt="2025-11-24T14:42:18.867" v="9159" actId="164"/>
-          <ac:spMkLst>
-            <pc:docMk/>
-            <pc:sldMk cId="1821755839" sldId="274"/>
-            <ac:spMk id="50" creationId="{D45817E9-F26B-F5AC-E969-2DB4F41AE334}"/>
-          </ac:spMkLst>
-        </pc:spChg>
-        <pc:spChg chg="add mod">
-          <ac:chgData name="Jean-Yves Vuillequez" userId="e7fac481abea6bd0" providerId="LiveId" clId="{79E365E8-22BC-4EC2-9606-9A9AC6CD1D22}" dt="2025-11-24T14:42:18.867" v="9159" actId="164"/>
-          <ac:spMkLst>
-            <pc:docMk/>
-            <pc:sldMk cId="1821755839" sldId="274"/>
-            <ac:spMk id="52" creationId="{7A45A31B-42CC-CB8B-442E-3576FB243381}"/>
-          </ac:spMkLst>
-        </pc:spChg>
-        <pc:spChg chg="add mod topLvl">
-          <ac:chgData name="Jean-Yves Vuillequez" userId="e7fac481abea6bd0" providerId="LiveId" clId="{79E365E8-22BC-4EC2-9606-9A9AC6CD1D22}" dt="2025-11-24T14:42:18.867" v="9159" actId="164"/>
-          <ac:spMkLst>
-            <pc:docMk/>
-            <pc:sldMk cId="1821755839" sldId="274"/>
-            <ac:spMk id="53" creationId="{CF1F8123-FC2A-EF28-8139-FC1D62216C5F}"/>
-          </ac:spMkLst>
-        </pc:spChg>
-        <pc:spChg chg="add mod topLvl">
-          <ac:chgData name="Jean-Yves Vuillequez" userId="e7fac481abea6bd0" providerId="LiveId" clId="{79E365E8-22BC-4EC2-9606-9A9AC6CD1D22}" dt="2025-11-24T14:43:38.162" v="9166" actId="164"/>
-          <ac:spMkLst>
-            <pc:docMk/>
-            <pc:sldMk cId="1821755839" sldId="274"/>
-            <ac:spMk id="54" creationId="{3E4E5C19-19D1-7DB3-6126-771BB460CA7E}"/>
-          </ac:spMkLst>
-        </pc:spChg>
-        <pc:spChg chg="add mod topLvl">
-          <ac:chgData name="Jean-Yves Vuillequez" userId="e7fac481abea6bd0" providerId="LiveId" clId="{79E365E8-22BC-4EC2-9606-9A9AC6CD1D22}" dt="2025-11-24T14:43:38.162" v="9166" actId="164"/>
-          <ac:spMkLst>
-            <pc:docMk/>
-            <pc:sldMk cId="1821755839" sldId="274"/>
-            <ac:spMk id="55" creationId="{C4EB1607-BC4B-15A3-0324-3D29B9154D63}"/>
-          </ac:spMkLst>
-        </pc:spChg>
-        <pc:spChg chg="add mod topLvl">
-          <ac:chgData name="Jean-Yves Vuillequez" userId="e7fac481abea6bd0" providerId="LiveId" clId="{79E365E8-22BC-4EC2-9606-9A9AC6CD1D22}" dt="2025-11-24T14:43:38.162" v="9166" actId="164"/>
-          <ac:spMkLst>
-            <pc:docMk/>
-            <pc:sldMk cId="1821755839" sldId="274"/>
-            <ac:spMk id="56" creationId="{34BB09D2-59B3-0F52-1024-4F32B01B2F53}"/>
-          </ac:spMkLst>
-        </pc:spChg>
-        <pc:spChg chg="add mod topLvl">
-          <ac:chgData name="Jean-Yves Vuillequez" userId="e7fac481abea6bd0" providerId="LiveId" clId="{79E365E8-22BC-4EC2-9606-9A9AC6CD1D22}" dt="2025-11-24T14:43:38.162" v="9166" actId="164"/>
-          <ac:spMkLst>
-            <pc:docMk/>
-            <pc:sldMk cId="1821755839" sldId="274"/>
-            <ac:spMk id="57" creationId="{685F5B80-27B1-45A6-3DF8-0CF7271056CC}"/>
-          </ac:spMkLst>
-        </pc:spChg>
-        <pc:spChg chg="add mod topLvl">
-          <ac:chgData name="Jean-Yves Vuillequez" userId="e7fac481abea6bd0" providerId="LiveId" clId="{79E365E8-22BC-4EC2-9606-9A9AC6CD1D22}" dt="2025-11-24T15:06:59.309" v="9219" actId="1035"/>
-          <ac:spMkLst>
-            <pc:docMk/>
-            <pc:sldMk cId="1821755839" sldId="274"/>
-            <ac:spMk id="58" creationId="{42C67AD7-C645-5367-3E47-6D6A996C5FE8}"/>
-          </ac:spMkLst>
-        </pc:spChg>
-        <pc:spChg chg="add mod topLvl">
-          <ac:chgData name="Jean-Yves Vuillequez" userId="e7fac481abea6bd0" providerId="LiveId" clId="{79E365E8-22BC-4EC2-9606-9A9AC6CD1D22}" dt="2025-11-24T15:06:59.309" v="9219" actId="1035"/>
-          <ac:spMkLst>
-            <pc:docMk/>
-            <pc:sldMk cId="1821755839" sldId="274"/>
-            <ac:spMk id="67" creationId="{77C37EC6-CDFA-6EF5-9731-EDD14211D90B}"/>
-          </ac:spMkLst>
-        </pc:spChg>
-        <pc:spChg chg="add mod topLvl">
-          <ac:chgData name="Jean-Yves Vuillequez" userId="e7fac481abea6bd0" providerId="LiveId" clId="{79E365E8-22BC-4EC2-9606-9A9AC6CD1D22}" dt="2025-11-24T15:06:59.309" v="9219" actId="1035"/>
-          <ac:spMkLst>
-            <pc:docMk/>
-            <pc:sldMk cId="1821755839" sldId="274"/>
-            <ac:spMk id="70" creationId="{78E1D7E3-9E06-E6A5-253E-A6CE2A2F1050}"/>
-          </ac:spMkLst>
-        </pc:spChg>
-        <pc:spChg chg="add mod topLvl">
-          <ac:chgData name="Jean-Yves Vuillequez" userId="e7fac481abea6bd0" providerId="LiveId" clId="{79E365E8-22BC-4EC2-9606-9A9AC6CD1D22}" dt="2025-11-24T15:06:59.309" v="9219" actId="1035"/>
-          <ac:spMkLst>
-            <pc:docMk/>
-            <pc:sldMk cId="1821755839" sldId="274"/>
-            <ac:spMk id="71" creationId="{E74B2057-34BC-1980-9671-44A128491597}"/>
-          </ac:spMkLst>
-        </pc:spChg>
-        <pc:spChg chg="add mod topLvl">
-          <ac:chgData name="Jean-Yves Vuillequez" userId="e7fac481abea6bd0" providerId="LiveId" clId="{79E365E8-22BC-4EC2-9606-9A9AC6CD1D22}" dt="2025-11-24T15:06:59.309" v="9219" actId="1035"/>
-          <ac:spMkLst>
-            <pc:docMk/>
-            <pc:sldMk cId="1821755839" sldId="274"/>
-            <ac:spMk id="73" creationId="{33C41871-317D-BA64-26E2-EBEE7A51AE73}"/>
-          </ac:spMkLst>
-        </pc:spChg>
-        <pc:spChg chg="mod">
-          <ac:chgData name="Jean-Yves Vuillequez" userId="e7fac481abea6bd0" providerId="LiveId" clId="{79E365E8-22BC-4EC2-9606-9A9AC6CD1D22}" dt="2025-11-24T11:15:07.707" v="8283"/>
-          <ac:spMkLst>
-            <pc:docMk/>
-            <pc:sldMk cId="1821755839" sldId="274"/>
-            <ac:spMk id="74" creationId="{26095706-054B-32B8-76C9-580C8A4D3C09}"/>
-          </ac:spMkLst>
-        </pc:spChg>
-        <pc:spChg chg="add mod">
-          <ac:chgData name="Jean-Yves Vuillequez" userId="e7fac481abea6bd0" providerId="LiveId" clId="{79E365E8-22BC-4EC2-9606-9A9AC6CD1D22}" dt="2025-11-24T14:34:10.679" v="9156" actId="164"/>
-          <ac:spMkLst>
-            <pc:docMk/>
-            <pc:sldMk cId="1821755839" sldId="274"/>
-            <ac:spMk id="76" creationId="{0137AD1F-A369-4FCE-AD69-964680B420B5}"/>
-          </ac:spMkLst>
-        </pc:spChg>
-        <pc:spChg chg="mod">
-          <ac:chgData name="Jean-Yves Vuillequez" userId="e7fac481abea6bd0" providerId="LiveId" clId="{79E365E8-22BC-4EC2-9606-9A9AC6CD1D22}" dt="2025-11-24T14:33:53.619" v="9154" actId="164"/>
-          <ac:spMkLst>
-            <pc:docMk/>
-            <pc:sldMk cId="1821755839" sldId="274"/>
-            <ac:spMk id="79" creationId="{61FAC2B4-497C-99AF-7507-9699F89C2CB8}"/>
-          </ac:spMkLst>
-        </pc:spChg>
-        <pc:spChg chg="mod">
-          <ac:chgData name="Jean-Yves Vuillequez" userId="e7fac481abea6bd0" providerId="LiveId" clId="{79E365E8-22BC-4EC2-9606-9A9AC6CD1D22}" dt="2025-11-24T11:15:36.398" v="8286" actId="571"/>
-          <ac:spMkLst>
-            <pc:docMk/>
-            <pc:sldMk cId="1821755839" sldId="274"/>
-            <ac:spMk id="82" creationId="{18C06A43-2495-F8A2-C1D3-AC93D4524D92}"/>
-          </ac:spMkLst>
-        </pc:spChg>
-        <pc:spChg chg="mod">
-          <ac:chgData name="Jean-Yves Vuillequez" userId="e7fac481abea6bd0" providerId="LiveId" clId="{79E365E8-22BC-4EC2-9606-9A9AC6CD1D22}" dt="2025-11-24T08:27:20.212" v="7732" actId="1076"/>
-          <ac:spMkLst>
-            <pc:docMk/>
-            <pc:sldMk cId="1821755839" sldId="274"/>
-            <ac:spMk id="96" creationId="{E0E7B8E7-F933-D99A-FC55-A7E0AFDF3556}"/>
-          </ac:spMkLst>
-        </pc:spChg>
-        <pc:spChg chg="add mod topLvl">
-          <ac:chgData name="Jean-Yves Vuillequez" userId="e7fac481abea6bd0" providerId="LiveId" clId="{79E365E8-22BC-4EC2-9606-9A9AC6CD1D22}" dt="2025-11-24T15:06:59.309" v="9219" actId="1035"/>
-          <ac:spMkLst>
-            <pc:docMk/>
-            <pc:sldMk cId="1821755839" sldId="274"/>
-            <ac:spMk id="106" creationId="{70820C9A-B957-87A8-109D-6C661627DA4C}"/>
-          </ac:spMkLst>
-        </pc:spChg>
-        <pc:spChg chg="add mod topLvl">
-          <ac:chgData name="Jean-Yves Vuillequez" userId="e7fac481abea6bd0" providerId="LiveId" clId="{79E365E8-22BC-4EC2-9606-9A9AC6CD1D22}" dt="2025-11-24T14:43:38.162" v="9166" actId="164"/>
-          <ac:spMkLst>
-            <pc:docMk/>
-            <pc:sldMk cId="1821755839" sldId="274"/>
-            <ac:spMk id="1074" creationId="{4162FACA-EA89-9D97-B392-632929E9443D}"/>
-          </ac:spMkLst>
-        </pc:spChg>
-        <pc:spChg chg="add mod">
-          <ac:chgData name="Jean-Yves Vuillequez" userId="e7fac481abea6bd0" providerId="LiveId" clId="{79E365E8-22BC-4EC2-9606-9A9AC6CD1D22}" dt="2025-11-23T09:52:32.533" v="7718" actId="1037"/>
-          <ac:spMkLst>
-            <pc:docMk/>
-            <pc:sldMk cId="1821755839" sldId="274"/>
-            <ac:spMk id="2096" creationId="{273A85B6-13FD-89FF-E669-100D308ACE82}"/>
-          </ac:spMkLst>
-        </pc:spChg>
-        <pc:spChg chg="add mod topLvl">
-          <ac:chgData name="Jean-Yves Vuillequez" userId="e7fac481abea6bd0" providerId="LiveId" clId="{79E365E8-22BC-4EC2-9606-9A9AC6CD1D22}" dt="2025-11-24T14:43:20.946" v="9165" actId="165"/>
-          <ac:spMkLst>
-            <pc:docMk/>
-            <pc:sldMk cId="1821755839" sldId="274"/>
-            <ac:spMk id="2097" creationId="{ADF20F1D-E32A-83D7-1C9F-ED56E1ADF5A6}"/>
-          </ac:spMkLst>
-        </pc:spChg>
-        <pc:grpChg chg="add mod">
-          <ac:chgData name="Jean-Yves Vuillequez" userId="e7fac481abea6bd0" providerId="LiveId" clId="{79E365E8-22BC-4EC2-9606-9A9AC6CD1D22}" dt="2025-11-24T14:21:00.554" v="9065" actId="164"/>
-          <ac:grpSpMkLst>
-            <pc:docMk/>
-            <pc:sldMk cId="1821755839" sldId="274"/>
-            <ac:grpSpMk id="8" creationId="{0C0B5DFE-9029-C89B-C283-4ABED73985B0}"/>
-          </ac:grpSpMkLst>
-        </pc:grpChg>
-        <pc:grpChg chg="mod">
-          <ac:chgData name="Jean-Yves Vuillequez" userId="e7fac481abea6bd0" providerId="LiveId" clId="{79E365E8-22BC-4EC2-9606-9A9AC6CD1D22}" dt="2025-11-24T14:23:41.370" v="9073" actId="167"/>
-          <ac:grpSpMkLst>
-            <pc:docMk/>
-            <pc:sldMk cId="1821755839" sldId="274"/>
-            <ac:grpSpMk id="12" creationId="{A7B30922-9F63-FE5A-C7BA-CC33A518BC3E}"/>
-          </ac:grpSpMkLst>
-        </pc:grpChg>
-        <pc:grpChg chg="mod">
-          <ac:chgData name="Jean-Yves Vuillequez" userId="e7fac481abea6bd0" providerId="LiveId" clId="{79E365E8-22BC-4EC2-9606-9A9AC6CD1D22}" dt="2025-11-24T14:28:52.263" v="9114" actId="164"/>
-          <ac:grpSpMkLst>
-            <pc:docMk/>
-            <pc:sldMk cId="1821755839" sldId="274"/>
-            <ac:grpSpMk id="13" creationId="{2B2C01D0-D6D6-9525-FD76-532BB2D28C7B}"/>
-          </ac:grpSpMkLst>
-        </pc:grpChg>
-        <pc:grpChg chg="add mod">
-          <ac:chgData name="Jean-Yves Vuillequez" userId="e7fac481abea6bd0" providerId="LiveId" clId="{79E365E8-22BC-4EC2-9606-9A9AC6CD1D22}" dt="2025-11-24T14:28:52.263" v="9114" actId="164"/>
-          <ac:grpSpMkLst>
-            <pc:docMk/>
-            <pc:sldMk cId="1821755839" sldId="274"/>
-            <ac:grpSpMk id="14" creationId="{AC88C872-8021-5A03-5640-B462CDB7F327}"/>
-          </ac:grpSpMkLst>
-        </pc:grpChg>
-        <pc:grpChg chg="add mod">
-          <ac:chgData name="Jean-Yves Vuillequez" userId="e7fac481abea6bd0" providerId="LiveId" clId="{79E365E8-22BC-4EC2-9606-9A9AC6CD1D22}" dt="2025-11-24T14:33:03.819" v="9147" actId="164"/>
-          <ac:grpSpMkLst>
-            <pc:docMk/>
-            <pc:sldMk cId="1821755839" sldId="274"/>
-            <ac:grpSpMk id="25" creationId="{4B1DEF0E-3C11-180E-A253-FB6D258584E1}"/>
-          </ac:grpSpMkLst>
-        </pc:grpChg>
-        <pc:grpChg chg="add mod">
-          <ac:chgData name="Jean-Yves Vuillequez" userId="e7fac481abea6bd0" providerId="LiveId" clId="{79E365E8-22BC-4EC2-9606-9A9AC6CD1D22}" dt="2025-11-24T14:33:57.864" v="9155" actId="1076"/>
-          <ac:grpSpMkLst>
-            <pc:docMk/>
-            <pc:sldMk cId="1821755839" sldId="274"/>
-            <ac:grpSpMk id="27" creationId="{2E88C532-5DC4-9A8E-0BD9-8DCB5D7A9625}"/>
-          </ac:grpSpMkLst>
-        </pc:grpChg>
-        <pc:grpChg chg="add mod">
-          <ac:chgData name="Jean-Yves Vuillequez" userId="e7fac481abea6bd0" providerId="LiveId" clId="{79E365E8-22BC-4EC2-9606-9A9AC6CD1D22}" dt="2025-11-24T14:34:10.679" v="9156" actId="164"/>
-          <ac:grpSpMkLst>
-            <pc:docMk/>
-            <pc:sldMk cId="1821755839" sldId="274"/>
-            <ac:grpSpMk id="33" creationId="{75C2D434-8ADD-A5DA-1AED-8BF4C18B9EB3}"/>
-          </ac:grpSpMkLst>
-        </pc:grpChg>
-        <pc:grpChg chg="add mod">
-          <ac:chgData name="Jean-Yves Vuillequez" userId="e7fac481abea6bd0" providerId="LiveId" clId="{79E365E8-22BC-4EC2-9606-9A9AC6CD1D22}" dt="2025-11-24T14:43:38.162" v="9166" actId="164"/>
-          <ac:grpSpMkLst>
-            <pc:docMk/>
-            <pc:sldMk cId="1821755839" sldId="274"/>
-            <ac:grpSpMk id="35" creationId="{FD39475C-E631-B671-266E-B9334304C252}"/>
-          </ac:grpSpMkLst>
-        </pc:grpChg>
-        <pc:grpChg chg="add mod">
-          <ac:chgData name="Jean-Yves Vuillequez" userId="e7fac481abea6bd0" providerId="LiveId" clId="{79E365E8-22BC-4EC2-9606-9A9AC6CD1D22}" dt="2025-11-24T11:10:55.415" v="8253" actId="1076"/>
-          <ac:grpSpMkLst>
-            <pc:docMk/>
-            <pc:sldMk cId="1821755839" sldId="274"/>
-            <ac:grpSpMk id="42" creationId="{ABFDE930-E8FD-AEFC-C080-0E20435636B0}"/>
-          </ac:grpSpMkLst>
-        </pc:grpChg>
-        <pc:grpChg chg="add mod">
-          <ac:chgData name="Jean-Yves Vuillequez" userId="e7fac481abea6bd0" providerId="LiveId" clId="{79E365E8-22BC-4EC2-9606-9A9AC6CD1D22}" dt="2025-11-24T11:15:07.707" v="8283"/>
-          <ac:grpSpMkLst>
-            <pc:docMk/>
-            <pc:sldMk cId="1821755839" sldId="274"/>
-            <ac:grpSpMk id="72" creationId="{47EA9FF2-9DF7-7639-BD18-76EE2D042084}"/>
-          </ac:grpSpMkLst>
-        </pc:grpChg>
-        <pc:grpChg chg="add mod">
-          <ac:chgData name="Jean-Yves Vuillequez" userId="e7fac481abea6bd0" providerId="LiveId" clId="{79E365E8-22BC-4EC2-9606-9A9AC6CD1D22}" dt="2025-11-24T11:16:04.837" v="8291" actId="1076"/>
-          <ac:grpSpMkLst>
-            <pc:docMk/>
-            <pc:sldMk cId="1821755839" sldId="274"/>
-            <ac:grpSpMk id="77" creationId="{09848BCD-B655-BAB2-9F3C-2A743C138D6B}"/>
-          </ac:grpSpMkLst>
-        </pc:grpChg>
-        <pc:grpChg chg="add mod ord">
-          <ac:chgData name="Jean-Yves Vuillequez" userId="e7fac481abea6bd0" providerId="LiveId" clId="{79E365E8-22BC-4EC2-9606-9A9AC6CD1D22}" dt="2025-11-24T11:14:25.114" v="8281" actId="166"/>
-          <ac:grpSpMkLst>
-            <pc:docMk/>
-            <pc:sldMk cId="1821755839" sldId="274"/>
-            <ac:grpSpMk id="78" creationId="{48BB1303-220D-775F-BC97-35D0BC10D7AC}"/>
-          </ac:grpSpMkLst>
-        </pc:grpChg>
-        <pc:grpChg chg="add del mod">
-          <ac:chgData name="Jean-Yves Vuillequez" userId="e7fac481abea6bd0" providerId="LiveId" clId="{79E365E8-22BC-4EC2-9606-9A9AC6CD1D22}" dt="2025-11-24T11:16:06.972" v="8292" actId="478"/>
-          <ac:grpSpMkLst>
-            <pc:docMk/>
-            <pc:sldMk cId="1821755839" sldId="274"/>
-            <ac:grpSpMk id="81" creationId="{761C14D8-9764-3A3C-A6F0-A9FF5EFCBD6B}"/>
-          </ac:grpSpMkLst>
-        </pc:grpChg>
-        <pc:picChg chg="add mod topLvl">
-          <ac:chgData name="Jean-Yves Vuillequez" userId="e7fac481abea6bd0" providerId="LiveId" clId="{79E365E8-22BC-4EC2-9606-9A9AC6CD1D22}" dt="2025-11-24T14:33:03.819" v="9147" actId="164"/>
-          <ac:picMkLst>
-            <pc:docMk/>
-            <pc:sldMk cId="1821755839" sldId="274"/>
-            <ac:picMk id="20" creationId="{9F92FB23-9D37-AEB9-493C-1E3DAE1913D2}"/>
-          </ac:picMkLst>
-        </pc:picChg>
-        <pc:picChg chg="add mod">
-          <ac:chgData name="Jean-Yves Vuillequez" userId="e7fac481abea6bd0" providerId="LiveId" clId="{79E365E8-22BC-4EC2-9606-9A9AC6CD1D22}" dt="2025-11-24T14:43:38.162" v="9166" actId="164"/>
-          <ac:picMkLst>
-            <pc:docMk/>
-            <pc:sldMk cId="1821755839" sldId="274"/>
-            <ac:picMk id="21" creationId="{174134F5-72A3-DA25-E671-C7DDD8DFA83A}"/>
-          </ac:picMkLst>
-        </pc:picChg>
-        <pc:picChg chg="add del mod">
-          <ac:chgData name="Jean-Yves Vuillequez" userId="e7fac481abea6bd0" providerId="LiveId" clId="{79E365E8-22BC-4EC2-9606-9A9AC6CD1D22}" dt="2025-11-24T11:09:57.506" v="8246" actId="478"/>
-          <ac:picMkLst>
-            <pc:docMk/>
-            <pc:sldMk cId="1821755839" sldId="274"/>
-            <ac:picMk id="38" creationId="{61B9E27D-C2EF-72CE-94C6-361123613D5A}"/>
-          </ac:picMkLst>
-        </pc:picChg>
-        <pc:picChg chg="add mod">
-          <ac:chgData name="Jean-Yves Vuillequez" userId="e7fac481abea6bd0" providerId="LiveId" clId="{79E365E8-22BC-4EC2-9606-9A9AC6CD1D22}" dt="2025-11-24T11:10:46.266" v="8250"/>
-          <ac:picMkLst>
-            <pc:docMk/>
-            <pc:sldMk cId="1821755839" sldId="274"/>
-            <ac:picMk id="41" creationId="{423CD652-2D44-79D0-9F09-9A9E0A116B0C}"/>
-          </ac:picMkLst>
-        </pc:picChg>
-        <pc:picChg chg="add mod topLvl">
-          <ac:chgData name="Jean-Yves Vuillequez" userId="e7fac481abea6bd0" providerId="LiveId" clId="{79E365E8-22BC-4EC2-9606-9A9AC6CD1D22}" dt="2025-11-24T14:43:38.162" v="9166" actId="164"/>
-          <ac:picMkLst>
-            <pc:docMk/>
-            <pc:sldMk cId="1821755839" sldId="274"/>
-            <ac:picMk id="43" creationId="{A31CCBD7-31A9-6123-B61B-FB210F650877}"/>
-          </ac:picMkLst>
-        </pc:picChg>
-        <pc:picChg chg="add mod">
-          <ac:chgData name="Jean-Yves Vuillequez" userId="e7fac481abea6bd0" providerId="LiveId" clId="{79E365E8-22BC-4EC2-9606-9A9AC6CD1D22}" dt="2025-11-22T18:17:34.404" v="7627" actId="1036"/>
-          <ac:picMkLst>
-            <pc:docMk/>
-            <pc:sldMk cId="1821755839" sldId="274"/>
-            <ac:picMk id="51" creationId="{054FB5AB-F043-1139-CFA8-44C9034D1153}"/>
-          </ac:picMkLst>
-        </pc:picChg>
-        <pc:picChg chg="mod">
-          <ac:chgData name="Jean-Yves Vuillequez" userId="e7fac481abea6bd0" providerId="LiveId" clId="{79E365E8-22BC-4EC2-9606-9A9AC6CD1D22}" dt="2025-11-24T14:43:20.946" v="9165" actId="165"/>
-          <ac:picMkLst>
-            <pc:docMk/>
-            <pc:sldMk cId="1821755839" sldId="274"/>
-            <ac:picMk id="59" creationId="{66E29ABD-B82C-FAB9-3744-D1866DC79A32}"/>
-          </ac:picMkLst>
-        </pc:picChg>
-        <pc:picChg chg="add mod ord">
-          <ac:chgData name="Jean-Yves Vuillequez" userId="e7fac481abea6bd0" providerId="LiveId" clId="{79E365E8-22BC-4EC2-9606-9A9AC6CD1D22}" dt="2025-11-24T14:34:10.679" v="9156" actId="164"/>
-          <ac:picMkLst>
-            <pc:docMk/>
-            <pc:sldMk cId="1821755839" sldId="274"/>
-            <ac:picMk id="62" creationId="{C5C7BA9B-2B99-4B7A-7436-5F82DE29B981}"/>
-          </ac:picMkLst>
-        </pc:picChg>
-        <pc:picChg chg="add mod topLvl">
-          <ac:chgData name="Jean-Yves Vuillequez" userId="e7fac481abea6bd0" providerId="LiveId" clId="{79E365E8-22BC-4EC2-9606-9A9AC6CD1D22}" dt="2025-11-24T15:06:23.612" v="9207" actId="732"/>
-          <ac:picMkLst>
-            <pc:docMk/>
-            <pc:sldMk cId="1821755839" sldId="274"/>
-            <ac:picMk id="65" creationId="{976AB5B9-1D61-B29C-C9DE-9051A31E8E27}"/>
-          </ac:picMkLst>
-        </pc:picChg>
-        <pc:picChg chg="add mod topLvl">
-          <ac:chgData name="Jean-Yves Vuillequez" userId="e7fac481abea6bd0" providerId="LiveId" clId="{79E365E8-22BC-4EC2-9606-9A9AC6CD1D22}" dt="2025-11-24T15:06:23.612" v="9207" actId="732"/>
-          <ac:picMkLst>
-            <pc:docMk/>
-            <pc:sldMk cId="1821755839" sldId="274"/>
-            <ac:picMk id="68" creationId="{6A1FE08D-DF15-8940-EAA5-98ED76914736}"/>
-          </ac:picMkLst>
-        </pc:picChg>
-        <pc:picChg chg="mod">
-          <ac:chgData name="Jean-Yves Vuillequez" userId="e7fac481abea6bd0" providerId="LiveId" clId="{79E365E8-22BC-4EC2-9606-9A9AC6CD1D22}" dt="2025-11-24T11:15:07.707" v="8283"/>
-          <ac:picMkLst>
-            <pc:docMk/>
-            <pc:sldMk cId="1821755839" sldId="274"/>
-            <ac:picMk id="75" creationId="{586886EB-4D25-9840-8F7B-CD58BBADAFA6}"/>
-          </ac:picMkLst>
-        </pc:picChg>
-        <pc:picChg chg="mod">
-          <ac:chgData name="Jean-Yves Vuillequez" userId="e7fac481abea6bd0" providerId="LiveId" clId="{79E365E8-22BC-4EC2-9606-9A9AC6CD1D22}" dt="2025-11-24T14:33:53.619" v="9154" actId="164"/>
-          <ac:picMkLst>
-            <pc:docMk/>
-            <pc:sldMk cId="1821755839" sldId="274"/>
-            <ac:picMk id="80" creationId="{FEC09453-8329-B943-E8CD-D18A9746E3DE}"/>
-          </ac:picMkLst>
-        </pc:picChg>
-        <pc:picChg chg="mod">
-          <ac:chgData name="Jean-Yves Vuillequez" userId="e7fac481abea6bd0" providerId="LiveId" clId="{79E365E8-22BC-4EC2-9606-9A9AC6CD1D22}" dt="2025-11-24T11:15:36.398" v="8286" actId="571"/>
-          <ac:picMkLst>
-            <pc:docMk/>
-            <pc:sldMk cId="1821755839" sldId="274"/>
-            <ac:picMk id="83" creationId="{98F38E63-7956-4830-D851-BEFE1B62BA8D}"/>
-          </ac:picMkLst>
-        </pc:picChg>
-        <pc:picChg chg="add mod topLvl">
-          <ac:chgData name="Jean-Yves Vuillequez" userId="e7fac481abea6bd0" providerId="LiveId" clId="{79E365E8-22BC-4EC2-9606-9A9AC6CD1D22}" dt="2025-11-24T14:33:03.819" v="9147" actId="164"/>
-          <ac:picMkLst>
-            <pc:docMk/>
-            <pc:sldMk cId="1821755839" sldId="274"/>
-            <ac:picMk id="107" creationId="{9E201599-7D6B-4671-395A-AB9C1CE55DB4}"/>
-          </ac:picMkLst>
-        </pc:picChg>
-        <pc:picChg chg="add mod topLvl">
-          <ac:chgData name="Jean-Yves Vuillequez" userId="e7fac481abea6bd0" providerId="LiveId" clId="{79E365E8-22BC-4EC2-9606-9A9AC6CD1D22}" dt="2025-11-24T14:33:03.819" v="9147" actId="164"/>
-          <ac:picMkLst>
-            <pc:docMk/>
-            <pc:sldMk cId="1821755839" sldId="274"/>
-            <ac:picMk id="116" creationId="{B7DCCBAF-8A38-3C4F-0798-30A393D5D283}"/>
-          </ac:picMkLst>
-        </pc:picChg>
-        <pc:picChg chg="add mod">
-          <ac:chgData name="Jean-Yves Vuillequez" userId="e7fac481abea6bd0" providerId="LiveId" clId="{79E365E8-22BC-4EC2-9606-9A9AC6CD1D22}" dt="2025-11-24T14:33:03.819" v="9147" actId="164"/>
-          <ac:picMkLst>
-            <pc:docMk/>
-            <pc:sldMk cId="1821755839" sldId="274"/>
-            <ac:picMk id="117" creationId="{B3747ED9-0378-A202-7151-54782D96CF66}"/>
-          </ac:picMkLst>
-        </pc:picChg>
-        <pc:picChg chg="add mod">
-          <ac:chgData name="Jean-Yves Vuillequez" userId="e7fac481abea6bd0" providerId="LiveId" clId="{79E365E8-22BC-4EC2-9606-9A9AC6CD1D22}" dt="2025-11-24T15:06:23.612" v="9207" actId="732"/>
-          <ac:picMkLst>
-            <pc:docMk/>
-            <pc:sldMk cId="1821755839" sldId="274"/>
-            <ac:picMk id="127" creationId="{0DF6E305-58E0-10D9-0E90-7E26126193AF}"/>
-          </ac:picMkLst>
-        </pc:picChg>
-        <pc:picChg chg="add mod topLvl">
-          <ac:chgData name="Jean-Yves Vuillequez" userId="e7fac481abea6bd0" providerId="LiveId" clId="{79E365E8-22BC-4EC2-9606-9A9AC6CD1D22}" dt="2025-11-22T18:31:07.116" v="7713" actId="1035"/>
-          <ac:picMkLst>
-            <pc:docMk/>
-            <pc:sldMk cId="1821755839" sldId="274"/>
-            <ac:picMk id="1026" creationId="{923FE2F2-F305-A7CE-975B-2A2BA912E4B7}"/>
-          </ac:picMkLst>
-        </pc:picChg>
-        <pc:picChg chg="add mod topLvl">
-          <ac:chgData name="Jean-Yves Vuillequez" userId="e7fac481abea6bd0" providerId="LiveId" clId="{79E365E8-22BC-4EC2-9606-9A9AC6CD1D22}" dt="2025-11-22T18:31:07.116" v="7713" actId="1035"/>
-          <ac:picMkLst>
-            <pc:docMk/>
-            <pc:sldMk cId="1821755839" sldId="274"/>
-            <ac:picMk id="1028" creationId="{D0C03EA7-EAD6-1A33-21AE-920B9121582F}"/>
-          </ac:picMkLst>
-        </pc:picChg>
-        <pc:picChg chg="add mod topLvl">
-          <ac:chgData name="Jean-Yves Vuillequez" userId="e7fac481abea6bd0" providerId="LiveId" clId="{79E365E8-22BC-4EC2-9606-9A9AC6CD1D22}" dt="2025-11-24T15:06:23.612" v="9207" actId="732"/>
-          <ac:picMkLst>
-            <pc:docMk/>
-            <pc:sldMk cId="1821755839" sldId="274"/>
-            <ac:picMk id="1030" creationId="{2941D76B-6840-C572-907F-F3680B66EBF7}"/>
-          </ac:picMkLst>
-        </pc:picChg>
-        <pc:picChg chg="add mod">
-          <ac:chgData name="Jean-Yves Vuillequez" userId="e7fac481abea6bd0" providerId="LiveId" clId="{79E365E8-22BC-4EC2-9606-9A9AC6CD1D22}" dt="2025-11-24T15:06:23.612" v="9207" actId="732"/>
-          <ac:picMkLst>
-            <pc:docMk/>
-            <pc:sldMk cId="1821755839" sldId="274"/>
-            <ac:picMk id="1033" creationId="{FD816D59-77CA-1E04-DAC5-C8410FAC6198}"/>
-          </ac:picMkLst>
-        </pc:picChg>
-        <pc:picChg chg="add mod topLvl">
-          <ac:chgData name="Jean-Yves Vuillequez" userId="e7fac481abea6bd0" providerId="LiveId" clId="{79E365E8-22BC-4EC2-9606-9A9AC6CD1D22}" dt="2025-11-24T14:42:18.867" v="9159" actId="164"/>
-          <ac:picMkLst>
-            <pc:docMk/>
-            <pc:sldMk cId="1821755839" sldId="274"/>
-            <ac:picMk id="1034" creationId="{748B16F9-6C53-91C1-4712-424BF6CE8989}"/>
-          </ac:picMkLst>
-        </pc:picChg>
-        <pc:picChg chg="add mod">
-          <ac:chgData name="Jean-Yves Vuillequez" userId="e7fac481abea6bd0" providerId="LiveId" clId="{79E365E8-22BC-4EC2-9606-9A9AC6CD1D22}" dt="2025-11-24T10:57:22.450" v="8107" actId="1076"/>
-          <ac:picMkLst>
-            <pc:docMk/>
-            <pc:sldMk cId="1821755839" sldId="274"/>
-            <ac:picMk id="1036" creationId="{135630BC-F5F0-17C1-438A-A312C16997F8}"/>
-          </ac:picMkLst>
-        </pc:picChg>
-        <pc:picChg chg="add mod">
-          <ac:chgData name="Jean-Yves Vuillequez" userId="e7fac481abea6bd0" providerId="LiveId" clId="{79E365E8-22BC-4EC2-9606-9A9AC6CD1D22}" dt="2025-11-24T10:41:03.494" v="8014" actId="1076"/>
-          <ac:picMkLst>
-            <pc:docMk/>
-            <pc:sldMk cId="1821755839" sldId="274"/>
-            <ac:picMk id="1038" creationId="{1B3822DD-A0E9-A37F-0DE9-40781F1C3DF4}"/>
-          </ac:picMkLst>
-        </pc:picChg>
-        <pc:picChg chg="add mod topLvl">
-          <ac:chgData name="Jean-Yves Vuillequez" userId="e7fac481abea6bd0" providerId="LiveId" clId="{79E365E8-22BC-4EC2-9606-9A9AC6CD1D22}" dt="2025-11-24T14:43:38.162" v="9166" actId="164"/>
-          <ac:picMkLst>
-            <pc:docMk/>
-            <pc:sldMk cId="1821755839" sldId="274"/>
-            <ac:picMk id="2052" creationId="{FCCA093A-E48A-7B59-31BE-E1F8F80AD69D}"/>
-          </ac:picMkLst>
-        </pc:picChg>
-        <pc:picChg chg="add mod">
-          <ac:chgData name="Jean-Yves Vuillequez" userId="e7fac481abea6bd0" providerId="LiveId" clId="{79E365E8-22BC-4EC2-9606-9A9AC6CD1D22}" dt="2025-11-24T14:42:18.867" v="9159" actId="164"/>
-          <ac:picMkLst>
-            <pc:docMk/>
-            <pc:sldMk cId="1821755839" sldId="274"/>
-            <ac:picMk id="2054" creationId="{A2294E8E-D08B-505D-5B9D-D8788A9CD32B}"/>
-          </ac:picMkLst>
-        </pc:picChg>
-        <pc:picChg chg="add mod">
-          <ac:chgData name="Jean-Yves Vuillequez" userId="e7fac481abea6bd0" providerId="LiveId" clId="{79E365E8-22BC-4EC2-9606-9A9AC6CD1D22}" dt="2025-11-24T11:29:41.163" v="8310" actId="1036"/>
-          <ac:picMkLst>
-            <pc:docMk/>
-            <pc:sldMk cId="1821755839" sldId="274"/>
-            <ac:picMk id="2068" creationId="{9336168E-33DE-2E2C-3F3A-3E4FC0819D15}"/>
-          </ac:picMkLst>
-        </pc:picChg>
-        <pc:cxnChg chg="add mod">
-          <ac:chgData name="Jean-Yves Vuillequez" userId="e7fac481abea6bd0" providerId="LiveId" clId="{79E365E8-22BC-4EC2-9606-9A9AC6CD1D22}" dt="2025-11-24T15:07:08.350" v="9225" actId="1035"/>
-          <ac:cxnSpMkLst>
-            <pc:docMk/>
-            <pc:sldMk cId="1821755839" sldId="274"/>
-            <ac:cxnSpMk id="6" creationId="{804A8FE7-27C3-4C54-36F8-6A8C0900C5DA}"/>
-          </ac:cxnSpMkLst>
-        </pc:cxnChg>
-        <pc:cxnChg chg="add mod">
-          <ac:chgData name="Jean-Yves Vuillequez" userId="e7fac481abea6bd0" providerId="LiveId" clId="{79E365E8-22BC-4EC2-9606-9A9AC6CD1D22}" dt="2025-11-22T18:26:55.253" v="7703" actId="1582"/>
-          <ac:cxnSpMkLst>
-            <pc:docMk/>
-            <pc:sldMk cId="1821755839" sldId="274"/>
-            <ac:cxnSpMk id="10" creationId="{A34EFFD9-2B7F-223F-36C3-4CCC46291479}"/>
-          </ac:cxnSpMkLst>
-        </pc:cxnChg>
-        <pc:cxnChg chg="add mod">
-          <ac:chgData name="Jean-Yves Vuillequez" userId="e7fac481abea6bd0" providerId="LiveId" clId="{79E365E8-22BC-4EC2-9606-9A9AC6CD1D22}" dt="2025-11-24T15:06:41.662" v="9216" actId="14100"/>
-          <ac:cxnSpMkLst>
-            <pc:docMk/>
-            <pc:sldMk cId="1821755839" sldId="274"/>
-            <ac:cxnSpMk id="11" creationId="{D8A48580-543E-68C9-355D-6C2F58EACB96}"/>
-          </ac:cxnSpMkLst>
-        </pc:cxnChg>
-        <pc:cxnChg chg="add mod">
-          <ac:chgData name="Jean-Yves Vuillequez" userId="e7fac481abea6bd0" providerId="LiveId" clId="{79E365E8-22BC-4EC2-9606-9A9AC6CD1D22}" dt="2025-11-24T11:11:54.035" v="8274" actId="14100"/>
-          <ac:cxnSpMkLst>
-            <pc:docMk/>
-            <pc:sldMk cId="1821755839" sldId="274"/>
-            <ac:cxnSpMk id="17" creationId="{E363E85D-958E-F6A6-C279-98695543B49C}"/>
-          </ac:cxnSpMkLst>
-        </pc:cxnChg>
-        <pc:cxnChg chg="add mod">
-          <ac:chgData name="Jean-Yves Vuillequez" userId="e7fac481abea6bd0" providerId="LiveId" clId="{79E365E8-22BC-4EC2-9606-9A9AC6CD1D22}" dt="2025-11-24T11:11:43.683" v="8272" actId="1036"/>
-          <ac:cxnSpMkLst>
-            <pc:docMk/>
-            <pc:sldMk cId="1821755839" sldId="274"/>
-            <ac:cxnSpMk id="19" creationId="{7965C0EE-9642-2EA9-734C-AF9138078030}"/>
-          </ac:cxnSpMkLst>
-        </pc:cxnChg>
-        <pc:cxnChg chg="add mod">
-          <ac:chgData name="Jean-Yves Vuillequez" userId="e7fac481abea6bd0" providerId="LiveId" clId="{79E365E8-22BC-4EC2-9606-9A9AC6CD1D22}" dt="2025-11-22T18:19:13.006" v="7656" actId="108"/>
-          <ac:cxnSpMkLst>
-            <pc:docMk/>
-            <pc:sldMk cId="1821755839" sldId="274"/>
-            <ac:cxnSpMk id="24" creationId="{9AD6B91C-AEA0-8BCF-42B4-76BEC72FDE00}"/>
-          </ac:cxnSpMkLst>
-        </pc:cxnChg>
-        <pc:cxnChg chg="add del mod">
-          <ac:chgData name="Jean-Yves Vuillequez" userId="e7fac481abea6bd0" providerId="LiveId" clId="{79E365E8-22BC-4EC2-9606-9A9AC6CD1D22}" dt="2025-11-24T10:58:22.172" v="8149" actId="478"/>
-          <ac:cxnSpMkLst>
-            <pc:docMk/>
-            <pc:sldMk cId="1821755839" sldId="274"/>
-            <ac:cxnSpMk id="27" creationId="{10B31F45-EE59-3B06-0BB0-9F63BE518A6D}"/>
-          </ac:cxnSpMkLst>
-        </pc:cxnChg>
-        <pc:cxnChg chg="add mod">
-          <ac:chgData name="Jean-Yves Vuillequez" userId="e7fac481abea6bd0" providerId="LiveId" clId="{79E365E8-22BC-4EC2-9606-9A9AC6CD1D22}" dt="2025-11-20T20:26:59.699" v="5173" actId="164"/>
-          <ac:cxnSpMkLst>
-            <pc:docMk/>
-            <pc:sldMk cId="1821755839" sldId="274"/>
-            <ac:cxnSpMk id="28" creationId="{66A68388-D1A7-6AC6-5F1F-65E1A6494D4A}"/>
-          </ac:cxnSpMkLst>
-        </pc:cxnChg>
-        <pc:cxnChg chg="add mod">
-          <ac:chgData name="Jean-Yves Vuillequez" userId="e7fac481abea6bd0" providerId="LiveId" clId="{79E365E8-22BC-4EC2-9606-9A9AC6CD1D22}" dt="2025-11-22T18:17:26.646" v="7623" actId="1076"/>
-          <ac:cxnSpMkLst>
-            <pc:docMk/>
-            <pc:sldMk cId="1821755839" sldId="274"/>
-            <ac:cxnSpMk id="29" creationId="{2F5C326A-12BF-B849-9176-2CB67D7A7ED9}"/>
-          </ac:cxnSpMkLst>
-        </pc:cxnChg>
-        <pc:cxnChg chg="add mod topLvl">
-          <ac:chgData name="Jean-Yves Vuillequez" userId="e7fac481abea6bd0" providerId="LiveId" clId="{79E365E8-22BC-4EC2-9606-9A9AC6CD1D22}" dt="2025-11-24T14:28:52.263" v="9114" actId="164"/>
-          <ac:cxnSpMkLst>
-            <pc:docMk/>
-            <pc:sldMk cId="1821755839" sldId="274"/>
-            <ac:cxnSpMk id="30" creationId="{DD9C7B50-C6F5-7260-C61A-2CAE5E4C0BF7}"/>
-          </ac:cxnSpMkLst>
-        </pc:cxnChg>
-        <pc:cxnChg chg="add mod">
-          <ac:chgData name="Jean-Yves Vuillequez" userId="e7fac481abea6bd0" providerId="LiveId" clId="{79E365E8-22BC-4EC2-9606-9A9AC6CD1D22}" dt="2025-11-24T11:29:41.163" v="8310" actId="1036"/>
-          <ac:cxnSpMkLst>
-            <pc:docMk/>
-            <pc:sldMk cId="1821755839" sldId="274"/>
-            <ac:cxnSpMk id="84" creationId="{9FB5173D-B04A-5921-8DF1-AA3A6807A99D}"/>
-          </ac:cxnSpMkLst>
-        </pc:cxnChg>
-        <pc:cxnChg chg="add mod ord topLvl">
-          <ac:chgData name="Jean-Yves Vuillequez" userId="e7fac481abea6bd0" providerId="LiveId" clId="{79E365E8-22BC-4EC2-9606-9A9AC6CD1D22}" dt="2025-11-24T10:41:01.075" v="8012" actId="1076"/>
-          <ac:cxnSpMkLst>
-            <pc:docMk/>
-            <pc:sldMk cId="1821755839" sldId="274"/>
-            <ac:cxnSpMk id="108" creationId="{8FC538F3-E888-6C1B-940B-D6B968D8FCEE}"/>
-          </ac:cxnSpMkLst>
-        </pc:cxnChg>
-        <pc:cxnChg chg="add mod">
-          <ac:chgData name="Jean-Yves Vuillequez" userId="e7fac481abea6bd0" providerId="LiveId" clId="{79E365E8-22BC-4EC2-9606-9A9AC6CD1D22}" dt="2025-11-22T18:23:16.737" v="7679" actId="14100"/>
-          <ac:cxnSpMkLst>
-            <pc:docMk/>
-            <pc:sldMk cId="1821755839" sldId="274"/>
-            <ac:cxnSpMk id="1029" creationId="{0E52F53C-5DBE-6D5C-C0A2-D6081CFAB7CB}"/>
-          </ac:cxnSpMkLst>
-        </pc:cxnChg>
-        <pc:cxnChg chg="add mod">
-          <ac:chgData name="Jean-Yves Vuillequez" userId="e7fac481abea6bd0" providerId="LiveId" clId="{79E365E8-22BC-4EC2-9606-9A9AC6CD1D22}" dt="2025-11-24T10:41:01.075" v="8012" actId="1076"/>
-          <ac:cxnSpMkLst>
-            <pc:docMk/>
-            <pc:sldMk cId="1821755839" sldId="274"/>
-            <ac:cxnSpMk id="1046" creationId="{F59A3777-3D90-7CA7-F89E-8874DA5F6283}"/>
-          </ac:cxnSpMkLst>
-        </pc:cxnChg>
-        <pc:cxnChg chg="add mod">
-          <ac:chgData name="Jean-Yves Vuillequez" userId="e7fac481abea6bd0" providerId="LiveId" clId="{79E365E8-22BC-4EC2-9606-9A9AC6CD1D22}" dt="2025-11-22T18:22:29.522" v="7678" actId="208"/>
-          <ac:cxnSpMkLst>
-            <pc:docMk/>
-            <pc:sldMk cId="1821755839" sldId="274"/>
-            <ac:cxnSpMk id="1062" creationId="{0CF073E9-1859-B299-0281-F152BD635678}"/>
-          </ac:cxnSpMkLst>
-        </pc:cxnChg>
-        <pc:cxnChg chg="add mod">
-          <ac:chgData name="Jean-Yves Vuillequez" userId="e7fac481abea6bd0" providerId="LiveId" clId="{79E365E8-22BC-4EC2-9606-9A9AC6CD1D22}" dt="2025-11-24T11:12:43.152" v="8278" actId="208"/>
-          <ac:cxnSpMkLst>
-            <pc:docMk/>
-            <pc:sldMk cId="1821755839" sldId="274"/>
-            <ac:cxnSpMk id="1068" creationId="{3FF98031-1DCE-7770-7F38-10F134A37AB2}"/>
-          </ac:cxnSpMkLst>
-        </pc:cxnChg>
-        <pc:cxnChg chg="add mod">
-          <ac:chgData name="Jean-Yves Vuillequez" userId="e7fac481abea6bd0" providerId="LiveId" clId="{79E365E8-22BC-4EC2-9606-9A9AC6CD1D22}" dt="2025-11-24T11:10:35.885" v="8248" actId="108"/>
-          <ac:cxnSpMkLst>
-            <pc:docMk/>
-            <pc:sldMk cId="1821755839" sldId="274"/>
-            <ac:cxnSpMk id="1075" creationId="{EB70B985-2508-613E-3824-FAD3BB6966AC}"/>
-          </ac:cxnSpMkLst>
-        </pc:cxnChg>
-        <pc:cxnChg chg="add mod">
-          <ac:chgData name="Jean-Yves Vuillequez" userId="e7fac481abea6bd0" providerId="LiveId" clId="{79E365E8-22BC-4EC2-9606-9A9AC6CD1D22}" dt="2025-11-24T11:29:41.163" v="8310" actId="1036"/>
-          <ac:cxnSpMkLst>
-            <pc:docMk/>
-            <pc:sldMk cId="1821755839" sldId="274"/>
-            <ac:cxnSpMk id="2101" creationId="{47334CC6-EC52-DED0-C7E9-A5E77BF2B99A}"/>
-          </ac:cxnSpMkLst>
-        </pc:cxnChg>
       </pc:sldChg>
-      <pc:sldChg chg="addSp delSp modSp add mod ord">
-        <pc:chgData name="Jean-Yves Vuillequez" userId="e7fac481abea6bd0" providerId="LiveId" clId="{79E365E8-22BC-4EC2-9606-9A9AC6CD1D22}" dt="2025-11-20T16:41:43.422" v="4740" actId="113"/>
+      <pc:sldChg chg="ord">
+        <pc:chgData name="Jean-Yves Vuillequez" userId="e7fac481abea6bd0" providerId="LiveId" clId="{79E365E8-22BC-4EC2-9606-9A9AC6CD1D22}" dt="2026-02-15T07:28:46.088" v="9736" actId="20578"/>
         <pc:sldMkLst>
           <pc:docMk/>
           <pc:sldMk cId="4088050223" sldId="275"/>
         </pc:sldMkLst>
-        <pc:spChg chg="add mod">
-          <ac:chgData name="Jean-Yves Vuillequez" userId="e7fac481abea6bd0" providerId="LiveId" clId="{79E365E8-22BC-4EC2-9606-9A9AC6CD1D22}" dt="2025-11-20T16:11:43.034" v="4634" actId="948"/>
-          <ac:spMkLst>
-            <pc:docMk/>
-            <pc:sldMk cId="4088050223" sldId="275"/>
-            <ac:spMk id="4" creationId="{9EF8D937-D220-A74B-8191-12E681FE1A08}"/>
-          </ac:spMkLst>
-        </pc:spChg>
-        <pc:spChg chg="mod">
-          <ac:chgData name="Jean-Yves Vuillequez" userId="e7fac481abea6bd0" providerId="LiveId" clId="{79E365E8-22BC-4EC2-9606-9A9AC6CD1D22}" dt="2025-11-20T16:41:43.422" v="4740" actId="113"/>
-          <ac:spMkLst>
-            <pc:docMk/>
-            <pc:sldMk cId="4088050223" sldId="275"/>
-            <ac:spMk id="96" creationId="{CFE260F2-EC75-DDF8-CE55-329FB5D8E4C4}"/>
-          </ac:spMkLst>
-        </pc:spChg>
       </pc:sldChg>
-      <pc:sldChg chg="addSp delSp modSp mod addAnim delAnim modAnim modNotesTx">
-        <pc:chgData name="Jean-Yves Vuillequez" userId="e7fac481abea6bd0" providerId="LiveId" clId="{79E365E8-22BC-4EC2-9606-9A9AC6CD1D22}" dt="2025-11-20T20:03:48.943" v="4847"/>
+      <pc:sldChg chg="modSp">
+        <pc:chgData name="Jean-Yves Vuillequez" userId="e7fac481abea6bd0" providerId="LiveId" clId="{79E365E8-22BC-4EC2-9606-9A9AC6CD1D22}" dt="2026-02-15T09:09:45.580" v="9991" actId="404"/>
         <pc:sldMkLst>
           <pc:docMk/>
           <pc:sldMk cId="406580661" sldId="286"/>
         </pc:sldMkLst>
-        <pc:spChg chg="add mod">
-          <ac:chgData name="Jean-Yves Vuillequez" userId="e7fac481abea6bd0" providerId="LiveId" clId="{79E365E8-22BC-4EC2-9606-9A9AC6CD1D22}" dt="2025-11-20T20:01:17.573" v="4830" actId="113"/>
+        <pc:spChg chg="mod">
+          <ac:chgData name="Jean-Yves Vuillequez" userId="e7fac481abea6bd0" providerId="LiveId" clId="{79E365E8-22BC-4EC2-9606-9A9AC6CD1D22}" dt="2026-02-15T09:09:37.076" v="9978" actId="404"/>
           <ac:spMkLst>
             <pc:docMk/>
             <pc:sldMk cId="406580661" sldId="286"/>
             <ac:spMk id="3" creationId="{E62B04DD-611C-26E7-F33B-2490F943666E}"/>
           </ac:spMkLst>
         </pc:spChg>
-        <pc:spChg chg="add mod">
-          <ac:chgData name="Jean-Yves Vuillequez" userId="e7fac481abea6bd0" providerId="LiveId" clId="{79E365E8-22BC-4EC2-9606-9A9AC6CD1D22}" dt="2025-11-20T14:11:45.501" v="3566" actId="1076"/>
-          <ac:spMkLst>
-            <pc:docMk/>
-            <pc:sldMk cId="406580661" sldId="286"/>
-            <ac:spMk id="5" creationId="{70346AF7-2EF1-3620-DDC0-3FB0A4344A61}"/>
-          </ac:spMkLst>
-        </pc:spChg>
-        <pc:spChg chg="add mod">
-          <ac:chgData name="Jean-Yves Vuillequez" userId="e7fac481abea6bd0" providerId="LiveId" clId="{79E365E8-22BC-4EC2-9606-9A9AC6CD1D22}" dt="2025-11-20T20:01:28.181" v="4837" actId="113"/>
+        <pc:spChg chg="mod">
+          <ac:chgData name="Jean-Yves Vuillequez" userId="e7fac481abea6bd0" providerId="LiveId" clId="{79E365E8-22BC-4EC2-9606-9A9AC6CD1D22}" dt="2026-02-15T09:09:45.580" v="9991" actId="404"/>
           <ac:spMkLst>
             <pc:docMk/>
             <pc:sldMk cId="406580661" sldId="286"/>
             <ac:spMk id="6" creationId="{EECDC86C-FCEE-561B-5E32-81BAAA77D281}"/>
           </ac:spMkLst>
         </pc:spChg>
-        <pc:spChg chg="add mod">
-          <ac:chgData name="Jean-Yves Vuillequez" userId="e7fac481abea6bd0" providerId="LiveId" clId="{79E365E8-22BC-4EC2-9606-9A9AC6CD1D22}" dt="2025-11-20T16:49:28.425" v="4780" actId="1076"/>
-          <ac:spMkLst>
-            <pc:docMk/>
-            <pc:sldMk cId="406580661" sldId="286"/>
-            <ac:spMk id="7" creationId="{5B604FB2-0DB7-F88D-245F-B97935413119}"/>
-          </ac:spMkLst>
-        </pc:spChg>
-        <pc:spChg chg="add mod">
-          <ac:chgData name="Jean-Yves Vuillequez" userId="e7fac481abea6bd0" providerId="LiveId" clId="{79E365E8-22BC-4EC2-9606-9A9AC6CD1D22}" dt="2025-11-20T20:01:06.610" v="4829" actId="404"/>
-          <ac:spMkLst>
-            <pc:docMk/>
-            <pc:sldMk cId="406580661" sldId="286"/>
-            <ac:spMk id="8" creationId="{9642715D-CAE4-8BA3-47DD-C9EF6EBB8572}"/>
-          </ac:spMkLst>
-        </pc:spChg>
-        <pc:spChg chg="add mod">
-          <ac:chgData name="Jean-Yves Vuillequez" userId="e7fac481abea6bd0" providerId="LiveId" clId="{79E365E8-22BC-4EC2-9606-9A9AC6CD1D22}" dt="2025-11-20T14:16:41.205" v="3597" actId="20577"/>
-          <ac:spMkLst>
-            <pc:docMk/>
-            <pc:sldMk cId="406580661" sldId="286"/>
-            <ac:spMk id="9" creationId="{C0AFC55C-7B26-1A33-6493-F9AF2D0F07CD}"/>
-          </ac:spMkLst>
-        </pc:spChg>
-        <pc:spChg chg="add mod ord">
-          <ac:chgData name="Jean-Yves Vuillequez" userId="e7fac481abea6bd0" providerId="LiveId" clId="{79E365E8-22BC-4EC2-9606-9A9AC6CD1D22}" dt="2025-11-20T14:11:57.466" v="3568" actId="571"/>
-          <ac:spMkLst>
-            <pc:docMk/>
-            <pc:sldMk cId="406580661" sldId="286"/>
-            <ac:spMk id="12" creationId="{C022C94F-050F-AB01-28C1-2AD03599D414}"/>
-          </ac:spMkLst>
-        </pc:spChg>
-        <pc:spChg chg="add mod">
-          <ac:chgData name="Jean-Yves Vuillequez" userId="e7fac481abea6bd0" providerId="LiveId" clId="{79E365E8-22BC-4EC2-9606-9A9AC6CD1D22}" dt="2025-11-20T16:48:03.372" v="4774" actId="20577"/>
-          <ac:spMkLst>
-            <pc:docMk/>
-            <pc:sldMk cId="406580661" sldId="286"/>
-            <ac:spMk id="14" creationId="{2FD38D0D-A22A-3A3C-C242-55050E7F3342}"/>
-          </ac:spMkLst>
-        </pc:spChg>
-        <pc:spChg chg="mod topLvl">
-          <ac:chgData name="Jean-Yves Vuillequez" userId="e7fac481abea6bd0" providerId="LiveId" clId="{79E365E8-22BC-4EC2-9606-9A9AC6CD1D22}" dt="2025-11-20T16:49:21.820" v="4776" actId="164"/>
-          <ac:spMkLst>
-            <pc:docMk/>
-            <pc:sldMk cId="406580661" sldId="286"/>
-            <ac:spMk id="18" creationId="{C17A729F-F9AB-A73C-CEFD-D87C2948A123}"/>
-          </ac:spMkLst>
-        </pc:spChg>
-        <pc:spChg chg="add mod">
-          <ac:chgData name="Jean-Yves Vuillequez" userId="e7fac481abea6bd0" providerId="LiveId" clId="{79E365E8-22BC-4EC2-9606-9A9AC6CD1D22}" dt="2025-11-20T16:49:21.820" v="4776" actId="164"/>
-          <ac:spMkLst>
-            <pc:docMk/>
-            <pc:sldMk cId="406580661" sldId="286"/>
-            <ac:spMk id="30" creationId="{717391EF-3678-1116-53EE-765DF8F95C9C}"/>
-          </ac:spMkLst>
-        </pc:spChg>
-        <pc:spChg chg="mod topLvl">
-          <ac:chgData name="Jean-Yves Vuillequez" userId="e7fac481abea6bd0" providerId="LiveId" clId="{79E365E8-22BC-4EC2-9606-9A9AC6CD1D22}" dt="2025-11-20T16:49:15.530" v="4775" actId="164"/>
-          <ac:spMkLst>
-            <pc:docMk/>
-            <pc:sldMk cId="406580661" sldId="286"/>
-            <ac:spMk id="36" creationId="{D67E0D0C-C631-6E3B-A20F-F6A59723BAE6}"/>
-          </ac:spMkLst>
-        </pc:spChg>
-        <pc:spChg chg="add mod">
-          <ac:chgData name="Jean-Yves Vuillequez" userId="e7fac481abea6bd0" providerId="LiveId" clId="{79E365E8-22BC-4EC2-9606-9A9AC6CD1D22}" dt="2025-11-20T16:46:47.881" v="4766" actId="1038"/>
-          <ac:spMkLst>
-            <pc:docMk/>
-            <pc:sldMk cId="406580661" sldId="286"/>
-            <ac:spMk id="43" creationId="{889E2712-F3EE-1CE7-817F-EE37ED7B2818}"/>
-          </ac:spMkLst>
-        </pc:spChg>
-        <pc:spChg chg="add mod">
-          <ac:chgData name="Jean-Yves Vuillequez" userId="e7fac481abea6bd0" providerId="LiveId" clId="{79E365E8-22BC-4EC2-9606-9A9AC6CD1D22}" dt="2025-11-20T14:31:58.077" v="3700" actId="1076"/>
-          <ac:spMkLst>
-            <pc:docMk/>
-            <pc:sldMk cId="406580661" sldId="286"/>
-            <ac:spMk id="44" creationId="{52DAE273-297D-B78E-8D7A-2AA631E57226}"/>
-          </ac:spMkLst>
-        </pc:spChg>
-        <pc:spChg chg="mod">
-          <ac:chgData name="Jean-Yves Vuillequez" userId="e7fac481abea6bd0" providerId="LiveId" clId="{79E365E8-22BC-4EC2-9606-9A9AC6CD1D22}" dt="2025-11-20T08:33:31.466" v="346" actId="113"/>
-          <ac:spMkLst>
-            <pc:docMk/>
-            <pc:sldMk cId="406580661" sldId="286"/>
-            <ac:spMk id="70" creationId="{6C332C7A-0C1B-7002-DD8F-E4EB26F3199D}"/>
-          </ac:spMkLst>
-        </pc:spChg>
-        <pc:grpChg chg="add mod">
-          <ac:chgData name="Jean-Yves Vuillequez" userId="e7fac481abea6bd0" providerId="LiveId" clId="{79E365E8-22BC-4EC2-9606-9A9AC6CD1D22}" dt="2025-11-20T16:49:15.530" v="4775" actId="164"/>
-          <ac:grpSpMkLst>
-            <pc:docMk/>
-            <pc:sldMk cId="406580661" sldId="286"/>
-            <ac:grpSpMk id="2" creationId="{E67CEDCE-6321-C0A9-D055-67F795430912}"/>
-          </ac:grpSpMkLst>
-        </pc:grpChg>
-        <pc:grpChg chg="add mod">
-          <ac:chgData name="Jean-Yves Vuillequez" userId="e7fac481abea6bd0" providerId="LiveId" clId="{79E365E8-22BC-4EC2-9606-9A9AC6CD1D22}" dt="2025-11-20T16:49:30.082" v="4782" actId="1076"/>
-          <ac:grpSpMkLst>
-            <pc:docMk/>
-            <pc:sldMk cId="406580661" sldId="286"/>
-            <ac:grpSpMk id="4" creationId="{EED4DECD-AB82-3770-D867-F5E3DC0F46C6}"/>
-          </ac:grpSpMkLst>
-        </pc:grpChg>
-        <pc:grpChg chg="add mod">
-          <ac:chgData name="Jean-Yves Vuillequez" userId="e7fac481abea6bd0" providerId="LiveId" clId="{79E365E8-22BC-4EC2-9606-9A9AC6CD1D22}" dt="2025-11-20T16:49:24.665" v="4778" actId="1076"/>
-          <ac:grpSpMkLst>
-            <pc:docMk/>
-            <pc:sldMk cId="406580661" sldId="286"/>
-            <ac:grpSpMk id="13" creationId="{4F2C3D66-D0D7-A86C-2848-AD50FAA4BBE5}"/>
-          </ac:grpSpMkLst>
-        </pc:grpChg>
-        <pc:picChg chg="add mod">
-          <ac:chgData name="Jean-Yves Vuillequez" userId="e7fac481abea6bd0" providerId="LiveId" clId="{79E365E8-22BC-4EC2-9606-9A9AC6CD1D22}" dt="2025-11-20T14:11:57.466" v="3568" actId="571"/>
-          <ac:picMkLst>
-            <pc:docMk/>
-            <pc:sldMk cId="406580661" sldId="286"/>
-            <ac:picMk id="11" creationId="{2D31D0A9-EF5E-70FA-7828-1FD6A1E4CECA}"/>
-          </ac:picMkLst>
-        </pc:picChg>
-        <pc:picChg chg="add mod">
-          <ac:chgData name="Jean-Yves Vuillequez" userId="e7fac481abea6bd0" providerId="LiveId" clId="{79E365E8-22BC-4EC2-9606-9A9AC6CD1D22}" dt="2025-11-20T16:49:15.530" v="4775" actId="164"/>
-          <ac:picMkLst>
-            <pc:docMk/>
-            <pc:sldMk cId="406580661" sldId="286"/>
-            <ac:picMk id="39" creationId="{9A15F92F-8AF9-9A60-52D8-D7970DAB78E9}"/>
-          </ac:picMkLst>
-        </pc:picChg>
-      </pc:sldChg>
-      <pc:sldChg chg="addSp delSp modSp add mod ord modAnim">
-        <pc:chgData name="Jean-Yves Vuillequez" userId="e7fac481abea6bd0" providerId="LiveId" clId="{79E365E8-22BC-4EC2-9606-9A9AC6CD1D22}" dt="2025-11-25T09:33:18.885" v="9545"/>
-        <pc:sldMkLst>
-          <pc:docMk/>
-          <pc:sldMk cId="3647836335" sldId="287"/>
-        </pc:sldMkLst>
-        <pc:spChg chg="mod">
-          <ac:chgData name="Jean-Yves Vuillequez" userId="e7fac481abea6bd0" providerId="LiveId" clId="{79E365E8-22BC-4EC2-9606-9A9AC6CD1D22}" dt="2025-11-24T15:42:47.576" v="9435" actId="1076"/>
-          <ac:spMkLst>
-            <pc:docMk/>
-            <pc:sldMk cId="3647836335" sldId="287"/>
-            <ac:spMk id="4" creationId="{A5620247-49B7-3C5A-F47B-760300A2EB3C}"/>
-          </ac:spMkLst>
-        </pc:spChg>
-        <pc:spChg chg="add mod">
-          <ac:chgData name="Jean-Yves Vuillequez" userId="e7fac481abea6bd0" providerId="LiveId" clId="{79E365E8-22BC-4EC2-9606-9A9AC6CD1D22}" dt="2025-11-24T15:42:44.380" v="9434" actId="1076"/>
-          <ac:spMkLst>
-            <pc:docMk/>
-            <pc:sldMk cId="3647836335" sldId="287"/>
-            <ac:spMk id="5" creationId="{1877B16D-43E1-D8A2-6CBB-699281489860}"/>
-          </ac:spMkLst>
-        </pc:spChg>
-        <pc:spChg chg="add mod">
-          <ac:chgData name="Jean-Yves Vuillequez" userId="e7fac481abea6bd0" providerId="LiveId" clId="{79E365E8-22BC-4EC2-9606-9A9AC6CD1D22}" dt="2025-11-24T15:42:05.689" v="9420" actId="14100"/>
-          <ac:spMkLst>
-            <pc:docMk/>
-            <pc:sldMk cId="3647836335" sldId="287"/>
-            <ac:spMk id="6" creationId="{29FB1499-A171-6144-AABD-0D25B6F5E06F}"/>
-          </ac:spMkLst>
-        </pc:spChg>
-        <pc:spChg chg="add mod">
-          <ac:chgData name="Jean-Yves Vuillequez" userId="e7fac481abea6bd0" providerId="LiveId" clId="{79E365E8-22BC-4EC2-9606-9A9AC6CD1D22}" dt="2025-11-24T15:42:12.060" v="9422" actId="14100"/>
-          <ac:spMkLst>
-            <pc:docMk/>
-            <pc:sldMk cId="3647836335" sldId="287"/>
-            <ac:spMk id="7" creationId="{FE1AD29E-F0C4-AB85-1B97-2B116EDF3685}"/>
-          </ac:spMkLst>
-        </pc:spChg>
-        <pc:spChg chg="add mod">
-          <ac:chgData name="Jean-Yves Vuillequez" userId="e7fac481abea6bd0" providerId="LiveId" clId="{79E365E8-22BC-4EC2-9606-9A9AC6CD1D22}" dt="2025-11-24T15:42:16.814" v="9423" actId="14100"/>
-          <ac:spMkLst>
-            <pc:docMk/>
-            <pc:sldMk cId="3647836335" sldId="287"/>
-            <ac:spMk id="8" creationId="{FFAA5FC3-4442-F0CD-2CEC-F6B1FFBCF1F2}"/>
-          </ac:spMkLst>
-        </pc:spChg>
-        <pc:spChg chg="add mod">
-          <ac:chgData name="Jean-Yves Vuillequez" userId="e7fac481abea6bd0" providerId="LiveId" clId="{79E365E8-22BC-4EC2-9606-9A9AC6CD1D22}" dt="2025-11-24T15:42:29.940" v="9430" actId="14100"/>
-          <ac:spMkLst>
-            <pc:docMk/>
-            <pc:sldMk cId="3647836335" sldId="287"/>
-            <ac:spMk id="9" creationId="{F61F0C2E-13CA-D614-0867-5C215EF2BD6C}"/>
-          </ac:spMkLst>
-        </pc:spChg>
-        <pc:spChg chg="add mod ord">
-          <ac:chgData name="Jean-Yves Vuillequez" userId="e7fac481abea6bd0" providerId="LiveId" clId="{79E365E8-22BC-4EC2-9606-9A9AC6CD1D22}" dt="2025-11-20T14:40:08.325" v="3828" actId="164"/>
-          <ac:spMkLst>
-            <pc:docMk/>
-            <pc:sldMk cId="3647836335" sldId="287"/>
-            <ac:spMk id="10" creationId="{1501C6C6-00E9-8CE8-0E69-6C28FB515B04}"/>
-          </ac:spMkLst>
-        </pc:spChg>
-        <pc:spChg chg="add mod">
-          <ac:chgData name="Jean-Yves Vuillequez" userId="e7fac481abea6bd0" providerId="LiveId" clId="{79E365E8-22BC-4EC2-9606-9A9AC6CD1D22}" dt="2025-11-24T15:42:40.355" v="9433" actId="108"/>
-          <ac:spMkLst>
-            <pc:docMk/>
-            <pc:sldMk cId="3647836335" sldId="287"/>
-            <ac:spMk id="12" creationId="{7699EDF7-B3FD-9018-8ED9-C590861D6946}"/>
-          </ac:spMkLst>
-        </pc:spChg>
-        <pc:spChg chg="mod topLvl">
-          <ac:chgData name="Jean-Yves Vuillequez" userId="e7fac481abea6bd0" providerId="LiveId" clId="{79E365E8-22BC-4EC2-9606-9A9AC6CD1D22}" dt="2025-11-24T15:42:24.264" v="9428" actId="1076"/>
-          <ac:spMkLst>
-            <pc:docMk/>
-            <pc:sldMk cId="3647836335" sldId="287"/>
-            <ac:spMk id="13" creationId="{3D2BBABE-A770-A1E0-2F9F-A99485CCB407}"/>
-          </ac:spMkLst>
-        </pc:spChg>
-        <pc:spChg chg="add mod">
-          <ac:chgData name="Jean-Yves Vuillequez" userId="e7fac481abea6bd0" providerId="LiveId" clId="{79E365E8-22BC-4EC2-9606-9A9AC6CD1D22}" dt="2025-11-24T15:42:19.056" v="9425" actId="571"/>
-          <ac:spMkLst>
-            <pc:docMk/>
-            <pc:sldMk cId="3647836335" sldId="287"/>
-            <ac:spMk id="14" creationId="{217E5B07-BCE8-176A-5237-2F941F134E55}"/>
-          </ac:spMkLst>
-        </pc:spChg>
-        <pc:spChg chg="add mod">
-          <ac:chgData name="Jean-Yves Vuillequez" userId="e7fac481abea6bd0" providerId="LiveId" clId="{79E365E8-22BC-4EC2-9606-9A9AC6CD1D22}" dt="2025-11-24T15:42:22.030" v="9427" actId="571"/>
-          <ac:spMkLst>
-            <pc:docMk/>
-            <pc:sldMk cId="3647836335" sldId="287"/>
-            <ac:spMk id="15" creationId="{26A2AF17-08AF-5037-25BC-FBB1288267DF}"/>
-          </ac:spMkLst>
-        </pc:spChg>
-        <pc:spChg chg="mod">
-          <ac:chgData name="Jean-Yves Vuillequez" userId="e7fac481abea6bd0" providerId="LiveId" clId="{79E365E8-22BC-4EC2-9606-9A9AC6CD1D22}" dt="2025-11-20T08:33:33.444" v="347" actId="108"/>
-          <ac:spMkLst>
-            <pc:docMk/>
-            <pc:sldMk cId="3647836335" sldId="287"/>
-            <ac:spMk id="70" creationId="{1CDDF2B5-8696-D966-7AE7-2D1548853B07}"/>
-          </ac:spMkLst>
-        </pc:spChg>
-        <pc:grpChg chg="add mod">
-          <ac:chgData name="Jean-Yves Vuillequez" userId="e7fac481abea6bd0" providerId="LiveId" clId="{79E365E8-22BC-4EC2-9606-9A9AC6CD1D22}" dt="2025-11-24T15:42:27.260" v="9429" actId="1076"/>
-          <ac:grpSpMkLst>
-            <pc:docMk/>
-            <pc:sldMk cId="3647836335" sldId="287"/>
-            <ac:grpSpMk id="11" creationId="{5108A918-E4C6-F9A2-4BF9-64DD15B4F141}"/>
-          </ac:grpSpMkLst>
-        </pc:grpChg>
-        <pc:picChg chg="add del mod ord modCrop">
-          <ac:chgData name="Jean-Yves Vuillequez" userId="e7fac481abea6bd0" providerId="LiveId" clId="{79E365E8-22BC-4EC2-9606-9A9AC6CD1D22}" dt="2025-11-20T14:40:08.325" v="3828" actId="164"/>
-          <ac:picMkLst>
-            <pc:docMk/>
-            <pc:sldMk cId="3647836335" sldId="287"/>
-            <ac:picMk id="3" creationId="{6A545F97-3B88-9E33-8963-86A0AF9F20D2}"/>
-          </ac:picMkLst>
-        </pc:picChg>
-      </pc:sldChg>
-      <pc:sldChg chg="addSp delSp modSp add mod modAnim modNotesTx">
-        <pc:chgData name="Jean-Yves Vuillequez" userId="e7fac481abea6bd0" providerId="LiveId" clId="{79E365E8-22BC-4EC2-9606-9A9AC6CD1D22}" dt="2025-11-25T09:56:49.003" v="9726"/>
-        <pc:sldMkLst>
-          <pc:docMk/>
-          <pc:sldMk cId="2290935718" sldId="289"/>
-        </pc:sldMkLst>
-        <pc:spChg chg="mod">
-          <ac:chgData name="Jean-Yves Vuillequez" userId="e7fac481abea6bd0" providerId="LiveId" clId="{79E365E8-22BC-4EC2-9606-9A9AC6CD1D22}" dt="2025-11-20T08:33:57.371" v="352" actId="113"/>
-          <ac:spMkLst>
-            <pc:docMk/>
-            <pc:sldMk cId="2290935718" sldId="289"/>
-            <ac:spMk id="2" creationId="{EBF06A3A-1FD1-62CC-FA82-868DA8F80F0D}"/>
-          </ac:spMkLst>
-        </pc:spChg>
-        <pc:spChg chg="add del mod">
-          <ac:chgData name="Jean-Yves Vuillequez" userId="e7fac481abea6bd0" providerId="LiveId" clId="{79E365E8-22BC-4EC2-9606-9A9AC6CD1D22}" dt="2025-11-24T14:49:08.078" v="9174" actId="478"/>
-          <ac:spMkLst>
-            <pc:docMk/>
-            <pc:sldMk cId="2290935718" sldId="289"/>
-            <ac:spMk id="3" creationId="{E869AAB6-05E5-7ABD-6265-0FBFDCCB98A9}"/>
-          </ac:spMkLst>
-        </pc:spChg>
-        <pc:spChg chg="add del mod ord">
-          <ac:chgData name="Jean-Yves Vuillequez" userId="e7fac481abea6bd0" providerId="LiveId" clId="{79E365E8-22BC-4EC2-9606-9A9AC6CD1D22}" dt="2025-11-24T13:07:59.684" v="8335" actId="478"/>
-          <ac:spMkLst>
-            <pc:docMk/>
-            <pc:sldMk cId="2290935718" sldId="289"/>
-            <ac:spMk id="4" creationId="{786453DB-D6FB-CB5F-9376-5629883FAC60}"/>
-          </ac:spMkLst>
-        </pc:spChg>
-        <pc:spChg chg="add del mod">
-          <ac:chgData name="Jean-Yves Vuillequez" userId="e7fac481abea6bd0" providerId="LiveId" clId="{79E365E8-22BC-4EC2-9606-9A9AC6CD1D22}" dt="2025-11-24T14:49:08.078" v="9174" actId="478"/>
-          <ac:spMkLst>
-            <pc:docMk/>
-            <pc:sldMk cId="2290935718" sldId="289"/>
-            <ac:spMk id="8" creationId="{91E5332C-F2D0-0543-DF7C-6D3B8D01B2FA}"/>
-          </ac:spMkLst>
-        </pc:spChg>
-        <pc:spChg chg="add mod">
-          <ac:chgData name="Jean-Yves Vuillequez" userId="e7fac481abea6bd0" providerId="LiveId" clId="{79E365E8-22BC-4EC2-9606-9A9AC6CD1D22}" dt="2025-11-21T14:51:30.458" v="7068"/>
-          <ac:spMkLst>
-            <pc:docMk/>
-            <pc:sldMk cId="2290935718" sldId="289"/>
-            <ac:spMk id="9" creationId="{F0B9A769-DDF6-9710-D866-D2F50F863B22}"/>
-          </ac:spMkLst>
-        </pc:spChg>
-        <pc:spChg chg="add mod">
-          <ac:chgData name="Jean-Yves Vuillequez" userId="e7fac481abea6bd0" providerId="LiveId" clId="{79E365E8-22BC-4EC2-9606-9A9AC6CD1D22}" dt="2025-11-25T09:55:44.740" v="9709" actId="20577"/>
-          <ac:spMkLst>
-            <pc:docMk/>
-            <pc:sldMk cId="2290935718" sldId="289"/>
-            <ac:spMk id="10" creationId="{DFD47DBC-035B-0B7D-9BB3-A4937ED2C9EB}"/>
-          </ac:spMkLst>
-        </pc:spChg>
-        <pc:spChg chg="add mod">
-          <ac:chgData name="Jean-Yves Vuillequez" userId="e7fac481abea6bd0" providerId="LiveId" clId="{79E365E8-22BC-4EC2-9606-9A9AC6CD1D22}" dt="2025-11-21T14:51:30.458" v="7068"/>
-          <ac:spMkLst>
-            <pc:docMk/>
-            <pc:sldMk cId="2290935718" sldId="289"/>
-            <ac:spMk id="11" creationId="{EEC86C4D-A9B4-4A74-ED37-29E01179A4EB}"/>
-          </ac:spMkLst>
-        </pc:spChg>
-        <pc:spChg chg="mod">
-          <ac:chgData name="Jean-Yves Vuillequez" userId="e7fac481abea6bd0" providerId="LiveId" clId="{79E365E8-22BC-4EC2-9606-9A9AC6CD1D22}" dt="2025-11-20T08:33:54.226" v="351" actId="113"/>
-          <ac:spMkLst>
-            <pc:docMk/>
-            <pc:sldMk cId="2290935718" sldId="289"/>
-            <ac:spMk id="178" creationId="{834EF362-0DAC-26BA-DE49-3126B33E851C}"/>
-          </ac:spMkLst>
-        </pc:spChg>
-        <pc:picChg chg="add del mod">
-          <ac:chgData name="Jean-Yves Vuillequez" userId="e7fac481abea6bd0" providerId="LiveId" clId="{79E365E8-22BC-4EC2-9606-9A9AC6CD1D22}" dt="2025-11-25T09:55:33.394" v="9706" actId="21"/>
-          <ac:picMkLst>
-            <pc:docMk/>
-            <pc:sldMk cId="2290935718" sldId="289"/>
-            <ac:picMk id="4" creationId="{000A3F10-64A4-99A8-2113-EEBBDD6801ED}"/>
-          </ac:picMkLst>
-        </pc:picChg>
-        <pc:picChg chg="add mod">
-          <ac:chgData name="Jean-Yves Vuillequez" userId="e7fac481abea6bd0" providerId="LiveId" clId="{79E365E8-22BC-4EC2-9606-9A9AC6CD1D22}" dt="2025-11-25T09:55:35.312" v="9708"/>
-          <ac:picMkLst>
-            <pc:docMk/>
-            <pc:sldMk cId="2290935718" sldId="289"/>
-            <ac:picMk id="5" creationId="{000A3F10-64A4-99A8-2113-EEBBDD6801ED}"/>
-          </ac:picMkLst>
-        </pc:picChg>
-        <pc:picChg chg="add del mod">
-          <ac:chgData name="Jean-Yves Vuillequez" userId="e7fac481abea6bd0" providerId="LiveId" clId="{79E365E8-22BC-4EC2-9606-9A9AC6CD1D22}" dt="2025-11-24T09:17:46.771" v="7796" actId="478"/>
-          <ac:picMkLst>
-            <pc:docMk/>
-            <pc:sldMk cId="2290935718" sldId="289"/>
-            <ac:picMk id="5" creationId="{937780E3-EE64-E9EA-5E8A-0FA88242AC93}"/>
-          </ac:picMkLst>
-        </pc:picChg>
-        <pc:picChg chg="add del mod modCrop">
-          <ac:chgData name="Jean-Yves Vuillequez" userId="e7fac481abea6bd0" providerId="LiveId" clId="{79E365E8-22BC-4EC2-9606-9A9AC6CD1D22}" dt="2025-11-24T13:41:00.083" v="8706" actId="21"/>
-          <ac:picMkLst>
-            <pc:docMk/>
-            <pc:sldMk cId="2290935718" sldId="289"/>
-            <ac:picMk id="6" creationId="{1DCCBE42-74DB-3DFF-14EF-68BE24C6FA39}"/>
-          </ac:picMkLst>
-        </pc:picChg>
-        <pc:picChg chg="add del mod">
-          <ac:chgData name="Jean-Yves Vuillequez" userId="e7fac481abea6bd0" providerId="LiveId" clId="{79E365E8-22BC-4EC2-9606-9A9AC6CD1D22}" dt="2025-11-24T11:04:10.956" v="8191" actId="478"/>
-          <ac:picMkLst>
-            <pc:docMk/>
-            <pc:sldMk cId="2290935718" sldId="289"/>
-            <ac:picMk id="7" creationId="{5FE561E2-56B0-D6A0-F0B7-7F202EE51386}"/>
-          </ac:picMkLst>
-        </pc:picChg>
-        <pc:picChg chg="add del mod">
-          <ac:chgData name="Jean-Yves Vuillequez" userId="e7fac481abea6bd0" providerId="LiveId" clId="{79E365E8-22BC-4EC2-9606-9A9AC6CD1D22}" dt="2025-11-25T09:56:47.735" v="9725" actId="478"/>
-          <ac:picMkLst>
-            <pc:docMk/>
-            <pc:sldMk cId="2290935718" sldId="289"/>
-            <ac:picMk id="7" creationId="{D843FCAE-84D8-B3E1-4B7A-0383F76C878B}"/>
-          </ac:picMkLst>
-        </pc:picChg>
-        <pc:picChg chg="add del mod">
-          <ac:chgData name="Jean-Yves Vuillequez" userId="e7fac481abea6bd0" providerId="LiveId" clId="{79E365E8-22BC-4EC2-9606-9A9AC6CD1D22}" dt="2025-11-25T09:56:28.999" v="9717" actId="478"/>
-          <ac:picMkLst>
-            <pc:docMk/>
-            <pc:sldMk cId="2290935718" sldId="289"/>
-            <ac:picMk id="8" creationId="{75BB14DA-0E1D-6252-77D5-F3B18DB8E908}"/>
-          </ac:picMkLst>
-        </pc:picChg>
-        <pc:picChg chg="add del mod">
-          <ac:chgData name="Jean-Yves Vuillequez" userId="e7fac481abea6bd0" providerId="LiveId" clId="{79E365E8-22BC-4EC2-9606-9A9AC6CD1D22}" dt="2025-11-24T09:17:44.883" v="7795" actId="21"/>
-          <ac:picMkLst>
-            <pc:docMk/>
-            <pc:sldMk cId="2290935718" sldId="289"/>
-            <ac:picMk id="12" creationId="{7D6B0B43-8628-A21E-C82B-D058DBA5452A}"/>
-          </ac:picMkLst>
-        </pc:picChg>
-        <pc:picChg chg="add del mod">
-          <ac:chgData name="Jean-Yves Vuillequez" userId="e7fac481abea6bd0" providerId="LiveId" clId="{79E365E8-22BC-4EC2-9606-9A9AC6CD1D22}" dt="2025-11-25T09:55:34.360" v="9707" actId="478"/>
-          <ac:picMkLst>
-            <pc:docMk/>
-            <pc:sldMk cId="2290935718" sldId="289"/>
-            <ac:picMk id="13" creationId="{7D6B0B43-8628-A21E-C82B-D058DBA5452A}"/>
-          </ac:picMkLst>
-        </pc:picChg>
-        <pc:picChg chg="add del mod">
-          <ac:chgData name="Jean-Yves Vuillequez" userId="e7fac481abea6bd0" providerId="LiveId" clId="{79E365E8-22BC-4EC2-9606-9A9AC6CD1D22}" dt="2025-11-24T14:15:19.532" v="8993" actId="478"/>
-          <ac:picMkLst>
-            <pc:docMk/>
-            <pc:sldMk cId="2290935718" sldId="289"/>
-            <ac:picMk id="14" creationId="{291A7323-DA08-B6B0-D55B-6BCFB1C0351B}"/>
-          </ac:picMkLst>
-        </pc:picChg>
-        <pc:picChg chg="add del mod">
-          <ac:chgData name="Jean-Yves Vuillequez" userId="e7fac481abea6bd0" providerId="LiveId" clId="{79E365E8-22BC-4EC2-9606-9A9AC6CD1D22}" dt="2025-11-25T09:56:46.881" v="9724" actId="21"/>
-          <ac:picMkLst>
-            <pc:docMk/>
-            <pc:sldMk cId="2290935718" sldId="289"/>
-            <ac:picMk id="14" creationId="{BC10BE04-1AA9-616C-9AB5-9507462BB970}"/>
-          </ac:picMkLst>
-        </pc:picChg>
-        <pc:picChg chg="add mod">
-          <ac:chgData name="Jean-Yves Vuillequez" userId="e7fac481abea6bd0" providerId="LiveId" clId="{79E365E8-22BC-4EC2-9606-9A9AC6CD1D22}" dt="2025-11-25T09:56:49.003" v="9726"/>
-          <ac:picMkLst>
-            <pc:docMk/>
-            <pc:sldMk cId="2290935718" sldId="289"/>
-            <ac:picMk id="15" creationId="{BC10BE04-1AA9-616C-9AB5-9507462BB970}"/>
-          </ac:picMkLst>
-        </pc:picChg>
       </pc:sldChg>
       <pc:sldChg chg="addSp delSp modSp add mod modNotesTx">
-        <pc:chgData name="Jean-Yves Vuillequez" userId="e7fac481abea6bd0" providerId="LiveId" clId="{79E365E8-22BC-4EC2-9606-9A9AC6CD1D22}" dt="2025-11-25T08:53:15.397" v="9530"/>
+        <pc:chgData name="Jean-Yves Vuillequez" userId="e7fac481abea6bd0" providerId="LiveId" clId="{79E365E8-22BC-4EC2-9606-9A9AC6CD1D22}" dt="2026-02-15T08:54:31.487" v="9975" actId="20577"/>
         <pc:sldMkLst>
           <pc:docMk/>
           <pc:sldMk cId="3332770" sldId="291"/>
         </pc:sldMkLst>
         <pc:spChg chg="del mod">
-          <ac:chgData name="Jean-Yves Vuillequez" userId="e7fac481abea6bd0" providerId="LiveId" clId="{79E365E8-22BC-4EC2-9606-9A9AC6CD1D22}" dt="2025-11-24T14:09:19.885" v="8945" actId="478"/>
-          <ac:spMkLst>
-            <pc:docMk/>
-            <pc:sldMk cId="3332770" sldId="291"/>
-            <ac:spMk id="2" creationId="{010F41C2-7624-67DE-B008-1F392C11A870}"/>
-          </ac:spMkLst>
-        </pc:spChg>
-        <pc:spChg chg="add del mod">
-          <ac:chgData name="Jean-Yves Vuillequez" userId="e7fac481abea6bd0" providerId="LiveId" clId="{79E365E8-22BC-4EC2-9606-9A9AC6CD1D22}" dt="2025-11-24T13:08:06.114" v="8336" actId="478"/>
-          <ac:spMkLst>
-            <pc:docMk/>
-            <pc:sldMk cId="3332770" sldId="291"/>
-            <ac:spMk id="3" creationId="{6C8C8F79-17EE-7C7E-88F5-83418E095E94}"/>
-          </ac:spMkLst>
-        </pc:spChg>
-        <pc:spChg chg="add del mod">
-          <ac:chgData name="Jean-Yves Vuillequez" userId="e7fac481abea6bd0" providerId="LiveId" clId="{79E365E8-22BC-4EC2-9606-9A9AC6CD1D22}" dt="2025-11-24T14:48:19.126" v="9171" actId="478"/>
-          <ac:spMkLst>
-            <pc:docMk/>
-            <pc:sldMk cId="3332770" sldId="291"/>
-            <ac:spMk id="5" creationId="{106A5BFC-54FA-403D-6C73-A732BC1D4F71}"/>
-          </ac:spMkLst>
-        </pc:spChg>
-        <pc:spChg chg="add del mod">
-          <ac:chgData name="Jean-Yves Vuillequez" userId="e7fac481abea6bd0" providerId="LiveId" clId="{79E365E8-22BC-4EC2-9606-9A9AC6CD1D22}" dt="2025-11-24T14:48:19.126" v="9171" actId="478"/>
-          <ac:spMkLst>
-            <pc:docMk/>
-            <pc:sldMk cId="3332770" sldId="291"/>
-            <ac:spMk id="6" creationId="{EBF21BA6-F9E0-6E0C-29B6-304458B8661D}"/>
-          </ac:spMkLst>
-        </pc:spChg>
-        <pc:spChg chg="add mod">
-          <ac:chgData name="Jean-Yves Vuillequez" userId="e7fac481abea6bd0" providerId="LiveId" clId="{79E365E8-22BC-4EC2-9606-9A9AC6CD1D22}" dt="2025-11-24T13:41:49.835" v="8718" actId="1076"/>
+          <ac:chgData name="Jean-Yves Vuillequez" userId="e7fac481abea6bd0" providerId="LiveId" clId="{79E365E8-22BC-4EC2-9606-9A9AC6CD1D22}" dt="2026-02-15T08:37:39.460" v="9891" actId="478"/>
           <ac:spMkLst>
             <pc:docMk/>
             <pc:sldMk cId="3332770" sldId="291"/>
             <ac:spMk id="12" creationId="{B403ED53-942F-ACDD-C77F-9C1FC1E6046D}"/>
           </ac:spMkLst>
         </pc:spChg>
-        <pc:spChg chg="add mod">
-          <ac:chgData name="Jean-Yves Vuillequez" userId="e7fac481abea6bd0" providerId="LiveId" clId="{79E365E8-22BC-4EC2-9606-9A9AC6CD1D22}" dt="2025-11-24T13:41:49.835" v="8718" actId="1076"/>
+        <pc:spChg chg="del mod">
+          <ac:chgData name="Jean-Yves Vuillequez" userId="e7fac481abea6bd0" providerId="LiveId" clId="{79E365E8-22BC-4EC2-9606-9A9AC6CD1D22}" dt="2026-02-15T08:37:39.460" v="9891" actId="478"/>
           <ac:spMkLst>
             <pc:docMk/>
             <pc:sldMk cId="3332770" sldId="291"/>
             <ac:spMk id="14" creationId="{5D0A73CE-C166-6A68-6591-7CD7FEC862D5}"/>
           </ac:spMkLst>
         </pc:spChg>
-        <pc:spChg chg="add mod">
-          <ac:chgData name="Jean-Yves Vuillequez" userId="e7fac481abea6bd0" providerId="LiveId" clId="{79E365E8-22BC-4EC2-9606-9A9AC6CD1D22}" dt="2025-11-21T14:41:37.210" v="6975" actId="1076"/>
-          <ac:spMkLst>
-            <pc:docMk/>
-            <pc:sldMk cId="3332770" sldId="291"/>
-            <ac:spMk id="15" creationId="{013ABAC4-C3BB-EC02-35DA-A3D2775495BD}"/>
-          </ac:spMkLst>
-        </pc:spChg>
-        <pc:spChg chg="add mod">
-          <ac:chgData name="Jean-Yves Vuillequez" userId="e7fac481abea6bd0" providerId="LiveId" clId="{79E365E8-22BC-4EC2-9606-9A9AC6CD1D22}" dt="2025-11-24T14:57:45.264" v="9201" actId="113"/>
+        <pc:spChg chg="mod">
+          <ac:chgData name="Jean-Yves Vuillequez" userId="e7fac481abea6bd0" providerId="LiveId" clId="{79E365E8-22BC-4EC2-9606-9A9AC6CD1D22}" dt="2026-02-15T08:45:44.286" v="9901" actId="20577"/>
           <ac:spMkLst>
             <pc:docMk/>
             <pc:sldMk cId="3332770" sldId="291"/>
             <ac:spMk id="16" creationId="{351780FB-D45B-8CC9-9474-2419578455B1}"/>
           </ac:spMkLst>
         </pc:spChg>
-        <pc:spChg chg="add mod">
-          <ac:chgData name="Jean-Yves Vuillequez" userId="e7fac481abea6bd0" providerId="LiveId" clId="{79E365E8-22BC-4EC2-9606-9A9AC6CD1D22}" dt="2025-11-21T14:41:37.210" v="6975" actId="1076"/>
-          <ac:spMkLst>
-            <pc:docMk/>
-            <pc:sldMk cId="3332770" sldId="291"/>
-            <ac:spMk id="17" creationId="{4D10BBB2-7966-3E3A-0D09-F29E1C548804}"/>
-          </ac:spMkLst>
-        </pc:spChg>
         <pc:spChg chg="mod">
-          <ac:chgData name="Jean-Yves Vuillequez" userId="e7fac481abea6bd0" providerId="LiveId" clId="{79E365E8-22BC-4EC2-9606-9A9AC6CD1D22}" dt="2025-11-20T08:35:17.304" v="353" actId="113"/>
+          <ac:chgData name="Jean-Yves Vuillequez" userId="e7fac481abea6bd0" providerId="LiveId" clId="{79E365E8-22BC-4EC2-9606-9A9AC6CD1D22}" dt="2026-02-15T08:47:31.795" v="9933" actId="20577"/>
           <ac:spMkLst>
             <pc:docMk/>
             <pc:sldMk cId="3332770" sldId="291"/>
             <ac:spMk id="178" creationId="{1DE246AA-5B17-33A5-5EF2-125E8EA81EFC}"/>
           </ac:spMkLst>
         </pc:spChg>
-        <pc:picChg chg="add mod">
-          <ac:chgData name="Jean-Yves Vuillequez" userId="e7fac481abea6bd0" providerId="LiveId" clId="{79E365E8-22BC-4EC2-9606-9A9AC6CD1D22}" dt="2025-11-25T08:53:15.397" v="9530"/>
+        <pc:graphicFrameChg chg="add mod modGraphic">
+          <ac:chgData name="Jean-Yves Vuillequez" userId="e7fac481abea6bd0" providerId="LiveId" clId="{79E365E8-22BC-4EC2-9606-9A9AC6CD1D22}" dt="2026-02-15T08:31:42.495" v="9888" actId="113"/>
+          <ac:graphicFrameMkLst>
+            <pc:docMk/>
+            <pc:sldMk cId="3332770" sldId="291"/>
+            <ac:graphicFrameMk id="4" creationId="{7B8808C1-B8B8-4B15-49A1-106F1747C5BF}"/>
+          </ac:graphicFrameMkLst>
+        </pc:graphicFrameChg>
+        <pc:picChg chg="mod">
+          <ac:chgData name="Jean-Yves Vuillequez" userId="e7fac481abea6bd0" providerId="LiveId" clId="{79E365E8-22BC-4EC2-9606-9A9AC6CD1D22}" dt="2026-02-15T08:31:27.274" v="9882" actId="1076"/>
           <ac:picMkLst>
             <pc:docMk/>
             <pc:sldMk cId="3332770" sldId="291"/>
             <ac:picMk id="2" creationId="{BFC65734-9253-849D-5A6F-F7D5EA9D0712}"/>
           </ac:picMkLst>
         </pc:picChg>
-        <pc:picChg chg="add mod">
-          <ac:chgData name="Jean-Yves Vuillequez" userId="e7fac481abea6bd0" providerId="LiveId" clId="{79E365E8-22BC-4EC2-9606-9A9AC6CD1D22}" dt="2025-11-25T08:53:15.397" v="9530"/>
+        <pc:picChg chg="mod">
+          <ac:chgData name="Jean-Yves Vuillequez" userId="e7fac481abea6bd0" providerId="LiveId" clId="{79E365E8-22BC-4EC2-9606-9A9AC6CD1D22}" dt="2026-02-15T08:31:27.274" v="9882" actId="1076"/>
           <ac:picMkLst>
             <pc:docMk/>
             <pc:sldMk cId="3332770" sldId="291"/>
             <ac:picMk id="3" creationId="{F42D4AB1-28C7-BB89-AEEE-DABEB2514D1E}"/>
           </ac:picMkLst>
         </pc:picChg>
-        <pc:picChg chg="add del mod">
-          <ac:chgData name="Jean-Yves Vuillequez" userId="e7fac481abea6bd0" providerId="LiveId" clId="{79E365E8-22BC-4EC2-9606-9A9AC6CD1D22}" dt="2025-11-24T13:08:48.053" v="8345" actId="21"/>
-          <ac:picMkLst>
-            <pc:docMk/>
-            <pc:sldMk cId="3332770" sldId="291"/>
-            <ac:picMk id="8" creationId="{015BFBD1-E8FF-A1DE-EE57-C49437435F9D}"/>
-          </ac:picMkLst>
-        </pc:picChg>
-        <pc:picChg chg="add del mod">
-          <ac:chgData name="Jean-Yves Vuillequez" userId="e7fac481abea6bd0" providerId="LiveId" clId="{79E365E8-22BC-4EC2-9606-9A9AC6CD1D22}" dt="2025-11-24T09:25:34.626" v="7809" actId="21"/>
-          <ac:picMkLst>
-            <pc:docMk/>
-            <pc:sldMk cId="3332770" sldId="291"/>
-            <ac:picMk id="8" creationId="{1C4C223B-DBE1-9C23-F6A9-F0D53C7554EA}"/>
-          </ac:picMkLst>
-        </pc:picChg>
-        <pc:picChg chg="add del mod ord">
-          <ac:chgData name="Jean-Yves Vuillequez" userId="e7fac481abea6bd0" providerId="LiveId" clId="{79E365E8-22BC-4EC2-9606-9A9AC6CD1D22}" dt="2025-11-24T13:08:48.948" v="8346" actId="478"/>
-          <ac:picMkLst>
-            <pc:docMk/>
-            <pc:sldMk cId="3332770" sldId="291"/>
-            <ac:picMk id="9" creationId="{1C4C223B-DBE1-9C23-F6A9-F0D53C7554EA}"/>
-          </ac:picMkLst>
-        </pc:picChg>
-        <pc:picChg chg="add del mod">
-          <ac:chgData name="Jean-Yves Vuillequez" userId="e7fac481abea6bd0" providerId="LiveId" clId="{79E365E8-22BC-4EC2-9606-9A9AC6CD1D22}" dt="2025-11-24T13:41:23.981" v="8712" actId="478"/>
-          <ac:picMkLst>
-            <pc:docMk/>
-            <pc:sldMk cId="3332770" sldId="291"/>
-            <ac:picMk id="10" creationId="{015BFBD1-E8FF-A1DE-EE57-C49437435F9D}"/>
-          </ac:picMkLst>
-        </pc:picChg>
-        <pc:picChg chg="add del mod modCrop">
-          <ac:chgData name="Jean-Yves Vuillequez" userId="e7fac481abea6bd0" providerId="LiveId" clId="{79E365E8-22BC-4EC2-9606-9A9AC6CD1D22}" dt="2025-11-24T14:24:59" v="9083" actId="478"/>
-          <ac:picMkLst>
-            <pc:docMk/>
-            <pc:sldMk cId="3332770" sldId="291"/>
-            <ac:picMk id="11" creationId="{1DCCBE42-74DB-3DFF-14EF-68BE24C6FA39}"/>
-          </ac:picMkLst>
-        </pc:picChg>
-        <pc:picChg chg="add del mod">
-          <ac:chgData name="Jean-Yves Vuillequez" userId="e7fac481abea6bd0" providerId="LiveId" clId="{79E365E8-22BC-4EC2-9606-9A9AC6CD1D22}" dt="2025-11-24T09:25:36.785" v="7810" actId="478"/>
-          <ac:picMkLst>
-            <pc:docMk/>
-            <pc:sldMk cId="3332770" sldId="291"/>
-            <ac:picMk id="11" creationId="{6B0F1A83-2432-176C-4AA5-8DD51C43E45F}"/>
-          </ac:picMkLst>
-        </pc:picChg>
-        <pc:picChg chg="add del mod">
-          <ac:chgData name="Jean-Yves Vuillequez" userId="e7fac481abea6bd0" providerId="LiveId" clId="{79E365E8-22BC-4EC2-9606-9A9AC6CD1D22}" dt="2025-11-25T08:53:14.980" v="9529" actId="478"/>
-          <ac:picMkLst>
-            <pc:docMk/>
-            <pc:sldMk cId="3332770" sldId="291"/>
-            <ac:picMk id="13" creationId="{42BBF9A1-C47F-62DF-F307-88D7E8C42892}"/>
-          </ac:picMkLst>
-        </pc:picChg>
-        <pc:picChg chg="add del mod">
-          <ac:chgData name="Jean-Yves Vuillequez" userId="e7fac481abea6bd0" providerId="LiveId" clId="{79E365E8-22BC-4EC2-9606-9A9AC6CD1D22}" dt="2025-11-24T14:24:57.298" v="9082" actId="478"/>
-          <ac:picMkLst>
-            <pc:docMk/>
-            <pc:sldMk cId="3332770" sldId="291"/>
-            <ac:picMk id="19" creationId="{251AEA8F-A473-62AD-0FE9-02E7F916FB2E}"/>
-          </ac:picMkLst>
-        </pc:picChg>
-        <pc:picChg chg="add del mod modCrop">
-          <ac:chgData name="Jean-Yves Vuillequez" userId="e7fac481abea6bd0" providerId="LiveId" clId="{79E365E8-22BC-4EC2-9606-9A9AC6CD1D22}" dt="2025-11-25T08:53:14.980" v="9529" actId="478"/>
-          <ac:picMkLst>
-            <pc:docMk/>
-            <pc:sldMk cId="3332770" sldId="291"/>
-            <ac:picMk id="21" creationId="{A65574E9-E5BD-6A21-1763-F42B66A783B7}"/>
-          </ac:picMkLst>
-        </pc:picChg>
-        <pc:cxnChg chg="add del mod">
-          <ac:chgData name="Jean-Yves Vuillequez" userId="e7fac481abea6bd0" providerId="LiveId" clId="{79E365E8-22BC-4EC2-9606-9A9AC6CD1D22}" dt="2025-11-24T14:48:19.126" v="9171" actId="478"/>
-          <ac:cxnSpMkLst>
-            <pc:docMk/>
-            <pc:sldMk cId="3332770" sldId="291"/>
-            <ac:cxnSpMk id="7" creationId="{224835CE-7645-B9BF-DF02-20730C1E63FF}"/>
-          </ac:cxnSpMkLst>
-        </pc:cxnChg>
       </pc:sldChg>
-      <pc:sldChg chg="addSp delSp modSp add mod ord delAnim modAnim modNotesTx">
-        <pc:chgData name="Jean-Yves Vuillequez" userId="e7fac481abea6bd0" providerId="LiveId" clId="{79E365E8-22BC-4EC2-9606-9A9AC6CD1D22}" dt="2025-11-25T09:41:19.311" v="9574" actId="14100"/>
+      <pc:sldChg chg="modNotesTx">
+        <pc:chgData name="Jean-Yves Vuillequez" userId="e7fac481abea6bd0" providerId="LiveId" clId="{79E365E8-22BC-4EC2-9606-9A9AC6CD1D22}" dt="2026-02-15T09:37:47.172" v="10025" actId="20577"/>
         <pc:sldMkLst>
           <pc:docMk/>
           <pc:sldMk cId="3315518580" sldId="292"/>
         </pc:sldMkLst>
-        <pc:spChg chg="add mod">
-          <ac:chgData name="Jean-Yves Vuillequez" userId="e7fac481abea6bd0" providerId="LiveId" clId="{79E365E8-22BC-4EC2-9606-9A9AC6CD1D22}" dt="2025-11-25T09:41:19.311" v="9574" actId="14100"/>
-          <ac:spMkLst>
-            <pc:docMk/>
-            <pc:sldMk cId="3315518580" sldId="292"/>
-            <ac:spMk id="2" creationId="{6010F8FA-C28E-A43A-D055-D8E240B71778}"/>
-          </ac:spMkLst>
-        </pc:spChg>
-        <pc:spChg chg="add mod">
-          <ac:chgData name="Jean-Yves Vuillequez" userId="e7fac481abea6bd0" providerId="LiveId" clId="{79E365E8-22BC-4EC2-9606-9A9AC6CD1D22}" dt="2025-11-25T09:41:18.557" v="9573" actId="1076"/>
-          <ac:spMkLst>
-            <pc:docMk/>
-            <pc:sldMk cId="3315518580" sldId="292"/>
-            <ac:spMk id="3" creationId="{8E129141-57FA-3782-2D29-46A01202FF38}"/>
-          </ac:spMkLst>
-        </pc:spChg>
-        <pc:spChg chg="add mod">
-          <ac:chgData name="Jean-Yves Vuillequez" userId="e7fac481abea6bd0" providerId="LiveId" clId="{79E365E8-22BC-4EC2-9606-9A9AC6CD1D22}" dt="2025-11-25T09:41:19.311" v="9574" actId="14100"/>
-          <ac:spMkLst>
-            <pc:docMk/>
-            <pc:sldMk cId="3315518580" sldId="292"/>
-            <ac:spMk id="6" creationId="{0E35907B-6989-788E-7DC3-A17A61D93F25}"/>
-          </ac:spMkLst>
-        </pc:spChg>
-        <pc:spChg chg="add mod ord">
-          <ac:chgData name="Jean-Yves Vuillequez" userId="e7fac481abea6bd0" providerId="LiveId" clId="{79E365E8-22BC-4EC2-9606-9A9AC6CD1D22}" dt="2025-11-21T15:24:06.980" v="7159" actId="164"/>
-          <ac:spMkLst>
-            <pc:docMk/>
-            <pc:sldMk cId="3315518580" sldId="292"/>
-            <ac:spMk id="9" creationId="{B6EC7C46-975B-FBFB-4AEA-EBA9F7AF7291}"/>
-          </ac:spMkLst>
-        </pc:spChg>
-        <pc:spChg chg="mod topLvl">
-          <ac:chgData name="Jean-Yves Vuillequez" userId="e7fac481abea6bd0" providerId="LiveId" clId="{79E365E8-22BC-4EC2-9606-9A9AC6CD1D22}" dt="2025-11-25T09:41:17.970" v="9572" actId="1076"/>
-          <ac:spMkLst>
-            <pc:docMk/>
-            <pc:sldMk cId="3315518580" sldId="292"/>
-            <ac:spMk id="11" creationId="{0363B15A-A0C9-C3C8-63BB-CDD69C135FDC}"/>
-          </ac:spMkLst>
-        </pc:spChg>
-        <pc:spChg chg="add mod">
-          <ac:chgData name="Jean-Yves Vuillequez" userId="e7fac481abea6bd0" providerId="LiveId" clId="{79E365E8-22BC-4EC2-9606-9A9AC6CD1D22}" dt="2025-11-21T15:24:06.980" v="7159" actId="164"/>
-          <ac:spMkLst>
-            <pc:docMk/>
-            <pc:sldMk cId="3315518580" sldId="292"/>
-            <ac:spMk id="16" creationId="{5F896893-885B-D70B-25B5-CAABE54E0893}"/>
-          </ac:spMkLst>
-        </pc:spChg>
-        <pc:spChg chg="mod">
-          <ac:chgData name="Jean-Yves Vuillequez" userId="e7fac481abea6bd0" providerId="LiveId" clId="{79E365E8-22BC-4EC2-9606-9A9AC6CD1D22}" dt="2025-11-20T08:35:26.468" v="355" actId="113"/>
-          <ac:spMkLst>
-            <pc:docMk/>
-            <pc:sldMk cId="3315518580" sldId="292"/>
-            <ac:spMk id="70" creationId="{C70766F9-707C-9B0E-5A17-F03AA1792E9A}"/>
-          </ac:spMkLst>
-        </pc:spChg>
-        <pc:grpChg chg="add mod">
-          <ac:chgData name="Jean-Yves Vuillequez" userId="e7fac481abea6bd0" providerId="LiveId" clId="{79E365E8-22BC-4EC2-9606-9A9AC6CD1D22}" dt="2025-11-25T09:41:17.970" v="9572" actId="1076"/>
-          <ac:grpSpMkLst>
-            <pc:docMk/>
-            <pc:sldMk cId="3315518580" sldId="292"/>
-            <ac:grpSpMk id="5" creationId="{F4E17C80-100B-9769-D624-90E0C0132394}"/>
-          </ac:grpSpMkLst>
-        </pc:grpChg>
-        <pc:picChg chg="add del mod">
-          <ac:chgData name="Jean-Yves Vuillequez" userId="e7fac481abea6bd0" providerId="LiveId" clId="{79E365E8-22BC-4EC2-9606-9A9AC6CD1D22}" dt="2025-11-25T09:41:16.373" v="9568"/>
-          <ac:picMkLst>
-            <pc:docMk/>
-            <pc:sldMk cId="3315518580" sldId="292"/>
-            <ac:picMk id="7" creationId="{E33D8126-FD17-736C-5FBC-B9AF511D26AF}"/>
-          </ac:picMkLst>
-        </pc:picChg>
-        <pc:picChg chg="add mod">
-          <ac:chgData name="Jean-Yves Vuillequez" userId="e7fac481abea6bd0" providerId="LiveId" clId="{79E365E8-22BC-4EC2-9606-9A9AC6CD1D22}" dt="2025-11-25T09:41:17.970" v="9572" actId="1076"/>
-          <ac:picMkLst>
-            <pc:docMk/>
-            <pc:sldMk cId="3315518580" sldId="292"/>
-            <ac:picMk id="14" creationId="{D2D4CD58-268F-2BAD-F9AA-0A0C8A5BE5A7}"/>
-          </ac:picMkLst>
-        </pc:picChg>
       </pc:sldChg>
-      <pc:sldChg chg="addSp delSp modSp add mod modAnim">
-        <pc:chgData name="Jean-Yves Vuillequez" userId="e7fac481abea6bd0" providerId="LiveId" clId="{79E365E8-22BC-4EC2-9606-9A9AC6CD1D22}" dt="2025-11-25T09:47:24.190" v="9695" actId="1076"/>
-        <pc:sldMkLst>
-          <pc:docMk/>
-          <pc:sldMk cId="1155304805" sldId="293"/>
-        </pc:sldMkLst>
-        <pc:spChg chg="mod">
-          <ac:chgData name="Jean-Yves Vuillequez" userId="e7fac481abea6bd0" providerId="LiveId" clId="{79E365E8-22BC-4EC2-9606-9A9AC6CD1D22}" dt="2025-11-20T13:25:30.949" v="3239" actId="1076"/>
-          <ac:spMkLst>
-            <pc:docMk/>
-            <pc:sldMk cId="1155304805" sldId="293"/>
-            <ac:spMk id="2" creationId="{1563EBE9-16C3-6238-4969-9E03C7CCE61D}"/>
-          </ac:spMkLst>
-        </pc:spChg>
-        <pc:spChg chg="add mod">
-          <ac:chgData name="Jean-Yves Vuillequez" userId="e7fac481abea6bd0" providerId="LiveId" clId="{79E365E8-22BC-4EC2-9606-9A9AC6CD1D22}" dt="2025-11-25T09:45:21.036" v="9692" actId="1076"/>
-          <ac:spMkLst>
-            <pc:docMk/>
-            <pc:sldMk cId="1155304805" sldId="293"/>
-            <ac:spMk id="3" creationId="{DEBF304F-77EB-BA94-CD84-BF91A9CC35D2}"/>
-          </ac:spMkLst>
-        </pc:spChg>
-        <pc:spChg chg="add mod">
-          <ac:chgData name="Jean-Yves Vuillequez" userId="e7fac481abea6bd0" providerId="LiveId" clId="{79E365E8-22BC-4EC2-9606-9A9AC6CD1D22}" dt="2025-11-25T09:44:58.571" v="9687"/>
-          <ac:spMkLst>
-            <pc:docMk/>
-            <pc:sldMk cId="1155304805" sldId="293"/>
-            <ac:spMk id="4" creationId="{1A25B44F-3D72-A752-04D6-8C3086471959}"/>
-          </ac:spMkLst>
-        </pc:spChg>
-        <pc:spChg chg="mod">
-          <ac:chgData name="Jean-Yves Vuillequez" userId="e7fac481abea6bd0" providerId="LiveId" clId="{79E365E8-22BC-4EC2-9606-9A9AC6CD1D22}" dt="2025-11-20T13:16:47.610" v="3140" actId="14100"/>
-          <ac:spMkLst>
-            <pc:docMk/>
-            <pc:sldMk cId="1155304805" sldId="293"/>
-            <ac:spMk id="22" creationId="{3D391DBE-8CF2-EE5C-2F68-B5607E178464}"/>
-          </ac:spMkLst>
-        </pc:spChg>
-        <pc:spChg chg="mod">
-          <ac:chgData name="Jean-Yves Vuillequez" userId="e7fac481abea6bd0" providerId="LiveId" clId="{79E365E8-22BC-4EC2-9606-9A9AC6CD1D22}" dt="2025-11-20T13:16:55.175" v="3142" actId="20577"/>
-          <ac:spMkLst>
-            <pc:docMk/>
-            <pc:sldMk cId="1155304805" sldId="293"/>
-            <ac:spMk id="27" creationId="{042A2A8D-6005-1889-1403-BC666FC81A37}"/>
-          </ac:spMkLst>
-        </pc:spChg>
-        <pc:spChg chg="mod">
-          <ac:chgData name="Jean-Yves Vuillequez" userId="e7fac481abea6bd0" providerId="LiveId" clId="{79E365E8-22BC-4EC2-9606-9A9AC6CD1D22}" dt="2025-11-20T13:21:37.603" v="3220" actId="313"/>
-          <ac:spMkLst>
-            <pc:docMk/>
-            <pc:sldMk cId="1155304805" sldId="293"/>
-            <ac:spMk id="29" creationId="{3BB7EFC0-9C01-A997-BF13-4D5D3052106F}"/>
-          </ac:spMkLst>
-        </pc:spChg>
-        <pc:spChg chg="mod">
-          <ac:chgData name="Jean-Yves Vuillequez" userId="e7fac481abea6bd0" providerId="LiveId" clId="{79E365E8-22BC-4EC2-9606-9A9AC6CD1D22}" dt="2025-11-20T13:21:36.093" v="3219" actId="313"/>
-          <ac:spMkLst>
-            <pc:docMk/>
-            <pc:sldMk cId="1155304805" sldId="293"/>
-            <ac:spMk id="32" creationId="{7F99F4F7-0E68-E50D-5D32-4D713CC22797}"/>
-          </ac:spMkLst>
-        </pc:spChg>
-        <pc:picChg chg="add mod ord">
-          <ac:chgData name="Jean-Yves Vuillequez" userId="e7fac481abea6bd0" providerId="LiveId" clId="{79E365E8-22BC-4EC2-9606-9A9AC6CD1D22}" dt="2025-11-20T13:18:54.190" v="3161" actId="1076"/>
-          <ac:picMkLst>
-            <pc:docMk/>
-            <pc:sldMk cId="1155304805" sldId="293"/>
-            <ac:picMk id="9" creationId="{84681BDA-D142-18E1-2191-03DE1F6FB8FA}"/>
-          </ac:picMkLst>
-        </pc:picChg>
-        <pc:picChg chg="add mod">
-          <ac:chgData name="Jean-Yves Vuillequez" userId="e7fac481abea6bd0" providerId="LiveId" clId="{79E365E8-22BC-4EC2-9606-9A9AC6CD1D22}" dt="2025-11-20T13:20:33.258" v="3167" actId="14100"/>
-          <ac:picMkLst>
-            <pc:docMk/>
-            <pc:sldMk cId="1155304805" sldId="293"/>
-            <ac:picMk id="14" creationId="{3B30B44E-DD21-0F7B-C83D-DEE95BA87D7D}"/>
-          </ac:picMkLst>
-        </pc:picChg>
-        <pc:picChg chg="add mod">
-          <ac:chgData name="Jean-Yves Vuillequez" userId="e7fac481abea6bd0" providerId="LiveId" clId="{79E365E8-22BC-4EC2-9606-9A9AC6CD1D22}" dt="2025-11-25T09:47:17.251" v="9693" actId="14100"/>
-          <ac:picMkLst>
-            <pc:docMk/>
-            <pc:sldMk cId="1155304805" sldId="293"/>
-            <ac:picMk id="17" creationId="{7BF05D77-BCB9-287C-3507-C65413D051DE}"/>
-          </ac:picMkLst>
-        </pc:picChg>
-        <pc:picChg chg="add mod">
-          <ac:chgData name="Jean-Yves Vuillequez" userId="e7fac481abea6bd0" providerId="LiveId" clId="{79E365E8-22BC-4EC2-9606-9A9AC6CD1D22}" dt="2025-11-25T09:47:24.190" v="9695" actId="1076"/>
-          <ac:picMkLst>
-            <pc:docMk/>
-            <pc:sldMk cId="1155304805" sldId="293"/>
-            <ac:picMk id="19" creationId="{47669945-4311-8D2F-8244-227CB848DB30}"/>
-          </ac:picMkLst>
-        </pc:picChg>
-      </pc:sldChg>
-      <pc:sldChg chg="modSp add mod">
-        <pc:chgData name="Jean-Yves Vuillequez" userId="e7fac481abea6bd0" providerId="LiveId" clId="{79E365E8-22BC-4EC2-9606-9A9AC6CD1D22}" dt="2025-11-21T02:29:34.535" v="5608" actId="6549"/>
-        <pc:sldMkLst>
-          <pc:docMk/>
-          <pc:sldMk cId="4010613788" sldId="294"/>
-        </pc:sldMkLst>
-        <pc:spChg chg="mod">
-          <ac:chgData name="Jean-Yves Vuillequez" userId="e7fac481abea6bd0" providerId="LiveId" clId="{79E365E8-22BC-4EC2-9606-9A9AC6CD1D22}" dt="2025-11-20T16:41:47.501" v="4741" actId="113"/>
-          <ac:spMkLst>
-            <pc:docMk/>
-            <pc:sldMk cId="4010613788" sldId="294"/>
-            <ac:spMk id="96" creationId="{A01AE6FF-5294-F6EC-FB0D-D63D7D63D71C}"/>
-          </ac:spMkLst>
-        </pc:spChg>
-        <pc:graphicFrameChg chg="modGraphic">
-          <ac:chgData name="Jean-Yves Vuillequez" userId="e7fac481abea6bd0" providerId="LiveId" clId="{79E365E8-22BC-4EC2-9606-9A9AC6CD1D22}" dt="2025-11-21T02:29:34.535" v="5608" actId="6549"/>
-          <ac:graphicFrameMkLst>
-            <pc:docMk/>
-            <pc:sldMk cId="4010613788" sldId="294"/>
-            <ac:graphicFrameMk id="2" creationId="{1F110593-1E38-6872-65AA-F9F3DBB52889}"/>
-          </ac:graphicFrameMkLst>
-        </pc:graphicFrameChg>
-      </pc:sldChg>
-      <pc:sldChg chg="addSp delSp modSp add mod ord">
-        <pc:chgData name="Jean-Yves Vuillequez" userId="e7fac481abea6bd0" providerId="LiveId" clId="{79E365E8-22BC-4EC2-9606-9A9AC6CD1D22}" dt="2025-11-25T08:54:23.746" v="9534"/>
-        <pc:sldMkLst>
-          <pc:docMk/>
-          <pc:sldMk cId="2817282669" sldId="295"/>
-        </pc:sldMkLst>
-        <pc:spChg chg="add del mod">
-          <ac:chgData name="Jean-Yves Vuillequez" userId="e7fac481abea6bd0" providerId="LiveId" clId="{79E365E8-22BC-4EC2-9606-9A9AC6CD1D22}" dt="2025-11-24T15:13:53.242" v="9229" actId="478"/>
-          <ac:spMkLst>
-            <pc:docMk/>
-            <pc:sldMk cId="2817282669" sldId="295"/>
-            <ac:spMk id="3" creationId="{89EE8D39-D478-0817-1A92-C3865BB10A61}"/>
-          </ac:spMkLst>
-        </pc:spChg>
-        <pc:spChg chg="mod">
-          <ac:chgData name="Jean-Yves Vuillequez" userId="e7fac481abea6bd0" providerId="LiveId" clId="{79E365E8-22BC-4EC2-9606-9A9AC6CD1D22}" dt="2025-11-20T16:41:51.642" v="4742" actId="113"/>
-          <ac:spMkLst>
-            <pc:docMk/>
-            <pc:sldMk cId="2817282669" sldId="295"/>
-            <ac:spMk id="96" creationId="{3BC85E95-4F59-55B9-B380-6FD61AF2CA9D}"/>
-          </ac:spMkLst>
-        </pc:spChg>
-        <pc:graphicFrameChg chg="mod modGraphic">
-          <ac:chgData name="Jean-Yves Vuillequez" userId="e7fac481abea6bd0" providerId="LiveId" clId="{79E365E8-22BC-4EC2-9606-9A9AC6CD1D22}" dt="2025-11-24T15:29:09.327" v="9309" actId="20577"/>
-          <ac:graphicFrameMkLst>
-            <pc:docMk/>
-            <pc:sldMk cId="2817282669" sldId="295"/>
-            <ac:graphicFrameMk id="2" creationId="{6B59FC8E-B1AF-6E01-CC30-CE12D63DD2F8}"/>
-          </ac:graphicFrameMkLst>
-        </pc:graphicFrameChg>
-      </pc:sldChg>
-      <pc:sldChg chg="addSp delSp modSp add mod ord">
-        <pc:chgData name="Jean-Yves Vuillequez" userId="e7fac481abea6bd0" providerId="LiveId" clId="{79E365E8-22BC-4EC2-9606-9A9AC6CD1D22}" dt="2025-11-25T08:54:23.746" v="9534"/>
-        <pc:sldMkLst>
-          <pc:docMk/>
-          <pc:sldMk cId="2552402859" sldId="296"/>
-        </pc:sldMkLst>
-        <pc:spChg chg="add del mod">
-          <ac:chgData name="Jean-Yves Vuillequez" userId="e7fac481abea6bd0" providerId="LiveId" clId="{79E365E8-22BC-4EC2-9606-9A9AC6CD1D22}" dt="2025-11-24T15:14:54.225" v="9242" actId="478"/>
-          <ac:spMkLst>
-            <pc:docMk/>
-            <pc:sldMk cId="2552402859" sldId="296"/>
-            <ac:spMk id="3" creationId="{5B05B1FD-33BF-DA06-1EDF-2A61D6895874}"/>
-          </ac:spMkLst>
-        </pc:spChg>
-        <pc:spChg chg="mod">
-          <ac:chgData name="Jean-Yves Vuillequez" userId="e7fac481abea6bd0" providerId="LiveId" clId="{79E365E8-22BC-4EC2-9606-9A9AC6CD1D22}" dt="2025-11-20T16:41:57.627" v="4743" actId="113"/>
-          <ac:spMkLst>
-            <pc:docMk/>
-            <pc:sldMk cId="2552402859" sldId="296"/>
-            <ac:spMk id="96" creationId="{CBB00398-E180-1580-BB88-2943694B8528}"/>
-          </ac:spMkLst>
-        </pc:spChg>
-        <pc:graphicFrameChg chg="mod modGraphic">
-          <ac:chgData name="Jean-Yves Vuillequez" userId="e7fac481abea6bd0" providerId="LiveId" clId="{79E365E8-22BC-4EC2-9606-9A9AC6CD1D22}" dt="2025-11-24T15:44:59.685" v="9438" actId="20577"/>
-          <ac:graphicFrameMkLst>
-            <pc:docMk/>
-            <pc:sldMk cId="2552402859" sldId="296"/>
-            <ac:graphicFrameMk id="2" creationId="{946331AE-73F0-28FF-B3AA-2EEF9B3307F6}"/>
-          </ac:graphicFrameMkLst>
-        </pc:graphicFrameChg>
-      </pc:sldChg>
-      <pc:sldChg chg="addSp delSp modSp add mod modNotesTx">
-        <pc:chgData name="Jean-Yves Vuillequez" userId="e7fac481abea6bd0" providerId="LiveId" clId="{79E365E8-22BC-4EC2-9606-9A9AC6CD1D22}" dt="2025-11-24T14:48:39.023" v="9173" actId="1076"/>
+      <pc:sldChg chg="modNotesTx">
+        <pc:chgData name="Jean-Yves Vuillequez" userId="e7fac481abea6bd0" providerId="LiveId" clId="{79E365E8-22BC-4EC2-9606-9A9AC6CD1D22}" dt="2026-02-15T09:41:16.431" v="10026" actId="20577"/>
         <pc:sldMkLst>
           <pc:docMk/>
           <pc:sldMk cId="1444436494" sldId="297"/>
         </pc:sldMkLst>
-        <pc:spChg chg="mod">
-          <ac:chgData name="Jean-Yves Vuillequez" userId="e7fac481abea6bd0" providerId="LiveId" clId="{79E365E8-22BC-4EC2-9606-9A9AC6CD1D22}" dt="2025-11-24T14:48:39.023" v="9173" actId="1076"/>
-          <ac:spMkLst>
-            <pc:docMk/>
-            <pc:sldMk cId="1444436494" sldId="297"/>
-            <ac:spMk id="5" creationId="{09C407C9-5F17-8D57-D377-23DFE0693D48}"/>
-          </ac:spMkLst>
-        </pc:spChg>
-        <pc:spChg chg="mod">
-          <ac:chgData name="Jean-Yves Vuillequez" userId="e7fac481abea6bd0" providerId="LiveId" clId="{79E365E8-22BC-4EC2-9606-9A9AC6CD1D22}" dt="2025-11-24T14:48:39.023" v="9173" actId="1076"/>
-          <ac:spMkLst>
-            <pc:docMk/>
-            <pc:sldMk cId="1444436494" sldId="297"/>
-            <ac:spMk id="6" creationId="{B90EF6EF-0FB3-7E2A-D542-2278633E1A3F}"/>
-          </ac:spMkLst>
-        </pc:spChg>
-        <pc:spChg chg="del">
-          <ac:chgData name="Jean-Yves Vuillequez" userId="e7fac481abea6bd0" providerId="LiveId" clId="{79E365E8-22BC-4EC2-9606-9A9AC6CD1D22}" dt="2025-11-24T13:41:30.194" v="8715" actId="478"/>
-          <ac:spMkLst>
-            <pc:docMk/>
-            <pc:sldMk cId="1444436494" sldId="297"/>
-            <ac:spMk id="15" creationId="{FDD96A06-DBA7-FCEA-0F92-4B5846061264}"/>
-          </ac:spMkLst>
-        </pc:spChg>
-        <pc:spChg chg="del">
-          <ac:chgData name="Jean-Yves Vuillequez" userId="e7fac481abea6bd0" providerId="LiveId" clId="{79E365E8-22BC-4EC2-9606-9A9AC6CD1D22}" dt="2025-11-24T13:41:30.194" v="8715" actId="478"/>
-          <ac:spMkLst>
-            <pc:docMk/>
-            <pc:sldMk cId="1444436494" sldId="297"/>
-            <ac:spMk id="16" creationId="{1ABFED4E-A724-91DB-38DD-00F20C5EAF98}"/>
-          </ac:spMkLst>
-        </pc:spChg>
-        <pc:spChg chg="del">
-          <ac:chgData name="Jean-Yves Vuillequez" userId="e7fac481abea6bd0" providerId="LiveId" clId="{79E365E8-22BC-4EC2-9606-9A9AC6CD1D22}" dt="2025-11-24T13:41:30.194" v="8715" actId="478"/>
-          <ac:spMkLst>
-            <pc:docMk/>
-            <pc:sldMk cId="1444436494" sldId="297"/>
-            <ac:spMk id="17" creationId="{52B9B445-68A9-B1DB-6EF3-C0AE80254ECE}"/>
-          </ac:spMkLst>
-        </pc:spChg>
-        <pc:picChg chg="add mod">
-          <ac:chgData name="Jean-Yves Vuillequez" userId="e7fac481abea6bd0" providerId="LiveId" clId="{79E365E8-22BC-4EC2-9606-9A9AC6CD1D22}" dt="2025-11-24T14:12:10.503" v="8973" actId="1076"/>
-          <ac:picMkLst>
-            <pc:docMk/>
-            <pc:sldMk cId="1444436494" sldId="297"/>
-            <ac:picMk id="4" creationId="{2BDCE2CF-B879-0D8F-F894-93FD712FBD79}"/>
-          </ac:picMkLst>
-        </pc:picChg>
-        <pc:picChg chg="del">
-          <ac:chgData name="Jean-Yves Vuillequez" userId="e7fac481abea6bd0" providerId="LiveId" clId="{79E365E8-22BC-4EC2-9606-9A9AC6CD1D22}" dt="2025-11-24T14:09:46.982" v="8946" actId="478"/>
-          <ac:picMkLst>
-            <pc:docMk/>
-            <pc:sldMk cId="1444436494" sldId="297"/>
-            <ac:picMk id="10" creationId="{4A57400A-AA4B-198F-0C67-0DD22B9A2461}"/>
-          </ac:picMkLst>
-        </pc:picChg>
-        <pc:picChg chg="del">
-          <ac:chgData name="Jean-Yves Vuillequez" userId="e7fac481abea6bd0" providerId="LiveId" clId="{79E365E8-22BC-4EC2-9606-9A9AC6CD1D22}" dt="2025-11-24T13:41:28.002" v="8714" actId="478"/>
-          <ac:picMkLst>
-            <pc:docMk/>
-            <pc:sldMk cId="1444436494" sldId="297"/>
-            <ac:picMk id="11" creationId="{9B1DD4D7-CBA8-B7A0-E8CD-0BE63CB336D7}"/>
-          </ac:picMkLst>
-        </pc:picChg>
-        <pc:picChg chg="del">
-          <ac:chgData name="Jean-Yves Vuillequez" userId="e7fac481abea6bd0" providerId="LiveId" clId="{79E365E8-22BC-4EC2-9606-9A9AC6CD1D22}" dt="2025-11-24T13:41:26.546" v="8713" actId="478"/>
-          <ac:picMkLst>
-            <pc:docMk/>
-            <pc:sldMk cId="1444436494" sldId="297"/>
-            <ac:picMk id="13" creationId="{E8317090-863A-52D7-A07C-0E64CEF74AA7}"/>
-          </ac:picMkLst>
-        </pc:picChg>
-        <pc:cxnChg chg="mod">
-          <ac:chgData name="Jean-Yves Vuillequez" userId="e7fac481abea6bd0" providerId="LiveId" clId="{79E365E8-22BC-4EC2-9606-9A9AC6CD1D22}" dt="2025-11-24T14:48:39.023" v="9173" actId="1076"/>
-          <ac:cxnSpMkLst>
-            <pc:docMk/>
-            <pc:sldMk cId="1444436494" sldId="297"/>
-            <ac:cxnSpMk id="7" creationId="{8A52E4F2-1D7C-51B1-DE52-6FB8760CC349}"/>
-          </ac:cxnSpMkLst>
-        </pc:cxnChg>
       </pc:sldChg>
-      <pc:sldChg chg="add del">
-        <pc:chgData name="Jean-Yves Vuillequez" userId="e7fac481abea6bd0" providerId="LiveId" clId="{79E365E8-22BC-4EC2-9606-9A9AC6CD1D22}" dt="2025-11-24T13:41:19.936" v="8710"/>
-        <pc:sldMkLst>
-          <pc:docMk/>
-          <pc:sldMk cId="1637271805" sldId="297"/>
-        </pc:sldMkLst>
-      </pc:sldChg>
-      <pc:sldChg chg="addSp delSp modSp add mod delAnim modAnim">
-        <pc:chgData name="Jean-Yves Vuillequez" userId="e7fac481abea6bd0" providerId="LiveId" clId="{79E365E8-22BC-4EC2-9606-9A9AC6CD1D22}" dt="2025-11-25T09:51:50.968" v="9700"/>
+      <pc:sldChg chg="ord modNotesTx">
+        <pc:chgData name="Jean-Yves Vuillequez" userId="e7fac481abea6bd0" providerId="LiveId" clId="{79E365E8-22BC-4EC2-9606-9A9AC6CD1D22}" dt="2026-02-15T09:36:38.623" v="9995"/>
         <pc:sldMkLst>
           <pc:docMk/>
           <pc:sldMk cId="1528976140" sldId="298"/>
         </pc:sldMkLst>
-        <pc:spChg chg="del">
-          <ac:chgData name="Jean-Yves Vuillequez" userId="e7fac481abea6bd0" providerId="LiveId" clId="{79E365E8-22BC-4EC2-9606-9A9AC6CD1D22}" dt="2025-11-25T09:41:27.680" v="9576" actId="478"/>
+      </pc:sldChg>
+      <pc:sldChg chg="addSp delSp modSp add del mod modNotesTx">
+        <pc:chgData name="Jean-Yves Vuillequez" userId="e7fac481abea6bd0" providerId="LiveId" clId="{79E365E8-22BC-4EC2-9606-9A9AC6CD1D22}" dt="2026-02-15T08:43:06.324" v="9894" actId="47"/>
+        <pc:sldMkLst>
+          <pc:docMk/>
+          <pc:sldMk cId="2166643445" sldId="299"/>
+        </pc:sldMkLst>
+        <pc:spChg chg="add mod">
+          <ac:chgData name="Jean-Yves Vuillequez" userId="e7fac481abea6bd0" providerId="LiveId" clId="{79E365E8-22BC-4EC2-9606-9A9AC6CD1D22}" dt="2026-02-15T07:46:12.330" v="9754"/>
           <ac:spMkLst>
             <pc:docMk/>
-            <pc:sldMk cId="1528976140" sldId="298"/>
-            <ac:spMk id="2" creationId="{533C9DFD-6E8E-88F1-7225-5C3975042C24}"/>
+            <pc:sldMk cId="2166643445" sldId="299"/>
+            <ac:spMk id="2" creationId="{568AD9D5-CBD6-635D-3835-2E030901705B}"/>
+          </ac:spMkLst>
+        </pc:spChg>
+        <pc:spChg chg="add mod">
+          <ac:chgData name="Jean-Yves Vuillequez" userId="e7fac481abea6bd0" providerId="LiveId" clId="{79E365E8-22BC-4EC2-9606-9A9AC6CD1D22}" dt="2026-02-15T07:46:12.330" v="9754"/>
+          <ac:spMkLst>
+            <pc:docMk/>
+            <pc:sldMk cId="2166643445" sldId="299"/>
+            <ac:spMk id="4" creationId="{72DBBACA-AB5D-B8CE-5C7B-AD64996A78B0}"/>
+          </ac:spMkLst>
+        </pc:spChg>
+        <pc:spChg chg="add mod">
+          <ac:chgData name="Jean-Yves Vuillequez" userId="e7fac481abea6bd0" providerId="LiveId" clId="{79E365E8-22BC-4EC2-9606-9A9AC6CD1D22}" dt="2026-02-15T07:46:26.120" v="9755"/>
+          <ac:spMkLst>
+            <pc:docMk/>
+            <pc:sldMk cId="2166643445" sldId="299"/>
+            <ac:spMk id="5" creationId="{D7FB1A18-5C92-619F-3543-02C21C4AA1CE}"/>
+          </ac:spMkLst>
+        </pc:spChg>
+        <pc:spChg chg="add mod">
+          <ac:chgData name="Jean-Yves Vuillequez" userId="e7fac481abea6bd0" providerId="LiveId" clId="{79E365E8-22BC-4EC2-9606-9A9AC6CD1D22}" dt="2026-02-15T08:24:21.462" v="9816" actId="20577"/>
+          <ac:spMkLst>
+            <pc:docMk/>
+            <pc:sldMk cId="2166643445" sldId="299"/>
+            <ac:spMk id="6" creationId="{6B39F0EF-7020-3885-201F-E7AB7F48885D}"/>
+          </ac:spMkLst>
+        </pc:spChg>
+        <pc:spChg chg="add mod">
+          <ac:chgData name="Jean-Yves Vuillequez" userId="e7fac481abea6bd0" providerId="LiveId" clId="{79E365E8-22BC-4EC2-9606-9A9AC6CD1D22}" dt="2026-02-15T07:46:26.120" v="9755"/>
+          <ac:spMkLst>
+            <pc:docMk/>
+            <pc:sldMk cId="2166643445" sldId="299"/>
+            <ac:spMk id="7" creationId="{90366784-6A04-CA78-0398-BCB508BA4ED5}"/>
           </ac:spMkLst>
         </pc:spChg>
         <pc:spChg chg="del">
-          <ac:chgData name="Jean-Yves Vuillequez" userId="e7fac481abea6bd0" providerId="LiveId" clId="{79E365E8-22BC-4EC2-9606-9A9AC6CD1D22}" dt="2025-11-25T09:41:27.680" v="9576" actId="478"/>
+          <ac:chgData name="Jean-Yves Vuillequez" userId="e7fac481abea6bd0" providerId="LiveId" clId="{79E365E8-22BC-4EC2-9606-9A9AC6CD1D22}" dt="2026-02-15T07:41:29.674" v="9739" actId="478"/>
           <ac:spMkLst>
             <pc:docMk/>
-            <pc:sldMk cId="1528976140" sldId="298"/>
-            <ac:spMk id="3" creationId="{8785E37A-885C-D1C2-87DF-533478F56CB4}"/>
+            <pc:sldMk cId="2166643445" sldId="299"/>
+            <ac:spMk id="11" creationId="{CCAFC56B-0391-D0D0-91A1-80E39855DACA}"/>
           </ac:spMkLst>
         </pc:spChg>
-        <pc:spChg chg="add mod">
-          <ac:chgData name="Jean-Yves Vuillequez" userId="e7fac481abea6bd0" providerId="LiveId" clId="{79E365E8-22BC-4EC2-9606-9A9AC6CD1D22}" dt="2025-11-25T09:41:48.200" v="9618" actId="20577"/>
+        <pc:spChg chg="del mod">
+          <ac:chgData name="Jean-Yves Vuillequez" userId="e7fac481abea6bd0" providerId="LiveId" clId="{79E365E8-22BC-4EC2-9606-9A9AC6CD1D22}" dt="2026-02-15T07:50:24.280" v="9774" actId="478"/>
           <ac:spMkLst>
             <pc:docMk/>
-            <pc:sldMk cId="1528976140" sldId="298"/>
-            <ac:spMk id="4" creationId="{B4652961-82E1-E9F1-B367-5278489897BB}"/>
-          </ac:spMkLst>
-        </pc:spChg>
-        <pc:spChg chg="del">
-          <ac:chgData name="Jean-Yves Vuillequez" userId="e7fac481abea6bd0" providerId="LiveId" clId="{79E365E8-22BC-4EC2-9606-9A9AC6CD1D22}" dt="2025-11-25T09:41:27.680" v="9576" actId="478"/>
-          <ac:spMkLst>
-            <pc:docMk/>
-            <pc:sldMk cId="1528976140" sldId="298"/>
-            <ac:spMk id="6" creationId="{8794308E-6A49-D3F2-09A4-7DDEF1CE7AE5}"/>
-          </ac:spMkLst>
-        </pc:spChg>
-        <pc:spChg chg="del">
-          <ac:chgData name="Jean-Yves Vuillequez" userId="e7fac481abea6bd0" providerId="LiveId" clId="{79E365E8-22BC-4EC2-9606-9A9AC6CD1D22}" dt="2025-11-25T09:41:27.680" v="9576" actId="478"/>
-          <ac:spMkLst>
-            <pc:docMk/>
-            <pc:sldMk cId="1528976140" sldId="298"/>
-            <ac:spMk id="11" creationId="{4EA49E74-8FBD-25AE-94C8-C376AB937BEF}"/>
-          </ac:spMkLst>
-        </pc:spChg>
-        <pc:spChg chg="add mod">
-          <ac:chgData name="Jean-Yves Vuillequez" userId="e7fac481abea6bd0" providerId="LiveId" clId="{79E365E8-22BC-4EC2-9606-9A9AC6CD1D22}" dt="2025-11-25T09:43:46.651" v="9667" actId="1076"/>
-          <ac:spMkLst>
-            <pc:docMk/>
-            <pc:sldMk cId="1528976140" sldId="298"/>
-            <ac:spMk id="13" creationId="{A0C660C5-C6B4-4D60-632C-38AA341D4E42}"/>
-          </ac:spMkLst>
-        </pc:spChg>
-        <pc:spChg chg="add mod">
-          <ac:chgData name="Jean-Yves Vuillequez" userId="e7fac481abea6bd0" providerId="LiveId" clId="{79E365E8-22BC-4EC2-9606-9A9AC6CD1D22}" dt="2025-11-25T09:44:01.713" v="9686" actId="14100"/>
-          <ac:spMkLst>
-            <pc:docMk/>
-            <pc:sldMk cId="1528976140" sldId="298"/>
-            <ac:spMk id="15" creationId="{7B02442F-1F39-3A7F-A132-603CFB285A80}"/>
+            <pc:sldMk cId="2166643445" sldId="299"/>
+            <ac:spMk id="13" creationId="{E19003E3-280F-7E0C-2560-B968F183C4B3}"/>
           </ac:spMkLst>
         </pc:spChg>
         <pc:spChg chg="mod">
-          <ac:chgData name="Jean-Yves Vuillequez" userId="e7fac481abea6bd0" providerId="LiveId" clId="{79E365E8-22BC-4EC2-9606-9A9AC6CD1D22}" dt="2025-11-25T09:42:21.129" v="9640" actId="1076"/>
+          <ac:chgData name="Jean-Yves Vuillequez" userId="e7fac481abea6bd0" providerId="LiveId" clId="{79E365E8-22BC-4EC2-9606-9A9AC6CD1D22}" dt="2026-02-15T07:42:25.381" v="9753" actId="20577"/>
           <ac:spMkLst>
             <pc:docMk/>
-            <pc:sldMk cId="1528976140" sldId="298"/>
-            <ac:spMk id="71" creationId="{B282795F-CC32-9B21-2C73-46BD6A694971}"/>
+            <pc:sldMk cId="2166643445" sldId="299"/>
+            <ac:spMk id="68" creationId="{3E1FE9AF-F8BF-6D41-7238-1CD8C87E5960}"/>
           </ac:spMkLst>
         </pc:spChg>
-        <pc:grpChg chg="del">
-          <ac:chgData name="Jean-Yves Vuillequez" userId="e7fac481abea6bd0" providerId="LiveId" clId="{79E365E8-22BC-4EC2-9606-9A9AC6CD1D22}" dt="2025-11-25T09:41:27.680" v="9576" actId="478"/>
-          <ac:grpSpMkLst>
+        <pc:graphicFrameChg chg="del">
+          <ac:chgData name="Jean-Yves Vuillequez" userId="e7fac481abea6bd0" providerId="LiveId" clId="{79E365E8-22BC-4EC2-9606-9A9AC6CD1D22}" dt="2026-02-15T07:41:29.674" v="9739" actId="478"/>
+          <ac:graphicFrameMkLst>
             <pc:docMk/>
-            <pc:sldMk cId="1528976140" sldId="298"/>
-            <ac:grpSpMk id="5" creationId="{716D0D9E-884E-53FC-BF93-5F07B985ACC1}"/>
-          </ac:grpSpMkLst>
-        </pc:grpChg>
-        <pc:picChg chg="add mod ord">
-          <ac:chgData name="Jean-Yves Vuillequez" userId="e7fac481abea6bd0" providerId="LiveId" clId="{79E365E8-22BC-4EC2-9606-9A9AC6CD1D22}" dt="2025-11-25T09:51:43.823" v="9698" actId="1076"/>
-          <ac:picMkLst>
+            <pc:sldMk cId="2166643445" sldId="299"/>
+            <ac:graphicFrameMk id="3" creationId="{8413E2CF-464F-F5E1-341F-3D8E5281BBA6}"/>
+          </ac:graphicFrameMkLst>
+        </pc:graphicFrameChg>
+        <pc:graphicFrameChg chg="mod modGraphic">
+          <ac:chgData name="Jean-Yves Vuillequez" userId="e7fac481abea6bd0" providerId="LiveId" clId="{79E365E8-22BC-4EC2-9606-9A9AC6CD1D22}" dt="2026-02-15T08:31:14.449" v="9879" actId="14100"/>
+          <ac:graphicFrameMkLst>
             <pc:docMk/>
-            <pc:sldMk cId="1528976140" sldId="298"/>
-            <ac:picMk id="8" creationId="{36374721-DBF6-6DC3-7F02-E2A019B585B7}"/>
-          </ac:picMkLst>
-        </pc:picChg>
-        <pc:picChg chg="add mod">
-          <ac:chgData name="Jean-Yves Vuillequez" userId="e7fac481abea6bd0" providerId="LiveId" clId="{79E365E8-22BC-4EC2-9606-9A9AC6CD1D22}" dt="2025-11-25T09:43:08.174" v="9659" actId="1076"/>
-          <ac:picMkLst>
-            <pc:docMk/>
-            <pc:sldMk cId="1528976140" sldId="298"/>
-            <ac:picMk id="12" creationId="{D61A617B-D6B7-1A94-495F-DC4E854385A5}"/>
-          </ac:picMkLst>
-        </pc:picChg>
-        <pc:picChg chg="del">
-          <ac:chgData name="Jean-Yves Vuillequez" userId="e7fac481abea6bd0" providerId="LiveId" clId="{79E365E8-22BC-4EC2-9606-9A9AC6CD1D22}" dt="2025-11-25T09:41:27.680" v="9576" actId="478"/>
-          <ac:picMkLst>
-            <pc:docMk/>
-            <pc:sldMk cId="1528976140" sldId="298"/>
-            <ac:picMk id="14" creationId="{00FAD22A-9740-C05B-F72B-F96EA58B04F4}"/>
-          </ac:picMkLst>
-        </pc:picChg>
+            <pc:sldMk cId="2166643445" sldId="299"/>
+            <ac:graphicFrameMk id="12" creationId="{96E9CAC1-4227-BB56-BF25-F3E8680718D1}"/>
+          </ac:graphicFrameMkLst>
+        </pc:graphicFrameChg>
       </pc:sldChg>
     </pc:docChg>
   </pc:docChgLst>
@@ -3262,15 +1218,282 @@
               <a:buSzPts val="1800"/>
               <a:buNone/>
             </a:pPr>
+            <a:endParaRPr lang="fr-FR" sz="1100" dirty="0"/>
+          </a:p>
+          <a:p>
+            <a:pPr marL="285750" marR="0" lvl="0" indent="-171450" algn="l" defTabSz="914400" rtl="0" eaLnBrk="1" fontAlgn="auto" latinLnBrk="0" hangingPunct="1">
+              <a:lnSpc>
+                <a:spcPct val="115000"/>
+              </a:lnSpc>
+              <a:spcBef>
+                <a:spcPts val="0"/>
+              </a:spcBef>
+              <a:spcAft>
+                <a:spcPts val="0"/>
+              </a:spcAft>
+              <a:buClr>
+                <a:srgbClr val="000000"/>
+              </a:buClr>
+              <a:buSzPts val="1800"/>
+              <a:tabLst/>
+              <a:defRPr/>
+            </a:pPr>
+            <a:r>
+              <a:rPr lang="fr-FR" dirty="0"/>
+              <a:t>Le R2 score mesure la proportion de la variance expliquée par le modèle : À quel point mon modèle explique les variations de la variable cible ? Le modèle explique environ </a:t>
+            </a:r>
+            <a:r>
+              <a:rPr lang="fr-FR" b="1" dirty="0"/>
+              <a:t>80 % de la variabilité du taux de charge solaire</a:t>
+            </a:r>
+            <a:r>
+              <a:rPr lang="fr-FR" dirty="0"/>
+              <a:t>.</a:t>
+            </a:r>
+          </a:p>
+          <a:p>
+            <a:pPr marL="114300" lvl="0" indent="0" algn="l" rtl="0">
+              <a:lnSpc>
+                <a:spcPct val="115000"/>
+              </a:lnSpc>
+              <a:spcBef>
+                <a:spcPts val="0"/>
+              </a:spcBef>
+              <a:spcAft>
+                <a:spcPts val="0"/>
+              </a:spcAft>
+              <a:buSzPts val="1800"/>
+              <a:buNone/>
+            </a:pPr>
+            <a:endParaRPr lang="fr-FR" sz="1100" dirty="0"/>
+          </a:p>
+          <a:p>
+            <a:pPr marL="114300" lvl="0" indent="0" algn="l" rtl="0">
+              <a:lnSpc>
+                <a:spcPct val="115000"/>
+              </a:lnSpc>
+              <a:spcBef>
+                <a:spcPts val="0"/>
+              </a:spcBef>
+              <a:spcAft>
+                <a:spcPts val="0"/>
+              </a:spcAft>
+              <a:buSzPts val="1800"/>
+              <a:buNone/>
+            </a:pPr>
             <a:r>
               <a:rPr lang="fr-FR" sz="1100" dirty="0"/>
-              <a:t>Démonstration </a:t>
+              <a:t>La MAE </a:t>
             </a:r>
             <a:r>
-              <a:rPr lang="fr-FR" sz="1100" dirty="0" err="1"/>
-              <a:t>dashboar</a:t>
+              <a:rPr lang="fr-FR" sz="1100" dirty="0" err="1">
+                <a:solidFill>
+                  <a:srgbClr val="C00000"/>
+                </a:solidFill>
+              </a:rPr>
+              <a:t>Mean</a:t>
             </a:r>
+            <a:r>
+              <a:rPr lang="fr-FR" sz="1100" dirty="0">
+                <a:solidFill>
+                  <a:srgbClr val="C00000"/>
+                </a:solidFill>
+              </a:rPr>
+              <a:t> </a:t>
+            </a:r>
+            <a:r>
+              <a:rPr lang="fr-FR" sz="1100" dirty="0" err="1">
+                <a:solidFill>
+                  <a:srgbClr val="C00000"/>
+                </a:solidFill>
+              </a:rPr>
+              <a:t>Absolute</a:t>
+            </a:r>
+            <a:r>
+              <a:rPr lang="fr-FR" sz="1100" dirty="0">
+                <a:solidFill>
+                  <a:srgbClr val="C00000"/>
+                </a:solidFill>
+              </a:rPr>
+              <a:t> </a:t>
+            </a:r>
+            <a:r>
+              <a:rPr lang="fr-FR" sz="1100" dirty="0" err="1">
+                <a:solidFill>
+                  <a:srgbClr val="C00000"/>
+                </a:solidFill>
+              </a:rPr>
+              <a:t>Error</a:t>
+            </a:r>
+            <a:r>
+              <a:rPr lang="fr-FR" sz="1100" dirty="0">
+                <a:solidFill>
+                  <a:srgbClr val="C00000"/>
+                </a:solidFill>
+              </a:rPr>
+              <a:t>  </a:t>
+            </a:r>
+            <a:r>
+              <a:rPr lang="fr-FR" sz="1100" dirty="0"/>
+              <a:t>mesure :</a:t>
+            </a:r>
+          </a:p>
+          <a:p>
+            <a:pPr marL="114300" lvl="0" indent="0" algn="l" rtl="0">
+              <a:lnSpc>
+                <a:spcPct val="115000"/>
+              </a:lnSpc>
+              <a:spcBef>
+                <a:spcPts val="0"/>
+              </a:spcBef>
+              <a:spcAft>
+                <a:spcPts val="0"/>
+              </a:spcAft>
+              <a:buSzPts val="1800"/>
+              <a:buNone/>
+            </a:pPr>
+            <a:r>
+              <a:rPr lang="fr-FR" sz="1100" dirty="0"/>
+              <a:t>En moyenne, de combien mon modèle se trompe.</a:t>
+            </a:r>
+          </a:p>
+          <a:p>
+            <a:pPr marL="114300" lvl="0" indent="0" algn="l" rtl="0">
+              <a:lnSpc>
+                <a:spcPct val="115000"/>
+              </a:lnSpc>
+              <a:spcBef>
+                <a:spcPts val="0"/>
+              </a:spcBef>
+              <a:spcAft>
+                <a:spcPts val="0"/>
+              </a:spcAft>
+              <a:buSzPts val="1800"/>
+              <a:buNone/>
+            </a:pPr>
+            <a:r>
+              <a:rPr lang="fr-FR" sz="1100" dirty="0"/>
+              <a:t>On regarde la différence entre :</a:t>
+            </a:r>
+          </a:p>
+          <a:p>
+            <a:pPr marL="285750" lvl="0" indent="-171450" algn="l" rtl="0">
+              <a:lnSpc>
+                <a:spcPct val="115000"/>
+              </a:lnSpc>
+              <a:spcBef>
+                <a:spcPts val="0"/>
+              </a:spcBef>
+              <a:spcAft>
+                <a:spcPts val="0"/>
+              </a:spcAft>
+              <a:buSzPts val="1800"/>
+            </a:pPr>
+            <a:r>
+              <a:rPr lang="fr-FR" sz="1100" dirty="0"/>
+              <a:t>la valeur réelle</a:t>
+            </a:r>
+          </a:p>
+          <a:p>
+            <a:pPr marL="285750" lvl="0" indent="-171450" algn="l" rtl="0">
+              <a:lnSpc>
+                <a:spcPct val="115000"/>
+              </a:lnSpc>
+              <a:spcBef>
+                <a:spcPts val="0"/>
+              </a:spcBef>
+              <a:spcAft>
+                <a:spcPts val="0"/>
+              </a:spcAft>
+              <a:buSzPts val="1800"/>
+            </a:pPr>
+            <a:r>
+              <a:rPr lang="fr-FR" sz="1100" dirty="0"/>
+              <a:t>la valeur prédite</a:t>
+            </a:r>
+          </a:p>
+          <a:p>
+            <a:pPr marL="114300" lvl="0" indent="0" algn="l" rtl="0">
+              <a:lnSpc>
+                <a:spcPct val="115000"/>
+              </a:lnSpc>
+              <a:spcBef>
+                <a:spcPts val="0"/>
+              </a:spcBef>
+              <a:spcAft>
+                <a:spcPts val="0"/>
+              </a:spcAft>
+              <a:buSzPts val="1800"/>
+              <a:buNone/>
+            </a:pPr>
+            <a:r>
+              <a:rPr lang="fr-FR" sz="1100" dirty="0"/>
+              <a:t>Puis on prend la valeur absolue (sans signe négatif)</a:t>
+            </a:r>
+          </a:p>
+          <a:p>
+            <a:pPr marL="114300" lvl="0" indent="0" algn="l" rtl="0">
+              <a:lnSpc>
+                <a:spcPct val="115000"/>
+              </a:lnSpc>
+              <a:spcBef>
+                <a:spcPts val="0"/>
+              </a:spcBef>
+              <a:spcAft>
+                <a:spcPts val="0"/>
+              </a:spcAft>
+              <a:buSzPts val="1800"/>
+              <a:buNone/>
+            </a:pPr>
+            <a:r>
+              <a:rPr lang="fr-FR" sz="1100" dirty="0"/>
+              <a:t>Puis on fait la moyenne.</a:t>
+            </a:r>
+          </a:p>
+          <a:p>
+            <a:pPr marL="114300" lvl="0" indent="0" algn="l" rtl="0">
+              <a:lnSpc>
+                <a:spcPct val="115000"/>
+              </a:lnSpc>
+              <a:spcBef>
+                <a:spcPts val="0"/>
+              </a:spcBef>
+              <a:spcAft>
+                <a:spcPts val="0"/>
+              </a:spcAft>
+              <a:buSzPts val="1800"/>
+              <a:buNone/>
+            </a:pPr>
             <a:endParaRPr lang="fr-FR" sz="1100" dirty="0"/>
+          </a:p>
+          <a:p>
+            <a:pPr marL="0" marR="0" lvl="0" indent="0" algn="l" defTabSz="914400" rtl="0" eaLnBrk="1" fontAlgn="auto" latinLnBrk="0" hangingPunct="1">
+              <a:lnSpc>
+                <a:spcPct val="100000"/>
+              </a:lnSpc>
+              <a:spcBef>
+                <a:spcPts val="0"/>
+              </a:spcBef>
+              <a:spcAft>
+                <a:spcPts val="0"/>
+              </a:spcAft>
+              <a:buClr>
+                <a:srgbClr val="000000"/>
+              </a:buClr>
+              <a:buSzPts val="1100"/>
+              <a:buFont typeface="Arial"/>
+              <a:buNone/>
+              <a:tabLst/>
+              <a:defRPr/>
+            </a:pPr>
+            <a:r>
+              <a:rPr lang="en-US" dirty="0"/>
+              <a:t>RMSE - Root Mean Squared Error : </a:t>
+            </a:r>
+            <a:r>
+              <a:rPr lang="fr-FR" dirty="0"/>
+              <a:t>On met l’erreur au carré avant de faire la moyenne. Donc les grosses erreurs comptent beaucoup plus. Le fait que RMSE soit nettement plus élevé indique : Il existe quelques erreurs importantes (sur les extrêmes)</a:t>
+            </a:r>
           </a:p>
         </p:txBody>
       </p:sp>
@@ -3415,14 +1638,6 @@
               <a:buSzPts val="1800"/>
               <a:buNone/>
             </a:pPr>
-            <a:r>
-              <a:rPr lang="fr-FR" sz="1100" dirty="0"/>
-              <a:t>Plot des erreurs : prédiction meilleure sur données centrales que le sur valeurs basses et haute de la </a:t>
-            </a:r>
-            <a:r>
-              <a:rPr lang="fr-FR" sz="1100" dirty="0" err="1"/>
-              <a:t>target</a:t>
-            </a:r>
             <a:endParaRPr lang="fr-FR" sz="1100" dirty="0"/>
           </a:p>
         </p:txBody>
@@ -3560,6 +1775,45 @@
             </a:pPr>
             <a:r>
               <a:rPr lang="fr-FR" sz="1100" b="1" dirty="0"/>
+              <a:t>Métrique : </a:t>
+            </a:r>
+          </a:p>
+          <a:p>
+            <a:pPr marL="114300" indent="0">
+              <a:buNone/>
+            </a:pPr>
+            <a:r>
+              <a:rPr lang="fr-FR" sz="1100" b="0" dirty="0"/>
+              <a:t>Si l’objectif est la stabilité du réseau, Est-ce que rater de 20 points un pic solaire est plus grave que se tromper régulièrement de 5 points ? </a:t>
+            </a:r>
+          </a:p>
+          <a:p>
+            <a:pPr marL="114300" indent="0">
+              <a:buNone/>
+            </a:pPr>
+            <a:r>
+              <a:rPr lang="fr-FR" sz="1100" b="0" dirty="0"/>
+              <a:t>La réponse métier détermine la métrique.</a:t>
+            </a:r>
+          </a:p>
+          <a:p>
+            <a:pPr marL="114300" indent="0">
+              <a:buNone/>
+            </a:pPr>
+            <a:endParaRPr lang="fr-FR" sz="1100" b="1" dirty="0"/>
+          </a:p>
+          <a:p>
+            <a:pPr marL="114300" indent="0">
+              <a:buNone/>
+            </a:pPr>
+            <a:endParaRPr lang="fr-FR" sz="1100" b="1" dirty="0"/>
+          </a:p>
+          <a:p>
+            <a:pPr marL="114300" indent="0">
+              <a:buNone/>
+            </a:pPr>
+            <a:r>
+              <a:rPr lang="fr-FR" sz="1100" b="1" dirty="0"/>
               <a:t>Valeur immédiate :</a:t>
             </a:r>
           </a:p>
@@ -3797,98 +2051,6 @@
             <a:noAutofit/>
           </a:bodyPr>
           <a:lstStyle/>
-          <a:p>
-            <a:pPr marL="114300" indent="0">
-              <a:buNone/>
-            </a:pPr>
-            <a:r>
-              <a:rPr lang="fr-FR" sz="1100" b="1" dirty="0"/>
-              <a:t>Valeur immédiate :</a:t>
-            </a:r>
-          </a:p>
-          <a:p>
-            <a:pPr marL="114300" indent="0">
-              <a:buNone/>
-            </a:pPr>
-            <a:r>
-              <a:rPr lang="fr-FR" sz="1100" dirty="0"/>
-              <a:t>Visibilité sur 3 jours → meilleure planification.</a:t>
-            </a:r>
-          </a:p>
-          <a:p>
-            <a:pPr marL="114300" indent="0">
-              <a:buNone/>
-            </a:pPr>
-            <a:r>
-              <a:rPr lang="fr-FR" sz="1100" dirty="0"/>
-              <a:t>Anticipation des pics et baisses → réseau plus stable, délestage de l’hydro électrique au profit du solaire</a:t>
-            </a:r>
-          </a:p>
-          <a:p>
-            <a:pPr marL="114300" indent="0">
-              <a:buNone/>
-            </a:pPr>
-            <a:r>
-              <a:rPr lang="fr-FR" sz="1100" dirty="0"/>
-              <a:t>Lecture régionale fine → priorisation des investissements ??</a:t>
-            </a:r>
-          </a:p>
-          <a:p>
-            <a:pPr marL="114300" indent="0">
-              <a:buNone/>
-            </a:pPr>
-            <a:r>
-              <a:rPr lang="fr-FR" sz="1100" dirty="0"/>
-              <a:t>Outil d’aide à la décision clair et exploitable</a:t>
-            </a:r>
-          </a:p>
-          <a:p>
-            <a:endParaRPr lang="fr-FR" sz="1100" b="1" dirty="0"/>
-          </a:p>
-          <a:p>
-            <a:pPr marL="114300" indent="0">
-              <a:buNone/>
-            </a:pPr>
-            <a:r>
-              <a:rPr lang="fr-FR" sz="1100" b="1" dirty="0"/>
-              <a:t>Perspectives :</a:t>
-            </a:r>
-          </a:p>
-          <a:p>
-            <a:pPr marL="114300" indent="0">
-              <a:buNone/>
-            </a:pPr>
-            <a:r>
-              <a:rPr lang="fr-FR" sz="1100" dirty="0"/>
-              <a:t>Passage en temps réel</a:t>
-            </a:r>
-          </a:p>
-          <a:p>
-            <a:pPr marL="114300" indent="0">
-              <a:buNone/>
-            </a:pPr>
-            <a:r>
-              <a:rPr lang="fr-FR" sz="1100" dirty="0"/>
-              <a:t>Ajout de la prévision intra </a:t>
-            </a:r>
-            <a:r>
-              <a:rPr lang="fr-FR" sz="1100" dirty="0" err="1"/>
-              <a:t>day</a:t>
-            </a:r>
-            <a:r>
-              <a:rPr lang="fr-FR" sz="1100" dirty="0"/>
-              <a:t> (données de prod RTE disponibles à la demi heure)</a:t>
-            </a:r>
-          </a:p>
-          <a:p>
-            <a:pPr marL="114300" indent="0">
-              <a:buNone/>
-            </a:pPr>
-            <a:r>
-              <a:rPr lang="fr-FR" sz="1100" dirty="0"/>
-              <a:t>Enrichissement par données satellitaires</a:t>
-            </a:r>
-          </a:p>
           <a:p>
             <a:pPr marL="158750" indent="0">
               <a:buNone/>
@@ -5578,27 +3740,6 @@
               <a:buNone/>
             </a:pPr>
             <a:r>
-              <a:rPr lang="fr-FR" b="0" dirty="0"/>
-              <a:t>https://app.diagrams.net/?src=about#HSheikoh%2FREnergies_efficiency_prediction%2Fmain%2Fdiagrams%2Farchitecture.drawio#%7B%22pageId%22%3A%22bG0RTmb4xdSiPlx_l64v%22%7D</a:t>
-            </a:r>
-          </a:p>
-          <a:p>
-            <a:pPr marL="158750" indent="0">
-              <a:buNone/>
-            </a:pPr>
-            <a:endParaRPr lang="fr-FR" b="1" dirty="0"/>
-          </a:p>
-          <a:p>
-            <a:pPr marL="158750" indent="0">
-              <a:buNone/>
-            </a:pPr>
-            <a:endParaRPr lang="fr-FR" b="1" dirty="0"/>
-          </a:p>
-          <a:p>
-            <a:pPr marL="158750" indent="0">
-              <a:buNone/>
-            </a:pPr>
-            <a:r>
               <a:rPr lang="fr-FR" b="1" dirty="0"/>
               <a:t>1. Collecte des données</a:t>
             </a:r>
@@ -5798,15 +3939,7 @@
             </a:pPr>
             <a:r>
               <a:rPr lang="fr-FR" dirty="0"/>
-              <a:t>EDA + </a:t>
-            </a:r>
-            <a:r>
-              <a:rPr lang="fr-FR"/>
-              <a:t>prévisions 3 </a:t>
-            </a:r>
-            <a:r>
-              <a:rPr lang="fr-FR" dirty="0"/>
-              <a:t>jours accessibles à l’utilisateur</a:t>
+              <a:t>EDA + prévisions 3 jours accessibles à l’utilisateur</a:t>
             </a:r>
           </a:p>
           <a:p>
@@ -19859,114 +17992,6 @@
           </a:p>
         </p:txBody>
       </p:sp>
-      <p:sp>
-        <p:nvSpPr>
-          <p:cNvPr id="12" name="ZoneTexte 11">
-            <a:extLst>
-              <a:ext uri="{FF2B5EF4-FFF2-40B4-BE49-F238E27FC236}">
-                <a16:creationId xmlns:a16="http://schemas.microsoft.com/office/drawing/2014/main" id="{B403ED53-942F-ACDD-C77F-9C1FC1E6046D}"/>
-              </a:ext>
-            </a:extLst>
-          </p:cNvPr>
-          <p:cNvSpPr txBox="1"/>
-          <p:nvPr/>
-        </p:nvSpPr>
-        <p:spPr>
-          <a:xfrm>
-            <a:off x="6375400" y="776148"/>
-            <a:ext cx="2399665" cy="340519"/>
-          </a:xfrm>
-          <a:prstGeom prst="roundRect">
-            <a:avLst/>
-          </a:prstGeom>
-          <a:solidFill>
-            <a:schemeClr val="bg1"/>
-          </a:solidFill>
-          <a:ln>
-            <a:solidFill>
-              <a:srgbClr val="C00000"/>
-            </a:solidFill>
-          </a:ln>
-        </p:spPr>
-        <p:txBody>
-          <a:bodyPr wrap="square" rtlCol="0">
-            <a:spAutoFit/>
-          </a:bodyPr>
-          <a:lstStyle/>
-          <a:p>
-            <a:pPr algn="ctr"/>
-            <a:r>
-              <a:rPr lang="fr-FR" dirty="0">
-                <a:solidFill>
-                  <a:srgbClr val="C00000"/>
-                </a:solidFill>
-              </a:rPr>
-              <a:t>MAE du modèle : 5,125</a:t>
-            </a:r>
-          </a:p>
-        </p:txBody>
-      </p:sp>
-      <p:sp>
-        <p:nvSpPr>
-          <p:cNvPr id="14" name="Ellipse 13">
-            <a:extLst>
-              <a:ext uri="{FF2B5EF4-FFF2-40B4-BE49-F238E27FC236}">
-                <a16:creationId xmlns:a16="http://schemas.microsoft.com/office/drawing/2014/main" id="{5D0A73CE-C166-6A68-6591-7CD7FEC862D5}"/>
-              </a:ext>
-            </a:extLst>
-          </p:cNvPr>
-          <p:cNvSpPr/>
-          <p:nvPr/>
-        </p:nvSpPr>
-        <p:spPr>
-          <a:xfrm>
-            <a:off x="6262378" y="564226"/>
-            <a:ext cx="292605" cy="292605"/>
-          </a:xfrm>
-          <a:prstGeom prst="ellipse">
-            <a:avLst/>
-          </a:prstGeom>
-          <a:solidFill>
-            <a:schemeClr val="bg1"/>
-          </a:solidFill>
-          <a:ln>
-            <a:solidFill>
-              <a:srgbClr val="C00000"/>
-            </a:solidFill>
-          </a:ln>
-        </p:spPr>
-        <p:style>
-          <a:lnRef idx="2">
-            <a:schemeClr val="accent1">
-              <a:shade val="15000"/>
-            </a:schemeClr>
-          </a:lnRef>
-          <a:fillRef idx="1">
-            <a:schemeClr val="accent1"/>
-          </a:fillRef>
-          <a:effectRef idx="0">
-            <a:schemeClr val="accent1"/>
-          </a:effectRef>
-          <a:fontRef idx="minor">
-            <a:schemeClr val="lt1"/>
-          </a:fontRef>
-        </p:style>
-        <p:txBody>
-          <a:bodyPr rtlCol="0" anchor="ctr"/>
-          <a:lstStyle/>
-          <a:p>
-            <a:pPr algn="ctr"/>
-            <a:r>
-              <a:rPr lang="fr-FR" sz="1600" b="1" dirty="0">
-                <a:solidFill>
-                  <a:srgbClr val="C00000"/>
-                </a:solidFill>
-              </a:rPr>
-              <a:t>!</a:t>
-            </a:r>
-          </a:p>
-        </p:txBody>
-      </p:sp>
       <p:pic>
         <p:nvPicPr>
           <p:cNvPr id="2" name="Image 1" descr="Une image contenant capture d’écran, diagramme, Tracé, conception">
@@ -19990,7 +18015,7 @@
         </p:blipFill>
         <p:spPr>
           <a:xfrm>
-            <a:off x="5131783" y="1335349"/>
+            <a:off x="5131783" y="1491050"/>
             <a:ext cx="3709114" cy="2520000"/>
           </a:xfrm>
           <a:prstGeom prst="rect">
@@ -20027,7 +18052,7 @@
         </p:blipFill>
         <p:spPr>
           <a:xfrm>
-            <a:off x="690620" y="1335349"/>
+            <a:off x="690620" y="1491050"/>
             <a:ext cx="4199999" cy="2520000"/>
           </a:xfrm>
           <a:prstGeom prst="rect">
@@ -20042,6 +18067,290 @@
           </a:ln>
         </p:spPr>
       </p:pic>
+      <p:graphicFrame>
+        <p:nvGraphicFramePr>
+          <p:cNvPr id="4" name="Tableau 3">
+            <a:extLst>
+              <a:ext uri="{FF2B5EF4-FFF2-40B4-BE49-F238E27FC236}">
+                <a16:creationId xmlns:a16="http://schemas.microsoft.com/office/drawing/2014/main" id="{7B8808C1-B8B8-4B15-49A1-106F1747C5BF}"/>
+              </a:ext>
+            </a:extLst>
+          </p:cNvPr>
+          <p:cNvGraphicFramePr>
+            <a:graphicFrameLocks noGrp="1"/>
+          </p:cNvGraphicFramePr>
+          <p:nvPr>
+            <p:extLst>
+              <p:ext uri="{D42A27DB-BD31-4B8C-83A1-F6EECF244321}">
+                <p14:modId xmlns:p14="http://schemas.microsoft.com/office/powerpoint/2010/main" val="329167938"/>
+              </p:ext>
+            </p:extLst>
+          </p:nvPr>
+        </p:nvGraphicFramePr>
+        <p:xfrm>
+          <a:off x="5715000" y="599647"/>
+          <a:ext cx="3125895" cy="612724"/>
+        </p:xfrm>
+        <a:graphic>
+          <a:graphicData uri="http://schemas.openxmlformats.org/drawingml/2006/table">
+            <a:tbl>
+              <a:tblPr firstRow="1" bandRow="1">
+                <a:tableStyleId>{5C22544A-7EE6-4342-B048-85BDC9FD1C3A}</a:tableStyleId>
+              </a:tblPr>
+              <a:tblGrid>
+                <a:gridCol w="785667">
+                  <a:extLst>
+                    <a:ext uri="{9D8B030D-6E8A-4147-A177-3AD203B41FA5}">
+                      <a16:colId xmlns:a16="http://schemas.microsoft.com/office/drawing/2014/main" val="467522551"/>
+                    </a:ext>
+                  </a:extLst>
+                </a:gridCol>
+                <a:gridCol w="585057">
+                  <a:extLst>
+                    <a:ext uri="{9D8B030D-6E8A-4147-A177-3AD203B41FA5}">
+                      <a16:colId xmlns:a16="http://schemas.microsoft.com/office/drawing/2014/main" val="4215255045"/>
+                    </a:ext>
+                  </a:extLst>
+                </a:gridCol>
+                <a:gridCol w="585057">
+                  <a:extLst>
+                    <a:ext uri="{9D8B030D-6E8A-4147-A177-3AD203B41FA5}">
+                      <a16:colId xmlns:a16="http://schemas.microsoft.com/office/drawing/2014/main" val="378134031"/>
+                    </a:ext>
+                  </a:extLst>
+                </a:gridCol>
+                <a:gridCol w="585057">
+                  <a:extLst>
+                    <a:ext uri="{9D8B030D-6E8A-4147-A177-3AD203B41FA5}">
+                      <a16:colId xmlns:a16="http://schemas.microsoft.com/office/drawing/2014/main" val="478246532"/>
+                    </a:ext>
+                  </a:extLst>
+                </a:gridCol>
+                <a:gridCol w="585057">
+                  <a:extLst>
+                    <a:ext uri="{9D8B030D-6E8A-4147-A177-3AD203B41FA5}">
+                      <a16:colId xmlns:a16="http://schemas.microsoft.com/office/drawing/2014/main" val="1955977169"/>
+                    </a:ext>
+                  </a:extLst>
+                </a:gridCol>
+              </a:tblGrid>
+              <a:tr h="220189">
+                <a:tc>
+                  <a:txBody>
+                    <a:bodyPr/>
+                    <a:lstStyle/>
+                    <a:p>
+                      <a:r>
+                        <a:rPr lang="fr-FR" sz="900" dirty="0"/>
+                        <a:t>Modèle</a:t>
+                      </a:r>
+                    </a:p>
+                  </a:txBody>
+                  <a:tcPr/>
+                </a:tc>
+                <a:tc>
+                  <a:txBody>
+                    <a:bodyPr/>
+                    <a:lstStyle/>
+                    <a:p>
+                      <a:pPr marR="0" algn="l" rtl="0">
+                        <a:lnSpc>
+                          <a:spcPct val="100000"/>
+                        </a:lnSpc>
+                        <a:spcBef>
+                          <a:spcPts val="0"/>
+                        </a:spcBef>
+                        <a:spcAft>
+                          <a:spcPts val="0"/>
+                        </a:spcAft>
+                        <a:buClr>
+                          <a:srgbClr val="000000"/>
+                        </a:buClr>
+                        <a:buFont typeface="Arial"/>
+                      </a:pPr>
+                      <a:r>
+                        <a:rPr lang="fr-FR" sz="900" b="1" i="0" u="none" strike="noStrike" cap="none" dirty="0">
+                          <a:solidFill>
+                            <a:schemeClr val="lt1"/>
+                          </a:solidFill>
+                          <a:latin typeface="+mn-lt"/>
+                          <a:ea typeface="+mn-ea"/>
+                          <a:cs typeface="+mn-cs"/>
+                          <a:sym typeface="Arial"/>
+                        </a:rPr>
+                        <a:t>MAE</a:t>
+                      </a:r>
+                    </a:p>
+                  </a:txBody>
+                  <a:tcPr/>
+                </a:tc>
+                <a:tc>
+                  <a:txBody>
+                    <a:bodyPr/>
+                    <a:lstStyle/>
+                    <a:p>
+                      <a:pPr marL="0" marR="0" lvl="0" indent="0" algn="l" defTabSz="914400" rtl="0" eaLnBrk="1" fontAlgn="auto" latinLnBrk="0" hangingPunct="1">
+                        <a:lnSpc>
+                          <a:spcPct val="100000"/>
+                        </a:lnSpc>
+                        <a:spcBef>
+                          <a:spcPts val="0"/>
+                        </a:spcBef>
+                        <a:spcAft>
+                          <a:spcPts val="0"/>
+                        </a:spcAft>
+                        <a:buClr>
+                          <a:srgbClr val="000000"/>
+                        </a:buClr>
+                        <a:buSzTx/>
+                        <a:buFont typeface="Arial"/>
+                        <a:buNone/>
+                        <a:tabLst/>
+                        <a:defRPr/>
+                      </a:pPr>
+                      <a:r>
+                        <a:rPr lang="fr-FR" sz="900" dirty="0"/>
+                        <a:t>MSE</a:t>
+                      </a:r>
+                    </a:p>
+                  </a:txBody>
+                  <a:tcPr/>
+                </a:tc>
+                <a:tc>
+                  <a:txBody>
+                    <a:bodyPr/>
+                    <a:lstStyle/>
+                    <a:p>
+                      <a:r>
+                        <a:rPr lang="fr-FR" sz="900" dirty="0"/>
+                        <a:t>RMSE</a:t>
+                      </a:r>
+                    </a:p>
+                  </a:txBody>
+                  <a:tcPr/>
+                </a:tc>
+                <a:tc>
+                  <a:txBody>
+                    <a:bodyPr/>
+                    <a:lstStyle/>
+                    <a:p>
+                      <a:r>
+                        <a:rPr lang="fr-FR" sz="900" dirty="0"/>
+                        <a:t>R²</a:t>
+                      </a:r>
+                    </a:p>
+                  </a:txBody>
+                  <a:tcPr/>
+                </a:tc>
+                <a:extLst>
+                  <a:ext uri="{0D108BD9-81ED-4DB2-BD59-A6C34878D82A}">
+                    <a16:rowId xmlns:a16="http://schemas.microsoft.com/office/drawing/2014/main" val="264934860"/>
+                  </a:ext>
+                </a:extLst>
+              </a:tr>
+              <a:tr h="384124">
+                <a:tc>
+                  <a:txBody>
+                    <a:bodyPr/>
+                    <a:lstStyle/>
+                    <a:p>
+                      <a:r>
+                        <a:rPr lang="fr-FR" sz="900" dirty="0" err="1"/>
+                        <a:t>Linear</a:t>
+                      </a:r>
+                      <a:endParaRPr lang="fr-FR" sz="900" dirty="0"/>
+                    </a:p>
+                    <a:p>
+                      <a:r>
+                        <a:rPr lang="fr-FR" sz="900" dirty="0" err="1"/>
+                        <a:t>Regression</a:t>
+                      </a:r>
+                      <a:r>
+                        <a:rPr lang="fr-FR" sz="900" dirty="0"/>
+                        <a:t> </a:t>
+                      </a:r>
+                    </a:p>
+                  </a:txBody>
+                  <a:tcPr anchor="ctr"/>
+                </a:tc>
+                <a:tc>
+                  <a:txBody>
+                    <a:bodyPr/>
+                    <a:lstStyle/>
+                    <a:p>
+                      <a:pPr algn="r">
+                        <a:buNone/>
+                      </a:pPr>
+                      <a:r>
+                        <a:rPr lang="fr-FR" sz="900" b="1" dirty="0">
+                          <a:solidFill>
+                            <a:srgbClr val="FF0000"/>
+                          </a:solidFill>
+                        </a:rPr>
+                        <a:t>5.12</a:t>
+                      </a:r>
+                    </a:p>
+                  </a:txBody>
+                  <a:tcPr anchor="ctr"/>
+                </a:tc>
+                <a:tc>
+                  <a:txBody>
+                    <a:bodyPr/>
+                    <a:lstStyle/>
+                    <a:p>
+                      <a:pPr algn="r">
+                        <a:buNone/>
+                      </a:pPr>
+                      <a:r>
+                        <a:rPr lang="fr-FR" sz="900" dirty="0"/>
+                        <a:t>45.4</a:t>
+                      </a:r>
+                    </a:p>
+                  </a:txBody>
+                  <a:tcPr anchor="ctr"/>
+                </a:tc>
+                <a:tc>
+                  <a:txBody>
+                    <a:bodyPr/>
+                    <a:lstStyle/>
+                    <a:p>
+                      <a:pPr algn="r">
+                        <a:buNone/>
+                      </a:pPr>
+                      <a:r>
+                        <a:rPr lang="fr-FR" sz="900" dirty="0"/>
+                        <a:t>6.74</a:t>
+                      </a:r>
+                    </a:p>
+                  </a:txBody>
+                  <a:tcPr anchor="ctr"/>
+                </a:tc>
+                <a:tc>
+                  <a:txBody>
+                    <a:bodyPr/>
+                    <a:lstStyle/>
+                    <a:p>
+                      <a:pPr algn="r">
+                        <a:buNone/>
+                      </a:pPr>
+                      <a:r>
+                        <a:rPr lang="fr-FR" sz="900" dirty="0"/>
+                        <a:t>0.795</a:t>
+                      </a:r>
+                    </a:p>
+                  </a:txBody>
+                  <a:tcPr anchor="ctr"/>
+                </a:tc>
+                <a:extLst>
+                  <a:ext uri="{0D108BD9-81ED-4DB2-BD59-A6C34878D82A}">
+                    <a16:rowId xmlns:a16="http://schemas.microsoft.com/office/drawing/2014/main" val="2338539637"/>
+                  </a:ext>
+                </a:extLst>
+              </a:tr>
+            </a:tbl>
+          </a:graphicData>
+        </a:graphic>
+      </p:graphicFrame>
     </p:spTree>
     <p:extLst>
       <p:ext uri="{BB962C8B-B14F-4D97-AF65-F5344CB8AC3E}">
